--- a/slides_en.pptx
+++ b/slides_en.pptx
@@ -42821,7 +42821,7 @@
                 </a:solidFill>
                 <a:latin typeface="Arial"/>
               </a:rPr>
-              <a:t>Discussion 2/3</a:t>
+              <a:t>Summary 1/2</a:t>
             </a:r>
           </a:p>
         </p:txBody>
@@ -42900,7 +42900,7 @@
                 </a:solidFill>
                 <a:latin typeface="Arial"/>
               </a:rPr>
-              <a:t>Current Challenges and Future Research Directions</a:t>
+              <a:t>Key Demonstrated Results</a:t>
             </a:r>
           </a:p>
         </p:txBody>
@@ -42986,49 +42986,14 @@
       </p:sp>
       <p:sp>
         <p:nvSpPr>
-          <p:cNvPr id="10" name="TextBox 9"/>
-          <p:cNvSpPr txBox="1"/>
+          <p:cNvPr id="10" name="Rounded Rectangle 9"/>
+          <p:cNvSpPr/>
           <p:nvPr/>
         </p:nvSpPr>
         <p:spPr>
           <a:xfrm>
             <a:off x="365760" y="859536"/>
-            <a:ext cx="5592927" cy="274320"/>
-          </a:xfrm>
-          <a:prstGeom prst="rect">
-            <a:avLst/>
-          </a:prstGeom>
-          <a:noFill/>
-        </p:spPr>
-        <p:txBody>
-          <a:bodyPr wrap="square" anchor="t" lIns="36000" rIns="36000" tIns="18000" bIns="18000">
-            <a:spAutoFit/>
-          </a:bodyPr>
-          <a:lstStyle/>
-          <a:p>
-            <a:pPr algn="l"/>
-            <a:r>
-              <a:rPr sz="1344" b="1" i="0">
-                <a:solidFill>
-                  <a:srgbClr val="64748B"/>
-                </a:solidFill>
-                <a:latin typeface="Arial"/>
-              </a:rPr>
-              <a:t>Current Limitations &amp; Challenges</a:t>
-            </a:r>
-          </a:p>
-        </p:txBody>
-      </p:sp>
-      <p:sp>
-        <p:nvSpPr>
-          <p:cNvPr id="11" name="Rounded Rectangle 10"/>
-          <p:cNvSpPr/>
-          <p:nvPr/>
-        </p:nvSpPr>
-        <p:spPr>
-          <a:xfrm>
-            <a:off x="365760" y="1271016"/>
-            <a:ext cx="1772869" cy="2011680"/>
+            <a:ext cx="2769031" cy="4206240"/>
           </a:xfrm>
           <a:prstGeom prst="roundRect">
             <a:avLst>
@@ -43069,14 +43034,58 @@
       </p:sp>
       <p:sp>
         <p:nvSpPr>
+          <p:cNvPr id="11" name="Rectangle 10"/>
+          <p:cNvSpPr/>
+          <p:nvPr/>
+        </p:nvSpPr>
+        <p:spPr>
+          <a:xfrm>
+            <a:off x="365760" y="859536"/>
+            <a:ext cx="2769031" cy="36576"/>
+          </a:xfrm>
+          <a:prstGeom prst="rect">
+            <a:avLst/>
+          </a:prstGeom>
+          <a:solidFill>
+            <a:srgbClr val="3B5174"/>
+          </a:solidFill>
+          <a:ln>
+            <a:noFill/>
+          </a:ln>
+          <a:effectLst/>
+        </p:spPr>
+        <p:style>
+          <a:lnRef idx="1">
+            <a:schemeClr val="accent1"/>
+          </a:lnRef>
+          <a:fillRef idx="3">
+            <a:schemeClr val="accent1"/>
+          </a:fillRef>
+          <a:effectRef idx="2">
+            <a:schemeClr val="accent1"/>
+          </a:effectRef>
+          <a:fontRef idx="minor">
+            <a:schemeClr val="lt1"/>
+          </a:fontRef>
+        </p:style>
+        <p:txBody>
+          <a:bodyPr rtlCol="0" anchor="ctr"/>
+          <a:lstStyle/>
+          <a:p>
+            <a:pPr algn="ctr"/>
+          </a:p>
+        </p:txBody>
+      </p:sp>
+      <p:sp>
+        <p:nvSpPr>
           <p:cNvPr id="12" name="TextBox 11"/>
           <p:cNvSpPr txBox="1"/>
           <p:nvPr/>
         </p:nvSpPr>
         <p:spPr>
           <a:xfrm>
-            <a:off x="493776" y="1399032"/>
-            <a:ext cx="1516837" cy="219456"/>
+            <a:off x="548640" y="1024128"/>
+            <a:ext cx="2403271" cy="219456"/>
           </a:xfrm>
           <a:prstGeom prst="rect">
             <a:avLst/>
@@ -43097,7 +43106,7 @@
                 </a:solidFill>
                 <a:latin typeface="Arial"/>
               </a:rPr>
-              <a:t>Scale</a:t>
+              <a:t>RHEOLOGY</a:t>
             </a:r>
           </a:p>
         </p:txBody>
@@ -43110,8 +43119,8 @@
         </p:nvSpPr>
         <p:spPr>
           <a:xfrm>
-            <a:off x="493776" y="1636776"/>
-            <a:ext cx="1516837" cy="310896"/>
+            <a:off x="548640" y="1261872"/>
+            <a:ext cx="2403271" cy="329184"/>
           </a:xfrm>
           <a:prstGeom prst="rect">
             <a:avLst/>
@@ -43132,7 +43141,7 @@
                 </a:solidFill>
                 <a:latin typeface="Arial"/>
               </a:rPr>
-              <a:t>No field trials</a:t>
+              <a:t>Rheology</a:t>
             </a:r>
           </a:p>
         </p:txBody>
@@ -43145,8 +43154,8 @@
         </p:nvSpPr>
         <p:spPr>
           <a:xfrm>
-            <a:off x="493776" y="1965960"/>
-            <a:ext cx="1516837" cy="1234440"/>
+            <a:off x="548640" y="1627632"/>
+            <a:ext cx="182880" cy="274320"/>
           </a:xfrm>
           <a:prstGeom prst="rect">
             <a:avLst/>
@@ -43163,60 +43172,270 @@
             <a:r>
               <a:rPr sz="1232" b="0" i="0">
                 <a:solidFill>
+                  <a:srgbClr val="3B5174"/>
+                </a:solidFill>
+                <a:latin typeface="Arial"/>
+              </a:rPr>
+              <a:t>•</a:t>
+            </a:r>
+          </a:p>
+        </p:txBody>
+      </p:sp>
+      <p:sp>
+        <p:nvSpPr>
+          <p:cNvPr id="15" name="TextBox 14"/>
+          <p:cNvSpPr txBox="1"/>
+          <p:nvPr/>
+        </p:nvSpPr>
+        <p:spPr>
+          <a:xfrm>
+            <a:off x="749808" y="1627632"/>
+            <a:ext cx="2202103" cy="274320"/>
+          </a:xfrm>
+          <a:prstGeom prst="rect">
+            <a:avLst/>
+          </a:prstGeom>
+          <a:noFill/>
+        </p:spPr>
+        <p:txBody>
+          <a:bodyPr wrap="square" anchor="t" lIns="36000" rIns="36000" tIns="18000" bIns="18000">
+            <a:spAutoFit/>
+          </a:bodyPr>
+          <a:lstStyle/>
+          <a:p>
+            <a:pPr algn="l"/>
+            <a:r>
+              <a:rPr sz="1232" b="0" i="0">
+                <a:solidFill>
                   <a:srgbClr val="475569"/>
                 </a:solidFill>
                 <a:latin typeface="Arial"/>
               </a:rPr>
-              <a:t>Lab scale only. Verification in real environments required</a:t>
-            </a:r>
-          </a:p>
-        </p:txBody>
-      </p:sp>
-      <p:sp>
-        <p:nvSpPr>
-          <p:cNvPr id="15" name="TextBox 14"/>
-          <p:cNvSpPr txBox="1"/>
-          <p:nvPr/>
-        </p:nvSpPr>
-        <p:spPr>
-          <a:xfrm>
-            <a:off x="2138629" y="1271016"/>
-            <a:ext cx="137160" cy="2011680"/>
-          </a:xfrm>
-          <a:prstGeom prst="rect">
-            <a:avLst/>
-          </a:prstGeom>
-          <a:noFill/>
-        </p:spPr>
-        <p:txBody>
-          <a:bodyPr wrap="square" anchor="ctr" lIns="36000" rIns="36000" tIns="18000" bIns="18000">
-            <a:spAutoFit/>
-          </a:bodyPr>
-          <a:lstStyle/>
-          <a:p>
-            <a:pPr algn="ctr"/>
-            <a:r>
-              <a:rPr sz="1344" b="0" i="0">
-                <a:solidFill>
-                  <a:srgbClr val="64748B"/>
-                </a:solidFill>
-                <a:latin typeface="Arial"/>
-              </a:rPr>
-              <a:t>▶</a:t>
-            </a:r>
-          </a:p>
-        </p:txBody>
-      </p:sp>
-      <p:sp>
-        <p:nvSpPr>
-          <p:cNvPr id="16" name="Rounded Rectangle 15"/>
+              <a:t>G' &gt; G'' for all systems (gel)</a:t>
+            </a:r>
+          </a:p>
+        </p:txBody>
+      </p:sp>
+      <p:sp>
+        <p:nvSpPr>
+          <p:cNvPr id="16" name="TextBox 15"/>
+          <p:cNvSpPr txBox="1"/>
+          <p:nvPr/>
+        </p:nvSpPr>
+        <p:spPr>
+          <a:xfrm>
+            <a:off x="548640" y="1901952"/>
+            <a:ext cx="182880" cy="274320"/>
+          </a:xfrm>
+          <a:prstGeom prst="rect">
+            <a:avLst/>
+          </a:prstGeom>
+          <a:noFill/>
+        </p:spPr>
+        <p:txBody>
+          <a:bodyPr wrap="square" anchor="t" lIns="36000" rIns="36000" tIns="18000" bIns="18000">
+            <a:spAutoFit/>
+          </a:bodyPr>
+          <a:lstStyle/>
+          <a:p>
+            <a:pPr algn="l"/>
+            <a:r>
+              <a:rPr sz="1232" b="0" i="0">
+                <a:solidFill>
+                  <a:srgbClr val="3B5174"/>
+                </a:solidFill>
+                <a:latin typeface="Arial"/>
+              </a:rPr>
+              <a:t>•</a:t>
+            </a:r>
+          </a:p>
+        </p:txBody>
+      </p:sp>
+      <p:sp>
+        <p:nvSpPr>
+          <p:cNvPr id="17" name="TextBox 16"/>
+          <p:cNvSpPr txBox="1"/>
+          <p:nvPr/>
+        </p:nvSpPr>
+        <p:spPr>
+          <a:xfrm>
+            <a:off x="749808" y="1901952"/>
+            <a:ext cx="2202103" cy="274320"/>
+          </a:xfrm>
+          <a:prstGeom prst="rect">
+            <a:avLst/>
+          </a:prstGeom>
+          <a:noFill/>
+        </p:spPr>
+        <p:txBody>
+          <a:bodyPr wrap="square" anchor="t" lIns="36000" rIns="36000" tIns="18000" bIns="18000">
+            <a:spAutoFit/>
+          </a:bodyPr>
+          <a:lstStyle/>
+          <a:p>
+            <a:pPr algn="l"/>
+            <a:r>
+              <a:rPr sz="1232" b="0" i="0">
+                <a:solidFill>
+                  <a:srgbClr val="475569"/>
+                </a:solidFill>
+                <a:latin typeface="Arial"/>
+              </a:rPr>
+              <a:t>n = 0.108–0.188</a:t>
+            </a:r>
+          </a:p>
+        </p:txBody>
+      </p:sp>
+      <p:sp>
+        <p:nvSpPr>
+          <p:cNvPr id="18" name="TextBox 17"/>
+          <p:cNvSpPr txBox="1"/>
+          <p:nvPr/>
+        </p:nvSpPr>
+        <p:spPr>
+          <a:xfrm>
+            <a:off x="548640" y="2176272"/>
+            <a:ext cx="182880" cy="274320"/>
+          </a:xfrm>
+          <a:prstGeom prst="rect">
+            <a:avLst/>
+          </a:prstGeom>
+          <a:noFill/>
+        </p:spPr>
+        <p:txBody>
+          <a:bodyPr wrap="square" anchor="t" lIns="36000" rIns="36000" tIns="18000" bIns="18000">
+            <a:spAutoFit/>
+          </a:bodyPr>
+          <a:lstStyle/>
+          <a:p>
+            <a:pPr algn="l"/>
+            <a:r>
+              <a:rPr sz="1232" b="0" i="0">
+                <a:solidFill>
+                  <a:srgbClr val="3B5174"/>
+                </a:solidFill>
+                <a:latin typeface="Arial"/>
+              </a:rPr>
+              <a:t>•</a:t>
+            </a:r>
+          </a:p>
+        </p:txBody>
+      </p:sp>
+      <p:sp>
+        <p:nvSpPr>
+          <p:cNvPr id="19" name="TextBox 18"/>
+          <p:cNvSpPr txBox="1"/>
+          <p:nvPr/>
+        </p:nvSpPr>
+        <p:spPr>
+          <a:xfrm>
+            <a:off x="749808" y="2176272"/>
+            <a:ext cx="2202103" cy="274320"/>
+          </a:xfrm>
+          <a:prstGeom prst="rect">
+            <a:avLst/>
+          </a:prstGeom>
+          <a:noFill/>
+        </p:spPr>
+        <p:txBody>
+          <a:bodyPr wrap="square" anchor="t" lIns="36000" rIns="36000" tIns="18000" bIns="18000">
+            <a:spAutoFit/>
+          </a:bodyPr>
+          <a:lstStyle/>
+          <a:p>
+            <a:pPr algn="l"/>
+            <a:r>
+              <a:rPr sz="1232" b="0" i="0">
+                <a:solidFill>
+                  <a:srgbClr val="475569"/>
+                </a:solidFill>
+                <a:latin typeface="Arial"/>
+              </a:rPr>
+              <a:t>Yield stress ~3× AquaGel-K</a:t>
+            </a:r>
+          </a:p>
+        </p:txBody>
+      </p:sp>
+      <p:sp>
+        <p:nvSpPr>
+          <p:cNvPr id="20" name="TextBox 19"/>
+          <p:cNvSpPr txBox="1"/>
+          <p:nvPr/>
+        </p:nvSpPr>
+        <p:spPr>
+          <a:xfrm>
+            <a:off x="548640" y="2450592"/>
+            <a:ext cx="182880" cy="274320"/>
+          </a:xfrm>
+          <a:prstGeom prst="rect">
+            <a:avLst/>
+          </a:prstGeom>
+          <a:noFill/>
+        </p:spPr>
+        <p:txBody>
+          <a:bodyPr wrap="square" anchor="t" lIns="36000" rIns="36000" tIns="18000" bIns="18000">
+            <a:spAutoFit/>
+          </a:bodyPr>
+          <a:lstStyle/>
+          <a:p>
+            <a:pPr algn="l"/>
+            <a:r>
+              <a:rPr sz="1232" b="0" i="0">
+                <a:solidFill>
+                  <a:srgbClr val="3B5174"/>
+                </a:solidFill>
+                <a:latin typeface="Arial"/>
+              </a:rPr>
+              <a:t>•</a:t>
+            </a:r>
+          </a:p>
+        </p:txBody>
+      </p:sp>
+      <p:sp>
+        <p:nvSpPr>
+          <p:cNvPr id="21" name="TextBox 20"/>
+          <p:cNvSpPr txBox="1"/>
+          <p:nvPr/>
+        </p:nvSpPr>
+        <p:spPr>
+          <a:xfrm>
+            <a:off x="749808" y="2450592"/>
+            <a:ext cx="2202103" cy="274320"/>
+          </a:xfrm>
+          <a:prstGeom prst="rect">
+            <a:avLst/>
+          </a:prstGeom>
+          <a:noFill/>
+        </p:spPr>
+        <p:txBody>
+          <a:bodyPr wrap="square" anchor="t" lIns="36000" rIns="36000" tIns="18000" bIns="18000">
+            <a:spAutoFit/>
+          </a:bodyPr>
+          <a:lstStyle/>
+          <a:p>
+            <a:pPr algn="l"/>
+            <a:r>
+              <a:rPr sz="1232" b="0" i="0">
+                <a:solidFill>
+                  <a:srgbClr val="475569"/>
+                </a:solidFill>
+                <a:latin typeface="Arial"/>
+              </a:rPr>
+              <a:t>tan δ &lt;&lt; 1 (elastic-dominated)</a:t>
+            </a:r>
+          </a:p>
+        </p:txBody>
+      </p:sp>
+      <p:sp>
+        <p:nvSpPr>
+          <p:cNvPr id="22" name="Rounded Rectangle 21"/>
           <p:cNvSpPr/>
           <p:nvPr/>
         </p:nvSpPr>
         <p:spPr>
           <a:xfrm>
-            <a:off x="2275789" y="1271016"/>
-            <a:ext cx="1772869" cy="2011680"/>
+            <a:off x="3262807" y="859536"/>
+            <a:ext cx="2769031" cy="4206240"/>
           </a:xfrm>
           <a:prstGeom prst="roundRect">
             <a:avLst>
@@ -43257,14 +43476,58 @@
       </p:sp>
       <p:sp>
         <p:nvSpPr>
-          <p:cNvPr id="17" name="TextBox 16"/>
-          <p:cNvSpPr txBox="1"/>
-          <p:nvPr/>
-        </p:nvSpPr>
-        <p:spPr>
-          <a:xfrm>
-            <a:off x="2403805" y="1399032"/>
-            <a:ext cx="1516837" cy="219456"/>
+          <p:cNvPr id="23" name="Rectangle 22"/>
+          <p:cNvSpPr/>
+          <p:nvPr/>
+        </p:nvSpPr>
+        <p:spPr>
+          <a:xfrm>
+            <a:off x="3262807" y="859536"/>
+            <a:ext cx="2769031" cy="36576"/>
+          </a:xfrm>
+          <a:prstGeom prst="rect">
+            <a:avLst/>
+          </a:prstGeom>
+          <a:solidFill>
+            <a:srgbClr val="3B5174"/>
+          </a:solidFill>
+          <a:ln>
+            <a:noFill/>
+          </a:ln>
+          <a:effectLst/>
+        </p:spPr>
+        <p:style>
+          <a:lnRef idx="1">
+            <a:schemeClr val="accent1"/>
+          </a:lnRef>
+          <a:fillRef idx="3">
+            <a:schemeClr val="accent1"/>
+          </a:fillRef>
+          <a:effectRef idx="2">
+            <a:schemeClr val="accent1"/>
+          </a:effectRef>
+          <a:fontRef idx="minor">
+            <a:schemeClr val="lt1"/>
+          </a:fontRef>
+        </p:style>
+        <p:txBody>
+          <a:bodyPr rtlCol="0" anchor="ctr"/>
+          <a:lstStyle/>
+          <a:p>
+            <a:pPr algn="ctr"/>
+          </a:p>
+        </p:txBody>
+      </p:sp>
+      <p:sp>
+        <p:nvSpPr>
+          <p:cNvPr id="24" name="TextBox 23"/>
+          <p:cNvSpPr txBox="1"/>
+          <p:nvPr/>
+        </p:nvSpPr>
+        <p:spPr>
+          <a:xfrm>
+            <a:off x="3445687" y="1024128"/>
+            <a:ext cx="2403271" cy="219456"/>
           </a:xfrm>
           <a:prstGeom prst="rect">
             <a:avLst/>
@@ -43285,21 +43548,21 @@
                 </a:solidFill>
                 <a:latin typeface="Arial"/>
               </a:rPr>
-              <a:t>Durability</a:t>
-            </a:r>
-          </a:p>
-        </p:txBody>
-      </p:sp>
-      <p:sp>
-        <p:nvSpPr>
-          <p:cNvPr id="18" name="TextBox 17"/>
-          <p:cNvSpPr txBox="1"/>
-          <p:nvPr/>
-        </p:nvSpPr>
-        <p:spPr>
-          <a:xfrm>
-            <a:off x="2403805" y="1636776"/>
-            <a:ext cx="1516837" cy="310896"/>
+              <a:t>FIRE PROTECTION</a:t>
+            </a:r>
+          </a:p>
+        </p:txBody>
+      </p:sp>
+      <p:sp>
+        <p:nvSpPr>
+          <p:cNvPr id="25" name="TextBox 24"/>
+          <p:cNvSpPr txBox="1"/>
+          <p:nvPr/>
+        </p:nvSpPr>
+        <p:spPr>
+          <a:xfrm>
+            <a:off x="3445687" y="1261872"/>
+            <a:ext cx="2403271" cy="329184"/>
           </a:xfrm>
           <a:prstGeom prst="rect">
             <a:avLst/>
@@ -43320,21 +43583,21 @@
                 </a:solidFill>
                 <a:latin typeface="Arial"/>
               </a:rPr>
-              <a:t>Long-term storage stability</a:t>
-            </a:r>
-          </a:p>
-        </p:txBody>
-      </p:sp>
-      <p:sp>
-        <p:nvSpPr>
-          <p:cNvPr id="19" name="TextBox 18"/>
-          <p:cNvSpPr txBox="1"/>
-          <p:nvPr/>
-        </p:nvSpPr>
-        <p:spPr>
-          <a:xfrm>
-            <a:off x="2403805" y="1965960"/>
-            <a:ext cx="1516837" cy="1234440"/>
+              <a:t>Fire Protection</a:t>
+            </a:r>
+          </a:p>
+        </p:txBody>
+      </p:sp>
+      <p:sp>
+        <p:nvSpPr>
+          <p:cNvPr id="26" name="TextBox 25"/>
+          <p:cNvSpPr txBox="1"/>
+          <p:nvPr/>
+        </p:nvSpPr>
+        <p:spPr>
+          <a:xfrm>
+            <a:off x="3445687" y="1627632"/>
+            <a:ext cx="182880" cy="274320"/>
           </a:xfrm>
           <a:prstGeom prst="rect">
             <a:avLst/>
@@ -43351,60 +43614,270 @@
             <a:r>
               <a:rPr sz="1232" b="0" i="0">
                 <a:solidFill>
+                  <a:srgbClr val="3B5174"/>
+                </a:solidFill>
+                <a:latin typeface="Arial"/>
+              </a:rPr>
+              <a:t>•</a:t>
+            </a:r>
+          </a:p>
+        </p:txBody>
+      </p:sp>
+      <p:sp>
+        <p:nvSpPr>
+          <p:cNvPr id="27" name="TextBox 26"/>
+          <p:cNvSpPr txBox="1"/>
+          <p:nvPr/>
+        </p:nvSpPr>
+        <p:spPr>
+          <a:xfrm>
+            <a:off x="3646855" y="1627632"/>
+            <a:ext cx="2202103" cy="274320"/>
+          </a:xfrm>
+          <a:prstGeom prst="rect">
+            <a:avLst/>
+          </a:prstGeom>
+          <a:noFill/>
+        </p:spPr>
+        <p:txBody>
+          <a:bodyPr wrap="square" anchor="t" lIns="36000" rIns="36000" tIns="18000" bIns="18000">
+            <a:spAutoFit/>
+          </a:bodyPr>
+          <a:lstStyle/>
+          <a:p>
+            <a:pPr algn="l"/>
+            <a:r>
+              <a:rPr sz="1232" b="0" i="0">
+                <a:solidFill>
                   <a:srgbClr val="475569"/>
                 </a:solidFill>
                 <a:latin typeface="Arial"/>
               </a:rPr>
-              <a:t>Evaluation of phase separation and sedimentation. Seasonal storage compatibility</a:t>
-            </a:r>
-          </a:p>
-        </p:txBody>
-      </p:sp>
-      <p:sp>
-        <p:nvSpPr>
-          <p:cNvPr id="20" name="TextBox 19"/>
-          <p:cNvSpPr txBox="1"/>
-          <p:nvPr/>
-        </p:nvSpPr>
-        <p:spPr>
-          <a:xfrm>
-            <a:off x="4048658" y="1271016"/>
-            <a:ext cx="137160" cy="2011680"/>
-          </a:xfrm>
-          <a:prstGeom prst="rect">
-            <a:avLst/>
-          </a:prstGeom>
-          <a:noFill/>
-        </p:spPr>
-        <p:txBody>
-          <a:bodyPr wrap="square" anchor="ctr" lIns="36000" rIns="36000" tIns="18000" bIns="18000">
-            <a:spAutoFit/>
-          </a:bodyPr>
-          <a:lstStyle/>
-          <a:p>
-            <a:pPr algn="ctr"/>
-            <a:r>
-              <a:rPr sz="1344" b="0" i="0">
-                <a:solidFill>
-                  <a:srgbClr val="64748B"/>
-                </a:solidFill>
-                <a:latin typeface="Arial"/>
-              </a:rPr>
-              <a:t>▶</a:t>
-            </a:r>
-          </a:p>
-        </p:txBody>
-      </p:sp>
-      <p:sp>
-        <p:nvSpPr>
-          <p:cNvPr id="21" name="Rounded Rectangle 20"/>
+              <a:t>Time to char ≈ 10 min</a:t>
+            </a:r>
+          </a:p>
+        </p:txBody>
+      </p:sp>
+      <p:sp>
+        <p:nvSpPr>
+          <p:cNvPr id="28" name="TextBox 27"/>
+          <p:cNvSpPr txBox="1"/>
+          <p:nvPr/>
+        </p:nvSpPr>
+        <p:spPr>
+          <a:xfrm>
+            <a:off x="3445687" y="1901952"/>
+            <a:ext cx="182880" cy="274320"/>
+          </a:xfrm>
+          <a:prstGeom prst="rect">
+            <a:avLst/>
+          </a:prstGeom>
+          <a:noFill/>
+        </p:spPr>
+        <p:txBody>
+          <a:bodyPr wrap="square" anchor="t" lIns="36000" rIns="36000" tIns="18000" bIns="18000">
+            <a:spAutoFit/>
+          </a:bodyPr>
+          <a:lstStyle/>
+          <a:p>
+            <a:pPr algn="l"/>
+            <a:r>
+              <a:rPr sz="1232" b="0" i="0">
+                <a:solidFill>
+                  <a:srgbClr val="3B5174"/>
+                </a:solidFill>
+                <a:latin typeface="Arial"/>
+              </a:rPr>
+              <a:t>•</a:t>
+            </a:r>
+          </a:p>
+        </p:txBody>
+      </p:sp>
+      <p:sp>
+        <p:nvSpPr>
+          <p:cNvPr id="29" name="TextBox 28"/>
+          <p:cNvSpPr txBox="1"/>
+          <p:nvPr/>
+        </p:nvSpPr>
+        <p:spPr>
+          <a:xfrm>
+            <a:off x="3646855" y="1901952"/>
+            <a:ext cx="2202103" cy="274320"/>
+          </a:xfrm>
+          <a:prstGeom prst="rect">
+            <a:avLst/>
+          </a:prstGeom>
+          <a:noFill/>
+        </p:spPr>
+        <p:txBody>
+          <a:bodyPr wrap="square" anchor="t" lIns="36000" rIns="36000" tIns="18000" bIns="18000">
+            <a:spAutoFit/>
+          </a:bodyPr>
+          <a:lstStyle/>
+          <a:p>
+            <a:pPr algn="l"/>
+            <a:r>
+              <a:rPr sz="1232" b="0" i="0">
+                <a:solidFill>
+                  <a:srgbClr val="475569"/>
+                </a:solidFill>
+                <a:latin typeface="Arial"/>
+              </a:rPr>
+              <a:t>~5× longer than water (~2 min)</a:t>
+            </a:r>
+          </a:p>
+        </p:txBody>
+      </p:sp>
+      <p:sp>
+        <p:nvSpPr>
+          <p:cNvPr id="30" name="TextBox 29"/>
+          <p:cNvSpPr txBox="1"/>
+          <p:nvPr/>
+        </p:nvSpPr>
+        <p:spPr>
+          <a:xfrm>
+            <a:off x="3445687" y="2176272"/>
+            <a:ext cx="182880" cy="274320"/>
+          </a:xfrm>
+          <a:prstGeom prst="rect">
+            <a:avLst/>
+          </a:prstGeom>
+          <a:noFill/>
+        </p:spPr>
+        <p:txBody>
+          <a:bodyPr wrap="square" anchor="t" lIns="36000" rIns="36000" tIns="18000" bIns="18000">
+            <a:spAutoFit/>
+          </a:bodyPr>
+          <a:lstStyle/>
+          <a:p>
+            <a:pPr algn="l"/>
+            <a:r>
+              <a:rPr sz="1232" b="0" i="0">
+                <a:solidFill>
+                  <a:srgbClr val="3B5174"/>
+                </a:solidFill>
+                <a:latin typeface="Arial"/>
+              </a:rPr>
+              <a:t>•</a:t>
+            </a:r>
+          </a:p>
+        </p:txBody>
+      </p:sp>
+      <p:sp>
+        <p:nvSpPr>
+          <p:cNvPr id="31" name="TextBox 30"/>
+          <p:cNvSpPr txBox="1"/>
+          <p:nvPr/>
+        </p:nvSpPr>
+        <p:spPr>
+          <a:xfrm>
+            <a:off x="3646855" y="2176272"/>
+            <a:ext cx="2202103" cy="274320"/>
+          </a:xfrm>
+          <a:prstGeom prst="rect">
+            <a:avLst/>
+          </a:prstGeom>
+          <a:noFill/>
+        </p:spPr>
+        <p:txBody>
+          <a:bodyPr wrap="square" anchor="t" lIns="36000" rIns="36000" tIns="18000" bIns="18000">
+            <a:spAutoFit/>
+          </a:bodyPr>
+          <a:lstStyle/>
+          <a:p>
+            <a:pPr algn="l"/>
+            <a:r>
+              <a:rPr sz="1232" b="0" i="0">
+                <a:solidFill>
+                  <a:srgbClr val="475569"/>
+                </a:solidFill>
+                <a:latin typeface="Arial"/>
+              </a:rPr>
+              <a:t>~40% longer than AquaGel-K</a:t>
+            </a:r>
+          </a:p>
+        </p:txBody>
+      </p:sp>
+      <p:sp>
+        <p:nvSpPr>
+          <p:cNvPr id="32" name="TextBox 31"/>
+          <p:cNvSpPr txBox="1"/>
+          <p:nvPr/>
+        </p:nvSpPr>
+        <p:spPr>
+          <a:xfrm>
+            <a:off x="3445687" y="2450592"/>
+            <a:ext cx="182880" cy="274320"/>
+          </a:xfrm>
+          <a:prstGeom prst="rect">
+            <a:avLst/>
+          </a:prstGeom>
+          <a:noFill/>
+        </p:spPr>
+        <p:txBody>
+          <a:bodyPr wrap="square" anchor="t" lIns="36000" rIns="36000" tIns="18000" bIns="18000">
+            <a:spAutoFit/>
+          </a:bodyPr>
+          <a:lstStyle/>
+          <a:p>
+            <a:pPr algn="l"/>
+            <a:r>
+              <a:rPr sz="1232" b="0" i="0">
+                <a:solidFill>
+                  <a:srgbClr val="3B5174"/>
+                </a:solidFill>
+                <a:latin typeface="Arial"/>
+              </a:rPr>
+              <a:t>•</a:t>
+            </a:r>
+          </a:p>
+        </p:txBody>
+      </p:sp>
+      <p:sp>
+        <p:nvSpPr>
+          <p:cNvPr id="33" name="TextBox 32"/>
+          <p:cNvSpPr txBox="1"/>
+          <p:nvPr/>
+        </p:nvSpPr>
+        <p:spPr>
+          <a:xfrm>
+            <a:off x="3646855" y="2450592"/>
+            <a:ext cx="2202103" cy="274320"/>
+          </a:xfrm>
+          <a:prstGeom prst="rect">
+            <a:avLst/>
+          </a:prstGeom>
+          <a:noFill/>
+        </p:spPr>
+        <p:txBody>
+          <a:bodyPr wrap="square" anchor="t" lIns="36000" rIns="36000" tIns="18000" bIns="18000">
+            <a:spAutoFit/>
+          </a:bodyPr>
+          <a:lstStyle/>
+          <a:p>
+            <a:pPr algn="l"/>
+            <a:r>
+              <a:rPr sz="1232" b="0" i="0">
+                <a:solidFill>
+                  <a:srgbClr val="475569"/>
+                </a:solidFill>
+                <a:latin typeface="Arial"/>
+              </a:rPr>
+              <a:t>Surface nearly intact at 300 s</a:t>
+            </a:r>
+          </a:p>
+        </p:txBody>
+      </p:sp>
+      <p:sp>
+        <p:nvSpPr>
+          <p:cNvPr id="34" name="Rounded Rectangle 33"/>
           <p:cNvSpPr/>
           <p:nvPr/>
         </p:nvSpPr>
         <p:spPr>
           <a:xfrm>
-            <a:off x="4185818" y="1271016"/>
-            <a:ext cx="1772869" cy="2011680"/>
+            <a:off x="6159855" y="859536"/>
+            <a:ext cx="2769031" cy="4206240"/>
           </a:xfrm>
           <a:prstGeom prst="roundRect">
             <a:avLst>
@@ -43445,165 +43918,14 @@
       </p:sp>
       <p:sp>
         <p:nvSpPr>
-          <p:cNvPr id="22" name="TextBox 21"/>
-          <p:cNvSpPr txBox="1"/>
-          <p:nvPr/>
-        </p:nvSpPr>
-        <p:spPr>
-          <a:xfrm>
-            <a:off x="4313834" y="1399032"/>
-            <a:ext cx="1516837" cy="219456"/>
-          </a:xfrm>
-          <a:prstGeom prst="rect">
-            <a:avLst/>
-          </a:prstGeom>
-          <a:noFill/>
-        </p:spPr>
-        <p:txBody>
-          <a:bodyPr wrap="square" anchor="t" lIns="36000" rIns="36000" tIns="18000" bIns="18000">
-            <a:spAutoFit/>
-          </a:bodyPr>
-          <a:lstStyle/>
-          <a:p>
-            <a:pPr algn="l"/>
-            <a:r>
-              <a:rPr sz="1120" b="1" i="0">
-                <a:solidFill>
-                  <a:srgbClr val="64748B"/>
-                </a:solidFill>
-                <a:latin typeface="Arial"/>
-              </a:rPr>
-              <a:t>Cost</a:t>
-            </a:r>
-          </a:p>
-        </p:txBody>
-      </p:sp>
-      <p:sp>
-        <p:nvSpPr>
-          <p:cNvPr id="23" name="TextBox 22"/>
-          <p:cNvSpPr txBox="1"/>
-          <p:nvPr/>
-        </p:nvSpPr>
-        <p:spPr>
-          <a:xfrm>
-            <a:off x="4313834" y="1636776"/>
-            <a:ext cx="1516837" cy="310896"/>
-          </a:xfrm>
-          <a:prstGeom prst="rect">
-            <a:avLst/>
-          </a:prstGeom>
-          <a:noFill/>
-        </p:spPr>
-        <p:txBody>
-          <a:bodyPr wrap="square" anchor="t" lIns="36000" rIns="36000" tIns="18000" bIns="18000">
-            <a:spAutoFit/>
-          </a:bodyPr>
-          <a:lstStyle/>
-          <a:p>
-            <a:pPr algn="l"/>
-            <a:r>
-              <a:rPr sz="1568" b="1" i="0">
-                <a:solidFill>
-                  <a:srgbClr val="1E293B"/>
-                </a:solidFill>
-                <a:latin typeface="Arial"/>
-              </a:rPr>
-              <a:t>Mass production cost</a:t>
-            </a:r>
-          </a:p>
-        </p:txBody>
-      </p:sp>
-      <p:sp>
-        <p:nvSpPr>
-          <p:cNvPr id="24" name="TextBox 23"/>
-          <p:cNvSpPr txBox="1"/>
-          <p:nvPr/>
-        </p:nvSpPr>
-        <p:spPr>
-          <a:xfrm>
-            <a:off x="4313834" y="1965960"/>
-            <a:ext cx="1516837" cy="1234440"/>
-          </a:xfrm>
-          <a:prstGeom prst="rect">
-            <a:avLst/>
-          </a:prstGeom>
-          <a:noFill/>
-        </p:spPr>
-        <p:txBody>
-          <a:bodyPr wrap="square" anchor="t" lIns="36000" rIns="36000" tIns="18000" bIns="18000">
-            <a:spAutoFit/>
-          </a:bodyPr>
-          <a:lstStyle/>
-          <a:p>
-            <a:pPr algn="l"/>
-            <a:r>
-              <a:rPr sz="1232" b="0" i="0">
-                <a:solidFill>
-                  <a:srgbClr val="475569"/>
-                </a:solidFill>
-                <a:latin typeface="Arial"/>
-              </a:rPr>
-              <a:t>Establishing raw material costs and large-scale preparation processes</a:t>
-            </a:r>
-          </a:p>
-        </p:txBody>
-      </p:sp>
-      <p:sp>
-        <p:nvSpPr>
-          <p:cNvPr id="25" name="Rounded Rectangle 24"/>
+          <p:cNvPr id="35" name="Rectangle 34"/>
           <p:cNvSpPr/>
           <p:nvPr/>
         </p:nvSpPr>
         <p:spPr>
           <a:xfrm>
-            <a:off x="365760" y="3465576"/>
-            <a:ext cx="5592927" cy="777240"/>
-          </a:xfrm>
-          <a:prstGeom prst="roundRect">
-            <a:avLst>
-              <a:gd name="adj" fmla="val 4000"/>
-            </a:avLst>
-          </a:prstGeom>
-          <a:solidFill>
-            <a:srgbClr val="F8FAFC"/>
-          </a:solidFill>
-          <a:ln>
-            <a:noFill/>
-          </a:ln>
-          <a:effectLst/>
-        </p:spPr>
-        <p:style>
-          <a:lnRef idx="1">
-            <a:schemeClr val="accent1"/>
-          </a:lnRef>
-          <a:fillRef idx="3">
-            <a:schemeClr val="accent1"/>
-          </a:fillRef>
-          <a:effectRef idx="2">
-            <a:schemeClr val="accent1"/>
-          </a:effectRef>
-          <a:fontRef idx="minor">
-            <a:schemeClr val="lt1"/>
-          </a:fontRef>
-        </p:style>
-        <p:txBody>
-          <a:bodyPr rtlCol="0" anchor="ctr"/>
-          <a:lstStyle/>
-          <a:p>
-            <a:pPr algn="ctr"/>
-          </a:p>
-        </p:txBody>
-      </p:sp>
-      <p:sp>
-        <p:nvSpPr>
-          <p:cNvPr id="26" name="Rectangle 25"/>
-          <p:cNvSpPr/>
-          <p:nvPr/>
-        </p:nvSpPr>
-        <p:spPr>
-          <a:xfrm>
-            <a:off x="365760" y="3465576"/>
-            <a:ext cx="54864" cy="777240"/>
+            <a:off x="6159855" y="859536"/>
+            <a:ext cx="2769031" cy="36576"/>
           </a:xfrm>
           <a:prstGeom prst="rect">
             <a:avLst/>
@@ -43640,14 +43962,896 @@
       </p:sp>
       <p:sp>
         <p:nvSpPr>
-          <p:cNvPr id="27" name="TextBox 26"/>
-          <p:cNvSpPr txBox="1"/>
-          <p:nvPr/>
-        </p:nvSpPr>
-        <p:spPr>
-          <a:xfrm>
-            <a:off x="548640" y="3465576"/>
-            <a:ext cx="365760" cy="777240"/>
+          <p:cNvPr id="36" name="TextBox 35"/>
+          <p:cNvSpPr txBox="1"/>
+          <p:nvPr/>
+        </p:nvSpPr>
+        <p:spPr>
+          <a:xfrm>
+            <a:off x="6342735" y="1024128"/>
+            <a:ext cx="2403271" cy="219456"/>
+          </a:xfrm>
+          <a:prstGeom prst="rect">
+            <a:avLst/>
+          </a:prstGeom>
+          <a:noFill/>
+        </p:spPr>
+        <p:txBody>
+          <a:bodyPr wrap="square" anchor="t" lIns="36000" rIns="36000" tIns="18000" bIns="18000">
+            <a:spAutoFit/>
+          </a:bodyPr>
+          <a:lstStyle/>
+          <a:p>
+            <a:pPr algn="l"/>
+            <a:r>
+              <a:rPr sz="1120" b="1" i="0">
+                <a:solidFill>
+                  <a:srgbClr val="64748B"/>
+                </a:solidFill>
+                <a:latin typeface="Arial"/>
+              </a:rPr>
+              <a:t>FOAMING / SEM</a:t>
+            </a:r>
+          </a:p>
+        </p:txBody>
+      </p:sp>
+      <p:sp>
+        <p:nvSpPr>
+          <p:cNvPr id="37" name="TextBox 36"/>
+          <p:cNvSpPr txBox="1"/>
+          <p:nvPr/>
+        </p:nvSpPr>
+        <p:spPr>
+          <a:xfrm>
+            <a:off x="6342735" y="1261872"/>
+            <a:ext cx="2403271" cy="329184"/>
+          </a:xfrm>
+          <a:prstGeom prst="rect">
+            <a:avLst/>
+          </a:prstGeom>
+          <a:noFill/>
+        </p:spPr>
+        <p:txBody>
+          <a:bodyPr wrap="square" anchor="t" lIns="36000" rIns="36000" tIns="18000" bIns="18000">
+            <a:spAutoFit/>
+          </a:bodyPr>
+          <a:lstStyle/>
+          <a:p>
+            <a:pPr algn="l"/>
+            <a:r>
+              <a:rPr sz="1568" b="1" i="0">
+                <a:solidFill>
+                  <a:srgbClr val="1E293B"/>
+                </a:solidFill>
+                <a:latin typeface="Arial"/>
+              </a:rPr>
+              <a:t>Foaming &amp; Structure</a:t>
+            </a:r>
+          </a:p>
+        </p:txBody>
+      </p:sp>
+      <p:sp>
+        <p:nvSpPr>
+          <p:cNvPr id="38" name="TextBox 37"/>
+          <p:cNvSpPr txBox="1"/>
+          <p:nvPr/>
+        </p:nvSpPr>
+        <p:spPr>
+          <a:xfrm>
+            <a:off x="6342735" y="1627632"/>
+            <a:ext cx="182880" cy="274320"/>
+          </a:xfrm>
+          <a:prstGeom prst="rect">
+            <a:avLst/>
+          </a:prstGeom>
+          <a:noFill/>
+        </p:spPr>
+        <p:txBody>
+          <a:bodyPr wrap="square" anchor="t" lIns="36000" rIns="36000" tIns="18000" bIns="18000">
+            <a:spAutoFit/>
+          </a:bodyPr>
+          <a:lstStyle/>
+          <a:p>
+            <a:pPr algn="l"/>
+            <a:r>
+              <a:rPr sz="1232" b="0" i="0">
+                <a:solidFill>
+                  <a:srgbClr val="3B5174"/>
+                </a:solidFill>
+                <a:latin typeface="Arial"/>
+              </a:rPr>
+              <a:t>•</a:t>
+            </a:r>
+          </a:p>
+        </p:txBody>
+      </p:sp>
+      <p:sp>
+        <p:nvSpPr>
+          <p:cNvPr id="39" name="TextBox 38"/>
+          <p:cNvSpPr txBox="1"/>
+          <p:nvPr/>
+        </p:nvSpPr>
+        <p:spPr>
+          <a:xfrm>
+            <a:off x="6543903" y="1627632"/>
+            <a:ext cx="2202103" cy="274320"/>
+          </a:xfrm>
+          <a:prstGeom prst="rect">
+            <a:avLst/>
+          </a:prstGeom>
+          <a:noFill/>
+        </p:spPr>
+        <p:txBody>
+          <a:bodyPr wrap="square" anchor="t" lIns="36000" rIns="36000" tIns="18000" bIns="18000">
+            <a:spAutoFit/>
+          </a:bodyPr>
+          <a:lstStyle/>
+          <a:p>
+            <a:pPr algn="l"/>
+            <a:r>
+              <a:rPr sz="1232" b="0" i="0">
+                <a:solidFill>
+                  <a:srgbClr val="475569"/>
+                </a:solidFill>
+                <a:latin typeface="Arial"/>
+              </a:rPr>
+              <a:t>Foaming Index ≈ 2.2–2.6</a:t>
+            </a:r>
+          </a:p>
+        </p:txBody>
+      </p:sp>
+      <p:sp>
+        <p:nvSpPr>
+          <p:cNvPr id="40" name="TextBox 39"/>
+          <p:cNvSpPr txBox="1"/>
+          <p:nvPr/>
+        </p:nvSpPr>
+        <p:spPr>
+          <a:xfrm>
+            <a:off x="6342735" y="1901952"/>
+            <a:ext cx="182880" cy="274320"/>
+          </a:xfrm>
+          <a:prstGeom prst="rect">
+            <a:avLst/>
+          </a:prstGeom>
+          <a:noFill/>
+        </p:spPr>
+        <p:txBody>
+          <a:bodyPr wrap="square" anchor="t" lIns="36000" rIns="36000" tIns="18000" bIns="18000">
+            <a:spAutoFit/>
+          </a:bodyPr>
+          <a:lstStyle/>
+          <a:p>
+            <a:pPr algn="l"/>
+            <a:r>
+              <a:rPr sz="1232" b="0" i="0">
+                <a:solidFill>
+                  <a:srgbClr val="3B5174"/>
+                </a:solidFill>
+                <a:latin typeface="Arial"/>
+              </a:rPr>
+              <a:t>•</a:t>
+            </a:r>
+          </a:p>
+        </p:txBody>
+      </p:sp>
+      <p:sp>
+        <p:nvSpPr>
+          <p:cNvPr id="41" name="TextBox 40"/>
+          <p:cNvSpPr txBox="1"/>
+          <p:nvPr/>
+        </p:nvSpPr>
+        <p:spPr>
+          <a:xfrm>
+            <a:off x="6543903" y="1901952"/>
+            <a:ext cx="2202103" cy="274320"/>
+          </a:xfrm>
+          <a:prstGeom prst="rect">
+            <a:avLst/>
+          </a:prstGeom>
+          <a:noFill/>
+        </p:spPr>
+        <p:txBody>
+          <a:bodyPr wrap="square" anchor="t" lIns="36000" rIns="36000" tIns="18000" bIns="18000">
+            <a:spAutoFit/>
+          </a:bodyPr>
+          <a:lstStyle/>
+          <a:p>
+            <a:pPr algn="l"/>
+            <a:r>
+              <a:rPr sz="1232" b="0" i="0">
+                <a:solidFill>
+                  <a:srgbClr val="475569"/>
+                </a:solidFill>
+                <a:latin typeface="Arial"/>
+              </a:rPr>
+              <a:t>Uniform bubbles at SDS 0.1%</a:t>
+            </a:r>
+          </a:p>
+        </p:txBody>
+      </p:sp>
+      <p:sp>
+        <p:nvSpPr>
+          <p:cNvPr id="42" name="TextBox 41"/>
+          <p:cNvSpPr txBox="1"/>
+          <p:nvPr/>
+        </p:nvSpPr>
+        <p:spPr>
+          <a:xfrm>
+            <a:off x="6342735" y="2176272"/>
+            <a:ext cx="182880" cy="274320"/>
+          </a:xfrm>
+          <a:prstGeom prst="rect">
+            <a:avLst/>
+          </a:prstGeom>
+          <a:noFill/>
+        </p:spPr>
+        <p:txBody>
+          <a:bodyPr wrap="square" anchor="t" lIns="36000" rIns="36000" tIns="18000" bIns="18000">
+            <a:spAutoFit/>
+          </a:bodyPr>
+          <a:lstStyle/>
+          <a:p>
+            <a:pPr algn="l"/>
+            <a:r>
+              <a:rPr sz="1232" b="0" i="0">
+                <a:solidFill>
+                  <a:srgbClr val="3B5174"/>
+                </a:solidFill>
+                <a:latin typeface="Arial"/>
+              </a:rPr>
+              <a:t>•</a:t>
+            </a:r>
+          </a:p>
+        </p:txBody>
+      </p:sp>
+      <p:sp>
+        <p:nvSpPr>
+          <p:cNvPr id="43" name="TextBox 42"/>
+          <p:cNvSpPr txBox="1"/>
+          <p:nvPr/>
+        </p:nvSpPr>
+        <p:spPr>
+          <a:xfrm>
+            <a:off x="6543903" y="2176272"/>
+            <a:ext cx="2202103" cy="274320"/>
+          </a:xfrm>
+          <a:prstGeom prst="rect">
+            <a:avLst/>
+          </a:prstGeom>
+          <a:noFill/>
+        </p:spPr>
+        <p:txBody>
+          <a:bodyPr wrap="square" anchor="t" lIns="36000" rIns="36000" tIns="18000" bIns="18000">
+            <a:spAutoFit/>
+          </a:bodyPr>
+          <a:lstStyle/>
+          <a:p>
+            <a:pPr algn="l"/>
+            <a:r>
+              <a:rPr sz="1232" b="0" i="0">
+                <a:solidFill>
+                  <a:srgbClr val="475569"/>
+                </a:solidFill>
+                <a:latin typeface="Arial"/>
+              </a:rPr>
+              <a:t>Sintering tracked by SEM</a:t>
+            </a:r>
+          </a:p>
+        </p:txBody>
+      </p:sp>
+      <p:sp>
+        <p:nvSpPr>
+          <p:cNvPr id="44" name="TextBox 43"/>
+          <p:cNvSpPr txBox="1"/>
+          <p:nvPr/>
+        </p:nvSpPr>
+        <p:spPr>
+          <a:xfrm>
+            <a:off x="6342735" y="2450592"/>
+            <a:ext cx="182880" cy="274320"/>
+          </a:xfrm>
+          <a:prstGeom prst="rect">
+            <a:avLst/>
+          </a:prstGeom>
+          <a:noFill/>
+        </p:spPr>
+        <p:txBody>
+          <a:bodyPr wrap="square" anchor="t" lIns="36000" rIns="36000" tIns="18000" bIns="18000">
+            <a:spAutoFit/>
+          </a:bodyPr>
+          <a:lstStyle/>
+          <a:p>
+            <a:pPr algn="l"/>
+            <a:r>
+              <a:rPr sz="1232" b="0" i="0">
+                <a:solidFill>
+                  <a:srgbClr val="3B5174"/>
+                </a:solidFill>
+                <a:latin typeface="Arial"/>
+              </a:rPr>
+              <a:t>•</a:t>
+            </a:r>
+          </a:p>
+        </p:txBody>
+      </p:sp>
+      <p:sp>
+        <p:nvSpPr>
+          <p:cNvPr id="45" name="TextBox 44"/>
+          <p:cNvSpPr txBox="1"/>
+          <p:nvPr/>
+        </p:nvSpPr>
+        <p:spPr>
+          <a:xfrm>
+            <a:off x="6543903" y="2450592"/>
+            <a:ext cx="2202103" cy="274320"/>
+          </a:xfrm>
+          <a:prstGeom prst="rect">
+            <a:avLst/>
+          </a:prstGeom>
+          <a:noFill/>
+        </p:spPr>
+        <p:txBody>
+          <a:bodyPr wrap="square" anchor="t" lIns="36000" rIns="36000" tIns="18000" bIns="18000">
+            <a:spAutoFit/>
+          </a:bodyPr>
+          <a:lstStyle/>
+          <a:p>
+            <a:pPr algn="l"/>
+            <a:r>
+              <a:rPr sz="1232" b="0" i="0">
+                <a:solidFill>
+                  <a:srgbClr val="475569"/>
+                </a:solidFill>
+                <a:latin typeface="Arial"/>
+              </a:rPr>
+              <a:t>Necking → porous skeleton</a:t>
+            </a:r>
+          </a:p>
+        </p:txBody>
+      </p:sp>
+      <p:sp>
+        <p:nvSpPr>
+          <p:cNvPr id="46" name="Rounded Rectangle 45"/>
+          <p:cNvSpPr/>
+          <p:nvPr/>
+        </p:nvSpPr>
+        <p:spPr>
+          <a:xfrm>
+            <a:off x="9056903" y="859536"/>
+            <a:ext cx="2769031" cy="4206240"/>
+          </a:xfrm>
+          <a:prstGeom prst="roundRect">
+            <a:avLst>
+              <a:gd name="adj" fmla="val 4000"/>
+            </a:avLst>
+          </a:prstGeom>
+          <a:solidFill>
+            <a:srgbClr val="F1F5F9"/>
+          </a:solidFill>
+          <a:ln w="6350">
+            <a:solidFill>
+              <a:srgbClr val="E2E8F0"/>
+            </a:solidFill>
+          </a:ln>
+          <a:effectLst/>
+        </p:spPr>
+        <p:style>
+          <a:lnRef idx="1">
+            <a:schemeClr val="accent1"/>
+          </a:lnRef>
+          <a:fillRef idx="3">
+            <a:schemeClr val="accent1"/>
+          </a:fillRef>
+          <a:effectRef idx="2">
+            <a:schemeClr val="accent1"/>
+          </a:effectRef>
+          <a:fontRef idx="minor">
+            <a:schemeClr val="lt1"/>
+          </a:fontRef>
+        </p:style>
+        <p:txBody>
+          <a:bodyPr rtlCol="0" anchor="ctr"/>
+          <a:lstStyle/>
+          <a:p>
+            <a:pPr algn="ctr"/>
+          </a:p>
+        </p:txBody>
+      </p:sp>
+      <p:sp>
+        <p:nvSpPr>
+          <p:cNvPr id="47" name="Rectangle 46"/>
+          <p:cNvSpPr/>
+          <p:nvPr/>
+        </p:nvSpPr>
+        <p:spPr>
+          <a:xfrm>
+            <a:off x="9056903" y="859536"/>
+            <a:ext cx="2769031" cy="36576"/>
+          </a:xfrm>
+          <a:prstGeom prst="rect">
+            <a:avLst/>
+          </a:prstGeom>
+          <a:solidFill>
+            <a:srgbClr val="3B5174"/>
+          </a:solidFill>
+          <a:ln>
+            <a:noFill/>
+          </a:ln>
+          <a:effectLst/>
+        </p:spPr>
+        <p:style>
+          <a:lnRef idx="1">
+            <a:schemeClr val="accent1"/>
+          </a:lnRef>
+          <a:fillRef idx="3">
+            <a:schemeClr val="accent1"/>
+          </a:fillRef>
+          <a:effectRef idx="2">
+            <a:schemeClr val="accent1"/>
+          </a:effectRef>
+          <a:fontRef idx="minor">
+            <a:schemeClr val="lt1"/>
+          </a:fontRef>
+        </p:style>
+        <p:txBody>
+          <a:bodyPr rtlCol="0" anchor="ctr"/>
+          <a:lstStyle/>
+          <a:p>
+            <a:pPr algn="ctr"/>
+          </a:p>
+        </p:txBody>
+      </p:sp>
+      <p:sp>
+        <p:nvSpPr>
+          <p:cNvPr id="48" name="TextBox 47"/>
+          <p:cNvSpPr txBox="1"/>
+          <p:nvPr/>
+        </p:nvSpPr>
+        <p:spPr>
+          <a:xfrm>
+            <a:off x="9239783" y="1024128"/>
+            <a:ext cx="2403271" cy="219456"/>
+          </a:xfrm>
+          <a:prstGeom prst="rect">
+            <a:avLst/>
+          </a:prstGeom>
+          <a:noFill/>
+        </p:spPr>
+        <p:txBody>
+          <a:bodyPr wrap="square" anchor="t" lIns="36000" rIns="36000" tIns="18000" bIns="18000">
+            <a:spAutoFit/>
+          </a:bodyPr>
+          <a:lstStyle/>
+          <a:p>
+            <a:pPr algn="l"/>
+            <a:r>
+              <a:rPr sz="1120" b="1" i="0">
+                <a:solidFill>
+                  <a:srgbClr val="64748B"/>
+                </a:solidFill>
+                <a:latin typeface="Arial"/>
+              </a:rPr>
+              <a:t>CHEMISTRY</a:t>
+            </a:r>
+          </a:p>
+        </p:txBody>
+      </p:sp>
+      <p:sp>
+        <p:nvSpPr>
+          <p:cNvPr id="49" name="TextBox 48"/>
+          <p:cNvSpPr txBox="1"/>
+          <p:nvPr/>
+        </p:nvSpPr>
+        <p:spPr>
+          <a:xfrm>
+            <a:off x="9239783" y="1261872"/>
+            <a:ext cx="2403271" cy="329184"/>
+          </a:xfrm>
+          <a:prstGeom prst="rect">
+            <a:avLst/>
+          </a:prstGeom>
+          <a:noFill/>
+        </p:spPr>
+        <p:txBody>
+          <a:bodyPr wrap="square" anchor="t" lIns="36000" rIns="36000" tIns="18000" bIns="18000">
+            <a:spAutoFit/>
+          </a:bodyPr>
+          <a:lstStyle/>
+          <a:p>
+            <a:pPr algn="l"/>
+            <a:r>
+              <a:rPr sz="1568" b="1" i="0">
+                <a:solidFill>
+                  <a:srgbClr val="1E293B"/>
+                </a:solidFill>
+                <a:latin typeface="Arial"/>
+              </a:rPr>
+              <a:t>Chemical Change</a:t>
+            </a:r>
+          </a:p>
+        </p:txBody>
+      </p:sp>
+      <p:sp>
+        <p:nvSpPr>
+          <p:cNvPr id="50" name="TextBox 49"/>
+          <p:cNvSpPr txBox="1"/>
+          <p:nvPr/>
+        </p:nvSpPr>
+        <p:spPr>
+          <a:xfrm>
+            <a:off x="9239783" y="1627632"/>
+            <a:ext cx="182880" cy="274320"/>
+          </a:xfrm>
+          <a:prstGeom prst="rect">
+            <a:avLst/>
+          </a:prstGeom>
+          <a:noFill/>
+        </p:spPr>
+        <p:txBody>
+          <a:bodyPr wrap="square" anchor="t" lIns="36000" rIns="36000" tIns="18000" bIns="18000">
+            <a:spAutoFit/>
+          </a:bodyPr>
+          <a:lstStyle/>
+          <a:p>
+            <a:pPr algn="l"/>
+            <a:r>
+              <a:rPr sz="1232" b="0" i="0">
+                <a:solidFill>
+                  <a:srgbClr val="3B5174"/>
+                </a:solidFill>
+                <a:latin typeface="Arial"/>
+              </a:rPr>
+              <a:t>•</a:t>
+            </a:r>
+          </a:p>
+        </p:txBody>
+      </p:sp>
+      <p:sp>
+        <p:nvSpPr>
+          <p:cNvPr id="51" name="TextBox 50"/>
+          <p:cNvSpPr txBox="1"/>
+          <p:nvPr/>
+        </p:nvSpPr>
+        <p:spPr>
+          <a:xfrm>
+            <a:off x="9440951" y="1627632"/>
+            <a:ext cx="2202103" cy="274320"/>
+          </a:xfrm>
+          <a:prstGeom prst="rect">
+            <a:avLst/>
+          </a:prstGeom>
+          <a:noFill/>
+        </p:spPr>
+        <p:txBody>
+          <a:bodyPr wrap="square" anchor="t" lIns="36000" rIns="36000" tIns="18000" bIns="18000">
+            <a:spAutoFit/>
+          </a:bodyPr>
+          <a:lstStyle/>
+          <a:p>
+            <a:pPr algn="l"/>
+            <a:r>
+              <a:rPr sz="1232" b="0" i="0">
+                <a:solidFill>
+                  <a:srgbClr val="475569"/>
+                </a:solidFill>
+                <a:latin typeface="Arial"/>
+              </a:rPr>
+              <a:t>FT-IR: pure SiO₂ after burn</a:t>
+            </a:r>
+          </a:p>
+        </p:txBody>
+      </p:sp>
+      <p:sp>
+        <p:nvSpPr>
+          <p:cNvPr id="52" name="TextBox 51"/>
+          <p:cNvSpPr txBox="1"/>
+          <p:nvPr/>
+        </p:nvSpPr>
+        <p:spPr>
+          <a:xfrm>
+            <a:off x="9239783" y="1901952"/>
+            <a:ext cx="182880" cy="274320"/>
+          </a:xfrm>
+          <a:prstGeom prst="rect">
+            <a:avLst/>
+          </a:prstGeom>
+          <a:noFill/>
+        </p:spPr>
+        <p:txBody>
+          <a:bodyPr wrap="square" anchor="t" lIns="36000" rIns="36000" tIns="18000" bIns="18000">
+            <a:spAutoFit/>
+          </a:bodyPr>
+          <a:lstStyle/>
+          <a:p>
+            <a:pPr algn="l"/>
+            <a:r>
+              <a:rPr sz="1232" b="0" i="0">
+                <a:solidFill>
+                  <a:srgbClr val="3B5174"/>
+                </a:solidFill>
+                <a:latin typeface="Arial"/>
+              </a:rPr>
+              <a:t>•</a:t>
+            </a:r>
+          </a:p>
+        </p:txBody>
+      </p:sp>
+      <p:sp>
+        <p:nvSpPr>
+          <p:cNvPr id="53" name="TextBox 52"/>
+          <p:cNvSpPr txBox="1"/>
+          <p:nvPr/>
+        </p:nvSpPr>
+        <p:spPr>
+          <a:xfrm>
+            <a:off x="9440951" y="1901952"/>
+            <a:ext cx="2202103" cy="274320"/>
+          </a:xfrm>
+          <a:prstGeom prst="rect">
+            <a:avLst/>
+          </a:prstGeom>
+          <a:noFill/>
+        </p:spPr>
+        <p:txBody>
+          <a:bodyPr wrap="square" anchor="t" lIns="36000" rIns="36000" tIns="18000" bIns="18000">
+            <a:spAutoFit/>
+          </a:bodyPr>
+          <a:lstStyle/>
+          <a:p>
+            <a:pPr algn="l"/>
+            <a:r>
+              <a:rPr sz="1232" b="0" i="0">
+                <a:solidFill>
+                  <a:srgbClr val="475569"/>
+                </a:solidFill>
+                <a:latin typeface="Arial"/>
+              </a:rPr>
+              <a:t>XPS: Si ~8× increase</a:t>
+            </a:r>
+          </a:p>
+        </p:txBody>
+      </p:sp>
+      <p:sp>
+        <p:nvSpPr>
+          <p:cNvPr id="54" name="TextBox 53"/>
+          <p:cNvSpPr txBox="1"/>
+          <p:nvPr/>
+        </p:nvSpPr>
+        <p:spPr>
+          <a:xfrm>
+            <a:off x="9239783" y="2176272"/>
+            <a:ext cx="182880" cy="274320"/>
+          </a:xfrm>
+          <a:prstGeom prst="rect">
+            <a:avLst/>
+          </a:prstGeom>
+          <a:noFill/>
+        </p:spPr>
+        <p:txBody>
+          <a:bodyPr wrap="square" anchor="t" lIns="36000" rIns="36000" tIns="18000" bIns="18000">
+            <a:spAutoFit/>
+          </a:bodyPr>
+          <a:lstStyle/>
+          <a:p>
+            <a:pPr algn="l"/>
+            <a:r>
+              <a:rPr sz="1232" b="0" i="0">
+                <a:solidFill>
+                  <a:srgbClr val="3B5174"/>
+                </a:solidFill>
+                <a:latin typeface="Arial"/>
+              </a:rPr>
+              <a:t>•</a:t>
+            </a:r>
+          </a:p>
+        </p:txBody>
+      </p:sp>
+      <p:sp>
+        <p:nvSpPr>
+          <p:cNvPr id="55" name="TextBox 54"/>
+          <p:cNvSpPr txBox="1"/>
+          <p:nvPr/>
+        </p:nvSpPr>
+        <p:spPr>
+          <a:xfrm>
+            <a:off x="9440951" y="2176272"/>
+            <a:ext cx="2202103" cy="274320"/>
+          </a:xfrm>
+          <a:prstGeom prst="rect">
+            <a:avLst/>
+          </a:prstGeom>
+          <a:noFill/>
+        </p:spPr>
+        <p:txBody>
+          <a:bodyPr wrap="square" anchor="t" lIns="36000" rIns="36000" tIns="18000" bIns="18000">
+            <a:spAutoFit/>
+          </a:bodyPr>
+          <a:lstStyle/>
+          <a:p>
+            <a:pPr algn="l"/>
+            <a:r>
+              <a:rPr sz="1232" b="0" i="0">
+                <a:solidFill>
+                  <a:srgbClr val="475569"/>
+                </a:solidFill>
+                <a:latin typeface="Arial"/>
+              </a:rPr>
+              <a:t>TGA: silica residue ~5–8 wt%</a:t>
+            </a:r>
+          </a:p>
+        </p:txBody>
+      </p:sp>
+      <p:sp>
+        <p:nvSpPr>
+          <p:cNvPr id="56" name="TextBox 55"/>
+          <p:cNvSpPr txBox="1"/>
+          <p:nvPr/>
+        </p:nvSpPr>
+        <p:spPr>
+          <a:xfrm>
+            <a:off x="9239783" y="2450592"/>
+            <a:ext cx="182880" cy="274320"/>
+          </a:xfrm>
+          <a:prstGeom prst="rect">
+            <a:avLst/>
+          </a:prstGeom>
+          <a:noFill/>
+        </p:spPr>
+        <p:txBody>
+          <a:bodyPr wrap="square" anchor="t" lIns="36000" rIns="36000" tIns="18000" bIns="18000">
+            <a:spAutoFit/>
+          </a:bodyPr>
+          <a:lstStyle/>
+          <a:p>
+            <a:pPr algn="l"/>
+            <a:r>
+              <a:rPr sz="1232" b="0" i="0">
+                <a:solidFill>
+                  <a:srgbClr val="3B5174"/>
+                </a:solidFill>
+                <a:latin typeface="Arial"/>
+              </a:rPr>
+              <a:t>•</a:t>
+            </a:r>
+          </a:p>
+        </p:txBody>
+      </p:sp>
+      <p:sp>
+        <p:nvSpPr>
+          <p:cNvPr id="57" name="TextBox 56"/>
+          <p:cNvSpPr txBox="1"/>
+          <p:nvPr/>
+        </p:nvSpPr>
+        <p:spPr>
+          <a:xfrm>
+            <a:off x="9440951" y="2450592"/>
+            <a:ext cx="2202103" cy="274320"/>
+          </a:xfrm>
+          <a:prstGeom prst="rect">
+            <a:avLst/>
+          </a:prstGeom>
+          <a:noFill/>
+        </p:spPr>
+        <p:txBody>
+          <a:bodyPr wrap="square" anchor="t" lIns="36000" rIns="36000" tIns="18000" bIns="18000">
+            <a:spAutoFit/>
+          </a:bodyPr>
+          <a:lstStyle/>
+          <a:p>
+            <a:pPr algn="l"/>
+            <a:r>
+              <a:rPr sz="1232" b="0" i="0">
+                <a:solidFill>
+                  <a:srgbClr val="475569"/>
+                </a:solidFill>
+                <a:latin typeface="Arial"/>
+              </a:rPr>
+              <a:t>Aerogel formation confirmed</a:t>
+            </a:r>
+          </a:p>
+        </p:txBody>
+      </p:sp>
+      <p:sp>
+        <p:nvSpPr>
+          <p:cNvPr id="58" name="Rounded Rectangle 57"/>
+          <p:cNvSpPr/>
+          <p:nvPr/>
+        </p:nvSpPr>
+        <p:spPr>
+          <a:xfrm>
+            <a:off x="365760" y="5294376"/>
+            <a:ext cx="11460175" cy="731520"/>
+          </a:xfrm>
+          <a:prstGeom prst="roundRect">
+            <a:avLst>
+              <a:gd name="adj" fmla="val 4000"/>
+            </a:avLst>
+          </a:prstGeom>
+          <a:solidFill>
+            <a:srgbClr val="1E293B"/>
+          </a:solidFill>
+          <a:ln>
+            <a:noFill/>
+          </a:ln>
+          <a:effectLst/>
+        </p:spPr>
+        <p:style>
+          <a:lnRef idx="1">
+            <a:schemeClr val="accent1"/>
+          </a:lnRef>
+          <a:fillRef idx="3">
+            <a:schemeClr val="accent1"/>
+          </a:fillRef>
+          <a:effectRef idx="2">
+            <a:schemeClr val="accent1"/>
+          </a:effectRef>
+          <a:fontRef idx="minor">
+            <a:schemeClr val="lt1"/>
+          </a:fontRef>
+        </p:style>
+        <p:txBody>
+          <a:bodyPr rtlCol="0" anchor="ctr"/>
+          <a:lstStyle/>
+          <a:p>
+            <a:pPr algn="ctr"/>
+          </a:p>
+        </p:txBody>
+      </p:sp>
+      <p:sp>
+        <p:nvSpPr>
+          <p:cNvPr id="59" name="Rectangle 58"/>
+          <p:cNvSpPr/>
+          <p:nvPr/>
+        </p:nvSpPr>
+        <p:spPr>
+          <a:xfrm>
+            <a:off x="365760" y="5294376"/>
+            <a:ext cx="54864" cy="731520"/>
+          </a:xfrm>
+          <a:prstGeom prst="rect">
+            <a:avLst/>
+          </a:prstGeom>
+          <a:solidFill>
+            <a:srgbClr val="D4A574"/>
+          </a:solidFill>
+          <a:ln>
+            <a:noFill/>
+          </a:ln>
+          <a:effectLst/>
+        </p:spPr>
+        <p:style>
+          <a:lnRef idx="1">
+            <a:schemeClr val="accent1"/>
+          </a:lnRef>
+          <a:fillRef idx="3">
+            <a:schemeClr val="accent1"/>
+          </a:fillRef>
+          <a:effectRef idx="2">
+            <a:schemeClr val="accent1"/>
+          </a:effectRef>
+          <a:fontRef idx="minor">
+            <a:schemeClr val="lt1"/>
+          </a:fontRef>
+        </p:style>
+        <p:txBody>
+          <a:bodyPr rtlCol="0" anchor="ctr"/>
+          <a:lstStyle/>
+          <a:p>
+            <a:pPr algn="ctr"/>
+          </a:p>
+        </p:txBody>
+      </p:sp>
+      <p:sp>
+        <p:nvSpPr>
+          <p:cNvPr id="60" name="TextBox 59"/>
+          <p:cNvSpPr txBox="1"/>
+          <p:nvPr/>
+        </p:nvSpPr>
+        <p:spPr>
+          <a:xfrm>
+            <a:off x="548640" y="5294376"/>
+            <a:ext cx="365760" cy="731520"/>
           </a:xfrm>
           <a:prstGeom prst="rect">
             <a:avLst/>
@@ -43664,25 +44868,25 @@
             <a:r>
               <a:rPr sz="1568" b="0" i="0">
                 <a:solidFill>
-                  <a:srgbClr val="3B5174"/>
-                </a:solidFill>
-                <a:latin typeface="Arial"/>
-              </a:rPr>
-              <a:t>⚠</a:t>
-            </a:r>
-          </a:p>
-        </p:txBody>
-      </p:sp>
-      <p:sp>
-        <p:nvSpPr>
-          <p:cNvPr id="28" name="TextBox 27"/>
-          <p:cNvSpPr txBox="1"/>
-          <p:nvPr/>
-        </p:nvSpPr>
-        <p:spPr>
-          <a:xfrm>
-            <a:off x="960120" y="3465576"/>
-            <a:ext cx="4907127" cy="777240"/>
+                  <a:srgbClr val="D4A574"/>
+                </a:solidFill>
+                <a:latin typeface="Arial"/>
+              </a:rPr>
+              <a:t>◆</a:t>
+            </a:r>
+          </a:p>
+        </p:txBody>
+      </p:sp>
+      <p:sp>
+        <p:nvSpPr>
+          <p:cNvPr id="61" name="TextBox 60"/>
+          <p:cNvSpPr txBox="1"/>
+          <p:nvPr/>
+        </p:nvSpPr>
+        <p:spPr>
+          <a:xfrm>
+            <a:off x="960120" y="5294376"/>
+            <a:ext cx="10774375" cy="731520"/>
           </a:xfrm>
           <a:prstGeom prst="rect">
             <a:avLst/>
@@ -43699,466 +44903,11 @@
             <a:r>
               <a:rPr sz="1456" b="1" i="0">
                 <a:solidFill>
-                  <a:srgbClr val="1E293B"/>
-                </a:solidFill>
-                <a:latin typeface="Arial"/>
-              </a:rPr>
-              <a:t>Behavior under real-world wind, dryness, and temperature gradients not yet evaluated</a:t>
-            </a:r>
-          </a:p>
-        </p:txBody>
-      </p:sp>
-      <p:sp>
-        <p:nvSpPr>
-          <p:cNvPr id="29" name="TextBox 28"/>
-          <p:cNvSpPr txBox="1"/>
-          <p:nvPr/>
-        </p:nvSpPr>
-        <p:spPr>
-          <a:xfrm>
-            <a:off x="6233007" y="859536"/>
-            <a:ext cx="5592927" cy="274320"/>
-          </a:xfrm>
-          <a:prstGeom prst="rect">
-            <a:avLst/>
-          </a:prstGeom>
-          <a:noFill/>
-        </p:spPr>
-        <p:txBody>
-          <a:bodyPr wrap="square" anchor="t" lIns="36000" rIns="36000" tIns="18000" bIns="18000">
-            <a:spAutoFit/>
-          </a:bodyPr>
-          <a:lstStyle/>
-          <a:p>
-            <a:pPr algn="l"/>
-            <a:r>
-              <a:rPr sz="1344" b="1" i="0">
-                <a:solidFill>
-                  <a:srgbClr val="64748B"/>
-                </a:solidFill>
-                <a:latin typeface="Arial"/>
-              </a:rPr>
-              <a:t>Future Research Directions</a:t>
-            </a:r>
-          </a:p>
-        </p:txBody>
-      </p:sp>
-      <p:sp>
-        <p:nvSpPr>
-          <p:cNvPr id="30" name="TextBox 29"/>
-          <p:cNvSpPr txBox="1"/>
-          <p:nvPr/>
-        </p:nvSpPr>
-        <p:spPr>
-          <a:xfrm>
-            <a:off x="6324447" y="1362456"/>
-            <a:ext cx="365760" cy="274320"/>
-          </a:xfrm>
-          <a:prstGeom prst="rect">
-            <a:avLst/>
-          </a:prstGeom>
-          <a:noFill/>
-        </p:spPr>
-        <p:txBody>
-          <a:bodyPr wrap="square" anchor="t" lIns="36000" rIns="36000" tIns="18000" bIns="18000">
-            <a:spAutoFit/>
-          </a:bodyPr>
-          <a:lstStyle/>
-          <a:p>
-            <a:pPr algn="l"/>
-            <a:r>
-              <a:rPr sz="1680" b="1" i="0">
-                <a:solidFill>
-                  <a:srgbClr val="3B5174"/>
-                </a:solidFill>
-                <a:latin typeface="Arial"/>
-              </a:rPr>
-              <a:t>→</a:t>
-            </a:r>
-          </a:p>
-        </p:txBody>
-      </p:sp>
-      <p:sp>
-        <p:nvSpPr>
-          <p:cNvPr id="31" name="TextBox 30"/>
-          <p:cNvSpPr txBox="1"/>
-          <p:nvPr/>
-        </p:nvSpPr>
-        <p:spPr>
-          <a:xfrm>
-            <a:off x="6690207" y="1362456"/>
-            <a:ext cx="5044287" cy="274320"/>
-          </a:xfrm>
-          <a:prstGeom prst="rect">
-            <a:avLst/>
-          </a:prstGeom>
-          <a:noFill/>
-        </p:spPr>
-        <p:txBody>
-          <a:bodyPr wrap="square" anchor="t" lIns="36000" rIns="36000" tIns="18000" bIns="18000">
-            <a:spAutoFit/>
-          </a:bodyPr>
-          <a:lstStyle/>
-          <a:p>
-            <a:pPr algn="l"/>
-            <a:r>
-              <a:rPr sz="1344" b="0" i="0">
-                <a:solidFill>
-                  <a:srgbClr val="334155"/>
-                </a:solidFill>
-                <a:latin typeface="Arial"/>
-              </a:rPr>
-              <a:t>Performance validation in large-scale combustion furnaces and outdoor simulated fire tests</a:t>
-            </a:r>
-          </a:p>
-        </p:txBody>
-      </p:sp>
-      <p:sp>
-        <p:nvSpPr>
-          <p:cNvPr id="32" name="TextBox 31"/>
-          <p:cNvSpPr txBox="1"/>
-          <p:nvPr/>
-        </p:nvSpPr>
-        <p:spPr>
-          <a:xfrm>
-            <a:off x="6324447" y="1865376"/>
-            <a:ext cx="365760" cy="274320"/>
-          </a:xfrm>
-          <a:prstGeom prst="rect">
-            <a:avLst/>
-          </a:prstGeom>
-          <a:noFill/>
-        </p:spPr>
-        <p:txBody>
-          <a:bodyPr wrap="square" anchor="t" lIns="36000" rIns="36000" tIns="18000" bIns="18000">
-            <a:spAutoFit/>
-          </a:bodyPr>
-          <a:lstStyle/>
-          <a:p>
-            <a:pPr algn="l"/>
-            <a:r>
-              <a:rPr sz="1680" b="1" i="0">
-                <a:solidFill>
-                  <a:srgbClr val="3B5174"/>
-                </a:solidFill>
-                <a:latin typeface="Arial"/>
-              </a:rPr>
-              <a:t>→</a:t>
-            </a:r>
-          </a:p>
-        </p:txBody>
-      </p:sp>
-      <p:sp>
-        <p:nvSpPr>
-          <p:cNvPr id="33" name="TextBox 32"/>
-          <p:cNvSpPr txBox="1"/>
-          <p:nvPr/>
-        </p:nvSpPr>
-        <p:spPr>
-          <a:xfrm>
-            <a:off x="6690207" y="1865376"/>
-            <a:ext cx="5044287" cy="274320"/>
-          </a:xfrm>
-          <a:prstGeom prst="rect">
-            <a:avLst/>
-          </a:prstGeom>
-          <a:noFill/>
-        </p:spPr>
-        <p:txBody>
-          <a:bodyPr wrap="square" anchor="t" lIns="36000" rIns="36000" tIns="18000" bIns="18000">
-            <a:spAutoFit/>
-          </a:bodyPr>
-          <a:lstStyle/>
-          <a:p>
-            <a:pPr algn="l"/>
-            <a:r>
-              <a:rPr sz="1344" b="0" i="0">
-                <a:solidFill>
-                  <a:srgbClr val="334155"/>
-                </a:solidFill>
-                <a:latin typeface="Arial"/>
-              </a:rPr>
-              <a:t>Adhesion evaluation on different substrates (concrete, metal, vegetation)</a:t>
-            </a:r>
-          </a:p>
-        </p:txBody>
-      </p:sp>
-      <p:sp>
-        <p:nvSpPr>
-          <p:cNvPr id="34" name="TextBox 33"/>
-          <p:cNvSpPr txBox="1"/>
-          <p:nvPr/>
-        </p:nvSpPr>
-        <p:spPr>
-          <a:xfrm>
-            <a:off x="6324447" y="2368296"/>
-            <a:ext cx="365760" cy="274320"/>
-          </a:xfrm>
-          <a:prstGeom prst="rect">
-            <a:avLst/>
-          </a:prstGeom>
-          <a:noFill/>
-        </p:spPr>
-        <p:txBody>
-          <a:bodyPr wrap="square" anchor="t" lIns="36000" rIns="36000" tIns="18000" bIns="18000">
-            <a:spAutoFit/>
-          </a:bodyPr>
-          <a:lstStyle/>
-          <a:p>
-            <a:pPr algn="l"/>
-            <a:r>
-              <a:rPr sz="1680" b="1" i="0">
-                <a:solidFill>
-                  <a:srgbClr val="3B5174"/>
-                </a:solidFill>
-                <a:latin typeface="Arial"/>
-              </a:rPr>
-              <a:t>→</a:t>
-            </a:r>
-          </a:p>
-        </p:txBody>
-      </p:sp>
-      <p:sp>
-        <p:nvSpPr>
-          <p:cNvPr id="35" name="TextBox 34"/>
-          <p:cNvSpPr txBox="1"/>
-          <p:nvPr/>
-        </p:nvSpPr>
-        <p:spPr>
-          <a:xfrm>
-            <a:off x="6690207" y="2368296"/>
-            <a:ext cx="5044287" cy="274320"/>
-          </a:xfrm>
-          <a:prstGeom prst="rect">
-            <a:avLst/>
-          </a:prstGeom>
-          <a:noFill/>
-        </p:spPr>
-        <p:txBody>
-          <a:bodyPr wrap="square" anchor="t" lIns="36000" rIns="36000" tIns="18000" bIns="18000">
-            <a:spAutoFit/>
-          </a:bodyPr>
-          <a:lstStyle/>
-          <a:p>
-            <a:pPr algn="l"/>
-            <a:r>
-              <a:rPr sz="1344" b="0" i="0">
-                <a:solidFill>
-                  <a:srgbClr val="334155"/>
-                </a:solidFill>
-                <a:latin typeface="Arial"/>
-              </a:rPr>
-              <a:t>Direct measurement of aerogel thermal conductivity (λ = 0.015–0.040 W/m·K expected)</a:t>
-            </a:r>
-          </a:p>
-        </p:txBody>
-      </p:sp>
-      <p:sp>
-        <p:nvSpPr>
-          <p:cNvPr id="36" name="TextBox 35"/>
-          <p:cNvSpPr txBox="1"/>
-          <p:nvPr/>
-        </p:nvSpPr>
-        <p:spPr>
-          <a:xfrm>
-            <a:off x="6324447" y="2871216"/>
-            <a:ext cx="365760" cy="274320"/>
-          </a:xfrm>
-          <a:prstGeom prst="rect">
-            <a:avLst/>
-          </a:prstGeom>
-          <a:noFill/>
-        </p:spPr>
-        <p:txBody>
-          <a:bodyPr wrap="square" anchor="t" lIns="36000" rIns="36000" tIns="18000" bIns="18000">
-            <a:spAutoFit/>
-          </a:bodyPr>
-          <a:lstStyle/>
-          <a:p>
-            <a:pPr algn="l"/>
-            <a:r>
-              <a:rPr sz="1680" b="1" i="0">
-                <a:solidFill>
-                  <a:srgbClr val="3B5174"/>
-                </a:solidFill>
-                <a:latin typeface="Arial"/>
-              </a:rPr>
-              <a:t>→</a:t>
-            </a:r>
-          </a:p>
-        </p:txBody>
-      </p:sp>
-      <p:sp>
-        <p:nvSpPr>
-          <p:cNvPr id="37" name="TextBox 36"/>
-          <p:cNvSpPr txBox="1"/>
-          <p:nvPr/>
-        </p:nvSpPr>
-        <p:spPr>
-          <a:xfrm>
-            <a:off x="6690207" y="2871216"/>
-            <a:ext cx="5044287" cy="274320"/>
-          </a:xfrm>
-          <a:prstGeom prst="rect">
-            <a:avLst/>
-          </a:prstGeom>
-          <a:noFill/>
-        </p:spPr>
-        <p:txBody>
-          <a:bodyPr wrap="square" anchor="t" lIns="36000" rIns="36000" tIns="18000" bIns="18000">
-            <a:spAutoFit/>
-          </a:bodyPr>
-          <a:lstStyle/>
-          <a:p>
-            <a:pPr algn="l"/>
-            <a:r>
-              <a:rPr sz="1344" b="0" i="0">
-                <a:solidFill>
-                  <a:srgbClr val="334155"/>
-                </a:solidFill>
-                <a:latin typeface="Arial"/>
-              </a:rPr>
-              <a:t>Exploration of SDS alternative surfactants (improved biodegradability)</a:t>
-            </a:r>
-          </a:p>
-        </p:txBody>
-      </p:sp>
-      <p:sp>
-        <p:nvSpPr>
-          <p:cNvPr id="38" name="TextBox 37"/>
-          <p:cNvSpPr txBox="1"/>
-          <p:nvPr/>
-        </p:nvSpPr>
-        <p:spPr>
-          <a:xfrm>
-            <a:off x="6324447" y="3374136"/>
-            <a:ext cx="365760" cy="274320"/>
-          </a:xfrm>
-          <a:prstGeom prst="rect">
-            <a:avLst/>
-          </a:prstGeom>
-          <a:noFill/>
-        </p:spPr>
-        <p:txBody>
-          <a:bodyPr wrap="square" anchor="t" lIns="36000" rIns="36000" tIns="18000" bIns="18000">
-            <a:spAutoFit/>
-          </a:bodyPr>
-          <a:lstStyle/>
-          <a:p>
-            <a:pPr algn="l"/>
-            <a:r>
-              <a:rPr sz="1680" b="1" i="0">
-                <a:solidFill>
-                  <a:srgbClr val="3B5174"/>
-                </a:solidFill>
-                <a:latin typeface="Arial"/>
-              </a:rPr>
-              <a:t>→</a:t>
-            </a:r>
-          </a:p>
-        </p:txBody>
-      </p:sp>
-      <p:sp>
-        <p:nvSpPr>
-          <p:cNvPr id="39" name="TextBox 38"/>
-          <p:cNvSpPr txBox="1"/>
-          <p:nvPr/>
-        </p:nvSpPr>
-        <p:spPr>
-          <a:xfrm>
-            <a:off x="6690207" y="3374136"/>
-            <a:ext cx="5044287" cy="274320"/>
-          </a:xfrm>
-          <a:prstGeom prst="rect">
-            <a:avLst/>
-          </a:prstGeom>
-          <a:noFill/>
-        </p:spPr>
-        <p:txBody>
-          <a:bodyPr wrap="square" anchor="t" lIns="36000" rIns="36000" tIns="18000" bIns="18000">
-            <a:spAutoFit/>
-          </a:bodyPr>
-          <a:lstStyle/>
-          <a:p>
-            <a:pPr algn="l"/>
-            <a:r>
-              <a:rPr sz="1344" b="0" i="0">
-                <a:solidFill>
-                  <a:srgbClr val="334155"/>
-                </a:solidFill>
-                <a:latin typeface="Arial"/>
-              </a:rPr>
-              <a:t>Systematic study of MC/HEC concentration optimization and CSP particle size effects</a:t>
-            </a:r>
-          </a:p>
-        </p:txBody>
-      </p:sp>
-      <p:sp>
-        <p:nvSpPr>
-          <p:cNvPr id="40" name="TextBox 39"/>
-          <p:cNvSpPr txBox="1"/>
-          <p:nvPr/>
-        </p:nvSpPr>
-        <p:spPr>
-          <a:xfrm>
-            <a:off x="6324447" y="3877056"/>
-            <a:ext cx="365760" cy="274320"/>
-          </a:xfrm>
-          <a:prstGeom prst="rect">
-            <a:avLst/>
-          </a:prstGeom>
-          <a:noFill/>
-        </p:spPr>
-        <p:txBody>
-          <a:bodyPr wrap="square" anchor="t" lIns="36000" rIns="36000" tIns="18000" bIns="18000">
-            <a:spAutoFit/>
-          </a:bodyPr>
-          <a:lstStyle/>
-          <a:p>
-            <a:pPr algn="l"/>
-            <a:r>
-              <a:rPr sz="1680" b="1" i="0">
-                <a:solidFill>
-                  <a:srgbClr val="3B5174"/>
-                </a:solidFill>
-                <a:latin typeface="Arial"/>
-              </a:rPr>
-              <a:t>→</a:t>
-            </a:r>
-          </a:p>
-        </p:txBody>
-      </p:sp>
-      <p:sp>
-        <p:nvSpPr>
-          <p:cNvPr id="41" name="TextBox 40"/>
-          <p:cNvSpPr txBox="1"/>
-          <p:nvPr/>
-        </p:nvSpPr>
-        <p:spPr>
-          <a:xfrm>
-            <a:off x="6690207" y="3877056"/>
-            <a:ext cx="5044287" cy="274320"/>
-          </a:xfrm>
-          <a:prstGeom prst="rect">
-            <a:avLst/>
-          </a:prstGeom>
-          <a:noFill/>
-        </p:spPr>
-        <p:txBody>
-          <a:bodyPr wrap="square" anchor="t" lIns="36000" rIns="36000" tIns="18000" bIns="18000">
-            <a:spAutoFit/>
-          </a:bodyPr>
-          <a:lstStyle/>
-          <a:p>
-            <a:pPr algn="l"/>
-            <a:r>
-              <a:rPr sz="1344" b="0" i="0">
-                <a:solidFill>
-                  <a:srgbClr val="334155"/>
-                </a:solidFill>
-                <a:latin typeface="Arial"/>
-              </a:rPr>
-              <a:t>Waterproofing improvement to eliminate need for reapplication after rainfall</a:t>
+                  <a:srgbClr val="FFFFFF"/>
+                </a:solidFill>
+                <a:latin typeface="Arial"/>
+              </a:rPr>
+              <a:t>Upon heating, CSP sinters and the gel self-transforms into a porous silica aerogel insulating layer — flame protection continues even after water evaporation</a:t>
             </a:r>
           </a:p>
         </p:txBody>
@@ -44343,7 +45092,7 @@
                 </a:solidFill>
                 <a:latin typeface="Arial"/>
               </a:rPr>
-              <a:t>Discussion 3/3</a:t>
+              <a:t>Summary 2/2</a:t>
             </a:r>
           </a:p>
         </p:txBody>
@@ -44422,7 +45171,7 @@
                 </a:solidFill>
                 <a:latin typeface="Arial"/>
               </a:rPr>
-              <a:t>Research Findings Summary and Outlook</a:t>
+              <a:t>Conclusions</a:t>
             </a:r>
           </a:p>
         </p:txBody>
@@ -44877,7 +45626,7 @@
                 </a:solidFill>
                 <a:latin typeface="Arial"/>
               </a:rPr>
-              <a:t>CSP heat-activated sintering → porous silica layer continuously insulates even after water evaporation</a:t>
+              <a:t>CSP sinters upon heating → porous silica layer continuously insulates even after water evaporation</a:t>
             </a:r>
           </a:p>
         </p:txBody>
@@ -45380,7 +46129,7 @@
                 </a:solidFill>
                 <a:latin typeface="Arial"/>
               </a:rPr>
-              <a:t>Anticipated Implementation Scenarios</a:t>
+              <a:t>Core Mechanism</a:t>
             </a:r>
           </a:p>
         </p:txBody>
@@ -45450,7 +46199,7 @@
                 </a:solidFill>
                 <a:latin typeface="Arial"/>
               </a:rPr>
-              <a:t>Pre-protective application to WUI structures and critical infrastructure</a:t>
+              <a:t>MC gelates on flame contact, fixing the structure</a:t>
             </a:r>
           </a:p>
         </p:txBody>
@@ -45520,7 +46269,7 @@
                 </a:solidFill>
                 <a:latin typeface="Arial"/>
               </a:rPr>
-              <a:t>Fire break formation along potential spread paths</a:t>
+              <a:t>CSP sinters upon dehydration and heating</a:t>
             </a:r>
           </a:p>
         </p:txBody>
@@ -45590,7 +46339,7 @@
                 </a:solidFill>
                 <a:latin typeface="Arial"/>
               </a:rPr>
-              <a:t>Coating of metal structures such as power lines and communication towers</a:t>
+              <a:t>Forms a porous SiO₂ aerogel insulating layer</a:t>
             </a:r>
           </a:p>
         </p:txBody>
@@ -45717,7 +46466,7 @@
                 </a:solidFill>
                 <a:latin typeface="Arial"/>
               </a:rPr>
-              <a:t>Future Challenges</a:t>
+              <a:t>Demonstrated Protection</a:t>
             </a:r>
           </a:p>
         </p:txBody>
@@ -45787,7 +46536,7 @@
                 </a:solidFill>
                 <a:latin typeface="Arial"/>
               </a:rPr>
-              <a:t>Large-scale field spray tests (real-world benchmarking)</a:t>
+              <a:t>Time to char ~10 min (~5× water)</a:t>
             </a:r>
           </a:p>
         </p:txBody>
@@ -45857,7 +46606,7 @@
                 </a:solidFill>
                 <a:latin typeface="Arial"/>
               </a:rPr>
-              <a:t>Long-term storage stability and cost evaluation</a:t>
+              <a:t>Protection continues after water evaporation</a:t>
             </a:r>
           </a:p>
         </p:txBody>
@@ -45927,7 +46676,7 @@
                 </a:solidFill>
                 <a:latin typeface="Arial"/>
               </a:rPr>
-              <a:t>Environmental impact assessment (biodegradability testing)</a:t>
+              <a:t>Flow properties compatible with existing infrastructure</a:t>
             </a:r>
           </a:p>
         </p:txBody>
@@ -46087,7 +46836,7 @@
                 </a:solidFill>
                 <a:latin typeface="Arial"/>
               </a:rPr>
-              <a:t>From "water carrier" to "self-transforming fire-retardant material" — A new WEG design paradigm</a:t>
+              <a:t>From "water carrier" to "heat-self-transforming fire-retardant material" — a new WEG design concept</a:t>
             </a:r>
           </a:p>
         </p:txBody>

--- a/slides_en.pptx
+++ b/slides_en.pptx
@@ -43211,7 +43211,7 @@
                 </a:solidFill>
                 <a:latin typeface="Arial"/>
               </a:rPr>
-              <a:t>G' &gt; G'' for all systems (gel)</a:t>
+              <a:t>G' &gt; G'', no crossover (gel)</a:t>
             </a:r>
           </a:p>
         </p:txBody>
@@ -43281,7 +43281,7 @@
                 </a:solidFill>
                 <a:latin typeface="Arial"/>
               </a:rPr>
-              <a:t>n = 0.108–0.188</a:t>
+              <a:t>G': HEC+MC≈46, MHEC≈26 Pa</a:t>
             </a:r>
           </a:p>
         </p:txBody>
@@ -43351,7 +43351,7 @@
                 </a:solidFill>
                 <a:latin typeface="Arial"/>
               </a:rPr>
-              <a:t>Yield stress ~3× AquaGel-K</a:t>
+              <a:t>Shear-thinning (HB) → sprayable</a:t>
             </a:r>
           </a:p>
         </p:txBody>
@@ -43421,7 +43421,7 @@
                 </a:solidFill>
                 <a:latin typeface="Arial"/>
               </a:rPr>
-              <a:t>tan δ &lt;&lt; 1 (elastic-dominated)</a:t>
+              <a:t>tan δ &lt; 1, solid-like gel</a:t>
             </a:r>
           </a:p>
         </p:txBody>
@@ -43653,7 +43653,7 @@
                 </a:solidFill>
                 <a:latin typeface="Arial"/>
               </a:rPr>
-              <a:t>Time to char ≈ 10 min</a:t>
+              <a:t>HEC+MC/CSP: &gt;7 min to char</a:t>
             </a:r>
           </a:p>
         </p:txBody>
@@ -43723,7 +43723,7 @@
                 </a:solidFill>
                 <a:latin typeface="Arial"/>
               </a:rPr>
-              <a:t>~5× longer than water (~2 min)</a:t>
+              <a:t>MHEC/CSP: &gt;5 min</a:t>
             </a:r>
           </a:p>
         </p:txBody>
@@ -43793,7 +43793,7 @@
                 </a:solidFill>
                 <a:latin typeface="Arial"/>
               </a:rPr>
-              <a:t>~40% longer than AquaGel-K</a:t>
+              <a:t>3–6× more effective than commercial</a:t>
             </a:r>
           </a:p>
         </p:txBody>
@@ -43863,7 +43863,7 @@
                 </a:solidFill>
                 <a:latin typeface="Arial"/>
               </a:rPr>
-              <a:t>Surface nearly intact at 300 s</a:t>
+              <a:t>Water ~0.3, AquaGel-K ~1.5 min</a:t>
             </a:r>
           </a:p>
         </p:txBody>
@@ -44095,7 +44095,7 @@
                 </a:solidFill>
                 <a:latin typeface="Arial"/>
               </a:rPr>
-              <a:t>Foaming Index ≈ 2.2–2.6</a:t>
+              <a:t>Foaming Index up to ≈2.6</a:t>
             </a:r>
           </a:p>
         </p:txBody>
@@ -44165,7 +44165,7 @@
                 </a:solidFill>
                 <a:latin typeface="Arial"/>
               </a:rPr>
-              <a:t>Uniform bubbles at SDS 0.1%</a:t>
+              <a:t>AquaGel-K does not foam (≈0)</a:t>
             </a:r>
           </a:p>
         </p:txBody>
@@ -44235,7 +44235,7 @@
                 </a:solidFill>
                 <a:latin typeface="Arial"/>
               </a:rPr>
-              <a:t>Sintering tracked by SEM</a:t>
+              <a:t>Porous silica film on burning</a:t>
             </a:r>
           </a:p>
         </p:txBody>
@@ -44305,7 +44305,7 @@
                 </a:solidFill>
                 <a:latin typeface="Arial"/>
               </a:rPr>
-              <a:t>Necking → porous skeleton</a:t>
+              <a:t>Particles sinter after 2 min (SEM)</a:t>
             </a:r>
           </a:p>
         </p:txBody>
@@ -44537,7 +44537,7 @@
                 </a:solidFill>
                 <a:latin typeface="Arial"/>
               </a:rPr>
-              <a:t>FT-IR: pure SiO₂ after burn</a:t>
+              <a:t>FT-IR: CH/SiO ratio drops</a:t>
             </a:r>
           </a:p>
         </p:txBody>
@@ -44607,7 +44607,7 @@
                 </a:solidFill>
                 <a:latin typeface="Arial"/>
               </a:rPr>
-              <a:t>XPS: Si ~8× increase</a:t>
+              <a:t>XPS: large carbon decrease</a:t>
             </a:r>
           </a:p>
         </p:txBody>
@@ -44677,7 +44677,7 @@
                 </a:solidFill>
                 <a:latin typeface="Arial"/>
               </a:rPr>
-              <a:t>TGA: silica residue ~5–8 wt%</a:t>
+              <a:t>MHEC/CSP C 38.3%→4.8%</a:t>
             </a:r>
           </a:p>
         </p:txBody>
@@ -44747,7 +44747,7 @@
                 </a:solidFill>
                 <a:latin typeface="Arial"/>
               </a:rPr>
-              <a:t>Aerogel formation confirmed</a:t>
+              <a:t>Silica (SiO₂) remains</a:t>
             </a:r>
           </a:p>
         </p:txBody>
@@ -44907,7 +44907,7 @@
                 </a:solidFill>
                 <a:latin typeface="Arial"/>
               </a:rPr>
-              <a:t>Upon heating, CSP sinters and the gel self-transforms into a porous silica aerogel insulating layer — flame protection continues even after water evaporation</a:t>
+              <a:t>On burning, water evaporates while the gel converts into a porous silica aerogel — insulating the substrate even after desiccation (a mechanism absent in commercial WEGs)</a:t>
             </a:r>
           </a:p>
         </p:txBody>
@@ -45403,7 +45403,7 @@
                 </a:solidFill>
                 <a:latin typeface="Arial"/>
               </a:rPr>
-              <a:t>Time to char ~10 min</a:t>
+              <a:t>3–6× more protective</a:t>
             </a:r>
           </a:p>
         </p:txBody>
@@ -45438,7 +45438,7 @@
                 </a:solidFill>
                 <a:latin typeface="Arial"/>
               </a:rPr>
-              <a:t>~5× water, ~40% longer than AquaGel-K. Greatly extends wood protection time under flame</a:t>
+              <a:t>HEC+MC/CSP &gt;7 min, MHEC/CSP &gt;5 min to char. Protects substrates far longer under flame</a:t>
             </a:r>
           </a:p>
         </p:txBody>
@@ -45626,7 +45626,7 @@
                 </a:solidFill>
                 <a:latin typeface="Arial"/>
               </a:rPr>
-              <a:t>CSP sinters upon heating → porous silica layer continuously insulates even after water evaporation</a:t>
+              <a:t>Heat dehydrates the gel and sinters CSP → forms a porous silica aerogel insulating layer in situ (protection continues after drying)</a:t>
             </a:r>
           </a:p>
         </p:txBody>
@@ -45779,7 +45779,7 @@
                 </a:solidFill>
                 <a:latin typeface="Arial"/>
               </a:rPr>
-              <a:t>Compatible with existing spray infrastructure</a:t>
+              <a:t>Compatible with spray infrastructure</a:t>
             </a:r>
           </a:p>
         </p:txBody>
@@ -45814,7 +45814,7 @@
                 </a:solidFill>
                 <a:latin typeface="Arial"/>
               </a:rPr>
-              <a:t>Shear-thinning fluid with n = 0.108–0.188. Sprayable through existing hoses and nozzles</a:t>
+              <a:t>Shear-thinning, sprayable fluid combining strong substrate adherence and wetting</a:t>
             </a:r>
           </a:p>
         </p:txBody>
@@ -45967,7 +45967,7 @@
                 </a:solidFill>
                 <a:latin typeface="Arial"/>
               </a:rPr>
-              <a:t>Sustainable materials</a:t>
+              <a:t>Sustainable, safe materials</a:t>
             </a:r>
           </a:p>
         </p:txBody>
@@ -46002,7 +46002,7 @@
                 </a:solidFill>
                 <a:latin typeface="Arial"/>
               </a:rPr>
-              <a:t>Cellulose derivatives are food-grade; silica is a harmless inorganic material. Low environmental impact</a:t>
+              <a:t>Cellulose derivatives — Earth's most abundant biopolymer; biodegradability confirmed in prior study; silica is benign</a:t>
             </a:r>
           </a:p>
         </p:txBody>
@@ -46199,7 +46199,7 @@
                 </a:solidFill>
                 <a:latin typeface="Arial"/>
               </a:rPr>
-              <a:t>MC gelates on flame contact, fixing the structure</a:t>
+              <a:t>Water rapidly evaporates on flame contact</a:t>
             </a:r>
           </a:p>
         </p:txBody>
@@ -46269,7 +46269,7 @@
                 </a:solidFill>
                 <a:latin typeface="Arial"/>
               </a:rPr>
-              <a:t>CSP sinters upon dehydration and heating</a:t>
+              <a:t>CSP sinters, forming inter-particle necks</a:t>
             </a:r>
           </a:p>
         </p:txBody>
@@ -46339,7 +46339,7 @@
                 </a:solidFill>
                 <a:latin typeface="Arial"/>
               </a:rPr>
-              <a:t>Forms a porous SiO₂ aerogel insulating layer</a:t>
+              <a:t>Porous silica aerogel insulating layer forms</a:t>
             </a:r>
           </a:p>
         </p:txBody>
@@ -46466,7 +46466,7 @@
                 </a:solidFill>
                 <a:latin typeface="Arial"/>
               </a:rPr>
-              <a:t>Demonstrated Protection</a:t>
+              <a:t>Significance Stated in the Paper</a:t>
             </a:r>
           </a:p>
         </p:txBody>
@@ -46536,7 +46536,7 @@
                 </a:solidFill>
                 <a:latin typeface="Arial"/>
               </a:rPr>
-              <a:t>Time to char ~10 min (~5× water)</a:t>
+              <a:t>PP platform as a basis for diverse fire retardants</a:t>
             </a:r>
           </a:p>
         </p:txBody>
@@ -46606,7 +46606,7 @@
                 </a:solidFill>
                 <a:latin typeface="Arial"/>
               </a:rPr>
-              <a:t>Protection continues after water evaporation</a:t>
+              <a:t>Amenable to modular manufacturing &amp; large scale</a:t>
             </a:r>
           </a:p>
         </p:txBody>
@@ -46676,7 +46676,7 @@
                 </a:solidFill>
                 <a:latin typeface="Arial"/>
               </a:rPr>
-              <a:t>Flow properties compatible with existing infrastructure</a:t>
+              <a:t>Fire retardancy retained after 455-day aging (MHEC/CSP)</a:t>
             </a:r>
           </a:p>
         </p:txBody>
@@ -46836,7 +46836,7 @@
                 </a:solidFill>
                 <a:latin typeface="Arial"/>
               </a:rPr>
-              <a:t>From "water carrier" to "heat-self-transforming fire-retardant material" — a new WEG design concept</a:t>
+              <a:t>From "water carrier" to "heat-self-transforming fire-retardant material" — a next-gen WEG that stays effective even after drying</a:t>
             </a:r>
           </a:p>
         </p:txBody>

--- a/slides_en.pptx
+++ b/slides_en.pptx
@@ -6381,7 +6381,7 @@
                 </a:solidFill>
                 <a:latin typeface="Arial"/>
               </a:rPr>
-              <a:t>Stock solution: colloidal dispersion at 12 wt% in water</a:t>
+              <a:t>LUDOX TM-50 (stock 50 wt%) → diluted to 15 wt% (pH 9)</a:t>
             </a:r>
           </a:p>
         </p:txBody>
@@ -6451,7 +6451,7 @@
                 </a:solidFill>
                 <a:latin typeface="Arial"/>
               </a:rPr>
-              <a:t>Particle size: monodisperse silica of tens of nanometers</a:t>
+              <a:t>Particle size: 22 nm (monodisperse)</a:t>
             </a:r>
           </a:p>
         </p:txBody>
@@ -6928,7 +6928,7 @@
                 </a:solidFill>
                 <a:latin typeface="Arial"/>
               </a:rPr>
-              <a:t>Role: promotes foaming and enhances porous structure</a:t>
+              <a:t>Adding SDS did not improve Foaming Index</a:t>
             </a:r>
           </a:p>
         </p:txBody>
@@ -7068,7 +7068,7 @@
                 </a:solidFill>
                 <a:latin typeface="Arial"/>
               </a:rPr>
-              <a:t>SEM confirms control of bubble size and distribution</a:t>
+              <a:t>Higher SDS concentration coarsens bubble size (SEM)</a:t>
             </a:r>
           </a:p>
         </p:txBody>
@@ -9830,7 +9830,7 @@
                 </a:solidFill>
                 <a:latin typeface="Arial"/>
               </a:rPr>
-              <a:t>Wood heated with butane burner</a:t>
+              <a:t>Whitewood plywood heated with MAP-Pro torch (~2054°C)</a:t>
             </a:r>
           </a:p>
         </p:txBody>
@@ -14322,7 +14322,7 @@
                 </a:solidFill>
                 <a:latin typeface="Arial"/>
               </a:rPr>
-              <a:t>This work's WEG shows higher elasticity than AquaGel-K</a:t>
+              <a:t>AquaGel-K (G'=457 Pa) shows higher G' than WEG (46/26 Pa); all formulations exhibit gel behavior</a:t>
             </a:r>
           </a:p>
         </p:txBody>
@@ -15105,7 +15105,7 @@
                 </a:solidFill>
                 <a:latin typeface="Arial"/>
               </a:rPr>
-              <a:t>Power-law index n</a:t>
+              <a:t>Flow index n</a:t>
             </a:r>
           </a:p>
         </p:txBody>
@@ -15140,7 +15140,7 @@
                 </a:solidFill>
                 <a:latin typeface="Arial"/>
               </a:rPr>
-              <a:t>0.108</a:t>
+              <a:t>n &lt; 1</a:t>
             </a:r>
           </a:p>
         </p:txBody>
@@ -15175,7 +15175,7 @@
                 </a:solidFill>
                 <a:latin typeface="Arial"/>
               </a:rPr>
-              <a:t>HEC+MC/CSP 1-5</a:t>
+              <a:t>HEC+MC/CSP — strong shear thinning</a:t>
             </a:r>
           </a:p>
         </p:txBody>
@@ -15258,7 +15258,7 @@
                 </a:solidFill>
                 <a:latin typeface="Arial"/>
               </a:rPr>
-              <a:t>Power-law index n</a:t>
+              <a:t>Flow index n</a:t>
             </a:r>
           </a:p>
         </p:txBody>
@@ -15293,7 +15293,7 @@
                 </a:solidFill>
                 <a:latin typeface="Arial"/>
               </a:rPr>
-              <a:t>0.188</a:t>
+              <a:t>n &lt; 1</a:t>
             </a:r>
           </a:p>
         </p:txBody>
@@ -15328,7 +15328,7 @@
                 </a:solidFill>
                 <a:latin typeface="Arial"/>
               </a:rPr>
-              <a:t>MHEC/CSP 1-5</a:t>
+              <a:t>MHEC/CSP — shear thinning</a:t>
             </a:r>
           </a:p>
         </p:txBody>
@@ -15847,7 +15847,7 @@
                 </a:solidFill>
                 <a:latin typeface="Arial"/>
               </a:rPr>
-              <a:t>Rheology ③: Herschel-Bulkley Model Parameters</a:t>
+              <a:t>Rheology ③: Static Yield Stress and Long-term Stability</a:t>
             </a:r>
           </a:p>
         </p:txBody>
@@ -16086,7 +16086,7 @@
                 </a:solidFill>
                 <a:latin typeface="Arial"/>
               </a:rPr>
-              <a:t>σ = τ₀ + K · γ̇ⁿ  （τ₀：降伏応力, K：稠度係数, n：流動指数）</a:t>
+              <a:t>Static yield stress: stress at the G'/G'' crossover (σ_s) from amplitude sweep — minimum stress to initiate flow</a:t>
             </a:r>
           </a:p>
         </p:txBody>
@@ -16100,7 +16100,7 @@
         <p:spPr>
           <a:xfrm>
             <a:off x="365760" y="1636776"/>
-            <a:ext cx="11460175" cy="434340"/>
+            <a:ext cx="11460175" cy="502920"/>
           </a:xfrm>
           <a:prstGeom prst="rect">
             <a:avLst/>
@@ -16144,7 +16144,7 @@
         <p:spPr>
           <a:xfrm>
             <a:off x="457200" y="1636776"/>
-            <a:ext cx="4365294" cy="434340"/>
+            <a:ext cx="3554979" cy="502920"/>
           </a:xfrm>
           <a:prstGeom prst="rect">
             <a:avLst/>
@@ -16178,8 +16178,8 @@
         </p:nvSpPr>
         <p:spPr>
           <a:xfrm>
-            <a:off x="4913934" y="1636776"/>
-            <a:ext cx="1818589" cy="434340"/>
+            <a:off x="4103619" y="1636776"/>
+            <a:ext cx="2513145" cy="502920"/>
           </a:xfrm>
           <a:prstGeom prst="rect">
             <a:avLst/>
@@ -16200,7 +16200,7 @@
                 </a:solidFill>
                 <a:latin typeface="Arial"/>
               </a:rPr>
-              <a:t>τ₀ (Pa)</a:t>
+              <a:t>Static yield stress (fresh)</a:t>
             </a:r>
           </a:p>
         </p:txBody>
@@ -16213,8 +16213,8 @@
         </p:nvSpPr>
         <p:spPr>
           <a:xfrm>
-            <a:off x="6823963" y="1636776"/>
-            <a:ext cx="1818589" cy="434340"/>
+            <a:off x="6708204" y="1636776"/>
+            <a:ext cx="2513145" cy="502920"/>
           </a:xfrm>
           <a:prstGeom prst="rect">
             <a:avLst/>
@@ -16235,7 +16235,7 @@
                 </a:solidFill>
                 <a:latin typeface="Arial"/>
               </a:rPr>
-              <a:t>K (Pa·sⁿ)</a:t>
+              <a:t>Static yield stress (455 days)</a:t>
             </a:r>
           </a:p>
         </p:txBody>
@@ -16248,8 +16248,8 @@
         </p:nvSpPr>
         <p:spPr>
           <a:xfrm>
-            <a:off x="8733993" y="1636776"/>
-            <a:ext cx="1500250" cy="434340"/>
+            <a:off x="9312789" y="1636776"/>
+            <a:ext cx="2513145" cy="502920"/>
           </a:xfrm>
           <a:prstGeom prst="rect">
             <a:avLst/>
@@ -16270,56 +16270,21 @@
                 </a:solidFill>
                 <a:latin typeface="Arial"/>
               </a:rPr>
-              <a:t>n</a:t>
-            </a:r>
-          </a:p>
-        </p:txBody>
-      </p:sp>
-      <p:sp>
-        <p:nvSpPr>
-          <p:cNvPr id="19" name="TextBox 18"/>
-          <p:cNvSpPr txBox="1"/>
-          <p:nvPr/>
-        </p:nvSpPr>
-        <p:spPr>
-          <a:xfrm>
-            <a:off x="10325684" y="1636776"/>
-            <a:ext cx="1500250" cy="434340"/>
-          </a:xfrm>
-          <a:prstGeom prst="rect">
-            <a:avLst/>
-          </a:prstGeom>
-          <a:noFill/>
-        </p:spPr>
-        <p:txBody>
-          <a:bodyPr wrap="square" anchor="ctr" lIns="36000" rIns="36000" tIns="18000" bIns="18000">
-            <a:spAutoFit/>
-          </a:bodyPr>
-          <a:lstStyle/>
-          <a:p>
-            <a:pPr algn="l"/>
-            <a:r>
-              <a:rPr sz="1232" b="1" i="0">
-                <a:solidFill>
-                  <a:srgbClr val="FFFFFF"/>
-                </a:solidFill>
-                <a:latin typeface="Arial"/>
-              </a:rPr>
-              <a:t>R²</a:t>
-            </a:r>
-          </a:p>
-        </p:txBody>
-      </p:sp>
-      <p:sp>
-        <p:nvSpPr>
-          <p:cNvPr id="20" name="Rectangle 19"/>
+              <a:t>Note</a:t>
+            </a:r>
+          </a:p>
+        </p:txBody>
+      </p:sp>
+      <p:sp>
+        <p:nvSpPr>
+          <p:cNvPr id="19" name="Rectangle 18"/>
           <p:cNvSpPr/>
           <p:nvPr/>
         </p:nvSpPr>
         <p:spPr>
           <a:xfrm>
-            <a:off x="365760" y="2071116"/>
-            <a:ext cx="11460175" cy="434340"/>
+            <a:off x="365760" y="2139696"/>
+            <a:ext cx="11460175" cy="502920"/>
           </a:xfrm>
           <a:prstGeom prst="rect">
             <a:avLst/>
@@ -16358,14 +16323,49 @@
       </p:sp>
       <p:sp>
         <p:nvSpPr>
+          <p:cNvPr id="20" name="TextBox 19"/>
+          <p:cNvSpPr txBox="1"/>
+          <p:nvPr/>
+        </p:nvSpPr>
+        <p:spPr>
+          <a:xfrm>
+            <a:off x="457200" y="2139696"/>
+            <a:ext cx="3554979" cy="502920"/>
+          </a:xfrm>
+          <a:prstGeom prst="rect">
+            <a:avLst/>
+          </a:prstGeom>
+          <a:noFill/>
+        </p:spPr>
+        <p:txBody>
+          <a:bodyPr wrap="square" anchor="ctr" lIns="36000" rIns="36000" tIns="18000" bIns="18000">
+            <a:spAutoFit/>
+          </a:bodyPr>
+          <a:lstStyle/>
+          <a:p>
+            <a:pPr algn="l"/>
+            <a:r>
+              <a:rPr sz="1232" b="1" i="0">
+                <a:solidFill>
+                  <a:srgbClr val="334155"/>
+                </a:solidFill>
+                <a:latin typeface="Arial"/>
+              </a:rPr>
+              <a:t>HEC+MC/CSP 1-5</a:t>
+            </a:r>
+          </a:p>
+        </p:txBody>
+      </p:sp>
+      <p:sp>
+        <p:nvSpPr>
           <p:cNvPr id="21" name="TextBox 20"/>
           <p:cNvSpPr txBox="1"/>
           <p:nvPr/>
         </p:nvSpPr>
         <p:spPr>
           <a:xfrm>
-            <a:off x="457200" y="2071116"/>
-            <a:ext cx="4365294" cy="434340"/>
+            <a:off x="4103619" y="2139696"/>
+            <a:ext cx="2513145" cy="502920"/>
           </a:xfrm>
           <a:prstGeom prst="rect">
             <a:avLst/>
@@ -16380,167 +16380,97 @@
           <a:p>
             <a:pPr algn="l"/>
             <a:r>
+              <a:rPr sz="1232" b="1" i="0">
+                <a:solidFill>
+                  <a:srgbClr val="3B5174"/>
+                </a:solidFill>
+                <a:latin typeface="Arial"/>
+              </a:rPr>
+              <a:t>33.34 Pa</a:t>
+            </a:r>
+          </a:p>
+        </p:txBody>
+      </p:sp>
+      <p:sp>
+        <p:nvSpPr>
+          <p:cNvPr id="22" name="TextBox 21"/>
+          <p:cNvSpPr txBox="1"/>
+          <p:nvPr/>
+        </p:nvSpPr>
+        <p:spPr>
+          <a:xfrm>
+            <a:off x="6708204" y="2139696"/>
+            <a:ext cx="2513145" cy="502920"/>
+          </a:xfrm>
+          <a:prstGeom prst="rect">
+            <a:avLst/>
+          </a:prstGeom>
+          <a:noFill/>
+        </p:spPr>
+        <p:txBody>
+          <a:bodyPr wrap="square" anchor="ctr" lIns="36000" rIns="36000" tIns="18000" bIns="18000">
+            <a:spAutoFit/>
+          </a:bodyPr>
+          <a:lstStyle/>
+          <a:p>
+            <a:pPr algn="l"/>
+            <a:r>
               <a:rPr sz="1232" b="0" i="0">
                 <a:solidFill>
+                  <a:srgbClr val="5B8C5A"/>
+                </a:solidFill>
+                <a:latin typeface="Arial"/>
+              </a:rPr>
+              <a:t>68.9 Pa</a:t>
+            </a:r>
+          </a:p>
+        </p:txBody>
+      </p:sp>
+      <p:sp>
+        <p:nvSpPr>
+          <p:cNvPr id="23" name="TextBox 22"/>
+          <p:cNvSpPr txBox="1"/>
+          <p:nvPr/>
+        </p:nvSpPr>
+        <p:spPr>
+          <a:xfrm>
+            <a:off x="9312789" y="2139696"/>
+            <a:ext cx="2513145" cy="502920"/>
+          </a:xfrm>
+          <a:prstGeom prst="rect">
+            <a:avLst/>
+          </a:prstGeom>
+          <a:noFill/>
+        </p:spPr>
+        <p:txBody>
+          <a:bodyPr wrap="square" anchor="ctr" lIns="36000" rIns="36000" tIns="18000" bIns="18000">
+            <a:spAutoFit/>
+          </a:bodyPr>
+          <a:lstStyle/>
+          <a:p>
+            <a:pPr algn="l"/>
+            <a:r>
+              <a:rPr sz="1232" b="0" i="0">
+                <a:solidFill>
                   <a:srgbClr val="334155"/>
                 </a:solidFill>
                 <a:latin typeface="Arial"/>
               </a:rPr>
-              <a:t>AquaGel-K (Commercial control)</a:t>
-            </a:r>
-          </a:p>
-        </p:txBody>
-      </p:sp>
-      <p:sp>
-        <p:nvSpPr>
-          <p:cNvPr id="22" name="TextBox 21"/>
-          <p:cNvSpPr txBox="1"/>
-          <p:nvPr/>
-        </p:nvSpPr>
-        <p:spPr>
-          <a:xfrm>
-            <a:off x="4913934" y="2071116"/>
-            <a:ext cx="1818589" cy="434340"/>
-          </a:xfrm>
-          <a:prstGeom prst="rect">
-            <a:avLst/>
-          </a:prstGeom>
-          <a:noFill/>
-        </p:spPr>
-        <p:txBody>
-          <a:bodyPr wrap="square" anchor="ctr" lIns="36000" rIns="36000" tIns="18000" bIns="18000">
-            <a:spAutoFit/>
-          </a:bodyPr>
-          <a:lstStyle/>
-          <a:p>
-            <a:pPr algn="l"/>
-            <a:r>
-              <a:rPr sz="1232" b="0" i="0">
-                <a:solidFill>
-                  <a:srgbClr val="334155"/>
-                </a:solidFill>
-                <a:latin typeface="Arial"/>
-              </a:rPr>
-              <a:t>0.31</a:t>
-            </a:r>
-          </a:p>
-        </p:txBody>
-      </p:sp>
-      <p:sp>
-        <p:nvSpPr>
-          <p:cNvPr id="23" name="TextBox 22"/>
-          <p:cNvSpPr txBox="1"/>
-          <p:nvPr/>
-        </p:nvSpPr>
-        <p:spPr>
-          <a:xfrm>
-            <a:off x="6823963" y="2071116"/>
-            <a:ext cx="1818589" cy="434340"/>
-          </a:xfrm>
-          <a:prstGeom prst="rect">
-            <a:avLst/>
-          </a:prstGeom>
-          <a:noFill/>
-        </p:spPr>
-        <p:txBody>
-          <a:bodyPr wrap="square" anchor="ctr" lIns="36000" rIns="36000" tIns="18000" bIns="18000">
-            <a:spAutoFit/>
-          </a:bodyPr>
-          <a:lstStyle/>
-          <a:p>
-            <a:pPr algn="l"/>
-            <a:r>
-              <a:rPr sz="1232" b="0" i="0">
-                <a:solidFill>
-                  <a:srgbClr val="334155"/>
-                </a:solidFill>
-                <a:latin typeface="Arial"/>
-              </a:rPr>
-              <a:t>0.85</a:t>
-            </a:r>
-          </a:p>
-        </p:txBody>
-      </p:sp>
-      <p:sp>
-        <p:nvSpPr>
-          <p:cNvPr id="24" name="TextBox 23"/>
-          <p:cNvSpPr txBox="1"/>
-          <p:nvPr/>
-        </p:nvSpPr>
-        <p:spPr>
-          <a:xfrm>
-            <a:off x="8733993" y="2071116"/>
-            <a:ext cx="1500250" cy="434340"/>
-          </a:xfrm>
-          <a:prstGeom prst="rect">
-            <a:avLst/>
-          </a:prstGeom>
-          <a:noFill/>
-        </p:spPr>
-        <p:txBody>
-          <a:bodyPr wrap="square" anchor="ctr" lIns="36000" rIns="36000" tIns="18000" bIns="18000">
-            <a:spAutoFit/>
-          </a:bodyPr>
-          <a:lstStyle/>
-          <a:p>
-            <a:pPr algn="l"/>
-            <a:r>
-              <a:rPr sz="1232" b="0" i="0">
-                <a:solidFill>
-                  <a:srgbClr val="334155"/>
-                </a:solidFill>
-                <a:latin typeface="Arial"/>
-              </a:rPr>
-              <a:t>0.52</a:t>
-            </a:r>
-          </a:p>
-        </p:txBody>
-      </p:sp>
-      <p:sp>
-        <p:nvSpPr>
-          <p:cNvPr id="25" name="TextBox 24"/>
-          <p:cNvSpPr txBox="1"/>
-          <p:nvPr/>
-        </p:nvSpPr>
-        <p:spPr>
-          <a:xfrm>
-            <a:off x="10325684" y="2071116"/>
-            <a:ext cx="1500250" cy="434340"/>
-          </a:xfrm>
-          <a:prstGeom prst="rect">
-            <a:avLst/>
-          </a:prstGeom>
-          <a:noFill/>
-        </p:spPr>
-        <p:txBody>
-          <a:bodyPr wrap="square" anchor="ctr" lIns="36000" rIns="36000" tIns="18000" bIns="18000">
-            <a:spAutoFit/>
-          </a:bodyPr>
-          <a:lstStyle/>
-          <a:p>
-            <a:pPr algn="l"/>
-            <a:r>
-              <a:rPr sz="1232" b="0" i="0">
-                <a:solidFill>
-                  <a:srgbClr val="5B8C5A"/>
-                </a:solidFill>
-                <a:latin typeface="Arial"/>
-              </a:rPr>
-              <a:t>&gt;0.99</a:t>
-            </a:r>
-          </a:p>
-        </p:txBody>
-      </p:sp>
-      <p:sp>
-        <p:nvSpPr>
-          <p:cNvPr id="26" name="Rectangle 25"/>
+              <a:t>Gel strength increases over time</a:t>
+            </a:r>
+          </a:p>
+        </p:txBody>
+      </p:sp>
+      <p:sp>
+        <p:nvSpPr>
+          <p:cNvPr id="24" name="Rectangle 23"/>
           <p:cNvSpPr/>
           <p:nvPr/>
         </p:nvSpPr>
         <p:spPr>
           <a:xfrm>
-            <a:off x="365760" y="2505456"/>
-            <a:ext cx="11460175" cy="434340"/>
+            <a:off x="365760" y="2642616"/>
+            <a:ext cx="11460175" cy="502920"/>
           </a:xfrm>
           <a:prstGeom prst="rect">
             <a:avLst/>
@@ -16579,14 +16509,84 @@
       </p:sp>
       <p:sp>
         <p:nvSpPr>
+          <p:cNvPr id="25" name="TextBox 24"/>
+          <p:cNvSpPr txBox="1"/>
+          <p:nvPr/>
+        </p:nvSpPr>
+        <p:spPr>
+          <a:xfrm>
+            <a:off x="457200" y="2642616"/>
+            <a:ext cx="3554979" cy="502920"/>
+          </a:xfrm>
+          <a:prstGeom prst="rect">
+            <a:avLst/>
+          </a:prstGeom>
+          <a:noFill/>
+        </p:spPr>
+        <p:txBody>
+          <a:bodyPr wrap="square" anchor="ctr" lIns="36000" rIns="36000" tIns="18000" bIns="18000">
+            <a:spAutoFit/>
+          </a:bodyPr>
+          <a:lstStyle/>
+          <a:p>
+            <a:pPr algn="l"/>
+            <a:r>
+              <a:rPr sz="1232" b="1" i="0">
+                <a:solidFill>
+                  <a:srgbClr val="334155"/>
+                </a:solidFill>
+                <a:latin typeface="Arial"/>
+              </a:rPr>
+              <a:t>MHEC/CSP 1-5</a:t>
+            </a:r>
+          </a:p>
+        </p:txBody>
+      </p:sp>
+      <p:sp>
+        <p:nvSpPr>
+          <p:cNvPr id="26" name="TextBox 25"/>
+          <p:cNvSpPr txBox="1"/>
+          <p:nvPr/>
+        </p:nvSpPr>
+        <p:spPr>
+          <a:xfrm>
+            <a:off x="4103619" y="2642616"/>
+            <a:ext cx="2513145" cy="502920"/>
+          </a:xfrm>
+          <a:prstGeom prst="rect">
+            <a:avLst/>
+          </a:prstGeom>
+          <a:noFill/>
+        </p:spPr>
+        <p:txBody>
+          <a:bodyPr wrap="square" anchor="ctr" lIns="36000" rIns="36000" tIns="18000" bIns="18000">
+            <a:spAutoFit/>
+          </a:bodyPr>
+          <a:lstStyle/>
+          <a:p>
+            <a:pPr algn="l"/>
+            <a:r>
+              <a:rPr sz="1232" b="1" i="0">
+                <a:solidFill>
+                  <a:srgbClr val="3B5174"/>
+                </a:solidFill>
+                <a:latin typeface="Arial"/>
+              </a:rPr>
+              <a:t>3.31 Pa</a:t>
+            </a:r>
+          </a:p>
+        </p:txBody>
+      </p:sp>
+      <p:sp>
+        <p:nvSpPr>
           <p:cNvPr id="27" name="TextBox 26"/>
           <p:cNvSpPr txBox="1"/>
           <p:nvPr/>
         </p:nvSpPr>
         <p:spPr>
           <a:xfrm>
-            <a:off x="457200" y="2505456"/>
-            <a:ext cx="4365294" cy="434340"/>
+            <a:off x="6708204" y="2642616"/>
+            <a:ext cx="2513145" cy="502920"/>
           </a:xfrm>
           <a:prstGeom prst="rect">
             <a:avLst/>
@@ -16601,167 +16601,62 @@
           <a:p>
             <a:pPr algn="l"/>
             <a:r>
-              <a:rPr sz="1232" b="1" i="0">
+              <a:rPr sz="1232" b="0" i="0">
+                <a:solidFill>
+                  <a:srgbClr val="5B8C5A"/>
+                </a:solidFill>
+                <a:latin typeface="Arial"/>
+              </a:rPr>
+              <a:t>4.56 Pa</a:t>
+            </a:r>
+          </a:p>
+        </p:txBody>
+      </p:sp>
+      <p:sp>
+        <p:nvSpPr>
+          <p:cNvPr id="28" name="TextBox 27"/>
+          <p:cNvSpPr txBox="1"/>
+          <p:nvPr/>
+        </p:nvSpPr>
+        <p:spPr>
+          <a:xfrm>
+            <a:off x="9312789" y="2642616"/>
+            <a:ext cx="2513145" cy="502920"/>
+          </a:xfrm>
+          <a:prstGeom prst="rect">
+            <a:avLst/>
+          </a:prstGeom>
+          <a:noFill/>
+        </p:spPr>
+        <p:txBody>
+          <a:bodyPr wrap="square" anchor="ctr" lIns="36000" rIns="36000" tIns="18000" bIns="18000">
+            <a:spAutoFit/>
+          </a:bodyPr>
+          <a:lstStyle/>
+          <a:p>
+            <a:pPr algn="l"/>
+            <a:r>
+              <a:rPr sz="1232" b="0" i="0">
                 <a:solidFill>
                   <a:srgbClr val="334155"/>
                 </a:solidFill>
                 <a:latin typeface="Arial"/>
               </a:rPr>
-              <a:t>HEC+MC/CSP 1-5</a:t>
-            </a:r>
-          </a:p>
-        </p:txBody>
-      </p:sp>
-      <p:sp>
-        <p:nvSpPr>
-          <p:cNvPr id="28" name="TextBox 27"/>
-          <p:cNvSpPr txBox="1"/>
-          <p:nvPr/>
-        </p:nvSpPr>
-        <p:spPr>
-          <a:xfrm>
-            <a:off x="4913934" y="2505456"/>
-            <a:ext cx="1818589" cy="434340"/>
-          </a:xfrm>
-          <a:prstGeom prst="rect">
-            <a:avLst/>
-          </a:prstGeom>
-          <a:noFill/>
-        </p:spPr>
-        <p:txBody>
-          <a:bodyPr wrap="square" anchor="ctr" lIns="36000" rIns="36000" tIns="18000" bIns="18000">
-            <a:spAutoFit/>
-          </a:bodyPr>
-          <a:lstStyle/>
-          <a:p>
-            <a:pPr algn="l"/>
-            <a:r>
-              <a:rPr sz="1232" b="1" i="0">
-                <a:solidFill>
-                  <a:srgbClr val="334155"/>
-                </a:solidFill>
-                <a:latin typeface="Arial"/>
-              </a:rPr>
-              <a:t>0.59</a:t>
-            </a:r>
-          </a:p>
-        </p:txBody>
-      </p:sp>
-      <p:sp>
-        <p:nvSpPr>
-          <p:cNvPr id="29" name="TextBox 28"/>
-          <p:cNvSpPr txBox="1"/>
-          <p:nvPr/>
-        </p:nvSpPr>
-        <p:spPr>
-          <a:xfrm>
-            <a:off x="6823963" y="2505456"/>
-            <a:ext cx="1818589" cy="434340"/>
-          </a:xfrm>
-          <a:prstGeom prst="rect">
-            <a:avLst/>
-          </a:prstGeom>
-          <a:noFill/>
-        </p:spPr>
-        <p:txBody>
-          <a:bodyPr wrap="square" anchor="ctr" lIns="36000" rIns="36000" tIns="18000" bIns="18000">
-            <a:spAutoFit/>
-          </a:bodyPr>
-          <a:lstStyle/>
-          <a:p>
-            <a:pPr algn="l"/>
-            <a:r>
-              <a:rPr sz="1232" b="1" i="0">
-                <a:solidFill>
-                  <a:srgbClr val="334155"/>
-                </a:solidFill>
-                <a:latin typeface="Arial"/>
-              </a:rPr>
-              <a:t>2.04</a:t>
-            </a:r>
-          </a:p>
-        </p:txBody>
-      </p:sp>
-      <p:sp>
-        <p:nvSpPr>
-          <p:cNvPr id="30" name="TextBox 29"/>
-          <p:cNvSpPr txBox="1"/>
-          <p:nvPr/>
-        </p:nvSpPr>
-        <p:spPr>
-          <a:xfrm>
-            <a:off x="8733993" y="2505456"/>
-            <a:ext cx="1500250" cy="434340"/>
-          </a:xfrm>
-          <a:prstGeom prst="rect">
-            <a:avLst/>
-          </a:prstGeom>
-          <a:noFill/>
-        </p:spPr>
-        <p:txBody>
-          <a:bodyPr wrap="square" anchor="ctr" lIns="36000" rIns="36000" tIns="18000" bIns="18000">
-            <a:spAutoFit/>
-          </a:bodyPr>
-          <a:lstStyle/>
-          <a:p>
-            <a:pPr algn="l"/>
-            <a:r>
-              <a:rPr sz="1232" b="1" i="0">
-                <a:solidFill>
-                  <a:srgbClr val="B08442"/>
-                </a:solidFill>
-                <a:latin typeface="Arial"/>
-              </a:rPr>
-              <a:t>0.108</a:t>
-            </a:r>
-          </a:p>
-        </p:txBody>
-      </p:sp>
-      <p:sp>
-        <p:nvSpPr>
-          <p:cNvPr id="31" name="TextBox 30"/>
-          <p:cNvSpPr txBox="1"/>
-          <p:nvPr/>
-        </p:nvSpPr>
-        <p:spPr>
-          <a:xfrm>
-            <a:off x="10325684" y="2505456"/>
-            <a:ext cx="1500250" cy="434340"/>
-          </a:xfrm>
-          <a:prstGeom prst="rect">
-            <a:avLst/>
-          </a:prstGeom>
-          <a:noFill/>
-        </p:spPr>
-        <p:txBody>
-          <a:bodyPr wrap="square" anchor="ctr" lIns="36000" rIns="36000" tIns="18000" bIns="18000">
-            <a:spAutoFit/>
-          </a:bodyPr>
-          <a:lstStyle/>
-          <a:p>
-            <a:pPr algn="l"/>
-            <a:r>
-              <a:rPr sz="1232" b="0" i="0">
-                <a:solidFill>
-                  <a:srgbClr val="5B8C5A"/>
-                </a:solidFill>
-                <a:latin typeface="Arial"/>
-              </a:rPr>
-              <a:t>&gt;0.99</a:t>
-            </a:r>
-          </a:p>
-        </p:txBody>
-      </p:sp>
-      <p:sp>
-        <p:nvSpPr>
-          <p:cNvPr id="32" name="Rectangle 31"/>
+              <a:t>Long-term stability confirmed (455 days)</a:t>
+            </a:r>
+          </a:p>
+        </p:txBody>
+      </p:sp>
+      <p:sp>
+        <p:nvSpPr>
+          <p:cNvPr id="29" name="Rectangle 28"/>
           <p:cNvSpPr/>
           <p:nvPr/>
         </p:nvSpPr>
         <p:spPr>
           <a:xfrm>
-            <a:off x="365760" y="2939796"/>
-            <a:ext cx="11460175" cy="434340"/>
+            <a:off x="365760" y="3145536"/>
+            <a:ext cx="11460175" cy="502920"/>
           </a:xfrm>
           <a:prstGeom prst="rect">
             <a:avLst/>
@@ -16800,14 +16695,119 @@
       </p:sp>
       <p:sp>
         <p:nvSpPr>
+          <p:cNvPr id="30" name="TextBox 29"/>
+          <p:cNvSpPr txBox="1"/>
+          <p:nvPr/>
+        </p:nvSpPr>
+        <p:spPr>
+          <a:xfrm>
+            <a:off x="457200" y="3145536"/>
+            <a:ext cx="3554979" cy="502920"/>
+          </a:xfrm>
+          <a:prstGeom prst="rect">
+            <a:avLst/>
+          </a:prstGeom>
+          <a:noFill/>
+        </p:spPr>
+        <p:txBody>
+          <a:bodyPr wrap="square" anchor="ctr" lIns="36000" rIns="36000" tIns="18000" bIns="18000">
+            <a:spAutoFit/>
+          </a:bodyPr>
+          <a:lstStyle/>
+          <a:p>
+            <a:pPr algn="l"/>
+            <a:r>
+              <a:rPr sz="1232" b="0" i="0">
+                <a:solidFill>
+                  <a:srgbClr val="334155"/>
+                </a:solidFill>
+                <a:latin typeface="Arial"/>
+              </a:rPr>
+              <a:t>AquaGel-K (Commercial control)</a:t>
+            </a:r>
+          </a:p>
+        </p:txBody>
+      </p:sp>
+      <p:sp>
+        <p:nvSpPr>
+          <p:cNvPr id="31" name="TextBox 30"/>
+          <p:cNvSpPr txBox="1"/>
+          <p:nvPr/>
+        </p:nvSpPr>
+        <p:spPr>
+          <a:xfrm>
+            <a:off x="4103619" y="3145536"/>
+            <a:ext cx="2513145" cy="502920"/>
+          </a:xfrm>
+          <a:prstGeom prst="rect">
+            <a:avLst/>
+          </a:prstGeom>
+          <a:noFill/>
+        </p:spPr>
+        <p:txBody>
+          <a:bodyPr wrap="square" anchor="ctr" lIns="36000" rIns="36000" tIns="18000" bIns="18000">
+            <a:spAutoFit/>
+          </a:bodyPr>
+          <a:lstStyle/>
+          <a:p>
+            <a:pPr algn="l"/>
+            <a:r>
+              <a:rPr sz="1232" b="0" i="0">
+                <a:solidFill>
+                  <a:srgbClr val="334155"/>
+                </a:solidFill>
+                <a:latin typeface="Arial"/>
+              </a:rPr>
+              <a:t>—</a:t>
+            </a:r>
+          </a:p>
+        </p:txBody>
+      </p:sp>
+      <p:sp>
+        <p:nvSpPr>
+          <p:cNvPr id="32" name="TextBox 31"/>
+          <p:cNvSpPr txBox="1"/>
+          <p:nvPr/>
+        </p:nvSpPr>
+        <p:spPr>
+          <a:xfrm>
+            <a:off x="6708204" y="3145536"/>
+            <a:ext cx="2513145" cy="502920"/>
+          </a:xfrm>
+          <a:prstGeom prst="rect">
+            <a:avLst/>
+          </a:prstGeom>
+          <a:noFill/>
+        </p:spPr>
+        <p:txBody>
+          <a:bodyPr wrap="square" anchor="ctr" lIns="36000" rIns="36000" tIns="18000" bIns="18000">
+            <a:spAutoFit/>
+          </a:bodyPr>
+          <a:lstStyle/>
+          <a:p>
+            <a:pPr algn="l"/>
+            <a:r>
+              <a:rPr sz="1232" b="0" i="0">
+                <a:solidFill>
+                  <a:srgbClr val="334155"/>
+                </a:solidFill>
+                <a:latin typeface="Arial"/>
+              </a:rPr>
+              <a:t>—</a:t>
+            </a:r>
+          </a:p>
+        </p:txBody>
+      </p:sp>
+      <p:sp>
+        <p:nvSpPr>
           <p:cNvPr id="33" name="TextBox 32"/>
           <p:cNvSpPr txBox="1"/>
           <p:nvPr/>
         </p:nvSpPr>
         <p:spPr>
           <a:xfrm>
-            <a:off x="457200" y="2939796"/>
-            <a:ext cx="4365294" cy="434340"/>
+            <a:off x="9312789" y="3145536"/>
+            <a:ext cx="2513145" cy="502920"/>
           </a:xfrm>
           <a:prstGeom prst="rect">
             <a:avLst/>
@@ -16824,606 +16824,24 @@
             <a:r>
               <a:rPr sz="1232" b="0" i="0">
                 <a:solidFill>
-                  <a:srgbClr val="334155"/>
-                </a:solidFill>
-                <a:latin typeface="Arial"/>
-              </a:rPr>
-              <a:t>HEC+MC/CSP/SDS 1-5-0.1</a:t>
-            </a:r>
-          </a:p>
-        </p:txBody>
-      </p:sp>
-      <p:sp>
-        <p:nvSpPr>
-          <p:cNvPr id="34" name="TextBox 33"/>
-          <p:cNvSpPr txBox="1"/>
-          <p:nvPr/>
-        </p:nvSpPr>
-        <p:spPr>
-          <a:xfrm>
-            <a:off x="4913934" y="2939796"/>
-            <a:ext cx="1818589" cy="434340"/>
-          </a:xfrm>
-          <a:prstGeom prst="rect">
-            <a:avLst/>
-          </a:prstGeom>
-          <a:noFill/>
-        </p:spPr>
-        <p:txBody>
-          <a:bodyPr wrap="square" anchor="ctr" lIns="36000" rIns="36000" tIns="18000" bIns="18000">
-            <a:spAutoFit/>
-          </a:bodyPr>
-          <a:lstStyle/>
-          <a:p>
-            <a:pPr algn="l"/>
-            <a:r>
-              <a:rPr sz="1232" b="0" i="0">
-                <a:solidFill>
-                  <a:srgbClr val="334155"/>
-                </a:solidFill>
-                <a:latin typeface="Arial"/>
-              </a:rPr>
-              <a:t>0.54</a:t>
-            </a:r>
-          </a:p>
-        </p:txBody>
-      </p:sp>
-      <p:sp>
-        <p:nvSpPr>
-          <p:cNvPr id="35" name="TextBox 34"/>
-          <p:cNvSpPr txBox="1"/>
-          <p:nvPr/>
-        </p:nvSpPr>
-        <p:spPr>
-          <a:xfrm>
-            <a:off x="6823963" y="2939796"/>
-            <a:ext cx="1818589" cy="434340"/>
-          </a:xfrm>
-          <a:prstGeom prst="rect">
-            <a:avLst/>
-          </a:prstGeom>
-          <a:noFill/>
-        </p:spPr>
-        <p:txBody>
-          <a:bodyPr wrap="square" anchor="ctr" lIns="36000" rIns="36000" tIns="18000" bIns="18000">
-            <a:spAutoFit/>
-          </a:bodyPr>
-          <a:lstStyle/>
-          <a:p>
-            <a:pPr algn="l"/>
-            <a:r>
-              <a:rPr sz="1232" b="0" i="0">
-                <a:solidFill>
-                  <a:srgbClr val="334155"/>
-                </a:solidFill>
-                <a:latin typeface="Arial"/>
-              </a:rPr>
-              <a:t>1.87</a:t>
-            </a:r>
-          </a:p>
-        </p:txBody>
-      </p:sp>
-      <p:sp>
-        <p:nvSpPr>
-          <p:cNvPr id="36" name="TextBox 35"/>
-          <p:cNvSpPr txBox="1"/>
-          <p:nvPr/>
-        </p:nvSpPr>
-        <p:spPr>
-          <a:xfrm>
-            <a:off x="8733993" y="2939796"/>
-            <a:ext cx="1500250" cy="434340"/>
-          </a:xfrm>
-          <a:prstGeom prst="rect">
-            <a:avLst/>
-          </a:prstGeom>
-          <a:noFill/>
-        </p:spPr>
-        <p:txBody>
-          <a:bodyPr wrap="square" anchor="ctr" lIns="36000" rIns="36000" tIns="18000" bIns="18000">
-            <a:spAutoFit/>
-          </a:bodyPr>
-          <a:lstStyle/>
-          <a:p>
-            <a:pPr algn="l"/>
-            <a:r>
-              <a:rPr sz="1232" b="0" i="0">
-                <a:solidFill>
-                  <a:srgbClr val="334155"/>
-                </a:solidFill>
-                <a:latin typeface="Arial"/>
-              </a:rPr>
-              <a:t>0.115</a:t>
-            </a:r>
-          </a:p>
-        </p:txBody>
-      </p:sp>
-      <p:sp>
-        <p:nvSpPr>
-          <p:cNvPr id="37" name="TextBox 36"/>
-          <p:cNvSpPr txBox="1"/>
-          <p:nvPr/>
-        </p:nvSpPr>
-        <p:spPr>
-          <a:xfrm>
-            <a:off x="10325684" y="2939796"/>
-            <a:ext cx="1500250" cy="434340"/>
-          </a:xfrm>
-          <a:prstGeom prst="rect">
-            <a:avLst/>
-          </a:prstGeom>
-          <a:noFill/>
-        </p:spPr>
-        <p:txBody>
-          <a:bodyPr wrap="square" anchor="ctr" lIns="36000" rIns="36000" tIns="18000" bIns="18000">
-            <a:spAutoFit/>
-          </a:bodyPr>
-          <a:lstStyle/>
-          <a:p>
-            <a:pPr algn="l"/>
-            <a:r>
-              <a:rPr sz="1232" b="0" i="0">
-                <a:solidFill>
-                  <a:srgbClr val="5B8C5A"/>
-                </a:solidFill>
-                <a:latin typeface="Arial"/>
-              </a:rPr>
-              <a:t>&gt;0.99</a:t>
-            </a:r>
-          </a:p>
-        </p:txBody>
-      </p:sp>
-      <p:sp>
-        <p:nvSpPr>
-          <p:cNvPr id="38" name="Rectangle 37"/>
+                  <a:srgbClr val="64748B"/>
+                </a:solidFill>
+                <a:latin typeface="Arial"/>
+              </a:rPr>
+              <a:t>Reference</a:t>
+            </a:r>
+          </a:p>
+        </p:txBody>
+      </p:sp>
+      <p:sp>
+        <p:nvSpPr>
+          <p:cNvPr id="34" name="Rounded Rectangle 33"/>
           <p:cNvSpPr/>
           <p:nvPr/>
         </p:nvSpPr>
         <p:spPr>
           <a:xfrm>
-            <a:off x="365760" y="3374136"/>
-            <a:ext cx="11460175" cy="434340"/>
-          </a:xfrm>
-          <a:prstGeom prst="rect">
-            <a:avLst/>
-          </a:prstGeom>
-          <a:solidFill>
-            <a:srgbClr val="FFFFFF"/>
-          </a:solidFill>
-          <a:ln w="3810">
-            <a:solidFill>
-              <a:srgbClr val="E2E8F0"/>
-            </a:solidFill>
-          </a:ln>
-          <a:effectLst/>
-        </p:spPr>
-        <p:style>
-          <a:lnRef idx="1">
-            <a:schemeClr val="accent1"/>
-          </a:lnRef>
-          <a:fillRef idx="3">
-            <a:schemeClr val="accent1"/>
-          </a:fillRef>
-          <a:effectRef idx="2">
-            <a:schemeClr val="accent1"/>
-          </a:effectRef>
-          <a:fontRef idx="minor">
-            <a:schemeClr val="lt1"/>
-          </a:fontRef>
-        </p:style>
-        <p:txBody>
-          <a:bodyPr rtlCol="0" anchor="ctr"/>
-          <a:lstStyle/>
-          <a:p>
-            <a:pPr algn="ctr"/>
-          </a:p>
-        </p:txBody>
-      </p:sp>
-      <p:sp>
-        <p:nvSpPr>
-          <p:cNvPr id="39" name="TextBox 38"/>
-          <p:cNvSpPr txBox="1"/>
-          <p:nvPr/>
-        </p:nvSpPr>
-        <p:spPr>
-          <a:xfrm>
-            <a:off x="457200" y="3374136"/>
-            <a:ext cx="4365294" cy="434340"/>
-          </a:xfrm>
-          <a:prstGeom prst="rect">
-            <a:avLst/>
-          </a:prstGeom>
-          <a:noFill/>
-        </p:spPr>
-        <p:txBody>
-          <a:bodyPr wrap="square" anchor="ctr" lIns="36000" rIns="36000" tIns="18000" bIns="18000">
-            <a:spAutoFit/>
-          </a:bodyPr>
-          <a:lstStyle/>
-          <a:p>
-            <a:pPr algn="l"/>
-            <a:r>
-              <a:rPr sz="1232" b="0" i="0">
-                <a:solidFill>
-                  <a:srgbClr val="334155"/>
-                </a:solidFill>
-                <a:latin typeface="Arial"/>
-              </a:rPr>
-              <a:t>HEC+MC/CSP/SDS 1-5-0.5</a:t>
-            </a:r>
-          </a:p>
-        </p:txBody>
-      </p:sp>
-      <p:sp>
-        <p:nvSpPr>
-          <p:cNvPr id="40" name="TextBox 39"/>
-          <p:cNvSpPr txBox="1"/>
-          <p:nvPr/>
-        </p:nvSpPr>
-        <p:spPr>
-          <a:xfrm>
-            <a:off x="4913934" y="3374136"/>
-            <a:ext cx="1818589" cy="434340"/>
-          </a:xfrm>
-          <a:prstGeom prst="rect">
-            <a:avLst/>
-          </a:prstGeom>
-          <a:noFill/>
-        </p:spPr>
-        <p:txBody>
-          <a:bodyPr wrap="square" anchor="ctr" lIns="36000" rIns="36000" tIns="18000" bIns="18000">
-            <a:spAutoFit/>
-          </a:bodyPr>
-          <a:lstStyle/>
-          <a:p>
-            <a:pPr algn="l"/>
-            <a:r>
-              <a:rPr sz="1232" b="0" i="0">
-                <a:solidFill>
-                  <a:srgbClr val="334155"/>
-                </a:solidFill>
-                <a:latin typeface="Arial"/>
-              </a:rPr>
-              <a:t>0.48</a:t>
-            </a:r>
-          </a:p>
-        </p:txBody>
-      </p:sp>
-      <p:sp>
-        <p:nvSpPr>
-          <p:cNvPr id="41" name="TextBox 40"/>
-          <p:cNvSpPr txBox="1"/>
-          <p:nvPr/>
-        </p:nvSpPr>
-        <p:spPr>
-          <a:xfrm>
-            <a:off x="6823963" y="3374136"/>
-            <a:ext cx="1818589" cy="434340"/>
-          </a:xfrm>
-          <a:prstGeom prst="rect">
-            <a:avLst/>
-          </a:prstGeom>
-          <a:noFill/>
-        </p:spPr>
-        <p:txBody>
-          <a:bodyPr wrap="square" anchor="ctr" lIns="36000" rIns="36000" tIns="18000" bIns="18000">
-            <a:spAutoFit/>
-          </a:bodyPr>
-          <a:lstStyle/>
-          <a:p>
-            <a:pPr algn="l"/>
-            <a:r>
-              <a:rPr sz="1232" b="0" i="0">
-                <a:solidFill>
-                  <a:srgbClr val="334155"/>
-                </a:solidFill>
-                <a:latin typeface="Arial"/>
-              </a:rPr>
-              <a:t>1.65</a:t>
-            </a:r>
-          </a:p>
-        </p:txBody>
-      </p:sp>
-      <p:sp>
-        <p:nvSpPr>
-          <p:cNvPr id="42" name="TextBox 41"/>
-          <p:cNvSpPr txBox="1"/>
-          <p:nvPr/>
-        </p:nvSpPr>
-        <p:spPr>
-          <a:xfrm>
-            <a:off x="8733993" y="3374136"/>
-            <a:ext cx="1500250" cy="434340"/>
-          </a:xfrm>
-          <a:prstGeom prst="rect">
-            <a:avLst/>
-          </a:prstGeom>
-          <a:noFill/>
-        </p:spPr>
-        <p:txBody>
-          <a:bodyPr wrap="square" anchor="ctr" lIns="36000" rIns="36000" tIns="18000" bIns="18000">
-            <a:spAutoFit/>
-          </a:bodyPr>
-          <a:lstStyle/>
-          <a:p>
-            <a:pPr algn="l"/>
-            <a:r>
-              <a:rPr sz="1232" b="0" i="0">
-                <a:solidFill>
-                  <a:srgbClr val="334155"/>
-                </a:solidFill>
-                <a:latin typeface="Arial"/>
-              </a:rPr>
-              <a:t>0.122</a:t>
-            </a:r>
-          </a:p>
-        </p:txBody>
-      </p:sp>
-      <p:sp>
-        <p:nvSpPr>
-          <p:cNvPr id="43" name="TextBox 42"/>
-          <p:cNvSpPr txBox="1"/>
-          <p:nvPr/>
-        </p:nvSpPr>
-        <p:spPr>
-          <a:xfrm>
-            <a:off x="10325684" y="3374136"/>
-            <a:ext cx="1500250" cy="434340"/>
-          </a:xfrm>
-          <a:prstGeom prst="rect">
-            <a:avLst/>
-          </a:prstGeom>
-          <a:noFill/>
-        </p:spPr>
-        <p:txBody>
-          <a:bodyPr wrap="square" anchor="ctr" lIns="36000" rIns="36000" tIns="18000" bIns="18000">
-            <a:spAutoFit/>
-          </a:bodyPr>
-          <a:lstStyle/>
-          <a:p>
-            <a:pPr algn="l"/>
-            <a:r>
-              <a:rPr sz="1232" b="0" i="0">
-                <a:solidFill>
-                  <a:srgbClr val="5B8C5A"/>
-                </a:solidFill>
-                <a:latin typeface="Arial"/>
-              </a:rPr>
-              <a:t>&gt;0.99</a:t>
-            </a:r>
-          </a:p>
-        </p:txBody>
-      </p:sp>
-      <p:sp>
-        <p:nvSpPr>
-          <p:cNvPr id="44" name="Rectangle 43"/>
-          <p:cNvSpPr/>
-          <p:nvPr/>
-        </p:nvSpPr>
-        <p:spPr>
-          <a:xfrm>
-            <a:off x="365760" y="3808476"/>
-            <a:ext cx="11460175" cy="434340"/>
-          </a:xfrm>
-          <a:prstGeom prst="rect">
-            <a:avLst/>
-          </a:prstGeom>
-          <a:solidFill>
-            <a:srgbClr val="F8FAFC"/>
-          </a:solidFill>
-          <a:ln w="3810">
-            <a:solidFill>
-              <a:srgbClr val="E2E8F0"/>
-            </a:solidFill>
-          </a:ln>
-          <a:effectLst/>
-        </p:spPr>
-        <p:style>
-          <a:lnRef idx="1">
-            <a:schemeClr val="accent1"/>
-          </a:lnRef>
-          <a:fillRef idx="3">
-            <a:schemeClr val="accent1"/>
-          </a:fillRef>
-          <a:effectRef idx="2">
-            <a:schemeClr val="accent1"/>
-          </a:effectRef>
-          <a:fontRef idx="minor">
-            <a:schemeClr val="lt1"/>
-          </a:fontRef>
-        </p:style>
-        <p:txBody>
-          <a:bodyPr rtlCol="0" anchor="ctr"/>
-          <a:lstStyle/>
-          <a:p>
-            <a:pPr algn="ctr"/>
-          </a:p>
-        </p:txBody>
-      </p:sp>
-      <p:sp>
-        <p:nvSpPr>
-          <p:cNvPr id="45" name="TextBox 44"/>
-          <p:cNvSpPr txBox="1"/>
-          <p:nvPr/>
-        </p:nvSpPr>
-        <p:spPr>
-          <a:xfrm>
-            <a:off x="457200" y="3808476"/>
-            <a:ext cx="4365294" cy="434340"/>
-          </a:xfrm>
-          <a:prstGeom prst="rect">
-            <a:avLst/>
-          </a:prstGeom>
-          <a:noFill/>
-        </p:spPr>
-        <p:txBody>
-          <a:bodyPr wrap="square" anchor="ctr" lIns="36000" rIns="36000" tIns="18000" bIns="18000">
-            <a:spAutoFit/>
-          </a:bodyPr>
-          <a:lstStyle/>
-          <a:p>
-            <a:pPr algn="l"/>
-            <a:r>
-              <a:rPr sz="1232" b="1" i="0">
-                <a:solidFill>
-                  <a:srgbClr val="334155"/>
-                </a:solidFill>
-                <a:latin typeface="Arial"/>
-              </a:rPr>
-              <a:t>MHEC/CSP 1-5</a:t>
-            </a:r>
-          </a:p>
-        </p:txBody>
-      </p:sp>
-      <p:sp>
-        <p:nvSpPr>
-          <p:cNvPr id="46" name="TextBox 45"/>
-          <p:cNvSpPr txBox="1"/>
-          <p:nvPr/>
-        </p:nvSpPr>
-        <p:spPr>
-          <a:xfrm>
-            <a:off x="4913934" y="3808476"/>
-            <a:ext cx="1818589" cy="434340"/>
-          </a:xfrm>
-          <a:prstGeom prst="rect">
-            <a:avLst/>
-          </a:prstGeom>
-          <a:noFill/>
-        </p:spPr>
-        <p:txBody>
-          <a:bodyPr wrap="square" anchor="ctr" lIns="36000" rIns="36000" tIns="18000" bIns="18000">
-            <a:spAutoFit/>
-          </a:bodyPr>
-          <a:lstStyle/>
-          <a:p>
-            <a:pPr algn="l"/>
-            <a:r>
-              <a:rPr sz="1232" b="1" i="0">
-                <a:solidFill>
-                  <a:srgbClr val="334155"/>
-                </a:solidFill>
-                <a:latin typeface="Arial"/>
-              </a:rPr>
-              <a:t>0.41</a:t>
-            </a:r>
-          </a:p>
-        </p:txBody>
-      </p:sp>
-      <p:sp>
-        <p:nvSpPr>
-          <p:cNvPr id="47" name="TextBox 46"/>
-          <p:cNvSpPr txBox="1"/>
-          <p:nvPr/>
-        </p:nvSpPr>
-        <p:spPr>
-          <a:xfrm>
-            <a:off x="6823963" y="3808476"/>
-            <a:ext cx="1818589" cy="434340"/>
-          </a:xfrm>
-          <a:prstGeom prst="rect">
-            <a:avLst/>
-          </a:prstGeom>
-          <a:noFill/>
-        </p:spPr>
-        <p:txBody>
-          <a:bodyPr wrap="square" anchor="ctr" lIns="36000" rIns="36000" tIns="18000" bIns="18000">
-            <a:spAutoFit/>
-          </a:bodyPr>
-          <a:lstStyle/>
-          <a:p>
-            <a:pPr algn="l"/>
-            <a:r>
-              <a:rPr sz="1232" b="1" i="0">
-                <a:solidFill>
-                  <a:srgbClr val="334155"/>
-                </a:solidFill>
-                <a:latin typeface="Arial"/>
-              </a:rPr>
-              <a:t>1.43</a:t>
-            </a:r>
-          </a:p>
-        </p:txBody>
-      </p:sp>
-      <p:sp>
-        <p:nvSpPr>
-          <p:cNvPr id="48" name="TextBox 47"/>
-          <p:cNvSpPr txBox="1"/>
-          <p:nvPr/>
-        </p:nvSpPr>
-        <p:spPr>
-          <a:xfrm>
-            <a:off x="8733993" y="3808476"/>
-            <a:ext cx="1500250" cy="434340"/>
-          </a:xfrm>
-          <a:prstGeom prst="rect">
-            <a:avLst/>
-          </a:prstGeom>
-          <a:noFill/>
-        </p:spPr>
-        <p:txBody>
-          <a:bodyPr wrap="square" anchor="ctr" lIns="36000" rIns="36000" tIns="18000" bIns="18000">
-            <a:spAutoFit/>
-          </a:bodyPr>
-          <a:lstStyle/>
-          <a:p>
-            <a:pPr algn="l"/>
-            <a:r>
-              <a:rPr sz="1232" b="1" i="0">
-                <a:solidFill>
-                  <a:srgbClr val="B08442"/>
-                </a:solidFill>
-                <a:latin typeface="Arial"/>
-              </a:rPr>
-              <a:t>0.188</a:t>
-            </a:r>
-          </a:p>
-        </p:txBody>
-      </p:sp>
-      <p:sp>
-        <p:nvSpPr>
-          <p:cNvPr id="49" name="TextBox 48"/>
-          <p:cNvSpPr txBox="1"/>
-          <p:nvPr/>
-        </p:nvSpPr>
-        <p:spPr>
-          <a:xfrm>
-            <a:off x="10325684" y="3808476"/>
-            <a:ext cx="1500250" cy="434340"/>
-          </a:xfrm>
-          <a:prstGeom prst="rect">
-            <a:avLst/>
-          </a:prstGeom>
-          <a:noFill/>
-        </p:spPr>
-        <p:txBody>
-          <a:bodyPr wrap="square" anchor="ctr" lIns="36000" rIns="36000" tIns="18000" bIns="18000">
-            <a:spAutoFit/>
-          </a:bodyPr>
-          <a:lstStyle/>
-          <a:p>
-            <a:pPr algn="l"/>
-            <a:r>
-              <a:rPr sz="1232" b="0" i="0">
-                <a:solidFill>
-                  <a:srgbClr val="5B8C5A"/>
-                </a:solidFill>
-                <a:latin typeface="Arial"/>
-              </a:rPr>
-              <a:t>&gt;0.99</a:t>
-            </a:r>
-          </a:p>
-        </p:txBody>
-      </p:sp>
-      <p:sp>
-        <p:nvSpPr>
-          <p:cNvPr id="50" name="Rounded Rectangle 49"/>
-          <p:cNvSpPr/>
-          <p:nvPr/>
-        </p:nvSpPr>
-        <p:spPr>
-          <a:xfrm>
-            <a:off x="365760" y="4517136"/>
+            <a:off x="365760" y="3922776"/>
             <a:ext cx="3728618" cy="1691640"/>
           </a:xfrm>
           <a:prstGeom prst="roundRect">
@@ -17465,13 +16883,13 @@
       </p:sp>
       <p:sp>
         <p:nvSpPr>
-          <p:cNvPr id="51" name="TextBox 50"/>
-          <p:cNvSpPr txBox="1"/>
-          <p:nvPr/>
-        </p:nvSpPr>
-        <p:spPr>
-          <a:xfrm>
-            <a:off x="530352" y="4663440"/>
+          <p:cNvPr id="35" name="TextBox 34"/>
+          <p:cNvSpPr txBox="1"/>
+          <p:nvPr/>
+        </p:nvSpPr>
+        <p:spPr>
+          <a:xfrm>
+            <a:off x="530352" y="4069080"/>
             <a:ext cx="3399434" cy="320040"/>
           </a:xfrm>
           <a:prstGeom prst="rect">
@@ -17493,20 +16911,20 @@
                 </a:solidFill>
                 <a:latin typeface="Arial"/>
               </a:rPr>
-              <a:t>Yield Stress τ₀</a:t>
-            </a:r>
-          </a:p>
-        </p:txBody>
-      </p:sp>
-      <p:sp>
-        <p:nvSpPr>
-          <p:cNvPr id="52" name="TextBox 51"/>
-          <p:cNvSpPr txBox="1"/>
-          <p:nvPr/>
-        </p:nvSpPr>
-        <p:spPr>
-          <a:xfrm>
-            <a:off x="530352" y="5029200"/>
+              <a:t>Static Yield Stress</a:t>
+            </a:r>
+          </a:p>
+        </p:txBody>
+      </p:sp>
+      <p:sp>
+        <p:nvSpPr>
+          <p:cNvPr id="36" name="TextBox 35"/>
+          <p:cNvSpPr txBox="1"/>
+          <p:nvPr/>
+        </p:nvSpPr>
+        <p:spPr>
+          <a:xfrm>
+            <a:off x="530352" y="4434840"/>
             <a:ext cx="3399434" cy="1051560"/>
           </a:xfrm>
           <a:prstGeom prst="rect">
@@ -17528,20 +16946,20 @@
                 </a:solidFill>
                 <a:latin typeface="Arial"/>
               </a:rPr>
-              <a:t>Flow start requires minimum stress. WEG is ~2× AquaGel-K → higher resistance to sagging on vertical surfaces</a:t>
-            </a:r>
-          </a:p>
-        </p:txBody>
-      </p:sp>
-      <p:sp>
-        <p:nvSpPr>
-          <p:cNvPr id="53" name="Rounded Rectangle 52"/>
+              <a:t>Measured at G'/G'' crossover from amplitude sweep. HEC+MC/CSP: 33.34 Pa; MHEC/CSP: 3.31 Pa (fresh)</a:t>
+            </a:r>
+          </a:p>
+        </p:txBody>
+      </p:sp>
+      <p:sp>
+        <p:nvSpPr>
+          <p:cNvPr id="37" name="Rounded Rectangle 36"/>
           <p:cNvSpPr/>
           <p:nvPr/>
         </p:nvSpPr>
         <p:spPr>
           <a:xfrm>
-            <a:off x="4231538" y="4517136"/>
+            <a:off x="4231538" y="3922776"/>
             <a:ext cx="3728618" cy="1691640"/>
           </a:xfrm>
           <a:prstGeom prst="roundRect">
@@ -17583,13 +17001,13 @@
       </p:sp>
       <p:sp>
         <p:nvSpPr>
-          <p:cNvPr id="54" name="TextBox 53"/>
-          <p:cNvSpPr txBox="1"/>
-          <p:nvPr/>
-        </p:nvSpPr>
-        <p:spPr>
-          <a:xfrm>
-            <a:off x="4396130" y="4663440"/>
+          <p:cNvPr id="38" name="TextBox 37"/>
+          <p:cNvSpPr txBox="1"/>
+          <p:nvPr/>
+        </p:nvSpPr>
+        <p:spPr>
+          <a:xfrm>
+            <a:off x="4396130" y="4069080"/>
             <a:ext cx="3399434" cy="320040"/>
           </a:xfrm>
           <a:prstGeom prst="rect">
@@ -17611,20 +17029,20 @@
                 </a:solidFill>
                 <a:latin typeface="Arial"/>
               </a:rPr>
-              <a:t>Flow Index n (&lt;&lt; 1)</a:t>
-            </a:r>
-          </a:p>
-        </p:txBody>
-      </p:sp>
-      <p:sp>
-        <p:nvSpPr>
-          <p:cNvPr id="55" name="TextBox 54"/>
-          <p:cNvSpPr txBox="1"/>
-          <p:nvPr/>
-        </p:nvSpPr>
-        <p:spPr>
-          <a:xfrm>
-            <a:off x="4396130" y="5029200"/>
+              <a:t>Long-term Stability</a:t>
+            </a:r>
+          </a:p>
+        </p:txBody>
+      </p:sp>
+      <p:sp>
+        <p:nvSpPr>
+          <p:cNvPr id="39" name="TextBox 38"/>
+          <p:cNvSpPr txBox="1"/>
+          <p:nvPr/>
+        </p:nvSpPr>
+        <p:spPr>
+          <a:xfrm>
+            <a:off x="4396130" y="4434840"/>
             <a:ext cx="3399434" cy="1051560"/>
           </a:xfrm>
           <a:prstGeom prst="rect">
@@ -17646,20 +17064,20 @@
                 </a:solidFill>
                 <a:latin typeface="Arial"/>
               </a:rPr>
-              <a:t>n=0.108 for HEC+MC/CSP shows strong shear thinning. Balances low viscosity during spraying and high viscosity at rest</a:t>
-            </a:r>
-          </a:p>
-        </p:txBody>
-      </p:sp>
-      <p:sp>
-        <p:nvSpPr>
-          <p:cNvPr id="56" name="Rounded Rectangle 55"/>
+              <a:t>MHEC/CSP shows only minor change after 455 days (3.31→4.56 Pa). Demonstrates shelf stability for practical use</a:t>
+            </a:r>
+          </a:p>
+        </p:txBody>
+      </p:sp>
+      <p:sp>
+        <p:nvSpPr>
+          <p:cNvPr id="40" name="Rounded Rectangle 39"/>
           <p:cNvSpPr/>
           <p:nvPr/>
         </p:nvSpPr>
         <p:spPr>
           <a:xfrm>
-            <a:off x="8097316" y="4517136"/>
+            <a:off x="8097316" y="3922776"/>
             <a:ext cx="3728618" cy="1691640"/>
           </a:xfrm>
           <a:prstGeom prst="roundRect">
@@ -17701,13 +17119,13 @@
       </p:sp>
       <p:sp>
         <p:nvSpPr>
-          <p:cNvPr id="57" name="TextBox 56"/>
-          <p:cNvSpPr txBox="1"/>
-          <p:nvPr/>
-        </p:nvSpPr>
-        <p:spPr>
-          <a:xfrm>
-            <a:off x="8261908" y="4663440"/>
+          <p:cNvPr id="41" name="TextBox 40"/>
+          <p:cNvSpPr txBox="1"/>
+          <p:nvPr/>
+        </p:nvSpPr>
+        <p:spPr>
+          <a:xfrm>
+            <a:off x="8261908" y="4069080"/>
             <a:ext cx="3399434" cy="320040"/>
           </a:xfrm>
           <a:prstGeom prst="rect">
@@ -17736,13 +17154,13 @@
       </p:sp>
       <p:sp>
         <p:nvSpPr>
-          <p:cNvPr id="58" name="TextBox 57"/>
-          <p:cNvSpPr txBox="1"/>
-          <p:nvPr/>
-        </p:nvSpPr>
-        <p:spPr>
-          <a:xfrm>
-            <a:off x="8261908" y="5029200"/>
+          <p:cNvPr id="42" name="TextBox 41"/>
+          <p:cNvSpPr txBox="1"/>
+          <p:nvPr/>
+        </p:nvSpPr>
+        <p:spPr>
+          <a:xfrm>
+            <a:off x="8261908" y="4434840"/>
             <a:ext cx="3399434" cy="1051560"/>
           </a:xfrm>
           <a:prstGeom prst="rect">
@@ -17764,7 +17182,7 @@
                 </a:solidFill>
                 <a:latin typeface="Arial"/>
               </a:rPr>
-              <a:t>HEC+MC system shows lower n and higher K → stronger shear thinning. MHEC system achieves similar function with single polymer</a:t>
+              <a:t>HEC+MC system shows ~10× higher yield stress, better for vertical surface adhesion. MHEC simpler to manufacture</a:t>
             </a:r>
           </a:p>
         </p:txBody>
@@ -18028,7 +17446,7 @@
                 </a:solidFill>
                 <a:latin typeface="Arial"/>
               </a:rPr>
-              <a:t>Rheology ④: Dynamic Yield Stress and Viscoelasticity (tan δ)</a:t>
+              <a:t>Rheology ④: Storage Modulus G' and Viscoelasticity (tan δ)</a:t>
             </a:r>
           </a:p>
         </p:txBody>
@@ -18142,7 +17560,7 @@
                 </a:solidFill>
                 <a:latin typeface="Arial"/>
               </a:rPr>
-              <a:t>Dynamic yield stress (from Amplitude Sweep)</a:t>
+              <a:t>G' Storage Modulus (1 rad/s)</a:t>
             </a:r>
           </a:p>
         </p:txBody>
@@ -18177,7 +17595,7 @@
                 </a:solidFill>
                 <a:latin typeface="Arial"/>
               </a:rPr>
-              <a:t>AquaGel-K</a:t>
+              <a:t>MHEC/CSP 1-5</a:t>
             </a:r>
           </a:p>
         </p:txBody>
@@ -18239,7 +17657,7 @@
         <p:spPr>
           <a:xfrm>
             <a:off x="2286000" y="1344168"/>
-            <a:ext cx="746717" cy="146304"/>
+            <a:ext cx="346690" cy="146304"/>
           </a:xfrm>
           <a:prstGeom prst="roundRect">
             <a:avLst>
@@ -18247,7 +17665,7 @@
             </a:avLst>
           </a:prstGeom>
           <a:solidFill>
-            <a:srgbClr val="AAB4C0"/>
+            <a:srgbClr val="9F7639"/>
           </a:solidFill>
           <a:ln>
             <a:noFill/>
@@ -18306,7 +17724,7 @@
                 </a:solidFill>
                 <a:latin typeface="Arial"/>
               </a:rPr>
-              <a:t>~0.4 Pa</a:t>
+              <a:t>25.6 Pa</a:t>
             </a:r>
           </a:p>
         </p:txBody>
@@ -18403,7 +17821,7 @@
         <p:spPr>
           <a:xfrm>
             <a:off x="2286000" y="1801368"/>
-            <a:ext cx="2266820" cy="146304"/>
+            <a:ext cx="666711" cy="146304"/>
           </a:xfrm>
           <a:prstGeom prst="roundRect">
             <a:avLst>
@@ -18470,7 +17888,7 @@
                 </a:solidFill>
                 <a:latin typeface="Arial"/>
               </a:rPr>
-              <a:t>~1.2 Pa</a:t>
+              <a:t>46.4 Pa</a:t>
             </a:r>
           </a:p>
         </p:txBody>
@@ -18505,7 +17923,7 @@
                 </a:solidFill>
                 <a:latin typeface="Arial"/>
               </a:rPr>
-              <a:t>+SDS 0.1 wt%</a:t>
+              <a:t>AquaGel-K</a:t>
             </a:r>
           </a:p>
         </p:txBody>
@@ -18567,7 +17985,7 @@
         <p:spPr>
           <a:xfrm>
             <a:off x="2286000" y="2258568"/>
-            <a:ext cx="2080141" cy="146304"/>
+            <a:ext cx="2533505" cy="146304"/>
           </a:xfrm>
           <a:prstGeom prst="roundRect">
             <a:avLst>
@@ -18575,7 +17993,7 @@
             </a:avLst>
           </a:prstGeom>
           <a:solidFill>
-            <a:srgbClr val="5B7A99"/>
+            <a:srgbClr val="AAB4C0"/>
           </a:solidFill>
           <a:ln>
             <a:noFill/>
@@ -18634,20 +18052,215 @@
                 </a:solidFill>
                 <a:latin typeface="Arial"/>
               </a:rPr>
-              <a:t>~1.1 Pa</a:t>
-            </a:r>
-          </a:p>
-        </p:txBody>
-      </p:sp>
-      <p:sp>
-        <p:nvSpPr>
-          <p:cNvPr id="23" name="TextBox 22"/>
-          <p:cNvSpPr txBox="1"/>
-          <p:nvPr/>
-        </p:nvSpPr>
-        <p:spPr>
-          <a:xfrm>
-            <a:off x="365760" y="2642616"/>
+              <a:t>456.8 Pa</a:t>
+            </a:r>
+          </a:p>
+        </p:txBody>
+      </p:sp>
+      <p:sp>
+        <p:nvSpPr>
+          <p:cNvPr id="23" name="Rounded Rectangle 22"/>
+          <p:cNvSpPr/>
+          <p:nvPr/>
+        </p:nvSpPr>
+        <p:spPr>
+          <a:xfrm>
+            <a:off x="365760" y="2779776"/>
+            <a:ext cx="5592927" cy="731520"/>
+          </a:xfrm>
+          <a:prstGeom prst="roundRect">
+            <a:avLst>
+              <a:gd name="adj" fmla="val 4000"/>
+            </a:avLst>
+          </a:prstGeom>
+          <a:solidFill>
+            <a:srgbClr val="F8FAFC"/>
+          </a:solidFill>
+          <a:ln>
+            <a:noFill/>
+          </a:ln>
+          <a:effectLst/>
+        </p:spPr>
+        <p:style>
+          <a:lnRef idx="1">
+            <a:schemeClr val="accent1"/>
+          </a:lnRef>
+          <a:fillRef idx="3">
+            <a:schemeClr val="accent1"/>
+          </a:fillRef>
+          <a:effectRef idx="2">
+            <a:schemeClr val="accent1"/>
+          </a:effectRef>
+          <a:fontRef idx="minor">
+            <a:schemeClr val="lt1"/>
+          </a:fontRef>
+        </p:style>
+        <p:txBody>
+          <a:bodyPr rtlCol="0" anchor="ctr"/>
+          <a:lstStyle/>
+          <a:p>
+            <a:pPr algn="ctr"/>
+          </a:p>
+        </p:txBody>
+      </p:sp>
+      <p:sp>
+        <p:nvSpPr>
+          <p:cNvPr id="24" name="Rectangle 23"/>
+          <p:cNvSpPr/>
+          <p:nvPr/>
+        </p:nvSpPr>
+        <p:spPr>
+          <a:xfrm>
+            <a:off x="365760" y="2779776"/>
+            <a:ext cx="54864" cy="731520"/>
+          </a:xfrm>
+          <a:prstGeom prst="rect">
+            <a:avLst/>
+          </a:prstGeom>
+          <a:solidFill>
+            <a:srgbClr val="3B5174"/>
+          </a:solidFill>
+          <a:ln>
+            <a:noFill/>
+          </a:ln>
+          <a:effectLst/>
+        </p:spPr>
+        <p:style>
+          <a:lnRef idx="1">
+            <a:schemeClr val="accent1"/>
+          </a:lnRef>
+          <a:fillRef idx="3">
+            <a:schemeClr val="accent1"/>
+          </a:fillRef>
+          <a:effectRef idx="2">
+            <a:schemeClr val="accent1"/>
+          </a:effectRef>
+          <a:fontRef idx="minor">
+            <a:schemeClr val="lt1"/>
+          </a:fontRef>
+        </p:style>
+        <p:txBody>
+          <a:bodyPr rtlCol="0" anchor="ctr"/>
+          <a:lstStyle/>
+          <a:p>
+            <a:pPr algn="ctr"/>
+          </a:p>
+        </p:txBody>
+      </p:sp>
+      <p:sp>
+        <p:nvSpPr>
+          <p:cNvPr id="25" name="TextBox 24"/>
+          <p:cNvSpPr txBox="1"/>
+          <p:nvPr/>
+        </p:nvSpPr>
+        <p:spPr>
+          <a:xfrm>
+            <a:off x="548640" y="2779776"/>
+            <a:ext cx="365760" cy="731520"/>
+          </a:xfrm>
+          <a:prstGeom prst="rect">
+            <a:avLst/>
+          </a:prstGeom>
+          <a:noFill/>
+        </p:spPr>
+        <p:txBody>
+          <a:bodyPr wrap="square" anchor="ctr" lIns="36000" rIns="36000" tIns="18000" bIns="18000">
+            <a:spAutoFit/>
+          </a:bodyPr>
+          <a:lstStyle/>
+          <a:p>
+            <a:pPr algn="l"/>
+            <a:r>
+              <a:rPr sz="1568" b="0" i="0">
+                <a:solidFill>
+                  <a:srgbClr val="3B5174"/>
+                </a:solidFill>
+                <a:latin typeface="Arial"/>
+              </a:rPr>
+              <a:t>ⓘ</a:t>
+            </a:r>
+          </a:p>
+        </p:txBody>
+      </p:sp>
+      <p:sp>
+        <p:nvSpPr>
+          <p:cNvPr id="26" name="TextBox 25"/>
+          <p:cNvSpPr txBox="1"/>
+          <p:nvPr/>
+        </p:nvSpPr>
+        <p:spPr>
+          <a:xfrm>
+            <a:off x="960120" y="2779776"/>
+            <a:ext cx="4907127" cy="731520"/>
+          </a:xfrm>
+          <a:prstGeom prst="rect">
+            <a:avLst/>
+          </a:prstGeom>
+          <a:noFill/>
+        </p:spPr>
+        <p:txBody>
+          <a:bodyPr wrap="square" anchor="ctr" lIns="36000" rIns="36000" tIns="18000" bIns="18000">
+            <a:spAutoFit/>
+          </a:bodyPr>
+          <a:lstStyle/>
+          <a:p>
+            <a:pPr algn="l"/>
+            <a:r>
+              <a:rPr sz="1456" b="1" i="0">
+                <a:solidFill>
+                  <a:srgbClr val="1E293B"/>
+                </a:solidFill>
+                <a:latin typeface="Arial"/>
+              </a:rPr>
+              <a:t>All formulations show G'&gt;G'' (gel behavior). AquaGel-K has the highest G' but also larger tan δ (more fluid-like)</a:t>
+            </a:r>
+          </a:p>
+        </p:txBody>
+      </p:sp>
+      <p:sp>
+        <p:nvSpPr>
+          <p:cNvPr id="27" name="TextBox 26"/>
+          <p:cNvSpPr txBox="1"/>
+          <p:nvPr/>
+        </p:nvSpPr>
+        <p:spPr>
+          <a:xfrm>
+            <a:off x="6233007" y="859536"/>
+            <a:ext cx="5592927" cy="274320"/>
+          </a:xfrm>
+          <a:prstGeom prst="rect">
+            <a:avLst/>
+          </a:prstGeom>
+          <a:noFill/>
+        </p:spPr>
+        <p:txBody>
+          <a:bodyPr wrap="square" anchor="t" lIns="36000" rIns="36000" tIns="18000" bIns="18000">
+            <a:spAutoFit/>
+          </a:bodyPr>
+          <a:lstStyle/>
+          <a:p>
+            <a:pPr algn="l"/>
+            <a:r>
+              <a:rPr sz="1344" b="1" i="0">
+                <a:solidFill>
+                  <a:srgbClr val="64748B"/>
+                </a:solidFill>
+                <a:latin typeface="Arial"/>
+              </a:rPr>
+              <a:t>Loss tangent tan δ = G''/G' (elastic-dominated = &lt;1)</a:t>
+            </a:r>
+          </a:p>
+        </p:txBody>
+      </p:sp>
+      <p:sp>
+        <p:nvSpPr>
+          <p:cNvPr id="28" name="TextBox 27"/>
+          <p:cNvSpPr txBox="1"/>
+          <p:nvPr/>
+        </p:nvSpPr>
+        <p:spPr>
+          <a:xfrm>
+            <a:off x="6233007" y="1271016"/>
             <a:ext cx="1828800" cy="274320"/>
           </a:xfrm>
           <a:prstGeom prst="rect">
@@ -18669,20 +18282,20 @@
                 </a:solidFill>
                 <a:latin typeface="Arial"/>
               </a:rPr>
-              <a:t>MHEC/CSP 1-5</a:t>
-            </a:r>
-          </a:p>
-        </p:txBody>
-      </p:sp>
-      <p:sp>
-        <p:nvSpPr>
-          <p:cNvPr id="24" name="Rounded Rectangle 23"/>
+              <a:t>AquaGel-K</a:t>
+            </a:r>
+          </a:p>
+        </p:txBody>
+      </p:sp>
+      <p:sp>
+        <p:nvSpPr>
+          <p:cNvPr id="29" name="Rounded Rectangle 28"/>
           <p:cNvSpPr/>
           <p:nvPr/>
         </p:nvSpPr>
         <p:spPr>
           <a:xfrm>
-            <a:off x="2286000" y="2715768"/>
+            <a:off x="8153247" y="1344168"/>
             <a:ext cx="2666847" cy="146304"/>
           </a:xfrm>
           <a:prstGeom prst="roundRect">
@@ -18724,14 +18337,14 @@
       </p:sp>
       <p:sp>
         <p:nvSpPr>
-          <p:cNvPr id="25" name="Rounded Rectangle 24"/>
+          <p:cNvPr id="30" name="Rounded Rectangle 29"/>
           <p:cNvSpPr/>
           <p:nvPr/>
         </p:nvSpPr>
         <p:spPr>
           <a:xfrm>
-            <a:off x="2286000" y="2715768"/>
-            <a:ext cx="1733450" cy="146304"/>
+            <a:off x="8153247" y="1344168"/>
+            <a:ext cx="1120075" cy="146304"/>
           </a:xfrm>
           <a:prstGeom prst="roundRect">
             <a:avLst>
@@ -18739,7 +18352,7 @@
             </a:avLst>
           </a:prstGeom>
           <a:solidFill>
-            <a:srgbClr val="9F7639"/>
+            <a:srgbClr val="AAB4C0"/>
           </a:solidFill>
           <a:ln>
             <a:noFill/>
@@ -18770,13 +18383,13 @@
       </p:sp>
       <p:sp>
         <p:nvSpPr>
-          <p:cNvPr id="26" name="TextBox 25"/>
-          <p:cNvSpPr txBox="1"/>
-          <p:nvPr/>
-        </p:nvSpPr>
-        <p:spPr>
-          <a:xfrm>
-            <a:off x="5044287" y="2642616"/>
+          <p:cNvPr id="31" name="TextBox 30"/>
+          <p:cNvSpPr txBox="1"/>
+          <p:nvPr/>
+        </p:nvSpPr>
+        <p:spPr>
+          <a:xfrm>
+            <a:off x="10911535" y="1271016"/>
             <a:ext cx="914400" cy="274320"/>
           </a:xfrm>
           <a:prstGeom prst="rect">
@@ -18798,111 +18411,21 @@
                 </a:solidFill>
                 <a:latin typeface="Arial"/>
               </a:rPr>
-              <a:t>~0.9 Pa</a:t>
-            </a:r>
-          </a:p>
-        </p:txBody>
-      </p:sp>
-      <p:sp>
-        <p:nvSpPr>
-          <p:cNvPr id="27" name="Rounded Rectangle 26"/>
-          <p:cNvSpPr/>
-          <p:nvPr/>
-        </p:nvSpPr>
-        <p:spPr>
-          <a:xfrm>
-            <a:off x="365760" y="3236976"/>
-            <a:ext cx="5592927" cy="731520"/>
-          </a:xfrm>
-          <a:prstGeom prst="roundRect">
-            <a:avLst>
-              <a:gd name="adj" fmla="val 4000"/>
-            </a:avLst>
-          </a:prstGeom>
-          <a:solidFill>
-            <a:srgbClr val="F8FAFC"/>
-          </a:solidFill>
-          <a:ln>
-            <a:noFill/>
-          </a:ln>
-          <a:effectLst/>
-        </p:spPr>
-        <p:style>
-          <a:lnRef idx="1">
-            <a:schemeClr val="accent1"/>
-          </a:lnRef>
-          <a:fillRef idx="3">
-            <a:schemeClr val="accent1"/>
-          </a:fillRef>
-          <a:effectRef idx="2">
-            <a:schemeClr val="accent1"/>
-          </a:effectRef>
-          <a:fontRef idx="minor">
-            <a:schemeClr val="lt1"/>
-          </a:fontRef>
-        </p:style>
-        <p:txBody>
-          <a:bodyPr rtlCol="0" anchor="ctr"/>
-          <a:lstStyle/>
-          <a:p>
-            <a:pPr algn="ctr"/>
-          </a:p>
-        </p:txBody>
-      </p:sp>
-      <p:sp>
-        <p:nvSpPr>
-          <p:cNvPr id="28" name="Rectangle 27"/>
-          <p:cNvSpPr/>
-          <p:nvPr/>
-        </p:nvSpPr>
-        <p:spPr>
-          <a:xfrm>
-            <a:off x="365760" y="3236976"/>
-            <a:ext cx="54864" cy="731520"/>
-          </a:xfrm>
-          <a:prstGeom prst="rect">
-            <a:avLst/>
-          </a:prstGeom>
-          <a:solidFill>
-            <a:srgbClr val="3B5174"/>
-          </a:solidFill>
-          <a:ln>
-            <a:noFill/>
-          </a:ln>
-          <a:effectLst/>
-        </p:spPr>
-        <p:style>
-          <a:lnRef idx="1">
-            <a:schemeClr val="accent1"/>
-          </a:lnRef>
-          <a:fillRef idx="3">
-            <a:schemeClr val="accent1"/>
-          </a:fillRef>
-          <a:effectRef idx="2">
-            <a:schemeClr val="accent1"/>
-          </a:effectRef>
-          <a:fontRef idx="minor">
-            <a:schemeClr val="lt1"/>
-          </a:fontRef>
-        </p:style>
-        <p:txBody>
-          <a:bodyPr rtlCol="0" anchor="ctr"/>
-          <a:lstStyle/>
-          <a:p>
-            <a:pPr algn="ctr"/>
-          </a:p>
-        </p:txBody>
-      </p:sp>
-      <p:sp>
-        <p:nvSpPr>
-          <p:cNvPr id="29" name="TextBox 28"/>
-          <p:cNvSpPr txBox="1"/>
-          <p:nvPr/>
-        </p:nvSpPr>
-        <p:spPr>
-          <a:xfrm>
-            <a:off x="548640" y="3236976"/>
-            <a:ext cx="365760" cy="731520"/>
+              <a:t>0.168</a:t>
+            </a:r>
+          </a:p>
+        </p:txBody>
+      </p:sp>
+      <p:sp>
+        <p:nvSpPr>
+          <p:cNvPr id="32" name="TextBox 31"/>
+          <p:cNvSpPr txBox="1"/>
+          <p:nvPr/>
+        </p:nvSpPr>
+        <p:spPr>
+          <a:xfrm>
+            <a:off x="6233007" y="1728216"/>
+            <a:ext cx="1828800" cy="274320"/>
           </a:xfrm>
           <a:prstGeom prst="rect">
             <a:avLst/>
@@ -18917,118 +18440,13 @@
           <a:p>
             <a:pPr algn="l"/>
             <a:r>
-              <a:rPr sz="1568" b="0" i="0">
-                <a:solidFill>
-                  <a:srgbClr val="3B5174"/>
-                </a:solidFill>
-                <a:latin typeface="Arial"/>
-              </a:rPr>
-              <a:t>ⓘ</a:t>
-            </a:r>
-          </a:p>
-        </p:txBody>
-      </p:sp>
-      <p:sp>
-        <p:nvSpPr>
-          <p:cNvPr id="30" name="TextBox 29"/>
-          <p:cNvSpPr txBox="1"/>
-          <p:nvPr/>
-        </p:nvSpPr>
-        <p:spPr>
-          <a:xfrm>
-            <a:off x="960120" y="3236976"/>
-            <a:ext cx="4907127" cy="731520"/>
-          </a:xfrm>
-          <a:prstGeom prst="rect">
-            <a:avLst/>
-          </a:prstGeom>
-          <a:noFill/>
-        </p:spPr>
-        <p:txBody>
-          <a:bodyPr wrap="square" anchor="ctr" lIns="36000" rIns="36000" tIns="18000" bIns="18000">
-            <a:spAutoFit/>
-          </a:bodyPr>
-          <a:lstStyle/>
-          <a:p>
-            <a:pPr algn="l"/>
-            <a:r>
-              <a:rPr sz="1456" b="1" i="0">
-                <a:solidFill>
-                  <a:srgbClr val="1E293B"/>
-                </a:solidFill>
-                <a:latin typeface="Arial"/>
-              </a:rPr>
-              <a:t>Stress at G' = G'' crossover = dynamic yield stress. WEG is ~3× AquaGel-K</a:t>
-            </a:r>
-          </a:p>
-        </p:txBody>
-      </p:sp>
-      <p:sp>
-        <p:nvSpPr>
-          <p:cNvPr id="31" name="TextBox 30"/>
-          <p:cNvSpPr txBox="1"/>
-          <p:nvPr/>
-        </p:nvSpPr>
-        <p:spPr>
-          <a:xfrm>
-            <a:off x="6233007" y="859536"/>
-            <a:ext cx="5592927" cy="274320"/>
-          </a:xfrm>
-          <a:prstGeom prst="rect">
-            <a:avLst/>
-          </a:prstGeom>
-          <a:noFill/>
-        </p:spPr>
-        <p:txBody>
-          <a:bodyPr wrap="square" anchor="t" lIns="36000" rIns="36000" tIns="18000" bIns="18000">
-            <a:spAutoFit/>
-          </a:bodyPr>
-          <a:lstStyle/>
-          <a:p>
-            <a:pPr algn="l"/>
-            <a:r>
-              <a:rPr sz="1344" b="1" i="0">
-                <a:solidFill>
-                  <a:srgbClr val="64748B"/>
-                </a:solidFill>
-                <a:latin typeface="Arial"/>
-              </a:rPr>
-              <a:t>Loss tangent tan δ = G''/G' (elastic-dominated = &lt;1)</a:t>
-            </a:r>
-          </a:p>
-        </p:txBody>
-      </p:sp>
-      <p:sp>
-        <p:nvSpPr>
-          <p:cNvPr id="32" name="TextBox 31"/>
-          <p:cNvSpPr txBox="1"/>
-          <p:nvPr/>
-        </p:nvSpPr>
-        <p:spPr>
-          <a:xfrm>
-            <a:off x="6233007" y="1271016"/>
-            <a:ext cx="1828800" cy="274320"/>
-          </a:xfrm>
-          <a:prstGeom prst="rect">
-            <a:avLst/>
-          </a:prstGeom>
-          <a:noFill/>
-        </p:spPr>
-        <p:txBody>
-          <a:bodyPr wrap="square" anchor="ctr" lIns="36000" rIns="36000" tIns="18000" bIns="18000">
-            <a:spAutoFit/>
-          </a:bodyPr>
-          <a:lstStyle/>
-          <a:p>
-            <a:pPr algn="l"/>
-            <a:r>
               <a:rPr sz="1344" b="0" i="0">
                 <a:solidFill>
                   <a:srgbClr val="334155"/>
                 </a:solidFill>
                 <a:latin typeface="Arial"/>
               </a:rPr>
-              <a:t>AquaGel-K</a:t>
+              <a:t>HEC+MC/CSP 1-5</a:t>
             </a:r>
           </a:p>
         </p:txBody>
@@ -19041,7 +18459,7 @@
         </p:nvSpPr>
         <p:spPr>
           <a:xfrm>
-            <a:off x="8153247" y="1344168"/>
+            <a:off x="8153247" y="1801368"/>
             <a:ext cx="2666847" cy="146304"/>
           </a:xfrm>
           <a:prstGeom prst="roundRect">
@@ -19089,8 +18507,8 @@
         </p:nvSpPr>
         <p:spPr>
           <a:xfrm>
-            <a:off x="8153247" y="1344168"/>
-            <a:ext cx="1333423" cy="146304"/>
+            <a:off x="8153247" y="1801368"/>
+            <a:ext cx="1466766" cy="146304"/>
           </a:xfrm>
           <a:prstGeom prst="roundRect">
             <a:avLst>
@@ -19098,7 +18516,7 @@
             </a:avLst>
           </a:prstGeom>
           <a:solidFill>
-            <a:srgbClr val="AAB4C0"/>
+            <a:srgbClr val="4A7C8C"/>
           </a:solidFill>
           <a:ln>
             <a:noFill/>
@@ -19135,7 +18553,7 @@
         </p:nvSpPr>
         <p:spPr>
           <a:xfrm>
-            <a:off x="10911535" y="1271016"/>
+            <a:off x="10911535" y="1728216"/>
             <a:ext cx="914400" cy="274320"/>
           </a:xfrm>
           <a:prstGeom prst="rect">
@@ -19157,7 +18575,7 @@
                 </a:solidFill>
                 <a:latin typeface="Arial"/>
               </a:rPr>
-              <a:t>~0.25</a:t>
+              <a:t>0.219</a:t>
             </a:r>
           </a:p>
         </p:txBody>
@@ -19170,7 +18588,7 @@
         </p:nvSpPr>
         <p:spPr>
           <a:xfrm>
-            <a:off x="6233007" y="1728216"/>
+            <a:off x="6233007" y="2185416"/>
             <a:ext cx="1828800" cy="274320"/>
           </a:xfrm>
           <a:prstGeom prst="rect">
@@ -19192,7 +18610,7 @@
                 </a:solidFill>
                 <a:latin typeface="Arial"/>
               </a:rPr>
-              <a:t>HEC+MC/CSP 1-5</a:t>
+              <a:t>MHEC/CSP 1-5</a:t>
             </a:r>
           </a:p>
         </p:txBody>
@@ -19205,7 +18623,7 @@
         </p:nvSpPr>
         <p:spPr>
           <a:xfrm>
-            <a:off x="8153247" y="1801368"/>
+            <a:off x="8153247" y="2258568"/>
             <a:ext cx="2666847" cy="146304"/>
           </a:xfrm>
           <a:prstGeom prst="roundRect">
@@ -19253,336 +18671,8 @@
         </p:nvSpPr>
         <p:spPr>
           <a:xfrm>
-            <a:off x="8153247" y="1801368"/>
-            <a:ext cx="533369" cy="146304"/>
-          </a:xfrm>
-          <a:prstGeom prst="roundRect">
-            <a:avLst>
-              <a:gd name="adj" fmla="val 50000"/>
-            </a:avLst>
-          </a:prstGeom>
-          <a:solidFill>
-            <a:srgbClr val="4A7C8C"/>
-          </a:solidFill>
-          <a:ln>
-            <a:noFill/>
-          </a:ln>
-          <a:effectLst/>
-        </p:spPr>
-        <p:style>
-          <a:lnRef idx="1">
-            <a:schemeClr val="accent1"/>
-          </a:lnRef>
-          <a:fillRef idx="3">
-            <a:schemeClr val="accent1"/>
-          </a:fillRef>
-          <a:effectRef idx="2">
-            <a:schemeClr val="accent1"/>
-          </a:effectRef>
-          <a:fontRef idx="minor">
-            <a:schemeClr val="lt1"/>
-          </a:fontRef>
-        </p:style>
-        <p:txBody>
-          <a:bodyPr rtlCol="0" anchor="ctr"/>
-          <a:lstStyle/>
-          <a:p>
-            <a:pPr algn="ctr"/>
-          </a:p>
-        </p:txBody>
-      </p:sp>
-      <p:sp>
-        <p:nvSpPr>
-          <p:cNvPr id="39" name="TextBox 38"/>
-          <p:cNvSpPr txBox="1"/>
-          <p:nvPr/>
-        </p:nvSpPr>
-        <p:spPr>
-          <a:xfrm>
-            <a:off x="10911535" y="1728216"/>
-            <a:ext cx="914400" cy="274320"/>
-          </a:xfrm>
-          <a:prstGeom prst="rect">
-            <a:avLst/>
-          </a:prstGeom>
-          <a:noFill/>
-        </p:spPr>
-        <p:txBody>
-          <a:bodyPr wrap="square" anchor="ctr" lIns="36000" rIns="36000" tIns="18000" bIns="18000">
-            <a:spAutoFit/>
-          </a:bodyPr>
-          <a:lstStyle/>
-          <a:p>
-            <a:pPr algn="l"/>
-            <a:r>
-              <a:rPr sz="1232" b="1" i="0">
-                <a:solidFill>
-                  <a:srgbClr val="475569"/>
-                </a:solidFill>
-                <a:latin typeface="Arial"/>
-              </a:rPr>
-              <a:t>~0.10</a:t>
-            </a:r>
-          </a:p>
-        </p:txBody>
-      </p:sp>
-      <p:sp>
-        <p:nvSpPr>
-          <p:cNvPr id="40" name="TextBox 39"/>
-          <p:cNvSpPr txBox="1"/>
-          <p:nvPr/>
-        </p:nvSpPr>
-        <p:spPr>
-          <a:xfrm>
-            <a:off x="6233007" y="2185416"/>
-            <a:ext cx="1828800" cy="274320"/>
-          </a:xfrm>
-          <a:prstGeom prst="rect">
-            <a:avLst/>
-          </a:prstGeom>
-          <a:noFill/>
-        </p:spPr>
-        <p:txBody>
-          <a:bodyPr wrap="square" anchor="ctr" lIns="36000" rIns="36000" tIns="18000" bIns="18000">
-            <a:spAutoFit/>
-          </a:bodyPr>
-          <a:lstStyle/>
-          <a:p>
-            <a:pPr algn="l"/>
-            <a:r>
-              <a:rPr sz="1344" b="0" i="0">
-                <a:solidFill>
-                  <a:srgbClr val="334155"/>
-                </a:solidFill>
-                <a:latin typeface="Arial"/>
-              </a:rPr>
-              <a:t>+SDS 0.1 wt%</a:t>
-            </a:r>
-          </a:p>
-        </p:txBody>
-      </p:sp>
-      <p:sp>
-        <p:nvSpPr>
-          <p:cNvPr id="41" name="Rounded Rectangle 40"/>
-          <p:cNvSpPr/>
-          <p:nvPr/>
-        </p:nvSpPr>
-        <p:spPr>
-          <a:xfrm>
             <a:off x="8153247" y="2258568"/>
             <a:ext cx="2666847" cy="146304"/>
-          </a:xfrm>
-          <a:prstGeom prst="roundRect">
-            <a:avLst>
-              <a:gd name="adj" fmla="val 50000"/>
-            </a:avLst>
-          </a:prstGeom>
-          <a:solidFill>
-            <a:srgbClr val="F1F5F9"/>
-          </a:solidFill>
-          <a:ln w="3810">
-            <a:solidFill>
-              <a:srgbClr val="E2E8F0"/>
-            </a:solidFill>
-          </a:ln>
-          <a:effectLst/>
-        </p:spPr>
-        <p:style>
-          <a:lnRef idx="1">
-            <a:schemeClr val="accent1"/>
-          </a:lnRef>
-          <a:fillRef idx="3">
-            <a:schemeClr val="accent1"/>
-          </a:fillRef>
-          <a:effectRef idx="2">
-            <a:schemeClr val="accent1"/>
-          </a:effectRef>
-          <a:fontRef idx="minor">
-            <a:schemeClr val="lt1"/>
-          </a:fontRef>
-        </p:style>
-        <p:txBody>
-          <a:bodyPr rtlCol="0" anchor="ctr"/>
-          <a:lstStyle/>
-          <a:p>
-            <a:pPr algn="ctr"/>
-          </a:p>
-        </p:txBody>
-      </p:sp>
-      <p:sp>
-        <p:nvSpPr>
-          <p:cNvPr id="42" name="Rounded Rectangle 41"/>
-          <p:cNvSpPr/>
-          <p:nvPr/>
-        </p:nvSpPr>
-        <p:spPr>
-          <a:xfrm>
-            <a:off x="8153247" y="2258568"/>
-            <a:ext cx="640043" cy="146304"/>
-          </a:xfrm>
-          <a:prstGeom prst="roundRect">
-            <a:avLst>
-              <a:gd name="adj" fmla="val 50000"/>
-            </a:avLst>
-          </a:prstGeom>
-          <a:solidFill>
-            <a:srgbClr val="5B7A99"/>
-          </a:solidFill>
-          <a:ln>
-            <a:noFill/>
-          </a:ln>
-          <a:effectLst/>
-        </p:spPr>
-        <p:style>
-          <a:lnRef idx="1">
-            <a:schemeClr val="accent1"/>
-          </a:lnRef>
-          <a:fillRef idx="3">
-            <a:schemeClr val="accent1"/>
-          </a:fillRef>
-          <a:effectRef idx="2">
-            <a:schemeClr val="accent1"/>
-          </a:effectRef>
-          <a:fontRef idx="minor">
-            <a:schemeClr val="lt1"/>
-          </a:fontRef>
-        </p:style>
-        <p:txBody>
-          <a:bodyPr rtlCol="0" anchor="ctr"/>
-          <a:lstStyle/>
-          <a:p>
-            <a:pPr algn="ctr"/>
-          </a:p>
-        </p:txBody>
-      </p:sp>
-      <p:sp>
-        <p:nvSpPr>
-          <p:cNvPr id="43" name="TextBox 42"/>
-          <p:cNvSpPr txBox="1"/>
-          <p:nvPr/>
-        </p:nvSpPr>
-        <p:spPr>
-          <a:xfrm>
-            <a:off x="10911535" y="2185416"/>
-            <a:ext cx="914400" cy="274320"/>
-          </a:xfrm>
-          <a:prstGeom prst="rect">
-            <a:avLst/>
-          </a:prstGeom>
-          <a:noFill/>
-        </p:spPr>
-        <p:txBody>
-          <a:bodyPr wrap="square" anchor="ctr" lIns="36000" rIns="36000" tIns="18000" bIns="18000">
-            <a:spAutoFit/>
-          </a:bodyPr>
-          <a:lstStyle/>
-          <a:p>
-            <a:pPr algn="l"/>
-            <a:r>
-              <a:rPr sz="1232" b="1" i="0">
-                <a:solidFill>
-                  <a:srgbClr val="475569"/>
-                </a:solidFill>
-                <a:latin typeface="Arial"/>
-              </a:rPr>
-              <a:t>~0.12</a:t>
-            </a:r>
-          </a:p>
-        </p:txBody>
-      </p:sp>
-      <p:sp>
-        <p:nvSpPr>
-          <p:cNvPr id="44" name="TextBox 43"/>
-          <p:cNvSpPr txBox="1"/>
-          <p:nvPr/>
-        </p:nvSpPr>
-        <p:spPr>
-          <a:xfrm>
-            <a:off x="6233007" y="2642616"/>
-            <a:ext cx="1828800" cy="274320"/>
-          </a:xfrm>
-          <a:prstGeom prst="rect">
-            <a:avLst/>
-          </a:prstGeom>
-          <a:noFill/>
-        </p:spPr>
-        <p:txBody>
-          <a:bodyPr wrap="square" anchor="ctr" lIns="36000" rIns="36000" tIns="18000" bIns="18000">
-            <a:spAutoFit/>
-          </a:bodyPr>
-          <a:lstStyle/>
-          <a:p>
-            <a:pPr algn="l"/>
-            <a:r>
-              <a:rPr sz="1344" b="0" i="0">
-                <a:solidFill>
-                  <a:srgbClr val="334155"/>
-                </a:solidFill>
-                <a:latin typeface="Arial"/>
-              </a:rPr>
-              <a:t>MHEC/CSP 1-5</a:t>
-            </a:r>
-          </a:p>
-        </p:txBody>
-      </p:sp>
-      <p:sp>
-        <p:nvSpPr>
-          <p:cNvPr id="45" name="Rounded Rectangle 44"/>
-          <p:cNvSpPr/>
-          <p:nvPr/>
-        </p:nvSpPr>
-        <p:spPr>
-          <a:xfrm>
-            <a:off x="8153247" y="2715768"/>
-            <a:ext cx="2666847" cy="146304"/>
-          </a:xfrm>
-          <a:prstGeom prst="roundRect">
-            <a:avLst>
-              <a:gd name="adj" fmla="val 50000"/>
-            </a:avLst>
-          </a:prstGeom>
-          <a:solidFill>
-            <a:srgbClr val="F1F5F9"/>
-          </a:solidFill>
-          <a:ln w="3810">
-            <a:solidFill>
-              <a:srgbClr val="E2E8F0"/>
-            </a:solidFill>
-          </a:ln>
-          <a:effectLst/>
-        </p:spPr>
-        <p:style>
-          <a:lnRef idx="1">
-            <a:schemeClr val="accent1"/>
-          </a:lnRef>
-          <a:fillRef idx="3">
-            <a:schemeClr val="accent1"/>
-          </a:fillRef>
-          <a:effectRef idx="2">
-            <a:schemeClr val="accent1"/>
-          </a:effectRef>
-          <a:fontRef idx="minor">
-            <a:schemeClr val="lt1"/>
-          </a:fontRef>
-        </p:style>
-        <p:txBody>
-          <a:bodyPr rtlCol="0" anchor="ctr"/>
-          <a:lstStyle/>
-          <a:p>
-            <a:pPr algn="ctr"/>
-          </a:p>
-        </p:txBody>
-      </p:sp>
-      <p:sp>
-        <p:nvSpPr>
-          <p:cNvPr id="46" name="Rounded Rectangle 45"/>
-          <p:cNvSpPr/>
-          <p:nvPr/>
-        </p:nvSpPr>
-        <p:spPr>
-          <a:xfrm>
-            <a:off x="8153247" y="2715768"/>
-            <a:ext cx="800054" cy="146304"/>
           </a:xfrm>
           <a:prstGeom prst="roundRect">
             <a:avLst>
@@ -19621,13 +18711,13 @@
       </p:sp>
       <p:sp>
         <p:nvSpPr>
-          <p:cNvPr id="47" name="TextBox 46"/>
-          <p:cNvSpPr txBox="1"/>
-          <p:nvPr/>
-        </p:nvSpPr>
-        <p:spPr>
-          <a:xfrm>
-            <a:off x="10911535" y="2642616"/>
+          <p:cNvPr id="39" name="TextBox 38"/>
+          <p:cNvSpPr txBox="1"/>
+          <p:nvPr/>
+        </p:nvSpPr>
+        <p:spPr>
+          <a:xfrm>
+            <a:off x="10911535" y="2185416"/>
             <a:ext cx="914400" cy="274320"/>
           </a:xfrm>
           <a:prstGeom prst="rect">
@@ -19649,20 +18739,20 @@
                 </a:solidFill>
                 <a:latin typeface="Arial"/>
               </a:rPr>
-              <a:t>~0.15</a:t>
-            </a:r>
-          </a:p>
-        </p:txBody>
-      </p:sp>
-      <p:sp>
-        <p:nvSpPr>
-          <p:cNvPr id="48" name="Rounded Rectangle 47"/>
+              <a:t>0.400</a:t>
+            </a:r>
+          </a:p>
+        </p:txBody>
+      </p:sp>
+      <p:sp>
+        <p:nvSpPr>
+          <p:cNvPr id="40" name="Rounded Rectangle 39"/>
           <p:cNvSpPr/>
           <p:nvPr/>
         </p:nvSpPr>
         <p:spPr>
           <a:xfrm>
-            <a:off x="6233007" y="3236976"/>
+            <a:off x="6233007" y="2779776"/>
             <a:ext cx="5592927" cy="731520"/>
           </a:xfrm>
           <a:prstGeom prst="roundRect">
@@ -19702,13 +18792,13 @@
       </p:sp>
       <p:sp>
         <p:nvSpPr>
-          <p:cNvPr id="49" name="Rectangle 48"/>
+          <p:cNvPr id="41" name="Rectangle 40"/>
           <p:cNvSpPr/>
           <p:nvPr/>
         </p:nvSpPr>
         <p:spPr>
           <a:xfrm>
-            <a:off x="6233007" y="3236976"/>
+            <a:off x="6233007" y="2779776"/>
             <a:ext cx="54864" cy="731520"/>
           </a:xfrm>
           <a:prstGeom prst="rect">
@@ -19746,13 +18836,13 @@
       </p:sp>
       <p:sp>
         <p:nvSpPr>
-          <p:cNvPr id="50" name="TextBox 49"/>
-          <p:cNvSpPr txBox="1"/>
-          <p:nvPr/>
-        </p:nvSpPr>
-        <p:spPr>
-          <a:xfrm>
-            <a:off x="6415887" y="3236976"/>
+          <p:cNvPr id="42" name="TextBox 41"/>
+          <p:cNvSpPr txBox="1"/>
+          <p:nvPr/>
+        </p:nvSpPr>
+        <p:spPr>
+          <a:xfrm>
+            <a:off x="6415887" y="2779776"/>
             <a:ext cx="365760" cy="731520"/>
           </a:xfrm>
           <a:prstGeom prst="rect">
@@ -19781,13 +18871,13 @@
       </p:sp>
       <p:sp>
         <p:nvSpPr>
-          <p:cNvPr id="51" name="TextBox 50"/>
-          <p:cNvSpPr txBox="1"/>
-          <p:nvPr/>
-        </p:nvSpPr>
-        <p:spPr>
-          <a:xfrm>
-            <a:off x="6827367" y="3236976"/>
+          <p:cNvPr id="43" name="TextBox 42"/>
+          <p:cNvSpPr txBox="1"/>
+          <p:nvPr/>
+        </p:nvSpPr>
+        <p:spPr>
+          <a:xfrm>
+            <a:off x="6827367" y="2779776"/>
             <a:ext cx="4907127" cy="731520"/>
           </a:xfrm>
           <a:prstGeom prst="rect">
@@ -19809,7 +18899,7 @@
                 </a:solidFill>
                 <a:latin typeface="Arial"/>
               </a:rPr>
-              <a:t>tan δ &lt;&lt; 1 → all formulations show clear gel behavior. Elastic component overwhelmingly dominant</a:t>
+              <a:t>All formulations: tan δ &lt; 1 (gel behavior). AquaGel-K most elastic (0.168); MHEC system most fluid-like (0.400)</a:t>
             </a:r>
           </a:p>
         </p:txBody>
@@ -22095,7 +21185,7 @@
                 </a:solidFill>
                 <a:latin typeface="Arial"/>
               </a:rPr>
-              <a:t>Lower n=0.108 → stronger shear thinning</a:t>
+              <a:t>Strong shear thinning (n &lt; 1)</a:t>
             </a:r>
           </a:p>
         </p:txBody>
@@ -22165,7 +21255,7 @@
                 </a:solidFill>
                 <a:latin typeface="Arial"/>
               </a:rPr>
-              <a:t>Time to char ≈ 9–10 min</a:t>
+              <a:t>Time to char &gt; 7 min</a:t>
             </a:r>
           </a:p>
         </p:txBody>
@@ -22690,7 +21780,7 @@
                 </a:solidFill>
                 <a:latin typeface="Arial"/>
               </a:rPr>
-              <a:t>n=0.188 (slightly higher than HEC+MC)</a:t>
+              <a:t>Shear thinning (n &lt; 1)</a:t>
             </a:r>
           </a:p>
         </p:txBody>
@@ -22760,7 +21850,7 @@
                 </a:solidFill>
                 <a:latin typeface="Arial"/>
               </a:rPr>
-              <a:t>Time to char ≈ 10 min</a:t>
+              <a:t>Time to char &gt; 5 min</a:t>
             </a:r>
           </a:p>
         </p:txBody>
@@ -23845,7 +22935,7 @@
                 </a:solidFill>
                 <a:latin typeface="Arial"/>
               </a:rPr>
-              <a:t>Substrate: pine wood thin board</a:t>
+              <a:t>Substrate: whitewood plywood</a:t>
             </a:r>
           </a:p>
         </p:txBody>
@@ -23985,7 +23075,7 @@
                 </a:solidFill>
                 <a:latin typeface="Arial"/>
               </a:rPr>
-              <a:t>Flame source: butane direct flame</a:t>
+              <a:t>Flame source: MAP-Pro torch (~2054°C)</a:t>
             </a:r>
           </a:p>
         </p:txBody>
@@ -24760,7 +23850,7 @@
         <p:spPr>
           <a:xfrm>
             <a:off x="2834640" y="1344168"/>
-            <a:ext cx="620587" cy="146304"/>
+            <a:ext cx="137908" cy="146304"/>
           </a:xfrm>
           <a:prstGeom prst="roundRect">
             <a:avLst>
@@ -24827,7 +23917,7 @@
                 </a:solidFill>
                 <a:latin typeface="Arial"/>
               </a:rPr>
-              <a:t>~2 min</a:t>
+              <a:t>~0.3 min</a:t>
             </a:r>
           </a:p>
         </p:txBody>
@@ -24924,7 +24014,7 @@
         <p:spPr>
           <a:xfrm>
             <a:off x="2834640" y="1847088"/>
-            <a:ext cx="2068625" cy="146304"/>
+            <a:ext cx="689541" cy="146304"/>
           </a:xfrm>
           <a:prstGeom prst="roundRect">
             <a:avLst>
@@ -24991,7 +24081,7 @@
                 </a:solidFill>
                 <a:latin typeface="Arial"/>
               </a:rPr>
-              <a:t>~7 min</a:t>
+              <a:t>~1.5 min</a:t>
             </a:r>
           </a:p>
         </p:txBody>
@@ -25026,7 +24116,7 @@
                 </a:solidFill>
                 <a:latin typeface="Arial"/>
               </a:rPr>
-              <a:t>HEC+MC/CSP 1-5</a:t>
+              <a:t>MHEC/CSP 1-5</a:t>
             </a:r>
           </a:p>
         </p:txBody>
@@ -25088,7 +24178,7 @@
         <p:spPr>
           <a:xfrm>
             <a:off x="2834640" y="2350008"/>
-            <a:ext cx="2758166" cy="146304"/>
+            <a:ext cx="2241010" cy="146304"/>
           </a:xfrm>
           <a:prstGeom prst="roundRect">
             <a:avLst>
@@ -25096,7 +24186,7 @@
             </a:avLst>
           </a:prstGeom>
           <a:solidFill>
-            <a:srgbClr val="4A7C8C"/>
+            <a:srgbClr val="9F7639"/>
           </a:solidFill>
           <a:ln>
             <a:noFill/>
@@ -25155,7 +24245,7 @@
                 </a:solidFill>
                 <a:latin typeface="Arial"/>
               </a:rPr>
-              <a:t>~9 min</a:t>
+              <a:t>&gt;5 min</a:t>
             </a:r>
           </a:p>
         </p:txBody>
@@ -25190,7 +24280,7 @@
                 </a:solidFill>
                 <a:latin typeface="Arial"/>
               </a:rPr>
-              <a:t>HEC+MC/CSP/SDS 1-5-0.1</a:t>
+              <a:t>HEC+MC/CSP 1-5</a:t>
             </a:r>
           </a:p>
         </p:txBody>
@@ -25260,7 +24350,7 @@
             </a:avLst>
           </a:prstGeom>
           <a:solidFill>
-            <a:srgbClr val="5B7A99"/>
+            <a:srgbClr val="4A7C8C"/>
           </a:solidFill>
           <a:ln>
             <a:noFill/>
@@ -25319,7 +24409,7 @@
                 </a:solidFill>
                 <a:latin typeface="Arial"/>
               </a:rPr>
-              <a:t>~10 min</a:t>
+              <a:t>&gt;7 min</a:t>
             </a:r>
           </a:p>
         </p:txBody>
@@ -25354,7 +24444,7 @@
                 </a:solidFill>
                 <a:latin typeface="Arial"/>
               </a:rPr>
-              <a:t>MHEC/CSP 1-5</a:t>
+              <a:t>HEC+MC/CSP/SDS 1-5-0.1</a:t>
             </a:r>
           </a:p>
         </p:txBody>
@@ -25416,7 +24506,7 @@
         <p:spPr>
           <a:xfrm>
             <a:off x="2834640" y="3355848"/>
-            <a:ext cx="3171891" cy="146304"/>
+            <a:ext cx="3102937" cy="146304"/>
           </a:xfrm>
           <a:prstGeom prst="roundRect">
             <a:avLst>
@@ -25483,7 +24573,7 @@
                 </a:solidFill>
                 <a:latin typeface="Arial"/>
               </a:rPr>
-              <a:t>~10 min</a:t>
+              <a:t>&gt;7 min</a:t>
             </a:r>
           </a:p>
         </p:txBody>
@@ -25643,7 +24733,7 @@
                 </a:solidFill>
                 <a:latin typeface="Arial"/>
               </a:rPr>
-              <a:t>This work's WEG group extends protection ~40% beyond AquaGel-K and ~5× longer than water alone</a:t>
+              <a:t>This work's WEG achieves 3–6× longer protection than commercial AquaGel-K (n≥3 for all tests)</a:t>
             </a:r>
           </a:p>
         </p:txBody>
@@ -26603,7 +25693,7 @@
                 </a:solidFill>
                 <a:latin typeface="Arial"/>
               </a:rPr>
-              <a:t>Wood surface chars in ~2 min</a:t>
+              <a:t>Wood surface chars in ~0.3 min (~18 s)</a:t>
             </a:r>
           </a:p>
         </p:txBody>
@@ -26896,7 +25986,7 @@
                 </a:solidFill>
                 <a:latin typeface="Arial"/>
               </a:rPr>
-              <a:t>Chars in ~7 min</a:t>
+              <a:t>Chars in ~1.5 min</a:t>
             </a:r>
           </a:p>
         </p:txBody>
@@ -27259,7 +26349,7 @@
                 </a:solidFill>
                 <a:latin typeface="Arial"/>
               </a:rPr>
-              <a:t>Charring prevented for ~10 min</a:t>
+              <a:t>Charring prevented for &gt;7 min (HEC+MC)</a:t>
             </a:r>
           </a:p>
         </p:txBody>
@@ -27987,7 +27077,7 @@
                 </a:solidFill>
                 <a:latin typeface="Arial"/>
               </a:rPr>
-              <a:t>Time to char: ~2 min</a:t>
+              <a:t>Time to char: ~0.3 min</a:t>
             </a:r>
           </a:p>
         </p:txBody>
@@ -28175,7 +27265,7 @@
                 </a:solidFill>
                 <a:latin typeface="Arial"/>
               </a:rPr>
-              <a:t>Time to char: ~7 min</a:t>
+              <a:t>Time to char: ~1.5 min</a:t>
             </a:r>
           </a:p>
         </p:txBody>
@@ -28363,7 +27453,7 @@
                 </a:solidFill>
                 <a:latin typeface="Arial"/>
               </a:rPr>
-              <a:t>Time to char: ~10 min</a:t>
+              <a:t>Time to char: &gt;7 min</a:t>
             </a:r>
           </a:p>
         </p:txBody>
@@ -28495,7 +27585,7 @@
                 </a:solidFill>
                 <a:latin typeface="Arial"/>
               </a:rPr>
-              <a:t>~10</a:t>
+              <a:t>&gt;7</a:t>
             </a:r>
             <a:r>
               <a:rPr sz="6720" b="0" i="0">
@@ -28539,7 +27629,7 @@
                 </a:solidFill>
                 <a:latin typeface="Arial"/>
               </a:rPr>
-              <a:t>Time to Char of This Work's WEG</a:t>
+              <a:t>Time to Char of This Work's WEG (HEC+MC/CSP)</a:t>
             </a:r>
           </a:p>
         </p:txBody>
@@ -28574,7 +27664,7 @@
                 </a:solidFill>
                 <a:latin typeface="Arial"/>
               </a:rPr>
-              <a:t>Achieved ~5× longer protection than water alone (~2 min) and ~1.4× longer than commercial AquaGel-K (~7 min)</a:t>
+              <a:t>Achieved 3–6× longer protection than commercial AquaGel-K (~1.5 min) — n≥3 for all tests</a:t>
             </a:r>
           </a:p>
         </p:txBody>
@@ -28669,7 +27759,7 @@
         <p:spPr>
           <a:xfrm>
             <a:off x="3931920" y="5568696"/>
-            <a:ext cx="1280160" cy="164592"/>
+            <a:ext cx="256032" cy="164592"/>
           </a:xfrm>
           <a:prstGeom prst="roundRect">
             <a:avLst>
@@ -28736,7 +27826,7 @@
                 </a:solidFill>
                 <a:latin typeface="Arial"/>
               </a:rPr>
-              <a:t>~2 min</a:t>
+              <a:t>~0.3 min</a:t>
             </a:r>
           </a:p>
         </p:txBody>
@@ -28831,7 +27921,7 @@
         <p:spPr>
           <a:xfrm>
             <a:off x="3931920" y="5888736"/>
-            <a:ext cx="3840480" cy="164592"/>
+            <a:ext cx="1280160" cy="164592"/>
           </a:xfrm>
           <a:prstGeom prst="roundRect">
             <a:avLst>
@@ -28898,7 +27988,7 @@
                 </a:solidFill>
                 <a:latin typeface="Arial"/>
               </a:rPr>
-              <a:t>~7 min</a:t>
+              <a:t>~1.5 min</a:t>
             </a:r>
           </a:p>
         </p:txBody>
@@ -29060,7 +28150,7 @@
                 </a:solidFill>
                 <a:latin typeface="Arial"/>
               </a:rPr>
-              <a:t>~10 min</a:t>
+              <a:t>&gt;7 min</a:t>
             </a:r>
           </a:p>
         </p:txBody>
@@ -30031,7 +29121,7 @@
                 </a:solidFill>
                 <a:latin typeface="Arial"/>
               </a:rPr>
-              <a:t>~0</a:t>
+              <a:t>≈0</a:t>
             </a:r>
           </a:p>
         </p:txBody>
@@ -30066,7 +29156,7 @@
                 </a:solidFill>
                 <a:latin typeface="Arial"/>
               </a:rPr>
-              <a:t>HEC+MC/CSP 1-5</a:t>
+              <a:t>MHEC/CSP 1-5</a:t>
             </a:r>
           </a:p>
         </p:txBody>
@@ -30128,7 +29218,7 @@
         <p:spPr>
           <a:xfrm>
             <a:off x="1920240" y="4224528"/>
-            <a:ext cx="1718226" cy="146304"/>
+            <a:ext cx="1655745" cy="146304"/>
           </a:xfrm>
           <a:prstGeom prst="roundRect">
             <a:avLst>
@@ -30136,7 +29226,7 @@
             </a:avLst>
           </a:prstGeom>
           <a:solidFill>
-            <a:srgbClr val="4A7C8C"/>
+            <a:srgbClr val="9F7639"/>
           </a:solidFill>
           <a:ln>
             <a:noFill/>
@@ -30195,7 +29285,7 @@
                 </a:solidFill>
                 <a:latin typeface="Arial"/>
               </a:rPr>
-              <a:t>~2.2×</a:t>
+              <a:t>≈2.1×</a:t>
             </a:r>
           </a:p>
         </p:txBody>
@@ -30230,7 +29320,7 @@
                 </a:solidFill>
                 <a:latin typeface="Arial"/>
               </a:rPr>
-              <a:t>+SDS 0.1 wt%</a:t>
+              <a:t>HEC+MC/CSP/SDS 1-5-0.1</a:t>
             </a:r>
           </a:p>
         </p:txBody>
@@ -30292,7 +29382,7 @@
         <p:spPr>
           <a:xfrm>
             <a:off x="1920240" y="4636008"/>
-            <a:ext cx="2030630" cy="146304"/>
+            <a:ext cx="1874428" cy="146304"/>
           </a:xfrm>
           <a:prstGeom prst="roundRect">
             <a:avLst>
@@ -30359,7 +29449,7 @@
                 </a:solidFill>
                 <a:latin typeface="Arial"/>
               </a:rPr>
-              <a:t>~2.6×</a:t>
+              <a:t>≈2.3×</a:t>
             </a:r>
           </a:p>
         </p:txBody>
@@ -30394,7 +29484,7 @@
                 </a:solidFill>
                 <a:latin typeface="Arial"/>
               </a:rPr>
-              <a:t>MHEC/CSP 1-5</a:t>
+              <a:t>HEC+MC/CSP 1-5</a:t>
             </a:r>
           </a:p>
         </p:txBody>
@@ -30456,7 +29546,7 @@
         <p:spPr>
           <a:xfrm>
             <a:off x="1920240" y="5047488"/>
-            <a:ext cx="1811947" cy="146304"/>
+            <a:ext cx="2124352" cy="146304"/>
           </a:xfrm>
           <a:prstGeom prst="roundRect">
             <a:avLst>
@@ -30464,7 +29554,7 @@
             </a:avLst>
           </a:prstGeom>
           <a:solidFill>
-            <a:srgbClr val="9F7639"/>
+            <a:srgbClr val="4A7C8C"/>
           </a:solidFill>
           <a:ln>
             <a:noFill/>
@@ -30523,7 +29613,7 @@
                 </a:solidFill>
                 <a:latin typeface="Arial"/>
               </a:rPr>
-              <a:t>~2.3×</a:t>
+              <a:t>≈2.6×</a:t>
             </a:r>
           </a:p>
         </p:txBody>
@@ -30838,7 +29928,7 @@
                 </a:solidFill>
                 <a:latin typeface="Arial"/>
               </a:rPr>
-              <a:t>SDS 0.1 wt% is optimal: forms uniform fine bubbles</a:t>
+              <a:t>HEC+MC/CSP without SDS achieves the highest foaming index (≈2.6)</a:t>
             </a:r>
           </a:p>
         </p:txBody>
@@ -31402,124 +30492,6 @@
           <a:solidFill>
             <a:srgbClr val="FFFFFF"/>
           </a:solidFill>
-          <a:ln w="6350">
-            <a:solidFill>
-              <a:srgbClr val="E2E8F0"/>
-            </a:solidFill>
-          </a:ln>
-          <a:effectLst/>
-        </p:spPr>
-        <p:style>
-          <a:lnRef idx="1">
-            <a:schemeClr val="accent1"/>
-          </a:lnRef>
-          <a:fillRef idx="3">
-            <a:schemeClr val="accent1"/>
-          </a:fillRef>
-          <a:effectRef idx="2">
-            <a:schemeClr val="accent1"/>
-          </a:effectRef>
-          <a:fontRef idx="minor">
-            <a:schemeClr val="lt1"/>
-          </a:fontRef>
-        </p:style>
-        <p:txBody>
-          <a:bodyPr rtlCol="0" anchor="ctr"/>
-          <a:lstStyle/>
-          <a:p>
-            <a:pPr algn="ctr"/>
-          </a:p>
-        </p:txBody>
-      </p:sp>
-      <p:sp>
-        <p:nvSpPr>
-          <p:cNvPr id="16" name="TextBox 15"/>
-          <p:cNvSpPr txBox="1"/>
-          <p:nvPr/>
-        </p:nvSpPr>
-        <p:spPr>
-          <a:xfrm>
-            <a:off x="530352" y="4215384"/>
-            <a:ext cx="3405530" cy="320040"/>
-          </a:xfrm>
-          <a:prstGeom prst="rect">
-            <a:avLst/>
-          </a:prstGeom>
-          <a:noFill/>
-        </p:spPr>
-        <p:txBody>
-          <a:bodyPr wrap="square" anchor="t" lIns="36000" rIns="36000" tIns="18000" bIns="18000">
-            <a:spAutoFit/>
-          </a:bodyPr>
-          <a:lstStyle/>
-          <a:p>
-            <a:pPr algn="l"/>
-            <a:r>
-              <a:rPr sz="1456" b="1" i="0">
-                <a:solidFill>
-                  <a:srgbClr val="64748B"/>
-                </a:solidFill>
-                <a:latin typeface="Arial"/>
-              </a:rPr>
-              <a:t>0% SDS</a:t>
-            </a:r>
-          </a:p>
-        </p:txBody>
-      </p:sp>
-      <p:sp>
-        <p:nvSpPr>
-          <p:cNvPr id="17" name="TextBox 16"/>
-          <p:cNvSpPr txBox="1"/>
-          <p:nvPr/>
-        </p:nvSpPr>
-        <p:spPr>
-          <a:xfrm>
-            <a:off x="530352" y="4700016"/>
-            <a:ext cx="3405530" cy="1280160"/>
-          </a:xfrm>
-          <a:prstGeom prst="rect">
-            <a:avLst/>
-          </a:prstGeom>
-          <a:noFill/>
-        </p:spPr>
-        <p:txBody>
-          <a:bodyPr wrap="square" anchor="t" lIns="36000" rIns="36000" tIns="18000" bIns="18000">
-            <a:spAutoFit/>
-          </a:bodyPr>
-          <a:lstStyle/>
-          <a:p>
-            <a:pPr algn="l"/>
-            <a:r>
-              <a:rPr sz="1344" b="0" i="0">
-                <a:solidFill>
-                  <a:srgbClr val="475569"/>
-                </a:solidFill>
-                <a:latin typeface="Arial"/>
-              </a:rPr>
-              <a:t>Dense silica network. Low porosity.</a:t>
-            </a:r>
-          </a:p>
-        </p:txBody>
-      </p:sp>
-      <p:sp>
-        <p:nvSpPr>
-          <p:cNvPr id="18" name="Rounded Rectangle 17"/>
-          <p:cNvSpPr/>
-          <p:nvPr/>
-        </p:nvSpPr>
-        <p:spPr>
-          <a:xfrm>
-            <a:off x="4228490" y="4014216"/>
-            <a:ext cx="3734714" cy="2103120"/>
-          </a:xfrm>
-          <a:prstGeom prst="roundRect">
-            <a:avLst>
-              <a:gd name="adj" fmla="val 4000"/>
-            </a:avLst>
-          </a:prstGeom>
-          <a:solidFill>
-            <a:srgbClr val="FFFFFF"/>
-          </a:solidFill>
           <a:ln w="10160">
             <a:solidFill>
               <a:srgbClr val="3B5174"/>
@@ -31551,13 +30523,13 @@
       </p:sp>
       <p:sp>
         <p:nvSpPr>
-          <p:cNvPr id="19" name="TextBox 18"/>
-          <p:cNvSpPr txBox="1"/>
-          <p:nvPr/>
-        </p:nvSpPr>
-        <p:spPr>
-          <a:xfrm>
-            <a:off x="4393082" y="4215384"/>
+          <p:cNvPr id="16" name="TextBox 15"/>
+          <p:cNvSpPr txBox="1"/>
+          <p:nvPr/>
+        </p:nvSpPr>
+        <p:spPr>
+          <a:xfrm>
+            <a:off x="530352" y="4215384"/>
             <a:ext cx="3405530" cy="320040"/>
           </a:xfrm>
           <a:prstGeom prst="rect">
@@ -31579,20 +30551,20 @@
                 </a:solidFill>
                 <a:latin typeface="Arial"/>
               </a:rPr>
-              <a:t>0.1% SDS (Optimal)</a:t>
-            </a:r>
-          </a:p>
-        </p:txBody>
-      </p:sp>
-      <p:sp>
-        <p:nvSpPr>
-          <p:cNvPr id="20" name="TextBox 19"/>
-          <p:cNvSpPr txBox="1"/>
-          <p:nvPr/>
-        </p:nvSpPr>
-        <p:spPr>
-          <a:xfrm>
-            <a:off x="4393082" y="4700016"/>
+              <a:t>0% SDS</a:t>
+            </a:r>
+          </a:p>
+        </p:txBody>
+      </p:sp>
+      <p:sp>
+        <p:nvSpPr>
+          <p:cNvPr id="17" name="TextBox 16"/>
+          <p:cNvSpPr txBox="1"/>
+          <p:nvPr/>
+        </p:nvSpPr>
+        <p:spPr>
+          <a:xfrm>
+            <a:off x="530352" y="4700016"/>
             <a:ext cx="3405530" cy="1280160"/>
           </a:xfrm>
           <a:prstGeom prst="rect">
@@ -31614,20 +30586,20 @@
                 </a:solidFill>
                 <a:latin typeface="Arial"/>
               </a:rPr>
-              <a:t>Uniform fine bubbles. Highest foaming index.</a:t>
-            </a:r>
-          </a:p>
-        </p:txBody>
-      </p:sp>
-      <p:sp>
-        <p:nvSpPr>
-          <p:cNvPr id="21" name="Rounded Rectangle 20"/>
+              <a:t>Highest foaming index (≈2.6). No SDS yields maximum expansion.</a:t>
+            </a:r>
+          </a:p>
+        </p:txBody>
+      </p:sp>
+      <p:sp>
+        <p:nvSpPr>
+          <p:cNvPr id="18" name="Rounded Rectangle 17"/>
           <p:cNvSpPr/>
           <p:nvPr/>
         </p:nvSpPr>
         <p:spPr>
           <a:xfrm>
-            <a:off x="8091220" y="4014216"/>
+            <a:off x="4228490" y="4014216"/>
             <a:ext cx="3734714" cy="2103120"/>
           </a:xfrm>
           <a:prstGeom prst="roundRect">
@@ -31669,6 +30641,124 @@
       </p:sp>
       <p:sp>
         <p:nvSpPr>
+          <p:cNvPr id="19" name="TextBox 18"/>
+          <p:cNvSpPr txBox="1"/>
+          <p:nvPr/>
+        </p:nvSpPr>
+        <p:spPr>
+          <a:xfrm>
+            <a:off x="4393082" y="4215384"/>
+            <a:ext cx="3405530" cy="320040"/>
+          </a:xfrm>
+          <a:prstGeom prst="rect">
+            <a:avLst/>
+          </a:prstGeom>
+          <a:noFill/>
+        </p:spPr>
+        <p:txBody>
+          <a:bodyPr wrap="square" anchor="t" lIns="36000" rIns="36000" tIns="18000" bIns="18000">
+            <a:spAutoFit/>
+          </a:bodyPr>
+          <a:lstStyle/>
+          <a:p>
+            <a:pPr algn="l"/>
+            <a:r>
+              <a:rPr sz="1456" b="1" i="0">
+                <a:solidFill>
+                  <a:srgbClr val="64748B"/>
+                </a:solidFill>
+                <a:latin typeface="Arial"/>
+              </a:rPr>
+              <a:t>0.1% SDS</a:t>
+            </a:r>
+          </a:p>
+        </p:txBody>
+      </p:sp>
+      <p:sp>
+        <p:nvSpPr>
+          <p:cNvPr id="20" name="TextBox 19"/>
+          <p:cNvSpPr txBox="1"/>
+          <p:nvPr/>
+        </p:nvSpPr>
+        <p:spPr>
+          <a:xfrm>
+            <a:off x="4393082" y="4700016"/>
+            <a:ext cx="3405530" cy="1280160"/>
+          </a:xfrm>
+          <a:prstGeom prst="rect">
+            <a:avLst/>
+          </a:prstGeom>
+          <a:noFill/>
+        </p:spPr>
+        <p:txBody>
+          <a:bodyPr wrap="square" anchor="t" lIns="36000" rIns="36000" tIns="18000" bIns="18000">
+            <a:spAutoFit/>
+          </a:bodyPr>
+          <a:lstStyle/>
+          <a:p>
+            <a:pPr algn="l"/>
+            <a:r>
+              <a:rPr sz="1344" b="0" i="0">
+                <a:solidFill>
+                  <a:srgbClr val="475569"/>
+                </a:solidFill>
+                <a:latin typeface="Arial"/>
+              </a:rPr>
+              <a:t>Uniform fine-bubble structure. Foaming index ≈2.3 (lower than no-SDS).</a:t>
+            </a:r>
+          </a:p>
+        </p:txBody>
+      </p:sp>
+      <p:sp>
+        <p:nvSpPr>
+          <p:cNvPr id="21" name="Rounded Rectangle 20"/>
+          <p:cNvSpPr/>
+          <p:nvPr/>
+        </p:nvSpPr>
+        <p:spPr>
+          <a:xfrm>
+            <a:off x="8091220" y="4014216"/>
+            <a:ext cx="3734714" cy="2103120"/>
+          </a:xfrm>
+          <a:prstGeom prst="roundRect">
+            <a:avLst>
+              <a:gd name="adj" fmla="val 4000"/>
+            </a:avLst>
+          </a:prstGeom>
+          <a:solidFill>
+            <a:srgbClr val="FFFFFF"/>
+          </a:solidFill>
+          <a:ln w="6350">
+            <a:solidFill>
+              <a:srgbClr val="E2E8F0"/>
+            </a:solidFill>
+          </a:ln>
+          <a:effectLst/>
+        </p:spPr>
+        <p:style>
+          <a:lnRef idx="1">
+            <a:schemeClr val="accent1"/>
+          </a:lnRef>
+          <a:fillRef idx="3">
+            <a:schemeClr val="accent1"/>
+          </a:fillRef>
+          <a:effectRef idx="2">
+            <a:schemeClr val="accent1"/>
+          </a:effectRef>
+          <a:fontRef idx="minor">
+            <a:schemeClr val="lt1"/>
+          </a:fontRef>
+        </p:style>
+        <p:txBody>
+          <a:bodyPr rtlCol="0" anchor="ctr"/>
+          <a:lstStyle/>
+          <a:p>
+            <a:pPr algn="ctr"/>
+          </a:p>
+        </p:txBody>
+      </p:sp>
+      <p:sp>
+        <p:nvSpPr>
           <p:cNvPr id="22" name="TextBox 21"/>
           <p:cNvSpPr txBox="1"/>
           <p:nvPr/>
@@ -31732,7 +30822,7 @@
                 </a:solidFill>
                 <a:latin typeface="Arial"/>
               </a:rPr>
-              <a:t>Non-uniform and coarsened bubble size.</a:t>
+              <a:t>Non-uniform and coarsened bubble size. Foaming index further reduced.</a:t>
             </a:r>
           </a:p>
         </p:txBody>
@@ -33223,7 +32313,7 @@
         <p:spPr>
           <a:xfrm>
             <a:off x="6187287" y="1243584"/>
-            <a:ext cx="5638647" cy="480060"/>
+            <a:ext cx="5638647" cy="640080"/>
           </a:xfrm>
           <a:prstGeom prst="rect">
             <a:avLst/>
@@ -33267,7 +32357,7 @@
         <p:spPr>
           <a:xfrm>
             <a:off x="6278727" y="1243584"/>
-            <a:ext cx="1788109" cy="480060"/>
+            <a:ext cx="1922362" cy="640080"/>
           </a:xfrm>
           <a:prstGeom prst="rect">
             <a:avLst/>
@@ -33288,7 +32378,7 @@
                 </a:solidFill>
                 <a:latin typeface="Arial"/>
               </a:rPr>
-              <a:t>Element</a:t>
+              <a:t>Formulation</a:t>
             </a:r>
           </a:p>
         </p:txBody>
@@ -33301,8 +32391,8 @@
         </p:nvSpPr>
         <p:spPr>
           <a:xfrm>
-            <a:off x="8158276" y="1243584"/>
-            <a:ext cx="1788109" cy="480060"/>
+            <a:off x="8292530" y="1243584"/>
+            <a:ext cx="1720982" cy="640080"/>
           </a:xfrm>
           <a:prstGeom prst="rect">
             <a:avLst/>
@@ -33323,7 +32413,7 @@
                 </a:solidFill>
                 <a:latin typeface="Arial"/>
               </a:rPr>
-              <a:t>Before combustion</a:t>
+              <a:t>C 1s before (at%)</a:t>
             </a:r>
           </a:p>
         </p:txBody>
@@ -33336,8 +32426,8 @@
         </p:nvSpPr>
         <p:spPr>
           <a:xfrm>
-            <a:off x="10037825" y="1243584"/>
-            <a:ext cx="1788109" cy="480060"/>
+            <a:off x="10104952" y="1243584"/>
+            <a:ext cx="1720982" cy="640080"/>
           </a:xfrm>
           <a:prstGeom prst="rect">
             <a:avLst/>
@@ -33358,7 +32448,7 @@
                 </a:solidFill>
                 <a:latin typeface="Arial"/>
               </a:rPr>
-              <a:t>After combustion</a:t>
+              <a:t>C 1s after (at%)</a:t>
             </a:r>
           </a:p>
         </p:txBody>
@@ -33371,8 +32461,8 @@
         </p:nvSpPr>
         <p:spPr>
           <a:xfrm>
-            <a:off x="6187287" y="1723644"/>
-            <a:ext cx="5638647" cy="480060"/>
+            <a:off x="6187287" y="1883664"/>
+            <a:ext cx="5638647" cy="640080"/>
           </a:xfrm>
           <a:prstGeom prst="rect">
             <a:avLst/>
@@ -33417,8 +32507,8 @@
         </p:nvSpPr>
         <p:spPr>
           <a:xfrm>
-            <a:off x="6278727" y="1723644"/>
-            <a:ext cx="1788109" cy="480060"/>
+            <a:off x="6278727" y="1883664"/>
+            <a:ext cx="1922362" cy="640080"/>
           </a:xfrm>
           <a:prstGeom prst="rect">
             <a:avLst/>
@@ -33439,7 +32529,7 @@
                 </a:solidFill>
                 <a:latin typeface="Arial"/>
               </a:rPr>
-              <a:t>Si 2p</a:t>
+              <a:t>HEC+MC/CSP</a:t>
             </a:r>
           </a:p>
         </p:txBody>
@@ -33452,8 +32542,8 @@
         </p:nvSpPr>
         <p:spPr>
           <a:xfrm>
-            <a:off x="8158276" y="1723644"/>
-            <a:ext cx="1788109" cy="480060"/>
+            <a:off x="8292530" y="1883664"/>
+            <a:ext cx="1720982" cy="640080"/>
           </a:xfrm>
           <a:prstGeom prst="rect">
             <a:avLst/>
@@ -33474,7 +32564,7 @@
                 </a:solidFill>
                 <a:latin typeface="Arial"/>
               </a:rPr>
-              <a:t>~4</a:t>
+              <a:t>25.6</a:t>
             </a:r>
           </a:p>
         </p:txBody>
@@ -33487,8 +32577,8 @@
         </p:nvSpPr>
         <p:spPr>
           <a:xfrm>
-            <a:off x="10037825" y="1723644"/>
-            <a:ext cx="1788109" cy="480060"/>
+            <a:off x="10104952" y="1883664"/>
+            <a:ext cx="1720982" cy="640080"/>
           </a:xfrm>
           <a:prstGeom prst="rect">
             <a:avLst/>
@@ -33505,11 +32595,11 @@
             <a:r>
               <a:rPr sz="1232" b="1" i="0">
                 <a:solidFill>
-                  <a:srgbClr val="5B8C5A"/>
-                </a:solidFill>
-                <a:latin typeface="Arial"/>
-              </a:rPr>
-              <a:t>~33</a:t>
+                  <a:srgbClr val="A05656"/>
+                </a:solidFill>
+                <a:latin typeface="Arial"/>
+              </a:rPr>
+              <a:t>14.9</a:t>
             </a:r>
           </a:p>
         </p:txBody>
@@ -33522,8 +32612,8 @@
         </p:nvSpPr>
         <p:spPr>
           <a:xfrm>
-            <a:off x="6187287" y="2203704"/>
-            <a:ext cx="5638647" cy="480060"/>
+            <a:off x="6187287" y="2523744"/>
+            <a:ext cx="5638647" cy="640080"/>
           </a:xfrm>
           <a:prstGeom prst="rect">
             <a:avLst/>
@@ -33568,8 +32658,8 @@
         </p:nvSpPr>
         <p:spPr>
           <a:xfrm>
-            <a:off x="6278727" y="2203704"/>
-            <a:ext cx="1788109" cy="480060"/>
+            <a:off x="6278727" y="2523744"/>
+            <a:ext cx="1922362" cy="640080"/>
           </a:xfrm>
           <a:prstGeom prst="rect">
             <a:avLst/>
@@ -33590,7 +32680,7 @@
                 </a:solidFill>
                 <a:latin typeface="Arial"/>
               </a:rPr>
-              <a:t>C 1s</a:t>
+              <a:t>MHEC/CSP</a:t>
             </a:r>
           </a:p>
         </p:txBody>
@@ -33603,8 +32693,8 @@
         </p:nvSpPr>
         <p:spPr>
           <a:xfrm>
-            <a:off x="8158276" y="2203704"/>
-            <a:ext cx="1788109" cy="480060"/>
+            <a:off x="8292530" y="2523744"/>
+            <a:ext cx="1720982" cy="640080"/>
           </a:xfrm>
           <a:prstGeom prst="rect">
             <a:avLst/>
@@ -33625,7 +32715,7 @@
                 </a:solidFill>
                 <a:latin typeface="Arial"/>
               </a:rPr>
-              <a:t>~55</a:t>
+              <a:t>38.3</a:t>
             </a:r>
           </a:p>
         </p:txBody>
@@ -33638,8 +32728,8 @@
         </p:nvSpPr>
         <p:spPr>
           <a:xfrm>
-            <a:off x="10037825" y="2203704"/>
-            <a:ext cx="1788109" cy="480060"/>
+            <a:off x="10104952" y="2523744"/>
+            <a:ext cx="1720982" cy="640080"/>
           </a:xfrm>
           <a:prstGeom prst="rect">
             <a:avLst/>
@@ -33660,165 +32750,14 @@
                 </a:solidFill>
                 <a:latin typeface="Arial"/>
               </a:rPr>
-              <a:t>~8</a:t>
-            </a:r>
-          </a:p>
-        </p:txBody>
-      </p:sp>
-      <p:sp>
-        <p:nvSpPr>
-          <p:cNvPr id="52" name="Rectangle 51"/>
-          <p:cNvSpPr/>
-          <p:nvPr/>
-        </p:nvSpPr>
-        <p:spPr>
-          <a:xfrm>
-            <a:off x="6187287" y="2683764"/>
-            <a:ext cx="5638647" cy="480060"/>
-          </a:xfrm>
-          <a:prstGeom prst="rect">
-            <a:avLst/>
-          </a:prstGeom>
-          <a:solidFill>
-            <a:srgbClr val="F8FAFC"/>
-          </a:solidFill>
-          <a:ln w="3810">
-            <a:solidFill>
-              <a:srgbClr val="E2E8F0"/>
-            </a:solidFill>
-          </a:ln>
-          <a:effectLst/>
-        </p:spPr>
-        <p:style>
-          <a:lnRef idx="1">
-            <a:schemeClr val="accent1"/>
-          </a:lnRef>
-          <a:fillRef idx="3">
-            <a:schemeClr val="accent1"/>
-          </a:fillRef>
-          <a:effectRef idx="2">
-            <a:schemeClr val="accent1"/>
-          </a:effectRef>
-          <a:fontRef idx="minor">
-            <a:schemeClr val="lt1"/>
-          </a:fontRef>
-        </p:style>
-        <p:txBody>
-          <a:bodyPr rtlCol="0" anchor="ctr"/>
-          <a:lstStyle/>
-          <a:p>
-            <a:pPr algn="ctr"/>
-          </a:p>
-        </p:txBody>
-      </p:sp>
-      <p:sp>
-        <p:nvSpPr>
-          <p:cNvPr id="53" name="TextBox 52"/>
-          <p:cNvSpPr txBox="1"/>
-          <p:nvPr/>
-        </p:nvSpPr>
-        <p:spPr>
-          <a:xfrm>
-            <a:off x="6278727" y="2683764"/>
-            <a:ext cx="1788109" cy="480060"/>
-          </a:xfrm>
-          <a:prstGeom prst="rect">
-            <a:avLst/>
-          </a:prstGeom>
-          <a:noFill/>
-        </p:spPr>
-        <p:txBody>
-          <a:bodyPr wrap="square" anchor="ctr" lIns="36000" rIns="36000" tIns="18000" bIns="18000">
-            <a:spAutoFit/>
-          </a:bodyPr>
-          <a:lstStyle/>
-          <a:p>
-            <a:pPr algn="l"/>
-            <a:r>
-              <a:rPr sz="1232" b="1" i="0">
-                <a:solidFill>
-                  <a:srgbClr val="334155"/>
-                </a:solidFill>
-                <a:latin typeface="Arial"/>
-              </a:rPr>
-              <a:t>O 1s</a:t>
-            </a:r>
-          </a:p>
-        </p:txBody>
-      </p:sp>
-      <p:sp>
-        <p:nvSpPr>
-          <p:cNvPr id="54" name="TextBox 53"/>
-          <p:cNvSpPr txBox="1"/>
-          <p:nvPr/>
-        </p:nvSpPr>
-        <p:spPr>
-          <a:xfrm>
-            <a:off x="8158276" y="2683764"/>
-            <a:ext cx="1788109" cy="480060"/>
-          </a:xfrm>
-          <a:prstGeom prst="rect">
-            <a:avLst/>
-          </a:prstGeom>
-          <a:noFill/>
-        </p:spPr>
-        <p:txBody>
-          <a:bodyPr wrap="square" anchor="ctr" lIns="36000" rIns="36000" tIns="18000" bIns="18000">
-            <a:spAutoFit/>
-          </a:bodyPr>
-          <a:lstStyle/>
-          <a:p>
-            <a:pPr algn="l"/>
-            <a:r>
-              <a:rPr sz="1232" b="0" i="0">
-                <a:solidFill>
-                  <a:srgbClr val="334155"/>
-                </a:solidFill>
-                <a:latin typeface="Arial"/>
-              </a:rPr>
-              <a:t>~41</a:t>
-            </a:r>
-          </a:p>
-        </p:txBody>
-      </p:sp>
-      <p:sp>
-        <p:nvSpPr>
-          <p:cNvPr id="55" name="TextBox 54"/>
-          <p:cNvSpPr txBox="1"/>
-          <p:nvPr/>
-        </p:nvSpPr>
-        <p:spPr>
-          <a:xfrm>
-            <a:off x="10037825" y="2683764"/>
-            <a:ext cx="1788109" cy="480060"/>
-          </a:xfrm>
-          <a:prstGeom prst="rect">
-            <a:avLst/>
-          </a:prstGeom>
-          <a:noFill/>
-        </p:spPr>
-        <p:txBody>
-          <a:bodyPr wrap="square" anchor="ctr" lIns="36000" rIns="36000" tIns="18000" bIns="18000">
-            <a:spAutoFit/>
-          </a:bodyPr>
-          <a:lstStyle/>
-          <a:p>
-            <a:pPr algn="l"/>
-            <a:r>
-              <a:rPr sz="1232" b="0" i="0">
-                <a:solidFill>
-                  <a:srgbClr val="334155"/>
-                </a:solidFill>
-                <a:latin typeface="Arial"/>
-              </a:rPr>
-              <a:t>~59</a:t>
-            </a:r>
-          </a:p>
-        </p:txBody>
-      </p:sp>
-      <p:sp>
-        <p:nvSpPr>
-          <p:cNvPr id="56" name="Rounded Rectangle 55"/>
+              <a:t>4.8</a:t>
+            </a:r>
+          </a:p>
+        </p:txBody>
+      </p:sp>
+      <p:sp>
+        <p:nvSpPr>
+          <p:cNvPr id="52" name="Rounded Rectangle 51"/>
           <p:cNvSpPr/>
           <p:nvPr/>
         </p:nvSpPr>
@@ -33864,7 +32803,7 @@
       </p:sp>
       <p:sp>
         <p:nvSpPr>
-          <p:cNvPr id="57" name="Rectangle 56"/>
+          <p:cNvPr id="53" name="Rectangle 52"/>
           <p:cNvSpPr/>
           <p:nvPr/>
         </p:nvSpPr>
@@ -33908,7 +32847,7 @@
       </p:sp>
       <p:sp>
         <p:nvSpPr>
-          <p:cNvPr id="58" name="TextBox 57"/>
+          <p:cNvPr id="54" name="TextBox 53"/>
           <p:cNvSpPr txBox="1"/>
           <p:nvPr/>
         </p:nvSpPr>
@@ -33943,7 +32882,7 @@
       </p:sp>
       <p:sp>
         <p:nvSpPr>
-          <p:cNvPr id="59" name="TextBox 58"/>
+          <p:cNvPr id="55" name="TextBox 54"/>
           <p:cNvSpPr txBox="1"/>
           <p:nvPr/>
         </p:nvSpPr>
@@ -33971,14 +32910,14 @@
                 </a:solidFill>
                 <a:latin typeface="Arial"/>
               </a:rPr>
-              <a:t>Si concentration increases ~8×, C concentration greatly reduced → organic matrix removed, silica exposed</a:t>
-            </a:r>
-          </a:p>
-        </p:txBody>
-      </p:sp>
-      <p:sp>
-        <p:nvSpPr>
-          <p:cNvPr id="60" name="Rounded Rectangle 59"/>
+              <a:t>Carbon greatly reduced (MHEC: 38.3→4.8 at%) → organic matrix combusted and removed; silica remains</a:t>
+            </a:r>
+          </a:p>
+        </p:txBody>
+      </p:sp>
+      <p:sp>
+        <p:nvSpPr>
+          <p:cNvPr id="56" name="Rounded Rectangle 55"/>
           <p:cNvSpPr/>
           <p:nvPr/>
         </p:nvSpPr>
@@ -34026,7 +32965,7 @@
       </p:sp>
       <p:sp>
         <p:nvSpPr>
-          <p:cNvPr id="61" name="TextBox 60"/>
+          <p:cNvPr id="57" name="TextBox 56"/>
           <p:cNvSpPr txBox="1"/>
           <p:nvPr/>
         </p:nvSpPr>
@@ -34061,7 +33000,7 @@
       </p:sp>
       <p:sp>
         <p:nvSpPr>
-          <p:cNvPr id="62" name="TextBox 61"/>
+          <p:cNvPr id="58" name="TextBox 57"/>
           <p:cNvSpPr txBox="1"/>
           <p:nvPr/>
         </p:nvSpPr>
@@ -42266,7 +41205,7 @@
                 </a:solidFill>
                 <a:latin typeface="Arial"/>
               </a:rPr>
-              <a:t>5× longer protection time</a:t>
+              <a:t>Far greater protection (water chars at ~0.3 min)</a:t>
             </a:r>
           </a:p>
         </p:txBody>
@@ -42336,7 +41275,7 @@
                 </a:solidFill>
                 <a:latin typeface="Arial"/>
               </a:rPr>
-              <a:t>Continues protecting after water evaporation</a:t>
+              <a:t>3–6× longer protection + continues after water evaporation</a:t>
             </a:r>
           </a:p>
         </p:txBody>
@@ -46962,16 +45901,16 @@
           <a:p>
             <a:pPr algn="ctr"/>
             <a:r>
-              <a:rPr sz="14560" b="1" i="0">
+              <a:rPr sz="11200" b="1" i="0">
                 <a:solidFill>
                   <a:srgbClr val="D4A574"/>
                 </a:solidFill>
                 <a:latin typeface="Arial"/>
               </a:rPr>
-              <a:t>5</a:t>
-            </a:r>
-            <a:r>
-              <a:rPr sz="8400" b="1" i="0">
+              <a:t>3–6</a:t>
+            </a:r>
+            <a:r>
+              <a:rPr sz="7280" b="1" i="0">
                 <a:solidFill>
                   <a:srgbClr val="C89A68"/>
                 </a:solidFill>
@@ -47012,7 +45951,7 @@
                 </a:solidFill>
                 <a:latin typeface="Arial"/>
               </a:rPr>
-              <a:t>Time to Char Improvement vs. Conventional (Water)</a:t>
+              <a:t>Time to Char Improvement vs. Commercial WEG (AquaGel-K)</a:t>
             </a:r>
           </a:p>
         </p:txBody>
@@ -47221,7 +46160,7 @@
                 </a:solidFill>
                 <a:latin typeface="Arial"/>
               </a:rPr>
-              <a:t>~10 min</a:t>
+              <a:t>&gt;7 min</a:t>
             </a:r>
           </a:p>
         </p:txBody>
@@ -47316,7 +46255,7 @@
         <p:spPr>
           <a:xfrm>
             <a:off x="4663440" y="5815584"/>
-            <a:ext cx="3090672" cy="146304"/>
+            <a:ext cx="3233318" cy="146304"/>
           </a:xfrm>
           <a:prstGeom prst="roundRect">
             <a:avLst>
@@ -47383,7 +46322,7 @@
                 </a:solidFill>
                 <a:latin typeface="Arial"/>
               </a:rPr>
-              <a:t>~2.6×</a:t>
+              <a:t>≈2.6×</a:t>
             </a:r>
           </a:p>
         </p:txBody>
@@ -47418,7 +46357,7 @@
                 </a:solidFill>
                 <a:latin typeface="Arial"/>
               </a:rPr>
-              <a:t>Power-law n</a:t>
+              <a:t>Shear-thinning</a:t>
             </a:r>
           </a:p>
         </p:txBody>
@@ -47478,7 +46417,7 @@
         <p:spPr>
           <a:xfrm>
             <a:off x="4663440" y="6108192"/>
-            <a:ext cx="523036" cy="146304"/>
+            <a:ext cx="2852928" cy="146304"/>
           </a:xfrm>
           <a:prstGeom prst="roundRect">
             <a:avLst>
@@ -47545,7 +46484,7 @@
                 </a:solidFill>
                 <a:latin typeface="Arial"/>
               </a:rPr>
-              <a:t>0.108</a:t>
+              <a:t>n &lt; 1</a:t>
             </a:r>
           </a:p>
         </p:txBody>

--- a/slides_en.pptx
+++ b/slides_en.pptx
@@ -46869,655 +46869,14 @@
       </p:sp>
       <p:sp>
         <p:nvSpPr>
-          <p:cNvPr id="10" name="Rounded Rectangle 9"/>
+          <p:cNvPr id="10" name="Rectangle 9"/>
           <p:cNvSpPr/>
           <p:nvPr/>
         </p:nvSpPr>
         <p:spPr>
           <a:xfrm>
             <a:off x="365760" y="859536"/>
-            <a:ext cx="2276996" cy="1554480"/>
-          </a:xfrm>
-          <a:prstGeom prst="roundRect">
-            <a:avLst>
-              <a:gd name="adj" fmla="val 4000"/>
-            </a:avLst>
-          </a:prstGeom>
-          <a:solidFill>
-            <a:srgbClr val="F1F5F9"/>
-          </a:solidFill>
-          <a:ln w="6350">
-            <a:solidFill>
-              <a:srgbClr val="E2E8F0"/>
-            </a:solidFill>
-          </a:ln>
-          <a:effectLst/>
-        </p:spPr>
-        <p:style>
-          <a:lnRef idx="1">
-            <a:schemeClr val="accent1"/>
-          </a:lnRef>
-          <a:fillRef idx="3">
-            <a:schemeClr val="accent1"/>
-          </a:fillRef>
-          <a:effectRef idx="2">
-            <a:schemeClr val="accent1"/>
-          </a:effectRef>
-          <a:fontRef idx="minor">
-            <a:schemeClr val="lt1"/>
-          </a:fontRef>
-        </p:style>
-        <p:txBody>
-          <a:bodyPr rtlCol="0" anchor="ctr"/>
-          <a:lstStyle/>
-          <a:p>
-            <a:pPr algn="ctr"/>
-          </a:p>
-        </p:txBody>
-      </p:sp>
-      <p:sp>
-        <p:nvSpPr>
-          <p:cNvPr id="11" name="TextBox 10"/>
-          <p:cNvSpPr txBox="1"/>
-          <p:nvPr/>
-        </p:nvSpPr>
-        <p:spPr>
-          <a:xfrm>
-            <a:off x="365760" y="1042416"/>
-            <a:ext cx="2276996" cy="777240"/>
-          </a:xfrm>
-          <a:prstGeom prst="rect">
-            <a:avLst/>
-          </a:prstGeom>
-          <a:noFill/>
-        </p:spPr>
-        <p:txBody>
-          <a:bodyPr wrap="square" anchor="ctr" lIns="36000" rIns="36000" tIns="18000" bIns="18000">
-            <a:spAutoFit/>
-          </a:bodyPr>
-          <a:lstStyle/>
-          <a:p>
-            <a:pPr algn="ctr"/>
-            <a:r>
-              <a:rPr sz="5152" b="1" i="0">
-                <a:solidFill>
-                  <a:srgbClr val="1E293B"/>
-                </a:solidFill>
-                <a:latin typeface="Arial"/>
-              </a:rPr>
-              <a:t>5</a:t>
-            </a:r>
-            <a:r>
-              <a:rPr sz="2240" b="0" i="0">
-                <a:solidFill>
-                  <a:srgbClr val="475569"/>
-                </a:solidFill>
-                <a:latin typeface="Arial"/>
-              </a:rPr>
-              <a:t>×</a:t>
-            </a:r>
-          </a:p>
-        </p:txBody>
-      </p:sp>
-      <p:sp>
-        <p:nvSpPr>
-          <p:cNvPr id="12" name="TextBox 11"/>
-          <p:cNvSpPr txBox="1"/>
-          <p:nvPr/>
-        </p:nvSpPr>
-        <p:spPr>
-          <a:xfrm>
-            <a:off x="457200" y="1865376"/>
-            <a:ext cx="2094116" cy="292608"/>
-          </a:xfrm>
-          <a:prstGeom prst="rect">
-            <a:avLst/>
-          </a:prstGeom>
-          <a:noFill/>
-        </p:spPr>
-        <p:txBody>
-          <a:bodyPr wrap="square" anchor="t" lIns="36000" rIns="36000" tIns="18000" bIns="18000">
-            <a:spAutoFit/>
-          </a:bodyPr>
-          <a:lstStyle/>
-          <a:p>
-            <a:pPr algn="ctr"/>
-            <a:r>
-              <a:rPr sz="1344" b="1" i="0">
-                <a:solidFill>
-                  <a:srgbClr val="334155"/>
-                </a:solidFill>
-                <a:latin typeface="Arial"/>
-              </a:rPr>
-              <a:t>Increase in Large-Scale Wildfires</a:t>
-            </a:r>
-          </a:p>
-        </p:txBody>
-      </p:sp>
-      <p:sp>
-        <p:nvSpPr>
-          <p:cNvPr id="13" name="TextBox 12"/>
-          <p:cNvSpPr txBox="1"/>
-          <p:nvPr/>
-        </p:nvSpPr>
-        <p:spPr>
-          <a:xfrm>
-            <a:off x="457200" y="2157984"/>
-            <a:ext cx="2094116" cy="274320"/>
-          </a:xfrm>
-          <a:prstGeom prst="rect">
-            <a:avLst/>
-          </a:prstGeom>
-          <a:noFill/>
-        </p:spPr>
-        <p:txBody>
-          <a:bodyPr wrap="square" anchor="t" lIns="36000" rIns="36000" tIns="18000" bIns="18000">
-            <a:spAutoFit/>
-          </a:bodyPr>
-          <a:lstStyle/>
-          <a:p>
-            <a:pPr algn="ctr"/>
-            <a:r>
-              <a:rPr sz="1120" b="0" i="0">
-                <a:solidFill>
-                  <a:srgbClr val="64748B"/>
-                </a:solidFill>
-                <a:latin typeface="Arial"/>
-              </a:rPr>
-              <a:t>Burned area expansion over past 30 years</a:t>
-            </a:r>
-          </a:p>
-        </p:txBody>
-      </p:sp>
-      <p:sp>
-        <p:nvSpPr>
-          <p:cNvPr id="14" name="Rounded Rectangle 13"/>
-          <p:cNvSpPr/>
-          <p:nvPr/>
-        </p:nvSpPr>
-        <p:spPr>
-          <a:xfrm>
-            <a:off x="2734196" y="859536"/>
-            <a:ext cx="2276996" cy="1554480"/>
-          </a:xfrm>
-          <a:prstGeom prst="roundRect">
-            <a:avLst>
-              <a:gd name="adj" fmla="val 4000"/>
-            </a:avLst>
-          </a:prstGeom>
-          <a:solidFill>
-            <a:srgbClr val="F1F5F9"/>
-          </a:solidFill>
-          <a:ln w="6350">
-            <a:solidFill>
-              <a:srgbClr val="E2E8F0"/>
-            </a:solidFill>
-          </a:ln>
-          <a:effectLst/>
-        </p:spPr>
-        <p:style>
-          <a:lnRef idx="1">
-            <a:schemeClr val="accent1"/>
-          </a:lnRef>
-          <a:fillRef idx="3">
-            <a:schemeClr val="accent1"/>
-          </a:fillRef>
-          <a:effectRef idx="2">
-            <a:schemeClr val="accent1"/>
-          </a:effectRef>
-          <a:fontRef idx="minor">
-            <a:schemeClr val="lt1"/>
-          </a:fontRef>
-        </p:style>
-        <p:txBody>
-          <a:bodyPr rtlCol="0" anchor="ctr"/>
-          <a:lstStyle/>
-          <a:p>
-            <a:pPr algn="ctr"/>
-          </a:p>
-        </p:txBody>
-      </p:sp>
-      <p:sp>
-        <p:nvSpPr>
-          <p:cNvPr id="15" name="TextBox 14"/>
-          <p:cNvSpPr txBox="1"/>
-          <p:nvPr/>
-        </p:nvSpPr>
-        <p:spPr>
-          <a:xfrm>
-            <a:off x="2734196" y="1042416"/>
-            <a:ext cx="2276996" cy="777240"/>
-          </a:xfrm>
-          <a:prstGeom prst="rect">
-            <a:avLst/>
-          </a:prstGeom>
-          <a:noFill/>
-        </p:spPr>
-        <p:txBody>
-          <a:bodyPr wrap="square" anchor="ctr" lIns="36000" rIns="36000" tIns="18000" bIns="18000">
-            <a:spAutoFit/>
-          </a:bodyPr>
-          <a:lstStyle/>
-          <a:p>
-            <a:pPr algn="ctr"/>
-            <a:r>
-              <a:rPr sz="4480" b="1" i="0">
-                <a:solidFill>
-                  <a:srgbClr val="1E293B"/>
-                </a:solidFill>
-                <a:latin typeface="Arial"/>
-              </a:rPr>
-              <a:t>400</a:t>
-            </a:r>
-            <a:r>
-              <a:rPr sz="2016" b="0" i="0">
-                <a:solidFill>
-                  <a:srgbClr val="475569"/>
-                </a:solidFill>
-                <a:latin typeface="Arial"/>
-              </a:rPr>
-              <a:t>M km²</a:t>
-            </a:r>
-          </a:p>
-        </p:txBody>
-      </p:sp>
-      <p:sp>
-        <p:nvSpPr>
-          <p:cNvPr id="16" name="TextBox 15"/>
-          <p:cNvSpPr txBox="1"/>
-          <p:nvPr/>
-        </p:nvSpPr>
-        <p:spPr>
-          <a:xfrm>
-            <a:off x="2825636" y="1865376"/>
-            <a:ext cx="2094116" cy="292608"/>
-          </a:xfrm>
-          <a:prstGeom prst="rect">
-            <a:avLst/>
-          </a:prstGeom>
-          <a:noFill/>
-        </p:spPr>
-        <p:txBody>
-          <a:bodyPr wrap="square" anchor="t" lIns="36000" rIns="36000" tIns="18000" bIns="18000">
-            <a:spAutoFit/>
-          </a:bodyPr>
-          <a:lstStyle/>
-          <a:p>
-            <a:pPr algn="ctr"/>
-            <a:r>
-              <a:rPr sz="1344" b="1" i="0">
-                <a:solidFill>
-                  <a:srgbClr val="334155"/>
-                </a:solidFill>
-                <a:latin typeface="Arial"/>
-              </a:rPr>
-              <a:t>Annual Burned Area (Global)</a:t>
-            </a:r>
-          </a:p>
-        </p:txBody>
-      </p:sp>
-      <p:sp>
-        <p:nvSpPr>
-          <p:cNvPr id="17" name="TextBox 16"/>
-          <p:cNvSpPr txBox="1"/>
-          <p:nvPr/>
-        </p:nvSpPr>
-        <p:spPr>
-          <a:xfrm>
-            <a:off x="2825636" y="2157984"/>
-            <a:ext cx="2094116" cy="274320"/>
-          </a:xfrm>
-          <a:prstGeom prst="rect">
-            <a:avLst/>
-          </a:prstGeom>
-          <a:noFill/>
-        </p:spPr>
-        <p:txBody>
-          <a:bodyPr wrap="square" anchor="t" lIns="36000" rIns="36000" tIns="18000" bIns="18000">
-            <a:spAutoFit/>
-          </a:bodyPr>
-          <a:lstStyle/>
-          <a:p>
-            <a:pPr algn="ctr"/>
-            <a:r>
-              <a:rPr sz="1120" b="0" i="0">
-                <a:solidFill>
-                  <a:srgbClr val="64748B"/>
-                </a:solidFill>
-                <a:latin typeface="Arial"/>
-              </a:rPr>
-              <a:t>Caused by climate change and drought</a:t>
-            </a:r>
-          </a:p>
-        </p:txBody>
-      </p:sp>
-      <p:sp>
-        <p:nvSpPr>
-          <p:cNvPr id="18" name="Rounded Rectangle 17"/>
-          <p:cNvSpPr/>
-          <p:nvPr/>
-        </p:nvSpPr>
-        <p:spPr>
-          <a:xfrm>
-            <a:off x="5102632" y="859536"/>
-            <a:ext cx="2276996" cy="1554480"/>
-          </a:xfrm>
-          <a:prstGeom prst="roundRect">
-            <a:avLst>
-              <a:gd name="adj" fmla="val 4000"/>
-            </a:avLst>
-          </a:prstGeom>
-          <a:solidFill>
-            <a:srgbClr val="F1F5F9"/>
-          </a:solidFill>
-          <a:ln w="6350">
-            <a:solidFill>
-              <a:srgbClr val="E2E8F0"/>
-            </a:solidFill>
-          </a:ln>
-          <a:effectLst/>
-        </p:spPr>
-        <p:style>
-          <a:lnRef idx="1">
-            <a:schemeClr val="accent1"/>
-          </a:lnRef>
-          <a:fillRef idx="3">
-            <a:schemeClr val="accent1"/>
-          </a:fillRef>
-          <a:effectRef idx="2">
-            <a:schemeClr val="accent1"/>
-          </a:effectRef>
-          <a:fontRef idx="minor">
-            <a:schemeClr val="lt1"/>
-          </a:fontRef>
-        </p:style>
-        <p:txBody>
-          <a:bodyPr rtlCol="0" anchor="ctr"/>
-          <a:lstStyle/>
-          <a:p>
-            <a:pPr algn="ctr"/>
-          </a:p>
-        </p:txBody>
-      </p:sp>
-      <p:sp>
-        <p:nvSpPr>
-          <p:cNvPr id="19" name="TextBox 18"/>
-          <p:cNvSpPr txBox="1"/>
-          <p:nvPr/>
-        </p:nvSpPr>
-        <p:spPr>
-          <a:xfrm>
-            <a:off x="5102632" y="1042416"/>
-            <a:ext cx="2276996" cy="777240"/>
-          </a:xfrm>
-          <a:prstGeom prst="rect">
-            <a:avLst/>
-          </a:prstGeom>
-          <a:noFill/>
-        </p:spPr>
-        <p:txBody>
-          <a:bodyPr wrap="square" anchor="ctr" lIns="36000" rIns="36000" tIns="18000" bIns="18000">
-            <a:spAutoFit/>
-          </a:bodyPr>
-          <a:lstStyle/>
-          <a:p>
-            <a:pPr algn="ctr"/>
-            <a:r>
-              <a:rPr sz="4704" b="1" i="0">
-                <a:solidFill>
-                  <a:srgbClr val="1E293B"/>
-                </a:solidFill>
-                <a:latin typeface="Arial"/>
-              </a:rPr>
-              <a:t>45M</a:t>
-            </a:r>
-          </a:p>
-        </p:txBody>
-      </p:sp>
-      <p:sp>
-        <p:nvSpPr>
-          <p:cNvPr id="20" name="TextBox 19"/>
-          <p:cNvSpPr txBox="1"/>
-          <p:nvPr/>
-        </p:nvSpPr>
-        <p:spPr>
-          <a:xfrm>
-            <a:off x="5194072" y="1865376"/>
-            <a:ext cx="2094116" cy="292608"/>
-          </a:xfrm>
-          <a:prstGeom prst="rect">
-            <a:avLst/>
-          </a:prstGeom>
-          <a:noFill/>
-        </p:spPr>
-        <p:txBody>
-          <a:bodyPr wrap="square" anchor="t" lIns="36000" rIns="36000" tIns="18000" bIns="18000">
-            <a:spAutoFit/>
-          </a:bodyPr>
-          <a:lstStyle/>
-          <a:p>
-            <a:pPr algn="ctr"/>
-            <a:r>
-              <a:rPr sz="1344" b="1" i="0">
-                <a:solidFill>
-                  <a:srgbClr val="334155"/>
-                </a:solidFill>
-                <a:latin typeface="Arial"/>
-              </a:rPr>
-              <a:t>U.S. WUI Residents</a:t>
-            </a:r>
-          </a:p>
-        </p:txBody>
-      </p:sp>
-      <p:sp>
-        <p:nvSpPr>
-          <p:cNvPr id="21" name="TextBox 20"/>
-          <p:cNvSpPr txBox="1"/>
-          <p:nvPr/>
-        </p:nvSpPr>
-        <p:spPr>
-          <a:xfrm>
-            <a:off x="5194072" y="2157984"/>
-            <a:ext cx="2094116" cy="274320"/>
-          </a:xfrm>
-          <a:prstGeom prst="rect">
-            <a:avLst/>
-          </a:prstGeom>
-          <a:noFill/>
-        </p:spPr>
-        <p:txBody>
-          <a:bodyPr wrap="square" anchor="t" lIns="36000" rIns="36000" tIns="18000" bIns="18000">
-            <a:spAutoFit/>
-          </a:bodyPr>
-          <a:lstStyle/>
-          <a:p>
-            <a:pPr algn="ctr"/>
-            <a:r>
-              <a:rPr sz="1120" b="0" i="0">
-                <a:solidFill>
-                  <a:srgbClr val="64748B"/>
-                </a:solidFill>
-                <a:latin typeface="Arial"/>
-              </a:rPr>
-              <a:t>High-risk population in interface zone</a:t>
-            </a:r>
-          </a:p>
-        </p:txBody>
-      </p:sp>
-      <p:sp>
-        <p:nvSpPr>
-          <p:cNvPr id="22" name="Rounded Rectangle 21"/>
-          <p:cNvSpPr/>
-          <p:nvPr/>
-        </p:nvSpPr>
-        <p:spPr>
-          <a:xfrm>
-            <a:off x="365760" y="2596896"/>
-            <a:ext cx="7013868" cy="914400"/>
-          </a:xfrm>
-          <a:prstGeom prst="roundRect">
-            <a:avLst>
-              <a:gd name="adj" fmla="val 4000"/>
-            </a:avLst>
-          </a:prstGeom>
-          <a:solidFill>
-            <a:srgbClr val="FFFFFF"/>
-          </a:solidFill>
-          <a:ln w="6350">
-            <a:solidFill>
-              <a:srgbClr val="E2E8F0"/>
-            </a:solidFill>
-          </a:ln>
-          <a:effectLst/>
-        </p:spPr>
-        <p:style>
-          <a:lnRef idx="1">
-            <a:schemeClr val="accent1"/>
-          </a:lnRef>
-          <a:fillRef idx="3">
-            <a:schemeClr val="accent1"/>
-          </a:fillRef>
-          <a:effectRef idx="2">
-            <a:schemeClr val="accent1"/>
-          </a:effectRef>
-          <a:fontRef idx="minor">
-            <a:schemeClr val="lt1"/>
-          </a:fontRef>
-        </p:style>
-        <p:txBody>
-          <a:bodyPr rtlCol="0" anchor="ctr"/>
-          <a:lstStyle/>
-          <a:p>
-            <a:pPr algn="ctr"/>
-          </a:p>
-        </p:txBody>
-      </p:sp>
-      <p:sp>
-        <p:nvSpPr>
-          <p:cNvPr id="23" name="TextBox 22"/>
-          <p:cNvSpPr txBox="1"/>
-          <p:nvPr/>
-        </p:nvSpPr>
-        <p:spPr>
-          <a:xfrm>
-            <a:off x="548640" y="2724912"/>
-            <a:ext cx="6648108" cy="274320"/>
-          </a:xfrm>
-          <a:prstGeom prst="rect">
-            <a:avLst/>
-          </a:prstGeom>
-          <a:noFill/>
-        </p:spPr>
-        <p:txBody>
-          <a:bodyPr wrap="square" anchor="t" lIns="36000" rIns="36000" tIns="18000" bIns="18000">
-            <a:spAutoFit/>
-          </a:bodyPr>
-          <a:lstStyle/>
-          <a:p>
-            <a:pPr algn="l"/>
-            <a:r>
-              <a:rPr sz="1232" b="1" i="0">
-                <a:solidFill>
-                  <a:srgbClr val="64748B"/>
-                </a:solidFill>
-                <a:latin typeface="Arial"/>
-              </a:rPr>
-              <a:t>Terminology</a:t>
-            </a:r>
-          </a:p>
-        </p:txBody>
-      </p:sp>
-      <p:sp>
-        <p:nvSpPr>
-          <p:cNvPr id="24" name="TextBox 23"/>
-          <p:cNvSpPr txBox="1"/>
-          <p:nvPr/>
-        </p:nvSpPr>
-        <p:spPr>
-          <a:xfrm>
-            <a:off x="548640" y="2980944"/>
-            <a:ext cx="6648108" cy="502920"/>
-          </a:xfrm>
-          <a:prstGeom prst="rect">
-            <a:avLst/>
-          </a:prstGeom>
-          <a:noFill/>
-        </p:spPr>
-        <p:txBody>
-          <a:bodyPr wrap="square" anchor="t" lIns="36000" rIns="36000" tIns="18000" bIns="18000">
-            <a:spAutoFit/>
-          </a:bodyPr>
-          <a:lstStyle/>
-          <a:p>
-            <a:pPr algn="l"/>
-            <a:r>
-              <a:rPr sz="1456" b="0" i="0">
-                <a:solidFill>
-                  <a:srgbClr val="1E293B"/>
-                </a:solidFill>
-                <a:latin typeface="Arial"/>
-              </a:rPr>
-              <a:t>WUI (Wildland-Urban Interface): The boundary zone between wildland and urban areas. A high-risk region where wildfire damage directly threatens residential structures.</a:t>
-            </a:r>
-          </a:p>
-        </p:txBody>
-      </p:sp>
-      <p:sp>
-        <p:nvSpPr>
-          <p:cNvPr id="25" name="Rounded Rectangle 24"/>
-          <p:cNvSpPr/>
-          <p:nvPr/>
-        </p:nvSpPr>
-        <p:spPr>
-          <a:xfrm>
-            <a:off x="365760" y="3675888"/>
-            <a:ext cx="7013868" cy="594360"/>
-          </a:xfrm>
-          <a:prstGeom prst="roundRect">
-            <a:avLst>
-              <a:gd name="adj" fmla="val 4000"/>
-            </a:avLst>
-          </a:prstGeom>
-          <a:solidFill>
-            <a:srgbClr val="F8FAFC"/>
-          </a:solidFill>
-          <a:ln>
-            <a:noFill/>
-          </a:ln>
-          <a:effectLst/>
-        </p:spPr>
-        <p:style>
-          <a:lnRef idx="1">
-            <a:schemeClr val="accent1"/>
-          </a:lnRef>
-          <a:fillRef idx="3">
-            <a:schemeClr val="accent1"/>
-          </a:fillRef>
-          <a:effectRef idx="2">
-            <a:schemeClr val="accent1"/>
-          </a:effectRef>
-          <a:fontRef idx="minor">
-            <a:schemeClr val="lt1"/>
-          </a:fontRef>
-        </p:style>
-        <p:txBody>
-          <a:bodyPr rtlCol="0" anchor="ctr"/>
-          <a:lstStyle/>
-          <a:p>
-            <a:pPr algn="ctr"/>
-          </a:p>
-        </p:txBody>
-      </p:sp>
-      <p:sp>
-        <p:nvSpPr>
-          <p:cNvPr id="26" name="Rectangle 25"/>
-          <p:cNvSpPr/>
-          <p:nvPr/>
-        </p:nvSpPr>
-        <p:spPr>
-          <a:xfrm>
-            <a:off x="365760" y="3675888"/>
-            <a:ext cx="54864" cy="594360"/>
+            <a:ext cx="45720" cy="1645920"/>
           </a:xfrm>
           <a:prstGeom prst="rect">
             <a:avLst/>
@@ -47554,57 +46913,57 @@
       </p:sp>
       <p:sp>
         <p:nvSpPr>
-          <p:cNvPr id="27" name="TextBox 26"/>
-          <p:cNvSpPr txBox="1"/>
-          <p:nvPr/>
-        </p:nvSpPr>
-        <p:spPr>
-          <a:xfrm>
-            <a:off x="548640" y="3675888"/>
-            <a:ext cx="365760" cy="594360"/>
-          </a:xfrm>
-          <a:prstGeom prst="rect">
-            <a:avLst/>
-          </a:prstGeom>
-          <a:noFill/>
-        </p:spPr>
-        <p:txBody>
-          <a:bodyPr wrap="square" anchor="ctr" lIns="36000" rIns="36000" tIns="18000" bIns="18000">
-            <a:spAutoFit/>
-          </a:bodyPr>
-          <a:lstStyle/>
-          <a:p>
-            <a:pPr algn="l"/>
-            <a:r>
-              <a:rPr sz="1568" b="0" i="0">
-                <a:solidFill>
-                  <a:srgbClr val="3B5174"/>
-                </a:solidFill>
-                <a:latin typeface="Arial"/>
-              </a:rPr>
-              <a:t>⚠</a:t>
-            </a:r>
-          </a:p>
-        </p:txBody>
-      </p:sp>
-      <p:sp>
-        <p:nvSpPr>
-          <p:cNvPr id="28" name="TextBox 27"/>
-          <p:cNvSpPr txBox="1"/>
-          <p:nvPr/>
-        </p:nvSpPr>
-        <p:spPr>
-          <a:xfrm>
-            <a:off x="960120" y="3675888"/>
-            <a:ext cx="6328068" cy="594360"/>
-          </a:xfrm>
-          <a:prstGeom prst="rect">
-            <a:avLst/>
-          </a:prstGeom>
-          <a:noFill/>
-        </p:spPr>
-        <p:txBody>
-          <a:bodyPr wrap="square" anchor="ctr" lIns="36000" rIns="36000" tIns="18000" bIns="18000">
+          <p:cNvPr id="11" name="TextBox 10"/>
+          <p:cNvSpPr txBox="1"/>
+          <p:nvPr/>
+        </p:nvSpPr>
+        <p:spPr>
+          <a:xfrm>
+            <a:off x="530352" y="859536"/>
+            <a:ext cx="4538953" cy="1005840"/>
+          </a:xfrm>
+          <a:prstGeom prst="rect">
+            <a:avLst/>
+          </a:prstGeom>
+          <a:noFill/>
+        </p:spPr>
+        <p:txBody>
+          <a:bodyPr wrap="square" anchor="t" lIns="36000" rIns="36000" tIns="18000" bIns="18000">
+            <a:spAutoFit/>
+          </a:bodyPr>
+          <a:lstStyle/>
+          <a:p>
+            <a:pPr algn="l"/>
+            <a:r>
+              <a:rPr sz="7616" b="1" i="0">
+                <a:solidFill>
+                  <a:srgbClr val="1E293B"/>
+                </a:solidFill>
+                <a:latin typeface="Arial"/>
+              </a:rPr>
+              <a:t>5×</a:t>
+            </a:r>
+          </a:p>
+        </p:txBody>
+      </p:sp>
+      <p:sp>
+        <p:nvSpPr>
+          <p:cNvPr id="12" name="TextBox 11"/>
+          <p:cNvSpPr txBox="1"/>
+          <p:nvPr/>
+        </p:nvSpPr>
+        <p:spPr>
+          <a:xfrm>
+            <a:off x="530352" y="1847088"/>
+            <a:ext cx="4538953" cy="292608"/>
+          </a:xfrm>
+          <a:prstGeom prst="rect">
+            <a:avLst/>
+          </a:prstGeom>
+          <a:noFill/>
+        </p:spPr>
+        <p:txBody>
+          <a:bodyPr wrap="square" anchor="t" lIns="36000" rIns="36000" tIns="18000" bIns="18000">
             <a:spAutoFit/>
           </a:bodyPr>
           <a:lstStyle/>
@@ -47613,25 +46972,344 @@
             <a:r>
               <a:rPr sz="1456" b="1" i="0">
                 <a:solidFill>
+                  <a:srgbClr val="334155"/>
+                </a:solidFill>
+                <a:latin typeface="Arial"/>
+              </a:rPr>
+              <a:t>Increase in large-scale wildfires (past 30 years)</a:t>
+            </a:r>
+          </a:p>
+        </p:txBody>
+      </p:sp>
+      <p:sp>
+        <p:nvSpPr>
+          <p:cNvPr id="13" name="TextBox 12"/>
+          <p:cNvSpPr txBox="1"/>
+          <p:nvPr/>
+        </p:nvSpPr>
+        <p:spPr>
+          <a:xfrm>
+            <a:off x="530352" y="2139696"/>
+            <a:ext cx="4538953" cy="256032"/>
+          </a:xfrm>
+          <a:prstGeom prst="rect">
+            <a:avLst/>
+          </a:prstGeom>
+          <a:noFill/>
+        </p:spPr>
+        <p:txBody>
+          <a:bodyPr wrap="square" anchor="t" lIns="36000" rIns="36000" tIns="18000" bIns="18000">
+            <a:spAutoFit/>
+          </a:bodyPr>
+          <a:lstStyle/>
+          <a:p>
+            <a:pPr algn="l"/>
+            <a:r>
+              <a:rPr sz="1232" b="0" i="0">
+                <a:solidFill>
+                  <a:srgbClr val="64748B"/>
+                </a:solidFill>
+                <a:latin typeface="Arial"/>
+              </a:rPr>
+              <a:t>Driven by climate change and prolonged drought</a:t>
+            </a:r>
+          </a:p>
+        </p:txBody>
+      </p:sp>
+      <p:sp>
+        <p:nvSpPr>
+          <p:cNvPr id="14" name="Rectangle 13"/>
+          <p:cNvSpPr/>
+          <p:nvPr/>
+        </p:nvSpPr>
+        <p:spPr>
+          <a:xfrm>
+            <a:off x="530352" y="2560320"/>
+            <a:ext cx="3527659" cy="18288"/>
+          </a:xfrm>
+          <a:prstGeom prst="rect">
+            <a:avLst/>
+          </a:prstGeom>
+          <a:solidFill>
+            <a:srgbClr val="E2E8F0"/>
+          </a:solidFill>
+          <a:ln>
+            <a:noFill/>
+          </a:ln>
+          <a:effectLst/>
+        </p:spPr>
+        <p:style>
+          <a:lnRef idx="1">
+            <a:schemeClr val="accent1"/>
+          </a:lnRef>
+          <a:fillRef idx="3">
+            <a:schemeClr val="accent1"/>
+          </a:fillRef>
+          <a:effectRef idx="2">
+            <a:schemeClr val="accent1"/>
+          </a:effectRef>
+          <a:fontRef idx="minor">
+            <a:schemeClr val="lt1"/>
+          </a:fontRef>
+        </p:style>
+        <p:txBody>
+          <a:bodyPr rtlCol="0" anchor="ctr"/>
+          <a:lstStyle/>
+          <a:p>
+            <a:pPr algn="ctr"/>
+          </a:p>
+        </p:txBody>
+      </p:sp>
+      <p:sp>
+        <p:nvSpPr>
+          <p:cNvPr id="15" name="Rectangle 14"/>
+          <p:cNvSpPr/>
+          <p:nvPr/>
+        </p:nvSpPr>
+        <p:spPr>
+          <a:xfrm>
+            <a:off x="365760" y="2761488"/>
+            <a:ext cx="45720" cy="1463040"/>
+          </a:xfrm>
+          <a:prstGeom prst="rect">
+            <a:avLst/>
+          </a:prstGeom>
+          <a:solidFill>
+            <a:srgbClr val="9F7639"/>
+          </a:solidFill>
+          <a:ln>
+            <a:noFill/>
+          </a:ln>
+          <a:effectLst/>
+        </p:spPr>
+        <p:style>
+          <a:lnRef idx="1">
+            <a:schemeClr val="accent1"/>
+          </a:lnRef>
+          <a:fillRef idx="3">
+            <a:schemeClr val="accent1"/>
+          </a:fillRef>
+          <a:effectRef idx="2">
+            <a:schemeClr val="accent1"/>
+          </a:effectRef>
+          <a:fontRef idx="minor">
+            <a:schemeClr val="lt1"/>
+          </a:fontRef>
+        </p:style>
+        <p:txBody>
+          <a:bodyPr rtlCol="0" anchor="ctr"/>
+          <a:lstStyle/>
+          <a:p>
+            <a:pPr algn="ctr"/>
+          </a:p>
+        </p:txBody>
+      </p:sp>
+      <p:sp>
+        <p:nvSpPr>
+          <p:cNvPr id="16" name="TextBox 15"/>
+          <p:cNvSpPr txBox="1"/>
+          <p:nvPr/>
+        </p:nvSpPr>
+        <p:spPr>
+          <a:xfrm>
+            <a:off x="530352" y="2761488"/>
+            <a:ext cx="4538953" cy="822960"/>
+          </a:xfrm>
+          <a:prstGeom prst="rect">
+            <a:avLst/>
+          </a:prstGeom>
+          <a:noFill/>
+        </p:spPr>
+        <p:txBody>
+          <a:bodyPr wrap="square" anchor="t" lIns="36000" rIns="36000" tIns="18000" bIns="18000">
+            <a:spAutoFit/>
+          </a:bodyPr>
+          <a:lstStyle/>
+          <a:p>
+            <a:pPr algn="l"/>
+            <a:r>
+              <a:rPr sz="4480" b="1" i="0">
+                <a:solidFill>
                   <a:srgbClr val="1E293B"/>
                 </a:solidFill>
                 <a:latin typeface="Arial"/>
               </a:rPr>
-              <a:t>Climate change extends dry and high-wind periods → Conventional firefighting strategies cannot keep pace</a:t>
-            </a:r>
-          </a:p>
-        </p:txBody>
-      </p:sp>
-      <p:sp>
-        <p:nvSpPr>
-          <p:cNvPr id="29" name="Rounded Rectangle 28"/>
+              <a:t>45 million</a:t>
+            </a:r>
+          </a:p>
+        </p:txBody>
+      </p:sp>
+      <p:sp>
+        <p:nvSpPr>
+          <p:cNvPr id="17" name="TextBox 16"/>
+          <p:cNvSpPr txBox="1"/>
+          <p:nvPr/>
+        </p:nvSpPr>
+        <p:spPr>
+          <a:xfrm>
+            <a:off x="530352" y="3584448"/>
+            <a:ext cx="4538953" cy="292608"/>
+          </a:xfrm>
+          <a:prstGeom prst="rect">
+            <a:avLst/>
+          </a:prstGeom>
+          <a:noFill/>
+        </p:spPr>
+        <p:txBody>
+          <a:bodyPr wrap="square" anchor="t" lIns="36000" rIns="36000" tIns="18000" bIns="18000">
+            <a:spAutoFit/>
+          </a:bodyPr>
+          <a:lstStyle/>
+          <a:p>
+            <a:pPr algn="l"/>
+            <a:r>
+              <a:rPr sz="1456" b="1" i="0">
+                <a:solidFill>
+                  <a:srgbClr val="334155"/>
+                </a:solidFill>
+                <a:latin typeface="Arial"/>
+              </a:rPr>
+              <a:t>U.S. WUI residents</a:t>
+            </a:r>
+          </a:p>
+        </p:txBody>
+      </p:sp>
+      <p:sp>
+        <p:nvSpPr>
+          <p:cNvPr id="18" name="TextBox 17"/>
+          <p:cNvSpPr txBox="1"/>
+          <p:nvPr/>
+        </p:nvSpPr>
+        <p:spPr>
+          <a:xfrm>
+            <a:off x="530352" y="3877056"/>
+            <a:ext cx="4538953" cy="256032"/>
+          </a:xfrm>
+          <a:prstGeom prst="rect">
+            <a:avLst/>
+          </a:prstGeom>
+          <a:noFill/>
+        </p:spPr>
+        <p:txBody>
+          <a:bodyPr wrap="square" anchor="t" lIns="36000" rIns="36000" tIns="18000" bIns="18000">
+            <a:spAutoFit/>
+          </a:bodyPr>
+          <a:lstStyle/>
+          <a:p>
+            <a:pPr algn="l"/>
+            <a:r>
+              <a:rPr sz="1232" b="0" i="0">
+                <a:solidFill>
+                  <a:srgbClr val="64748B"/>
+                </a:solidFill>
+                <a:latin typeface="Arial"/>
+              </a:rPr>
+              <a:t>High-risk population at the wildland–urban interface</a:t>
+            </a:r>
+          </a:p>
+        </p:txBody>
+      </p:sp>
+      <p:sp>
+        <p:nvSpPr>
+          <p:cNvPr id="19" name="Rectangle 18"/>
           <p:cNvSpPr/>
           <p:nvPr/>
         </p:nvSpPr>
         <p:spPr>
           <a:xfrm>
-            <a:off x="7562508" y="859536"/>
-            <a:ext cx="4263426" cy="4206240"/>
+            <a:off x="530352" y="4315968"/>
+            <a:ext cx="4233190" cy="18288"/>
+          </a:xfrm>
+          <a:prstGeom prst="rect">
+            <a:avLst/>
+          </a:prstGeom>
+          <a:solidFill>
+            <a:srgbClr val="E2E8F0"/>
+          </a:solidFill>
+          <a:ln>
+            <a:noFill/>
+          </a:ln>
+          <a:effectLst/>
+        </p:spPr>
+        <p:style>
+          <a:lnRef idx="1">
+            <a:schemeClr val="accent1"/>
+          </a:lnRef>
+          <a:fillRef idx="3">
+            <a:schemeClr val="accent1"/>
+          </a:fillRef>
+          <a:effectRef idx="2">
+            <a:schemeClr val="accent1"/>
+          </a:effectRef>
+          <a:fontRef idx="minor">
+            <a:schemeClr val="lt1"/>
+          </a:fontRef>
+        </p:style>
+        <p:txBody>
+          <a:bodyPr rtlCol="0" anchor="ctr"/>
+          <a:lstStyle/>
+          <a:p>
+            <a:pPr algn="ctr"/>
+          </a:p>
+        </p:txBody>
+      </p:sp>
+      <p:sp>
+        <p:nvSpPr>
+          <p:cNvPr id="20" name="TextBox 19"/>
+          <p:cNvSpPr txBox="1"/>
+          <p:nvPr/>
+        </p:nvSpPr>
+        <p:spPr>
+          <a:xfrm>
+            <a:off x="530352" y="4480560"/>
+            <a:ext cx="4538953" cy="640080"/>
+          </a:xfrm>
+          <a:prstGeom prst="rect">
+            <a:avLst/>
+          </a:prstGeom>
+          <a:noFill/>
+        </p:spPr>
+        <p:txBody>
+          <a:bodyPr wrap="square" anchor="t" lIns="36000" rIns="36000" tIns="18000" bIns="18000">
+            <a:spAutoFit/>
+          </a:bodyPr>
+          <a:lstStyle/>
+          <a:p>
+            <a:pPr algn="l"/>
+            <a:r>
+              <a:rPr sz="1344" b="0" i="1">
+                <a:solidFill>
+                  <a:srgbClr val="475569"/>
+                </a:solidFill>
+                <a:latin typeface="Arial"/>
+              </a:rPr>
+              <a:t>Extended dry and high-wind seasons mean</a:t>
+            </a:r>
+          </a:p>
+          <a:p>
+            <a:pPr algn="l"/>
+            <a:r>
+              <a:rPr sz="1344" b="0" i="1">
+                <a:solidFill>
+                  <a:srgbClr val="475569"/>
+                </a:solidFill>
+                <a:latin typeface="Arial"/>
+              </a:rPr>
+              <a:t>conventional firefighting strategies can no longer keep pace</a:t>
+            </a:r>
+          </a:p>
+        </p:txBody>
+      </p:sp>
+      <p:sp>
+        <p:nvSpPr>
+          <p:cNvPr id="21" name="Rounded Rectangle 20"/>
+          <p:cNvSpPr/>
+          <p:nvPr/>
+        </p:nvSpPr>
+        <p:spPr>
+          <a:xfrm>
+            <a:off x="5252185" y="859536"/>
+            <a:ext cx="6573749" cy="5760720"/>
           </a:xfrm>
           <a:prstGeom prst="roundRect">
             <a:avLst>
@@ -47672,13 +47350,13 @@
       </p:sp>
       <p:sp>
         <p:nvSpPr>
-          <p:cNvPr id="30" name="Rectangle 29"/>
+          <p:cNvPr id="22" name="Rectangle 21"/>
           <p:cNvSpPr/>
           <p:nvPr/>
         </p:nvSpPr>
         <p:spPr>
           <a:xfrm>
-            <a:off x="7672236" y="969264"/>
+            <a:off x="5361913" y="969264"/>
             <a:ext cx="868680" cy="292608"/>
           </a:xfrm>
           <a:prstGeom prst="rect">
@@ -47716,13 +47394,13 @@
       </p:sp>
       <p:sp>
         <p:nvSpPr>
-          <p:cNvPr id="31" name="TextBox 30"/>
-          <p:cNvSpPr txBox="1"/>
-          <p:nvPr/>
-        </p:nvSpPr>
-        <p:spPr>
-          <a:xfrm>
-            <a:off x="7672236" y="969264"/>
+          <p:cNvPr id="23" name="TextBox 22"/>
+          <p:cNvSpPr txBox="1"/>
+          <p:nvPr/>
+        </p:nvSpPr>
+        <p:spPr>
+          <a:xfrm>
+            <a:off x="5361913" y="969264"/>
             <a:ext cx="868680" cy="292608"/>
           </a:xfrm>
           <a:prstGeom prst="rect">
@@ -47744,21 +47422,21 @@
                 </a:solidFill>
                 <a:latin typeface="Arial"/>
               </a:rPr>
-              <a:t>Fig. 3c</a:t>
-            </a:r>
-          </a:p>
-        </p:txBody>
-      </p:sp>
-      <p:sp>
-        <p:nvSpPr>
-          <p:cNvPr id="32" name="TextBox 31"/>
-          <p:cNvSpPr txBox="1"/>
-          <p:nvPr/>
-        </p:nvSpPr>
-        <p:spPr>
-          <a:xfrm>
-            <a:off x="7562508" y="859536"/>
-            <a:ext cx="4263426" cy="4206240"/>
+              <a:t>Image</a:t>
+            </a:r>
+          </a:p>
+        </p:txBody>
+      </p:sp>
+      <p:sp>
+        <p:nvSpPr>
+          <p:cNvPr id="24" name="TextBox 23"/>
+          <p:cNvSpPr txBox="1"/>
+          <p:nvPr/>
+        </p:nvSpPr>
+        <p:spPr>
+          <a:xfrm>
+            <a:off x="5252185" y="859536"/>
+            <a:ext cx="6573749" cy="5760720"/>
           </a:xfrm>
           <a:prstGeom prst="rect">
             <a:avLst/>
@@ -47786,14 +47464,14 @@
       </p:sp>
       <p:sp>
         <p:nvSpPr>
-          <p:cNvPr id="33" name="TextBox 32"/>
-          <p:cNvSpPr txBox="1"/>
-          <p:nvPr/>
-        </p:nvSpPr>
-        <p:spPr>
-          <a:xfrm>
-            <a:off x="7562508" y="5102352"/>
-            <a:ext cx="4263426" cy="274320"/>
+          <p:cNvPr id="25" name="TextBox 24"/>
+          <p:cNvSpPr txBox="1"/>
+          <p:nvPr/>
+        </p:nvSpPr>
+        <p:spPr>
+          <a:xfrm>
+            <a:off x="5252185" y="6656832"/>
+            <a:ext cx="6573749" cy="274320"/>
           </a:xfrm>
           <a:prstGeom prst="rect">
             <a:avLst/>
@@ -47814,7 +47492,7 @@
                 </a:solidFill>
                 <a:latin typeface="Arial"/>
               </a:rPr>
-              <a:t>Combustion process under direct flame contact</a:t>
+              <a:t>Wildfire / WUI boundary zone (photo)</a:t>
             </a:r>
           </a:p>
         </p:txBody>
@@ -48171,7 +47849,7 @@
         <p:spPr>
           <a:xfrm>
             <a:off x="365760" y="859536"/>
-            <a:ext cx="11460175" cy="2743200"/>
+            <a:ext cx="11460175" cy="3200400"/>
           </a:xfrm>
           <a:prstGeom prst="roundRect">
             <a:avLst>
@@ -48298,7 +47976,7 @@
         <p:spPr>
           <a:xfrm>
             <a:off x="365760" y="859536"/>
-            <a:ext cx="11460175" cy="2743200"/>
+            <a:ext cx="11460175" cy="3200400"/>
           </a:xfrm>
           <a:prstGeom prst="rect">
             <a:avLst/>
@@ -48332,7 +48010,7 @@
         </p:nvSpPr>
         <p:spPr>
           <a:xfrm>
-            <a:off x="365760" y="3639312"/>
+            <a:off x="365760" y="4096512"/>
             <a:ext cx="11460175" cy="274320"/>
           </a:xfrm>
           <a:prstGeom prst="rect">
@@ -48354,7 +48032,7 @@
                 </a:solidFill>
                 <a:latin typeface="Arial"/>
               </a:rPr>
-              <a:t>Fire-retardant gel application → flame contact → heat-activated aerogel formation → structural protection</a:t>
+              <a:t>Gel application → flame contact → heat-activated aerogel formation → structural protection</a:t>
             </a:r>
           </a:p>
         </p:txBody>
@@ -48367,59 +48045,13 @@
         </p:nvSpPr>
         <p:spPr>
           <a:xfrm>
-            <a:off x="365760" y="4014216"/>
-            <a:ext cx="2769031" cy="2011680"/>
+            <a:off x="1549107" y="4315968"/>
+            <a:ext cx="402336" cy="402336"/>
           </a:xfrm>
           <a:prstGeom prst="roundRect">
             <a:avLst>
-              <a:gd name="adj" fmla="val 4000"/>
+              <a:gd name="adj" fmla="val 50000"/>
             </a:avLst>
-          </a:prstGeom>
-          <a:solidFill>
-            <a:srgbClr val="F1F5F9"/>
-          </a:solidFill>
-          <a:ln w="6350">
-            <a:solidFill>
-              <a:srgbClr val="E2E8F0"/>
-            </a:solidFill>
-          </a:ln>
-          <a:effectLst/>
-        </p:spPr>
-        <p:style>
-          <a:lnRef idx="1">
-            <a:schemeClr val="accent1"/>
-          </a:lnRef>
-          <a:fillRef idx="3">
-            <a:schemeClr val="accent1"/>
-          </a:fillRef>
-          <a:effectRef idx="2">
-            <a:schemeClr val="accent1"/>
-          </a:effectRef>
-          <a:fontRef idx="minor">
-            <a:schemeClr val="lt1"/>
-          </a:fontRef>
-        </p:style>
-        <p:txBody>
-          <a:bodyPr rtlCol="0" anchor="ctr"/>
-          <a:lstStyle/>
-          <a:p>
-            <a:pPr algn="ctr"/>
-          </a:p>
-        </p:txBody>
-      </p:sp>
-      <p:sp>
-        <p:nvSpPr>
-          <p:cNvPr id="16" name="Rectangle 15"/>
-          <p:cNvSpPr/>
-          <p:nvPr/>
-        </p:nvSpPr>
-        <p:spPr>
-          <a:xfrm>
-            <a:off x="365760" y="4014216"/>
-            <a:ext cx="2769031" cy="36576"/>
-          </a:xfrm>
-          <a:prstGeom prst="rect">
-            <a:avLst/>
           </a:prstGeom>
           <a:solidFill>
             <a:srgbClr val="3B5174"/>
@@ -48453,132 +48085,58 @@
       </p:sp>
       <p:sp>
         <p:nvSpPr>
-          <p:cNvPr id="17" name="TextBox 16"/>
-          <p:cNvSpPr txBox="1"/>
-          <p:nvPr/>
-        </p:nvSpPr>
-        <p:spPr>
-          <a:xfrm>
-            <a:off x="548640" y="4178808"/>
-            <a:ext cx="2403271" cy="219456"/>
-          </a:xfrm>
-          <a:prstGeom prst="rect">
-            <a:avLst/>
-          </a:prstGeom>
-          <a:noFill/>
-        </p:spPr>
-        <p:txBody>
-          <a:bodyPr wrap="square" anchor="t" lIns="36000" rIns="36000" tIns="18000" bIns="18000">
-            <a:spAutoFit/>
-          </a:bodyPr>
-          <a:lstStyle/>
-          <a:p>
-            <a:pPr algn="l"/>
-            <a:r>
-              <a:rPr sz="1120" b="1" i="0">
-                <a:solidFill>
-                  <a:srgbClr val="64748B"/>
-                </a:solidFill>
-                <a:latin typeface="Arial"/>
-              </a:rPr>
-              <a:t>STEP 1</a:t>
-            </a:r>
-          </a:p>
-        </p:txBody>
-      </p:sp>
-      <p:sp>
-        <p:nvSpPr>
-          <p:cNvPr id="18" name="TextBox 17"/>
-          <p:cNvSpPr txBox="1"/>
-          <p:nvPr/>
-        </p:nvSpPr>
-        <p:spPr>
-          <a:xfrm>
-            <a:off x="548640" y="4416552"/>
-            <a:ext cx="2403271" cy="329184"/>
-          </a:xfrm>
-          <a:prstGeom prst="rect">
-            <a:avLst/>
-          </a:prstGeom>
-          <a:noFill/>
-        </p:spPr>
-        <p:txBody>
-          <a:bodyPr wrap="square" anchor="t" lIns="36000" rIns="36000" tIns="18000" bIns="18000">
-            <a:spAutoFit/>
-          </a:bodyPr>
-          <a:lstStyle/>
-          <a:p>
-            <a:pPr algn="l"/>
+          <p:cNvPr id="16" name="TextBox 15"/>
+          <p:cNvSpPr txBox="1"/>
+          <p:nvPr/>
+        </p:nvSpPr>
+        <p:spPr>
+          <a:xfrm>
+            <a:off x="1549107" y="4315968"/>
+            <a:ext cx="402336" cy="402336"/>
+          </a:xfrm>
+          <a:prstGeom prst="rect">
+            <a:avLst/>
+          </a:prstGeom>
+          <a:noFill/>
+        </p:spPr>
+        <p:txBody>
+          <a:bodyPr wrap="square" anchor="ctr" lIns="36000" rIns="36000" tIns="18000" bIns="18000">
+            <a:spAutoFit/>
+          </a:bodyPr>
+          <a:lstStyle/>
+          <a:p>
+            <a:pPr algn="ctr"/>
             <a:r>
               <a:rPr sz="1792" b="1" i="0">
                 <a:solidFill>
-                  <a:srgbClr val="1E293B"/>
-                </a:solidFill>
-                <a:latin typeface="Arial"/>
-              </a:rPr>
-              <a:t>Gel Application</a:t>
-            </a:r>
-          </a:p>
-        </p:txBody>
-      </p:sp>
-      <p:sp>
-        <p:nvSpPr>
-          <p:cNvPr id="19" name="TextBox 18"/>
-          <p:cNvSpPr txBox="1"/>
-          <p:nvPr/>
-        </p:nvSpPr>
-        <p:spPr>
-          <a:xfrm>
-            <a:off x="548640" y="4782312"/>
-            <a:ext cx="2403271" cy="1133856"/>
-          </a:xfrm>
-          <a:prstGeom prst="rect">
-            <a:avLst/>
-          </a:prstGeom>
-          <a:noFill/>
-        </p:spPr>
-        <p:txBody>
-          <a:bodyPr wrap="square" anchor="t" lIns="36000" rIns="36000" tIns="18000" bIns="18000">
-            <a:spAutoFit/>
-          </a:bodyPr>
-          <a:lstStyle/>
-          <a:p>
-            <a:pPr algn="l"/>
-            <a:r>
-              <a:rPr sz="1344" b="0" i="0">
-                <a:solidFill>
-                  <a:srgbClr val="475569"/>
-                </a:solidFill>
-                <a:latin typeface="Arial"/>
-              </a:rPr>
-              <a:t>Spray application of cellulosic gel to buildings and vegetation</a:t>
-            </a:r>
-          </a:p>
-        </p:txBody>
-      </p:sp>
-      <p:sp>
-        <p:nvSpPr>
-          <p:cNvPr id="20" name="Rounded Rectangle 19"/>
+                  <a:srgbClr val="FFFFFF"/>
+                </a:solidFill>
+                <a:latin typeface="Arial"/>
+              </a:rPr>
+              <a:t>1</a:t>
+            </a:r>
+          </a:p>
+        </p:txBody>
+      </p:sp>
+      <p:sp>
+        <p:nvSpPr>
+          <p:cNvPr id="17" name="Rectangle 16"/>
           <p:cNvSpPr/>
           <p:nvPr/>
         </p:nvSpPr>
         <p:spPr>
           <a:xfrm>
-            <a:off x="3262807" y="4014216"/>
-            <a:ext cx="2769031" cy="2011680"/>
-          </a:xfrm>
-          <a:prstGeom prst="roundRect">
-            <a:avLst>
-              <a:gd name="adj" fmla="val 4000"/>
-            </a:avLst>
+            <a:off x="3171367" y="4507992"/>
+            <a:ext cx="54864" cy="18288"/>
+          </a:xfrm>
+          <a:prstGeom prst="rect">
+            <a:avLst/>
           </a:prstGeom>
           <a:solidFill>
-            <a:srgbClr val="F1F5F9"/>
+            <a:srgbClr val="AAB4C0"/>
           </a:solidFill>
-          <a:ln w="6350">
-            <a:solidFill>
-              <a:srgbClr val="E2E8F0"/>
-            </a:solidFill>
+          <a:ln>
+            <a:noFill/>
           </a:ln>
           <a:effectLst/>
         </p:spPr>
@@ -48606,17 +48164,101 @@
       </p:sp>
       <p:sp>
         <p:nvSpPr>
-          <p:cNvPr id="21" name="Rectangle 20"/>
+          <p:cNvPr id="18" name="TextBox 17"/>
+          <p:cNvSpPr txBox="1"/>
+          <p:nvPr/>
+        </p:nvSpPr>
+        <p:spPr>
+          <a:xfrm>
+            <a:off x="365760" y="4846320"/>
+            <a:ext cx="2769031" cy="274320"/>
+          </a:xfrm>
+          <a:prstGeom prst="rect">
+            <a:avLst/>
+          </a:prstGeom>
+          <a:noFill/>
+        </p:spPr>
+        <p:txBody>
+          <a:bodyPr wrap="square" anchor="t" lIns="36000" rIns="36000" tIns="18000" bIns="18000">
+            <a:spAutoFit/>
+          </a:bodyPr>
+          <a:lstStyle/>
+          <a:p>
+            <a:pPr algn="ctr"/>
+            <a:r>
+              <a:rPr sz="1456" b="1" i="0">
+                <a:solidFill>
+                  <a:srgbClr val="1E293B"/>
+                </a:solidFill>
+                <a:latin typeface="Arial"/>
+              </a:rPr>
+              <a:t>Gel Application</a:t>
+            </a:r>
+          </a:p>
+        </p:txBody>
+      </p:sp>
+      <p:sp>
+        <p:nvSpPr>
+          <p:cNvPr id="19" name="TextBox 18"/>
+          <p:cNvSpPr txBox="1"/>
+          <p:nvPr/>
+        </p:nvSpPr>
+        <p:spPr>
+          <a:xfrm>
+            <a:off x="365760" y="5138928"/>
+            <a:ext cx="2769031" cy="548640"/>
+          </a:xfrm>
+          <a:prstGeom prst="rect">
+            <a:avLst/>
+          </a:prstGeom>
+          <a:noFill/>
+        </p:spPr>
+        <p:txBody>
+          <a:bodyPr wrap="square" anchor="t" lIns="36000" rIns="36000" tIns="18000" bIns="18000">
+            <a:spAutoFit/>
+          </a:bodyPr>
+          <a:lstStyle/>
+          <a:p>
+            <a:pPr algn="ctr"/>
+            <a:r>
+              <a:rPr sz="1232" b="0" i="0">
+                <a:solidFill>
+                  <a:srgbClr val="475569"/>
+                </a:solidFill>
+                <a:latin typeface="Arial"/>
+              </a:rPr>
+              <a:t>Spray cellulosic gel</a:t>
+            </a:r>
+          </a:p>
+          <a:p>
+            <a:pPr algn="ctr"/>
+            <a:r>
+              <a:rPr sz="1232" b="0" i="0">
+                <a:solidFill>
+                  <a:srgbClr val="475569"/>
+                </a:solidFill>
+                <a:latin typeface="Arial"/>
+              </a:rPr>
+              <a:t>onto buildings and vegetation</a:t>
+            </a:r>
+          </a:p>
+        </p:txBody>
+      </p:sp>
+      <p:sp>
+        <p:nvSpPr>
+          <p:cNvPr id="20" name="Rounded Rectangle 19"/>
           <p:cNvSpPr/>
           <p:nvPr/>
         </p:nvSpPr>
         <p:spPr>
           <a:xfrm>
-            <a:off x="3262807" y="4014216"/>
-            <a:ext cx="2769031" cy="36576"/>
-          </a:xfrm>
-          <a:prstGeom prst="rect">
-            <a:avLst/>
+            <a:off x="4446155" y="4315968"/>
+            <a:ext cx="402336" cy="402336"/>
+          </a:xfrm>
+          <a:prstGeom prst="roundRect">
+            <a:avLst>
+              <a:gd name="adj" fmla="val 50000"/>
+            </a:avLst>
           </a:prstGeom>
           <a:solidFill>
             <a:srgbClr val="3B5174"/>
@@ -48650,132 +48292,58 @@
       </p:sp>
       <p:sp>
         <p:nvSpPr>
-          <p:cNvPr id="22" name="TextBox 21"/>
-          <p:cNvSpPr txBox="1"/>
-          <p:nvPr/>
-        </p:nvSpPr>
-        <p:spPr>
-          <a:xfrm>
-            <a:off x="3445687" y="4178808"/>
-            <a:ext cx="2403271" cy="219456"/>
-          </a:xfrm>
-          <a:prstGeom prst="rect">
-            <a:avLst/>
-          </a:prstGeom>
-          <a:noFill/>
-        </p:spPr>
-        <p:txBody>
-          <a:bodyPr wrap="square" anchor="t" lIns="36000" rIns="36000" tIns="18000" bIns="18000">
-            <a:spAutoFit/>
-          </a:bodyPr>
-          <a:lstStyle/>
-          <a:p>
-            <a:pPr algn="l"/>
-            <a:r>
-              <a:rPr sz="1120" b="1" i="0">
-                <a:solidFill>
-                  <a:srgbClr val="64748B"/>
-                </a:solidFill>
-                <a:latin typeface="Arial"/>
-              </a:rPr>
-              <a:t>STEP 2</a:t>
-            </a:r>
-          </a:p>
-        </p:txBody>
-      </p:sp>
-      <p:sp>
-        <p:nvSpPr>
-          <p:cNvPr id="23" name="TextBox 22"/>
-          <p:cNvSpPr txBox="1"/>
-          <p:nvPr/>
-        </p:nvSpPr>
-        <p:spPr>
-          <a:xfrm>
-            <a:off x="3445687" y="4416552"/>
-            <a:ext cx="2403271" cy="329184"/>
-          </a:xfrm>
-          <a:prstGeom prst="rect">
-            <a:avLst/>
-          </a:prstGeom>
-          <a:noFill/>
-        </p:spPr>
-        <p:txBody>
-          <a:bodyPr wrap="square" anchor="t" lIns="36000" rIns="36000" tIns="18000" bIns="18000">
-            <a:spAutoFit/>
-          </a:bodyPr>
-          <a:lstStyle/>
-          <a:p>
-            <a:pPr algn="l"/>
+          <p:cNvPr id="21" name="TextBox 20"/>
+          <p:cNvSpPr txBox="1"/>
+          <p:nvPr/>
+        </p:nvSpPr>
+        <p:spPr>
+          <a:xfrm>
+            <a:off x="4446155" y="4315968"/>
+            <a:ext cx="402336" cy="402336"/>
+          </a:xfrm>
+          <a:prstGeom prst="rect">
+            <a:avLst/>
+          </a:prstGeom>
+          <a:noFill/>
+        </p:spPr>
+        <p:txBody>
+          <a:bodyPr wrap="square" anchor="ctr" lIns="36000" rIns="36000" tIns="18000" bIns="18000">
+            <a:spAutoFit/>
+          </a:bodyPr>
+          <a:lstStyle/>
+          <a:p>
+            <a:pPr algn="ctr"/>
             <a:r>
               <a:rPr sz="1792" b="1" i="0">
                 <a:solidFill>
-                  <a:srgbClr val="1E293B"/>
-                </a:solidFill>
-                <a:latin typeface="Arial"/>
-              </a:rPr>
-              <a:t>Flame Contact</a:t>
-            </a:r>
-          </a:p>
-        </p:txBody>
-      </p:sp>
-      <p:sp>
-        <p:nvSpPr>
-          <p:cNvPr id="24" name="TextBox 23"/>
-          <p:cNvSpPr txBox="1"/>
-          <p:nvPr/>
-        </p:nvSpPr>
-        <p:spPr>
-          <a:xfrm>
-            <a:off x="3445687" y="4782312"/>
-            <a:ext cx="2403271" cy="1133856"/>
-          </a:xfrm>
-          <a:prstGeom prst="rect">
-            <a:avLst/>
-          </a:prstGeom>
-          <a:noFill/>
-        </p:spPr>
-        <p:txBody>
-          <a:bodyPr wrap="square" anchor="t" lIns="36000" rIns="36000" tIns="18000" bIns="18000">
-            <a:spAutoFit/>
-          </a:bodyPr>
-          <a:lstStyle/>
-          <a:p>
-            <a:pPr algn="l"/>
-            <a:r>
-              <a:rPr sz="1344" b="0" i="0">
-                <a:solidFill>
-                  <a:srgbClr val="475569"/>
-                </a:solidFill>
-                <a:latin typeface="Arial"/>
-              </a:rPr>
-              <a:t>Moisture evaporates while gel foams and particles aggregate</a:t>
-            </a:r>
-          </a:p>
-        </p:txBody>
-      </p:sp>
-      <p:sp>
-        <p:nvSpPr>
-          <p:cNvPr id="25" name="Rounded Rectangle 24"/>
+                  <a:srgbClr val="FFFFFF"/>
+                </a:solidFill>
+                <a:latin typeface="Arial"/>
+              </a:rPr>
+              <a:t>2</a:t>
+            </a:r>
+          </a:p>
+        </p:txBody>
+      </p:sp>
+      <p:sp>
+        <p:nvSpPr>
+          <p:cNvPr id="22" name="Rectangle 21"/>
           <p:cNvSpPr/>
           <p:nvPr/>
         </p:nvSpPr>
         <p:spPr>
           <a:xfrm>
-            <a:off x="6159855" y="4014216"/>
-            <a:ext cx="2769031" cy="2011680"/>
-          </a:xfrm>
-          <a:prstGeom prst="roundRect">
-            <a:avLst>
-              <a:gd name="adj" fmla="val 4000"/>
-            </a:avLst>
+            <a:off x="6068415" y="4507992"/>
+            <a:ext cx="54864" cy="18288"/>
+          </a:xfrm>
+          <a:prstGeom prst="rect">
+            <a:avLst/>
           </a:prstGeom>
           <a:solidFill>
-            <a:srgbClr val="F1F5F9"/>
+            <a:srgbClr val="AAB4C0"/>
           </a:solidFill>
-          <a:ln w="6350">
-            <a:solidFill>
-              <a:srgbClr val="E2E8F0"/>
-            </a:solidFill>
+          <a:ln>
+            <a:noFill/>
           </a:ln>
           <a:effectLst/>
         </p:spPr>
@@ -48803,17 +48371,101 @@
       </p:sp>
       <p:sp>
         <p:nvSpPr>
-          <p:cNvPr id="26" name="Rectangle 25"/>
+          <p:cNvPr id="23" name="TextBox 22"/>
+          <p:cNvSpPr txBox="1"/>
+          <p:nvPr/>
+        </p:nvSpPr>
+        <p:spPr>
+          <a:xfrm>
+            <a:off x="3262807" y="4846320"/>
+            <a:ext cx="2769031" cy="274320"/>
+          </a:xfrm>
+          <a:prstGeom prst="rect">
+            <a:avLst/>
+          </a:prstGeom>
+          <a:noFill/>
+        </p:spPr>
+        <p:txBody>
+          <a:bodyPr wrap="square" anchor="t" lIns="36000" rIns="36000" tIns="18000" bIns="18000">
+            <a:spAutoFit/>
+          </a:bodyPr>
+          <a:lstStyle/>
+          <a:p>
+            <a:pPr algn="ctr"/>
+            <a:r>
+              <a:rPr sz="1456" b="1" i="0">
+                <a:solidFill>
+                  <a:srgbClr val="1E293B"/>
+                </a:solidFill>
+                <a:latin typeface="Arial"/>
+              </a:rPr>
+              <a:t>Flame Contact</a:t>
+            </a:r>
+          </a:p>
+        </p:txBody>
+      </p:sp>
+      <p:sp>
+        <p:nvSpPr>
+          <p:cNvPr id="24" name="TextBox 23"/>
+          <p:cNvSpPr txBox="1"/>
+          <p:nvPr/>
+        </p:nvSpPr>
+        <p:spPr>
+          <a:xfrm>
+            <a:off x="3262807" y="5138928"/>
+            <a:ext cx="2769031" cy="548640"/>
+          </a:xfrm>
+          <a:prstGeom prst="rect">
+            <a:avLst/>
+          </a:prstGeom>
+          <a:noFill/>
+        </p:spPr>
+        <p:txBody>
+          <a:bodyPr wrap="square" anchor="t" lIns="36000" rIns="36000" tIns="18000" bIns="18000">
+            <a:spAutoFit/>
+          </a:bodyPr>
+          <a:lstStyle/>
+          <a:p>
+            <a:pPr algn="ctr"/>
+            <a:r>
+              <a:rPr sz="1232" b="0" i="0">
+                <a:solidFill>
+                  <a:srgbClr val="475569"/>
+                </a:solidFill>
+                <a:latin typeface="Arial"/>
+              </a:rPr>
+              <a:t>Moisture evaporates; gel</a:t>
+            </a:r>
+          </a:p>
+          <a:p>
+            <a:pPr algn="ctr"/>
+            <a:r>
+              <a:rPr sz="1232" b="0" i="0">
+                <a:solidFill>
+                  <a:srgbClr val="475569"/>
+                </a:solidFill>
+                <a:latin typeface="Arial"/>
+              </a:rPr>
+              <a:t>foams and particles aggregate</a:t>
+            </a:r>
+          </a:p>
+        </p:txBody>
+      </p:sp>
+      <p:sp>
+        <p:nvSpPr>
+          <p:cNvPr id="25" name="Rounded Rectangle 24"/>
           <p:cNvSpPr/>
           <p:nvPr/>
         </p:nvSpPr>
         <p:spPr>
           <a:xfrm>
-            <a:off x="6159855" y="4014216"/>
-            <a:ext cx="2769031" cy="36576"/>
-          </a:xfrm>
-          <a:prstGeom prst="rect">
-            <a:avLst/>
+            <a:off x="7343203" y="4315968"/>
+            <a:ext cx="402336" cy="402336"/>
+          </a:xfrm>
+          <a:prstGeom prst="roundRect">
+            <a:avLst>
+              <a:gd name="adj" fmla="val 50000"/>
+            </a:avLst>
           </a:prstGeom>
           <a:solidFill>
             <a:srgbClr val="3B5174"/>
@@ -48847,132 +48499,58 @@
       </p:sp>
       <p:sp>
         <p:nvSpPr>
-          <p:cNvPr id="27" name="TextBox 26"/>
-          <p:cNvSpPr txBox="1"/>
-          <p:nvPr/>
-        </p:nvSpPr>
-        <p:spPr>
-          <a:xfrm>
-            <a:off x="6342735" y="4178808"/>
-            <a:ext cx="2403271" cy="219456"/>
-          </a:xfrm>
-          <a:prstGeom prst="rect">
-            <a:avLst/>
-          </a:prstGeom>
-          <a:noFill/>
-        </p:spPr>
-        <p:txBody>
-          <a:bodyPr wrap="square" anchor="t" lIns="36000" rIns="36000" tIns="18000" bIns="18000">
-            <a:spAutoFit/>
-          </a:bodyPr>
-          <a:lstStyle/>
-          <a:p>
-            <a:pPr algn="l"/>
-            <a:r>
-              <a:rPr sz="1120" b="1" i="0">
-                <a:solidFill>
-                  <a:srgbClr val="64748B"/>
-                </a:solidFill>
-                <a:latin typeface="Arial"/>
-              </a:rPr>
-              <a:t>STEP 3</a:t>
-            </a:r>
-          </a:p>
-        </p:txBody>
-      </p:sp>
-      <p:sp>
-        <p:nvSpPr>
-          <p:cNvPr id="28" name="TextBox 27"/>
-          <p:cNvSpPr txBox="1"/>
-          <p:nvPr/>
-        </p:nvSpPr>
-        <p:spPr>
-          <a:xfrm>
-            <a:off x="6342735" y="4416552"/>
-            <a:ext cx="2403271" cy="329184"/>
-          </a:xfrm>
-          <a:prstGeom prst="rect">
-            <a:avLst/>
-          </a:prstGeom>
-          <a:noFill/>
-        </p:spPr>
-        <p:txBody>
-          <a:bodyPr wrap="square" anchor="t" lIns="36000" rIns="36000" tIns="18000" bIns="18000">
-            <a:spAutoFit/>
-          </a:bodyPr>
-          <a:lstStyle/>
-          <a:p>
-            <a:pPr algn="l"/>
+          <p:cNvPr id="26" name="TextBox 25"/>
+          <p:cNvSpPr txBox="1"/>
+          <p:nvPr/>
+        </p:nvSpPr>
+        <p:spPr>
+          <a:xfrm>
+            <a:off x="7343203" y="4315968"/>
+            <a:ext cx="402336" cy="402336"/>
+          </a:xfrm>
+          <a:prstGeom prst="rect">
+            <a:avLst/>
+          </a:prstGeom>
+          <a:noFill/>
+        </p:spPr>
+        <p:txBody>
+          <a:bodyPr wrap="square" anchor="ctr" lIns="36000" rIns="36000" tIns="18000" bIns="18000">
+            <a:spAutoFit/>
+          </a:bodyPr>
+          <a:lstStyle/>
+          <a:p>
+            <a:pPr algn="ctr"/>
             <a:r>
               <a:rPr sz="1792" b="1" i="0">
                 <a:solidFill>
-                  <a:srgbClr val="1E293B"/>
-                </a:solidFill>
-                <a:latin typeface="Arial"/>
-              </a:rPr>
-              <a:t>Aerogel Formation</a:t>
-            </a:r>
-          </a:p>
-        </p:txBody>
-      </p:sp>
-      <p:sp>
-        <p:nvSpPr>
-          <p:cNvPr id="29" name="TextBox 28"/>
-          <p:cNvSpPr txBox="1"/>
-          <p:nvPr/>
-        </p:nvSpPr>
-        <p:spPr>
-          <a:xfrm>
-            <a:off x="6342735" y="4782312"/>
-            <a:ext cx="2403271" cy="1133856"/>
-          </a:xfrm>
-          <a:prstGeom prst="rect">
-            <a:avLst/>
-          </a:prstGeom>
-          <a:noFill/>
-        </p:spPr>
-        <p:txBody>
-          <a:bodyPr wrap="square" anchor="t" lIns="36000" rIns="36000" tIns="18000" bIns="18000">
-            <a:spAutoFit/>
-          </a:bodyPr>
-          <a:lstStyle/>
-          <a:p>
-            <a:pPr algn="l"/>
-            <a:r>
-              <a:rPr sz="1344" b="0" i="0">
-                <a:solidFill>
-                  <a:srgbClr val="475569"/>
-                </a:solidFill>
-                <a:latin typeface="Arial"/>
-              </a:rPr>
-              <a:t>Silica particles sinter to form a porous aerogel layer</a:t>
-            </a:r>
-          </a:p>
-        </p:txBody>
-      </p:sp>
-      <p:sp>
-        <p:nvSpPr>
-          <p:cNvPr id="30" name="Rounded Rectangle 29"/>
+                  <a:srgbClr val="FFFFFF"/>
+                </a:solidFill>
+                <a:latin typeface="Arial"/>
+              </a:rPr>
+              <a:t>3</a:t>
+            </a:r>
+          </a:p>
+        </p:txBody>
+      </p:sp>
+      <p:sp>
+        <p:nvSpPr>
+          <p:cNvPr id="27" name="Rectangle 26"/>
           <p:cNvSpPr/>
           <p:nvPr/>
         </p:nvSpPr>
         <p:spPr>
           <a:xfrm>
-            <a:off x="9056903" y="4014216"/>
-            <a:ext cx="2769031" cy="2011680"/>
-          </a:xfrm>
-          <a:prstGeom prst="roundRect">
-            <a:avLst>
-              <a:gd name="adj" fmla="val 4000"/>
-            </a:avLst>
+            <a:off x="8965463" y="4507992"/>
+            <a:ext cx="54864" cy="18288"/>
+          </a:xfrm>
+          <a:prstGeom prst="rect">
+            <a:avLst/>
           </a:prstGeom>
           <a:solidFill>
-            <a:srgbClr val="F1F5F9"/>
+            <a:srgbClr val="AAB4C0"/>
           </a:solidFill>
-          <a:ln w="6350">
-            <a:solidFill>
-              <a:srgbClr val="E2E8F0"/>
-            </a:solidFill>
+          <a:ln>
+            <a:noFill/>
           </a:ln>
           <a:effectLst/>
         </p:spPr>
@@ -49000,17 +48578,101 @@
       </p:sp>
       <p:sp>
         <p:nvSpPr>
-          <p:cNvPr id="31" name="Rectangle 30"/>
+          <p:cNvPr id="28" name="TextBox 27"/>
+          <p:cNvSpPr txBox="1"/>
+          <p:nvPr/>
+        </p:nvSpPr>
+        <p:spPr>
+          <a:xfrm>
+            <a:off x="6159855" y="4846320"/>
+            <a:ext cx="2769031" cy="274320"/>
+          </a:xfrm>
+          <a:prstGeom prst="rect">
+            <a:avLst/>
+          </a:prstGeom>
+          <a:noFill/>
+        </p:spPr>
+        <p:txBody>
+          <a:bodyPr wrap="square" anchor="t" lIns="36000" rIns="36000" tIns="18000" bIns="18000">
+            <a:spAutoFit/>
+          </a:bodyPr>
+          <a:lstStyle/>
+          <a:p>
+            <a:pPr algn="ctr"/>
+            <a:r>
+              <a:rPr sz="1456" b="1" i="0">
+                <a:solidFill>
+                  <a:srgbClr val="1E293B"/>
+                </a:solidFill>
+                <a:latin typeface="Arial"/>
+              </a:rPr>
+              <a:t>Aerogel Formation</a:t>
+            </a:r>
+          </a:p>
+        </p:txBody>
+      </p:sp>
+      <p:sp>
+        <p:nvSpPr>
+          <p:cNvPr id="29" name="TextBox 28"/>
+          <p:cNvSpPr txBox="1"/>
+          <p:nvPr/>
+        </p:nvSpPr>
+        <p:spPr>
+          <a:xfrm>
+            <a:off x="6159855" y="5138928"/>
+            <a:ext cx="2769031" cy="548640"/>
+          </a:xfrm>
+          <a:prstGeom prst="rect">
+            <a:avLst/>
+          </a:prstGeom>
+          <a:noFill/>
+        </p:spPr>
+        <p:txBody>
+          <a:bodyPr wrap="square" anchor="t" lIns="36000" rIns="36000" tIns="18000" bIns="18000">
+            <a:spAutoFit/>
+          </a:bodyPr>
+          <a:lstStyle/>
+          <a:p>
+            <a:pPr algn="ctr"/>
+            <a:r>
+              <a:rPr sz="1232" b="0" i="0">
+                <a:solidFill>
+                  <a:srgbClr val="475569"/>
+                </a:solidFill>
+                <a:latin typeface="Arial"/>
+              </a:rPr>
+              <a:t>Silica particles sinter into</a:t>
+            </a:r>
+          </a:p>
+          <a:p>
+            <a:pPr algn="ctr"/>
+            <a:r>
+              <a:rPr sz="1232" b="0" i="0">
+                <a:solidFill>
+                  <a:srgbClr val="475569"/>
+                </a:solidFill>
+                <a:latin typeface="Arial"/>
+              </a:rPr>
+              <a:t>a porous insulating layer</a:t>
+            </a:r>
+          </a:p>
+        </p:txBody>
+      </p:sp>
+      <p:sp>
+        <p:nvSpPr>
+          <p:cNvPr id="30" name="Rounded Rectangle 29"/>
           <p:cNvSpPr/>
           <p:nvPr/>
         </p:nvSpPr>
         <p:spPr>
           <a:xfrm>
-            <a:off x="9056903" y="4014216"/>
-            <a:ext cx="2769031" cy="36576"/>
-          </a:xfrm>
-          <a:prstGeom prst="rect">
-            <a:avLst/>
+            <a:off x="10240251" y="4315968"/>
+            <a:ext cx="402336" cy="402336"/>
+          </a:xfrm>
+          <a:prstGeom prst="roundRect">
+            <a:avLst>
+              <a:gd name="adj" fmla="val 50000"/>
+            </a:avLst>
           </a:prstGeom>
           <a:solidFill>
             <a:srgbClr val="3B5174"/>
@@ -49044,35 +48706,70 @@
       </p:sp>
       <p:sp>
         <p:nvSpPr>
+          <p:cNvPr id="31" name="TextBox 30"/>
+          <p:cNvSpPr txBox="1"/>
+          <p:nvPr/>
+        </p:nvSpPr>
+        <p:spPr>
+          <a:xfrm>
+            <a:off x="10240251" y="4315968"/>
+            <a:ext cx="402336" cy="402336"/>
+          </a:xfrm>
+          <a:prstGeom prst="rect">
+            <a:avLst/>
+          </a:prstGeom>
+          <a:noFill/>
+        </p:spPr>
+        <p:txBody>
+          <a:bodyPr wrap="square" anchor="ctr" lIns="36000" rIns="36000" tIns="18000" bIns="18000">
+            <a:spAutoFit/>
+          </a:bodyPr>
+          <a:lstStyle/>
+          <a:p>
+            <a:pPr algn="ctr"/>
+            <a:r>
+              <a:rPr sz="1792" b="1" i="0">
+                <a:solidFill>
+                  <a:srgbClr val="FFFFFF"/>
+                </a:solidFill>
+                <a:latin typeface="Arial"/>
+              </a:rPr>
+              <a:t>4</a:t>
+            </a:r>
+          </a:p>
+        </p:txBody>
+      </p:sp>
+      <p:sp>
+        <p:nvSpPr>
           <p:cNvPr id="32" name="TextBox 31"/>
           <p:cNvSpPr txBox="1"/>
           <p:nvPr/>
         </p:nvSpPr>
         <p:spPr>
           <a:xfrm>
-            <a:off x="9239783" y="4178808"/>
-            <a:ext cx="2403271" cy="219456"/>
-          </a:xfrm>
-          <a:prstGeom prst="rect">
-            <a:avLst/>
-          </a:prstGeom>
-          <a:noFill/>
-        </p:spPr>
-        <p:txBody>
-          <a:bodyPr wrap="square" anchor="t" lIns="36000" rIns="36000" tIns="18000" bIns="18000">
-            <a:spAutoFit/>
-          </a:bodyPr>
-          <a:lstStyle/>
-          <a:p>
-            <a:pPr algn="l"/>
-            <a:r>
-              <a:rPr sz="1120" b="1" i="0">
-                <a:solidFill>
-                  <a:srgbClr val="64748B"/>
-                </a:solidFill>
-                <a:latin typeface="Arial"/>
-              </a:rPr>
-              <a:t>STEP 4</a:t>
+            <a:off x="9056903" y="4846320"/>
+            <a:ext cx="2769031" cy="274320"/>
+          </a:xfrm>
+          <a:prstGeom prst="rect">
+            <a:avLst/>
+          </a:prstGeom>
+          <a:noFill/>
+        </p:spPr>
+        <p:txBody>
+          <a:bodyPr wrap="square" anchor="t" lIns="36000" rIns="36000" tIns="18000" bIns="18000">
+            <a:spAutoFit/>
+          </a:bodyPr>
+          <a:lstStyle/>
+          <a:p>
+            <a:pPr algn="ctr"/>
+            <a:r>
+              <a:rPr sz="1456" b="1" i="0">
+                <a:solidFill>
+                  <a:srgbClr val="1E293B"/>
+                </a:solidFill>
+                <a:latin typeface="Arial"/>
+              </a:rPr>
+              <a:t>Sustained Protection</a:t>
             </a:r>
           </a:p>
         </p:txBody>
@@ -49085,64 +48782,41 @@
         </p:nvSpPr>
         <p:spPr>
           <a:xfrm>
-            <a:off x="9239783" y="4416552"/>
-            <a:ext cx="2403271" cy="329184"/>
-          </a:xfrm>
-          <a:prstGeom prst="rect">
-            <a:avLst/>
-          </a:prstGeom>
-          <a:noFill/>
-        </p:spPr>
-        <p:txBody>
-          <a:bodyPr wrap="square" anchor="t" lIns="36000" rIns="36000" tIns="18000" bIns="18000">
-            <a:spAutoFit/>
-          </a:bodyPr>
-          <a:lstStyle/>
-          <a:p>
-            <a:pPr algn="l"/>
-            <a:r>
-              <a:rPr sz="1792" b="1" i="0">
-                <a:solidFill>
-                  <a:srgbClr val="1E293B"/>
-                </a:solidFill>
-                <a:latin typeface="Arial"/>
-              </a:rPr>
-              <a:t>Sustained Protection</a:t>
-            </a:r>
-          </a:p>
-        </p:txBody>
-      </p:sp>
-      <p:sp>
-        <p:nvSpPr>
-          <p:cNvPr id="34" name="TextBox 33"/>
-          <p:cNvSpPr txBox="1"/>
-          <p:nvPr/>
-        </p:nvSpPr>
-        <p:spPr>
-          <a:xfrm>
-            <a:off x="9239783" y="4782312"/>
-            <a:ext cx="2403271" cy="1133856"/>
-          </a:xfrm>
-          <a:prstGeom prst="rect">
-            <a:avLst/>
-          </a:prstGeom>
-          <a:noFill/>
-        </p:spPr>
-        <p:txBody>
-          <a:bodyPr wrap="square" anchor="t" lIns="36000" rIns="36000" tIns="18000" bIns="18000">
-            <a:spAutoFit/>
-          </a:bodyPr>
-          <a:lstStyle/>
-          <a:p>
-            <a:pPr algn="l"/>
-            <a:r>
-              <a:rPr sz="1344" b="0" i="0">
+            <a:off x="9056903" y="5138928"/>
+            <a:ext cx="2769031" cy="548640"/>
+          </a:xfrm>
+          <a:prstGeom prst="rect">
+            <a:avLst/>
+          </a:prstGeom>
+          <a:noFill/>
+        </p:spPr>
+        <p:txBody>
+          <a:bodyPr wrap="square" anchor="t" lIns="36000" rIns="36000" tIns="18000" bIns="18000">
+            <a:spAutoFit/>
+          </a:bodyPr>
+          <a:lstStyle/>
+          <a:p>
+            <a:pPr algn="ctr"/>
+            <a:r>
+              <a:rPr sz="1232" b="0" i="0">
                 <a:solidFill>
                   <a:srgbClr val="475569"/>
                 </a:solidFill>
                 <a:latin typeface="Arial"/>
               </a:rPr>
-              <a:t>Ultra-low thermal conductivity insulating layer continuously protects the substrate</a:t>
+              <a:t>Ultra-low thermal conductivity</a:t>
+            </a:r>
+          </a:p>
+          <a:p>
+            <a:pPr algn="ctr"/>
+            <a:r>
+              <a:rPr sz="1232" b="0" i="0">
+                <a:solidFill>
+                  <a:srgbClr val="475569"/>
+                </a:solidFill>
+                <a:latin typeface="Arial"/>
+              </a:rPr>
+              <a:t>layer shields the substrate</a:t>
             </a:r>
           </a:p>
         </p:txBody>
@@ -49492,17 +49166,895 @@
       </p:sp>
       <p:sp>
         <p:nvSpPr>
-          <p:cNvPr id="10" name="Rectangle 9"/>
+          <p:cNvPr id="10" name="Rounded Rectangle 9"/>
           <p:cNvSpPr/>
           <p:nvPr/>
         </p:nvSpPr>
         <p:spPr>
           <a:xfrm>
             <a:off x="365760" y="859536"/>
-            <a:ext cx="7472275" cy="585216"/>
-          </a:xfrm>
-          <a:prstGeom prst="rect">
-            <a:avLst/>
+            <a:ext cx="2741599" cy="5248656"/>
+          </a:xfrm>
+          <a:prstGeom prst="roundRect">
+            <a:avLst>
+              <a:gd name="adj" fmla="val 4000"/>
+            </a:avLst>
+          </a:prstGeom>
+          <a:solidFill>
+            <a:srgbClr val="F1F5F9"/>
+          </a:solidFill>
+          <a:ln w="6350">
+            <a:solidFill>
+              <a:srgbClr val="E2E8F0"/>
+            </a:solidFill>
+          </a:ln>
+          <a:effectLst/>
+        </p:spPr>
+        <p:style>
+          <a:lnRef idx="1">
+            <a:schemeClr val="accent1"/>
+          </a:lnRef>
+          <a:fillRef idx="3">
+            <a:schemeClr val="accent1"/>
+          </a:fillRef>
+          <a:effectRef idx="2">
+            <a:schemeClr val="accent1"/>
+          </a:effectRef>
+          <a:fontRef idx="minor">
+            <a:schemeClr val="lt1"/>
+          </a:fontRef>
+        </p:style>
+        <p:txBody>
+          <a:bodyPr rtlCol="0" anchor="ctr"/>
+          <a:lstStyle/>
+          <a:p>
+            <a:pPr algn="ctr"/>
+          </a:p>
+        </p:txBody>
+      </p:sp>
+      <p:sp>
+        <p:nvSpPr>
+          <p:cNvPr id="11" name="Rectangle 10"/>
+          <p:cNvSpPr/>
+          <p:nvPr/>
+        </p:nvSpPr>
+        <p:spPr>
+          <a:xfrm>
+            <a:off x="365760" y="859536"/>
+            <a:ext cx="2741599" cy="36576"/>
+          </a:xfrm>
+          <a:prstGeom prst="rect">
+            <a:avLst/>
+          </a:prstGeom>
+          <a:solidFill>
+            <a:srgbClr val="E2E8F0"/>
+          </a:solidFill>
+          <a:ln>
+            <a:noFill/>
+          </a:ln>
+          <a:effectLst/>
+        </p:spPr>
+        <p:style>
+          <a:lnRef idx="1">
+            <a:schemeClr val="accent1"/>
+          </a:lnRef>
+          <a:fillRef idx="3">
+            <a:schemeClr val="accent1"/>
+          </a:fillRef>
+          <a:effectRef idx="2">
+            <a:schemeClr val="accent1"/>
+          </a:effectRef>
+          <a:fontRef idx="minor">
+            <a:schemeClr val="lt1"/>
+          </a:fontRef>
+        </p:style>
+        <p:txBody>
+          <a:bodyPr rtlCol="0" anchor="ctr"/>
+          <a:lstStyle/>
+          <a:p>
+            <a:pPr algn="ctr"/>
+          </a:p>
+        </p:txBody>
+      </p:sp>
+      <p:sp>
+        <p:nvSpPr>
+          <p:cNvPr id="12" name="Rounded Rectangle 11"/>
+          <p:cNvSpPr/>
+          <p:nvPr/>
+        </p:nvSpPr>
+        <p:spPr>
+          <a:xfrm>
+            <a:off x="475488" y="969264"/>
+            <a:ext cx="2522143" cy="2514600"/>
+          </a:xfrm>
+          <a:prstGeom prst="roundRect">
+            <a:avLst>
+              <a:gd name="adj" fmla="val 3000"/>
+            </a:avLst>
+          </a:prstGeom>
+          <a:solidFill>
+            <a:srgbClr val="F5F8FC"/>
+          </a:solidFill>
+          <a:ln w="8890">
+            <a:solidFill>
+              <a:srgbClr val="C0D0E0"/>
+            </a:solidFill>
+          </a:ln>
+          <a:effectLst/>
+        </p:spPr>
+        <p:style>
+          <a:lnRef idx="1">
+            <a:schemeClr val="accent1"/>
+          </a:lnRef>
+          <a:fillRef idx="3">
+            <a:schemeClr val="accent1"/>
+          </a:fillRef>
+          <a:effectRef idx="2">
+            <a:schemeClr val="accent1"/>
+          </a:effectRef>
+          <a:fontRef idx="minor">
+            <a:schemeClr val="lt1"/>
+          </a:fontRef>
+        </p:style>
+        <p:txBody>
+          <a:bodyPr rtlCol="0" anchor="ctr"/>
+          <a:lstStyle/>
+          <a:p>
+            <a:pPr algn="ctr"/>
+          </a:p>
+        </p:txBody>
+      </p:sp>
+      <p:sp>
+        <p:nvSpPr>
+          <p:cNvPr id="13" name="TextBox 12"/>
+          <p:cNvSpPr txBox="1"/>
+          <p:nvPr/>
+        </p:nvSpPr>
+        <p:spPr>
+          <a:xfrm>
+            <a:off x="475488" y="969264"/>
+            <a:ext cx="2522143" cy="2514600"/>
+          </a:xfrm>
+          <a:prstGeom prst="rect">
+            <a:avLst/>
+          </a:prstGeom>
+          <a:noFill/>
+        </p:spPr>
+        <p:txBody>
+          <a:bodyPr wrap="square" anchor="ctr" lIns="36000" rIns="36000" tIns="18000" bIns="18000">
+            <a:spAutoFit/>
+          </a:bodyPr>
+          <a:lstStyle/>
+          <a:p>
+            <a:pPr algn="ctr"/>
+            <a:r>
+              <a:rPr sz="1232" b="0" i="0">
+                <a:solidFill>
+                  <a:srgbClr val="AAB4C0"/>
+                </a:solidFill>
+                <a:latin typeface="Arial"/>
+              </a:rPr>
+              <a:t>(photo)</a:t>
+            </a:r>
+          </a:p>
+        </p:txBody>
+      </p:sp>
+      <p:sp>
+        <p:nvSpPr>
+          <p:cNvPr id="14" name="TextBox 13"/>
+          <p:cNvSpPr txBox="1"/>
+          <p:nvPr/>
+        </p:nvSpPr>
+        <p:spPr>
+          <a:xfrm>
+            <a:off x="457200" y="3611880"/>
+            <a:ext cx="2558719" cy="310896"/>
+          </a:xfrm>
+          <a:prstGeom prst="rect">
+            <a:avLst/>
+          </a:prstGeom>
+          <a:noFill/>
+        </p:spPr>
+        <p:txBody>
+          <a:bodyPr wrap="square" anchor="t" lIns="36000" rIns="36000" tIns="18000" bIns="18000">
+            <a:spAutoFit/>
+          </a:bodyPr>
+          <a:lstStyle/>
+          <a:p>
+            <a:pPr algn="ctr"/>
+            <a:r>
+              <a:rPr sz="1568" b="1" i="0">
+                <a:solidFill>
+                  <a:srgbClr val="1E293B"/>
+                </a:solidFill>
+                <a:latin typeface="Arial"/>
+              </a:rPr>
+              <a:t>Water only</a:t>
+            </a:r>
+          </a:p>
+        </p:txBody>
+      </p:sp>
+      <p:sp>
+        <p:nvSpPr>
+          <p:cNvPr id="15" name="TextBox 14"/>
+          <p:cNvSpPr txBox="1"/>
+          <p:nvPr/>
+        </p:nvSpPr>
+        <p:spPr>
+          <a:xfrm>
+            <a:off x="457200" y="3922776"/>
+            <a:ext cx="2558719" cy="237744"/>
+          </a:xfrm>
+          <a:prstGeom prst="rect">
+            <a:avLst/>
+          </a:prstGeom>
+          <a:noFill/>
+        </p:spPr>
+        <p:txBody>
+          <a:bodyPr wrap="square" anchor="t" lIns="36000" rIns="36000" tIns="18000" bIns="18000">
+            <a:spAutoFit/>
+          </a:bodyPr>
+          <a:lstStyle/>
+          <a:p>
+            <a:pPr algn="ctr"/>
+            <a:r>
+              <a:rPr sz="1120" b="0" i="0">
+                <a:solidFill>
+                  <a:srgbClr val="64748B"/>
+                </a:solidFill>
+                <a:latin typeface="Arial"/>
+              </a:rPr>
+              <a:t>H₂O</a:t>
+            </a:r>
+          </a:p>
+        </p:txBody>
+      </p:sp>
+      <p:sp>
+        <p:nvSpPr>
+          <p:cNvPr id="16" name="TextBox 15"/>
+          <p:cNvSpPr txBox="1"/>
+          <p:nvPr/>
+        </p:nvSpPr>
+        <p:spPr>
+          <a:xfrm>
+            <a:off x="457200" y="4197096"/>
+            <a:ext cx="2558719" cy="1837944"/>
+          </a:xfrm>
+          <a:prstGeom prst="rect">
+            <a:avLst/>
+          </a:prstGeom>
+          <a:noFill/>
+        </p:spPr>
+        <p:txBody>
+          <a:bodyPr wrap="square" anchor="t" lIns="36000" rIns="36000" tIns="18000" bIns="18000">
+            <a:spAutoFit/>
+          </a:bodyPr>
+          <a:lstStyle/>
+          <a:p>
+            <a:pPr algn="ctr"/>
+            <a:r>
+              <a:rPr sz="1344" b="0" i="0">
+                <a:solidFill>
+                  <a:srgbClr val="A05656"/>
+                </a:solidFill>
+                <a:latin typeface="Arial"/>
+              </a:rPr>
+              <a:t>Runs off and evaporates</a:t>
+            </a:r>
+          </a:p>
+          <a:p>
+            <a:pPr algn="ctr"/>
+            <a:r>
+              <a:rPr sz="1344" b="0" i="0">
+                <a:solidFill>
+                  <a:srgbClr val="A05656"/>
+                </a:solidFill>
+                <a:latin typeface="Arial"/>
+              </a:rPr>
+              <a:t>instantly — no persistence</a:t>
+            </a:r>
+          </a:p>
+        </p:txBody>
+      </p:sp>
+      <p:sp>
+        <p:nvSpPr>
+          <p:cNvPr id="17" name="Rounded Rectangle 16"/>
+          <p:cNvSpPr/>
+          <p:nvPr/>
+        </p:nvSpPr>
+        <p:spPr>
+          <a:xfrm>
+            <a:off x="3271951" y="859536"/>
+            <a:ext cx="2741599" cy="5248656"/>
+          </a:xfrm>
+          <a:prstGeom prst="roundRect">
+            <a:avLst>
+              <a:gd name="adj" fmla="val 4000"/>
+            </a:avLst>
+          </a:prstGeom>
+          <a:solidFill>
+            <a:srgbClr val="F1F5F9"/>
+          </a:solidFill>
+          <a:ln w="6350">
+            <a:solidFill>
+              <a:srgbClr val="E2E8F0"/>
+            </a:solidFill>
+          </a:ln>
+          <a:effectLst/>
+        </p:spPr>
+        <p:style>
+          <a:lnRef idx="1">
+            <a:schemeClr val="accent1"/>
+          </a:lnRef>
+          <a:fillRef idx="3">
+            <a:schemeClr val="accent1"/>
+          </a:fillRef>
+          <a:effectRef idx="2">
+            <a:schemeClr val="accent1"/>
+          </a:effectRef>
+          <a:fontRef idx="minor">
+            <a:schemeClr val="lt1"/>
+          </a:fontRef>
+        </p:style>
+        <p:txBody>
+          <a:bodyPr rtlCol="0" anchor="ctr"/>
+          <a:lstStyle/>
+          <a:p>
+            <a:pPr algn="ctr"/>
+          </a:p>
+        </p:txBody>
+      </p:sp>
+      <p:sp>
+        <p:nvSpPr>
+          <p:cNvPr id="18" name="Rectangle 17"/>
+          <p:cNvSpPr/>
+          <p:nvPr/>
+        </p:nvSpPr>
+        <p:spPr>
+          <a:xfrm>
+            <a:off x="3271951" y="859536"/>
+            <a:ext cx="2741599" cy="36576"/>
+          </a:xfrm>
+          <a:prstGeom prst="rect">
+            <a:avLst/>
+          </a:prstGeom>
+          <a:solidFill>
+            <a:srgbClr val="E2E8F0"/>
+          </a:solidFill>
+          <a:ln>
+            <a:noFill/>
+          </a:ln>
+          <a:effectLst/>
+        </p:spPr>
+        <p:style>
+          <a:lnRef idx="1">
+            <a:schemeClr val="accent1"/>
+          </a:lnRef>
+          <a:fillRef idx="3">
+            <a:schemeClr val="accent1"/>
+          </a:fillRef>
+          <a:effectRef idx="2">
+            <a:schemeClr val="accent1"/>
+          </a:effectRef>
+          <a:fontRef idx="minor">
+            <a:schemeClr val="lt1"/>
+          </a:fontRef>
+        </p:style>
+        <p:txBody>
+          <a:bodyPr rtlCol="0" anchor="ctr"/>
+          <a:lstStyle/>
+          <a:p>
+            <a:pPr algn="ctr"/>
+          </a:p>
+        </p:txBody>
+      </p:sp>
+      <p:sp>
+        <p:nvSpPr>
+          <p:cNvPr id="19" name="Rounded Rectangle 18"/>
+          <p:cNvSpPr/>
+          <p:nvPr/>
+        </p:nvSpPr>
+        <p:spPr>
+          <a:xfrm>
+            <a:off x="3381679" y="969264"/>
+            <a:ext cx="2522143" cy="2514600"/>
+          </a:xfrm>
+          <a:prstGeom prst="roundRect">
+            <a:avLst>
+              <a:gd name="adj" fmla="val 3000"/>
+            </a:avLst>
+          </a:prstGeom>
+          <a:solidFill>
+            <a:srgbClr val="F5F8FC"/>
+          </a:solidFill>
+          <a:ln w="8890">
+            <a:solidFill>
+              <a:srgbClr val="C0D0E0"/>
+            </a:solidFill>
+          </a:ln>
+          <a:effectLst/>
+        </p:spPr>
+        <p:style>
+          <a:lnRef idx="1">
+            <a:schemeClr val="accent1"/>
+          </a:lnRef>
+          <a:fillRef idx="3">
+            <a:schemeClr val="accent1"/>
+          </a:fillRef>
+          <a:effectRef idx="2">
+            <a:schemeClr val="accent1"/>
+          </a:effectRef>
+          <a:fontRef idx="minor">
+            <a:schemeClr val="lt1"/>
+          </a:fontRef>
+        </p:style>
+        <p:txBody>
+          <a:bodyPr rtlCol="0" anchor="ctr"/>
+          <a:lstStyle/>
+          <a:p>
+            <a:pPr algn="ctr"/>
+          </a:p>
+        </p:txBody>
+      </p:sp>
+      <p:sp>
+        <p:nvSpPr>
+          <p:cNvPr id="20" name="TextBox 19"/>
+          <p:cNvSpPr txBox="1"/>
+          <p:nvPr/>
+        </p:nvSpPr>
+        <p:spPr>
+          <a:xfrm>
+            <a:off x="3381679" y="969264"/>
+            <a:ext cx="2522143" cy="2514600"/>
+          </a:xfrm>
+          <a:prstGeom prst="rect">
+            <a:avLst/>
+          </a:prstGeom>
+          <a:noFill/>
+        </p:spPr>
+        <p:txBody>
+          <a:bodyPr wrap="square" anchor="ctr" lIns="36000" rIns="36000" tIns="18000" bIns="18000">
+            <a:spAutoFit/>
+          </a:bodyPr>
+          <a:lstStyle/>
+          <a:p>
+            <a:pPr algn="ctr"/>
+            <a:r>
+              <a:rPr sz="1232" b="0" i="0">
+                <a:solidFill>
+                  <a:srgbClr val="AAB4C0"/>
+                </a:solidFill>
+                <a:latin typeface="Arial"/>
+              </a:rPr>
+              <a:t>(photo)</a:t>
+            </a:r>
+          </a:p>
+        </p:txBody>
+      </p:sp>
+      <p:sp>
+        <p:nvSpPr>
+          <p:cNvPr id="21" name="TextBox 20"/>
+          <p:cNvSpPr txBox="1"/>
+          <p:nvPr/>
+        </p:nvSpPr>
+        <p:spPr>
+          <a:xfrm>
+            <a:off x="3363391" y="3611880"/>
+            <a:ext cx="2558719" cy="310896"/>
+          </a:xfrm>
+          <a:prstGeom prst="rect">
+            <a:avLst/>
+          </a:prstGeom>
+          <a:noFill/>
+        </p:spPr>
+        <p:txBody>
+          <a:bodyPr wrap="square" anchor="t" lIns="36000" rIns="36000" tIns="18000" bIns="18000">
+            <a:spAutoFit/>
+          </a:bodyPr>
+          <a:lstStyle/>
+          <a:p>
+            <a:pPr algn="ctr"/>
+            <a:r>
+              <a:rPr sz="1568" b="1" i="0">
+                <a:solidFill>
+                  <a:srgbClr val="1E293B"/>
+                </a:solidFill>
+                <a:latin typeface="Arial"/>
+              </a:rPr>
+              <a:t>Phos-Chek</a:t>
+            </a:r>
+          </a:p>
+        </p:txBody>
+      </p:sp>
+      <p:sp>
+        <p:nvSpPr>
+          <p:cNvPr id="22" name="TextBox 21"/>
+          <p:cNvSpPr txBox="1"/>
+          <p:nvPr/>
+        </p:nvSpPr>
+        <p:spPr>
+          <a:xfrm>
+            <a:off x="3363391" y="3922776"/>
+            <a:ext cx="2558719" cy="237744"/>
+          </a:xfrm>
+          <a:prstGeom prst="rect">
+            <a:avLst/>
+          </a:prstGeom>
+          <a:noFill/>
+        </p:spPr>
+        <p:txBody>
+          <a:bodyPr wrap="square" anchor="t" lIns="36000" rIns="36000" tIns="18000" bIns="18000">
+            <a:spAutoFit/>
+          </a:bodyPr>
+          <a:lstStyle/>
+          <a:p>
+            <a:pPr algn="ctr"/>
+            <a:r>
+              <a:rPr sz="1120" b="0" i="0">
+                <a:solidFill>
+                  <a:srgbClr val="64748B"/>
+                </a:solidFill>
+                <a:latin typeface="Arial"/>
+              </a:rPr>
+              <a:t>Ammonium phosphate</a:t>
+            </a:r>
+          </a:p>
+        </p:txBody>
+      </p:sp>
+      <p:sp>
+        <p:nvSpPr>
+          <p:cNvPr id="23" name="TextBox 22"/>
+          <p:cNvSpPr txBox="1"/>
+          <p:nvPr/>
+        </p:nvSpPr>
+        <p:spPr>
+          <a:xfrm>
+            <a:off x="3363391" y="4197096"/>
+            <a:ext cx="2558719" cy="1837944"/>
+          </a:xfrm>
+          <a:prstGeom prst="rect">
+            <a:avLst/>
+          </a:prstGeom>
+          <a:noFill/>
+        </p:spPr>
+        <p:txBody>
+          <a:bodyPr wrap="square" anchor="t" lIns="36000" rIns="36000" tIns="18000" bIns="18000">
+            <a:spAutoFit/>
+          </a:bodyPr>
+          <a:lstStyle/>
+          <a:p>
+            <a:pPr algn="ctr"/>
+            <a:r>
+              <a:rPr sz="1344" b="0" i="0">
+                <a:solidFill>
+                  <a:srgbClr val="A05656"/>
+                </a:solidFill>
+                <a:latin typeface="Arial"/>
+              </a:rPr>
+              <a:t>Chemical residue persists</a:t>
+            </a:r>
+          </a:p>
+          <a:p>
+            <a:pPr algn="ctr"/>
+            <a:r>
+              <a:rPr sz="1344" b="0" i="0">
+                <a:solidFill>
+                  <a:srgbClr val="A05656"/>
+                </a:solidFill>
+                <a:latin typeface="Arial"/>
+              </a:rPr>
+              <a:t>in soil and water systems</a:t>
+            </a:r>
+          </a:p>
+        </p:txBody>
+      </p:sp>
+      <p:sp>
+        <p:nvSpPr>
+          <p:cNvPr id="24" name="Rounded Rectangle 23"/>
+          <p:cNvSpPr/>
+          <p:nvPr/>
+        </p:nvSpPr>
+        <p:spPr>
+          <a:xfrm>
+            <a:off x="6178143" y="859536"/>
+            <a:ext cx="2741599" cy="5248656"/>
+          </a:xfrm>
+          <a:prstGeom prst="roundRect">
+            <a:avLst>
+              <a:gd name="adj" fmla="val 4000"/>
+            </a:avLst>
+          </a:prstGeom>
+          <a:solidFill>
+            <a:srgbClr val="F1F5F9"/>
+          </a:solidFill>
+          <a:ln w="6350">
+            <a:solidFill>
+              <a:srgbClr val="E2E8F0"/>
+            </a:solidFill>
+          </a:ln>
+          <a:effectLst/>
+        </p:spPr>
+        <p:style>
+          <a:lnRef idx="1">
+            <a:schemeClr val="accent1"/>
+          </a:lnRef>
+          <a:fillRef idx="3">
+            <a:schemeClr val="accent1"/>
+          </a:fillRef>
+          <a:effectRef idx="2">
+            <a:schemeClr val="accent1"/>
+          </a:effectRef>
+          <a:fontRef idx="minor">
+            <a:schemeClr val="lt1"/>
+          </a:fontRef>
+        </p:style>
+        <p:txBody>
+          <a:bodyPr rtlCol="0" anchor="ctr"/>
+          <a:lstStyle/>
+          <a:p>
+            <a:pPr algn="ctr"/>
+          </a:p>
+        </p:txBody>
+      </p:sp>
+      <p:sp>
+        <p:nvSpPr>
+          <p:cNvPr id="25" name="Rectangle 24"/>
+          <p:cNvSpPr/>
+          <p:nvPr/>
+        </p:nvSpPr>
+        <p:spPr>
+          <a:xfrm>
+            <a:off x="6178143" y="859536"/>
+            <a:ext cx="2741599" cy="36576"/>
+          </a:xfrm>
+          <a:prstGeom prst="rect">
+            <a:avLst/>
+          </a:prstGeom>
+          <a:solidFill>
+            <a:srgbClr val="E2E8F0"/>
+          </a:solidFill>
+          <a:ln>
+            <a:noFill/>
+          </a:ln>
+          <a:effectLst/>
+        </p:spPr>
+        <p:style>
+          <a:lnRef idx="1">
+            <a:schemeClr val="accent1"/>
+          </a:lnRef>
+          <a:fillRef idx="3">
+            <a:schemeClr val="accent1"/>
+          </a:fillRef>
+          <a:effectRef idx="2">
+            <a:schemeClr val="accent1"/>
+          </a:effectRef>
+          <a:fontRef idx="minor">
+            <a:schemeClr val="lt1"/>
+          </a:fontRef>
+        </p:style>
+        <p:txBody>
+          <a:bodyPr rtlCol="0" anchor="ctr"/>
+          <a:lstStyle/>
+          <a:p>
+            <a:pPr algn="ctr"/>
+          </a:p>
+        </p:txBody>
+      </p:sp>
+      <p:sp>
+        <p:nvSpPr>
+          <p:cNvPr id="26" name="Rounded Rectangle 25"/>
+          <p:cNvSpPr/>
+          <p:nvPr/>
+        </p:nvSpPr>
+        <p:spPr>
+          <a:xfrm>
+            <a:off x="6287871" y="969264"/>
+            <a:ext cx="2522143" cy="2514600"/>
+          </a:xfrm>
+          <a:prstGeom prst="roundRect">
+            <a:avLst>
+              <a:gd name="adj" fmla="val 3000"/>
+            </a:avLst>
+          </a:prstGeom>
+          <a:solidFill>
+            <a:srgbClr val="F5F8FC"/>
+          </a:solidFill>
+          <a:ln w="8890">
+            <a:solidFill>
+              <a:srgbClr val="C0D0E0"/>
+            </a:solidFill>
+          </a:ln>
+          <a:effectLst/>
+        </p:spPr>
+        <p:style>
+          <a:lnRef idx="1">
+            <a:schemeClr val="accent1"/>
+          </a:lnRef>
+          <a:fillRef idx="3">
+            <a:schemeClr val="accent1"/>
+          </a:fillRef>
+          <a:effectRef idx="2">
+            <a:schemeClr val="accent1"/>
+          </a:effectRef>
+          <a:fontRef idx="minor">
+            <a:schemeClr val="lt1"/>
+          </a:fontRef>
+        </p:style>
+        <p:txBody>
+          <a:bodyPr rtlCol="0" anchor="ctr"/>
+          <a:lstStyle/>
+          <a:p>
+            <a:pPr algn="ctr"/>
+          </a:p>
+        </p:txBody>
+      </p:sp>
+      <p:sp>
+        <p:nvSpPr>
+          <p:cNvPr id="27" name="TextBox 26"/>
+          <p:cNvSpPr txBox="1"/>
+          <p:nvPr/>
+        </p:nvSpPr>
+        <p:spPr>
+          <a:xfrm>
+            <a:off x="6287871" y="969264"/>
+            <a:ext cx="2522143" cy="2514600"/>
+          </a:xfrm>
+          <a:prstGeom prst="rect">
+            <a:avLst/>
+          </a:prstGeom>
+          <a:noFill/>
+        </p:spPr>
+        <p:txBody>
+          <a:bodyPr wrap="square" anchor="ctr" lIns="36000" rIns="36000" tIns="18000" bIns="18000">
+            <a:spAutoFit/>
+          </a:bodyPr>
+          <a:lstStyle/>
+          <a:p>
+            <a:pPr algn="ctr"/>
+            <a:r>
+              <a:rPr sz="1232" b="0" i="0">
+                <a:solidFill>
+                  <a:srgbClr val="AAB4C0"/>
+                </a:solidFill>
+                <a:latin typeface="Arial"/>
+              </a:rPr>
+              <a:t>(photo)</a:t>
+            </a:r>
+          </a:p>
+        </p:txBody>
+      </p:sp>
+      <p:sp>
+        <p:nvSpPr>
+          <p:cNvPr id="28" name="TextBox 27"/>
+          <p:cNvSpPr txBox="1"/>
+          <p:nvPr/>
+        </p:nvSpPr>
+        <p:spPr>
+          <a:xfrm>
+            <a:off x="6269583" y="3611880"/>
+            <a:ext cx="2558719" cy="310896"/>
+          </a:xfrm>
+          <a:prstGeom prst="rect">
+            <a:avLst/>
+          </a:prstGeom>
+          <a:noFill/>
+        </p:spPr>
+        <p:txBody>
+          <a:bodyPr wrap="square" anchor="t" lIns="36000" rIns="36000" tIns="18000" bIns="18000">
+            <a:spAutoFit/>
+          </a:bodyPr>
+          <a:lstStyle/>
+          <a:p>
+            <a:pPr algn="ctr"/>
+            <a:r>
+              <a:rPr sz="1568" b="1" i="0">
+                <a:solidFill>
+                  <a:srgbClr val="1E293B"/>
+                </a:solidFill>
+                <a:latin typeface="Arial"/>
+              </a:rPr>
+              <a:t>AquaGel-K</a:t>
+            </a:r>
+          </a:p>
+        </p:txBody>
+      </p:sp>
+      <p:sp>
+        <p:nvSpPr>
+          <p:cNvPr id="29" name="TextBox 28"/>
+          <p:cNvSpPr txBox="1"/>
+          <p:nvPr/>
+        </p:nvSpPr>
+        <p:spPr>
+          <a:xfrm>
+            <a:off x="6269583" y="3922776"/>
+            <a:ext cx="2558719" cy="237744"/>
+          </a:xfrm>
+          <a:prstGeom prst="rect">
+            <a:avLst/>
+          </a:prstGeom>
+          <a:noFill/>
+        </p:spPr>
+        <p:txBody>
+          <a:bodyPr wrap="square" anchor="t" lIns="36000" rIns="36000" tIns="18000" bIns="18000">
+            <a:spAutoFit/>
+          </a:bodyPr>
+          <a:lstStyle/>
+          <a:p>
+            <a:pPr algn="ctr"/>
+            <a:r>
+              <a:rPr sz="1120" b="0" i="0">
+                <a:solidFill>
+                  <a:srgbClr val="64748B"/>
+                </a:solidFill>
+                <a:latin typeface="Arial"/>
+              </a:rPr>
+              <a:t>Cross-linked polyacrylate</a:t>
+            </a:r>
+          </a:p>
+        </p:txBody>
+      </p:sp>
+      <p:sp>
+        <p:nvSpPr>
+          <p:cNvPr id="30" name="TextBox 29"/>
+          <p:cNvSpPr txBox="1"/>
+          <p:nvPr/>
+        </p:nvSpPr>
+        <p:spPr>
+          <a:xfrm>
+            <a:off x="6269583" y="4197096"/>
+            <a:ext cx="2558719" cy="1837944"/>
+          </a:xfrm>
+          <a:prstGeom prst="rect">
+            <a:avLst/>
+          </a:prstGeom>
+          <a:noFill/>
+        </p:spPr>
+        <p:txBody>
+          <a:bodyPr wrap="square" anchor="t" lIns="36000" rIns="36000" tIns="18000" bIns="18000">
+            <a:spAutoFit/>
+          </a:bodyPr>
+          <a:lstStyle/>
+          <a:p>
+            <a:pPr algn="ctr"/>
+            <a:r>
+              <a:rPr sz="1344" b="0" i="0">
+                <a:solidFill>
+                  <a:srgbClr val="A05656"/>
+                </a:solidFill>
+                <a:latin typeface="Arial"/>
+              </a:rPr>
+              <a:t>Protection lost the moment</a:t>
+            </a:r>
+          </a:p>
+          <a:p>
+            <a:pPr algn="ctr"/>
+            <a:r>
+              <a:rPr sz="1344" b="0" i="0">
+                <a:solidFill>
+                  <a:srgbClr val="A05656"/>
+                </a:solidFill>
+                <a:latin typeface="Arial"/>
+              </a:rPr>
+              <a:t>water evaporates</a:t>
+            </a:r>
+          </a:p>
+        </p:txBody>
+      </p:sp>
+      <p:sp>
+        <p:nvSpPr>
+          <p:cNvPr id="31" name="Rounded Rectangle 30"/>
+          <p:cNvSpPr/>
+          <p:nvPr/>
+        </p:nvSpPr>
+        <p:spPr>
+          <a:xfrm>
+            <a:off x="9084335" y="859536"/>
+            <a:ext cx="2741599" cy="5248656"/>
+          </a:xfrm>
+          <a:prstGeom prst="roundRect">
+            <a:avLst>
+              <a:gd name="adj" fmla="val 4000"/>
+            </a:avLst>
           </a:prstGeom>
           <a:solidFill>
             <a:srgbClr val="1E293B"/>
@@ -49536,944 +50088,14 @@
       </p:sp>
       <p:sp>
         <p:nvSpPr>
-          <p:cNvPr id="11" name="TextBox 10"/>
-          <p:cNvSpPr txBox="1"/>
-          <p:nvPr/>
-        </p:nvSpPr>
-        <p:spPr>
-          <a:xfrm>
-            <a:off x="457200" y="859536"/>
-            <a:ext cx="1509761" cy="585216"/>
-          </a:xfrm>
-          <a:prstGeom prst="rect">
-            <a:avLst/>
-          </a:prstGeom>
-          <a:noFill/>
-        </p:spPr>
-        <p:txBody>
-          <a:bodyPr wrap="square" anchor="ctr" lIns="36000" rIns="36000" tIns="18000" bIns="18000">
-            <a:spAutoFit/>
-          </a:bodyPr>
-          <a:lstStyle/>
-          <a:p>
-            <a:pPr algn="l"/>
-            <a:r>
-              <a:rPr sz="1232" b="1" i="0">
-                <a:solidFill>
-                  <a:srgbClr val="FFFFFF"/>
-                </a:solidFill>
-                <a:latin typeface="Arial"/>
-              </a:rPr>
-              <a:t>Technology</a:t>
-            </a:r>
-          </a:p>
-        </p:txBody>
-      </p:sp>
-      <p:sp>
-        <p:nvSpPr>
-          <p:cNvPr id="12" name="TextBox 11"/>
-          <p:cNvSpPr txBox="1"/>
-          <p:nvPr/>
-        </p:nvSpPr>
-        <p:spPr>
-          <a:xfrm>
-            <a:off x="2058401" y="859536"/>
-            <a:ext cx="2043495" cy="585216"/>
-          </a:xfrm>
-          <a:prstGeom prst="rect">
-            <a:avLst/>
-          </a:prstGeom>
-          <a:noFill/>
-        </p:spPr>
-        <p:txBody>
-          <a:bodyPr wrap="square" anchor="ctr" lIns="36000" rIns="36000" tIns="18000" bIns="18000">
-            <a:spAutoFit/>
-          </a:bodyPr>
-          <a:lstStyle/>
-          <a:p>
-            <a:pPr algn="l"/>
-            <a:r>
-              <a:rPr sz="1232" b="1" i="0">
-                <a:solidFill>
-                  <a:srgbClr val="FFFFFF"/>
-                </a:solidFill>
-                <a:latin typeface="Arial"/>
-              </a:rPr>
-              <a:t>Main Component</a:t>
-            </a:r>
-          </a:p>
-        </p:txBody>
-      </p:sp>
-      <p:sp>
-        <p:nvSpPr>
-          <p:cNvPr id="13" name="TextBox 12"/>
-          <p:cNvSpPr txBox="1"/>
-          <p:nvPr/>
-        </p:nvSpPr>
-        <p:spPr>
-          <a:xfrm>
-            <a:off x="4193337" y="859536"/>
-            <a:ext cx="2043495" cy="585216"/>
-          </a:xfrm>
-          <a:prstGeom prst="rect">
-            <a:avLst/>
-          </a:prstGeom>
-          <a:noFill/>
-        </p:spPr>
-        <p:txBody>
-          <a:bodyPr wrap="square" anchor="ctr" lIns="36000" rIns="36000" tIns="18000" bIns="18000">
-            <a:spAutoFit/>
-          </a:bodyPr>
-          <a:lstStyle/>
-          <a:p>
-            <a:pPr algn="l"/>
-            <a:r>
-              <a:rPr sz="1232" b="1" i="0">
-                <a:solidFill>
-                  <a:srgbClr val="FFFFFF"/>
-                </a:solidFill>
-                <a:latin typeface="Arial"/>
-              </a:rPr>
-              <a:t>Feature</a:t>
-            </a:r>
-          </a:p>
-        </p:txBody>
-      </p:sp>
-      <p:sp>
-        <p:nvSpPr>
-          <p:cNvPr id="14" name="TextBox 13"/>
-          <p:cNvSpPr txBox="1"/>
-          <p:nvPr/>
-        </p:nvSpPr>
-        <p:spPr>
-          <a:xfrm>
-            <a:off x="6328273" y="859536"/>
-            <a:ext cx="1509761" cy="585216"/>
-          </a:xfrm>
-          <a:prstGeom prst="rect">
-            <a:avLst/>
-          </a:prstGeom>
-          <a:noFill/>
-        </p:spPr>
-        <p:txBody>
-          <a:bodyPr wrap="square" anchor="ctr" lIns="36000" rIns="36000" tIns="18000" bIns="18000">
-            <a:spAutoFit/>
-          </a:bodyPr>
-          <a:lstStyle/>
-          <a:p>
-            <a:pPr algn="l"/>
-            <a:r>
-              <a:rPr sz="1232" b="1" i="0">
-                <a:solidFill>
-                  <a:srgbClr val="FFFFFF"/>
-                </a:solidFill>
-                <a:latin typeface="Arial"/>
-              </a:rPr>
-              <a:t>Limitation</a:t>
-            </a:r>
-          </a:p>
-        </p:txBody>
-      </p:sp>
-      <p:sp>
-        <p:nvSpPr>
-          <p:cNvPr id="15" name="Rectangle 14"/>
+          <p:cNvPr id="32" name="Rectangle 31"/>
           <p:cNvSpPr/>
           <p:nvPr/>
         </p:nvSpPr>
         <p:spPr>
           <a:xfrm>
-            <a:off x="365760" y="1444752"/>
-            <a:ext cx="7472275" cy="585216"/>
-          </a:xfrm>
-          <a:prstGeom prst="rect">
-            <a:avLst/>
-          </a:prstGeom>
-          <a:solidFill>
-            <a:srgbClr val="F8FAFC"/>
-          </a:solidFill>
-          <a:ln w="3810">
-            <a:solidFill>
-              <a:srgbClr val="E2E8F0"/>
-            </a:solidFill>
-          </a:ln>
-          <a:effectLst/>
-        </p:spPr>
-        <p:style>
-          <a:lnRef idx="1">
-            <a:schemeClr val="accent1"/>
-          </a:lnRef>
-          <a:fillRef idx="3">
-            <a:schemeClr val="accent1"/>
-          </a:fillRef>
-          <a:effectRef idx="2">
-            <a:schemeClr val="accent1"/>
-          </a:effectRef>
-          <a:fontRef idx="minor">
-            <a:schemeClr val="lt1"/>
-          </a:fontRef>
-        </p:style>
-        <p:txBody>
-          <a:bodyPr rtlCol="0" anchor="ctr"/>
-          <a:lstStyle/>
-          <a:p>
-            <a:pPr algn="ctr"/>
-          </a:p>
-        </p:txBody>
-      </p:sp>
-      <p:sp>
-        <p:nvSpPr>
-          <p:cNvPr id="16" name="TextBox 15"/>
-          <p:cNvSpPr txBox="1"/>
-          <p:nvPr/>
-        </p:nvSpPr>
-        <p:spPr>
-          <a:xfrm>
-            <a:off x="457200" y="1444752"/>
-            <a:ext cx="1509761" cy="585216"/>
-          </a:xfrm>
-          <a:prstGeom prst="rect">
-            <a:avLst/>
-          </a:prstGeom>
-          <a:noFill/>
-        </p:spPr>
-        <p:txBody>
-          <a:bodyPr wrap="square" anchor="ctr" lIns="36000" rIns="36000" tIns="18000" bIns="18000">
-            <a:spAutoFit/>
-          </a:bodyPr>
-          <a:lstStyle/>
-          <a:p>
-            <a:pPr algn="l"/>
-            <a:r>
-              <a:rPr sz="1232" b="0" i="0">
-                <a:solidFill>
-                  <a:srgbClr val="334155"/>
-                </a:solidFill>
-                <a:latin typeface="Arial"/>
-              </a:rPr>
-              <a:t>Water only</a:t>
-            </a:r>
-          </a:p>
-        </p:txBody>
-      </p:sp>
-      <p:sp>
-        <p:nvSpPr>
-          <p:cNvPr id="17" name="TextBox 16"/>
-          <p:cNvSpPr txBox="1"/>
-          <p:nvPr/>
-        </p:nvSpPr>
-        <p:spPr>
-          <a:xfrm>
-            <a:off x="2058401" y="1444752"/>
-            <a:ext cx="2043495" cy="585216"/>
-          </a:xfrm>
-          <a:prstGeom prst="rect">
-            <a:avLst/>
-          </a:prstGeom>
-          <a:noFill/>
-        </p:spPr>
-        <p:txBody>
-          <a:bodyPr wrap="square" anchor="ctr" lIns="36000" rIns="36000" tIns="18000" bIns="18000">
-            <a:spAutoFit/>
-          </a:bodyPr>
-          <a:lstStyle/>
-          <a:p>
-            <a:pPr algn="l"/>
-            <a:r>
-              <a:rPr sz="1232" b="0" i="0">
-                <a:solidFill>
-                  <a:srgbClr val="334155"/>
-                </a:solidFill>
-                <a:latin typeface="Arial"/>
-              </a:rPr>
-              <a:t>H₂O</a:t>
-            </a:r>
-          </a:p>
-        </p:txBody>
-      </p:sp>
-      <p:sp>
-        <p:nvSpPr>
-          <p:cNvPr id="18" name="TextBox 17"/>
-          <p:cNvSpPr txBox="1"/>
-          <p:nvPr/>
-        </p:nvSpPr>
-        <p:spPr>
-          <a:xfrm>
-            <a:off x="4193337" y="1444752"/>
-            <a:ext cx="2043495" cy="585216"/>
-          </a:xfrm>
-          <a:prstGeom prst="rect">
-            <a:avLst/>
-          </a:prstGeom>
-          <a:noFill/>
-        </p:spPr>
-        <p:txBody>
-          <a:bodyPr wrap="square" anchor="ctr" lIns="36000" rIns="36000" tIns="18000" bIns="18000">
-            <a:spAutoFit/>
-          </a:bodyPr>
-          <a:lstStyle/>
-          <a:p>
-            <a:pPr algn="l"/>
-            <a:r>
-              <a:rPr sz="1232" b="0" i="0">
-                <a:solidFill>
-                  <a:srgbClr val="334155"/>
-                </a:solidFill>
-                <a:latin typeface="Arial"/>
-              </a:rPr>
-              <a:t>Cooling by latent heat of evaporation</a:t>
-            </a:r>
-          </a:p>
-        </p:txBody>
-      </p:sp>
-      <p:sp>
-        <p:nvSpPr>
-          <p:cNvPr id="19" name="TextBox 18"/>
-          <p:cNvSpPr txBox="1"/>
-          <p:nvPr/>
-        </p:nvSpPr>
-        <p:spPr>
-          <a:xfrm>
-            <a:off x="6328273" y="1444752"/>
-            <a:ext cx="1509761" cy="585216"/>
-          </a:xfrm>
-          <a:prstGeom prst="rect">
-            <a:avLst/>
-          </a:prstGeom>
-          <a:noFill/>
-        </p:spPr>
-        <p:txBody>
-          <a:bodyPr wrap="square" anchor="ctr" lIns="36000" rIns="36000" tIns="18000" bIns="18000">
-            <a:spAutoFit/>
-          </a:bodyPr>
-          <a:lstStyle/>
-          <a:p>
-            <a:pPr algn="l"/>
-            <a:r>
-              <a:rPr sz="1232" b="0" i="0">
-                <a:solidFill>
-                  <a:srgbClr val="A05656"/>
-                </a:solidFill>
-                <a:latin typeface="Arial"/>
-              </a:rPr>
-              <a:t>Immediately runs off and evaporates</a:t>
-            </a:r>
-          </a:p>
-        </p:txBody>
-      </p:sp>
-      <p:sp>
-        <p:nvSpPr>
-          <p:cNvPr id="20" name="Rectangle 19"/>
-          <p:cNvSpPr/>
-          <p:nvPr/>
-        </p:nvSpPr>
-        <p:spPr>
-          <a:xfrm>
-            <a:off x="365760" y="2029968"/>
-            <a:ext cx="7472275" cy="585216"/>
-          </a:xfrm>
-          <a:prstGeom prst="rect">
-            <a:avLst/>
-          </a:prstGeom>
-          <a:solidFill>
-            <a:srgbClr val="FFFFFF"/>
-          </a:solidFill>
-          <a:ln w="3810">
-            <a:solidFill>
-              <a:srgbClr val="E2E8F0"/>
-            </a:solidFill>
-          </a:ln>
-          <a:effectLst/>
-        </p:spPr>
-        <p:style>
-          <a:lnRef idx="1">
-            <a:schemeClr val="accent1"/>
-          </a:lnRef>
-          <a:fillRef idx="3">
-            <a:schemeClr val="accent1"/>
-          </a:fillRef>
-          <a:effectRef idx="2">
-            <a:schemeClr val="accent1"/>
-          </a:effectRef>
-          <a:fontRef idx="minor">
-            <a:schemeClr val="lt1"/>
-          </a:fontRef>
-        </p:style>
-        <p:txBody>
-          <a:bodyPr rtlCol="0" anchor="ctr"/>
-          <a:lstStyle/>
-          <a:p>
-            <a:pPr algn="ctr"/>
-          </a:p>
-        </p:txBody>
-      </p:sp>
-      <p:sp>
-        <p:nvSpPr>
-          <p:cNvPr id="21" name="TextBox 20"/>
-          <p:cNvSpPr txBox="1"/>
-          <p:nvPr/>
-        </p:nvSpPr>
-        <p:spPr>
-          <a:xfrm>
-            <a:off x="457200" y="2029968"/>
-            <a:ext cx="1509761" cy="585216"/>
-          </a:xfrm>
-          <a:prstGeom prst="rect">
-            <a:avLst/>
-          </a:prstGeom>
-          <a:noFill/>
-        </p:spPr>
-        <p:txBody>
-          <a:bodyPr wrap="square" anchor="ctr" lIns="36000" rIns="36000" tIns="18000" bIns="18000">
-            <a:spAutoFit/>
-          </a:bodyPr>
-          <a:lstStyle/>
-          <a:p>
-            <a:pPr algn="l"/>
-            <a:r>
-              <a:rPr sz="1232" b="0" i="0">
-                <a:solidFill>
-                  <a:srgbClr val="334155"/>
-                </a:solidFill>
-                <a:latin typeface="Arial"/>
-              </a:rPr>
-              <a:t>Phos-Chek</a:t>
-            </a:r>
-          </a:p>
-        </p:txBody>
-      </p:sp>
-      <p:sp>
-        <p:nvSpPr>
-          <p:cNvPr id="22" name="TextBox 21"/>
-          <p:cNvSpPr txBox="1"/>
-          <p:nvPr/>
-        </p:nvSpPr>
-        <p:spPr>
-          <a:xfrm>
-            <a:off x="2058401" y="2029968"/>
-            <a:ext cx="2043495" cy="585216"/>
-          </a:xfrm>
-          <a:prstGeom prst="rect">
-            <a:avLst/>
-          </a:prstGeom>
-          <a:noFill/>
-        </p:spPr>
-        <p:txBody>
-          <a:bodyPr wrap="square" anchor="ctr" lIns="36000" rIns="36000" tIns="18000" bIns="18000">
-            <a:spAutoFit/>
-          </a:bodyPr>
-          <a:lstStyle/>
-          <a:p>
-            <a:pPr algn="l"/>
-            <a:r>
-              <a:rPr sz="1232" b="0" i="0">
-                <a:solidFill>
-                  <a:srgbClr val="334155"/>
-                </a:solidFill>
-                <a:latin typeface="Arial"/>
-              </a:rPr>
-              <a:t>Ammonium phosphate</a:t>
-            </a:r>
-          </a:p>
-        </p:txBody>
-      </p:sp>
-      <p:sp>
-        <p:nvSpPr>
-          <p:cNvPr id="23" name="TextBox 22"/>
-          <p:cNvSpPr txBox="1"/>
-          <p:nvPr/>
-        </p:nvSpPr>
-        <p:spPr>
-          <a:xfrm>
-            <a:off x="4193337" y="2029968"/>
-            <a:ext cx="2043495" cy="585216"/>
-          </a:xfrm>
-          <a:prstGeom prst="rect">
-            <a:avLst/>
-          </a:prstGeom>
-          <a:noFill/>
-        </p:spPr>
-        <p:txBody>
-          <a:bodyPr wrap="square" anchor="ctr" lIns="36000" rIns="36000" tIns="18000" bIns="18000">
-            <a:spAutoFit/>
-          </a:bodyPr>
-          <a:lstStyle/>
-          <a:p>
-            <a:pPr algn="l"/>
-            <a:r>
-              <a:rPr sz="1232" b="0" i="0">
-                <a:solidFill>
-                  <a:srgbClr val="334155"/>
-                </a:solidFill>
-                <a:latin typeface="Arial"/>
-              </a:rPr>
-              <a:t>Direct application to trees and ground surface</a:t>
-            </a:r>
-          </a:p>
-        </p:txBody>
-      </p:sp>
-      <p:sp>
-        <p:nvSpPr>
-          <p:cNvPr id="24" name="TextBox 23"/>
-          <p:cNvSpPr txBox="1"/>
-          <p:nvPr/>
-        </p:nvSpPr>
-        <p:spPr>
-          <a:xfrm>
-            <a:off x="6328273" y="2029968"/>
-            <a:ext cx="1509761" cy="585216"/>
-          </a:xfrm>
-          <a:prstGeom prst="rect">
-            <a:avLst/>
-          </a:prstGeom>
-          <a:noFill/>
-        </p:spPr>
-        <p:txBody>
-          <a:bodyPr wrap="square" anchor="ctr" lIns="36000" rIns="36000" tIns="18000" bIns="18000">
-            <a:spAutoFit/>
-          </a:bodyPr>
-          <a:lstStyle/>
-          <a:p>
-            <a:pPr algn="l"/>
-            <a:r>
-              <a:rPr sz="1232" b="0" i="0">
-                <a:solidFill>
-                  <a:srgbClr val="A05656"/>
-                </a:solidFill>
-                <a:latin typeface="Arial"/>
-              </a:rPr>
-              <a:t>Residual contamination in soil and water systems</a:t>
-            </a:r>
-          </a:p>
-        </p:txBody>
-      </p:sp>
-      <p:sp>
-        <p:nvSpPr>
-          <p:cNvPr id="25" name="Rectangle 24"/>
-          <p:cNvSpPr/>
-          <p:nvPr/>
-        </p:nvSpPr>
-        <p:spPr>
-          <a:xfrm>
-            <a:off x="365760" y="2615184"/>
-            <a:ext cx="7472275" cy="585216"/>
-          </a:xfrm>
-          <a:prstGeom prst="rect">
-            <a:avLst/>
-          </a:prstGeom>
-          <a:solidFill>
-            <a:srgbClr val="F8FAFC"/>
-          </a:solidFill>
-          <a:ln w="3810">
-            <a:solidFill>
-              <a:srgbClr val="E2E8F0"/>
-            </a:solidFill>
-          </a:ln>
-          <a:effectLst/>
-        </p:spPr>
-        <p:style>
-          <a:lnRef idx="1">
-            <a:schemeClr val="accent1"/>
-          </a:lnRef>
-          <a:fillRef idx="3">
-            <a:schemeClr val="accent1"/>
-          </a:fillRef>
-          <a:effectRef idx="2">
-            <a:schemeClr val="accent1"/>
-          </a:effectRef>
-          <a:fontRef idx="minor">
-            <a:schemeClr val="lt1"/>
-          </a:fontRef>
-        </p:style>
-        <p:txBody>
-          <a:bodyPr rtlCol="0" anchor="ctr"/>
-          <a:lstStyle/>
-          <a:p>
-            <a:pPr algn="ctr"/>
-          </a:p>
-        </p:txBody>
-      </p:sp>
-      <p:sp>
-        <p:nvSpPr>
-          <p:cNvPr id="26" name="TextBox 25"/>
-          <p:cNvSpPr txBox="1"/>
-          <p:nvPr/>
-        </p:nvSpPr>
-        <p:spPr>
-          <a:xfrm>
-            <a:off x="457200" y="2615184"/>
-            <a:ext cx="1509761" cy="585216"/>
-          </a:xfrm>
-          <a:prstGeom prst="rect">
-            <a:avLst/>
-          </a:prstGeom>
-          <a:noFill/>
-        </p:spPr>
-        <p:txBody>
-          <a:bodyPr wrap="square" anchor="ctr" lIns="36000" rIns="36000" tIns="18000" bIns="18000">
-            <a:spAutoFit/>
-          </a:bodyPr>
-          <a:lstStyle/>
-          <a:p>
-            <a:pPr algn="l"/>
-            <a:r>
-              <a:rPr sz="1232" b="0" i="0">
-                <a:solidFill>
-                  <a:srgbClr val="334155"/>
-                </a:solidFill>
-                <a:latin typeface="Arial"/>
-              </a:rPr>
-              <a:t>AquaGel-K</a:t>
-            </a:r>
-          </a:p>
-        </p:txBody>
-      </p:sp>
-      <p:sp>
-        <p:nvSpPr>
-          <p:cNvPr id="27" name="TextBox 26"/>
-          <p:cNvSpPr txBox="1"/>
-          <p:nvPr/>
-        </p:nvSpPr>
-        <p:spPr>
-          <a:xfrm>
-            <a:off x="2058401" y="2615184"/>
-            <a:ext cx="2043495" cy="585216"/>
-          </a:xfrm>
-          <a:prstGeom prst="rect">
-            <a:avLst/>
-          </a:prstGeom>
-          <a:noFill/>
-        </p:spPr>
-        <p:txBody>
-          <a:bodyPr wrap="square" anchor="ctr" lIns="36000" rIns="36000" tIns="18000" bIns="18000">
-            <a:spAutoFit/>
-          </a:bodyPr>
-          <a:lstStyle/>
-          <a:p>
-            <a:pPr algn="l"/>
-            <a:r>
-              <a:rPr sz="1232" b="0" i="0">
-                <a:solidFill>
-                  <a:srgbClr val="334155"/>
-                </a:solidFill>
-                <a:latin typeface="Arial"/>
-              </a:rPr>
-              <a:t>Cross-linked polyacrylate</a:t>
-            </a:r>
-          </a:p>
-        </p:txBody>
-      </p:sp>
-      <p:sp>
-        <p:nvSpPr>
-          <p:cNvPr id="28" name="TextBox 27"/>
-          <p:cNvSpPr txBox="1"/>
-          <p:nvPr/>
-        </p:nvSpPr>
-        <p:spPr>
-          <a:xfrm>
-            <a:off x="4193337" y="2615184"/>
-            <a:ext cx="2043495" cy="585216"/>
-          </a:xfrm>
-          <a:prstGeom prst="rect">
-            <a:avLst/>
-          </a:prstGeom>
-          <a:noFill/>
-        </p:spPr>
-        <p:txBody>
-          <a:bodyPr wrap="square" anchor="ctr" lIns="36000" rIns="36000" tIns="18000" bIns="18000">
-            <a:spAutoFit/>
-          </a:bodyPr>
-          <a:lstStyle/>
-          <a:p>
-            <a:pPr algn="l"/>
-            <a:r>
-              <a:rPr sz="1232" b="0" i="0">
-                <a:solidFill>
-                  <a:srgbClr val="334155"/>
-                </a:solidFill>
-                <a:latin typeface="Arial"/>
-              </a:rPr>
-              <a:t>Retains water at high concentration</a:t>
-            </a:r>
-          </a:p>
-        </p:txBody>
-      </p:sp>
-      <p:sp>
-        <p:nvSpPr>
-          <p:cNvPr id="29" name="TextBox 28"/>
-          <p:cNvSpPr txBox="1"/>
-          <p:nvPr/>
-        </p:nvSpPr>
-        <p:spPr>
-          <a:xfrm>
-            <a:off x="6328273" y="2615184"/>
-            <a:ext cx="1509761" cy="585216"/>
-          </a:xfrm>
-          <a:prstGeom prst="rect">
-            <a:avLst/>
-          </a:prstGeom>
-          <a:noFill/>
-        </p:spPr>
-        <p:txBody>
-          <a:bodyPr wrap="square" anchor="ctr" lIns="36000" rIns="36000" tIns="18000" bIns="18000">
-            <a:spAutoFit/>
-          </a:bodyPr>
-          <a:lstStyle/>
-          <a:p>
-            <a:pPr algn="l"/>
-            <a:r>
-              <a:rPr sz="1232" b="0" i="0">
-                <a:solidFill>
-                  <a:srgbClr val="A05656"/>
-                </a:solidFill>
-                <a:latin typeface="Arial"/>
-              </a:rPr>
-              <a:t>Function lost after water evaporation</a:t>
-            </a:r>
-          </a:p>
-        </p:txBody>
-      </p:sp>
-      <p:sp>
-        <p:nvSpPr>
-          <p:cNvPr id="30" name="Rectangle 29"/>
-          <p:cNvSpPr/>
-          <p:nvPr/>
-        </p:nvSpPr>
-        <p:spPr>
-          <a:xfrm>
-            <a:off x="365760" y="3200400"/>
-            <a:ext cx="7472275" cy="585216"/>
-          </a:xfrm>
-          <a:prstGeom prst="rect">
-            <a:avLst/>
-          </a:prstGeom>
-          <a:solidFill>
-            <a:srgbClr val="FFFFFF"/>
-          </a:solidFill>
-          <a:ln w="3810">
-            <a:solidFill>
-              <a:srgbClr val="E2E8F0"/>
-            </a:solidFill>
-          </a:ln>
-          <a:effectLst/>
-        </p:spPr>
-        <p:style>
-          <a:lnRef idx="1">
-            <a:schemeClr val="accent1"/>
-          </a:lnRef>
-          <a:fillRef idx="3">
-            <a:schemeClr val="accent1"/>
-          </a:fillRef>
-          <a:effectRef idx="2">
-            <a:schemeClr val="accent1"/>
-          </a:effectRef>
-          <a:fontRef idx="minor">
-            <a:schemeClr val="lt1"/>
-          </a:fontRef>
-        </p:style>
-        <p:txBody>
-          <a:bodyPr rtlCol="0" anchor="ctr"/>
-          <a:lstStyle/>
-          <a:p>
-            <a:pPr algn="ctr"/>
-          </a:p>
-        </p:txBody>
-      </p:sp>
-      <p:sp>
-        <p:nvSpPr>
-          <p:cNvPr id="31" name="TextBox 30"/>
-          <p:cNvSpPr txBox="1"/>
-          <p:nvPr/>
-        </p:nvSpPr>
-        <p:spPr>
-          <a:xfrm>
-            <a:off x="457200" y="3200400"/>
-            <a:ext cx="1509761" cy="585216"/>
-          </a:xfrm>
-          <a:prstGeom prst="rect">
-            <a:avLst/>
-          </a:prstGeom>
-          <a:noFill/>
-        </p:spPr>
-        <p:txBody>
-          <a:bodyPr wrap="square" anchor="ctr" lIns="36000" rIns="36000" tIns="18000" bIns="18000">
-            <a:spAutoFit/>
-          </a:bodyPr>
-          <a:lstStyle/>
-          <a:p>
-            <a:pPr algn="l"/>
-            <a:r>
-              <a:rPr sz="1232" b="1" i="0">
-                <a:solidFill>
-                  <a:srgbClr val="3B5174"/>
-                </a:solidFill>
-                <a:latin typeface="Arial"/>
-              </a:rPr>
-              <a:t>This Work WEG</a:t>
-            </a:r>
-          </a:p>
-        </p:txBody>
-      </p:sp>
-      <p:sp>
-        <p:nvSpPr>
-          <p:cNvPr id="32" name="TextBox 31"/>
-          <p:cNvSpPr txBox="1"/>
-          <p:nvPr/>
-        </p:nvSpPr>
-        <p:spPr>
-          <a:xfrm>
-            <a:off x="2058401" y="3200400"/>
-            <a:ext cx="2043495" cy="585216"/>
-          </a:xfrm>
-          <a:prstGeom prst="rect">
-            <a:avLst/>
-          </a:prstGeom>
-          <a:noFill/>
-        </p:spPr>
-        <p:txBody>
-          <a:bodyPr wrap="square" anchor="ctr" lIns="36000" rIns="36000" tIns="18000" bIns="18000">
-            <a:spAutoFit/>
-          </a:bodyPr>
-          <a:lstStyle/>
-          <a:p>
-            <a:pPr algn="l"/>
-            <a:r>
-              <a:rPr sz="1232" b="0" i="0">
-                <a:solidFill>
-                  <a:srgbClr val="334155"/>
-                </a:solidFill>
-                <a:latin typeface="Arial"/>
-              </a:rPr>
-              <a:t>Cellulosic + Silica</a:t>
-            </a:r>
-          </a:p>
-        </p:txBody>
-      </p:sp>
-      <p:sp>
-        <p:nvSpPr>
-          <p:cNvPr id="33" name="TextBox 32"/>
-          <p:cNvSpPr txBox="1"/>
-          <p:nvPr/>
-        </p:nvSpPr>
-        <p:spPr>
-          <a:xfrm>
-            <a:off x="4193337" y="3200400"/>
-            <a:ext cx="2043495" cy="585216"/>
-          </a:xfrm>
-          <a:prstGeom prst="rect">
-            <a:avLst/>
-          </a:prstGeom>
-          <a:noFill/>
-        </p:spPr>
-        <p:txBody>
-          <a:bodyPr wrap="square" anchor="ctr" lIns="36000" rIns="36000" tIns="18000" bIns="18000">
-            <a:spAutoFit/>
-          </a:bodyPr>
-          <a:lstStyle/>
-          <a:p>
-            <a:pPr algn="l"/>
-            <a:r>
-              <a:rPr sz="1232" b="0" i="0">
-                <a:solidFill>
-                  <a:srgbClr val="334155"/>
-                </a:solidFill>
-                <a:latin typeface="Arial"/>
-              </a:rPr>
-              <a:t>Forms aerogel layer upon heating</a:t>
-            </a:r>
-          </a:p>
-        </p:txBody>
-      </p:sp>
-      <p:sp>
-        <p:nvSpPr>
-          <p:cNvPr id="34" name="TextBox 33"/>
-          <p:cNvSpPr txBox="1"/>
-          <p:nvPr/>
-        </p:nvSpPr>
-        <p:spPr>
-          <a:xfrm>
-            <a:off x="6328273" y="3200400"/>
-            <a:ext cx="1509761" cy="585216"/>
-          </a:xfrm>
-          <a:prstGeom prst="rect">
-            <a:avLst/>
-          </a:prstGeom>
-          <a:noFill/>
-        </p:spPr>
-        <p:txBody>
-          <a:bodyPr wrap="square" anchor="ctr" lIns="36000" rIns="36000" tIns="18000" bIns="18000">
-            <a:spAutoFit/>
-          </a:bodyPr>
-          <a:lstStyle/>
-          <a:p>
-            <a:pPr algn="l"/>
-            <a:r>
-              <a:rPr sz="1232" b="1" i="0">
-                <a:solidFill>
-                  <a:srgbClr val="5B8C5A"/>
-                </a:solidFill>
-                <a:latin typeface="Arial"/>
-              </a:rPr>
-              <a:t>Continues protecting after water evaporation</a:t>
-            </a:r>
-          </a:p>
-        </p:txBody>
-      </p:sp>
-      <p:sp>
-        <p:nvSpPr>
-          <p:cNvPr id="35" name="Rounded Rectangle 34"/>
-          <p:cNvSpPr/>
-          <p:nvPr/>
-        </p:nvSpPr>
-        <p:spPr>
-          <a:xfrm>
-            <a:off x="365760" y="3986784"/>
-            <a:ext cx="7472275" cy="640080"/>
-          </a:xfrm>
-          <a:prstGeom prst="roundRect">
-            <a:avLst>
-              <a:gd name="adj" fmla="val 4000"/>
-            </a:avLst>
-          </a:prstGeom>
-          <a:solidFill>
-            <a:srgbClr val="1E293B"/>
-          </a:solidFill>
-          <a:ln>
-            <a:noFill/>
-          </a:ln>
-          <a:effectLst/>
-        </p:spPr>
-        <p:style>
-          <a:lnRef idx="1">
-            <a:schemeClr val="accent1"/>
-          </a:lnRef>
-          <a:fillRef idx="3">
-            <a:schemeClr val="accent1"/>
-          </a:fillRef>
-          <a:effectRef idx="2">
-            <a:schemeClr val="accent1"/>
-          </a:effectRef>
-          <a:fontRef idx="minor">
-            <a:schemeClr val="lt1"/>
-          </a:fontRef>
-        </p:style>
-        <p:txBody>
-          <a:bodyPr rtlCol="0" anchor="ctr"/>
-          <a:lstStyle/>
-          <a:p>
-            <a:pPr algn="ctr"/>
-          </a:p>
-        </p:txBody>
-      </p:sp>
-      <p:sp>
-        <p:nvSpPr>
-          <p:cNvPr id="36" name="Rectangle 35"/>
-          <p:cNvSpPr/>
-          <p:nvPr/>
-        </p:nvSpPr>
-        <p:spPr>
-          <a:xfrm>
-            <a:off x="365760" y="3986784"/>
-            <a:ext cx="54864" cy="640080"/>
+            <a:off x="9084335" y="859536"/>
+            <a:ext cx="2741599" cy="36576"/>
           </a:xfrm>
           <a:prstGeom prst="rect">
             <a:avLst/>
@@ -50510,96 +50132,26 @@
       </p:sp>
       <p:sp>
         <p:nvSpPr>
-          <p:cNvPr id="37" name="TextBox 36"/>
-          <p:cNvSpPr txBox="1"/>
-          <p:nvPr/>
-        </p:nvSpPr>
-        <p:spPr>
-          <a:xfrm>
-            <a:off x="548640" y="3986784"/>
-            <a:ext cx="365760" cy="640080"/>
-          </a:xfrm>
-          <a:prstGeom prst="rect">
-            <a:avLst/>
-          </a:prstGeom>
-          <a:noFill/>
-        </p:spPr>
-        <p:txBody>
-          <a:bodyPr wrap="square" anchor="ctr" lIns="36000" rIns="36000" tIns="18000" bIns="18000">
-            <a:spAutoFit/>
-          </a:bodyPr>
-          <a:lstStyle/>
-          <a:p>
-            <a:pPr algn="l"/>
-            <a:r>
-              <a:rPr sz="1568" b="0" i="0">
-                <a:solidFill>
-                  <a:srgbClr val="D4A574"/>
-                </a:solidFill>
-                <a:latin typeface="Arial"/>
-              </a:rPr>
-              <a:t>→</a:t>
-            </a:r>
-          </a:p>
-        </p:txBody>
-      </p:sp>
-      <p:sp>
-        <p:nvSpPr>
-          <p:cNvPr id="38" name="TextBox 37"/>
-          <p:cNvSpPr txBox="1"/>
-          <p:nvPr/>
-        </p:nvSpPr>
-        <p:spPr>
-          <a:xfrm>
-            <a:off x="960120" y="3986784"/>
-            <a:ext cx="6786475" cy="640080"/>
-          </a:xfrm>
-          <a:prstGeom prst="rect">
-            <a:avLst/>
-          </a:prstGeom>
-          <a:noFill/>
-        </p:spPr>
-        <p:txBody>
-          <a:bodyPr wrap="square" anchor="ctr" lIns="36000" rIns="36000" tIns="18000" bIns="18000">
-            <a:spAutoFit/>
-          </a:bodyPr>
-          <a:lstStyle/>
-          <a:p>
-            <a:pPr algn="l"/>
-            <a:r>
-              <a:rPr sz="1456" b="1" i="0">
-                <a:solidFill>
-                  <a:srgbClr val="FFFFFF"/>
-                </a:solidFill>
-                <a:latin typeface="Arial"/>
-              </a:rPr>
-              <a:t>Challenge: Existing WEGs are mere "water carriers" — protection is lost simultaneously with moisture loss</a:t>
-            </a:r>
-          </a:p>
-        </p:txBody>
-      </p:sp>
-      <p:sp>
-        <p:nvSpPr>
-          <p:cNvPr id="39" name="Rounded Rectangle 38"/>
+          <p:cNvPr id="33" name="Rounded Rectangle 32"/>
           <p:cNvSpPr/>
           <p:nvPr/>
         </p:nvSpPr>
         <p:spPr>
           <a:xfrm>
-            <a:off x="8020915" y="859536"/>
-            <a:ext cx="3805019" cy="3840480"/>
+            <a:off x="9194063" y="969264"/>
+            <a:ext cx="2522143" cy="2514600"/>
           </a:xfrm>
           <a:prstGeom prst="roundRect">
             <a:avLst>
-              <a:gd name="adj" fmla="val 2000"/>
+              <a:gd name="adj" fmla="val 3000"/>
             </a:avLst>
           </a:prstGeom>
           <a:solidFill>
-            <a:srgbClr val="F5F8FC"/>
+            <a:srgbClr val="2A3C54"/>
           </a:solidFill>
-          <a:ln w="12700">
+          <a:ln w="8890">
             <a:solidFill>
-              <a:srgbClr val="C0D0E0"/>
+              <a:srgbClr val="445E7A"/>
             </a:solidFill>
           </a:ln>
           <a:effectLst/>
@@ -50628,20 +50180,172 @@
       </p:sp>
       <p:sp>
         <p:nvSpPr>
-          <p:cNvPr id="40" name="Rectangle 39"/>
+          <p:cNvPr id="34" name="TextBox 33"/>
+          <p:cNvSpPr txBox="1"/>
+          <p:nvPr/>
+        </p:nvSpPr>
+        <p:spPr>
+          <a:xfrm>
+            <a:off x="9194063" y="969264"/>
+            <a:ext cx="2522143" cy="2514600"/>
+          </a:xfrm>
+          <a:prstGeom prst="rect">
+            <a:avLst/>
+          </a:prstGeom>
+          <a:noFill/>
+        </p:spPr>
+        <p:txBody>
+          <a:bodyPr wrap="square" anchor="ctr" lIns="36000" rIns="36000" tIns="18000" bIns="18000">
+            <a:spAutoFit/>
+          </a:bodyPr>
+          <a:lstStyle/>
+          <a:p>
+            <a:pPr algn="ctr"/>
+            <a:r>
+              <a:rPr sz="1232" b="0" i="0">
+                <a:solidFill>
+                  <a:srgbClr val="88A0B8"/>
+                </a:solidFill>
+                <a:latin typeface="Arial"/>
+              </a:rPr>
+              <a:t>(photo)</a:t>
+            </a:r>
+          </a:p>
+        </p:txBody>
+      </p:sp>
+      <p:sp>
+        <p:nvSpPr>
+          <p:cNvPr id="35" name="TextBox 34"/>
+          <p:cNvSpPr txBox="1"/>
+          <p:nvPr/>
+        </p:nvSpPr>
+        <p:spPr>
+          <a:xfrm>
+            <a:off x="9175775" y="3611880"/>
+            <a:ext cx="2558719" cy="310896"/>
+          </a:xfrm>
+          <a:prstGeom prst="rect">
+            <a:avLst/>
+          </a:prstGeom>
+          <a:noFill/>
+        </p:spPr>
+        <p:txBody>
+          <a:bodyPr wrap="square" anchor="t" lIns="36000" rIns="36000" tIns="18000" bIns="18000">
+            <a:spAutoFit/>
+          </a:bodyPr>
+          <a:lstStyle/>
+          <a:p>
+            <a:pPr algn="ctr"/>
+            <a:r>
+              <a:rPr sz="1568" b="1" i="0">
+                <a:solidFill>
+                  <a:srgbClr val="FFFFFF"/>
+                </a:solidFill>
+                <a:latin typeface="Arial"/>
+              </a:rPr>
+              <a:t>WEG (This Work)</a:t>
+            </a:r>
+          </a:p>
+        </p:txBody>
+      </p:sp>
+      <p:sp>
+        <p:nvSpPr>
+          <p:cNvPr id="36" name="TextBox 35"/>
+          <p:cNvSpPr txBox="1"/>
+          <p:nvPr/>
+        </p:nvSpPr>
+        <p:spPr>
+          <a:xfrm>
+            <a:off x="9175775" y="3922776"/>
+            <a:ext cx="2558719" cy="237744"/>
+          </a:xfrm>
+          <a:prstGeom prst="rect">
+            <a:avLst/>
+          </a:prstGeom>
+          <a:noFill/>
+        </p:spPr>
+        <p:txBody>
+          <a:bodyPr wrap="square" anchor="t" lIns="36000" rIns="36000" tIns="18000" bIns="18000">
+            <a:spAutoFit/>
+          </a:bodyPr>
+          <a:lstStyle/>
+          <a:p>
+            <a:pPr algn="ctr"/>
+            <a:r>
+              <a:rPr sz="1120" b="0" i="0">
+                <a:solidFill>
+                  <a:srgbClr val="A0B8D0"/>
+                </a:solidFill>
+                <a:latin typeface="Arial"/>
+              </a:rPr>
+              <a:t>Cellulosic + Silica</a:t>
+            </a:r>
+          </a:p>
+        </p:txBody>
+      </p:sp>
+      <p:sp>
+        <p:nvSpPr>
+          <p:cNvPr id="37" name="TextBox 36"/>
+          <p:cNvSpPr txBox="1"/>
+          <p:nvPr/>
+        </p:nvSpPr>
+        <p:spPr>
+          <a:xfrm>
+            <a:off x="9175775" y="4197096"/>
+            <a:ext cx="2558719" cy="1837944"/>
+          </a:xfrm>
+          <a:prstGeom prst="rect">
+            <a:avLst/>
+          </a:prstGeom>
+          <a:noFill/>
+        </p:spPr>
+        <p:txBody>
+          <a:bodyPr wrap="square" anchor="t" lIns="36000" rIns="36000" tIns="18000" bIns="18000">
+            <a:spAutoFit/>
+          </a:bodyPr>
+          <a:lstStyle/>
+          <a:p>
+            <a:pPr algn="ctr"/>
+            <a:r>
+              <a:rPr sz="1344" b="1" i="0">
+                <a:solidFill>
+                  <a:srgbClr val="5B8C5A"/>
+                </a:solidFill>
+                <a:latin typeface="Arial"/>
+              </a:rPr>
+              <a:t>Aerogel layer continues</a:t>
+            </a:r>
+          </a:p>
+          <a:p>
+            <a:pPr algn="ctr"/>
+            <a:r>
+              <a:rPr sz="1344" b="1" i="0">
+                <a:solidFill>
+                  <a:srgbClr val="5B8C5A"/>
+                </a:solidFill>
+                <a:latin typeface="Arial"/>
+              </a:rPr>
+              <a:t>protecting after water loss</a:t>
+            </a:r>
+          </a:p>
+        </p:txBody>
+      </p:sp>
+      <p:sp>
+        <p:nvSpPr>
+          <p:cNvPr id="38" name="Rectangle 37"/>
           <p:cNvSpPr/>
           <p:nvPr/>
         </p:nvSpPr>
         <p:spPr>
           <a:xfrm>
-            <a:off x="8130643" y="969264"/>
-            <a:ext cx="868680" cy="292608"/>
+            <a:off x="365760" y="6236208"/>
+            <a:ext cx="11460175" cy="18288"/>
           </a:xfrm>
           <a:prstGeom prst="rect">
             <a:avLst/>
           </a:prstGeom>
           <a:solidFill>
-            <a:srgbClr val="1E293B"/>
+            <a:srgbClr val="E2E8F0"/>
           </a:solidFill>
           <a:ln>
             <a:noFill/>
@@ -50672,105 +50376,35 @@
       </p:sp>
       <p:sp>
         <p:nvSpPr>
-          <p:cNvPr id="41" name="TextBox 40"/>
-          <p:cNvSpPr txBox="1"/>
-          <p:nvPr/>
-        </p:nvSpPr>
-        <p:spPr>
-          <a:xfrm>
-            <a:off x="8130643" y="969264"/>
-            <a:ext cx="868680" cy="292608"/>
-          </a:xfrm>
-          <a:prstGeom prst="rect">
-            <a:avLst/>
-          </a:prstGeom>
-          <a:noFill/>
-        </p:spPr>
-        <p:txBody>
-          <a:bodyPr wrap="square" anchor="ctr" lIns="36000" rIns="36000" tIns="18000" bIns="18000">
-            <a:spAutoFit/>
-          </a:bodyPr>
-          <a:lstStyle/>
-          <a:p>
-            <a:pPr algn="ctr"/>
-            <a:r>
-              <a:rPr sz="1232" b="1" i="0">
-                <a:solidFill>
-                  <a:srgbClr val="FFFFFF"/>
-                </a:solidFill>
-                <a:latin typeface="Arial"/>
-              </a:rPr>
-              <a:t>Fig. 3d</a:t>
-            </a:r>
-          </a:p>
-        </p:txBody>
-      </p:sp>
-      <p:sp>
-        <p:nvSpPr>
-          <p:cNvPr id="42" name="TextBox 41"/>
-          <p:cNvSpPr txBox="1"/>
-          <p:nvPr/>
-        </p:nvSpPr>
-        <p:spPr>
-          <a:xfrm>
-            <a:off x="8020915" y="859536"/>
-            <a:ext cx="3805019" cy="3840480"/>
-          </a:xfrm>
-          <a:prstGeom prst="rect">
-            <a:avLst/>
-          </a:prstGeom>
-          <a:noFill/>
-        </p:spPr>
-        <p:txBody>
-          <a:bodyPr wrap="square" anchor="ctr" lIns="36000" rIns="36000" tIns="18000" bIns="18000">
-            <a:spAutoFit/>
-          </a:bodyPr>
-          <a:lstStyle/>
-          <a:p>
-            <a:pPr algn="ctr"/>
-            <a:r>
-              <a:rPr sz="1344" b="0" i="0">
-                <a:solidFill>
-                  <a:srgbClr val="AAB4C0"/>
-                </a:solidFill>
-                <a:latin typeface="Arial"/>
-              </a:rPr>
-              <a:t>(Paste paper figure here)</a:t>
-            </a:r>
-          </a:p>
-        </p:txBody>
-      </p:sp>
-      <p:sp>
-        <p:nvSpPr>
-          <p:cNvPr id="43" name="TextBox 42"/>
-          <p:cNvSpPr txBox="1"/>
-          <p:nvPr/>
-        </p:nvSpPr>
-        <p:spPr>
-          <a:xfrm>
-            <a:off x="8020915" y="4736592"/>
-            <a:ext cx="3805019" cy="274320"/>
-          </a:xfrm>
-          <a:prstGeom prst="rect">
-            <a:avLst/>
-          </a:prstGeom>
-          <a:noFill/>
-        </p:spPr>
-        <p:txBody>
-          <a:bodyPr wrap="square" anchor="t" lIns="36000" rIns="36000" tIns="18000" bIns="18000">
-            <a:spAutoFit/>
-          </a:bodyPr>
-          <a:lstStyle/>
-          <a:p>
-            <a:pPr algn="ctr"/>
-            <a:r>
-              <a:rPr sz="1120" b="0" i="1">
-                <a:solidFill>
-                  <a:srgbClr val="64748B"/>
-                </a:solidFill>
-                <a:latin typeface="Arial"/>
-              </a:rPr>
-              <a:t>Comparison at 300 s: Water vs. This Work WEG</a:t>
+          <p:cNvPr id="39" name="TextBox 38"/>
+          <p:cNvSpPr txBox="1"/>
+          <p:nvPr/>
+        </p:nvSpPr>
+        <p:spPr>
+          <a:xfrm>
+            <a:off x="365760" y="6345936"/>
+            <a:ext cx="11460175" cy="329184"/>
+          </a:xfrm>
+          <a:prstGeom prst="rect">
+            <a:avLst/>
+          </a:prstGeom>
+          <a:noFill/>
+        </p:spPr>
+        <p:txBody>
+          <a:bodyPr wrap="square" anchor="t" lIns="36000" rIns="36000" tIns="18000" bIns="18000">
+            <a:spAutoFit/>
+          </a:bodyPr>
+          <a:lstStyle/>
+          <a:p>
+            <a:pPr algn="ctr"/>
+            <a:r>
+              <a:rPr sz="1456" b="1" i="0">
+                <a:solidFill>
+                  <a:srgbClr val="1E293B"/>
+                </a:solidFill>
+                <a:latin typeface="Arial"/>
+              </a:rPr>
+              <a:t>Challenge: Existing WEGs are mere "water carriers" — protection vanishes the moment moisture is lost</a:t>
             </a:r>
           </a:p>
         </p:txBody>
@@ -51120,62 +50754,14 @@
       </p:sp>
       <p:sp>
         <p:nvSpPr>
-          <p:cNvPr id="10" name="Rounded Rectangle 9"/>
+          <p:cNvPr id="10" name="Rectangle 9"/>
           <p:cNvSpPr/>
           <p:nvPr/>
         </p:nvSpPr>
         <p:spPr>
           <a:xfrm>
             <a:off x="365760" y="859536"/>
-            <a:ext cx="3328324" cy="3108960"/>
-          </a:xfrm>
-          <a:prstGeom prst="roundRect">
-            <a:avLst>
-              <a:gd name="adj" fmla="val 4000"/>
-            </a:avLst>
-          </a:prstGeom>
-          <a:solidFill>
-            <a:srgbClr val="F1F5F9"/>
-          </a:solidFill>
-          <a:ln w="6350">
-            <a:solidFill>
-              <a:srgbClr val="E2E8F0"/>
-            </a:solidFill>
-          </a:ln>
-          <a:effectLst/>
-        </p:spPr>
-        <p:style>
-          <a:lnRef idx="1">
-            <a:schemeClr val="accent1"/>
-          </a:lnRef>
-          <a:fillRef idx="3">
-            <a:schemeClr val="accent1"/>
-          </a:fillRef>
-          <a:effectRef idx="2">
-            <a:schemeClr val="accent1"/>
-          </a:effectRef>
-          <a:fontRef idx="minor">
-            <a:schemeClr val="lt1"/>
-          </a:fontRef>
-        </p:style>
-        <p:txBody>
-          <a:bodyPr rtlCol="0" anchor="ctr"/>
-          <a:lstStyle/>
-          <a:p>
-            <a:pPr algn="ctr"/>
-          </a:p>
-        </p:txBody>
-      </p:sp>
-      <p:sp>
-        <p:nvSpPr>
-          <p:cNvPr id="11" name="Rectangle 10"/>
-          <p:cNvSpPr/>
-          <p:nvPr/>
-        </p:nvSpPr>
-        <p:spPr>
-          <a:xfrm>
-            <a:off x="365760" y="859536"/>
-            <a:ext cx="3328324" cy="36576"/>
+            <a:ext cx="45720" cy="1389888"/>
           </a:xfrm>
           <a:prstGeom prst="rect">
             <a:avLst/>
@@ -51212,35 +50798,70 @@
       </p:sp>
       <p:sp>
         <p:nvSpPr>
+          <p:cNvPr id="11" name="TextBox 10"/>
+          <p:cNvSpPr txBox="1"/>
+          <p:nvPr/>
+        </p:nvSpPr>
+        <p:spPr>
+          <a:xfrm>
+            <a:off x="530352" y="859536"/>
+            <a:ext cx="4080546" cy="475488"/>
+          </a:xfrm>
+          <a:prstGeom prst="rect">
+            <a:avLst/>
+          </a:prstGeom>
+          <a:noFill/>
+        </p:spPr>
+        <p:txBody>
+          <a:bodyPr wrap="square" anchor="t" lIns="36000" rIns="36000" tIns="18000" bIns="18000">
+            <a:spAutoFit/>
+          </a:bodyPr>
+          <a:lstStyle/>
+          <a:p>
+            <a:pPr algn="l"/>
+            <a:r>
+              <a:rPr sz="2464" b="1" i="1">
+                <a:solidFill>
+                  <a:srgbClr val="1E293B"/>
+                </a:solidFill>
+                <a:latin typeface="Arial"/>
+              </a:rPr>
+              <a:t>Heat-Activated</a:t>
+            </a:r>
+          </a:p>
+        </p:txBody>
+      </p:sp>
+      <p:sp>
+        <p:nvSpPr>
           <p:cNvPr id="12" name="TextBox 11"/>
           <p:cNvSpPr txBox="1"/>
           <p:nvPr/>
         </p:nvSpPr>
         <p:spPr>
           <a:xfrm>
-            <a:off x="548640" y="1024128"/>
-            <a:ext cx="2962564" cy="219456"/>
-          </a:xfrm>
-          <a:prstGeom prst="rect">
-            <a:avLst/>
-          </a:prstGeom>
-          <a:noFill/>
-        </p:spPr>
-        <p:txBody>
-          <a:bodyPr wrap="square" anchor="t" lIns="36000" rIns="36000" tIns="18000" bIns="18000">
-            <a:spAutoFit/>
-          </a:bodyPr>
-          <a:lstStyle/>
-          <a:p>
-            <a:pPr algn="l"/>
-            <a:r>
-              <a:rPr sz="1120" b="1" i="0">
-                <a:solidFill>
-                  <a:srgbClr val="64748B"/>
-                </a:solidFill>
-                <a:latin typeface="Arial"/>
-              </a:rPr>
-              <a:t>DESIGN CONCEPT</a:t>
+            <a:off x="530352" y="1316736"/>
+            <a:ext cx="4080546" cy="475488"/>
+          </a:xfrm>
+          <a:prstGeom prst="rect">
+            <a:avLst/>
+          </a:prstGeom>
+          <a:noFill/>
+        </p:spPr>
+        <p:txBody>
+          <a:bodyPr wrap="square" anchor="t" lIns="36000" rIns="36000" tIns="18000" bIns="18000">
+            <a:spAutoFit/>
+          </a:bodyPr>
+          <a:lstStyle/>
+          <a:p>
+            <a:pPr algn="l"/>
+            <a:r>
+              <a:rPr sz="2464" b="1" i="1">
+                <a:solidFill>
+                  <a:srgbClr val="3B5174"/>
+                </a:solidFill>
+                <a:latin typeface="Arial"/>
+              </a:rPr>
+              <a:t>Aerogel Formation</a:t>
             </a:r>
           </a:p>
         </p:txBody>
@@ -51253,43 +50874,8 @@
         </p:nvSpPr>
         <p:spPr>
           <a:xfrm>
-            <a:off x="548640" y="1261872"/>
-            <a:ext cx="2962564" cy="329184"/>
-          </a:xfrm>
-          <a:prstGeom prst="rect">
-            <a:avLst/>
-          </a:prstGeom>
-          <a:noFill/>
-        </p:spPr>
-        <p:txBody>
-          <a:bodyPr wrap="square" anchor="t" lIns="36000" rIns="36000" tIns="18000" bIns="18000">
-            <a:spAutoFit/>
-          </a:bodyPr>
-          <a:lstStyle/>
-          <a:p>
-            <a:pPr algn="l"/>
-            <a:r>
-              <a:rPr sz="1680" b="1" i="0">
-                <a:solidFill>
-                  <a:srgbClr val="1E293B"/>
-                </a:solidFill>
-                <a:latin typeface="Arial"/>
-              </a:rPr>
-              <a:t>Design Concept</a:t>
-            </a:r>
-          </a:p>
-        </p:txBody>
-      </p:sp>
-      <p:sp>
-        <p:nvSpPr>
-          <p:cNvPr id="14" name="TextBox 13"/>
-          <p:cNvSpPr txBox="1"/>
-          <p:nvPr/>
-        </p:nvSpPr>
-        <p:spPr>
-          <a:xfrm>
-            <a:off x="548640" y="1627632"/>
-            <a:ext cx="182880" cy="274320"/>
+            <a:off x="530352" y="1810512"/>
+            <a:ext cx="4080546" cy="310896"/>
           </a:xfrm>
           <a:prstGeom prst="rect">
             <a:avLst/>
@@ -51306,278 +50892,31 @@
             <a:r>
               <a:rPr sz="1232" b="0" i="0">
                 <a:solidFill>
-                  <a:srgbClr val="3B5174"/>
-                </a:solidFill>
-                <a:latin typeface="Arial"/>
-              </a:rPr>
-              <a:t>•</a:t>
-            </a:r>
-          </a:p>
-        </p:txBody>
-      </p:sp>
-      <p:sp>
-        <p:nvSpPr>
-          <p:cNvPr id="15" name="TextBox 14"/>
-          <p:cNvSpPr txBox="1"/>
-          <p:nvPr/>
-        </p:nvSpPr>
-        <p:spPr>
-          <a:xfrm>
-            <a:off x="749808" y="1627632"/>
-            <a:ext cx="2761396" cy="274320"/>
-          </a:xfrm>
-          <a:prstGeom prst="rect">
-            <a:avLst/>
-          </a:prstGeom>
-          <a:noFill/>
-        </p:spPr>
-        <p:txBody>
-          <a:bodyPr wrap="square" anchor="t" lIns="36000" rIns="36000" tIns="18000" bIns="18000">
-            <a:spAutoFit/>
-          </a:bodyPr>
-          <a:lstStyle/>
-          <a:p>
-            <a:pPr algn="l"/>
-            <a:r>
-              <a:rPr sz="1232" b="0" i="0">
-                <a:solidFill>
                   <a:srgbClr val="475569"/>
                 </a:solidFill>
                 <a:latin typeface="Arial"/>
               </a:rPr>
-              <a:t>Cellulosic polymers (HEC, MC, MHEC) form water-soluble gel network</a:t>
-            </a:r>
-          </a:p>
-        </p:txBody>
-      </p:sp>
-      <p:sp>
-        <p:nvSpPr>
-          <p:cNvPr id="16" name="TextBox 15"/>
-          <p:cNvSpPr txBox="1"/>
-          <p:nvPr/>
-        </p:nvSpPr>
-        <p:spPr>
-          <a:xfrm>
-            <a:off x="548640" y="1901952"/>
-            <a:ext cx="182880" cy="274320"/>
-          </a:xfrm>
-          <a:prstGeom prst="rect">
-            <a:avLst/>
-          </a:prstGeom>
-          <a:noFill/>
-        </p:spPr>
-        <p:txBody>
-          <a:bodyPr wrap="square" anchor="t" lIns="36000" rIns="36000" tIns="18000" bIns="18000">
-            <a:spAutoFit/>
-          </a:bodyPr>
-          <a:lstStyle/>
-          <a:p>
-            <a:pPr algn="l"/>
-            <a:r>
-              <a:rPr sz="1232" b="0" i="0">
-                <a:solidFill>
-                  <a:srgbClr val="3B5174"/>
-                </a:solidFill>
-                <a:latin typeface="Arial"/>
-              </a:rPr>
-              <a:t>•</a:t>
-            </a:r>
-          </a:p>
-        </p:txBody>
-      </p:sp>
-      <p:sp>
-        <p:nvSpPr>
-          <p:cNvPr id="17" name="TextBox 16"/>
-          <p:cNvSpPr txBox="1"/>
-          <p:nvPr/>
-        </p:nvSpPr>
-        <p:spPr>
-          <a:xfrm>
-            <a:off x="749808" y="1901952"/>
-            <a:ext cx="2761396" cy="274320"/>
-          </a:xfrm>
-          <a:prstGeom prst="rect">
-            <a:avLst/>
-          </a:prstGeom>
-          <a:noFill/>
-        </p:spPr>
-        <p:txBody>
-          <a:bodyPr wrap="square" anchor="t" lIns="36000" rIns="36000" tIns="18000" bIns="18000">
-            <a:spAutoFit/>
-          </a:bodyPr>
-          <a:lstStyle/>
-          <a:p>
-            <a:pPr algn="l"/>
-            <a:r>
-              <a:rPr sz="1232" b="0" i="0">
-                <a:solidFill>
-                  <a:srgbClr val="475569"/>
-                </a:solidFill>
-                <a:latin typeface="Arial"/>
-              </a:rPr>
-              <a:t>Colloidal silica particles (CSP) uniformly dispersed</a:t>
-            </a:r>
-          </a:p>
-        </p:txBody>
-      </p:sp>
-      <p:sp>
-        <p:nvSpPr>
-          <p:cNvPr id="18" name="TextBox 17"/>
-          <p:cNvSpPr txBox="1"/>
-          <p:nvPr/>
-        </p:nvSpPr>
-        <p:spPr>
-          <a:xfrm>
-            <a:off x="548640" y="2176272"/>
-            <a:ext cx="182880" cy="274320"/>
-          </a:xfrm>
-          <a:prstGeom prst="rect">
-            <a:avLst/>
-          </a:prstGeom>
-          <a:noFill/>
-        </p:spPr>
-        <p:txBody>
-          <a:bodyPr wrap="square" anchor="t" lIns="36000" rIns="36000" tIns="18000" bIns="18000">
-            <a:spAutoFit/>
-          </a:bodyPr>
-          <a:lstStyle/>
-          <a:p>
-            <a:pPr algn="l"/>
-            <a:r>
-              <a:rPr sz="1232" b="0" i="0">
-                <a:solidFill>
-                  <a:srgbClr val="3B5174"/>
-                </a:solidFill>
-                <a:latin typeface="Arial"/>
-              </a:rPr>
-              <a:t>•</a:t>
-            </a:r>
-          </a:p>
-        </p:txBody>
-      </p:sp>
-      <p:sp>
-        <p:nvSpPr>
-          <p:cNvPr id="19" name="TextBox 18"/>
-          <p:cNvSpPr txBox="1"/>
-          <p:nvPr/>
-        </p:nvSpPr>
-        <p:spPr>
-          <a:xfrm>
-            <a:off x="749808" y="2176272"/>
-            <a:ext cx="2761396" cy="274320"/>
-          </a:xfrm>
-          <a:prstGeom prst="rect">
-            <a:avLst/>
-          </a:prstGeom>
-          <a:noFill/>
-        </p:spPr>
-        <p:txBody>
-          <a:bodyPr wrap="square" anchor="t" lIns="36000" rIns="36000" tIns="18000" bIns="18000">
-            <a:spAutoFit/>
-          </a:bodyPr>
-          <a:lstStyle/>
-          <a:p>
-            <a:pPr algn="l"/>
-            <a:r>
-              <a:rPr sz="1232" b="0" i="0">
-                <a:solidFill>
-                  <a:srgbClr val="475569"/>
-                </a:solidFill>
-                <a:latin typeface="Arial"/>
-              </a:rPr>
-              <a:t>Water foams upon heating to form porous structure</a:t>
-            </a:r>
-          </a:p>
-        </p:txBody>
-      </p:sp>
-      <p:sp>
-        <p:nvSpPr>
-          <p:cNvPr id="20" name="TextBox 19"/>
-          <p:cNvSpPr txBox="1"/>
-          <p:nvPr/>
-        </p:nvSpPr>
-        <p:spPr>
-          <a:xfrm>
-            <a:off x="548640" y="2450592"/>
-            <a:ext cx="182880" cy="274320"/>
-          </a:xfrm>
-          <a:prstGeom prst="rect">
-            <a:avLst/>
-          </a:prstGeom>
-          <a:noFill/>
-        </p:spPr>
-        <p:txBody>
-          <a:bodyPr wrap="square" anchor="t" lIns="36000" rIns="36000" tIns="18000" bIns="18000">
-            <a:spAutoFit/>
-          </a:bodyPr>
-          <a:lstStyle/>
-          <a:p>
-            <a:pPr algn="l"/>
-            <a:r>
-              <a:rPr sz="1232" b="0" i="0">
-                <a:solidFill>
-                  <a:srgbClr val="3B5174"/>
-                </a:solidFill>
-                <a:latin typeface="Arial"/>
-              </a:rPr>
-              <a:t>•</a:t>
-            </a:r>
-          </a:p>
-        </p:txBody>
-      </p:sp>
-      <p:sp>
-        <p:nvSpPr>
-          <p:cNvPr id="21" name="TextBox 20"/>
-          <p:cNvSpPr txBox="1"/>
-          <p:nvPr/>
-        </p:nvSpPr>
-        <p:spPr>
-          <a:xfrm>
-            <a:off x="749808" y="2450592"/>
-            <a:ext cx="2761396" cy="274320"/>
-          </a:xfrm>
-          <a:prstGeom prst="rect">
-            <a:avLst/>
-          </a:prstGeom>
-          <a:noFill/>
-        </p:spPr>
-        <p:txBody>
-          <a:bodyPr wrap="square" anchor="t" lIns="36000" rIns="36000" tIns="18000" bIns="18000">
-            <a:spAutoFit/>
-          </a:bodyPr>
-          <a:lstStyle/>
-          <a:p>
-            <a:pPr algn="l"/>
-            <a:r>
-              <a:rPr sz="1232" b="0" i="0">
-                <a:solidFill>
-                  <a:srgbClr val="475569"/>
-                </a:solidFill>
-                <a:latin typeface="Arial"/>
-              </a:rPr>
-              <a:t>Silica particles sinter and convert to aerogel layer</a:t>
-            </a:r>
-          </a:p>
-        </p:txBody>
-      </p:sp>
-      <p:sp>
-        <p:nvSpPr>
-          <p:cNvPr id="22" name="Rounded Rectangle 21"/>
+              <a:t>Flame contact triggers the gel to transform into an aerogel insulator</a:t>
+            </a:r>
+          </a:p>
+        </p:txBody>
+      </p:sp>
+      <p:sp>
+        <p:nvSpPr>
+          <p:cNvPr id="14" name="Rectangle 13"/>
           <p:cNvSpPr/>
           <p:nvPr/>
         </p:nvSpPr>
         <p:spPr>
           <a:xfrm>
-            <a:off x="3822100" y="859536"/>
-            <a:ext cx="3328324" cy="3108960"/>
-          </a:xfrm>
-          <a:prstGeom prst="roundRect">
-            <a:avLst>
-              <a:gd name="adj" fmla="val 4000"/>
-            </a:avLst>
+            <a:off x="530352" y="2267712"/>
+            <a:ext cx="3608367" cy="18288"/>
+          </a:xfrm>
+          <a:prstGeom prst="rect">
+            <a:avLst/>
           </a:prstGeom>
           <a:solidFill>
-            <a:srgbClr val="1E293B"/>
+            <a:srgbClr val="E2E8F0"/>
           </a:solidFill>
           <a:ln>
             <a:noFill/>
@@ -51608,84 +50947,294 @@
       </p:sp>
       <p:sp>
         <p:nvSpPr>
+          <p:cNvPr id="15" name="TextBox 14"/>
+          <p:cNvSpPr txBox="1"/>
+          <p:nvPr/>
+        </p:nvSpPr>
+        <p:spPr>
+          <a:xfrm>
+            <a:off x="365760" y="2450592"/>
+            <a:ext cx="402336" cy="274320"/>
+          </a:xfrm>
+          <a:prstGeom prst="rect">
+            <a:avLst/>
+          </a:prstGeom>
+          <a:noFill/>
+        </p:spPr>
+        <p:txBody>
+          <a:bodyPr wrap="square" anchor="t" lIns="36000" rIns="36000" tIns="18000" bIns="18000">
+            <a:spAutoFit/>
+          </a:bodyPr>
+          <a:lstStyle/>
+          <a:p>
+            <a:pPr algn="l"/>
+            <a:r>
+              <a:rPr sz="1232" b="1" i="0">
+                <a:solidFill>
+                  <a:srgbClr val="3B5174"/>
+                </a:solidFill>
+                <a:latin typeface="Arial"/>
+              </a:rPr>
+              <a:t>01</a:t>
+            </a:r>
+          </a:p>
+        </p:txBody>
+      </p:sp>
+      <p:sp>
+        <p:nvSpPr>
+          <p:cNvPr id="16" name="TextBox 15"/>
+          <p:cNvSpPr txBox="1"/>
+          <p:nvPr/>
+        </p:nvSpPr>
+        <p:spPr>
+          <a:xfrm>
+            <a:off x="786384" y="2450592"/>
+            <a:ext cx="3824514" cy="256032"/>
+          </a:xfrm>
+          <a:prstGeom prst="rect">
+            <a:avLst/>
+          </a:prstGeom>
+          <a:noFill/>
+        </p:spPr>
+        <p:txBody>
+          <a:bodyPr wrap="square" anchor="t" lIns="36000" rIns="36000" tIns="18000" bIns="18000">
+            <a:spAutoFit/>
+          </a:bodyPr>
+          <a:lstStyle/>
+          <a:p>
+            <a:pPr algn="l"/>
+            <a:r>
+              <a:rPr sz="1456" b="1" i="0">
+                <a:solidFill>
+                  <a:srgbClr val="1E293B"/>
+                </a:solidFill>
+                <a:latin typeface="Arial"/>
+              </a:rPr>
+              <a:t>Beyond water dependence</a:t>
+            </a:r>
+          </a:p>
+        </p:txBody>
+      </p:sp>
+      <p:sp>
+        <p:nvSpPr>
+          <p:cNvPr id="17" name="TextBox 16"/>
+          <p:cNvSpPr txBox="1"/>
+          <p:nvPr/>
+        </p:nvSpPr>
+        <p:spPr>
+          <a:xfrm>
+            <a:off x="786384" y="2706624"/>
+            <a:ext cx="3824514" cy="256032"/>
+          </a:xfrm>
+          <a:prstGeom prst="rect">
+            <a:avLst/>
+          </a:prstGeom>
+          <a:noFill/>
+        </p:spPr>
+        <p:txBody>
+          <a:bodyPr wrap="square" anchor="t" lIns="36000" rIns="36000" tIns="18000" bIns="18000">
+            <a:spAutoFit/>
+          </a:bodyPr>
+          <a:lstStyle/>
+          <a:p>
+            <a:pPr algn="l"/>
+            <a:r>
+              <a:rPr sz="1232" b="0" i="0">
+                <a:solidFill>
+                  <a:srgbClr val="64748B"/>
+                </a:solidFill>
+                <a:latin typeface="Arial"/>
+              </a:rPr>
+              <a:t>Heat-activated solid protective layer</a:t>
+            </a:r>
+          </a:p>
+        </p:txBody>
+      </p:sp>
+      <p:sp>
+        <p:nvSpPr>
+          <p:cNvPr id="18" name="TextBox 17"/>
+          <p:cNvSpPr txBox="1"/>
+          <p:nvPr/>
+        </p:nvSpPr>
+        <p:spPr>
+          <a:xfrm>
+            <a:off x="365760" y="3136392"/>
+            <a:ext cx="402336" cy="274320"/>
+          </a:xfrm>
+          <a:prstGeom prst="rect">
+            <a:avLst/>
+          </a:prstGeom>
+          <a:noFill/>
+        </p:spPr>
+        <p:txBody>
+          <a:bodyPr wrap="square" anchor="t" lIns="36000" rIns="36000" tIns="18000" bIns="18000">
+            <a:spAutoFit/>
+          </a:bodyPr>
+          <a:lstStyle/>
+          <a:p>
+            <a:pPr algn="l"/>
+            <a:r>
+              <a:rPr sz="1232" b="1" i="0">
+                <a:solidFill>
+                  <a:srgbClr val="3B5174"/>
+                </a:solidFill>
+                <a:latin typeface="Arial"/>
+              </a:rPr>
+              <a:t>02</a:t>
+            </a:r>
+          </a:p>
+        </p:txBody>
+      </p:sp>
+      <p:sp>
+        <p:nvSpPr>
+          <p:cNvPr id="19" name="TextBox 18"/>
+          <p:cNvSpPr txBox="1"/>
+          <p:nvPr/>
+        </p:nvSpPr>
+        <p:spPr>
+          <a:xfrm>
+            <a:off x="786384" y="3136392"/>
+            <a:ext cx="3824514" cy="256032"/>
+          </a:xfrm>
+          <a:prstGeom prst="rect">
+            <a:avLst/>
+          </a:prstGeom>
+          <a:noFill/>
+        </p:spPr>
+        <p:txBody>
+          <a:bodyPr wrap="square" anchor="t" lIns="36000" rIns="36000" tIns="18000" bIns="18000">
+            <a:spAutoFit/>
+          </a:bodyPr>
+          <a:lstStyle/>
+          <a:p>
+            <a:pPr algn="l"/>
+            <a:r>
+              <a:rPr sz="1456" b="1" i="0">
+                <a:solidFill>
+                  <a:srgbClr val="1E293B"/>
+                </a:solidFill>
+                <a:latin typeface="Arial"/>
+              </a:rPr>
+              <a:t>Sustainable materials</a:t>
+            </a:r>
+          </a:p>
+        </p:txBody>
+      </p:sp>
+      <p:sp>
+        <p:nvSpPr>
+          <p:cNvPr id="20" name="TextBox 19"/>
+          <p:cNvSpPr txBox="1"/>
+          <p:nvPr/>
+        </p:nvSpPr>
+        <p:spPr>
+          <a:xfrm>
+            <a:off x="786384" y="3392424"/>
+            <a:ext cx="3824514" cy="256032"/>
+          </a:xfrm>
+          <a:prstGeom prst="rect">
+            <a:avLst/>
+          </a:prstGeom>
+          <a:noFill/>
+        </p:spPr>
+        <p:txBody>
+          <a:bodyPr wrap="square" anchor="t" lIns="36000" rIns="36000" tIns="18000" bIns="18000">
+            <a:spAutoFit/>
+          </a:bodyPr>
+          <a:lstStyle/>
+          <a:p>
+            <a:pPr algn="l"/>
+            <a:r>
+              <a:rPr sz="1232" b="0" i="0">
+                <a:solidFill>
+                  <a:srgbClr val="64748B"/>
+                </a:solidFill>
+                <a:latin typeface="Arial"/>
+              </a:rPr>
+              <a:t>Naturally derived, food-grade components</a:t>
+            </a:r>
+          </a:p>
+        </p:txBody>
+      </p:sp>
+      <p:sp>
+        <p:nvSpPr>
+          <p:cNvPr id="21" name="TextBox 20"/>
+          <p:cNvSpPr txBox="1"/>
+          <p:nvPr/>
+        </p:nvSpPr>
+        <p:spPr>
+          <a:xfrm>
+            <a:off x="365760" y="3822192"/>
+            <a:ext cx="402336" cy="274320"/>
+          </a:xfrm>
+          <a:prstGeom prst="rect">
+            <a:avLst/>
+          </a:prstGeom>
+          <a:noFill/>
+        </p:spPr>
+        <p:txBody>
+          <a:bodyPr wrap="square" anchor="t" lIns="36000" rIns="36000" tIns="18000" bIns="18000">
+            <a:spAutoFit/>
+          </a:bodyPr>
+          <a:lstStyle/>
+          <a:p>
+            <a:pPr algn="l"/>
+            <a:r>
+              <a:rPr sz="1232" b="1" i="0">
+                <a:solidFill>
+                  <a:srgbClr val="3B5174"/>
+                </a:solidFill>
+                <a:latin typeface="Arial"/>
+              </a:rPr>
+              <a:t>03</a:t>
+            </a:r>
+          </a:p>
+        </p:txBody>
+      </p:sp>
+      <p:sp>
+        <p:nvSpPr>
+          <p:cNvPr id="22" name="TextBox 21"/>
+          <p:cNvSpPr txBox="1"/>
+          <p:nvPr/>
+        </p:nvSpPr>
+        <p:spPr>
+          <a:xfrm>
+            <a:off x="786384" y="3822192"/>
+            <a:ext cx="3824514" cy="256032"/>
+          </a:xfrm>
+          <a:prstGeom prst="rect">
+            <a:avLst/>
+          </a:prstGeom>
+          <a:noFill/>
+        </p:spPr>
+        <p:txBody>
+          <a:bodyPr wrap="square" anchor="t" lIns="36000" rIns="36000" tIns="18000" bIns="18000">
+            <a:spAutoFit/>
+          </a:bodyPr>
+          <a:lstStyle/>
+          <a:p>
+            <a:pPr algn="l"/>
+            <a:r>
+              <a:rPr sz="1456" b="1" i="0">
+                <a:solidFill>
+                  <a:srgbClr val="1E293B"/>
+                </a:solidFill>
+                <a:latin typeface="Arial"/>
+              </a:rPr>
+              <a:t>Drop-in compatible</a:t>
+            </a:r>
+          </a:p>
+        </p:txBody>
+      </p:sp>
+      <p:sp>
+        <p:nvSpPr>
           <p:cNvPr id="23" name="TextBox 22"/>
           <p:cNvSpPr txBox="1"/>
           <p:nvPr/>
         </p:nvSpPr>
         <p:spPr>
           <a:xfrm>
-            <a:off x="4004980" y="1024128"/>
-            <a:ext cx="2962564" cy="219456"/>
-          </a:xfrm>
-          <a:prstGeom prst="rect">
-            <a:avLst/>
-          </a:prstGeom>
-          <a:noFill/>
-        </p:spPr>
-        <p:txBody>
-          <a:bodyPr wrap="square" anchor="t" lIns="36000" rIns="36000" tIns="18000" bIns="18000">
-            <a:spAutoFit/>
-          </a:bodyPr>
-          <a:lstStyle/>
-          <a:p>
-            <a:pPr algn="l"/>
-            <a:r>
-              <a:rPr sz="1120" b="1" i="0">
-                <a:solidFill>
-                  <a:srgbClr val="A0B8D0"/>
-                </a:solidFill>
-                <a:latin typeface="Arial"/>
-              </a:rPr>
-              <a:t>INNOVATION</a:t>
-            </a:r>
-          </a:p>
-        </p:txBody>
-      </p:sp>
-      <p:sp>
-        <p:nvSpPr>
-          <p:cNvPr id="24" name="TextBox 23"/>
-          <p:cNvSpPr txBox="1"/>
-          <p:nvPr/>
-        </p:nvSpPr>
-        <p:spPr>
-          <a:xfrm>
-            <a:off x="4004980" y="1261872"/>
-            <a:ext cx="2962564" cy="329184"/>
-          </a:xfrm>
-          <a:prstGeom prst="rect">
-            <a:avLst/>
-          </a:prstGeom>
-          <a:noFill/>
-        </p:spPr>
-        <p:txBody>
-          <a:bodyPr wrap="square" anchor="t" lIns="36000" rIns="36000" tIns="18000" bIns="18000">
-            <a:spAutoFit/>
-          </a:bodyPr>
-          <a:lstStyle/>
-          <a:p>
-            <a:pPr algn="l"/>
-            <a:r>
-              <a:rPr sz="1680" b="1" i="0">
-                <a:solidFill>
-                  <a:srgbClr val="FFFFFF"/>
-                </a:solidFill>
-                <a:latin typeface="Arial"/>
-              </a:rPr>
-              <a:t>Three Innovation Points</a:t>
-            </a:r>
-          </a:p>
-        </p:txBody>
-      </p:sp>
-      <p:sp>
-        <p:nvSpPr>
-          <p:cNvPr id="25" name="TextBox 24"/>
-          <p:cNvSpPr txBox="1"/>
-          <p:nvPr/>
-        </p:nvSpPr>
-        <p:spPr>
-          <a:xfrm>
-            <a:off x="4004980" y="1627632"/>
-            <a:ext cx="182880" cy="274320"/>
+            <a:off x="786384" y="4078224"/>
+            <a:ext cx="3824514" cy="256032"/>
           </a:xfrm>
           <a:prstGeom prst="rect">
             <a:avLst/>
@@ -51702,372 +51251,25 @@
             <a:r>
               <a:rPr sz="1232" b="0" i="0">
                 <a:solidFill>
-                  <a:srgbClr val="D4A574"/>
-                </a:solidFill>
-                <a:latin typeface="Arial"/>
-              </a:rPr>
-              <a:t>•</a:t>
-            </a:r>
-          </a:p>
-        </p:txBody>
-      </p:sp>
-      <p:sp>
-        <p:nvSpPr>
-          <p:cNvPr id="26" name="TextBox 25"/>
-          <p:cNvSpPr txBox="1"/>
-          <p:nvPr/>
-        </p:nvSpPr>
-        <p:spPr>
-          <a:xfrm>
-            <a:off x="4206148" y="1627632"/>
-            <a:ext cx="2761396" cy="274320"/>
-          </a:xfrm>
-          <a:prstGeom prst="rect">
-            <a:avLst/>
-          </a:prstGeom>
-          <a:noFill/>
-        </p:spPr>
-        <p:txBody>
-          <a:bodyPr wrap="square" anchor="t" lIns="36000" rIns="36000" tIns="18000" bIns="18000">
-            <a:spAutoFit/>
-          </a:bodyPr>
-          <a:lstStyle/>
-          <a:p>
-            <a:pPr algn="l"/>
-            <a:r>
-              <a:rPr sz="1232" b="0" i="0">
-                <a:solidFill>
-                  <a:srgbClr val="C8D8E8"/>
-                </a:solidFill>
-                <a:latin typeface="Arial"/>
-              </a:rPr>
-              <a:t>Breaking free from water dependence: heat-activated solid protective layer</a:t>
-            </a:r>
-          </a:p>
-        </p:txBody>
-      </p:sp>
-      <p:sp>
-        <p:nvSpPr>
-          <p:cNvPr id="27" name="TextBox 26"/>
-          <p:cNvSpPr txBox="1"/>
-          <p:nvPr/>
-        </p:nvSpPr>
-        <p:spPr>
-          <a:xfrm>
-            <a:off x="4004980" y="1901952"/>
-            <a:ext cx="182880" cy="274320"/>
-          </a:xfrm>
-          <a:prstGeom prst="rect">
-            <a:avLst/>
-          </a:prstGeom>
-          <a:noFill/>
-        </p:spPr>
-        <p:txBody>
-          <a:bodyPr wrap="square" anchor="t" lIns="36000" rIns="36000" tIns="18000" bIns="18000">
-            <a:spAutoFit/>
-          </a:bodyPr>
-          <a:lstStyle/>
-          <a:p>
-            <a:pPr algn="l"/>
-            <a:r>
-              <a:rPr sz="1232" b="0" i="0">
-                <a:solidFill>
-                  <a:srgbClr val="D4A574"/>
-                </a:solidFill>
-                <a:latin typeface="Arial"/>
-              </a:rPr>
-              <a:t>•</a:t>
-            </a:r>
-          </a:p>
-        </p:txBody>
-      </p:sp>
-      <p:sp>
-        <p:nvSpPr>
-          <p:cNvPr id="28" name="TextBox 27"/>
-          <p:cNvSpPr txBox="1"/>
-          <p:nvPr/>
-        </p:nvSpPr>
-        <p:spPr>
-          <a:xfrm>
-            <a:off x="4206148" y="1901952"/>
-            <a:ext cx="2761396" cy="274320"/>
-          </a:xfrm>
-          <a:prstGeom prst="rect">
-            <a:avLst/>
-          </a:prstGeom>
-          <a:noFill/>
-        </p:spPr>
-        <p:txBody>
-          <a:bodyPr wrap="square" anchor="t" lIns="36000" rIns="36000" tIns="18000" bIns="18000">
-            <a:spAutoFit/>
-          </a:bodyPr>
-          <a:lstStyle/>
-          <a:p>
-            <a:pPr algn="l"/>
-            <a:r>
-              <a:rPr sz="1232" b="0" i="0">
-                <a:solidFill>
-                  <a:srgbClr val="C8D8E8"/>
-                </a:solidFill>
-                <a:latin typeface="Arial"/>
-              </a:rPr>
-              <a:t>Sustainable: naturally derived, food-grade materials</a:t>
-            </a:r>
-          </a:p>
-        </p:txBody>
-      </p:sp>
-      <p:sp>
-        <p:nvSpPr>
-          <p:cNvPr id="29" name="TextBox 28"/>
-          <p:cNvSpPr txBox="1"/>
-          <p:nvPr/>
-        </p:nvSpPr>
-        <p:spPr>
-          <a:xfrm>
-            <a:off x="4004980" y="2176272"/>
-            <a:ext cx="182880" cy="274320"/>
-          </a:xfrm>
-          <a:prstGeom prst="rect">
-            <a:avLst/>
-          </a:prstGeom>
-          <a:noFill/>
-        </p:spPr>
-        <p:txBody>
-          <a:bodyPr wrap="square" anchor="t" lIns="36000" rIns="36000" tIns="18000" bIns="18000">
-            <a:spAutoFit/>
-          </a:bodyPr>
-          <a:lstStyle/>
-          <a:p>
-            <a:pPr algn="l"/>
-            <a:r>
-              <a:rPr sz="1232" b="0" i="0">
-                <a:solidFill>
-                  <a:srgbClr val="D4A574"/>
-                </a:solidFill>
-                <a:latin typeface="Arial"/>
-              </a:rPr>
-              <a:t>•</a:t>
-            </a:r>
-          </a:p>
-        </p:txBody>
-      </p:sp>
-      <p:sp>
-        <p:nvSpPr>
-          <p:cNvPr id="30" name="TextBox 29"/>
-          <p:cNvSpPr txBox="1"/>
-          <p:nvPr/>
-        </p:nvSpPr>
-        <p:spPr>
-          <a:xfrm>
-            <a:off x="4206148" y="2176272"/>
-            <a:ext cx="2761396" cy="274320"/>
-          </a:xfrm>
-          <a:prstGeom prst="rect">
-            <a:avLst/>
-          </a:prstGeom>
-          <a:noFill/>
-        </p:spPr>
-        <p:txBody>
-          <a:bodyPr wrap="square" anchor="t" lIns="36000" rIns="36000" tIns="18000" bIns="18000">
-            <a:spAutoFit/>
-          </a:bodyPr>
-          <a:lstStyle/>
-          <a:p>
-            <a:pPr algn="l"/>
-            <a:r>
-              <a:rPr sz="1232" b="0" i="0">
-                <a:solidFill>
-                  <a:srgbClr val="C8D8E8"/>
-                </a:solidFill>
-                <a:latin typeface="Arial"/>
-              </a:rPr>
-              <a:t>Compatible with existing spray infrastructure: sprayable fluid</a:t>
-            </a:r>
-          </a:p>
-        </p:txBody>
-      </p:sp>
-      <p:sp>
-        <p:nvSpPr>
-          <p:cNvPr id="31" name="Rounded Rectangle 30"/>
+                  <a:srgbClr val="64748B"/>
+                </a:solidFill>
+                <a:latin typeface="Arial"/>
+              </a:rPr>
+              <a:t>Sprayable fluid — no new infrastructure needed</a:t>
+            </a:r>
+          </a:p>
+        </p:txBody>
+      </p:sp>
+      <p:sp>
+        <p:nvSpPr>
+          <p:cNvPr id="24" name="Rounded Rectangle 23"/>
           <p:cNvSpPr/>
           <p:nvPr/>
         </p:nvSpPr>
         <p:spPr>
           <a:xfrm>
-            <a:off x="365760" y="4197096"/>
-            <a:ext cx="6784665" cy="731520"/>
-          </a:xfrm>
-          <a:prstGeom prst="roundRect">
-            <a:avLst>
-              <a:gd name="adj" fmla="val 4000"/>
-            </a:avLst>
-          </a:prstGeom>
-          <a:solidFill>
-            <a:srgbClr val="F8FAFC"/>
-          </a:solidFill>
-          <a:ln>
-            <a:noFill/>
-          </a:ln>
-          <a:effectLst/>
-        </p:spPr>
-        <p:style>
-          <a:lnRef idx="1">
-            <a:schemeClr val="accent1"/>
-          </a:lnRef>
-          <a:fillRef idx="3">
-            <a:schemeClr val="accent1"/>
-          </a:fillRef>
-          <a:effectRef idx="2">
-            <a:schemeClr val="accent1"/>
-          </a:effectRef>
-          <a:fontRef idx="minor">
-            <a:schemeClr val="lt1"/>
-          </a:fontRef>
-        </p:style>
-        <p:txBody>
-          <a:bodyPr rtlCol="0" anchor="ctr"/>
-          <a:lstStyle/>
-          <a:p>
-            <a:pPr algn="ctr"/>
-          </a:p>
-        </p:txBody>
-      </p:sp>
-      <p:sp>
-        <p:nvSpPr>
-          <p:cNvPr id="32" name="Rectangle 31"/>
-          <p:cNvSpPr/>
-          <p:nvPr/>
-        </p:nvSpPr>
-        <p:spPr>
-          <a:xfrm>
-            <a:off x="365760" y="4197096"/>
-            <a:ext cx="54864" cy="731520"/>
-          </a:xfrm>
-          <a:prstGeom prst="rect">
-            <a:avLst/>
-          </a:prstGeom>
-          <a:solidFill>
-            <a:srgbClr val="3B5174"/>
-          </a:solidFill>
-          <a:ln>
-            <a:noFill/>
-          </a:ln>
-          <a:effectLst/>
-        </p:spPr>
-        <p:style>
-          <a:lnRef idx="1">
-            <a:schemeClr val="accent1"/>
-          </a:lnRef>
-          <a:fillRef idx="3">
-            <a:schemeClr val="accent1"/>
-          </a:fillRef>
-          <a:effectRef idx="2">
-            <a:schemeClr val="accent1"/>
-          </a:effectRef>
-          <a:fontRef idx="minor">
-            <a:schemeClr val="lt1"/>
-          </a:fontRef>
-        </p:style>
-        <p:txBody>
-          <a:bodyPr rtlCol="0" anchor="ctr"/>
-          <a:lstStyle/>
-          <a:p>
-            <a:pPr algn="ctr"/>
-          </a:p>
-        </p:txBody>
-      </p:sp>
-      <p:sp>
-        <p:nvSpPr>
-          <p:cNvPr id="33" name="TextBox 32"/>
-          <p:cNvSpPr txBox="1"/>
-          <p:nvPr/>
-        </p:nvSpPr>
-        <p:spPr>
-          <a:xfrm>
-            <a:off x="548640" y="4197096"/>
-            <a:ext cx="365760" cy="731520"/>
-          </a:xfrm>
-          <a:prstGeom prst="rect">
-            <a:avLst/>
-          </a:prstGeom>
-          <a:noFill/>
-        </p:spPr>
-        <p:txBody>
-          <a:bodyPr wrap="square" anchor="ctr" lIns="36000" rIns="36000" tIns="18000" bIns="18000">
-            <a:spAutoFit/>
-          </a:bodyPr>
-          <a:lstStyle/>
-          <a:p>
-            <a:pPr algn="l"/>
-            <a:r>
-              <a:rPr sz="1568" b="0" i="0">
-                <a:solidFill>
-                  <a:srgbClr val="3B5174"/>
-                </a:solidFill>
-                <a:latin typeface="Arial"/>
-              </a:rPr>
-              <a:t>💡</a:t>
-            </a:r>
-          </a:p>
-        </p:txBody>
-      </p:sp>
-      <p:sp>
-        <p:nvSpPr>
-          <p:cNvPr id="34" name="TextBox 33"/>
-          <p:cNvSpPr txBox="1"/>
-          <p:nvPr/>
-        </p:nvSpPr>
-        <p:spPr>
-          <a:xfrm>
-            <a:off x="960120" y="4197096"/>
-            <a:ext cx="6098865" cy="731520"/>
-          </a:xfrm>
-          <a:prstGeom prst="rect">
-            <a:avLst/>
-          </a:prstGeom>
-          <a:noFill/>
-        </p:spPr>
-        <p:txBody>
-          <a:bodyPr wrap="square" anchor="ctr" lIns="36000" rIns="36000" tIns="18000" bIns="18000">
-            <a:spAutoFit/>
-          </a:bodyPr>
-          <a:lstStyle/>
-          <a:p>
-            <a:pPr algn="l"/>
-            <a:r>
-              <a:rPr sz="1456" b="1" i="0">
-                <a:solidFill>
-                  <a:srgbClr val="1E293B"/>
-                </a:solidFill>
-                <a:latin typeface="Arial"/>
-              </a:rPr>
-              <a:t>"Heat-Activated Formation of Silica Aerogels"</a:t>
-            </a:r>
-          </a:p>
-          <a:p>
-            <a:pPr algn="l"/>
-            <a:r>
-              <a:rPr sz="1456" b="1" i="0">
-                <a:solidFill>
-                  <a:srgbClr val="1E293B"/>
-                </a:solidFill>
-                <a:latin typeface="Arial"/>
-              </a:rPr>
-              <a:t>— Triggered by flame contact, the gel itself transforms into an aerogel insulator</a:t>
-            </a:r>
-          </a:p>
-        </p:txBody>
-      </p:sp>
-      <p:sp>
-        <p:nvSpPr>
-          <p:cNvPr id="35" name="Rounded Rectangle 34"/>
-          <p:cNvSpPr/>
-          <p:nvPr/>
-        </p:nvSpPr>
-        <p:spPr>
-          <a:xfrm>
-            <a:off x="7333305" y="859536"/>
-            <a:ext cx="4492630" cy="4389120"/>
+            <a:off x="4793778" y="859536"/>
+            <a:ext cx="7032156" cy="5760720"/>
           </a:xfrm>
           <a:prstGeom prst="roundRect">
             <a:avLst>
@@ -52108,13 +51310,13 @@
       </p:sp>
       <p:sp>
         <p:nvSpPr>
-          <p:cNvPr id="36" name="Rectangle 35"/>
+          <p:cNvPr id="25" name="Rectangle 24"/>
           <p:cNvSpPr/>
           <p:nvPr/>
         </p:nvSpPr>
         <p:spPr>
           <a:xfrm>
-            <a:off x="7443033" y="969264"/>
+            <a:off x="4903506" y="969264"/>
             <a:ext cx="868680" cy="292608"/>
           </a:xfrm>
           <a:prstGeom prst="rect">
@@ -52152,13 +51354,13 @@
       </p:sp>
       <p:sp>
         <p:nvSpPr>
-          <p:cNvPr id="37" name="TextBox 36"/>
-          <p:cNvSpPr txBox="1"/>
-          <p:nvPr/>
-        </p:nvSpPr>
-        <p:spPr>
-          <a:xfrm>
-            <a:off x="7443033" y="969264"/>
+          <p:cNvPr id="26" name="TextBox 25"/>
+          <p:cNvSpPr txBox="1"/>
+          <p:nvPr/>
+        </p:nvSpPr>
+        <p:spPr>
+          <a:xfrm>
+            <a:off x="4903506" y="969264"/>
             <a:ext cx="868680" cy="292608"/>
           </a:xfrm>
           <a:prstGeom prst="rect">
@@ -52187,14 +51389,14 @@
       </p:sp>
       <p:sp>
         <p:nvSpPr>
-          <p:cNvPr id="38" name="TextBox 37"/>
-          <p:cNvSpPr txBox="1"/>
-          <p:nvPr/>
-        </p:nvSpPr>
-        <p:spPr>
-          <a:xfrm>
-            <a:off x="7333305" y="859536"/>
-            <a:ext cx="4492630" cy="4389120"/>
+          <p:cNvPr id="27" name="TextBox 26"/>
+          <p:cNvSpPr txBox="1"/>
+          <p:nvPr/>
+        </p:nvSpPr>
+        <p:spPr>
+          <a:xfrm>
+            <a:off x="4793778" y="859536"/>
+            <a:ext cx="7032156" cy="5760720"/>
           </a:xfrm>
           <a:prstGeom prst="rect">
             <a:avLst/>
@@ -52222,14 +51424,14 @@
       </p:sp>
       <p:sp>
         <p:nvSpPr>
-          <p:cNvPr id="39" name="TextBox 38"/>
-          <p:cNvSpPr txBox="1"/>
-          <p:nvPr/>
-        </p:nvSpPr>
-        <p:spPr>
-          <a:xfrm>
-            <a:off x="7333305" y="5285232"/>
-            <a:ext cx="4492630" cy="274320"/>
+          <p:cNvPr id="28" name="TextBox 27"/>
+          <p:cNvSpPr txBox="1"/>
+          <p:nvPr/>
+        </p:nvSpPr>
+        <p:spPr>
+          <a:xfrm>
+            <a:off x="4793778" y="6656832"/>
+            <a:ext cx="7032156" cy="274320"/>
           </a:xfrm>
           <a:prstGeom prst="rect">
             <a:avLst/>
@@ -52250,7 +51452,7 @@
                 </a:solidFill>
                 <a:latin typeface="Arial"/>
               </a:rPr>
-              <a:t>3-stage silica aerogel formation (preview)</a:t>
+              <a:t>3-stage silica aerogel formation</a:t>
             </a:r>
           </a:p>
         </p:txBody>

--- a/slides_en.pptx
+++ b/slides_en.pptx
@@ -51382,7 +51382,7 @@
                 </a:solidFill>
                 <a:latin typeface="Arial"/>
               </a:rPr>
-              <a:t>Fig. 5a</a:t>
+              <a:t>Concept</a:t>
             </a:r>
           </a:p>
         </p:txBody>
@@ -51452,7 +51452,7 @@
                 </a:solidFill>
                 <a:latin typeface="Arial"/>
               </a:rPr>
-              <a:t>3-stage silica aerogel formation</a:t>
+              <a:t>Heat trigger transforms the gel into a porous aerogel insulating layer</a:t>
             </a:r>
           </a:p>
         </p:txBody>
@@ -52415,27 +52415,163 @@
       </p:sp>
       <p:sp>
         <p:nvSpPr>
-          <p:cNvPr id="10" name="Rounded Rectangle 9"/>
+          <p:cNvPr id="10" name="TextBox 9"/>
+          <p:cNvSpPr txBox="1"/>
+          <p:nvPr/>
+        </p:nvSpPr>
+        <p:spPr>
+          <a:xfrm>
+            <a:off x="365760" y="859536"/>
+            <a:ext cx="822960" cy="1920240"/>
+          </a:xfrm>
+          <a:prstGeom prst="rect">
+            <a:avLst/>
+          </a:prstGeom>
+          <a:noFill/>
+        </p:spPr>
+        <p:txBody>
+          <a:bodyPr wrap="square" anchor="ctr" lIns="36000" rIns="36000" tIns="18000" bIns="18000">
+            <a:spAutoFit/>
+          </a:bodyPr>
+          <a:lstStyle/>
+          <a:p>
+            <a:pPr algn="l"/>
+            <a:r>
+              <a:rPr sz="6048" b="1" i="0">
+                <a:solidFill>
+                  <a:srgbClr val="E2E8F0"/>
+                </a:solidFill>
+                <a:latin typeface="Arial"/>
+              </a:rPr>
+              <a:t>A</a:t>
+            </a:r>
+          </a:p>
+        </p:txBody>
+      </p:sp>
+      <p:sp>
+        <p:nvSpPr>
+          <p:cNvPr id="11" name="TextBox 10"/>
+          <p:cNvSpPr txBox="1"/>
+          <p:nvPr/>
+        </p:nvSpPr>
+        <p:spPr>
+          <a:xfrm>
+            <a:off x="1234440" y="1060704"/>
+            <a:ext cx="5324688" cy="411480"/>
+          </a:xfrm>
+          <a:prstGeom prst="rect">
+            <a:avLst/>
+          </a:prstGeom>
+          <a:noFill/>
+        </p:spPr>
+        <p:txBody>
+          <a:bodyPr wrap="square" anchor="t" lIns="36000" rIns="36000" tIns="18000" bIns="18000">
+            <a:spAutoFit/>
+          </a:bodyPr>
+          <a:lstStyle/>
+          <a:p>
+            <a:pPr algn="l"/>
+            <a:r>
+              <a:rPr sz="2688" b="1" i="0">
+                <a:solidFill>
+                  <a:srgbClr val="1E293B"/>
+                </a:solidFill>
+                <a:latin typeface="Arial"/>
+              </a:rPr>
+              <a:t>HEC</a:t>
+            </a:r>
+          </a:p>
+        </p:txBody>
+      </p:sp>
+      <p:sp>
+        <p:nvSpPr>
+          <p:cNvPr id="12" name="TextBox 11"/>
+          <p:cNvSpPr txBox="1"/>
+          <p:nvPr/>
+        </p:nvSpPr>
+        <p:spPr>
+          <a:xfrm>
+            <a:off x="1234440" y="1499616"/>
+            <a:ext cx="5324688" cy="256032"/>
+          </a:xfrm>
+          <a:prstGeom prst="rect">
+            <a:avLst/>
+          </a:prstGeom>
+          <a:noFill/>
+        </p:spPr>
+        <p:txBody>
+          <a:bodyPr wrap="square" anchor="t" lIns="36000" rIns="36000" tIns="18000" bIns="18000">
+            <a:spAutoFit/>
+          </a:bodyPr>
+          <a:lstStyle/>
+          <a:p>
+            <a:pPr algn="l"/>
+            <a:r>
+              <a:rPr sz="1232" b="0" i="0">
+                <a:solidFill>
+                  <a:srgbClr val="64748B"/>
+                </a:solidFill>
+                <a:latin typeface="Arial"/>
+              </a:rPr>
+              <a:t>Hydroxyethyl cellulose</a:t>
+            </a:r>
+          </a:p>
+        </p:txBody>
+      </p:sp>
+      <p:sp>
+        <p:nvSpPr>
+          <p:cNvPr id="13" name="TextBox 12"/>
+          <p:cNvSpPr txBox="1"/>
+          <p:nvPr/>
+        </p:nvSpPr>
+        <p:spPr>
+          <a:xfrm>
+            <a:off x="1234440" y="1773936"/>
+            <a:ext cx="5324688" cy="310896"/>
+          </a:xfrm>
+          <a:prstGeom prst="rect">
+            <a:avLst/>
+          </a:prstGeom>
+          <a:noFill/>
+        </p:spPr>
+        <p:txBody>
+          <a:bodyPr wrap="square" anchor="t" lIns="36000" rIns="36000" tIns="18000" bIns="18000">
+            <a:spAutoFit/>
+          </a:bodyPr>
+          <a:lstStyle/>
+          <a:p>
+            <a:pPr algn="l"/>
+            <a:r>
+              <a:rPr sz="1344" b="1" i="0">
+                <a:solidFill>
+                  <a:srgbClr val="3B5174"/>
+                </a:solidFill>
+                <a:latin typeface="Arial"/>
+              </a:rPr>
+              <a:t>Base viscosity-building backbone</a:t>
+            </a:r>
+          </a:p>
+        </p:txBody>
+      </p:sp>
+      <p:sp>
+        <p:nvSpPr>
+          <p:cNvPr id="14" name="Rectangle 13"/>
           <p:cNvSpPr/>
           <p:nvPr/>
         </p:nvSpPr>
         <p:spPr>
           <a:xfrm>
-            <a:off x="365760" y="859536"/>
-            <a:ext cx="3734714" cy="1920240"/>
-          </a:xfrm>
-          <a:prstGeom prst="roundRect">
-            <a:avLst>
-              <a:gd name="adj" fmla="val 4000"/>
-            </a:avLst>
+            <a:off x="365760" y="2761488"/>
+            <a:ext cx="6193368" cy="13716"/>
+          </a:xfrm>
+          <a:prstGeom prst="rect">
+            <a:avLst/>
           </a:prstGeom>
           <a:solidFill>
-            <a:srgbClr val="F8FAFC"/>
+            <a:srgbClr val="E2E8F0"/>
           </a:solidFill>
-          <a:ln w="6350">
-            <a:solidFill>
-              <a:srgbClr val="E2E8F0"/>
-            </a:solidFill>
+          <a:ln>
+            <a:noFill/>
           </a:ln>
           <a:effectLst/>
         </p:spPr>
@@ -52463,119 +52599,119 @@
       </p:sp>
       <p:sp>
         <p:nvSpPr>
-          <p:cNvPr id="11" name="TextBox 10"/>
-          <p:cNvSpPr txBox="1"/>
-          <p:nvPr/>
-        </p:nvSpPr>
-        <p:spPr>
-          <a:xfrm>
-            <a:off x="548640" y="987552"/>
-            <a:ext cx="3368954" cy="228600"/>
-          </a:xfrm>
-          <a:prstGeom prst="rect">
-            <a:avLst/>
-          </a:prstGeom>
-          <a:noFill/>
-        </p:spPr>
-        <p:txBody>
-          <a:bodyPr wrap="square" anchor="t" lIns="36000" rIns="36000" tIns="18000" bIns="18000">
-            <a:spAutoFit/>
-          </a:bodyPr>
-          <a:lstStyle/>
-          <a:p>
-            <a:pPr algn="l"/>
-            <a:r>
-              <a:rPr sz="1232" b="1" i="0">
+          <p:cNvPr id="15" name="TextBox 14"/>
+          <p:cNvSpPr txBox="1"/>
+          <p:nvPr/>
+        </p:nvSpPr>
+        <p:spPr>
+          <a:xfrm>
+            <a:off x="365760" y="2779776"/>
+            <a:ext cx="822960" cy="1920240"/>
+          </a:xfrm>
+          <a:prstGeom prst="rect">
+            <a:avLst/>
+          </a:prstGeom>
+          <a:noFill/>
+        </p:spPr>
+        <p:txBody>
+          <a:bodyPr wrap="square" anchor="ctr" lIns="36000" rIns="36000" tIns="18000" bIns="18000">
+            <a:spAutoFit/>
+          </a:bodyPr>
+          <a:lstStyle/>
+          <a:p>
+            <a:pPr algn="l"/>
+            <a:r>
+              <a:rPr sz="6048" b="1" i="0">
+                <a:solidFill>
+                  <a:srgbClr val="E2E8F0"/>
+                </a:solidFill>
+                <a:latin typeface="Arial"/>
+              </a:rPr>
+              <a:t>B</a:t>
+            </a:r>
+          </a:p>
+        </p:txBody>
+      </p:sp>
+      <p:sp>
+        <p:nvSpPr>
+          <p:cNvPr id="16" name="TextBox 15"/>
+          <p:cNvSpPr txBox="1"/>
+          <p:nvPr/>
+        </p:nvSpPr>
+        <p:spPr>
+          <a:xfrm>
+            <a:off x="1234440" y="2980944"/>
+            <a:ext cx="5324688" cy="411480"/>
+          </a:xfrm>
+          <a:prstGeom prst="rect">
+            <a:avLst/>
+          </a:prstGeom>
+          <a:noFill/>
+        </p:spPr>
+        <p:txBody>
+          <a:bodyPr wrap="square" anchor="t" lIns="36000" rIns="36000" tIns="18000" bIns="18000">
+            <a:spAutoFit/>
+          </a:bodyPr>
+          <a:lstStyle/>
+          <a:p>
+            <a:pPr algn="l"/>
+            <a:r>
+              <a:rPr sz="2688" b="1" i="0">
+                <a:solidFill>
+                  <a:srgbClr val="1E293B"/>
+                </a:solidFill>
+                <a:latin typeface="Arial"/>
+              </a:rPr>
+              <a:t>MC</a:t>
+            </a:r>
+          </a:p>
+        </p:txBody>
+      </p:sp>
+      <p:sp>
+        <p:nvSpPr>
+          <p:cNvPr id="17" name="TextBox 16"/>
+          <p:cNvSpPr txBox="1"/>
+          <p:nvPr/>
+        </p:nvSpPr>
+        <p:spPr>
+          <a:xfrm>
+            <a:off x="1234440" y="3419856"/>
+            <a:ext cx="5324688" cy="256032"/>
+          </a:xfrm>
+          <a:prstGeom prst="rect">
+            <a:avLst/>
+          </a:prstGeom>
+          <a:noFill/>
+        </p:spPr>
+        <p:txBody>
+          <a:bodyPr wrap="square" anchor="t" lIns="36000" rIns="36000" tIns="18000" bIns="18000">
+            <a:spAutoFit/>
+          </a:bodyPr>
+          <a:lstStyle/>
+          <a:p>
+            <a:pPr algn="l"/>
+            <a:r>
+              <a:rPr sz="1232" b="0" i="0">
                 <a:solidFill>
                   <a:srgbClr val="64748B"/>
                 </a:solidFill>
                 <a:latin typeface="Arial"/>
               </a:rPr>
-              <a:t>Polymer A</a:t>
-            </a:r>
-          </a:p>
-        </p:txBody>
-      </p:sp>
-      <p:sp>
-        <p:nvSpPr>
-          <p:cNvPr id="12" name="TextBox 11"/>
-          <p:cNvSpPr txBox="1"/>
-          <p:nvPr/>
-        </p:nvSpPr>
-        <p:spPr>
-          <a:xfrm>
-            <a:off x="548640" y="1243584"/>
-            <a:ext cx="3368954" cy="457200"/>
-          </a:xfrm>
-          <a:prstGeom prst="rect">
-            <a:avLst/>
-          </a:prstGeom>
-          <a:noFill/>
-        </p:spPr>
-        <p:txBody>
-          <a:bodyPr wrap="square" anchor="t" lIns="36000" rIns="36000" tIns="18000" bIns="18000">
-            <a:spAutoFit/>
-          </a:bodyPr>
-          <a:lstStyle/>
-          <a:p>
-            <a:pPr algn="l"/>
-            <a:r>
-              <a:rPr sz="2912" b="1" i="0">
-                <a:solidFill>
-                  <a:srgbClr val="1E293B"/>
-                </a:solidFill>
-                <a:latin typeface="Arial"/>
-              </a:rPr>
-              <a:t>HEC</a:t>
-            </a:r>
-          </a:p>
-        </p:txBody>
-      </p:sp>
-      <p:sp>
-        <p:nvSpPr>
-          <p:cNvPr id="13" name="TextBox 12"/>
-          <p:cNvSpPr txBox="1"/>
-          <p:nvPr/>
-        </p:nvSpPr>
-        <p:spPr>
-          <a:xfrm>
-            <a:off x="548640" y="1737360"/>
-            <a:ext cx="3368954" cy="594360"/>
-          </a:xfrm>
-          <a:prstGeom prst="rect">
-            <a:avLst/>
-          </a:prstGeom>
-          <a:noFill/>
-        </p:spPr>
-        <p:txBody>
-          <a:bodyPr wrap="square" anchor="t" lIns="36000" rIns="36000" tIns="18000" bIns="18000">
-            <a:spAutoFit/>
-          </a:bodyPr>
-          <a:lstStyle/>
-          <a:p>
-            <a:pPr algn="l"/>
-            <a:r>
-              <a:rPr sz="1232" b="0" i="0">
-                <a:solidFill>
-                  <a:srgbClr val="475569"/>
-                </a:solidFill>
-                <a:latin typeface="Arial"/>
-              </a:rPr>
-              <a:t>Hydroxyethyl cellulose</a:t>
-            </a:r>
-          </a:p>
-        </p:txBody>
-      </p:sp>
-      <p:sp>
-        <p:nvSpPr>
-          <p:cNvPr id="14" name="TextBox 13"/>
-          <p:cNvSpPr txBox="1"/>
-          <p:nvPr/>
-        </p:nvSpPr>
-        <p:spPr>
-          <a:xfrm>
-            <a:off x="548640" y="2395728"/>
-            <a:ext cx="3368954" cy="274320"/>
+              <a:t>Methyl cellulose</a:t>
+            </a:r>
+          </a:p>
+        </p:txBody>
+      </p:sp>
+      <p:sp>
+        <p:nvSpPr>
+          <p:cNvPr id="18" name="TextBox 17"/>
+          <p:cNvSpPr txBox="1"/>
+          <p:nvPr/>
+        </p:nvSpPr>
+        <p:spPr>
+          <a:xfrm>
+            <a:off x="1234440" y="3694176"/>
+            <a:ext cx="5324688" cy="310896"/>
           </a:xfrm>
           <a:prstGeom prst="rect">
             <a:avLst/>
@@ -52596,34 +52732,30 @@
                 </a:solidFill>
                 <a:latin typeface="Arial"/>
               </a:rPr>
-              <a:t>→ Base viscosity agent</a:t>
-            </a:r>
-          </a:p>
-        </p:txBody>
-      </p:sp>
-      <p:sp>
-        <p:nvSpPr>
-          <p:cNvPr id="15" name="Rounded Rectangle 14"/>
+              <a:t>Gels on heating (thermoreversible) — key to flame protection</a:t>
+            </a:r>
+          </a:p>
+        </p:txBody>
+      </p:sp>
+      <p:sp>
+        <p:nvSpPr>
+          <p:cNvPr id="19" name="Rectangle 18"/>
           <p:cNvSpPr/>
           <p:nvPr/>
         </p:nvSpPr>
         <p:spPr>
           <a:xfrm>
-            <a:off x="4228490" y="859536"/>
-            <a:ext cx="3734714" cy="1920240"/>
-          </a:xfrm>
-          <a:prstGeom prst="roundRect">
-            <a:avLst>
-              <a:gd name="adj" fmla="val 4000"/>
-            </a:avLst>
+            <a:off x="365760" y="4681728"/>
+            <a:ext cx="6193368" cy="13716"/>
+          </a:xfrm>
+          <a:prstGeom prst="rect">
+            <a:avLst/>
           </a:prstGeom>
           <a:solidFill>
-            <a:srgbClr val="F8FAFC"/>
+            <a:srgbClr val="E2E8F0"/>
           </a:solidFill>
-          <a:ln w="6350">
-            <a:solidFill>
-              <a:srgbClr val="E2E8F0"/>
-            </a:solidFill>
+          <a:ln>
+            <a:noFill/>
           </a:ln>
           <a:effectLst/>
         </p:spPr>
@@ -52651,119 +52783,119 @@
       </p:sp>
       <p:sp>
         <p:nvSpPr>
-          <p:cNvPr id="16" name="TextBox 15"/>
-          <p:cNvSpPr txBox="1"/>
-          <p:nvPr/>
-        </p:nvSpPr>
-        <p:spPr>
-          <a:xfrm>
-            <a:off x="4411370" y="987552"/>
-            <a:ext cx="3368954" cy="228600"/>
-          </a:xfrm>
-          <a:prstGeom prst="rect">
-            <a:avLst/>
-          </a:prstGeom>
-          <a:noFill/>
-        </p:spPr>
-        <p:txBody>
-          <a:bodyPr wrap="square" anchor="t" lIns="36000" rIns="36000" tIns="18000" bIns="18000">
-            <a:spAutoFit/>
-          </a:bodyPr>
-          <a:lstStyle/>
-          <a:p>
-            <a:pPr algn="l"/>
-            <a:r>
-              <a:rPr sz="1232" b="1" i="0">
+          <p:cNvPr id="20" name="TextBox 19"/>
+          <p:cNvSpPr txBox="1"/>
+          <p:nvPr/>
+        </p:nvSpPr>
+        <p:spPr>
+          <a:xfrm>
+            <a:off x="365760" y="4700016"/>
+            <a:ext cx="822960" cy="1920240"/>
+          </a:xfrm>
+          <a:prstGeom prst="rect">
+            <a:avLst/>
+          </a:prstGeom>
+          <a:noFill/>
+        </p:spPr>
+        <p:txBody>
+          <a:bodyPr wrap="square" anchor="ctr" lIns="36000" rIns="36000" tIns="18000" bIns="18000">
+            <a:spAutoFit/>
+          </a:bodyPr>
+          <a:lstStyle/>
+          <a:p>
+            <a:pPr algn="l"/>
+            <a:r>
+              <a:rPr sz="6048" b="1" i="0">
+                <a:solidFill>
+                  <a:srgbClr val="E2E8F0"/>
+                </a:solidFill>
+                <a:latin typeface="Arial"/>
+              </a:rPr>
+              <a:t>C</a:t>
+            </a:r>
+          </a:p>
+        </p:txBody>
+      </p:sp>
+      <p:sp>
+        <p:nvSpPr>
+          <p:cNvPr id="21" name="TextBox 20"/>
+          <p:cNvSpPr txBox="1"/>
+          <p:nvPr/>
+        </p:nvSpPr>
+        <p:spPr>
+          <a:xfrm>
+            <a:off x="1234440" y="4901184"/>
+            <a:ext cx="5324688" cy="411480"/>
+          </a:xfrm>
+          <a:prstGeom prst="rect">
+            <a:avLst/>
+          </a:prstGeom>
+          <a:noFill/>
+        </p:spPr>
+        <p:txBody>
+          <a:bodyPr wrap="square" anchor="t" lIns="36000" rIns="36000" tIns="18000" bIns="18000">
+            <a:spAutoFit/>
+          </a:bodyPr>
+          <a:lstStyle/>
+          <a:p>
+            <a:pPr algn="l"/>
+            <a:r>
+              <a:rPr sz="2688" b="1" i="0">
+                <a:solidFill>
+                  <a:srgbClr val="1E293B"/>
+                </a:solidFill>
+                <a:latin typeface="Arial"/>
+              </a:rPr>
+              <a:t>MHEC</a:t>
+            </a:r>
+          </a:p>
+        </p:txBody>
+      </p:sp>
+      <p:sp>
+        <p:nvSpPr>
+          <p:cNvPr id="22" name="TextBox 21"/>
+          <p:cNvSpPr txBox="1"/>
+          <p:nvPr/>
+        </p:nvSpPr>
+        <p:spPr>
+          <a:xfrm>
+            <a:off x="1234440" y="5340096"/>
+            <a:ext cx="5324688" cy="256032"/>
+          </a:xfrm>
+          <a:prstGeom prst="rect">
+            <a:avLst/>
+          </a:prstGeom>
+          <a:noFill/>
+        </p:spPr>
+        <p:txBody>
+          <a:bodyPr wrap="square" anchor="t" lIns="36000" rIns="36000" tIns="18000" bIns="18000">
+            <a:spAutoFit/>
+          </a:bodyPr>
+          <a:lstStyle/>
+          <a:p>
+            <a:pPr algn="l"/>
+            <a:r>
+              <a:rPr sz="1232" b="0" i="0">
                 <a:solidFill>
                   <a:srgbClr val="64748B"/>
                 </a:solidFill>
                 <a:latin typeface="Arial"/>
               </a:rPr>
-              <a:t>Polymer B</a:t>
-            </a:r>
-          </a:p>
-        </p:txBody>
-      </p:sp>
-      <p:sp>
-        <p:nvSpPr>
-          <p:cNvPr id="17" name="TextBox 16"/>
-          <p:cNvSpPr txBox="1"/>
-          <p:nvPr/>
-        </p:nvSpPr>
-        <p:spPr>
-          <a:xfrm>
-            <a:off x="4411370" y="1243584"/>
-            <a:ext cx="3368954" cy="457200"/>
-          </a:xfrm>
-          <a:prstGeom prst="rect">
-            <a:avLst/>
-          </a:prstGeom>
-          <a:noFill/>
-        </p:spPr>
-        <p:txBody>
-          <a:bodyPr wrap="square" anchor="t" lIns="36000" rIns="36000" tIns="18000" bIns="18000">
-            <a:spAutoFit/>
-          </a:bodyPr>
-          <a:lstStyle/>
-          <a:p>
-            <a:pPr algn="l"/>
-            <a:r>
-              <a:rPr sz="2912" b="1" i="0">
-                <a:solidFill>
-                  <a:srgbClr val="1E293B"/>
-                </a:solidFill>
-                <a:latin typeface="Arial"/>
-              </a:rPr>
-              <a:t>MC</a:t>
-            </a:r>
-          </a:p>
-        </p:txBody>
-      </p:sp>
-      <p:sp>
-        <p:nvSpPr>
-          <p:cNvPr id="18" name="TextBox 17"/>
-          <p:cNvSpPr txBox="1"/>
-          <p:nvPr/>
-        </p:nvSpPr>
-        <p:spPr>
-          <a:xfrm>
-            <a:off x="4411370" y="1737360"/>
-            <a:ext cx="3368954" cy="594360"/>
-          </a:xfrm>
-          <a:prstGeom prst="rect">
-            <a:avLst/>
-          </a:prstGeom>
-          <a:noFill/>
-        </p:spPr>
-        <p:txBody>
-          <a:bodyPr wrap="square" anchor="t" lIns="36000" rIns="36000" tIns="18000" bIns="18000">
-            <a:spAutoFit/>
-          </a:bodyPr>
-          <a:lstStyle/>
-          <a:p>
-            <a:pPr algn="l"/>
-            <a:r>
-              <a:rPr sz="1232" b="0" i="0">
-                <a:solidFill>
-                  <a:srgbClr val="475569"/>
-                </a:solidFill>
-                <a:latin typeface="Arial"/>
-              </a:rPr>
-              <a:t>Methyl cellulose</a:t>
-            </a:r>
-          </a:p>
-        </p:txBody>
-      </p:sp>
-      <p:sp>
-        <p:nvSpPr>
-          <p:cNvPr id="19" name="TextBox 18"/>
-          <p:cNvSpPr txBox="1"/>
-          <p:nvPr/>
-        </p:nvSpPr>
-        <p:spPr>
-          <a:xfrm>
-            <a:off x="4411370" y="2395728"/>
-            <a:ext cx="3368954" cy="274320"/>
+              <a:t>Methyl 2-hydroxyethyl cellulose</a:t>
+            </a:r>
+          </a:p>
+        </p:txBody>
+      </p:sp>
+      <p:sp>
+        <p:nvSpPr>
+          <p:cNvPr id="23" name="TextBox 22"/>
+          <p:cNvSpPr txBox="1"/>
+          <p:nvPr/>
+        </p:nvSpPr>
+        <p:spPr>
+          <a:xfrm>
+            <a:off x="1234440" y="5614416"/>
+            <a:ext cx="5324688" cy="310896"/>
           </a:xfrm>
           <a:prstGeom prst="rect">
             <a:avLst/>
@@ -52784,209 +52916,21 @@
                 </a:solidFill>
                 <a:latin typeface="Arial"/>
               </a:rPr>
-              <a:t>→ Gelation upon heating (thermoreversible)</a:t>
-            </a:r>
-          </a:p>
-        </p:txBody>
-      </p:sp>
-      <p:sp>
-        <p:nvSpPr>
-          <p:cNvPr id="20" name="Rounded Rectangle 19"/>
+              <a:t>Hybrid combining the traits of A and B</a:t>
+            </a:r>
+          </a:p>
+        </p:txBody>
+      </p:sp>
+      <p:sp>
+        <p:nvSpPr>
+          <p:cNvPr id="24" name="Rounded Rectangle 23"/>
           <p:cNvSpPr/>
           <p:nvPr/>
         </p:nvSpPr>
         <p:spPr>
           <a:xfrm>
-            <a:off x="8091220" y="859536"/>
-            <a:ext cx="3734714" cy="1920240"/>
-          </a:xfrm>
-          <a:prstGeom prst="roundRect">
-            <a:avLst>
-              <a:gd name="adj" fmla="val 4000"/>
-            </a:avLst>
-          </a:prstGeom>
-          <a:solidFill>
-            <a:srgbClr val="F8FAFC"/>
-          </a:solidFill>
-          <a:ln w="6350">
-            <a:solidFill>
-              <a:srgbClr val="E2E8F0"/>
-            </a:solidFill>
-          </a:ln>
-          <a:effectLst/>
-        </p:spPr>
-        <p:style>
-          <a:lnRef idx="1">
-            <a:schemeClr val="accent1"/>
-          </a:lnRef>
-          <a:fillRef idx="3">
-            <a:schemeClr val="accent1"/>
-          </a:fillRef>
-          <a:effectRef idx="2">
-            <a:schemeClr val="accent1"/>
-          </a:effectRef>
-          <a:fontRef idx="minor">
-            <a:schemeClr val="lt1"/>
-          </a:fontRef>
-        </p:style>
-        <p:txBody>
-          <a:bodyPr rtlCol="0" anchor="ctr"/>
-          <a:lstStyle/>
-          <a:p>
-            <a:pPr algn="ctr"/>
-          </a:p>
-        </p:txBody>
-      </p:sp>
-      <p:sp>
-        <p:nvSpPr>
-          <p:cNvPr id="21" name="TextBox 20"/>
-          <p:cNvSpPr txBox="1"/>
-          <p:nvPr/>
-        </p:nvSpPr>
-        <p:spPr>
-          <a:xfrm>
-            <a:off x="8274100" y="987552"/>
-            <a:ext cx="3368954" cy="228600"/>
-          </a:xfrm>
-          <a:prstGeom prst="rect">
-            <a:avLst/>
-          </a:prstGeom>
-          <a:noFill/>
-        </p:spPr>
-        <p:txBody>
-          <a:bodyPr wrap="square" anchor="t" lIns="36000" rIns="36000" tIns="18000" bIns="18000">
-            <a:spAutoFit/>
-          </a:bodyPr>
-          <a:lstStyle/>
-          <a:p>
-            <a:pPr algn="l"/>
-            <a:r>
-              <a:rPr sz="1232" b="1" i="0">
-                <a:solidFill>
-                  <a:srgbClr val="64748B"/>
-                </a:solidFill>
-                <a:latin typeface="Arial"/>
-              </a:rPr>
-              <a:t>Polymer C</a:t>
-            </a:r>
-          </a:p>
-        </p:txBody>
-      </p:sp>
-      <p:sp>
-        <p:nvSpPr>
-          <p:cNvPr id="22" name="TextBox 21"/>
-          <p:cNvSpPr txBox="1"/>
-          <p:nvPr/>
-        </p:nvSpPr>
-        <p:spPr>
-          <a:xfrm>
-            <a:off x="8274100" y="1243584"/>
-            <a:ext cx="3368954" cy="457200"/>
-          </a:xfrm>
-          <a:prstGeom prst="rect">
-            <a:avLst/>
-          </a:prstGeom>
-          <a:noFill/>
-        </p:spPr>
-        <p:txBody>
-          <a:bodyPr wrap="square" anchor="t" lIns="36000" rIns="36000" tIns="18000" bIns="18000">
-            <a:spAutoFit/>
-          </a:bodyPr>
-          <a:lstStyle/>
-          <a:p>
-            <a:pPr algn="l"/>
-            <a:r>
-              <a:rPr sz="2912" b="1" i="0">
-                <a:solidFill>
-                  <a:srgbClr val="1E293B"/>
-                </a:solidFill>
-                <a:latin typeface="Arial"/>
-              </a:rPr>
-              <a:t>MHEC</a:t>
-            </a:r>
-          </a:p>
-        </p:txBody>
-      </p:sp>
-      <p:sp>
-        <p:nvSpPr>
-          <p:cNvPr id="23" name="TextBox 22"/>
-          <p:cNvSpPr txBox="1"/>
-          <p:nvPr/>
-        </p:nvSpPr>
-        <p:spPr>
-          <a:xfrm>
-            <a:off x="8274100" y="1737360"/>
-            <a:ext cx="3368954" cy="594360"/>
-          </a:xfrm>
-          <a:prstGeom prst="rect">
-            <a:avLst/>
-          </a:prstGeom>
-          <a:noFill/>
-        </p:spPr>
-        <p:txBody>
-          <a:bodyPr wrap="square" anchor="t" lIns="36000" rIns="36000" tIns="18000" bIns="18000">
-            <a:spAutoFit/>
-          </a:bodyPr>
-          <a:lstStyle/>
-          <a:p>
-            <a:pPr algn="l"/>
-            <a:r>
-              <a:rPr sz="1232" b="0" i="0">
-                <a:solidFill>
-                  <a:srgbClr val="475569"/>
-                </a:solidFill>
-                <a:latin typeface="Arial"/>
-              </a:rPr>
-              <a:t>Methyl 2-hydroxyethyl cellulose</a:t>
-            </a:r>
-          </a:p>
-        </p:txBody>
-      </p:sp>
-      <p:sp>
-        <p:nvSpPr>
-          <p:cNvPr id="24" name="TextBox 23"/>
-          <p:cNvSpPr txBox="1"/>
-          <p:nvPr/>
-        </p:nvSpPr>
-        <p:spPr>
-          <a:xfrm>
-            <a:off x="8274100" y="2395728"/>
-            <a:ext cx="3368954" cy="274320"/>
-          </a:xfrm>
-          <a:prstGeom prst="rect">
-            <a:avLst/>
-          </a:prstGeom>
-          <a:noFill/>
-        </p:spPr>
-        <p:txBody>
-          <a:bodyPr wrap="square" anchor="t" lIns="36000" rIns="36000" tIns="18000" bIns="18000">
-            <a:spAutoFit/>
-          </a:bodyPr>
-          <a:lstStyle/>
-          <a:p>
-            <a:pPr algn="l"/>
-            <a:r>
-              <a:rPr sz="1344" b="1" i="0">
-                <a:solidFill>
-                  <a:srgbClr val="3B5174"/>
-                </a:solidFill>
-                <a:latin typeface="Arial"/>
-              </a:rPr>
-              <a:t>→ Integrates properties of A and B</a:t>
-            </a:r>
-          </a:p>
-        </p:txBody>
-      </p:sp>
-      <p:sp>
-        <p:nvSpPr>
-          <p:cNvPr id="25" name="Rounded Rectangle 24"/>
-          <p:cNvSpPr/>
-          <p:nvPr/>
-        </p:nvSpPr>
-        <p:spPr>
-          <a:xfrm>
-            <a:off x="365760" y="3054096"/>
-            <a:ext cx="11460175" cy="3246120"/>
+            <a:off x="6742008" y="859536"/>
+            <a:ext cx="5083926" cy="5760720"/>
           </a:xfrm>
           <a:prstGeom prst="roundRect">
             <a:avLst>
@@ -53027,13 +52971,13 @@
       </p:sp>
       <p:sp>
         <p:nvSpPr>
-          <p:cNvPr id="26" name="Rectangle 25"/>
+          <p:cNvPr id="25" name="Rectangle 24"/>
           <p:cNvSpPr/>
           <p:nvPr/>
         </p:nvSpPr>
         <p:spPr>
           <a:xfrm>
-            <a:off x="475488" y="3163824"/>
+            <a:off x="6851736" y="969264"/>
             <a:ext cx="868680" cy="292608"/>
           </a:xfrm>
           <a:prstGeom prst="rect">
@@ -53071,14 +53015,49 @@
       </p:sp>
       <p:sp>
         <p:nvSpPr>
+          <p:cNvPr id="26" name="TextBox 25"/>
+          <p:cNvSpPr txBox="1"/>
+          <p:nvPr/>
+        </p:nvSpPr>
+        <p:spPr>
+          <a:xfrm>
+            <a:off x="6851736" y="969264"/>
+            <a:ext cx="868680" cy="292608"/>
+          </a:xfrm>
+          <a:prstGeom prst="rect">
+            <a:avLst/>
+          </a:prstGeom>
+          <a:noFill/>
+        </p:spPr>
+        <p:txBody>
+          <a:bodyPr wrap="square" anchor="ctr" lIns="36000" rIns="36000" tIns="18000" bIns="18000">
+            <a:spAutoFit/>
+          </a:bodyPr>
+          <a:lstStyle/>
+          <a:p>
+            <a:pPr algn="ctr"/>
+            <a:r>
+              <a:rPr sz="1232" b="1" i="0">
+                <a:solidFill>
+                  <a:srgbClr val="FFFFFF"/>
+                </a:solidFill>
+                <a:latin typeface="Arial"/>
+              </a:rPr>
+              <a:t>Fig. 1b/c</a:t>
+            </a:r>
+          </a:p>
+        </p:txBody>
+      </p:sp>
+      <p:sp>
+        <p:nvSpPr>
           <p:cNvPr id="27" name="TextBox 26"/>
           <p:cNvSpPr txBox="1"/>
           <p:nvPr/>
         </p:nvSpPr>
         <p:spPr>
           <a:xfrm>
-            <a:off x="475488" y="3163824"/>
-            <a:ext cx="868680" cy="292608"/>
+            <a:off x="6742008" y="859536"/>
+            <a:ext cx="5083926" cy="5760720"/>
           </a:xfrm>
           <a:prstGeom prst="rect">
             <a:avLst/>
@@ -53093,13 +53072,13 @@
           <a:p>
             <a:pPr algn="ctr"/>
             <a:r>
-              <a:rPr sz="1232" b="1" i="0">
-                <a:solidFill>
-                  <a:srgbClr val="FFFFFF"/>
-                </a:solidFill>
-                <a:latin typeface="Arial"/>
-              </a:rPr>
-              <a:t>Fig. 1b/c</a:t>
+              <a:rPr sz="1344" b="0" i="0">
+                <a:solidFill>
+                  <a:srgbClr val="AAB4C0"/>
+                </a:solidFill>
+                <a:latin typeface="Arial"/>
+              </a:rPr>
+              <a:t>(Paste paper figure here)</a:t>
             </a:r>
           </a:p>
         </p:txBody>
@@ -53112,43 +53091,8 @@
         </p:nvSpPr>
         <p:spPr>
           <a:xfrm>
-            <a:off x="365760" y="3054096"/>
-            <a:ext cx="11460175" cy="3246120"/>
-          </a:xfrm>
-          <a:prstGeom prst="rect">
-            <a:avLst/>
-          </a:prstGeom>
-          <a:noFill/>
-        </p:spPr>
-        <p:txBody>
-          <a:bodyPr wrap="square" anchor="ctr" lIns="36000" rIns="36000" tIns="18000" bIns="18000">
-            <a:spAutoFit/>
-          </a:bodyPr>
-          <a:lstStyle/>
-          <a:p>
-            <a:pPr algn="ctr"/>
-            <a:r>
-              <a:rPr sz="1344" b="0" i="0">
-                <a:solidFill>
-                  <a:srgbClr val="AAB4C0"/>
-                </a:solidFill>
-                <a:latin typeface="Arial"/>
-              </a:rPr>
-              <a:t>(Paste paper figure here)</a:t>
-            </a:r>
-          </a:p>
-        </p:txBody>
-      </p:sp>
-      <p:sp>
-        <p:nvSpPr>
-          <p:cNvPr id="29" name="TextBox 28"/>
-          <p:cNvSpPr txBox="1"/>
-          <p:nvPr/>
-        </p:nvSpPr>
-        <p:spPr>
-          <a:xfrm>
-            <a:off x="365760" y="6336792"/>
-            <a:ext cx="11460175" cy="274320"/>
+            <a:off x="6742008" y="6656832"/>
+            <a:ext cx="5083926" cy="274320"/>
           </a:xfrm>
           <a:prstGeom prst="rect">
             <a:avLst/>
@@ -53169,7 +53113,7 @@
                 </a:solidFill>
                 <a:latin typeface="Arial"/>
               </a:rPr>
-              <a:t>Chemical structures of each polymer and mixing scheme with colloidal silica (CSP)</a:t>
+              <a:t>Chemical structures and CSP mixing scheme</a:t>
             </a:r>
           </a:p>
         </p:txBody>

--- a/slides_en.pptx
+++ b/slides_en.pptx
@@ -3934,19 +3934,19 @@
         <p:spPr>
           <a:xfrm>
             <a:off x="365760" y="859536"/>
-            <a:ext cx="5409444" cy="3200400"/>
+            <a:ext cx="5409444" cy="2468880"/>
           </a:xfrm>
           <a:prstGeom prst="roundRect">
             <a:avLst>
-              <a:gd name="adj" fmla="val 4000"/>
+              <a:gd name="adj" fmla="val 2000"/>
             </a:avLst>
           </a:prstGeom>
           <a:solidFill>
-            <a:srgbClr val="F1F5F9"/>
+            <a:srgbClr val="F5F8FC"/>
           </a:solidFill>
-          <a:ln w="6350">
+          <a:ln w="12700">
             <a:solidFill>
-              <a:srgbClr val="E2E8F0"/>
+              <a:srgbClr val="C0D0E0"/>
             </a:solidFill>
           </a:ln>
           <a:effectLst/>
@@ -3981,14 +3981,14 @@
         </p:nvSpPr>
         <p:spPr>
           <a:xfrm>
-            <a:off x="365760" y="859536"/>
-            <a:ext cx="5409444" cy="36576"/>
+            <a:off x="475488" y="969264"/>
+            <a:ext cx="868680" cy="292608"/>
           </a:xfrm>
           <a:prstGeom prst="rect">
             <a:avLst/>
           </a:prstGeom>
           <a:solidFill>
-            <a:srgbClr val="3B5174"/>
+            <a:srgbClr val="1E293B"/>
           </a:solidFill>
           <a:ln>
             <a:noFill/>
@@ -4025,366 +4025,119 @@
         </p:nvSpPr>
         <p:spPr>
           <a:xfrm>
-            <a:off x="548640" y="1024128"/>
-            <a:ext cx="5043684" cy="219456"/>
-          </a:xfrm>
-          <a:prstGeom prst="rect">
-            <a:avLst/>
-          </a:prstGeom>
-          <a:noFill/>
-        </p:spPr>
-        <p:txBody>
-          <a:bodyPr wrap="square" anchor="t" lIns="36000" rIns="36000" tIns="18000" bIns="18000">
-            <a:spAutoFit/>
-          </a:bodyPr>
-          <a:lstStyle/>
-          <a:p>
-            <a:pPr algn="l"/>
-            <a:r>
-              <a:rPr sz="1120" b="1" i="0">
+            <a:off x="475488" y="969264"/>
+            <a:ext cx="868680" cy="292608"/>
+          </a:xfrm>
+          <a:prstGeom prst="rect">
+            <a:avLst/>
+          </a:prstGeom>
+          <a:noFill/>
+        </p:spPr>
+        <p:txBody>
+          <a:bodyPr wrap="square" anchor="ctr" lIns="36000" rIns="36000" tIns="18000" bIns="18000">
+            <a:spAutoFit/>
+          </a:bodyPr>
+          <a:lstStyle/>
+          <a:p>
+            <a:pPr algn="ctr"/>
+            <a:r>
+              <a:rPr sz="1232" b="1" i="0">
+                <a:solidFill>
+                  <a:srgbClr val="FFFFFF"/>
+                </a:solidFill>
+                <a:latin typeface="Arial"/>
+              </a:rPr>
+              <a:t>Photo</a:t>
+            </a:r>
+          </a:p>
+        </p:txBody>
+      </p:sp>
+      <p:sp>
+        <p:nvSpPr>
+          <p:cNvPr id="13" name="TextBox 12"/>
+          <p:cNvSpPr txBox="1"/>
+          <p:nvPr/>
+        </p:nvSpPr>
+        <p:spPr>
+          <a:xfrm>
+            <a:off x="365760" y="859536"/>
+            <a:ext cx="5409444" cy="2468880"/>
+          </a:xfrm>
+          <a:prstGeom prst="rect">
+            <a:avLst/>
+          </a:prstGeom>
+          <a:noFill/>
+        </p:spPr>
+        <p:txBody>
+          <a:bodyPr wrap="square" anchor="ctr" lIns="36000" rIns="36000" tIns="18000" bIns="18000">
+            <a:spAutoFit/>
+          </a:bodyPr>
+          <a:lstStyle/>
+          <a:p>
+            <a:pPr algn="ctr"/>
+            <a:r>
+              <a:rPr sz="1344" b="0" i="0">
+                <a:solidFill>
+                  <a:srgbClr val="AAB4C0"/>
+                </a:solidFill>
+                <a:latin typeface="Arial"/>
+              </a:rPr>
+              <a:t>(Paste paper figure here)</a:t>
+            </a:r>
+          </a:p>
+        </p:txBody>
+      </p:sp>
+      <p:sp>
+        <p:nvSpPr>
+          <p:cNvPr id="14" name="TextBox 13"/>
+          <p:cNvSpPr txBox="1"/>
+          <p:nvPr/>
+        </p:nvSpPr>
+        <p:spPr>
+          <a:xfrm>
+            <a:off x="365760" y="3364992"/>
+            <a:ext cx="5409444" cy="274320"/>
+          </a:xfrm>
+          <a:prstGeom prst="rect">
+            <a:avLst/>
+          </a:prstGeom>
+          <a:noFill/>
+        </p:spPr>
+        <p:txBody>
+          <a:bodyPr wrap="square" anchor="t" lIns="36000" rIns="36000" tIns="18000" bIns="18000">
+            <a:spAutoFit/>
+          </a:bodyPr>
+          <a:lstStyle/>
+          <a:p>
+            <a:pPr algn="ctr"/>
+            <a:r>
+              <a:rPr sz="1120" b="0" i="1">
                 <a:solidFill>
                   <a:srgbClr val="64748B"/>
                 </a:solidFill>
                 <a:latin typeface="Arial"/>
               </a:rPr>
-              <a:t>THERMAL RESPONSE</a:t>
-            </a:r>
-          </a:p>
-        </p:txBody>
-      </p:sp>
-      <p:sp>
-        <p:nvSpPr>
-          <p:cNvPr id="13" name="TextBox 12"/>
-          <p:cNvSpPr txBox="1"/>
-          <p:nvPr/>
-        </p:nvSpPr>
-        <p:spPr>
-          <a:xfrm>
-            <a:off x="548640" y="1261872"/>
-            <a:ext cx="5043684" cy="329184"/>
-          </a:xfrm>
-          <a:prstGeom prst="rect">
-            <a:avLst/>
-          </a:prstGeom>
-          <a:noFill/>
-        </p:spPr>
-        <p:txBody>
-          <a:bodyPr wrap="square" anchor="t" lIns="36000" rIns="36000" tIns="18000" bIns="18000">
-            <a:spAutoFit/>
-          </a:bodyPr>
-          <a:lstStyle/>
-          <a:p>
-            <a:pPr algn="l"/>
-            <a:r>
-              <a:rPr sz="1680" b="1" i="0">
-                <a:solidFill>
-                  <a:srgbClr val="1E293B"/>
-                </a:solidFill>
-                <a:latin typeface="Arial"/>
-              </a:rPr>
-              <a:t>Inverse Thermal Response (LCST Behavior)</a:t>
-            </a:r>
-          </a:p>
-        </p:txBody>
-      </p:sp>
-      <p:sp>
-        <p:nvSpPr>
-          <p:cNvPr id="14" name="TextBox 13"/>
-          <p:cNvSpPr txBox="1"/>
-          <p:nvPr/>
-        </p:nvSpPr>
-        <p:spPr>
-          <a:xfrm>
-            <a:off x="548640" y="1627632"/>
-            <a:ext cx="182880" cy="274320"/>
-          </a:xfrm>
-          <a:prstGeom prst="rect">
-            <a:avLst/>
-          </a:prstGeom>
-          <a:noFill/>
-        </p:spPr>
-        <p:txBody>
-          <a:bodyPr wrap="square" anchor="t" lIns="36000" rIns="36000" tIns="18000" bIns="18000">
-            <a:spAutoFit/>
-          </a:bodyPr>
-          <a:lstStyle/>
-          <a:p>
-            <a:pPr algn="l"/>
-            <a:r>
-              <a:rPr sz="1344" b="0" i="0">
-                <a:solidFill>
-                  <a:srgbClr val="3B5174"/>
-                </a:solidFill>
-                <a:latin typeface="Arial"/>
-              </a:rPr>
-              <a:t>•</a:t>
-            </a:r>
-          </a:p>
-        </p:txBody>
-      </p:sp>
-      <p:sp>
-        <p:nvSpPr>
-          <p:cNvPr id="15" name="TextBox 14"/>
-          <p:cNvSpPr txBox="1"/>
-          <p:nvPr/>
-        </p:nvSpPr>
-        <p:spPr>
-          <a:xfrm>
-            <a:off x="749808" y="1627632"/>
-            <a:ext cx="4842516" cy="274320"/>
-          </a:xfrm>
-          <a:prstGeom prst="rect">
-            <a:avLst/>
-          </a:prstGeom>
-          <a:noFill/>
-        </p:spPr>
-        <p:txBody>
-          <a:bodyPr wrap="square" anchor="t" lIns="36000" rIns="36000" tIns="18000" bIns="18000">
-            <a:spAutoFit/>
-          </a:bodyPr>
-          <a:lstStyle/>
-          <a:p>
-            <a:pPr algn="l"/>
-            <a:r>
-              <a:rPr sz="1344" b="0" i="0">
-                <a:solidFill>
-                  <a:srgbClr val="475569"/>
-                </a:solidFill>
-                <a:latin typeface="Arial"/>
-              </a:rPr>
-              <a:t>MC dissolves in cold water (&lt;20°C) to form a low-viscosity solution</a:t>
-            </a:r>
-          </a:p>
-        </p:txBody>
-      </p:sp>
-      <p:sp>
-        <p:nvSpPr>
-          <p:cNvPr id="16" name="TextBox 15"/>
-          <p:cNvSpPr txBox="1"/>
-          <p:nvPr/>
-        </p:nvSpPr>
-        <p:spPr>
-          <a:xfrm>
-            <a:off x="548640" y="1901952"/>
-            <a:ext cx="182880" cy="274320"/>
-          </a:xfrm>
-          <a:prstGeom prst="rect">
-            <a:avLst/>
-          </a:prstGeom>
-          <a:noFill/>
-        </p:spPr>
-        <p:txBody>
-          <a:bodyPr wrap="square" anchor="t" lIns="36000" rIns="36000" tIns="18000" bIns="18000">
-            <a:spAutoFit/>
-          </a:bodyPr>
-          <a:lstStyle/>
-          <a:p>
-            <a:pPr algn="l"/>
-            <a:r>
-              <a:rPr sz="1344" b="0" i="0">
-                <a:solidFill>
-                  <a:srgbClr val="3B5174"/>
-                </a:solidFill>
-                <a:latin typeface="Arial"/>
-              </a:rPr>
-              <a:t>•</a:t>
-            </a:r>
-          </a:p>
-        </p:txBody>
-      </p:sp>
-      <p:sp>
-        <p:nvSpPr>
-          <p:cNvPr id="17" name="TextBox 16"/>
-          <p:cNvSpPr txBox="1"/>
-          <p:nvPr/>
-        </p:nvSpPr>
-        <p:spPr>
-          <a:xfrm>
-            <a:off x="749808" y="1901952"/>
-            <a:ext cx="4842516" cy="274320"/>
-          </a:xfrm>
-          <a:prstGeom prst="rect">
-            <a:avLst/>
-          </a:prstGeom>
-          <a:noFill/>
-        </p:spPr>
-        <p:txBody>
-          <a:bodyPr wrap="square" anchor="t" lIns="36000" rIns="36000" tIns="18000" bIns="18000">
-            <a:spAutoFit/>
-          </a:bodyPr>
-          <a:lstStyle/>
-          <a:p>
-            <a:pPr algn="l"/>
-            <a:r>
-              <a:rPr sz="1344" b="0" i="0">
-                <a:solidFill>
-                  <a:srgbClr val="475569"/>
-                </a:solidFill>
-                <a:latin typeface="Arial"/>
-              </a:rPr>
-              <a:t>Gelation above LCST upon heating</a:t>
-            </a:r>
-          </a:p>
-        </p:txBody>
-      </p:sp>
-      <p:sp>
-        <p:nvSpPr>
-          <p:cNvPr id="18" name="TextBox 17"/>
-          <p:cNvSpPr txBox="1"/>
-          <p:nvPr/>
-        </p:nvSpPr>
-        <p:spPr>
-          <a:xfrm>
-            <a:off x="548640" y="2176272"/>
-            <a:ext cx="182880" cy="274320"/>
-          </a:xfrm>
-          <a:prstGeom prst="rect">
-            <a:avLst/>
-          </a:prstGeom>
-          <a:noFill/>
-        </p:spPr>
-        <p:txBody>
-          <a:bodyPr wrap="square" anchor="t" lIns="36000" rIns="36000" tIns="18000" bIns="18000">
-            <a:spAutoFit/>
-          </a:bodyPr>
-          <a:lstStyle/>
-          <a:p>
-            <a:pPr algn="l"/>
-            <a:r>
-              <a:rPr sz="1344" b="0" i="0">
-                <a:solidFill>
-                  <a:srgbClr val="3B5174"/>
-                </a:solidFill>
-                <a:latin typeface="Arial"/>
-              </a:rPr>
-              <a:t>•</a:t>
-            </a:r>
-          </a:p>
-        </p:txBody>
-      </p:sp>
-      <p:sp>
-        <p:nvSpPr>
-          <p:cNvPr id="19" name="TextBox 18"/>
-          <p:cNvSpPr txBox="1"/>
-          <p:nvPr/>
-        </p:nvSpPr>
-        <p:spPr>
-          <a:xfrm>
-            <a:off x="749808" y="2176272"/>
-            <a:ext cx="4842516" cy="274320"/>
-          </a:xfrm>
-          <a:prstGeom prst="rect">
-            <a:avLst/>
-          </a:prstGeom>
-          <a:noFill/>
-        </p:spPr>
-        <p:txBody>
-          <a:bodyPr wrap="square" anchor="t" lIns="36000" rIns="36000" tIns="18000" bIns="18000">
-            <a:spAutoFit/>
-          </a:bodyPr>
-          <a:lstStyle/>
-          <a:p>
-            <a:pPr algn="l"/>
-            <a:r>
-              <a:rPr sz="1344" b="0" i="0">
-                <a:solidFill>
-                  <a:srgbClr val="475569"/>
-                </a:solidFill>
-                <a:latin typeface="Arial"/>
-              </a:rPr>
-              <a:t>MC gelation onset: approx. 50–60°C (concentration-dependent)</a:t>
-            </a:r>
-          </a:p>
-        </p:txBody>
-      </p:sp>
-      <p:sp>
-        <p:nvSpPr>
-          <p:cNvPr id="20" name="TextBox 19"/>
-          <p:cNvSpPr txBox="1"/>
-          <p:nvPr/>
-        </p:nvSpPr>
-        <p:spPr>
-          <a:xfrm>
-            <a:off x="548640" y="2450592"/>
-            <a:ext cx="182880" cy="274320"/>
-          </a:xfrm>
-          <a:prstGeom prst="rect">
-            <a:avLst/>
-          </a:prstGeom>
-          <a:noFill/>
-        </p:spPr>
-        <p:txBody>
-          <a:bodyPr wrap="square" anchor="t" lIns="36000" rIns="36000" tIns="18000" bIns="18000">
-            <a:spAutoFit/>
-          </a:bodyPr>
-          <a:lstStyle/>
-          <a:p>
-            <a:pPr algn="l"/>
-            <a:r>
-              <a:rPr sz="1344" b="0" i="0">
-                <a:solidFill>
-                  <a:srgbClr val="3B5174"/>
-                </a:solidFill>
-                <a:latin typeface="Arial"/>
-              </a:rPr>
-              <a:t>•</a:t>
-            </a:r>
-          </a:p>
-        </p:txBody>
-      </p:sp>
-      <p:sp>
-        <p:nvSpPr>
-          <p:cNvPr id="21" name="TextBox 20"/>
-          <p:cNvSpPr txBox="1"/>
-          <p:nvPr/>
-        </p:nvSpPr>
-        <p:spPr>
-          <a:xfrm>
-            <a:off x="749808" y="2450592"/>
-            <a:ext cx="4842516" cy="274320"/>
-          </a:xfrm>
-          <a:prstGeom prst="rect">
-            <a:avLst/>
-          </a:prstGeom>
-          <a:noFill/>
-        </p:spPr>
-        <p:txBody>
-          <a:bodyPr wrap="square" anchor="t" lIns="36000" rIns="36000" tIns="18000" bIns="18000">
-            <a:spAutoFit/>
-          </a:bodyPr>
-          <a:lstStyle/>
-          <a:p>
-            <a:pPr algn="l"/>
-            <a:r>
-              <a:rPr sz="1344" b="0" i="0">
-                <a:solidFill>
-                  <a:srgbClr val="475569"/>
-                </a:solidFill>
-                <a:latin typeface="Arial"/>
-              </a:rPr>
-              <a:t>Liquid at room temperature → instantaneous gelation upon flame contact</a:t>
-            </a:r>
-          </a:p>
-        </p:txBody>
-      </p:sp>
-      <p:sp>
-        <p:nvSpPr>
-          <p:cNvPr id="22" name="Rounded Rectangle 21"/>
+              <a:t>MC sol (room temp) → gel (after heating) — visual comparison</a:t>
+            </a:r>
+          </a:p>
+        </p:txBody>
+      </p:sp>
+      <p:sp>
+        <p:nvSpPr>
+          <p:cNvPr id="15" name="Rectangle 14"/>
           <p:cNvSpPr/>
           <p:nvPr/>
         </p:nvSpPr>
         <p:spPr>
           <a:xfrm>
-            <a:off x="365760" y="4242816"/>
-            <a:ext cx="5409444" cy="777240"/>
-          </a:xfrm>
-          <a:prstGeom prst="roundRect">
-            <a:avLst>
-              <a:gd name="adj" fmla="val 4000"/>
-            </a:avLst>
+            <a:off x="365760" y="3511296"/>
+            <a:ext cx="4868499" cy="13716"/>
+          </a:xfrm>
+          <a:prstGeom prst="rect">
+            <a:avLst/>
           </a:prstGeom>
           <a:solidFill>
-            <a:srgbClr val="F8FAFC"/>
+            <a:srgbClr val="E2E8F0"/>
           </a:solidFill>
           <a:ln>
             <a:noFill/>
@@ -4415,121 +4168,217 @@
       </p:sp>
       <p:sp>
         <p:nvSpPr>
-          <p:cNvPr id="23" name="Rectangle 22"/>
-          <p:cNvSpPr/>
-          <p:nvPr/>
-        </p:nvSpPr>
-        <p:spPr>
-          <a:xfrm>
-            <a:off x="365760" y="4242816"/>
-            <a:ext cx="54864" cy="777240"/>
-          </a:xfrm>
-          <a:prstGeom prst="rect">
-            <a:avLst/>
-          </a:prstGeom>
-          <a:solidFill>
-            <a:srgbClr val="3B5174"/>
-          </a:solidFill>
-          <a:ln>
-            <a:noFill/>
-          </a:ln>
-          <a:effectLst/>
-        </p:spPr>
-        <p:style>
-          <a:lnRef idx="1">
-            <a:schemeClr val="accent1"/>
-          </a:lnRef>
-          <a:fillRef idx="3">
-            <a:schemeClr val="accent1"/>
-          </a:fillRef>
-          <a:effectRef idx="2">
-            <a:schemeClr val="accent1"/>
-          </a:effectRef>
-          <a:fontRef idx="minor">
-            <a:schemeClr val="lt1"/>
-          </a:fontRef>
-        </p:style>
-        <p:txBody>
-          <a:bodyPr rtlCol="0" anchor="ctr"/>
-          <a:lstStyle/>
-          <a:p>
-            <a:pPr algn="ctr"/>
-          </a:p>
-        </p:txBody>
-      </p:sp>
-      <p:sp>
-        <p:nvSpPr>
-          <p:cNvPr id="24" name="TextBox 23"/>
-          <p:cNvSpPr txBox="1"/>
-          <p:nvPr/>
-        </p:nvSpPr>
-        <p:spPr>
-          <a:xfrm>
-            <a:off x="548640" y="4242816"/>
-            <a:ext cx="365760" cy="777240"/>
-          </a:xfrm>
-          <a:prstGeom prst="rect">
-            <a:avLst/>
-          </a:prstGeom>
-          <a:noFill/>
-        </p:spPr>
-        <p:txBody>
-          <a:bodyPr wrap="square" anchor="ctr" lIns="36000" rIns="36000" tIns="18000" bIns="18000">
-            <a:spAutoFit/>
-          </a:bodyPr>
-          <a:lstStyle/>
-          <a:p>
-            <a:pPr algn="l"/>
-            <a:r>
-              <a:rPr sz="1568" b="0" i="0">
+          <p:cNvPr id="16" name="TextBox 15"/>
+          <p:cNvSpPr txBox="1"/>
+          <p:nvPr/>
+        </p:nvSpPr>
+        <p:spPr>
+          <a:xfrm>
+            <a:off x="365760" y="3675888"/>
+            <a:ext cx="804672" cy="274320"/>
+          </a:xfrm>
+          <a:prstGeom prst="rect">
+            <a:avLst/>
+          </a:prstGeom>
+          <a:noFill/>
+        </p:spPr>
+        <p:txBody>
+          <a:bodyPr wrap="square" anchor="t" lIns="36000" rIns="36000" tIns="18000" bIns="18000">
+            <a:spAutoFit/>
+          </a:bodyPr>
+          <a:lstStyle/>
+          <a:p>
+            <a:pPr algn="l"/>
+            <a:r>
+              <a:rPr sz="1120" b="1" i="0">
                 <a:solidFill>
                   <a:srgbClr val="3B5174"/>
                 </a:solidFill>
                 <a:latin typeface="Arial"/>
               </a:rPr>
-              <a:t>🔥</a:t>
-            </a:r>
-          </a:p>
-        </p:txBody>
-      </p:sp>
-      <p:sp>
-        <p:nvSpPr>
-          <p:cNvPr id="25" name="TextBox 24"/>
-          <p:cNvSpPr txBox="1"/>
-          <p:nvPr/>
-        </p:nvSpPr>
-        <p:spPr>
-          <a:xfrm>
-            <a:off x="960120" y="4242816"/>
-            <a:ext cx="4723644" cy="777240"/>
-          </a:xfrm>
-          <a:prstGeom prst="rect">
-            <a:avLst/>
-          </a:prstGeom>
-          <a:noFill/>
-        </p:spPr>
-        <p:txBody>
-          <a:bodyPr wrap="square" anchor="ctr" lIns="36000" rIns="36000" tIns="18000" bIns="18000">
-            <a:spAutoFit/>
-          </a:bodyPr>
-          <a:lstStyle/>
-          <a:p>
-            <a:pPr algn="l"/>
-            <a:r>
-              <a:rPr sz="1456" b="1" i="0">
-                <a:solidFill>
-                  <a:srgbClr val="1E293B"/>
-                </a:solidFill>
-                <a:latin typeface="Arial"/>
-              </a:rPr>
-              <a:t>MC gelates in the initial stage of flame contact → maintains foamed structure while CSP is fixed</a:t>
-            </a:r>
-          </a:p>
-        </p:txBody>
-      </p:sp>
-      <p:sp>
-        <p:nvSpPr>
-          <p:cNvPr id="26" name="Rounded Rectangle 25"/>
+              <a:t>LCST</a:t>
+            </a:r>
+          </a:p>
+        </p:txBody>
+      </p:sp>
+      <p:sp>
+        <p:nvSpPr>
+          <p:cNvPr id="17" name="TextBox 16"/>
+          <p:cNvSpPr txBox="1"/>
+          <p:nvPr/>
+        </p:nvSpPr>
+        <p:spPr>
+          <a:xfrm>
+            <a:off x="1207008" y="3675888"/>
+            <a:ext cx="4568196" cy="274320"/>
+          </a:xfrm>
+          <a:prstGeom prst="rect">
+            <a:avLst/>
+          </a:prstGeom>
+          <a:noFill/>
+        </p:spPr>
+        <p:txBody>
+          <a:bodyPr wrap="square" anchor="t" lIns="36000" rIns="36000" tIns="18000" bIns="18000">
+            <a:spAutoFit/>
+          </a:bodyPr>
+          <a:lstStyle/>
+          <a:p>
+            <a:pPr algn="l"/>
+            <a:r>
+              <a:rPr sz="1344" b="0" i="0">
+                <a:solidFill>
+                  <a:srgbClr val="334155"/>
+                </a:solidFill>
+                <a:latin typeface="Arial"/>
+              </a:rPr>
+              <a:t>~55°C gelation onset (1 wt% aqueous solution)</a:t>
+            </a:r>
+          </a:p>
+        </p:txBody>
+      </p:sp>
+      <p:sp>
+        <p:nvSpPr>
+          <p:cNvPr id="18" name="TextBox 17"/>
+          <p:cNvSpPr txBox="1"/>
+          <p:nvPr/>
+        </p:nvSpPr>
+        <p:spPr>
+          <a:xfrm>
+            <a:off x="365760" y="4041648"/>
+            <a:ext cx="804672" cy="274320"/>
+          </a:xfrm>
+          <a:prstGeom prst="rect">
+            <a:avLst/>
+          </a:prstGeom>
+          <a:noFill/>
+        </p:spPr>
+        <p:txBody>
+          <a:bodyPr wrap="square" anchor="t" lIns="36000" rIns="36000" tIns="18000" bIns="18000">
+            <a:spAutoFit/>
+          </a:bodyPr>
+          <a:lstStyle/>
+          <a:p>
+            <a:pPr algn="l"/>
+            <a:r>
+              <a:rPr sz="1120" b="1" i="0">
+                <a:solidFill>
+                  <a:srgbClr val="3B5174"/>
+                </a:solidFill>
+                <a:latin typeface="Arial"/>
+              </a:rPr>
+              <a:t>Decomp.</a:t>
+            </a:r>
+          </a:p>
+        </p:txBody>
+      </p:sp>
+      <p:sp>
+        <p:nvSpPr>
+          <p:cNvPr id="19" name="TextBox 18"/>
+          <p:cNvSpPr txBox="1"/>
+          <p:nvPr/>
+        </p:nvSpPr>
+        <p:spPr>
+          <a:xfrm>
+            <a:off x="1207008" y="4041648"/>
+            <a:ext cx="4568196" cy="274320"/>
+          </a:xfrm>
+          <a:prstGeom prst="rect">
+            <a:avLst/>
+          </a:prstGeom>
+          <a:noFill/>
+        </p:spPr>
+        <p:txBody>
+          <a:bodyPr wrap="square" anchor="t" lIns="36000" rIns="36000" tIns="18000" bIns="18000">
+            <a:spAutoFit/>
+          </a:bodyPr>
+          <a:lstStyle/>
+          <a:p>
+            <a:pPr algn="l"/>
+            <a:r>
+              <a:rPr sz="1344" b="0" i="0">
+                <a:solidFill>
+                  <a:srgbClr val="334155"/>
+                </a:solidFill>
+                <a:latin typeface="Arial"/>
+              </a:rPr>
+              <a:t>~300°C thermal decomposition of organic component</a:t>
+            </a:r>
+          </a:p>
+        </p:txBody>
+      </p:sp>
+      <p:sp>
+        <p:nvSpPr>
+          <p:cNvPr id="20" name="TextBox 19"/>
+          <p:cNvSpPr txBox="1"/>
+          <p:nvPr/>
+        </p:nvSpPr>
+        <p:spPr>
+          <a:xfrm>
+            <a:off x="365760" y="4407408"/>
+            <a:ext cx="804672" cy="274320"/>
+          </a:xfrm>
+          <a:prstGeom prst="rect">
+            <a:avLst/>
+          </a:prstGeom>
+          <a:noFill/>
+        </p:spPr>
+        <p:txBody>
+          <a:bodyPr wrap="square" anchor="t" lIns="36000" rIns="36000" tIns="18000" bIns="18000">
+            <a:spAutoFit/>
+          </a:bodyPr>
+          <a:lstStyle/>
+          <a:p>
+            <a:pPr algn="l"/>
+            <a:r>
+              <a:rPr sz="1120" b="1" i="0">
+                <a:solidFill>
+                  <a:srgbClr val="3B5174"/>
+                </a:solidFill>
+                <a:latin typeface="Arial"/>
+              </a:rPr>
+              <a:t>Design</a:t>
+            </a:r>
+          </a:p>
+        </p:txBody>
+      </p:sp>
+      <p:sp>
+        <p:nvSpPr>
+          <p:cNvPr id="21" name="TextBox 20"/>
+          <p:cNvSpPr txBox="1"/>
+          <p:nvPr/>
+        </p:nvSpPr>
+        <p:spPr>
+          <a:xfrm>
+            <a:off x="1207008" y="4407408"/>
+            <a:ext cx="4568196" cy="274320"/>
+          </a:xfrm>
+          <a:prstGeom prst="rect">
+            <a:avLst/>
+          </a:prstGeom>
+          <a:noFill/>
+        </p:spPr>
+        <p:txBody>
+          <a:bodyPr wrap="square" anchor="t" lIns="36000" rIns="36000" tIns="18000" bIns="18000">
+            <a:spAutoFit/>
+          </a:bodyPr>
+          <a:lstStyle/>
+          <a:p>
+            <a:pPr algn="l"/>
+            <a:r>
+              <a:rPr sz="1344" b="0" i="0">
+                <a:solidFill>
+                  <a:srgbClr val="334155"/>
+                </a:solidFill>
+                <a:latin typeface="Arial"/>
+              </a:rPr>
+              <a:t>Liquid at room temp → instant gel on flame contact</a:t>
+            </a:r>
+          </a:p>
+        </p:txBody>
+      </p:sp>
+      <p:sp>
+        <p:nvSpPr>
+          <p:cNvPr id="22" name="Rounded Rectangle 21"/>
           <p:cNvSpPr/>
           <p:nvPr/>
         </p:nvSpPr>
@@ -4577,7 +4426,7 @@
       </p:sp>
       <p:sp>
         <p:nvSpPr>
-          <p:cNvPr id="27" name="TextBox 26"/>
+          <p:cNvPr id="23" name="TextBox 22"/>
           <p:cNvSpPr txBox="1"/>
           <p:nvPr/>
         </p:nvSpPr>
@@ -4612,7 +4461,7 @@
       </p:sp>
       <p:sp>
         <p:nvSpPr>
-          <p:cNvPr id="28" name="TextBox 27"/>
+          <p:cNvPr id="24" name="TextBox 23"/>
           <p:cNvSpPr txBox="1"/>
           <p:nvPr/>
         </p:nvSpPr>
@@ -4647,7 +4496,7 @@
       </p:sp>
       <p:sp>
         <p:nvSpPr>
-          <p:cNvPr id="29" name="TextBox 28"/>
+          <p:cNvPr id="25" name="TextBox 24"/>
           <p:cNvSpPr txBox="1"/>
           <p:nvPr/>
         </p:nvSpPr>
@@ -4682,7 +4531,7 @@
       </p:sp>
       <p:sp>
         <p:nvSpPr>
-          <p:cNvPr id="30" name="Rounded Rectangle 29"/>
+          <p:cNvPr id="26" name="Rounded Rectangle 25"/>
           <p:cNvSpPr/>
           <p:nvPr/>
         </p:nvSpPr>
@@ -4730,7 +4579,7 @@
       </p:sp>
       <p:sp>
         <p:nvSpPr>
-          <p:cNvPr id="31" name="TextBox 30"/>
+          <p:cNvPr id="27" name="TextBox 26"/>
           <p:cNvSpPr txBox="1"/>
           <p:nvPr/>
         </p:nvSpPr>
@@ -4765,7 +4614,7 @@
       </p:sp>
       <p:sp>
         <p:nvSpPr>
-          <p:cNvPr id="32" name="TextBox 31"/>
+          <p:cNvPr id="28" name="TextBox 27"/>
           <p:cNvSpPr txBox="1"/>
           <p:nvPr/>
         </p:nvSpPr>
@@ -4800,7 +4649,7 @@
       </p:sp>
       <p:sp>
         <p:nvSpPr>
-          <p:cNvPr id="33" name="TextBox 32"/>
+          <p:cNvPr id="29" name="TextBox 28"/>
           <p:cNvSpPr txBox="1"/>
           <p:nvPr/>
         </p:nvSpPr>
@@ -4835,7 +4684,7 @@
       </p:sp>
       <p:sp>
         <p:nvSpPr>
-          <p:cNvPr id="34" name="Rounded Rectangle 33"/>
+          <p:cNvPr id="30" name="Rounded Rectangle 29"/>
           <p:cNvSpPr/>
           <p:nvPr/>
         </p:nvSpPr>
@@ -4883,7 +4732,7 @@
       </p:sp>
       <p:sp>
         <p:nvSpPr>
-          <p:cNvPr id="35" name="TextBox 34"/>
+          <p:cNvPr id="31" name="TextBox 30"/>
           <p:cNvSpPr txBox="1"/>
           <p:nvPr/>
         </p:nvSpPr>
@@ -4918,7 +4767,7 @@
       </p:sp>
       <p:sp>
         <p:nvSpPr>
-          <p:cNvPr id="36" name="TextBox 35"/>
+          <p:cNvPr id="32" name="TextBox 31"/>
           <p:cNvSpPr txBox="1"/>
           <p:nvPr/>
         </p:nvSpPr>
@@ -4953,7 +4802,7 @@
       </p:sp>
       <p:sp>
         <p:nvSpPr>
-          <p:cNvPr id="37" name="TextBox 36"/>
+          <p:cNvPr id="33" name="TextBox 32"/>
           <p:cNvSpPr txBox="1"/>
           <p:nvPr/>
         </p:nvSpPr>
@@ -4988,7 +4837,7 @@
       </p:sp>
       <p:sp>
         <p:nvSpPr>
-          <p:cNvPr id="38" name="Rounded Rectangle 37"/>
+          <p:cNvPr id="34" name="Rounded Rectangle 33"/>
           <p:cNvSpPr/>
           <p:nvPr/>
         </p:nvSpPr>
@@ -5034,7 +4883,7 @@
       </p:sp>
       <p:sp>
         <p:nvSpPr>
-          <p:cNvPr id="39" name="TextBox 38"/>
+          <p:cNvPr id="35" name="TextBox 34"/>
           <p:cNvSpPr txBox="1"/>
           <p:nvPr/>
         </p:nvSpPr>
@@ -5069,7 +4918,7 @@
       </p:sp>
       <p:sp>
         <p:nvSpPr>
-          <p:cNvPr id="40" name="Rounded Rectangle 39"/>
+          <p:cNvPr id="36" name="Rounded Rectangle 35"/>
           <p:cNvSpPr/>
           <p:nvPr/>
         </p:nvSpPr>
@@ -5115,7 +4964,7 @@
       </p:sp>
       <p:sp>
         <p:nvSpPr>
-          <p:cNvPr id="41" name="TextBox 40"/>
+          <p:cNvPr id="37" name="TextBox 36"/>
           <p:cNvSpPr txBox="1"/>
           <p:nvPr/>
         </p:nvSpPr>
@@ -5150,7 +4999,7 @@
       </p:sp>
       <p:sp>
         <p:nvSpPr>
-          <p:cNvPr id="42" name="TextBox 41"/>
+          <p:cNvPr id="38" name="TextBox 37"/>
           <p:cNvSpPr txBox="1"/>
           <p:nvPr/>
         </p:nvSpPr>
@@ -5185,7 +5034,7 @@
       </p:sp>
       <p:sp>
         <p:nvSpPr>
-          <p:cNvPr id="43" name="TextBox 42"/>
+          <p:cNvPr id="39" name="TextBox 38"/>
           <p:cNvSpPr txBox="1"/>
           <p:nvPr/>
         </p:nvSpPr>
@@ -5220,7 +5069,7 @@
       </p:sp>
       <p:sp>
         <p:nvSpPr>
-          <p:cNvPr id="44" name="TextBox 43"/>
+          <p:cNvPr id="40" name="TextBox 39"/>
           <p:cNvSpPr txBox="1"/>
           <p:nvPr/>
         </p:nvSpPr>
@@ -5255,7 +5104,7 @@
       </p:sp>
       <p:sp>
         <p:nvSpPr>
-          <p:cNvPr id="45" name="Rounded Rectangle 44"/>
+          <p:cNvPr id="41" name="Rounded Rectangle 40"/>
           <p:cNvSpPr/>
           <p:nvPr/>
         </p:nvSpPr>
@@ -5301,7 +5150,7 @@
       </p:sp>
       <p:sp>
         <p:nvSpPr>
-          <p:cNvPr id="46" name="TextBox 45"/>
+          <p:cNvPr id="42" name="TextBox 41"/>
           <p:cNvSpPr txBox="1"/>
           <p:nvPr/>
         </p:nvSpPr>
@@ -5336,7 +5185,7 @@
       </p:sp>
       <p:sp>
         <p:nvSpPr>
-          <p:cNvPr id="47" name="TextBox 46"/>
+          <p:cNvPr id="43" name="TextBox 42"/>
           <p:cNvSpPr txBox="1"/>
           <p:nvPr/>
         </p:nvSpPr>
@@ -5371,7 +5220,7 @@
       </p:sp>
       <p:sp>
         <p:nvSpPr>
-          <p:cNvPr id="48" name="TextBox 47"/>
+          <p:cNvPr id="44" name="TextBox 43"/>
           <p:cNvSpPr txBox="1"/>
           <p:nvPr/>
         </p:nvSpPr>
@@ -5406,7 +5255,7 @@
       </p:sp>
       <p:sp>
         <p:nvSpPr>
-          <p:cNvPr id="49" name="TextBox 48"/>
+          <p:cNvPr id="45" name="TextBox 44"/>
           <p:cNvSpPr txBox="1"/>
           <p:nvPr/>
         </p:nvSpPr>
@@ -5441,7 +5290,7 @@
       </p:sp>
       <p:sp>
         <p:nvSpPr>
-          <p:cNvPr id="50" name="Rounded Rectangle 49"/>
+          <p:cNvPr id="46" name="Rounded Rectangle 45"/>
           <p:cNvSpPr/>
           <p:nvPr/>
         </p:nvSpPr>
@@ -5487,7 +5336,7 @@
       </p:sp>
       <p:sp>
         <p:nvSpPr>
-          <p:cNvPr id="51" name="TextBox 50"/>
+          <p:cNvPr id="47" name="TextBox 46"/>
           <p:cNvSpPr txBox="1"/>
           <p:nvPr/>
         </p:nvSpPr>
@@ -5522,7 +5371,7 @@
       </p:sp>
       <p:sp>
         <p:nvSpPr>
-          <p:cNvPr id="52" name="TextBox 51"/>
+          <p:cNvPr id="48" name="TextBox 47"/>
           <p:cNvSpPr txBox="1"/>
           <p:nvPr/>
         </p:nvSpPr>
@@ -5557,7 +5406,7 @@
       </p:sp>
       <p:sp>
         <p:nvSpPr>
-          <p:cNvPr id="53" name="TextBox 52"/>
+          <p:cNvPr id="49" name="TextBox 48"/>
           <p:cNvSpPr txBox="1"/>
           <p:nvPr/>
         </p:nvSpPr>
@@ -5592,7 +5441,7 @@
       </p:sp>
       <p:sp>
         <p:nvSpPr>
-          <p:cNvPr id="54" name="TextBox 53"/>
+          <p:cNvPr id="50" name="TextBox 49"/>
           <p:cNvSpPr txBox="1"/>
           <p:nvPr/>
         </p:nvSpPr>
@@ -5627,7 +5476,7 @@
       </p:sp>
       <p:sp>
         <p:nvSpPr>
-          <p:cNvPr id="55" name="Rounded Rectangle 54"/>
+          <p:cNvPr id="51" name="Rounded Rectangle 50"/>
           <p:cNvSpPr/>
           <p:nvPr/>
         </p:nvSpPr>
@@ -5673,7 +5522,7 @@
       </p:sp>
       <p:sp>
         <p:nvSpPr>
-          <p:cNvPr id="56" name="TextBox 55"/>
+          <p:cNvPr id="52" name="TextBox 51"/>
           <p:cNvSpPr txBox="1"/>
           <p:nvPr/>
         </p:nvSpPr>
@@ -5708,7 +5557,7 @@
       </p:sp>
       <p:sp>
         <p:nvSpPr>
-          <p:cNvPr id="57" name="TextBox 56"/>
+          <p:cNvPr id="53" name="TextBox 52"/>
           <p:cNvSpPr txBox="1"/>
           <p:nvPr/>
         </p:nvSpPr>
@@ -5743,7 +5592,7 @@
       </p:sp>
       <p:sp>
         <p:nvSpPr>
-          <p:cNvPr id="58" name="TextBox 57"/>
+          <p:cNvPr id="54" name="TextBox 53"/>
           <p:cNvSpPr txBox="1"/>
           <p:nvPr/>
         </p:nvSpPr>
@@ -6128,19 +5977,19 @@
         <p:spPr>
           <a:xfrm>
             <a:off x="365760" y="859536"/>
-            <a:ext cx="5647791" cy="3840480"/>
+            <a:ext cx="5647791" cy="2194560"/>
           </a:xfrm>
           <a:prstGeom prst="roundRect">
             <a:avLst>
-              <a:gd name="adj" fmla="val 4000"/>
+              <a:gd name="adj" fmla="val 2000"/>
             </a:avLst>
           </a:prstGeom>
           <a:solidFill>
-            <a:srgbClr val="F1F5F9"/>
+            <a:srgbClr val="F5F8FC"/>
           </a:solidFill>
-          <a:ln w="6350">
+          <a:ln w="12700">
             <a:solidFill>
-              <a:srgbClr val="E2E8F0"/>
+              <a:srgbClr val="C0D0E0"/>
             </a:solidFill>
           </a:ln>
           <a:effectLst/>
@@ -6175,8 +6024,1030 @@
         </p:nvSpPr>
         <p:spPr>
           <a:xfrm>
+            <a:off x="475488" y="969264"/>
+            <a:ext cx="868680" cy="292608"/>
+          </a:xfrm>
+          <a:prstGeom prst="rect">
+            <a:avLst/>
+          </a:prstGeom>
+          <a:solidFill>
+            <a:srgbClr val="1E293B"/>
+          </a:solidFill>
+          <a:ln>
+            <a:noFill/>
+          </a:ln>
+          <a:effectLst/>
+        </p:spPr>
+        <p:style>
+          <a:lnRef idx="1">
+            <a:schemeClr val="accent1"/>
+          </a:lnRef>
+          <a:fillRef idx="3">
+            <a:schemeClr val="accent1"/>
+          </a:fillRef>
+          <a:effectRef idx="2">
+            <a:schemeClr val="accent1"/>
+          </a:effectRef>
+          <a:fontRef idx="minor">
+            <a:schemeClr val="lt1"/>
+          </a:fontRef>
+        </p:style>
+        <p:txBody>
+          <a:bodyPr rtlCol="0" anchor="ctr"/>
+          <a:lstStyle/>
+          <a:p>
+            <a:pPr algn="ctr"/>
+          </a:p>
+        </p:txBody>
+      </p:sp>
+      <p:sp>
+        <p:nvSpPr>
+          <p:cNvPr id="12" name="TextBox 11"/>
+          <p:cNvSpPr txBox="1"/>
+          <p:nvPr/>
+        </p:nvSpPr>
+        <p:spPr>
+          <a:xfrm>
+            <a:off x="475488" y="969264"/>
+            <a:ext cx="868680" cy="292608"/>
+          </a:xfrm>
+          <a:prstGeom prst="rect">
+            <a:avLst/>
+          </a:prstGeom>
+          <a:noFill/>
+        </p:spPr>
+        <p:txBody>
+          <a:bodyPr wrap="square" anchor="ctr" lIns="36000" rIns="36000" tIns="18000" bIns="18000">
+            <a:spAutoFit/>
+          </a:bodyPr>
+          <a:lstStyle/>
+          <a:p>
+            <a:pPr algn="ctr"/>
+            <a:r>
+              <a:rPr sz="1232" b="1" i="0">
+                <a:solidFill>
+                  <a:srgbClr val="FFFFFF"/>
+                </a:solidFill>
+                <a:latin typeface="Arial"/>
+              </a:rPr>
+              <a:t>TEM</a:t>
+            </a:r>
+          </a:p>
+        </p:txBody>
+      </p:sp>
+      <p:sp>
+        <p:nvSpPr>
+          <p:cNvPr id="13" name="TextBox 12"/>
+          <p:cNvSpPr txBox="1"/>
+          <p:nvPr/>
+        </p:nvSpPr>
+        <p:spPr>
+          <a:xfrm>
             <a:off x="365760" y="859536"/>
-            <a:ext cx="5647791" cy="36576"/>
+            <a:ext cx="5647791" cy="2194560"/>
+          </a:xfrm>
+          <a:prstGeom prst="rect">
+            <a:avLst/>
+          </a:prstGeom>
+          <a:noFill/>
+        </p:spPr>
+        <p:txBody>
+          <a:bodyPr wrap="square" anchor="ctr" lIns="36000" rIns="36000" tIns="18000" bIns="18000">
+            <a:spAutoFit/>
+          </a:bodyPr>
+          <a:lstStyle/>
+          <a:p>
+            <a:pPr algn="ctr"/>
+            <a:r>
+              <a:rPr sz="1344" b="0" i="0">
+                <a:solidFill>
+                  <a:srgbClr val="AAB4C0"/>
+                </a:solidFill>
+                <a:latin typeface="Arial"/>
+              </a:rPr>
+              <a:t>(Paste paper figure here)</a:t>
+            </a:r>
+          </a:p>
+        </p:txBody>
+      </p:sp>
+      <p:sp>
+        <p:nvSpPr>
+          <p:cNvPr id="14" name="TextBox 13"/>
+          <p:cNvSpPr txBox="1"/>
+          <p:nvPr/>
+        </p:nvSpPr>
+        <p:spPr>
+          <a:xfrm>
+            <a:off x="365760" y="3090672"/>
+            <a:ext cx="5647791" cy="274320"/>
+          </a:xfrm>
+          <a:prstGeom prst="rect">
+            <a:avLst/>
+          </a:prstGeom>
+          <a:noFill/>
+        </p:spPr>
+        <p:txBody>
+          <a:bodyPr wrap="square" anchor="t" lIns="36000" rIns="36000" tIns="18000" bIns="18000">
+            <a:spAutoFit/>
+          </a:bodyPr>
+          <a:lstStyle/>
+          <a:p>
+            <a:pPr algn="ctr"/>
+            <a:r>
+              <a:rPr sz="1120" b="0" i="1">
+                <a:solidFill>
+                  <a:srgbClr val="64748B"/>
+                </a:solidFill>
+                <a:latin typeface="Arial"/>
+              </a:rPr>
+              <a:t>CSP particles (22 nm, monodisperse)</a:t>
+            </a:r>
+          </a:p>
+        </p:txBody>
+      </p:sp>
+      <p:sp>
+        <p:nvSpPr>
+          <p:cNvPr id="15" name="TextBox 14"/>
+          <p:cNvSpPr txBox="1"/>
+          <p:nvPr/>
+        </p:nvSpPr>
+        <p:spPr>
+          <a:xfrm>
+            <a:off x="365760" y="3218688"/>
+            <a:ext cx="5647791" cy="310896"/>
+          </a:xfrm>
+          <a:prstGeom prst="rect">
+            <a:avLst/>
+          </a:prstGeom>
+          <a:noFill/>
+        </p:spPr>
+        <p:txBody>
+          <a:bodyPr wrap="square" anchor="t" lIns="36000" rIns="36000" tIns="18000" bIns="18000">
+            <a:spAutoFit/>
+          </a:bodyPr>
+          <a:lstStyle/>
+          <a:p>
+            <a:pPr algn="l"/>
+            <a:r>
+              <a:rPr sz="1568" b="1" i="0">
+                <a:solidFill>
+                  <a:srgbClr val="1E293B"/>
+                </a:solidFill>
+                <a:latin typeface="Arial"/>
+              </a:rPr>
+              <a:t>CSP — Colloidal Silica Particles</a:t>
+            </a:r>
+          </a:p>
+        </p:txBody>
+      </p:sp>
+      <p:sp>
+        <p:nvSpPr>
+          <p:cNvPr id="16" name="TextBox 15"/>
+          <p:cNvSpPr txBox="1"/>
+          <p:nvPr/>
+        </p:nvSpPr>
+        <p:spPr>
+          <a:xfrm>
+            <a:off x="365760" y="3566160"/>
+            <a:ext cx="182880" cy="256032"/>
+          </a:xfrm>
+          <a:prstGeom prst="rect">
+            <a:avLst/>
+          </a:prstGeom>
+          <a:noFill/>
+        </p:spPr>
+        <p:txBody>
+          <a:bodyPr wrap="square" anchor="t" lIns="36000" rIns="36000" tIns="18000" bIns="18000">
+            <a:spAutoFit/>
+          </a:bodyPr>
+          <a:lstStyle/>
+          <a:p>
+            <a:pPr algn="l"/>
+            <a:r>
+              <a:rPr sz="1344" b="0" i="0">
+                <a:solidFill>
+                  <a:srgbClr val="3B5174"/>
+                </a:solidFill>
+                <a:latin typeface="Arial"/>
+              </a:rPr>
+              <a:t>•</a:t>
+            </a:r>
+          </a:p>
+        </p:txBody>
+      </p:sp>
+      <p:sp>
+        <p:nvSpPr>
+          <p:cNvPr id="17" name="TextBox 16"/>
+          <p:cNvSpPr txBox="1"/>
+          <p:nvPr/>
+        </p:nvSpPr>
+        <p:spPr>
+          <a:xfrm>
+            <a:off x="566928" y="3566160"/>
+            <a:ext cx="5446623" cy="256032"/>
+          </a:xfrm>
+          <a:prstGeom prst="rect">
+            <a:avLst/>
+          </a:prstGeom>
+          <a:noFill/>
+        </p:spPr>
+        <p:txBody>
+          <a:bodyPr wrap="square" anchor="t" lIns="36000" rIns="36000" tIns="18000" bIns="18000">
+            <a:spAutoFit/>
+          </a:bodyPr>
+          <a:lstStyle/>
+          <a:p>
+            <a:pPr algn="l"/>
+            <a:r>
+              <a:rPr sz="1344" b="0" i="0">
+                <a:solidFill>
+                  <a:srgbClr val="334155"/>
+                </a:solidFill>
+                <a:latin typeface="Arial"/>
+              </a:rPr>
+              <a:t>LUDOX TM-50 (stock 50 wt%) → diluted to 15 wt% (pH 9)</a:t>
+            </a:r>
+          </a:p>
+        </p:txBody>
+      </p:sp>
+      <p:sp>
+        <p:nvSpPr>
+          <p:cNvPr id="18" name="TextBox 17"/>
+          <p:cNvSpPr txBox="1"/>
+          <p:nvPr/>
+        </p:nvSpPr>
+        <p:spPr>
+          <a:xfrm>
+            <a:off x="365760" y="3877056"/>
+            <a:ext cx="182880" cy="256032"/>
+          </a:xfrm>
+          <a:prstGeom prst="rect">
+            <a:avLst/>
+          </a:prstGeom>
+          <a:noFill/>
+        </p:spPr>
+        <p:txBody>
+          <a:bodyPr wrap="square" anchor="t" lIns="36000" rIns="36000" tIns="18000" bIns="18000">
+            <a:spAutoFit/>
+          </a:bodyPr>
+          <a:lstStyle/>
+          <a:p>
+            <a:pPr algn="l"/>
+            <a:r>
+              <a:rPr sz="1344" b="0" i="0">
+                <a:solidFill>
+                  <a:srgbClr val="3B5174"/>
+                </a:solidFill>
+                <a:latin typeface="Arial"/>
+              </a:rPr>
+              <a:t>•</a:t>
+            </a:r>
+          </a:p>
+        </p:txBody>
+      </p:sp>
+      <p:sp>
+        <p:nvSpPr>
+          <p:cNvPr id="19" name="TextBox 18"/>
+          <p:cNvSpPr txBox="1"/>
+          <p:nvPr/>
+        </p:nvSpPr>
+        <p:spPr>
+          <a:xfrm>
+            <a:off x="566928" y="3877056"/>
+            <a:ext cx="5446623" cy="256032"/>
+          </a:xfrm>
+          <a:prstGeom prst="rect">
+            <a:avLst/>
+          </a:prstGeom>
+          <a:noFill/>
+        </p:spPr>
+        <p:txBody>
+          <a:bodyPr wrap="square" anchor="t" lIns="36000" rIns="36000" tIns="18000" bIns="18000">
+            <a:spAutoFit/>
+          </a:bodyPr>
+          <a:lstStyle/>
+          <a:p>
+            <a:pPr algn="l"/>
+            <a:r>
+              <a:rPr sz="1344" b="0" i="0">
+                <a:solidFill>
+                  <a:srgbClr val="334155"/>
+                </a:solidFill>
+                <a:latin typeface="Arial"/>
+              </a:rPr>
+              <a:t>Particle size: 22 nm (monodisperse)</a:t>
+            </a:r>
+          </a:p>
+        </p:txBody>
+      </p:sp>
+      <p:sp>
+        <p:nvSpPr>
+          <p:cNvPr id="20" name="TextBox 19"/>
+          <p:cNvSpPr txBox="1"/>
+          <p:nvPr/>
+        </p:nvSpPr>
+        <p:spPr>
+          <a:xfrm>
+            <a:off x="365760" y="4187952"/>
+            <a:ext cx="182880" cy="256032"/>
+          </a:xfrm>
+          <a:prstGeom prst="rect">
+            <a:avLst/>
+          </a:prstGeom>
+          <a:noFill/>
+        </p:spPr>
+        <p:txBody>
+          <a:bodyPr wrap="square" anchor="t" lIns="36000" rIns="36000" tIns="18000" bIns="18000">
+            <a:spAutoFit/>
+          </a:bodyPr>
+          <a:lstStyle/>
+          <a:p>
+            <a:pPr algn="l"/>
+            <a:r>
+              <a:rPr sz="1344" b="0" i="0">
+                <a:solidFill>
+                  <a:srgbClr val="3B5174"/>
+                </a:solidFill>
+                <a:latin typeface="Arial"/>
+              </a:rPr>
+              <a:t>•</a:t>
+            </a:r>
+          </a:p>
+        </p:txBody>
+      </p:sp>
+      <p:sp>
+        <p:nvSpPr>
+          <p:cNvPr id="21" name="TextBox 20"/>
+          <p:cNvSpPr txBox="1"/>
+          <p:nvPr/>
+        </p:nvSpPr>
+        <p:spPr>
+          <a:xfrm>
+            <a:off x="566928" y="4187952"/>
+            <a:ext cx="5446623" cy="256032"/>
+          </a:xfrm>
+          <a:prstGeom prst="rect">
+            <a:avLst/>
+          </a:prstGeom>
+          <a:noFill/>
+        </p:spPr>
+        <p:txBody>
+          <a:bodyPr wrap="square" anchor="t" lIns="36000" rIns="36000" tIns="18000" bIns="18000">
+            <a:spAutoFit/>
+          </a:bodyPr>
+          <a:lstStyle/>
+          <a:p>
+            <a:pPr algn="l"/>
+            <a:r>
+              <a:rPr sz="1344" b="0" i="0">
+                <a:solidFill>
+                  <a:srgbClr val="334155"/>
+                </a:solidFill>
+                <a:latin typeface="Arial"/>
+              </a:rPr>
+              <a:t>Formulation concentration: 5 wt% in gel</a:t>
+            </a:r>
+          </a:p>
+        </p:txBody>
+      </p:sp>
+      <p:sp>
+        <p:nvSpPr>
+          <p:cNvPr id="22" name="TextBox 21"/>
+          <p:cNvSpPr txBox="1"/>
+          <p:nvPr/>
+        </p:nvSpPr>
+        <p:spPr>
+          <a:xfrm>
+            <a:off x="365760" y="4498848"/>
+            <a:ext cx="182880" cy="256032"/>
+          </a:xfrm>
+          <a:prstGeom prst="rect">
+            <a:avLst/>
+          </a:prstGeom>
+          <a:noFill/>
+        </p:spPr>
+        <p:txBody>
+          <a:bodyPr wrap="square" anchor="t" lIns="36000" rIns="36000" tIns="18000" bIns="18000">
+            <a:spAutoFit/>
+          </a:bodyPr>
+          <a:lstStyle/>
+          <a:p>
+            <a:pPr algn="l"/>
+            <a:r>
+              <a:rPr sz="1344" b="0" i="0">
+                <a:solidFill>
+                  <a:srgbClr val="3B5174"/>
+                </a:solidFill>
+                <a:latin typeface="Arial"/>
+              </a:rPr>
+              <a:t>•</a:t>
+            </a:r>
+          </a:p>
+        </p:txBody>
+      </p:sp>
+      <p:sp>
+        <p:nvSpPr>
+          <p:cNvPr id="23" name="TextBox 22"/>
+          <p:cNvSpPr txBox="1"/>
+          <p:nvPr/>
+        </p:nvSpPr>
+        <p:spPr>
+          <a:xfrm>
+            <a:off x="566928" y="4498848"/>
+            <a:ext cx="5446623" cy="256032"/>
+          </a:xfrm>
+          <a:prstGeom prst="rect">
+            <a:avLst/>
+          </a:prstGeom>
+          <a:noFill/>
+        </p:spPr>
+        <p:txBody>
+          <a:bodyPr wrap="square" anchor="t" lIns="36000" rIns="36000" tIns="18000" bIns="18000">
+            <a:spAutoFit/>
+          </a:bodyPr>
+          <a:lstStyle/>
+          <a:p>
+            <a:pPr algn="l"/>
+            <a:r>
+              <a:rPr sz="1344" b="0" i="0">
+                <a:solidFill>
+                  <a:srgbClr val="334155"/>
+                </a:solidFill>
+                <a:latin typeface="Arial"/>
+              </a:rPr>
+              <a:t>Sinters upon heating → transforms into silica aerogel</a:t>
+            </a:r>
+          </a:p>
+        </p:txBody>
+      </p:sp>
+      <p:sp>
+        <p:nvSpPr>
+          <p:cNvPr id="24" name="Rounded Rectangle 23"/>
+          <p:cNvSpPr/>
+          <p:nvPr/>
+        </p:nvSpPr>
+        <p:spPr>
+          <a:xfrm>
+            <a:off x="6178143" y="859536"/>
+            <a:ext cx="5647791" cy="2194560"/>
+          </a:xfrm>
+          <a:prstGeom prst="roundRect">
+            <a:avLst>
+              <a:gd name="adj" fmla="val 2000"/>
+            </a:avLst>
+          </a:prstGeom>
+          <a:solidFill>
+            <a:srgbClr val="F5F8FC"/>
+          </a:solidFill>
+          <a:ln w="12700">
+            <a:solidFill>
+              <a:srgbClr val="C0D0E0"/>
+            </a:solidFill>
+          </a:ln>
+          <a:effectLst/>
+        </p:spPr>
+        <p:style>
+          <a:lnRef idx="1">
+            <a:schemeClr val="accent1"/>
+          </a:lnRef>
+          <a:fillRef idx="3">
+            <a:schemeClr val="accent1"/>
+          </a:fillRef>
+          <a:effectRef idx="2">
+            <a:schemeClr val="accent1"/>
+          </a:effectRef>
+          <a:fontRef idx="minor">
+            <a:schemeClr val="lt1"/>
+          </a:fontRef>
+        </p:style>
+        <p:txBody>
+          <a:bodyPr rtlCol="0" anchor="ctr"/>
+          <a:lstStyle/>
+          <a:p>
+            <a:pPr algn="ctr"/>
+          </a:p>
+        </p:txBody>
+      </p:sp>
+      <p:sp>
+        <p:nvSpPr>
+          <p:cNvPr id="25" name="Rectangle 24"/>
+          <p:cNvSpPr/>
+          <p:nvPr/>
+        </p:nvSpPr>
+        <p:spPr>
+          <a:xfrm>
+            <a:off x="6287871" y="969264"/>
+            <a:ext cx="868680" cy="292608"/>
+          </a:xfrm>
+          <a:prstGeom prst="rect">
+            <a:avLst/>
+          </a:prstGeom>
+          <a:solidFill>
+            <a:srgbClr val="1E293B"/>
+          </a:solidFill>
+          <a:ln>
+            <a:noFill/>
+          </a:ln>
+          <a:effectLst/>
+        </p:spPr>
+        <p:style>
+          <a:lnRef idx="1">
+            <a:schemeClr val="accent1"/>
+          </a:lnRef>
+          <a:fillRef idx="3">
+            <a:schemeClr val="accent1"/>
+          </a:fillRef>
+          <a:effectRef idx="2">
+            <a:schemeClr val="accent1"/>
+          </a:effectRef>
+          <a:fontRef idx="minor">
+            <a:schemeClr val="lt1"/>
+          </a:fontRef>
+        </p:style>
+        <p:txBody>
+          <a:bodyPr rtlCol="0" anchor="ctr"/>
+          <a:lstStyle/>
+          <a:p>
+            <a:pPr algn="ctr"/>
+          </a:p>
+        </p:txBody>
+      </p:sp>
+      <p:sp>
+        <p:nvSpPr>
+          <p:cNvPr id="26" name="TextBox 25"/>
+          <p:cNvSpPr txBox="1"/>
+          <p:nvPr/>
+        </p:nvSpPr>
+        <p:spPr>
+          <a:xfrm>
+            <a:off x="6287871" y="969264"/>
+            <a:ext cx="868680" cy="292608"/>
+          </a:xfrm>
+          <a:prstGeom prst="rect">
+            <a:avLst/>
+          </a:prstGeom>
+          <a:noFill/>
+        </p:spPr>
+        <p:txBody>
+          <a:bodyPr wrap="square" anchor="ctr" lIns="36000" rIns="36000" tIns="18000" bIns="18000">
+            <a:spAutoFit/>
+          </a:bodyPr>
+          <a:lstStyle/>
+          <a:p>
+            <a:pPr algn="ctr"/>
+            <a:r>
+              <a:rPr sz="1232" b="1" i="0">
+                <a:solidFill>
+                  <a:srgbClr val="FFFFFF"/>
+                </a:solidFill>
+                <a:latin typeface="Arial"/>
+              </a:rPr>
+              <a:t>SEM</a:t>
+            </a:r>
+          </a:p>
+        </p:txBody>
+      </p:sp>
+      <p:sp>
+        <p:nvSpPr>
+          <p:cNvPr id="27" name="TextBox 26"/>
+          <p:cNvSpPr txBox="1"/>
+          <p:nvPr/>
+        </p:nvSpPr>
+        <p:spPr>
+          <a:xfrm>
+            <a:off x="6178143" y="859536"/>
+            <a:ext cx="5647791" cy="2194560"/>
+          </a:xfrm>
+          <a:prstGeom prst="rect">
+            <a:avLst/>
+          </a:prstGeom>
+          <a:noFill/>
+        </p:spPr>
+        <p:txBody>
+          <a:bodyPr wrap="square" anchor="ctr" lIns="36000" rIns="36000" tIns="18000" bIns="18000">
+            <a:spAutoFit/>
+          </a:bodyPr>
+          <a:lstStyle/>
+          <a:p>
+            <a:pPr algn="ctr"/>
+            <a:r>
+              <a:rPr sz="1344" b="0" i="0">
+                <a:solidFill>
+                  <a:srgbClr val="AAB4C0"/>
+                </a:solidFill>
+                <a:latin typeface="Arial"/>
+              </a:rPr>
+              <a:t>(Paste paper figure here)</a:t>
+            </a:r>
+          </a:p>
+        </p:txBody>
+      </p:sp>
+      <p:sp>
+        <p:nvSpPr>
+          <p:cNvPr id="28" name="TextBox 27"/>
+          <p:cNvSpPr txBox="1"/>
+          <p:nvPr/>
+        </p:nvSpPr>
+        <p:spPr>
+          <a:xfrm>
+            <a:off x="6178143" y="3090672"/>
+            <a:ext cx="5647791" cy="274320"/>
+          </a:xfrm>
+          <a:prstGeom prst="rect">
+            <a:avLst/>
+          </a:prstGeom>
+          <a:noFill/>
+        </p:spPr>
+        <p:txBody>
+          <a:bodyPr wrap="square" anchor="t" lIns="36000" rIns="36000" tIns="18000" bIns="18000">
+            <a:spAutoFit/>
+          </a:bodyPr>
+          <a:lstStyle/>
+          <a:p>
+            <a:pPr algn="ctr"/>
+            <a:r>
+              <a:rPr sz="1120" b="0" i="1">
+                <a:solidFill>
+                  <a:srgbClr val="64748B"/>
+                </a:solidFill>
+                <a:latin typeface="Arial"/>
+              </a:rPr>
+              <a:t>Foam structure variation by SDS concentration</a:t>
+            </a:r>
+          </a:p>
+        </p:txBody>
+      </p:sp>
+      <p:sp>
+        <p:nvSpPr>
+          <p:cNvPr id="29" name="TextBox 28"/>
+          <p:cNvSpPr txBox="1"/>
+          <p:nvPr/>
+        </p:nvSpPr>
+        <p:spPr>
+          <a:xfrm>
+            <a:off x="6178143" y="3218688"/>
+            <a:ext cx="5647791" cy="310896"/>
+          </a:xfrm>
+          <a:prstGeom prst="rect">
+            <a:avLst/>
+          </a:prstGeom>
+          <a:noFill/>
+        </p:spPr>
+        <p:txBody>
+          <a:bodyPr wrap="square" anchor="t" lIns="36000" rIns="36000" tIns="18000" bIns="18000">
+            <a:spAutoFit/>
+          </a:bodyPr>
+          <a:lstStyle/>
+          <a:p>
+            <a:pPr algn="l"/>
+            <a:r>
+              <a:rPr sz="1568" b="1" i="0">
+                <a:solidFill>
+                  <a:srgbClr val="1E293B"/>
+                </a:solidFill>
+                <a:latin typeface="Arial"/>
+              </a:rPr>
+              <a:t>SDS — Sodium Dodecyl Sulfate</a:t>
+            </a:r>
+          </a:p>
+        </p:txBody>
+      </p:sp>
+      <p:sp>
+        <p:nvSpPr>
+          <p:cNvPr id="30" name="TextBox 29"/>
+          <p:cNvSpPr txBox="1"/>
+          <p:nvPr/>
+        </p:nvSpPr>
+        <p:spPr>
+          <a:xfrm>
+            <a:off x="6178143" y="3566160"/>
+            <a:ext cx="182880" cy="256032"/>
+          </a:xfrm>
+          <a:prstGeom prst="rect">
+            <a:avLst/>
+          </a:prstGeom>
+          <a:noFill/>
+        </p:spPr>
+        <p:txBody>
+          <a:bodyPr wrap="square" anchor="t" lIns="36000" rIns="36000" tIns="18000" bIns="18000">
+            <a:spAutoFit/>
+          </a:bodyPr>
+          <a:lstStyle/>
+          <a:p>
+            <a:pPr algn="l"/>
+            <a:r>
+              <a:rPr sz="1344" b="0" i="0">
+                <a:solidFill>
+                  <a:srgbClr val="3B5174"/>
+                </a:solidFill>
+                <a:latin typeface="Arial"/>
+              </a:rPr>
+              <a:t>•</a:t>
+            </a:r>
+          </a:p>
+        </p:txBody>
+      </p:sp>
+      <p:sp>
+        <p:nvSpPr>
+          <p:cNvPr id="31" name="TextBox 30"/>
+          <p:cNvSpPr txBox="1"/>
+          <p:nvPr/>
+        </p:nvSpPr>
+        <p:spPr>
+          <a:xfrm>
+            <a:off x="6379311" y="3566160"/>
+            <a:ext cx="5446623" cy="256032"/>
+          </a:xfrm>
+          <a:prstGeom prst="rect">
+            <a:avLst/>
+          </a:prstGeom>
+          <a:noFill/>
+        </p:spPr>
+        <p:txBody>
+          <a:bodyPr wrap="square" anchor="t" lIns="36000" rIns="36000" tIns="18000" bIns="18000">
+            <a:spAutoFit/>
+          </a:bodyPr>
+          <a:lstStyle/>
+          <a:p>
+            <a:pPr algn="l"/>
+            <a:r>
+              <a:rPr sz="1344" b="0" i="0">
+                <a:solidFill>
+                  <a:srgbClr val="334155"/>
+                </a:solidFill>
+                <a:latin typeface="Arial"/>
+              </a:rPr>
+              <a:t>Anionic surfactant (additive)</a:t>
+            </a:r>
+          </a:p>
+        </p:txBody>
+      </p:sp>
+      <p:sp>
+        <p:nvSpPr>
+          <p:cNvPr id="32" name="TextBox 31"/>
+          <p:cNvSpPr txBox="1"/>
+          <p:nvPr/>
+        </p:nvSpPr>
+        <p:spPr>
+          <a:xfrm>
+            <a:off x="6178143" y="3877056"/>
+            <a:ext cx="182880" cy="256032"/>
+          </a:xfrm>
+          <a:prstGeom prst="rect">
+            <a:avLst/>
+          </a:prstGeom>
+          <a:noFill/>
+        </p:spPr>
+        <p:txBody>
+          <a:bodyPr wrap="square" anchor="t" lIns="36000" rIns="36000" tIns="18000" bIns="18000">
+            <a:spAutoFit/>
+          </a:bodyPr>
+          <a:lstStyle/>
+          <a:p>
+            <a:pPr algn="l"/>
+            <a:r>
+              <a:rPr sz="1344" b="0" i="0">
+                <a:solidFill>
+                  <a:srgbClr val="3B5174"/>
+                </a:solidFill>
+                <a:latin typeface="Arial"/>
+              </a:rPr>
+              <a:t>•</a:t>
+            </a:r>
+          </a:p>
+        </p:txBody>
+      </p:sp>
+      <p:sp>
+        <p:nvSpPr>
+          <p:cNvPr id="33" name="TextBox 32"/>
+          <p:cNvSpPr txBox="1"/>
+          <p:nvPr/>
+        </p:nvSpPr>
+        <p:spPr>
+          <a:xfrm>
+            <a:off x="6379311" y="3877056"/>
+            <a:ext cx="5446623" cy="256032"/>
+          </a:xfrm>
+          <a:prstGeom prst="rect">
+            <a:avLst/>
+          </a:prstGeom>
+          <a:noFill/>
+        </p:spPr>
+        <p:txBody>
+          <a:bodyPr wrap="square" anchor="t" lIns="36000" rIns="36000" tIns="18000" bIns="18000">
+            <a:spAutoFit/>
+          </a:bodyPr>
+          <a:lstStyle/>
+          <a:p>
+            <a:pPr algn="l"/>
+            <a:r>
+              <a:rPr sz="1344" b="0" i="0">
+                <a:solidFill>
+                  <a:srgbClr val="334155"/>
+                </a:solidFill>
+                <a:latin typeface="Arial"/>
+              </a:rPr>
+              <a:t>Adding SDS did not improve Foaming Index</a:t>
+            </a:r>
+          </a:p>
+        </p:txBody>
+      </p:sp>
+      <p:sp>
+        <p:nvSpPr>
+          <p:cNvPr id="34" name="TextBox 33"/>
+          <p:cNvSpPr txBox="1"/>
+          <p:nvPr/>
+        </p:nvSpPr>
+        <p:spPr>
+          <a:xfrm>
+            <a:off x="6178143" y="4187952"/>
+            <a:ext cx="182880" cy="256032"/>
+          </a:xfrm>
+          <a:prstGeom prst="rect">
+            <a:avLst/>
+          </a:prstGeom>
+          <a:noFill/>
+        </p:spPr>
+        <p:txBody>
+          <a:bodyPr wrap="square" anchor="t" lIns="36000" rIns="36000" tIns="18000" bIns="18000">
+            <a:spAutoFit/>
+          </a:bodyPr>
+          <a:lstStyle/>
+          <a:p>
+            <a:pPr algn="l"/>
+            <a:r>
+              <a:rPr sz="1344" b="0" i="0">
+                <a:solidFill>
+                  <a:srgbClr val="3B5174"/>
+                </a:solidFill>
+                <a:latin typeface="Arial"/>
+              </a:rPr>
+              <a:t>•</a:t>
+            </a:r>
+          </a:p>
+        </p:txBody>
+      </p:sp>
+      <p:sp>
+        <p:nvSpPr>
+          <p:cNvPr id="35" name="TextBox 34"/>
+          <p:cNvSpPr txBox="1"/>
+          <p:nvPr/>
+        </p:nvSpPr>
+        <p:spPr>
+          <a:xfrm>
+            <a:off x="6379311" y="4187952"/>
+            <a:ext cx="5446623" cy="256032"/>
+          </a:xfrm>
+          <a:prstGeom prst="rect">
+            <a:avLst/>
+          </a:prstGeom>
+          <a:noFill/>
+        </p:spPr>
+        <p:txBody>
+          <a:bodyPr wrap="square" anchor="t" lIns="36000" rIns="36000" tIns="18000" bIns="18000">
+            <a:spAutoFit/>
+          </a:bodyPr>
+          <a:lstStyle/>
+          <a:p>
+            <a:pPr algn="l"/>
+            <a:r>
+              <a:rPr sz="1344" b="0" i="0">
+                <a:solidFill>
+                  <a:srgbClr val="334155"/>
+                </a:solidFill>
+                <a:latin typeface="Arial"/>
+              </a:rPr>
+              <a:t>Addition levels: 0.1 wt% and 0.5 wt%</a:t>
+            </a:r>
+          </a:p>
+        </p:txBody>
+      </p:sp>
+      <p:sp>
+        <p:nvSpPr>
+          <p:cNvPr id="36" name="TextBox 35"/>
+          <p:cNvSpPr txBox="1"/>
+          <p:nvPr/>
+        </p:nvSpPr>
+        <p:spPr>
+          <a:xfrm>
+            <a:off x="6178143" y="4498848"/>
+            <a:ext cx="182880" cy="256032"/>
+          </a:xfrm>
+          <a:prstGeom prst="rect">
+            <a:avLst/>
+          </a:prstGeom>
+          <a:noFill/>
+        </p:spPr>
+        <p:txBody>
+          <a:bodyPr wrap="square" anchor="t" lIns="36000" rIns="36000" tIns="18000" bIns="18000">
+            <a:spAutoFit/>
+          </a:bodyPr>
+          <a:lstStyle/>
+          <a:p>
+            <a:pPr algn="l"/>
+            <a:r>
+              <a:rPr sz="1344" b="0" i="0">
+                <a:solidFill>
+                  <a:srgbClr val="3B5174"/>
+                </a:solidFill>
+                <a:latin typeface="Arial"/>
+              </a:rPr>
+              <a:t>•</a:t>
+            </a:r>
+          </a:p>
+        </p:txBody>
+      </p:sp>
+      <p:sp>
+        <p:nvSpPr>
+          <p:cNvPr id="37" name="TextBox 36"/>
+          <p:cNvSpPr txBox="1"/>
+          <p:nvPr/>
+        </p:nvSpPr>
+        <p:spPr>
+          <a:xfrm>
+            <a:off x="6379311" y="4498848"/>
+            <a:ext cx="5446623" cy="256032"/>
+          </a:xfrm>
+          <a:prstGeom prst="rect">
+            <a:avLst/>
+          </a:prstGeom>
+          <a:noFill/>
+        </p:spPr>
+        <p:txBody>
+          <a:bodyPr wrap="square" anchor="t" lIns="36000" rIns="36000" tIns="18000" bIns="18000">
+            <a:spAutoFit/>
+          </a:bodyPr>
+          <a:lstStyle/>
+          <a:p>
+            <a:pPr algn="l"/>
+            <a:r>
+              <a:rPr sz="1344" b="0" i="0">
+                <a:solidFill>
+                  <a:srgbClr val="334155"/>
+                </a:solidFill>
+                <a:latin typeface="Arial"/>
+              </a:rPr>
+              <a:t>Higher SDS concentration coarsens bubble size (SEM)</a:t>
+            </a:r>
+          </a:p>
+        </p:txBody>
+      </p:sp>
+      <p:sp>
+        <p:nvSpPr>
+          <p:cNvPr id="38" name="Rounded Rectangle 37"/>
+          <p:cNvSpPr/>
+          <p:nvPr/>
+        </p:nvSpPr>
+        <p:spPr>
+          <a:xfrm>
+            <a:off x="365760" y="6053328"/>
+            <a:ext cx="11460175" cy="658368"/>
+          </a:xfrm>
+          <a:prstGeom prst="roundRect">
+            <a:avLst>
+              <a:gd name="adj" fmla="val 4000"/>
+            </a:avLst>
+          </a:prstGeom>
+          <a:solidFill>
+            <a:srgbClr val="F8FAFC"/>
+          </a:solidFill>
+          <a:ln>
+            <a:noFill/>
+          </a:ln>
+          <a:effectLst/>
+        </p:spPr>
+        <p:style>
+          <a:lnRef idx="1">
+            <a:schemeClr val="accent1"/>
+          </a:lnRef>
+          <a:fillRef idx="3">
+            <a:schemeClr val="accent1"/>
+          </a:fillRef>
+          <a:effectRef idx="2">
+            <a:schemeClr val="accent1"/>
+          </a:effectRef>
+          <a:fontRef idx="minor">
+            <a:schemeClr val="lt1"/>
+          </a:fontRef>
+        </p:style>
+        <p:txBody>
+          <a:bodyPr rtlCol="0" anchor="ctr"/>
+          <a:lstStyle/>
+          <a:p>
+            <a:pPr algn="ctr"/>
+          </a:p>
+        </p:txBody>
+      </p:sp>
+      <p:sp>
+        <p:nvSpPr>
+          <p:cNvPr id="39" name="Rectangle 38"/>
+          <p:cNvSpPr/>
+          <p:nvPr/>
+        </p:nvSpPr>
+        <p:spPr>
+          <a:xfrm>
+            <a:off x="365760" y="6053328"/>
+            <a:ext cx="54864" cy="658368"/>
           </a:xfrm>
           <a:prstGeom prst="rect">
             <a:avLst/>
@@ -6213,1022 +7084,70 @@
       </p:sp>
       <p:sp>
         <p:nvSpPr>
-          <p:cNvPr id="12" name="TextBox 11"/>
-          <p:cNvSpPr txBox="1"/>
-          <p:nvPr/>
-        </p:nvSpPr>
-        <p:spPr>
-          <a:xfrm>
-            <a:off x="548640" y="1042416"/>
-            <a:ext cx="548640" cy="457200"/>
-          </a:xfrm>
-          <a:prstGeom prst="rect">
-            <a:avLst/>
-          </a:prstGeom>
-          <a:noFill/>
-        </p:spPr>
-        <p:txBody>
-          <a:bodyPr wrap="square" anchor="t" lIns="36000" rIns="36000" tIns="18000" bIns="18000">
-            <a:spAutoFit/>
-          </a:bodyPr>
-          <a:lstStyle/>
-          <a:p>
-            <a:pPr algn="l"/>
-            <a:r>
-              <a:rPr sz="3136" b="0" i="0">
+          <p:cNvPr id="40" name="TextBox 39"/>
+          <p:cNvSpPr txBox="1"/>
+          <p:nvPr/>
+        </p:nvSpPr>
+        <p:spPr>
+          <a:xfrm>
+            <a:off x="548640" y="6053328"/>
+            <a:ext cx="365760" cy="658368"/>
+          </a:xfrm>
+          <a:prstGeom prst="rect">
+            <a:avLst/>
+          </a:prstGeom>
+          <a:noFill/>
+        </p:spPr>
+        <p:txBody>
+          <a:bodyPr wrap="square" anchor="ctr" lIns="36000" rIns="36000" tIns="18000" bIns="18000">
+            <a:spAutoFit/>
+          </a:bodyPr>
+          <a:lstStyle/>
+          <a:p>
+            <a:pPr algn="l"/>
+            <a:r>
+              <a:rPr sz="1568" b="0" i="0">
                 <a:solidFill>
                   <a:srgbClr val="3B5174"/>
                 </a:solidFill>
                 <a:latin typeface="Arial"/>
               </a:rPr>
-              <a:t>●</a:t>
-            </a:r>
-          </a:p>
-        </p:txBody>
-      </p:sp>
-      <p:sp>
-        <p:nvSpPr>
-          <p:cNvPr id="13" name="TextBox 12"/>
-          <p:cNvSpPr txBox="1"/>
-          <p:nvPr/>
-        </p:nvSpPr>
-        <p:spPr>
-          <a:xfrm>
-            <a:off x="1234440" y="1060704"/>
-            <a:ext cx="4641951" cy="274320"/>
-          </a:xfrm>
-          <a:prstGeom prst="rect">
-            <a:avLst/>
-          </a:prstGeom>
-          <a:noFill/>
-        </p:spPr>
-        <p:txBody>
-          <a:bodyPr wrap="square" anchor="t" lIns="36000" rIns="36000" tIns="18000" bIns="18000">
-            <a:spAutoFit/>
-          </a:bodyPr>
-          <a:lstStyle/>
-          <a:p>
-            <a:pPr algn="l"/>
-            <a:r>
-              <a:rPr sz="1232" b="1" i="0">
-                <a:solidFill>
-                  <a:srgbClr val="64748B"/>
-                </a:solidFill>
-                <a:latin typeface="Arial"/>
-              </a:rPr>
-              <a:t>CSP</a:t>
-            </a:r>
-          </a:p>
-        </p:txBody>
-      </p:sp>
-      <p:sp>
-        <p:nvSpPr>
-          <p:cNvPr id="14" name="TextBox 13"/>
-          <p:cNvSpPr txBox="1"/>
-          <p:nvPr/>
-        </p:nvSpPr>
-        <p:spPr>
-          <a:xfrm>
-            <a:off x="1234440" y="1316736"/>
-            <a:ext cx="4641951" cy="457200"/>
-          </a:xfrm>
-          <a:prstGeom prst="rect">
-            <a:avLst/>
-          </a:prstGeom>
-          <a:noFill/>
-        </p:spPr>
-        <p:txBody>
-          <a:bodyPr wrap="square" anchor="t" lIns="36000" rIns="36000" tIns="18000" bIns="18000">
-            <a:spAutoFit/>
-          </a:bodyPr>
-          <a:lstStyle/>
-          <a:p>
-            <a:pPr algn="l"/>
-            <a:r>
-              <a:rPr sz="2016" b="1" i="0">
+              <a:t>💡</a:t>
+            </a:r>
+          </a:p>
+        </p:txBody>
+      </p:sp>
+      <p:sp>
+        <p:nvSpPr>
+          <p:cNvPr id="41" name="TextBox 40"/>
+          <p:cNvSpPr txBox="1"/>
+          <p:nvPr/>
+        </p:nvSpPr>
+        <p:spPr>
+          <a:xfrm>
+            <a:off x="960120" y="6053328"/>
+            <a:ext cx="10774375" cy="658368"/>
+          </a:xfrm>
+          <a:prstGeom prst="rect">
+            <a:avLst/>
+          </a:prstGeom>
+          <a:noFill/>
+        </p:spPr>
+        <p:txBody>
+          <a:bodyPr wrap="square" anchor="ctr" lIns="36000" rIns="36000" tIns="18000" bIns="18000">
+            <a:spAutoFit/>
+          </a:bodyPr>
+          <a:lstStyle/>
+          <a:p>
+            <a:pPr algn="l"/>
+            <a:r>
+              <a:rPr sz="1456" b="1" i="0">
                 <a:solidFill>
                   <a:srgbClr val="1E293B"/>
                 </a:solidFill>
                 <a:latin typeface="Arial"/>
               </a:rPr>
-              <a:t>Colloidal Silica Particles</a:t>
-            </a:r>
-          </a:p>
-        </p:txBody>
-      </p:sp>
-      <p:sp>
-        <p:nvSpPr>
-          <p:cNvPr id="15" name="TextBox 14"/>
-          <p:cNvSpPr txBox="1"/>
-          <p:nvPr/>
-        </p:nvSpPr>
-        <p:spPr>
-          <a:xfrm>
-            <a:off x="640080" y="2048256"/>
-            <a:ext cx="182880" cy="274320"/>
-          </a:xfrm>
-          <a:prstGeom prst="rect">
-            <a:avLst/>
-          </a:prstGeom>
-          <a:noFill/>
-        </p:spPr>
-        <p:txBody>
-          <a:bodyPr wrap="square" anchor="t" lIns="36000" rIns="36000" tIns="18000" bIns="18000">
-            <a:spAutoFit/>
-          </a:bodyPr>
-          <a:lstStyle/>
-          <a:p>
-            <a:pPr algn="l"/>
-            <a:r>
-              <a:rPr sz="1568" b="0" i="0">
-                <a:solidFill>
-                  <a:srgbClr val="3B5174"/>
-                </a:solidFill>
-                <a:latin typeface="Arial"/>
-              </a:rPr>
-              <a:t>•</a:t>
-            </a:r>
-          </a:p>
-        </p:txBody>
-      </p:sp>
-      <p:sp>
-        <p:nvSpPr>
-          <p:cNvPr id="16" name="TextBox 15"/>
-          <p:cNvSpPr txBox="1"/>
-          <p:nvPr/>
-        </p:nvSpPr>
-        <p:spPr>
-          <a:xfrm>
-            <a:off x="868680" y="2048256"/>
-            <a:ext cx="4961991" cy="274320"/>
-          </a:xfrm>
-          <a:prstGeom prst="rect">
-            <a:avLst/>
-          </a:prstGeom>
-          <a:noFill/>
-        </p:spPr>
-        <p:txBody>
-          <a:bodyPr wrap="square" anchor="t" lIns="36000" rIns="36000" tIns="18000" bIns="18000">
-            <a:spAutoFit/>
-          </a:bodyPr>
-          <a:lstStyle/>
-          <a:p>
-            <a:pPr algn="l"/>
-            <a:r>
-              <a:rPr sz="1456" b="0" i="0">
-                <a:solidFill>
-                  <a:srgbClr val="334155"/>
-                </a:solidFill>
-                <a:latin typeface="Arial"/>
-              </a:rPr>
-              <a:t>LUDOX TM-50 (stock 50 wt%) → diluted to 15 wt% (pH 9)</a:t>
-            </a:r>
-          </a:p>
-        </p:txBody>
-      </p:sp>
-      <p:sp>
-        <p:nvSpPr>
-          <p:cNvPr id="17" name="TextBox 16"/>
-          <p:cNvSpPr txBox="1"/>
-          <p:nvPr/>
-        </p:nvSpPr>
-        <p:spPr>
-          <a:xfrm>
-            <a:off x="640080" y="2432304"/>
-            <a:ext cx="182880" cy="274320"/>
-          </a:xfrm>
-          <a:prstGeom prst="rect">
-            <a:avLst/>
-          </a:prstGeom>
-          <a:noFill/>
-        </p:spPr>
-        <p:txBody>
-          <a:bodyPr wrap="square" anchor="t" lIns="36000" rIns="36000" tIns="18000" bIns="18000">
-            <a:spAutoFit/>
-          </a:bodyPr>
-          <a:lstStyle/>
-          <a:p>
-            <a:pPr algn="l"/>
-            <a:r>
-              <a:rPr sz="1568" b="0" i="0">
-                <a:solidFill>
-                  <a:srgbClr val="3B5174"/>
-                </a:solidFill>
-                <a:latin typeface="Arial"/>
-              </a:rPr>
-              <a:t>•</a:t>
-            </a:r>
-          </a:p>
-        </p:txBody>
-      </p:sp>
-      <p:sp>
-        <p:nvSpPr>
-          <p:cNvPr id="18" name="TextBox 17"/>
-          <p:cNvSpPr txBox="1"/>
-          <p:nvPr/>
-        </p:nvSpPr>
-        <p:spPr>
-          <a:xfrm>
-            <a:off x="868680" y="2432304"/>
-            <a:ext cx="4961991" cy="274320"/>
-          </a:xfrm>
-          <a:prstGeom prst="rect">
-            <a:avLst/>
-          </a:prstGeom>
-          <a:noFill/>
-        </p:spPr>
-        <p:txBody>
-          <a:bodyPr wrap="square" anchor="t" lIns="36000" rIns="36000" tIns="18000" bIns="18000">
-            <a:spAutoFit/>
-          </a:bodyPr>
-          <a:lstStyle/>
-          <a:p>
-            <a:pPr algn="l"/>
-            <a:r>
-              <a:rPr sz="1456" b="0" i="0">
-                <a:solidFill>
-                  <a:srgbClr val="334155"/>
-                </a:solidFill>
-                <a:latin typeface="Arial"/>
-              </a:rPr>
-              <a:t>Particle size: 22 nm (monodisperse)</a:t>
-            </a:r>
-          </a:p>
-        </p:txBody>
-      </p:sp>
-      <p:sp>
-        <p:nvSpPr>
-          <p:cNvPr id="19" name="TextBox 18"/>
-          <p:cNvSpPr txBox="1"/>
-          <p:nvPr/>
-        </p:nvSpPr>
-        <p:spPr>
-          <a:xfrm>
-            <a:off x="640080" y="2816352"/>
-            <a:ext cx="182880" cy="274320"/>
-          </a:xfrm>
-          <a:prstGeom prst="rect">
-            <a:avLst/>
-          </a:prstGeom>
-          <a:noFill/>
-        </p:spPr>
-        <p:txBody>
-          <a:bodyPr wrap="square" anchor="t" lIns="36000" rIns="36000" tIns="18000" bIns="18000">
-            <a:spAutoFit/>
-          </a:bodyPr>
-          <a:lstStyle/>
-          <a:p>
-            <a:pPr algn="l"/>
-            <a:r>
-              <a:rPr sz="1568" b="0" i="0">
-                <a:solidFill>
-                  <a:srgbClr val="3B5174"/>
-                </a:solidFill>
-                <a:latin typeface="Arial"/>
-              </a:rPr>
-              <a:t>•</a:t>
-            </a:r>
-          </a:p>
-        </p:txBody>
-      </p:sp>
-      <p:sp>
-        <p:nvSpPr>
-          <p:cNvPr id="20" name="TextBox 19"/>
-          <p:cNvSpPr txBox="1"/>
-          <p:nvPr/>
-        </p:nvSpPr>
-        <p:spPr>
-          <a:xfrm>
-            <a:off x="868680" y="2816352"/>
-            <a:ext cx="4961991" cy="274320"/>
-          </a:xfrm>
-          <a:prstGeom prst="rect">
-            <a:avLst/>
-          </a:prstGeom>
-          <a:noFill/>
-        </p:spPr>
-        <p:txBody>
-          <a:bodyPr wrap="square" anchor="t" lIns="36000" rIns="36000" tIns="18000" bIns="18000">
-            <a:spAutoFit/>
-          </a:bodyPr>
-          <a:lstStyle/>
-          <a:p>
-            <a:pPr algn="l"/>
-            <a:r>
-              <a:rPr sz="1456" b="0" i="0">
-                <a:solidFill>
-                  <a:srgbClr val="334155"/>
-                </a:solidFill>
-                <a:latin typeface="Arial"/>
-              </a:rPr>
-              <a:t>Formulation concentration: 5 wt% in gel</a:t>
-            </a:r>
-          </a:p>
-        </p:txBody>
-      </p:sp>
-      <p:sp>
-        <p:nvSpPr>
-          <p:cNvPr id="21" name="TextBox 20"/>
-          <p:cNvSpPr txBox="1"/>
-          <p:nvPr/>
-        </p:nvSpPr>
-        <p:spPr>
-          <a:xfrm>
-            <a:off x="640080" y="3200400"/>
-            <a:ext cx="182880" cy="274320"/>
-          </a:xfrm>
-          <a:prstGeom prst="rect">
-            <a:avLst/>
-          </a:prstGeom>
-          <a:noFill/>
-        </p:spPr>
-        <p:txBody>
-          <a:bodyPr wrap="square" anchor="t" lIns="36000" rIns="36000" tIns="18000" bIns="18000">
-            <a:spAutoFit/>
-          </a:bodyPr>
-          <a:lstStyle/>
-          <a:p>
-            <a:pPr algn="l"/>
-            <a:r>
-              <a:rPr sz="1568" b="0" i="0">
-                <a:solidFill>
-                  <a:srgbClr val="3B5174"/>
-                </a:solidFill>
-                <a:latin typeface="Arial"/>
-              </a:rPr>
-              <a:t>•</a:t>
-            </a:r>
-          </a:p>
-        </p:txBody>
-      </p:sp>
-      <p:sp>
-        <p:nvSpPr>
-          <p:cNvPr id="22" name="TextBox 21"/>
-          <p:cNvSpPr txBox="1"/>
-          <p:nvPr/>
-        </p:nvSpPr>
-        <p:spPr>
-          <a:xfrm>
-            <a:off x="868680" y="3200400"/>
-            <a:ext cx="4961991" cy="274320"/>
-          </a:xfrm>
-          <a:prstGeom prst="rect">
-            <a:avLst/>
-          </a:prstGeom>
-          <a:noFill/>
-        </p:spPr>
-        <p:txBody>
-          <a:bodyPr wrap="square" anchor="t" lIns="36000" rIns="36000" tIns="18000" bIns="18000">
-            <a:spAutoFit/>
-          </a:bodyPr>
-          <a:lstStyle/>
-          <a:p>
-            <a:pPr algn="l"/>
-            <a:r>
-              <a:rPr sz="1456" b="0" i="0">
-                <a:solidFill>
-                  <a:srgbClr val="334155"/>
-                </a:solidFill>
-                <a:latin typeface="Arial"/>
-              </a:rPr>
-              <a:t>Sinters upon heating → transforms into silica aerogel</a:t>
-            </a:r>
-          </a:p>
-        </p:txBody>
-      </p:sp>
-      <p:sp>
-        <p:nvSpPr>
-          <p:cNvPr id="23" name="Rounded Rectangle 22"/>
-          <p:cNvSpPr/>
-          <p:nvPr/>
-        </p:nvSpPr>
-        <p:spPr>
-          <a:xfrm>
-            <a:off x="6178143" y="859536"/>
-            <a:ext cx="5647791" cy="3840480"/>
-          </a:xfrm>
-          <a:prstGeom prst="roundRect">
-            <a:avLst>
-              <a:gd name="adj" fmla="val 4000"/>
-            </a:avLst>
-          </a:prstGeom>
-          <a:solidFill>
-            <a:srgbClr val="F1F5F9"/>
-          </a:solidFill>
-          <a:ln w="6350">
-            <a:solidFill>
-              <a:srgbClr val="E2E8F0"/>
-            </a:solidFill>
-          </a:ln>
-          <a:effectLst/>
-        </p:spPr>
-        <p:style>
-          <a:lnRef idx="1">
-            <a:schemeClr val="accent1"/>
-          </a:lnRef>
-          <a:fillRef idx="3">
-            <a:schemeClr val="accent1"/>
-          </a:fillRef>
-          <a:effectRef idx="2">
-            <a:schemeClr val="accent1"/>
-          </a:effectRef>
-          <a:fontRef idx="minor">
-            <a:schemeClr val="lt1"/>
-          </a:fontRef>
-        </p:style>
-        <p:txBody>
-          <a:bodyPr rtlCol="0" anchor="ctr"/>
-          <a:lstStyle/>
-          <a:p>
-            <a:pPr algn="ctr"/>
-          </a:p>
-        </p:txBody>
-      </p:sp>
-      <p:sp>
-        <p:nvSpPr>
-          <p:cNvPr id="24" name="Rectangle 23"/>
-          <p:cNvSpPr/>
-          <p:nvPr/>
-        </p:nvSpPr>
-        <p:spPr>
-          <a:xfrm>
-            <a:off x="6178143" y="859536"/>
-            <a:ext cx="5647791" cy="36576"/>
-          </a:xfrm>
-          <a:prstGeom prst="rect">
-            <a:avLst/>
-          </a:prstGeom>
-          <a:solidFill>
-            <a:srgbClr val="3B5174"/>
-          </a:solidFill>
-          <a:ln>
-            <a:noFill/>
-          </a:ln>
-          <a:effectLst/>
-        </p:spPr>
-        <p:style>
-          <a:lnRef idx="1">
-            <a:schemeClr val="accent1"/>
-          </a:lnRef>
-          <a:fillRef idx="3">
-            <a:schemeClr val="accent1"/>
-          </a:fillRef>
-          <a:effectRef idx="2">
-            <a:schemeClr val="accent1"/>
-          </a:effectRef>
-          <a:fontRef idx="minor">
-            <a:schemeClr val="lt1"/>
-          </a:fontRef>
-        </p:style>
-        <p:txBody>
-          <a:bodyPr rtlCol="0" anchor="ctr"/>
-          <a:lstStyle/>
-          <a:p>
-            <a:pPr algn="ctr"/>
-          </a:p>
-        </p:txBody>
-      </p:sp>
-      <p:sp>
-        <p:nvSpPr>
-          <p:cNvPr id="25" name="TextBox 24"/>
-          <p:cNvSpPr txBox="1"/>
-          <p:nvPr/>
-        </p:nvSpPr>
-        <p:spPr>
-          <a:xfrm>
-            <a:off x="6361023" y="1042416"/>
-            <a:ext cx="548640" cy="457200"/>
-          </a:xfrm>
-          <a:prstGeom prst="rect">
-            <a:avLst/>
-          </a:prstGeom>
-          <a:noFill/>
-        </p:spPr>
-        <p:txBody>
-          <a:bodyPr wrap="square" anchor="t" lIns="36000" rIns="36000" tIns="18000" bIns="18000">
-            <a:spAutoFit/>
-          </a:bodyPr>
-          <a:lstStyle/>
-          <a:p>
-            <a:pPr algn="l"/>
-            <a:r>
-              <a:rPr sz="3136" b="0" i="0">
-                <a:solidFill>
-                  <a:srgbClr val="3B5174"/>
-                </a:solidFill>
-                <a:latin typeface="Arial"/>
-              </a:rPr>
-              <a:t>◆</a:t>
-            </a:r>
-          </a:p>
-        </p:txBody>
-      </p:sp>
-      <p:sp>
-        <p:nvSpPr>
-          <p:cNvPr id="26" name="TextBox 25"/>
-          <p:cNvSpPr txBox="1"/>
-          <p:nvPr/>
-        </p:nvSpPr>
-        <p:spPr>
-          <a:xfrm>
-            <a:off x="7046823" y="1060704"/>
-            <a:ext cx="4641951" cy="274320"/>
-          </a:xfrm>
-          <a:prstGeom prst="rect">
-            <a:avLst/>
-          </a:prstGeom>
-          <a:noFill/>
-        </p:spPr>
-        <p:txBody>
-          <a:bodyPr wrap="square" anchor="t" lIns="36000" rIns="36000" tIns="18000" bIns="18000">
-            <a:spAutoFit/>
-          </a:bodyPr>
-          <a:lstStyle/>
-          <a:p>
-            <a:pPr algn="l"/>
-            <a:r>
-              <a:rPr sz="1232" b="1" i="0">
-                <a:solidFill>
-                  <a:srgbClr val="64748B"/>
-                </a:solidFill>
-                <a:latin typeface="Arial"/>
-              </a:rPr>
-              <a:t>SDS (Additive)</a:t>
-            </a:r>
-          </a:p>
-        </p:txBody>
-      </p:sp>
-      <p:sp>
-        <p:nvSpPr>
-          <p:cNvPr id="27" name="TextBox 26"/>
-          <p:cNvSpPr txBox="1"/>
-          <p:nvPr/>
-        </p:nvSpPr>
-        <p:spPr>
-          <a:xfrm>
-            <a:off x="7046823" y="1316736"/>
-            <a:ext cx="4641951" cy="457200"/>
-          </a:xfrm>
-          <a:prstGeom prst="rect">
-            <a:avLst/>
-          </a:prstGeom>
-          <a:noFill/>
-        </p:spPr>
-        <p:txBody>
-          <a:bodyPr wrap="square" anchor="t" lIns="36000" rIns="36000" tIns="18000" bIns="18000">
-            <a:spAutoFit/>
-          </a:bodyPr>
-          <a:lstStyle/>
-          <a:p>
-            <a:pPr algn="l"/>
-            <a:r>
-              <a:rPr sz="2016" b="1" i="0">
-                <a:solidFill>
-                  <a:srgbClr val="1E293B"/>
-                </a:solidFill>
-                <a:latin typeface="Arial"/>
-              </a:rPr>
-              <a:t>Sodium Dodecyl Sulfate</a:t>
-            </a:r>
-          </a:p>
-        </p:txBody>
-      </p:sp>
-      <p:sp>
-        <p:nvSpPr>
-          <p:cNvPr id="28" name="TextBox 27"/>
-          <p:cNvSpPr txBox="1"/>
-          <p:nvPr/>
-        </p:nvSpPr>
-        <p:spPr>
-          <a:xfrm>
-            <a:off x="6452463" y="2048256"/>
-            <a:ext cx="182880" cy="274320"/>
-          </a:xfrm>
-          <a:prstGeom prst="rect">
-            <a:avLst/>
-          </a:prstGeom>
-          <a:noFill/>
-        </p:spPr>
-        <p:txBody>
-          <a:bodyPr wrap="square" anchor="t" lIns="36000" rIns="36000" tIns="18000" bIns="18000">
-            <a:spAutoFit/>
-          </a:bodyPr>
-          <a:lstStyle/>
-          <a:p>
-            <a:pPr algn="l"/>
-            <a:r>
-              <a:rPr sz="1568" b="0" i="0">
-                <a:solidFill>
-                  <a:srgbClr val="3B5174"/>
-                </a:solidFill>
-                <a:latin typeface="Arial"/>
-              </a:rPr>
-              <a:t>•</a:t>
-            </a:r>
-          </a:p>
-        </p:txBody>
-      </p:sp>
-      <p:sp>
-        <p:nvSpPr>
-          <p:cNvPr id="29" name="TextBox 28"/>
-          <p:cNvSpPr txBox="1"/>
-          <p:nvPr/>
-        </p:nvSpPr>
-        <p:spPr>
-          <a:xfrm>
-            <a:off x="6681063" y="2048256"/>
-            <a:ext cx="4961991" cy="274320"/>
-          </a:xfrm>
-          <a:prstGeom prst="rect">
-            <a:avLst/>
-          </a:prstGeom>
-          <a:noFill/>
-        </p:spPr>
-        <p:txBody>
-          <a:bodyPr wrap="square" anchor="t" lIns="36000" rIns="36000" tIns="18000" bIns="18000">
-            <a:spAutoFit/>
-          </a:bodyPr>
-          <a:lstStyle/>
-          <a:p>
-            <a:pPr algn="l"/>
-            <a:r>
-              <a:rPr sz="1456" b="0" i="0">
-                <a:solidFill>
-                  <a:srgbClr val="334155"/>
-                </a:solidFill>
-                <a:latin typeface="Arial"/>
-              </a:rPr>
-              <a:t>Anionic surfactant</a:t>
-            </a:r>
-          </a:p>
-        </p:txBody>
-      </p:sp>
-      <p:sp>
-        <p:nvSpPr>
-          <p:cNvPr id="30" name="TextBox 29"/>
-          <p:cNvSpPr txBox="1"/>
-          <p:nvPr/>
-        </p:nvSpPr>
-        <p:spPr>
-          <a:xfrm>
-            <a:off x="6452463" y="2432304"/>
-            <a:ext cx="182880" cy="274320"/>
-          </a:xfrm>
-          <a:prstGeom prst="rect">
-            <a:avLst/>
-          </a:prstGeom>
-          <a:noFill/>
-        </p:spPr>
-        <p:txBody>
-          <a:bodyPr wrap="square" anchor="t" lIns="36000" rIns="36000" tIns="18000" bIns="18000">
-            <a:spAutoFit/>
-          </a:bodyPr>
-          <a:lstStyle/>
-          <a:p>
-            <a:pPr algn="l"/>
-            <a:r>
-              <a:rPr sz="1568" b="0" i="0">
-                <a:solidFill>
-                  <a:srgbClr val="3B5174"/>
-                </a:solidFill>
-                <a:latin typeface="Arial"/>
-              </a:rPr>
-              <a:t>•</a:t>
-            </a:r>
-          </a:p>
-        </p:txBody>
-      </p:sp>
-      <p:sp>
-        <p:nvSpPr>
-          <p:cNvPr id="31" name="TextBox 30"/>
-          <p:cNvSpPr txBox="1"/>
-          <p:nvPr/>
-        </p:nvSpPr>
-        <p:spPr>
-          <a:xfrm>
-            <a:off x="6681063" y="2432304"/>
-            <a:ext cx="4961991" cy="274320"/>
-          </a:xfrm>
-          <a:prstGeom prst="rect">
-            <a:avLst/>
-          </a:prstGeom>
-          <a:noFill/>
-        </p:spPr>
-        <p:txBody>
-          <a:bodyPr wrap="square" anchor="t" lIns="36000" rIns="36000" tIns="18000" bIns="18000">
-            <a:spAutoFit/>
-          </a:bodyPr>
-          <a:lstStyle/>
-          <a:p>
-            <a:pPr algn="l"/>
-            <a:r>
-              <a:rPr sz="1456" b="0" i="0">
-                <a:solidFill>
-                  <a:srgbClr val="334155"/>
-                </a:solidFill>
-                <a:latin typeface="Arial"/>
-              </a:rPr>
-              <a:t>Adding SDS did not improve Foaming Index</a:t>
-            </a:r>
-          </a:p>
-        </p:txBody>
-      </p:sp>
-      <p:sp>
-        <p:nvSpPr>
-          <p:cNvPr id="32" name="TextBox 31"/>
-          <p:cNvSpPr txBox="1"/>
-          <p:nvPr/>
-        </p:nvSpPr>
-        <p:spPr>
-          <a:xfrm>
-            <a:off x="6452463" y="2816352"/>
-            <a:ext cx="182880" cy="274320"/>
-          </a:xfrm>
-          <a:prstGeom prst="rect">
-            <a:avLst/>
-          </a:prstGeom>
-          <a:noFill/>
-        </p:spPr>
-        <p:txBody>
-          <a:bodyPr wrap="square" anchor="t" lIns="36000" rIns="36000" tIns="18000" bIns="18000">
-            <a:spAutoFit/>
-          </a:bodyPr>
-          <a:lstStyle/>
-          <a:p>
-            <a:pPr algn="l"/>
-            <a:r>
-              <a:rPr sz="1568" b="0" i="0">
-                <a:solidFill>
-                  <a:srgbClr val="3B5174"/>
-                </a:solidFill>
-                <a:latin typeface="Arial"/>
-              </a:rPr>
-              <a:t>•</a:t>
-            </a:r>
-          </a:p>
-        </p:txBody>
-      </p:sp>
-      <p:sp>
-        <p:nvSpPr>
-          <p:cNvPr id="33" name="TextBox 32"/>
-          <p:cNvSpPr txBox="1"/>
-          <p:nvPr/>
-        </p:nvSpPr>
-        <p:spPr>
-          <a:xfrm>
-            <a:off x="6681063" y="2816352"/>
-            <a:ext cx="4961991" cy="274320"/>
-          </a:xfrm>
-          <a:prstGeom prst="rect">
-            <a:avLst/>
-          </a:prstGeom>
-          <a:noFill/>
-        </p:spPr>
-        <p:txBody>
-          <a:bodyPr wrap="square" anchor="t" lIns="36000" rIns="36000" tIns="18000" bIns="18000">
-            <a:spAutoFit/>
-          </a:bodyPr>
-          <a:lstStyle/>
-          <a:p>
-            <a:pPr algn="l"/>
-            <a:r>
-              <a:rPr sz="1456" b="0" i="0">
-                <a:solidFill>
-                  <a:srgbClr val="334155"/>
-                </a:solidFill>
-                <a:latin typeface="Arial"/>
-              </a:rPr>
-              <a:t>Addition levels: two concentrations of 0.1 wt% and 0.5 wt%</a:t>
-            </a:r>
-          </a:p>
-        </p:txBody>
-      </p:sp>
-      <p:sp>
-        <p:nvSpPr>
-          <p:cNvPr id="34" name="TextBox 33"/>
-          <p:cNvSpPr txBox="1"/>
-          <p:nvPr/>
-        </p:nvSpPr>
-        <p:spPr>
-          <a:xfrm>
-            <a:off x="6452463" y="3200400"/>
-            <a:ext cx="182880" cy="274320"/>
-          </a:xfrm>
-          <a:prstGeom prst="rect">
-            <a:avLst/>
-          </a:prstGeom>
-          <a:noFill/>
-        </p:spPr>
-        <p:txBody>
-          <a:bodyPr wrap="square" anchor="t" lIns="36000" rIns="36000" tIns="18000" bIns="18000">
-            <a:spAutoFit/>
-          </a:bodyPr>
-          <a:lstStyle/>
-          <a:p>
-            <a:pPr algn="l"/>
-            <a:r>
-              <a:rPr sz="1568" b="0" i="0">
-                <a:solidFill>
-                  <a:srgbClr val="3B5174"/>
-                </a:solidFill>
-                <a:latin typeface="Arial"/>
-              </a:rPr>
-              <a:t>•</a:t>
-            </a:r>
-          </a:p>
-        </p:txBody>
-      </p:sp>
-      <p:sp>
-        <p:nvSpPr>
-          <p:cNvPr id="35" name="TextBox 34"/>
-          <p:cNvSpPr txBox="1"/>
-          <p:nvPr/>
-        </p:nvSpPr>
-        <p:spPr>
-          <a:xfrm>
-            <a:off x="6681063" y="3200400"/>
-            <a:ext cx="4961991" cy="274320"/>
-          </a:xfrm>
-          <a:prstGeom prst="rect">
-            <a:avLst/>
-          </a:prstGeom>
-          <a:noFill/>
-        </p:spPr>
-        <p:txBody>
-          <a:bodyPr wrap="square" anchor="t" lIns="36000" rIns="36000" tIns="18000" bIns="18000">
-            <a:spAutoFit/>
-          </a:bodyPr>
-          <a:lstStyle/>
-          <a:p>
-            <a:pPr algn="l"/>
-            <a:r>
-              <a:rPr sz="1456" b="0" i="0">
-                <a:solidFill>
-                  <a:srgbClr val="334155"/>
-                </a:solidFill>
-                <a:latin typeface="Arial"/>
-              </a:rPr>
-              <a:t>Higher SDS concentration coarsens bubble size (SEM)</a:t>
-            </a:r>
-          </a:p>
-        </p:txBody>
-      </p:sp>
-      <p:sp>
-        <p:nvSpPr>
-          <p:cNvPr id="36" name="Rounded Rectangle 35"/>
-          <p:cNvSpPr/>
-          <p:nvPr/>
-        </p:nvSpPr>
-        <p:spPr>
-          <a:xfrm>
-            <a:off x="365760" y="4974336"/>
-            <a:ext cx="11460175" cy="731520"/>
-          </a:xfrm>
-          <a:prstGeom prst="roundRect">
-            <a:avLst>
-              <a:gd name="adj" fmla="val 4000"/>
-            </a:avLst>
-          </a:prstGeom>
-          <a:solidFill>
-            <a:srgbClr val="F8FAFC"/>
-          </a:solidFill>
-          <a:ln>
-            <a:noFill/>
-          </a:ln>
-          <a:effectLst/>
-        </p:spPr>
-        <p:style>
-          <a:lnRef idx="1">
-            <a:schemeClr val="accent1"/>
-          </a:lnRef>
-          <a:fillRef idx="3">
-            <a:schemeClr val="accent1"/>
-          </a:fillRef>
-          <a:effectRef idx="2">
-            <a:schemeClr val="accent1"/>
-          </a:effectRef>
-          <a:fontRef idx="minor">
-            <a:schemeClr val="lt1"/>
-          </a:fontRef>
-        </p:style>
-        <p:txBody>
-          <a:bodyPr rtlCol="0" anchor="ctr"/>
-          <a:lstStyle/>
-          <a:p>
-            <a:pPr algn="ctr"/>
-          </a:p>
-        </p:txBody>
-      </p:sp>
-      <p:sp>
-        <p:nvSpPr>
-          <p:cNvPr id="37" name="Rectangle 36"/>
-          <p:cNvSpPr/>
-          <p:nvPr/>
-        </p:nvSpPr>
-        <p:spPr>
-          <a:xfrm>
-            <a:off x="365760" y="4974336"/>
-            <a:ext cx="54864" cy="731520"/>
-          </a:xfrm>
-          <a:prstGeom prst="rect">
-            <a:avLst/>
-          </a:prstGeom>
-          <a:solidFill>
-            <a:srgbClr val="3B5174"/>
-          </a:solidFill>
-          <a:ln>
-            <a:noFill/>
-          </a:ln>
-          <a:effectLst/>
-        </p:spPr>
-        <p:style>
-          <a:lnRef idx="1">
-            <a:schemeClr val="accent1"/>
-          </a:lnRef>
-          <a:fillRef idx="3">
-            <a:schemeClr val="accent1"/>
-          </a:fillRef>
-          <a:effectRef idx="2">
-            <a:schemeClr val="accent1"/>
-          </a:effectRef>
-          <a:fontRef idx="minor">
-            <a:schemeClr val="lt1"/>
-          </a:fontRef>
-        </p:style>
-        <p:txBody>
-          <a:bodyPr rtlCol="0" anchor="ctr"/>
-          <a:lstStyle/>
-          <a:p>
-            <a:pPr algn="ctr"/>
-          </a:p>
-        </p:txBody>
-      </p:sp>
-      <p:sp>
-        <p:nvSpPr>
-          <p:cNvPr id="38" name="TextBox 37"/>
-          <p:cNvSpPr txBox="1"/>
-          <p:nvPr/>
-        </p:nvSpPr>
-        <p:spPr>
-          <a:xfrm>
-            <a:off x="548640" y="4974336"/>
-            <a:ext cx="365760" cy="731520"/>
-          </a:xfrm>
-          <a:prstGeom prst="rect">
-            <a:avLst/>
-          </a:prstGeom>
-          <a:noFill/>
-        </p:spPr>
-        <p:txBody>
-          <a:bodyPr wrap="square" anchor="ctr" lIns="36000" rIns="36000" tIns="18000" bIns="18000">
-            <a:spAutoFit/>
-          </a:bodyPr>
-          <a:lstStyle/>
-          <a:p>
-            <a:pPr algn="l"/>
-            <a:r>
-              <a:rPr sz="1568" b="0" i="0">
-                <a:solidFill>
-                  <a:srgbClr val="3B5174"/>
-                </a:solidFill>
-                <a:latin typeface="Arial"/>
-              </a:rPr>
-              <a:t>💡</a:t>
-            </a:r>
-          </a:p>
-        </p:txBody>
-      </p:sp>
-      <p:sp>
-        <p:nvSpPr>
-          <p:cNvPr id="39" name="TextBox 38"/>
-          <p:cNvSpPr txBox="1"/>
-          <p:nvPr/>
-        </p:nvSpPr>
-        <p:spPr>
-          <a:xfrm>
-            <a:off x="960120" y="4974336"/>
-            <a:ext cx="10774375" cy="731520"/>
-          </a:xfrm>
-          <a:prstGeom prst="rect">
-            <a:avLst/>
-          </a:prstGeom>
-          <a:noFill/>
-        </p:spPr>
-        <p:txBody>
-          <a:bodyPr wrap="square" anchor="ctr" lIns="36000" rIns="36000" tIns="18000" bIns="18000">
-            <a:spAutoFit/>
-          </a:bodyPr>
-          <a:lstStyle/>
-          <a:p>
-            <a:pPr algn="l"/>
-            <a:r>
-              <a:rPr sz="1456" b="1" i="0">
-                <a:solidFill>
-                  <a:srgbClr val="1E293B"/>
-                </a:solidFill>
-                <a:latin typeface="Arial"/>
-              </a:rPr>
-              <a:t>The sintering temperature range of CSP overlaps with the thermal decomposition temperature of cellulose, enabling synchronized thermal response to form the insulating layer</a:t>
+              <a:t>The sintering temperature range of CSP overlaps with cellulose thermal decomposition — synchronized response forms the insulating layer</a:t>
             </a:r>
           </a:p>
         </p:txBody>

--- a/slides_en.pptx
+++ b/slides_en.pptx
@@ -8305,7 +8305,7 @@
         <p:spPr>
           <a:xfrm>
             <a:off x="365760" y="2962656"/>
-            <a:ext cx="5638647" cy="2286000"/>
+            <a:ext cx="3710330" cy="2286000"/>
           </a:xfrm>
           <a:prstGeom prst="roundRect">
             <a:avLst>
@@ -8353,7 +8353,7 @@
         <p:spPr>
           <a:xfrm>
             <a:off x="365760" y="2962656"/>
-            <a:ext cx="5638647" cy="36576"/>
+            <a:ext cx="3710330" cy="36576"/>
           </a:xfrm>
           <a:prstGeom prst="rect">
             <a:avLst/>
@@ -8397,22 +8397,22 @@
         <p:spPr>
           <a:xfrm>
             <a:off x="548640" y="3127248"/>
-            <a:ext cx="5272887" cy="329184"/>
-          </a:xfrm>
-          <a:prstGeom prst="rect">
-            <a:avLst/>
-          </a:prstGeom>
-          <a:noFill/>
-        </p:spPr>
-        <p:txBody>
-          <a:bodyPr wrap="square" anchor="t" lIns="36000" rIns="36000" tIns="18000" bIns="18000">
-            <a:spAutoFit/>
-          </a:bodyPr>
-          <a:lstStyle/>
-          <a:p>
-            <a:pPr algn="l"/>
-            <a:r>
-              <a:rPr sz="1680" b="1" i="0">
+            <a:ext cx="3344570" cy="329184"/>
+          </a:xfrm>
+          <a:prstGeom prst="rect">
+            <a:avLst/>
+          </a:prstGeom>
+          <a:noFill/>
+        </p:spPr>
+        <p:txBody>
+          <a:bodyPr wrap="square" anchor="t" lIns="36000" rIns="36000" tIns="18000" bIns="18000">
+            <a:spAutoFit/>
+          </a:bodyPr>
+          <a:lstStyle/>
+          <a:p>
+            <a:pPr algn="l"/>
+            <a:r>
+              <a:rPr sz="1568" b="1" i="0">
                 <a:solidFill>
                   <a:srgbClr val="1E293B"/>
                 </a:solidFill>
@@ -8447,7 +8447,7 @@
           <a:p>
             <a:pPr algn="l"/>
             <a:r>
-              <a:rPr sz="1344" b="0" i="0">
+              <a:rPr sz="1232" b="0" i="0">
                 <a:solidFill>
                   <a:srgbClr val="3B5174"/>
                 </a:solidFill>
@@ -8467,28 +8467,28 @@
         <p:spPr>
           <a:xfrm>
             <a:off x="749808" y="3493008"/>
-            <a:ext cx="5071719" cy="274320"/>
-          </a:xfrm>
-          <a:prstGeom prst="rect">
-            <a:avLst/>
-          </a:prstGeom>
-          <a:noFill/>
-        </p:spPr>
-        <p:txBody>
-          <a:bodyPr wrap="square" anchor="t" lIns="36000" rIns="36000" tIns="18000" bIns="18000">
-            <a:spAutoFit/>
-          </a:bodyPr>
-          <a:lstStyle/>
-          <a:p>
-            <a:pPr algn="l"/>
-            <a:r>
-              <a:rPr sz="1344" b="0" i="0">
+            <a:ext cx="3143402" cy="274320"/>
+          </a:xfrm>
+          <a:prstGeom prst="rect">
+            <a:avLst/>
+          </a:prstGeom>
+          <a:noFill/>
+        </p:spPr>
+        <p:txBody>
+          <a:bodyPr wrap="square" anchor="t" lIns="36000" rIns="36000" tIns="18000" bIns="18000">
+            <a:spAutoFit/>
+          </a:bodyPr>
+          <a:lstStyle/>
+          <a:p>
+            <a:pPr algn="l"/>
+            <a:r>
+              <a:rPr sz="1232" b="0" i="0">
                 <a:solidFill>
                   <a:srgbClr val="475569"/>
                 </a:solidFill>
                 <a:latin typeface="Arial"/>
               </a:rPr>
-              <a:t>Comparing functional differences by varying polymer type (HEC+MC vs MHEC)</a:t>
+              <a:t>Compare functional differences by polymer type</a:t>
             </a:r>
           </a:p>
         </p:txBody>
@@ -8517,7 +8517,7 @@
           <a:p>
             <a:pPr algn="l"/>
             <a:r>
-              <a:rPr sz="1344" b="0" i="0">
+              <a:rPr sz="1232" b="0" i="0">
                 <a:solidFill>
                   <a:srgbClr val="3B5174"/>
                 </a:solidFill>
@@ -8537,28 +8537,28 @@
         <p:spPr>
           <a:xfrm>
             <a:off x="749808" y="3767328"/>
-            <a:ext cx="5071719" cy="274320"/>
-          </a:xfrm>
-          <a:prstGeom prst="rect">
-            <a:avLst/>
-          </a:prstGeom>
-          <a:noFill/>
-        </p:spPr>
-        <p:txBody>
-          <a:bodyPr wrap="square" anchor="t" lIns="36000" rIns="36000" tIns="18000" bIns="18000">
-            <a:spAutoFit/>
-          </a:bodyPr>
-          <a:lstStyle/>
-          <a:p>
-            <a:pPr algn="l"/>
-            <a:r>
-              <a:rPr sz="1344" b="0" i="0">
+            <a:ext cx="3143402" cy="274320"/>
+          </a:xfrm>
+          <a:prstGeom prst="rect">
+            <a:avLst/>
+          </a:prstGeom>
+          <a:noFill/>
+        </p:spPr>
+        <p:txBody>
+          <a:bodyPr wrap="square" anchor="t" lIns="36000" rIns="36000" tIns="18000" bIns="18000">
+            <a:spAutoFit/>
+          </a:bodyPr>
+          <a:lstStyle/>
+          <a:p>
+            <a:pPr algn="l"/>
+            <a:r>
+              <a:rPr sz="1232" b="0" i="0">
                 <a:solidFill>
                   <a:srgbClr val="475569"/>
                 </a:solidFill>
                 <a:latin typeface="Arial"/>
               </a:rPr>
-              <a:t>Verifying the effect on foam structure with two SDS concentration levels</a:t>
+              <a:t>Verify foam structure at two SDS levels</a:t>
             </a:r>
           </a:p>
         </p:txBody>
@@ -8587,7 +8587,7 @@
           <a:p>
             <a:pPr algn="l"/>
             <a:r>
-              <a:rPr sz="1344" b="0" i="0">
+              <a:rPr sz="1232" b="0" i="0">
                 <a:solidFill>
                   <a:srgbClr val="3B5174"/>
                 </a:solidFill>
@@ -8607,28 +8607,28 @@
         <p:spPr>
           <a:xfrm>
             <a:off x="749808" y="4041648"/>
-            <a:ext cx="5071719" cy="274320"/>
-          </a:xfrm>
-          <a:prstGeom prst="rect">
-            <a:avLst/>
-          </a:prstGeom>
-          <a:noFill/>
-        </p:spPr>
-        <p:txBody>
-          <a:bodyPr wrap="square" anchor="t" lIns="36000" rIns="36000" tIns="18000" bIns="18000">
-            <a:spAutoFit/>
-          </a:bodyPr>
-          <a:lstStyle/>
-          <a:p>
-            <a:pPr algn="l"/>
-            <a:r>
-              <a:rPr sz="1344" b="0" i="0">
+            <a:ext cx="3143402" cy="274320"/>
+          </a:xfrm>
+          <a:prstGeom prst="rect">
+            <a:avLst/>
+          </a:prstGeom>
+          <a:noFill/>
+        </p:spPr>
+        <p:txBody>
+          <a:bodyPr wrap="square" anchor="t" lIns="36000" rIns="36000" tIns="18000" bIns="18000">
+            <a:spAutoFit/>
+          </a:bodyPr>
+          <a:lstStyle/>
+          <a:p>
+            <a:pPr algn="l"/>
+            <a:r>
+              <a:rPr sz="1232" b="0" i="0">
                 <a:solidFill>
                   <a:srgbClr val="475569"/>
                 </a:solidFill>
                 <a:latin typeface="Arial"/>
               </a:rPr>
-              <a:t>Direct comparison with commercial AquaGel-K</a:t>
+              <a:t>Direct comparison with AquaGel-K</a:t>
             </a:r>
           </a:p>
         </p:txBody>
@@ -8641,8 +8641,8 @@
         </p:nvSpPr>
         <p:spPr>
           <a:xfrm>
-            <a:off x="6187287" y="2962656"/>
-            <a:ext cx="5638647" cy="2286000"/>
+            <a:off x="4240682" y="2962656"/>
+            <a:ext cx="3710330" cy="2286000"/>
           </a:xfrm>
           <a:prstGeom prst="roundRect">
             <a:avLst>
@@ -8689,8 +8689,8 @@
         </p:nvSpPr>
         <p:spPr>
           <a:xfrm>
-            <a:off x="6187287" y="2962656"/>
-            <a:ext cx="5638647" cy="36576"/>
+            <a:off x="4240682" y="2962656"/>
+            <a:ext cx="3710330" cy="36576"/>
           </a:xfrm>
           <a:prstGeom prst="rect">
             <a:avLst/>
@@ -8733,23 +8733,23 @@
         </p:nvSpPr>
         <p:spPr>
           <a:xfrm>
-            <a:off x="6370167" y="3127248"/>
-            <a:ext cx="5272887" cy="329184"/>
-          </a:xfrm>
-          <a:prstGeom prst="rect">
-            <a:avLst/>
-          </a:prstGeom>
-          <a:noFill/>
-        </p:spPr>
-        <p:txBody>
-          <a:bodyPr wrap="square" anchor="t" lIns="36000" rIns="36000" tIns="18000" bIns="18000">
-            <a:spAutoFit/>
-          </a:bodyPr>
-          <a:lstStyle/>
-          <a:p>
-            <a:pPr algn="l"/>
-            <a:r>
-              <a:rPr sz="1680" b="1" i="0">
+            <a:off x="4423562" y="3127248"/>
+            <a:ext cx="3344570" cy="329184"/>
+          </a:xfrm>
+          <a:prstGeom prst="rect">
+            <a:avLst/>
+          </a:prstGeom>
+          <a:noFill/>
+        </p:spPr>
+        <p:txBody>
+          <a:bodyPr wrap="square" anchor="t" lIns="36000" rIns="36000" tIns="18000" bIns="18000">
+            <a:spAutoFit/>
+          </a:bodyPr>
+          <a:lstStyle/>
+          <a:p>
+            <a:pPr algn="l"/>
+            <a:r>
+              <a:rPr sz="1568" b="1" i="0">
                 <a:solidFill>
                   <a:srgbClr val="1E293B"/>
                 </a:solidFill>
@@ -8768,23 +8768,23 @@
         </p:nvSpPr>
         <p:spPr>
           <a:xfrm>
-            <a:off x="6370167" y="3493008"/>
-            <a:ext cx="5272887" cy="1645920"/>
-          </a:xfrm>
-          <a:prstGeom prst="rect">
-            <a:avLst/>
-          </a:prstGeom>
-          <a:noFill/>
-        </p:spPr>
-        <p:txBody>
-          <a:bodyPr wrap="square" anchor="t" lIns="36000" rIns="36000" tIns="18000" bIns="18000">
-            <a:spAutoFit/>
-          </a:bodyPr>
-          <a:lstStyle/>
-          <a:p>
-            <a:pPr algn="l"/>
-            <a:r>
-              <a:rPr sz="1568" b="0" i="0">
+            <a:off x="4423562" y="3493008"/>
+            <a:ext cx="3344570" cy="1645920"/>
+          </a:xfrm>
+          <a:prstGeom prst="rect">
+            <a:avLst/>
+          </a:prstGeom>
+          <a:noFill/>
+        </p:spPr>
+        <p:txBody>
+          <a:bodyPr wrap="square" anchor="t" lIns="36000" rIns="36000" tIns="18000" bIns="18000">
+            <a:spAutoFit/>
+          </a:bodyPr>
+          <a:lstStyle/>
+          <a:p>
+            <a:pPr algn="l"/>
+            <a:r>
+              <a:rPr sz="1456" b="0" i="0">
                 <a:solidFill>
                   <a:srgbClr val="475569"/>
                 </a:solidFill>
@@ -8796,13 +8796,234 @@
           <a:p>
             <a:pPr algn="l"/>
             <a:r>
-              <a:rPr sz="1568" b="0" i="0">
+              <a:rPr sz="1456" b="0" i="0">
                 <a:solidFill>
                   <a:srgbClr val="475569"/>
                 </a:solidFill>
                 <a:latin typeface="Arial"/>
               </a:rPr>
-              <a:t>→ HEC+MC 1 wt% ／ CSP 5 wt% ／ SDS 0.1 wt%</a:t>
+              <a:t>→ HEC+MC 1 wt%</a:t>
+            </a:r>
+          </a:p>
+          <a:p>
+            <a:pPr algn="l"/>
+            <a:r>
+              <a:rPr sz="1456" b="0" i="0">
+                <a:solidFill>
+                  <a:srgbClr val="475569"/>
+                </a:solidFill>
+                <a:latin typeface="Arial"/>
+              </a:rPr>
+              <a:t>／ CSP 5 wt%</a:t>
+            </a:r>
+          </a:p>
+          <a:p>
+            <a:pPr algn="l"/>
+            <a:r>
+              <a:rPr sz="1456" b="0" i="0">
+                <a:solidFill>
+                  <a:srgbClr val="475569"/>
+                </a:solidFill>
+                <a:latin typeface="Arial"/>
+              </a:rPr>
+              <a:t>／ SDS 0.1 wt%</a:t>
+            </a:r>
+          </a:p>
+        </p:txBody>
+      </p:sp>
+      <p:sp>
+        <p:nvSpPr>
+          <p:cNvPr id="43" name="Rounded Rectangle 42"/>
+          <p:cNvSpPr/>
+          <p:nvPr/>
+        </p:nvSpPr>
+        <p:spPr>
+          <a:xfrm>
+            <a:off x="8115604" y="2962656"/>
+            <a:ext cx="3710330" cy="1975104"/>
+          </a:xfrm>
+          <a:prstGeom prst="roundRect">
+            <a:avLst>
+              <a:gd name="adj" fmla="val 2000"/>
+            </a:avLst>
+          </a:prstGeom>
+          <a:solidFill>
+            <a:srgbClr val="F5F8FC"/>
+          </a:solidFill>
+          <a:ln w="12700">
+            <a:solidFill>
+              <a:srgbClr val="C0D0E0"/>
+            </a:solidFill>
+          </a:ln>
+          <a:effectLst/>
+        </p:spPr>
+        <p:style>
+          <a:lnRef idx="1">
+            <a:schemeClr val="accent1"/>
+          </a:lnRef>
+          <a:fillRef idx="3">
+            <a:schemeClr val="accent1"/>
+          </a:fillRef>
+          <a:effectRef idx="2">
+            <a:schemeClr val="accent1"/>
+          </a:effectRef>
+          <a:fontRef idx="minor">
+            <a:schemeClr val="lt1"/>
+          </a:fontRef>
+        </p:style>
+        <p:txBody>
+          <a:bodyPr rtlCol="0" anchor="ctr"/>
+          <a:lstStyle/>
+          <a:p>
+            <a:pPr algn="ctr"/>
+          </a:p>
+        </p:txBody>
+      </p:sp>
+      <p:sp>
+        <p:nvSpPr>
+          <p:cNvPr id="44" name="Rectangle 43"/>
+          <p:cNvSpPr/>
+          <p:nvPr/>
+        </p:nvSpPr>
+        <p:spPr>
+          <a:xfrm>
+            <a:off x="8225332" y="3072384"/>
+            <a:ext cx="868680" cy="292608"/>
+          </a:xfrm>
+          <a:prstGeom prst="rect">
+            <a:avLst/>
+          </a:prstGeom>
+          <a:solidFill>
+            <a:srgbClr val="1E293B"/>
+          </a:solidFill>
+          <a:ln>
+            <a:noFill/>
+          </a:ln>
+          <a:effectLst/>
+        </p:spPr>
+        <p:style>
+          <a:lnRef idx="1">
+            <a:schemeClr val="accent1"/>
+          </a:lnRef>
+          <a:fillRef idx="3">
+            <a:schemeClr val="accent1"/>
+          </a:fillRef>
+          <a:effectRef idx="2">
+            <a:schemeClr val="accent1"/>
+          </a:effectRef>
+          <a:fontRef idx="minor">
+            <a:schemeClr val="lt1"/>
+          </a:fontRef>
+        </p:style>
+        <p:txBody>
+          <a:bodyPr rtlCol="0" anchor="ctr"/>
+          <a:lstStyle/>
+          <a:p>
+            <a:pPr algn="ctr"/>
+          </a:p>
+        </p:txBody>
+      </p:sp>
+      <p:sp>
+        <p:nvSpPr>
+          <p:cNvPr id="45" name="TextBox 44"/>
+          <p:cNvSpPr txBox="1"/>
+          <p:nvPr/>
+        </p:nvSpPr>
+        <p:spPr>
+          <a:xfrm>
+            <a:off x="8225332" y="3072384"/>
+            <a:ext cx="868680" cy="292608"/>
+          </a:xfrm>
+          <a:prstGeom prst="rect">
+            <a:avLst/>
+          </a:prstGeom>
+          <a:noFill/>
+        </p:spPr>
+        <p:txBody>
+          <a:bodyPr wrap="square" anchor="ctr" lIns="36000" rIns="36000" tIns="18000" bIns="18000">
+            <a:spAutoFit/>
+          </a:bodyPr>
+          <a:lstStyle/>
+          <a:p>
+            <a:pPr algn="ctr"/>
+            <a:r>
+              <a:rPr sz="1232" b="1" i="0">
+                <a:solidFill>
+                  <a:srgbClr val="FFFFFF"/>
+                </a:solidFill>
+                <a:latin typeface="Arial"/>
+              </a:rPr>
+              <a:t>Photo</a:t>
+            </a:r>
+          </a:p>
+        </p:txBody>
+      </p:sp>
+      <p:sp>
+        <p:nvSpPr>
+          <p:cNvPr id="46" name="TextBox 45"/>
+          <p:cNvSpPr txBox="1"/>
+          <p:nvPr/>
+        </p:nvSpPr>
+        <p:spPr>
+          <a:xfrm>
+            <a:off x="8115604" y="2962656"/>
+            <a:ext cx="3710330" cy="1975104"/>
+          </a:xfrm>
+          <a:prstGeom prst="rect">
+            <a:avLst/>
+          </a:prstGeom>
+          <a:noFill/>
+        </p:spPr>
+        <p:txBody>
+          <a:bodyPr wrap="square" anchor="ctr" lIns="36000" rIns="36000" tIns="18000" bIns="18000">
+            <a:spAutoFit/>
+          </a:bodyPr>
+          <a:lstStyle/>
+          <a:p>
+            <a:pPr algn="ctr"/>
+            <a:r>
+              <a:rPr sz="1344" b="0" i="0">
+                <a:solidFill>
+                  <a:srgbClr val="AAB4C0"/>
+                </a:solidFill>
+                <a:latin typeface="Arial"/>
+              </a:rPr>
+              <a:t>(Paste paper figure here)</a:t>
+            </a:r>
+          </a:p>
+        </p:txBody>
+      </p:sp>
+      <p:sp>
+        <p:nvSpPr>
+          <p:cNvPr id="47" name="TextBox 46"/>
+          <p:cNvSpPr txBox="1"/>
+          <p:nvPr/>
+        </p:nvSpPr>
+        <p:spPr>
+          <a:xfrm>
+            <a:off x="8115604" y="4974336"/>
+            <a:ext cx="3710330" cy="274320"/>
+          </a:xfrm>
+          <a:prstGeom prst="rect">
+            <a:avLst/>
+          </a:prstGeom>
+          <a:noFill/>
+        </p:spPr>
+        <p:txBody>
+          <a:bodyPr wrap="square" anchor="t" lIns="36000" rIns="36000" tIns="18000" bIns="18000">
+            <a:spAutoFit/>
+          </a:bodyPr>
+          <a:lstStyle/>
+          <a:p>
+            <a:pPr algn="ctr"/>
+            <a:r>
+              <a:rPr sz="1120" b="0" i="1">
+                <a:solidFill>
+                  <a:srgbClr val="64748B"/>
+                </a:solidFill>
+                <a:latin typeface="Arial"/>
+              </a:rPr>
+              <a:t>Appearance of the five formulations</a:t>
             </a:r>
           </a:p>
         </p:txBody>
@@ -9159,7 +9380,204 @@
         <p:spPr>
           <a:xfrm>
             <a:off x="365760" y="859536"/>
-            <a:ext cx="3728618" cy="2788920"/>
+            <a:ext cx="3805019" cy="5449824"/>
+          </a:xfrm>
+          <a:prstGeom prst="roundRect">
+            <a:avLst>
+              <a:gd name="adj" fmla="val 2000"/>
+            </a:avLst>
+          </a:prstGeom>
+          <a:solidFill>
+            <a:srgbClr val="F5F8FC"/>
+          </a:solidFill>
+          <a:ln w="12700">
+            <a:solidFill>
+              <a:srgbClr val="C0D0E0"/>
+            </a:solidFill>
+          </a:ln>
+          <a:effectLst/>
+        </p:spPr>
+        <p:style>
+          <a:lnRef idx="1">
+            <a:schemeClr val="accent1"/>
+          </a:lnRef>
+          <a:fillRef idx="3">
+            <a:schemeClr val="accent1"/>
+          </a:fillRef>
+          <a:effectRef idx="2">
+            <a:schemeClr val="accent1"/>
+          </a:effectRef>
+          <a:fontRef idx="minor">
+            <a:schemeClr val="lt1"/>
+          </a:fontRef>
+        </p:style>
+        <p:txBody>
+          <a:bodyPr rtlCol="0" anchor="ctr"/>
+          <a:lstStyle/>
+          <a:p>
+            <a:pPr algn="ctr"/>
+          </a:p>
+        </p:txBody>
+      </p:sp>
+      <p:sp>
+        <p:nvSpPr>
+          <p:cNvPr id="11" name="Rectangle 10"/>
+          <p:cNvSpPr/>
+          <p:nvPr/>
+        </p:nvSpPr>
+        <p:spPr>
+          <a:xfrm>
+            <a:off x="475488" y="969264"/>
+            <a:ext cx="868680" cy="292608"/>
+          </a:xfrm>
+          <a:prstGeom prst="rect">
+            <a:avLst/>
+          </a:prstGeom>
+          <a:solidFill>
+            <a:srgbClr val="1E293B"/>
+          </a:solidFill>
+          <a:ln>
+            <a:noFill/>
+          </a:ln>
+          <a:effectLst/>
+        </p:spPr>
+        <p:style>
+          <a:lnRef idx="1">
+            <a:schemeClr val="accent1"/>
+          </a:lnRef>
+          <a:fillRef idx="3">
+            <a:schemeClr val="accent1"/>
+          </a:fillRef>
+          <a:effectRef idx="2">
+            <a:schemeClr val="accent1"/>
+          </a:effectRef>
+          <a:fontRef idx="minor">
+            <a:schemeClr val="lt1"/>
+          </a:fontRef>
+        </p:style>
+        <p:txBody>
+          <a:bodyPr rtlCol="0" anchor="ctr"/>
+          <a:lstStyle/>
+          <a:p>
+            <a:pPr algn="ctr"/>
+          </a:p>
+        </p:txBody>
+      </p:sp>
+      <p:sp>
+        <p:nvSpPr>
+          <p:cNvPr id="12" name="TextBox 11"/>
+          <p:cNvSpPr txBox="1"/>
+          <p:nvPr/>
+        </p:nvSpPr>
+        <p:spPr>
+          <a:xfrm>
+            <a:off x="475488" y="969264"/>
+            <a:ext cx="868680" cy="292608"/>
+          </a:xfrm>
+          <a:prstGeom prst="rect">
+            <a:avLst/>
+          </a:prstGeom>
+          <a:noFill/>
+        </p:spPr>
+        <p:txBody>
+          <a:bodyPr wrap="square" anchor="ctr" lIns="36000" rIns="36000" tIns="18000" bIns="18000">
+            <a:spAutoFit/>
+          </a:bodyPr>
+          <a:lstStyle/>
+          <a:p>
+            <a:pPr algn="ctr"/>
+            <a:r>
+              <a:rPr sz="1232" b="1" i="0">
+                <a:solidFill>
+                  <a:srgbClr val="FFFFFF"/>
+                </a:solidFill>
+                <a:latin typeface="Arial"/>
+              </a:rPr>
+              <a:t>Setup</a:t>
+            </a:r>
+          </a:p>
+        </p:txBody>
+      </p:sp>
+      <p:sp>
+        <p:nvSpPr>
+          <p:cNvPr id="13" name="TextBox 12"/>
+          <p:cNvSpPr txBox="1"/>
+          <p:nvPr/>
+        </p:nvSpPr>
+        <p:spPr>
+          <a:xfrm>
+            <a:off x="365760" y="859536"/>
+            <a:ext cx="3805019" cy="5449824"/>
+          </a:xfrm>
+          <a:prstGeom prst="rect">
+            <a:avLst/>
+          </a:prstGeom>
+          <a:noFill/>
+        </p:spPr>
+        <p:txBody>
+          <a:bodyPr wrap="square" anchor="ctr" lIns="36000" rIns="36000" tIns="18000" bIns="18000">
+            <a:spAutoFit/>
+          </a:bodyPr>
+          <a:lstStyle/>
+          <a:p>
+            <a:pPr algn="ctr"/>
+            <a:r>
+              <a:rPr sz="1344" b="0" i="0">
+                <a:solidFill>
+                  <a:srgbClr val="AAB4C0"/>
+                </a:solidFill>
+                <a:latin typeface="Arial"/>
+              </a:rPr>
+              <a:t>(Paste paper figure here)</a:t>
+            </a:r>
+          </a:p>
+        </p:txBody>
+      </p:sp>
+      <p:sp>
+        <p:nvSpPr>
+          <p:cNvPr id="14" name="TextBox 13"/>
+          <p:cNvSpPr txBox="1"/>
+          <p:nvPr/>
+        </p:nvSpPr>
+        <p:spPr>
+          <a:xfrm>
+            <a:off x="365760" y="6345936"/>
+            <a:ext cx="3805019" cy="274320"/>
+          </a:xfrm>
+          <a:prstGeom prst="rect">
+            <a:avLst/>
+          </a:prstGeom>
+          <a:noFill/>
+        </p:spPr>
+        <p:txBody>
+          <a:bodyPr wrap="square" anchor="t" lIns="36000" rIns="36000" tIns="18000" bIns="18000">
+            <a:spAutoFit/>
+          </a:bodyPr>
+          <a:lstStyle/>
+          <a:p>
+            <a:pPr algn="ctr"/>
+            <a:r>
+              <a:rPr sz="1120" b="0" i="1">
+                <a:solidFill>
+                  <a:srgbClr val="64748B"/>
+                </a:solidFill>
+                <a:latin typeface="Arial"/>
+              </a:rPr>
+              <a:t>Combustion test setup (MAP-Pro torch / plywood substrate)</a:t>
+            </a:r>
+          </a:p>
+        </p:txBody>
+      </p:sp>
+      <p:sp>
+        <p:nvSpPr>
+          <p:cNvPr id="15" name="Rounded Rectangle 14"/>
+          <p:cNvSpPr/>
+          <p:nvPr/>
+        </p:nvSpPr>
+        <p:spPr>
+          <a:xfrm>
+            <a:off x="4353659" y="859536"/>
+            <a:ext cx="3667557" cy="1798320"/>
           </a:xfrm>
           <a:prstGeom prst="roundRect">
             <a:avLst>
@@ -9200,14 +9618,14 @@
       </p:sp>
       <p:sp>
         <p:nvSpPr>
-          <p:cNvPr id="11" name="Rectangle 10"/>
+          <p:cNvPr id="16" name="Rectangle 15"/>
           <p:cNvSpPr/>
           <p:nvPr/>
         </p:nvSpPr>
         <p:spPr>
           <a:xfrm>
-            <a:off x="365760" y="859536"/>
-            <a:ext cx="3728618" cy="36576"/>
+            <a:off x="4353659" y="859536"/>
+            <a:ext cx="3667557" cy="36576"/>
           </a:xfrm>
           <a:prstGeom prst="rect">
             <a:avLst/>
@@ -9244,14 +9662,14 @@
       </p:sp>
       <p:sp>
         <p:nvSpPr>
-          <p:cNvPr id="12" name="TextBox 11"/>
-          <p:cNvSpPr txBox="1"/>
-          <p:nvPr/>
-        </p:nvSpPr>
-        <p:spPr>
-          <a:xfrm>
-            <a:off x="548640" y="1024128"/>
-            <a:ext cx="3362858" cy="219456"/>
+          <p:cNvPr id="17" name="TextBox 16"/>
+          <p:cNvSpPr txBox="1"/>
+          <p:nvPr/>
+        </p:nvSpPr>
+        <p:spPr>
+          <a:xfrm>
+            <a:off x="4536539" y="1024128"/>
+            <a:ext cx="3301797" cy="219456"/>
           </a:xfrm>
           <a:prstGeom prst="rect">
             <a:avLst/>
@@ -9279,29 +9697,29 @@
       </p:sp>
       <p:sp>
         <p:nvSpPr>
-          <p:cNvPr id="13" name="TextBox 12"/>
-          <p:cNvSpPr txBox="1"/>
-          <p:nvPr/>
-        </p:nvSpPr>
-        <p:spPr>
-          <a:xfrm>
-            <a:off x="548640" y="1261872"/>
-            <a:ext cx="3362858" cy="329184"/>
-          </a:xfrm>
-          <a:prstGeom prst="rect">
-            <a:avLst/>
-          </a:prstGeom>
-          <a:noFill/>
-        </p:spPr>
-        <p:txBody>
-          <a:bodyPr wrap="square" anchor="t" lIns="36000" rIns="36000" tIns="18000" bIns="18000">
-            <a:spAutoFit/>
-          </a:bodyPr>
-          <a:lstStyle/>
-          <a:p>
-            <a:pPr algn="l"/>
-            <a:r>
-              <a:rPr sz="1568" b="1" i="0">
+          <p:cNvPr id="18" name="TextBox 17"/>
+          <p:cNvSpPr txBox="1"/>
+          <p:nvPr/>
+        </p:nvSpPr>
+        <p:spPr>
+          <a:xfrm>
+            <a:off x="4536539" y="1261872"/>
+            <a:ext cx="3301797" cy="329184"/>
+          </a:xfrm>
+          <a:prstGeom prst="rect">
+            <a:avLst/>
+          </a:prstGeom>
+          <a:noFill/>
+        </p:spPr>
+        <p:txBody>
+          <a:bodyPr wrap="square" anchor="t" lIns="36000" rIns="36000" tIns="18000" bIns="18000">
+            <a:spAutoFit/>
+          </a:bodyPr>
+          <a:lstStyle/>
+          <a:p>
+            <a:pPr algn="l"/>
+            <a:r>
+              <a:rPr sz="1456" b="1" i="0">
                 <a:solidFill>
                   <a:srgbClr val="1E293B"/>
                 </a:solidFill>
@@ -9314,13 +9732,13 @@
       </p:sp>
       <p:sp>
         <p:nvSpPr>
-          <p:cNvPr id="14" name="TextBox 13"/>
-          <p:cNvSpPr txBox="1"/>
-          <p:nvPr/>
-        </p:nvSpPr>
-        <p:spPr>
-          <a:xfrm>
-            <a:off x="548640" y="1627632"/>
+          <p:cNvPr id="19" name="TextBox 18"/>
+          <p:cNvSpPr txBox="1"/>
+          <p:nvPr/>
+        </p:nvSpPr>
+        <p:spPr>
+          <a:xfrm>
+            <a:off x="4536539" y="1627632"/>
             <a:ext cx="182880" cy="274320"/>
           </a:xfrm>
           <a:prstGeom prst="rect">
@@ -9336,7 +9754,7 @@
           <a:p>
             <a:pPr algn="l"/>
             <a:r>
-              <a:rPr sz="1232" b="0" i="0">
+              <a:rPr sz="1120" b="0" i="0">
                 <a:solidFill>
                   <a:srgbClr val="3B5174"/>
                 </a:solidFill>
@@ -9349,48 +9767,48 @@
       </p:sp>
       <p:sp>
         <p:nvSpPr>
-          <p:cNvPr id="15" name="TextBox 14"/>
-          <p:cNvSpPr txBox="1"/>
-          <p:nvPr/>
-        </p:nvSpPr>
-        <p:spPr>
-          <a:xfrm>
-            <a:off x="749808" y="1627632"/>
-            <a:ext cx="3161690" cy="274320"/>
-          </a:xfrm>
-          <a:prstGeom prst="rect">
-            <a:avLst/>
-          </a:prstGeom>
-          <a:noFill/>
-        </p:spPr>
-        <p:txBody>
-          <a:bodyPr wrap="square" anchor="t" lIns="36000" rIns="36000" tIns="18000" bIns="18000">
-            <a:spAutoFit/>
-          </a:bodyPr>
-          <a:lstStyle/>
-          <a:p>
-            <a:pPr algn="l"/>
-            <a:r>
-              <a:rPr sz="1232" b="0" i="0">
+          <p:cNvPr id="20" name="TextBox 19"/>
+          <p:cNvSpPr txBox="1"/>
+          <p:nvPr/>
+        </p:nvSpPr>
+        <p:spPr>
+          <a:xfrm>
+            <a:off x="4737707" y="1627632"/>
+            <a:ext cx="3100629" cy="274320"/>
+          </a:xfrm>
+          <a:prstGeom prst="rect">
+            <a:avLst/>
+          </a:prstGeom>
+          <a:noFill/>
+        </p:spPr>
+        <p:txBody>
+          <a:bodyPr wrap="square" anchor="t" lIns="36000" rIns="36000" tIns="18000" bIns="18000">
+            <a:spAutoFit/>
+          </a:bodyPr>
+          <a:lstStyle/>
+          <a:p>
+            <a:pPr algn="l"/>
+            <a:r>
+              <a:rPr sz="1120" b="0" i="0">
                 <a:solidFill>
                   <a:srgbClr val="475569"/>
                 </a:solidFill>
                 <a:latin typeface="Arial"/>
               </a:rPr>
-              <a:t>Oscillatory frequency sweep (G', G'')</a:t>
-            </a:r>
-          </a:p>
-        </p:txBody>
-      </p:sp>
-      <p:sp>
-        <p:nvSpPr>
-          <p:cNvPr id="16" name="TextBox 15"/>
-          <p:cNvSpPr txBox="1"/>
-          <p:nvPr/>
-        </p:nvSpPr>
-        <p:spPr>
-          <a:xfrm>
-            <a:off x="548640" y="1901952"/>
+              <a:t>Oscillatory sweep (G', G'')</a:t>
+            </a:r>
+          </a:p>
+        </p:txBody>
+      </p:sp>
+      <p:sp>
+        <p:nvSpPr>
+          <p:cNvPr id="21" name="TextBox 20"/>
+          <p:cNvSpPr txBox="1"/>
+          <p:nvPr/>
+        </p:nvSpPr>
+        <p:spPr>
+          <a:xfrm>
+            <a:off x="4536539" y="1901952"/>
             <a:ext cx="182880" cy="274320"/>
           </a:xfrm>
           <a:prstGeom prst="rect">
@@ -9406,7 +9824,7 @@
           <a:p>
             <a:pPr algn="l"/>
             <a:r>
-              <a:rPr sz="1232" b="0" i="0">
+              <a:rPr sz="1120" b="0" i="0">
                 <a:solidFill>
                   <a:srgbClr val="3B5174"/>
                 </a:solidFill>
@@ -9419,48 +9837,48 @@
       </p:sp>
       <p:sp>
         <p:nvSpPr>
-          <p:cNvPr id="17" name="TextBox 16"/>
-          <p:cNvSpPr txBox="1"/>
-          <p:nvPr/>
-        </p:nvSpPr>
-        <p:spPr>
-          <a:xfrm>
-            <a:off x="749808" y="1901952"/>
-            <a:ext cx="3161690" cy="274320"/>
-          </a:xfrm>
-          <a:prstGeom prst="rect">
-            <a:avLst/>
-          </a:prstGeom>
-          <a:noFill/>
-        </p:spPr>
-        <p:txBody>
-          <a:bodyPr wrap="square" anchor="t" lIns="36000" rIns="36000" tIns="18000" bIns="18000">
-            <a:spAutoFit/>
-          </a:bodyPr>
-          <a:lstStyle/>
-          <a:p>
-            <a:pPr algn="l"/>
-            <a:r>
-              <a:rPr sz="1232" b="0" i="0">
+          <p:cNvPr id="22" name="TextBox 21"/>
+          <p:cNvSpPr txBox="1"/>
+          <p:nvPr/>
+        </p:nvSpPr>
+        <p:spPr>
+          <a:xfrm>
+            <a:off x="4737707" y="1901952"/>
+            <a:ext cx="3100629" cy="274320"/>
+          </a:xfrm>
+          <a:prstGeom prst="rect">
+            <a:avLst/>
+          </a:prstGeom>
+          <a:noFill/>
+        </p:spPr>
+        <p:txBody>
+          <a:bodyPr wrap="square" anchor="t" lIns="36000" rIns="36000" tIns="18000" bIns="18000">
+            <a:spAutoFit/>
+          </a:bodyPr>
+          <a:lstStyle/>
+          <a:p>
+            <a:pPr algn="l"/>
+            <a:r>
+              <a:rPr sz="1120" b="0" i="0">
                 <a:solidFill>
                   <a:srgbClr val="475569"/>
                 </a:solidFill>
                 <a:latin typeface="Arial"/>
               </a:rPr>
-              <a:t>Steady-flow sweep (viscosity vs. shear rate)</a:t>
-            </a:r>
-          </a:p>
-        </p:txBody>
-      </p:sp>
-      <p:sp>
-        <p:nvSpPr>
-          <p:cNvPr id="18" name="TextBox 17"/>
-          <p:cNvSpPr txBox="1"/>
-          <p:nvPr/>
-        </p:nvSpPr>
-        <p:spPr>
-          <a:xfrm>
-            <a:off x="548640" y="2176272"/>
+              <a:t>Steady-flow sweep (viscosity)</a:t>
+            </a:r>
+          </a:p>
+        </p:txBody>
+      </p:sp>
+      <p:sp>
+        <p:nvSpPr>
+          <p:cNvPr id="23" name="TextBox 22"/>
+          <p:cNvSpPr txBox="1"/>
+          <p:nvPr/>
+        </p:nvSpPr>
+        <p:spPr>
+          <a:xfrm>
+            <a:off x="4536539" y="2176272"/>
             <a:ext cx="182880" cy="274320"/>
           </a:xfrm>
           <a:prstGeom prst="rect">
@@ -9476,7 +9894,7 @@
           <a:p>
             <a:pPr algn="l"/>
             <a:r>
-              <a:rPr sz="1232" b="0" i="0">
+              <a:rPr sz="1120" b="0" i="0">
                 <a:solidFill>
                   <a:srgbClr val="3B5174"/>
                 </a:solidFill>
@@ -9489,49 +9907,49 @@
       </p:sp>
       <p:sp>
         <p:nvSpPr>
-          <p:cNvPr id="19" name="TextBox 18"/>
-          <p:cNvSpPr txBox="1"/>
-          <p:nvPr/>
-        </p:nvSpPr>
-        <p:spPr>
-          <a:xfrm>
-            <a:off x="749808" y="2176272"/>
-            <a:ext cx="3161690" cy="274320"/>
-          </a:xfrm>
-          <a:prstGeom prst="rect">
-            <a:avLst/>
-          </a:prstGeom>
-          <a:noFill/>
-        </p:spPr>
-        <p:txBody>
-          <a:bodyPr wrap="square" anchor="t" lIns="36000" rIns="36000" tIns="18000" bIns="18000">
-            <a:spAutoFit/>
-          </a:bodyPr>
-          <a:lstStyle/>
-          <a:p>
-            <a:pPr algn="l"/>
-            <a:r>
-              <a:rPr sz="1232" b="0" i="0">
+          <p:cNvPr id="24" name="TextBox 23"/>
+          <p:cNvSpPr txBox="1"/>
+          <p:nvPr/>
+        </p:nvSpPr>
+        <p:spPr>
+          <a:xfrm>
+            <a:off x="4737707" y="2176272"/>
+            <a:ext cx="3100629" cy="274320"/>
+          </a:xfrm>
+          <a:prstGeom prst="rect">
+            <a:avLst/>
+          </a:prstGeom>
+          <a:noFill/>
+        </p:spPr>
+        <p:txBody>
+          <a:bodyPr wrap="square" anchor="t" lIns="36000" rIns="36000" tIns="18000" bIns="18000">
+            <a:spAutoFit/>
+          </a:bodyPr>
+          <a:lstStyle/>
+          <a:p>
+            <a:pPr algn="l"/>
+            <a:r>
+              <a:rPr sz="1120" b="0" i="0">
                 <a:solidFill>
                   <a:srgbClr val="475569"/>
                 </a:solidFill>
                 <a:latin typeface="Arial"/>
               </a:rPr>
-              <a:t>Herschel-Bulkley model fitting</a:t>
-            </a:r>
-          </a:p>
-        </p:txBody>
-      </p:sp>
-      <p:sp>
-        <p:nvSpPr>
-          <p:cNvPr id="20" name="Rounded Rectangle 19"/>
+              <a:t>Herschel-Bulkley fitting</a:t>
+            </a:r>
+          </a:p>
+        </p:txBody>
+      </p:sp>
+      <p:sp>
+        <p:nvSpPr>
+          <p:cNvPr id="25" name="Rounded Rectangle 24"/>
           <p:cNvSpPr/>
           <p:nvPr/>
         </p:nvSpPr>
         <p:spPr>
           <a:xfrm>
-            <a:off x="4231538" y="859536"/>
-            <a:ext cx="3728618" cy="2788920"/>
+            <a:off x="8158377" y="859536"/>
+            <a:ext cx="3667557" cy="1798320"/>
           </a:xfrm>
           <a:prstGeom prst="roundRect">
             <a:avLst>
@@ -9572,14 +9990,14 @@
       </p:sp>
       <p:sp>
         <p:nvSpPr>
-          <p:cNvPr id="21" name="Rectangle 20"/>
+          <p:cNvPr id="26" name="Rectangle 25"/>
           <p:cNvSpPr/>
           <p:nvPr/>
         </p:nvSpPr>
         <p:spPr>
           <a:xfrm>
-            <a:off x="4231538" y="859536"/>
-            <a:ext cx="3728618" cy="36576"/>
+            <a:off x="8158377" y="859536"/>
+            <a:ext cx="3667557" cy="36576"/>
           </a:xfrm>
           <a:prstGeom prst="rect">
             <a:avLst/>
@@ -9616,14 +10034,14 @@
       </p:sp>
       <p:sp>
         <p:nvSpPr>
-          <p:cNvPr id="22" name="TextBox 21"/>
-          <p:cNvSpPr txBox="1"/>
-          <p:nvPr/>
-        </p:nvSpPr>
-        <p:spPr>
-          <a:xfrm>
-            <a:off x="4414418" y="1024128"/>
-            <a:ext cx="3362858" cy="219456"/>
+          <p:cNvPr id="27" name="TextBox 26"/>
+          <p:cNvSpPr txBox="1"/>
+          <p:nvPr/>
+        </p:nvSpPr>
+        <p:spPr>
+          <a:xfrm>
+            <a:off x="8341257" y="1024128"/>
+            <a:ext cx="3301797" cy="219456"/>
           </a:xfrm>
           <a:prstGeom prst="rect">
             <a:avLst/>
@@ -9651,48 +10069,48 @@
       </p:sp>
       <p:sp>
         <p:nvSpPr>
-          <p:cNvPr id="23" name="TextBox 22"/>
-          <p:cNvSpPr txBox="1"/>
-          <p:nvPr/>
-        </p:nvSpPr>
-        <p:spPr>
-          <a:xfrm>
-            <a:off x="4414418" y="1261872"/>
-            <a:ext cx="3362858" cy="329184"/>
-          </a:xfrm>
-          <a:prstGeom prst="rect">
-            <a:avLst/>
-          </a:prstGeom>
-          <a:noFill/>
-        </p:spPr>
-        <p:txBody>
-          <a:bodyPr wrap="square" anchor="t" lIns="36000" rIns="36000" tIns="18000" bIns="18000">
-            <a:spAutoFit/>
-          </a:bodyPr>
-          <a:lstStyle/>
-          <a:p>
-            <a:pPr algn="l"/>
-            <a:r>
-              <a:rPr sz="1568" b="1" i="0">
+          <p:cNvPr id="28" name="TextBox 27"/>
+          <p:cNvSpPr txBox="1"/>
+          <p:nvPr/>
+        </p:nvSpPr>
+        <p:spPr>
+          <a:xfrm>
+            <a:off x="8341257" y="1261872"/>
+            <a:ext cx="3301797" cy="329184"/>
+          </a:xfrm>
+          <a:prstGeom prst="rect">
+            <a:avLst/>
+          </a:prstGeom>
+          <a:noFill/>
+        </p:spPr>
+        <p:txBody>
+          <a:bodyPr wrap="square" anchor="t" lIns="36000" rIns="36000" tIns="18000" bIns="18000">
+            <a:spAutoFit/>
+          </a:bodyPr>
+          <a:lstStyle/>
+          <a:p>
+            <a:pPr algn="l"/>
+            <a:r>
+              <a:rPr sz="1456" b="1" i="0">
                 <a:solidFill>
                   <a:srgbClr val="1E293B"/>
                 </a:solidFill>
                 <a:latin typeface="Arial"/>
               </a:rPr>
-              <a:t>Combustion Test (Time-to-char)</a:t>
-            </a:r>
-          </a:p>
-        </p:txBody>
-      </p:sp>
-      <p:sp>
-        <p:nvSpPr>
-          <p:cNvPr id="24" name="TextBox 23"/>
-          <p:cNvSpPr txBox="1"/>
-          <p:nvPr/>
-        </p:nvSpPr>
-        <p:spPr>
-          <a:xfrm>
-            <a:off x="4414418" y="1627632"/>
+              <a:t>Combustion Test</a:t>
+            </a:r>
+          </a:p>
+        </p:txBody>
+      </p:sp>
+      <p:sp>
+        <p:nvSpPr>
+          <p:cNvPr id="29" name="TextBox 28"/>
+          <p:cNvSpPr txBox="1"/>
+          <p:nvPr/>
+        </p:nvSpPr>
+        <p:spPr>
+          <a:xfrm>
+            <a:off x="8341257" y="1627632"/>
             <a:ext cx="182880" cy="274320"/>
           </a:xfrm>
           <a:prstGeom prst="rect">
@@ -9708,7 +10126,7 @@
           <a:p>
             <a:pPr algn="l"/>
             <a:r>
-              <a:rPr sz="1232" b="0" i="0">
+              <a:rPr sz="1120" b="0" i="0">
                 <a:solidFill>
                   <a:srgbClr val="3B5174"/>
                 </a:solidFill>
@@ -9721,48 +10139,48 @@
       </p:sp>
       <p:sp>
         <p:nvSpPr>
-          <p:cNvPr id="25" name="TextBox 24"/>
-          <p:cNvSpPr txBox="1"/>
-          <p:nvPr/>
-        </p:nvSpPr>
-        <p:spPr>
-          <a:xfrm>
-            <a:off x="4615586" y="1627632"/>
-            <a:ext cx="3161690" cy="274320"/>
-          </a:xfrm>
-          <a:prstGeom prst="rect">
-            <a:avLst/>
-          </a:prstGeom>
-          <a:noFill/>
-        </p:spPr>
-        <p:txBody>
-          <a:bodyPr wrap="square" anchor="t" lIns="36000" rIns="36000" tIns="18000" bIns="18000">
-            <a:spAutoFit/>
-          </a:bodyPr>
-          <a:lstStyle/>
-          <a:p>
-            <a:pPr algn="l"/>
-            <a:r>
-              <a:rPr sz="1232" b="0" i="0">
+          <p:cNvPr id="30" name="TextBox 29"/>
+          <p:cNvSpPr txBox="1"/>
+          <p:nvPr/>
+        </p:nvSpPr>
+        <p:spPr>
+          <a:xfrm>
+            <a:off x="8542425" y="1627632"/>
+            <a:ext cx="3100629" cy="274320"/>
+          </a:xfrm>
+          <a:prstGeom prst="rect">
+            <a:avLst/>
+          </a:prstGeom>
+          <a:noFill/>
+        </p:spPr>
+        <p:txBody>
+          <a:bodyPr wrap="square" anchor="t" lIns="36000" rIns="36000" tIns="18000" bIns="18000">
+            <a:spAutoFit/>
+          </a:bodyPr>
+          <a:lstStyle/>
+          <a:p>
+            <a:pPr algn="l"/>
+            <a:r>
+              <a:rPr sz="1120" b="0" i="0">
                 <a:solidFill>
                   <a:srgbClr val="475569"/>
                 </a:solidFill>
                 <a:latin typeface="Arial"/>
               </a:rPr>
-              <a:t>Whitewood plywood heated with MAP-Pro torch (~2054°C)</a:t>
-            </a:r>
-          </a:p>
-        </p:txBody>
-      </p:sp>
-      <p:sp>
-        <p:nvSpPr>
-          <p:cNvPr id="26" name="TextBox 25"/>
-          <p:cNvSpPr txBox="1"/>
-          <p:nvPr/>
-        </p:nvSpPr>
-        <p:spPr>
-          <a:xfrm>
-            <a:off x="4414418" y="1901952"/>
+              <a:t>MAP-Pro torch (~2054°C)</a:t>
+            </a:r>
+          </a:p>
+        </p:txBody>
+      </p:sp>
+      <p:sp>
+        <p:nvSpPr>
+          <p:cNvPr id="31" name="TextBox 30"/>
+          <p:cNvSpPr txBox="1"/>
+          <p:nvPr/>
+        </p:nvSpPr>
+        <p:spPr>
+          <a:xfrm>
+            <a:off x="8341257" y="1901952"/>
             <a:ext cx="182880" cy="274320"/>
           </a:xfrm>
           <a:prstGeom prst="rect">
@@ -9778,7 +10196,7 @@
           <a:p>
             <a:pPr algn="l"/>
             <a:r>
-              <a:rPr sz="1232" b="0" i="0">
+              <a:rPr sz="1120" b="0" i="0">
                 <a:solidFill>
                   <a:srgbClr val="3B5174"/>
                 </a:solidFill>
@@ -9791,48 +10209,48 @@
       </p:sp>
       <p:sp>
         <p:nvSpPr>
-          <p:cNvPr id="27" name="TextBox 26"/>
-          <p:cNvSpPr txBox="1"/>
-          <p:nvPr/>
-        </p:nvSpPr>
-        <p:spPr>
-          <a:xfrm>
-            <a:off x="4615586" y="1901952"/>
-            <a:ext cx="3161690" cy="274320"/>
-          </a:xfrm>
-          <a:prstGeom prst="rect">
-            <a:avLst/>
-          </a:prstGeom>
-          <a:noFill/>
-        </p:spPr>
-        <p:txBody>
-          <a:bodyPr wrap="square" anchor="t" lIns="36000" rIns="36000" tIns="18000" bIns="18000">
-            <a:spAutoFit/>
-          </a:bodyPr>
-          <a:lstStyle/>
-          <a:p>
-            <a:pPr algn="l"/>
-            <a:r>
-              <a:rPr sz="1232" b="0" i="0">
+          <p:cNvPr id="32" name="TextBox 31"/>
+          <p:cNvSpPr txBox="1"/>
+          <p:nvPr/>
+        </p:nvSpPr>
+        <p:spPr>
+          <a:xfrm>
+            <a:off x="8542425" y="1901952"/>
+            <a:ext cx="3100629" cy="274320"/>
+          </a:xfrm>
+          <a:prstGeom prst="rect">
+            <a:avLst/>
+          </a:prstGeom>
+          <a:noFill/>
+        </p:spPr>
+        <p:txBody>
+          <a:bodyPr wrap="square" anchor="t" lIns="36000" rIns="36000" tIns="18000" bIns="18000">
+            <a:spAutoFit/>
+          </a:bodyPr>
+          <a:lstStyle/>
+          <a:p>
+            <a:pPr algn="l"/>
+            <a:r>
+              <a:rPr sz="1120" b="0" i="0">
                 <a:solidFill>
                   <a:srgbClr val="475569"/>
                 </a:solidFill>
                 <a:latin typeface="Arial"/>
               </a:rPr>
-              <a:t>Time to charring onset measured</a:t>
-            </a:r>
-          </a:p>
-        </p:txBody>
-      </p:sp>
-      <p:sp>
-        <p:nvSpPr>
-          <p:cNvPr id="28" name="TextBox 27"/>
-          <p:cNvSpPr txBox="1"/>
-          <p:nvPr/>
-        </p:nvSpPr>
-        <p:spPr>
-          <a:xfrm>
-            <a:off x="4414418" y="2176272"/>
+              <a:t>Time to charring onset</a:t>
+            </a:r>
+          </a:p>
+        </p:txBody>
+      </p:sp>
+      <p:sp>
+        <p:nvSpPr>
+          <p:cNvPr id="33" name="TextBox 32"/>
+          <p:cNvSpPr txBox="1"/>
+          <p:nvPr/>
+        </p:nvSpPr>
+        <p:spPr>
+          <a:xfrm>
+            <a:off x="8341257" y="2176272"/>
             <a:ext cx="182880" cy="274320"/>
           </a:xfrm>
           <a:prstGeom prst="rect">
@@ -9848,7 +10266,7 @@
           <a:p>
             <a:pPr algn="l"/>
             <a:r>
-              <a:rPr sz="1232" b="0" i="0">
+              <a:rPr sz="1120" b="0" i="0">
                 <a:solidFill>
                   <a:srgbClr val="3B5174"/>
                 </a:solidFill>
@@ -9861,49 +10279,49 @@
       </p:sp>
       <p:sp>
         <p:nvSpPr>
-          <p:cNvPr id="29" name="TextBox 28"/>
-          <p:cNvSpPr txBox="1"/>
-          <p:nvPr/>
-        </p:nvSpPr>
-        <p:spPr>
-          <a:xfrm>
-            <a:off x="4615586" y="2176272"/>
-            <a:ext cx="3161690" cy="274320"/>
-          </a:xfrm>
-          <a:prstGeom prst="rect">
-            <a:avLst/>
-          </a:prstGeom>
-          <a:noFill/>
-        </p:spPr>
-        <p:txBody>
-          <a:bodyPr wrap="square" anchor="t" lIns="36000" rIns="36000" tIns="18000" bIns="18000">
-            <a:spAutoFit/>
-          </a:bodyPr>
-          <a:lstStyle/>
-          <a:p>
-            <a:pPr algn="l"/>
-            <a:r>
-              <a:rPr sz="1232" b="0" i="0">
+          <p:cNvPr id="34" name="TextBox 33"/>
+          <p:cNvSpPr txBox="1"/>
+          <p:nvPr/>
+        </p:nvSpPr>
+        <p:spPr>
+          <a:xfrm>
+            <a:off x="8542425" y="2176272"/>
+            <a:ext cx="3100629" cy="274320"/>
+          </a:xfrm>
+          <a:prstGeom prst="rect">
+            <a:avLst/>
+          </a:prstGeom>
+          <a:noFill/>
+        </p:spPr>
+        <p:txBody>
+          <a:bodyPr wrap="square" anchor="t" lIns="36000" rIns="36000" tIns="18000" bIns="18000">
+            <a:spAutoFit/>
+          </a:bodyPr>
+          <a:lstStyle/>
+          <a:p>
+            <a:pPr algn="l"/>
+            <a:r>
+              <a:rPr sz="1120" b="0" i="0">
                 <a:solidFill>
                   <a:srgbClr val="475569"/>
                 </a:solidFill>
                 <a:latin typeface="Arial"/>
               </a:rPr>
-              <a:t>Photographic comparison at 120 s / 300 s</a:t>
-            </a:r>
-          </a:p>
-        </p:txBody>
-      </p:sp>
-      <p:sp>
-        <p:nvSpPr>
-          <p:cNvPr id="30" name="Rounded Rectangle 29"/>
+              <a:t>Compare at 120/300 s</a:t>
+            </a:r>
+          </a:p>
+        </p:txBody>
+      </p:sp>
+      <p:sp>
+        <p:nvSpPr>
+          <p:cNvPr id="35" name="Rounded Rectangle 34"/>
           <p:cNvSpPr/>
           <p:nvPr/>
         </p:nvSpPr>
         <p:spPr>
           <a:xfrm>
-            <a:off x="8097316" y="859536"/>
-            <a:ext cx="3728618" cy="2788920"/>
+            <a:off x="4353659" y="2840736"/>
+            <a:ext cx="3667557" cy="1798320"/>
           </a:xfrm>
           <a:prstGeom prst="roundRect">
             <a:avLst>
@@ -9944,14 +10362,14 @@
       </p:sp>
       <p:sp>
         <p:nvSpPr>
-          <p:cNvPr id="31" name="Rectangle 30"/>
+          <p:cNvPr id="36" name="Rectangle 35"/>
           <p:cNvSpPr/>
           <p:nvPr/>
         </p:nvSpPr>
         <p:spPr>
           <a:xfrm>
-            <a:off x="8097316" y="859536"/>
-            <a:ext cx="3728618" cy="36576"/>
+            <a:off x="4353659" y="2840736"/>
+            <a:ext cx="3667557" cy="36576"/>
           </a:xfrm>
           <a:prstGeom prst="rect">
             <a:avLst/>
@@ -9988,14 +10406,14 @@
       </p:sp>
       <p:sp>
         <p:nvSpPr>
-          <p:cNvPr id="32" name="TextBox 31"/>
-          <p:cNvSpPr txBox="1"/>
-          <p:nvPr/>
-        </p:nvSpPr>
-        <p:spPr>
-          <a:xfrm>
-            <a:off x="8280196" y="1024128"/>
-            <a:ext cx="3362858" cy="219456"/>
+          <p:cNvPr id="37" name="TextBox 36"/>
+          <p:cNvSpPr txBox="1"/>
+          <p:nvPr/>
+        </p:nvSpPr>
+        <p:spPr>
+          <a:xfrm>
+            <a:off x="4536539" y="3005328"/>
+            <a:ext cx="3301797" cy="219456"/>
           </a:xfrm>
           <a:prstGeom prst="rect">
             <a:avLst/>
@@ -10023,48 +10441,48 @@
       </p:sp>
       <p:sp>
         <p:nvSpPr>
-          <p:cNvPr id="33" name="TextBox 32"/>
-          <p:cNvSpPr txBox="1"/>
-          <p:nvPr/>
-        </p:nvSpPr>
-        <p:spPr>
-          <a:xfrm>
-            <a:off x="8280196" y="1261872"/>
-            <a:ext cx="3362858" cy="329184"/>
-          </a:xfrm>
-          <a:prstGeom prst="rect">
-            <a:avLst/>
-          </a:prstGeom>
-          <a:noFill/>
-        </p:spPr>
-        <p:txBody>
-          <a:bodyPr wrap="square" anchor="t" lIns="36000" rIns="36000" tIns="18000" bIns="18000">
-            <a:spAutoFit/>
-          </a:bodyPr>
-          <a:lstStyle/>
-          <a:p>
-            <a:pPr algn="l"/>
-            <a:r>
-              <a:rPr sz="1568" b="1" i="0">
+          <p:cNvPr id="38" name="TextBox 37"/>
+          <p:cNvSpPr txBox="1"/>
+          <p:nvPr/>
+        </p:nvSpPr>
+        <p:spPr>
+          <a:xfrm>
+            <a:off x="4536539" y="3243072"/>
+            <a:ext cx="3301797" cy="329184"/>
+          </a:xfrm>
+          <a:prstGeom prst="rect">
+            <a:avLst/>
+          </a:prstGeom>
+          <a:noFill/>
+        </p:spPr>
+        <p:txBody>
+          <a:bodyPr wrap="square" anchor="t" lIns="36000" rIns="36000" tIns="18000" bIns="18000">
+            <a:spAutoFit/>
+          </a:bodyPr>
+          <a:lstStyle/>
+          <a:p>
+            <a:pPr algn="l"/>
+            <a:r>
+              <a:rPr sz="1456" b="1" i="0">
                 <a:solidFill>
                   <a:srgbClr val="1E293B"/>
                 </a:solidFill>
                 <a:latin typeface="Arial"/>
               </a:rPr>
-              <a:t>Foaming Index Measurement</a:t>
-            </a:r>
-          </a:p>
-        </p:txBody>
-      </p:sp>
-      <p:sp>
-        <p:nvSpPr>
-          <p:cNvPr id="34" name="TextBox 33"/>
-          <p:cNvSpPr txBox="1"/>
-          <p:nvPr/>
-        </p:nvSpPr>
-        <p:spPr>
-          <a:xfrm>
-            <a:off x="8280196" y="1627632"/>
+              <a:t>Foaming Index</a:t>
+            </a:r>
+          </a:p>
+        </p:txBody>
+      </p:sp>
+      <p:sp>
+        <p:nvSpPr>
+          <p:cNvPr id="39" name="TextBox 38"/>
+          <p:cNvSpPr txBox="1"/>
+          <p:nvPr/>
+        </p:nvSpPr>
+        <p:spPr>
+          <a:xfrm>
+            <a:off x="4536539" y="3608832"/>
             <a:ext cx="182880" cy="274320"/>
           </a:xfrm>
           <a:prstGeom prst="rect">
@@ -10080,7 +10498,7 @@
           <a:p>
             <a:pPr algn="l"/>
             <a:r>
-              <a:rPr sz="1232" b="0" i="0">
+              <a:rPr sz="1120" b="0" i="0">
                 <a:solidFill>
                   <a:srgbClr val="3B5174"/>
                 </a:solidFill>
@@ -10093,48 +10511,48 @@
       </p:sp>
       <p:sp>
         <p:nvSpPr>
-          <p:cNvPr id="35" name="TextBox 34"/>
-          <p:cNvSpPr txBox="1"/>
-          <p:nvPr/>
-        </p:nvSpPr>
-        <p:spPr>
-          <a:xfrm>
-            <a:off x="8481364" y="1627632"/>
-            <a:ext cx="3161690" cy="274320"/>
-          </a:xfrm>
-          <a:prstGeom prst="rect">
-            <a:avLst/>
-          </a:prstGeom>
-          <a:noFill/>
-        </p:spPr>
-        <p:txBody>
-          <a:bodyPr wrap="square" anchor="t" lIns="36000" rIns="36000" tIns="18000" bIns="18000">
-            <a:spAutoFit/>
-          </a:bodyPr>
-          <a:lstStyle/>
-          <a:p>
-            <a:pPr algn="l"/>
-            <a:r>
-              <a:rPr sz="1232" b="0" i="0">
+          <p:cNvPr id="40" name="TextBox 39"/>
+          <p:cNvSpPr txBox="1"/>
+          <p:nvPr/>
+        </p:nvSpPr>
+        <p:spPr>
+          <a:xfrm>
+            <a:off x="4737707" y="3608832"/>
+            <a:ext cx="3100629" cy="274320"/>
+          </a:xfrm>
+          <a:prstGeom prst="rect">
+            <a:avLst/>
+          </a:prstGeom>
+          <a:noFill/>
+        </p:spPr>
+        <p:txBody>
+          <a:bodyPr wrap="square" anchor="t" lIns="36000" rIns="36000" tIns="18000" bIns="18000">
+            <a:spAutoFit/>
+          </a:bodyPr>
+          <a:lstStyle/>
+          <a:p>
+            <a:pPr algn="l"/>
+            <a:r>
+              <a:rPr sz="1120" b="0" i="0">
                 <a:solidFill>
                   <a:srgbClr val="475569"/>
                 </a:solidFill>
                 <a:latin typeface="Arial"/>
               </a:rPr>
-              <a:t>Foamed layer thickness measured after combustion</a:t>
-            </a:r>
-          </a:p>
-        </p:txBody>
-      </p:sp>
-      <p:sp>
-        <p:nvSpPr>
-          <p:cNvPr id="36" name="TextBox 35"/>
-          <p:cNvSpPr txBox="1"/>
-          <p:nvPr/>
-        </p:nvSpPr>
-        <p:spPr>
-          <a:xfrm>
-            <a:off x="8280196" y="1901952"/>
+              <a:t>Foamed layer thickness</a:t>
+            </a:r>
+          </a:p>
+        </p:txBody>
+      </p:sp>
+      <p:sp>
+        <p:nvSpPr>
+          <p:cNvPr id="41" name="TextBox 40"/>
+          <p:cNvSpPr txBox="1"/>
+          <p:nvPr/>
+        </p:nvSpPr>
+        <p:spPr>
+          <a:xfrm>
+            <a:off x="4536539" y="3883152"/>
             <a:ext cx="182880" cy="274320"/>
           </a:xfrm>
           <a:prstGeom prst="rect">
@@ -10150,7 +10568,7 @@
           <a:p>
             <a:pPr algn="l"/>
             <a:r>
-              <a:rPr sz="1232" b="0" i="0">
+              <a:rPr sz="1120" b="0" i="0">
                 <a:solidFill>
                   <a:srgbClr val="3B5174"/>
                 </a:solidFill>
@@ -10163,49 +10581,49 @@
       </p:sp>
       <p:sp>
         <p:nvSpPr>
-          <p:cNvPr id="37" name="TextBox 36"/>
-          <p:cNvSpPr txBox="1"/>
-          <p:nvPr/>
-        </p:nvSpPr>
-        <p:spPr>
-          <a:xfrm>
-            <a:off x="8481364" y="1901952"/>
-            <a:ext cx="3161690" cy="274320"/>
-          </a:xfrm>
-          <a:prstGeom prst="rect">
-            <a:avLst/>
-          </a:prstGeom>
-          <a:noFill/>
-        </p:spPr>
-        <p:txBody>
-          <a:bodyPr wrap="square" anchor="t" lIns="36000" rIns="36000" tIns="18000" bIns="18000">
-            <a:spAutoFit/>
-          </a:bodyPr>
-          <a:lstStyle/>
-          <a:p>
-            <a:pPr algn="l"/>
-            <a:r>
-              <a:rPr sz="1232" b="0" i="0">
+          <p:cNvPr id="42" name="TextBox 41"/>
+          <p:cNvSpPr txBox="1"/>
+          <p:nvPr/>
+        </p:nvSpPr>
+        <p:spPr>
+          <a:xfrm>
+            <a:off x="4737707" y="3883152"/>
+            <a:ext cx="3100629" cy="274320"/>
+          </a:xfrm>
+          <a:prstGeom prst="rect">
+            <a:avLst/>
+          </a:prstGeom>
+          <a:noFill/>
+        </p:spPr>
+        <p:txBody>
+          <a:bodyPr wrap="square" anchor="t" lIns="36000" rIns="36000" tIns="18000" bIns="18000">
+            <a:spAutoFit/>
+          </a:bodyPr>
+          <a:lstStyle/>
+          <a:p>
+            <a:pPr algn="l"/>
+            <a:r>
+              <a:rPr sz="1120" b="0" i="0">
                 <a:solidFill>
                   <a:srgbClr val="475569"/>
                 </a:solidFill>
                 <a:latin typeface="Arial"/>
               </a:rPr>
-              <a:t>Ratio to initial thickness = Foaming Index</a:t>
-            </a:r>
-          </a:p>
-        </p:txBody>
-      </p:sp>
-      <p:sp>
-        <p:nvSpPr>
-          <p:cNvPr id="38" name="Rounded Rectangle 37"/>
+              <a:t>Ratio to initial = Foaming Index</a:t>
+            </a:r>
+          </a:p>
+        </p:txBody>
+      </p:sp>
+      <p:sp>
+        <p:nvSpPr>
+          <p:cNvPr id="43" name="Rounded Rectangle 42"/>
           <p:cNvSpPr/>
           <p:nvPr/>
         </p:nvSpPr>
         <p:spPr>
           <a:xfrm>
-            <a:off x="365760" y="3831336"/>
-            <a:ext cx="3728618" cy="2788920"/>
+            <a:off x="8158377" y="2840736"/>
+            <a:ext cx="3667557" cy="1798320"/>
           </a:xfrm>
           <a:prstGeom prst="roundRect">
             <a:avLst>
@@ -10246,14 +10664,14 @@
       </p:sp>
       <p:sp>
         <p:nvSpPr>
-          <p:cNvPr id="39" name="Rectangle 38"/>
+          <p:cNvPr id="44" name="Rectangle 43"/>
           <p:cNvSpPr/>
           <p:nvPr/>
         </p:nvSpPr>
         <p:spPr>
           <a:xfrm>
-            <a:off x="365760" y="3831336"/>
-            <a:ext cx="3728618" cy="36576"/>
+            <a:off x="8158377" y="2840736"/>
+            <a:ext cx="3667557" cy="36576"/>
           </a:xfrm>
           <a:prstGeom prst="rect">
             <a:avLst/>
@@ -10290,14 +10708,14 @@
       </p:sp>
       <p:sp>
         <p:nvSpPr>
-          <p:cNvPr id="40" name="TextBox 39"/>
-          <p:cNvSpPr txBox="1"/>
-          <p:nvPr/>
-        </p:nvSpPr>
-        <p:spPr>
-          <a:xfrm>
-            <a:off x="548640" y="3995928"/>
-            <a:ext cx="3362858" cy="219456"/>
+          <p:cNvPr id="45" name="TextBox 44"/>
+          <p:cNvSpPr txBox="1"/>
+          <p:nvPr/>
+        </p:nvSpPr>
+        <p:spPr>
+          <a:xfrm>
+            <a:off x="8341257" y="3005328"/>
+            <a:ext cx="3301797" cy="219456"/>
           </a:xfrm>
           <a:prstGeom prst="rect">
             <a:avLst/>
@@ -10325,48 +10743,48 @@
       </p:sp>
       <p:sp>
         <p:nvSpPr>
-          <p:cNvPr id="41" name="TextBox 40"/>
-          <p:cNvSpPr txBox="1"/>
-          <p:nvPr/>
-        </p:nvSpPr>
-        <p:spPr>
-          <a:xfrm>
-            <a:off x="548640" y="4233672"/>
-            <a:ext cx="3362858" cy="329184"/>
-          </a:xfrm>
-          <a:prstGeom prst="rect">
-            <a:avLst/>
-          </a:prstGeom>
-          <a:noFill/>
-        </p:spPr>
-        <p:txBody>
-          <a:bodyPr wrap="square" anchor="t" lIns="36000" rIns="36000" tIns="18000" bIns="18000">
-            <a:spAutoFit/>
-          </a:bodyPr>
-          <a:lstStyle/>
-          <a:p>
-            <a:pPr algn="l"/>
-            <a:r>
-              <a:rPr sz="1568" b="1" i="0">
+          <p:cNvPr id="46" name="TextBox 45"/>
+          <p:cNvSpPr txBox="1"/>
+          <p:nvPr/>
+        </p:nvSpPr>
+        <p:spPr>
+          <a:xfrm>
+            <a:off x="8341257" y="3243072"/>
+            <a:ext cx="3301797" cy="329184"/>
+          </a:xfrm>
+          <a:prstGeom prst="rect">
+            <a:avLst/>
+          </a:prstGeom>
+          <a:noFill/>
+        </p:spPr>
+        <p:txBody>
+          <a:bodyPr wrap="square" anchor="t" lIns="36000" rIns="36000" tIns="18000" bIns="18000">
+            <a:spAutoFit/>
+          </a:bodyPr>
+          <a:lstStyle/>
+          <a:p>
+            <a:pPr algn="l"/>
+            <a:r>
+              <a:rPr sz="1456" b="1" i="0">
                 <a:solidFill>
                   <a:srgbClr val="1E293B"/>
                 </a:solidFill>
                 <a:latin typeface="Arial"/>
               </a:rPr>
-              <a:t>SEM Morphological Observation</a:t>
-            </a:r>
-          </a:p>
-        </p:txBody>
-      </p:sp>
-      <p:sp>
-        <p:nvSpPr>
-          <p:cNvPr id="42" name="TextBox 41"/>
-          <p:cNvSpPr txBox="1"/>
-          <p:nvPr/>
-        </p:nvSpPr>
-        <p:spPr>
-          <a:xfrm>
-            <a:off x="548640" y="4599432"/>
+              <a:t>SEM Observation</a:t>
+            </a:r>
+          </a:p>
+        </p:txBody>
+      </p:sp>
+      <p:sp>
+        <p:nvSpPr>
+          <p:cNvPr id="47" name="TextBox 46"/>
+          <p:cNvSpPr txBox="1"/>
+          <p:nvPr/>
+        </p:nvSpPr>
+        <p:spPr>
+          <a:xfrm>
+            <a:off x="8341257" y="3608832"/>
             <a:ext cx="182880" cy="274320"/>
           </a:xfrm>
           <a:prstGeom prst="rect">
@@ -10382,7 +10800,7 @@
           <a:p>
             <a:pPr algn="l"/>
             <a:r>
-              <a:rPr sz="1232" b="0" i="0">
+              <a:rPr sz="1120" b="0" i="0">
                 <a:solidFill>
                   <a:srgbClr val="3B5174"/>
                 </a:solidFill>
@@ -10395,48 +10813,48 @@
       </p:sp>
       <p:sp>
         <p:nvSpPr>
-          <p:cNvPr id="43" name="TextBox 42"/>
-          <p:cNvSpPr txBox="1"/>
-          <p:nvPr/>
-        </p:nvSpPr>
-        <p:spPr>
-          <a:xfrm>
-            <a:off x="749808" y="4599432"/>
-            <a:ext cx="3161690" cy="274320"/>
-          </a:xfrm>
-          <a:prstGeom prst="rect">
-            <a:avLst/>
-          </a:prstGeom>
-          <a:noFill/>
-        </p:spPr>
-        <p:txBody>
-          <a:bodyPr wrap="square" anchor="t" lIns="36000" rIns="36000" tIns="18000" bIns="18000">
-            <a:spAutoFit/>
-          </a:bodyPr>
-          <a:lstStyle/>
-          <a:p>
-            <a:pPr algn="l"/>
-            <a:r>
-              <a:rPr sz="1232" b="0" i="0">
+          <p:cNvPr id="48" name="TextBox 47"/>
+          <p:cNvSpPr txBox="1"/>
+          <p:nvPr/>
+        </p:nvSpPr>
+        <p:spPr>
+          <a:xfrm>
+            <a:off x="8542425" y="3608832"/>
+            <a:ext cx="3100629" cy="274320"/>
+          </a:xfrm>
+          <a:prstGeom prst="rect">
+            <a:avLst/>
+          </a:prstGeom>
+          <a:noFill/>
+        </p:spPr>
+        <p:txBody>
+          <a:bodyPr wrap="square" anchor="t" lIns="36000" rIns="36000" tIns="18000" bIns="18000">
+            <a:spAutoFit/>
+          </a:bodyPr>
+          <a:lstStyle/>
+          <a:p>
+            <a:pPr algn="l"/>
+            <a:r>
+              <a:rPr sz="1120" b="0" i="0">
                 <a:solidFill>
                   <a:srgbClr val="475569"/>
                 </a:solidFill>
                 <a:latin typeface="Arial"/>
               </a:rPr>
-              <a:t>Foam structure by SDS concentration</a:t>
-            </a:r>
-          </a:p>
-        </p:txBody>
-      </p:sp>
-      <p:sp>
-        <p:nvSpPr>
-          <p:cNvPr id="44" name="TextBox 43"/>
-          <p:cNvSpPr txBox="1"/>
-          <p:nvPr/>
-        </p:nvSpPr>
-        <p:spPr>
-          <a:xfrm>
-            <a:off x="548640" y="4873752"/>
+              <a:t>Foam structure by SDS level</a:t>
+            </a:r>
+          </a:p>
+        </p:txBody>
+      </p:sp>
+      <p:sp>
+        <p:nvSpPr>
+          <p:cNvPr id="49" name="TextBox 48"/>
+          <p:cNvSpPr txBox="1"/>
+          <p:nvPr/>
+        </p:nvSpPr>
+        <p:spPr>
+          <a:xfrm>
+            <a:off x="8341257" y="3883152"/>
             <a:ext cx="182880" cy="274320"/>
           </a:xfrm>
           <a:prstGeom prst="rect">
@@ -10452,7 +10870,7 @@
           <a:p>
             <a:pPr algn="l"/>
             <a:r>
-              <a:rPr sz="1232" b="0" i="0">
+              <a:rPr sz="1120" b="0" i="0">
                 <a:solidFill>
                   <a:srgbClr val="3B5174"/>
                 </a:solidFill>
@@ -10465,49 +10883,49 @@
       </p:sp>
       <p:sp>
         <p:nvSpPr>
-          <p:cNvPr id="45" name="TextBox 44"/>
-          <p:cNvSpPr txBox="1"/>
-          <p:nvPr/>
-        </p:nvSpPr>
-        <p:spPr>
-          <a:xfrm>
-            <a:off x="749808" y="4873752"/>
-            <a:ext cx="3161690" cy="274320"/>
-          </a:xfrm>
-          <a:prstGeom prst="rect">
-            <a:avLst/>
-          </a:prstGeom>
-          <a:noFill/>
-        </p:spPr>
-        <p:txBody>
-          <a:bodyPr wrap="square" anchor="t" lIns="36000" rIns="36000" tIns="18000" bIns="18000">
-            <a:spAutoFit/>
-          </a:bodyPr>
-          <a:lstStyle/>
-          <a:p>
-            <a:pPr algn="l"/>
-            <a:r>
-              <a:rPr sz="1232" b="0" i="0">
+          <p:cNvPr id="50" name="TextBox 49"/>
+          <p:cNvSpPr txBox="1"/>
+          <p:nvPr/>
+        </p:nvSpPr>
+        <p:spPr>
+          <a:xfrm>
+            <a:off x="8542425" y="3883152"/>
+            <a:ext cx="3100629" cy="274320"/>
+          </a:xfrm>
+          <a:prstGeom prst="rect">
+            <a:avLst/>
+          </a:prstGeom>
+          <a:noFill/>
+        </p:spPr>
+        <p:txBody>
+          <a:bodyPr wrap="square" anchor="t" lIns="36000" rIns="36000" tIns="18000" bIns="18000">
+            <a:spAutoFit/>
+          </a:bodyPr>
+          <a:lstStyle/>
+          <a:p>
+            <a:pPr algn="l"/>
+            <a:r>
+              <a:rPr sz="1120" b="0" i="0">
                 <a:solidFill>
                   <a:srgbClr val="475569"/>
                 </a:solidFill>
                 <a:latin typeface="Arial"/>
               </a:rPr>
-              <a:t>Sintering progression by burn time (0/1/2/4 min)</a:t>
-            </a:r>
-          </a:p>
-        </p:txBody>
-      </p:sp>
-      <p:sp>
-        <p:nvSpPr>
-          <p:cNvPr id="46" name="Rounded Rectangle 45"/>
+              <a:t>Sintering by burn time</a:t>
+            </a:r>
+          </a:p>
+        </p:txBody>
+      </p:sp>
+      <p:sp>
+        <p:nvSpPr>
+          <p:cNvPr id="51" name="Rounded Rectangle 50"/>
           <p:cNvSpPr/>
           <p:nvPr/>
         </p:nvSpPr>
         <p:spPr>
           <a:xfrm>
-            <a:off x="4231538" y="3831336"/>
-            <a:ext cx="3728618" cy="2788920"/>
+            <a:off x="4353659" y="4821936"/>
+            <a:ext cx="3667557" cy="1798320"/>
           </a:xfrm>
           <a:prstGeom prst="roundRect">
             <a:avLst>
@@ -10548,14 +10966,14 @@
       </p:sp>
       <p:sp>
         <p:nvSpPr>
-          <p:cNvPr id="47" name="Rectangle 46"/>
+          <p:cNvPr id="52" name="Rectangle 51"/>
           <p:cNvSpPr/>
           <p:nvPr/>
         </p:nvSpPr>
         <p:spPr>
           <a:xfrm>
-            <a:off x="4231538" y="3831336"/>
-            <a:ext cx="3728618" cy="36576"/>
+            <a:off x="4353659" y="4821936"/>
+            <a:ext cx="3667557" cy="36576"/>
           </a:xfrm>
           <a:prstGeom prst="rect">
             <a:avLst/>
@@ -10592,14 +11010,14 @@
       </p:sp>
       <p:sp>
         <p:nvSpPr>
-          <p:cNvPr id="48" name="TextBox 47"/>
-          <p:cNvSpPr txBox="1"/>
-          <p:nvPr/>
-        </p:nvSpPr>
-        <p:spPr>
-          <a:xfrm>
-            <a:off x="4414418" y="3995928"/>
-            <a:ext cx="3362858" cy="219456"/>
+          <p:cNvPr id="53" name="TextBox 52"/>
+          <p:cNvSpPr txBox="1"/>
+          <p:nvPr/>
+        </p:nvSpPr>
+        <p:spPr>
+          <a:xfrm>
+            <a:off x="4536539" y="4986528"/>
+            <a:ext cx="3301797" cy="219456"/>
           </a:xfrm>
           <a:prstGeom prst="rect">
             <a:avLst/>
@@ -10627,48 +11045,48 @@
       </p:sp>
       <p:sp>
         <p:nvSpPr>
-          <p:cNvPr id="49" name="TextBox 48"/>
-          <p:cNvSpPr txBox="1"/>
-          <p:nvPr/>
-        </p:nvSpPr>
-        <p:spPr>
-          <a:xfrm>
-            <a:off x="4414418" y="4233672"/>
-            <a:ext cx="3362858" cy="329184"/>
-          </a:xfrm>
-          <a:prstGeom prst="rect">
-            <a:avLst/>
-          </a:prstGeom>
-          <a:noFill/>
-        </p:spPr>
-        <p:txBody>
-          <a:bodyPr wrap="square" anchor="t" lIns="36000" rIns="36000" tIns="18000" bIns="18000">
-            <a:spAutoFit/>
-          </a:bodyPr>
-          <a:lstStyle/>
-          <a:p>
-            <a:pPr algn="l"/>
-            <a:r>
-              <a:rPr sz="1568" b="1" i="0">
+          <p:cNvPr id="54" name="TextBox 53"/>
+          <p:cNvSpPr txBox="1"/>
+          <p:nvPr/>
+        </p:nvSpPr>
+        <p:spPr>
+          <a:xfrm>
+            <a:off x="4536539" y="5224272"/>
+            <a:ext cx="3301797" cy="329184"/>
+          </a:xfrm>
+          <a:prstGeom prst="rect">
+            <a:avLst/>
+          </a:prstGeom>
+          <a:noFill/>
+        </p:spPr>
+        <p:txBody>
+          <a:bodyPr wrap="square" anchor="t" lIns="36000" rIns="36000" tIns="18000" bIns="18000">
+            <a:spAutoFit/>
+          </a:bodyPr>
+          <a:lstStyle/>
+          <a:p>
+            <a:pPr algn="l"/>
+            <a:r>
+              <a:rPr sz="1456" b="1" i="0">
                 <a:solidFill>
                   <a:srgbClr val="1E293B"/>
                 </a:solidFill>
                 <a:latin typeface="Arial"/>
               </a:rPr>
-              <a:t>Spectroscopic Analysis</a:t>
-            </a:r>
-          </a:p>
-        </p:txBody>
-      </p:sp>
-      <p:sp>
-        <p:nvSpPr>
-          <p:cNvPr id="50" name="TextBox 49"/>
-          <p:cNvSpPr txBox="1"/>
-          <p:nvPr/>
-        </p:nvSpPr>
-        <p:spPr>
-          <a:xfrm>
-            <a:off x="4414418" y="4599432"/>
+              <a:t>Spectroscopy</a:t>
+            </a:r>
+          </a:p>
+        </p:txBody>
+      </p:sp>
+      <p:sp>
+        <p:nvSpPr>
+          <p:cNvPr id="55" name="TextBox 54"/>
+          <p:cNvSpPr txBox="1"/>
+          <p:nvPr/>
+        </p:nvSpPr>
+        <p:spPr>
+          <a:xfrm>
+            <a:off x="4536539" y="5590032"/>
             <a:ext cx="182880" cy="274320"/>
           </a:xfrm>
           <a:prstGeom prst="rect">
@@ -10684,7 +11102,7 @@
           <a:p>
             <a:pPr algn="l"/>
             <a:r>
-              <a:rPr sz="1232" b="0" i="0">
+              <a:rPr sz="1120" b="0" i="0">
                 <a:solidFill>
                   <a:srgbClr val="3B5174"/>
                 </a:solidFill>
@@ -10697,29 +11115,29 @@
       </p:sp>
       <p:sp>
         <p:nvSpPr>
-          <p:cNvPr id="51" name="TextBox 50"/>
-          <p:cNvSpPr txBox="1"/>
-          <p:nvPr/>
-        </p:nvSpPr>
-        <p:spPr>
-          <a:xfrm>
-            <a:off x="4615586" y="4599432"/>
-            <a:ext cx="3161690" cy="274320"/>
-          </a:xfrm>
-          <a:prstGeom prst="rect">
-            <a:avLst/>
-          </a:prstGeom>
-          <a:noFill/>
-        </p:spPr>
-        <p:txBody>
-          <a:bodyPr wrap="square" anchor="t" lIns="36000" rIns="36000" tIns="18000" bIns="18000">
-            <a:spAutoFit/>
-          </a:bodyPr>
-          <a:lstStyle/>
-          <a:p>
-            <a:pPr algn="l"/>
-            <a:r>
-              <a:rPr sz="1232" b="0" i="0">
+          <p:cNvPr id="56" name="TextBox 55"/>
+          <p:cNvSpPr txBox="1"/>
+          <p:nvPr/>
+        </p:nvSpPr>
+        <p:spPr>
+          <a:xfrm>
+            <a:off x="4737707" y="5590032"/>
+            <a:ext cx="3100629" cy="274320"/>
+          </a:xfrm>
+          <a:prstGeom prst="rect">
+            <a:avLst/>
+          </a:prstGeom>
+          <a:noFill/>
+        </p:spPr>
+        <p:txBody>
+          <a:bodyPr wrap="square" anchor="t" lIns="36000" rIns="36000" tIns="18000" bIns="18000">
+            <a:spAutoFit/>
+          </a:bodyPr>
+          <a:lstStyle/>
+          <a:p>
+            <a:pPr algn="l"/>
+            <a:r>
+              <a:rPr sz="1120" b="0" i="0">
                 <a:solidFill>
                   <a:srgbClr val="475569"/>
                 </a:solidFill>
@@ -10732,13 +11150,13 @@
       </p:sp>
       <p:sp>
         <p:nvSpPr>
-          <p:cNvPr id="52" name="TextBox 51"/>
-          <p:cNvSpPr txBox="1"/>
-          <p:nvPr/>
-        </p:nvSpPr>
-        <p:spPr>
-          <a:xfrm>
-            <a:off x="4414418" y="4873752"/>
+          <p:cNvPr id="57" name="TextBox 56"/>
+          <p:cNvSpPr txBox="1"/>
+          <p:nvPr/>
+        </p:nvSpPr>
+        <p:spPr>
+          <a:xfrm>
+            <a:off x="4536539" y="5864352"/>
             <a:ext cx="182880" cy="274320"/>
           </a:xfrm>
           <a:prstGeom prst="rect">
@@ -10754,7 +11172,7 @@
           <a:p>
             <a:pPr algn="l"/>
             <a:r>
-              <a:rPr sz="1232" b="0" i="0">
+              <a:rPr sz="1120" b="0" i="0">
                 <a:solidFill>
                   <a:srgbClr val="3B5174"/>
                 </a:solidFill>
@@ -10767,29 +11185,29 @@
       </p:sp>
       <p:sp>
         <p:nvSpPr>
-          <p:cNvPr id="53" name="TextBox 52"/>
-          <p:cNvSpPr txBox="1"/>
-          <p:nvPr/>
-        </p:nvSpPr>
-        <p:spPr>
-          <a:xfrm>
-            <a:off x="4615586" y="4873752"/>
-            <a:ext cx="3161690" cy="274320"/>
-          </a:xfrm>
-          <a:prstGeom prst="rect">
-            <a:avLst/>
-          </a:prstGeom>
-          <a:noFill/>
-        </p:spPr>
-        <p:txBody>
-          <a:bodyPr wrap="square" anchor="t" lIns="36000" rIns="36000" tIns="18000" bIns="18000">
-            <a:spAutoFit/>
-          </a:bodyPr>
-          <a:lstStyle/>
-          <a:p>
-            <a:pPr algn="l"/>
-            <a:r>
-              <a:rPr sz="1232" b="0" i="0">
+          <p:cNvPr id="58" name="TextBox 57"/>
+          <p:cNvSpPr txBox="1"/>
+          <p:nvPr/>
+        </p:nvSpPr>
+        <p:spPr>
+          <a:xfrm>
+            <a:off x="4737707" y="5864352"/>
+            <a:ext cx="3100629" cy="274320"/>
+          </a:xfrm>
+          <a:prstGeom prst="rect">
+            <a:avLst/>
+          </a:prstGeom>
+          <a:noFill/>
+        </p:spPr>
+        <p:txBody>
+          <a:bodyPr wrap="square" anchor="t" lIns="36000" rIns="36000" tIns="18000" bIns="18000">
+            <a:spAutoFit/>
+          </a:bodyPr>
+          <a:lstStyle/>
+          <a:p>
+            <a:pPr algn="l"/>
+            <a:r>
+              <a:rPr sz="1120" b="0" i="0">
                 <a:solidFill>
                   <a:srgbClr val="475569"/>
                 </a:solidFill>
@@ -10802,14 +11220,14 @@
       </p:sp>
       <p:sp>
         <p:nvSpPr>
-          <p:cNvPr id="54" name="Rounded Rectangle 53"/>
+          <p:cNvPr id="59" name="Rounded Rectangle 58"/>
           <p:cNvSpPr/>
           <p:nvPr/>
         </p:nvSpPr>
         <p:spPr>
           <a:xfrm>
-            <a:off x="8097316" y="3831336"/>
-            <a:ext cx="3728618" cy="2788920"/>
+            <a:off x="8158377" y="4821936"/>
+            <a:ext cx="3667557" cy="1798320"/>
           </a:xfrm>
           <a:prstGeom prst="roundRect">
             <a:avLst>
@@ -10850,14 +11268,14 @@
       </p:sp>
       <p:sp>
         <p:nvSpPr>
-          <p:cNvPr id="55" name="Rectangle 54"/>
+          <p:cNvPr id="60" name="Rectangle 59"/>
           <p:cNvSpPr/>
           <p:nvPr/>
         </p:nvSpPr>
         <p:spPr>
           <a:xfrm>
-            <a:off x="8097316" y="3831336"/>
-            <a:ext cx="3728618" cy="36576"/>
+            <a:off x="8158377" y="4821936"/>
+            <a:ext cx="3667557" cy="36576"/>
           </a:xfrm>
           <a:prstGeom prst="rect">
             <a:avLst/>
@@ -10894,14 +11312,14 @@
       </p:sp>
       <p:sp>
         <p:nvSpPr>
-          <p:cNvPr id="56" name="TextBox 55"/>
-          <p:cNvSpPr txBox="1"/>
-          <p:nvPr/>
-        </p:nvSpPr>
-        <p:spPr>
-          <a:xfrm>
-            <a:off x="8280196" y="3995928"/>
-            <a:ext cx="3362858" cy="219456"/>
+          <p:cNvPr id="61" name="TextBox 60"/>
+          <p:cNvSpPr txBox="1"/>
+          <p:nvPr/>
+        </p:nvSpPr>
+        <p:spPr>
+          <a:xfrm>
+            <a:off x="8341257" y="4986528"/>
+            <a:ext cx="3301797" cy="219456"/>
           </a:xfrm>
           <a:prstGeom prst="rect">
             <a:avLst/>
@@ -10929,29 +11347,29 @@
       </p:sp>
       <p:sp>
         <p:nvSpPr>
-          <p:cNvPr id="57" name="TextBox 56"/>
-          <p:cNvSpPr txBox="1"/>
-          <p:nvPr/>
-        </p:nvSpPr>
-        <p:spPr>
-          <a:xfrm>
-            <a:off x="8280196" y="4233672"/>
-            <a:ext cx="3362858" cy="329184"/>
-          </a:xfrm>
-          <a:prstGeom prst="rect">
-            <a:avLst/>
-          </a:prstGeom>
-          <a:noFill/>
-        </p:spPr>
-        <p:txBody>
-          <a:bodyPr wrap="square" anchor="t" lIns="36000" rIns="36000" tIns="18000" bIns="18000">
-            <a:spAutoFit/>
-          </a:bodyPr>
-          <a:lstStyle/>
-          <a:p>
-            <a:pPr algn="l"/>
-            <a:r>
-              <a:rPr sz="1568" b="1" i="0">
+          <p:cNvPr id="62" name="TextBox 61"/>
+          <p:cNvSpPr txBox="1"/>
+          <p:nvPr/>
+        </p:nvSpPr>
+        <p:spPr>
+          <a:xfrm>
+            <a:off x="8341257" y="5224272"/>
+            <a:ext cx="3301797" cy="329184"/>
+          </a:xfrm>
+          <a:prstGeom prst="rect">
+            <a:avLst/>
+          </a:prstGeom>
+          <a:noFill/>
+        </p:spPr>
+        <p:txBody>
+          <a:bodyPr wrap="square" anchor="t" lIns="36000" rIns="36000" tIns="18000" bIns="18000">
+            <a:spAutoFit/>
+          </a:bodyPr>
+          <a:lstStyle/>
+          <a:p>
+            <a:pPr algn="l"/>
+            <a:r>
+              <a:rPr sz="1456" b="1" i="0">
                 <a:solidFill>
                   <a:srgbClr val="1E293B"/>
                 </a:solidFill>
@@ -10964,13 +11382,13 @@
       </p:sp>
       <p:sp>
         <p:nvSpPr>
-          <p:cNvPr id="58" name="TextBox 57"/>
-          <p:cNvSpPr txBox="1"/>
-          <p:nvPr/>
-        </p:nvSpPr>
-        <p:spPr>
-          <a:xfrm>
-            <a:off x="8280196" y="4599432"/>
+          <p:cNvPr id="63" name="TextBox 62"/>
+          <p:cNvSpPr txBox="1"/>
+          <p:nvPr/>
+        </p:nvSpPr>
+        <p:spPr>
+          <a:xfrm>
+            <a:off x="8341257" y="5590032"/>
             <a:ext cx="182880" cy="274320"/>
           </a:xfrm>
           <a:prstGeom prst="rect">
@@ -10986,7 +11404,7 @@
           <a:p>
             <a:pPr algn="l"/>
             <a:r>
-              <a:rPr sz="1232" b="0" i="0">
+              <a:rPr sz="1120" b="0" i="0">
                 <a:solidFill>
                   <a:srgbClr val="3B5174"/>
                 </a:solidFill>
@@ -10999,48 +11417,48 @@
       </p:sp>
       <p:sp>
         <p:nvSpPr>
-          <p:cNvPr id="59" name="TextBox 58"/>
-          <p:cNvSpPr txBox="1"/>
-          <p:nvPr/>
-        </p:nvSpPr>
-        <p:spPr>
-          <a:xfrm>
-            <a:off x="8481364" y="4599432"/>
-            <a:ext cx="3161690" cy="274320"/>
-          </a:xfrm>
-          <a:prstGeom prst="rect">
-            <a:avLst/>
-          </a:prstGeom>
-          <a:noFill/>
-        </p:spPr>
-        <p:txBody>
-          <a:bodyPr wrap="square" anchor="t" lIns="36000" rIns="36000" tIns="18000" bIns="18000">
-            <a:spAutoFit/>
-          </a:bodyPr>
-          <a:lstStyle/>
-          <a:p>
-            <a:pPr algn="l"/>
-            <a:r>
-              <a:rPr sz="1232" b="0" i="0">
+          <p:cNvPr id="64" name="TextBox 63"/>
+          <p:cNvSpPr txBox="1"/>
+          <p:nvPr/>
+        </p:nvSpPr>
+        <p:spPr>
+          <a:xfrm>
+            <a:off x="8542425" y="5590032"/>
+            <a:ext cx="3100629" cy="274320"/>
+          </a:xfrm>
+          <a:prstGeom prst="rect">
+            <a:avLst/>
+          </a:prstGeom>
+          <a:noFill/>
+        </p:spPr>
+        <p:txBody>
+          <a:bodyPr wrap="square" anchor="t" lIns="36000" rIns="36000" tIns="18000" bIns="18000">
+            <a:spAutoFit/>
+          </a:bodyPr>
+          <a:lstStyle/>
+          <a:p>
+            <a:pPr algn="l"/>
+            <a:r>
+              <a:rPr sz="1120" b="0" i="0">
                 <a:solidFill>
                   <a:srgbClr val="475569"/>
                 </a:solidFill>
                 <a:latin typeface="Arial"/>
               </a:rPr>
-              <a:t>TGA (thermogravimetric analysis)</a:t>
-            </a:r>
-          </a:p>
-        </p:txBody>
-      </p:sp>
-      <p:sp>
-        <p:nvSpPr>
-          <p:cNvPr id="60" name="TextBox 59"/>
-          <p:cNvSpPr txBox="1"/>
-          <p:nvPr/>
-        </p:nvSpPr>
-        <p:spPr>
-          <a:xfrm>
-            <a:off x="8280196" y="4873752"/>
+              <a:t>TGA (thermogravimetric)</a:t>
+            </a:r>
+          </a:p>
+        </p:txBody>
+      </p:sp>
+      <p:sp>
+        <p:nvSpPr>
+          <p:cNvPr id="65" name="TextBox 64"/>
+          <p:cNvSpPr txBox="1"/>
+          <p:nvPr/>
+        </p:nvSpPr>
+        <p:spPr>
+          <a:xfrm>
+            <a:off x="8341257" y="5864352"/>
             <a:ext cx="182880" cy="274320"/>
           </a:xfrm>
           <a:prstGeom prst="rect">
@@ -11056,7 +11474,7 @@
           <a:p>
             <a:pPr algn="l"/>
             <a:r>
-              <a:rPr sz="1232" b="0" i="0">
+              <a:rPr sz="1120" b="0" i="0">
                 <a:solidFill>
                   <a:srgbClr val="3B5174"/>
                 </a:solidFill>
@@ -11069,35 +11487,35 @@
       </p:sp>
       <p:sp>
         <p:nvSpPr>
-          <p:cNvPr id="61" name="TextBox 60"/>
-          <p:cNvSpPr txBox="1"/>
-          <p:nvPr/>
-        </p:nvSpPr>
-        <p:spPr>
-          <a:xfrm>
-            <a:off x="8481364" y="4873752"/>
-            <a:ext cx="3161690" cy="274320"/>
-          </a:xfrm>
-          <a:prstGeom prst="rect">
-            <a:avLst/>
-          </a:prstGeom>
-          <a:noFill/>
-        </p:spPr>
-        <p:txBody>
-          <a:bodyPr wrap="square" anchor="t" lIns="36000" rIns="36000" tIns="18000" bIns="18000">
-            <a:spAutoFit/>
-          </a:bodyPr>
-          <a:lstStyle/>
-          <a:p>
-            <a:pPr algn="l"/>
-            <a:r>
-              <a:rPr sz="1232" b="0" i="0">
+          <p:cNvPr id="66" name="TextBox 65"/>
+          <p:cNvSpPr txBox="1"/>
+          <p:nvPr/>
+        </p:nvSpPr>
+        <p:spPr>
+          <a:xfrm>
+            <a:off x="8542425" y="5864352"/>
+            <a:ext cx="3100629" cy="274320"/>
+          </a:xfrm>
+          <a:prstGeom prst="rect">
+            <a:avLst/>
+          </a:prstGeom>
+          <a:noFill/>
+        </p:spPr>
+        <p:txBody>
+          <a:bodyPr wrap="square" anchor="t" lIns="36000" rIns="36000" tIns="18000" bIns="18000">
+            <a:spAutoFit/>
+          </a:bodyPr>
+          <a:lstStyle/>
+          <a:p>
+            <a:pPr algn="l"/>
+            <a:r>
+              <a:rPr sz="1120" b="0" i="0">
                 <a:solidFill>
                   <a:srgbClr val="475569"/>
                 </a:solidFill>
                 <a:latin typeface="Arial"/>
               </a:rPr>
-              <a:t>DSC (differential scanning calorimetry)</a:t>
+              <a:t>DSC (calorimetry)</a:t>
             </a:r>
           </a:p>
         </p:txBody>
@@ -11454,19 +11872,19 @@
         <p:spPr>
           <a:xfrm>
             <a:off x="365760" y="859536"/>
-            <a:ext cx="3734714" cy="3291840"/>
+            <a:ext cx="3734714" cy="2194560"/>
           </a:xfrm>
           <a:prstGeom prst="roundRect">
             <a:avLst>
-              <a:gd name="adj" fmla="val 4000"/>
+              <a:gd name="adj" fmla="val 2000"/>
             </a:avLst>
           </a:prstGeom>
           <a:solidFill>
-            <a:srgbClr val="F1F5F9"/>
+            <a:srgbClr val="F5F8FC"/>
           </a:solidFill>
-          <a:ln w="6350">
+          <a:ln w="12700">
             <a:solidFill>
-              <a:srgbClr val="E2E8F0"/>
+              <a:srgbClr val="C0D0E0"/>
             </a:solidFill>
           </a:ln>
           <a:effectLst/>
@@ -11501,8 +11919,1437 @@
         </p:nvSpPr>
         <p:spPr>
           <a:xfrm>
+            <a:off x="475488" y="969264"/>
+            <a:ext cx="868680" cy="292608"/>
+          </a:xfrm>
+          <a:prstGeom prst="rect">
+            <a:avLst/>
+          </a:prstGeom>
+          <a:solidFill>
+            <a:srgbClr val="1E293B"/>
+          </a:solidFill>
+          <a:ln>
+            <a:noFill/>
+          </a:ln>
+          <a:effectLst/>
+        </p:spPr>
+        <p:style>
+          <a:lnRef idx="1">
+            <a:schemeClr val="accent1"/>
+          </a:lnRef>
+          <a:fillRef idx="3">
+            <a:schemeClr val="accent1"/>
+          </a:fillRef>
+          <a:effectRef idx="2">
+            <a:schemeClr val="accent1"/>
+          </a:effectRef>
+          <a:fontRef idx="minor">
+            <a:schemeClr val="lt1"/>
+          </a:fontRef>
+        </p:style>
+        <p:txBody>
+          <a:bodyPr rtlCol="0" anchor="ctr"/>
+          <a:lstStyle/>
+          <a:p>
+            <a:pPr algn="ctr"/>
+          </a:p>
+        </p:txBody>
+      </p:sp>
+      <p:sp>
+        <p:nvSpPr>
+          <p:cNvPr id="12" name="TextBox 11"/>
+          <p:cNvSpPr txBox="1"/>
+          <p:nvPr/>
+        </p:nvSpPr>
+        <p:spPr>
+          <a:xfrm>
+            <a:off x="475488" y="969264"/>
+            <a:ext cx="868680" cy="292608"/>
+          </a:xfrm>
+          <a:prstGeom prst="rect">
+            <a:avLst/>
+          </a:prstGeom>
+          <a:noFill/>
+        </p:spPr>
+        <p:txBody>
+          <a:bodyPr wrap="square" anchor="ctr" lIns="36000" rIns="36000" tIns="18000" bIns="18000">
+            <a:spAutoFit/>
+          </a:bodyPr>
+          <a:lstStyle/>
+          <a:p>
+            <a:pPr algn="ctr"/>
+            <a:r>
+              <a:rPr sz="1232" b="1" i="0">
+                <a:solidFill>
+                  <a:srgbClr val="FFFFFF"/>
+                </a:solidFill>
+                <a:latin typeface="Arial"/>
+              </a:rPr>
+              <a:t>Photo</a:t>
+            </a:r>
+          </a:p>
+        </p:txBody>
+      </p:sp>
+      <p:sp>
+        <p:nvSpPr>
+          <p:cNvPr id="13" name="TextBox 12"/>
+          <p:cNvSpPr txBox="1"/>
+          <p:nvPr/>
+        </p:nvSpPr>
+        <p:spPr>
+          <a:xfrm>
             <a:off x="365760" y="859536"/>
-            <a:ext cx="3734714" cy="36576"/>
+            <a:ext cx="3734714" cy="2194560"/>
+          </a:xfrm>
+          <a:prstGeom prst="rect">
+            <a:avLst/>
+          </a:prstGeom>
+          <a:noFill/>
+        </p:spPr>
+        <p:txBody>
+          <a:bodyPr wrap="square" anchor="ctr" lIns="36000" rIns="36000" tIns="18000" bIns="18000">
+            <a:spAutoFit/>
+          </a:bodyPr>
+          <a:lstStyle/>
+          <a:p>
+            <a:pPr algn="ctr"/>
+            <a:r>
+              <a:rPr sz="1344" b="0" i="0">
+                <a:solidFill>
+                  <a:srgbClr val="AAB4C0"/>
+                </a:solidFill>
+                <a:latin typeface="Arial"/>
+              </a:rPr>
+              <a:t>(Paste paper figure here)</a:t>
+            </a:r>
+          </a:p>
+        </p:txBody>
+      </p:sp>
+      <p:sp>
+        <p:nvSpPr>
+          <p:cNvPr id="14" name="TextBox 13"/>
+          <p:cNvSpPr txBox="1"/>
+          <p:nvPr/>
+        </p:nvSpPr>
+        <p:spPr>
+          <a:xfrm>
+            <a:off x="365760" y="3090672"/>
+            <a:ext cx="3734714" cy="274320"/>
+          </a:xfrm>
+          <a:prstGeom prst="rect">
+            <a:avLst/>
+          </a:prstGeom>
+          <a:noFill/>
+        </p:spPr>
+        <p:txBody>
+          <a:bodyPr wrap="square" anchor="t" lIns="36000" rIns="36000" tIns="18000" bIns="18000">
+            <a:spAutoFit/>
+          </a:bodyPr>
+          <a:lstStyle/>
+          <a:p>
+            <a:pPr algn="ctr"/>
+            <a:r>
+              <a:rPr sz="1120" b="0" i="1">
+                <a:solidFill>
+                  <a:srgbClr val="64748B"/>
+                </a:solidFill>
+                <a:latin typeface="Arial"/>
+              </a:rPr>
+              <a:t>Contact angle on wood</a:t>
+            </a:r>
+          </a:p>
+        </p:txBody>
+      </p:sp>
+      <p:sp>
+        <p:nvSpPr>
+          <p:cNvPr id="15" name="TextBox 14"/>
+          <p:cNvSpPr txBox="1"/>
+          <p:nvPr/>
+        </p:nvSpPr>
+        <p:spPr>
+          <a:xfrm>
+            <a:off x="365760" y="3401568"/>
+            <a:ext cx="3734714" cy="237744"/>
+          </a:xfrm>
+          <a:prstGeom prst="rect">
+            <a:avLst/>
+          </a:prstGeom>
+          <a:noFill/>
+        </p:spPr>
+        <p:txBody>
+          <a:bodyPr wrap="square" anchor="t" lIns="36000" rIns="36000" tIns="18000" bIns="18000">
+            <a:spAutoFit/>
+          </a:bodyPr>
+          <a:lstStyle/>
+          <a:p>
+            <a:pPr algn="l"/>
+            <a:r>
+              <a:rPr sz="1120" b="1" i="0">
+                <a:solidFill>
+                  <a:srgbClr val="64748B"/>
+                </a:solidFill>
+                <a:latin typeface="Arial"/>
+              </a:rPr>
+              <a:t>WETTING</a:t>
+            </a:r>
+          </a:p>
+        </p:txBody>
+      </p:sp>
+      <p:sp>
+        <p:nvSpPr>
+          <p:cNvPr id="16" name="TextBox 15"/>
+          <p:cNvSpPr txBox="1"/>
+          <p:nvPr/>
+        </p:nvSpPr>
+        <p:spPr>
+          <a:xfrm>
+            <a:off x="365760" y="3639312"/>
+            <a:ext cx="3734714" cy="310896"/>
+          </a:xfrm>
+          <a:prstGeom prst="rect">
+            <a:avLst/>
+          </a:prstGeom>
+          <a:noFill/>
+        </p:spPr>
+        <p:txBody>
+          <a:bodyPr wrap="square" anchor="t" lIns="36000" rIns="36000" tIns="18000" bIns="18000">
+            <a:spAutoFit/>
+          </a:bodyPr>
+          <a:lstStyle/>
+          <a:p>
+            <a:pPr algn="l"/>
+            <a:r>
+              <a:rPr sz="1568" b="1" i="0">
+                <a:solidFill>
+                  <a:srgbClr val="1E293B"/>
+                </a:solidFill>
+                <a:latin typeface="Arial"/>
+              </a:rPr>
+              <a:t>Contact Angle</a:t>
+            </a:r>
+          </a:p>
+        </p:txBody>
+      </p:sp>
+      <p:sp>
+        <p:nvSpPr>
+          <p:cNvPr id="17" name="TextBox 16"/>
+          <p:cNvSpPr txBox="1"/>
+          <p:nvPr/>
+        </p:nvSpPr>
+        <p:spPr>
+          <a:xfrm>
+            <a:off x="365760" y="4023360"/>
+            <a:ext cx="182880" cy="274320"/>
+          </a:xfrm>
+          <a:prstGeom prst="rect">
+            <a:avLst/>
+          </a:prstGeom>
+          <a:noFill/>
+        </p:spPr>
+        <p:txBody>
+          <a:bodyPr wrap="square" anchor="t" lIns="36000" rIns="36000" tIns="18000" bIns="18000">
+            <a:spAutoFit/>
+          </a:bodyPr>
+          <a:lstStyle/>
+          <a:p>
+            <a:pPr algn="l"/>
+            <a:r>
+              <a:rPr sz="1232" b="0" i="0">
+                <a:solidFill>
+                  <a:srgbClr val="3B5174"/>
+                </a:solidFill>
+                <a:latin typeface="Arial"/>
+              </a:rPr>
+              <a:t>•</a:t>
+            </a:r>
+          </a:p>
+        </p:txBody>
+      </p:sp>
+      <p:sp>
+        <p:nvSpPr>
+          <p:cNvPr id="18" name="TextBox 17"/>
+          <p:cNvSpPr txBox="1"/>
+          <p:nvPr/>
+        </p:nvSpPr>
+        <p:spPr>
+          <a:xfrm>
+            <a:off x="566928" y="4023360"/>
+            <a:ext cx="3533546" cy="274320"/>
+          </a:xfrm>
+          <a:prstGeom prst="rect">
+            <a:avLst/>
+          </a:prstGeom>
+          <a:noFill/>
+        </p:spPr>
+        <p:txBody>
+          <a:bodyPr wrap="square" anchor="t" lIns="36000" rIns="36000" tIns="18000" bIns="18000">
+            <a:spAutoFit/>
+          </a:bodyPr>
+          <a:lstStyle/>
+          <a:p>
+            <a:pPr algn="l"/>
+            <a:r>
+              <a:rPr sz="1232" b="0" i="0">
+                <a:solidFill>
+                  <a:srgbClr val="334155"/>
+                </a:solidFill>
+                <a:latin typeface="Arial"/>
+              </a:rPr>
+              <a:t>Evaluated on wood, concrete, metal</a:t>
+            </a:r>
+          </a:p>
+        </p:txBody>
+      </p:sp>
+      <p:sp>
+        <p:nvSpPr>
+          <p:cNvPr id="19" name="TextBox 18"/>
+          <p:cNvSpPr txBox="1"/>
+          <p:nvPr/>
+        </p:nvSpPr>
+        <p:spPr>
+          <a:xfrm>
+            <a:off x="365760" y="4334256"/>
+            <a:ext cx="182880" cy="274320"/>
+          </a:xfrm>
+          <a:prstGeom prst="rect">
+            <a:avLst/>
+          </a:prstGeom>
+          <a:noFill/>
+        </p:spPr>
+        <p:txBody>
+          <a:bodyPr wrap="square" anchor="t" lIns="36000" rIns="36000" tIns="18000" bIns="18000">
+            <a:spAutoFit/>
+          </a:bodyPr>
+          <a:lstStyle/>
+          <a:p>
+            <a:pPr algn="l"/>
+            <a:r>
+              <a:rPr sz="1232" b="0" i="0">
+                <a:solidFill>
+                  <a:srgbClr val="3B5174"/>
+                </a:solidFill>
+                <a:latin typeface="Arial"/>
+              </a:rPr>
+              <a:t>•</a:t>
+            </a:r>
+          </a:p>
+        </p:txBody>
+      </p:sp>
+      <p:sp>
+        <p:nvSpPr>
+          <p:cNvPr id="20" name="TextBox 19"/>
+          <p:cNvSpPr txBox="1"/>
+          <p:nvPr/>
+        </p:nvSpPr>
+        <p:spPr>
+          <a:xfrm>
+            <a:off x="566928" y="4334256"/>
+            <a:ext cx="3533546" cy="274320"/>
+          </a:xfrm>
+          <a:prstGeom prst="rect">
+            <a:avLst/>
+          </a:prstGeom>
+          <a:noFill/>
+        </p:spPr>
+        <p:txBody>
+          <a:bodyPr wrap="square" anchor="t" lIns="36000" rIns="36000" tIns="18000" bIns="18000">
+            <a:spAutoFit/>
+          </a:bodyPr>
+          <a:lstStyle/>
+          <a:p>
+            <a:pPr algn="l"/>
+            <a:r>
+              <a:rPr sz="1232" b="0" i="0">
+                <a:solidFill>
+                  <a:srgbClr val="334155"/>
+                </a:solidFill>
+                <a:latin typeface="Arial"/>
+              </a:rPr>
+              <a:t>WEG: low contact angle → wettability</a:t>
+            </a:r>
+          </a:p>
+        </p:txBody>
+      </p:sp>
+      <p:sp>
+        <p:nvSpPr>
+          <p:cNvPr id="21" name="TextBox 20"/>
+          <p:cNvSpPr txBox="1"/>
+          <p:nvPr/>
+        </p:nvSpPr>
+        <p:spPr>
+          <a:xfrm>
+            <a:off x="365760" y="4645152"/>
+            <a:ext cx="182880" cy="274320"/>
+          </a:xfrm>
+          <a:prstGeom prst="rect">
+            <a:avLst/>
+          </a:prstGeom>
+          <a:noFill/>
+        </p:spPr>
+        <p:txBody>
+          <a:bodyPr wrap="square" anchor="t" lIns="36000" rIns="36000" tIns="18000" bIns="18000">
+            <a:spAutoFit/>
+          </a:bodyPr>
+          <a:lstStyle/>
+          <a:p>
+            <a:pPr algn="l"/>
+            <a:r>
+              <a:rPr sz="1232" b="0" i="0">
+                <a:solidFill>
+                  <a:srgbClr val="3B5174"/>
+                </a:solidFill>
+                <a:latin typeface="Arial"/>
+              </a:rPr>
+              <a:t>•</a:t>
+            </a:r>
+          </a:p>
+        </p:txBody>
+      </p:sp>
+      <p:sp>
+        <p:nvSpPr>
+          <p:cNvPr id="22" name="TextBox 21"/>
+          <p:cNvSpPr txBox="1"/>
+          <p:nvPr/>
+        </p:nvSpPr>
+        <p:spPr>
+          <a:xfrm>
+            <a:off x="566928" y="4645152"/>
+            <a:ext cx="3533546" cy="274320"/>
+          </a:xfrm>
+          <a:prstGeom prst="rect">
+            <a:avLst/>
+          </a:prstGeom>
+          <a:noFill/>
+        </p:spPr>
+        <p:txBody>
+          <a:bodyPr wrap="square" anchor="t" lIns="36000" rIns="36000" tIns="18000" bIns="18000">
+            <a:spAutoFit/>
+          </a:bodyPr>
+          <a:lstStyle/>
+          <a:p>
+            <a:pPr algn="l"/>
+            <a:r>
+              <a:rPr sz="1232" b="0" i="0">
+                <a:solidFill>
+                  <a:srgbClr val="334155"/>
+                </a:solidFill>
+                <a:latin typeface="Arial"/>
+              </a:rPr>
+              <a:t>HEC+MC: high affinity to wood</a:t>
+            </a:r>
+          </a:p>
+        </p:txBody>
+      </p:sp>
+      <p:sp>
+        <p:nvSpPr>
+          <p:cNvPr id="23" name="Rounded Rectangle 22"/>
+          <p:cNvSpPr/>
+          <p:nvPr/>
+        </p:nvSpPr>
+        <p:spPr>
+          <a:xfrm>
+            <a:off x="4228490" y="859536"/>
+            <a:ext cx="3734714" cy="2194560"/>
+          </a:xfrm>
+          <a:prstGeom prst="roundRect">
+            <a:avLst>
+              <a:gd name="adj" fmla="val 2000"/>
+            </a:avLst>
+          </a:prstGeom>
+          <a:solidFill>
+            <a:srgbClr val="F5F8FC"/>
+          </a:solidFill>
+          <a:ln w="12700">
+            <a:solidFill>
+              <a:srgbClr val="C0D0E0"/>
+            </a:solidFill>
+          </a:ln>
+          <a:effectLst/>
+        </p:spPr>
+        <p:style>
+          <a:lnRef idx="1">
+            <a:schemeClr val="accent1"/>
+          </a:lnRef>
+          <a:fillRef idx="3">
+            <a:schemeClr val="accent1"/>
+          </a:fillRef>
+          <a:effectRef idx="2">
+            <a:schemeClr val="accent1"/>
+          </a:effectRef>
+          <a:fontRef idx="minor">
+            <a:schemeClr val="lt1"/>
+          </a:fontRef>
+        </p:style>
+        <p:txBody>
+          <a:bodyPr rtlCol="0" anchor="ctr"/>
+          <a:lstStyle/>
+          <a:p>
+            <a:pPr algn="ctr"/>
+          </a:p>
+        </p:txBody>
+      </p:sp>
+      <p:sp>
+        <p:nvSpPr>
+          <p:cNvPr id="24" name="Rectangle 23"/>
+          <p:cNvSpPr/>
+          <p:nvPr/>
+        </p:nvSpPr>
+        <p:spPr>
+          <a:xfrm>
+            <a:off x="4338218" y="969264"/>
+            <a:ext cx="868680" cy="292608"/>
+          </a:xfrm>
+          <a:prstGeom prst="rect">
+            <a:avLst/>
+          </a:prstGeom>
+          <a:solidFill>
+            <a:srgbClr val="1E293B"/>
+          </a:solidFill>
+          <a:ln>
+            <a:noFill/>
+          </a:ln>
+          <a:effectLst/>
+        </p:spPr>
+        <p:style>
+          <a:lnRef idx="1">
+            <a:schemeClr val="accent1"/>
+          </a:lnRef>
+          <a:fillRef idx="3">
+            <a:schemeClr val="accent1"/>
+          </a:fillRef>
+          <a:effectRef idx="2">
+            <a:schemeClr val="accent1"/>
+          </a:effectRef>
+          <a:fontRef idx="minor">
+            <a:schemeClr val="lt1"/>
+          </a:fontRef>
+        </p:style>
+        <p:txBody>
+          <a:bodyPr rtlCol="0" anchor="ctr"/>
+          <a:lstStyle/>
+          <a:p>
+            <a:pPr algn="ctr"/>
+          </a:p>
+        </p:txBody>
+      </p:sp>
+      <p:sp>
+        <p:nvSpPr>
+          <p:cNvPr id="25" name="TextBox 24"/>
+          <p:cNvSpPr txBox="1"/>
+          <p:nvPr/>
+        </p:nvSpPr>
+        <p:spPr>
+          <a:xfrm>
+            <a:off x="4338218" y="969264"/>
+            <a:ext cx="868680" cy="292608"/>
+          </a:xfrm>
+          <a:prstGeom prst="rect">
+            <a:avLst/>
+          </a:prstGeom>
+          <a:noFill/>
+        </p:spPr>
+        <p:txBody>
+          <a:bodyPr wrap="square" anchor="ctr" lIns="36000" rIns="36000" tIns="18000" bIns="18000">
+            <a:spAutoFit/>
+          </a:bodyPr>
+          <a:lstStyle/>
+          <a:p>
+            <a:pPr algn="ctr"/>
+            <a:r>
+              <a:rPr sz="1232" b="1" i="0">
+                <a:solidFill>
+                  <a:srgbClr val="FFFFFF"/>
+                </a:solidFill>
+                <a:latin typeface="Arial"/>
+              </a:rPr>
+              <a:t>Photo</a:t>
+            </a:r>
+          </a:p>
+        </p:txBody>
+      </p:sp>
+      <p:sp>
+        <p:nvSpPr>
+          <p:cNvPr id="26" name="TextBox 25"/>
+          <p:cNvSpPr txBox="1"/>
+          <p:nvPr/>
+        </p:nvSpPr>
+        <p:spPr>
+          <a:xfrm>
+            <a:off x="4228490" y="859536"/>
+            <a:ext cx="3734714" cy="2194560"/>
+          </a:xfrm>
+          <a:prstGeom prst="rect">
+            <a:avLst/>
+          </a:prstGeom>
+          <a:noFill/>
+        </p:spPr>
+        <p:txBody>
+          <a:bodyPr wrap="square" anchor="ctr" lIns="36000" rIns="36000" tIns="18000" bIns="18000">
+            <a:spAutoFit/>
+          </a:bodyPr>
+          <a:lstStyle/>
+          <a:p>
+            <a:pPr algn="ctr"/>
+            <a:r>
+              <a:rPr sz="1344" b="0" i="0">
+                <a:solidFill>
+                  <a:srgbClr val="AAB4C0"/>
+                </a:solidFill>
+                <a:latin typeface="Arial"/>
+              </a:rPr>
+              <a:t>(Paste paper figure here)</a:t>
+            </a:r>
+          </a:p>
+        </p:txBody>
+      </p:sp>
+      <p:sp>
+        <p:nvSpPr>
+          <p:cNvPr id="27" name="TextBox 26"/>
+          <p:cNvSpPr txBox="1"/>
+          <p:nvPr/>
+        </p:nvSpPr>
+        <p:spPr>
+          <a:xfrm>
+            <a:off x="4228490" y="3090672"/>
+            <a:ext cx="3734714" cy="274320"/>
+          </a:xfrm>
+          <a:prstGeom prst="rect">
+            <a:avLst/>
+          </a:prstGeom>
+          <a:noFill/>
+        </p:spPr>
+        <p:txBody>
+          <a:bodyPr wrap="square" anchor="t" lIns="36000" rIns="36000" tIns="18000" bIns="18000">
+            <a:spAutoFit/>
+          </a:bodyPr>
+          <a:lstStyle/>
+          <a:p>
+            <a:pPr algn="ctr"/>
+            <a:r>
+              <a:rPr sz="1120" b="0" i="1">
+                <a:solidFill>
+                  <a:srgbClr val="64748B"/>
+                </a:solidFill>
+                <a:latin typeface="Arial"/>
+              </a:rPr>
+              <a:t>Gel retention on vertical substrate</a:t>
+            </a:r>
+          </a:p>
+        </p:txBody>
+      </p:sp>
+      <p:sp>
+        <p:nvSpPr>
+          <p:cNvPr id="28" name="TextBox 27"/>
+          <p:cNvSpPr txBox="1"/>
+          <p:nvPr/>
+        </p:nvSpPr>
+        <p:spPr>
+          <a:xfrm>
+            <a:off x="4228490" y="3401568"/>
+            <a:ext cx="3734714" cy="237744"/>
+          </a:xfrm>
+          <a:prstGeom prst="rect">
+            <a:avLst/>
+          </a:prstGeom>
+          <a:noFill/>
+        </p:spPr>
+        <p:txBody>
+          <a:bodyPr wrap="square" anchor="t" lIns="36000" rIns="36000" tIns="18000" bIns="18000">
+            <a:spAutoFit/>
+          </a:bodyPr>
+          <a:lstStyle/>
+          <a:p>
+            <a:pPr algn="l"/>
+            <a:r>
+              <a:rPr sz="1120" b="1" i="0">
+                <a:solidFill>
+                  <a:srgbClr val="64748B"/>
+                </a:solidFill>
+                <a:latin typeface="Arial"/>
+              </a:rPr>
+              <a:t>ADHESION</a:t>
+            </a:r>
+          </a:p>
+        </p:txBody>
+      </p:sp>
+      <p:sp>
+        <p:nvSpPr>
+          <p:cNvPr id="29" name="TextBox 28"/>
+          <p:cNvSpPr txBox="1"/>
+          <p:nvPr/>
+        </p:nvSpPr>
+        <p:spPr>
+          <a:xfrm>
+            <a:off x="4228490" y="3639312"/>
+            <a:ext cx="3734714" cy="310896"/>
+          </a:xfrm>
+          <a:prstGeom prst="rect">
+            <a:avLst/>
+          </a:prstGeom>
+          <a:noFill/>
+        </p:spPr>
+        <p:txBody>
+          <a:bodyPr wrap="square" anchor="t" lIns="36000" rIns="36000" tIns="18000" bIns="18000">
+            <a:spAutoFit/>
+          </a:bodyPr>
+          <a:lstStyle/>
+          <a:p>
+            <a:pPr algn="l"/>
+            <a:r>
+              <a:rPr sz="1568" b="1" i="0">
+                <a:solidFill>
+                  <a:srgbClr val="1E293B"/>
+                </a:solidFill>
+                <a:latin typeface="Arial"/>
+              </a:rPr>
+              <a:t>Vertical Adhesion</a:t>
+            </a:r>
+          </a:p>
+        </p:txBody>
+      </p:sp>
+      <p:sp>
+        <p:nvSpPr>
+          <p:cNvPr id="30" name="TextBox 29"/>
+          <p:cNvSpPr txBox="1"/>
+          <p:nvPr/>
+        </p:nvSpPr>
+        <p:spPr>
+          <a:xfrm>
+            <a:off x="4228490" y="4023360"/>
+            <a:ext cx="182880" cy="274320"/>
+          </a:xfrm>
+          <a:prstGeom prst="rect">
+            <a:avLst/>
+          </a:prstGeom>
+          <a:noFill/>
+        </p:spPr>
+        <p:txBody>
+          <a:bodyPr wrap="square" anchor="t" lIns="36000" rIns="36000" tIns="18000" bIns="18000">
+            <a:spAutoFit/>
+          </a:bodyPr>
+          <a:lstStyle/>
+          <a:p>
+            <a:pPr algn="l"/>
+            <a:r>
+              <a:rPr sz="1232" b="0" i="0">
+                <a:solidFill>
+                  <a:srgbClr val="3B5174"/>
+                </a:solidFill>
+                <a:latin typeface="Arial"/>
+              </a:rPr>
+              <a:t>•</a:t>
+            </a:r>
+          </a:p>
+        </p:txBody>
+      </p:sp>
+      <p:sp>
+        <p:nvSpPr>
+          <p:cNvPr id="31" name="TextBox 30"/>
+          <p:cNvSpPr txBox="1"/>
+          <p:nvPr/>
+        </p:nvSpPr>
+        <p:spPr>
+          <a:xfrm>
+            <a:off x="4429658" y="4023360"/>
+            <a:ext cx="3533546" cy="274320"/>
+          </a:xfrm>
+          <a:prstGeom prst="rect">
+            <a:avLst/>
+          </a:prstGeom>
+          <a:noFill/>
+        </p:spPr>
+        <p:txBody>
+          <a:bodyPr wrap="square" anchor="t" lIns="36000" rIns="36000" tIns="18000" bIns="18000">
+            <a:spAutoFit/>
+          </a:bodyPr>
+          <a:lstStyle/>
+          <a:p>
+            <a:pPr algn="l"/>
+            <a:r>
+              <a:rPr sz="1232" b="0" i="0">
+                <a:solidFill>
+                  <a:srgbClr val="334155"/>
+                </a:solidFill>
+                <a:latin typeface="Arial"/>
+              </a:rPr>
+              <a:t>Applied to vertical substrate</a:t>
+            </a:r>
+          </a:p>
+        </p:txBody>
+      </p:sp>
+      <p:sp>
+        <p:nvSpPr>
+          <p:cNvPr id="32" name="TextBox 31"/>
+          <p:cNvSpPr txBox="1"/>
+          <p:nvPr/>
+        </p:nvSpPr>
+        <p:spPr>
+          <a:xfrm>
+            <a:off x="4228490" y="4334256"/>
+            <a:ext cx="182880" cy="274320"/>
+          </a:xfrm>
+          <a:prstGeom prst="rect">
+            <a:avLst/>
+          </a:prstGeom>
+          <a:noFill/>
+        </p:spPr>
+        <p:txBody>
+          <a:bodyPr wrap="square" anchor="t" lIns="36000" rIns="36000" tIns="18000" bIns="18000">
+            <a:spAutoFit/>
+          </a:bodyPr>
+          <a:lstStyle/>
+          <a:p>
+            <a:pPr algn="l"/>
+            <a:r>
+              <a:rPr sz="1232" b="0" i="0">
+                <a:solidFill>
+                  <a:srgbClr val="3B5174"/>
+                </a:solidFill>
+                <a:latin typeface="Arial"/>
+              </a:rPr>
+              <a:t>•</a:t>
+            </a:r>
+          </a:p>
+        </p:txBody>
+      </p:sp>
+      <p:sp>
+        <p:nvSpPr>
+          <p:cNvPr id="33" name="TextBox 32"/>
+          <p:cNvSpPr txBox="1"/>
+          <p:nvPr/>
+        </p:nvSpPr>
+        <p:spPr>
+          <a:xfrm>
+            <a:off x="4429658" y="4334256"/>
+            <a:ext cx="3533546" cy="274320"/>
+          </a:xfrm>
+          <a:prstGeom prst="rect">
+            <a:avLst/>
+          </a:prstGeom>
+          <a:noFill/>
+        </p:spPr>
+        <p:txBody>
+          <a:bodyPr wrap="square" anchor="t" lIns="36000" rIns="36000" tIns="18000" bIns="18000">
+            <a:spAutoFit/>
+          </a:bodyPr>
+          <a:lstStyle/>
+          <a:p>
+            <a:pPr algn="l"/>
+            <a:r>
+              <a:rPr sz="1232" b="0" i="0">
+                <a:solidFill>
+                  <a:srgbClr val="334155"/>
+                </a:solidFill>
+                <a:latin typeface="Arial"/>
+              </a:rPr>
+              <a:t>G' ≫ G'' → no run-off</a:t>
+            </a:r>
+          </a:p>
+        </p:txBody>
+      </p:sp>
+      <p:sp>
+        <p:nvSpPr>
+          <p:cNvPr id="34" name="TextBox 33"/>
+          <p:cNvSpPr txBox="1"/>
+          <p:nvPr/>
+        </p:nvSpPr>
+        <p:spPr>
+          <a:xfrm>
+            <a:off x="4228490" y="4645152"/>
+            <a:ext cx="182880" cy="274320"/>
+          </a:xfrm>
+          <a:prstGeom prst="rect">
+            <a:avLst/>
+          </a:prstGeom>
+          <a:noFill/>
+        </p:spPr>
+        <p:txBody>
+          <a:bodyPr wrap="square" anchor="t" lIns="36000" rIns="36000" tIns="18000" bIns="18000">
+            <a:spAutoFit/>
+          </a:bodyPr>
+          <a:lstStyle/>
+          <a:p>
+            <a:pPr algn="l"/>
+            <a:r>
+              <a:rPr sz="1232" b="0" i="0">
+                <a:solidFill>
+                  <a:srgbClr val="3B5174"/>
+                </a:solidFill>
+                <a:latin typeface="Arial"/>
+              </a:rPr>
+              <a:t>•</a:t>
+            </a:r>
+          </a:p>
+        </p:txBody>
+      </p:sp>
+      <p:sp>
+        <p:nvSpPr>
+          <p:cNvPr id="35" name="TextBox 34"/>
+          <p:cNvSpPr txBox="1"/>
+          <p:nvPr/>
+        </p:nvSpPr>
+        <p:spPr>
+          <a:xfrm>
+            <a:off x="4429658" y="4645152"/>
+            <a:ext cx="3533546" cy="274320"/>
+          </a:xfrm>
+          <a:prstGeom prst="rect">
+            <a:avLst/>
+          </a:prstGeom>
+          <a:noFill/>
+        </p:spPr>
+        <p:txBody>
+          <a:bodyPr wrap="square" anchor="t" lIns="36000" rIns="36000" tIns="18000" bIns="18000">
+            <a:spAutoFit/>
+          </a:bodyPr>
+          <a:lstStyle/>
+          <a:p>
+            <a:pPr algn="l"/>
+            <a:r>
+              <a:rPr sz="1232" b="0" i="0">
+                <a:solidFill>
+                  <a:srgbClr val="334155"/>
+                </a:solidFill>
+                <a:latin typeface="Arial"/>
+              </a:rPr>
+              <a:t>Retention ≥ AquaGel-K</a:t>
+            </a:r>
+          </a:p>
+        </p:txBody>
+      </p:sp>
+      <p:sp>
+        <p:nvSpPr>
+          <p:cNvPr id="36" name="Rounded Rectangle 35"/>
+          <p:cNvSpPr/>
+          <p:nvPr/>
+        </p:nvSpPr>
+        <p:spPr>
+          <a:xfrm>
+            <a:off x="8091220" y="859536"/>
+            <a:ext cx="3734714" cy="2194560"/>
+          </a:xfrm>
+          <a:prstGeom prst="roundRect">
+            <a:avLst>
+              <a:gd name="adj" fmla="val 2000"/>
+            </a:avLst>
+          </a:prstGeom>
+          <a:solidFill>
+            <a:srgbClr val="F5F8FC"/>
+          </a:solidFill>
+          <a:ln w="12700">
+            <a:solidFill>
+              <a:srgbClr val="C0D0E0"/>
+            </a:solidFill>
+          </a:ln>
+          <a:effectLst/>
+        </p:spPr>
+        <p:style>
+          <a:lnRef idx="1">
+            <a:schemeClr val="accent1"/>
+          </a:lnRef>
+          <a:fillRef idx="3">
+            <a:schemeClr val="accent1"/>
+          </a:fillRef>
+          <a:effectRef idx="2">
+            <a:schemeClr val="accent1"/>
+          </a:effectRef>
+          <a:fontRef idx="minor">
+            <a:schemeClr val="lt1"/>
+          </a:fontRef>
+        </p:style>
+        <p:txBody>
+          <a:bodyPr rtlCol="0" anchor="ctr"/>
+          <a:lstStyle/>
+          <a:p>
+            <a:pPr algn="ctr"/>
+          </a:p>
+        </p:txBody>
+      </p:sp>
+      <p:sp>
+        <p:nvSpPr>
+          <p:cNvPr id="37" name="Rectangle 36"/>
+          <p:cNvSpPr/>
+          <p:nvPr/>
+        </p:nvSpPr>
+        <p:spPr>
+          <a:xfrm>
+            <a:off x="8200948" y="969264"/>
+            <a:ext cx="868680" cy="292608"/>
+          </a:xfrm>
+          <a:prstGeom prst="rect">
+            <a:avLst/>
+          </a:prstGeom>
+          <a:solidFill>
+            <a:srgbClr val="1E293B"/>
+          </a:solidFill>
+          <a:ln>
+            <a:noFill/>
+          </a:ln>
+          <a:effectLst/>
+        </p:spPr>
+        <p:style>
+          <a:lnRef idx="1">
+            <a:schemeClr val="accent1"/>
+          </a:lnRef>
+          <a:fillRef idx="3">
+            <a:schemeClr val="accent1"/>
+          </a:fillRef>
+          <a:effectRef idx="2">
+            <a:schemeClr val="accent1"/>
+          </a:effectRef>
+          <a:fontRef idx="minor">
+            <a:schemeClr val="lt1"/>
+          </a:fontRef>
+        </p:style>
+        <p:txBody>
+          <a:bodyPr rtlCol="0" anchor="ctr"/>
+          <a:lstStyle/>
+          <a:p>
+            <a:pPr algn="ctr"/>
+          </a:p>
+        </p:txBody>
+      </p:sp>
+      <p:sp>
+        <p:nvSpPr>
+          <p:cNvPr id="38" name="TextBox 37"/>
+          <p:cNvSpPr txBox="1"/>
+          <p:nvPr/>
+        </p:nvSpPr>
+        <p:spPr>
+          <a:xfrm>
+            <a:off x="8200948" y="969264"/>
+            <a:ext cx="868680" cy="292608"/>
+          </a:xfrm>
+          <a:prstGeom prst="rect">
+            <a:avLst/>
+          </a:prstGeom>
+          <a:noFill/>
+        </p:spPr>
+        <p:txBody>
+          <a:bodyPr wrap="square" anchor="ctr" lIns="36000" rIns="36000" tIns="18000" bIns="18000">
+            <a:spAutoFit/>
+          </a:bodyPr>
+          <a:lstStyle/>
+          <a:p>
+            <a:pPr algn="ctr"/>
+            <a:r>
+              <a:rPr sz="1232" b="1" i="0">
+                <a:solidFill>
+                  <a:srgbClr val="FFFFFF"/>
+                </a:solidFill>
+                <a:latin typeface="Arial"/>
+              </a:rPr>
+              <a:t>Photo</a:t>
+            </a:r>
+          </a:p>
+        </p:txBody>
+      </p:sp>
+      <p:sp>
+        <p:nvSpPr>
+          <p:cNvPr id="39" name="TextBox 38"/>
+          <p:cNvSpPr txBox="1"/>
+          <p:nvPr/>
+        </p:nvSpPr>
+        <p:spPr>
+          <a:xfrm>
+            <a:off x="8091220" y="859536"/>
+            <a:ext cx="3734714" cy="2194560"/>
+          </a:xfrm>
+          <a:prstGeom prst="rect">
+            <a:avLst/>
+          </a:prstGeom>
+          <a:noFill/>
+        </p:spPr>
+        <p:txBody>
+          <a:bodyPr wrap="square" anchor="ctr" lIns="36000" rIns="36000" tIns="18000" bIns="18000">
+            <a:spAutoFit/>
+          </a:bodyPr>
+          <a:lstStyle/>
+          <a:p>
+            <a:pPr algn="ctr"/>
+            <a:r>
+              <a:rPr sz="1344" b="0" i="0">
+                <a:solidFill>
+                  <a:srgbClr val="AAB4C0"/>
+                </a:solidFill>
+                <a:latin typeface="Arial"/>
+              </a:rPr>
+              <a:t>(Paste paper figure here)</a:t>
+            </a:r>
+          </a:p>
+        </p:txBody>
+      </p:sp>
+      <p:sp>
+        <p:nvSpPr>
+          <p:cNvPr id="40" name="TextBox 39"/>
+          <p:cNvSpPr txBox="1"/>
+          <p:nvPr/>
+        </p:nvSpPr>
+        <p:spPr>
+          <a:xfrm>
+            <a:off x="8091220" y="3090672"/>
+            <a:ext cx="3734714" cy="274320"/>
+          </a:xfrm>
+          <a:prstGeom prst="rect">
+            <a:avLst/>
+          </a:prstGeom>
+          <a:noFill/>
+        </p:spPr>
+        <p:txBody>
+          <a:bodyPr wrap="square" anchor="t" lIns="36000" rIns="36000" tIns="18000" bIns="18000">
+            <a:spAutoFit/>
+          </a:bodyPr>
+          <a:lstStyle/>
+          <a:p>
+            <a:pPr algn="ctr"/>
+            <a:r>
+              <a:rPr sz="1120" b="0" i="1">
+                <a:solidFill>
+                  <a:srgbClr val="64748B"/>
+                </a:solidFill>
+                <a:latin typeface="Arial"/>
+              </a:rPr>
+              <a:t>Nozzle spraying in action</a:t>
+            </a:r>
+          </a:p>
+        </p:txBody>
+      </p:sp>
+      <p:sp>
+        <p:nvSpPr>
+          <p:cNvPr id="41" name="TextBox 40"/>
+          <p:cNvSpPr txBox="1"/>
+          <p:nvPr/>
+        </p:nvSpPr>
+        <p:spPr>
+          <a:xfrm>
+            <a:off x="8091220" y="3401568"/>
+            <a:ext cx="3734714" cy="237744"/>
+          </a:xfrm>
+          <a:prstGeom prst="rect">
+            <a:avLst/>
+          </a:prstGeom>
+          <a:noFill/>
+        </p:spPr>
+        <p:txBody>
+          <a:bodyPr wrap="square" anchor="t" lIns="36000" rIns="36000" tIns="18000" bIns="18000">
+            <a:spAutoFit/>
+          </a:bodyPr>
+          <a:lstStyle/>
+          <a:p>
+            <a:pPr algn="l"/>
+            <a:r>
+              <a:rPr sz="1120" b="1" i="0">
+                <a:solidFill>
+                  <a:srgbClr val="64748B"/>
+                </a:solidFill>
+                <a:latin typeface="Arial"/>
+              </a:rPr>
+              <a:t>SPRAY</a:t>
+            </a:r>
+          </a:p>
+        </p:txBody>
+      </p:sp>
+      <p:sp>
+        <p:nvSpPr>
+          <p:cNvPr id="42" name="TextBox 41"/>
+          <p:cNvSpPr txBox="1"/>
+          <p:nvPr/>
+        </p:nvSpPr>
+        <p:spPr>
+          <a:xfrm>
+            <a:off x="8091220" y="3639312"/>
+            <a:ext cx="3734714" cy="310896"/>
+          </a:xfrm>
+          <a:prstGeom prst="rect">
+            <a:avLst/>
+          </a:prstGeom>
+          <a:noFill/>
+        </p:spPr>
+        <p:txBody>
+          <a:bodyPr wrap="square" anchor="t" lIns="36000" rIns="36000" tIns="18000" bIns="18000">
+            <a:spAutoFit/>
+          </a:bodyPr>
+          <a:lstStyle/>
+          <a:p>
+            <a:pPr algn="l"/>
+            <a:r>
+              <a:rPr sz="1568" b="1" i="0">
+                <a:solidFill>
+                  <a:srgbClr val="1E293B"/>
+                </a:solidFill>
+                <a:latin typeface="Arial"/>
+              </a:rPr>
+              <a:t>Spray Suitability</a:t>
+            </a:r>
+          </a:p>
+        </p:txBody>
+      </p:sp>
+      <p:sp>
+        <p:nvSpPr>
+          <p:cNvPr id="43" name="TextBox 42"/>
+          <p:cNvSpPr txBox="1"/>
+          <p:nvPr/>
+        </p:nvSpPr>
+        <p:spPr>
+          <a:xfrm>
+            <a:off x="8091220" y="4023360"/>
+            <a:ext cx="182880" cy="274320"/>
+          </a:xfrm>
+          <a:prstGeom prst="rect">
+            <a:avLst/>
+          </a:prstGeom>
+          <a:noFill/>
+        </p:spPr>
+        <p:txBody>
+          <a:bodyPr wrap="square" anchor="t" lIns="36000" rIns="36000" tIns="18000" bIns="18000">
+            <a:spAutoFit/>
+          </a:bodyPr>
+          <a:lstStyle/>
+          <a:p>
+            <a:pPr algn="l"/>
+            <a:r>
+              <a:rPr sz="1232" b="0" i="0">
+                <a:solidFill>
+                  <a:srgbClr val="3B5174"/>
+                </a:solidFill>
+                <a:latin typeface="Arial"/>
+              </a:rPr>
+              <a:t>•</a:t>
+            </a:r>
+          </a:p>
+        </p:txBody>
+      </p:sp>
+      <p:sp>
+        <p:nvSpPr>
+          <p:cNvPr id="44" name="TextBox 43"/>
+          <p:cNvSpPr txBox="1"/>
+          <p:nvPr/>
+        </p:nvSpPr>
+        <p:spPr>
+          <a:xfrm>
+            <a:off x="8292388" y="4023360"/>
+            <a:ext cx="3533546" cy="274320"/>
+          </a:xfrm>
+          <a:prstGeom prst="rect">
+            <a:avLst/>
+          </a:prstGeom>
+          <a:noFill/>
+        </p:spPr>
+        <p:txBody>
+          <a:bodyPr wrap="square" anchor="t" lIns="36000" rIns="36000" tIns="18000" bIns="18000">
+            <a:spAutoFit/>
+          </a:bodyPr>
+          <a:lstStyle/>
+          <a:p>
+            <a:pPr algn="l"/>
+            <a:r>
+              <a:rPr sz="1232" b="0" i="0">
+                <a:solidFill>
+                  <a:srgbClr val="334155"/>
+                </a:solidFill>
+                <a:latin typeface="Arial"/>
+              </a:rPr>
+              <a:t>Viscosity drops under high shear</a:t>
+            </a:r>
+          </a:p>
+        </p:txBody>
+      </p:sp>
+      <p:sp>
+        <p:nvSpPr>
+          <p:cNvPr id="45" name="TextBox 44"/>
+          <p:cNvSpPr txBox="1"/>
+          <p:nvPr/>
+        </p:nvSpPr>
+        <p:spPr>
+          <a:xfrm>
+            <a:off x="8091220" y="4334256"/>
+            <a:ext cx="182880" cy="274320"/>
+          </a:xfrm>
+          <a:prstGeom prst="rect">
+            <a:avLst/>
+          </a:prstGeom>
+          <a:noFill/>
+        </p:spPr>
+        <p:txBody>
+          <a:bodyPr wrap="square" anchor="t" lIns="36000" rIns="36000" tIns="18000" bIns="18000">
+            <a:spAutoFit/>
+          </a:bodyPr>
+          <a:lstStyle/>
+          <a:p>
+            <a:pPr algn="l"/>
+            <a:r>
+              <a:rPr sz="1232" b="0" i="0">
+                <a:solidFill>
+                  <a:srgbClr val="3B5174"/>
+                </a:solidFill>
+                <a:latin typeface="Arial"/>
+              </a:rPr>
+              <a:t>•</a:t>
+            </a:r>
+          </a:p>
+        </p:txBody>
+      </p:sp>
+      <p:sp>
+        <p:nvSpPr>
+          <p:cNvPr id="46" name="TextBox 45"/>
+          <p:cNvSpPr txBox="1"/>
+          <p:nvPr/>
+        </p:nvSpPr>
+        <p:spPr>
+          <a:xfrm>
+            <a:off x="8292388" y="4334256"/>
+            <a:ext cx="3533546" cy="274320"/>
+          </a:xfrm>
+          <a:prstGeom prst="rect">
+            <a:avLst/>
+          </a:prstGeom>
+          <a:noFill/>
+        </p:spPr>
+        <p:txBody>
+          <a:bodyPr wrap="square" anchor="t" lIns="36000" rIns="36000" tIns="18000" bIns="18000">
+            <a:spAutoFit/>
+          </a:bodyPr>
+          <a:lstStyle/>
+          <a:p>
+            <a:pPr algn="l"/>
+            <a:r>
+              <a:rPr sz="1232" b="0" i="0">
+                <a:solidFill>
+                  <a:srgbClr val="334155"/>
+                </a:solidFill>
+                <a:latin typeface="Arial"/>
+              </a:rPr>
+              <a:t>Recovers high viscosity on landing</a:t>
+            </a:r>
+          </a:p>
+        </p:txBody>
+      </p:sp>
+      <p:sp>
+        <p:nvSpPr>
+          <p:cNvPr id="47" name="TextBox 46"/>
+          <p:cNvSpPr txBox="1"/>
+          <p:nvPr/>
+        </p:nvSpPr>
+        <p:spPr>
+          <a:xfrm>
+            <a:off x="8091220" y="4645152"/>
+            <a:ext cx="182880" cy="274320"/>
+          </a:xfrm>
+          <a:prstGeom prst="rect">
+            <a:avLst/>
+          </a:prstGeom>
+          <a:noFill/>
+        </p:spPr>
+        <p:txBody>
+          <a:bodyPr wrap="square" anchor="t" lIns="36000" rIns="36000" tIns="18000" bIns="18000">
+            <a:spAutoFit/>
+          </a:bodyPr>
+          <a:lstStyle/>
+          <a:p>
+            <a:pPr algn="l"/>
+            <a:r>
+              <a:rPr sz="1232" b="0" i="0">
+                <a:solidFill>
+                  <a:srgbClr val="3B5174"/>
+                </a:solidFill>
+                <a:latin typeface="Arial"/>
+              </a:rPr>
+              <a:t>•</a:t>
+            </a:r>
+          </a:p>
+        </p:txBody>
+      </p:sp>
+      <p:sp>
+        <p:nvSpPr>
+          <p:cNvPr id="48" name="TextBox 47"/>
+          <p:cNvSpPr txBox="1"/>
+          <p:nvPr/>
+        </p:nvSpPr>
+        <p:spPr>
+          <a:xfrm>
+            <a:off x="8292388" y="4645152"/>
+            <a:ext cx="3533546" cy="274320"/>
+          </a:xfrm>
+          <a:prstGeom prst="rect">
+            <a:avLst/>
+          </a:prstGeom>
+          <a:noFill/>
+        </p:spPr>
+        <p:txBody>
+          <a:bodyPr wrap="square" anchor="t" lIns="36000" rIns="36000" tIns="18000" bIns="18000">
+            <a:spAutoFit/>
+          </a:bodyPr>
+          <a:lstStyle/>
+          <a:p>
+            <a:pPr algn="l"/>
+            <a:r>
+              <a:rPr sz="1232" b="0" i="0">
+                <a:solidFill>
+                  <a:srgbClr val="334155"/>
+                </a:solidFill>
+                <a:latin typeface="Arial"/>
+              </a:rPr>
+              <a:t>Compatible with existing nozzles</a:t>
+            </a:r>
+          </a:p>
+        </p:txBody>
+      </p:sp>
+      <p:sp>
+        <p:nvSpPr>
+          <p:cNvPr id="49" name="Rounded Rectangle 48"/>
+          <p:cNvSpPr/>
+          <p:nvPr/>
+        </p:nvSpPr>
+        <p:spPr>
+          <a:xfrm>
+            <a:off x="365760" y="5980176"/>
+            <a:ext cx="11460175" cy="658368"/>
+          </a:xfrm>
+          <a:prstGeom prst="roundRect">
+            <a:avLst>
+              <a:gd name="adj" fmla="val 4000"/>
+            </a:avLst>
+          </a:prstGeom>
+          <a:solidFill>
+            <a:srgbClr val="F8FAFC"/>
+          </a:solidFill>
+          <a:ln>
+            <a:noFill/>
+          </a:ln>
+          <a:effectLst/>
+        </p:spPr>
+        <p:style>
+          <a:lnRef idx="1">
+            <a:schemeClr val="accent1"/>
+          </a:lnRef>
+          <a:fillRef idx="3">
+            <a:schemeClr val="accent1"/>
+          </a:fillRef>
+          <a:effectRef idx="2">
+            <a:schemeClr val="accent1"/>
+          </a:effectRef>
+          <a:fontRef idx="minor">
+            <a:schemeClr val="lt1"/>
+          </a:fontRef>
+        </p:style>
+        <p:txBody>
+          <a:bodyPr rtlCol="0" anchor="ctr"/>
+          <a:lstStyle/>
+          <a:p>
+            <a:pPr algn="ctr"/>
+          </a:p>
+        </p:txBody>
+      </p:sp>
+      <p:sp>
+        <p:nvSpPr>
+          <p:cNvPr id="50" name="Rectangle 49"/>
+          <p:cNvSpPr/>
+          <p:nvPr/>
+        </p:nvSpPr>
+        <p:spPr>
+          <a:xfrm>
+            <a:off x="365760" y="5980176"/>
+            <a:ext cx="54864" cy="658368"/>
           </a:xfrm>
           <a:prstGeom prst="rect">
             <a:avLst/>
@@ -11539,1148 +13386,34 @@
       </p:sp>
       <p:sp>
         <p:nvSpPr>
-          <p:cNvPr id="12" name="TextBox 11"/>
-          <p:cNvSpPr txBox="1"/>
-          <p:nvPr/>
-        </p:nvSpPr>
-        <p:spPr>
-          <a:xfrm>
-            <a:off x="548640" y="1024128"/>
-            <a:ext cx="3368954" cy="219456"/>
-          </a:xfrm>
-          <a:prstGeom prst="rect">
-            <a:avLst/>
-          </a:prstGeom>
-          <a:noFill/>
-        </p:spPr>
-        <p:txBody>
-          <a:bodyPr wrap="square" anchor="t" lIns="36000" rIns="36000" tIns="18000" bIns="18000">
-            <a:spAutoFit/>
-          </a:bodyPr>
-          <a:lstStyle/>
-          <a:p>
-            <a:pPr algn="l"/>
-            <a:r>
-              <a:rPr sz="1120" b="1" i="0">
-                <a:solidFill>
-                  <a:srgbClr val="64748B"/>
-                </a:solidFill>
-                <a:latin typeface="Arial"/>
-              </a:rPr>
-              <a:t>WETTING</a:t>
-            </a:r>
-          </a:p>
-        </p:txBody>
-      </p:sp>
-      <p:sp>
-        <p:nvSpPr>
-          <p:cNvPr id="13" name="TextBox 12"/>
-          <p:cNvSpPr txBox="1"/>
-          <p:nvPr/>
-        </p:nvSpPr>
-        <p:spPr>
-          <a:xfrm>
-            <a:off x="548640" y="1261872"/>
-            <a:ext cx="3368954" cy="329184"/>
-          </a:xfrm>
-          <a:prstGeom prst="rect">
-            <a:avLst/>
-          </a:prstGeom>
-          <a:noFill/>
-        </p:spPr>
-        <p:txBody>
-          <a:bodyPr wrap="square" anchor="t" lIns="36000" rIns="36000" tIns="18000" bIns="18000">
-            <a:spAutoFit/>
-          </a:bodyPr>
-          <a:lstStyle/>
-          <a:p>
-            <a:pPr algn="l"/>
-            <a:r>
-              <a:rPr sz="1680" b="1" i="0">
-                <a:solidFill>
-                  <a:srgbClr val="1E293B"/>
-                </a:solidFill>
-                <a:latin typeface="Arial"/>
-              </a:rPr>
-              <a:t>Contact Angle Measurement</a:t>
-            </a:r>
-          </a:p>
-        </p:txBody>
-      </p:sp>
-      <p:sp>
-        <p:nvSpPr>
-          <p:cNvPr id="14" name="TextBox 13"/>
-          <p:cNvSpPr txBox="1"/>
-          <p:nvPr/>
-        </p:nvSpPr>
-        <p:spPr>
-          <a:xfrm>
-            <a:off x="548640" y="1627632"/>
-            <a:ext cx="182880" cy="274320"/>
-          </a:xfrm>
-          <a:prstGeom prst="rect">
-            <a:avLst/>
-          </a:prstGeom>
-          <a:noFill/>
-        </p:spPr>
-        <p:txBody>
-          <a:bodyPr wrap="square" anchor="t" lIns="36000" rIns="36000" tIns="18000" bIns="18000">
-            <a:spAutoFit/>
-          </a:bodyPr>
-          <a:lstStyle/>
-          <a:p>
-            <a:pPr algn="l"/>
-            <a:r>
-              <a:rPr sz="1344" b="0" i="0">
+          <p:cNvPr id="51" name="TextBox 50"/>
+          <p:cNvSpPr txBox="1"/>
+          <p:nvPr/>
+        </p:nvSpPr>
+        <p:spPr>
+          <a:xfrm>
+            <a:off x="548640" y="5980176"/>
+            <a:ext cx="365760" cy="658368"/>
+          </a:xfrm>
+          <a:prstGeom prst="rect">
+            <a:avLst/>
+          </a:prstGeom>
+          <a:noFill/>
+        </p:spPr>
+        <p:txBody>
+          <a:bodyPr wrap="square" anchor="ctr" lIns="36000" rIns="36000" tIns="18000" bIns="18000">
+            <a:spAutoFit/>
+          </a:bodyPr>
+          <a:lstStyle/>
+          <a:p>
+            <a:pPr algn="l"/>
+            <a:r>
+              <a:rPr sz="1568" b="0" i="0">
                 <a:solidFill>
                   <a:srgbClr val="3B5174"/>
                 </a:solidFill>
                 <a:latin typeface="Arial"/>
               </a:rPr>
-              <a:t>•</a:t>
-            </a:r>
-          </a:p>
-        </p:txBody>
-      </p:sp>
-      <p:sp>
-        <p:nvSpPr>
-          <p:cNvPr id="15" name="TextBox 14"/>
-          <p:cNvSpPr txBox="1"/>
-          <p:nvPr/>
-        </p:nvSpPr>
-        <p:spPr>
-          <a:xfrm>
-            <a:off x="749808" y="1627632"/>
-            <a:ext cx="3167786" cy="274320"/>
-          </a:xfrm>
-          <a:prstGeom prst="rect">
-            <a:avLst/>
-          </a:prstGeom>
-          <a:noFill/>
-        </p:spPr>
-        <p:txBody>
-          <a:bodyPr wrap="square" anchor="t" lIns="36000" rIns="36000" tIns="18000" bIns="18000">
-            <a:spAutoFit/>
-          </a:bodyPr>
-          <a:lstStyle/>
-          <a:p>
-            <a:pPr algn="l"/>
-            <a:r>
-              <a:rPr sz="1344" b="0" i="0">
-                <a:solidFill>
-                  <a:srgbClr val="475569"/>
-                </a:solidFill>
-                <a:latin typeface="Arial"/>
-              </a:rPr>
-              <a:t>Contact angle evaluation on wood, concrete, and metal</a:t>
-            </a:r>
-          </a:p>
-        </p:txBody>
-      </p:sp>
-      <p:sp>
-        <p:nvSpPr>
-          <p:cNvPr id="16" name="TextBox 15"/>
-          <p:cNvSpPr txBox="1"/>
-          <p:nvPr/>
-        </p:nvSpPr>
-        <p:spPr>
-          <a:xfrm>
-            <a:off x="548640" y="1901952"/>
-            <a:ext cx="182880" cy="274320"/>
-          </a:xfrm>
-          <a:prstGeom prst="rect">
-            <a:avLst/>
-          </a:prstGeom>
-          <a:noFill/>
-        </p:spPr>
-        <p:txBody>
-          <a:bodyPr wrap="square" anchor="t" lIns="36000" rIns="36000" tIns="18000" bIns="18000">
-            <a:spAutoFit/>
-          </a:bodyPr>
-          <a:lstStyle/>
-          <a:p>
-            <a:pPr algn="l"/>
-            <a:r>
-              <a:rPr sz="1344" b="0" i="0">
-                <a:solidFill>
-                  <a:srgbClr val="3B5174"/>
-                </a:solidFill>
-                <a:latin typeface="Arial"/>
-              </a:rPr>
-              <a:t>•</a:t>
-            </a:r>
-          </a:p>
-        </p:txBody>
-      </p:sp>
-      <p:sp>
-        <p:nvSpPr>
-          <p:cNvPr id="17" name="TextBox 16"/>
-          <p:cNvSpPr txBox="1"/>
-          <p:nvPr/>
-        </p:nvSpPr>
-        <p:spPr>
-          <a:xfrm>
-            <a:off x="749808" y="1901952"/>
-            <a:ext cx="3167786" cy="274320"/>
-          </a:xfrm>
-          <a:prstGeom prst="rect">
-            <a:avLst/>
-          </a:prstGeom>
-          <a:noFill/>
-        </p:spPr>
-        <p:txBody>
-          <a:bodyPr wrap="square" anchor="t" lIns="36000" rIns="36000" tIns="18000" bIns="18000">
-            <a:spAutoFit/>
-          </a:bodyPr>
-          <a:lstStyle/>
-          <a:p>
-            <a:pPr algn="l"/>
-            <a:r>
-              <a:rPr sz="1344" b="0" i="0">
-                <a:solidFill>
-                  <a:srgbClr val="475569"/>
-                </a:solidFill>
-                <a:latin typeface="Arial"/>
-              </a:rPr>
-              <a:t>WEG shows low contact angle → high wettability</a:t>
-            </a:r>
-          </a:p>
-        </p:txBody>
-      </p:sp>
-      <p:sp>
-        <p:nvSpPr>
-          <p:cNvPr id="18" name="TextBox 17"/>
-          <p:cNvSpPr txBox="1"/>
-          <p:nvPr/>
-        </p:nvSpPr>
-        <p:spPr>
-          <a:xfrm>
-            <a:off x="548640" y="2176272"/>
-            <a:ext cx="182880" cy="274320"/>
-          </a:xfrm>
-          <a:prstGeom prst="rect">
-            <a:avLst/>
-          </a:prstGeom>
-          <a:noFill/>
-        </p:spPr>
-        <p:txBody>
-          <a:bodyPr wrap="square" anchor="t" lIns="36000" rIns="36000" tIns="18000" bIns="18000">
-            <a:spAutoFit/>
-          </a:bodyPr>
-          <a:lstStyle/>
-          <a:p>
-            <a:pPr algn="l"/>
-            <a:r>
-              <a:rPr sz="1344" b="0" i="0">
-                <a:solidFill>
-                  <a:srgbClr val="3B5174"/>
-                </a:solidFill>
-                <a:latin typeface="Arial"/>
-              </a:rPr>
-              <a:t>•</a:t>
-            </a:r>
-          </a:p>
-        </p:txBody>
-      </p:sp>
-      <p:sp>
-        <p:nvSpPr>
-          <p:cNvPr id="19" name="TextBox 18"/>
-          <p:cNvSpPr txBox="1"/>
-          <p:nvPr/>
-        </p:nvSpPr>
-        <p:spPr>
-          <a:xfrm>
-            <a:off x="749808" y="2176272"/>
-            <a:ext cx="3167786" cy="274320"/>
-          </a:xfrm>
-          <a:prstGeom prst="rect">
-            <a:avLst/>
-          </a:prstGeom>
-          <a:noFill/>
-        </p:spPr>
-        <p:txBody>
-          <a:bodyPr wrap="square" anchor="t" lIns="36000" rIns="36000" tIns="18000" bIns="18000">
-            <a:spAutoFit/>
-          </a:bodyPr>
-          <a:lstStyle/>
-          <a:p>
-            <a:pPr algn="l"/>
-            <a:r>
-              <a:rPr sz="1344" b="0" i="0">
-                <a:solidFill>
-                  <a:srgbClr val="475569"/>
-                </a:solidFill>
-                <a:latin typeface="Arial"/>
-              </a:rPr>
-              <a:t>HEC+MC shows particularly high affinity at cellulose-wood interface</a:t>
-            </a:r>
-          </a:p>
-        </p:txBody>
-      </p:sp>
-      <p:sp>
-        <p:nvSpPr>
-          <p:cNvPr id="20" name="Rounded Rectangle 19"/>
-          <p:cNvSpPr/>
-          <p:nvPr/>
-        </p:nvSpPr>
-        <p:spPr>
-          <a:xfrm>
-            <a:off x="4228490" y="859536"/>
-            <a:ext cx="3734714" cy="3291840"/>
-          </a:xfrm>
-          <a:prstGeom prst="roundRect">
-            <a:avLst>
-              <a:gd name="adj" fmla="val 4000"/>
-            </a:avLst>
-          </a:prstGeom>
-          <a:solidFill>
-            <a:srgbClr val="F1F5F9"/>
-          </a:solidFill>
-          <a:ln w="6350">
-            <a:solidFill>
-              <a:srgbClr val="E2E8F0"/>
-            </a:solidFill>
-          </a:ln>
-          <a:effectLst/>
-        </p:spPr>
-        <p:style>
-          <a:lnRef idx="1">
-            <a:schemeClr val="accent1"/>
-          </a:lnRef>
-          <a:fillRef idx="3">
-            <a:schemeClr val="accent1"/>
-          </a:fillRef>
-          <a:effectRef idx="2">
-            <a:schemeClr val="accent1"/>
-          </a:effectRef>
-          <a:fontRef idx="minor">
-            <a:schemeClr val="lt1"/>
-          </a:fontRef>
-        </p:style>
-        <p:txBody>
-          <a:bodyPr rtlCol="0" anchor="ctr"/>
-          <a:lstStyle/>
-          <a:p>
-            <a:pPr algn="ctr"/>
-          </a:p>
-        </p:txBody>
-      </p:sp>
-      <p:sp>
-        <p:nvSpPr>
-          <p:cNvPr id="21" name="Rectangle 20"/>
-          <p:cNvSpPr/>
-          <p:nvPr/>
-        </p:nvSpPr>
-        <p:spPr>
-          <a:xfrm>
-            <a:off x="4228490" y="859536"/>
-            <a:ext cx="3734714" cy="36576"/>
-          </a:xfrm>
-          <a:prstGeom prst="rect">
-            <a:avLst/>
-          </a:prstGeom>
-          <a:solidFill>
-            <a:srgbClr val="3B5174"/>
-          </a:solidFill>
-          <a:ln>
-            <a:noFill/>
-          </a:ln>
-          <a:effectLst/>
-        </p:spPr>
-        <p:style>
-          <a:lnRef idx="1">
-            <a:schemeClr val="accent1"/>
-          </a:lnRef>
-          <a:fillRef idx="3">
-            <a:schemeClr val="accent1"/>
-          </a:fillRef>
-          <a:effectRef idx="2">
-            <a:schemeClr val="accent1"/>
-          </a:effectRef>
-          <a:fontRef idx="minor">
-            <a:schemeClr val="lt1"/>
-          </a:fontRef>
-        </p:style>
-        <p:txBody>
-          <a:bodyPr rtlCol="0" anchor="ctr"/>
-          <a:lstStyle/>
-          <a:p>
-            <a:pPr algn="ctr"/>
-          </a:p>
-        </p:txBody>
-      </p:sp>
-      <p:sp>
-        <p:nvSpPr>
-          <p:cNvPr id="22" name="TextBox 21"/>
-          <p:cNvSpPr txBox="1"/>
-          <p:nvPr/>
-        </p:nvSpPr>
-        <p:spPr>
-          <a:xfrm>
-            <a:off x="4411370" y="1024128"/>
-            <a:ext cx="3368954" cy="219456"/>
-          </a:xfrm>
-          <a:prstGeom prst="rect">
-            <a:avLst/>
-          </a:prstGeom>
-          <a:noFill/>
-        </p:spPr>
-        <p:txBody>
-          <a:bodyPr wrap="square" anchor="t" lIns="36000" rIns="36000" tIns="18000" bIns="18000">
-            <a:spAutoFit/>
-          </a:bodyPr>
-          <a:lstStyle/>
-          <a:p>
-            <a:pPr algn="l"/>
-            <a:r>
-              <a:rPr sz="1120" b="1" i="0">
-                <a:solidFill>
-                  <a:srgbClr val="64748B"/>
-                </a:solidFill>
-                <a:latin typeface="Arial"/>
-              </a:rPr>
-              <a:t>ADHESION</a:t>
-            </a:r>
-          </a:p>
-        </p:txBody>
-      </p:sp>
-      <p:sp>
-        <p:nvSpPr>
-          <p:cNvPr id="23" name="TextBox 22"/>
-          <p:cNvSpPr txBox="1"/>
-          <p:nvPr/>
-        </p:nvSpPr>
-        <p:spPr>
-          <a:xfrm>
-            <a:off x="4411370" y="1261872"/>
-            <a:ext cx="3368954" cy="329184"/>
-          </a:xfrm>
-          <a:prstGeom prst="rect">
-            <a:avLst/>
-          </a:prstGeom>
-          <a:noFill/>
-        </p:spPr>
-        <p:txBody>
-          <a:bodyPr wrap="square" anchor="t" lIns="36000" rIns="36000" tIns="18000" bIns="18000">
-            <a:spAutoFit/>
-          </a:bodyPr>
-          <a:lstStyle/>
-          <a:p>
-            <a:pPr algn="l"/>
-            <a:r>
-              <a:rPr sz="1680" b="1" i="0">
-                <a:solidFill>
-                  <a:srgbClr val="1E293B"/>
-                </a:solidFill>
-                <a:latin typeface="Arial"/>
-              </a:rPr>
-              <a:t>Vertical Surface Adhesion Test</a:t>
-            </a:r>
-          </a:p>
-        </p:txBody>
-      </p:sp>
-      <p:sp>
-        <p:nvSpPr>
-          <p:cNvPr id="24" name="TextBox 23"/>
-          <p:cNvSpPr txBox="1"/>
-          <p:nvPr/>
-        </p:nvSpPr>
-        <p:spPr>
-          <a:xfrm>
-            <a:off x="4411370" y="1627632"/>
-            <a:ext cx="182880" cy="274320"/>
-          </a:xfrm>
-          <a:prstGeom prst="rect">
-            <a:avLst/>
-          </a:prstGeom>
-          <a:noFill/>
-        </p:spPr>
-        <p:txBody>
-          <a:bodyPr wrap="square" anchor="t" lIns="36000" rIns="36000" tIns="18000" bIns="18000">
-            <a:spAutoFit/>
-          </a:bodyPr>
-          <a:lstStyle/>
-          <a:p>
-            <a:pPr algn="l"/>
-            <a:r>
-              <a:rPr sz="1344" b="0" i="0">
-                <a:solidFill>
-                  <a:srgbClr val="3B5174"/>
-                </a:solidFill>
-                <a:latin typeface="Arial"/>
-              </a:rPr>
-              <a:t>•</a:t>
-            </a:r>
-          </a:p>
-        </p:txBody>
-      </p:sp>
-      <p:sp>
-        <p:nvSpPr>
-          <p:cNvPr id="25" name="TextBox 24"/>
-          <p:cNvSpPr txBox="1"/>
-          <p:nvPr/>
-        </p:nvSpPr>
-        <p:spPr>
-          <a:xfrm>
-            <a:off x="4612538" y="1627632"/>
-            <a:ext cx="3167786" cy="274320"/>
-          </a:xfrm>
-          <a:prstGeom prst="rect">
-            <a:avLst/>
-          </a:prstGeom>
-          <a:noFill/>
-        </p:spPr>
-        <p:txBody>
-          <a:bodyPr wrap="square" anchor="t" lIns="36000" rIns="36000" tIns="18000" bIns="18000">
-            <a:spAutoFit/>
-          </a:bodyPr>
-          <a:lstStyle/>
-          <a:p>
-            <a:pPr algn="l"/>
-            <a:r>
-              <a:rPr sz="1344" b="0" i="0">
-                <a:solidFill>
-                  <a:srgbClr val="475569"/>
-                </a:solidFill>
-                <a:latin typeface="Arial"/>
-              </a:rPr>
-              <a:t>Gel applied to vertically oriented substrate</a:t>
-            </a:r>
-          </a:p>
-        </p:txBody>
-      </p:sp>
-      <p:sp>
-        <p:nvSpPr>
-          <p:cNvPr id="26" name="TextBox 25"/>
-          <p:cNvSpPr txBox="1"/>
-          <p:nvPr/>
-        </p:nvSpPr>
-        <p:spPr>
-          <a:xfrm>
-            <a:off x="4411370" y="1901952"/>
-            <a:ext cx="182880" cy="274320"/>
-          </a:xfrm>
-          <a:prstGeom prst="rect">
-            <a:avLst/>
-          </a:prstGeom>
-          <a:noFill/>
-        </p:spPr>
-        <p:txBody>
-          <a:bodyPr wrap="square" anchor="t" lIns="36000" rIns="36000" tIns="18000" bIns="18000">
-            <a:spAutoFit/>
-          </a:bodyPr>
-          <a:lstStyle/>
-          <a:p>
-            <a:pPr algn="l"/>
-            <a:r>
-              <a:rPr sz="1344" b="0" i="0">
-                <a:solidFill>
-                  <a:srgbClr val="3B5174"/>
-                </a:solidFill>
-                <a:latin typeface="Arial"/>
-              </a:rPr>
-              <a:t>•</a:t>
-            </a:r>
-          </a:p>
-        </p:txBody>
-      </p:sp>
-      <p:sp>
-        <p:nvSpPr>
-          <p:cNvPr id="27" name="TextBox 26"/>
-          <p:cNvSpPr txBox="1"/>
-          <p:nvPr/>
-        </p:nvSpPr>
-        <p:spPr>
-          <a:xfrm>
-            <a:off x="4612538" y="1901952"/>
-            <a:ext cx="3167786" cy="274320"/>
-          </a:xfrm>
-          <a:prstGeom prst="rect">
-            <a:avLst/>
-          </a:prstGeom>
-          <a:noFill/>
-        </p:spPr>
-        <p:txBody>
-          <a:bodyPr wrap="square" anchor="t" lIns="36000" rIns="36000" tIns="18000" bIns="18000">
-            <a:spAutoFit/>
-          </a:bodyPr>
-          <a:lstStyle/>
-          <a:p>
-            <a:pPr algn="l"/>
-            <a:r>
-              <a:rPr sz="1344" b="0" i="0">
-                <a:solidFill>
-                  <a:srgbClr val="475569"/>
-                </a:solidFill>
-                <a:latin typeface="Arial"/>
-              </a:rPr>
-              <a:t>G' ≫ G'' → resists gravity without flowing down</a:t>
-            </a:r>
-          </a:p>
-        </p:txBody>
-      </p:sp>
-      <p:sp>
-        <p:nvSpPr>
-          <p:cNvPr id="28" name="TextBox 27"/>
-          <p:cNvSpPr txBox="1"/>
-          <p:nvPr/>
-        </p:nvSpPr>
-        <p:spPr>
-          <a:xfrm>
-            <a:off x="4411370" y="2176272"/>
-            <a:ext cx="182880" cy="274320"/>
-          </a:xfrm>
-          <a:prstGeom prst="rect">
-            <a:avLst/>
-          </a:prstGeom>
-          <a:noFill/>
-        </p:spPr>
-        <p:txBody>
-          <a:bodyPr wrap="square" anchor="t" lIns="36000" rIns="36000" tIns="18000" bIns="18000">
-            <a:spAutoFit/>
-          </a:bodyPr>
-          <a:lstStyle/>
-          <a:p>
-            <a:pPr algn="l"/>
-            <a:r>
-              <a:rPr sz="1344" b="0" i="0">
-                <a:solidFill>
-                  <a:srgbClr val="3B5174"/>
-                </a:solidFill>
-                <a:latin typeface="Arial"/>
-              </a:rPr>
-              <a:t>•</a:t>
-            </a:r>
-          </a:p>
-        </p:txBody>
-      </p:sp>
-      <p:sp>
-        <p:nvSpPr>
-          <p:cNvPr id="29" name="TextBox 28"/>
-          <p:cNvSpPr txBox="1"/>
-          <p:nvPr/>
-        </p:nvSpPr>
-        <p:spPr>
-          <a:xfrm>
-            <a:off x="4612538" y="2176272"/>
-            <a:ext cx="3167786" cy="274320"/>
-          </a:xfrm>
-          <a:prstGeom prst="rect">
-            <a:avLst/>
-          </a:prstGeom>
-          <a:noFill/>
-        </p:spPr>
-        <p:txBody>
-          <a:bodyPr wrap="square" anchor="t" lIns="36000" rIns="36000" tIns="18000" bIns="18000">
-            <a:spAutoFit/>
-          </a:bodyPr>
-          <a:lstStyle/>
-          <a:p>
-            <a:pPr algn="l"/>
-            <a:r>
-              <a:rPr sz="1344" b="0" i="0">
-                <a:solidFill>
-                  <a:srgbClr val="475569"/>
-                </a:solidFill>
-                <a:latin typeface="Arial"/>
-              </a:rPr>
-              <a:t>Vertical surface retention equal to or better than AquaGel-K</a:t>
-            </a:r>
-          </a:p>
-        </p:txBody>
-      </p:sp>
-      <p:sp>
-        <p:nvSpPr>
-          <p:cNvPr id="30" name="Rounded Rectangle 29"/>
-          <p:cNvSpPr/>
-          <p:nvPr/>
-        </p:nvSpPr>
-        <p:spPr>
-          <a:xfrm>
-            <a:off x="8091220" y="859536"/>
-            <a:ext cx="3734714" cy="3291840"/>
-          </a:xfrm>
-          <a:prstGeom prst="roundRect">
-            <a:avLst>
-              <a:gd name="adj" fmla="val 4000"/>
-            </a:avLst>
-          </a:prstGeom>
-          <a:solidFill>
-            <a:srgbClr val="F1F5F9"/>
-          </a:solidFill>
-          <a:ln w="6350">
-            <a:solidFill>
-              <a:srgbClr val="E2E8F0"/>
-            </a:solidFill>
-          </a:ln>
-          <a:effectLst/>
-        </p:spPr>
-        <p:style>
-          <a:lnRef idx="1">
-            <a:schemeClr val="accent1"/>
-          </a:lnRef>
-          <a:fillRef idx="3">
-            <a:schemeClr val="accent1"/>
-          </a:fillRef>
-          <a:effectRef idx="2">
-            <a:schemeClr val="accent1"/>
-          </a:effectRef>
-          <a:fontRef idx="minor">
-            <a:schemeClr val="lt1"/>
-          </a:fontRef>
-        </p:style>
-        <p:txBody>
-          <a:bodyPr rtlCol="0" anchor="ctr"/>
-          <a:lstStyle/>
-          <a:p>
-            <a:pPr algn="ctr"/>
-          </a:p>
-        </p:txBody>
-      </p:sp>
-      <p:sp>
-        <p:nvSpPr>
-          <p:cNvPr id="31" name="Rectangle 30"/>
-          <p:cNvSpPr/>
-          <p:nvPr/>
-        </p:nvSpPr>
-        <p:spPr>
-          <a:xfrm>
-            <a:off x="8091220" y="859536"/>
-            <a:ext cx="3734714" cy="36576"/>
-          </a:xfrm>
-          <a:prstGeom prst="rect">
-            <a:avLst/>
-          </a:prstGeom>
-          <a:solidFill>
-            <a:srgbClr val="3B5174"/>
-          </a:solidFill>
-          <a:ln>
-            <a:noFill/>
-          </a:ln>
-          <a:effectLst/>
-        </p:spPr>
-        <p:style>
-          <a:lnRef idx="1">
-            <a:schemeClr val="accent1"/>
-          </a:lnRef>
-          <a:fillRef idx="3">
-            <a:schemeClr val="accent1"/>
-          </a:fillRef>
-          <a:effectRef idx="2">
-            <a:schemeClr val="accent1"/>
-          </a:effectRef>
-          <a:fontRef idx="minor">
-            <a:schemeClr val="lt1"/>
-          </a:fontRef>
-        </p:style>
-        <p:txBody>
-          <a:bodyPr rtlCol="0" anchor="ctr"/>
-          <a:lstStyle/>
-          <a:p>
-            <a:pPr algn="ctr"/>
-          </a:p>
-        </p:txBody>
-      </p:sp>
-      <p:sp>
-        <p:nvSpPr>
-          <p:cNvPr id="32" name="TextBox 31"/>
-          <p:cNvSpPr txBox="1"/>
-          <p:nvPr/>
-        </p:nvSpPr>
-        <p:spPr>
-          <a:xfrm>
-            <a:off x="8274100" y="1024128"/>
-            <a:ext cx="3368954" cy="219456"/>
-          </a:xfrm>
-          <a:prstGeom prst="rect">
-            <a:avLst/>
-          </a:prstGeom>
-          <a:noFill/>
-        </p:spPr>
-        <p:txBody>
-          <a:bodyPr wrap="square" anchor="t" lIns="36000" rIns="36000" tIns="18000" bIns="18000">
-            <a:spAutoFit/>
-          </a:bodyPr>
-          <a:lstStyle/>
-          <a:p>
-            <a:pPr algn="l"/>
-            <a:r>
-              <a:rPr sz="1120" b="1" i="0">
-                <a:solidFill>
-                  <a:srgbClr val="64748B"/>
-                </a:solidFill>
-                <a:latin typeface="Arial"/>
-              </a:rPr>
-              <a:t>SPRAY</a:t>
-            </a:r>
-          </a:p>
-        </p:txBody>
-      </p:sp>
-      <p:sp>
-        <p:nvSpPr>
-          <p:cNvPr id="33" name="TextBox 32"/>
-          <p:cNvSpPr txBox="1"/>
-          <p:nvPr/>
-        </p:nvSpPr>
-        <p:spPr>
-          <a:xfrm>
-            <a:off x="8274100" y="1261872"/>
-            <a:ext cx="3368954" cy="329184"/>
-          </a:xfrm>
-          <a:prstGeom prst="rect">
-            <a:avLst/>
-          </a:prstGeom>
-          <a:noFill/>
-        </p:spPr>
-        <p:txBody>
-          <a:bodyPr wrap="square" anchor="t" lIns="36000" rIns="36000" tIns="18000" bIns="18000">
-            <a:spAutoFit/>
-          </a:bodyPr>
-          <a:lstStyle/>
-          <a:p>
-            <a:pPr algn="l"/>
-            <a:r>
-              <a:rPr sz="1680" b="1" i="0">
-                <a:solidFill>
-                  <a:srgbClr val="1E293B"/>
-                </a:solidFill>
-                <a:latin typeface="Arial"/>
-              </a:rPr>
-              <a:t>Spray Application Suitability</a:t>
-            </a:r>
-          </a:p>
-        </p:txBody>
-      </p:sp>
-      <p:sp>
-        <p:nvSpPr>
-          <p:cNvPr id="34" name="TextBox 33"/>
-          <p:cNvSpPr txBox="1"/>
-          <p:nvPr/>
-        </p:nvSpPr>
-        <p:spPr>
-          <a:xfrm>
-            <a:off x="8274100" y="1627632"/>
-            <a:ext cx="182880" cy="274320"/>
-          </a:xfrm>
-          <a:prstGeom prst="rect">
-            <a:avLst/>
-          </a:prstGeom>
-          <a:noFill/>
-        </p:spPr>
-        <p:txBody>
-          <a:bodyPr wrap="square" anchor="t" lIns="36000" rIns="36000" tIns="18000" bIns="18000">
-            <a:spAutoFit/>
-          </a:bodyPr>
-          <a:lstStyle/>
-          <a:p>
-            <a:pPr algn="l"/>
-            <a:r>
-              <a:rPr sz="1344" b="0" i="0">
-                <a:solidFill>
-                  <a:srgbClr val="3B5174"/>
-                </a:solidFill>
-                <a:latin typeface="Arial"/>
-              </a:rPr>
-              <a:t>•</a:t>
-            </a:r>
-          </a:p>
-        </p:txBody>
-      </p:sp>
-      <p:sp>
-        <p:nvSpPr>
-          <p:cNvPr id="35" name="TextBox 34"/>
-          <p:cNvSpPr txBox="1"/>
-          <p:nvPr/>
-        </p:nvSpPr>
-        <p:spPr>
-          <a:xfrm>
-            <a:off x="8475268" y="1627632"/>
-            <a:ext cx="3167786" cy="274320"/>
-          </a:xfrm>
-          <a:prstGeom prst="rect">
-            <a:avLst/>
-          </a:prstGeom>
-          <a:noFill/>
-        </p:spPr>
-        <p:txBody>
-          <a:bodyPr wrap="square" anchor="t" lIns="36000" rIns="36000" tIns="18000" bIns="18000">
-            <a:spAutoFit/>
-          </a:bodyPr>
-          <a:lstStyle/>
-          <a:p>
-            <a:pPr algn="l"/>
-            <a:r>
-              <a:rPr sz="1344" b="0" i="0">
-                <a:solidFill>
-                  <a:srgbClr val="475569"/>
-                </a:solidFill>
-                <a:latin typeface="Arial"/>
-              </a:rPr>
-              <a:t>Viscosity drops sharply under high shear (inside nozzle)</a:t>
-            </a:r>
-          </a:p>
-        </p:txBody>
-      </p:sp>
-      <p:sp>
-        <p:nvSpPr>
-          <p:cNvPr id="36" name="TextBox 35"/>
-          <p:cNvSpPr txBox="1"/>
-          <p:nvPr/>
-        </p:nvSpPr>
-        <p:spPr>
-          <a:xfrm>
-            <a:off x="8274100" y="1901952"/>
-            <a:ext cx="182880" cy="274320"/>
-          </a:xfrm>
-          <a:prstGeom prst="rect">
-            <a:avLst/>
-          </a:prstGeom>
-          <a:noFill/>
-        </p:spPr>
-        <p:txBody>
-          <a:bodyPr wrap="square" anchor="t" lIns="36000" rIns="36000" tIns="18000" bIns="18000">
-            <a:spAutoFit/>
-          </a:bodyPr>
-          <a:lstStyle/>
-          <a:p>
-            <a:pPr algn="l"/>
-            <a:r>
-              <a:rPr sz="1344" b="0" i="0">
-                <a:solidFill>
-                  <a:srgbClr val="3B5174"/>
-                </a:solidFill>
-                <a:latin typeface="Arial"/>
-              </a:rPr>
-              <a:t>•</a:t>
-            </a:r>
-          </a:p>
-        </p:txBody>
-      </p:sp>
-      <p:sp>
-        <p:nvSpPr>
-          <p:cNvPr id="37" name="TextBox 36"/>
-          <p:cNvSpPr txBox="1"/>
-          <p:nvPr/>
-        </p:nvSpPr>
-        <p:spPr>
-          <a:xfrm>
-            <a:off x="8475268" y="1901952"/>
-            <a:ext cx="3167786" cy="274320"/>
-          </a:xfrm>
-          <a:prstGeom prst="rect">
-            <a:avLst/>
-          </a:prstGeom>
-          <a:noFill/>
-        </p:spPr>
-        <p:txBody>
-          <a:bodyPr wrap="square" anchor="t" lIns="36000" rIns="36000" tIns="18000" bIns="18000">
-            <a:spAutoFit/>
-          </a:bodyPr>
-          <a:lstStyle/>
-          <a:p>
-            <a:pPr algn="l"/>
-            <a:r>
-              <a:rPr sz="1344" b="0" i="0">
-                <a:solidFill>
-                  <a:srgbClr val="475569"/>
-                </a:solidFill>
-                <a:latin typeface="Arial"/>
-              </a:rPr>
-              <a:t>Quickly recovers high viscosity upon reaching substrate → maintains adhesion</a:t>
-            </a:r>
-          </a:p>
-        </p:txBody>
-      </p:sp>
-      <p:sp>
-        <p:nvSpPr>
-          <p:cNvPr id="38" name="TextBox 37"/>
-          <p:cNvSpPr txBox="1"/>
-          <p:nvPr/>
-        </p:nvSpPr>
-        <p:spPr>
-          <a:xfrm>
-            <a:off x="8274100" y="2176272"/>
-            <a:ext cx="182880" cy="274320"/>
-          </a:xfrm>
-          <a:prstGeom prst="rect">
-            <a:avLst/>
-          </a:prstGeom>
-          <a:noFill/>
-        </p:spPr>
-        <p:txBody>
-          <a:bodyPr wrap="square" anchor="t" lIns="36000" rIns="36000" tIns="18000" bIns="18000">
-            <a:spAutoFit/>
-          </a:bodyPr>
-          <a:lstStyle/>
-          <a:p>
-            <a:pPr algn="l"/>
-            <a:r>
-              <a:rPr sz="1344" b="0" i="0">
-                <a:solidFill>
-                  <a:srgbClr val="3B5174"/>
-                </a:solidFill>
-                <a:latin typeface="Arial"/>
-              </a:rPr>
-              <a:t>•</a:t>
-            </a:r>
-          </a:p>
-        </p:txBody>
-      </p:sp>
-      <p:sp>
-        <p:nvSpPr>
-          <p:cNvPr id="39" name="TextBox 38"/>
-          <p:cNvSpPr txBox="1"/>
-          <p:nvPr/>
-        </p:nvSpPr>
-        <p:spPr>
-          <a:xfrm>
-            <a:off x="8475268" y="2176272"/>
-            <a:ext cx="3167786" cy="274320"/>
-          </a:xfrm>
-          <a:prstGeom prst="rect">
-            <a:avLst/>
-          </a:prstGeom>
-          <a:noFill/>
-        </p:spPr>
-        <p:txBody>
-          <a:bodyPr wrap="square" anchor="t" lIns="36000" rIns="36000" tIns="18000" bIns="18000">
-            <a:spAutoFit/>
-          </a:bodyPr>
-          <a:lstStyle/>
-          <a:p>
-            <a:pPr algn="l"/>
-            <a:r>
-              <a:rPr sz="1344" b="0" i="0">
-                <a:solidFill>
-                  <a:srgbClr val="475569"/>
-                </a:solidFill>
-                <a:latin typeface="Arial"/>
-              </a:rPr>
-              <a:t>Fully compatible with existing fire hoses and nozzles</a:t>
-            </a:r>
-          </a:p>
-        </p:txBody>
-      </p:sp>
-      <p:sp>
-        <p:nvSpPr>
-          <p:cNvPr id="40" name="Rounded Rectangle 39"/>
-          <p:cNvSpPr/>
-          <p:nvPr/>
-        </p:nvSpPr>
-        <p:spPr>
-          <a:xfrm>
-            <a:off x="365760" y="4425696"/>
-            <a:ext cx="11460175" cy="731520"/>
-          </a:xfrm>
-          <a:prstGeom prst="roundRect">
-            <a:avLst>
-              <a:gd name="adj" fmla="val 4000"/>
-            </a:avLst>
-          </a:prstGeom>
-          <a:solidFill>
-            <a:srgbClr val="F8FAFC"/>
-          </a:solidFill>
-          <a:ln>
-            <a:noFill/>
-          </a:ln>
-          <a:effectLst/>
-        </p:spPr>
-        <p:style>
-          <a:lnRef idx="1">
-            <a:schemeClr val="accent1"/>
-          </a:lnRef>
-          <a:fillRef idx="3">
-            <a:schemeClr val="accent1"/>
-          </a:fillRef>
-          <a:effectRef idx="2">
-            <a:schemeClr val="accent1"/>
-          </a:effectRef>
-          <a:fontRef idx="minor">
-            <a:schemeClr val="lt1"/>
-          </a:fontRef>
-        </p:style>
-        <p:txBody>
-          <a:bodyPr rtlCol="0" anchor="ctr"/>
-          <a:lstStyle/>
-          <a:p>
-            <a:pPr algn="ctr"/>
-          </a:p>
-        </p:txBody>
-      </p:sp>
-      <p:sp>
-        <p:nvSpPr>
-          <p:cNvPr id="41" name="Rectangle 40"/>
-          <p:cNvSpPr/>
-          <p:nvPr/>
-        </p:nvSpPr>
-        <p:spPr>
-          <a:xfrm>
-            <a:off x="365760" y="4425696"/>
-            <a:ext cx="54864" cy="731520"/>
-          </a:xfrm>
-          <a:prstGeom prst="rect">
-            <a:avLst/>
-          </a:prstGeom>
-          <a:solidFill>
-            <a:srgbClr val="3B5174"/>
-          </a:solidFill>
-          <a:ln>
-            <a:noFill/>
-          </a:ln>
-          <a:effectLst/>
-        </p:spPr>
-        <p:style>
-          <a:lnRef idx="1">
-            <a:schemeClr val="accent1"/>
-          </a:lnRef>
-          <a:fillRef idx="3">
-            <a:schemeClr val="accent1"/>
-          </a:fillRef>
-          <a:effectRef idx="2">
-            <a:schemeClr val="accent1"/>
-          </a:effectRef>
-          <a:fontRef idx="minor">
-            <a:schemeClr val="lt1"/>
-          </a:fontRef>
-        </p:style>
-        <p:txBody>
-          <a:bodyPr rtlCol="0" anchor="ctr"/>
-          <a:lstStyle/>
-          <a:p>
-            <a:pPr algn="ctr"/>
-          </a:p>
-        </p:txBody>
-      </p:sp>
-      <p:sp>
-        <p:nvSpPr>
-          <p:cNvPr id="42" name="TextBox 41"/>
-          <p:cNvSpPr txBox="1"/>
-          <p:nvPr/>
-        </p:nvSpPr>
-        <p:spPr>
-          <a:xfrm>
-            <a:off x="548640" y="4425696"/>
-            <a:ext cx="365760" cy="731520"/>
-          </a:xfrm>
-          <a:prstGeom prst="rect">
-            <a:avLst/>
-          </a:prstGeom>
-          <a:noFill/>
-        </p:spPr>
-        <p:txBody>
-          <a:bodyPr wrap="square" anchor="ctr" lIns="36000" rIns="36000" tIns="18000" bIns="18000">
-            <a:spAutoFit/>
-          </a:bodyPr>
-          <a:lstStyle/>
-          <a:p>
-            <a:pPr algn="l"/>
-            <a:r>
-              <a:rPr sz="1568" b="0" i="0">
-                <a:solidFill>
-                  <a:srgbClr val="3B5174"/>
-                </a:solidFill>
-                <a:latin typeface="Arial"/>
-              </a:rPr>
               <a:t>✓</a:t>
             </a:r>
           </a:p>
@@ -12688,14 +13421,14 @@
       </p:sp>
       <p:sp>
         <p:nvSpPr>
-          <p:cNvPr id="43" name="TextBox 42"/>
-          <p:cNvSpPr txBox="1"/>
-          <p:nvPr/>
-        </p:nvSpPr>
-        <p:spPr>
-          <a:xfrm>
-            <a:off x="960120" y="4425696"/>
-            <a:ext cx="10774375" cy="731520"/>
+          <p:cNvPr id="52" name="TextBox 51"/>
+          <p:cNvSpPr txBox="1"/>
+          <p:nvPr/>
+        </p:nvSpPr>
+        <p:spPr>
+          <a:xfrm>
+            <a:off x="960120" y="5980176"/>
+            <a:ext cx="10774375" cy="658368"/>
           </a:xfrm>
           <a:prstGeom prst="rect">
             <a:avLst/>
@@ -47228,7 +47961,7 @@
         <p:spPr>
           <a:xfrm>
             <a:off x="5252185" y="859536"/>
-            <a:ext cx="6573749" cy="5760720"/>
+            <a:ext cx="6573749" cy="2926080"/>
           </a:xfrm>
           <a:prstGeom prst="roundRect">
             <a:avLst>
@@ -47355,7 +48088,7 @@
         <p:spPr>
           <a:xfrm>
             <a:off x="5252185" y="859536"/>
-            <a:ext cx="6573749" cy="5760720"/>
+            <a:ext cx="6573749" cy="2926080"/>
           </a:xfrm>
           <a:prstGeom prst="rect">
             <a:avLst/>
@@ -47389,7 +48122,7 @@
         </p:nvSpPr>
         <p:spPr>
           <a:xfrm>
-            <a:off x="5252185" y="6656832"/>
+            <a:off x="5252185" y="3822192"/>
             <a:ext cx="6573749" cy="274320"/>
           </a:xfrm>
           <a:prstGeom prst="rect">
@@ -47412,6 +48145,238 @@
                 <a:latin typeface="Arial"/>
               </a:rPr>
               <a:t>Wildfire / WUI boundary zone (photo)</a:t>
+            </a:r>
+          </a:p>
+        </p:txBody>
+      </p:sp>
+      <p:sp>
+        <p:nvSpPr>
+          <p:cNvPr id="26" name="Rounded Rectangle 25"/>
+          <p:cNvSpPr/>
+          <p:nvPr/>
+        </p:nvSpPr>
+        <p:spPr>
+          <a:xfrm>
+            <a:off x="5252185" y="4206240"/>
+            <a:ext cx="6573749" cy="1828800"/>
+          </a:xfrm>
+          <a:prstGeom prst="roundRect">
+            <a:avLst>
+              <a:gd name="adj" fmla="val 2000"/>
+            </a:avLst>
+          </a:prstGeom>
+          <a:solidFill>
+            <a:srgbClr val="F5F8FC"/>
+          </a:solidFill>
+          <a:ln w="12700">
+            <a:solidFill>
+              <a:srgbClr val="C0D0E0"/>
+            </a:solidFill>
+          </a:ln>
+          <a:effectLst/>
+        </p:spPr>
+        <p:style>
+          <a:lnRef idx="1">
+            <a:schemeClr val="accent1"/>
+          </a:lnRef>
+          <a:fillRef idx="3">
+            <a:schemeClr val="accent1"/>
+          </a:fillRef>
+          <a:effectRef idx="2">
+            <a:schemeClr val="accent1"/>
+          </a:effectRef>
+          <a:fontRef idx="minor">
+            <a:schemeClr val="lt1"/>
+          </a:fontRef>
+        </p:style>
+        <p:txBody>
+          <a:bodyPr rtlCol="0" anchor="ctr"/>
+          <a:lstStyle/>
+          <a:p>
+            <a:pPr algn="ctr"/>
+          </a:p>
+        </p:txBody>
+      </p:sp>
+      <p:sp>
+        <p:nvSpPr>
+          <p:cNvPr id="27" name="Rectangle 26"/>
+          <p:cNvSpPr/>
+          <p:nvPr/>
+        </p:nvSpPr>
+        <p:spPr>
+          <a:xfrm>
+            <a:off x="5361913" y="4315968"/>
+            <a:ext cx="868680" cy="292608"/>
+          </a:xfrm>
+          <a:prstGeom prst="rect">
+            <a:avLst/>
+          </a:prstGeom>
+          <a:solidFill>
+            <a:srgbClr val="B08442"/>
+          </a:solidFill>
+          <a:ln>
+            <a:noFill/>
+          </a:ln>
+          <a:effectLst/>
+        </p:spPr>
+        <p:style>
+          <a:lnRef idx="1">
+            <a:schemeClr val="accent1"/>
+          </a:lnRef>
+          <a:fillRef idx="3">
+            <a:schemeClr val="accent1"/>
+          </a:fillRef>
+          <a:effectRef idx="2">
+            <a:schemeClr val="accent1"/>
+          </a:effectRef>
+          <a:fontRef idx="minor">
+            <a:schemeClr val="lt1"/>
+          </a:fontRef>
+        </p:style>
+        <p:txBody>
+          <a:bodyPr rtlCol="0" anchor="ctr"/>
+          <a:lstStyle/>
+          <a:p>
+            <a:pPr algn="ctr"/>
+          </a:p>
+        </p:txBody>
+      </p:sp>
+      <p:sp>
+        <p:nvSpPr>
+          <p:cNvPr id="28" name="TextBox 27"/>
+          <p:cNvSpPr txBox="1"/>
+          <p:nvPr/>
+        </p:nvSpPr>
+        <p:spPr>
+          <a:xfrm>
+            <a:off x="5361913" y="4315968"/>
+            <a:ext cx="868680" cy="292608"/>
+          </a:xfrm>
+          <a:prstGeom prst="rect">
+            <a:avLst/>
+          </a:prstGeom>
+          <a:noFill/>
+        </p:spPr>
+        <p:txBody>
+          <a:bodyPr wrap="square" anchor="ctr" lIns="36000" rIns="36000" tIns="18000" bIns="18000">
+            <a:spAutoFit/>
+          </a:bodyPr>
+          <a:lstStyle/>
+          <a:p>
+            <a:pPr algn="ctr"/>
+            <a:r>
+              <a:rPr sz="1232" b="1" i="0">
+                <a:solidFill>
+                  <a:srgbClr val="FFFFFF"/>
+                </a:solidFill>
+                <a:latin typeface="Arial"/>
+              </a:rPr>
+              <a:t>Cited</a:t>
+            </a:r>
+          </a:p>
+        </p:txBody>
+      </p:sp>
+      <p:sp>
+        <p:nvSpPr>
+          <p:cNvPr id="29" name="TextBox 28"/>
+          <p:cNvSpPr txBox="1"/>
+          <p:nvPr/>
+        </p:nvSpPr>
+        <p:spPr>
+          <a:xfrm>
+            <a:off x="5252185" y="4206240"/>
+            <a:ext cx="6573749" cy="1828800"/>
+          </a:xfrm>
+          <a:prstGeom prst="rect">
+            <a:avLst/>
+          </a:prstGeom>
+          <a:noFill/>
+        </p:spPr>
+        <p:txBody>
+          <a:bodyPr wrap="square" anchor="ctr" lIns="36000" rIns="36000" tIns="18000" bIns="18000">
+            <a:spAutoFit/>
+          </a:bodyPr>
+          <a:lstStyle/>
+          <a:p>
+            <a:pPr algn="ctr"/>
+            <a:r>
+              <a:rPr sz="1344" b="0" i="0">
+                <a:solidFill>
+                  <a:srgbClr val="AAB4C0"/>
+                </a:solidFill>
+                <a:latin typeface="Arial"/>
+              </a:rPr>
+              <a:t>(Paste cited figure here)</a:t>
+            </a:r>
+          </a:p>
+        </p:txBody>
+      </p:sp>
+      <p:sp>
+        <p:nvSpPr>
+          <p:cNvPr id="30" name="TextBox 29"/>
+          <p:cNvSpPr txBox="1"/>
+          <p:nvPr/>
+        </p:nvSpPr>
+        <p:spPr>
+          <a:xfrm>
+            <a:off x="5361913" y="5687568"/>
+            <a:ext cx="6354293" cy="256032"/>
+          </a:xfrm>
+          <a:prstGeom prst="rect">
+            <a:avLst/>
+          </a:prstGeom>
+          <a:noFill/>
+        </p:spPr>
+        <p:txBody>
+          <a:bodyPr wrap="square" anchor="t" lIns="36000" rIns="36000" tIns="18000" bIns="18000">
+            <a:spAutoFit/>
+          </a:bodyPr>
+          <a:lstStyle/>
+          <a:p>
+            <a:pPr algn="l"/>
+            <a:r>
+              <a:rPr sz="1008" b="0" i="1">
+                <a:solidFill>
+                  <a:srgbClr val="9F7639"/>
+                </a:solidFill>
+                <a:latin typeface="Arial"/>
+              </a:rPr>
+              <a:t>Source: ________________ (fill in later)</a:t>
+            </a:r>
+          </a:p>
+        </p:txBody>
+      </p:sp>
+      <p:sp>
+        <p:nvSpPr>
+          <p:cNvPr id="31" name="TextBox 30"/>
+          <p:cNvSpPr txBox="1"/>
+          <p:nvPr/>
+        </p:nvSpPr>
+        <p:spPr>
+          <a:xfrm>
+            <a:off x="5252185" y="6071616"/>
+            <a:ext cx="6573749" cy="274320"/>
+          </a:xfrm>
+          <a:prstGeom prst="rect">
+            <a:avLst/>
+          </a:prstGeom>
+          <a:noFill/>
+        </p:spPr>
+        <p:txBody>
+          <a:bodyPr wrap="square" anchor="t" lIns="36000" rIns="36000" tIns="18000" bIns="18000">
+            <a:spAutoFit/>
+          </a:bodyPr>
+          <a:lstStyle/>
+          <a:p>
+            <a:pPr algn="ctr"/>
+            <a:r>
+              <a:rPr sz="1120" b="0" i="1">
+                <a:solidFill>
+                  <a:srgbClr val="64748B"/>
+                </a:solidFill>
+                <a:latin typeface="Arial"/>
+              </a:rPr>
+              <a:t>Year-over-year trend in wildfire scale / annual burned area</a:t>
             </a:r>
           </a:p>
         </p:txBody>
@@ -51188,7 +52153,7 @@
         <p:spPr>
           <a:xfrm>
             <a:off x="4793778" y="859536"/>
-            <a:ext cx="7032156" cy="5760720"/>
+            <a:ext cx="7032156" cy="2834640"/>
           </a:xfrm>
           <a:prstGeom prst="roundRect">
             <a:avLst>
@@ -51315,7 +52280,7 @@
         <p:spPr>
           <a:xfrm>
             <a:off x="4793778" y="859536"/>
-            <a:ext cx="7032156" cy="5760720"/>
+            <a:ext cx="7032156" cy="2834640"/>
           </a:xfrm>
           <a:prstGeom prst="rect">
             <a:avLst/>
@@ -51349,7 +52314,7 @@
         </p:nvSpPr>
         <p:spPr>
           <a:xfrm>
-            <a:off x="4793778" y="6656832"/>
+            <a:off x="4793778" y="3730752"/>
             <a:ext cx="7032156" cy="274320"/>
           </a:xfrm>
           <a:prstGeom prst="rect">
@@ -51372,6 +52337,470 @@
                 <a:latin typeface="Arial"/>
               </a:rPr>
               <a:t>Heat trigger transforms the gel into a porous aerogel insulating layer</a:t>
+            </a:r>
+          </a:p>
+        </p:txBody>
+      </p:sp>
+      <p:sp>
+        <p:nvSpPr>
+          <p:cNvPr id="29" name="Rounded Rectangle 28"/>
+          <p:cNvSpPr/>
+          <p:nvPr/>
+        </p:nvSpPr>
+        <p:spPr>
+          <a:xfrm>
+            <a:off x="4793778" y="4078224"/>
+            <a:ext cx="3433782" cy="2011680"/>
+          </a:xfrm>
+          <a:prstGeom prst="roundRect">
+            <a:avLst>
+              <a:gd name="adj" fmla="val 2000"/>
+            </a:avLst>
+          </a:prstGeom>
+          <a:solidFill>
+            <a:srgbClr val="F5F8FC"/>
+          </a:solidFill>
+          <a:ln w="12700">
+            <a:solidFill>
+              <a:srgbClr val="C0D0E0"/>
+            </a:solidFill>
+          </a:ln>
+          <a:effectLst/>
+        </p:spPr>
+        <p:style>
+          <a:lnRef idx="1">
+            <a:schemeClr val="accent1"/>
+          </a:lnRef>
+          <a:fillRef idx="3">
+            <a:schemeClr val="accent1"/>
+          </a:fillRef>
+          <a:effectRef idx="2">
+            <a:schemeClr val="accent1"/>
+          </a:effectRef>
+          <a:fontRef idx="minor">
+            <a:schemeClr val="lt1"/>
+          </a:fontRef>
+        </p:style>
+        <p:txBody>
+          <a:bodyPr rtlCol="0" anchor="ctr"/>
+          <a:lstStyle/>
+          <a:p>
+            <a:pPr algn="ctr"/>
+          </a:p>
+        </p:txBody>
+      </p:sp>
+      <p:sp>
+        <p:nvSpPr>
+          <p:cNvPr id="30" name="Rectangle 29"/>
+          <p:cNvSpPr/>
+          <p:nvPr/>
+        </p:nvSpPr>
+        <p:spPr>
+          <a:xfrm>
+            <a:off x="4903506" y="4187952"/>
+            <a:ext cx="868680" cy="292608"/>
+          </a:xfrm>
+          <a:prstGeom prst="rect">
+            <a:avLst/>
+          </a:prstGeom>
+          <a:solidFill>
+            <a:srgbClr val="B08442"/>
+          </a:solidFill>
+          <a:ln>
+            <a:noFill/>
+          </a:ln>
+          <a:effectLst/>
+        </p:spPr>
+        <p:style>
+          <a:lnRef idx="1">
+            <a:schemeClr val="accent1"/>
+          </a:lnRef>
+          <a:fillRef idx="3">
+            <a:schemeClr val="accent1"/>
+          </a:fillRef>
+          <a:effectRef idx="2">
+            <a:schemeClr val="accent1"/>
+          </a:effectRef>
+          <a:fontRef idx="minor">
+            <a:schemeClr val="lt1"/>
+          </a:fontRef>
+        </p:style>
+        <p:txBody>
+          <a:bodyPr rtlCol="0" anchor="ctr"/>
+          <a:lstStyle/>
+          <a:p>
+            <a:pPr algn="ctr"/>
+          </a:p>
+        </p:txBody>
+      </p:sp>
+      <p:sp>
+        <p:nvSpPr>
+          <p:cNvPr id="31" name="TextBox 30"/>
+          <p:cNvSpPr txBox="1"/>
+          <p:nvPr/>
+        </p:nvSpPr>
+        <p:spPr>
+          <a:xfrm>
+            <a:off x="4903506" y="4187952"/>
+            <a:ext cx="868680" cy="292608"/>
+          </a:xfrm>
+          <a:prstGeom prst="rect">
+            <a:avLst/>
+          </a:prstGeom>
+          <a:noFill/>
+        </p:spPr>
+        <p:txBody>
+          <a:bodyPr wrap="square" anchor="ctr" lIns="36000" rIns="36000" tIns="18000" bIns="18000">
+            <a:spAutoFit/>
+          </a:bodyPr>
+          <a:lstStyle/>
+          <a:p>
+            <a:pPr algn="ctr"/>
+            <a:r>
+              <a:rPr sz="1232" b="1" i="0">
+                <a:solidFill>
+                  <a:srgbClr val="FFFFFF"/>
+                </a:solidFill>
+                <a:latin typeface="Arial"/>
+              </a:rPr>
+              <a:t>Cited</a:t>
+            </a:r>
+          </a:p>
+        </p:txBody>
+      </p:sp>
+      <p:sp>
+        <p:nvSpPr>
+          <p:cNvPr id="32" name="TextBox 31"/>
+          <p:cNvSpPr txBox="1"/>
+          <p:nvPr/>
+        </p:nvSpPr>
+        <p:spPr>
+          <a:xfrm>
+            <a:off x="4793778" y="4078224"/>
+            <a:ext cx="3433782" cy="2011680"/>
+          </a:xfrm>
+          <a:prstGeom prst="rect">
+            <a:avLst/>
+          </a:prstGeom>
+          <a:noFill/>
+        </p:spPr>
+        <p:txBody>
+          <a:bodyPr wrap="square" anchor="ctr" lIns="36000" rIns="36000" tIns="18000" bIns="18000">
+            <a:spAutoFit/>
+          </a:bodyPr>
+          <a:lstStyle/>
+          <a:p>
+            <a:pPr algn="ctr"/>
+            <a:r>
+              <a:rPr sz="1344" b="0" i="0">
+                <a:solidFill>
+                  <a:srgbClr val="AAB4C0"/>
+                </a:solidFill>
+                <a:latin typeface="Arial"/>
+              </a:rPr>
+              <a:t>(Paste cited figure here)</a:t>
+            </a:r>
+          </a:p>
+        </p:txBody>
+      </p:sp>
+      <p:sp>
+        <p:nvSpPr>
+          <p:cNvPr id="33" name="TextBox 32"/>
+          <p:cNvSpPr txBox="1"/>
+          <p:nvPr/>
+        </p:nvSpPr>
+        <p:spPr>
+          <a:xfrm>
+            <a:off x="4903506" y="5742432"/>
+            <a:ext cx="3214326" cy="256032"/>
+          </a:xfrm>
+          <a:prstGeom prst="rect">
+            <a:avLst/>
+          </a:prstGeom>
+          <a:noFill/>
+        </p:spPr>
+        <p:txBody>
+          <a:bodyPr wrap="square" anchor="t" lIns="36000" rIns="36000" tIns="18000" bIns="18000">
+            <a:spAutoFit/>
+          </a:bodyPr>
+          <a:lstStyle/>
+          <a:p>
+            <a:pPr algn="l"/>
+            <a:r>
+              <a:rPr sz="1008" b="0" i="1">
+                <a:solidFill>
+                  <a:srgbClr val="9F7639"/>
+                </a:solidFill>
+                <a:latin typeface="Arial"/>
+              </a:rPr>
+              <a:t>Source: ________________ (fill in later)</a:t>
+            </a:r>
+          </a:p>
+        </p:txBody>
+      </p:sp>
+      <p:sp>
+        <p:nvSpPr>
+          <p:cNvPr id="34" name="TextBox 33"/>
+          <p:cNvSpPr txBox="1"/>
+          <p:nvPr/>
+        </p:nvSpPr>
+        <p:spPr>
+          <a:xfrm>
+            <a:off x="4793778" y="6126480"/>
+            <a:ext cx="3433782" cy="274320"/>
+          </a:xfrm>
+          <a:prstGeom prst="rect">
+            <a:avLst/>
+          </a:prstGeom>
+          <a:noFill/>
+        </p:spPr>
+        <p:txBody>
+          <a:bodyPr wrap="square" anchor="t" lIns="36000" rIns="36000" tIns="18000" bIns="18000">
+            <a:spAutoFit/>
+          </a:bodyPr>
+          <a:lstStyle/>
+          <a:p>
+            <a:pPr algn="ctr"/>
+            <a:r>
+              <a:rPr sz="1120" b="0" i="1">
+                <a:solidFill>
+                  <a:srgbClr val="64748B"/>
+                </a:solidFill>
+                <a:latin typeface="Arial"/>
+              </a:rPr>
+              <a:t>SEM microstructure of silica aerogel</a:t>
+            </a:r>
+          </a:p>
+        </p:txBody>
+      </p:sp>
+      <p:sp>
+        <p:nvSpPr>
+          <p:cNvPr id="35" name="Rounded Rectangle 34"/>
+          <p:cNvSpPr/>
+          <p:nvPr/>
+        </p:nvSpPr>
+        <p:spPr>
+          <a:xfrm>
+            <a:off x="8392152" y="4078224"/>
+            <a:ext cx="3433782" cy="2011680"/>
+          </a:xfrm>
+          <a:prstGeom prst="roundRect">
+            <a:avLst>
+              <a:gd name="adj" fmla="val 2000"/>
+            </a:avLst>
+          </a:prstGeom>
+          <a:solidFill>
+            <a:srgbClr val="F5F8FC"/>
+          </a:solidFill>
+          <a:ln w="12700">
+            <a:solidFill>
+              <a:srgbClr val="C0D0E0"/>
+            </a:solidFill>
+          </a:ln>
+          <a:effectLst/>
+        </p:spPr>
+        <p:style>
+          <a:lnRef idx="1">
+            <a:schemeClr val="accent1"/>
+          </a:lnRef>
+          <a:fillRef idx="3">
+            <a:schemeClr val="accent1"/>
+          </a:fillRef>
+          <a:effectRef idx="2">
+            <a:schemeClr val="accent1"/>
+          </a:effectRef>
+          <a:fontRef idx="minor">
+            <a:schemeClr val="lt1"/>
+          </a:fontRef>
+        </p:style>
+        <p:txBody>
+          <a:bodyPr rtlCol="0" anchor="ctr"/>
+          <a:lstStyle/>
+          <a:p>
+            <a:pPr algn="ctr"/>
+          </a:p>
+        </p:txBody>
+      </p:sp>
+      <p:sp>
+        <p:nvSpPr>
+          <p:cNvPr id="36" name="Rectangle 35"/>
+          <p:cNvSpPr/>
+          <p:nvPr/>
+        </p:nvSpPr>
+        <p:spPr>
+          <a:xfrm>
+            <a:off x="8501880" y="4187952"/>
+            <a:ext cx="868680" cy="292608"/>
+          </a:xfrm>
+          <a:prstGeom prst="rect">
+            <a:avLst/>
+          </a:prstGeom>
+          <a:solidFill>
+            <a:srgbClr val="B08442"/>
+          </a:solidFill>
+          <a:ln>
+            <a:noFill/>
+          </a:ln>
+          <a:effectLst/>
+        </p:spPr>
+        <p:style>
+          <a:lnRef idx="1">
+            <a:schemeClr val="accent1"/>
+          </a:lnRef>
+          <a:fillRef idx="3">
+            <a:schemeClr val="accent1"/>
+          </a:fillRef>
+          <a:effectRef idx="2">
+            <a:schemeClr val="accent1"/>
+          </a:effectRef>
+          <a:fontRef idx="minor">
+            <a:schemeClr val="lt1"/>
+          </a:fontRef>
+        </p:style>
+        <p:txBody>
+          <a:bodyPr rtlCol="0" anchor="ctr"/>
+          <a:lstStyle/>
+          <a:p>
+            <a:pPr algn="ctr"/>
+          </a:p>
+        </p:txBody>
+      </p:sp>
+      <p:sp>
+        <p:nvSpPr>
+          <p:cNvPr id="37" name="TextBox 36"/>
+          <p:cNvSpPr txBox="1"/>
+          <p:nvPr/>
+        </p:nvSpPr>
+        <p:spPr>
+          <a:xfrm>
+            <a:off x="8501880" y="4187952"/>
+            <a:ext cx="868680" cy="292608"/>
+          </a:xfrm>
+          <a:prstGeom prst="rect">
+            <a:avLst/>
+          </a:prstGeom>
+          <a:noFill/>
+        </p:spPr>
+        <p:txBody>
+          <a:bodyPr wrap="square" anchor="ctr" lIns="36000" rIns="36000" tIns="18000" bIns="18000">
+            <a:spAutoFit/>
+          </a:bodyPr>
+          <a:lstStyle/>
+          <a:p>
+            <a:pPr algn="ctr"/>
+            <a:r>
+              <a:rPr sz="1232" b="1" i="0">
+                <a:solidFill>
+                  <a:srgbClr val="FFFFFF"/>
+                </a:solidFill>
+                <a:latin typeface="Arial"/>
+              </a:rPr>
+              <a:t>Cited</a:t>
+            </a:r>
+          </a:p>
+        </p:txBody>
+      </p:sp>
+      <p:sp>
+        <p:nvSpPr>
+          <p:cNvPr id="38" name="TextBox 37"/>
+          <p:cNvSpPr txBox="1"/>
+          <p:nvPr/>
+        </p:nvSpPr>
+        <p:spPr>
+          <a:xfrm>
+            <a:off x="8392152" y="4078224"/>
+            <a:ext cx="3433782" cy="2011680"/>
+          </a:xfrm>
+          <a:prstGeom prst="rect">
+            <a:avLst/>
+          </a:prstGeom>
+          <a:noFill/>
+        </p:spPr>
+        <p:txBody>
+          <a:bodyPr wrap="square" anchor="ctr" lIns="36000" rIns="36000" tIns="18000" bIns="18000">
+            <a:spAutoFit/>
+          </a:bodyPr>
+          <a:lstStyle/>
+          <a:p>
+            <a:pPr algn="ctr"/>
+            <a:r>
+              <a:rPr sz="1344" b="0" i="0">
+                <a:solidFill>
+                  <a:srgbClr val="AAB4C0"/>
+                </a:solidFill>
+                <a:latin typeface="Arial"/>
+              </a:rPr>
+              <a:t>(Paste cited figure here)</a:t>
+            </a:r>
+          </a:p>
+        </p:txBody>
+      </p:sp>
+      <p:sp>
+        <p:nvSpPr>
+          <p:cNvPr id="39" name="TextBox 38"/>
+          <p:cNvSpPr txBox="1"/>
+          <p:nvPr/>
+        </p:nvSpPr>
+        <p:spPr>
+          <a:xfrm>
+            <a:off x="8501880" y="5742432"/>
+            <a:ext cx="3214326" cy="256032"/>
+          </a:xfrm>
+          <a:prstGeom prst="rect">
+            <a:avLst/>
+          </a:prstGeom>
+          <a:noFill/>
+        </p:spPr>
+        <p:txBody>
+          <a:bodyPr wrap="square" anchor="t" lIns="36000" rIns="36000" tIns="18000" bIns="18000">
+            <a:spAutoFit/>
+          </a:bodyPr>
+          <a:lstStyle/>
+          <a:p>
+            <a:pPr algn="l"/>
+            <a:r>
+              <a:rPr sz="1008" b="0" i="1">
+                <a:solidFill>
+                  <a:srgbClr val="9F7639"/>
+                </a:solidFill>
+                <a:latin typeface="Arial"/>
+              </a:rPr>
+              <a:t>Source: ________________ (fill in later)</a:t>
+            </a:r>
+          </a:p>
+        </p:txBody>
+      </p:sp>
+      <p:sp>
+        <p:nvSpPr>
+          <p:cNvPr id="40" name="TextBox 39"/>
+          <p:cNvSpPr txBox="1"/>
+          <p:nvPr/>
+        </p:nvSpPr>
+        <p:spPr>
+          <a:xfrm>
+            <a:off x="8392152" y="6126480"/>
+            <a:ext cx="3433782" cy="274320"/>
+          </a:xfrm>
+          <a:prstGeom prst="rect">
+            <a:avLst/>
+          </a:prstGeom>
+          <a:noFill/>
+        </p:spPr>
+        <p:txBody>
+          <a:bodyPr wrap="square" anchor="t" lIns="36000" rIns="36000" tIns="18000" bIns="18000">
+            <a:spAutoFit/>
+          </a:bodyPr>
+          <a:lstStyle/>
+          <a:p>
+            <a:pPr algn="ctr"/>
+            <a:r>
+              <a:rPr sz="1120" b="0" i="1">
+                <a:solidFill>
+                  <a:srgbClr val="64748B"/>
+                </a:solidFill>
+                <a:latin typeface="Arial"/>
+              </a:rPr>
+              <a:t>Aerogel thermal-insulation demo (sample over flame, etc.)</a:t>
             </a:r>
           </a:p>
         </p:txBody>
@@ -52849,7 +54278,7 @@
         <p:spPr>
           <a:xfrm>
             <a:off x="6742008" y="859536"/>
-            <a:ext cx="5083926" cy="5760720"/>
+            <a:ext cx="5083926" cy="3017520"/>
           </a:xfrm>
           <a:prstGeom prst="roundRect">
             <a:avLst>
@@ -52976,7 +54405,7 @@
         <p:spPr>
           <a:xfrm>
             <a:off x="6742008" y="859536"/>
-            <a:ext cx="5083926" cy="5760720"/>
+            <a:ext cx="5083926" cy="3017520"/>
           </a:xfrm>
           <a:prstGeom prst="rect">
             <a:avLst/>
@@ -53010,7 +54439,7 @@
         </p:nvSpPr>
         <p:spPr>
           <a:xfrm>
-            <a:off x="6742008" y="6656832"/>
+            <a:off x="6742008" y="3913632"/>
             <a:ext cx="5083926" cy="274320"/>
           </a:xfrm>
           <a:prstGeom prst="rect">
@@ -53033,6 +54462,238 @@
                 <a:latin typeface="Arial"/>
               </a:rPr>
               <a:t>Chemical structures and CSP mixing scheme</a:t>
+            </a:r>
+          </a:p>
+        </p:txBody>
+      </p:sp>
+      <p:sp>
+        <p:nvSpPr>
+          <p:cNvPr id="29" name="Rounded Rectangle 28"/>
+          <p:cNvSpPr/>
+          <p:nvPr/>
+        </p:nvSpPr>
+        <p:spPr>
+          <a:xfrm>
+            <a:off x="6742008" y="4297680"/>
+            <a:ext cx="5083926" cy="1828800"/>
+          </a:xfrm>
+          <a:prstGeom prst="roundRect">
+            <a:avLst>
+              <a:gd name="adj" fmla="val 2000"/>
+            </a:avLst>
+          </a:prstGeom>
+          <a:solidFill>
+            <a:srgbClr val="F5F8FC"/>
+          </a:solidFill>
+          <a:ln w="12700">
+            <a:solidFill>
+              <a:srgbClr val="C0D0E0"/>
+            </a:solidFill>
+          </a:ln>
+          <a:effectLst/>
+        </p:spPr>
+        <p:style>
+          <a:lnRef idx="1">
+            <a:schemeClr val="accent1"/>
+          </a:lnRef>
+          <a:fillRef idx="3">
+            <a:schemeClr val="accent1"/>
+          </a:fillRef>
+          <a:effectRef idx="2">
+            <a:schemeClr val="accent1"/>
+          </a:effectRef>
+          <a:fontRef idx="minor">
+            <a:schemeClr val="lt1"/>
+          </a:fontRef>
+        </p:style>
+        <p:txBody>
+          <a:bodyPr rtlCol="0" anchor="ctr"/>
+          <a:lstStyle/>
+          <a:p>
+            <a:pPr algn="ctr"/>
+          </a:p>
+        </p:txBody>
+      </p:sp>
+      <p:sp>
+        <p:nvSpPr>
+          <p:cNvPr id="30" name="Rectangle 29"/>
+          <p:cNvSpPr/>
+          <p:nvPr/>
+        </p:nvSpPr>
+        <p:spPr>
+          <a:xfrm>
+            <a:off x="6851736" y="4407408"/>
+            <a:ext cx="868680" cy="292608"/>
+          </a:xfrm>
+          <a:prstGeom prst="rect">
+            <a:avLst/>
+          </a:prstGeom>
+          <a:solidFill>
+            <a:srgbClr val="B08442"/>
+          </a:solidFill>
+          <a:ln>
+            <a:noFill/>
+          </a:ln>
+          <a:effectLst/>
+        </p:spPr>
+        <p:style>
+          <a:lnRef idx="1">
+            <a:schemeClr val="accent1"/>
+          </a:lnRef>
+          <a:fillRef idx="3">
+            <a:schemeClr val="accent1"/>
+          </a:fillRef>
+          <a:effectRef idx="2">
+            <a:schemeClr val="accent1"/>
+          </a:effectRef>
+          <a:fontRef idx="minor">
+            <a:schemeClr val="lt1"/>
+          </a:fontRef>
+        </p:style>
+        <p:txBody>
+          <a:bodyPr rtlCol="0" anchor="ctr"/>
+          <a:lstStyle/>
+          <a:p>
+            <a:pPr algn="ctr"/>
+          </a:p>
+        </p:txBody>
+      </p:sp>
+      <p:sp>
+        <p:nvSpPr>
+          <p:cNvPr id="31" name="TextBox 30"/>
+          <p:cNvSpPr txBox="1"/>
+          <p:nvPr/>
+        </p:nvSpPr>
+        <p:spPr>
+          <a:xfrm>
+            <a:off x="6851736" y="4407408"/>
+            <a:ext cx="868680" cy="292608"/>
+          </a:xfrm>
+          <a:prstGeom prst="rect">
+            <a:avLst/>
+          </a:prstGeom>
+          <a:noFill/>
+        </p:spPr>
+        <p:txBody>
+          <a:bodyPr wrap="square" anchor="ctr" lIns="36000" rIns="36000" tIns="18000" bIns="18000">
+            <a:spAutoFit/>
+          </a:bodyPr>
+          <a:lstStyle/>
+          <a:p>
+            <a:pPr algn="ctr"/>
+            <a:r>
+              <a:rPr sz="1232" b="1" i="0">
+                <a:solidFill>
+                  <a:srgbClr val="FFFFFF"/>
+                </a:solidFill>
+                <a:latin typeface="Arial"/>
+              </a:rPr>
+              <a:t>Cited</a:t>
+            </a:r>
+          </a:p>
+        </p:txBody>
+      </p:sp>
+      <p:sp>
+        <p:nvSpPr>
+          <p:cNvPr id="32" name="TextBox 31"/>
+          <p:cNvSpPr txBox="1"/>
+          <p:nvPr/>
+        </p:nvSpPr>
+        <p:spPr>
+          <a:xfrm>
+            <a:off x="6742008" y="4297680"/>
+            <a:ext cx="5083926" cy="1828800"/>
+          </a:xfrm>
+          <a:prstGeom prst="rect">
+            <a:avLst/>
+          </a:prstGeom>
+          <a:noFill/>
+        </p:spPr>
+        <p:txBody>
+          <a:bodyPr wrap="square" anchor="ctr" lIns="36000" rIns="36000" tIns="18000" bIns="18000">
+            <a:spAutoFit/>
+          </a:bodyPr>
+          <a:lstStyle/>
+          <a:p>
+            <a:pPr algn="ctr"/>
+            <a:r>
+              <a:rPr sz="1344" b="0" i="0">
+                <a:solidFill>
+                  <a:srgbClr val="AAB4C0"/>
+                </a:solidFill>
+                <a:latin typeface="Arial"/>
+              </a:rPr>
+              <a:t>(Paste cited figure here)</a:t>
+            </a:r>
+          </a:p>
+        </p:txBody>
+      </p:sp>
+      <p:sp>
+        <p:nvSpPr>
+          <p:cNvPr id="33" name="TextBox 32"/>
+          <p:cNvSpPr txBox="1"/>
+          <p:nvPr/>
+        </p:nvSpPr>
+        <p:spPr>
+          <a:xfrm>
+            <a:off x="6851736" y="5779008"/>
+            <a:ext cx="4864470" cy="256032"/>
+          </a:xfrm>
+          <a:prstGeom prst="rect">
+            <a:avLst/>
+          </a:prstGeom>
+          <a:noFill/>
+        </p:spPr>
+        <p:txBody>
+          <a:bodyPr wrap="square" anchor="t" lIns="36000" rIns="36000" tIns="18000" bIns="18000">
+            <a:spAutoFit/>
+          </a:bodyPr>
+          <a:lstStyle/>
+          <a:p>
+            <a:pPr algn="l"/>
+            <a:r>
+              <a:rPr sz="1008" b="0" i="1">
+                <a:solidFill>
+                  <a:srgbClr val="9F7639"/>
+                </a:solidFill>
+                <a:latin typeface="Arial"/>
+              </a:rPr>
+              <a:t>Source: ________________ (fill in later)</a:t>
+            </a:r>
+          </a:p>
+        </p:txBody>
+      </p:sp>
+      <p:sp>
+        <p:nvSpPr>
+          <p:cNvPr id="34" name="TextBox 33"/>
+          <p:cNvSpPr txBox="1"/>
+          <p:nvPr/>
+        </p:nvSpPr>
+        <p:spPr>
+          <a:xfrm>
+            <a:off x="6742008" y="6163056"/>
+            <a:ext cx="5083926" cy="274320"/>
+          </a:xfrm>
+          <a:prstGeom prst="rect">
+            <a:avLst/>
+          </a:prstGeom>
+          <a:noFill/>
+        </p:spPr>
+        <p:txBody>
+          <a:bodyPr wrap="square" anchor="t" lIns="36000" rIns="36000" tIns="18000" bIns="18000">
+            <a:spAutoFit/>
+          </a:bodyPr>
+          <a:lstStyle/>
+          <a:p>
+            <a:pPr algn="ctr"/>
+            <a:r>
+              <a:rPr sz="1120" b="0" i="1">
+                <a:solidFill>
+                  <a:srgbClr val="64748B"/>
+                </a:solidFill>
+                <a:latin typeface="Arial"/>
+              </a:rPr>
+              <a:t>Molecular structure of cellulose (reference)</a:t>
             </a:r>
           </a:p>
         </p:txBody>

--- a/slides_en.pptx
+++ b/slides_en.pptx
@@ -42,6 +42,7 @@
     <p:sldId id="290" r:id="rId41"/>
     <p:sldId id="291" r:id="rId42"/>
     <p:sldId id="292" r:id="rId43"/>
+    <p:sldId id="293" r:id="rId44"/>
   </p:sldIdLst>
   <p:sldSz cx="12191695" cy="6858000" type="screen4x3"/>
   <p:notesSz cx="6858000" cy="9144000"/>
@@ -3578,7 +3579,7 @@
                 </a:solidFill>
                 <a:latin typeface="Arial"/>
               </a:rPr>
-              <a:t>1 / 37</a:t>
+              <a:t>1 / 38</a:t>
             </a:r>
           </a:p>
         </p:txBody>
@@ -3921,7 +3922,7 @@
                 </a:solidFill>
                 <a:latin typeface="Arial"/>
               </a:rPr>
-              <a:t>10 / 37</a:t>
+              <a:t>10 / 38</a:t>
             </a:r>
           </a:p>
         </p:txBody>
@@ -5964,7 +5965,7 @@
                 </a:solidFill>
                 <a:latin typeface="Arial"/>
               </a:rPr>
-              <a:t>11 / 37</a:t>
+              <a:t>11 / 38</a:t>
             </a:r>
           </a:p>
         </p:txBody>
@@ -7491,7 +7492,7 @@
                 </a:solidFill>
                 <a:latin typeface="Arial"/>
               </a:rPr>
-              <a:t>12 / 37</a:t>
+              <a:t>12 / 38</a:t>
             </a:r>
           </a:p>
         </p:txBody>
@@ -9367,7 +9368,7 @@
                 </a:solidFill>
                 <a:latin typeface="Arial"/>
               </a:rPr>
-              <a:t>13 / 37</a:t>
+              <a:t>13 / 38</a:t>
             </a:r>
           </a:p>
         </p:txBody>
@@ -11859,7 +11860,7 @@
                 </a:solidFill>
                 <a:latin typeface="Arial"/>
               </a:rPr>
-              <a:t>14 / 37</a:t>
+              <a:t>14 / 38</a:t>
             </a:r>
           </a:p>
         </p:txBody>
@@ -14063,7 +14064,7 @@
                 </a:solidFill>
                 <a:latin typeface="Arial"/>
               </a:rPr>
-              <a:t>15 / 37</a:t>
+              <a:t>15 / 38</a:t>
             </a:r>
           </a:p>
         </p:txBody>
@@ -14406,7 +14407,7 @@
                 </a:solidFill>
                 <a:latin typeface="Arial"/>
               </a:rPr>
-              <a:t>16 / 37</a:t>
+              <a:t>16 / 38</a:t>
             </a:r>
           </a:p>
         </p:txBody>
@@ -15478,7 +15479,7 @@
                 </a:solidFill>
                 <a:latin typeface="Arial"/>
               </a:rPr>
-              <a:t>17 / 37</a:t>
+              <a:t>17 / 38</a:t>
             </a:r>
           </a:p>
         </p:txBody>
@@ -16579,7 +16580,7 @@
                 </a:solidFill>
                 <a:latin typeface="Arial"/>
               </a:rPr>
-              <a:t>18 / 37</a:t>
+              <a:t>18 / 38</a:t>
             </a:r>
           </a:p>
         </p:txBody>
@@ -18178,7 +18179,7 @@
                 </a:solidFill>
                 <a:latin typeface="Arial"/>
               </a:rPr>
-              <a:t>19 / 37</a:t>
+              <a:t>19 / 38</a:t>
             </a:r>
           </a:p>
         </p:txBody>
@@ -19895,7 +19896,7 @@
                 </a:solidFill>
                 <a:latin typeface="Arial"/>
               </a:rPr>
-              <a:t>2 / 37</a:t>
+              <a:t>2 / 38</a:t>
             </a:r>
           </a:p>
         </p:txBody>
@@ -21466,7 +21467,7 @@
                 </a:solidFill>
                 <a:latin typeface="Arial"/>
               </a:rPr>
-              <a:t>20 / 37</a:t>
+              <a:t>20 / 38</a:t>
             </a:r>
           </a:p>
         </p:txBody>
@@ -23159,7 +23160,7 @@
                 </a:solidFill>
                 <a:latin typeface="Arial"/>
               </a:rPr>
-              <a:t>21 / 37</a:t>
+              <a:t>21 / 38</a:t>
             </a:r>
           </a:p>
         </p:txBody>
@@ -24371,7 +24372,7 @@
                 </a:solidFill>
                 <a:latin typeface="Arial"/>
               </a:rPr>
-              <a:t>22 / 37</a:t>
+              <a:t>22 / 38</a:t>
             </a:r>
           </a:p>
         </p:txBody>
@@ -25926,7 +25927,7 @@
                 </a:solidFill>
                 <a:latin typeface="Arial"/>
               </a:rPr>
-              <a:t>23 / 37</a:t>
+              <a:t>23 / 38</a:t>
             </a:r>
           </a:p>
         </p:txBody>
@@ -27345,7 +27346,7 @@
                 </a:solidFill>
                 <a:latin typeface="Arial"/>
               </a:rPr>
-              <a:t>24 / 37</a:t>
+              <a:t>24 / 38</a:t>
             </a:r>
           </a:p>
         </p:txBody>
@@ -28838,7 +28839,7 @@
                 </a:solidFill>
                 <a:latin typeface="Arial"/>
               </a:rPr>
-              <a:t>25 / 37</a:t>
+              <a:t>25 / 38</a:t>
             </a:r>
           </a:p>
         </p:txBody>
@@ -29181,7 +29182,7 @@
                 </a:solidFill>
                 <a:latin typeface="Arial"/>
               </a:rPr>
-              <a:t>26 / 37</a:t>
+              <a:t>26 / 38</a:t>
             </a:r>
           </a:p>
         </p:txBody>
@@ -30924,7 +30925,7 @@
                 </a:solidFill>
                 <a:latin typeface="Arial"/>
               </a:rPr>
-              <a:t>27 / 37</a:t>
+              <a:t>27 / 38</a:t>
             </a:r>
           </a:p>
         </p:txBody>
@@ -31818,7 +31819,7 @@
                 </a:solidFill>
                 <a:latin typeface="Arial"/>
               </a:rPr>
-              <a:t>28 / 37</a:t>
+              <a:t>28 / 38</a:t>
             </a:r>
           </a:p>
         </p:txBody>
@@ -34024,7 +34025,7 @@
                 </a:solidFill>
                 <a:latin typeface="Arial"/>
               </a:rPr>
-              <a:t>29 / 37</a:t>
+              <a:t>29 / 38</a:t>
             </a:r>
           </a:p>
         </p:txBody>
@@ -36208,7 +36209,7 @@
                 </a:solidFill>
                 <a:latin typeface="Arial"/>
               </a:rPr>
-              <a:t>3 / 37</a:t>
+              <a:t>3 / 38</a:t>
             </a:r>
           </a:p>
         </p:txBody>
@@ -36551,7 +36552,7 @@
                 </a:solidFill>
                 <a:latin typeface="Arial"/>
               </a:rPr>
-              <a:t>30 / 37</a:t>
+              <a:t>30 / 38</a:t>
             </a:r>
           </a:p>
         </p:txBody>
@@ -38207,7 +38208,7 @@
                 </a:solidFill>
                 <a:latin typeface="Arial"/>
               </a:rPr>
-              <a:t>31 / 37</a:t>
+              <a:t>31 / 38</a:t>
             </a:r>
           </a:p>
         </p:txBody>
@@ -40059,7 +40060,7 @@
                 </a:solidFill>
                 <a:latin typeface="Arial"/>
               </a:rPr>
-              <a:t>32 / 37</a:t>
+              <a:t>32 / 38</a:t>
             </a:r>
           </a:p>
         </p:txBody>
@@ -41597,7 +41598,7 @@
                 </a:solidFill>
                 <a:latin typeface="Arial"/>
               </a:rPr>
-              <a:t>33 / 37</a:t>
+              <a:t>33 / 38</a:t>
             </a:r>
           </a:p>
         </p:txBody>
@@ -41940,7 +41941,7 @@
                 </a:solidFill>
                 <a:latin typeface="Arial"/>
               </a:rPr>
-              <a:t>34 / 37</a:t>
+              <a:t>34 / 38</a:t>
             </a:r>
           </a:p>
         </p:txBody>
@@ -43922,7 +43923,7 @@
                 </a:solidFill>
                 <a:latin typeface="Arial"/>
               </a:rPr>
-              <a:t>35 / 37</a:t>
+              <a:t>35 / 38</a:t>
             </a:r>
           </a:p>
         </p:txBody>
@@ -46193,7 +46194,7 @@
                 </a:solidFill>
                 <a:latin typeface="Arial"/>
               </a:rPr>
-              <a:t>36 / 37</a:t>
+              <a:t>36 / 38</a:t>
             </a:r>
           </a:p>
         </p:txBody>
@@ -48523,7 +48524,1663 @@
                 </a:solidFill>
                 <a:latin typeface="Arial"/>
               </a:rPr>
-              <a:t>37 / 37</a:t>
+              <a:t>37 / 38</a:t>
+            </a:r>
+          </a:p>
+        </p:txBody>
+      </p:sp>
+    </p:spTree>
+  </p:cSld>
+  <p:clrMapOvr>
+    <a:masterClrMapping/>
+  </p:clrMapOvr>
+</p:sld>
+</file>
+
+<file path=ppt/slides/slide38.xml><?xml version="1.0" encoding="utf-8"?>
+<p:sld xmlns:a="http://schemas.openxmlformats.org/drawingml/2006/main" xmlns:p="http://schemas.openxmlformats.org/presentationml/2006/main" xmlns:r="http://schemas.openxmlformats.org/officeDocument/2006/relationships">
+  <p:cSld>
+    <p:spTree>
+      <p:nvGrpSpPr>
+        <p:cNvPr id="1" name=""/>
+        <p:cNvGrpSpPr/>
+        <p:nvPr/>
+      </p:nvGrpSpPr>
+      <p:grpSpPr/>
+      <p:sp>
+        <p:nvSpPr>
+          <p:cNvPr id="2" name="Rectangle 1"/>
+          <p:cNvSpPr/>
+          <p:nvPr/>
+        </p:nvSpPr>
+        <p:spPr>
+          <a:xfrm>
+            <a:off x="0" y="0"/>
+            <a:ext cx="12191695" cy="6858000"/>
+          </a:xfrm>
+          <a:prstGeom prst="rect">
+            <a:avLst/>
+          </a:prstGeom>
+          <a:solidFill>
+            <a:srgbClr val="FFFFFF"/>
+          </a:solidFill>
+          <a:ln>
+            <a:noFill/>
+          </a:ln>
+          <a:effectLst/>
+        </p:spPr>
+        <p:style>
+          <a:lnRef idx="1">
+            <a:schemeClr val="accent1"/>
+          </a:lnRef>
+          <a:fillRef idx="3">
+            <a:schemeClr val="accent1"/>
+          </a:fillRef>
+          <a:effectRef idx="2">
+            <a:schemeClr val="accent1"/>
+          </a:effectRef>
+          <a:fontRef idx="minor">
+            <a:schemeClr val="lt1"/>
+          </a:fontRef>
+        </p:style>
+        <p:txBody>
+          <a:bodyPr rtlCol="0" anchor="ctr"/>
+          <a:lstStyle/>
+          <a:p>
+            <a:pPr algn="ctr"/>
+          </a:p>
+        </p:txBody>
+      </p:sp>
+      <p:sp>
+        <p:nvSpPr>
+          <p:cNvPr id="3" name="Rectangle 2"/>
+          <p:cNvSpPr/>
+          <p:nvPr/>
+        </p:nvSpPr>
+        <p:spPr>
+          <a:xfrm>
+            <a:off x="0" y="0"/>
+            <a:ext cx="12191695" cy="658368"/>
+          </a:xfrm>
+          <a:prstGeom prst="rect">
+            <a:avLst/>
+          </a:prstGeom>
+          <a:solidFill>
+            <a:srgbClr val="1E293B"/>
+          </a:solidFill>
+          <a:ln>
+            <a:noFill/>
+          </a:ln>
+          <a:effectLst/>
+        </p:spPr>
+        <p:style>
+          <a:lnRef idx="1">
+            <a:schemeClr val="accent1"/>
+          </a:lnRef>
+          <a:fillRef idx="3">
+            <a:schemeClr val="accent1"/>
+          </a:fillRef>
+          <a:effectRef idx="2">
+            <a:schemeClr val="accent1"/>
+          </a:effectRef>
+          <a:fontRef idx="minor">
+            <a:schemeClr val="lt1"/>
+          </a:fontRef>
+        </p:style>
+        <p:txBody>
+          <a:bodyPr rtlCol="0" anchor="ctr"/>
+          <a:lstStyle/>
+          <a:p>
+            <a:pPr algn="ctr"/>
+          </a:p>
+        </p:txBody>
+      </p:sp>
+      <p:sp>
+        <p:nvSpPr>
+          <p:cNvPr id="4" name="Rectangle 3"/>
+          <p:cNvSpPr/>
+          <p:nvPr/>
+        </p:nvSpPr>
+        <p:spPr>
+          <a:xfrm>
+            <a:off x="0" y="621792"/>
+            <a:ext cx="12191695" cy="36576"/>
+          </a:xfrm>
+          <a:prstGeom prst="rect">
+            <a:avLst/>
+          </a:prstGeom>
+          <a:solidFill>
+            <a:srgbClr val="3B5174"/>
+          </a:solidFill>
+          <a:ln>
+            <a:noFill/>
+          </a:ln>
+          <a:effectLst/>
+        </p:spPr>
+        <p:style>
+          <a:lnRef idx="1">
+            <a:schemeClr val="accent1"/>
+          </a:lnRef>
+          <a:fillRef idx="3">
+            <a:schemeClr val="accent1"/>
+          </a:fillRef>
+          <a:effectRef idx="2">
+            <a:schemeClr val="accent1"/>
+          </a:effectRef>
+          <a:fontRef idx="minor">
+            <a:schemeClr val="lt1"/>
+          </a:fontRef>
+        </p:style>
+        <p:txBody>
+          <a:bodyPr rtlCol="0" anchor="ctr"/>
+          <a:lstStyle/>
+          <a:p>
+            <a:pPr algn="ctr"/>
+          </a:p>
+        </p:txBody>
+      </p:sp>
+      <p:sp>
+        <p:nvSpPr>
+          <p:cNvPr id="5" name="TextBox 4"/>
+          <p:cNvSpPr txBox="1"/>
+          <p:nvPr/>
+        </p:nvSpPr>
+        <p:spPr>
+          <a:xfrm>
+            <a:off x="365760" y="128016"/>
+            <a:ext cx="2194560" cy="365760"/>
+          </a:xfrm>
+          <a:prstGeom prst="rect">
+            <a:avLst/>
+          </a:prstGeom>
+          <a:noFill/>
+        </p:spPr>
+        <p:txBody>
+          <a:bodyPr wrap="square" anchor="ctr" lIns="36000" rIns="36000" tIns="18000" bIns="18000">
+            <a:spAutoFit/>
+          </a:bodyPr>
+          <a:lstStyle/>
+          <a:p>
+            <a:pPr algn="l"/>
+            <a:r>
+              <a:rPr sz="1232" b="1" i="0">
+                <a:solidFill>
+                  <a:srgbClr val="88A4C4"/>
+                </a:solidFill>
+                <a:latin typeface="Arial"/>
+              </a:rPr>
+              <a:t>Supplementary</a:t>
+            </a:r>
+          </a:p>
+        </p:txBody>
+      </p:sp>
+      <p:sp>
+        <p:nvSpPr>
+          <p:cNvPr id="6" name="Rectangle 5"/>
+          <p:cNvSpPr/>
+          <p:nvPr/>
+        </p:nvSpPr>
+        <p:spPr>
+          <a:xfrm>
+            <a:off x="2606040" y="182880"/>
+            <a:ext cx="10972" cy="292608"/>
+          </a:xfrm>
+          <a:prstGeom prst="rect">
+            <a:avLst/>
+          </a:prstGeom>
+          <a:solidFill>
+            <a:srgbClr val="445870"/>
+          </a:solidFill>
+          <a:ln>
+            <a:noFill/>
+          </a:ln>
+          <a:effectLst/>
+        </p:spPr>
+        <p:style>
+          <a:lnRef idx="1">
+            <a:schemeClr val="accent1"/>
+          </a:lnRef>
+          <a:fillRef idx="3">
+            <a:schemeClr val="accent1"/>
+          </a:fillRef>
+          <a:effectRef idx="2">
+            <a:schemeClr val="accent1"/>
+          </a:effectRef>
+          <a:fontRef idx="minor">
+            <a:schemeClr val="lt1"/>
+          </a:fontRef>
+        </p:style>
+        <p:txBody>
+          <a:bodyPr rtlCol="0" anchor="ctr"/>
+          <a:lstStyle/>
+          <a:p>
+            <a:pPr algn="ctr"/>
+          </a:p>
+        </p:txBody>
+      </p:sp>
+      <p:sp>
+        <p:nvSpPr>
+          <p:cNvPr id="7" name="TextBox 6"/>
+          <p:cNvSpPr txBox="1"/>
+          <p:nvPr/>
+        </p:nvSpPr>
+        <p:spPr>
+          <a:xfrm>
+            <a:off x="2743200" y="91440"/>
+            <a:ext cx="9082735" cy="502920"/>
+          </a:xfrm>
+          <a:prstGeom prst="rect">
+            <a:avLst/>
+          </a:prstGeom>
+          <a:noFill/>
+        </p:spPr>
+        <p:txBody>
+          <a:bodyPr wrap="square" anchor="ctr" lIns="36000" rIns="36000" tIns="18000" bIns="18000">
+            <a:spAutoFit/>
+          </a:bodyPr>
+          <a:lstStyle/>
+          <a:p>
+            <a:pPr algn="l"/>
+            <a:r>
+              <a:rPr sz="2688" b="1" i="0">
+                <a:solidFill>
+                  <a:srgbClr val="FFFFFF"/>
+                </a:solidFill>
+                <a:latin typeface="Arial"/>
+              </a:rPr>
+              <a:t>Three-Stage Temperature-Dependent Gel Transition</a:t>
+            </a:r>
+          </a:p>
+        </p:txBody>
+      </p:sp>
+      <p:sp>
+        <p:nvSpPr>
+          <p:cNvPr id="8" name="Rectangle 7"/>
+          <p:cNvSpPr/>
+          <p:nvPr/>
+        </p:nvSpPr>
+        <p:spPr>
+          <a:xfrm>
+            <a:off x="0" y="6803136"/>
+            <a:ext cx="12191695" cy="54864"/>
+          </a:xfrm>
+          <a:prstGeom prst="rect">
+            <a:avLst/>
+          </a:prstGeom>
+          <a:solidFill>
+            <a:srgbClr val="3B5174"/>
+          </a:solidFill>
+          <a:ln>
+            <a:noFill/>
+          </a:ln>
+          <a:effectLst/>
+        </p:spPr>
+        <p:style>
+          <a:lnRef idx="1">
+            <a:schemeClr val="accent1"/>
+          </a:lnRef>
+          <a:fillRef idx="3">
+            <a:schemeClr val="accent1"/>
+          </a:fillRef>
+          <a:effectRef idx="2">
+            <a:schemeClr val="accent1"/>
+          </a:effectRef>
+          <a:fontRef idx="minor">
+            <a:schemeClr val="lt1"/>
+          </a:fontRef>
+        </p:style>
+        <p:txBody>
+          <a:bodyPr rtlCol="0" anchor="ctr"/>
+          <a:lstStyle/>
+          <a:p>
+            <a:pPr algn="ctr"/>
+          </a:p>
+        </p:txBody>
+      </p:sp>
+      <p:sp>
+        <p:nvSpPr>
+          <p:cNvPr id="9" name="TextBox 8"/>
+          <p:cNvSpPr txBox="1"/>
+          <p:nvPr/>
+        </p:nvSpPr>
+        <p:spPr>
+          <a:xfrm>
+            <a:off x="10911535" y="6547104"/>
+            <a:ext cx="1143000" cy="237744"/>
+          </a:xfrm>
+          <a:prstGeom prst="rect">
+            <a:avLst/>
+          </a:prstGeom>
+          <a:noFill/>
+        </p:spPr>
+        <p:txBody>
+          <a:bodyPr wrap="square" anchor="t" lIns="36000" rIns="36000" tIns="18000" bIns="18000">
+            <a:spAutoFit/>
+          </a:bodyPr>
+          <a:lstStyle/>
+          <a:p>
+            <a:pPr algn="r"/>
+            <a:r>
+              <a:rPr sz="1120" b="0" i="0">
+                <a:solidFill>
+                  <a:srgbClr val="64748B"/>
+                </a:solidFill>
+                <a:latin typeface="Arial"/>
+              </a:rPr>
+              <a:t>38 / 38</a:t>
+            </a:r>
+          </a:p>
+        </p:txBody>
+      </p:sp>
+      <p:sp>
+        <p:nvSpPr>
+          <p:cNvPr id="10" name="Rounded Rectangle 9"/>
+          <p:cNvSpPr/>
+          <p:nvPr/>
+        </p:nvSpPr>
+        <p:spPr>
+          <a:xfrm>
+            <a:off x="365760" y="859536"/>
+            <a:ext cx="11460175" cy="2011680"/>
+          </a:xfrm>
+          <a:prstGeom prst="roundRect">
+            <a:avLst>
+              <a:gd name="adj" fmla="val 2000"/>
+            </a:avLst>
+          </a:prstGeom>
+          <a:solidFill>
+            <a:srgbClr val="F5F8FC"/>
+          </a:solidFill>
+          <a:ln w="12700">
+            <a:solidFill>
+              <a:srgbClr val="C0D0E0"/>
+            </a:solidFill>
+          </a:ln>
+          <a:effectLst/>
+        </p:spPr>
+        <p:style>
+          <a:lnRef idx="1">
+            <a:schemeClr val="accent1"/>
+          </a:lnRef>
+          <a:fillRef idx="3">
+            <a:schemeClr val="accent1"/>
+          </a:fillRef>
+          <a:effectRef idx="2">
+            <a:schemeClr val="accent1"/>
+          </a:effectRef>
+          <a:fontRef idx="minor">
+            <a:schemeClr val="lt1"/>
+          </a:fontRef>
+        </p:style>
+        <p:txBody>
+          <a:bodyPr rtlCol="0" anchor="ctr"/>
+          <a:lstStyle/>
+          <a:p>
+            <a:pPr algn="ctr"/>
+          </a:p>
+        </p:txBody>
+      </p:sp>
+      <p:sp>
+        <p:nvSpPr>
+          <p:cNvPr id="11" name="Rectangle 10"/>
+          <p:cNvSpPr/>
+          <p:nvPr/>
+        </p:nvSpPr>
+        <p:spPr>
+          <a:xfrm>
+            <a:off x="475488" y="969264"/>
+            <a:ext cx="868680" cy="292608"/>
+          </a:xfrm>
+          <a:prstGeom prst="rect">
+            <a:avLst/>
+          </a:prstGeom>
+          <a:solidFill>
+            <a:srgbClr val="1E293B"/>
+          </a:solidFill>
+          <a:ln>
+            <a:noFill/>
+          </a:ln>
+          <a:effectLst/>
+        </p:spPr>
+        <p:style>
+          <a:lnRef idx="1">
+            <a:schemeClr val="accent1"/>
+          </a:lnRef>
+          <a:fillRef idx="3">
+            <a:schemeClr val="accent1"/>
+          </a:fillRef>
+          <a:effectRef idx="2">
+            <a:schemeClr val="accent1"/>
+          </a:effectRef>
+          <a:fontRef idx="minor">
+            <a:schemeClr val="lt1"/>
+          </a:fontRef>
+        </p:style>
+        <p:txBody>
+          <a:bodyPr rtlCol="0" anchor="ctr"/>
+          <a:lstStyle/>
+          <a:p>
+            <a:pPr algn="ctr"/>
+          </a:p>
+        </p:txBody>
+      </p:sp>
+      <p:sp>
+        <p:nvSpPr>
+          <p:cNvPr id="12" name="TextBox 11"/>
+          <p:cNvSpPr txBox="1"/>
+          <p:nvPr/>
+        </p:nvSpPr>
+        <p:spPr>
+          <a:xfrm>
+            <a:off x="475488" y="969264"/>
+            <a:ext cx="868680" cy="292608"/>
+          </a:xfrm>
+          <a:prstGeom prst="rect">
+            <a:avLst/>
+          </a:prstGeom>
+          <a:noFill/>
+        </p:spPr>
+        <p:txBody>
+          <a:bodyPr wrap="square" anchor="ctr" lIns="36000" rIns="36000" tIns="18000" bIns="18000">
+            <a:spAutoFit/>
+          </a:bodyPr>
+          <a:lstStyle/>
+          <a:p>
+            <a:pPr algn="ctr"/>
+            <a:r>
+              <a:rPr sz="1232" b="1" i="0">
+                <a:solidFill>
+                  <a:srgbClr val="FFFFFF"/>
+                </a:solidFill>
+                <a:latin typeface="Arial"/>
+              </a:rPr>
+              <a:t>Concept</a:t>
+            </a:r>
+          </a:p>
+        </p:txBody>
+      </p:sp>
+      <p:sp>
+        <p:nvSpPr>
+          <p:cNvPr id="13" name="TextBox 12"/>
+          <p:cNvSpPr txBox="1"/>
+          <p:nvPr/>
+        </p:nvSpPr>
+        <p:spPr>
+          <a:xfrm>
+            <a:off x="365760" y="859536"/>
+            <a:ext cx="11460175" cy="2011680"/>
+          </a:xfrm>
+          <a:prstGeom prst="rect">
+            <a:avLst/>
+          </a:prstGeom>
+          <a:noFill/>
+        </p:spPr>
+        <p:txBody>
+          <a:bodyPr wrap="square" anchor="ctr" lIns="36000" rIns="36000" tIns="18000" bIns="18000">
+            <a:spAutoFit/>
+          </a:bodyPr>
+          <a:lstStyle/>
+          <a:p>
+            <a:pPr algn="ctr"/>
+            <a:r>
+              <a:rPr sz="1344" b="0" i="0">
+                <a:solidFill>
+                  <a:srgbClr val="AAB4C0"/>
+                </a:solidFill>
+                <a:latin typeface="Arial"/>
+              </a:rPr>
+              <a:t>(Paste paper figure here)</a:t>
+            </a:r>
+          </a:p>
+        </p:txBody>
+      </p:sp>
+      <p:sp>
+        <p:nvSpPr>
+          <p:cNvPr id="14" name="TextBox 13"/>
+          <p:cNvSpPr txBox="1"/>
+          <p:nvPr/>
+        </p:nvSpPr>
+        <p:spPr>
+          <a:xfrm>
+            <a:off x="365760" y="2907792"/>
+            <a:ext cx="11460175" cy="274320"/>
+          </a:xfrm>
+          <a:prstGeom prst="rect">
+            <a:avLst/>
+          </a:prstGeom>
+          <a:noFill/>
+        </p:spPr>
+        <p:txBody>
+          <a:bodyPr wrap="square" anchor="t" lIns="36000" rIns="36000" tIns="18000" bIns="18000">
+            <a:spAutoFit/>
+          </a:bodyPr>
+          <a:lstStyle/>
+          <a:p>
+            <a:pPr algn="ctr"/>
+            <a:r>
+              <a:rPr sz="1120" b="0" i="1">
+                <a:solidFill>
+                  <a:srgbClr val="64748B"/>
+                </a:solidFill>
+                <a:latin typeface="Arial"/>
+              </a:rPr>
+              <a:t>Sol -&gt; thermal gel -&gt; silica aerogel transition with rising temperature</a:t>
+            </a:r>
+          </a:p>
+        </p:txBody>
+      </p:sp>
+      <p:sp>
+        <p:nvSpPr>
+          <p:cNvPr id="15" name="Rounded Rectangle 14"/>
+          <p:cNvSpPr/>
+          <p:nvPr/>
+        </p:nvSpPr>
+        <p:spPr>
+          <a:xfrm>
+            <a:off x="365760" y="3273552"/>
+            <a:ext cx="3734714" cy="2651760"/>
+          </a:xfrm>
+          <a:prstGeom prst="roundRect">
+            <a:avLst>
+              <a:gd name="adj" fmla="val 4000"/>
+            </a:avLst>
+          </a:prstGeom>
+          <a:solidFill>
+            <a:srgbClr val="F1F5F9"/>
+          </a:solidFill>
+          <a:ln w="6350">
+            <a:solidFill>
+              <a:srgbClr val="E2E8F0"/>
+            </a:solidFill>
+          </a:ln>
+          <a:effectLst/>
+        </p:spPr>
+        <p:style>
+          <a:lnRef idx="1">
+            <a:schemeClr val="accent1"/>
+          </a:lnRef>
+          <a:fillRef idx="3">
+            <a:schemeClr val="accent1"/>
+          </a:fillRef>
+          <a:effectRef idx="2">
+            <a:schemeClr val="accent1"/>
+          </a:effectRef>
+          <a:fontRef idx="minor">
+            <a:schemeClr val="lt1"/>
+          </a:fontRef>
+        </p:style>
+        <p:txBody>
+          <a:bodyPr rtlCol="0" anchor="ctr"/>
+          <a:lstStyle/>
+          <a:p>
+            <a:pPr algn="ctr"/>
+          </a:p>
+        </p:txBody>
+      </p:sp>
+      <p:sp>
+        <p:nvSpPr>
+          <p:cNvPr id="16" name="Rectangle 15"/>
+          <p:cNvSpPr/>
+          <p:nvPr/>
+        </p:nvSpPr>
+        <p:spPr>
+          <a:xfrm>
+            <a:off x="365760" y="3273552"/>
+            <a:ext cx="3734714" cy="36576"/>
+          </a:xfrm>
+          <a:prstGeom prst="rect">
+            <a:avLst/>
+          </a:prstGeom>
+          <a:solidFill>
+            <a:srgbClr val="3B5174"/>
+          </a:solidFill>
+          <a:ln>
+            <a:noFill/>
+          </a:ln>
+          <a:effectLst/>
+        </p:spPr>
+        <p:style>
+          <a:lnRef idx="1">
+            <a:schemeClr val="accent1"/>
+          </a:lnRef>
+          <a:fillRef idx="3">
+            <a:schemeClr val="accent1"/>
+          </a:fillRef>
+          <a:effectRef idx="2">
+            <a:schemeClr val="accent1"/>
+          </a:effectRef>
+          <a:fontRef idx="minor">
+            <a:schemeClr val="lt1"/>
+          </a:fontRef>
+        </p:style>
+        <p:txBody>
+          <a:bodyPr rtlCol="0" anchor="ctr"/>
+          <a:lstStyle/>
+          <a:p>
+            <a:pPr algn="ctr"/>
+          </a:p>
+        </p:txBody>
+      </p:sp>
+      <p:sp>
+        <p:nvSpPr>
+          <p:cNvPr id="17" name="TextBox 16"/>
+          <p:cNvSpPr txBox="1"/>
+          <p:nvPr/>
+        </p:nvSpPr>
+        <p:spPr>
+          <a:xfrm>
+            <a:off x="548640" y="3438144"/>
+            <a:ext cx="3368954" cy="219456"/>
+          </a:xfrm>
+          <a:prstGeom prst="rect">
+            <a:avLst/>
+          </a:prstGeom>
+          <a:noFill/>
+        </p:spPr>
+        <p:txBody>
+          <a:bodyPr wrap="square" anchor="t" lIns="36000" rIns="36000" tIns="18000" bIns="18000">
+            <a:spAutoFit/>
+          </a:bodyPr>
+          <a:lstStyle/>
+          <a:p>
+            <a:pPr algn="l"/>
+            <a:r>
+              <a:rPr sz="1120" b="1" i="0">
+                <a:solidFill>
+                  <a:srgbClr val="64748B"/>
+                </a:solidFill>
+                <a:latin typeface="Arial"/>
+              </a:rPr>
+              <a:t>STEP 1 . Sol</a:t>
+            </a:r>
+          </a:p>
+        </p:txBody>
+      </p:sp>
+      <p:sp>
+        <p:nvSpPr>
+          <p:cNvPr id="18" name="TextBox 17"/>
+          <p:cNvSpPr txBox="1"/>
+          <p:nvPr/>
+        </p:nvSpPr>
+        <p:spPr>
+          <a:xfrm>
+            <a:off x="548640" y="3675888"/>
+            <a:ext cx="3368954" cy="329184"/>
+          </a:xfrm>
+          <a:prstGeom prst="rect">
+            <a:avLst/>
+          </a:prstGeom>
+          <a:noFill/>
+        </p:spPr>
+        <p:txBody>
+          <a:bodyPr wrap="square" anchor="t" lIns="36000" rIns="36000" tIns="18000" bIns="18000">
+            <a:spAutoFit/>
+          </a:bodyPr>
+          <a:lstStyle/>
+          <a:p>
+            <a:pPr algn="l"/>
+            <a:r>
+              <a:rPr sz="1680" b="1" i="0">
+                <a:solidFill>
+                  <a:srgbClr val="1E293B"/>
+                </a:solidFill>
+                <a:latin typeface="Arial"/>
+              </a:rPr>
+              <a:t>Room temp (~25 C)</a:t>
+            </a:r>
+          </a:p>
+        </p:txBody>
+      </p:sp>
+      <p:sp>
+        <p:nvSpPr>
+          <p:cNvPr id="19" name="TextBox 18"/>
+          <p:cNvSpPr txBox="1"/>
+          <p:nvPr/>
+        </p:nvSpPr>
+        <p:spPr>
+          <a:xfrm>
+            <a:off x="548640" y="4041648"/>
+            <a:ext cx="182880" cy="274320"/>
+          </a:xfrm>
+          <a:prstGeom prst="rect">
+            <a:avLst/>
+          </a:prstGeom>
+          <a:noFill/>
+        </p:spPr>
+        <p:txBody>
+          <a:bodyPr wrap="square" anchor="t" lIns="36000" rIns="36000" tIns="18000" bIns="18000">
+            <a:spAutoFit/>
+          </a:bodyPr>
+          <a:lstStyle/>
+          <a:p>
+            <a:pPr algn="l"/>
+            <a:r>
+              <a:rPr sz="1344" b="0" i="0">
+                <a:solidFill>
+                  <a:srgbClr val="3B5174"/>
+                </a:solidFill>
+                <a:latin typeface="Arial"/>
+              </a:rPr>
+              <a:t>•</a:t>
+            </a:r>
+          </a:p>
+        </p:txBody>
+      </p:sp>
+      <p:sp>
+        <p:nvSpPr>
+          <p:cNvPr id="20" name="TextBox 19"/>
+          <p:cNvSpPr txBox="1"/>
+          <p:nvPr/>
+        </p:nvSpPr>
+        <p:spPr>
+          <a:xfrm>
+            <a:off x="749808" y="4041648"/>
+            <a:ext cx="3167786" cy="274320"/>
+          </a:xfrm>
+          <a:prstGeom prst="rect">
+            <a:avLst/>
+          </a:prstGeom>
+          <a:noFill/>
+        </p:spPr>
+        <p:txBody>
+          <a:bodyPr wrap="square" anchor="t" lIns="36000" rIns="36000" tIns="18000" bIns="18000">
+            <a:spAutoFit/>
+          </a:bodyPr>
+          <a:lstStyle/>
+          <a:p>
+            <a:pPr algn="l"/>
+            <a:r>
+              <a:rPr sz="1344" b="0" i="0">
+                <a:solidFill>
+                  <a:srgbClr val="475569"/>
+                </a:solidFill>
+                <a:latin typeface="Arial"/>
+              </a:rPr>
+              <a:t>MC chains as hydrophilic random coils</a:t>
+            </a:r>
+          </a:p>
+        </p:txBody>
+      </p:sp>
+      <p:sp>
+        <p:nvSpPr>
+          <p:cNvPr id="21" name="TextBox 20"/>
+          <p:cNvSpPr txBox="1"/>
+          <p:nvPr/>
+        </p:nvSpPr>
+        <p:spPr>
+          <a:xfrm>
+            <a:off x="548640" y="4315968"/>
+            <a:ext cx="182880" cy="274320"/>
+          </a:xfrm>
+          <a:prstGeom prst="rect">
+            <a:avLst/>
+          </a:prstGeom>
+          <a:noFill/>
+        </p:spPr>
+        <p:txBody>
+          <a:bodyPr wrap="square" anchor="t" lIns="36000" rIns="36000" tIns="18000" bIns="18000">
+            <a:spAutoFit/>
+          </a:bodyPr>
+          <a:lstStyle/>
+          <a:p>
+            <a:pPr algn="l"/>
+            <a:r>
+              <a:rPr sz="1344" b="0" i="0">
+                <a:solidFill>
+                  <a:srgbClr val="3B5174"/>
+                </a:solidFill>
+                <a:latin typeface="Arial"/>
+              </a:rPr>
+              <a:t>•</a:t>
+            </a:r>
+          </a:p>
+        </p:txBody>
+      </p:sp>
+      <p:sp>
+        <p:nvSpPr>
+          <p:cNvPr id="22" name="TextBox 21"/>
+          <p:cNvSpPr txBox="1"/>
+          <p:nvPr/>
+        </p:nvSpPr>
+        <p:spPr>
+          <a:xfrm>
+            <a:off x="749808" y="4315968"/>
+            <a:ext cx="3167786" cy="274320"/>
+          </a:xfrm>
+          <a:prstGeom prst="rect">
+            <a:avLst/>
+          </a:prstGeom>
+          <a:noFill/>
+        </p:spPr>
+        <p:txBody>
+          <a:bodyPr wrap="square" anchor="t" lIns="36000" rIns="36000" tIns="18000" bIns="18000">
+            <a:spAutoFit/>
+          </a:bodyPr>
+          <a:lstStyle/>
+          <a:p>
+            <a:pPr algn="l"/>
+            <a:r>
+              <a:rPr sz="1344" b="0" i="0">
+                <a:solidFill>
+                  <a:srgbClr val="475569"/>
+                </a:solidFill>
+                <a:latin typeface="Arial"/>
+              </a:rPr>
+              <a:t>Low viscosity, sprayable</a:t>
+            </a:r>
+          </a:p>
+        </p:txBody>
+      </p:sp>
+      <p:sp>
+        <p:nvSpPr>
+          <p:cNvPr id="23" name="TextBox 22"/>
+          <p:cNvSpPr txBox="1"/>
+          <p:nvPr/>
+        </p:nvSpPr>
+        <p:spPr>
+          <a:xfrm>
+            <a:off x="548640" y="4590288"/>
+            <a:ext cx="182880" cy="274320"/>
+          </a:xfrm>
+          <a:prstGeom prst="rect">
+            <a:avLst/>
+          </a:prstGeom>
+          <a:noFill/>
+        </p:spPr>
+        <p:txBody>
+          <a:bodyPr wrap="square" anchor="t" lIns="36000" rIns="36000" tIns="18000" bIns="18000">
+            <a:spAutoFit/>
+          </a:bodyPr>
+          <a:lstStyle/>
+          <a:p>
+            <a:pPr algn="l"/>
+            <a:r>
+              <a:rPr sz="1344" b="0" i="0">
+                <a:solidFill>
+                  <a:srgbClr val="3B5174"/>
+                </a:solidFill>
+                <a:latin typeface="Arial"/>
+              </a:rPr>
+              <a:t>•</a:t>
+            </a:r>
+          </a:p>
+        </p:txBody>
+      </p:sp>
+      <p:sp>
+        <p:nvSpPr>
+          <p:cNvPr id="24" name="TextBox 23"/>
+          <p:cNvSpPr txBox="1"/>
+          <p:nvPr/>
+        </p:nvSpPr>
+        <p:spPr>
+          <a:xfrm>
+            <a:off x="749808" y="4590288"/>
+            <a:ext cx="3167786" cy="274320"/>
+          </a:xfrm>
+          <a:prstGeom prst="rect">
+            <a:avLst/>
+          </a:prstGeom>
+          <a:noFill/>
+        </p:spPr>
+        <p:txBody>
+          <a:bodyPr wrap="square" anchor="t" lIns="36000" rIns="36000" tIns="18000" bIns="18000">
+            <a:spAutoFit/>
+          </a:bodyPr>
+          <a:lstStyle/>
+          <a:p>
+            <a:pPr algn="l"/>
+            <a:r>
+              <a:rPr sz="1344" b="0" i="0">
+                <a:solidFill>
+                  <a:srgbClr val="475569"/>
+                </a:solidFill>
+                <a:latin typeface="Arial"/>
+              </a:rPr>
+              <a:t>Reversible H-bonding between CSP and polymer</a:t>
+            </a:r>
+          </a:p>
+        </p:txBody>
+      </p:sp>
+      <p:sp>
+        <p:nvSpPr>
+          <p:cNvPr id="25" name="Rounded Rectangle 24"/>
+          <p:cNvSpPr/>
+          <p:nvPr/>
+        </p:nvSpPr>
+        <p:spPr>
+          <a:xfrm>
+            <a:off x="4228490" y="3273552"/>
+            <a:ext cx="3734714" cy="2651760"/>
+          </a:xfrm>
+          <a:prstGeom prst="roundRect">
+            <a:avLst>
+              <a:gd name="adj" fmla="val 4000"/>
+            </a:avLst>
+          </a:prstGeom>
+          <a:solidFill>
+            <a:srgbClr val="F1F5F9"/>
+          </a:solidFill>
+          <a:ln w="6350">
+            <a:solidFill>
+              <a:srgbClr val="E2E8F0"/>
+            </a:solidFill>
+          </a:ln>
+          <a:effectLst/>
+        </p:spPr>
+        <p:style>
+          <a:lnRef idx="1">
+            <a:schemeClr val="accent1"/>
+          </a:lnRef>
+          <a:fillRef idx="3">
+            <a:schemeClr val="accent1"/>
+          </a:fillRef>
+          <a:effectRef idx="2">
+            <a:schemeClr val="accent1"/>
+          </a:effectRef>
+          <a:fontRef idx="minor">
+            <a:schemeClr val="lt1"/>
+          </a:fontRef>
+        </p:style>
+        <p:txBody>
+          <a:bodyPr rtlCol="0" anchor="ctr"/>
+          <a:lstStyle/>
+          <a:p>
+            <a:pPr algn="ctr"/>
+          </a:p>
+        </p:txBody>
+      </p:sp>
+      <p:sp>
+        <p:nvSpPr>
+          <p:cNvPr id="26" name="Rectangle 25"/>
+          <p:cNvSpPr/>
+          <p:nvPr/>
+        </p:nvSpPr>
+        <p:spPr>
+          <a:xfrm>
+            <a:off x="4228490" y="3273552"/>
+            <a:ext cx="3734714" cy="36576"/>
+          </a:xfrm>
+          <a:prstGeom prst="rect">
+            <a:avLst/>
+          </a:prstGeom>
+          <a:solidFill>
+            <a:srgbClr val="3B5174"/>
+          </a:solidFill>
+          <a:ln>
+            <a:noFill/>
+          </a:ln>
+          <a:effectLst/>
+        </p:spPr>
+        <p:style>
+          <a:lnRef idx="1">
+            <a:schemeClr val="accent1"/>
+          </a:lnRef>
+          <a:fillRef idx="3">
+            <a:schemeClr val="accent1"/>
+          </a:fillRef>
+          <a:effectRef idx="2">
+            <a:schemeClr val="accent1"/>
+          </a:effectRef>
+          <a:fontRef idx="minor">
+            <a:schemeClr val="lt1"/>
+          </a:fontRef>
+        </p:style>
+        <p:txBody>
+          <a:bodyPr rtlCol="0" anchor="ctr"/>
+          <a:lstStyle/>
+          <a:p>
+            <a:pPr algn="ctr"/>
+          </a:p>
+        </p:txBody>
+      </p:sp>
+      <p:sp>
+        <p:nvSpPr>
+          <p:cNvPr id="27" name="TextBox 26"/>
+          <p:cNvSpPr txBox="1"/>
+          <p:nvPr/>
+        </p:nvSpPr>
+        <p:spPr>
+          <a:xfrm>
+            <a:off x="4411370" y="3438144"/>
+            <a:ext cx="3368954" cy="219456"/>
+          </a:xfrm>
+          <a:prstGeom prst="rect">
+            <a:avLst/>
+          </a:prstGeom>
+          <a:noFill/>
+        </p:spPr>
+        <p:txBody>
+          <a:bodyPr wrap="square" anchor="t" lIns="36000" rIns="36000" tIns="18000" bIns="18000">
+            <a:spAutoFit/>
+          </a:bodyPr>
+          <a:lstStyle/>
+          <a:p>
+            <a:pPr algn="l"/>
+            <a:r>
+              <a:rPr sz="1120" b="1" i="0">
+                <a:solidFill>
+                  <a:srgbClr val="64748B"/>
+                </a:solidFill>
+                <a:latin typeface="Arial"/>
+              </a:rPr>
+              <a:t>STEP 2 . Thermal gelation</a:t>
+            </a:r>
+          </a:p>
+        </p:txBody>
+      </p:sp>
+      <p:sp>
+        <p:nvSpPr>
+          <p:cNvPr id="28" name="TextBox 27"/>
+          <p:cNvSpPr txBox="1"/>
+          <p:nvPr/>
+        </p:nvSpPr>
+        <p:spPr>
+          <a:xfrm>
+            <a:off x="4411370" y="3675888"/>
+            <a:ext cx="3368954" cy="329184"/>
+          </a:xfrm>
+          <a:prstGeom prst="rect">
+            <a:avLst/>
+          </a:prstGeom>
+          <a:noFill/>
+        </p:spPr>
+        <p:txBody>
+          <a:bodyPr wrap="square" anchor="t" lIns="36000" rIns="36000" tIns="18000" bIns="18000">
+            <a:spAutoFit/>
+          </a:bodyPr>
+          <a:lstStyle/>
+          <a:p>
+            <a:pPr algn="l"/>
+            <a:r>
+              <a:rPr sz="1680" b="1" i="0">
+                <a:solidFill>
+                  <a:srgbClr val="1E293B"/>
+                </a:solidFill>
+                <a:latin typeface="Arial"/>
+              </a:rPr>
+              <a:t>Heating (~50-60 C)</a:t>
+            </a:r>
+          </a:p>
+        </p:txBody>
+      </p:sp>
+      <p:sp>
+        <p:nvSpPr>
+          <p:cNvPr id="29" name="TextBox 28"/>
+          <p:cNvSpPr txBox="1"/>
+          <p:nvPr/>
+        </p:nvSpPr>
+        <p:spPr>
+          <a:xfrm>
+            <a:off x="4411370" y="4041648"/>
+            <a:ext cx="182880" cy="274320"/>
+          </a:xfrm>
+          <a:prstGeom prst="rect">
+            <a:avLst/>
+          </a:prstGeom>
+          <a:noFill/>
+        </p:spPr>
+        <p:txBody>
+          <a:bodyPr wrap="square" anchor="t" lIns="36000" rIns="36000" tIns="18000" bIns="18000">
+            <a:spAutoFit/>
+          </a:bodyPr>
+          <a:lstStyle/>
+          <a:p>
+            <a:pPr algn="l"/>
+            <a:r>
+              <a:rPr sz="1344" b="0" i="0">
+                <a:solidFill>
+                  <a:srgbClr val="3B5174"/>
+                </a:solidFill>
+                <a:latin typeface="Arial"/>
+              </a:rPr>
+              <a:t>•</a:t>
+            </a:r>
+          </a:p>
+        </p:txBody>
+      </p:sp>
+      <p:sp>
+        <p:nvSpPr>
+          <p:cNvPr id="30" name="TextBox 29"/>
+          <p:cNvSpPr txBox="1"/>
+          <p:nvPr/>
+        </p:nvSpPr>
+        <p:spPr>
+          <a:xfrm>
+            <a:off x="4612538" y="4041648"/>
+            <a:ext cx="3167786" cy="274320"/>
+          </a:xfrm>
+          <a:prstGeom prst="rect">
+            <a:avLst/>
+          </a:prstGeom>
+          <a:noFill/>
+        </p:spPr>
+        <p:txBody>
+          <a:bodyPr wrap="square" anchor="t" lIns="36000" rIns="36000" tIns="18000" bIns="18000">
+            <a:spAutoFit/>
+          </a:bodyPr>
+          <a:lstStyle/>
+          <a:p>
+            <a:pPr algn="l"/>
+            <a:r>
+              <a:rPr sz="1344" b="0" i="0">
+                <a:solidFill>
+                  <a:srgbClr val="475569"/>
+                </a:solidFill>
+                <a:latin typeface="Arial"/>
+              </a:rPr>
+              <a:t>MC LCST behavior boosts hydrophobic interaction</a:t>
+            </a:r>
+          </a:p>
+        </p:txBody>
+      </p:sp>
+      <p:sp>
+        <p:nvSpPr>
+          <p:cNvPr id="31" name="TextBox 30"/>
+          <p:cNvSpPr txBox="1"/>
+          <p:nvPr/>
+        </p:nvSpPr>
+        <p:spPr>
+          <a:xfrm>
+            <a:off x="4411370" y="4315968"/>
+            <a:ext cx="182880" cy="274320"/>
+          </a:xfrm>
+          <a:prstGeom prst="rect">
+            <a:avLst/>
+          </a:prstGeom>
+          <a:noFill/>
+        </p:spPr>
+        <p:txBody>
+          <a:bodyPr wrap="square" anchor="t" lIns="36000" rIns="36000" tIns="18000" bIns="18000">
+            <a:spAutoFit/>
+          </a:bodyPr>
+          <a:lstStyle/>
+          <a:p>
+            <a:pPr algn="l"/>
+            <a:r>
+              <a:rPr sz="1344" b="0" i="0">
+                <a:solidFill>
+                  <a:srgbClr val="3B5174"/>
+                </a:solidFill>
+                <a:latin typeface="Arial"/>
+              </a:rPr>
+              <a:t>•</a:t>
+            </a:r>
+          </a:p>
+        </p:txBody>
+      </p:sp>
+      <p:sp>
+        <p:nvSpPr>
+          <p:cNvPr id="32" name="TextBox 31"/>
+          <p:cNvSpPr txBox="1"/>
+          <p:nvPr/>
+        </p:nvSpPr>
+        <p:spPr>
+          <a:xfrm>
+            <a:off x="4612538" y="4315968"/>
+            <a:ext cx="3167786" cy="274320"/>
+          </a:xfrm>
+          <a:prstGeom prst="rect">
+            <a:avLst/>
+          </a:prstGeom>
+          <a:noFill/>
+        </p:spPr>
+        <p:txBody>
+          <a:bodyPr wrap="square" anchor="t" lIns="36000" rIns="36000" tIns="18000" bIns="18000">
+            <a:spAutoFit/>
+          </a:bodyPr>
+          <a:lstStyle/>
+          <a:p>
+            <a:pPr algn="l"/>
+            <a:r>
+              <a:rPr sz="1344" b="0" i="0">
+                <a:solidFill>
+                  <a:srgbClr val="475569"/>
+                </a:solidFill>
+                <a:latin typeface="Arial"/>
+              </a:rPr>
+              <a:t>Polymer chains assemble into a gel network</a:t>
+            </a:r>
+          </a:p>
+        </p:txBody>
+      </p:sp>
+      <p:sp>
+        <p:nvSpPr>
+          <p:cNvPr id="33" name="TextBox 32"/>
+          <p:cNvSpPr txBox="1"/>
+          <p:nvPr/>
+        </p:nvSpPr>
+        <p:spPr>
+          <a:xfrm>
+            <a:off x="4411370" y="4590288"/>
+            <a:ext cx="182880" cy="274320"/>
+          </a:xfrm>
+          <a:prstGeom prst="rect">
+            <a:avLst/>
+          </a:prstGeom>
+          <a:noFill/>
+        </p:spPr>
+        <p:txBody>
+          <a:bodyPr wrap="square" anchor="t" lIns="36000" rIns="36000" tIns="18000" bIns="18000">
+            <a:spAutoFit/>
+          </a:bodyPr>
+          <a:lstStyle/>
+          <a:p>
+            <a:pPr algn="l"/>
+            <a:r>
+              <a:rPr sz="1344" b="0" i="0">
+                <a:solidFill>
+                  <a:srgbClr val="3B5174"/>
+                </a:solidFill>
+                <a:latin typeface="Arial"/>
+              </a:rPr>
+              <a:t>•</a:t>
+            </a:r>
+          </a:p>
+        </p:txBody>
+      </p:sp>
+      <p:sp>
+        <p:nvSpPr>
+          <p:cNvPr id="34" name="TextBox 33"/>
+          <p:cNvSpPr txBox="1"/>
+          <p:nvPr/>
+        </p:nvSpPr>
+        <p:spPr>
+          <a:xfrm>
+            <a:off x="4612538" y="4590288"/>
+            <a:ext cx="3167786" cy="274320"/>
+          </a:xfrm>
+          <a:prstGeom prst="rect">
+            <a:avLst/>
+          </a:prstGeom>
+          <a:noFill/>
+        </p:spPr>
+        <p:txBody>
+          <a:bodyPr wrap="square" anchor="t" lIns="36000" rIns="36000" tIns="18000" bIns="18000">
+            <a:spAutoFit/>
+          </a:bodyPr>
+          <a:lstStyle/>
+          <a:p>
+            <a:pPr algn="l"/>
+            <a:r>
+              <a:rPr sz="1344" b="0" i="0">
+                <a:solidFill>
+                  <a:srgbClr val="475569"/>
+                </a:solidFill>
+                <a:latin typeface="Arial"/>
+              </a:rPr>
+              <a:t>Thermoreversible gelation (onset of fire protection)</a:t>
+            </a:r>
+          </a:p>
+        </p:txBody>
+      </p:sp>
+      <p:sp>
+        <p:nvSpPr>
+          <p:cNvPr id="35" name="Rounded Rectangle 34"/>
+          <p:cNvSpPr/>
+          <p:nvPr/>
+        </p:nvSpPr>
+        <p:spPr>
+          <a:xfrm>
+            <a:off x="8091220" y="3273552"/>
+            <a:ext cx="3734714" cy="2651760"/>
+          </a:xfrm>
+          <a:prstGeom prst="roundRect">
+            <a:avLst>
+              <a:gd name="adj" fmla="val 4000"/>
+            </a:avLst>
+          </a:prstGeom>
+          <a:solidFill>
+            <a:srgbClr val="F1F5F9"/>
+          </a:solidFill>
+          <a:ln w="6350">
+            <a:solidFill>
+              <a:srgbClr val="E2E8F0"/>
+            </a:solidFill>
+          </a:ln>
+          <a:effectLst/>
+        </p:spPr>
+        <p:style>
+          <a:lnRef idx="1">
+            <a:schemeClr val="accent1"/>
+          </a:lnRef>
+          <a:fillRef idx="3">
+            <a:schemeClr val="accent1"/>
+          </a:fillRef>
+          <a:effectRef idx="2">
+            <a:schemeClr val="accent1"/>
+          </a:effectRef>
+          <a:fontRef idx="minor">
+            <a:schemeClr val="lt1"/>
+          </a:fontRef>
+        </p:style>
+        <p:txBody>
+          <a:bodyPr rtlCol="0" anchor="ctr"/>
+          <a:lstStyle/>
+          <a:p>
+            <a:pPr algn="ctr"/>
+          </a:p>
+        </p:txBody>
+      </p:sp>
+      <p:sp>
+        <p:nvSpPr>
+          <p:cNvPr id="36" name="Rectangle 35"/>
+          <p:cNvSpPr/>
+          <p:nvPr/>
+        </p:nvSpPr>
+        <p:spPr>
+          <a:xfrm>
+            <a:off x="8091220" y="3273552"/>
+            <a:ext cx="3734714" cy="36576"/>
+          </a:xfrm>
+          <a:prstGeom prst="rect">
+            <a:avLst/>
+          </a:prstGeom>
+          <a:solidFill>
+            <a:srgbClr val="3B5174"/>
+          </a:solidFill>
+          <a:ln>
+            <a:noFill/>
+          </a:ln>
+          <a:effectLst/>
+        </p:spPr>
+        <p:style>
+          <a:lnRef idx="1">
+            <a:schemeClr val="accent1"/>
+          </a:lnRef>
+          <a:fillRef idx="3">
+            <a:schemeClr val="accent1"/>
+          </a:fillRef>
+          <a:effectRef idx="2">
+            <a:schemeClr val="accent1"/>
+          </a:effectRef>
+          <a:fontRef idx="minor">
+            <a:schemeClr val="lt1"/>
+          </a:fontRef>
+        </p:style>
+        <p:txBody>
+          <a:bodyPr rtlCol="0" anchor="ctr"/>
+          <a:lstStyle/>
+          <a:p>
+            <a:pPr algn="ctr"/>
+          </a:p>
+        </p:txBody>
+      </p:sp>
+      <p:sp>
+        <p:nvSpPr>
+          <p:cNvPr id="37" name="TextBox 36"/>
+          <p:cNvSpPr txBox="1"/>
+          <p:nvPr/>
+        </p:nvSpPr>
+        <p:spPr>
+          <a:xfrm>
+            <a:off x="8274100" y="3438144"/>
+            <a:ext cx="3368954" cy="219456"/>
+          </a:xfrm>
+          <a:prstGeom prst="rect">
+            <a:avLst/>
+          </a:prstGeom>
+          <a:noFill/>
+        </p:spPr>
+        <p:txBody>
+          <a:bodyPr wrap="square" anchor="t" lIns="36000" rIns="36000" tIns="18000" bIns="18000">
+            <a:spAutoFit/>
+          </a:bodyPr>
+          <a:lstStyle/>
+          <a:p>
+            <a:pPr algn="l"/>
+            <a:r>
+              <a:rPr sz="1120" b="1" i="0">
+                <a:solidFill>
+                  <a:srgbClr val="64748B"/>
+                </a:solidFill>
+                <a:latin typeface="Arial"/>
+              </a:rPr>
+              <a:t>STEP 3 . Aerogel</a:t>
+            </a:r>
+          </a:p>
+        </p:txBody>
+      </p:sp>
+      <p:sp>
+        <p:nvSpPr>
+          <p:cNvPr id="38" name="TextBox 37"/>
+          <p:cNvSpPr txBox="1"/>
+          <p:nvPr/>
+        </p:nvSpPr>
+        <p:spPr>
+          <a:xfrm>
+            <a:off x="8274100" y="3675888"/>
+            <a:ext cx="3368954" cy="329184"/>
+          </a:xfrm>
+          <a:prstGeom prst="rect">
+            <a:avLst/>
+          </a:prstGeom>
+          <a:noFill/>
+        </p:spPr>
+        <p:txBody>
+          <a:bodyPr wrap="square" anchor="t" lIns="36000" rIns="36000" tIns="18000" bIns="18000">
+            <a:spAutoFit/>
+          </a:bodyPr>
+          <a:lstStyle/>
+          <a:p>
+            <a:pPr algn="l"/>
+            <a:r>
+              <a:rPr sz="1680" b="1" i="0">
+                <a:solidFill>
+                  <a:srgbClr val="1E293B"/>
+                </a:solidFill>
+                <a:latin typeface="Arial"/>
+              </a:rPr>
+              <a:t>Flame (hundreds C)</a:t>
+            </a:r>
+          </a:p>
+        </p:txBody>
+      </p:sp>
+      <p:sp>
+        <p:nvSpPr>
+          <p:cNvPr id="39" name="TextBox 38"/>
+          <p:cNvSpPr txBox="1"/>
+          <p:nvPr/>
+        </p:nvSpPr>
+        <p:spPr>
+          <a:xfrm>
+            <a:off x="8274100" y="4041648"/>
+            <a:ext cx="182880" cy="274320"/>
+          </a:xfrm>
+          <a:prstGeom prst="rect">
+            <a:avLst/>
+          </a:prstGeom>
+          <a:noFill/>
+        </p:spPr>
+        <p:txBody>
+          <a:bodyPr wrap="square" anchor="t" lIns="36000" rIns="36000" tIns="18000" bIns="18000">
+            <a:spAutoFit/>
+          </a:bodyPr>
+          <a:lstStyle/>
+          <a:p>
+            <a:pPr algn="l"/>
+            <a:r>
+              <a:rPr sz="1344" b="0" i="0">
+                <a:solidFill>
+                  <a:srgbClr val="3B5174"/>
+                </a:solidFill>
+                <a:latin typeface="Arial"/>
+              </a:rPr>
+              <a:t>•</a:t>
+            </a:r>
+          </a:p>
+        </p:txBody>
+      </p:sp>
+      <p:sp>
+        <p:nvSpPr>
+          <p:cNvPr id="40" name="TextBox 39"/>
+          <p:cNvSpPr txBox="1"/>
+          <p:nvPr/>
+        </p:nvSpPr>
+        <p:spPr>
+          <a:xfrm>
+            <a:off x="8475268" y="4041648"/>
+            <a:ext cx="3167786" cy="274320"/>
+          </a:xfrm>
+          <a:prstGeom prst="rect">
+            <a:avLst/>
+          </a:prstGeom>
+          <a:noFill/>
+        </p:spPr>
+        <p:txBody>
+          <a:bodyPr wrap="square" anchor="t" lIns="36000" rIns="36000" tIns="18000" bIns="18000">
+            <a:spAutoFit/>
+          </a:bodyPr>
+          <a:lstStyle/>
+          <a:p>
+            <a:pPr algn="l"/>
+            <a:r>
+              <a:rPr sz="1344" b="0" i="0">
+                <a:solidFill>
+                  <a:srgbClr val="475569"/>
+                </a:solidFill>
+                <a:latin typeface="Arial"/>
+              </a:rPr>
+              <a:t>Rapid water evaporation / dehydration</a:t>
+            </a:r>
+          </a:p>
+        </p:txBody>
+      </p:sp>
+      <p:sp>
+        <p:nvSpPr>
+          <p:cNvPr id="41" name="TextBox 40"/>
+          <p:cNvSpPr txBox="1"/>
+          <p:nvPr/>
+        </p:nvSpPr>
+        <p:spPr>
+          <a:xfrm>
+            <a:off x="8274100" y="4315968"/>
+            <a:ext cx="182880" cy="274320"/>
+          </a:xfrm>
+          <a:prstGeom prst="rect">
+            <a:avLst/>
+          </a:prstGeom>
+          <a:noFill/>
+        </p:spPr>
+        <p:txBody>
+          <a:bodyPr wrap="square" anchor="t" lIns="36000" rIns="36000" tIns="18000" bIns="18000">
+            <a:spAutoFit/>
+          </a:bodyPr>
+          <a:lstStyle/>
+          <a:p>
+            <a:pPr algn="l"/>
+            <a:r>
+              <a:rPr sz="1344" b="0" i="0">
+                <a:solidFill>
+                  <a:srgbClr val="3B5174"/>
+                </a:solidFill>
+                <a:latin typeface="Arial"/>
+              </a:rPr>
+              <a:t>•</a:t>
+            </a:r>
+          </a:p>
+        </p:txBody>
+      </p:sp>
+      <p:sp>
+        <p:nvSpPr>
+          <p:cNvPr id="42" name="TextBox 41"/>
+          <p:cNvSpPr txBox="1"/>
+          <p:nvPr/>
+        </p:nvSpPr>
+        <p:spPr>
+          <a:xfrm>
+            <a:off x="8475268" y="4315968"/>
+            <a:ext cx="3167786" cy="274320"/>
+          </a:xfrm>
+          <a:prstGeom prst="rect">
+            <a:avLst/>
+          </a:prstGeom>
+          <a:noFill/>
+        </p:spPr>
+        <p:txBody>
+          <a:bodyPr wrap="square" anchor="t" lIns="36000" rIns="36000" tIns="18000" bIns="18000">
+            <a:spAutoFit/>
+          </a:bodyPr>
+          <a:lstStyle/>
+          <a:p>
+            <a:pPr algn="l"/>
+            <a:r>
+              <a:rPr sz="1344" b="0" i="0">
+                <a:solidFill>
+                  <a:srgbClr val="475569"/>
+                </a:solidFill>
+                <a:latin typeface="Arial"/>
+              </a:rPr>
+              <a:t>CSP sinters into a 3D porous skeleton</a:t>
+            </a:r>
+          </a:p>
+        </p:txBody>
+      </p:sp>
+      <p:sp>
+        <p:nvSpPr>
+          <p:cNvPr id="43" name="TextBox 42"/>
+          <p:cNvSpPr txBox="1"/>
+          <p:nvPr/>
+        </p:nvSpPr>
+        <p:spPr>
+          <a:xfrm>
+            <a:off x="8274100" y="4590288"/>
+            <a:ext cx="182880" cy="274320"/>
+          </a:xfrm>
+          <a:prstGeom prst="rect">
+            <a:avLst/>
+          </a:prstGeom>
+          <a:noFill/>
+        </p:spPr>
+        <p:txBody>
+          <a:bodyPr wrap="square" anchor="t" lIns="36000" rIns="36000" tIns="18000" bIns="18000">
+            <a:spAutoFit/>
+          </a:bodyPr>
+          <a:lstStyle/>
+          <a:p>
+            <a:pPr algn="l"/>
+            <a:r>
+              <a:rPr sz="1344" b="0" i="0">
+                <a:solidFill>
+                  <a:srgbClr val="3B5174"/>
+                </a:solidFill>
+                <a:latin typeface="Arial"/>
+              </a:rPr>
+              <a:t>•</a:t>
+            </a:r>
+          </a:p>
+        </p:txBody>
+      </p:sp>
+      <p:sp>
+        <p:nvSpPr>
+          <p:cNvPr id="44" name="TextBox 43"/>
+          <p:cNvSpPr txBox="1"/>
+          <p:nvPr/>
+        </p:nvSpPr>
+        <p:spPr>
+          <a:xfrm>
+            <a:off x="8475268" y="4590288"/>
+            <a:ext cx="3167786" cy="274320"/>
+          </a:xfrm>
+          <a:prstGeom prst="rect">
+            <a:avLst/>
+          </a:prstGeom>
+          <a:noFill/>
+        </p:spPr>
+        <p:txBody>
+          <a:bodyPr wrap="square" anchor="t" lIns="36000" rIns="36000" tIns="18000" bIns="18000">
+            <a:spAutoFit/>
+          </a:bodyPr>
+          <a:lstStyle/>
+          <a:p>
+            <a:pPr algn="l"/>
+            <a:r>
+              <a:rPr sz="1344" b="0" i="0">
+                <a:solidFill>
+                  <a:srgbClr val="475569"/>
+                </a:solidFill>
+                <a:latin typeface="Arial"/>
+              </a:rPr>
+              <a:t>Insulating silica aerogel layer forms</a:t>
             </a:r>
           </a:p>
         </p:txBody>
@@ -48866,7 +50523,7 @@
                 </a:solidFill>
                 <a:latin typeface="Arial"/>
               </a:rPr>
-              <a:t>4 / 37</a:t>
+              <a:t>4 / 38</a:t>
             </a:r>
           </a:p>
         </p:txBody>
@@ -50071,7 +51728,7 @@
                 </a:solidFill>
                 <a:latin typeface="Arial"/>
               </a:rPr>
-              <a:t>5 / 37</a:t>
+              <a:t>5 / 38</a:t>
             </a:r>
           </a:p>
         </p:txBody>
@@ -51395,7 +53052,7 @@
                 </a:solidFill>
                 <a:latin typeface="Arial"/>
               </a:rPr>
-              <a:t>6 / 37</a:t>
+              <a:t>6 / 38</a:t>
             </a:r>
           </a:p>
         </p:txBody>
@@ -52983,7 +54640,7 @@
                 </a:solidFill>
                 <a:latin typeface="Arial"/>
               </a:rPr>
-              <a:t>7 / 37</a:t>
+              <a:t>7 / 38</a:t>
             </a:r>
           </a:p>
         </p:txBody>
@@ -54765,7 +56422,7 @@
                 </a:solidFill>
                 <a:latin typeface="Arial"/>
               </a:rPr>
-              <a:t>8 / 37</a:t>
+              <a:t>8 / 38</a:t>
             </a:r>
           </a:p>
         </p:txBody>
@@ -55108,7 +56765,7 @@
                 </a:solidFill>
                 <a:latin typeface="Arial"/>
               </a:rPr>
-              <a:t>9 / 37</a:t>
+              <a:t>9 / 38</a:t>
             </a:r>
           </a:p>
         </p:txBody>

--- a/slides_en.pptx
+++ b/slides_en.pptx
@@ -42,7 +42,6 @@
     <p:sldId id="290" r:id="rId41"/>
     <p:sldId id="291" r:id="rId42"/>
     <p:sldId id="292" r:id="rId43"/>
-    <p:sldId id="293" r:id="rId44"/>
   </p:sldIdLst>
   <p:sldSz cx="12191695" cy="6858000" type="screen4x3"/>
   <p:notesSz cx="6858000" cy="9144000"/>
@@ -3579,7 +3578,7 @@
                 </a:solidFill>
                 <a:latin typeface="Arial"/>
               </a:rPr>
-              <a:t>1 / 38</a:t>
+              <a:t>1 / 37</a:t>
             </a:r>
           </a:p>
         </p:txBody>
@@ -3922,7 +3921,7 @@
                 </a:solidFill>
                 <a:latin typeface="Arial"/>
               </a:rPr>
-              <a:t>10 / 38</a:t>
+              <a:t>10 / 37</a:t>
             </a:r>
           </a:p>
         </p:txBody>
@@ -5965,7 +5964,7 @@
                 </a:solidFill>
                 <a:latin typeface="Arial"/>
               </a:rPr>
-              <a:t>11 / 38</a:t>
+              <a:t>11 / 37</a:t>
             </a:r>
           </a:p>
         </p:txBody>
@@ -7492,7 +7491,7 @@
                 </a:solidFill>
                 <a:latin typeface="Arial"/>
               </a:rPr>
-              <a:t>12 / 38</a:t>
+              <a:t>12 / 37</a:t>
             </a:r>
           </a:p>
         </p:txBody>
@@ -9368,7 +9367,7 @@
                 </a:solidFill>
                 <a:latin typeface="Arial"/>
               </a:rPr>
-              <a:t>13 / 38</a:t>
+              <a:t>13 / 37</a:t>
             </a:r>
           </a:p>
         </p:txBody>
@@ -11860,7 +11859,7 @@
                 </a:solidFill>
                 <a:latin typeface="Arial"/>
               </a:rPr>
-              <a:t>14 / 38</a:t>
+              <a:t>14 / 37</a:t>
             </a:r>
           </a:p>
         </p:txBody>
@@ -14064,7 +14063,7 @@
                 </a:solidFill>
                 <a:latin typeface="Arial"/>
               </a:rPr>
-              <a:t>15 / 38</a:t>
+              <a:t>15 / 37</a:t>
             </a:r>
           </a:p>
         </p:txBody>
@@ -14407,7 +14406,7 @@
                 </a:solidFill>
                 <a:latin typeface="Arial"/>
               </a:rPr>
-              <a:t>16 / 38</a:t>
+              <a:t>16 / 37</a:t>
             </a:r>
           </a:p>
         </p:txBody>
@@ -15479,7 +15478,7 @@
                 </a:solidFill>
                 <a:latin typeface="Arial"/>
               </a:rPr>
-              <a:t>17 / 38</a:t>
+              <a:t>17 / 37</a:t>
             </a:r>
           </a:p>
         </p:txBody>
@@ -16580,7 +16579,7 @@
                 </a:solidFill>
                 <a:latin typeface="Arial"/>
               </a:rPr>
-              <a:t>18 / 38</a:t>
+              <a:t>18 / 37</a:t>
             </a:r>
           </a:p>
         </p:txBody>
@@ -18179,7 +18178,7 @@
                 </a:solidFill>
                 <a:latin typeface="Arial"/>
               </a:rPr>
-              <a:t>19 / 38</a:t>
+              <a:t>19 / 37</a:t>
             </a:r>
           </a:p>
         </p:txBody>
@@ -19896,7 +19895,7 @@
                 </a:solidFill>
                 <a:latin typeface="Arial"/>
               </a:rPr>
-              <a:t>2 / 38</a:t>
+              <a:t>2 / 37</a:t>
             </a:r>
           </a:p>
         </p:txBody>
@@ -21467,7 +21466,7 @@
                 </a:solidFill>
                 <a:latin typeface="Arial"/>
               </a:rPr>
-              <a:t>20 / 38</a:t>
+              <a:t>20 / 37</a:t>
             </a:r>
           </a:p>
         </p:txBody>
@@ -23160,7 +23159,7 @@
                 </a:solidFill>
                 <a:latin typeface="Arial"/>
               </a:rPr>
-              <a:t>21 / 38</a:t>
+              <a:t>21 / 37</a:t>
             </a:r>
           </a:p>
         </p:txBody>
@@ -24372,7 +24371,7 @@
                 </a:solidFill>
                 <a:latin typeface="Arial"/>
               </a:rPr>
-              <a:t>22 / 38</a:t>
+              <a:t>22 / 37</a:t>
             </a:r>
           </a:p>
         </p:txBody>
@@ -25927,7 +25926,7 @@
                 </a:solidFill>
                 <a:latin typeface="Arial"/>
               </a:rPr>
-              <a:t>23 / 38</a:t>
+              <a:t>23 / 37</a:t>
             </a:r>
           </a:p>
         </p:txBody>
@@ -27346,7 +27345,7 @@
                 </a:solidFill>
                 <a:latin typeface="Arial"/>
               </a:rPr>
-              <a:t>24 / 38</a:t>
+              <a:t>24 / 37</a:t>
             </a:r>
           </a:p>
         </p:txBody>
@@ -28839,7 +28838,7 @@
                 </a:solidFill>
                 <a:latin typeface="Arial"/>
               </a:rPr>
-              <a:t>25 / 38</a:t>
+              <a:t>25 / 37</a:t>
             </a:r>
           </a:p>
         </p:txBody>
@@ -29182,7 +29181,7 @@
                 </a:solidFill>
                 <a:latin typeface="Arial"/>
               </a:rPr>
-              <a:t>26 / 38</a:t>
+              <a:t>26 / 37</a:t>
             </a:r>
           </a:p>
         </p:txBody>
@@ -30925,7 +30924,7 @@
                 </a:solidFill>
                 <a:latin typeface="Arial"/>
               </a:rPr>
-              <a:t>27 / 38</a:t>
+              <a:t>27 / 37</a:t>
             </a:r>
           </a:p>
         </p:txBody>
@@ -31819,7 +31818,7 @@
                 </a:solidFill>
                 <a:latin typeface="Arial"/>
               </a:rPr>
-              <a:t>28 / 38</a:t>
+              <a:t>28 / 37</a:t>
             </a:r>
           </a:p>
         </p:txBody>
@@ -34025,7 +34024,7 @@
                 </a:solidFill>
                 <a:latin typeface="Arial"/>
               </a:rPr>
-              <a:t>29 / 38</a:t>
+              <a:t>29 / 37</a:t>
             </a:r>
           </a:p>
         </p:txBody>
@@ -36209,7 +36208,7 @@
                 </a:solidFill>
                 <a:latin typeface="Arial"/>
               </a:rPr>
-              <a:t>3 / 38</a:t>
+              <a:t>3 / 37</a:t>
             </a:r>
           </a:p>
         </p:txBody>
@@ -36552,7 +36551,7 @@
                 </a:solidFill>
                 <a:latin typeface="Arial"/>
               </a:rPr>
-              <a:t>30 / 38</a:t>
+              <a:t>30 / 37</a:t>
             </a:r>
           </a:p>
         </p:txBody>
@@ -38208,7 +38207,7 @@
                 </a:solidFill>
                 <a:latin typeface="Arial"/>
               </a:rPr>
-              <a:t>31 / 38</a:t>
+              <a:t>31 / 37</a:t>
             </a:r>
           </a:p>
         </p:txBody>
@@ -40060,7 +40059,7 @@
                 </a:solidFill>
                 <a:latin typeface="Arial"/>
               </a:rPr>
-              <a:t>32 / 38</a:t>
+              <a:t>32 / 37</a:t>
             </a:r>
           </a:p>
         </p:txBody>
@@ -41598,7 +41597,7 @@
                 </a:solidFill>
                 <a:latin typeface="Arial"/>
               </a:rPr>
-              <a:t>33 / 38</a:t>
+              <a:t>33 / 37</a:t>
             </a:r>
           </a:p>
         </p:txBody>
@@ -41941,7 +41940,7 @@
                 </a:solidFill>
                 <a:latin typeface="Arial"/>
               </a:rPr>
-              <a:t>34 / 38</a:t>
+              <a:t>34 / 37</a:t>
             </a:r>
           </a:p>
         </p:txBody>
@@ -43923,7 +43922,7 @@
                 </a:solidFill>
                 <a:latin typeface="Arial"/>
               </a:rPr>
-              <a:t>35 / 38</a:t>
+              <a:t>35 / 37</a:t>
             </a:r>
           </a:p>
         </p:txBody>
@@ -46194,7 +46193,7 @@
                 </a:solidFill>
                 <a:latin typeface="Arial"/>
               </a:rPr>
-              <a:t>36 / 38</a:t>
+              <a:t>36 / 37</a:t>
             </a:r>
           </a:p>
         </p:txBody>
@@ -48524,1663 +48523,7 @@
                 </a:solidFill>
                 <a:latin typeface="Arial"/>
               </a:rPr>
-              <a:t>37 / 38</a:t>
-            </a:r>
-          </a:p>
-        </p:txBody>
-      </p:sp>
-    </p:spTree>
-  </p:cSld>
-  <p:clrMapOvr>
-    <a:masterClrMapping/>
-  </p:clrMapOvr>
-</p:sld>
-</file>
-
-<file path=ppt/slides/slide38.xml><?xml version="1.0" encoding="utf-8"?>
-<p:sld xmlns:a="http://schemas.openxmlformats.org/drawingml/2006/main" xmlns:p="http://schemas.openxmlformats.org/presentationml/2006/main" xmlns:r="http://schemas.openxmlformats.org/officeDocument/2006/relationships">
-  <p:cSld>
-    <p:spTree>
-      <p:nvGrpSpPr>
-        <p:cNvPr id="1" name=""/>
-        <p:cNvGrpSpPr/>
-        <p:nvPr/>
-      </p:nvGrpSpPr>
-      <p:grpSpPr/>
-      <p:sp>
-        <p:nvSpPr>
-          <p:cNvPr id="2" name="Rectangle 1"/>
-          <p:cNvSpPr/>
-          <p:nvPr/>
-        </p:nvSpPr>
-        <p:spPr>
-          <a:xfrm>
-            <a:off x="0" y="0"/>
-            <a:ext cx="12191695" cy="6858000"/>
-          </a:xfrm>
-          <a:prstGeom prst="rect">
-            <a:avLst/>
-          </a:prstGeom>
-          <a:solidFill>
-            <a:srgbClr val="FFFFFF"/>
-          </a:solidFill>
-          <a:ln>
-            <a:noFill/>
-          </a:ln>
-          <a:effectLst/>
-        </p:spPr>
-        <p:style>
-          <a:lnRef idx="1">
-            <a:schemeClr val="accent1"/>
-          </a:lnRef>
-          <a:fillRef idx="3">
-            <a:schemeClr val="accent1"/>
-          </a:fillRef>
-          <a:effectRef idx="2">
-            <a:schemeClr val="accent1"/>
-          </a:effectRef>
-          <a:fontRef idx="minor">
-            <a:schemeClr val="lt1"/>
-          </a:fontRef>
-        </p:style>
-        <p:txBody>
-          <a:bodyPr rtlCol="0" anchor="ctr"/>
-          <a:lstStyle/>
-          <a:p>
-            <a:pPr algn="ctr"/>
-          </a:p>
-        </p:txBody>
-      </p:sp>
-      <p:sp>
-        <p:nvSpPr>
-          <p:cNvPr id="3" name="Rectangle 2"/>
-          <p:cNvSpPr/>
-          <p:nvPr/>
-        </p:nvSpPr>
-        <p:spPr>
-          <a:xfrm>
-            <a:off x="0" y="0"/>
-            <a:ext cx="12191695" cy="658368"/>
-          </a:xfrm>
-          <a:prstGeom prst="rect">
-            <a:avLst/>
-          </a:prstGeom>
-          <a:solidFill>
-            <a:srgbClr val="1E293B"/>
-          </a:solidFill>
-          <a:ln>
-            <a:noFill/>
-          </a:ln>
-          <a:effectLst/>
-        </p:spPr>
-        <p:style>
-          <a:lnRef idx="1">
-            <a:schemeClr val="accent1"/>
-          </a:lnRef>
-          <a:fillRef idx="3">
-            <a:schemeClr val="accent1"/>
-          </a:fillRef>
-          <a:effectRef idx="2">
-            <a:schemeClr val="accent1"/>
-          </a:effectRef>
-          <a:fontRef idx="minor">
-            <a:schemeClr val="lt1"/>
-          </a:fontRef>
-        </p:style>
-        <p:txBody>
-          <a:bodyPr rtlCol="0" anchor="ctr"/>
-          <a:lstStyle/>
-          <a:p>
-            <a:pPr algn="ctr"/>
-          </a:p>
-        </p:txBody>
-      </p:sp>
-      <p:sp>
-        <p:nvSpPr>
-          <p:cNvPr id="4" name="Rectangle 3"/>
-          <p:cNvSpPr/>
-          <p:nvPr/>
-        </p:nvSpPr>
-        <p:spPr>
-          <a:xfrm>
-            <a:off x="0" y="621792"/>
-            <a:ext cx="12191695" cy="36576"/>
-          </a:xfrm>
-          <a:prstGeom prst="rect">
-            <a:avLst/>
-          </a:prstGeom>
-          <a:solidFill>
-            <a:srgbClr val="3B5174"/>
-          </a:solidFill>
-          <a:ln>
-            <a:noFill/>
-          </a:ln>
-          <a:effectLst/>
-        </p:spPr>
-        <p:style>
-          <a:lnRef idx="1">
-            <a:schemeClr val="accent1"/>
-          </a:lnRef>
-          <a:fillRef idx="3">
-            <a:schemeClr val="accent1"/>
-          </a:fillRef>
-          <a:effectRef idx="2">
-            <a:schemeClr val="accent1"/>
-          </a:effectRef>
-          <a:fontRef idx="minor">
-            <a:schemeClr val="lt1"/>
-          </a:fontRef>
-        </p:style>
-        <p:txBody>
-          <a:bodyPr rtlCol="0" anchor="ctr"/>
-          <a:lstStyle/>
-          <a:p>
-            <a:pPr algn="ctr"/>
-          </a:p>
-        </p:txBody>
-      </p:sp>
-      <p:sp>
-        <p:nvSpPr>
-          <p:cNvPr id="5" name="TextBox 4"/>
-          <p:cNvSpPr txBox="1"/>
-          <p:nvPr/>
-        </p:nvSpPr>
-        <p:spPr>
-          <a:xfrm>
-            <a:off x="365760" y="128016"/>
-            <a:ext cx="2194560" cy="365760"/>
-          </a:xfrm>
-          <a:prstGeom prst="rect">
-            <a:avLst/>
-          </a:prstGeom>
-          <a:noFill/>
-        </p:spPr>
-        <p:txBody>
-          <a:bodyPr wrap="square" anchor="ctr" lIns="36000" rIns="36000" tIns="18000" bIns="18000">
-            <a:spAutoFit/>
-          </a:bodyPr>
-          <a:lstStyle/>
-          <a:p>
-            <a:pPr algn="l"/>
-            <a:r>
-              <a:rPr sz="1232" b="1" i="0">
-                <a:solidFill>
-                  <a:srgbClr val="88A4C4"/>
-                </a:solidFill>
-                <a:latin typeface="Arial"/>
-              </a:rPr>
-              <a:t>Supplementary</a:t>
-            </a:r>
-          </a:p>
-        </p:txBody>
-      </p:sp>
-      <p:sp>
-        <p:nvSpPr>
-          <p:cNvPr id="6" name="Rectangle 5"/>
-          <p:cNvSpPr/>
-          <p:nvPr/>
-        </p:nvSpPr>
-        <p:spPr>
-          <a:xfrm>
-            <a:off x="2606040" y="182880"/>
-            <a:ext cx="10972" cy="292608"/>
-          </a:xfrm>
-          <a:prstGeom prst="rect">
-            <a:avLst/>
-          </a:prstGeom>
-          <a:solidFill>
-            <a:srgbClr val="445870"/>
-          </a:solidFill>
-          <a:ln>
-            <a:noFill/>
-          </a:ln>
-          <a:effectLst/>
-        </p:spPr>
-        <p:style>
-          <a:lnRef idx="1">
-            <a:schemeClr val="accent1"/>
-          </a:lnRef>
-          <a:fillRef idx="3">
-            <a:schemeClr val="accent1"/>
-          </a:fillRef>
-          <a:effectRef idx="2">
-            <a:schemeClr val="accent1"/>
-          </a:effectRef>
-          <a:fontRef idx="minor">
-            <a:schemeClr val="lt1"/>
-          </a:fontRef>
-        </p:style>
-        <p:txBody>
-          <a:bodyPr rtlCol="0" anchor="ctr"/>
-          <a:lstStyle/>
-          <a:p>
-            <a:pPr algn="ctr"/>
-          </a:p>
-        </p:txBody>
-      </p:sp>
-      <p:sp>
-        <p:nvSpPr>
-          <p:cNvPr id="7" name="TextBox 6"/>
-          <p:cNvSpPr txBox="1"/>
-          <p:nvPr/>
-        </p:nvSpPr>
-        <p:spPr>
-          <a:xfrm>
-            <a:off x="2743200" y="91440"/>
-            <a:ext cx="9082735" cy="502920"/>
-          </a:xfrm>
-          <a:prstGeom prst="rect">
-            <a:avLst/>
-          </a:prstGeom>
-          <a:noFill/>
-        </p:spPr>
-        <p:txBody>
-          <a:bodyPr wrap="square" anchor="ctr" lIns="36000" rIns="36000" tIns="18000" bIns="18000">
-            <a:spAutoFit/>
-          </a:bodyPr>
-          <a:lstStyle/>
-          <a:p>
-            <a:pPr algn="l"/>
-            <a:r>
-              <a:rPr sz="2688" b="1" i="0">
-                <a:solidFill>
-                  <a:srgbClr val="FFFFFF"/>
-                </a:solidFill>
-                <a:latin typeface="Arial"/>
-              </a:rPr>
-              <a:t>Three-Stage Temperature-Dependent Gel Transition</a:t>
-            </a:r>
-          </a:p>
-        </p:txBody>
-      </p:sp>
-      <p:sp>
-        <p:nvSpPr>
-          <p:cNvPr id="8" name="Rectangle 7"/>
-          <p:cNvSpPr/>
-          <p:nvPr/>
-        </p:nvSpPr>
-        <p:spPr>
-          <a:xfrm>
-            <a:off x="0" y="6803136"/>
-            <a:ext cx="12191695" cy="54864"/>
-          </a:xfrm>
-          <a:prstGeom prst="rect">
-            <a:avLst/>
-          </a:prstGeom>
-          <a:solidFill>
-            <a:srgbClr val="3B5174"/>
-          </a:solidFill>
-          <a:ln>
-            <a:noFill/>
-          </a:ln>
-          <a:effectLst/>
-        </p:spPr>
-        <p:style>
-          <a:lnRef idx="1">
-            <a:schemeClr val="accent1"/>
-          </a:lnRef>
-          <a:fillRef idx="3">
-            <a:schemeClr val="accent1"/>
-          </a:fillRef>
-          <a:effectRef idx="2">
-            <a:schemeClr val="accent1"/>
-          </a:effectRef>
-          <a:fontRef idx="minor">
-            <a:schemeClr val="lt1"/>
-          </a:fontRef>
-        </p:style>
-        <p:txBody>
-          <a:bodyPr rtlCol="0" anchor="ctr"/>
-          <a:lstStyle/>
-          <a:p>
-            <a:pPr algn="ctr"/>
-          </a:p>
-        </p:txBody>
-      </p:sp>
-      <p:sp>
-        <p:nvSpPr>
-          <p:cNvPr id="9" name="TextBox 8"/>
-          <p:cNvSpPr txBox="1"/>
-          <p:nvPr/>
-        </p:nvSpPr>
-        <p:spPr>
-          <a:xfrm>
-            <a:off x="10911535" y="6547104"/>
-            <a:ext cx="1143000" cy="237744"/>
-          </a:xfrm>
-          <a:prstGeom prst="rect">
-            <a:avLst/>
-          </a:prstGeom>
-          <a:noFill/>
-        </p:spPr>
-        <p:txBody>
-          <a:bodyPr wrap="square" anchor="t" lIns="36000" rIns="36000" tIns="18000" bIns="18000">
-            <a:spAutoFit/>
-          </a:bodyPr>
-          <a:lstStyle/>
-          <a:p>
-            <a:pPr algn="r"/>
-            <a:r>
-              <a:rPr sz="1120" b="0" i="0">
-                <a:solidFill>
-                  <a:srgbClr val="64748B"/>
-                </a:solidFill>
-                <a:latin typeface="Arial"/>
-              </a:rPr>
-              <a:t>38 / 38</a:t>
-            </a:r>
-          </a:p>
-        </p:txBody>
-      </p:sp>
-      <p:sp>
-        <p:nvSpPr>
-          <p:cNvPr id="10" name="Rounded Rectangle 9"/>
-          <p:cNvSpPr/>
-          <p:nvPr/>
-        </p:nvSpPr>
-        <p:spPr>
-          <a:xfrm>
-            <a:off x="365760" y="859536"/>
-            <a:ext cx="11460175" cy="2011680"/>
-          </a:xfrm>
-          <a:prstGeom prst="roundRect">
-            <a:avLst>
-              <a:gd name="adj" fmla="val 2000"/>
-            </a:avLst>
-          </a:prstGeom>
-          <a:solidFill>
-            <a:srgbClr val="F5F8FC"/>
-          </a:solidFill>
-          <a:ln w="12700">
-            <a:solidFill>
-              <a:srgbClr val="C0D0E0"/>
-            </a:solidFill>
-          </a:ln>
-          <a:effectLst/>
-        </p:spPr>
-        <p:style>
-          <a:lnRef idx="1">
-            <a:schemeClr val="accent1"/>
-          </a:lnRef>
-          <a:fillRef idx="3">
-            <a:schemeClr val="accent1"/>
-          </a:fillRef>
-          <a:effectRef idx="2">
-            <a:schemeClr val="accent1"/>
-          </a:effectRef>
-          <a:fontRef idx="minor">
-            <a:schemeClr val="lt1"/>
-          </a:fontRef>
-        </p:style>
-        <p:txBody>
-          <a:bodyPr rtlCol="0" anchor="ctr"/>
-          <a:lstStyle/>
-          <a:p>
-            <a:pPr algn="ctr"/>
-          </a:p>
-        </p:txBody>
-      </p:sp>
-      <p:sp>
-        <p:nvSpPr>
-          <p:cNvPr id="11" name="Rectangle 10"/>
-          <p:cNvSpPr/>
-          <p:nvPr/>
-        </p:nvSpPr>
-        <p:spPr>
-          <a:xfrm>
-            <a:off x="475488" y="969264"/>
-            <a:ext cx="868680" cy="292608"/>
-          </a:xfrm>
-          <a:prstGeom prst="rect">
-            <a:avLst/>
-          </a:prstGeom>
-          <a:solidFill>
-            <a:srgbClr val="1E293B"/>
-          </a:solidFill>
-          <a:ln>
-            <a:noFill/>
-          </a:ln>
-          <a:effectLst/>
-        </p:spPr>
-        <p:style>
-          <a:lnRef idx="1">
-            <a:schemeClr val="accent1"/>
-          </a:lnRef>
-          <a:fillRef idx="3">
-            <a:schemeClr val="accent1"/>
-          </a:fillRef>
-          <a:effectRef idx="2">
-            <a:schemeClr val="accent1"/>
-          </a:effectRef>
-          <a:fontRef idx="minor">
-            <a:schemeClr val="lt1"/>
-          </a:fontRef>
-        </p:style>
-        <p:txBody>
-          <a:bodyPr rtlCol="0" anchor="ctr"/>
-          <a:lstStyle/>
-          <a:p>
-            <a:pPr algn="ctr"/>
-          </a:p>
-        </p:txBody>
-      </p:sp>
-      <p:sp>
-        <p:nvSpPr>
-          <p:cNvPr id="12" name="TextBox 11"/>
-          <p:cNvSpPr txBox="1"/>
-          <p:nvPr/>
-        </p:nvSpPr>
-        <p:spPr>
-          <a:xfrm>
-            <a:off x="475488" y="969264"/>
-            <a:ext cx="868680" cy="292608"/>
-          </a:xfrm>
-          <a:prstGeom prst="rect">
-            <a:avLst/>
-          </a:prstGeom>
-          <a:noFill/>
-        </p:spPr>
-        <p:txBody>
-          <a:bodyPr wrap="square" anchor="ctr" lIns="36000" rIns="36000" tIns="18000" bIns="18000">
-            <a:spAutoFit/>
-          </a:bodyPr>
-          <a:lstStyle/>
-          <a:p>
-            <a:pPr algn="ctr"/>
-            <a:r>
-              <a:rPr sz="1232" b="1" i="0">
-                <a:solidFill>
-                  <a:srgbClr val="FFFFFF"/>
-                </a:solidFill>
-                <a:latin typeface="Arial"/>
-              </a:rPr>
-              <a:t>Concept</a:t>
-            </a:r>
-          </a:p>
-        </p:txBody>
-      </p:sp>
-      <p:sp>
-        <p:nvSpPr>
-          <p:cNvPr id="13" name="TextBox 12"/>
-          <p:cNvSpPr txBox="1"/>
-          <p:nvPr/>
-        </p:nvSpPr>
-        <p:spPr>
-          <a:xfrm>
-            <a:off x="365760" y="859536"/>
-            <a:ext cx="11460175" cy="2011680"/>
-          </a:xfrm>
-          <a:prstGeom prst="rect">
-            <a:avLst/>
-          </a:prstGeom>
-          <a:noFill/>
-        </p:spPr>
-        <p:txBody>
-          <a:bodyPr wrap="square" anchor="ctr" lIns="36000" rIns="36000" tIns="18000" bIns="18000">
-            <a:spAutoFit/>
-          </a:bodyPr>
-          <a:lstStyle/>
-          <a:p>
-            <a:pPr algn="ctr"/>
-            <a:r>
-              <a:rPr sz="1344" b="0" i="0">
-                <a:solidFill>
-                  <a:srgbClr val="AAB4C0"/>
-                </a:solidFill>
-                <a:latin typeface="Arial"/>
-              </a:rPr>
-              <a:t>(Paste paper figure here)</a:t>
-            </a:r>
-          </a:p>
-        </p:txBody>
-      </p:sp>
-      <p:sp>
-        <p:nvSpPr>
-          <p:cNvPr id="14" name="TextBox 13"/>
-          <p:cNvSpPr txBox="1"/>
-          <p:nvPr/>
-        </p:nvSpPr>
-        <p:spPr>
-          <a:xfrm>
-            <a:off x="365760" y="2907792"/>
-            <a:ext cx="11460175" cy="274320"/>
-          </a:xfrm>
-          <a:prstGeom prst="rect">
-            <a:avLst/>
-          </a:prstGeom>
-          <a:noFill/>
-        </p:spPr>
-        <p:txBody>
-          <a:bodyPr wrap="square" anchor="t" lIns="36000" rIns="36000" tIns="18000" bIns="18000">
-            <a:spAutoFit/>
-          </a:bodyPr>
-          <a:lstStyle/>
-          <a:p>
-            <a:pPr algn="ctr"/>
-            <a:r>
-              <a:rPr sz="1120" b="0" i="1">
-                <a:solidFill>
-                  <a:srgbClr val="64748B"/>
-                </a:solidFill>
-                <a:latin typeface="Arial"/>
-              </a:rPr>
-              <a:t>Sol -&gt; thermal gel -&gt; silica aerogel transition with rising temperature</a:t>
-            </a:r>
-          </a:p>
-        </p:txBody>
-      </p:sp>
-      <p:sp>
-        <p:nvSpPr>
-          <p:cNvPr id="15" name="Rounded Rectangle 14"/>
-          <p:cNvSpPr/>
-          <p:nvPr/>
-        </p:nvSpPr>
-        <p:spPr>
-          <a:xfrm>
-            <a:off x="365760" y="3273552"/>
-            <a:ext cx="3734714" cy="2651760"/>
-          </a:xfrm>
-          <a:prstGeom prst="roundRect">
-            <a:avLst>
-              <a:gd name="adj" fmla="val 4000"/>
-            </a:avLst>
-          </a:prstGeom>
-          <a:solidFill>
-            <a:srgbClr val="F1F5F9"/>
-          </a:solidFill>
-          <a:ln w="6350">
-            <a:solidFill>
-              <a:srgbClr val="E2E8F0"/>
-            </a:solidFill>
-          </a:ln>
-          <a:effectLst/>
-        </p:spPr>
-        <p:style>
-          <a:lnRef idx="1">
-            <a:schemeClr val="accent1"/>
-          </a:lnRef>
-          <a:fillRef idx="3">
-            <a:schemeClr val="accent1"/>
-          </a:fillRef>
-          <a:effectRef idx="2">
-            <a:schemeClr val="accent1"/>
-          </a:effectRef>
-          <a:fontRef idx="minor">
-            <a:schemeClr val="lt1"/>
-          </a:fontRef>
-        </p:style>
-        <p:txBody>
-          <a:bodyPr rtlCol="0" anchor="ctr"/>
-          <a:lstStyle/>
-          <a:p>
-            <a:pPr algn="ctr"/>
-          </a:p>
-        </p:txBody>
-      </p:sp>
-      <p:sp>
-        <p:nvSpPr>
-          <p:cNvPr id="16" name="Rectangle 15"/>
-          <p:cNvSpPr/>
-          <p:nvPr/>
-        </p:nvSpPr>
-        <p:spPr>
-          <a:xfrm>
-            <a:off x="365760" y="3273552"/>
-            <a:ext cx="3734714" cy="36576"/>
-          </a:xfrm>
-          <a:prstGeom prst="rect">
-            <a:avLst/>
-          </a:prstGeom>
-          <a:solidFill>
-            <a:srgbClr val="3B5174"/>
-          </a:solidFill>
-          <a:ln>
-            <a:noFill/>
-          </a:ln>
-          <a:effectLst/>
-        </p:spPr>
-        <p:style>
-          <a:lnRef idx="1">
-            <a:schemeClr val="accent1"/>
-          </a:lnRef>
-          <a:fillRef idx="3">
-            <a:schemeClr val="accent1"/>
-          </a:fillRef>
-          <a:effectRef idx="2">
-            <a:schemeClr val="accent1"/>
-          </a:effectRef>
-          <a:fontRef idx="minor">
-            <a:schemeClr val="lt1"/>
-          </a:fontRef>
-        </p:style>
-        <p:txBody>
-          <a:bodyPr rtlCol="0" anchor="ctr"/>
-          <a:lstStyle/>
-          <a:p>
-            <a:pPr algn="ctr"/>
-          </a:p>
-        </p:txBody>
-      </p:sp>
-      <p:sp>
-        <p:nvSpPr>
-          <p:cNvPr id="17" name="TextBox 16"/>
-          <p:cNvSpPr txBox="1"/>
-          <p:nvPr/>
-        </p:nvSpPr>
-        <p:spPr>
-          <a:xfrm>
-            <a:off x="548640" y="3438144"/>
-            <a:ext cx="3368954" cy="219456"/>
-          </a:xfrm>
-          <a:prstGeom prst="rect">
-            <a:avLst/>
-          </a:prstGeom>
-          <a:noFill/>
-        </p:spPr>
-        <p:txBody>
-          <a:bodyPr wrap="square" anchor="t" lIns="36000" rIns="36000" tIns="18000" bIns="18000">
-            <a:spAutoFit/>
-          </a:bodyPr>
-          <a:lstStyle/>
-          <a:p>
-            <a:pPr algn="l"/>
-            <a:r>
-              <a:rPr sz="1120" b="1" i="0">
-                <a:solidFill>
-                  <a:srgbClr val="64748B"/>
-                </a:solidFill>
-                <a:latin typeface="Arial"/>
-              </a:rPr>
-              <a:t>STEP 1 . Sol</a:t>
-            </a:r>
-          </a:p>
-        </p:txBody>
-      </p:sp>
-      <p:sp>
-        <p:nvSpPr>
-          <p:cNvPr id="18" name="TextBox 17"/>
-          <p:cNvSpPr txBox="1"/>
-          <p:nvPr/>
-        </p:nvSpPr>
-        <p:spPr>
-          <a:xfrm>
-            <a:off x="548640" y="3675888"/>
-            <a:ext cx="3368954" cy="329184"/>
-          </a:xfrm>
-          <a:prstGeom prst="rect">
-            <a:avLst/>
-          </a:prstGeom>
-          <a:noFill/>
-        </p:spPr>
-        <p:txBody>
-          <a:bodyPr wrap="square" anchor="t" lIns="36000" rIns="36000" tIns="18000" bIns="18000">
-            <a:spAutoFit/>
-          </a:bodyPr>
-          <a:lstStyle/>
-          <a:p>
-            <a:pPr algn="l"/>
-            <a:r>
-              <a:rPr sz="1680" b="1" i="0">
-                <a:solidFill>
-                  <a:srgbClr val="1E293B"/>
-                </a:solidFill>
-                <a:latin typeface="Arial"/>
-              </a:rPr>
-              <a:t>Room temp (~25 C)</a:t>
-            </a:r>
-          </a:p>
-        </p:txBody>
-      </p:sp>
-      <p:sp>
-        <p:nvSpPr>
-          <p:cNvPr id="19" name="TextBox 18"/>
-          <p:cNvSpPr txBox="1"/>
-          <p:nvPr/>
-        </p:nvSpPr>
-        <p:spPr>
-          <a:xfrm>
-            <a:off x="548640" y="4041648"/>
-            <a:ext cx="182880" cy="274320"/>
-          </a:xfrm>
-          <a:prstGeom prst="rect">
-            <a:avLst/>
-          </a:prstGeom>
-          <a:noFill/>
-        </p:spPr>
-        <p:txBody>
-          <a:bodyPr wrap="square" anchor="t" lIns="36000" rIns="36000" tIns="18000" bIns="18000">
-            <a:spAutoFit/>
-          </a:bodyPr>
-          <a:lstStyle/>
-          <a:p>
-            <a:pPr algn="l"/>
-            <a:r>
-              <a:rPr sz="1344" b="0" i="0">
-                <a:solidFill>
-                  <a:srgbClr val="3B5174"/>
-                </a:solidFill>
-                <a:latin typeface="Arial"/>
-              </a:rPr>
-              <a:t>•</a:t>
-            </a:r>
-          </a:p>
-        </p:txBody>
-      </p:sp>
-      <p:sp>
-        <p:nvSpPr>
-          <p:cNvPr id="20" name="TextBox 19"/>
-          <p:cNvSpPr txBox="1"/>
-          <p:nvPr/>
-        </p:nvSpPr>
-        <p:spPr>
-          <a:xfrm>
-            <a:off x="749808" y="4041648"/>
-            <a:ext cx="3167786" cy="274320"/>
-          </a:xfrm>
-          <a:prstGeom prst="rect">
-            <a:avLst/>
-          </a:prstGeom>
-          <a:noFill/>
-        </p:spPr>
-        <p:txBody>
-          <a:bodyPr wrap="square" anchor="t" lIns="36000" rIns="36000" tIns="18000" bIns="18000">
-            <a:spAutoFit/>
-          </a:bodyPr>
-          <a:lstStyle/>
-          <a:p>
-            <a:pPr algn="l"/>
-            <a:r>
-              <a:rPr sz="1344" b="0" i="0">
-                <a:solidFill>
-                  <a:srgbClr val="475569"/>
-                </a:solidFill>
-                <a:latin typeface="Arial"/>
-              </a:rPr>
-              <a:t>MC chains as hydrophilic random coils</a:t>
-            </a:r>
-          </a:p>
-        </p:txBody>
-      </p:sp>
-      <p:sp>
-        <p:nvSpPr>
-          <p:cNvPr id="21" name="TextBox 20"/>
-          <p:cNvSpPr txBox="1"/>
-          <p:nvPr/>
-        </p:nvSpPr>
-        <p:spPr>
-          <a:xfrm>
-            <a:off x="548640" y="4315968"/>
-            <a:ext cx="182880" cy="274320"/>
-          </a:xfrm>
-          <a:prstGeom prst="rect">
-            <a:avLst/>
-          </a:prstGeom>
-          <a:noFill/>
-        </p:spPr>
-        <p:txBody>
-          <a:bodyPr wrap="square" anchor="t" lIns="36000" rIns="36000" tIns="18000" bIns="18000">
-            <a:spAutoFit/>
-          </a:bodyPr>
-          <a:lstStyle/>
-          <a:p>
-            <a:pPr algn="l"/>
-            <a:r>
-              <a:rPr sz="1344" b="0" i="0">
-                <a:solidFill>
-                  <a:srgbClr val="3B5174"/>
-                </a:solidFill>
-                <a:latin typeface="Arial"/>
-              </a:rPr>
-              <a:t>•</a:t>
-            </a:r>
-          </a:p>
-        </p:txBody>
-      </p:sp>
-      <p:sp>
-        <p:nvSpPr>
-          <p:cNvPr id="22" name="TextBox 21"/>
-          <p:cNvSpPr txBox="1"/>
-          <p:nvPr/>
-        </p:nvSpPr>
-        <p:spPr>
-          <a:xfrm>
-            <a:off x="749808" y="4315968"/>
-            <a:ext cx="3167786" cy="274320"/>
-          </a:xfrm>
-          <a:prstGeom prst="rect">
-            <a:avLst/>
-          </a:prstGeom>
-          <a:noFill/>
-        </p:spPr>
-        <p:txBody>
-          <a:bodyPr wrap="square" anchor="t" lIns="36000" rIns="36000" tIns="18000" bIns="18000">
-            <a:spAutoFit/>
-          </a:bodyPr>
-          <a:lstStyle/>
-          <a:p>
-            <a:pPr algn="l"/>
-            <a:r>
-              <a:rPr sz="1344" b="0" i="0">
-                <a:solidFill>
-                  <a:srgbClr val="475569"/>
-                </a:solidFill>
-                <a:latin typeface="Arial"/>
-              </a:rPr>
-              <a:t>Low viscosity, sprayable</a:t>
-            </a:r>
-          </a:p>
-        </p:txBody>
-      </p:sp>
-      <p:sp>
-        <p:nvSpPr>
-          <p:cNvPr id="23" name="TextBox 22"/>
-          <p:cNvSpPr txBox="1"/>
-          <p:nvPr/>
-        </p:nvSpPr>
-        <p:spPr>
-          <a:xfrm>
-            <a:off x="548640" y="4590288"/>
-            <a:ext cx="182880" cy="274320"/>
-          </a:xfrm>
-          <a:prstGeom prst="rect">
-            <a:avLst/>
-          </a:prstGeom>
-          <a:noFill/>
-        </p:spPr>
-        <p:txBody>
-          <a:bodyPr wrap="square" anchor="t" lIns="36000" rIns="36000" tIns="18000" bIns="18000">
-            <a:spAutoFit/>
-          </a:bodyPr>
-          <a:lstStyle/>
-          <a:p>
-            <a:pPr algn="l"/>
-            <a:r>
-              <a:rPr sz="1344" b="0" i="0">
-                <a:solidFill>
-                  <a:srgbClr val="3B5174"/>
-                </a:solidFill>
-                <a:latin typeface="Arial"/>
-              </a:rPr>
-              <a:t>•</a:t>
-            </a:r>
-          </a:p>
-        </p:txBody>
-      </p:sp>
-      <p:sp>
-        <p:nvSpPr>
-          <p:cNvPr id="24" name="TextBox 23"/>
-          <p:cNvSpPr txBox="1"/>
-          <p:nvPr/>
-        </p:nvSpPr>
-        <p:spPr>
-          <a:xfrm>
-            <a:off x="749808" y="4590288"/>
-            <a:ext cx="3167786" cy="274320"/>
-          </a:xfrm>
-          <a:prstGeom prst="rect">
-            <a:avLst/>
-          </a:prstGeom>
-          <a:noFill/>
-        </p:spPr>
-        <p:txBody>
-          <a:bodyPr wrap="square" anchor="t" lIns="36000" rIns="36000" tIns="18000" bIns="18000">
-            <a:spAutoFit/>
-          </a:bodyPr>
-          <a:lstStyle/>
-          <a:p>
-            <a:pPr algn="l"/>
-            <a:r>
-              <a:rPr sz="1344" b="0" i="0">
-                <a:solidFill>
-                  <a:srgbClr val="475569"/>
-                </a:solidFill>
-                <a:latin typeface="Arial"/>
-              </a:rPr>
-              <a:t>Reversible H-bonding between CSP and polymer</a:t>
-            </a:r>
-          </a:p>
-        </p:txBody>
-      </p:sp>
-      <p:sp>
-        <p:nvSpPr>
-          <p:cNvPr id="25" name="Rounded Rectangle 24"/>
-          <p:cNvSpPr/>
-          <p:nvPr/>
-        </p:nvSpPr>
-        <p:spPr>
-          <a:xfrm>
-            <a:off x="4228490" y="3273552"/>
-            <a:ext cx="3734714" cy="2651760"/>
-          </a:xfrm>
-          <a:prstGeom prst="roundRect">
-            <a:avLst>
-              <a:gd name="adj" fmla="val 4000"/>
-            </a:avLst>
-          </a:prstGeom>
-          <a:solidFill>
-            <a:srgbClr val="F1F5F9"/>
-          </a:solidFill>
-          <a:ln w="6350">
-            <a:solidFill>
-              <a:srgbClr val="E2E8F0"/>
-            </a:solidFill>
-          </a:ln>
-          <a:effectLst/>
-        </p:spPr>
-        <p:style>
-          <a:lnRef idx="1">
-            <a:schemeClr val="accent1"/>
-          </a:lnRef>
-          <a:fillRef idx="3">
-            <a:schemeClr val="accent1"/>
-          </a:fillRef>
-          <a:effectRef idx="2">
-            <a:schemeClr val="accent1"/>
-          </a:effectRef>
-          <a:fontRef idx="minor">
-            <a:schemeClr val="lt1"/>
-          </a:fontRef>
-        </p:style>
-        <p:txBody>
-          <a:bodyPr rtlCol="0" anchor="ctr"/>
-          <a:lstStyle/>
-          <a:p>
-            <a:pPr algn="ctr"/>
-          </a:p>
-        </p:txBody>
-      </p:sp>
-      <p:sp>
-        <p:nvSpPr>
-          <p:cNvPr id="26" name="Rectangle 25"/>
-          <p:cNvSpPr/>
-          <p:nvPr/>
-        </p:nvSpPr>
-        <p:spPr>
-          <a:xfrm>
-            <a:off x="4228490" y="3273552"/>
-            <a:ext cx="3734714" cy="36576"/>
-          </a:xfrm>
-          <a:prstGeom prst="rect">
-            <a:avLst/>
-          </a:prstGeom>
-          <a:solidFill>
-            <a:srgbClr val="3B5174"/>
-          </a:solidFill>
-          <a:ln>
-            <a:noFill/>
-          </a:ln>
-          <a:effectLst/>
-        </p:spPr>
-        <p:style>
-          <a:lnRef idx="1">
-            <a:schemeClr val="accent1"/>
-          </a:lnRef>
-          <a:fillRef idx="3">
-            <a:schemeClr val="accent1"/>
-          </a:fillRef>
-          <a:effectRef idx="2">
-            <a:schemeClr val="accent1"/>
-          </a:effectRef>
-          <a:fontRef idx="minor">
-            <a:schemeClr val="lt1"/>
-          </a:fontRef>
-        </p:style>
-        <p:txBody>
-          <a:bodyPr rtlCol="0" anchor="ctr"/>
-          <a:lstStyle/>
-          <a:p>
-            <a:pPr algn="ctr"/>
-          </a:p>
-        </p:txBody>
-      </p:sp>
-      <p:sp>
-        <p:nvSpPr>
-          <p:cNvPr id="27" name="TextBox 26"/>
-          <p:cNvSpPr txBox="1"/>
-          <p:nvPr/>
-        </p:nvSpPr>
-        <p:spPr>
-          <a:xfrm>
-            <a:off x="4411370" y="3438144"/>
-            <a:ext cx="3368954" cy="219456"/>
-          </a:xfrm>
-          <a:prstGeom prst="rect">
-            <a:avLst/>
-          </a:prstGeom>
-          <a:noFill/>
-        </p:spPr>
-        <p:txBody>
-          <a:bodyPr wrap="square" anchor="t" lIns="36000" rIns="36000" tIns="18000" bIns="18000">
-            <a:spAutoFit/>
-          </a:bodyPr>
-          <a:lstStyle/>
-          <a:p>
-            <a:pPr algn="l"/>
-            <a:r>
-              <a:rPr sz="1120" b="1" i="0">
-                <a:solidFill>
-                  <a:srgbClr val="64748B"/>
-                </a:solidFill>
-                <a:latin typeface="Arial"/>
-              </a:rPr>
-              <a:t>STEP 2 . Thermal gelation</a:t>
-            </a:r>
-          </a:p>
-        </p:txBody>
-      </p:sp>
-      <p:sp>
-        <p:nvSpPr>
-          <p:cNvPr id="28" name="TextBox 27"/>
-          <p:cNvSpPr txBox="1"/>
-          <p:nvPr/>
-        </p:nvSpPr>
-        <p:spPr>
-          <a:xfrm>
-            <a:off x="4411370" y="3675888"/>
-            <a:ext cx="3368954" cy="329184"/>
-          </a:xfrm>
-          <a:prstGeom prst="rect">
-            <a:avLst/>
-          </a:prstGeom>
-          <a:noFill/>
-        </p:spPr>
-        <p:txBody>
-          <a:bodyPr wrap="square" anchor="t" lIns="36000" rIns="36000" tIns="18000" bIns="18000">
-            <a:spAutoFit/>
-          </a:bodyPr>
-          <a:lstStyle/>
-          <a:p>
-            <a:pPr algn="l"/>
-            <a:r>
-              <a:rPr sz="1680" b="1" i="0">
-                <a:solidFill>
-                  <a:srgbClr val="1E293B"/>
-                </a:solidFill>
-                <a:latin typeface="Arial"/>
-              </a:rPr>
-              <a:t>Heating (~50-60 C)</a:t>
-            </a:r>
-          </a:p>
-        </p:txBody>
-      </p:sp>
-      <p:sp>
-        <p:nvSpPr>
-          <p:cNvPr id="29" name="TextBox 28"/>
-          <p:cNvSpPr txBox="1"/>
-          <p:nvPr/>
-        </p:nvSpPr>
-        <p:spPr>
-          <a:xfrm>
-            <a:off x="4411370" y="4041648"/>
-            <a:ext cx="182880" cy="274320"/>
-          </a:xfrm>
-          <a:prstGeom prst="rect">
-            <a:avLst/>
-          </a:prstGeom>
-          <a:noFill/>
-        </p:spPr>
-        <p:txBody>
-          <a:bodyPr wrap="square" anchor="t" lIns="36000" rIns="36000" tIns="18000" bIns="18000">
-            <a:spAutoFit/>
-          </a:bodyPr>
-          <a:lstStyle/>
-          <a:p>
-            <a:pPr algn="l"/>
-            <a:r>
-              <a:rPr sz="1344" b="0" i="0">
-                <a:solidFill>
-                  <a:srgbClr val="3B5174"/>
-                </a:solidFill>
-                <a:latin typeface="Arial"/>
-              </a:rPr>
-              <a:t>•</a:t>
-            </a:r>
-          </a:p>
-        </p:txBody>
-      </p:sp>
-      <p:sp>
-        <p:nvSpPr>
-          <p:cNvPr id="30" name="TextBox 29"/>
-          <p:cNvSpPr txBox="1"/>
-          <p:nvPr/>
-        </p:nvSpPr>
-        <p:spPr>
-          <a:xfrm>
-            <a:off x="4612538" y="4041648"/>
-            <a:ext cx="3167786" cy="274320"/>
-          </a:xfrm>
-          <a:prstGeom prst="rect">
-            <a:avLst/>
-          </a:prstGeom>
-          <a:noFill/>
-        </p:spPr>
-        <p:txBody>
-          <a:bodyPr wrap="square" anchor="t" lIns="36000" rIns="36000" tIns="18000" bIns="18000">
-            <a:spAutoFit/>
-          </a:bodyPr>
-          <a:lstStyle/>
-          <a:p>
-            <a:pPr algn="l"/>
-            <a:r>
-              <a:rPr sz="1344" b="0" i="0">
-                <a:solidFill>
-                  <a:srgbClr val="475569"/>
-                </a:solidFill>
-                <a:latin typeface="Arial"/>
-              </a:rPr>
-              <a:t>MC LCST behavior boosts hydrophobic interaction</a:t>
-            </a:r>
-          </a:p>
-        </p:txBody>
-      </p:sp>
-      <p:sp>
-        <p:nvSpPr>
-          <p:cNvPr id="31" name="TextBox 30"/>
-          <p:cNvSpPr txBox="1"/>
-          <p:nvPr/>
-        </p:nvSpPr>
-        <p:spPr>
-          <a:xfrm>
-            <a:off x="4411370" y="4315968"/>
-            <a:ext cx="182880" cy="274320"/>
-          </a:xfrm>
-          <a:prstGeom prst="rect">
-            <a:avLst/>
-          </a:prstGeom>
-          <a:noFill/>
-        </p:spPr>
-        <p:txBody>
-          <a:bodyPr wrap="square" anchor="t" lIns="36000" rIns="36000" tIns="18000" bIns="18000">
-            <a:spAutoFit/>
-          </a:bodyPr>
-          <a:lstStyle/>
-          <a:p>
-            <a:pPr algn="l"/>
-            <a:r>
-              <a:rPr sz="1344" b="0" i="0">
-                <a:solidFill>
-                  <a:srgbClr val="3B5174"/>
-                </a:solidFill>
-                <a:latin typeface="Arial"/>
-              </a:rPr>
-              <a:t>•</a:t>
-            </a:r>
-          </a:p>
-        </p:txBody>
-      </p:sp>
-      <p:sp>
-        <p:nvSpPr>
-          <p:cNvPr id="32" name="TextBox 31"/>
-          <p:cNvSpPr txBox="1"/>
-          <p:nvPr/>
-        </p:nvSpPr>
-        <p:spPr>
-          <a:xfrm>
-            <a:off x="4612538" y="4315968"/>
-            <a:ext cx="3167786" cy="274320"/>
-          </a:xfrm>
-          <a:prstGeom prst="rect">
-            <a:avLst/>
-          </a:prstGeom>
-          <a:noFill/>
-        </p:spPr>
-        <p:txBody>
-          <a:bodyPr wrap="square" anchor="t" lIns="36000" rIns="36000" tIns="18000" bIns="18000">
-            <a:spAutoFit/>
-          </a:bodyPr>
-          <a:lstStyle/>
-          <a:p>
-            <a:pPr algn="l"/>
-            <a:r>
-              <a:rPr sz="1344" b="0" i="0">
-                <a:solidFill>
-                  <a:srgbClr val="475569"/>
-                </a:solidFill>
-                <a:latin typeface="Arial"/>
-              </a:rPr>
-              <a:t>Polymer chains assemble into a gel network</a:t>
-            </a:r>
-          </a:p>
-        </p:txBody>
-      </p:sp>
-      <p:sp>
-        <p:nvSpPr>
-          <p:cNvPr id="33" name="TextBox 32"/>
-          <p:cNvSpPr txBox="1"/>
-          <p:nvPr/>
-        </p:nvSpPr>
-        <p:spPr>
-          <a:xfrm>
-            <a:off x="4411370" y="4590288"/>
-            <a:ext cx="182880" cy="274320"/>
-          </a:xfrm>
-          <a:prstGeom prst="rect">
-            <a:avLst/>
-          </a:prstGeom>
-          <a:noFill/>
-        </p:spPr>
-        <p:txBody>
-          <a:bodyPr wrap="square" anchor="t" lIns="36000" rIns="36000" tIns="18000" bIns="18000">
-            <a:spAutoFit/>
-          </a:bodyPr>
-          <a:lstStyle/>
-          <a:p>
-            <a:pPr algn="l"/>
-            <a:r>
-              <a:rPr sz="1344" b="0" i="0">
-                <a:solidFill>
-                  <a:srgbClr val="3B5174"/>
-                </a:solidFill>
-                <a:latin typeface="Arial"/>
-              </a:rPr>
-              <a:t>•</a:t>
-            </a:r>
-          </a:p>
-        </p:txBody>
-      </p:sp>
-      <p:sp>
-        <p:nvSpPr>
-          <p:cNvPr id="34" name="TextBox 33"/>
-          <p:cNvSpPr txBox="1"/>
-          <p:nvPr/>
-        </p:nvSpPr>
-        <p:spPr>
-          <a:xfrm>
-            <a:off x="4612538" y="4590288"/>
-            <a:ext cx="3167786" cy="274320"/>
-          </a:xfrm>
-          <a:prstGeom prst="rect">
-            <a:avLst/>
-          </a:prstGeom>
-          <a:noFill/>
-        </p:spPr>
-        <p:txBody>
-          <a:bodyPr wrap="square" anchor="t" lIns="36000" rIns="36000" tIns="18000" bIns="18000">
-            <a:spAutoFit/>
-          </a:bodyPr>
-          <a:lstStyle/>
-          <a:p>
-            <a:pPr algn="l"/>
-            <a:r>
-              <a:rPr sz="1344" b="0" i="0">
-                <a:solidFill>
-                  <a:srgbClr val="475569"/>
-                </a:solidFill>
-                <a:latin typeface="Arial"/>
-              </a:rPr>
-              <a:t>Thermoreversible gelation (onset of fire protection)</a:t>
-            </a:r>
-          </a:p>
-        </p:txBody>
-      </p:sp>
-      <p:sp>
-        <p:nvSpPr>
-          <p:cNvPr id="35" name="Rounded Rectangle 34"/>
-          <p:cNvSpPr/>
-          <p:nvPr/>
-        </p:nvSpPr>
-        <p:spPr>
-          <a:xfrm>
-            <a:off x="8091220" y="3273552"/>
-            <a:ext cx="3734714" cy="2651760"/>
-          </a:xfrm>
-          <a:prstGeom prst="roundRect">
-            <a:avLst>
-              <a:gd name="adj" fmla="val 4000"/>
-            </a:avLst>
-          </a:prstGeom>
-          <a:solidFill>
-            <a:srgbClr val="F1F5F9"/>
-          </a:solidFill>
-          <a:ln w="6350">
-            <a:solidFill>
-              <a:srgbClr val="E2E8F0"/>
-            </a:solidFill>
-          </a:ln>
-          <a:effectLst/>
-        </p:spPr>
-        <p:style>
-          <a:lnRef idx="1">
-            <a:schemeClr val="accent1"/>
-          </a:lnRef>
-          <a:fillRef idx="3">
-            <a:schemeClr val="accent1"/>
-          </a:fillRef>
-          <a:effectRef idx="2">
-            <a:schemeClr val="accent1"/>
-          </a:effectRef>
-          <a:fontRef idx="minor">
-            <a:schemeClr val="lt1"/>
-          </a:fontRef>
-        </p:style>
-        <p:txBody>
-          <a:bodyPr rtlCol="0" anchor="ctr"/>
-          <a:lstStyle/>
-          <a:p>
-            <a:pPr algn="ctr"/>
-          </a:p>
-        </p:txBody>
-      </p:sp>
-      <p:sp>
-        <p:nvSpPr>
-          <p:cNvPr id="36" name="Rectangle 35"/>
-          <p:cNvSpPr/>
-          <p:nvPr/>
-        </p:nvSpPr>
-        <p:spPr>
-          <a:xfrm>
-            <a:off x="8091220" y="3273552"/>
-            <a:ext cx="3734714" cy="36576"/>
-          </a:xfrm>
-          <a:prstGeom prst="rect">
-            <a:avLst/>
-          </a:prstGeom>
-          <a:solidFill>
-            <a:srgbClr val="3B5174"/>
-          </a:solidFill>
-          <a:ln>
-            <a:noFill/>
-          </a:ln>
-          <a:effectLst/>
-        </p:spPr>
-        <p:style>
-          <a:lnRef idx="1">
-            <a:schemeClr val="accent1"/>
-          </a:lnRef>
-          <a:fillRef idx="3">
-            <a:schemeClr val="accent1"/>
-          </a:fillRef>
-          <a:effectRef idx="2">
-            <a:schemeClr val="accent1"/>
-          </a:effectRef>
-          <a:fontRef idx="minor">
-            <a:schemeClr val="lt1"/>
-          </a:fontRef>
-        </p:style>
-        <p:txBody>
-          <a:bodyPr rtlCol="0" anchor="ctr"/>
-          <a:lstStyle/>
-          <a:p>
-            <a:pPr algn="ctr"/>
-          </a:p>
-        </p:txBody>
-      </p:sp>
-      <p:sp>
-        <p:nvSpPr>
-          <p:cNvPr id="37" name="TextBox 36"/>
-          <p:cNvSpPr txBox="1"/>
-          <p:nvPr/>
-        </p:nvSpPr>
-        <p:spPr>
-          <a:xfrm>
-            <a:off x="8274100" y="3438144"/>
-            <a:ext cx="3368954" cy="219456"/>
-          </a:xfrm>
-          <a:prstGeom prst="rect">
-            <a:avLst/>
-          </a:prstGeom>
-          <a:noFill/>
-        </p:spPr>
-        <p:txBody>
-          <a:bodyPr wrap="square" anchor="t" lIns="36000" rIns="36000" tIns="18000" bIns="18000">
-            <a:spAutoFit/>
-          </a:bodyPr>
-          <a:lstStyle/>
-          <a:p>
-            <a:pPr algn="l"/>
-            <a:r>
-              <a:rPr sz="1120" b="1" i="0">
-                <a:solidFill>
-                  <a:srgbClr val="64748B"/>
-                </a:solidFill>
-                <a:latin typeface="Arial"/>
-              </a:rPr>
-              <a:t>STEP 3 . Aerogel</a:t>
-            </a:r>
-          </a:p>
-        </p:txBody>
-      </p:sp>
-      <p:sp>
-        <p:nvSpPr>
-          <p:cNvPr id="38" name="TextBox 37"/>
-          <p:cNvSpPr txBox="1"/>
-          <p:nvPr/>
-        </p:nvSpPr>
-        <p:spPr>
-          <a:xfrm>
-            <a:off x="8274100" y="3675888"/>
-            <a:ext cx="3368954" cy="329184"/>
-          </a:xfrm>
-          <a:prstGeom prst="rect">
-            <a:avLst/>
-          </a:prstGeom>
-          <a:noFill/>
-        </p:spPr>
-        <p:txBody>
-          <a:bodyPr wrap="square" anchor="t" lIns="36000" rIns="36000" tIns="18000" bIns="18000">
-            <a:spAutoFit/>
-          </a:bodyPr>
-          <a:lstStyle/>
-          <a:p>
-            <a:pPr algn="l"/>
-            <a:r>
-              <a:rPr sz="1680" b="1" i="0">
-                <a:solidFill>
-                  <a:srgbClr val="1E293B"/>
-                </a:solidFill>
-                <a:latin typeface="Arial"/>
-              </a:rPr>
-              <a:t>Flame (hundreds C)</a:t>
-            </a:r>
-          </a:p>
-        </p:txBody>
-      </p:sp>
-      <p:sp>
-        <p:nvSpPr>
-          <p:cNvPr id="39" name="TextBox 38"/>
-          <p:cNvSpPr txBox="1"/>
-          <p:nvPr/>
-        </p:nvSpPr>
-        <p:spPr>
-          <a:xfrm>
-            <a:off x="8274100" y="4041648"/>
-            <a:ext cx="182880" cy="274320"/>
-          </a:xfrm>
-          <a:prstGeom prst="rect">
-            <a:avLst/>
-          </a:prstGeom>
-          <a:noFill/>
-        </p:spPr>
-        <p:txBody>
-          <a:bodyPr wrap="square" anchor="t" lIns="36000" rIns="36000" tIns="18000" bIns="18000">
-            <a:spAutoFit/>
-          </a:bodyPr>
-          <a:lstStyle/>
-          <a:p>
-            <a:pPr algn="l"/>
-            <a:r>
-              <a:rPr sz="1344" b="0" i="0">
-                <a:solidFill>
-                  <a:srgbClr val="3B5174"/>
-                </a:solidFill>
-                <a:latin typeface="Arial"/>
-              </a:rPr>
-              <a:t>•</a:t>
-            </a:r>
-          </a:p>
-        </p:txBody>
-      </p:sp>
-      <p:sp>
-        <p:nvSpPr>
-          <p:cNvPr id="40" name="TextBox 39"/>
-          <p:cNvSpPr txBox="1"/>
-          <p:nvPr/>
-        </p:nvSpPr>
-        <p:spPr>
-          <a:xfrm>
-            <a:off x="8475268" y="4041648"/>
-            <a:ext cx="3167786" cy="274320"/>
-          </a:xfrm>
-          <a:prstGeom prst="rect">
-            <a:avLst/>
-          </a:prstGeom>
-          <a:noFill/>
-        </p:spPr>
-        <p:txBody>
-          <a:bodyPr wrap="square" anchor="t" lIns="36000" rIns="36000" tIns="18000" bIns="18000">
-            <a:spAutoFit/>
-          </a:bodyPr>
-          <a:lstStyle/>
-          <a:p>
-            <a:pPr algn="l"/>
-            <a:r>
-              <a:rPr sz="1344" b="0" i="0">
-                <a:solidFill>
-                  <a:srgbClr val="475569"/>
-                </a:solidFill>
-                <a:latin typeface="Arial"/>
-              </a:rPr>
-              <a:t>Rapid water evaporation / dehydration</a:t>
-            </a:r>
-          </a:p>
-        </p:txBody>
-      </p:sp>
-      <p:sp>
-        <p:nvSpPr>
-          <p:cNvPr id="41" name="TextBox 40"/>
-          <p:cNvSpPr txBox="1"/>
-          <p:nvPr/>
-        </p:nvSpPr>
-        <p:spPr>
-          <a:xfrm>
-            <a:off x="8274100" y="4315968"/>
-            <a:ext cx="182880" cy="274320"/>
-          </a:xfrm>
-          <a:prstGeom prst="rect">
-            <a:avLst/>
-          </a:prstGeom>
-          <a:noFill/>
-        </p:spPr>
-        <p:txBody>
-          <a:bodyPr wrap="square" anchor="t" lIns="36000" rIns="36000" tIns="18000" bIns="18000">
-            <a:spAutoFit/>
-          </a:bodyPr>
-          <a:lstStyle/>
-          <a:p>
-            <a:pPr algn="l"/>
-            <a:r>
-              <a:rPr sz="1344" b="0" i="0">
-                <a:solidFill>
-                  <a:srgbClr val="3B5174"/>
-                </a:solidFill>
-                <a:latin typeface="Arial"/>
-              </a:rPr>
-              <a:t>•</a:t>
-            </a:r>
-          </a:p>
-        </p:txBody>
-      </p:sp>
-      <p:sp>
-        <p:nvSpPr>
-          <p:cNvPr id="42" name="TextBox 41"/>
-          <p:cNvSpPr txBox="1"/>
-          <p:nvPr/>
-        </p:nvSpPr>
-        <p:spPr>
-          <a:xfrm>
-            <a:off x="8475268" y="4315968"/>
-            <a:ext cx="3167786" cy="274320"/>
-          </a:xfrm>
-          <a:prstGeom prst="rect">
-            <a:avLst/>
-          </a:prstGeom>
-          <a:noFill/>
-        </p:spPr>
-        <p:txBody>
-          <a:bodyPr wrap="square" anchor="t" lIns="36000" rIns="36000" tIns="18000" bIns="18000">
-            <a:spAutoFit/>
-          </a:bodyPr>
-          <a:lstStyle/>
-          <a:p>
-            <a:pPr algn="l"/>
-            <a:r>
-              <a:rPr sz="1344" b="0" i="0">
-                <a:solidFill>
-                  <a:srgbClr val="475569"/>
-                </a:solidFill>
-                <a:latin typeface="Arial"/>
-              </a:rPr>
-              <a:t>CSP sinters into a 3D porous skeleton</a:t>
-            </a:r>
-          </a:p>
-        </p:txBody>
-      </p:sp>
-      <p:sp>
-        <p:nvSpPr>
-          <p:cNvPr id="43" name="TextBox 42"/>
-          <p:cNvSpPr txBox="1"/>
-          <p:nvPr/>
-        </p:nvSpPr>
-        <p:spPr>
-          <a:xfrm>
-            <a:off x="8274100" y="4590288"/>
-            <a:ext cx="182880" cy="274320"/>
-          </a:xfrm>
-          <a:prstGeom prst="rect">
-            <a:avLst/>
-          </a:prstGeom>
-          <a:noFill/>
-        </p:spPr>
-        <p:txBody>
-          <a:bodyPr wrap="square" anchor="t" lIns="36000" rIns="36000" tIns="18000" bIns="18000">
-            <a:spAutoFit/>
-          </a:bodyPr>
-          <a:lstStyle/>
-          <a:p>
-            <a:pPr algn="l"/>
-            <a:r>
-              <a:rPr sz="1344" b="0" i="0">
-                <a:solidFill>
-                  <a:srgbClr val="3B5174"/>
-                </a:solidFill>
-                <a:latin typeface="Arial"/>
-              </a:rPr>
-              <a:t>•</a:t>
-            </a:r>
-          </a:p>
-        </p:txBody>
-      </p:sp>
-      <p:sp>
-        <p:nvSpPr>
-          <p:cNvPr id="44" name="TextBox 43"/>
-          <p:cNvSpPr txBox="1"/>
-          <p:nvPr/>
-        </p:nvSpPr>
-        <p:spPr>
-          <a:xfrm>
-            <a:off x="8475268" y="4590288"/>
-            <a:ext cx="3167786" cy="274320"/>
-          </a:xfrm>
-          <a:prstGeom prst="rect">
-            <a:avLst/>
-          </a:prstGeom>
-          <a:noFill/>
-        </p:spPr>
-        <p:txBody>
-          <a:bodyPr wrap="square" anchor="t" lIns="36000" rIns="36000" tIns="18000" bIns="18000">
-            <a:spAutoFit/>
-          </a:bodyPr>
-          <a:lstStyle/>
-          <a:p>
-            <a:pPr algn="l"/>
-            <a:r>
-              <a:rPr sz="1344" b="0" i="0">
-                <a:solidFill>
-                  <a:srgbClr val="475569"/>
-                </a:solidFill>
-                <a:latin typeface="Arial"/>
-              </a:rPr>
-              <a:t>Insulating silica aerogel layer forms</a:t>
+              <a:t>37 / 37</a:t>
             </a:r>
           </a:p>
         </p:txBody>
@@ -50523,7 +48866,7 @@
                 </a:solidFill>
                 <a:latin typeface="Arial"/>
               </a:rPr>
-              <a:t>4 / 38</a:t>
+              <a:t>4 / 37</a:t>
             </a:r>
           </a:p>
         </p:txBody>
@@ -50672,7 +49015,7 @@
                 </a:solidFill>
                 <a:latin typeface="Arial"/>
               </a:rPr>
-              <a:t>Driven by climate change and prolonged drought</a:t>
+              <a:t>Driven by climate change and fuel accumulation (US/EU/AU)</a:t>
             </a:r>
           </a:p>
         </p:txBody>
@@ -50944,7 +49287,7 @@
                 </a:solidFill>
                 <a:latin typeface="Arial"/>
               </a:rPr>
-              <a:t>Extended dry and high-wind seasons mean</a:t>
+              <a:t>Devastating loss to economy, infrastructure, natural</a:t>
             </a:r>
           </a:p>
           <a:p>
@@ -50956,7 +49299,7 @@
                 </a:solidFill>
                 <a:latin typeface="Arial"/>
               </a:rPr>
-              <a:t>conventional firefighting strategies can no longer keep pace</a:t>
+              <a:t>resources and WUI residents — eco-friendly retardants are urgently needed</a:t>
             </a:r>
           </a:p>
         </p:txBody>
@@ -51728,7 +50071,7 @@
                 </a:solidFill>
                 <a:latin typeface="Arial"/>
               </a:rPr>
-              <a:t>5 / 38</a:t>
+              <a:t>5 / 37</a:t>
             </a:r>
           </a:p>
         </p:txBody>
@@ -52973,7 +51316,7 @@
                 </a:solidFill>
                 <a:latin typeface="Arial"/>
               </a:rPr>
-              <a:t>Existing Wildfire Protection Methods and Their Fundamental Limitations</a:t>
+              <a:t>Existing Wildfire Suppressants and Their Limits (USFS 3 Categories)</a:t>
             </a:r>
           </a:p>
         </p:txBody>
@@ -53052,7 +51395,7 @@
                 </a:solidFill>
                 <a:latin typeface="Arial"/>
               </a:rPr>
-              <a:t>6 / 38</a:t>
+              <a:t>6 / 37</a:t>
             </a:r>
           </a:p>
         </p:txBody>
@@ -53066,7 +51409,7 @@
         <p:spPr>
           <a:xfrm>
             <a:off x="365760" y="859536"/>
-            <a:ext cx="2741599" cy="5248656"/>
+            <a:ext cx="3685946" cy="4974336"/>
           </a:xfrm>
           <a:prstGeom prst="roundRect">
             <a:avLst>
@@ -53114,7 +51457,7 @@
         <p:spPr>
           <a:xfrm>
             <a:off x="365760" y="859536"/>
-            <a:ext cx="2741599" cy="36576"/>
+            <a:ext cx="3685946" cy="45720"/>
           </a:xfrm>
           <a:prstGeom prst="rect">
             <a:avLst/>
@@ -53151,27 +51494,58 @@
       </p:sp>
       <p:sp>
         <p:nvSpPr>
-          <p:cNvPr id="12" name="Rounded Rectangle 11"/>
+          <p:cNvPr id="12" name="TextBox 11"/>
+          <p:cNvSpPr txBox="1"/>
+          <p:nvPr/>
+        </p:nvSpPr>
+        <p:spPr>
+          <a:xfrm>
+            <a:off x="566928" y="1133856"/>
+            <a:ext cx="3283610" cy="420624"/>
+          </a:xfrm>
+          <a:prstGeom prst="rect">
+            <a:avLst/>
+          </a:prstGeom>
+          <a:noFill/>
+        </p:spPr>
+        <p:txBody>
+          <a:bodyPr wrap="square" anchor="t" lIns="36000" rIns="36000" tIns="18000" bIns="18000">
+            <a:spAutoFit/>
+          </a:bodyPr>
+          <a:lstStyle/>
+          <a:p>
+            <a:pPr algn="l"/>
+            <a:r>
+              <a:rPr sz="1792" b="1" i="0">
+                <a:solidFill>
+                  <a:srgbClr val="1E293B"/>
+                </a:solidFill>
+                <a:latin typeface="Arial"/>
+              </a:rPr>
+              <a:t>Long-term retardant</a:t>
+            </a:r>
+          </a:p>
+        </p:txBody>
+      </p:sp>
+      <p:sp>
+        <p:nvSpPr>
+          <p:cNvPr id="13" name="Rectangle 12"/>
           <p:cNvSpPr/>
           <p:nvPr/>
         </p:nvSpPr>
         <p:spPr>
           <a:xfrm>
-            <a:off x="475488" y="969264"/>
-            <a:ext cx="2522143" cy="2514600"/>
-          </a:xfrm>
-          <a:prstGeom prst="roundRect">
-            <a:avLst>
-              <a:gd name="adj" fmla="val 3000"/>
-            </a:avLst>
+            <a:off x="566928" y="1865376"/>
+            <a:ext cx="3283610" cy="13716"/>
+          </a:xfrm>
+          <a:prstGeom prst="rect">
+            <a:avLst/>
           </a:prstGeom>
           <a:solidFill>
-            <a:srgbClr val="F5F8FC"/>
+            <a:srgbClr val="E2E8F0"/>
           </a:solidFill>
-          <a:ln w="8890">
-            <a:solidFill>
-              <a:srgbClr val="C0D0E0"/>
-            </a:solidFill>
+          <a:ln>
+            <a:noFill/>
           </a:ln>
           <a:effectLst/>
         </p:spPr>
@@ -53199,70 +51573,35 @@
       </p:sp>
       <p:sp>
         <p:nvSpPr>
-          <p:cNvPr id="13" name="TextBox 12"/>
-          <p:cNvSpPr txBox="1"/>
-          <p:nvPr/>
-        </p:nvSpPr>
-        <p:spPr>
-          <a:xfrm>
-            <a:off x="475488" y="969264"/>
-            <a:ext cx="2522143" cy="2514600"/>
-          </a:xfrm>
-          <a:prstGeom prst="rect">
-            <a:avLst/>
-          </a:prstGeom>
-          <a:noFill/>
-        </p:spPr>
-        <p:txBody>
-          <a:bodyPr wrap="square" anchor="ctr" lIns="36000" rIns="36000" tIns="18000" bIns="18000">
-            <a:spAutoFit/>
-          </a:bodyPr>
-          <a:lstStyle/>
-          <a:p>
-            <a:pPr algn="ctr"/>
-            <a:r>
-              <a:rPr sz="1232" b="0" i="0">
-                <a:solidFill>
-                  <a:srgbClr val="AAB4C0"/>
-                </a:solidFill>
-                <a:latin typeface="Arial"/>
-              </a:rPr>
-              <a:t>(photo)</a:t>
-            </a:r>
-          </a:p>
-        </p:txBody>
-      </p:sp>
-      <p:sp>
-        <p:nvSpPr>
           <p:cNvPr id="14" name="TextBox 13"/>
           <p:cNvSpPr txBox="1"/>
           <p:nvPr/>
         </p:nvSpPr>
         <p:spPr>
           <a:xfrm>
-            <a:off x="457200" y="3611880"/>
-            <a:ext cx="2558719" cy="310896"/>
-          </a:xfrm>
-          <a:prstGeom prst="rect">
-            <a:avLst/>
-          </a:prstGeom>
-          <a:noFill/>
-        </p:spPr>
-        <p:txBody>
-          <a:bodyPr wrap="square" anchor="t" lIns="36000" rIns="36000" tIns="18000" bIns="18000">
-            <a:spAutoFit/>
-          </a:bodyPr>
-          <a:lstStyle/>
-          <a:p>
-            <a:pPr algn="ctr"/>
-            <a:r>
-              <a:rPr sz="1568" b="1" i="0">
-                <a:solidFill>
-                  <a:srgbClr val="1E293B"/>
-                </a:solidFill>
-                <a:latin typeface="Arial"/>
-              </a:rPr>
-              <a:t>Water only</a:t>
+            <a:off x="566928" y="2011680"/>
+            <a:ext cx="3283610" cy="219456"/>
+          </a:xfrm>
+          <a:prstGeom prst="rect">
+            <a:avLst/>
+          </a:prstGeom>
+          <a:noFill/>
+        </p:spPr>
+        <p:txBody>
+          <a:bodyPr wrap="square" anchor="t" lIns="36000" rIns="36000" tIns="18000" bIns="18000">
+            <a:spAutoFit/>
+          </a:bodyPr>
+          <a:lstStyle/>
+          <a:p>
+            <a:pPr algn="l"/>
+            <a:r>
+              <a:rPr sz="1120" b="1" i="0">
+                <a:solidFill>
+                  <a:srgbClr val="64748B"/>
+                </a:solidFill>
+                <a:latin typeface="Arial"/>
+              </a:rPr>
+              <a:t>Composition</a:t>
             </a:r>
           </a:p>
         </p:txBody>
@@ -53275,90 +51614,183 @@
         </p:nvSpPr>
         <p:spPr>
           <a:xfrm>
-            <a:off x="457200" y="3922776"/>
-            <a:ext cx="2558719" cy="237744"/>
-          </a:xfrm>
-          <a:prstGeom prst="rect">
-            <a:avLst/>
-          </a:prstGeom>
-          <a:noFill/>
-        </p:spPr>
-        <p:txBody>
-          <a:bodyPr wrap="square" anchor="t" lIns="36000" rIns="36000" tIns="18000" bIns="18000">
-            <a:spAutoFit/>
-          </a:bodyPr>
-          <a:lstStyle/>
-          <a:p>
-            <a:pPr algn="ctr"/>
-            <a:r>
-              <a:rPr sz="1120" b="0" i="0">
+            <a:off x="566928" y="2231136"/>
+            <a:ext cx="3283610" cy="475488"/>
+          </a:xfrm>
+          <a:prstGeom prst="rect">
+            <a:avLst/>
+          </a:prstGeom>
+          <a:noFill/>
+        </p:spPr>
+        <p:txBody>
+          <a:bodyPr wrap="square" anchor="t" lIns="36000" rIns="36000" tIns="18000" bIns="18000">
+            <a:spAutoFit/>
+          </a:bodyPr>
+          <a:lstStyle/>
+          <a:p>
+            <a:pPr algn="l"/>
+            <a:r>
+              <a:rPr sz="1344" b="0" i="0">
+                <a:solidFill>
+                  <a:srgbClr val="475569"/>
+                </a:solidFill>
+                <a:latin typeface="Arial"/>
+              </a:rPr>
+              <a:t>Chemicals such as ammonium phosphate</a:t>
+            </a:r>
+          </a:p>
+        </p:txBody>
+      </p:sp>
+      <p:sp>
+        <p:nvSpPr>
+          <p:cNvPr id="16" name="TextBox 15"/>
+          <p:cNvSpPr txBox="1"/>
+          <p:nvPr/>
+        </p:nvSpPr>
+        <p:spPr>
+          <a:xfrm>
+            <a:off x="566928" y="2743200"/>
+            <a:ext cx="3283610" cy="219456"/>
+          </a:xfrm>
+          <a:prstGeom prst="rect">
+            <a:avLst/>
+          </a:prstGeom>
+          <a:noFill/>
+        </p:spPr>
+        <p:txBody>
+          <a:bodyPr wrap="square" anchor="t" lIns="36000" rIns="36000" tIns="18000" bIns="18000">
+            <a:spAutoFit/>
+          </a:bodyPr>
+          <a:lstStyle/>
+          <a:p>
+            <a:pPr algn="l"/>
+            <a:r>
+              <a:rPr sz="1120" b="1" i="0">
                 <a:solidFill>
                   <a:srgbClr val="64748B"/>
                 </a:solidFill>
                 <a:latin typeface="Arial"/>
               </a:rPr>
-              <a:t>H₂O</a:t>
-            </a:r>
-          </a:p>
-        </p:txBody>
-      </p:sp>
-      <p:sp>
-        <p:nvSpPr>
-          <p:cNvPr id="16" name="TextBox 15"/>
-          <p:cNvSpPr txBox="1"/>
-          <p:nvPr/>
-        </p:nvSpPr>
-        <p:spPr>
-          <a:xfrm>
-            <a:off x="457200" y="4197096"/>
-            <a:ext cx="2558719" cy="1837944"/>
-          </a:xfrm>
-          <a:prstGeom prst="rect">
-            <a:avLst/>
-          </a:prstGeom>
-          <a:noFill/>
-        </p:spPr>
-        <p:txBody>
-          <a:bodyPr wrap="square" anchor="t" lIns="36000" rIns="36000" tIns="18000" bIns="18000">
-            <a:spAutoFit/>
-          </a:bodyPr>
-          <a:lstStyle/>
-          <a:p>
-            <a:pPr algn="ctr"/>
+              <a:t>Effect / retention</a:t>
+            </a:r>
+          </a:p>
+        </p:txBody>
+      </p:sp>
+      <p:sp>
+        <p:nvSpPr>
+          <p:cNvPr id="17" name="TextBox 16"/>
+          <p:cNvSpPr txBox="1"/>
+          <p:nvPr/>
+        </p:nvSpPr>
+        <p:spPr>
+          <a:xfrm>
+            <a:off x="566928" y="2962656"/>
+            <a:ext cx="3283610" cy="475488"/>
+          </a:xfrm>
+          <a:prstGeom prst="rect">
+            <a:avLst/>
+          </a:prstGeom>
+          <a:noFill/>
+        </p:spPr>
+        <p:txBody>
+          <a:bodyPr wrap="square" anchor="t" lIns="36000" rIns="36000" tIns="18000" bIns="18000">
+            <a:spAutoFit/>
+          </a:bodyPr>
+          <a:lstStyle/>
+          <a:p>
+            <a:pPr algn="l"/>
             <a:r>
               <a:rPr sz="1344" b="0" i="0">
                 <a:solidFill>
+                  <a:srgbClr val="475569"/>
+                </a:solidFill>
+                <a:latin typeface="Arial"/>
+              </a:rPr>
+              <a:t>Effective as long as residue remains</a:t>
+            </a:r>
+          </a:p>
+        </p:txBody>
+      </p:sp>
+      <p:sp>
+        <p:nvSpPr>
+          <p:cNvPr id="18" name="TextBox 17"/>
+          <p:cNvSpPr txBox="1"/>
+          <p:nvPr/>
+        </p:nvSpPr>
+        <p:spPr>
+          <a:xfrm>
+            <a:off x="566928" y="3493008"/>
+            <a:ext cx="3283610" cy="219456"/>
+          </a:xfrm>
+          <a:prstGeom prst="rect">
+            <a:avLst/>
+          </a:prstGeom>
+          <a:noFill/>
+        </p:spPr>
+        <p:txBody>
+          <a:bodyPr wrap="square" anchor="t" lIns="36000" rIns="36000" tIns="18000" bIns="18000">
+            <a:spAutoFit/>
+          </a:bodyPr>
+          <a:lstStyle/>
+          <a:p>
+            <a:pPr algn="l"/>
+            <a:r>
+              <a:rPr sz="1120" b="1" i="0">
+                <a:solidFill>
                   <a:srgbClr val="A05656"/>
                 </a:solidFill>
                 <a:latin typeface="Arial"/>
               </a:rPr>
-              <a:t>Runs off and evaporates</a:t>
-            </a:r>
-          </a:p>
-          <a:p>
-            <a:pPr algn="ctr"/>
-            <a:r>
-              <a:rPr sz="1344" b="0" i="0">
+              <a:t>Limitation</a:t>
+            </a:r>
+          </a:p>
+        </p:txBody>
+      </p:sp>
+      <p:sp>
+        <p:nvSpPr>
+          <p:cNvPr id="19" name="TextBox 18"/>
+          <p:cNvSpPr txBox="1"/>
+          <p:nvPr/>
+        </p:nvSpPr>
+        <p:spPr>
+          <a:xfrm>
+            <a:off x="566928" y="3712464"/>
+            <a:ext cx="3283610" cy="1956816"/>
+          </a:xfrm>
+          <a:prstGeom prst="rect">
+            <a:avLst/>
+          </a:prstGeom>
+          <a:noFill/>
+        </p:spPr>
+        <p:txBody>
+          <a:bodyPr wrap="square" anchor="t" lIns="36000" rIns="36000" tIns="18000" bIns="18000">
+            <a:spAutoFit/>
+          </a:bodyPr>
+          <a:lstStyle/>
+          <a:p>
+            <a:pPr algn="l"/>
+            <a:r>
+              <a:rPr sz="1344" b="1" i="0">
                 <a:solidFill>
                   <a:srgbClr val="A05656"/>
                 </a:solidFill>
                 <a:latin typeface="Arial"/>
               </a:rPr>
-              <a:t>instantly — no persistence</a:t>
-            </a:r>
-          </a:p>
-        </p:txBody>
-      </p:sp>
-      <p:sp>
-        <p:nvSpPr>
-          <p:cNvPr id="17" name="Rounded Rectangle 16"/>
+              <a:t>Chemical residue left on the target</a:t>
+            </a:r>
+          </a:p>
+        </p:txBody>
+      </p:sp>
+      <p:sp>
+        <p:nvSpPr>
+          <p:cNvPr id="20" name="Rounded Rectangle 19"/>
           <p:cNvSpPr/>
           <p:nvPr/>
         </p:nvSpPr>
         <p:spPr>
           <a:xfrm>
-            <a:off x="3271951" y="859536"/>
-            <a:ext cx="2741599" cy="5248656"/>
+            <a:off x="4252874" y="859536"/>
+            <a:ext cx="3685946" cy="4974336"/>
           </a:xfrm>
           <a:prstGeom prst="roundRect">
             <a:avLst>
@@ -53399,14 +51831,14 @@
       </p:sp>
       <p:sp>
         <p:nvSpPr>
-          <p:cNvPr id="18" name="Rectangle 17"/>
+          <p:cNvPr id="21" name="Rectangle 20"/>
           <p:cNvSpPr/>
           <p:nvPr/>
         </p:nvSpPr>
         <p:spPr>
           <a:xfrm>
-            <a:off x="3271951" y="859536"/>
-            <a:ext cx="2741599" cy="36576"/>
+            <a:off x="4252874" y="859536"/>
+            <a:ext cx="3685946" cy="45720"/>
           </a:xfrm>
           <a:prstGeom prst="rect">
             <a:avLst/>
@@ -53443,262 +51875,49 @@
       </p:sp>
       <p:sp>
         <p:nvSpPr>
-          <p:cNvPr id="19" name="Rounded Rectangle 18"/>
+          <p:cNvPr id="22" name="TextBox 21"/>
+          <p:cNvSpPr txBox="1"/>
+          <p:nvPr/>
+        </p:nvSpPr>
+        <p:spPr>
+          <a:xfrm>
+            <a:off x="4454042" y="1133856"/>
+            <a:ext cx="3283610" cy="420624"/>
+          </a:xfrm>
+          <a:prstGeom prst="rect">
+            <a:avLst/>
+          </a:prstGeom>
+          <a:noFill/>
+        </p:spPr>
+        <p:txBody>
+          <a:bodyPr wrap="square" anchor="t" lIns="36000" rIns="36000" tIns="18000" bIns="18000">
+            <a:spAutoFit/>
+          </a:bodyPr>
+          <a:lstStyle/>
+          <a:p>
+            <a:pPr algn="l"/>
+            <a:r>
+              <a:rPr sz="1792" b="1" i="0">
+                <a:solidFill>
+                  <a:srgbClr val="1E293B"/>
+                </a:solidFill>
+                <a:latin typeface="Arial"/>
+              </a:rPr>
+              <a:t>Foam suppressant</a:t>
+            </a:r>
+          </a:p>
+        </p:txBody>
+      </p:sp>
+      <p:sp>
+        <p:nvSpPr>
+          <p:cNvPr id="23" name="Rectangle 22"/>
           <p:cNvSpPr/>
           <p:nvPr/>
         </p:nvSpPr>
         <p:spPr>
           <a:xfrm>
-            <a:off x="3381679" y="969264"/>
-            <a:ext cx="2522143" cy="2514600"/>
-          </a:xfrm>
-          <a:prstGeom prst="roundRect">
-            <a:avLst>
-              <a:gd name="adj" fmla="val 3000"/>
-            </a:avLst>
-          </a:prstGeom>
-          <a:solidFill>
-            <a:srgbClr val="F5F8FC"/>
-          </a:solidFill>
-          <a:ln w="8890">
-            <a:solidFill>
-              <a:srgbClr val="C0D0E0"/>
-            </a:solidFill>
-          </a:ln>
-          <a:effectLst/>
-        </p:spPr>
-        <p:style>
-          <a:lnRef idx="1">
-            <a:schemeClr val="accent1"/>
-          </a:lnRef>
-          <a:fillRef idx="3">
-            <a:schemeClr val="accent1"/>
-          </a:fillRef>
-          <a:effectRef idx="2">
-            <a:schemeClr val="accent1"/>
-          </a:effectRef>
-          <a:fontRef idx="minor">
-            <a:schemeClr val="lt1"/>
-          </a:fontRef>
-        </p:style>
-        <p:txBody>
-          <a:bodyPr rtlCol="0" anchor="ctr"/>
-          <a:lstStyle/>
-          <a:p>
-            <a:pPr algn="ctr"/>
-          </a:p>
-        </p:txBody>
-      </p:sp>
-      <p:sp>
-        <p:nvSpPr>
-          <p:cNvPr id="20" name="TextBox 19"/>
-          <p:cNvSpPr txBox="1"/>
-          <p:nvPr/>
-        </p:nvSpPr>
-        <p:spPr>
-          <a:xfrm>
-            <a:off x="3381679" y="969264"/>
-            <a:ext cx="2522143" cy="2514600"/>
-          </a:xfrm>
-          <a:prstGeom prst="rect">
-            <a:avLst/>
-          </a:prstGeom>
-          <a:noFill/>
-        </p:spPr>
-        <p:txBody>
-          <a:bodyPr wrap="square" anchor="ctr" lIns="36000" rIns="36000" tIns="18000" bIns="18000">
-            <a:spAutoFit/>
-          </a:bodyPr>
-          <a:lstStyle/>
-          <a:p>
-            <a:pPr algn="ctr"/>
-            <a:r>
-              <a:rPr sz="1232" b="0" i="0">
-                <a:solidFill>
-                  <a:srgbClr val="AAB4C0"/>
-                </a:solidFill>
-                <a:latin typeface="Arial"/>
-              </a:rPr>
-              <a:t>(photo)</a:t>
-            </a:r>
-          </a:p>
-        </p:txBody>
-      </p:sp>
-      <p:sp>
-        <p:nvSpPr>
-          <p:cNvPr id="21" name="TextBox 20"/>
-          <p:cNvSpPr txBox="1"/>
-          <p:nvPr/>
-        </p:nvSpPr>
-        <p:spPr>
-          <a:xfrm>
-            <a:off x="3363391" y="3611880"/>
-            <a:ext cx="2558719" cy="310896"/>
-          </a:xfrm>
-          <a:prstGeom prst="rect">
-            <a:avLst/>
-          </a:prstGeom>
-          <a:noFill/>
-        </p:spPr>
-        <p:txBody>
-          <a:bodyPr wrap="square" anchor="t" lIns="36000" rIns="36000" tIns="18000" bIns="18000">
-            <a:spAutoFit/>
-          </a:bodyPr>
-          <a:lstStyle/>
-          <a:p>
-            <a:pPr algn="ctr"/>
-            <a:r>
-              <a:rPr sz="1568" b="1" i="0">
-                <a:solidFill>
-                  <a:srgbClr val="1E293B"/>
-                </a:solidFill>
-                <a:latin typeface="Arial"/>
-              </a:rPr>
-              <a:t>Phos-Chek</a:t>
-            </a:r>
-          </a:p>
-        </p:txBody>
-      </p:sp>
-      <p:sp>
-        <p:nvSpPr>
-          <p:cNvPr id="22" name="TextBox 21"/>
-          <p:cNvSpPr txBox="1"/>
-          <p:nvPr/>
-        </p:nvSpPr>
-        <p:spPr>
-          <a:xfrm>
-            <a:off x="3363391" y="3922776"/>
-            <a:ext cx="2558719" cy="237744"/>
-          </a:xfrm>
-          <a:prstGeom prst="rect">
-            <a:avLst/>
-          </a:prstGeom>
-          <a:noFill/>
-        </p:spPr>
-        <p:txBody>
-          <a:bodyPr wrap="square" anchor="t" lIns="36000" rIns="36000" tIns="18000" bIns="18000">
-            <a:spAutoFit/>
-          </a:bodyPr>
-          <a:lstStyle/>
-          <a:p>
-            <a:pPr algn="ctr"/>
-            <a:r>
-              <a:rPr sz="1120" b="0" i="0">
-                <a:solidFill>
-                  <a:srgbClr val="64748B"/>
-                </a:solidFill>
-                <a:latin typeface="Arial"/>
-              </a:rPr>
-              <a:t>Ammonium phosphate</a:t>
-            </a:r>
-          </a:p>
-        </p:txBody>
-      </p:sp>
-      <p:sp>
-        <p:nvSpPr>
-          <p:cNvPr id="23" name="TextBox 22"/>
-          <p:cNvSpPr txBox="1"/>
-          <p:nvPr/>
-        </p:nvSpPr>
-        <p:spPr>
-          <a:xfrm>
-            <a:off x="3363391" y="4197096"/>
-            <a:ext cx="2558719" cy="1837944"/>
-          </a:xfrm>
-          <a:prstGeom prst="rect">
-            <a:avLst/>
-          </a:prstGeom>
-          <a:noFill/>
-        </p:spPr>
-        <p:txBody>
-          <a:bodyPr wrap="square" anchor="t" lIns="36000" rIns="36000" tIns="18000" bIns="18000">
-            <a:spAutoFit/>
-          </a:bodyPr>
-          <a:lstStyle/>
-          <a:p>
-            <a:pPr algn="ctr"/>
-            <a:r>
-              <a:rPr sz="1344" b="0" i="0">
-                <a:solidFill>
-                  <a:srgbClr val="A05656"/>
-                </a:solidFill>
-                <a:latin typeface="Arial"/>
-              </a:rPr>
-              <a:t>Chemical residue persists</a:t>
-            </a:r>
-          </a:p>
-          <a:p>
-            <a:pPr algn="ctr"/>
-            <a:r>
-              <a:rPr sz="1344" b="0" i="0">
-                <a:solidFill>
-                  <a:srgbClr val="A05656"/>
-                </a:solidFill>
-                <a:latin typeface="Arial"/>
-              </a:rPr>
-              <a:t>in soil and water systems</a:t>
-            </a:r>
-          </a:p>
-        </p:txBody>
-      </p:sp>
-      <p:sp>
-        <p:nvSpPr>
-          <p:cNvPr id="24" name="Rounded Rectangle 23"/>
-          <p:cNvSpPr/>
-          <p:nvPr/>
-        </p:nvSpPr>
-        <p:spPr>
-          <a:xfrm>
-            <a:off x="6178143" y="859536"/>
-            <a:ext cx="2741599" cy="5248656"/>
-          </a:xfrm>
-          <a:prstGeom prst="roundRect">
-            <a:avLst>
-              <a:gd name="adj" fmla="val 4000"/>
-            </a:avLst>
-          </a:prstGeom>
-          <a:solidFill>
-            <a:srgbClr val="F1F5F9"/>
-          </a:solidFill>
-          <a:ln w="6350">
-            <a:solidFill>
-              <a:srgbClr val="E2E8F0"/>
-            </a:solidFill>
-          </a:ln>
-          <a:effectLst/>
-        </p:spPr>
-        <p:style>
-          <a:lnRef idx="1">
-            <a:schemeClr val="accent1"/>
-          </a:lnRef>
-          <a:fillRef idx="3">
-            <a:schemeClr val="accent1"/>
-          </a:fillRef>
-          <a:effectRef idx="2">
-            <a:schemeClr val="accent1"/>
-          </a:effectRef>
-          <a:fontRef idx="minor">
-            <a:schemeClr val="lt1"/>
-          </a:fontRef>
-        </p:style>
-        <p:txBody>
-          <a:bodyPr rtlCol="0" anchor="ctr"/>
-          <a:lstStyle/>
-          <a:p>
-            <a:pPr algn="ctr"/>
-          </a:p>
-        </p:txBody>
-      </p:sp>
-      <p:sp>
-        <p:nvSpPr>
-          <p:cNvPr id="25" name="Rectangle 24"/>
-          <p:cNvSpPr/>
-          <p:nvPr/>
-        </p:nvSpPr>
-        <p:spPr>
-          <a:xfrm>
-            <a:off x="6178143" y="859536"/>
-            <a:ext cx="2741599" cy="36576"/>
+            <a:off x="4454042" y="1865376"/>
+            <a:ext cx="3283610" cy="13716"/>
           </a:xfrm>
           <a:prstGeom prst="rect">
             <a:avLst/>
@@ -53735,214 +51954,224 @@
       </p:sp>
       <p:sp>
         <p:nvSpPr>
-          <p:cNvPr id="26" name="Rounded Rectangle 25"/>
+          <p:cNvPr id="24" name="TextBox 23"/>
+          <p:cNvSpPr txBox="1"/>
+          <p:nvPr/>
+        </p:nvSpPr>
+        <p:spPr>
+          <a:xfrm>
+            <a:off x="4454042" y="2011680"/>
+            <a:ext cx="3283610" cy="219456"/>
+          </a:xfrm>
+          <a:prstGeom prst="rect">
+            <a:avLst/>
+          </a:prstGeom>
+          <a:noFill/>
+        </p:spPr>
+        <p:txBody>
+          <a:bodyPr wrap="square" anchor="t" lIns="36000" rIns="36000" tIns="18000" bIns="18000">
+            <a:spAutoFit/>
+          </a:bodyPr>
+          <a:lstStyle/>
+          <a:p>
+            <a:pPr algn="l"/>
+            <a:r>
+              <a:rPr sz="1120" b="1" i="0">
+                <a:solidFill>
+                  <a:srgbClr val="64748B"/>
+                </a:solidFill>
+                <a:latin typeface="Arial"/>
+              </a:rPr>
+              <a:t>Composition</a:t>
+            </a:r>
+          </a:p>
+        </p:txBody>
+      </p:sp>
+      <p:sp>
+        <p:nvSpPr>
+          <p:cNvPr id="25" name="TextBox 24"/>
+          <p:cNvSpPr txBox="1"/>
+          <p:nvPr/>
+        </p:nvSpPr>
+        <p:spPr>
+          <a:xfrm>
+            <a:off x="4454042" y="2231136"/>
+            <a:ext cx="3283610" cy="475488"/>
+          </a:xfrm>
+          <a:prstGeom prst="rect">
+            <a:avLst/>
+          </a:prstGeom>
+          <a:noFill/>
+        </p:spPr>
+        <p:txBody>
+          <a:bodyPr wrap="square" anchor="t" lIns="36000" rIns="36000" tIns="18000" bIns="18000">
+            <a:spAutoFit/>
+          </a:bodyPr>
+          <a:lstStyle/>
+          <a:p>
+            <a:pPr algn="l"/>
+            <a:r>
+              <a:rPr sz="1344" b="0" i="0">
+                <a:solidFill>
+                  <a:srgbClr val="475569"/>
+                </a:solidFill>
+                <a:latin typeface="Arial"/>
+              </a:rPr>
+              <a:t>Surfactants (historically fluorinated)</a:t>
+            </a:r>
+          </a:p>
+        </p:txBody>
+      </p:sp>
+      <p:sp>
+        <p:nvSpPr>
+          <p:cNvPr id="26" name="TextBox 25"/>
+          <p:cNvSpPr txBox="1"/>
+          <p:nvPr/>
+        </p:nvSpPr>
+        <p:spPr>
+          <a:xfrm>
+            <a:off x="4454042" y="2743200"/>
+            <a:ext cx="3283610" cy="219456"/>
+          </a:xfrm>
+          <a:prstGeom prst="rect">
+            <a:avLst/>
+          </a:prstGeom>
+          <a:noFill/>
+        </p:spPr>
+        <p:txBody>
+          <a:bodyPr wrap="square" anchor="t" lIns="36000" rIns="36000" tIns="18000" bIns="18000">
+            <a:spAutoFit/>
+          </a:bodyPr>
+          <a:lstStyle/>
+          <a:p>
+            <a:pPr algn="l"/>
+            <a:r>
+              <a:rPr sz="1120" b="1" i="0">
+                <a:solidFill>
+                  <a:srgbClr val="64748B"/>
+                </a:solidFill>
+                <a:latin typeface="Arial"/>
+              </a:rPr>
+              <a:t>Effect / retention</a:t>
+            </a:r>
+          </a:p>
+        </p:txBody>
+      </p:sp>
+      <p:sp>
+        <p:nvSpPr>
+          <p:cNvPr id="27" name="TextBox 26"/>
+          <p:cNvSpPr txBox="1"/>
+          <p:nvPr/>
+        </p:nvSpPr>
+        <p:spPr>
+          <a:xfrm>
+            <a:off x="4454042" y="2962656"/>
+            <a:ext cx="3283610" cy="475488"/>
+          </a:xfrm>
+          <a:prstGeom prst="rect">
+            <a:avLst/>
+          </a:prstGeom>
+          <a:noFill/>
+        </p:spPr>
+        <p:txBody>
+          <a:bodyPr wrap="square" anchor="t" lIns="36000" rIns="36000" tIns="18000" bIns="18000">
+            <a:spAutoFit/>
+          </a:bodyPr>
+          <a:lstStyle/>
+          <a:p>
+            <a:pPr algn="l"/>
+            <a:r>
+              <a:rPr sz="1344" b="0" i="0">
+                <a:solidFill>
+                  <a:srgbClr val="475569"/>
+                </a:solidFill>
+                <a:latin typeface="Arial"/>
+              </a:rPr>
+              <a:t>Water retention 15–30 min (short-term)</a:t>
+            </a:r>
+          </a:p>
+        </p:txBody>
+      </p:sp>
+      <p:sp>
+        <p:nvSpPr>
+          <p:cNvPr id="28" name="TextBox 27"/>
+          <p:cNvSpPr txBox="1"/>
+          <p:nvPr/>
+        </p:nvSpPr>
+        <p:spPr>
+          <a:xfrm>
+            <a:off x="4454042" y="3493008"/>
+            <a:ext cx="3283610" cy="219456"/>
+          </a:xfrm>
+          <a:prstGeom prst="rect">
+            <a:avLst/>
+          </a:prstGeom>
+          <a:noFill/>
+        </p:spPr>
+        <p:txBody>
+          <a:bodyPr wrap="square" anchor="t" lIns="36000" rIns="36000" tIns="18000" bIns="18000">
+            <a:spAutoFit/>
+          </a:bodyPr>
+          <a:lstStyle/>
+          <a:p>
+            <a:pPr algn="l"/>
+            <a:r>
+              <a:rPr sz="1120" b="1" i="0">
+                <a:solidFill>
+                  <a:srgbClr val="A05656"/>
+                </a:solidFill>
+                <a:latin typeface="Arial"/>
+              </a:rPr>
+              <a:t>Limitation</a:t>
+            </a:r>
+          </a:p>
+        </p:txBody>
+      </p:sp>
+      <p:sp>
+        <p:nvSpPr>
+          <p:cNvPr id="29" name="TextBox 28"/>
+          <p:cNvSpPr txBox="1"/>
+          <p:nvPr/>
+        </p:nvSpPr>
+        <p:spPr>
+          <a:xfrm>
+            <a:off x="4454042" y="3712464"/>
+            <a:ext cx="3283610" cy="1956816"/>
+          </a:xfrm>
+          <a:prstGeom prst="rect">
+            <a:avLst/>
+          </a:prstGeom>
+          <a:noFill/>
+        </p:spPr>
+        <p:txBody>
+          <a:bodyPr wrap="square" anchor="t" lIns="36000" rIns="36000" tIns="18000" bIns="18000">
+            <a:spAutoFit/>
+          </a:bodyPr>
+          <a:lstStyle/>
+          <a:p>
+            <a:pPr algn="l"/>
+            <a:r>
+              <a:rPr sz="1344" b="1" i="0">
+                <a:solidFill>
+                  <a:srgbClr val="A05656"/>
+                </a:solidFill>
+                <a:latin typeface="Arial"/>
+              </a:rPr>
+              <a:t>Loses effect when dry; fluorinated types bioaccumulate and are toxic</a:t>
+            </a:r>
+          </a:p>
+        </p:txBody>
+      </p:sp>
+      <p:sp>
+        <p:nvSpPr>
+          <p:cNvPr id="30" name="Rounded Rectangle 29"/>
           <p:cNvSpPr/>
           <p:nvPr/>
         </p:nvSpPr>
         <p:spPr>
           <a:xfrm>
-            <a:off x="6287871" y="969264"/>
-            <a:ext cx="2522143" cy="2514600"/>
-          </a:xfrm>
-          <a:prstGeom prst="roundRect">
-            <a:avLst>
-              <a:gd name="adj" fmla="val 3000"/>
-            </a:avLst>
-          </a:prstGeom>
-          <a:solidFill>
-            <a:srgbClr val="F5F8FC"/>
-          </a:solidFill>
-          <a:ln w="8890">
-            <a:solidFill>
-              <a:srgbClr val="C0D0E0"/>
-            </a:solidFill>
-          </a:ln>
-          <a:effectLst/>
-        </p:spPr>
-        <p:style>
-          <a:lnRef idx="1">
-            <a:schemeClr val="accent1"/>
-          </a:lnRef>
-          <a:fillRef idx="3">
-            <a:schemeClr val="accent1"/>
-          </a:fillRef>
-          <a:effectRef idx="2">
-            <a:schemeClr val="accent1"/>
-          </a:effectRef>
-          <a:fontRef idx="minor">
-            <a:schemeClr val="lt1"/>
-          </a:fontRef>
-        </p:style>
-        <p:txBody>
-          <a:bodyPr rtlCol="0" anchor="ctr"/>
-          <a:lstStyle/>
-          <a:p>
-            <a:pPr algn="ctr"/>
-          </a:p>
-        </p:txBody>
-      </p:sp>
-      <p:sp>
-        <p:nvSpPr>
-          <p:cNvPr id="27" name="TextBox 26"/>
-          <p:cNvSpPr txBox="1"/>
-          <p:nvPr/>
-        </p:nvSpPr>
-        <p:spPr>
-          <a:xfrm>
-            <a:off x="6287871" y="969264"/>
-            <a:ext cx="2522143" cy="2514600"/>
-          </a:xfrm>
-          <a:prstGeom prst="rect">
-            <a:avLst/>
-          </a:prstGeom>
-          <a:noFill/>
-        </p:spPr>
-        <p:txBody>
-          <a:bodyPr wrap="square" anchor="ctr" lIns="36000" rIns="36000" tIns="18000" bIns="18000">
-            <a:spAutoFit/>
-          </a:bodyPr>
-          <a:lstStyle/>
-          <a:p>
-            <a:pPr algn="ctr"/>
-            <a:r>
-              <a:rPr sz="1232" b="0" i="0">
-                <a:solidFill>
-                  <a:srgbClr val="AAB4C0"/>
-                </a:solidFill>
-                <a:latin typeface="Arial"/>
-              </a:rPr>
-              <a:t>(photo)</a:t>
-            </a:r>
-          </a:p>
-        </p:txBody>
-      </p:sp>
-      <p:sp>
-        <p:nvSpPr>
-          <p:cNvPr id="28" name="TextBox 27"/>
-          <p:cNvSpPr txBox="1"/>
-          <p:nvPr/>
-        </p:nvSpPr>
-        <p:spPr>
-          <a:xfrm>
-            <a:off x="6269583" y="3611880"/>
-            <a:ext cx="2558719" cy="310896"/>
-          </a:xfrm>
-          <a:prstGeom prst="rect">
-            <a:avLst/>
-          </a:prstGeom>
-          <a:noFill/>
-        </p:spPr>
-        <p:txBody>
-          <a:bodyPr wrap="square" anchor="t" lIns="36000" rIns="36000" tIns="18000" bIns="18000">
-            <a:spAutoFit/>
-          </a:bodyPr>
-          <a:lstStyle/>
-          <a:p>
-            <a:pPr algn="ctr"/>
-            <a:r>
-              <a:rPr sz="1568" b="1" i="0">
-                <a:solidFill>
-                  <a:srgbClr val="1E293B"/>
-                </a:solidFill>
-                <a:latin typeface="Arial"/>
-              </a:rPr>
-              <a:t>AquaGel-K</a:t>
-            </a:r>
-          </a:p>
-        </p:txBody>
-      </p:sp>
-      <p:sp>
-        <p:nvSpPr>
-          <p:cNvPr id="29" name="TextBox 28"/>
-          <p:cNvSpPr txBox="1"/>
-          <p:nvPr/>
-        </p:nvSpPr>
-        <p:spPr>
-          <a:xfrm>
-            <a:off x="6269583" y="3922776"/>
-            <a:ext cx="2558719" cy="237744"/>
-          </a:xfrm>
-          <a:prstGeom prst="rect">
-            <a:avLst/>
-          </a:prstGeom>
-          <a:noFill/>
-        </p:spPr>
-        <p:txBody>
-          <a:bodyPr wrap="square" anchor="t" lIns="36000" rIns="36000" tIns="18000" bIns="18000">
-            <a:spAutoFit/>
-          </a:bodyPr>
-          <a:lstStyle/>
-          <a:p>
-            <a:pPr algn="ctr"/>
-            <a:r>
-              <a:rPr sz="1120" b="0" i="0">
-                <a:solidFill>
-                  <a:srgbClr val="64748B"/>
-                </a:solidFill>
-                <a:latin typeface="Arial"/>
-              </a:rPr>
-              <a:t>Cross-linked polyacrylate</a:t>
-            </a:r>
-          </a:p>
-        </p:txBody>
-      </p:sp>
-      <p:sp>
-        <p:nvSpPr>
-          <p:cNvPr id="30" name="TextBox 29"/>
-          <p:cNvSpPr txBox="1"/>
-          <p:nvPr/>
-        </p:nvSpPr>
-        <p:spPr>
-          <a:xfrm>
-            <a:off x="6269583" y="4197096"/>
-            <a:ext cx="2558719" cy="1837944"/>
-          </a:xfrm>
-          <a:prstGeom prst="rect">
-            <a:avLst/>
-          </a:prstGeom>
-          <a:noFill/>
-        </p:spPr>
-        <p:txBody>
-          <a:bodyPr wrap="square" anchor="t" lIns="36000" rIns="36000" tIns="18000" bIns="18000">
-            <a:spAutoFit/>
-          </a:bodyPr>
-          <a:lstStyle/>
-          <a:p>
-            <a:pPr algn="ctr"/>
-            <a:r>
-              <a:rPr sz="1344" b="0" i="0">
-                <a:solidFill>
-                  <a:srgbClr val="A05656"/>
-                </a:solidFill>
-                <a:latin typeface="Arial"/>
-              </a:rPr>
-              <a:t>Protection lost the moment</a:t>
-            </a:r>
-          </a:p>
-          <a:p>
-            <a:pPr algn="ctr"/>
-            <a:r>
-              <a:rPr sz="1344" b="0" i="0">
-                <a:solidFill>
-                  <a:srgbClr val="A05656"/>
-                </a:solidFill>
-                <a:latin typeface="Arial"/>
-              </a:rPr>
-              <a:t>water evaporates</a:t>
-            </a:r>
-          </a:p>
-        </p:txBody>
-      </p:sp>
-      <p:sp>
-        <p:nvSpPr>
-          <p:cNvPr id="31" name="Rounded Rectangle 30"/>
-          <p:cNvSpPr/>
-          <p:nvPr/>
-        </p:nvSpPr>
-        <p:spPr>
-          <a:xfrm>
-            <a:off x="9084335" y="859536"/>
-            <a:ext cx="2741599" cy="5248656"/>
+            <a:off x="8139988" y="859536"/>
+            <a:ext cx="3685946" cy="4974336"/>
           </a:xfrm>
           <a:prstGeom prst="roundRect">
             <a:avLst>
@@ -53981,14 +52210,14 @@
       </p:sp>
       <p:sp>
         <p:nvSpPr>
-          <p:cNvPr id="32" name="Rectangle 31"/>
+          <p:cNvPr id="31" name="Rectangle 30"/>
           <p:cNvSpPr/>
           <p:nvPr/>
         </p:nvSpPr>
         <p:spPr>
           <a:xfrm>
-            <a:off x="9084335" y="859536"/>
-            <a:ext cx="2741599" cy="36576"/>
+            <a:off x="8139988" y="859536"/>
+            <a:ext cx="3685946" cy="45720"/>
           </a:xfrm>
           <a:prstGeom prst="rect">
             <a:avLst/>
@@ -54025,27 +52254,58 @@
       </p:sp>
       <p:sp>
         <p:nvSpPr>
-          <p:cNvPr id="33" name="Rounded Rectangle 32"/>
+          <p:cNvPr id="32" name="TextBox 31"/>
+          <p:cNvSpPr txBox="1"/>
+          <p:nvPr/>
+        </p:nvSpPr>
+        <p:spPr>
+          <a:xfrm>
+            <a:off x="8341156" y="1133856"/>
+            <a:ext cx="3283610" cy="420624"/>
+          </a:xfrm>
+          <a:prstGeom prst="rect">
+            <a:avLst/>
+          </a:prstGeom>
+          <a:noFill/>
+        </p:spPr>
+        <p:txBody>
+          <a:bodyPr wrap="square" anchor="t" lIns="36000" rIns="36000" tIns="18000" bIns="18000">
+            <a:spAutoFit/>
+          </a:bodyPr>
+          <a:lstStyle/>
+          <a:p>
+            <a:pPr algn="l"/>
+            <a:r>
+              <a:rPr sz="1792" b="1" i="0">
+                <a:solidFill>
+                  <a:srgbClr val="FFFFFF"/>
+                </a:solidFill>
+                <a:latin typeface="Arial"/>
+              </a:rPr>
+              <a:t>Water-enhancing gel (WEG)</a:t>
+            </a:r>
+          </a:p>
+        </p:txBody>
+      </p:sp>
+      <p:sp>
+        <p:nvSpPr>
+          <p:cNvPr id="33" name="Rectangle 32"/>
           <p:cNvSpPr/>
           <p:nvPr/>
         </p:nvSpPr>
         <p:spPr>
           <a:xfrm>
-            <a:off x="9194063" y="969264"/>
-            <a:ext cx="2522143" cy="2514600"/>
-          </a:xfrm>
-          <a:prstGeom prst="roundRect">
-            <a:avLst>
-              <a:gd name="adj" fmla="val 3000"/>
-            </a:avLst>
+            <a:off x="8341156" y="1865376"/>
+            <a:ext cx="3283610" cy="13716"/>
+          </a:xfrm>
+          <a:prstGeom prst="rect">
+            <a:avLst/>
           </a:prstGeom>
           <a:solidFill>
-            <a:srgbClr val="2A3C54"/>
+            <a:srgbClr val="445870"/>
           </a:solidFill>
-          <a:ln w="8890">
-            <a:solidFill>
-              <a:srgbClr val="445E7A"/>
-            </a:solidFill>
+          <a:ln>
+            <a:noFill/>
           </a:ln>
           <a:effectLst/>
         </p:spPr>
@@ -54079,29 +52339,29 @@
         </p:nvSpPr>
         <p:spPr>
           <a:xfrm>
-            <a:off x="9194063" y="969264"/>
-            <a:ext cx="2522143" cy="2514600"/>
-          </a:xfrm>
-          <a:prstGeom prst="rect">
-            <a:avLst/>
-          </a:prstGeom>
-          <a:noFill/>
-        </p:spPr>
-        <p:txBody>
-          <a:bodyPr wrap="square" anchor="ctr" lIns="36000" rIns="36000" tIns="18000" bIns="18000">
-            <a:spAutoFit/>
-          </a:bodyPr>
-          <a:lstStyle/>
-          <a:p>
-            <a:pPr algn="ctr"/>
-            <a:r>
-              <a:rPr sz="1232" b="0" i="0">
+            <a:off x="8341156" y="2011680"/>
+            <a:ext cx="3283610" cy="219456"/>
+          </a:xfrm>
+          <a:prstGeom prst="rect">
+            <a:avLst/>
+          </a:prstGeom>
+          <a:noFill/>
+        </p:spPr>
+        <p:txBody>
+          <a:bodyPr wrap="square" anchor="t" lIns="36000" rIns="36000" tIns="18000" bIns="18000">
+            <a:spAutoFit/>
+          </a:bodyPr>
+          <a:lstStyle/>
+          <a:p>
+            <a:pPr algn="l"/>
+            <a:r>
+              <a:rPr sz="1120" b="1" i="0">
                 <a:solidFill>
                   <a:srgbClr val="88A0B8"/>
                 </a:solidFill>
                 <a:latin typeface="Arial"/>
               </a:rPr>
-              <a:t>(photo)</a:t>
+              <a:t>Composition</a:t>
             </a:r>
           </a:p>
         </p:txBody>
@@ -54114,131 +52374,191 @@
         </p:nvSpPr>
         <p:spPr>
           <a:xfrm>
-            <a:off x="9175775" y="3611880"/>
-            <a:ext cx="2558719" cy="310896"/>
-          </a:xfrm>
-          <a:prstGeom prst="rect">
-            <a:avLst/>
-          </a:prstGeom>
-          <a:noFill/>
-        </p:spPr>
-        <p:txBody>
-          <a:bodyPr wrap="square" anchor="t" lIns="36000" rIns="36000" tIns="18000" bIns="18000">
-            <a:spAutoFit/>
-          </a:bodyPr>
-          <a:lstStyle/>
-          <a:p>
-            <a:pPr algn="ctr"/>
-            <a:r>
-              <a:rPr sz="1568" b="1" i="0">
+            <a:off x="8341156" y="2231136"/>
+            <a:ext cx="3283610" cy="475488"/>
+          </a:xfrm>
+          <a:prstGeom prst="rect">
+            <a:avLst/>
+          </a:prstGeom>
+          <a:noFill/>
+        </p:spPr>
+        <p:txBody>
+          <a:bodyPr wrap="square" anchor="t" lIns="36000" rIns="36000" tIns="18000" bIns="18000">
+            <a:spAutoFit/>
+          </a:bodyPr>
+          <a:lstStyle/>
+          <a:p>
+            <a:pPr algn="l"/>
+            <a:r>
+              <a:rPr sz="1344" b="0" i="0">
+                <a:solidFill>
+                  <a:srgbClr val="D8E2EE"/>
+                </a:solidFill>
+                <a:latin typeface="Arial"/>
+              </a:rPr>
+              <a:t>Superabsorbent polymer (eco-friendly)</a:t>
+            </a:r>
+          </a:p>
+        </p:txBody>
+      </p:sp>
+      <p:sp>
+        <p:nvSpPr>
+          <p:cNvPr id="36" name="TextBox 35"/>
+          <p:cNvSpPr txBox="1"/>
+          <p:nvPr/>
+        </p:nvSpPr>
+        <p:spPr>
+          <a:xfrm>
+            <a:off x="8341156" y="2743200"/>
+            <a:ext cx="3283610" cy="219456"/>
+          </a:xfrm>
+          <a:prstGeom prst="rect">
+            <a:avLst/>
+          </a:prstGeom>
+          <a:noFill/>
+        </p:spPr>
+        <p:txBody>
+          <a:bodyPr wrap="square" anchor="t" lIns="36000" rIns="36000" tIns="18000" bIns="18000">
+            <a:spAutoFit/>
+          </a:bodyPr>
+          <a:lstStyle/>
+          <a:p>
+            <a:pPr algn="l"/>
+            <a:r>
+              <a:rPr sz="1120" b="1" i="0">
+                <a:solidFill>
+                  <a:srgbClr val="88A0B8"/>
+                </a:solidFill>
+                <a:latin typeface="Arial"/>
+              </a:rPr>
+              <a:t>Effect / retention</a:t>
+            </a:r>
+          </a:p>
+        </p:txBody>
+      </p:sp>
+      <p:sp>
+        <p:nvSpPr>
+          <p:cNvPr id="37" name="TextBox 36"/>
+          <p:cNvSpPr txBox="1"/>
+          <p:nvPr/>
+        </p:nvSpPr>
+        <p:spPr>
+          <a:xfrm>
+            <a:off x="8341156" y="2962656"/>
+            <a:ext cx="3283610" cy="475488"/>
+          </a:xfrm>
+          <a:prstGeom prst="rect">
+            <a:avLst/>
+          </a:prstGeom>
+          <a:noFill/>
+        </p:spPr>
+        <p:txBody>
+          <a:bodyPr wrap="square" anchor="t" lIns="36000" rIns="36000" tIns="18000" bIns="18000">
+            <a:spAutoFit/>
+          </a:bodyPr>
+          <a:lstStyle/>
+          <a:p>
+            <a:pPr algn="l"/>
+            <a:r>
+              <a:rPr sz="1344" b="0" i="0">
+                <a:solidFill>
+                  <a:srgbClr val="D8E2EE"/>
+                </a:solidFill>
+                <a:latin typeface="Arial"/>
+              </a:rPr>
+              <a:t>Water retention 30–60 min; protects buildings</a:t>
+            </a:r>
+          </a:p>
+        </p:txBody>
+      </p:sp>
+      <p:sp>
+        <p:nvSpPr>
+          <p:cNvPr id="38" name="TextBox 37"/>
+          <p:cNvSpPr txBox="1"/>
+          <p:nvPr/>
+        </p:nvSpPr>
+        <p:spPr>
+          <a:xfrm>
+            <a:off x="8341156" y="3493008"/>
+            <a:ext cx="3283610" cy="219456"/>
+          </a:xfrm>
+          <a:prstGeom prst="rect">
+            <a:avLst/>
+          </a:prstGeom>
+          <a:noFill/>
+        </p:spPr>
+        <p:txBody>
+          <a:bodyPr wrap="square" anchor="t" lIns="36000" rIns="36000" tIns="18000" bIns="18000">
+            <a:spAutoFit/>
+          </a:bodyPr>
+          <a:lstStyle/>
+          <a:p>
+            <a:pPr algn="l"/>
+            <a:r>
+              <a:rPr sz="1120" b="1" i="0">
+                <a:solidFill>
+                  <a:srgbClr val="D4A574"/>
+                </a:solidFill>
+                <a:latin typeface="Arial"/>
+              </a:rPr>
+              <a:t>Limitation</a:t>
+            </a:r>
+          </a:p>
+        </p:txBody>
+      </p:sp>
+      <p:sp>
+        <p:nvSpPr>
+          <p:cNvPr id="39" name="TextBox 38"/>
+          <p:cNvSpPr txBox="1"/>
+          <p:nvPr/>
+        </p:nvSpPr>
+        <p:spPr>
+          <a:xfrm>
+            <a:off x="8341156" y="3712464"/>
+            <a:ext cx="3283610" cy="1956816"/>
+          </a:xfrm>
+          <a:prstGeom prst="rect">
+            <a:avLst/>
+          </a:prstGeom>
+          <a:noFill/>
+        </p:spPr>
+        <p:txBody>
+          <a:bodyPr wrap="square" anchor="t" lIns="36000" rIns="36000" tIns="18000" bIns="18000">
+            <a:spAutoFit/>
+          </a:bodyPr>
+          <a:lstStyle/>
+          <a:p>
+            <a:pPr algn="l"/>
+            <a:r>
+              <a:rPr sz="1344" b="1" i="0">
                 <a:solidFill>
                   <a:srgbClr val="FFFFFF"/>
                 </a:solidFill>
                 <a:latin typeface="Arial"/>
               </a:rPr>
-              <a:t>WEG (This Work)</a:t>
-            </a:r>
-          </a:p>
-        </p:txBody>
-      </p:sp>
-      <p:sp>
-        <p:nvSpPr>
-          <p:cNvPr id="36" name="TextBox 35"/>
-          <p:cNvSpPr txBox="1"/>
-          <p:nvPr/>
-        </p:nvSpPr>
-        <p:spPr>
-          <a:xfrm>
-            <a:off x="9175775" y="3922776"/>
-            <a:ext cx="2558719" cy="237744"/>
-          </a:xfrm>
-          <a:prstGeom prst="rect">
-            <a:avLst/>
-          </a:prstGeom>
-          <a:noFill/>
-        </p:spPr>
-        <p:txBody>
-          <a:bodyPr wrap="square" anchor="t" lIns="36000" rIns="36000" tIns="18000" bIns="18000">
-            <a:spAutoFit/>
-          </a:bodyPr>
-          <a:lstStyle/>
-          <a:p>
-            <a:pPr algn="ctr"/>
-            <a:r>
-              <a:rPr sz="1120" b="0" i="0">
-                <a:solidFill>
-                  <a:srgbClr val="A0B8D0"/>
-                </a:solidFill>
-                <a:latin typeface="Arial"/>
-              </a:rPr>
-              <a:t>Cellulosic + Silica</a:t>
-            </a:r>
-          </a:p>
-        </p:txBody>
-      </p:sp>
-      <p:sp>
-        <p:nvSpPr>
-          <p:cNvPr id="37" name="TextBox 36"/>
-          <p:cNvSpPr txBox="1"/>
-          <p:nvPr/>
-        </p:nvSpPr>
-        <p:spPr>
-          <a:xfrm>
-            <a:off x="9175775" y="4197096"/>
-            <a:ext cx="2558719" cy="1837944"/>
-          </a:xfrm>
-          <a:prstGeom prst="rect">
-            <a:avLst/>
-          </a:prstGeom>
-          <a:noFill/>
-        </p:spPr>
-        <p:txBody>
-          <a:bodyPr wrap="square" anchor="t" lIns="36000" rIns="36000" tIns="18000" bIns="18000">
-            <a:spAutoFit/>
-          </a:bodyPr>
-          <a:lstStyle/>
-          <a:p>
-            <a:pPr algn="ctr"/>
-            <a:r>
-              <a:rPr sz="1344" b="1" i="0">
-                <a:solidFill>
-                  <a:srgbClr val="5B8C5A"/>
-                </a:solidFill>
-                <a:latin typeface="Arial"/>
-              </a:rPr>
-              <a:t>Aerogel layer continues</a:t>
-            </a:r>
-          </a:p>
-          <a:p>
-            <a:pPr algn="ctr"/>
-            <a:r>
-              <a:rPr sz="1344" b="1" i="0">
-                <a:solidFill>
-                  <a:srgbClr val="5B8C5A"/>
-                </a:solidFill>
-                <a:latin typeface="Arial"/>
-              </a:rPr>
-              <a:t>protecting after water loss</a:t>
-            </a:r>
-          </a:p>
-        </p:txBody>
-      </p:sp>
-      <p:sp>
-        <p:nvSpPr>
-          <p:cNvPr id="38" name="Rectangle 37"/>
+              <a:t>Once dried by heat/wind, effectiveness is completely lost</a:t>
+            </a:r>
+          </a:p>
+        </p:txBody>
+      </p:sp>
+      <p:sp>
+        <p:nvSpPr>
+          <p:cNvPr id="40" name="Rounded Rectangle 39"/>
           <p:cNvSpPr/>
           <p:nvPr/>
         </p:nvSpPr>
         <p:spPr>
           <a:xfrm>
-            <a:off x="365760" y="6236208"/>
-            <a:ext cx="11460175" cy="18288"/>
-          </a:xfrm>
-          <a:prstGeom prst="rect">
-            <a:avLst/>
+            <a:off x="365760" y="5998464"/>
+            <a:ext cx="11460175" cy="475488"/>
+          </a:xfrm>
+          <a:prstGeom prst="roundRect">
+            <a:avLst>
+              <a:gd name="adj" fmla="val 4000"/>
+            </a:avLst>
           </a:prstGeom>
           <a:solidFill>
-            <a:srgbClr val="E2E8F0"/>
+            <a:srgbClr val="F8FAFC"/>
           </a:solidFill>
           <a:ln>
             <a:noFill/>
@@ -54269,27 +52589,106 @@
       </p:sp>
       <p:sp>
         <p:nvSpPr>
-          <p:cNvPr id="39" name="TextBox 38"/>
-          <p:cNvSpPr txBox="1"/>
-          <p:nvPr/>
-        </p:nvSpPr>
-        <p:spPr>
-          <a:xfrm>
-            <a:off x="365760" y="6345936"/>
-            <a:ext cx="11460175" cy="329184"/>
-          </a:xfrm>
-          <a:prstGeom prst="rect">
-            <a:avLst/>
-          </a:prstGeom>
-          <a:noFill/>
-        </p:spPr>
-        <p:txBody>
-          <a:bodyPr wrap="square" anchor="t" lIns="36000" rIns="36000" tIns="18000" bIns="18000">
-            <a:spAutoFit/>
-          </a:bodyPr>
-          <a:lstStyle/>
-          <a:p>
-            <a:pPr algn="ctr"/>
+          <p:cNvPr id="41" name="Rectangle 40"/>
+          <p:cNvSpPr/>
+          <p:nvPr/>
+        </p:nvSpPr>
+        <p:spPr>
+          <a:xfrm>
+            <a:off x="365760" y="5998464"/>
+            <a:ext cx="54864" cy="475488"/>
+          </a:xfrm>
+          <a:prstGeom prst="rect">
+            <a:avLst/>
+          </a:prstGeom>
+          <a:solidFill>
+            <a:srgbClr val="3B5174"/>
+          </a:solidFill>
+          <a:ln>
+            <a:noFill/>
+          </a:ln>
+          <a:effectLst/>
+        </p:spPr>
+        <p:style>
+          <a:lnRef idx="1">
+            <a:schemeClr val="accent1"/>
+          </a:lnRef>
+          <a:fillRef idx="3">
+            <a:schemeClr val="accent1"/>
+          </a:fillRef>
+          <a:effectRef idx="2">
+            <a:schemeClr val="accent1"/>
+          </a:effectRef>
+          <a:fontRef idx="minor">
+            <a:schemeClr val="lt1"/>
+          </a:fontRef>
+        </p:style>
+        <p:txBody>
+          <a:bodyPr rtlCol="0" anchor="ctr"/>
+          <a:lstStyle/>
+          <a:p>
+            <a:pPr algn="ctr"/>
+          </a:p>
+        </p:txBody>
+      </p:sp>
+      <p:sp>
+        <p:nvSpPr>
+          <p:cNvPr id="42" name="TextBox 41"/>
+          <p:cNvSpPr txBox="1"/>
+          <p:nvPr/>
+        </p:nvSpPr>
+        <p:spPr>
+          <a:xfrm>
+            <a:off x="548640" y="5998464"/>
+            <a:ext cx="365760" cy="475488"/>
+          </a:xfrm>
+          <a:prstGeom prst="rect">
+            <a:avLst/>
+          </a:prstGeom>
+          <a:noFill/>
+        </p:spPr>
+        <p:txBody>
+          <a:bodyPr wrap="square" anchor="ctr" lIns="36000" rIns="36000" tIns="18000" bIns="18000">
+            <a:spAutoFit/>
+          </a:bodyPr>
+          <a:lstStyle/>
+          <a:p>
+            <a:pPr algn="l"/>
+            <a:r>
+              <a:rPr sz="1568" b="0" i="0">
+                <a:solidFill>
+                  <a:srgbClr val="3B5174"/>
+                </a:solidFill>
+                <a:latin typeface="Arial"/>
+              </a:rPr>
+              <a:t>→</a:t>
+            </a:r>
+          </a:p>
+        </p:txBody>
+      </p:sp>
+      <p:sp>
+        <p:nvSpPr>
+          <p:cNvPr id="43" name="TextBox 42"/>
+          <p:cNvSpPr txBox="1"/>
+          <p:nvPr/>
+        </p:nvSpPr>
+        <p:spPr>
+          <a:xfrm>
+            <a:off x="960120" y="5998464"/>
+            <a:ext cx="10774375" cy="475488"/>
+          </a:xfrm>
+          <a:prstGeom prst="rect">
+            <a:avLst/>
+          </a:prstGeom>
+          <a:noFill/>
+        </p:spPr>
+        <p:txBody>
+          <a:bodyPr wrap="square" anchor="ctr" lIns="36000" rIns="36000" tIns="18000" bIns="18000">
+            <a:spAutoFit/>
+          </a:bodyPr>
+          <a:lstStyle/>
+          <a:p>
+            <a:pPr algn="l"/>
             <a:r>
               <a:rPr sz="1456" b="1" i="0">
                 <a:solidFill>
@@ -54297,7 +52696,7 @@
                 </a:solidFill>
                 <a:latin typeface="Arial"/>
               </a:rPr>
-              <a:t>Challenge: Existing WEGs are mere "water carriers" — protection vanishes the moment moisture is lost</a:t>
+              <a:t>This work overcomes the fatal flaw of eco-friendly WEGs: losing all effectiveness once dried</a:t>
             </a:r>
           </a:p>
         </p:txBody>
@@ -54640,7 +53039,7 @@
                 </a:solidFill>
                 <a:latin typeface="Arial"/>
               </a:rPr>
-              <a:t>7 / 38</a:t>
+              <a:t>7 / 37</a:t>
             </a:r>
           </a:p>
         </p:txBody>
@@ -54903,7 +53302,7 @@
                 </a:solidFill>
                 <a:latin typeface="Arial"/>
               </a:rPr>
-              <a:t>Beyond water dependence</a:t>
+              <a:t>Material design</a:t>
             </a:r>
           </a:p>
         </p:txBody>
@@ -54917,6 +53316,76 @@
         <p:spPr>
           <a:xfrm>
             <a:off x="786384" y="2706624"/>
+            <a:ext cx="3824514" cy="365760"/>
+          </a:xfrm>
+          <a:prstGeom prst="rect">
+            <a:avLst/>
+          </a:prstGeom>
+          <a:noFill/>
+        </p:spPr>
+        <p:txBody>
+          <a:bodyPr wrap="square" anchor="t" lIns="36000" rIns="36000" tIns="18000" bIns="18000">
+            <a:spAutoFit/>
+          </a:bodyPr>
+          <a:lstStyle/>
+          <a:p>
+            <a:pPr algn="l"/>
+            <a:r>
+              <a:rPr sz="1232" b="0" i="0">
+                <a:solidFill>
+                  <a:srgbClr val="64748B"/>
+                </a:solidFill>
+                <a:latin typeface="Arial"/>
+              </a:rPr>
+              <a:t>Cellulosic biopolymer × colloidal silica, physically crosslinked</a:t>
+            </a:r>
+          </a:p>
+        </p:txBody>
+      </p:sp>
+      <p:sp>
+        <p:nvSpPr>
+          <p:cNvPr id="18" name="TextBox 17"/>
+          <p:cNvSpPr txBox="1"/>
+          <p:nvPr/>
+        </p:nvSpPr>
+        <p:spPr>
+          <a:xfrm>
+            <a:off x="365760" y="3090672"/>
+            <a:ext cx="402336" cy="274320"/>
+          </a:xfrm>
+          <a:prstGeom prst="rect">
+            <a:avLst/>
+          </a:prstGeom>
+          <a:noFill/>
+        </p:spPr>
+        <p:txBody>
+          <a:bodyPr wrap="square" anchor="t" lIns="36000" rIns="36000" tIns="18000" bIns="18000">
+            <a:spAutoFit/>
+          </a:bodyPr>
+          <a:lstStyle/>
+          <a:p>
+            <a:pPr algn="l"/>
+            <a:r>
+              <a:rPr sz="1232" b="1" i="0">
+                <a:solidFill>
+                  <a:srgbClr val="3B5174"/>
+                </a:solidFill>
+                <a:latin typeface="Arial"/>
+              </a:rPr>
+              <a:t>02</a:t>
+            </a:r>
+          </a:p>
+        </p:txBody>
+      </p:sp>
+      <p:sp>
+        <p:nvSpPr>
+          <p:cNvPr id="19" name="TextBox 18"/>
+          <p:cNvSpPr txBox="1"/>
+          <p:nvPr/>
+        </p:nvSpPr>
+        <p:spPr>
+          <a:xfrm>
+            <a:off x="786384" y="3090672"/>
             <a:ext cx="3824514" cy="256032"/>
           </a:xfrm>
           <a:prstGeom prst="rect">
@@ -54932,26 +53401,61 @@
           <a:p>
             <a:pPr algn="l"/>
             <a:r>
+              <a:rPr sz="1456" b="1" i="0">
+                <a:solidFill>
+                  <a:srgbClr val="1E293B"/>
+                </a:solidFill>
+                <a:latin typeface="Arial"/>
+              </a:rPr>
+              <a:t>Aerogel formation</a:t>
+            </a:r>
+          </a:p>
+        </p:txBody>
+      </p:sp>
+      <p:sp>
+        <p:nvSpPr>
+          <p:cNvPr id="20" name="TextBox 19"/>
+          <p:cNvSpPr txBox="1"/>
+          <p:nvPr/>
+        </p:nvSpPr>
+        <p:spPr>
+          <a:xfrm>
+            <a:off x="786384" y="3346704"/>
+            <a:ext cx="3824514" cy="365760"/>
+          </a:xfrm>
+          <a:prstGeom prst="rect">
+            <a:avLst/>
+          </a:prstGeom>
+          <a:noFill/>
+        </p:spPr>
+        <p:txBody>
+          <a:bodyPr wrap="square" anchor="t" lIns="36000" rIns="36000" tIns="18000" bIns="18000">
+            <a:spAutoFit/>
+          </a:bodyPr>
+          <a:lstStyle/>
+          <a:p>
+            <a:pPr algn="l"/>
+            <a:r>
               <a:rPr sz="1232" b="0" i="0">
                 <a:solidFill>
                   <a:srgbClr val="64748B"/>
                 </a:solidFill>
                 <a:latin typeface="Arial"/>
               </a:rPr>
-              <a:t>Heat-activated solid protective layer</a:t>
-            </a:r>
-          </a:p>
-        </p:txBody>
-      </p:sp>
-      <p:sp>
-        <p:nvSpPr>
-          <p:cNvPr id="18" name="TextBox 17"/>
-          <p:cNvSpPr txBox="1"/>
-          <p:nvPr/>
-        </p:nvSpPr>
-        <p:spPr>
-          <a:xfrm>
-            <a:off x="365760" y="3136392"/>
+              <a:t>Flame-driven water loss forms a porous silica network in situ</a:t>
+            </a:r>
+          </a:p>
+        </p:txBody>
+      </p:sp>
+      <p:sp>
+        <p:nvSpPr>
+          <p:cNvPr id="21" name="TextBox 20"/>
+          <p:cNvSpPr txBox="1"/>
+          <p:nvPr/>
+        </p:nvSpPr>
+        <p:spPr>
+          <a:xfrm>
+            <a:off x="365760" y="3730752"/>
             <a:ext cx="402336" cy="274320"/>
           </a:xfrm>
           <a:prstGeom prst="rect">
@@ -54973,20 +53477,20 @@
                 </a:solidFill>
                 <a:latin typeface="Arial"/>
               </a:rPr>
-              <a:t>02</a:t>
-            </a:r>
-          </a:p>
-        </p:txBody>
-      </p:sp>
-      <p:sp>
-        <p:nvSpPr>
-          <p:cNvPr id="19" name="TextBox 18"/>
-          <p:cNvSpPr txBox="1"/>
-          <p:nvPr/>
-        </p:nvSpPr>
-        <p:spPr>
-          <a:xfrm>
-            <a:off x="786384" y="3136392"/>
+              <a:t>03</a:t>
+            </a:r>
+          </a:p>
+        </p:txBody>
+      </p:sp>
+      <p:sp>
+        <p:nvSpPr>
+          <p:cNvPr id="22" name="TextBox 21"/>
+          <p:cNvSpPr txBox="1"/>
+          <p:nvPr/>
+        </p:nvSpPr>
+        <p:spPr>
+          <a:xfrm>
+            <a:off x="786384" y="3730752"/>
             <a:ext cx="3824514" cy="256032"/>
           </a:xfrm>
           <a:prstGeom prst="rect">
@@ -55008,20 +53512,90 @@
                 </a:solidFill>
                 <a:latin typeface="Arial"/>
               </a:rPr>
-              <a:t>Sustainable materials</a:t>
-            </a:r>
-          </a:p>
-        </p:txBody>
-      </p:sp>
-      <p:sp>
-        <p:nvSpPr>
-          <p:cNvPr id="20" name="TextBox 19"/>
-          <p:cNvSpPr txBox="1"/>
-          <p:nvPr/>
-        </p:nvSpPr>
-        <p:spPr>
-          <a:xfrm>
-            <a:off x="786384" y="3392424"/>
+              <a:t>Sustained protection</a:t>
+            </a:r>
+          </a:p>
+        </p:txBody>
+      </p:sp>
+      <p:sp>
+        <p:nvSpPr>
+          <p:cNvPr id="23" name="TextBox 22"/>
+          <p:cNvSpPr txBox="1"/>
+          <p:nvPr/>
+        </p:nvSpPr>
+        <p:spPr>
+          <a:xfrm>
+            <a:off x="786384" y="3986784"/>
+            <a:ext cx="3824514" cy="365760"/>
+          </a:xfrm>
+          <a:prstGeom prst="rect">
+            <a:avLst/>
+          </a:prstGeom>
+          <a:noFill/>
+        </p:spPr>
+        <p:txBody>
+          <a:bodyPr wrap="square" anchor="t" lIns="36000" rIns="36000" tIns="18000" bIns="18000">
+            <a:spAutoFit/>
+          </a:bodyPr>
+          <a:lstStyle/>
+          <a:p>
+            <a:pPr algn="l"/>
+            <a:r>
+              <a:rPr sz="1232" b="0" i="0">
+                <a:solidFill>
+                  <a:srgbClr val="64748B"/>
+                </a:solidFill>
+                <a:latin typeface="Arial"/>
+              </a:rPr>
+              <a:t>Insulating barrier prevents ignition even after water is gone</a:t>
+            </a:r>
+          </a:p>
+        </p:txBody>
+      </p:sp>
+      <p:sp>
+        <p:nvSpPr>
+          <p:cNvPr id="24" name="TextBox 23"/>
+          <p:cNvSpPr txBox="1"/>
+          <p:nvPr/>
+        </p:nvSpPr>
+        <p:spPr>
+          <a:xfrm>
+            <a:off x="365760" y="4370832"/>
+            <a:ext cx="402336" cy="274320"/>
+          </a:xfrm>
+          <a:prstGeom prst="rect">
+            <a:avLst/>
+          </a:prstGeom>
+          <a:noFill/>
+        </p:spPr>
+        <p:txBody>
+          <a:bodyPr wrap="square" anchor="t" lIns="36000" rIns="36000" tIns="18000" bIns="18000">
+            <a:spAutoFit/>
+          </a:bodyPr>
+          <a:lstStyle/>
+          <a:p>
+            <a:pPr algn="l"/>
+            <a:r>
+              <a:rPr sz="1232" b="1" i="0">
+                <a:solidFill>
+                  <a:srgbClr val="3B5174"/>
+                </a:solidFill>
+                <a:latin typeface="Arial"/>
+              </a:rPr>
+              <a:t>04</a:t>
+            </a:r>
+          </a:p>
+        </p:txBody>
+      </p:sp>
+      <p:sp>
+        <p:nvSpPr>
+          <p:cNvPr id="25" name="TextBox 24"/>
+          <p:cNvSpPr txBox="1"/>
+          <p:nvPr/>
+        </p:nvSpPr>
+        <p:spPr>
+          <a:xfrm>
+            <a:off x="786384" y="4370832"/>
             <a:ext cx="3824514" cy="256032"/>
           </a:xfrm>
           <a:prstGeom prst="rect">
@@ -55037,125 +53611,55 @@
           <a:p>
             <a:pPr algn="l"/>
             <a:r>
+              <a:rPr sz="1456" b="1" i="0">
+                <a:solidFill>
+                  <a:srgbClr val="1E293B"/>
+                </a:solidFill>
+                <a:latin typeface="Arial"/>
+              </a:rPr>
+              <a:t>Applicability &amp; scale</a:t>
+            </a:r>
+          </a:p>
+        </p:txBody>
+      </p:sp>
+      <p:sp>
+        <p:nvSpPr>
+          <p:cNvPr id="26" name="TextBox 25"/>
+          <p:cNvSpPr txBox="1"/>
+          <p:nvPr/>
+        </p:nvSpPr>
+        <p:spPr>
+          <a:xfrm>
+            <a:off x="786384" y="4626864"/>
+            <a:ext cx="3824514" cy="365760"/>
+          </a:xfrm>
+          <a:prstGeom prst="rect">
+            <a:avLst/>
+          </a:prstGeom>
+          <a:noFill/>
+        </p:spPr>
+        <p:txBody>
+          <a:bodyPr wrap="square" anchor="t" lIns="36000" rIns="36000" tIns="18000" bIns="18000">
+            <a:spAutoFit/>
+          </a:bodyPr>
+          <a:lstStyle/>
+          <a:p>
+            <a:pPr algn="l"/>
+            <a:r>
               <a:rPr sz="1232" b="0" i="0">
                 <a:solidFill>
                   <a:srgbClr val="64748B"/>
                 </a:solidFill>
                 <a:latin typeface="Arial"/>
               </a:rPr>
-              <a:t>Naturally derived, food-grade components</a:t>
-            </a:r>
-          </a:p>
-        </p:txBody>
-      </p:sp>
-      <p:sp>
-        <p:nvSpPr>
-          <p:cNvPr id="21" name="TextBox 20"/>
-          <p:cNvSpPr txBox="1"/>
-          <p:nvPr/>
-        </p:nvSpPr>
-        <p:spPr>
-          <a:xfrm>
-            <a:off x="365760" y="3822192"/>
-            <a:ext cx="402336" cy="274320"/>
-          </a:xfrm>
-          <a:prstGeom prst="rect">
-            <a:avLst/>
-          </a:prstGeom>
-          <a:noFill/>
-        </p:spPr>
-        <p:txBody>
-          <a:bodyPr wrap="square" anchor="t" lIns="36000" rIns="36000" tIns="18000" bIns="18000">
-            <a:spAutoFit/>
-          </a:bodyPr>
-          <a:lstStyle/>
-          <a:p>
-            <a:pPr algn="l"/>
-            <a:r>
-              <a:rPr sz="1232" b="1" i="0">
-                <a:solidFill>
-                  <a:srgbClr val="3B5174"/>
-                </a:solidFill>
-                <a:latin typeface="Arial"/>
-              </a:rPr>
-              <a:t>03</a:t>
-            </a:r>
-          </a:p>
-        </p:txBody>
-      </p:sp>
-      <p:sp>
-        <p:nvSpPr>
-          <p:cNvPr id="22" name="TextBox 21"/>
-          <p:cNvSpPr txBox="1"/>
-          <p:nvPr/>
-        </p:nvSpPr>
-        <p:spPr>
-          <a:xfrm>
-            <a:off x="786384" y="3822192"/>
-            <a:ext cx="3824514" cy="256032"/>
-          </a:xfrm>
-          <a:prstGeom prst="rect">
-            <a:avLst/>
-          </a:prstGeom>
-          <a:noFill/>
-        </p:spPr>
-        <p:txBody>
-          <a:bodyPr wrap="square" anchor="t" lIns="36000" rIns="36000" tIns="18000" bIns="18000">
-            <a:spAutoFit/>
-          </a:bodyPr>
-          <a:lstStyle/>
-          <a:p>
-            <a:pPr algn="l"/>
-            <a:r>
-              <a:rPr sz="1456" b="1" i="0">
-                <a:solidFill>
-                  <a:srgbClr val="1E293B"/>
-                </a:solidFill>
-                <a:latin typeface="Arial"/>
-              </a:rPr>
-              <a:t>Drop-in compatible</a:t>
-            </a:r>
-          </a:p>
-        </p:txBody>
-      </p:sp>
-      <p:sp>
-        <p:nvSpPr>
-          <p:cNvPr id="23" name="TextBox 22"/>
-          <p:cNvSpPr txBox="1"/>
-          <p:nvPr/>
-        </p:nvSpPr>
-        <p:spPr>
-          <a:xfrm>
-            <a:off x="786384" y="4078224"/>
-            <a:ext cx="3824514" cy="256032"/>
-          </a:xfrm>
-          <a:prstGeom prst="rect">
-            <a:avLst/>
-          </a:prstGeom>
-          <a:noFill/>
-        </p:spPr>
-        <p:txBody>
-          <a:bodyPr wrap="square" anchor="t" lIns="36000" rIns="36000" tIns="18000" bIns="18000">
-            <a:spAutoFit/>
-          </a:bodyPr>
-          <a:lstStyle/>
-          <a:p>
-            <a:pPr algn="l"/>
-            <a:r>
-              <a:rPr sz="1232" b="0" i="0">
-                <a:solidFill>
-                  <a:srgbClr val="64748B"/>
-                </a:solidFill>
-                <a:latin typeface="Arial"/>
-              </a:rPr>
-              <a:t>Sprayable fluid — no new infrastructure needed</a:t>
-            </a:r>
-          </a:p>
-        </p:txBody>
-      </p:sp>
-      <p:sp>
-        <p:nvSpPr>
-          <p:cNvPr id="24" name="Rounded Rectangle 23"/>
+              <a:t>Tunable flow for spray/pump; suited to large-scale manufacturing</a:t>
+            </a:r>
+          </a:p>
+        </p:txBody>
+      </p:sp>
+      <p:sp>
+        <p:nvSpPr>
+          <p:cNvPr id="27" name="Rounded Rectangle 26"/>
           <p:cNvSpPr/>
           <p:nvPr/>
         </p:nvSpPr>
@@ -55203,7 +53707,7 @@
       </p:sp>
       <p:sp>
         <p:nvSpPr>
-          <p:cNvPr id="25" name="Rectangle 24"/>
+          <p:cNvPr id="28" name="Rectangle 27"/>
           <p:cNvSpPr/>
           <p:nvPr/>
         </p:nvSpPr>
@@ -55247,7 +53751,7 @@
       </p:sp>
       <p:sp>
         <p:nvSpPr>
-          <p:cNvPr id="26" name="TextBox 25"/>
+          <p:cNvPr id="29" name="TextBox 28"/>
           <p:cNvSpPr txBox="1"/>
           <p:nvPr/>
         </p:nvSpPr>
@@ -55282,7 +53786,7 @@
       </p:sp>
       <p:sp>
         <p:nvSpPr>
-          <p:cNvPr id="27" name="TextBox 26"/>
+          <p:cNvPr id="30" name="TextBox 29"/>
           <p:cNvSpPr txBox="1"/>
           <p:nvPr/>
         </p:nvSpPr>
@@ -55317,7 +53821,7 @@
       </p:sp>
       <p:sp>
         <p:nvSpPr>
-          <p:cNvPr id="28" name="TextBox 27"/>
+          <p:cNvPr id="31" name="TextBox 30"/>
           <p:cNvSpPr txBox="1"/>
           <p:nvPr/>
         </p:nvSpPr>
@@ -55352,7 +53856,7 @@
       </p:sp>
       <p:sp>
         <p:nvSpPr>
-          <p:cNvPr id="29" name="Rounded Rectangle 28"/>
+          <p:cNvPr id="32" name="Rounded Rectangle 31"/>
           <p:cNvSpPr/>
           <p:nvPr/>
         </p:nvSpPr>
@@ -55400,7 +53904,7 @@
       </p:sp>
       <p:sp>
         <p:nvSpPr>
-          <p:cNvPr id="30" name="Rectangle 29"/>
+          <p:cNvPr id="33" name="Rectangle 32"/>
           <p:cNvSpPr/>
           <p:nvPr/>
         </p:nvSpPr>
@@ -55444,7 +53948,7 @@
       </p:sp>
       <p:sp>
         <p:nvSpPr>
-          <p:cNvPr id="31" name="TextBox 30"/>
+          <p:cNvPr id="34" name="TextBox 33"/>
           <p:cNvSpPr txBox="1"/>
           <p:nvPr/>
         </p:nvSpPr>
@@ -55479,7 +53983,7 @@
       </p:sp>
       <p:sp>
         <p:nvSpPr>
-          <p:cNvPr id="32" name="TextBox 31"/>
+          <p:cNvPr id="35" name="TextBox 34"/>
           <p:cNvSpPr txBox="1"/>
           <p:nvPr/>
         </p:nvSpPr>
@@ -55514,7 +54018,7 @@
       </p:sp>
       <p:sp>
         <p:nvSpPr>
-          <p:cNvPr id="33" name="TextBox 32"/>
+          <p:cNvPr id="36" name="TextBox 35"/>
           <p:cNvSpPr txBox="1"/>
           <p:nvPr/>
         </p:nvSpPr>
@@ -55549,7 +54053,7 @@
       </p:sp>
       <p:sp>
         <p:nvSpPr>
-          <p:cNvPr id="34" name="TextBox 33"/>
+          <p:cNvPr id="37" name="TextBox 36"/>
           <p:cNvSpPr txBox="1"/>
           <p:nvPr/>
         </p:nvSpPr>
@@ -55584,7 +54088,7 @@
       </p:sp>
       <p:sp>
         <p:nvSpPr>
-          <p:cNvPr id="35" name="Rounded Rectangle 34"/>
+          <p:cNvPr id="38" name="Rounded Rectangle 37"/>
           <p:cNvSpPr/>
           <p:nvPr/>
         </p:nvSpPr>
@@ -55632,7 +54136,7 @@
       </p:sp>
       <p:sp>
         <p:nvSpPr>
-          <p:cNvPr id="36" name="Rectangle 35"/>
+          <p:cNvPr id="39" name="Rectangle 38"/>
           <p:cNvSpPr/>
           <p:nvPr/>
         </p:nvSpPr>
@@ -55676,7 +54180,7 @@
       </p:sp>
       <p:sp>
         <p:nvSpPr>
-          <p:cNvPr id="37" name="TextBox 36"/>
+          <p:cNvPr id="40" name="TextBox 39"/>
           <p:cNvSpPr txBox="1"/>
           <p:nvPr/>
         </p:nvSpPr>
@@ -55711,7 +54215,7 @@
       </p:sp>
       <p:sp>
         <p:nvSpPr>
-          <p:cNvPr id="38" name="TextBox 37"/>
+          <p:cNvPr id="41" name="TextBox 40"/>
           <p:cNvSpPr txBox="1"/>
           <p:nvPr/>
         </p:nvSpPr>
@@ -55746,7 +54250,7 @@
       </p:sp>
       <p:sp>
         <p:nvSpPr>
-          <p:cNvPr id="39" name="TextBox 38"/>
+          <p:cNvPr id="42" name="TextBox 41"/>
           <p:cNvSpPr txBox="1"/>
           <p:nvPr/>
         </p:nvSpPr>
@@ -55781,7 +54285,7 @@
       </p:sp>
       <p:sp>
         <p:nvSpPr>
-          <p:cNvPr id="40" name="TextBox 39"/>
+          <p:cNvPr id="43" name="TextBox 42"/>
           <p:cNvSpPr txBox="1"/>
           <p:nvPr/>
         </p:nvSpPr>
@@ -56422,7 +54926,7 @@
                 </a:solidFill>
                 <a:latin typeface="Arial"/>
               </a:rPr>
-              <a:t>8 / 38</a:t>
+              <a:t>8 / 37</a:t>
             </a:r>
           </a:p>
         </p:txBody>
@@ -56765,7 +55269,7 @@
                 </a:solidFill>
                 <a:latin typeface="Arial"/>
               </a:rPr>
-              <a:t>9 / 38</a:t>
+              <a:t>9 / 37</a:t>
             </a:r>
           </a:p>
         </p:txBody>

--- a/slides_en.pptx
+++ b/slides_en.pptx
@@ -3844,7 +3844,7 @@
                 </a:solidFill>
                 <a:latin typeface="Arial"/>
               </a:rPr>
-              <a:t>Self-Protection Mechanism via Heat Activation</a:t>
+              <a:t>Mechanism: Spray, Adhesion, and Flame Protection</a:t>
             </a:r>
           </a:p>
         </p:txBody>
@@ -3958,7 +3958,7 @@
                 </a:solidFill>
                 <a:latin typeface="Arial"/>
               </a:rPr>
-              <a:t>Heat-Activated</a:t>
+              <a:t>Shear-Thinning and</a:t>
             </a:r>
           </a:p>
         </p:txBody>
@@ -3993,7 +3993,7 @@
                 </a:solidFill>
                 <a:latin typeface="Arial"/>
               </a:rPr>
-              <a:t>Self-Protection Mechanism</a:t>
+              <a:t>Self-Healing Are Key</a:t>
             </a:r>
           </a:p>
         </p:txBody>
@@ -4072,7 +4072,7 @@
                 </a:solidFill>
                 <a:latin typeface="Arial"/>
               </a:rPr>
-              <a:t>The biomimetic hydrogel developed in this work transforms into a silica aerogel when exposed to flame.</a:t>
+              <a:t>Shear strain during spraying reduces viscosity (sol-like); upon wall contact, self-healing instantly restores the gel network.</a:t>
             </a:r>
           </a:p>
         </p:txBody>
@@ -4107,7 +4107,7 @@
                 </a:solidFill>
                 <a:latin typeface="Arial"/>
               </a:rPr>
-              <a:t>Even after complete desiccation, it functions as a robust thermal barrier, shielding the substrate from ignition over extended periods.</a:t>
+              <a:t>When exposed to flame, the gel transforms into a silica aerogel, protecting the substrate as a thermal barrier even after complete desiccation.</a:t>
             </a:r>
           </a:p>
         </p:txBody>
@@ -4121,7 +4121,7 @@
         <p:spPr>
           <a:xfrm>
             <a:off x="365760" y="3785616"/>
-            <a:ext cx="1497744" cy="640080"/>
+            <a:ext cx="1114164" cy="640080"/>
           </a:xfrm>
           <a:prstGeom prst="roundRect">
             <a:avLst>
@@ -4169,7 +4169,7 @@
         <p:spPr>
           <a:xfrm>
             <a:off x="365760" y="3785616"/>
-            <a:ext cx="1497744" cy="36576"/>
+            <a:ext cx="1114164" cy="36576"/>
           </a:xfrm>
           <a:prstGeom prst="rect">
             <a:avLst/>
@@ -4213,7 +4213,7 @@
         <p:spPr>
           <a:xfrm>
             <a:off x="365760" y="3785616"/>
-            <a:ext cx="1497744" cy="640080"/>
+            <a:ext cx="1114164" cy="640080"/>
           </a:xfrm>
           <a:prstGeom prst="rect">
             <a:avLst/>
@@ -4228,25 +4228,25 @@
           <a:p>
             <a:pPr algn="ctr"/>
             <a:r>
-              <a:rPr sz="1120" b="1" i="0">
+              <a:rPr sz="1008" b="1" i="0">
                 <a:solidFill>
                   <a:srgbClr val="1E293B"/>
                 </a:solidFill>
                 <a:latin typeface="Arial"/>
               </a:rPr>
-              <a:t>Sol</a:t>
-            </a:r>
-          </a:p>
-          <a:p>
-            <a:pPr algn="ctr"/>
-            <a:r>
-              <a:rPr sz="1120" b="1" i="0">
+              <a:t>Gel</a:t>
+            </a:r>
+          </a:p>
+          <a:p>
+            <a:pPr algn="ctr"/>
+            <a:r>
+              <a:rPr sz="1008" b="1" i="0">
                 <a:solidFill>
                   <a:srgbClr val="1E293B"/>
                 </a:solidFill>
                 <a:latin typeface="Arial"/>
               </a:rPr>
-              <a:t>(spray)</a:t>
+              <a:t>(at rest)</a:t>
             </a:r>
           </a:p>
         </p:txBody>
@@ -4259,8 +4259,8 @@
         </p:nvSpPr>
         <p:spPr>
           <a:xfrm>
-            <a:off x="1872648" y="3785616"/>
-            <a:ext cx="91440" cy="640080"/>
+            <a:off x="1489068" y="3785616"/>
+            <a:ext cx="73152" cy="640080"/>
           </a:xfrm>
           <a:prstGeom prst="rect">
             <a:avLst/>
@@ -4275,7 +4275,7 @@
           <a:p>
             <a:pPr algn="ctr"/>
             <a:r>
-              <a:rPr sz="1232" b="0" i="0">
+              <a:rPr sz="1120" b="0" i="0">
                 <a:solidFill>
                   <a:srgbClr val="64748B"/>
                 </a:solidFill>
@@ -4294,8 +4294,8 @@
         </p:nvSpPr>
         <p:spPr>
           <a:xfrm>
-            <a:off x="1954944" y="3785616"/>
-            <a:ext cx="1497744" cy="640080"/>
+            <a:off x="1553076" y="3785616"/>
+            <a:ext cx="1114164" cy="640080"/>
           </a:xfrm>
           <a:prstGeom prst="roundRect">
             <a:avLst>
@@ -4342,8 +4342,8 @@
         </p:nvSpPr>
         <p:spPr>
           <a:xfrm>
-            <a:off x="1954944" y="3785616"/>
-            <a:ext cx="1497744" cy="36576"/>
+            <a:off x="1553076" y="3785616"/>
+            <a:ext cx="1114164" cy="36576"/>
           </a:xfrm>
           <a:prstGeom prst="rect">
             <a:avLst/>
@@ -4386,8 +4386,8 @@
         </p:nvSpPr>
         <p:spPr>
           <a:xfrm>
-            <a:off x="1954944" y="3785616"/>
-            <a:ext cx="1497744" cy="640080"/>
+            <a:off x="1553076" y="3785616"/>
+            <a:ext cx="1114164" cy="640080"/>
           </a:xfrm>
           <a:prstGeom prst="rect">
             <a:avLst/>
@@ -4402,25 +4402,25 @@
           <a:p>
             <a:pPr algn="ctr"/>
             <a:r>
-              <a:rPr sz="1120" b="1" i="0">
+              <a:rPr sz="1008" b="1" i="0">
                 <a:solidFill>
                   <a:srgbClr val="1E293B"/>
                 </a:solidFill>
                 <a:latin typeface="Arial"/>
               </a:rPr>
-              <a:t>Thermal gel</a:t>
-            </a:r>
-          </a:p>
-          <a:p>
-            <a:pPr algn="ctr"/>
-            <a:r>
-              <a:rPr sz="1120" b="1" i="0">
+              <a:t>Sol-like</a:t>
+            </a:r>
+          </a:p>
+          <a:p>
+            <a:pPr algn="ctr"/>
+            <a:r>
+              <a:rPr sz="1008" b="1" i="0">
                 <a:solidFill>
                   <a:srgbClr val="1E293B"/>
                 </a:solidFill>
                 <a:latin typeface="Arial"/>
               </a:rPr>
-              <a:t>(contact)</a:t>
+              <a:t>(spraying)</a:t>
             </a:r>
           </a:p>
         </p:txBody>
@@ -4433,8 +4433,8 @@
         </p:nvSpPr>
         <p:spPr>
           <a:xfrm>
-            <a:off x="3461833" y="3785616"/>
-            <a:ext cx="91440" cy="640080"/>
+            <a:off x="2676384" y="3785616"/>
+            <a:ext cx="73152" cy="640080"/>
           </a:xfrm>
           <a:prstGeom prst="rect">
             <a:avLst/>
@@ -4449,7 +4449,7 @@
           <a:p>
             <a:pPr algn="ctr"/>
             <a:r>
-              <a:rPr sz="1232" b="0" i="0">
+              <a:rPr sz="1120" b="0" i="0">
                 <a:solidFill>
                   <a:srgbClr val="64748B"/>
                 </a:solidFill>
@@ -4468,8 +4468,182 @@
         </p:nvSpPr>
         <p:spPr>
           <a:xfrm>
-            <a:off x="3544129" y="3785616"/>
-            <a:ext cx="1497744" cy="640080"/>
+            <a:off x="2740392" y="3785616"/>
+            <a:ext cx="1114164" cy="640080"/>
+          </a:xfrm>
+          <a:prstGeom prst="roundRect">
+            <a:avLst>
+              <a:gd name="adj" fmla="val 3000"/>
+            </a:avLst>
+          </a:prstGeom>
+          <a:solidFill>
+            <a:srgbClr val="F1F5F9"/>
+          </a:solidFill>
+          <a:ln w="8890">
+            <a:solidFill>
+              <a:srgbClr val="5B8C5A"/>
+            </a:solidFill>
+          </a:ln>
+          <a:effectLst/>
+        </p:spPr>
+        <p:style>
+          <a:lnRef idx="1">
+            <a:schemeClr val="accent1"/>
+          </a:lnRef>
+          <a:fillRef idx="3">
+            <a:schemeClr val="accent1"/>
+          </a:fillRef>
+          <a:effectRef idx="2">
+            <a:schemeClr val="accent1"/>
+          </a:effectRef>
+          <a:fontRef idx="minor">
+            <a:schemeClr val="lt1"/>
+          </a:fontRef>
+        </p:style>
+        <p:txBody>
+          <a:bodyPr rtlCol="0" anchor="ctr"/>
+          <a:lstStyle/>
+          <a:p>
+            <a:pPr algn="ctr"/>
+          </a:p>
+        </p:txBody>
+      </p:sp>
+      <p:sp>
+        <p:nvSpPr>
+          <p:cNvPr id="24" name="Rectangle 23"/>
+          <p:cNvSpPr/>
+          <p:nvPr/>
+        </p:nvSpPr>
+        <p:spPr>
+          <a:xfrm>
+            <a:off x="2740392" y="3785616"/>
+            <a:ext cx="1114164" cy="36576"/>
+          </a:xfrm>
+          <a:prstGeom prst="rect">
+            <a:avLst/>
+          </a:prstGeom>
+          <a:solidFill>
+            <a:srgbClr val="5B8C5A"/>
+          </a:solidFill>
+          <a:ln>
+            <a:noFill/>
+          </a:ln>
+          <a:effectLst/>
+        </p:spPr>
+        <p:style>
+          <a:lnRef idx="1">
+            <a:schemeClr val="accent1"/>
+          </a:lnRef>
+          <a:fillRef idx="3">
+            <a:schemeClr val="accent1"/>
+          </a:fillRef>
+          <a:effectRef idx="2">
+            <a:schemeClr val="accent1"/>
+          </a:effectRef>
+          <a:fontRef idx="minor">
+            <a:schemeClr val="lt1"/>
+          </a:fontRef>
+        </p:style>
+        <p:txBody>
+          <a:bodyPr rtlCol="0" anchor="ctr"/>
+          <a:lstStyle/>
+          <a:p>
+            <a:pPr algn="ctr"/>
+          </a:p>
+        </p:txBody>
+      </p:sp>
+      <p:sp>
+        <p:nvSpPr>
+          <p:cNvPr id="25" name="TextBox 24"/>
+          <p:cNvSpPr txBox="1"/>
+          <p:nvPr/>
+        </p:nvSpPr>
+        <p:spPr>
+          <a:xfrm>
+            <a:off x="2740392" y="3785616"/>
+            <a:ext cx="1114164" cy="640080"/>
+          </a:xfrm>
+          <a:prstGeom prst="rect">
+            <a:avLst/>
+          </a:prstGeom>
+          <a:noFill/>
+        </p:spPr>
+        <p:txBody>
+          <a:bodyPr wrap="square" anchor="ctr" lIns="36000" rIns="36000" tIns="18000" bIns="18000">
+            <a:spAutoFit/>
+          </a:bodyPr>
+          <a:lstStyle/>
+          <a:p>
+            <a:pPr algn="ctr"/>
+            <a:r>
+              <a:rPr sz="1008" b="1" i="0">
+                <a:solidFill>
+                  <a:srgbClr val="1E293B"/>
+                </a:solidFill>
+                <a:latin typeface="Arial"/>
+              </a:rPr>
+              <a:t>Self-heal gel</a:t>
+            </a:r>
+          </a:p>
+          <a:p>
+            <a:pPr algn="ctr"/>
+            <a:r>
+              <a:rPr sz="1008" b="1" i="0">
+                <a:solidFill>
+                  <a:srgbClr val="1E293B"/>
+                </a:solidFill>
+                <a:latin typeface="Arial"/>
+              </a:rPr>
+              <a:t>(on wall)</a:t>
+            </a:r>
+          </a:p>
+        </p:txBody>
+      </p:sp>
+      <p:sp>
+        <p:nvSpPr>
+          <p:cNvPr id="26" name="TextBox 25"/>
+          <p:cNvSpPr txBox="1"/>
+          <p:nvPr/>
+        </p:nvSpPr>
+        <p:spPr>
+          <a:xfrm>
+            <a:off x="3863701" y="3785616"/>
+            <a:ext cx="73152" cy="640080"/>
+          </a:xfrm>
+          <a:prstGeom prst="rect">
+            <a:avLst/>
+          </a:prstGeom>
+          <a:noFill/>
+        </p:spPr>
+        <p:txBody>
+          <a:bodyPr wrap="square" anchor="ctr" lIns="36000" rIns="36000" tIns="18000" bIns="18000">
+            <a:spAutoFit/>
+          </a:bodyPr>
+          <a:lstStyle/>
+          <a:p>
+            <a:pPr algn="ctr"/>
+            <a:r>
+              <a:rPr sz="1120" b="0" i="0">
+                <a:solidFill>
+                  <a:srgbClr val="64748B"/>
+                </a:solidFill>
+                <a:latin typeface="Arial"/>
+              </a:rPr>
+              <a:t>→</a:t>
+            </a:r>
+          </a:p>
+        </p:txBody>
+      </p:sp>
+      <p:sp>
+        <p:nvSpPr>
+          <p:cNvPr id="27" name="Rounded Rectangle 26"/>
+          <p:cNvSpPr/>
+          <p:nvPr/>
+        </p:nvSpPr>
+        <p:spPr>
+          <a:xfrm>
+            <a:off x="3927709" y="3785616"/>
+            <a:ext cx="1114164" cy="640080"/>
           </a:xfrm>
           <a:prstGeom prst="roundRect">
             <a:avLst>
@@ -4510,14 +4684,14 @@
       </p:sp>
       <p:sp>
         <p:nvSpPr>
-          <p:cNvPr id="24" name="Rectangle 23"/>
+          <p:cNvPr id="28" name="Rectangle 27"/>
           <p:cNvSpPr/>
           <p:nvPr/>
         </p:nvSpPr>
         <p:spPr>
           <a:xfrm>
-            <a:off x="3544129" y="3785616"/>
-            <a:ext cx="1497744" cy="36576"/>
+            <a:off x="3927709" y="3785616"/>
+            <a:ext cx="1114164" cy="36576"/>
           </a:xfrm>
           <a:prstGeom prst="rect">
             <a:avLst/>
@@ -4554,14 +4728,14 @@
       </p:sp>
       <p:sp>
         <p:nvSpPr>
-          <p:cNvPr id="25" name="TextBox 24"/>
-          <p:cNvSpPr txBox="1"/>
-          <p:nvPr/>
-        </p:nvSpPr>
-        <p:spPr>
-          <a:xfrm>
-            <a:off x="3544129" y="3785616"/>
-            <a:ext cx="1497744" cy="640080"/>
+          <p:cNvPr id="29" name="TextBox 28"/>
+          <p:cNvSpPr txBox="1"/>
+          <p:nvPr/>
+        </p:nvSpPr>
+        <p:spPr>
+          <a:xfrm>
+            <a:off x="3927709" y="3785616"/>
+            <a:ext cx="1114164" cy="640080"/>
           </a:xfrm>
           <a:prstGeom prst="rect">
             <a:avLst/>
@@ -4576,7 +4750,7 @@
           <a:p>
             <a:pPr algn="ctr"/>
             <a:r>
-              <a:rPr sz="1120" b="1" i="0">
+              <a:rPr sz="1008" b="1" i="0">
                 <a:solidFill>
                   <a:srgbClr val="1E293B"/>
                 </a:solidFill>
@@ -4588,20 +4762,20 @@
           <a:p>
             <a:pPr algn="ctr"/>
             <a:r>
-              <a:rPr sz="1120" b="1" i="0">
+              <a:rPr sz="1008" b="1" i="0">
                 <a:solidFill>
                   <a:srgbClr val="1E293B"/>
                 </a:solidFill>
                 <a:latin typeface="Arial"/>
               </a:rPr>
-              <a:t>(protect)</a:t>
-            </a:r>
-          </a:p>
-        </p:txBody>
-      </p:sp>
-      <p:sp>
-        <p:nvSpPr>
-          <p:cNvPr id="26" name="Rounded Rectangle 25"/>
+              <a:t>(flame)</a:t>
+            </a:r>
+          </a:p>
+        </p:txBody>
+      </p:sp>
+      <p:sp>
+        <p:nvSpPr>
+          <p:cNvPr id="30" name="Rounded Rectangle 29"/>
           <p:cNvSpPr/>
           <p:nvPr/>
         </p:nvSpPr>
@@ -4649,7 +4823,7 @@
       </p:sp>
       <p:sp>
         <p:nvSpPr>
-          <p:cNvPr id="27" name="Rectangle 26"/>
+          <p:cNvPr id="31" name="Rectangle 30"/>
           <p:cNvSpPr/>
           <p:nvPr/>
         </p:nvSpPr>
@@ -4693,7 +4867,7 @@
       </p:sp>
       <p:sp>
         <p:nvSpPr>
-          <p:cNvPr id="28" name="TextBox 27"/>
+          <p:cNvPr id="32" name="TextBox 31"/>
           <p:cNvSpPr txBox="1"/>
           <p:nvPr/>
         </p:nvSpPr>
@@ -4728,7 +4902,7 @@
       </p:sp>
       <p:sp>
         <p:nvSpPr>
-          <p:cNvPr id="29" name="TextBox 28"/>
+          <p:cNvPr id="33" name="TextBox 32"/>
           <p:cNvSpPr txBox="1"/>
           <p:nvPr/>
         </p:nvSpPr>
@@ -4763,7 +4937,7 @@
       </p:sp>
       <p:sp>
         <p:nvSpPr>
-          <p:cNvPr id="30" name="TextBox 29"/>
+          <p:cNvPr id="34" name="TextBox 33"/>
           <p:cNvSpPr txBox="1"/>
           <p:nvPr/>
         </p:nvSpPr>
@@ -6335,7 +6509,7 @@
                 </a:solidFill>
                 <a:latin typeface="Arial"/>
               </a:rPr>
-              <a:t>Methyl Cellulose (MC) Thermal Gelation: Key Property for Flame Protection</a:t>
+              <a:t>Rheological Design: Shear-Thinning and Self-Healing</a:t>
             </a:r>
           </a:p>
         </p:txBody>
@@ -6541,7 +6715,7 @@
                 </a:solidFill>
                 <a:latin typeface="Arial"/>
               </a:rPr>
-              <a:t>Photo</a:t>
+              <a:t>Fig. 2</a:t>
             </a:r>
           </a:p>
         </p:txBody>
@@ -6611,7 +6785,7 @@
                 </a:solidFill>
                 <a:latin typeface="Arial"/>
               </a:rPr>
-              <a:t>MC sol (room temp) → gel (after heating) — visual comparison</a:t>
+              <a:t>Viscosity vs. shear rate — shear-thinning behavior</a:t>
             </a:r>
           </a:p>
         </p:txBody>
@@ -6669,7 +6843,7 @@
         <p:spPr>
           <a:xfrm>
             <a:off x="365760" y="3675888"/>
-            <a:ext cx="804672" cy="274320"/>
+            <a:ext cx="1051560" cy="274320"/>
           </a:xfrm>
           <a:prstGeom prst="rect">
             <a:avLst/>
@@ -6690,7 +6864,7 @@
                 </a:solidFill>
                 <a:latin typeface="Arial"/>
               </a:rPr>
-              <a:t>LCST</a:t>
+              <a:t>Shear-thinning</a:t>
             </a:r>
           </a:p>
         </p:txBody>
@@ -6703,8 +6877,8 @@
         </p:nvSpPr>
         <p:spPr>
           <a:xfrm>
-            <a:off x="1207008" y="3675888"/>
-            <a:ext cx="4568196" cy="274320"/>
+            <a:off x="1453896" y="3675888"/>
+            <a:ext cx="4321308" cy="274320"/>
           </a:xfrm>
           <a:prstGeom prst="rect">
             <a:avLst/>
@@ -6725,7 +6899,7 @@
                 </a:solidFill>
                 <a:latin typeface="Arial"/>
               </a:rPr>
-              <a:t>~55°C gelation onset (1 wt% aqueous solution)</a:t>
+              <a:t>Flow index n &lt; 1 — reduced viscosity during spraying</a:t>
             </a:r>
           </a:p>
         </p:txBody>
@@ -6739,7 +6913,7 @@
         <p:spPr>
           <a:xfrm>
             <a:off x="365760" y="4041648"/>
-            <a:ext cx="804672" cy="274320"/>
+            <a:ext cx="1051560" cy="274320"/>
           </a:xfrm>
           <a:prstGeom prst="rect">
             <a:avLst/>
@@ -6760,7 +6934,7 @@
                 </a:solidFill>
                 <a:latin typeface="Arial"/>
               </a:rPr>
-              <a:t>Decomp.</a:t>
+              <a:t>Yield stress</a:t>
             </a:r>
           </a:p>
         </p:txBody>
@@ -6773,8 +6947,8 @@
         </p:nvSpPr>
         <p:spPr>
           <a:xfrm>
-            <a:off x="1207008" y="4041648"/>
-            <a:ext cx="4568196" cy="274320"/>
+            <a:off x="1453896" y="4041648"/>
+            <a:ext cx="4321308" cy="274320"/>
           </a:xfrm>
           <a:prstGeom prst="rect">
             <a:avLst/>
@@ -6795,7 +6969,7 @@
                 </a:solidFill>
                 <a:latin typeface="Arial"/>
               </a:rPr>
-              <a:t>~300°C thermal decomposition of organic component</a:t>
+              <a:t>~33 Pa — gel structure maintained at rest</a:t>
             </a:r>
           </a:p>
         </p:txBody>
@@ -6809,7 +6983,7 @@
         <p:spPr>
           <a:xfrm>
             <a:off x="365760" y="4407408"/>
-            <a:ext cx="804672" cy="274320"/>
+            <a:ext cx="1051560" cy="274320"/>
           </a:xfrm>
           <a:prstGeom prst="rect">
             <a:avLst/>
@@ -6830,7 +7004,7 @@
                 </a:solidFill>
                 <a:latin typeface="Arial"/>
               </a:rPr>
-              <a:t>Design</a:t>
+              <a:t>Self-healing</a:t>
             </a:r>
           </a:p>
         </p:txBody>
@@ -6843,8 +7017,8 @@
         </p:nvSpPr>
         <p:spPr>
           <a:xfrm>
-            <a:off x="1207008" y="4407408"/>
-            <a:ext cx="4568196" cy="274320"/>
+            <a:off x="1453896" y="4407408"/>
+            <a:ext cx="4321308" cy="274320"/>
           </a:xfrm>
           <a:prstGeom prst="rect">
             <a:avLst/>
@@ -6865,7 +7039,7 @@
                 </a:solidFill>
                 <a:latin typeface="Arial"/>
               </a:rPr>
-              <a:t>Liquid at room temp → instant gel on flame contact</a:t>
+              <a:t>G' recovers ~90% after strain removal</a:t>
             </a:r>
           </a:p>
         </p:txBody>
@@ -6948,7 +7122,7 @@
                 </a:solidFill>
                 <a:latin typeface="Arial"/>
               </a:rPr>
-              <a:t>LCST (Gelation onset)</a:t>
+              <a:t>Flow index n</a:t>
             </a:r>
           </a:p>
         </p:txBody>
@@ -6983,7 +7157,7 @@
                 </a:solidFill>
                 <a:latin typeface="Arial"/>
               </a:rPr>
-              <a:t>~55°C</a:t>
+              <a:t>&lt; 1</a:t>
             </a:r>
           </a:p>
         </p:txBody>
@@ -7018,7 +7192,7 @@
                 </a:solidFill>
                 <a:latin typeface="Arial"/>
               </a:rPr>
-              <a:t>1 wt% MC aqueous solution</a:t>
+              <a:t>Strong shear-thinning</a:t>
             </a:r>
           </a:p>
         </p:txBody>
@@ -7101,7 +7275,7 @@
                 </a:solidFill>
                 <a:latin typeface="Arial"/>
               </a:rPr>
-              <a:t>Thermal decomposition</a:t>
+              <a:t>Static yield stress</a:t>
             </a:r>
           </a:p>
         </p:txBody>
@@ -7132,11 +7306,11 @@
             <a:r>
               <a:rPr sz="2240" b="1" i="0">
                 <a:solidFill>
-                  <a:srgbClr val="A05656"/>
-                </a:solidFill>
-                <a:latin typeface="Arial"/>
-              </a:rPr>
-              <a:t>~300°C</a:t>
+                  <a:srgbClr val="4A7C8C"/>
+                </a:solidFill>
+                <a:latin typeface="Arial"/>
+              </a:rPr>
+              <a:t>~33 Pa</a:t>
             </a:r>
           </a:p>
         </p:txBody>
@@ -7171,7 +7345,7 @@
                 </a:solidFill>
                 <a:latin typeface="Arial"/>
               </a:rPr>
-              <a:t>TGA measurement</a:t>
+              <a:t>HEC+MC/CSP</a:t>
             </a:r>
           </a:p>
         </p:txBody>
@@ -7254,7 +7428,7 @@
                 </a:solidFill>
                 <a:latin typeface="Arial"/>
               </a:rPr>
-              <a:t>CSP sintering onset</a:t>
+              <a:t>G' recovery</a:t>
             </a:r>
           </a:p>
         </p:txBody>
@@ -7285,11 +7459,11 @@
             <a:r>
               <a:rPr sz="2240" b="1" i="0">
                 <a:solidFill>
-                  <a:srgbClr val="4A7C8C"/>
-                </a:solidFill>
-                <a:latin typeface="Arial"/>
-              </a:rPr>
-              <a:t>~200°C</a:t>
+                  <a:srgbClr val="5B8C5A"/>
+                </a:solidFill>
+                <a:latin typeface="Arial"/>
+              </a:rPr>
+              <a:t>~90%</a:t>
             </a:r>
           </a:p>
         </p:txBody>
@@ -7324,7 +7498,7 @@
                 </a:solidFill>
                 <a:latin typeface="Arial"/>
               </a:rPr>
-              <a:t>Inter-particle neck formation</a:t>
+              <a:t>After 1000 s</a:t>
             </a:r>
           </a:p>
         </p:txBody>
@@ -7405,7 +7579,7 @@
                 </a:solidFill>
                 <a:latin typeface="Arial"/>
               </a:rPr>
-              <a:t>Temperature-dependent Process</a:t>
+              <a:t>Spray-to-Flame Process</a:t>
             </a:r>
           </a:p>
         </p:txBody>
@@ -7486,7 +7660,7 @@
                 </a:solidFill>
                 <a:latin typeface="Arial"/>
               </a:rPr>
-              <a:t>~55°C</a:t>
+              <a:t>At rest</a:t>
             </a:r>
           </a:p>
         </p:txBody>
@@ -7521,7 +7695,7 @@
                 </a:solidFill>
                 <a:latin typeface="Arial"/>
               </a:rPr>
-              <a:t>MC gelation</a:t>
+              <a:t>Gel state</a:t>
             </a:r>
           </a:p>
         </p:txBody>
@@ -7556,7 +7730,7 @@
                 </a:solidFill>
                 <a:latin typeface="Arial"/>
               </a:rPr>
-              <a:t>Structure fixed</a:t>
+              <a:t>G' &gt; G''</a:t>
             </a:r>
           </a:p>
         </p:txBody>
@@ -7672,7 +7846,7 @@
                 </a:solidFill>
                 <a:latin typeface="Arial"/>
               </a:rPr>
-              <a:t>~100°C</a:t>
+              <a:t>Spraying</a:t>
             </a:r>
           </a:p>
         </p:txBody>
@@ -7707,7 +7881,7 @@
                 </a:solidFill>
                 <a:latin typeface="Arial"/>
               </a:rPr>
-              <a:t>Moisture evaporation</a:t>
+              <a:t>Shear-thinning</a:t>
             </a:r>
           </a:p>
         </p:txBody>
@@ -7742,7 +7916,7 @@
                 </a:solidFill>
                 <a:latin typeface="Arial"/>
               </a:rPr>
-              <a:t>Foaming &amp; expansion</a:t>
+              <a:t>Low viscosity</a:t>
             </a:r>
           </a:p>
         </p:txBody>
@@ -7858,7 +8032,7 @@
                 </a:solidFill>
                 <a:latin typeface="Arial"/>
               </a:rPr>
-              <a:t>~200°C</a:t>
+              <a:t>On wall</a:t>
             </a:r>
           </a:p>
         </p:txBody>
@@ -7893,7 +8067,7 @@
                 </a:solidFill>
                 <a:latin typeface="Arial"/>
               </a:rPr>
-              <a:t>CSP sintering</a:t>
+              <a:t>Self-healing</a:t>
             </a:r>
           </a:p>
         </p:txBody>
@@ -7928,7 +8102,7 @@
                 </a:solidFill>
                 <a:latin typeface="Arial"/>
               </a:rPr>
-              <a:t>Grain boundary formation</a:t>
+              <a:t>G' recovery</a:t>
             </a:r>
           </a:p>
         </p:txBody>
@@ -8044,7 +8218,7 @@
                 </a:solidFill>
                 <a:latin typeface="Arial"/>
               </a:rPr>
-              <a:t>&gt;300°C</a:t>
+              <a:t>Flame</a:t>
             </a:r>
           </a:p>
         </p:txBody>
@@ -8079,7 +8253,7 @@
                 </a:solidFill>
                 <a:latin typeface="Arial"/>
               </a:rPr>
-              <a:t>Organic decomposition</a:t>
+              <a:t>Aerogel</a:t>
             </a:r>
           </a:p>
         </p:txBody>
@@ -8114,7 +8288,7 @@
                 </a:solidFill>
                 <a:latin typeface="Arial"/>
               </a:rPr>
-              <a:t>Pure silica layer</a:t>
+              <a:t>Porous silica</a:t>
             </a:r>
           </a:p>
         </p:txBody>

--- a/slides_en.pptx
+++ b/slides_en.pptx
@@ -3937,64 +3937,77 @@
         <p:spPr>
           <a:xfrm>
             <a:off x="365760" y="859536"/>
-            <a:ext cx="4676113" cy="640080"/>
-          </a:xfrm>
-          <a:prstGeom prst="rect">
-            <a:avLst/>
-          </a:prstGeom>
-          <a:noFill/>
-        </p:spPr>
-        <p:txBody>
-          <a:bodyPr wrap="square" anchor="t" lIns="36000" rIns="36000" tIns="18000" bIns="18000">
-            <a:spAutoFit/>
-          </a:bodyPr>
-          <a:lstStyle/>
-          <a:p>
-            <a:pPr algn="l"/>
-            <a:r>
-              <a:rPr sz="2912" b="1" i="0">
+            <a:ext cx="11460175" cy="475488"/>
+          </a:xfrm>
+          <a:prstGeom prst="rect">
+            <a:avLst/>
+          </a:prstGeom>
+          <a:noFill/>
+        </p:spPr>
+        <p:txBody>
+          <a:bodyPr wrap="square" anchor="ctr" lIns="36000" rIns="36000" tIns="18000" bIns="18000">
+            <a:spAutoFit/>
+          </a:bodyPr>
+          <a:lstStyle/>
+          <a:p>
+            <a:pPr algn="l"/>
+            <a:r>
+              <a:rPr sz="1680" b="1" i="0">
                 <a:solidFill>
                   <a:srgbClr val="1E293B"/>
                 </a:solidFill>
                 <a:latin typeface="Arial"/>
               </a:rPr>
-              <a:t>Shear-Thinning and</a:t>
-            </a:r>
-          </a:p>
-        </p:txBody>
-      </p:sp>
-      <p:sp>
-        <p:nvSpPr>
-          <p:cNvPr id="11" name="TextBox 10"/>
-          <p:cNvSpPr txBox="1"/>
-          <p:nvPr/>
-        </p:nvSpPr>
-        <p:spPr>
-          <a:xfrm>
-            <a:off x="365760" y="1481328"/>
-            <a:ext cx="4676113" cy="640080"/>
-          </a:xfrm>
-          <a:prstGeom prst="rect">
-            <a:avLst/>
-          </a:prstGeom>
-          <a:noFill/>
-        </p:spPr>
-        <p:txBody>
-          <a:bodyPr wrap="square" anchor="t" lIns="36000" rIns="36000" tIns="18000" bIns="18000">
-            <a:spAutoFit/>
-          </a:bodyPr>
-          <a:lstStyle/>
-          <a:p>
-            <a:pPr algn="l"/>
-            <a:r>
-              <a:rPr sz="2912" b="1" i="0">
-                <a:solidFill>
-                  <a:srgbClr val="1E293B"/>
-                </a:solidFill>
-                <a:latin typeface="Arial"/>
-              </a:rPr>
-              <a:t>Self-Healing Are Key</a:t>
-            </a:r>
+              <a:t>Not temperature, but shear and self-healing govern the spray-to-adhesion behavior.</a:t>
+            </a:r>
+          </a:p>
+        </p:txBody>
+      </p:sp>
+      <p:sp>
+        <p:nvSpPr>
+          <p:cNvPr id="11" name="Rounded Rectangle 10"/>
+          <p:cNvSpPr/>
+          <p:nvPr/>
+        </p:nvSpPr>
+        <p:spPr>
+          <a:xfrm>
+            <a:off x="365760" y="1463040"/>
+            <a:ext cx="2659303" cy="3200400"/>
+          </a:xfrm>
+          <a:prstGeom prst="roundRect">
+            <a:avLst>
+              <a:gd name="adj" fmla="val 4000"/>
+            </a:avLst>
+          </a:prstGeom>
+          <a:solidFill>
+            <a:srgbClr val="F1F5F9"/>
+          </a:solidFill>
+          <a:ln w="6350">
+            <a:solidFill>
+              <a:srgbClr val="E2E8F0"/>
+            </a:solidFill>
+          </a:ln>
+          <a:effectLst/>
+        </p:spPr>
+        <p:style>
+          <a:lnRef idx="1">
+            <a:schemeClr val="accent1"/>
+          </a:lnRef>
+          <a:fillRef idx="3">
+            <a:schemeClr val="accent1"/>
+          </a:fillRef>
+          <a:effectRef idx="2">
+            <a:schemeClr val="accent1"/>
+          </a:effectRef>
+          <a:fontRef idx="minor">
+            <a:schemeClr val="lt1"/>
+          </a:fontRef>
+        </p:style>
+        <p:txBody>
+          <a:bodyPr rtlCol="0" anchor="ctr"/>
+          <a:lstStyle/>
+          <a:p>
+            <a:pPr algn="ctr"/>
           </a:p>
         </p:txBody>
       </p:sp>
@@ -4006,8 +4019,8 @@
         </p:nvSpPr>
         <p:spPr>
           <a:xfrm>
-            <a:off x="365760" y="2286000"/>
-            <a:ext cx="45720" cy="1645920"/>
+            <a:off x="365760" y="1463040"/>
+            <a:ext cx="2659303" cy="54864"/>
           </a:xfrm>
           <a:prstGeom prst="rect">
             <a:avLst/>
@@ -4050,8 +4063,157 @@
         </p:nvSpPr>
         <p:spPr>
           <a:xfrm>
-            <a:off x="530352" y="2340864"/>
-            <a:ext cx="4511521" cy="512064"/>
+            <a:off x="548640" y="1627632"/>
+            <a:ext cx="2293543" cy="310896"/>
+          </a:xfrm>
+          <a:prstGeom prst="rect">
+            <a:avLst/>
+          </a:prstGeom>
+          <a:noFill/>
+        </p:spPr>
+        <p:txBody>
+          <a:bodyPr wrap="square" anchor="t" lIns="36000" rIns="36000" tIns="18000" bIns="18000">
+            <a:spAutoFit/>
+          </a:bodyPr>
+          <a:lstStyle/>
+          <a:p>
+            <a:pPr algn="l"/>
+            <a:r>
+              <a:rPr sz="1456" b="1" i="0">
+                <a:solidFill>
+                  <a:srgbClr val="3B5174"/>
+                </a:solidFill>
+                <a:latin typeface="Arial"/>
+              </a:rPr>
+              <a:t>01</a:t>
+            </a:r>
+          </a:p>
+        </p:txBody>
+      </p:sp>
+      <p:sp>
+        <p:nvSpPr>
+          <p:cNvPr id="14" name="TextBox 13"/>
+          <p:cNvSpPr txBox="1"/>
+          <p:nvPr/>
+        </p:nvSpPr>
+        <p:spPr>
+          <a:xfrm>
+            <a:off x="548640" y="1956816"/>
+            <a:ext cx="2293543" cy="274320"/>
+          </a:xfrm>
+          <a:prstGeom prst="rect">
+            <a:avLst/>
+          </a:prstGeom>
+          <a:noFill/>
+        </p:spPr>
+        <p:txBody>
+          <a:bodyPr wrap="square" anchor="t" lIns="36000" rIns="36000" tIns="18000" bIns="18000">
+            <a:spAutoFit/>
+          </a:bodyPr>
+          <a:lstStyle/>
+          <a:p>
+            <a:pPr algn="l"/>
+            <a:r>
+              <a:rPr sz="1344" b="1" i="0">
+                <a:solidFill>
+                  <a:srgbClr val="64748B"/>
+                </a:solidFill>
+                <a:latin typeface="Arial"/>
+              </a:rPr>
+              <a:t>At rest</a:t>
+            </a:r>
+          </a:p>
+        </p:txBody>
+      </p:sp>
+      <p:sp>
+        <p:nvSpPr>
+          <p:cNvPr id="15" name="TextBox 14"/>
+          <p:cNvSpPr txBox="1"/>
+          <p:nvPr/>
+        </p:nvSpPr>
+        <p:spPr>
+          <a:xfrm>
+            <a:off x="548640" y="2304288"/>
+            <a:ext cx="2293543" cy="512064"/>
+          </a:xfrm>
+          <a:prstGeom prst="rect">
+            <a:avLst/>
+          </a:prstGeom>
+          <a:noFill/>
+        </p:spPr>
+        <p:txBody>
+          <a:bodyPr wrap="square" anchor="t" lIns="36000" rIns="36000" tIns="18000" bIns="18000">
+            <a:spAutoFit/>
+          </a:bodyPr>
+          <a:lstStyle/>
+          <a:p>
+            <a:pPr algn="l"/>
+            <a:r>
+              <a:rPr sz="2240" b="1" i="0">
+                <a:solidFill>
+                  <a:srgbClr val="1E293B"/>
+                </a:solidFill>
+                <a:latin typeface="Arial"/>
+              </a:rPr>
+              <a:t>Gel</a:t>
+            </a:r>
+          </a:p>
+        </p:txBody>
+      </p:sp>
+      <p:sp>
+        <p:nvSpPr>
+          <p:cNvPr id="16" name="Rectangle 15"/>
+          <p:cNvSpPr/>
+          <p:nvPr/>
+        </p:nvSpPr>
+        <p:spPr>
+          <a:xfrm>
+            <a:off x="548640" y="2907792"/>
+            <a:ext cx="2293543" cy="13716"/>
+          </a:xfrm>
+          <a:prstGeom prst="rect">
+            <a:avLst/>
+          </a:prstGeom>
+          <a:solidFill>
+            <a:srgbClr val="E2E8F0"/>
+          </a:solidFill>
+          <a:ln>
+            <a:noFill/>
+          </a:ln>
+          <a:effectLst/>
+        </p:spPr>
+        <p:style>
+          <a:lnRef idx="1">
+            <a:schemeClr val="accent1"/>
+          </a:lnRef>
+          <a:fillRef idx="3">
+            <a:schemeClr val="accent1"/>
+          </a:fillRef>
+          <a:effectRef idx="2">
+            <a:schemeClr val="accent1"/>
+          </a:effectRef>
+          <a:fontRef idx="minor">
+            <a:schemeClr val="lt1"/>
+          </a:fontRef>
+        </p:style>
+        <p:txBody>
+          <a:bodyPr rtlCol="0" anchor="ctr"/>
+          <a:lstStyle/>
+          <a:p>
+            <a:pPr algn="ctr"/>
+          </a:p>
+        </p:txBody>
+      </p:sp>
+      <p:sp>
+        <p:nvSpPr>
+          <p:cNvPr id="17" name="TextBox 16"/>
+          <p:cNvSpPr txBox="1"/>
+          <p:nvPr/>
+        </p:nvSpPr>
+        <p:spPr>
+          <a:xfrm>
+            <a:off x="548640" y="3035808"/>
+            <a:ext cx="2293543" cy="1005840"/>
           </a:xfrm>
           <a:prstGeom prst="rect">
             <a:avLst/>
@@ -4068,68 +4230,33 @@
             <a:r>
               <a:rPr sz="1344" b="0" i="0">
                 <a:solidFill>
-                  <a:srgbClr val="334155"/>
-                </a:solidFill>
-                <a:latin typeface="Arial"/>
-              </a:rPr>
-              <a:t>Shear strain during spraying reduces viscosity (sol-like); upon wall contact, self-healing instantly restores the gel network.</a:t>
-            </a:r>
-          </a:p>
-        </p:txBody>
-      </p:sp>
-      <p:sp>
-        <p:nvSpPr>
-          <p:cNvPr id="14" name="TextBox 13"/>
-          <p:cNvSpPr txBox="1"/>
-          <p:nvPr/>
-        </p:nvSpPr>
-        <p:spPr>
-          <a:xfrm>
-            <a:off x="530352" y="2962656"/>
-            <a:ext cx="4511521" cy="512064"/>
-          </a:xfrm>
-          <a:prstGeom prst="rect">
-            <a:avLst/>
-          </a:prstGeom>
-          <a:noFill/>
-        </p:spPr>
-        <p:txBody>
-          <a:bodyPr wrap="square" anchor="t" lIns="36000" rIns="36000" tIns="18000" bIns="18000">
-            <a:spAutoFit/>
-          </a:bodyPr>
-          <a:lstStyle/>
-          <a:p>
-            <a:pPr algn="l"/>
-            <a:r>
-              <a:rPr sz="1344" b="0" i="0">
-                <a:solidFill>
-                  <a:srgbClr val="334155"/>
-                </a:solidFill>
-                <a:latin typeface="Arial"/>
-              </a:rPr>
-              <a:t>When exposed to flame, the gel transforms into a silica aerogel, protecting the substrate as a thermal barrier even after complete desiccation.</a:t>
-            </a:r>
-          </a:p>
-        </p:txBody>
-      </p:sp>
-      <p:sp>
-        <p:nvSpPr>
-          <p:cNvPr id="15" name="Rounded Rectangle 14"/>
+                  <a:srgbClr val="475569"/>
+                </a:solidFill>
+                <a:latin typeface="Arial"/>
+              </a:rPr>
+              <a:t>High-viscosity elastic gel. G' &gt; G'' holds structure.</a:t>
+            </a:r>
+          </a:p>
+        </p:txBody>
+      </p:sp>
+      <p:sp>
+        <p:nvSpPr>
+          <p:cNvPr id="18" name="Rounded Rectangle 17"/>
           <p:cNvSpPr/>
           <p:nvPr/>
         </p:nvSpPr>
         <p:spPr>
           <a:xfrm>
-            <a:off x="365760" y="3785616"/>
-            <a:ext cx="1114164" cy="640080"/>
+            <a:off x="548640" y="4078224"/>
+            <a:ext cx="2293543" cy="420624"/>
           </a:xfrm>
           <a:prstGeom prst="roundRect">
             <a:avLst>
-              <a:gd name="adj" fmla="val 3000"/>
+              <a:gd name="adj" fmla="val 6000"/>
             </a:avLst>
           </a:prstGeom>
           <a:solidFill>
-            <a:srgbClr val="F1F5F9"/>
+            <a:srgbClr val="FFFFFF"/>
           </a:solidFill>
           <a:ln w="8890">
             <a:solidFill>
@@ -4162,20 +4289,138 @@
       </p:sp>
       <p:sp>
         <p:nvSpPr>
-          <p:cNvPr id="16" name="Rectangle 15"/>
+          <p:cNvPr id="19" name="TextBox 18"/>
+          <p:cNvSpPr txBox="1"/>
+          <p:nvPr/>
+        </p:nvSpPr>
+        <p:spPr>
+          <a:xfrm>
+            <a:off x="548640" y="4078224"/>
+            <a:ext cx="2293543" cy="420624"/>
+          </a:xfrm>
+          <a:prstGeom prst="rect">
+            <a:avLst/>
+          </a:prstGeom>
+          <a:noFill/>
+        </p:spPr>
+        <p:txBody>
+          <a:bodyPr wrap="square" anchor="ctr" lIns="36000" rIns="36000" tIns="18000" bIns="18000">
+            <a:spAutoFit/>
+          </a:bodyPr>
+          <a:lstStyle/>
+          <a:p>
+            <a:pPr algn="ctr"/>
+            <a:r>
+              <a:rPr sz="1120" b="1" i="0">
+                <a:solidFill>
+                  <a:srgbClr val="3B5174"/>
+                </a:solidFill>
+                <a:latin typeface="Arial"/>
+              </a:rPr>
+              <a:t>Yield stress ~33 Pa</a:t>
+            </a:r>
+          </a:p>
+        </p:txBody>
+      </p:sp>
+      <p:sp>
+        <p:nvSpPr>
+          <p:cNvPr id="20" name="TextBox 19"/>
+          <p:cNvSpPr txBox="1"/>
+          <p:nvPr/>
+        </p:nvSpPr>
+        <p:spPr>
+          <a:xfrm>
+            <a:off x="3025063" y="1463040"/>
+            <a:ext cx="274320" cy="3200400"/>
+          </a:xfrm>
+          <a:prstGeom prst="rect">
+            <a:avLst/>
+          </a:prstGeom>
+          <a:noFill/>
+        </p:spPr>
+        <p:txBody>
+          <a:bodyPr wrap="square" anchor="ctr" lIns="36000" rIns="36000" tIns="18000" bIns="18000">
+            <a:spAutoFit/>
+          </a:bodyPr>
+          <a:lstStyle/>
+          <a:p>
+            <a:pPr algn="ctr"/>
+            <a:r>
+              <a:rPr sz="2240" b="0" i="0">
+                <a:solidFill>
+                  <a:srgbClr val="AAB4C0"/>
+                </a:solidFill>
+                <a:latin typeface="Arial"/>
+              </a:rPr>
+              <a:t>→</a:t>
+            </a:r>
+          </a:p>
+        </p:txBody>
+      </p:sp>
+      <p:sp>
+        <p:nvSpPr>
+          <p:cNvPr id="21" name="Rounded Rectangle 20"/>
           <p:cNvSpPr/>
           <p:nvPr/>
         </p:nvSpPr>
         <p:spPr>
           <a:xfrm>
-            <a:off x="365760" y="3785616"/>
-            <a:ext cx="1114164" cy="36576"/>
-          </a:xfrm>
-          <a:prstGeom prst="rect">
-            <a:avLst/>
+            <a:off x="3299383" y="1463040"/>
+            <a:ext cx="2659303" cy="3200400"/>
+          </a:xfrm>
+          <a:prstGeom prst="roundRect">
+            <a:avLst>
+              <a:gd name="adj" fmla="val 4000"/>
+            </a:avLst>
           </a:prstGeom>
           <a:solidFill>
-            <a:srgbClr val="3B5174"/>
+            <a:srgbClr val="F1F5F9"/>
+          </a:solidFill>
+          <a:ln w="6350">
+            <a:solidFill>
+              <a:srgbClr val="E2E8F0"/>
+            </a:solidFill>
+          </a:ln>
+          <a:effectLst/>
+        </p:spPr>
+        <p:style>
+          <a:lnRef idx="1">
+            <a:schemeClr val="accent1"/>
+          </a:lnRef>
+          <a:fillRef idx="3">
+            <a:schemeClr val="accent1"/>
+          </a:fillRef>
+          <a:effectRef idx="2">
+            <a:schemeClr val="accent1"/>
+          </a:effectRef>
+          <a:fontRef idx="minor">
+            <a:schemeClr val="lt1"/>
+          </a:fontRef>
+        </p:style>
+        <p:txBody>
+          <a:bodyPr rtlCol="0" anchor="ctr"/>
+          <a:lstStyle/>
+          <a:p>
+            <a:pPr algn="ctr"/>
+          </a:p>
+        </p:txBody>
+      </p:sp>
+      <p:sp>
+        <p:nvSpPr>
+          <p:cNvPr id="22" name="Rectangle 21"/>
+          <p:cNvSpPr/>
+          <p:nvPr/>
+        </p:nvSpPr>
+        <p:spPr>
+          <a:xfrm>
+            <a:off x="3299383" y="1463040"/>
+            <a:ext cx="2659303" cy="54864"/>
+          </a:xfrm>
+          <a:prstGeom prst="rect">
+            <a:avLst/>
+          </a:prstGeom>
+          <a:solidFill>
+            <a:srgbClr val="4A7C8C"/>
           </a:solidFill>
           <a:ln>
             <a:noFill/>
@@ -4206,104 +4451,206 @@
       </p:sp>
       <p:sp>
         <p:nvSpPr>
-          <p:cNvPr id="17" name="TextBox 16"/>
-          <p:cNvSpPr txBox="1"/>
-          <p:nvPr/>
-        </p:nvSpPr>
-        <p:spPr>
-          <a:xfrm>
-            <a:off x="365760" y="3785616"/>
-            <a:ext cx="1114164" cy="640080"/>
-          </a:xfrm>
-          <a:prstGeom prst="rect">
-            <a:avLst/>
-          </a:prstGeom>
-          <a:noFill/>
-        </p:spPr>
-        <p:txBody>
-          <a:bodyPr wrap="square" anchor="ctr" lIns="36000" rIns="36000" tIns="18000" bIns="18000">
-            <a:spAutoFit/>
-          </a:bodyPr>
-          <a:lstStyle/>
-          <a:p>
-            <a:pPr algn="ctr"/>
-            <a:r>
-              <a:rPr sz="1008" b="1" i="0">
+          <p:cNvPr id="23" name="TextBox 22"/>
+          <p:cNvSpPr txBox="1"/>
+          <p:nvPr/>
+        </p:nvSpPr>
+        <p:spPr>
+          <a:xfrm>
+            <a:off x="3482263" y="1627632"/>
+            <a:ext cx="2293543" cy="310896"/>
+          </a:xfrm>
+          <a:prstGeom prst="rect">
+            <a:avLst/>
+          </a:prstGeom>
+          <a:noFill/>
+        </p:spPr>
+        <p:txBody>
+          <a:bodyPr wrap="square" anchor="t" lIns="36000" rIns="36000" tIns="18000" bIns="18000">
+            <a:spAutoFit/>
+          </a:bodyPr>
+          <a:lstStyle/>
+          <a:p>
+            <a:pPr algn="l"/>
+            <a:r>
+              <a:rPr sz="1456" b="1" i="0">
+                <a:solidFill>
+                  <a:srgbClr val="4A7C8C"/>
+                </a:solidFill>
+                <a:latin typeface="Arial"/>
+              </a:rPr>
+              <a:t>02</a:t>
+            </a:r>
+          </a:p>
+        </p:txBody>
+      </p:sp>
+      <p:sp>
+        <p:nvSpPr>
+          <p:cNvPr id="24" name="TextBox 23"/>
+          <p:cNvSpPr txBox="1"/>
+          <p:nvPr/>
+        </p:nvSpPr>
+        <p:spPr>
+          <a:xfrm>
+            <a:off x="3482263" y="1956816"/>
+            <a:ext cx="2293543" cy="274320"/>
+          </a:xfrm>
+          <a:prstGeom prst="rect">
+            <a:avLst/>
+          </a:prstGeom>
+          <a:noFill/>
+        </p:spPr>
+        <p:txBody>
+          <a:bodyPr wrap="square" anchor="t" lIns="36000" rIns="36000" tIns="18000" bIns="18000">
+            <a:spAutoFit/>
+          </a:bodyPr>
+          <a:lstStyle/>
+          <a:p>
+            <a:pPr algn="l"/>
+            <a:r>
+              <a:rPr sz="1344" b="1" i="0">
+                <a:solidFill>
+                  <a:srgbClr val="64748B"/>
+                </a:solidFill>
+                <a:latin typeface="Arial"/>
+              </a:rPr>
+              <a:t>Spraying</a:t>
+            </a:r>
+          </a:p>
+        </p:txBody>
+      </p:sp>
+      <p:sp>
+        <p:nvSpPr>
+          <p:cNvPr id="25" name="TextBox 24"/>
+          <p:cNvSpPr txBox="1"/>
+          <p:nvPr/>
+        </p:nvSpPr>
+        <p:spPr>
+          <a:xfrm>
+            <a:off x="3482263" y="2304288"/>
+            <a:ext cx="2293543" cy="512064"/>
+          </a:xfrm>
+          <a:prstGeom prst="rect">
+            <a:avLst/>
+          </a:prstGeom>
+          <a:noFill/>
+        </p:spPr>
+        <p:txBody>
+          <a:bodyPr wrap="square" anchor="t" lIns="36000" rIns="36000" tIns="18000" bIns="18000">
+            <a:spAutoFit/>
+          </a:bodyPr>
+          <a:lstStyle/>
+          <a:p>
+            <a:pPr algn="l"/>
+            <a:r>
+              <a:rPr sz="2240" b="1" i="0">
                 <a:solidFill>
                   <a:srgbClr val="1E293B"/>
                 </a:solidFill>
                 <a:latin typeface="Arial"/>
               </a:rPr>
-              <a:t>Gel</a:t>
-            </a:r>
-          </a:p>
-          <a:p>
-            <a:pPr algn="ctr"/>
-            <a:r>
-              <a:rPr sz="1008" b="1" i="0">
-                <a:solidFill>
-                  <a:srgbClr val="1E293B"/>
-                </a:solidFill>
-                <a:latin typeface="Arial"/>
-              </a:rPr>
-              <a:t>(at rest)</a:t>
-            </a:r>
-          </a:p>
-        </p:txBody>
-      </p:sp>
-      <p:sp>
-        <p:nvSpPr>
-          <p:cNvPr id="18" name="TextBox 17"/>
-          <p:cNvSpPr txBox="1"/>
-          <p:nvPr/>
-        </p:nvSpPr>
-        <p:spPr>
-          <a:xfrm>
-            <a:off x="1489068" y="3785616"/>
-            <a:ext cx="73152" cy="640080"/>
-          </a:xfrm>
-          <a:prstGeom prst="rect">
-            <a:avLst/>
-          </a:prstGeom>
-          <a:noFill/>
-        </p:spPr>
-        <p:txBody>
-          <a:bodyPr wrap="square" anchor="ctr" lIns="36000" rIns="36000" tIns="18000" bIns="18000">
-            <a:spAutoFit/>
-          </a:bodyPr>
-          <a:lstStyle/>
-          <a:p>
-            <a:pPr algn="ctr"/>
-            <a:r>
-              <a:rPr sz="1120" b="0" i="0">
-                <a:solidFill>
-                  <a:srgbClr val="64748B"/>
-                </a:solidFill>
-                <a:latin typeface="Arial"/>
-              </a:rPr>
-              <a:t>→</a:t>
-            </a:r>
-          </a:p>
-        </p:txBody>
-      </p:sp>
-      <p:sp>
-        <p:nvSpPr>
-          <p:cNvPr id="19" name="Rounded Rectangle 18"/>
+              <a:t>Sol-like</a:t>
+            </a:r>
+          </a:p>
+        </p:txBody>
+      </p:sp>
+      <p:sp>
+        <p:nvSpPr>
+          <p:cNvPr id="26" name="Rectangle 25"/>
           <p:cNvSpPr/>
           <p:nvPr/>
         </p:nvSpPr>
         <p:spPr>
           <a:xfrm>
-            <a:off x="1553076" y="3785616"/>
-            <a:ext cx="1114164" cy="640080"/>
+            <a:off x="3482263" y="2907792"/>
+            <a:ext cx="2293543" cy="13716"/>
+          </a:xfrm>
+          <a:prstGeom prst="rect">
+            <a:avLst/>
+          </a:prstGeom>
+          <a:solidFill>
+            <a:srgbClr val="E2E8F0"/>
+          </a:solidFill>
+          <a:ln>
+            <a:noFill/>
+          </a:ln>
+          <a:effectLst/>
+        </p:spPr>
+        <p:style>
+          <a:lnRef idx="1">
+            <a:schemeClr val="accent1"/>
+          </a:lnRef>
+          <a:fillRef idx="3">
+            <a:schemeClr val="accent1"/>
+          </a:fillRef>
+          <a:effectRef idx="2">
+            <a:schemeClr val="accent1"/>
+          </a:effectRef>
+          <a:fontRef idx="minor">
+            <a:schemeClr val="lt1"/>
+          </a:fontRef>
+        </p:style>
+        <p:txBody>
+          <a:bodyPr rtlCol="0" anchor="ctr"/>
+          <a:lstStyle/>
+          <a:p>
+            <a:pPr algn="ctr"/>
+          </a:p>
+        </p:txBody>
+      </p:sp>
+      <p:sp>
+        <p:nvSpPr>
+          <p:cNvPr id="27" name="TextBox 26"/>
+          <p:cNvSpPr txBox="1"/>
+          <p:nvPr/>
+        </p:nvSpPr>
+        <p:spPr>
+          <a:xfrm>
+            <a:off x="3482263" y="3035808"/>
+            <a:ext cx="2293543" cy="1005840"/>
+          </a:xfrm>
+          <a:prstGeom prst="rect">
+            <a:avLst/>
+          </a:prstGeom>
+          <a:noFill/>
+        </p:spPr>
+        <p:txBody>
+          <a:bodyPr wrap="square" anchor="t" lIns="36000" rIns="36000" tIns="18000" bIns="18000">
+            <a:spAutoFit/>
+          </a:bodyPr>
+          <a:lstStyle/>
+          <a:p>
+            <a:pPr algn="l"/>
+            <a:r>
+              <a:rPr sz="1344" b="0" i="0">
+                <a:solidFill>
+                  <a:srgbClr val="475569"/>
+                </a:solidFill>
+                <a:latin typeface="Arial"/>
+              </a:rPr>
+              <a:t>Shear strain lowers viscosity; the gel flows.</a:t>
+            </a:r>
+          </a:p>
+        </p:txBody>
+      </p:sp>
+      <p:sp>
+        <p:nvSpPr>
+          <p:cNvPr id="28" name="Rounded Rectangle 27"/>
+          <p:cNvSpPr/>
+          <p:nvPr/>
+        </p:nvSpPr>
+        <p:spPr>
+          <a:xfrm>
+            <a:off x="3482263" y="4078224"/>
+            <a:ext cx="2293543" cy="420624"/>
           </a:xfrm>
           <a:prstGeom prst="roundRect">
             <a:avLst>
-              <a:gd name="adj" fmla="val 3000"/>
+              <a:gd name="adj" fmla="val 6000"/>
             </a:avLst>
           </a:prstGeom>
           <a:solidFill>
-            <a:srgbClr val="F1F5F9"/>
+            <a:srgbClr val="FFFFFF"/>
           </a:solidFill>
           <a:ln w="8890">
             <a:solidFill>
@@ -4336,20 +4683,138 @@
       </p:sp>
       <p:sp>
         <p:nvSpPr>
-          <p:cNvPr id="20" name="Rectangle 19"/>
+          <p:cNvPr id="29" name="TextBox 28"/>
+          <p:cNvSpPr txBox="1"/>
+          <p:nvPr/>
+        </p:nvSpPr>
+        <p:spPr>
+          <a:xfrm>
+            <a:off x="3482263" y="4078224"/>
+            <a:ext cx="2293543" cy="420624"/>
+          </a:xfrm>
+          <a:prstGeom prst="rect">
+            <a:avLst/>
+          </a:prstGeom>
+          <a:noFill/>
+        </p:spPr>
+        <p:txBody>
+          <a:bodyPr wrap="square" anchor="ctr" lIns="36000" rIns="36000" tIns="18000" bIns="18000">
+            <a:spAutoFit/>
+          </a:bodyPr>
+          <a:lstStyle/>
+          <a:p>
+            <a:pPr algn="ctr"/>
+            <a:r>
+              <a:rPr sz="1120" b="1" i="0">
+                <a:solidFill>
+                  <a:srgbClr val="4A7C8C"/>
+                </a:solidFill>
+                <a:latin typeface="Arial"/>
+              </a:rPr>
+              <a:t>Shear-thinning n &lt; 1</a:t>
+            </a:r>
+          </a:p>
+        </p:txBody>
+      </p:sp>
+      <p:sp>
+        <p:nvSpPr>
+          <p:cNvPr id="30" name="TextBox 29"/>
+          <p:cNvSpPr txBox="1"/>
+          <p:nvPr/>
+        </p:nvSpPr>
+        <p:spPr>
+          <a:xfrm>
+            <a:off x="5958687" y="1463040"/>
+            <a:ext cx="274320" cy="3200400"/>
+          </a:xfrm>
+          <a:prstGeom prst="rect">
+            <a:avLst/>
+          </a:prstGeom>
+          <a:noFill/>
+        </p:spPr>
+        <p:txBody>
+          <a:bodyPr wrap="square" anchor="ctr" lIns="36000" rIns="36000" tIns="18000" bIns="18000">
+            <a:spAutoFit/>
+          </a:bodyPr>
+          <a:lstStyle/>
+          <a:p>
+            <a:pPr algn="ctr"/>
+            <a:r>
+              <a:rPr sz="2240" b="0" i="0">
+                <a:solidFill>
+                  <a:srgbClr val="AAB4C0"/>
+                </a:solidFill>
+                <a:latin typeface="Arial"/>
+              </a:rPr>
+              <a:t>→</a:t>
+            </a:r>
+          </a:p>
+        </p:txBody>
+      </p:sp>
+      <p:sp>
+        <p:nvSpPr>
+          <p:cNvPr id="31" name="Rounded Rectangle 30"/>
           <p:cNvSpPr/>
           <p:nvPr/>
         </p:nvSpPr>
         <p:spPr>
           <a:xfrm>
-            <a:off x="1553076" y="3785616"/>
-            <a:ext cx="1114164" cy="36576"/>
-          </a:xfrm>
-          <a:prstGeom prst="rect">
-            <a:avLst/>
+            <a:off x="6233007" y="1463040"/>
+            <a:ext cx="2659303" cy="3200400"/>
+          </a:xfrm>
+          <a:prstGeom prst="roundRect">
+            <a:avLst>
+              <a:gd name="adj" fmla="val 4000"/>
+            </a:avLst>
           </a:prstGeom>
           <a:solidFill>
-            <a:srgbClr val="4A7C8C"/>
+            <a:srgbClr val="F1F5F9"/>
+          </a:solidFill>
+          <a:ln w="6350">
+            <a:solidFill>
+              <a:srgbClr val="E2E8F0"/>
+            </a:solidFill>
+          </a:ln>
+          <a:effectLst/>
+        </p:spPr>
+        <p:style>
+          <a:lnRef idx="1">
+            <a:schemeClr val="accent1"/>
+          </a:lnRef>
+          <a:fillRef idx="3">
+            <a:schemeClr val="accent1"/>
+          </a:fillRef>
+          <a:effectRef idx="2">
+            <a:schemeClr val="accent1"/>
+          </a:effectRef>
+          <a:fontRef idx="minor">
+            <a:schemeClr val="lt1"/>
+          </a:fontRef>
+        </p:style>
+        <p:txBody>
+          <a:bodyPr rtlCol="0" anchor="ctr"/>
+          <a:lstStyle/>
+          <a:p>
+            <a:pPr algn="ctr"/>
+          </a:p>
+        </p:txBody>
+      </p:sp>
+      <p:sp>
+        <p:nvSpPr>
+          <p:cNvPr id="32" name="Rectangle 31"/>
+          <p:cNvSpPr/>
+          <p:nvPr/>
+        </p:nvSpPr>
+        <p:spPr>
+          <a:xfrm>
+            <a:off x="6233007" y="1463040"/>
+            <a:ext cx="2659303" cy="54864"/>
+          </a:xfrm>
+          <a:prstGeom prst="rect">
+            <a:avLst/>
+          </a:prstGeom>
+          <a:solidFill>
+            <a:srgbClr val="5B8C5A"/>
           </a:solidFill>
           <a:ln>
             <a:noFill/>
@@ -4380,104 +4845,206 @@
       </p:sp>
       <p:sp>
         <p:nvSpPr>
-          <p:cNvPr id="21" name="TextBox 20"/>
-          <p:cNvSpPr txBox="1"/>
-          <p:nvPr/>
-        </p:nvSpPr>
-        <p:spPr>
-          <a:xfrm>
-            <a:off x="1553076" y="3785616"/>
-            <a:ext cx="1114164" cy="640080"/>
-          </a:xfrm>
-          <a:prstGeom prst="rect">
-            <a:avLst/>
-          </a:prstGeom>
-          <a:noFill/>
-        </p:spPr>
-        <p:txBody>
-          <a:bodyPr wrap="square" anchor="ctr" lIns="36000" rIns="36000" tIns="18000" bIns="18000">
-            <a:spAutoFit/>
-          </a:bodyPr>
-          <a:lstStyle/>
-          <a:p>
-            <a:pPr algn="ctr"/>
-            <a:r>
-              <a:rPr sz="1008" b="1" i="0">
+          <p:cNvPr id="33" name="TextBox 32"/>
+          <p:cNvSpPr txBox="1"/>
+          <p:nvPr/>
+        </p:nvSpPr>
+        <p:spPr>
+          <a:xfrm>
+            <a:off x="6415887" y="1627632"/>
+            <a:ext cx="2293543" cy="310896"/>
+          </a:xfrm>
+          <a:prstGeom prst="rect">
+            <a:avLst/>
+          </a:prstGeom>
+          <a:noFill/>
+        </p:spPr>
+        <p:txBody>
+          <a:bodyPr wrap="square" anchor="t" lIns="36000" rIns="36000" tIns="18000" bIns="18000">
+            <a:spAutoFit/>
+          </a:bodyPr>
+          <a:lstStyle/>
+          <a:p>
+            <a:pPr algn="l"/>
+            <a:r>
+              <a:rPr sz="1456" b="1" i="0">
+                <a:solidFill>
+                  <a:srgbClr val="5B8C5A"/>
+                </a:solidFill>
+                <a:latin typeface="Arial"/>
+              </a:rPr>
+              <a:t>03</a:t>
+            </a:r>
+          </a:p>
+        </p:txBody>
+      </p:sp>
+      <p:sp>
+        <p:nvSpPr>
+          <p:cNvPr id="34" name="TextBox 33"/>
+          <p:cNvSpPr txBox="1"/>
+          <p:nvPr/>
+        </p:nvSpPr>
+        <p:spPr>
+          <a:xfrm>
+            <a:off x="6415887" y="1956816"/>
+            <a:ext cx="2293543" cy="274320"/>
+          </a:xfrm>
+          <a:prstGeom prst="rect">
+            <a:avLst/>
+          </a:prstGeom>
+          <a:noFill/>
+        </p:spPr>
+        <p:txBody>
+          <a:bodyPr wrap="square" anchor="t" lIns="36000" rIns="36000" tIns="18000" bIns="18000">
+            <a:spAutoFit/>
+          </a:bodyPr>
+          <a:lstStyle/>
+          <a:p>
+            <a:pPr algn="l"/>
+            <a:r>
+              <a:rPr sz="1344" b="1" i="0">
+                <a:solidFill>
+                  <a:srgbClr val="64748B"/>
+                </a:solidFill>
+                <a:latin typeface="Arial"/>
+              </a:rPr>
+              <a:t>On wall</a:t>
+            </a:r>
+          </a:p>
+        </p:txBody>
+      </p:sp>
+      <p:sp>
+        <p:nvSpPr>
+          <p:cNvPr id="35" name="TextBox 34"/>
+          <p:cNvSpPr txBox="1"/>
+          <p:nvPr/>
+        </p:nvSpPr>
+        <p:spPr>
+          <a:xfrm>
+            <a:off x="6415887" y="2304288"/>
+            <a:ext cx="2293543" cy="512064"/>
+          </a:xfrm>
+          <a:prstGeom prst="rect">
+            <a:avLst/>
+          </a:prstGeom>
+          <a:noFill/>
+        </p:spPr>
+        <p:txBody>
+          <a:bodyPr wrap="square" anchor="t" lIns="36000" rIns="36000" tIns="18000" bIns="18000">
+            <a:spAutoFit/>
+          </a:bodyPr>
+          <a:lstStyle/>
+          <a:p>
+            <a:pPr algn="l"/>
+            <a:r>
+              <a:rPr sz="2240" b="1" i="0">
                 <a:solidFill>
                   <a:srgbClr val="1E293B"/>
                 </a:solidFill>
                 <a:latin typeface="Arial"/>
               </a:rPr>
-              <a:t>Sol-like</a:t>
-            </a:r>
-          </a:p>
-          <a:p>
-            <a:pPr algn="ctr"/>
-            <a:r>
-              <a:rPr sz="1008" b="1" i="0">
-                <a:solidFill>
-                  <a:srgbClr val="1E293B"/>
-                </a:solidFill>
-                <a:latin typeface="Arial"/>
-              </a:rPr>
-              <a:t>(spraying)</a:t>
-            </a:r>
-          </a:p>
-        </p:txBody>
-      </p:sp>
-      <p:sp>
-        <p:nvSpPr>
-          <p:cNvPr id="22" name="TextBox 21"/>
-          <p:cNvSpPr txBox="1"/>
-          <p:nvPr/>
-        </p:nvSpPr>
-        <p:spPr>
-          <a:xfrm>
-            <a:off x="2676384" y="3785616"/>
-            <a:ext cx="73152" cy="640080"/>
-          </a:xfrm>
-          <a:prstGeom prst="rect">
-            <a:avLst/>
-          </a:prstGeom>
-          <a:noFill/>
-        </p:spPr>
-        <p:txBody>
-          <a:bodyPr wrap="square" anchor="ctr" lIns="36000" rIns="36000" tIns="18000" bIns="18000">
-            <a:spAutoFit/>
-          </a:bodyPr>
-          <a:lstStyle/>
-          <a:p>
-            <a:pPr algn="ctr"/>
-            <a:r>
-              <a:rPr sz="1120" b="0" i="0">
-                <a:solidFill>
-                  <a:srgbClr val="64748B"/>
-                </a:solidFill>
-                <a:latin typeface="Arial"/>
-              </a:rPr>
-              <a:t>→</a:t>
-            </a:r>
-          </a:p>
-        </p:txBody>
-      </p:sp>
-      <p:sp>
-        <p:nvSpPr>
-          <p:cNvPr id="23" name="Rounded Rectangle 22"/>
+              <a:t>Self-healing gel</a:t>
+            </a:r>
+          </a:p>
+        </p:txBody>
+      </p:sp>
+      <p:sp>
+        <p:nvSpPr>
+          <p:cNvPr id="36" name="Rectangle 35"/>
           <p:cNvSpPr/>
           <p:nvPr/>
         </p:nvSpPr>
         <p:spPr>
           <a:xfrm>
-            <a:off x="2740392" y="3785616"/>
-            <a:ext cx="1114164" cy="640080"/>
+            <a:off x="6415887" y="2907792"/>
+            <a:ext cx="2293543" cy="13716"/>
+          </a:xfrm>
+          <a:prstGeom prst="rect">
+            <a:avLst/>
+          </a:prstGeom>
+          <a:solidFill>
+            <a:srgbClr val="E2E8F0"/>
+          </a:solidFill>
+          <a:ln>
+            <a:noFill/>
+          </a:ln>
+          <a:effectLst/>
+        </p:spPr>
+        <p:style>
+          <a:lnRef idx="1">
+            <a:schemeClr val="accent1"/>
+          </a:lnRef>
+          <a:fillRef idx="3">
+            <a:schemeClr val="accent1"/>
+          </a:fillRef>
+          <a:effectRef idx="2">
+            <a:schemeClr val="accent1"/>
+          </a:effectRef>
+          <a:fontRef idx="minor">
+            <a:schemeClr val="lt1"/>
+          </a:fontRef>
+        </p:style>
+        <p:txBody>
+          <a:bodyPr rtlCol="0" anchor="ctr"/>
+          <a:lstStyle/>
+          <a:p>
+            <a:pPr algn="ctr"/>
+          </a:p>
+        </p:txBody>
+      </p:sp>
+      <p:sp>
+        <p:nvSpPr>
+          <p:cNvPr id="37" name="TextBox 36"/>
+          <p:cNvSpPr txBox="1"/>
+          <p:nvPr/>
+        </p:nvSpPr>
+        <p:spPr>
+          <a:xfrm>
+            <a:off x="6415887" y="3035808"/>
+            <a:ext cx="2293543" cy="1005840"/>
+          </a:xfrm>
+          <a:prstGeom prst="rect">
+            <a:avLst/>
+          </a:prstGeom>
+          <a:noFill/>
+        </p:spPr>
+        <p:txBody>
+          <a:bodyPr wrap="square" anchor="t" lIns="36000" rIns="36000" tIns="18000" bIns="18000">
+            <a:spAutoFit/>
+          </a:bodyPr>
+          <a:lstStyle/>
+          <a:p>
+            <a:pPr algn="l"/>
+            <a:r>
+              <a:rPr sz="1344" b="0" i="0">
+                <a:solidFill>
+                  <a:srgbClr val="475569"/>
+                </a:solidFill>
+                <a:latin typeface="Arial"/>
+              </a:rPr>
+              <a:t>Strain release instantly restores the gel network.</a:t>
+            </a:r>
+          </a:p>
+        </p:txBody>
+      </p:sp>
+      <p:sp>
+        <p:nvSpPr>
+          <p:cNvPr id="38" name="Rounded Rectangle 37"/>
+          <p:cNvSpPr/>
+          <p:nvPr/>
+        </p:nvSpPr>
+        <p:spPr>
+          <a:xfrm>
+            <a:off x="6415887" y="4078224"/>
+            <a:ext cx="2293543" cy="420624"/>
           </a:xfrm>
           <a:prstGeom prst="roundRect">
             <a:avLst>
-              <a:gd name="adj" fmla="val 3000"/>
+              <a:gd name="adj" fmla="val 6000"/>
             </a:avLst>
           </a:prstGeom>
           <a:solidFill>
-            <a:srgbClr val="F1F5F9"/>
+            <a:srgbClr val="FFFFFF"/>
           </a:solidFill>
           <a:ln w="8890">
             <a:solidFill>
@@ -4510,20 +5077,138 @@
       </p:sp>
       <p:sp>
         <p:nvSpPr>
-          <p:cNvPr id="24" name="Rectangle 23"/>
+          <p:cNvPr id="39" name="TextBox 38"/>
+          <p:cNvSpPr txBox="1"/>
+          <p:nvPr/>
+        </p:nvSpPr>
+        <p:spPr>
+          <a:xfrm>
+            <a:off x="6415887" y="4078224"/>
+            <a:ext cx="2293543" cy="420624"/>
+          </a:xfrm>
+          <a:prstGeom prst="rect">
+            <a:avLst/>
+          </a:prstGeom>
+          <a:noFill/>
+        </p:spPr>
+        <p:txBody>
+          <a:bodyPr wrap="square" anchor="ctr" lIns="36000" rIns="36000" tIns="18000" bIns="18000">
+            <a:spAutoFit/>
+          </a:bodyPr>
+          <a:lstStyle/>
+          <a:p>
+            <a:pPr algn="ctr"/>
+            <a:r>
+              <a:rPr sz="1120" b="1" i="0">
+                <a:solidFill>
+                  <a:srgbClr val="5B8C5A"/>
+                </a:solidFill>
+                <a:latin typeface="Arial"/>
+              </a:rPr>
+              <a:t>G' recovery ~90%</a:t>
+            </a:r>
+          </a:p>
+        </p:txBody>
+      </p:sp>
+      <p:sp>
+        <p:nvSpPr>
+          <p:cNvPr id="40" name="TextBox 39"/>
+          <p:cNvSpPr txBox="1"/>
+          <p:nvPr/>
+        </p:nvSpPr>
+        <p:spPr>
+          <a:xfrm>
+            <a:off x="8892311" y="1463040"/>
+            <a:ext cx="274320" cy="3200400"/>
+          </a:xfrm>
+          <a:prstGeom prst="rect">
+            <a:avLst/>
+          </a:prstGeom>
+          <a:noFill/>
+        </p:spPr>
+        <p:txBody>
+          <a:bodyPr wrap="square" anchor="ctr" lIns="36000" rIns="36000" tIns="18000" bIns="18000">
+            <a:spAutoFit/>
+          </a:bodyPr>
+          <a:lstStyle/>
+          <a:p>
+            <a:pPr algn="ctr"/>
+            <a:r>
+              <a:rPr sz="2240" b="0" i="0">
+                <a:solidFill>
+                  <a:srgbClr val="AAB4C0"/>
+                </a:solidFill>
+                <a:latin typeface="Arial"/>
+              </a:rPr>
+              <a:t>→</a:t>
+            </a:r>
+          </a:p>
+        </p:txBody>
+      </p:sp>
+      <p:sp>
+        <p:nvSpPr>
+          <p:cNvPr id="41" name="Rounded Rectangle 40"/>
           <p:cNvSpPr/>
           <p:nvPr/>
         </p:nvSpPr>
         <p:spPr>
           <a:xfrm>
-            <a:off x="2740392" y="3785616"/>
-            <a:ext cx="1114164" cy="36576"/>
-          </a:xfrm>
-          <a:prstGeom prst="rect">
-            <a:avLst/>
+            <a:off x="9166631" y="1463040"/>
+            <a:ext cx="2659303" cy="3200400"/>
+          </a:xfrm>
+          <a:prstGeom prst="roundRect">
+            <a:avLst>
+              <a:gd name="adj" fmla="val 4000"/>
+            </a:avLst>
           </a:prstGeom>
           <a:solidFill>
-            <a:srgbClr val="5B8C5A"/>
+            <a:srgbClr val="F1F5F9"/>
+          </a:solidFill>
+          <a:ln w="6350">
+            <a:solidFill>
+              <a:srgbClr val="E2E8F0"/>
+            </a:solidFill>
+          </a:ln>
+          <a:effectLst/>
+        </p:spPr>
+        <p:style>
+          <a:lnRef idx="1">
+            <a:schemeClr val="accent1"/>
+          </a:lnRef>
+          <a:fillRef idx="3">
+            <a:schemeClr val="accent1"/>
+          </a:fillRef>
+          <a:effectRef idx="2">
+            <a:schemeClr val="accent1"/>
+          </a:effectRef>
+          <a:fontRef idx="minor">
+            <a:schemeClr val="lt1"/>
+          </a:fontRef>
+        </p:style>
+        <p:txBody>
+          <a:bodyPr rtlCol="0" anchor="ctr"/>
+          <a:lstStyle/>
+          <a:p>
+            <a:pPr algn="ctr"/>
+          </a:p>
+        </p:txBody>
+      </p:sp>
+      <p:sp>
+        <p:nvSpPr>
+          <p:cNvPr id="42" name="Rectangle 41"/>
+          <p:cNvSpPr/>
+          <p:nvPr/>
+        </p:nvSpPr>
+        <p:spPr>
+          <a:xfrm>
+            <a:off x="9166631" y="1463040"/>
+            <a:ext cx="2659303" cy="54864"/>
+          </a:xfrm>
+          <a:prstGeom prst="rect">
+            <a:avLst/>
+          </a:prstGeom>
+          <a:solidFill>
+            <a:srgbClr val="9F7639"/>
           </a:solidFill>
           <a:ln>
             <a:noFill/>
@@ -4554,104 +5239,206 @@
       </p:sp>
       <p:sp>
         <p:nvSpPr>
-          <p:cNvPr id="25" name="TextBox 24"/>
-          <p:cNvSpPr txBox="1"/>
-          <p:nvPr/>
-        </p:nvSpPr>
-        <p:spPr>
-          <a:xfrm>
-            <a:off x="2740392" y="3785616"/>
-            <a:ext cx="1114164" cy="640080"/>
-          </a:xfrm>
-          <a:prstGeom prst="rect">
-            <a:avLst/>
-          </a:prstGeom>
-          <a:noFill/>
-        </p:spPr>
-        <p:txBody>
-          <a:bodyPr wrap="square" anchor="ctr" lIns="36000" rIns="36000" tIns="18000" bIns="18000">
-            <a:spAutoFit/>
-          </a:bodyPr>
-          <a:lstStyle/>
-          <a:p>
-            <a:pPr algn="ctr"/>
-            <a:r>
-              <a:rPr sz="1008" b="1" i="0">
+          <p:cNvPr id="43" name="TextBox 42"/>
+          <p:cNvSpPr txBox="1"/>
+          <p:nvPr/>
+        </p:nvSpPr>
+        <p:spPr>
+          <a:xfrm>
+            <a:off x="9349511" y="1627632"/>
+            <a:ext cx="2293543" cy="310896"/>
+          </a:xfrm>
+          <a:prstGeom prst="rect">
+            <a:avLst/>
+          </a:prstGeom>
+          <a:noFill/>
+        </p:spPr>
+        <p:txBody>
+          <a:bodyPr wrap="square" anchor="t" lIns="36000" rIns="36000" tIns="18000" bIns="18000">
+            <a:spAutoFit/>
+          </a:bodyPr>
+          <a:lstStyle/>
+          <a:p>
+            <a:pPr algn="l"/>
+            <a:r>
+              <a:rPr sz="1456" b="1" i="0">
+                <a:solidFill>
+                  <a:srgbClr val="9F7639"/>
+                </a:solidFill>
+                <a:latin typeface="Arial"/>
+              </a:rPr>
+              <a:t>04</a:t>
+            </a:r>
+          </a:p>
+        </p:txBody>
+      </p:sp>
+      <p:sp>
+        <p:nvSpPr>
+          <p:cNvPr id="44" name="TextBox 43"/>
+          <p:cNvSpPr txBox="1"/>
+          <p:nvPr/>
+        </p:nvSpPr>
+        <p:spPr>
+          <a:xfrm>
+            <a:off x="9349511" y="1956816"/>
+            <a:ext cx="2293543" cy="274320"/>
+          </a:xfrm>
+          <a:prstGeom prst="rect">
+            <a:avLst/>
+          </a:prstGeom>
+          <a:noFill/>
+        </p:spPr>
+        <p:txBody>
+          <a:bodyPr wrap="square" anchor="t" lIns="36000" rIns="36000" tIns="18000" bIns="18000">
+            <a:spAutoFit/>
+          </a:bodyPr>
+          <a:lstStyle/>
+          <a:p>
+            <a:pPr algn="l"/>
+            <a:r>
+              <a:rPr sz="1344" b="1" i="0">
+                <a:solidFill>
+                  <a:srgbClr val="64748B"/>
+                </a:solidFill>
+                <a:latin typeface="Arial"/>
+              </a:rPr>
+              <a:t>Flame</a:t>
+            </a:r>
+          </a:p>
+        </p:txBody>
+      </p:sp>
+      <p:sp>
+        <p:nvSpPr>
+          <p:cNvPr id="45" name="TextBox 44"/>
+          <p:cNvSpPr txBox="1"/>
+          <p:nvPr/>
+        </p:nvSpPr>
+        <p:spPr>
+          <a:xfrm>
+            <a:off x="9349511" y="2304288"/>
+            <a:ext cx="2293543" cy="512064"/>
+          </a:xfrm>
+          <a:prstGeom prst="rect">
+            <a:avLst/>
+          </a:prstGeom>
+          <a:noFill/>
+        </p:spPr>
+        <p:txBody>
+          <a:bodyPr wrap="square" anchor="t" lIns="36000" rIns="36000" tIns="18000" bIns="18000">
+            <a:spAutoFit/>
+          </a:bodyPr>
+          <a:lstStyle/>
+          <a:p>
+            <a:pPr algn="l"/>
+            <a:r>
+              <a:rPr sz="2240" b="1" i="0">
                 <a:solidFill>
                   <a:srgbClr val="1E293B"/>
                 </a:solidFill>
                 <a:latin typeface="Arial"/>
               </a:rPr>
-              <a:t>Self-heal gel</a:t>
-            </a:r>
-          </a:p>
-          <a:p>
-            <a:pPr algn="ctr"/>
-            <a:r>
-              <a:rPr sz="1008" b="1" i="0">
-                <a:solidFill>
-                  <a:srgbClr val="1E293B"/>
-                </a:solidFill>
-                <a:latin typeface="Arial"/>
-              </a:rPr>
-              <a:t>(on wall)</a:t>
-            </a:r>
-          </a:p>
-        </p:txBody>
-      </p:sp>
-      <p:sp>
-        <p:nvSpPr>
-          <p:cNvPr id="26" name="TextBox 25"/>
-          <p:cNvSpPr txBox="1"/>
-          <p:nvPr/>
-        </p:nvSpPr>
-        <p:spPr>
-          <a:xfrm>
-            <a:off x="3863701" y="3785616"/>
-            <a:ext cx="73152" cy="640080"/>
-          </a:xfrm>
-          <a:prstGeom prst="rect">
-            <a:avLst/>
-          </a:prstGeom>
-          <a:noFill/>
-        </p:spPr>
-        <p:txBody>
-          <a:bodyPr wrap="square" anchor="ctr" lIns="36000" rIns="36000" tIns="18000" bIns="18000">
-            <a:spAutoFit/>
-          </a:bodyPr>
-          <a:lstStyle/>
-          <a:p>
-            <a:pPr algn="ctr"/>
-            <a:r>
-              <a:rPr sz="1120" b="0" i="0">
-                <a:solidFill>
-                  <a:srgbClr val="64748B"/>
-                </a:solidFill>
-                <a:latin typeface="Arial"/>
-              </a:rPr>
-              <a:t>→</a:t>
-            </a:r>
-          </a:p>
-        </p:txBody>
-      </p:sp>
-      <p:sp>
-        <p:nvSpPr>
-          <p:cNvPr id="27" name="Rounded Rectangle 26"/>
+              <a:t>Aerogel</a:t>
+            </a:r>
+          </a:p>
+        </p:txBody>
+      </p:sp>
+      <p:sp>
+        <p:nvSpPr>
+          <p:cNvPr id="46" name="Rectangle 45"/>
           <p:cNvSpPr/>
           <p:nvPr/>
         </p:nvSpPr>
         <p:spPr>
           <a:xfrm>
-            <a:off x="3927709" y="3785616"/>
-            <a:ext cx="1114164" cy="640080"/>
+            <a:off x="9349511" y="2907792"/>
+            <a:ext cx="2293543" cy="13716"/>
+          </a:xfrm>
+          <a:prstGeom prst="rect">
+            <a:avLst/>
+          </a:prstGeom>
+          <a:solidFill>
+            <a:srgbClr val="E2E8F0"/>
+          </a:solidFill>
+          <a:ln>
+            <a:noFill/>
+          </a:ln>
+          <a:effectLst/>
+        </p:spPr>
+        <p:style>
+          <a:lnRef idx="1">
+            <a:schemeClr val="accent1"/>
+          </a:lnRef>
+          <a:fillRef idx="3">
+            <a:schemeClr val="accent1"/>
+          </a:fillRef>
+          <a:effectRef idx="2">
+            <a:schemeClr val="accent1"/>
+          </a:effectRef>
+          <a:fontRef idx="minor">
+            <a:schemeClr val="lt1"/>
+          </a:fontRef>
+        </p:style>
+        <p:txBody>
+          <a:bodyPr rtlCol="0" anchor="ctr"/>
+          <a:lstStyle/>
+          <a:p>
+            <a:pPr algn="ctr"/>
+          </a:p>
+        </p:txBody>
+      </p:sp>
+      <p:sp>
+        <p:nvSpPr>
+          <p:cNvPr id="47" name="TextBox 46"/>
+          <p:cNvSpPr txBox="1"/>
+          <p:nvPr/>
+        </p:nvSpPr>
+        <p:spPr>
+          <a:xfrm>
+            <a:off x="9349511" y="3035808"/>
+            <a:ext cx="2293543" cy="1005840"/>
+          </a:xfrm>
+          <a:prstGeom prst="rect">
+            <a:avLst/>
+          </a:prstGeom>
+          <a:noFill/>
+        </p:spPr>
+        <p:txBody>
+          <a:bodyPr wrap="square" anchor="t" lIns="36000" rIns="36000" tIns="18000" bIns="18000">
+            <a:spAutoFit/>
+          </a:bodyPr>
+          <a:lstStyle/>
+          <a:p>
+            <a:pPr algn="l"/>
+            <a:r>
+              <a:rPr sz="1344" b="0" i="0">
+                <a:solidFill>
+                  <a:srgbClr val="475569"/>
+                </a:solidFill>
+                <a:latin typeface="Arial"/>
+              </a:rPr>
+              <a:t>CSP sinters into a porous silica layer.</a:t>
+            </a:r>
+          </a:p>
+        </p:txBody>
+      </p:sp>
+      <p:sp>
+        <p:nvSpPr>
+          <p:cNvPr id="48" name="Rounded Rectangle 47"/>
+          <p:cNvSpPr/>
+          <p:nvPr/>
+        </p:nvSpPr>
+        <p:spPr>
+          <a:xfrm>
+            <a:off x="9349511" y="4078224"/>
+            <a:ext cx="2293543" cy="420624"/>
           </a:xfrm>
           <a:prstGeom prst="roundRect">
             <a:avLst>
-              <a:gd name="adj" fmla="val 3000"/>
+              <a:gd name="adj" fmla="val 6000"/>
             </a:avLst>
           </a:prstGeom>
           <a:solidFill>
-            <a:srgbClr val="F1F5F9"/>
+            <a:srgbClr val="FFFFFF"/>
           </a:solidFill>
           <a:ln w="8890">
             <a:solidFill>
@@ -4684,156 +5471,54 @@
       </p:sp>
       <p:sp>
         <p:nvSpPr>
-          <p:cNvPr id="28" name="Rectangle 27"/>
+          <p:cNvPr id="49" name="TextBox 48"/>
+          <p:cNvSpPr txBox="1"/>
+          <p:nvPr/>
+        </p:nvSpPr>
+        <p:spPr>
+          <a:xfrm>
+            <a:off x="9349511" y="4078224"/>
+            <a:ext cx="2293543" cy="420624"/>
+          </a:xfrm>
+          <a:prstGeom prst="rect">
+            <a:avLst/>
+          </a:prstGeom>
+          <a:noFill/>
+        </p:spPr>
+        <p:txBody>
+          <a:bodyPr wrap="square" anchor="ctr" lIns="36000" rIns="36000" tIns="18000" bIns="18000">
+            <a:spAutoFit/>
+          </a:bodyPr>
+          <a:lstStyle/>
+          <a:p>
+            <a:pPr algn="ctr"/>
+            <a:r>
+              <a:rPr sz="1120" b="1" i="0">
+                <a:solidFill>
+                  <a:srgbClr val="9F7639"/>
+                </a:solidFill>
+                <a:latin typeface="Arial"/>
+              </a:rPr>
+              <a:t>Acts as thermal barrier</a:t>
+            </a:r>
+          </a:p>
+        </p:txBody>
+      </p:sp>
+      <p:sp>
+        <p:nvSpPr>
+          <p:cNvPr id="50" name="Rounded Rectangle 49"/>
           <p:cNvSpPr/>
           <p:nvPr/>
         </p:nvSpPr>
         <p:spPr>
           <a:xfrm>
-            <a:off x="3927709" y="3785616"/>
-            <a:ext cx="1114164" cy="36576"/>
-          </a:xfrm>
-          <a:prstGeom prst="rect">
-            <a:avLst/>
-          </a:prstGeom>
-          <a:solidFill>
-            <a:srgbClr val="9F7639"/>
-          </a:solidFill>
-          <a:ln>
-            <a:noFill/>
-          </a:ln>
-          <a:effectLst/>
-        </p:spPr>
-        <p:style>
-          <a:lnRef idx="1">
-            <a:schemeClr val="accent1"/>
-          </a:lnRef>
-          <a:fillRef idx="3">
-            <a:schemeClr val="accent1"/>
-          </a:fillRef>
-          <a:effectRef idx="2">
-            <a:schemeClr val="accent1"/>
-          </a:effectRef>
-          <a:fontRef idx="minor">
-            <a:schemeClr val="lt1"/>
-          </a:fontRef>
-        </p:style>
-        <p:txBody>
-          <a:bodyPr rtlCol="0" anchor="ctr"/>
-          <a:lstStyle/>
-          <a:p>
-            <a:pPr algn="ctr"/>
-          </a:p>
-        </p:txBody>
-      </p:sp>
-      <p:sp>
-        <p:nvSpPr>
-          <p:cNvPr id="29" name="TextBox 28"/>
-          <p:cNvSpPr txBox="1"/>
-          <p:nvPr/>
-        </p:nvSpPr>
-        <p:spPr>
-          <a:xfrm>
-            <a:off x="3927709" y="3785616"/>
-            <a:ext cx="1114164" cy="640080"/>
-          </a:xfrm>
-          <a:prstGeom prst="rect">
-            <a:avLst/>
-          </a:prstGeom>
-          <a:noFill/>
-        </p:spPr>
-        <p:txBody>
-          <a:bodyPr wrap="square" anchor="ctr" lIns="36000" rIns="36000" tIns="18000" bIns="18000">
-            <a:spAutoFit/>
-          </a:bodyPr>
-          <a:lstStyle/>
-          <a:p>
-            <a:pPr algn="ctr"/>
-            <a:r>
-              <a:rPr sz="1008" b="1" i="0">
-                <a:solidFill>
-                  <a:srgbClr val="1E293B"/>
-                </a:solidFill>
-                <a:latin typeface="Arial"/>
-              </a:rPr>
-              <a:t>Aerogel</a:t>
-            </a:r>
-          </a:p>
-          <a:p>
-            <a:pPr algn="ctr"/>
-            <a:r>
-              <a:rPr sz="1008" b="1" i="0">
-                <a:solidFill>
-                  <a:srgbClr val="1E293B"/>
-                </a:solidFill>
-                <a:latin typeface="Arial"/>
-              </a:rPr>
-              <a:t>(flame)</a:t>
-            </a:r>
-          </a:p>
-        </p:txBody>
-      </p:sp>
-      <p:sp>
-        <p:nvSpPr>
-          <p:cNvPr id="30" name="Rounded Rectangle 29"/>
-          <p:cNvSpPr/>
-          <p:nvPr/>
-        </p:nvSpPr>
-        <p:spPr>
-          <a:xfrm>
-            <a:off x="5224753" y="859536"/>
-            <a:ext cx="6601181" cy="5394960"/>
+            <a:off x="365760" y="4846320"/>
+            <a:ext cx="11460175" cy="1755648"/>
           </a:xfrm>
           <a:prstGeom prst="roundRect">
             <a:avLst>
-              <a:gd name="adj" fmla="val 2000"/>
+              <a:gd name="adj" fmla="val 5000"/>
             </a:avLst>
-          </a:prstGeom>
-          <a:solidFill>
-            <a:srgbClr val="F5F8FC"/>
-          </a:solidFill>
-          <a:ln w="12700">
-            <a:solidFill>
-              <a:srgbClr val="C0D0E0"/>
-            </a:solidFill>
-          </a:ln>
-          <a:effectLst/>
-        </p:spPr>
-        <p:style>
-          <a:lnRef idx="1">
-            <a:schemeClr val="accent1"/>
-          </a:lnRef>
-          <a:fillRef idx="3">
-            <a:schemeClr val="accent1"/>
-          </a:fillRef>
-          <a:effectRef idx="2">
-            <a:schemeClr val="accent1"/>
-          </a:effectRef>
-          <a:fontRef idx="minor">
-            <a:schemeClr val="lt1"/>
-          </a:fontRef>
-        </p:style>
-        <p:txBody>
-          <a:bodyPr rtlCol="0" anchor="ctr"/>
-          <a:lstStyle/>
-          <a:p>
-            <a:pPr algn="ctr"/>
-          </a:p>
-        </p:txBody>
-      </p:sp>
-      <p:sp>
-        <p:nvSpPr>
-          <p:cNvPr id="31" name="Rectangle 30"/>
-          <p:cNvSpPr/>
-          <p:nvPr/>
-        </p:nvSpPr>
-        <p:spPr>
-          <a:xfrm>
-            <a:off x="5334481" y="969264"/>
-            <a:ext cx="868680" cy="292608"/>
-          </a:xfrm>
-          <a:prstGeom prst="rect">
-            <a:avLst/>
           </a:prstGeom>
           <a:solidFill>
             <a:srgbClr val="1E293B"/>
@@ -4867,14 +5552,58 @@
       </p:sp>
       <p:sp>
         <p:nvSpPr>
-          <p:cNvPr id="32" name="TextBox 31"/>
-          <p:cNvSpPr txBox="1"/>
-          <p:nvPr/>
-        </p:nvSpPr>
-        <p:spPr>
-          <a:xfrm>
-            <a:off x="5334481" y="969264"/>
-            <a:ext cx="868680" cy="292608"/>
+          <p:cNvPr id="51" name="Rectangle 50"/>
+          <p:cNvSpPr/>
+          <p:nvPr/>
+        </p:nvSpPr>
+        <p:spPr>
+          <a:xfrm>
+            <a:off x="365760" y="4846320"/>
+            <a:ext cx="73152" cy="1755648"/>
+          </a:xfrm>
+          <a:prstGeom prst="rect">
+            <a:avLst/>
+          </a:prstGeom>
+          <a:solidFill>
+            <a:srgbClr val="D4A574"/>
+          </a:solidFill>
+          <a:ln>
+            <a:noFill/>
+          </a:ln>
+          <a:effectLst/>
+        </p:spPr>
+        <p:style>
+          <a:lnRef idx="1">
+            <a:schemeClr val="accent1"/>
+          </a:lnRef>
+          <a:fillRef idx="3">
+            <a:schemeClr val="accent1"/>
+          </a:fillRef>
+          <a:effectRef idx="2">
+            <a:schemeClr val="accent1"/>
+          </a:effectRef>
+          <a:fontRef idx="minor">
+            <a:schemeClr val="lt1"/>
+          </a:fontRef>
+        </p:style>
+        <p:txBody>
+          <a:bodyPr rtlCol="0" anchor="ctr"/>
+          <a:lstStyle/>
+          <a:p>
+            <a:pPr algn="ctr"/>
+          </a:p>
+        </p:txBody>
+      </p:sp>
+      <p:sp>
+        <p:nvSpPr>
+          <p:cNvPr id="52" name="TextBox 51"/>
+          <p:cNvSpPr txBox="1"/>
+          <p:nvPr/>
+        </p:nvSpPr>
+        <p:spPr>
+          <a:xfrm>
+            <a:off x="640080" y="4846320"/>
+            <a:ext cx="2194560" cy="1755648"/>
           </a:xfrm>
           <a:prstGeom prst="rect">
             <a:avLst/>
@@ -4887,85 +5616,50 @@
           </a:bodyPr>
           <a:lstStyle/>
           <a:p>
-            <a:pPr algn="ctr"/>
-            <a:r>
-              <a:rPr sz="1232" b="1" i="0">
+            <a:pPr algn="l"/>
+            <a:r>
+              <a:rPr sz="1456" b="1" i="0">
+                <a:solidFill>
+                  <a:srgbClr val="D4A574"/>
+                </a:solidFill>
+                <a:latin typeface="Arial"/>
+              </a:rPr>
+              <a:t>POINT</a:t>
+            </a:r>
+          </a:p>
+        </p:txBody>
+      </p:sp>
+      <p:sp>
+        <p:nvSpPr>
+          <p:cNvPr id="53" name="TextBox 52"/>
+          <p:cNvSpPr txBox="1"/>
+          <p:nvPr/>
+        </p:nvSpPr>
+        <p:spPr>
+          <a:xfrm>
+            <a:off x="2194560" y="4846320"/>
+            <a:ext cx="9357055" cy="1755648"/>
+          </a:xfrm>
+          <a:prstGeom prst="rect">
+            <a:avLst/>
+          </a:prstGeom>
+          <a:noFill/>
+        </p:spPr>
+        <p:txBody>
+          <a:bodyPr wrap="square" anchor="ctr" lIns="36000" rIns="36000" tIns="18000" bIns="18000">
+            <a:spAutoFit/>
+          </a:bodyPr>
+          <a:lstStyle/>
+          <a:p>
+            <a:pPr algn="l"/>
+            <a:r>
+              <a:rPr sz="1456" b="0" i="0">
                 <a:solidFill>
                   <a:srgbClr val="FFFFFF"/>
                 </a:solidFill>
                 <a:latin typeface="Arial"/>
               </a:rPr>
-              <a:t>Concept</a:t>
-            </a:r>
-          </a:p>
-        </p:txBody>
-      </p:sp>
-      <p:sp>
-        <p:nvSpPr>
-          <p:cNvPr id="33" name="TextBox 32"/>
-          <p:cNvSpPr txBox="1"/>
-          <p:nvPr/>
-        </p:nvSpPr>
-        <p:spPr>
-          <a:xfrm>
-            <a:off x="5224753" y="859536"/>
-            <a:ext cx="6601181" cy="5394960"/>
-          </a:xfrm>
-          <a:prstGeom prst="rect">
-            <a:avLst/>
-          </a:prstGeom>
-          <a:noFill/>
-        </p:spPr>
-        <p:txBody>
-          <a:bodyPr wrap="square" anchor="ctr" lIns="36000" rIns="36000" tIns="18000" bIns="18000">
-            <a:spAutoFit/>
-          </a:bodyPr>
-          <a:lstStyle/>
-          <a:p>
-            <a:pPr algn="ctr"/>
-            <a:r>
-              <a:rPr sz="1344" b="0" i="0">
-                <a:solidFill>
-                  <a:srgbClr val="AAB4C0"/>
-                </a:solidFill>
-                <a:latin typeface="Arial"/>
-              </a:rPr>
-              <a:t>(Paste paper figure here)</a:t>
-            </a:r>
-          </a:p>
-        </p:txBody>
-      </p:sp>
-      <p:sp>
-        <p:nvSpPr>
-          <p:cNvPr id="34" name="TextBox 33"/>
-          <p:cNvSpPr txBox="1"/>
-          <p:nvPr/>
-        </p:nvSpPr>
-        <p:spPr>
-          <a:xfrm>
-            <a:off x="5224753" y="6291072"/>
-            <a:ext cx="6601181" cy="274320"/>
-          </a:xfrm>
-          <a:prstGeom prst="rect">
-            <a:avLst/>
-          </a:prstGeom>
-          <a:noFill/>
-        </p:spPr>
-        <p:txBody>
-          <a:bodyPr wrap="square" anchor="t" lIns="36000" rIns="36000" tIns="18000" bIns="18000">
-            <a:spAutoFit/>
-          </a:bodyPr>
-          <a:lstStyle/>
-          <a:p>
-            <a:pPr algn="ctr"/>
-            <a:r>
-              <a:rPr sz="1120" b="0" i="1">
-                <a:solidFill>
-                  <a:srgbClr val="64748B"/>
-                </a:solidFill>
-                <a:latin typeface="Arial"/>
-              </a:rPr>
-              <a:t>Cellulosic polymer × colloidal silica → silica aerogel formation concept schematic</a:t>
+              <a:t>Rather than relying on MC's thermal response (LCST), rheology alone achieves "spray → stick → set" — the core of this material.</a:t>
             </a:r>
           </a:p>
         </p:txBody>
@@ -57943,18 +58637,53 @@
       </p:sp>
       <p:sp>
         <p:nvSpPr>
-          <p:cNvPr id="10" name="Rounded Rectangle 9"/>
+          <p:cNvPr id="10" name="TextBox 9"/>
+          <p:cNvSpPr txBox="1"/>
+          <p:nvPr/>
+        </p:nvSpPr>
+        <p:spPr>
+          <a:xfrm>
+            <a:off x="365760" y="859536"/>
+            <a:ext cx="11460175" cy="457200"/>
+          </a:xfrm>
+          <a:prstGeom prst="rect">
+            <a:avLst/>
+          </a:prstGeom>
+          <a:noFill/>
+        </p:spPr>
+        <p:txBody>
+          <a:bodyPr wrap="square" anchor="ctr" lIns="36000" rIns="36000" tIns="18000" bIns="18000">
+            <a:spAutoFit/>
+          </a:bodyPr>
+          <a:lstStyle/>
+          <a:p>
+            <a:pPr algn="l"/>
+            <a:r>
+              <a:rPr sz="1568" b="0" i="0">
+                <a:solidFill>
+                  <a:srgbClr val="334155"/>
+                </a:solidFill>
+                <a:latin typeface="Arial"/>
+              </a:rPr>
+              <a:t>Three building blocks — skeleton, function, and bonding — combine biodegradability with high performance.</a:t>
+            </a:r>
+          </a:p>
+        </p:txBody>
+      </p:sp>
+      <p:sp>
+        <p:nvSpPr>
+          <p:cNvPr id="11" name="Rounded Rectangle 10"/>
           <p:cNvSpPr/>
           <p:nvPr/>
         </p:nvSpPr>
         <p:spPr>
           <a:xfrm>
-            <a:off x="365760" y="859536"/>
-            <a:ext cx="3637178" cy="5303520"/>
+            <a:off x="365760" y="1444752"/>
+            <a:ext cx="3637178" cy="5138928"/>
           </a:xfrm>
           <a:prstGeom prst="roundRect">
             <a:avLst>
-              <a:gd name="adj" fmla="val 4000"/>
+              <a:gd name="adj" fmla="val 3500"/>
             </a:avLst>
           </a:prstGeom>
           <a:solidFill>
@@ -57991,14 +58720,14 @@
       </p:sp>
       <p:sp>
         <p:nvSpPr>
-          <p:cNvPr id="11" name="Rectangle 10"/>
+          <p:cNvPr id="12" name="Rectangle 11"/>
           <p:cNvSpPr/>
           <p:nvPr/>
         </p:nvSpPr>
         <p:spPr>
           <a:xfrm>
-            <a:off x="365760" y="859536"/>
-            <a:ext cx="3637178" cy="45720"/>
+            <a:off x="365760" y="1444752"/>
+            <a:ext cx="3637178" cy="54864"/>
           </a:xfrm>
           <a:prstGeom prst="rect">
             <a:avLst/>
@@ -58035,14 +58764,14 @@
       </p:sp>
       <p:sp>
         <p:nvSpPr>
-          <p:cNvPr id="12" name="TextBox 11"/>
-          <p:cNvSpPr txBox="1"/>
-          <p:nvPr/>
-        </p:nvSpPr>
-        <p:spPr>
-          <a:xfrm>
-            <a:off x="365760" y="1225296"/>
-            <a:ext cx="3637178" cy="548640"/>
+          <p:cNvPr id="13" name="TextBox 12"/>
+          <p:cNvSpPr txBox="1"/>
+          <p:nvPr/>
+        </p:nvSpPr>
+        <p:spPr>
+          <a:xfrm>
+            <a:off x="365760" y="1719072"/>
+            <a:ext cx="3637178" cy="512064"/>
           </a:xfrm>
           <a:prstGeom prst="rect">
             <a:avLst/>
@@ -58057,7 +58786,7 @@
           <a:p>
             <a:pPr algn="ctr"/>
             <a:r>
-              <a:rPr sz="3584" b="0" i="0">
+              <a:rPr sz="3360" b="0" i="0">
                 <a:solidFill>
                   <a:srgbClr val="3B5174"/>
                 </a:solidFill>
@@ -58070,29 +58799,29 @@
       </p:sp>
       <p:sp>
         <p:nvSpPr>
-          <p:cNvPr id="13" name="TextBox 12"/>
-          <p:cNvSpPr txBox="1"/>
-          <p:nvPr/>
-        </p:nvSpPr>
-        <p:spPr>
-          <a:xfrm>
-            <a:off x="566928" y="1865376"/>
-            <a:ext cx="3234842" cy="512064"/>
-          </a:xfrm>
-          <a:prstGeom prst="rect">
-            <a:avLst/>
-          </a:prstGeom>
-          <a:noFill/>
-        </p:spPr>
-        <p:txBody>
-          <a:bodyPr wrap="square" anchor="t" lIns="36000" rIns="36000" tIns="18000" bIns="18000">
-            <a:spAutoFit/>
-          </a:bodyPr>
-          <a:lstStyle/>
-          <a:p>
-            <a:pPr algn="ctr"/>
-            <a:r>
-              <a:rPr sz="1904" b="1" i="0">
+          <p:cNvPr id="14" name="TextBox 13"/>
+          <p:cNvSpPr txBox="1"/>
+          <p:nvPr/>
+        </p:nvSpPr>
+        <p:spPr>
+          <a:xfrm>
+            <a:off x="585216" y="2286000"/>
+            <a:ext cx="3198266" cy="384048"/>
+          </a:xfrm>
+          <a:prstGeom prst="rect">
+            <a:avLst/>
+          </a:prstGeom>
+          <a:noFill/>
+        </p:spPr>
+        <p:txBody>
+          <a:bodyPr wrap="square" anchor="t" lIns="36000" rIns="36000" tIns="18000" bIns="18000">
+            <a:spAutoFit/>
+          </a:bodyPr>
+          <a:lstStyle/>
+          <a:p>
+            <a:pPr algn="ctr"/>
+            <a:r>
+              <a:rPr sz="1792" b="1" i="0">
                 <a:solidFill>
                   <a:srgbClr val="1E293B"/>
                 </a:solidFill>
@@ -58105,14 +58834,49 @@
       </p:sp>
       <p:sp>
         <p:nvSpPr>
-          <p:cNvPr id="14" name="Rectangle 13"/>
+          <p:cNvPr id="15" name="TextBox 14"/>
+          <p:cNvSpPr txBox="1"/>
+          <p:nvPr/>
+        </p:nvSpPr>
+        <p:spPr>
+          <a:xfrm>
+            <a:off x="585216" y="2670048"/>
+            <a:ext cx="3198266" cy="256032"/>
+          </a:xfrm>
+          <a:prstGeom prst="rect">
+            <a:avLst/>
+          </a:prstGeom>
+          <a:noFill/>
+        </p:spPr>
+        <p:txBody>
+          <a:bodyPr wrap="square" anchor="t" lIns="36000" rIns="36000" tIns="18000" bIns="18000">
+            <a:spAutoFit/>
+          </a:bodyPr>
+          <a:lstStyle/>
+          <a:p>
+            <a:pPr algn="ctr"/>
+            <a:r>
+              <a:rPr sz="1120" b="0" i="1">
+                <a:solidFill>
+                  <a:srgbClr val="64748B"/>
+                </a:solidFill>
+                <a:latin typeface="Arial"/>
+              </a:rPr>
+              <a:t>Plant-based biopolymers</a:t>
+            </a:r>
+          </a:p>
+        </p:txBody>
+      </p:sp>
+      <p:sp>
+        <p:nvSpPr>
+          <p:cNvPr id="16" name="Rectangle 15"/>
           <p:cNvSpPr/>
           <p:nvPr/>
         </p:nvSpPr>
         <p:spPr>
           <a:xfrm>
-            <a:off x="640080" y="2414016"/>
-            <a:ext cx="3088538" cy="13716"/>
+            <a:off x="658368" y="2999232"/>
+            <a:ext cx="3051962" cy="13716"/>
           </a:xfrm>
           <a:prstGeom prst="rect">
             <a:avLst/>
@@ -58149,53 +58913,407 @@
       </p:sp>
       <p:sp>
         <p:nvSpPr>
-          <p:cNvPr id="15" name="TextBox 14"/>
-          <p:cNvSpPr txBox="1"/>
-          <p:nvPr/>
-        </p:nvSpPr>
-        <p:spPr>
-          <a:xfrm>
-            <a:off x="566928" y="2560320"/>
-            <a:ext cx="3234842" cy="3383280"/>
-          </a:xfrm>
-          <a:prstGeom prst="rect">
-            <a:avLst/>
-          </a:prstGeom>
-          <a:noFill/>
-        </p:spPr>
-        <p:txBody>
-          <a:bodyPr wrap="square" anchor="t" lIns="36000" rIns="36000" tIns="18000" bIns="18000">
-            <a:spAutoFit/>
-          </a:bodyPr>
-          <a:lstStyle/>
-          <a:p>
-            <a:pPr algn="ctr"/>
-            <a:r>
-              <a:rPr sz="1456" b="0" i="0">
+          <p:cNvPr id="17" name="TextBox 16"/>
+          <p:cNvSpPr txBox="1"/>
+          <p:nvPr/>
+        </p:nvSpPr>
+        <p:spPr>
+          <a:xfrm>
+            <a:off x="585216" y="3127248"/>
+            <a:ext cx="3198266" cy="1005840"/>
+          </a:xfrm>
+          <a:prstGeom prst="rect">
+            <a:avLst/>
+          </a:prstGeom>
+          <a:noFill/>
+        </p:spPr>
+        <p:txBody>
+          <a:bodyPr wrap="square" anchor="t" lIns="36000" rIns="36000" tIns="18000" bIns="18000">
+            <a:spAutoFit/>
+          </a:bodyPr>
+          <a:lstStyle/>
+          <a:p>
+            <a:pPr algn="ctr"/>
+            <a:r>
+              <a:rPr sz="1344" b="0" i="0">
                 <a:solidFill>
                   <a:srgbClr val="475569"/>
                 </a:solidFill>
                 <a:latin typeface="Arial"/>
               </a:rPr>
-              <a:t>Plant-derived biopolymer. Highly biodegradable and forms the scaffold of the gel network.</a:t>
-            </a:r>
-          </a:p>
-        </p:txBody>
-      </p:sp>
-      <p:sp>
-        <p:nvSpPr>
-          <p:cNvPr id="16" name="Rounded Rectangle 15"/>
+              <a:t>Plant-derived biopolymers that form the backbone of the gel network.</a:t>
+            </a:r>
+          </a:p>
+        </p:txBody>
+      </p:sp>
+      <p:sp>
+        <p:nvSpPr>
+          <p:cNvPr id="18" name="Rounded Rectangle 17"/>
           <p:cNvSpPr/>
           <p:nvPr/>
         </p:nvSpPr>
         <p:spPr>
           <a:xfrm>
-            <a:off x="4277258" y="859536"/>
-            <a:ext cx="3637178" cy="5303520"/>
+            <a:off x="585216" y="4279392"/>
+            <a:ext cx="960120" cy="292608"/>
           </a:xfrm>
           <a:prstGeom prst="roundRect">
             <a:avLst>
-              <a:gd name="adj" fmla="val 4000"/>
+              <a:gd name="adj" fmla="val 50000"/>
+            </a:avLst>
+          </a:prstGeom>
+          <a:solidFill>
+            <a:srgbClr val="FFFFFF"/>
+          </a:solidFill>
+          <a:ln w="8890">
+            <a:solidFill>
+              <a:srgbClr val="3B5174"/>
+            </a:solidFill>
+          </a:ln>
+          <a:effectLst/>
+        </p:spPr>
+        <p:style>
+          <a:lnRef idx="1">
+            <a:schemeClr val="accent1"/>
+          </a:lnRef>
+          <a:fillRef idx="3">
+            <a:schemeClr val="accent1"/>
+          </a:fillRef>
+          <a:effectRef idx="2">
+            <a:schemeClr val="accent1"/>
+          </a:effectRef>
+          <a:fontRef idx="minor">
+            <a:schemeClr val="lt1"/>
+          </a:fontRef>
+        </p:style>
+        <p:txBody>
+          <a:bodyPr rtlCol="0" anchor="ctr"/>
+          <a:lstStyle/>
+          <a:p>
+            <a:pPr algn="ctr"/>
+          </a:p>
+        </p:txBody>
+      </p:sp>
+      <p:sp>
+        <p:nvSpPr>
+          <p:cNvPr id="19" name="TextBox 18"/>
+          <p:cNvSpPr txBox="1"/>
+          <p:nvPr/>
+        </p:nvSpPr>
+        <p:spPr>
+          <a:xfrm>
+            <a:off x="585216" y="4279392"/>
+            <a:ext cx="960120" cy="292608"/>
+          </a:xfrm>
+          <a:prstGeom prst="rect">
+            <a:avLst/>
+          </a:prstGeom>
+          <a:noFill/>
+        </p:spPr>
+        <p:txBody>
+          <a:bodyPr wrap="square" anchor="ctr" lIns="36000" rIns="36000" tIns="18000" bIns="18000">
+            <a:spAutoFit/>
+          </a:bodyPr>
+          <a:lstStyle/>
+          <a:p>
+            <a:pPr algn="ctr"/>
+            <a:r>
+              <a:rPr sz="1120" b="1" i="0">
+                <a:solidFill>
+                  <a:srgbClr val="3B5174"/>
+                </a:solidFill>
+                <a:latin typeface="Arial"/>
+              </a:rPr>
+              <a:t>3 types</a:t>
+            </a:r>
+          </a:p>
+        </p:txBody>
+      </p:sp>
+      <p:sp>
+        <p:nvSpPr>
+          <p:cNvPr id="20" name="TextBox 19"/>
+          <p:cNvSpPr txBox="1"/>
+          <p:nvPr/>
+        </p:nvSpPr>
+        <p:spPr>
+          <a:xfrm>
+            <a:off x="1636776" y="4242816"/>
+            <a:ext cx="2146706" cy="365760"/>
+          </a:xfrm>
+          <a:prstGeom prst="rect">
+            <a:avLst/>
+          </a:prstGeom>
+          <a:noFill/>
+        </p:spPr>
+        <p:txBody>
+          <a:bodyPr wrap="square" anchor="ctr" lIns="36000" rIns="36000" tIns="18000" bIns="18000">
+            <a:spAutoFit/>
+          </a:bodyPr>
+          <a:lstStyle/>
+          <a:p>
+            <a:pPr algn="l"/>
+            <a:r>
+              <a:rPr sz="1232" b="0" i="0">
+                <a:solidFill>
+                  <a:srgbClr val="334155"/>
+                </a:solidFill>
+                <a:latin typeface="Arial"/>
+              </a:rPr>
+              <a:t>HEC, MC, MHEC</a:t>
+            </a:r>
+          </a:p>
+        </p:txBody>
+      </p:sp>
+      <p:sp>
+        <p:nvSpPr>
+          <p:cNvPr id="21" name="Rounded Rectangle 20"/>
+          <p:cNvSpPr/>
+          <p:nvPr/>
+        </p:nvSpPr>
+        <p:spPr>
+          <a:xfrm>
+            <a:off x="585216" y="4956048"/>
+            <a:ext cx="960120" cy="292608"/>
+          </a:xfrm>
+          <a:prstGeom prst="roundRect">
+            <a:avLst>
+              <a:gd name="adj" fmla="val 50000"/>
+            </a:avLst>
+          </a:prstGeom>
+          <a:solidFill>
+            <a:srgbClr val="FFFFFF"/>
+          </a:solidFill>
+          <a:ln w="8890">
+            <a:solidFill>
+              <a:srgbClr val="3B5174"/>
+            </a:solidFill>
+          </a:ln>
+          <a:effectLst/>
+        </p:spPr>
+        <p:style>
+          <a:lnRef idx="1">
+            <a:schemeClr val="accent1"/>
+          </a:lnRef>
+          <a:fillRef idx="3">
+            <a:schemeClr val="accent1"/>
+          </a:fillRef>
+          <a:effectRef idx="2">
+            <a:schemeClr val="accent1"/>
+          </a:effectRef>
+          <a:fontRef idx="minor">
+            <a:schemeClr val="lt1"/>
+          </a:fontRef>
+        </p:style>
+        <p:txBody>
+          <a:bodyPr rtlCol="0" anchor="ctr"/>
+          <a:lstStyle/>
+          <a:p>
+            <a:pPr algn="ctr"/>
+          </a:p>
+        </p:txBody>
+      </p:sp>
+      <p:sp>
+        <p:nvSpPr>
+          <p:cNvPr id="22" name="TextBox 21"/>
+          <p:cNvSpPr txBox="1"/>
+          <p:nvPr/>
+        </p:nvSpPr>
+        <p:spPr>
+          <a:xfrm>
+            <a:off x="585216" y="4956048"/>
+            <a:ext cx="960120" cy="292608"/>
+          </a:xfrm>
+          <a:prstGeom prst="rect">
+            <a:avLst/>
+          </a:prstGeom>
+          <a:noFill/>
+        </p:spPr>
+        <p:txBody>
+          <a:bodyPr wrap="square" anchor="ctr" lIns="36000" rIns="36000" tIns="18000" bIns="18000">
+            <a:spAutoFit/>
+          </a:bodyPr>
+          <a:lstStyle/>
+          <a:p>
+            <a:pPr algn="ctr"/>
+            <a:r>
+              <a:rPr sz="1120" b="1" i="0">
+                <a:solidFill>
+                  <a:srgbClr val="3B5174"/>
+                </a:solidFill>
+                <a:latin typeface="Arial"/>
+              </a:rPr>
+              <a:t>Bio.</a:t>
+            </a:r>
+          </a:p>
+        </p:txBody>
+      </p:sp>
+      <p:sp>
+        <p:nvSpPr>
+          <p:cNvPr id="23" name="TextBox 22"/>
+          <p:cNvSpPr txBox="1"/>
+          <p:nvPr/>
+        </p:nvSpPr>
+        <p:spPr>
+          <a:xfrm>
+            <a:off x="1636776" y="4919472"/>
+            <a:ext cx="2146706" cy="365760"/>
+          </a:xfrm>
+          <a:prstGeom prst="rect">
+            <a:avLst/>
+          </a:prstGeom>
+          <a:noFill/>
+        </p:spPr>
+        <p:txBody>
+          <a:bodyPr wrap="square" anchor="ctr" lIns="36000" rIns="36000" tIns="18000" bIns="18000">
+            <a:spAutoFit/>
+          </a:bodyPr>
+          <a:lstStyle/>
+          <a:p>
+            <a:pPr algn="l"/>
+            <a:r>
+              <a:rPr sz="1232" b="0" i="0">
+                <a:solidFill>
+                  <a:srgbClr val="334155"/>
+                </a:solidFill>
+                <a:latin typeface="Arial"/>
+              </a:rPr>
+              <a:t>Highly biodegradable</a:t>
+            </a:r>
+          </a:p>
+        </p:txBody>
+      </p:sp>
+      <p:sp>
+        <p:nvSpPr>
+          <p:cNvPr id="24" name="Rounded Rectangle 23"/>
+          <p:cNvSpPr/>
+          <p:nvPr/>
+        </p:nvSpPr>
+        <p:spPr>
+          <a:xfrm>
+            <a:off x="585216" y="5632704"/>
+            <a:ext cx="960120" cy="292608"/>
+          </a:xfrm>
+          <a:prstGeom prst="roundRect">
+            <a:avLst>
+              <a:gd name="adj" fmla="val 50000"/>
+            </a:avLst>
+          </a:prstGeom>
+          <a:solidFill>
+            <a:srgbClr val="FFFFFF"/>
+          </a:solidFill>
+          <a:ln w="8890">
+            <a:solidFill>
+              <a:srgbClr val="3B5174"/>
+            </a:solidFill>
+          </a:ln>
+          <a:effectLst/>
+        </p:spPr>
+        <p:style>
+          <a:lnRef idx="1">
+            <a:schemeClr val="accent1"/>
+          </a:lnRef>
+          <a:fillRef idx="3">
+            <a:schemeClr val="accent1"/>
+          </a:fillRef>
+          <a:effectRef idx="2">
+            <a:schemeClr val="accent1"/>
+          </a:effectRef>
+          <a:fontRef idx="minor">
+            <a:schemeClr val="lt1"/>
+          </a:fontRef>
+        </p:style>
+        <p:txBody>
+          <a:bodyPr rtlCol="0" anchor="ctr"/>
+          <a:lstStyle/>
+          <a:p>
+            <a:pPr algn="ctr"/>
+          </a:p>
+        </p:txBody>
+      </p:sp>
+      <p:sp>
+        <p:nvSpPr>
+          <p:cNvPr id="25" name="TextBox 24"/>
+          <p:cNvSpPr txBox="1"/>
+          <p:nvPr/>
+        </p:nvSpPr>
+        <p:spPr>
+          <a:xfrm>
+            <a:off x="585216" y="5632704"/>
+            <a:ext cx="960120" cy="292608"/>
+          </a:xfrm>
+          <a:prstGeom prst="rect">
+            <a:avLst/>
+          </a:prstGeom>
+          <a:noFill/>
+        </p:spPr>
+        <p:txBody>
+          <a:bodyPr wrap="square" anchor="ctr" lIns="36000" rIns="36000" tIns="18000" bIns="18000">
+            <a:spAutoFit/>
+          </a:bodyPr>
+          <a:lstStyle/>
+          <a:p>
+            <a:pPr algn="ctr"/>
+            <a:r>
+              <a:rPr sz="1120" b="1" i="0">
+                <a:solidFill>
+                  <a:srgbClr val="3B5174"/>
+                </a:solidFill>
+                <a:latin typeface="Arial"/>
+              </a:rPr>
+              <a:t>Role</a:t>
+            </a:r>
+          </a:p>
+        </p:txBody>
+      </p:sp>
+      <p:sp>
+        <p:nvSpPr>
+          <p:cNvPr id="26" name="TextBox 25"/>
+          <p:cNvSpPr txBox="1"/>
+          <p:nvPr/>
+        </p:nvSpPr>
+        <p:spPr>
+          <a:xfrm>
+            <a:off x="1636776" y="5596128"/>
+            <a:ext cx="2146706" cy="365760"/>
+          </a:xfrm>
+          <a:prstGeom prst="rect">
+            <a:avLst/>
+          </a:prstGeom>
+          <a:noFill/>
+        </p:spPr>
+        <p:txBody>
+          <a:bodyPr wrap="square" anchor="ctr" lIns="36000" rIns="36000" tIns="18000" bIns="18000">
+            <a:spAutoFit/>
+          </a:bodyPr>
+          <a:lstStyle/>
+          <a:p>
+            <a:pPr algn="l"/>
+            <a:r>
+              <a:rPr sz="1232" b="0" i="0">
+                <a:solidFill>
+                  <a:srgbClr val="334155"/>
+                </a:solidFill>
+                <a:latin typeface="Arial"/>
+              </a:rPr>
+              <a:t>Viscosity &amp; structure</a:t>
+            </a:r>
+          </a:p>
+        </p:txBody>
+      </p:sp>
+      <p:sp>
+        <p:nvSpPr>
+          <p:cNvPr id="27" name="Rounded Rectangle 26"/>
+          <p:cNvSpPr/>
+          <p:nvPr/>
+        </p:nvSpPr>
+        <p:spPr>
+          <a:xfrm>
+            <a:off x="4277258" y="1444752"/>
+            <a:ext cx="3637178" cy="5138928"/>
+          </a:xfrm>
+          <a:prstGeom prst="roundRect">
+            <a:avLst>
+              <a:gd name="adj" fmla="val 3500"/>
             </a:avLst>
           </a:prstGeom>
           <a:solidFill>
@@ -58232,14 +59350,14 @@
       </p:sp>
       <p:sp>
         <p:nvSpPr>
-          <p:cNvPr id="17" name="Rectangle 16"/>
+          <p:cNvPr id="28" name="Rectangle 27"/>
           <p:cNvSpPr/>
           <p:nvPr/>
         </p:nvSpPr>
         <p:spPr>
           <a:xfrm>
-            <a:off x="4277258" y="859536"/>
-            <a:ext cx="3637178" cy="45720"/>
+            <a:off x="4277258" y="1444752"/>
+            <a:ext cx="3637178" cy="54864"/>
           </a:xfrm>
           <a:prstGeom prst="rect">
             <a:avLst/>
@@ -58276,14 +59394,14 @@
       </p:sp>
       <p:sp>
         <p:nvSpPr>
-          <p:cNvPr id="18" name="TextBox 17"/>
-          <p:cNvSpPr txBox="1"/>
-          <p:nvPr/>
-        </p:nvSpPr>
-        <p:spPr>
-          <a:xfrm>
-            <a:off x="4277258" y="1225296"/>
-            <a:ext cx="3637178" cy="548640"/>
+          <p:cNvPr id="29" name="TextBox 28"/>
+          <p:cNvSpPr txBox="1"/>
+          <p:nvPr/>
+        </p:nvSpPr>
+        <p:spPr>
+          <a:xfrm>
+            <a:off x="4277258" y="1719072"/>
+            <a:ext cx="3637178" cy="512064"/>
           </a:xfrm>
           <a:prstGeom prst="rect">
             <a:avLst/>
@@ -58298,7 +59416,7 @@
           <a:p>
             <a:pPr algn="ctr"/>
             <a:r>
-              <a:rPr sz="3584" b="0" i="0">
+              <a:rPr sz="3360" b="0" i="0">
                 <a:solidFill>
                   <a:srgbClr val="4A7C8C"/>
                 </a:solidFill>
@@ -58311,29 +59429,29 @@
       </p:sp>
       <p:sp>
         <p:nvSpPr>
-          <p:cNvPr id="19" name="TextBox 18"/>
-          <p:cNvSpPr txBox="1"/>
-          <p:nvPr/>
-        </p:nvSpPr>
-        <p:spPr>
-          <a:xfrm>
-            <a:off x="4478426" y="1865376"/>
-            <a:ext cx="3234842" cy="512064"/>
-          </a:xfrm>
-          <a:prstGeom prst="rect">
-            <a:avLst/>
-          </a:prstGeom>
-          <a:noFill/>
-        </p:spPr>
-        <p:txBody>
-          <a:bodyPr wrap="square" anchor="t" lIns="36000" rIns="36000" tIns="18000" bIns="18000">
-            <a:spAutoFit/>
-          </a:bodyPr>
-          <a:lstStyle/>
-          <a:p>
-            <a:pPr algn="ctr"/>
-            <a:r>
-              <a:rPr sz="1904" b="1" i="0">
+          <p:cNvPr id="30" name="TextBox 29"/>
+          <p:cNvSpPr txBox="1"/>
+          <p:nvPr/>
+        </p:nvSpPr>
+        <p:spPr>
+          <a:xfrm>
+            <a:off x="4496714" y="2286000"/>
+            <a:ext cx="3198266" cy="384048"/>
+          </a:xfrm>
+          <a:prstGeom prst="rect">
+            <a:avLst/>
+          </a:prstGeom>
+          <a:noFill/>
+        </p:spPr>
+        <p:txBody>
+          <a:bodyPr wrap="square" anchor="t" lIns="36000" rIns="36000" tIns="18000" bIns="18000">
+            <a:spAutoFit/>
+          </a:bodyPr>
+          <a:lstStyle/>
+          <a:p>
+            <a:pPr algn="ctr"/>
+            <a:r>
+              <a:rPr sz="1792" b="1" i="0">
                 <a:solidFill>
                   <a:srgbClr val="1E293B"/>
                 </a:solidFill>
@@ -58346,14 +59464,49 @@
       </p:sp>
       <p:sp>
         <p:nvSpPr>
-          <p:cNvPr id="20" name="Rectangle 19"/>
+          <p:cNvPr id="31" name="TextBox 30"/>
+          <p:cNvSpPr txBox="1"/>
+          <p:nvPr/>
+        </p:nvSpPr>
+        <p:spPr>
+          <a:xfrm>
+            <a:off x="4496714" y="2670048"/>
+            <a:ext cx="3198266" cy="256032"/>
+          </a:xfrm>
+          <a:prstGeom prst="rect">
+            <a:avLst/>
+          </a:prstGeom>
+          <a:noFill/>
+        </p:spPr>
+        <p:txBody>
+          <a:bodyPr wrap="square" anchor="t" lIns="36000" rIns="36000" tIns="18000" bIns="18000">
+            <a:spAutoFit/>
+          </a:bodyPr>
+          <a:lstStyle/>
+          <a:p>
+            <a:pPr algn="ctr"/>
+            <a:r>
+              <a:rPr sz="1120" b="0" i="1">
+                <a:solidFill>
+                  <a:srgbClr val="64748B"/>
+                </a:solidFill>
+                <a:latin typeface="Arial"/>
+              </a:rPr>
+              <a:t>Colloidal Silica Particles</a:t>
+            </a:r>
+          </a:p>
+        </p:txBody>
+      </p:sp>
+      <p:sp>
+        <p:nvSpPr>
+          <p:cNvPr id="32" name="Rectangle 31"/>
           <p:cNvSpPr/>
           <p:nvPr/>
         </p:nvSpPr>
         <p:spPr>
           <a:xfrm>
-            <a:off x="4551578" y="2414016"/>
-            <a:ext cx="3088538" cy="13716"/>
+            <a:off x="4569866" y="2999232"/>
+            <a:ext cx="3051962" cy="13716"/>
           </a:xfrm>
           <a:prstGeom prst="rect">
             <a:avLst/>
@@ -58390,53 +59543,407 @@
       </p:sp>
       <p:sp>
         <p:nvSpPr>
-          <p:cNvPr id="21" name="TextBox 20"/>
-          <p:cNvSpPr txBox="1"/>
-          <p:nvPr/>
-        </p:nvSpPr>
-        <p:spPr>
-          <a:xfrm>
-            <a:off x="4478426" y="2560320"/>
-            <a:ext cx="3234842" cy="3383280"/>
-          </a:xfrm>
-          <a:prstGeom prst="rect">
-            <a:avLst/>
-          </a:prstGeom>
-          <a:noFill/>
-        </p:spPr>
-        <p:txBody>
-          <a:bodyPr wrap="square" anchor="t" lIns="36000" rIns="36000" tIns="18000" bIns="18000">
-            <a:spAutoFit/>
-          </a:bodyPr>
-          <a:lstStyle/>
-          <a:p>
-            <a:pPr algn="ctr"/>
-            <a:r>
-              <a:rPr sz="1456" b="0" i="0">
+          <p:cNvPr id="33" name="TextBox 32"/>
+          <p:cNvSpPr txBox="1"/>
+          <p:nvPr/>
+        </p:nvSpPr>
+        <p:spPr>
+          <a:xfrm>
+            <a:off x="4496714" y="3127248"/>
+            <a:ext cx="3198266" cy="1005840"/>
+          </a:xfrm>
+          <a:prstGeom prst="rect">
+            <a:avLst/>
+          </a:prstGeom>
+          <a:noFill/>
+        </p:spPr>
+        <p:txBody>
+          <a:bodyPr wrap="square" anchor="t" lIns="36000" rIns="36000" tIns="18000" bIns="18000">
+            <a:spAutoFit/>
+          </a:bodyPr>
+          <a:lstStyle/>
+          <a:p>
+            <a:pPr algn="ctr"/>
+            <a:r>
+              <a:rPr sz="1344" b="0" i="0">
                 <a:solidFill>
                   <a:srgbClr val="475569"/>
                 </a:solidFill>
                 <a:latin typeface="Arial"/>
               </a:rPr>
-              <a:t>Dynamically interacts with the polymer and forms a silica aerogel upon heat activation.</a:t>
-            </a:r>
-          </a:p>
-        </p:txBody>
-      </p:sp>
-      <p:sp>
-        <p:nvSpPr>
-          <p:cNvPr id="22" name="Rounded Rectangle 21"/>
+              <a:t>The key component that interacts dynamically with polymers and forms aerogel under heat.</a:t>
+            </a:r>
+          </a:p>
+        </p:txBody>
+      </p:sp>
+      <p:sp>
+        <p:nvSpPr>
+          <p:cNvPr id="34" name="Rounded Rectangle 33"/>
           <p:cNvSpPr/>
           <p:nvPr/>
         </p:nvSpPr>
         <p:spPr>
           <a:xfrm>
-            <a:off x="8188756" y="859536"/>
-            <a:ext cx="3637178" cy="5303520"/>
+            <a:off x="4496714" y="4279392"/>
+            <a:ext cx="960120" cy="292608"/>
           </a:xfrm>
           <a:prstGeom prst="roundRect">
             <a:avLst>
-              <a:gd name="adj" fmla="val 4000"/>
+              <a:gd name="adj" fmla="val 50000"/>
+            </a:avLst>
+          </a:prstGeom>
+          <a:solidFill>
+            <a:srgbClr val="FFFFFF"/>
+          </a:solidFill>
+          <a:ln w="8890">
+            <a:solidFill>
+              <a:srgbClr val="4A7C8C"/>
+            </a:solidFill>
+          </a:ln>
+          <a:effectLst/>
+        </p:spPr>
+        <p:style>
+          <a:lnRef idx="1">
+            <a:schemeClr val="accent1"/>
+          </a:lnRef>
+          <a:fillRef idx="3">
+            <a:schemeClr val="accent1"/>
+          </a:fillRef>
+          <a:effectRef idx="2">
+            <a:schemeClr val="accent1"/>
+          </a:effectRef>
+          <a:fontRef idx="minor">
+            <a:schemeClr val="lt1"/>
+          </a:fontRef>
+        </p:style>
+        <p:txBody>
+          <a:bodyPr rtlCol="0" anchor="ctr"/>
+          <a:lstStyle/>
+          <a:p>
+            <a:pPr algn="ctr"/>
+          </a:p>
+        </p:txBody>
+      </p:sp>
+      <p:sp>
+        <p:nvSpPr>
+          <p:cNvPr id="35" name="TextBox 34"/>
+          <p:cNvSpPr txBox="1"/>
+          <p:nvPr/>
+        </p:nvSpPr>
+        <p:spPr>
+          <a:xfrm>
+            <a:off x="4496714" y="4279392"/>
+            <a:ext cx="960120" cy="292608"/>
+          </a:xfrm>
+          <a:prstGeom prst="rect">
+            <a:avLst/>
+          </a:prstGeom>
+          <a:noFill/>
+        </p:spPr>
+        <p:txBody>
+          <a:bodyPr wrap="square" anchor="ctr" lIns="36000" rIns="36000" tIns="18000" bIns="18000">
+            <a:spAutoFit/>
+          </a:bodyPr>
+          <a:lstStyle/>
+          <a:p>
+            <a:pPr algn="ctr"/>
+            <a:r>
+              <a:rPr sz="1120" b="1" i="0">
+                <a:solidFill>
+                  <a:srgbClr val="4A7C8C"/>
+                </a:solidFill>
+                <a:latin typeface="Arial"/>
+              </a:rPr>
+              <a:t>Size</a:t>
+            </a:r>
+          </a:p>
+        </p:txBody>
+      </p:sp>
+      <p:sp>
+        <p:nvSpPr>
+          <p:cNvPr id="36" name="TextBox 35"/>
+          <p:cNvSpPr txBox="1"/>
+          <p:nvPr/>
+        </p:nvSpPr>
+        <p:spPr>
+          <a:xfrm>
+            <a:off x="5548274" y="4242816"/>
+            <a:ext cx="2146706" cy="365760"/>
+          </a:xfrm>
+          <a:prstGeom prst="rect">
+            <a:avLst/>
+          </a:prstGeom>
+          <a:noFill/>
+        </p:spPr>
+        <p:txBody>
+          <a:bodyPr wrap="square" anchor="ctr" lIns="36000" rIns="36000" tIns="18000" bIns="18000">
+            <a:spAutoFit/>
+          </a:bodyPr>
+          <a:lstStyle/>
+          <a:p>
+            <a:pPr algn="l"/>
+            <a:r>
+              <a:rPr sz="1232" b="0" i="0">
+                <a:solidFill>
+                  <a:srgbClr val="334155"/>
+                </a:solidFill>
+                <a:latin typeface="Arial"/>
+              </a:rPr>
+              <a:t>~22 nm monodisperse</a:t>
+            </a:r>
+          </a:p>
+        </p:txBody>
+      </p:sp>
+      <p:sp>
+        <p:nvSpPr>
+          <p:cNvPr id="37" name="Rounded Rectangle 36"/>
+          <p:cNvSpPr/>
+          <p:nvPr/>
+        </p:nvSpPr>
+        <p:spPr>
+          <a:xfrm>
+            <a:off x="4496714" y="4956048"/>
+            <a:ext cx="960120" cy="292608"/>
+          </a:xfrm>
+          <a:prstGeom prst="roundRect">
+            <a:avLst>
+              <a:gd name="adj" fmla="val 50000"/>
+            </a:avLst>
+          </a:prstGeom>
+          <a:solidFill>
+            <a:srgbClr val="FFFFFF"/>
+          </a:solidFill>
+          <a:ln w="8890">
+            <a:solidFill>
+              <a:srgbClr val="4A7C8C"/>
+            </a:solidFill>
+          </a:ln>
+          <a:effectLst/>
+        </p:spPr>
+        <p:style>
+          <a:lnRef idx="1">
+            <a:schemeClr val="accent1"/>
+          </a:lnRef>
+          <a:fillRef idx="3">
+            <a:schemeClr val="accent1"/>
+          </a:fillRef>
+          <a:effectRef idx="2">
+            <a:schemeClr val="accent1"/>
+          </a:effectRef>
+          <a:fontRef idx="minor">
+            <a:schemeClr val="lt1"/>
+          </a:fontRef>
+        </p:style>
+        <p:txBody>
+          <a:bodyPr rtlCol="0" anchor="ctr"/>
+          <a:lstStyle/>
+          <a:p>
+            <a:pPr algn="ctr"/>
+          </a:p>
+        </p:txBody>
+      </p:sp>
+      <p:sp>
+        <p:nvSpPr>
+          <p:cNvPr id="38" name="TextBox 37"/>
+          <p:cNvSpPr txBox="1"/>
+          <p:nvPr/>
+        </p:nvSpPr>
+        <p:spPr>
+          <a:xfrm>
+            <a:off x="4496714" y="4956048"/>
+            <a:ext cx="960120" cy="292608"/>
+          </a:xfrm>
+          <a:prstGeom prst="rect">
+            <a:avLst/>
+          </a:prstGeom>
+          <a:noFill/>
+        </p:spPr>
+        <p:txBody>
+          <a:bodyPr wrap="square" anchor="ctr" lIns="36000" rIns="36000" tIns="18000" bIns="18000">
+            <a:spAutoFit/>
+          </a:bodyPr>
+          <a:lstStyle/>
+          <a:p>
+            <a:pPr algn="ctr"/>
+            <a:r>
+              <a:rPr sz="1120" b="1" i="0">
+                <a:solidFill>
+                  <a:srgbClr val="4A7C8C"/>
+                </a:solidFill>
+                <a:latin typeface="Arial"/>
+              </a:rPr>
+              <a:t>Sinter</a:t>
+            </a:r>
+          </a:p>
+        </p:txBody>
+      </p:sp>
+      <p:sp>
+        <p:nvSpPr>
+          <p:cNvPr id="39" name="TextBox 38"/>
+          <p:cNvSpPr txBox="1"/>
+          <p:nvPr/>
+        </p:nvSpPr>
+        <p:spPr>
+          <a:xfrm>
+            <a:off x="5548274" y="4919472"/>
+            <a:ext cx="2146706" cy="365760"/>
+          </a:xfrm>
+          <a:prstGeom prst="rect">
+            <a:avLst/>
+          </a:prstGeom>
+          <a:noFill/>
+        </p:spPr>
+        <p:txBody>
+          <a:bodyPr wrap="square" anchor="ctr" lIns="36000" rIns="36000" tIns="18000" bIns="18000">
+            <a:spAutoFit/>
+          </a:bodyPr>
+          <a:lstStyle/>
+          <a:p>
+            <a:pPr algn="l"/>
+            <a:r>
+              <a:rPr sz="1232" b="0" i="0">
+                <a:solidFill>
+                  <a:srgbClr val="334155"/>
+                </a:solidFill>
+                <a:latin typeface="Arial"/>
+              </a:rPr>
+              <a:t>Forms silica skeleton</a:t>
+            </a:r>
+          </a:p>
+        </p:txBody>
+      </p:sp>
+      <p:sp>
+        <p:nvSpPr>
+          <p:cNvPr id="40" name="Rounded Rectangle 39"/>
+          <p:cNvSpPr/>
+          <p:nvPr/>
+        </p:nvSpPr>
+        <p:spPr>
+          <a:xfrm>
+            <a:off x="4496714" y="5632704"/>
+            <a:ext cx="960120" cy="292608"/>
+          </a:xfrm>
+          <a:prstGeom prst="roundRect">
+            <a:avLst>
+              <a:gd name="adj" fmla="val 50000"/>
+            </a:avLst>
+          </a:prstGeom>
+          <a:solidFill>
+            <a:srgbClr val="FFFFFF"/>
+          </a:solidFill>
+          <a:ln w="8890">
+            <a:solidFill>
+              <a:srgbClr val="4A7C8C"/>
+            </a:solidFill>
+          </a:ln>
+          <a:effectLst/>
+        </p:spPr>
+        <p:style>
+          <a:lnRef idx="1">
+            <a:schemeClr val="accent1"/>
+          </a:lnRef>
+          <a:fillRef idx="3">
+            <a:schemeClr val="accent1"/>
+          </a:fillRef>
+          <a:effectRef idx="2">
+            <a:schemeClr val="accent1"/>
+          </a:effectRef>
+          <a:fontRef idx="minor">
+            <a:schemeClr val="lt1"/>
+          </a:fontRef>
+        </p:style>
+        <p:txBody>
+          <a:bodyPr rtlCol="0" anchor="ctr"/>
+          <a:lstStyle/>
+          <a:p>
+            <a:pPr algn="ctr"/>
+          </a:p>
+        </p:txBody>
+      </p:sp>
+      <p:sp>
+        <p:nvSpPr>
+          <p:cNvPr id="41" name="TextBox 40"/>
+          <p:cNvSpPr txBox="1"/>
+          <p:nvPr/>
+        </p:nvSpPr>
+        <p:spPr>
+          <a:xfrm>
+            <a:off x="4496714" y="5632704"/>
+            <a:ext cx="960120" cy="292608"/>
+          </a:xfrm>
+          <a:prstGeom prst="rect">
+            <a:avLst/>
+          </a:prstGeom>
+          <a:noFill/>
+        </p:spPr>
+        <p:txBody>
+          <a:bodyPr wrap="square" anchor="ctr" lIns="36000" rIns="36000" tIns="18000" bIns="18000">
+            <a:spAutoFit/>
+          </a:bodyPr>
+          <a:lstStyle/>
+          <a:p>
+            <a:pPr algn="ctr"/>
+            <a:r>
+              <a:rPr sz="1120" b="1" i="0">
+                <a:solidFill>
+                  <a:srgbClr val="4A7C8C"/>
+                </a:solidFill>
+                <a:latin typeface="Arial"/>
+              </a:rPr>
+              <a:t>Role</a:t>
+            </a:r>
+          </a:p>
+        </p:txBody>
+      </p:sp>
+      <p:sp>
+        <p:nvSpPr>
+          <p:cNvPr id="42" name="TextBox 41"/>
+          <p:cNvSpPr txBox="1"/>
+          <p:nvPr/>
+        </p:nvSpPr>
+        <p:spPr>
+          <a:xfrm>
+            <a:off x="5548274" y="5596128"/>
+            <a:ext cx="2146706" cy="365760"/>
+          </a:xfrm>
+          <a:prstGeom prst="rect">
+            <a:avLst/>
+          </a:prstGeom>
+          <a:noFill/>
+        </p:spPr>
+        <p:txBody>
+          <a:bodyPr wrap="square" anchor="ctr" lIns="36000" rIns="36000" tIns="18000" bIns="18000">
+            <a:spAutoFit/>
+          </a:bodyPr>
+          <a:lstStyle/>
+          <a:p>
+            <a:pPr algn="l"/>
+            <a:r>
+              <a:rPr sz="1232" b="0" i="0">
+                <a:solidFill>
+                  <a:srgbClr val="334155"/>
+                </a:solidFill>
+                <a:latin typeface="Arial"/>
+              </a:rPr>
+              <a:t>Source of aerogel</a:t>
+            </a:r>
+          </a:p>
+        </p:txBody>
+      </p:sp>
+      <p:sp>
+        <p:nvSpPr>
+          <p:cNvPr id="43" name="Rounded Rectangle 42"/>
+          <p:cNvSpPr/>
+          <p:nvPr/>
+        </p:nvSpPr>
+        <p:spPr>
+          <a:xfrm>
+            <a:off x="8188756" y="1444752"/>
+            <a:ext cx="3637178" cy="5138928"/>
+          </a:xfrm>
+          <a:prstGeom prst="roundRect">
+            <a:avLst>
+              <a:gd name="adj" fmla="val 3500"/>
             </a:avLst>
           </a:prstGeom>
           <a:solidFill>
@@ -58473,14 +59980,14 @@
       </p:sp>
       <p:sp>
         <p:nvSpPr>
-          <p:cNvPr id="23" name="Rectangle 22"/>
+          <p:cNvPr id="44" name="Rectangle 43"/>
           <p:cNvSpPr/>
           <p:nvPr/>
         </p:nvSpPr>
         <p:spPr>
           <a:xfrm>
-            <a:off x="8188756" y="859536"/>
-            <a:ext cx="3637178" cy="45720"/>
+            <a:off x="8188756" y="1444752"/>
+            <a:ext cx="3637178" cy="54864"/>
           </a:xfrm>
           <a:prstGeom prst="rect">
             <a:avLst/>
@@ -58517,14 +60024,14 @@
       </p:sp>
       <p:sp>
         <p:nvSpPr>
-          <p:cNvPr id="24" name="TextBox 23"/>
-          <p:cNvSpPr txBox="1"/>
-          <p:nvPr/>
-        </p:nvSpPr>
-        <p:spPr>
-          <a:xfrm>
-            <a:off x="8188756" y="1225296"/>
-            <a:ext cx="3637178" cy="548640"/>
+          <p:cNvPr id="45" name="TextBox 44"/>
+          <p:cNvSpPr txBox="1"/>
+          <p:nvPr/>
+        </p:nvSpPr>
+        <p:spPr>
+          <a:xfrm>
+            <a:off x="8188756" y="1719072"/>
+            <a:ext cx="3637178" cy="512064"/>
           </a:xfrm>
           <a:prstGeom prst="rect">
             <a:avLst/>
@@ -58539,7 +60046,7 @@
           <a:p>
             <a:pPr algn="ctr"/>
             <a:r>
-              <a:rPr sz="3584" b="0" i="0">
+              <a:rPr sz="3360" b="0" i="0">
                 <a:solidFill>
                   <a:srgbClr val="9F7639"/>
                 </a:solidFill>
@@ -58552,49 +60059,84 @@
       </p:sp>
       <p:sp>
         <p:nvSpPr>
-          <p:cNvPr id="25" name="TextBox 24"/>
-          <p:cNvSpPr txBox="1"/>
-          <p:nvPr/>
-        </p:nvSpPr>
-        <p:spPr>
-          <a:xfrm>
-            <a:off x="8389924" y="1865376"/>
-            <a:ext cx="3234842" cy="512064"/>
-          </a:xfrm>
-          <a:prstGeom prst="rect">
-            <a:avLst/>
-          </a:prstGeom>
-          <a:noFill/>
-        </p:spPr>
-        <p:txBody>
-          <a:bodyPr wrap="square" anchor="t" lIns="36000" rIns="36000" tIns="18000" bIns="18000">
-            <a:spAutoFit/>
-          </a:bodyPr>
-          <a:lstStyle/>
-          <a:p>
-            <a:pPr algn="ctr"/>
-            <a:r>
-              <a:rPr sz="1904" b="1" i="0">
+          <p:cNvPr id="46" name="TextBox 45"/>
+          <p:cNvSpPr txBox="1"/>
+          <p:nvPr/>
+        </p:nvSpPr>
+        <p:spPr>
+          <a:xfrm>
+            <a:off x="8408212" y="2286000"/>
+            <a:ext cx="3198266" cy="384048"/>
+          </a:xfrm>
+          <a:prstGeom prst="rect">
+            <a:avLst/>
+          </a:prstGeom>
+          <a:noFill/>
+        </p:spPr>
+        <p:txBody>
+          <a:bodyPr wrap="square" anchor="t" lIns="36000" rIns="36000" tIns="18000" bIns="18000">
+            <a:spAutoFit/>
+          </a:bodyPr>
+          <a:lstStyle/>
+          <a:p>
+            <a:pPr algn="ctr"/>
+            <a:r>
+              <a:rPr sz="1792" b="1" i="0">
                 <a:solidFill>
                   <a:srgbClr val="1E293B"/>
                 </a:solidFill>
                 <a:latin typeface="Arial"/>
               </a:rPr>
-              <a:t>Polymer–Particle (PP) Interaction</a:t>
-            </a:r>
-          </a:p>
-        </p:txBody>
-      </p:sp>
-      <p:sp>
-        <p:nvSpPr>
-          <p:cNvPr id="26" name="Rectangle 25"/>
+              <a:t>PP Interaction</a:t>
+            </a:r>
+          </a:p>
+        </p:txBody>
+      </p:sp>
+      <p:sp>
+        <p:nvSpPr>
+          <p:cNvPr id="47" name="TextBox 46"/>
+          <p:cNvSpPr txBox="1"/>
+          <p:nvPr/>
+        </p:nvSpPr>
+        <p:spPr>
+          <a:xfrm>
+            <a:off x="8408212" y="2670048"/>
+            <a:ext cx="3198266" cy="256032"/>
+          </a:xfrm>
+          <a:prstGeom prst="rect">
+            <a:avLst/>
+          </a:prstGeom>
+          <a:noFill/>
+        </p:spPr>
+        <p:txBody>
+          <a:bodyPr wrap="square" anchor="t" lIns="36000" rIns="36000" tIns="18000" bIns="18000">
+            <a:spAutoFit/>
+          </a:bodyPr>
+          <a:lstStyle/>
+          <a:p>
+            <a:pPr algn="ctr"/>
+            <a:r>
+              <a:rPr sz="1120" b="0" i="1">
+                <a:solidFill>
+                  <a:srgbClr val="64748B"/>
+                </a:solidFill>
+                <a:latin typeface="Arial"/>
+              </a:rPr>
+              <a:t>Polymer–Particle Interaction</a:t>
+            </a:r>
+          </a:p>
+        </p:txBody>
+      </p:sp>
+      <p:sp>
+        <p:nvSpPr>
+          <p:cNvPr id="48" name="Rectangle 47"/>
           <p:cNvSpPr/>
           <p:nvPr/>
         </p:nvSpPr>
         <p:spPr>
           <a:xfrm>
-            <a:off x="8463076" y="2414016"/>
-            <a:ext cx="3088538" cy="13716"/>
+            <a:off x="8481364" y="2999232"/>
+            <a:ext cx="3051962" cy="13716"/>
           </a:xfrm>
           <a:prstGeom prst="rect">
             <a:avLst/>
@@ -58631,35 +60173,389 @@
       </p:sp>
       <p:sp>
         <p:nvSpPr>
-          <p:cNvPr id="27" name="TextBox 26"/>
-          <p:cNvSpPr txBox="1"/>
-          <p:nvPr/>
-        </p:nvSpPr>
-        <p:spPr>
-          <a:xfrm>
-            <a:off x="8389924" y="2560320"/>
-            <a:ext cx="3234842" cy="3383280"/>
-          </a:xfrm>
-          <a:prstGeom prst="rect">
-            <a:avLst/>
-          </a:prstGeom>
-          <a:noFill/>
-        </p:spPr>
-        <p:txBody>
-          <a:bodyPr wrap="square" anchor="t" lIns="36000" rIns="36000" tIns="18000" bIns="18000">
-            <a:spAutoFit/>
-          </a:bodyPr>
-          <a:lstStyle/>
-          <a:p>
-            <a:pPr algn="ctr"/>
-            <a:r>
-              <a:rPr sz="1456" b="0" i="0">
+          <p:cNvPr id="49" name="TextBox 48"/>
+          <p:cNvSpPr txBox="1"/>
+          <p:nvPr/>
+        </p:nvSpPr>
+        <p:spPr>
+          <a:xfrm>
+            <a:off x="8408212" y="3127248"/>
+            <a:ext cx="3198266" cy="1005840"/>
+          </a:xfrm>
+          <a:prstGeom prst="rect">
+            <a:avLst/>
+          </a:prstGeom>
+          <a:noFill/>
+        </p:spPr>
+        <p:txBody>
+          <a:bodyPr wrap="square" anchor="t" lIns="36000" rIns="36000" tIns="18000" bIns="18000">
+            <a:spAutoFit/>
+          </a:bodyPr>
+          <a:lstStyle/>
+          <a:p>
+            <a:pPr algn="ctr"/>
+            <a:r>
+              <a:rPr sz="1344" b="0" i="0">
                 <a:solidFill>
                   <a:srgbClr val="475569"/>
                 </a:solidFill>
                 <a:latin typeface="Arial"/>
               </a:rPr>
-              <a:t>Multivalent dynamic interactions provide excellent adhesion and sprayability.</a:t>
+              <a:t>Builds the network via dynamic, multivalent hydrogen bonds — no covalent bonds required.</a:t>
+            </a:r>
+          </a:p>
+        </p:txBody>
+      </p:sp>
+      <p:sp>
+        <p:nvSpPr>
+          <p:cNvPr id="50" name="Rounded Rectangle 49"/>
+          <p:cNvSpPr/>
+          <p:nvPr/>
+        </p:nvSpPr>
+        <p:spPr>
+          <a:xfrm>
+            <a:off x="8408212" y="4279392"/>
+            <a:ext cx="960120" cy="292608"/>
+          </a:xfrm>
+          <a:prstGeom prst="roundRect">
+            <a:avLst>
+              <a:gd name="adj" fmla="val 50000"/>
+            </a:avLst>
+          </a:prstGeom>
+          <a:solidFill>
+            <a:srgbClr val="FFFFFF"/>
+          </a:solidFill>
+          <a:ln w="8890">
+            <a:solidFill>
+              <a:srgbClr val="9F7639"/>
+            </a:solidFill>
+          </a:ln>
+          <a:effectLst/>
+        </p:spPr>
+        <p:style>
+          <a:lnRef idx="1">
+            <a:schemeClr val="accent1"/>
+          </a:lnRef>
+          <a:fillRef idx="3">
+            <a:schemeClr val="accent1"/>
+          </a:fillRef>
+          <a:effectRef idx="2">
+            <a:schemeClr val="accent1"/>
+          </a:effectRef>
+          <a:fontRef idx="minor">
+            <a:schemeClr val="lt1"/>
+          </a:fontRef>
+        </p:style>
+        <p:txBody>
+          <a:bodyPr rtlCol="0" anchor="ctr"/>
+          <a:lstStyle/>
+          <a:p>
+            <a:pPr algn="ctr"/>
+          </a:p>
+        </p:txBody>
+      </p:sp>
+      <p:sp>
+        <p:nvSpPr>
+          <p:cNvPr id="51" name="TextBox 50"/>
+          <p:cNvSpPr txBox="1"/>
+          <p:nvPr/>
+        </p:nvSpPr>
+        <p:spPr>
+          <a:xfrm>
+            <a:off x="8408212" y="4279392"/>
+            <a:ext cx="960120" cy="292608"/>
+          </a:xfrm>
+          <a:prstGeom prst="rect">
+            <a:avLst/>
+          </a:prstGeom>
+          <a:noFill/>
+        </p:spPr>
+        <p:txBody>
+          <a:bodyPr wrap="square" anchor="ctr" lIns="36000" rIns="36000" tIns="18000" bIns="18000">
+            <a:spAutoFit/>
+          </a:bodyPr>
+          <a:lstStyle/>
+          <a:p>
+            <a:pPr algn="ctr"/>
+            <a:r>
+              <a:rPr sz="1120" b="1" i="0">
+                <a:solidFill>
+                  <a:srgbClr val="9F7639"/>
+                </a:solidFill>
+                <a:latin typeface="Arial"/>
+              </a:rPr>
+              <a:t>Bonds</a:t>
+            </a:r>
+          </a:p>
+        </p:txBody>
+      </p:sp>
+      <p:sp>
+        <p:nvSpPr>
+          <p:cNvPr id="52" name="TextBox 51"/>
+          <p:cNvSpPr txBox="1"/>
+          <p:nvPr/>
+        </p:nvSpPr>
+        <p:spPr>
+          <a:xfrm>
+            <a:off x="9459772" y="4242816"/>
+            <a:ext cx="2146706" cy="365760"/>
+          </a:xfrm>
+          <a:prstGeom prst="rect">
+            <a:avLst/>
+          </a:prstGeom>
+          <a:noFill/>
+        </p:spPr>
+        <p:txBody>
+          <a:bodyPr wrap="square" anchor="ctr" lIns="36000" rIns="36000" tIns="18000" bIns="18000">
+            <a:spAutoFit/>
+          </a:bodyPr>
+          <a:lstStyle/>
+          <a:p>
+            <a:pPr algn="l"/>
+            <a:r>
+              <a:rPr sz="1232" b="0" i="0">
+                <a:solidFill>
+                  <a:srgbClr val="334155"/>
+                </a:solidFill>
+                <a:latin typeface="Arial"/>
+              </a:rPr>
+              <a:t>Dynamic H-bonds</a:t>
+            </a:r>
+          </a:p>
+        </p:txBody>
+      </p:sp>
+      <p:sp>
+        <p:nvSpPr>
+          <p:cNvPr id="53" name="Rounded Rectangle 52"/>
+          <p:cNvSpPr/>
+          <p:nvPr/>
+        </p:nvSpPr>
+        <p:spPr>
+          <a:xfrm>
+            <a:off x="8408212" y="4956048"/>
+            <a:ext cx="960120" cy="292608"/>
+          </a:xfrm>
+          <a:prstGeom prst="roundRect">
+            <a:avLst>
+              <a:gd name="adj" fmla="val 50000"/>
+            </a:avLst>
+          </a:prstGeom>
+          <a:solidFill>
+            <a:srgbClr val="FFFFFF"/>
+          </a:solidFill>
+          <a:ln w="8890">
+            <a:solidFill>
+              <a:srgbClr val="9F7639"/>
+            </a:solidFill>
+          </a:ln>
+          <a:effectLst/>
+        </p:spPr>
+        <p:style>
+          <a:lnRef idx="1">
+            <a:schemeClr val="accent1"/>
+          </a:lnRef>
+          <a:fillRef idx="3">
+            <a:schemeClr val="accent1"/>
+          </a:fillRef>
+          <a:effectRef idx="2">
+            <a:schemeClr val="accent1"/>
+          </a:effectRef>
+          <a:fontRef idx="minor">
+            <a:schemeClr val="lt1"/>
+          </a:fontRef>
+        </p:style>
+        <p:txBody>
+          <a:bodyPr rtlCol="0" anchor="ctr"/>
+          <a:lstStyle/>
+          <a:p>
+            <a:pPr algn="ctr"/>
+          </a:p>
+        </p:txBody>
+      </p:sp>
+      <p:sp>
+        <p:nvSpPr>
+          <p:cNvPr id="54" name="TextBox 53"/>
+          <p:cNvSpPr txBox="1"/>
+          <p:nvPr/>
+        </p:nvSpPr>
+        <p:spPr>
+          <a:xfrm>
+            <a:off x="8408212" y="4956048"/>
+            <a:ext cx="960120" cy="292608"/>
+          </a:xfrm>
+          <a:prstGeom prst="rect">
+            <a:avLst/>
+          </a:prstGeom>
+          <a:noFill/>
+        </p:spPr>
+        <p:txBody>
+          <a:bodyPr wrap="square" anchor="ctr" lIns="36000" rIns="36000" tIns="18000" bIns="18000">
+            <a:spAutoFit/>
+          </a:bodyPr>
+          <a:lstStyle/>
+          <a:p>
+            <a:pPr algn="ctr"/>
+            <a:r>
+              <a:rPr sz="1120" b="1" i="0">
+                <a:solidFill>
+                  <a:srgbClr val="9F7639"/>
+                </a:solidFill>
+                <a:latin typeface="Arial"/>
+              </a:rPr>
+              <a:t>Self-heal</a:t>
+            </a:r>
+          </a:p>
+        </p:txBody>
+      </p:sp>
+      <p:sp>
+        <p:nvSpPr>
+          <p:cNvPr id="55" name="TextBox 54"/>
+          <p:cNvSpPr txBox="1"/>
+          <p:nvPr/>
+        </p:nvSpPr>
+        <p:spPr>
+          <a:xfrm>
+            <a:off x="9459772" y="4919472"/>
+            <a:ext cx="2146706" cy="365760"/>
+          </a:xfrm>
+          <a:prstGeom prst="rect">
+            <a:avLst/>
+          </a:prstGeom>
+          <a:noFill/>
+        </p:spPr>
+        <p:txBody>
+          <a:bodyPr wrap="square" anchor="ctr" lIns="36000" rIns="36000" tIns="18000" bIns="18000">
+            <a:spAutoFit/>
+          </a:bodyPr>
+          <a:lstStyle/>
+          <a:p>
+            <a:pPr algn="l"/>
+            <a:r>
+              <a:rPr sz="1232" b="0" i="0">
+                <a:solidFill>
+                  <a:srgbClr val="334155"/>
+                </a:solidFill>
+                <a:latin typeface="Arial"/>
+              </a:rPr>
+              <a:t>Gel recovers after strain</a:t>
+            </a:r>
+          </a:p>
+        </p:txBody>
+      </p:sp>
+      <p:sp>
+        <p:nvSpPr>
+          <p:cNvPr id="56" name="Rounded Rectangle 55"/>
+          <p:cNvSpPr/>
+          <p:nvPr/>
+        </p:nvSpPr>
+        <p:spPr>
+          <a:xfrm>
+            <a:off x="8408212" y="5632704"/>
+            <a:ext cx="960120" cy="292608"/>
+          </a:xfrm>
+          <a:prstGeom prst="roundRect">
+            <a:avLst>
+              <a:gd name="adj" fmla="val 50000"/>
+            </a:avLst>
+          </a:prstGeom>
+          <a:solidFill>
+            <a:srgbClr val="FFFFFF"/>
+          </a:solidFill>
+          <a:ln w="8890">
+            <a:solidFill>
+              <a:srgbClr val="9F7639"/>
+            </a:solidFill>
+          </a:ln>
+          <a:effectLst/>
+        </p:spPr>
+        <p:style>
+          <a:lnRef idx="1">
+            <a:schemeClr val="accent1"/>
+          </a:lnRef>
+          <a:fillRef idx="3">
+            <a:schemeClr val="accent1"/>
+          </a:fillRef>
+          <a:effectRef idx="2">
+            <a:schemeClr val="accent1"/>
+          </a:effectRef>
+          <a:fontRef idx="minor">
+            <a:schemeClr val="lt1"/>
+          </a:fontRef>
+        </p:style>
+        <p:txBody>
+          <a:bodyPr rtlCol="0" anchor="ctr"/>
+          <a:lstStyle/>
+          <a:p>
+            <a:pPr algn="ctr"/>
+          </a:p>
+        </p:txBody>
+      </p:sp>
+      <p:sp>
+        <p:nvSpPr>
+          <p:cNvPr id="57" name="TextBox 56"/>
+          <p:cNvSpPr txBox="1"/>
+          <p:nvPr/>
+        </p:nvSpPr>
+        <p:spPr>
+          <a:xfrm>
+            <a:off x="8408212" y="5632704"/>
+            <a:ext cx="960120" cy="292608"/>
+          </a:xfrm>
+          <a:prstGeom prst="rect">
+            <a:avLst/>
+          </a:prstGeom>
+          <a:noFill/>
+        </p:spPr>
+        <p:txBody>
+          <a:bodyPr wrap="square" anchor="ctr" lIns="36000" rIns="36000" tIns="18000" bIns="18000">
+            <a:spAutoFit/>
+          </a:bodyPr>
+          <a:lstStyle/>
+          <a:p>
+            <a:pPr algn="ctr"/>
+            <a:r>
+              <a:rPr sz="1120" b="1" i="0">
+                <a:solidFill>
+                  <a:srgbClr val="9F7639"/>
+                </a:solidFill>
+                <a:latin typeface="Arial"/>
+              </a:rPr>
+              <a:t>Sprayable</a:t>
+            </a:r>
+          </a:p>
+        </p:txBody>
+      </p:sp>
+      <p:sp>
+        <p:nvSpPr>
+          <p:cNvPr id="58" name="TextBox 57"/>
+          <p:cNvSpPr txBox="1"/>
+          <p:nvPr/>
+        </p:nvSpPr>
+        <p:spPr>
+          <a:xfrm>
+            <a:off x="9459772" y="5596128"/>
+            <a:ext cx="2146706" cy="365760"/>
+          </a:xfrm>
+          <a:prstGeom prst="rect">
+            <a:avLst/>
+          </a:prstGeom>
+          <a:noFill/>
+        </p:spPr>
+        <p:txBody>
+          <a:bodyPr wrap="square" anchor="ctr" lIns="36000" rIns="36000" tIns="18000" bIns="18000">
+            <a:spAutoFit/>
+          </a:bodyPr>
+          <a:lstStyle/>
+          <a:p>
+            <a:pPr algn="l"/>
+            <a:r>
+              <a:rPr sz="1232" b="0" i="0">
+                <a:solidFill>
+                  <a:srgbClr val="334155"/>
+                </a:solidFill>
+                <a:latin typeface="Arial"/>
+              </a:rPr>
+              <a:t>Easy spray application</a:t>
             </a:r>
           </a:p>
         </p:txBody>

--- a/slides_en.pptx
+++ b/slides_en.pptx
@@ -54770,7 +54770,7 @@
         <p:spPr>
           <a:xfrm>
             <a:off x="365760" y="859536"/>
-            <a:ext cx="3685946" cy="4974336"/>
+            <a:ext cx="3685946" cy="5047488"/>
           </a:xfrm>
           <a:prstGeom prst="roundRect">
             <a:avLst>
@@ -54855,36 +54855,49 @@
       </p:sp>
       <p:sp>
         <p:nvSpPr>
-          <p:cNvPr id="12" name="TextBox 11"/>
-          <p:cNvSpPr txBox="1"/>
-          <p:nvPr/>
-        </p:nvSpPr>
-        <p:spPr>
-          <a:xfrm>
-            <a:off x="566928" y="1133856"/>
-            <a:ext cx="3283610" cy="420624"/>
-          </a:xfrm>
-          <a:prstGeom prst="rect">
-            <a:avLst/>
-          </a:prstGeom>
-          <a:noFill/>
-        </p:spPr>
-        <p:txBody>
-          <a:bodyPr wrap="square" anchor="t" lIns="36000" rIns="36000" tIns="18000" bIns="18000">
-            <a:spAutoFit/>
-          </a:bodyPr>
-          <a:lstStyle/>
-          <a:p>
-            <a:pPr algn="l"/>
-            <a:r>
-              <a:rPr sz="1792" b="1" i="0">
-                <a:solidFill>
-                  <a:srgbClr val="1E293B"/>
-                </a:solidFill>
-                <a:latin typeface="Arial"/>
-              </a:rPr>
-              <a:t>Long-term retardant</a:t>
-            </a:r>
+          <p:cNvPr id="12" name="Rounded Rectangle 11"/>
+          <p:cNvSpPr/>
+          <p:nvPr/>
+        </p:nvSpPr>
+        <p:spPr>
+          <a:xfrm>
+            <a:off x="548640" y="1024128"/>
+            <a:ext cx="3320186" cy="1078992"/>
+          </a:xfrm>
+          <a:prstGeom prst="roundRect">
+            <a:avLst>
+              <a:gd name="adj" fmla="val 3000"/>
+            </a:avLst>
+          </a:prstGeom>
+          <a:solidFill>
+            <a:srgbClr val="F5F8FC"/>
+          </a:solidFill>
+          <a:ln w="12700">
+            <a:solidFill>
+              <a:srgbClr val="C0D0E0"/>
+            </a:solidFill>
+          </a:ln>
+          <a:effectLst/>
+        </p:spPr>
+        <p:style>
+          <a:lnRef idx="1">
+            <a:schemeClr val="accent1"/>
+          </a:lnRef>
+          <a:fillRef idx="3">
+            <a:schemeClr val="accent1"/>
+          </a:fillRef>
+          <a:effectRef idx="2">
+            <a:schemeClr val="accent1"/>
+          </a:effectRef>
+          <a:fontRef idx="minor">
+            <a:schemeClr val="lt1"/>
+          </a:fontRef>
+        </p:style>
+        <p:txBody>
+          <a:bodyPr rtlCol="0" anchor="ctr"/>
+          <a:lstStyle/>
+          <a:p>
+            <a:pPr algn="ctr"/>
           </a:p>
         </p:txBody>
       </p:sp>
@@ -54896,8 +54909,157 @@
         </p:nvSpPr>
         <p:spPr>
           <a:xfrm>
-            <a:off x="566928" y="1865376"/>
-            <a:ext cx="3283610" cy="13716"/>
+            <a:off x="621792" y="1097280"/>
+            <a:ext cx="640080" cy="237744"/>
+          </a:xfrm>
+          <a:prstGeom prst="rect">
+            <a:avLst/>
+          </a:prstGeom>
+          <a:solidFill>
+            <a:srgbClr val="3B5174"/>
+          </a:solidFill>
+          <a:ln>
+            <a:noFill/>
+          </a:ln>
+          <a:effectLst/>
+        </p:spPr>
+        <p:style>
+          <a:lnRef idx="1">
+            <a:schemeClr val="accent1"/>
+          </a:lnRef>
+          <a:fillRef idx="3">
+            <a:schemeClr val="accent1"/>
+          </a:fillRef>
+          <a:effectRef idx="2">
+            <a:schemeClr val="accent1"/>
+          </a:effectRef>
+          <a:fontRef idx="minor">
+            <a:schemeClr val="lt1"/>
+          </a:fontRef>
+        </p:style>
+        <p:txBody>
+          <a:bodyPr rtlCol="0" anchor="ctr"/>
+          <a:lstStyle/>
+          <a:p>
+            <a:pPr algn="ctr"/>
+          </a:p>
+        </p:txBody>
+      </p:sp>
+      <p:sp>
+        <p:nvSpPr>
+          <p:cNvPr id="14" name="TextBox 13"/>
+          <p:cNvSpPr txBox="1"/>
+          <p:nvPr/>
+        </p:nvSpPr>
+        <p:spPr>
+          <a:xfrm>
+            <a:off x="621792" y="1097280"/>
+            <a:ext cx="640080" cy="237744"/>
+          </a:xfrm>
+          <a:prstGeom prst="rect">
+            <a:avLst/>
+          </a:prstGeom>
+          <a:noFill/>
+        </p:spPr>
+        <p:txBody>
+          <a:bodyPr wrap="square" anchor="ctr" lIns="36000" rIns="36000" tIns="18000" bIns="18000">
+            <a:spAutoFit/>
+          </a:bodyPr>
+          <a:lstStyle/>
+          <a:p>
+            <a:pPr algn="ctr"/>
+            <a:r>
+              <a:rPr sz="1008" b="1" i="0">
+                <a:solidFill>
+                  <a:srgbClr val="FFFFFF"/>
+                </a:solidFill>
+                <a:latin typeface="Arial"/>
+              </a:rPr>
+              <a:t>Photo</a:t>
+            </a:r>
+          </a:p>
+        </p:txBody>
+      </p:sp>
+      <p:sp>
+        <p:nvSpPr>
+          <p:cNvPr id="15" name="TextBox 14"/>
+          <p:cNvSpPr txBox="1"/>
+          <p:nvPr/>
+        </p:nvSpPr>
+        <p:spPr>
+          <a:xfrm>
+            <a:off x="548640" y="1298448"/>
+            <a:ext cx="3320186" cy="512064"/>
+          </a:xfrm>
+          <a:prstGeom prst="rect">
+            <a:avLst/>
+          </a:prstGeom>
+          <a:noFill/>
+        </p:spPr>
+        <p:txBody>
+          <a:bodyPr wrap="square" anchor="ctr" lIns="36000" rIns="36000" tIns="18000" bIns="18000">
+            <a:spAutoFit/>
+          </a:bodyPr>
+          <a:lstStyle/>
+          <a:p>
+            <a:pPr algn="ctr"/>
+            <a:r>
+              <a:rPr sz="1120" b="0" i="0">
+                <a:solidFill>
+                  <a:srgbClr val="AAB4C0"/>
+                </a:solidFill>
+                <a:latin typeface="Arial"/>
+              </a:rPr>
+              <a:t>Aerial drop of red retardant slurry</a:t>
+            </a:r>
+          </a:p>
+        </p:txBody>
+      </p:sp>
+      <p:sp>
+        <p:nvSpPr>
+          <p:cNvPr id="16" name="TextBox 15"/>
+          <p:cNvSpPr txBox="1"/>
+          <p:nvPr/>
+        </p:nvSpPr>
+        <p:spPr>
+          <a:xfrm>
+            <a:off x="548640" y="2212848"/>
+            <a:ext cx="3320186" cy="365760"/>
+          </a:xfrm>
+          <a:prstGeom prst="rect">
+            <a:avLst/>
+          </a:prstGeom>
+          <a:noFill/>
+        </p:spPr>
+        <p:txBody>
+          <a:bodyPr wrap="square" anchor="t" lIns="36000" rIns="36000" tIns="18000" bIns="18000">
+            <a:spAutoFit/>
+          </a:bodyPr>
+          <a:lstStyle/>
+          <a:p>
+            <a:pPr algn="l"/>
+            <a:r>
+              <a:rPr sz="1680" b="1" i="0">
+                <a:solidFill>
+                  <a:srgbClr val="1E293B"/>
+                </a:solidFill>
+                <a:latin typeface="Arial"/>
+              </a:rPr>
+              <a:t>Long-term retardant</a:t>
+            </a:r>
+          </a:p>
+        </p:txBody>
+      </p:sp>
+      <p:sp>
+        <p:nvSpPr>
+          <p:cNvPr id="17" name="Rectangle 16"/>
+          <p:cNvSpPr/>
+          <p:nvPr/>
+        </p:nvSpPr>
+        <p:spPr>
+          <a:xfrm>
+            <a:off x="548640" y="2724912"/>
+            <a:ext cx="3320186" cy="10972"/>
           </a:xfrm>
           <a:prstGeom prst="rect">
             <a:avLst/>
@@ -54934,29 +55096,99 @@
       </p:sp>
       <p:sp>
         <p:nvSpPr>
-          <p:cNvPr id="14" name="TextBox 13"/>
-          <p:cNvSpPr txBox="1"/>
-          <p:nvPr/>
-        </p:nvSpPr>
-        <p:spPr>
-          <a:xfrm>
-            <a:off x="566928" y="2011680"/>
-            <a:ext cx="3283610" cy="219456"/>
-          </a:xfrm>
-          <a:prstGeom prst="rect">
-            <a:avLst/>
-          </a:prstGeom>
-          <a:noFill/>
-        </p:spPr>
-        <p:txBody>
-          <a:bodyPr wrap="square" anchor="t" lIns="36000" rIns="36000" tIns="18000" bIns="18000">
-            <a:spAutoFit/>
-          </a:bodyPr>
-          <a:lstStyle/>
-          <a:p>
-            <a:pPr algn="l"/>
-            <a:r>
-              <a:rPr sz="1120" b="1" i="0">
+          <p:cNvPr id="18" name="TextBox 17"/>
+          <p:cNvSpPr txBox="1"/>
+          <p:nvPr/>
+        </p:nvSpPr>
+        <p:spPr>
+          <a:xfrm>
+            <a:off x="548640" y="2816352"/>
+            <a:ext cx="3320186" cy="201168"/>
+          </a:xfrm>
+          <a:prstGeom prst="rect">
+            <a:avLst/>
+          </a:prstGeom>
+          <a:noFill/>
+        </p:spPr>
+        <p:txBody>
+          <a:bodyPr wrap="square" anchor="t" lIns="36000" rIns="36000" tIns="18000" bIns="18000">
+            <a:spAutoFit/>
+          </a:bodyPr>
+          <a:lstStyle/>
+          <a:p>
+            <a:pPr algn="l"/>
+            <a:r>
+              <a:rPr sz="1008" b="1" i="0">
+                <a:solidFill>
+                  <a:srgbClr val="3B5174"/>
+                </a:solidFill>
+                <a:latin typeface="Arial"/>
+              </a:rPr>
+              <a:t>Example</a:t>
+            </a:r>
+          </a:p>
+        </p:txBody>
+      </p:sp>
+      <p:sp>
+        <p:nvSpPr>
+          <p:cNvPr id="19" name="TextBox 18"/>
+          <p:cNvSpPr txBox="1"/>
+          <p:nvPr/>
+        </p:nvSpPr>
+        <p:spPr>
+          <a:xfrm>
+            <a:off x="548640" y="2999232"/>
+            <a:ext cx="3320186" cy="365760"/>
+          </a:xfrm>
+          <a:prstGeom prst="rect">
+            <a:avLst/>
+          </a:prstGeom>
+          <a:noFill/>
+        </p:spPr>
+        <p:txBody>
+          <a:bodyPr wrap="square" anchor="t" lIns="36000" rIns="36000" tIns="18000" bIns="18000">
+            <a:spAutoFit/>
+          </a:bodyPr>
+          <a:lstStyle/>
+          <a:p>
+            <a:pPr algn="l"/>
+            <a:r>
+              <a:rPr sz="1232" b="1" i="0">
+                <a:solidFill>
+                  <a:srgbClr val="475569"/>
+                </a:solidFill>
+                <a:latin typeface="Arial"/>
+              </a:rPr>
+              <a:t>Phos-Chek (phosphate slurry)</a:t>
+            </a:r>
+          </a:p>
+        </p:txBody>
+      </p:sp>
+      <p:sp>
+        <p:nvSpPr>
+          <p:cNvPr id="20" name="TextBox 19"/>
+          <p:cNvSpPr txBox="1"/>
+          <p:nvPr/>
+        </p:nvSpPr>
+        <p:spPr>
+          <a:xfrm>
+            <a:off x="548640" y="3419856"/>
+            <a:ext cx="3320186" cy="201168"/>
+          </a:xfrm>
+          <a:prstGeom prst="rect">
+            <a:avLst/>
+          </a:prstGeom>
+          <a:noFill/>
+        </p:spPr>
+        <p:txBody>
+          <a:bodyPr wrap="square" anchor="t" lIns="36000" rIns="36000" tIns="18000" bIns="18000">
+            <a:spAutoFit/>
+          </a:bodyPr>
+          <a:lstStyle/>
+          <a:p>
+            <a:pPr algn="l"/>
+            <a:r>
+              <a:rPr sz="1008" b="1" i="0">
                 <a:solidFill>
                   <a:srgbClr val="64748B"/>
                 </a:solidFill>
@@ -54969,29 +55201,29 @@
       </p:sp>
       <p:sp>
         <p:nvSpPr>
-          <p:cNvPr id="15" name="TextBox 14"/>
-          <p:cNvSpPr txBox="1"/>
-          <p:nvPr/>
-        </p:nvSpPr>
-        <p:spPr>
-          <a:xfrm>
-            <a:off x="566928" y="2231136"/>
-            <a:ext cx="3283610" cy="475488"/>
-          </a:xfrm>
-          <a:prstGeom prst="rect">
-            <a:avLst/>
-          </a:prstGeom>
-          <a:noFill/>
-        </p:spPr>
-        <p:txBody>
-          <a:bodyPr wrap="square" anchor="t" lIns="36000" rIns="36000" tIns="18000" bIns="18000">
-            <a:spAutoFit/>
-          </a:bodyPr>
-          <a:lstStyle/>
-          <a:p>
-            <a:pPr algn="l"/>
-            <a:r>
-              <a:rPr sz="1344" b="0" i="0">
+          <p:cNvPr id="21" name="TextBox 20"/>
+          <p:cNvSpPr txBox="1"/>
+          <p:nvPr/>
+        </p:nvSpPr>
+        <p:spPr>
+          <a:xfrm>
+            <a:off x="548640" y="3602736"/>
+            <a:ext cx="3320186" cy="384048"/>
+          </a:xfrm>
+          <a:prstGeom prst="rect">
+            <a:avLst/>
+          </a:prstGeom>
+          <a:noFill/>
+        </p:spPr>
+        <p:txBody>
+          <a:bodyPr wrap="square" anchor="t" lIns="36000" rIns="36000" tIns="18000" bIns="18000">
+            <a:spAutoFit/>
+          </a:bodyPr>
+          <a:lstStyle/>
+          <a:p>
+            <a:pPr algn="l"/>
+            <a:r>
+              <a:rPr sz="1232" b="0" i="0">
                 <a:solidFill>
                   <a:srgbClr val="475569"/>
                 </a:solidFill>
@@ -55004,29 +55236,29 @@
       </p:sp>
       <p:sp>
         <p:nvSpPr>
-          <p:cNvPr id="16" name="TextBox 15"/>
-          <p:cNvSpPr txBox="1"/>
-          <p:nvPr/>
-        </p:nvSpPr>
-        <p:spPr>
-          <a:xfrm>
-            <a:off x="566928" y="2743200"/>
-            <a:ext cx="3283610" cy="219456"/>
-          </a:xfrm>
-          <a:prstGeom prst="rect">
-            <a:avLst/>
-          </a:prstGeom>
-          <a:noFill/>
-        </p:spPr>
-        <p:txBody>
-          <a:bodyPr wrap="square" anchor="t" lIns="36000" rIns="36000" tIns="18000" bIns="18000">
-            <a:spAutoFit/>
-          </a:bodyPr>
-          <a:lstStyle/>
-          <a:p>
-            <a:pPr algn="l"/>
-            <a:r>
-              <a:rPr sz="1120" b="1" i="0">
+          <p:cNvPr id="22" name="TextBox 21"/>
+          <p:cNvSpPr txBox="1"/>
+          <p:nvPr/>
+        </p:nvSpPr>
+        <p:spPr>
+          <a:xfrm>
+            <a:off x="548640" y="4041648"/>
+            <a:ext cx="3320186" cy="201168"/>
+          </a:xfrm>
+          <a:prstGeom prst="rect">
+            <a:avLst/>
+          </a:prstGeom>
+          <a:noFill/>
+        </p:spPr>
+        <p:txBody>
+          <a:bodyPr wrap="square" anchor="t" lIns="36000" rIns="36000" tIns="18000" bIns="18000">
+            <a:spAutoFit/>
+          </a:bodyPr>
+          <a:lstStyle/>
+          <a:p>
+            <a:pPr algn="l"/>
+            <a:r>
+              <a:rPr sz="1008" b="1" i="0">
                 <a:solidFill>
                   <a:srgbClr val="64748B"/>
                 </a:solidFill>
@@ -55039,29 +55271,29 @@
       </p:sp>
       <p:sp>
         <p:nvSpPr>
-          <p:cNvPr id="17" name="TextBox 16"/>
-          <p:cNvSpPr txBox="1"/>
-          <p:nvPr/>
-        </p:nvSpPr>
-        <p:spPr>
-          <a:xfrm>
-            <a:off x="566928" y="2962656"/>
-            <a:ext cx="3283610" cy="475488"/>
-          </a:xfrm>
-          <a:prstGeom prst="rect">
-            <a:avLst/>
-          </a:prstGeom>
-          <a:noFill/>
-        </p:spPr>
-        <p:txBody>
-          <a:bodyPr wrap="square" anchor="t" lIns="36000" rIns="36000" tIns="18000" bIns="18000">
-            <a:spAutoFit/>
-          </a:bodyPr>
-          <a:lstStyle/>
-          <a:p>
-            <a:pPr algn="l"/>
-            <a:r>
-              <a:rPr sz="1344" b="0" i="0">
+          <p:cNvPr id="23" name="TextBox 22"/>
+          <p:cNvSpPr txBox="1"/>
+          <p:nvPr/>
+        </p:nvSpPr>
+        <p:spPr>
+          <a:xfrm>
+            <a:off x="548640" y="4224528"/>
+            <a:ext cx="3320186" cy="384048"/>
+          </a:xfrm>
+          <a:prstGeom prst="rect">
+            <a:avLst/>
+          </a:prstGeom>
+          <a:noFill/>
+        </p:spPr>
+        <p:txBody>
+          <a:bodyPr wrap="square" anchor="t" lIns="36000" rIns="36000" tIns="18000" bIns="18000">
+            <a:spAutoFit/>
+          </a:bodyPr>
+          <a:lstStyle/>
+          <a:p>
+            <a:pPr algn="l"/>
+            <a:r>
+              <a:rPr sz="1232" b="0" i="0">
                 <a:solidFill>
                   <a:srgbClr val="475569"/>
                 </a:solidFill>
@@ -55074,29 +55306,29 @@
       </p:sp>
       <p:sp>
         <p:nvSpPr>
-          <p:cNvPr id="18" name="TextBox 17"/>
-          <p:cNvSpPr txBox="1"/>
-          <p:nvPr/>
-        </p:nvSpPr>
-        <p:spPr>
-          <a:xfrm>
-            <a:off x="566928" y="3493008"/>
-            <a:ext cx="3283610" cy="219456"/>
-          </a:xfrm>
-          <a:prstGeom prst="rect">
-            <a:avLst/>
-          </a:prstGeom>
-          <a:noFill/>
-        </p:spPr>
-        <p:txBody>
-          <a:bodyPr wrap="square" anchor="t" lIns="36000" rIns="36000" tIns="18000" bIns="18000">
-            <a:spAutoFit/>
-          </a:bodyPr>
-          <a:lstStyle/>
-          <a:p>
-            <a:pPr algn="l"/>
-            <a:r>
-              <a:rPr sz="1120" b="1" i="0">
+          <p:cNvPr id="24" name="TextBox 23"/>
+          <p:cNvSpPr txBox="1"/>
+          <p:nvPr/>
+        </p:nvSpPr>
+        <p:spPr>
+          <a:xfrm>
+            <a:off x="548640" y="4663440"/>
+            <a:ext cx="3320186" cy="201168"/>
+          </a:xfrm>
+          <a:prstGeom prst="rect">
+            <a:avLst/>
+          </a:prstGeom>
+          <a:noFill/>
+        </p:spPr>
+        <p:txBody>
+          <a:bodyPr wrap="square" anchor="t" lIns="36000" rIns="36000" tIns="18000" bIns="18000">
+            <a:spAutoFit/>
+          </a:bodyPr>
+          <a:lstStyle/>
+          <a:p>
+            <a:pPr algn="l"/>
+            <a:r>
+              <a:rPr sz="1008" b="1" i="0">
                 <a:solidFill>
                   <a:srgbClr val="A05656"/>
                 </a:solidFill>
@@ -55109,29 +55341,29 @@
       </p:sp>
       <p:sp>
         <p:nvSpPr>
-          <p:cNvPr id="19" name="TextBox 18"/>
-          <p:cNvSpPr txBox="1"/>
-          <p:nvPr/>
-        </p:nvSpPr>
-        <p:spPr>
-          <a:xfrm>
-            <a:off x="566928" y="3712464"/>
-            <a:ext cx="3283610" cy="1956816"/>
-          </a:xfrm>
-          <a:prstGeom prst="rect">
-            <a:avLst/>
-          </a:prstGeom>
-          <a:noFill/>
-        </p:spPr>
-        <p:txBody>
-          <a:bodyPr wrap="square" anchor="t" lIns="36000" rIns="36000" tIns="18000" bIns="18000">
-            <a:spAutoFit/>
-          </a:bodyPr>
-          <a:lstStyle/>
-          <a:p>
-            <a:pPr algn="l"/>
-            <a:r>
-              <a:rPr sz="1344" b="1" i="0">
+          <p:cNvPr id="25" name="TextBox 24"/>
+          <p:cNvSpPr txBox="1"/>
+          <p:nvPr/>
+        </p:nvSpPr>
+        <p:spPr>
+          <a:xfrm>
+            <a:off x="548640" y="4846320"/>
+            <a:ext cx="3320186" cy="896112"/>
+          </a:xfrm>
+          <a:prstGeom prst="rect">
+            <a:avLst/>
+          </a:prstGeom>
+          <a:noFill/>
+        </p:spPr>
+        <p:txBody>
+          <a:bodyPr wrap="square" anchor="t" lIns="36000" rIns="36000" tIns="18000" bIns="18000">
+            <a:spAutoFit/>
+          </a:bodyPr>
+          <a:lstStyle/>
+          <a:p>
+            <a:pPr algn="l"/>
+            <a:r>
+              <a:rPr sz="1232" b="1" i="0">
                 <a:solidFill>
                   <a:srgbClr val="A05656"/>
                 </a:solidFill>
@@ -55144,14 +55376,14 @@
       </p:sp>
       <p:sp>
         <p:nvSpPr>
-          <p:cNvPr id="20" name="Rounded Rectangle 19"/>
+          <p:cNvPr id="26" name="Rounded Rectangle 25"/>
           <p:cNvSpPr/>
           <p:nvPr/>
         </p:nvSpPr>
         <p:spPr>
           <a:xfrm>
             <a:off x="4252874" y="859536"/>
-            <a:ext cx="3685946" cy="4974336"/>
+            <a:ext cx="3685946" cy="5047488"/>
           </a:xfrm>
           <a:prstGeom prst="roundRect">
             <a:avLst>
@@ -55192,7 +55424,7 @@
       </p:sp>
       <p:sp>
         <p:nvSpPr>
-          <p:cNvPr id="21" name="Rectangle 20"/>
+          <p:cNvPr id="27" name="Rectangle 26"/>
           <p:cNvSpPr/>
           <p:nvPr/>
         </p:nvSpPr>
@@ -55236,29 +55468,191 @@
       </p:sp>
       <p:sp>
         <p:nvSpPr>
-          <p:cNvPr id="22" name="TextBox 21"/>
-          <p:cNvSpPr txBox="1"/>
-          <p:nvPr/>
-        </p:nvSpPr>
-        <p:spPr>
-          <a:xfrm>
-            <a:off x="4454042" y="1133856"/>
-            <a:ext cx="3283610" cy="420624"/>
-          </a:xfrm>
-          <a:prstGeom prst="rect">
-            <a:avLst/>
-          </a:prstGeom>
-          <a:noFill/>
-        </p:spPr>
-        <p:txBody>
-          <a:bodyPr wrap="square" anchor="t" lIns="36000" rIns="36000" tIns="18000" bIns="18000">
-            <a:spAutoFit/>
-          </a:bodyPr>
-          <a:lstStyle/>
-          <a:p>
-            <a:pPr algn="l"/>
-            <a:r>
-              <a:rPr sz="1792" b="1" i="0">
+          <p:cNvPr id="28" name="Rounded Rectangle 27"/>
+          <p:cNvSpPr/>
+          <p:nvPr/>
+        </p:nvSpPr>
+        <p:spPr>
+          <a:xfrm>
+            <a:off x="4435754" y="1024128"/>
+            <a:ext cx="3320186" cy="1078992"/>
+          </a:xfrm>
+          <a:prstGeom prst="roundRect">
+            <a:avLst>
+              <a:gd name="adj" fmla="val 3000"/>
+            </a:avLst>
+          </a:prstGeom>
+          <a:solidFill>
+            <a:srgbClr val="F5F8FC"/>
+          </a:solidFill>
+          <a:ln w="12700">
+            <a:solidFill>
+              <a:srgbClr val="C0D0E0"/>
+            </a:solidFill>
+          </a:ln>
+          <a:effectLst/>
+        </p:spPr>
+        <p:style>
+          <a:lnRef idx="1">
+            <a:schemeClr val="accent1"/>
+          </a:lnRef>
+          <a:fillRef idx="3">
+            <a:schemeClr val="accent1"/>
+          </a:fillRef>
+          <a:effectRef idx="2">
+            <a:schemeClr val="accent1"/>
+          </a:effectRef>
+          <a:fontRef idx="minor">
+            <a:schemeClr val="lt1"/>
+          </a:fontRef>
+        </p:style>
+        <p:txBody>
+          <a:bodyPr rtlCol="0" anchor="ctr"/>
+          <a:lstStyle/>
+          <a:p>
+            <a:pPr algn="ctr"/>
+          </a:p>
+        </p:txBody>
+      </p:sp>
+      <p:sp>
+        <p:nvSpPr>
+          <p:cNvPr id="29" name="Rectangle 28"/>
+          <p:cNvSpPr/>
+          <p:nvPr/>
+        </p:nvSpPr>
+        <p:spPr>
+          <a:xfrm>
+            <a:off x="4508906" y="1097280"/>
+            <a:ext cx="640080" cy="237744"/>
+          </a:xfrm>
+          <a:prstGeom prst="rect">
+            <a:avLst/>
+          </a:prstGeom>
+          <a:solidFill>
+            <a:srgbClr val="3B5174"/>
+          </a:solidFill>
+          <a:ln>
+            <a:noFill/>
+          </a:ln>
+          <a:effectLst/>
+        </p:spPr>
+        <p:style>
+          <a:lnRef idx="1">
+            <a:schemeClr val="accent1"/>
+          </a:lnRef>
+          <a:fillRef idx="3">
+            <a:schemeClr val="accent1"/>
+          </a:fillRef>
+          <a:effectRef idx="2">
+            <a:schemeClr val="accent1"/>
+          </a:effectRef>
+          <a:fontRef idx="minor">
+            <a:schemeClr val="lt1"/>
+          </a:fontRef>
+        </p:style>
+        <p:txBody>
+          <a:bodyPr rtlCol="0" anchor="ctr"/>
+          <a:lstStyle/>
+          <a:p>
+            <a:pPr algn="ctr"/>
+          </a:p>
+        </p:txBody>
+      </p:sp>
+      <p:sp>
+        <p:nvSpPr>
+          <p:cNvPr id="30" name="TextBox 29"/>
+          <p:cNvSpPr txBox="1"/>
+          <p:nvPr/>
+        </p:nvSpPr>
+        <p:spPr>
+          <a:xfrm>
+            <a:off x="4508906" y="1097280"/>
+            <a:ext cx="640080" cy="237744"/>
+          </a:xfrm>
+          <a:prstGeom prst="rect">
+            <a:avLst/>
+          </a:prstGeom>
+          <a:noFill/>
+        </p:spPr>
+        <p:txBody>
+          <a:bodyPr wrap="square" anchor="ctr" lIns="36000" rIns="36000" tIns="18000" bIns="18000">
+            <a:spAutoFit/>
+          </a:bodyPr>
+          <a:lstStyle/>
+          <a:p>
+            <a:pPr algn="ctr"/>
+            <a:r>
+              <a:rPr sz="1008" b="1" i="0">
+                <a:solidFill>
+                  <a:srgbClr val="FFFFFF"/>
+                </a:solidFill>
+                <a:latin typeface="Arial"/>
+              </a:rPr>
+              <a:t>Photo</a:t>
+            </a:r>
+          </a:p>
+        </p:txBody>
+      </p:sp>
+      <p:sp>
+        <p:nvSpPr>
+          <p:cNvPr id="31" name="TextBox 30"/>
+          <p:cNvSpPr txBox="1"/>
+          <p:nvPr/>
+        </p:nvSpPr>
+        <p:spPr>
+          <a:xfrm>
+            <a:off x="4435754" y="1298448"/>
+            <a:ext cx="3320186" cy="512064"/>
+          </a:xfrm>
+          <a:prstGeom prst="rect">
+            <a:avLst/>
+          </a:prstGeom>
+          <a:noFill/>
+        </p:spPr>
+        <p:txBody>
+          <a:bodyPr wrap="square" anchor="ctr" lIns="36000" rIns="36000" tIns="18000" bIns="18000">
+            <a:spAutoFit/>
+          </a:bodyPr>
+          <a:lstStyle/>
+          <a:p>
+            <a:pPr algn="ctr"/>
+            <a:r>
+              <a:rPr sz="1120" b="0" i="0">
+                <a:solidFill>
+                  <a:srgbClr val="AAB4C0"/>
+                </a:solidFill>
+                <a:latin typeface="Arial"/>
+              </a:rPr>
+              <a:t>Foam discharge from a fire hose</a:t>
+            </a:r>
+          </a:p>
+        </p:txBody>
+      </p:sp>
+      <p:sp>
+        <p:nvSpPr>
+          <p:cNvPr id="32" name="TextBox 31"/>
+          <p:cNvSpPr txBox="1"/>
+          <p:nvPr/>
+        </p:nvSpPr>
+        <p:spPr>
+          <a:xfrm>
+            <a:off x="4435754" y="2212848"/>
+            <a:ext cx="3320186" cy="365760"/>
+          </a:xfrm>
+          <a:prstGeom prst="rect">
+            <a:avLst/>
+          </a:prstGeom>
+          <a:noFill/>
+        </p:spPr>
+        <p:txBody>
+          <a:bodyPr wrap="square" anchor="t" lIns="36000" rIns="36000" tIns="18000" bIns="18000">
+            <a:spAutoFit/>
+          </a:bodyPr>
+          <a:lstStyle/>
+          <a:p>
+            <a:pPr algn="l"/>
+            <a:r>
+              <a:rPr sz="1680" b="1" i="0">
                 <a:solidFill>
                   <a:srgbClr val="1E293B"/>
                 </a:solidFill>
@@ -55271,14 +55665,14 @@
       </p:sp>
       <p:sp>
         <p:nvSpPr>
-          <p:cNvPr id="23" name="Rectangle 22"/>
+          <p:cNvPr id="33" name="Rectangle 32"/>
           <p:cNvSpPr/>
           <p:nvPr/>
         </p:nvSpPr>
         <p:spPr>
           <a:xfrm>
-            <a:off x="4454042" y="1865376"/>
-            <a:ext cx="3283610" cy="13716"/>
+            <a:off x="4435754" y="2724912"/>
+            <a:ext cx="3320186" cy="10972"/>
           </a:xfrm>
           <a:prstGeom prst="rect">
             <a:avLst/>
@@ -55315,29 +55709,99 @@
       </p:sp>
       <p:sp>
         <p:nvSpPr>
-          <p:cNvPr id="24" name="TextBox 23"/>
-          <p:cNvSpPr txBox="1"/>
-          <p:nvPr/>
-        </p:nvSpPr>
-        <p:spPr>
-          <a:xfrm>
-            <a:off x="4454042" y="2011680"/>
-            <a:ext cx="3283610" cy="219456"/>
-          </a:xfrm>
-          <a:prstGeom prst="rect">
-            <a:avLst/>
-          </a:prstGeom>
-          <a:noFill/>
-        </p:spPr>
-        <p:txBody>
-          <a:bodyPr wrap="square" anchor="t" lIns="36000" rIns="36000" tIns="18000" bIns="18000">
-            <a:spAutoFit/>
-          </a:bodyPr>
-          <a:lstStyle/>
-          <a:p>
-            <a:pPr algn="l"/>
-            <a:r>
-              <a:rPr sz="1120" b="1" i="0">
+          <p:cNvPr id="34" name="TextBox 33"/>
+          <p:cNvSpPr txBox="1"/>
+          <p:nvPr/>
+        </p:nvSpPr>
+        <p:spPr>
+          <a:xfrm>
+            <a:off x="4435754" y="2816352"/>
+            <a:ext cx="3320186" cy="201168"/>
+          </a:xfrm>
+          <a:prstGeom prst="rect">
+            <a:avLst/>
+          </a:prstGeom>
+          <a:noFill/>
+        </p:spPr>
+        <p:txBody>
+          <a:bodyPr wrap="square" anchor="t" lIns="36000" rIns="36000" tIns="18000" bIns="18000">
+            <a:spAutoFit/>
+          </a:bodyPr>
+          <a:lstStyle/>
+          <a:p>
+            <a:pPr algn="l"/>
+            <a:r>
+              <a:rPr sz="1008" b="1" i="0">
+                <a:solidFill>
+                  <a:srgbClr val="3B5174"/>
+                </a:solidFill>
+                <a:latin typeface="Arial"/>
+              </a:rPr>
+              <a:t>Example</a:t>
+            </a:r>
+          </a:p>
+        </p:txBody>
+      </p:sp>
+      <p:sp>
+        <p:nvSpPr>
+          <p:cNvPr id="35" name="TextBox 34"/>
+          <p:cNvSpPr txBox="1"/>
+          <p:nvPr/>
+        </p:nvSpPr>
+        <p:spPr>
+          <a:xfrm>
+            <a:off x="4435754" y="2999232"/>
+            <a:ext cx="3320186" cy="365760"/>
+          </a:xfrm>
+          <a:prstGeom prst="rect">
+            <a:avLst/>
+          </a:prstGeom>
+          <a:noFill/>
+        </p:spPr>
+        <p:txBody>
+          <a:bodyPr wrap="square" anchor="t" lIns="36000" rIns="36000" tIns="18000" bIns="18000">
+            <a:spAutoFit/>
+          </a:bodyPr>
+          <a:lstStyle/>
+          <a:p>
+            <a:pPr algn="l"/>
+            <a:r>
+              <a:rPr sz="1232" b="1" i="0">
+                <a:solidFill>
+                  <a:srgbClr val="475569"/>
+                </a:solidFill>
+                <a:latin typeface="Arial"/>
+              </a:rPr>
+              <a:t>Class A foam / legacy AFFF</a:t>
+            </a:r>
+          </a:p>
+        </p:txBody>
+      </p:sp>
+      <p:sp>
+        <p:nvSpPr>
+          <p:cNvPr id="36" name="TextBox 35"/>
+          <p:cNvSpPr txBox="1"/>
+          <p:nvPr/>
+        </p:nvSpPr>
+        <p:spPr>
+          <a:xfrm>
+            <a:off x="4435754" y="3419856"/>
+            <a:ext cx="3320186" cy="201168"/>
+          </a:xfrm>
+          <a:prstGeom prst="rect">
+            <a:avLst/>
+          </a:prstGeom>
+          <a:noFill/>
+        </p:spPr>
+        <p:txBody>
+          <a:bodyPr wrap="square" anchor="t" lIns="36000" rIns="36000" tIns="18000" bIns="18000">
+            <a:spAutoFit/>
+          </a:bodyPr>
+          <a:lstStyle/>
+          <a:p>
+            <a:pPr algn="l"/>
+            <a:r>
+              <a:rPr sz="1008" b="1" i="0">
                 <a:solidFill>
                   <a:srgbClr val="64748B"/>
                 </a:solidFill>
@@ -55350,29 +55814,29 @@
       </p:sp>
       <p:sp>
         <p:nvSpPr>
-          <p:cNvPr id="25" name="TextBox 24"/>
-          <p:cNvSpPr txBox="1"/>
-          <p:nvPr/>
-        </p:nvSpPr>
-        <p:spPr>
-          <a:xfrm>
-            <a:off x="4454042" y="2231136"/>
-            <a:ext cx="3283610" cy="475488"/>
-          </a:xfrm>
-          <a:prstGeom prst="rect">
-            <a:avLst/>
-          </a:prstGeom>
-          <a:noFill/>
-        </p:spPr>
-        <p:txBody>
-          <a:bodyPr wrap="square" anchor="t" lIns="36000" rIns="36000" tIns="18000" bIns="18000">
-            <a:spAutoFit/>
-          </a:bodyPr>
-          <a:lstStyle/>
-          <a:p>
-            <a:pPr algn="l"/>
-            <a:r>
-              <a:rPr sz="1344" b="0" i="0">
+          <p:cNvPr id="37" name="TextBox 36"/>
+          <p:cNvSpPr txBox="1"/>
+          <p:nvPr/>
+        </p:nvSpPr>
+        <p:spPr>
+          <a:xfrm>
+            <a:off x="4435754" y="3602736"/>
+            <a:ext cx="3320186" cy="384048"/>
+          </a:xfrm>
+          <a:prstGeom prst="rect">
+            <a:avLst/>
+          </a:prstGeom>
+          <a:noFill/>
+        </p:spPr>
+        <p:txBody>
+          <a:bodyPr wrap="square" anchor="t" lIns="36000" rIns="36000" tIns="18000" bIns="18000">
+            <a:spAutoFit/>
+          </a:bodyPr>
+          <a:lstStyle/>
+          <a:p>
+            <a:pPr algn="l"/>
+            <a:r>
+              <a:rPr sz="1232" b="0" i="0">
                 <a:solidFill>
                   <a:srgbClr val="475569"/>
                 </a:solidFill>
@@ -55385,29 +55849,29 @@
       </p:sp>
       <p:sp>
         <p:nvSpPr>
-          <p:cNvPr id="26" name="TextBox 25"/>
-          <p:cNvSpPr txBox="1"/>
-          <p:nvPr/>
-        </p:nvSpPr>
-        <p:spPr>
-          <a:xfrm>
-            <a:off x="4454042" y="2743200"/>
-            <a:ext cx="3283610" cy="219456"/>
-          </a:xfrm>
-          <a:prstGeom prst="rect">
-            <a:avLst/>
-          </a:prstGeom>
-          <a:noFill/>
-        </p:spPr>
-        <p:txBody>
-          <a:bodyPr wrap="square" anchor="t" lIns="36000" rIns="36000" tIns="18000" bIns="18000">
-            <a:spAutoFit/>
-          </a:bodyPr>
-          <a:lstStyle/>
-          <a:p>
-            <a:pPr algn="l"/>
-            <a:r>
-              <a:rPr sz="1120" b="1" i="0">
+          <p:cNvPr id="38" name="TextBox 37"/>
+          <p:cNvSpPr txBox="1"/>
+          <p:nvPr/>
+        </p:nvSpPr>
+        <p:spPr>
+          <a:xfrm>
+            <a:off x="4435754" y="4041648"/>
+            <a:ext cx="3320186" cy="201168"/>
+          </a:xfrm>
+          <a:prstGeom prst="rect">
+            <a:avLst/>
+          </a:prstGeom>
+          <a:noFill/>
+        </p:spPr>
+        <p:txBody>
+          <a:bodyPr wrap="square" anchor="t" lIns="36000" rIns="36000" tIns="18000" bIns="18000">
+            <a:spAutoFit/>
+          </a:bodyPr>
+          <a:lstStyle/>
+          <a:p>
+            <a:pPr algn="l"/>
+            <a:r>
+              <a:rPr sz="1008" b="1" i="0">
                 <a:solidFill>
                   <a:srgbClr val="64748B"/>
                 </a:solidFill>
@@ -55420,29 +55884,29 @@
       </p:sp>
       <p:sp>
         <p:nvSpPr>
-          <p:cNvPr id="27" name="TextBox 26"/>
-          <p:cNvSpPr txBox="1"/>
-          <p:nvPr/>
-        </p:nvSpPr>
-        <p:spPr>
-          <a:xfrm>
-            <a:off x="4454042" y="2962656"/>
-            <a:ext cx="3283610" cy="475488"/>
-          </a:xfrm>
-          <a:prstGeom prst="rect">
-            <a:avLst/>
-          </a:prstGeom>
-          <a:noFill/>
-        </p:spPr>
-        <p:txBody>
-          <a:bodyPr wrap="square" anchor="t" lIns="36000" rIns="36000" tIns="18000" bIns="18000">
-            <a:spAutoFit/>
-          </a:bodyPr>
-          <a:lstStyle/>
-          <a:p>
-            <a:pPr algn="l"/>
-            <a:r>
-              <a:rPr sz="1344" b="0" i="0">
+          <p:cNvPr id="39" name="TextBox 38"/>
+          <p:cNvSpPr txBox="1"/>
+          <p:nvPr/>
+        </p:nvSpPr>
+        <p:spPr>
+          <a:xfrm>
+            <a:off x="4435754" y="4224528"/>
+            <a:ext cx="3320186" cy="384048"/>
+          </a:xfrm>
+          <a:prstGeom prst="rect">
+            <a:avLst/>
+          </a:prstGeom>
+          <a:noFill/>
+        </p:spPr>
+        <p:txBody>
+          <a:bodyPr wrap="square" anchor="t" lIns="36000" rIns="36000" tIns="18000" bIns="18000">
+            <a:spAutoFit/>
+          </a:bodyPr>
+          <a:lstStyle/>
+          <a:p>
+            <a:pPr algn="l"/>
+            <a:r>
+              <a:rPr sz="1232" b="0" i="0">
                 <a:solidFill>
                   <a:srgbClr val="475569"/>
                 </a:solidFill>
@@ -55455,29 +55919,29 @@
       </p:sp>
       <p:sp>
         <p:nvSpPr>
-          <p:cNvPr id="28" name="TextBox 27"/>
-          <p:cNvSpPr txBox="1"/>
-          <p:nvPr/>
-        </p:nvSpPr>
-        <p:spPr>
-          <a:xfrm>
-            <a:off x="4454042" y="3493008"/>
-            <a:ext cx="3283610" cy="219456"/>
-          </a:xfrm>
-          <a:prstGeom prst="rect">
-            <a:avLst/>
-          </a:prstGeom>
-          <a:noFill/>
-        </p:spPr>
-        <p:txBody>
-          <a:bodyPr wrap="square" anchor="t" lIns="36000" rIns="36000" tIns="18000" bIns="18000">
-            <a:spAutoFit/>
-          </a:bodyPr>
-          <a:lstStyle/>
-          <a:p>
-            <a:pPr algn="l"/>
-            <a:r>
-              <a:rPr sz="1120" b="1" i="0">
+          <p:cNvPr id="40" name="TextBox 39"/>
+          <p:cNvSpPr txBox="1"/>
+          <p:nvPr/>
+        </p:nvSpPr>
+        <p:spPr>
+          <a:xfrm>
+            <a:off x="4435754" y="4663440"/>
+            <a:ext cx="3320186" cy="201168"/>
+          </a:xfrm>
+          <a:prstGeom prst="rect">
+            <a:avLst/>
+          </a:prstGeom>
+          <a:noFill/>
+        </p:spPr>
+        <p:txBody>
+          <a:bodyPr wrap="square" anchor="t" lIns="36000" rIns="36000" tIns="18000" bIns="18000">
+            <a:spAutoFit/>
+          </a:bodyPr>
+          <a:lstStyle/>
+          <a:p>
+            <a:pPr algn="l"/>
+            <a:r>
+              <a:rPr sz="1008" b="1" i="0">
                 <a:solidFill>
                   <a:srgbClr val="A05656"/>
                 </a:solidFill>
@@ -55490,29 +55954,29 @@
       </p:sp>
       <p:sp>
         <p:nvSpPr>
-          <p:cNvPr id="29" name="TextBox 28"/>
-          <p:cNvSpPr txBox="1"/>
-          <p:nvPr/>
-        </p:nvSpPr>
-        <p:spPr>
-          <a:xfrm>
-            <a:off x="4454042" y="3712464"/>
-            <a:ext cx="3283610" cy="1956816"/>
-          </a:xfrm>
-          <a:prstGeom prst="rect">
-            <a:avLst/>
-          </a:prstGeom>
-          <a:noFill/>
-        </p:spPr>
-        <p:txBody>
-          <a:bodyPr wrap="square" anchor="t" lIns="36000" rIns="36000" tIns="18000" bIns="18000">
-            <a:spAutoFit/>
-          </a:bodyPr>
-          <a:lstStyle/>
-          <a:p>
-            <a:pPr algn="l"/>
-            <a:r>
-              <a:rPr sz="1344" b="1" i="0">
+          <p:cNvPr id="41" name="TextBox 40"/>
+          <p:cNvSpPr txBox="1"/>
+          <p:nvPr/>
+        </p:nvSpPr>
+        <p:spPr>
+          <a:xfrm>
+            <a:off x="4435754" y="4846320"/>
+            <a:ext cx="3320186" cy="896112"/>
+          </a:xfrm>
+          <a:prstGeom prst="rect">
+            <a:avLst/>
+          </a:prstGeom>
+          <a:noFill/>
+        </p:spPr>
+        <p:txBody>
+          <a:bodyPr wrap="square" anchor="t" lIns="36000" rIns="36000" tIns="18000" bIns="18000">
+            <a:spAutoFit/>
+          </a:bodyPr>
+          <a:lstStyle/>
+          <a:p>
+            <a:pPr algn="l"/>
+            <a:r>
+              <a:rPr sz="1232" b="1" i="0">
                 <a:solidFill>
                   <a:srgbClr val="A05656"/>
                 </a:solidFill>
@@ -55525,14 +55989,14 @@
       </p:sp>
       <p:sp>
         <p:nvSpPr>
-          <p:cNvPr id="30" name="Rounded Rectangle 29"/>
+          <p:cNvPr id="42" name="Rounded Rectangle 41"/>
           <p:cNvSpPr/>
           <p:nvPr/>
         </p:nvSpPr>
         <p:spPr>
           <a:xfrm>
             <a:off x="8139988" y="859536"/>
-            <a:ext cx="3685946" cy="4974336"/>
+            <a:ext cx="3685946" cy="5047488"/>
           </a:xfrm>
           <a:prstGeom prst="roundRect">
             <a:avLst>
@@ -55571,7 +56035,7 @@
       </p:sp>
       <p:sp>
         <p:nvSpPr>
-          <p:cNvPr id="31" name="Rectangle 30"/>
+          <p:cNvPr id="43" name="Rectangle 42"/>
           <p:cNvSpPr/>
           <p:nvPr/>
         </p:nvSpPr>
@@ -55615,34 +56079,196 @@
       </p:sp>
       <p:sp>
         <p:nvSpPr>
-          <p:cNvPr id="32" name="TextBox 31"/>
-          <p:cNvSpPr txBox="1"/>
-          <p:nvPr/>
-        </p:nvSpPr>
-        <p:spPr>
-          <a:xfrm>
-            <a:off x="8341156" y="1133856"/>
-            <a:ext cx="3283610" cy="420624"/>
-          </a:xfrm>
-          <a:prstGeom prst="rect">
-            <a:avLst/>
-          </a:prstGeom>
-          <a:noFill/>
-        </p:spPr>
-        <p:txBody>
-          <a:bodyPr wrap="square" anchor="t" lIns="36000" rIns="36000" tIns="18000" bIns="18000">
-            <a:spAutoFit/>
-          </a:bodyPr>
-          <a:lstStyle/>
-          <a:p>
-            <a:pPr algn="l"/>
-            <a:r>
-              <a:rPr sz="1792" b="1" i="0">
+          <p:cNvPr id="44" name="Rounded Rectangle 43"/>
+          <p:cNvSpPr/>
+          <p:nvPr/>
+        </p:nvSpPr>
+        <p:spPr>
+          <a:xfrm>
+            <a:off x="8322868" y="1024128"/>
+            <a:ext cx="3320186" cy="1078992"/>
+          </a:xfrm>
+          <a:prstGeom prst="roundRect">
+            <a:avLst>
+              <a:gd name="adj" fmla="val 3000"/>
+            </a:avLst>
+          </a:prstGeom>
+          <a:solidFill>
+            <a:srgbClr val="F5F8FC"/>
+          </a:solidFill>
+          <a:ln w="12700">
+            <a:solidFill>
+              <a:srgbClr val="C0D0E0"/>
+            </a:solidFill>
+          </a:ln>
+          <a:effectLst/>
+        </p:spPr>
+        <p:style>
+          <a:lnRef idx="1">
+            <a:schemeClr val="accent1"/>
+          </a:lnRef>
+          <a:fillRef idx="3">
+            <a:schemeClr val="accent1"/>
+          </a:fillRef>
+          <a:effectRef idx="2">
+            <a:schemeClr val="accent1"/>
+          </a:effectRef>
+          <a:fontRef idx="minor">
+            <a:schemeClr val="lt1"/>
+          </a:fontRef>
+        </p:style>
+        <p:txBody>
+          <a:bodyPr rtlCol="0" anchor="ctr"/>
+          <a:lstStyle/>
+          <a:p>
+            <a:pPr algn="ctr"/>
+          </a:p>
+        </p:txBody>
+      </p:sp>
+      <p:sp>
+        <p:nvSpPr>
+          <p:cNvPr id="45" name="Rectangle 44"/>
+          <p:cNvSpPr/>
+          <p:nvPr/>
+        </p:nvSpPr>
+        <p:spPr>
+          <a:xfrm>
+            <a:off x="8396020" y="1097280"/>
+            <a:ext cx="640080" cy="237744"/>
+          </a:xfrm>
+          <a:prstGeom prst="rect">
+            <a:avLst/>
+          </a:prstGeom>
+          <a:solidFill>
+            <a:srgbClr val="D4A574"/>
+          </a:solidFill>
+          <a:ln>
+            <a:noFill/>
+          </a:ln>
+          <a:effectLst/>
+        </p:spPr>
+        <p:style>
+          <a:lnRef idx="1">
+            <a:schemeClr val="accent1"/>
+          </a:lnRef>
+          <a:fillRef idx="3">
+            <a:schemeClr val="accent1"/>
+          </a:fillRef>
+          <a:effectRef idx="2">
+            <a:schemeClr val="accent1"/>
+          </a:effectRef>
+          <a:fontRef idx="minor">
+            <a:schemeClr val="lt1"/>
+          </a:fontRef>
+        </p:style>
+        <p:txBody>
+          <a:bodyPr rtlCol="0" anchor="ctr"/>
+          <a:lstStyle/>
+          <a:p>
+            <a:pPr algn="ctr"/>
+          </a:p>
+        </p:txBody>
+      </p:sp>
+      <p:sp>
+        <p:nvSpPr>
+          <p:cNvPr id="46" name="TextBox 45"/>
+          <p:cNvSpPr txBox="1"/>
+          <p:nvPr/>
+        </p:nvSpPr>
+        <p:spPr>
+          <a:xfrm>
+            <a:off x="8396020" y="1097280"/>
+            <a:ext cx="640080" cy="237744"/>
+          </a:xfrm>
+          <a:prstGeom prst="rect">
+            <a:avLst/>
+          </a:prstGeom>
+          <a:noFill/>
+        </p:spPr>
+        <p:txBody>
+          <a:bodyPr wrap="square" anchor="ctr" lIns="36000" rIns="36000" tIns="18000" bIns="18000">
+            <a:spAutoFit/>
+          </a:bodyPr>
+          <a:lstStyle/>
+          <a:p>
+            <a:pPr algn="ctr"/>
+            <a:r>
+              <a:rPr sz="1008" b="1" i="0">
                 <a:solidFill>
                   <a:srgbClr val="FFFFFF"/>
                 </a:solidFill>
                 <a:latin typeface="Arial"/>
               </a:rPr>
+              <a:t>Photo</a:t>
+            </a:r>
+          </a:p>
+        </p:txBody>
+      </p:sp>
+      <p:sp>
+        <p:nvSpPr>
+          <p:cNvPr id="47" name="TextBox 46"/>
+          <p:cNvSpPr txBox="1"/>
+          <p:nvPr/>
+        </p:nvSpPr>
+        <p:spPr>
+          <a:xfrm>
+            <a:off x="8322868" y="1298448"/>
+            <a:ext cx="3320186" cy="512064"/>
+          </a:xfrm>
+          <a:prstGeom prst="rect">
+            <a:avLst/>
+          </a:prstGeom>
+          <a:noFill/>
+        </p:spPr>
+        <p:txBody>
+          <a:bodyPr wrap="square" anchor="ctr" lIns="36000" rIns="36000" tIns="18000" bIns="18000">
+            <a:spAutoFit/>
+          </a:bodyPr>
+          <a:lstStyle/>
+          <a:p>
+            <a:pPr algn="ctr"/>
+            <a:r>
+              <a:rPr sz="1120" b="0" i="0">
+                <a:solidFill>
+                  <a:srgbClr val="AAB4C0"/>
+                </a:solidFill>
+                <a:latin typeface="Arial"/>
+              </a:rPr>
+              <a:t>Pre-applied gel coating on homes</a:t>
+            </a:r>
+          </a:p>
+        </p:txBody>
+      </p:sp>
+      <p:sp>
+        <p:nvSpPr>
+          <p:cNvPr id="48" name="TextBox 47"/>
+          <p:cNvSpPr txBox="1"/>
+          <p:nvPr/>
+        </p:nvSpPr>
+        <p:spPr>
+          <a:xfrm>
+            <a:off x="8322868" y="2212848"/>
+            <a:ext cx="3320186" cy="365760"/>
+          </a:xfrm>
+          <a:prstGeom prst="rect">
+            <a:avLst/>
+          </a:prstGeom>
+          <a:noFill/>
+        </p:spPr>
+        <p:txBody>
+          <a:bodyPr wrap="square" anchor="t" lIns="36000" rIns="36000" tIns="18000" bIns="18000">
+            <a:spAutoFit/>
+          </a:bodyPr>
+          <a:lstStyle/>
+          <a:p>
+            <a:pPr algn="l"/>
+            <a:r>
+              <a:rPr sz="1680" b="1" i="0">
+                <a:solidFill>
+                  <a:srgbClr val="FFFFFF"/>
+                </a:solidFill>
+                <a:latin typeface="Arial"/>
+              </a:rPr>
               <a:t>Water-enhancing gel (WEG)</a:t>
             </a:r>
           </a:p>
@@ -55650,14 +56276,14 @@
       </p:sp>
       <p:sp>
         <p:nvSpPr>
-          <p:cNvPr id="33" name="Rectangle 32"/>
+          <p:cNvPr id="49" name="Rectangle 48"/>
           <p:cNvSpPr/>
           <p:nvPr/>
         </p:nvSpPr>
         <p:spPr>
           <a:xfrm>
-            <a:off x="8341156" y="1865376"/>
-            <a:ext cx="3283610" cy="13716"/>
+            <a:off x="8322868" y="2724912"/>
+            <a:ext cx="3320186" cy="10972"/>
           </a:xfrm>
           <a:prstGeom prst="rect">
             <a:avLst/>
@@ -55694,29 +56320,99 @@
       </p:sp>
       <p:sp>
         <p:nvSpPr>
-          <p:cNvPr id="34" name="TextBox 33"/>
-          <p:cNvSpPr txBox="1"/>
-          <p:nvPr/>
-        </p:nvSpPr>
-        <p:spPr>
-          <a:xfrm>
-            <a:off x="8341156" y="2011680"/>
-            <a:ext cx="3283610" cy="219456"/>
-          </a:xfrm>
-          <a:prstGeom prst="rect">
-            <a:avLst/>
-          </a:prstGeom>
-          <a:noFill/>
-        </p:spPr>
-        <p:txBody>
-          <a:bodyPr wrap="square" anchor="t" lIns="36000" rIns="36000" tIns="18000" bIns="18000">
-            <a:spAutoFit/>
-          </a:bodyPr>
-          <a:lstStyle/>
-          <a:p>
-            <a:pPr algn="l"/>
-            <a:r>
-              <a:rPr sz="1120" b="1" i="0">
+          <p:cNvPr id="50" name="TextBox 49"/>
+          <p:cNvSpPr txBox="1"/>
+          <p:nvPr/>
+        </p:nvSpPr>
+        <p:spPr>
+          <a:xfrm>
+            <a:off x="8322868" y="2816352"/>
+            <a:ext cx="3320186" cy="201168"/>
+          </a:xfrm>
+          <a:prstGeom prst="rect">
+            <a:avLst/>
+          </a:prstGeom>
+          <a:noFill/>
+        </p:spPr>
+        <p:txBody>
+          <a:bodyPr wrap="square" anchor="t" lIns="36000" rIns="36000" tIns="18000" bIns="18000">
+            <a:spAutoFit/>
+          </a:bodyPr>
+          <a:lstStyle/>
+          <a:p>
+            <a:pPr algn="l"/>
+            <a:r>
+              <a:rPr sz="1008" b="1" i="0">
+                <a:solidFill>
+                  <a:srgbClr val="D4A574"/>
+                </a:solidFill>
+                <a:latin typeface="Arial"/>
+              </a:rPr>
+              <a:t>Example</a:t>
+            </a:r>
+          </a:p>
+        </p:txBody>
+      </p:sp>
+      <p:sp>
+        <p:nvSpPr>
+          <p:cNvPr id="51" name="TextBox 50"/>
+          <p:cNvSpPr txBox="1"/>
+          <p:nvPr/>
+        </p:nvSpPr>
+        <p:spPr>
+          <a:xfrm>
+            <a:off x="8322868" y="2999232"/>
+            <a:ext cx="3320186" cy="365760"/>
+          </a:xfrm>
+          <a:prstGeom prst="rect">
+            <a:avLst/>
+          </a:prstGeom>
+          <a:noFill/>
+        </p:spPr>
+        <p:txBody>
+          <a:bodyPr wrap="square" anchor="t" lIns="36000" rIns="36000" tIns="18000" bIns="18000">
+            <a:spAutoFit/>
+          </a:bodyPr>
+          <a:lstStyle/>
+          <a:p>
+            <a:pPr algn="l"/>
+            <a:r>
+              <a:rPr sz="1232" b="1" i="0">
+                <a:solidFill>
+                  <a:srgbClr val="D8E2EE"/>
+                </a:solidFill>
+                <a:latin typeface="Arial"/>
+              </a:rPr>
+              <a:t>Barricade / Thermo-Gel / AquaGel-K</a:t>
+            </a:r>
+          </a:p>
+        </p:txBody>
+      </p:sp>
+      <p:sp>
+        <p:nvSpPr>
+          <p:cNvPr id="52" name="TextBox 51"/>
+          <p:cNvSpPr txBox="1"/>
+          <p:nvPr/>
+        </p:nvSpPr>
+        <p:spPr>
+          <a:xfrm>
+            <a:off x="8322868" y="3419856"/>
+            <a:ext cx="3320186" cy="201168"/>
+          </a:xfrm>
+          <a:prstGeom prst="rect">
+            <a:avLst/>
+          </a:prstGeom>
+          <a:noFill/>
+        </p:spPr>
+        <p:txBody>
+          <a:bodyPr wrap="square" anchor="t" lIns="36000" rIns="36000" tIns="18000" bIns="18000">
+            <a:spAutoFit/>
+          </a:bodyPr>
+          <a:lstStyle/>
+          <a:p>
+            <a:pPr algn="l"/>
+            <a:r>
+              <a:rPr sz="1008" b="1" i="0">
                 <a:solidFill>
                   <a:srgbClr val="88A0B8"/>
                 </a:solidFill>
@@ -55729,29 +56425,29 @@
       </p:sp>
       <p:sp>
         <p:nvSpPr>
-          <p:cNvPr id="35" name="TextBox 34"/>
-          <p:cNvSpPr txBox="1"/>
-          <p:nvPr/>
-        </p:nvSpPr>
-        <p:spPr>
-          <a:xfrm>
-            <a:off x="8341156" y="2231136"/>
-            <a:ext cx="3283610" cy="475488"/>
-          </a:xfrm>
-          <a:prstGeom prst="rect">
-            <a:avLst/>
-          </a:prstGeom>
-          <a:noFill/>
-        </p:spPr>
-        <p:txBody>
-          <a:bodyPr wrap="square" anchor="t" lIns="36000" rIns="36000" tIns="18000" bIns="18000">
-            <a:spAutoFit/>
-          </a:bodyPr>
-          <a:lstStyle/>
-          <a:p>
-            <a:pPr algn="l"/>
-            <a:r>
-              <a:rPr sz="1344" b="0" i="0">
+          <p:cNvPr id="53" name="TextBox 52"/>
+          <p:cNvSpPr txBox="1"/>
+          <p:nvPr/>
+        </p:nvSpPr>
+        <p:spPr>
+          <a:xfrm>
+            <a:off x="8322868" y="3602736"/>
+            <a:ext cx="3320186" cy="384048"/>
+          </a:xfrm>
+          <a:prstGeom prst="rect">
+            <a:avLst/>
+          </a:prstGeom>
+          <a:noFill/>
+        </p:spPr>
+        <p:txBody>
+          <a:bodyPr wrap="square" anchor="t" lIns="36000" rIns="36000" tIns="18000" bIns="18000">
+            <a:spAutoFit/>
+          </a:bodyPr>
+          <a:lstStyle/>
+          <a:p>
+            <a:pPr algn="l"/>
+            <a:r>
+              <a:rPr sz="1232" b="0" i="0">
                 <a:solidFill>
                   <a:srgbClr val="D8E2EE"/>
                 </a:solidFill>
@@ -55764,29 +56460,29 @@
       </p:sp>
       <p:sp>
         <p:nvSpPr>
-          <p:cNvPr id="36" name="TextBox 35"/>
-          <p:cNvSpPr txBox="1"/>
-          <p:nvPr/>
-        </p:nvSpPr>
-        <p:spPr>
-          <a:xfrm>
-            <a:off x="8341156" y="2743200"/>
-            <a:ext cx="3283610" cy="219456"/>
-          </a:xfrm>
-          <a:prstGeom prst="rect">
-            <a:avLst/>
-          </a:prstGeom>
-          <a:noFill/>
-        </p:spPr>
-        <p:txBody>
-          <a:bodyPr wrap="square" anchor="t" lIns="36000" rIns="36000" tIns="18000" bIns="18000">
-            <a:spAutoFit/>
-          </a:bodyPr>
-          <a:lstStyle/>
-          <a:p>
-            <a:pPr algn="l"/>
-            <a:r>
-              <a:rPr sz="1120" b="1" i="0">
+          <p:cNvPr id="54" name="TextBox 53"/>
+          <p:cNvSpPr txBox="1"/>
+          <p:nvPr/>
+        </p:nvSpPr>
+        <p:spPr>
+          <a:xfrm>
+            <a:off x="8322868" y="4041648"/>
+            <a:ext cx="3320186" cy="201168"/>
+          </a:xfrm>
+          <a:prstGeom prst="rect">
+            <a:avLst/>
+          </a:prstGeom>
+          <a:noFill/>
+        </p:spPr>
+        <p:txBody>
+          <a:bodyPr wrap="square" anchor="t" lIns="36000" rIns="36000" tIns="18000" bIns="18000">
+            <a:spAutoFit/>
+          </a:bodyPr>
+          <a:lstStyle/>
+          <a:p>
+            <a:pPr algn="l"/>
+            <a:r>
+              <a:rPr sz="1008" b="1" i="0">
                 <a:solidFill>
                   <a:srgbClr val="88A0B8"/>
                 </a:solidFill>
@@ -55799,29 +56495,29 @@
       </p:sp>
       <p:sp>
         <p:nvSpPr>
-          <p:cNvPr id="37" name="TextBox 36"/>
-          <p:cNvSpPr txBox="1"/>
-          <p:nvPr/>
-        </p:nvSpPr>
-        <p:spPr>
-          <a:xfrm>
-            <a:off x="8341156" y="2962656"/>
-            <a:ext cx="3283610" cy="475488"/>
-          </a:xfrm>
-          <a:prstGeom prst="rect">
-            <a:avLst/>
-          </a:prstGeom>
-          <a:noFill/>
-        </p:spPr>
-        <p:txBody>
-          <a:bodyPr wrap="square" anchor="t" lIns="36000" rIns="36000" tIns="18000" bIns="18000">
-            <a:spAutoFit/>
-          </a:bodyPr>
-          <a:lstStyle/>
-          <a:p>
-            <a:pPr algn="l"/>
-            <a:r>
-              <a:rPr sz="1344" b="0" i="0">
+          <p:cNvPr id="55" name="TextBox 54"/>
+          <p:cNvSpPr txBox="1"/>
+          <p:nvPr/>
+        </p:nvSpPr>
+        <p:spPr>
+          <a:xfrm>
+            <a:off x="8322868" y="4224528"/>
+            <a:ext cx="3320186" cy="384048"/>
+          </a:xfrm>
+          <a:prstGeom prst="rect">
+            <a:avLst/>
+          </a:prstGeom>
+          <a:noFill/>
+        </p:spPr>
+        <p:txBody>
+          <a:bodyPr wrap="square" anchor="t" lIns="36000" rIns="36000" tIns="18000" bIns="18000">
+            <a:spAutoFit/>
+          </a:bodyPr>
+          <a:lstStyle/>
+          <a:p>
+            <a:pPr algn="l"/>
+            <a:r>
+              <a:rPr sz="1232" b="0" i="0">
                 <a:solidFill>
                   <a:srgbClr val="D8E2EE"/>
                 </a:solidFill>
@@ -55834,29 +56530,29 @@
       </p:sp>
       <p:sp>
         <p:nvSpPr>
-          <p:cNvPr id="38" name="TextBox 37"/>
-          <p:cNvSpPr txBox="1"/>
-          <p:nvPr/>
-        </p:nvSpPr>
-        <p:spPr>
-          <a:xfrm>
-            <a:off x="8341156" y="3493008"/>
-            <a:ext cx="3283610" cy="219456"/>
-          </a:xfrm>
-          <a:prstGeom prst="rect">
-            <a:avLst/>
-          </a:prstGeom>
-          <a:noFill/>
-        </p:spPr>
-        <p:txBody>
-          <a:bodyPr wrap="square" anchor="t" lIns="36000" rIns="36000" tIns="18000" bIns="18000">
-            <a:spAutoFit/>
-          </a:bodyPr>
-          <a:lstStyle/>
-          <a:p>
-            <a:pPr algn="l"/>
-            <a:r>
-              <a:rPr sz="1120" b="1" i="0">
+          <p:cNvPr id="56" name="TextBox 55"/>
+          <p:cNvSpPr txBox="1"/>
+          <p:nvPr/>
+        </p:nvSpPr>
+        <p:spPr>
+          <a:xfrm>
+            <a:off x="8322868" y="4663440"/>
+            <a:ext cx="3320186" cy="201168"/>
+          </a:xfrm>
+          <a:prstGeom prst="rect">
+            <a:avLst/>
+          </a:prstGeom>
+          <a:noFill/>
+        </p:spPr>
+        <p:txBody>
+          <a:bodyPr wrap="square" anchor="t" lIns="36000" rIns="36000" tIns="18000" bIns="18000">
+            <a:spAutoFit/>
+          </a:bodyPr>
+          <a:lstStyle/>
+          <a:p>
+            <a:pPr algn="l"/>
+            <a:r>
+              <a:rPr sz="1008" b="1" i="0">
                 <a:solidFill>
                   <a:srgbClr val="D4A574"/>
                 </a:solidFill>
@@ -55869,29 +56565,29 @@
       </p:sp>
       <p:sp>
         <p:nvSpPr>
-          <p:cNvPr id="39" name="TextBox 38"/>
-          <p:cNvSpPr txBox="1"/>
-          <p:nvPr/>
-        </p:nvSpPr>
-        <p:spPr>
-          <a:xfrm>
-            <a:off x="8341156" y="3712464"/>
-            <a:ext cx="3283610" cy="1956816"/>
-          </a:xfrm>
-          <a:prstGeom prst="rect">
-            <a:avLst/>
-          </a:prstGeom>
-          <a:noFill/>
-        </p:spPr>
-        <p:txBody>
-          <a:bodyPr wrap="square" anchor="t" lIns="36000" rIns="36000" tIns="18000" bIns="18000">
-            <a:spAutoFit/>
-          </a:bodyPr>
-          <a:lstStyle/>
-          <a:p>
-            <a:pPr algn="l"/>
-            <a:r>
-              <a:rPr sz="1344" b="1" i="0">
+          <p:cNvPr id="57" name="TextBox 56"/>
+          <p:cNvSpPr txBox="1"/>
+          <p:nvPr/>
+        </p:nvSpPr>
+        <p:spPr>
+          <a:xfrm>
+            <a:off x="8322868" y="4846320"/>
+            <a:ext cx="3320186" cy="896112"/>
+          </a:xfrm>
+          <a:prstGeom prst="rect">
+            <a:avLst/>
+          </a:prstGeom>
+          <a:noFill/>
+        </p:spPr>
+        <p:txBody>
+          <a:bodyPr wrap="square" anchor="t" lIns="36000" rIns="36000" tIns="18000" bIns="18000">
+            <a:spAutoFit/>
+          </a:bodyPr>
+          <a:lstStyle/>
+          <a:p>
+            <a:pPr algn="l"/>
+            <a:r>
+              <a:rPr sz="1232" b="1" i="0">
                 <a:solidFill>
                   <a:srgbClr val="FFFFFF"/>
                 </a:solidFill>
@@ -55904,14 +56600,14 @@
       </p:sp>
       <p:sp>
         <p:nvSpPr>
-          <p:cNvPr id="40" name="Rounded Rectangle 39"/>
+          <p:cNvPr id="58" name="Rounded Rectangle 57"/>
           <p:cNvSpPr/>
           <p:nvPr/>
         </p:nvSpPr>
         <p:spPr>
           <a:xfrm>
-            <a:off x="365760" y="5998464"/>
-            <a:ext cx="11460175" cy="475488"/>
+            <a:off x="365760" y="6053328"/>
+            <a:ext cx="11460175" cy="457200"/>
           </a:xfrm>
           <a:prstGeom prst="roundRect">
             <a:avLst>
@@ -55950,14 +56646,14 @@
       </p:sp>
       <p:sp>
         <p:nvSpPr>
-          <p:cNvPr id="41" name="Rectangle 40"/>
+          <p:cNvPr id="59" name="Rectangle 58"/>
           <p:cNvSpPr/>
           <p:nvPr/>
         </p:nvSpPr>
         <p:spPr>
           <a:xfrm>
-            <a:off x="365760" y="5998464"/>
-            <a:ext cx="54864" cy="475488"/>
+            <a:off x="365760" y="6053328"/>
+            <a:ext cx="54864" cy="457200"/>
           </a:xfrm>
           <a:prstGeom prst="rect">
             <a:avLst/>
@@ -55994,14 +56690,14 @@
       </p:sp>
       <p:sp>
         <p:nvSpPr>
-          <p:cNvPr id="42" name="TextBox 41"/>
-          <p:cNvSpPr txBox="1"/>
-          <p:nvPr/>
-        </p:nvSpPr>
-        <p:spPr>
-          <a:xfrm>
-            <a:off x="548640" y="5998464"/>
-            <a:ext cx="365760" cy="475488"/>
+          <p:cNvPr id="60" name="TextBox 59"/>
+          <p:cNvSpPr txBox="1"/>
+          <p:nvPr/>
+        </p:nvSpPr>
+        <p:spPr>
+          <a:xfrm>
+            <a:off x="548640" y="6053328"/>
+            <a:ext cx="365760" cy="457200"/>
           </a:xfrm>
           <a:prstGeom prst="rect">
             <a:avLst/>
@@ -56029,14 +56725,14 @@
       </p:sp>
       <p:sp>
         <p:nvSpPr>
-          <p:cNvPr id="43" name="TextBox 42"/>
-          <p:cNvSpPr txBox="1"/>
-          <p:nvPr/>
-        </p:nvSpPr>
-        <p:spPr>
-          <a:xfrm>
-            <a:off x="960120" y="5998464"/>
-            <a:ext cx="10774375" cy="475488"/>
+          <p:cNvPr id="61" name="TextBox 60"/>
+          <p:cNvSpPr txBox="1"/>
+          <p:nvPr/>
+        </p:nvSpPr>
+        <p:spPr>
+          <a:xfrm>
+            <a:off x="960120" y="6053328"/>
+            <a:ext cx="10774375" cy="457200"/>
           </a:xfrm>
           <a:prstGeom prst="rect">
             <a:avLst/>

--- a/slides_en.pptx
+++ b/slides_en.pptx
@@ -54870,12 +54870,10 @@
             </a:avLst>
           </a:prstGeom>
           <a:solidFill>
-            <a:srgbClr val="F5F8FC"/>
+            <a:srgbClr val="A8D4EF"/>
           </a:solidFill>
-          <a:ln w="12700">
-            <a:solidFill>
-              <a:srgbClr val="C0D0E0"/>
-            </a:solidFill>
+          <a:ln>
+            <a:noFill/>
           </a:ln>
           <a:effectLst/>
         </p:spPr>
@@ -54909,14 +54907,14 @@
         </p:nvSpPr>
         <p:spPr>
           <a:xfrm>
-            <a:off x="621792" y="1097280"/>
-            <a:ext cx="640080" cy="237744"/>
+            <a:off x="548640" y="1865741"/>
+            <a:ext cx="3320186" cy="237378"/>
           </a:xfrm>
           <a:prstGeom prst="rect">
             <a:avLst/>
           </a:prstGeom>
           <a:solidFill>
-            <a:srgbClr val="3B5174"/>
+            <a:srgbClr val="6AA55E"/>
           </a:solidFill>
           <a:ln>
             <a:noFill/>
@@ -54947,77 +54945,491 @@
       </p:sp>
       <p:sp>
         <p:nvSpPr>
-          <p:cNvPr id="14" name="TextBox 13"/>
-          <p:cNvSpPr txBox="1"/>
-          <p:nvPr/>
-        </p:nvSpPr>
-        <p:spPr>
-          <a:xfrm>
-            <a:off x="621792" y="1097280"/>
-            <a:ext cx="640080" cy="237744"/>
-          </a:xfrm>
-          <a:prstGeom prst="rect">
-            <a:avLst/>
-          </a:prstGeom>
-          <a:noFill/>
-        </p:spPr>
-        <p:txBody>
-          <a:bodyPr wrap="square" anchor="ctr" lIns="36000" rIns="36000" tIns="18000" bIns="18000">
-            <a:spAutoFit/>
-          </a:bodyPr>
-          <a:lstStyle/>
-          <a:p>
-            <a:pPr algn="ctr"/>
-            <a:r>
-              <a:rPr sz="1008" b="1" i="0">
-                <a:solidFill>
-                  <a:srgbClr val="FFFFFF"/>
-                </a:solidFill>
-                <a:latin typeface="Arial"/>
-              </a:rPr>
-              <a:t>Photo</a:t>
-            </a:r>
-          </a:p>
-        </p:txBody>
-      </p:sp>
-      <p:sp>
-        <p:nvSpPr>
-          <p:cNvPr id="15" name="TextBox 14"/>
-          <p:cNvSpPr txBox="1"/>
-          <p:nvPr/>
-        </p:nvSpPr>
-        <p:spPr>
-          <a:xfrm>
-            <a:off x="548640" y="1298448"/>
-            <a:ext cx="3320186" cy="512064"/>
-          </a:xfrm>
-          <a:prstGeom prst="rect">
-            <a:avLst/>
-          </a:prstGeom>
-          <a:noFill/>
-        </p:spPr>
-        <p:txBody>
-          <a:bodyPr wrap="square" anchor="ctr" lIns="36000" rIns="36000" tIns="18000" bIns="18000">
-            <a:spAutoFit/>
-          </a:bodyPr>
-          <a:lstStyle/>
-          <a:p>
-            <a:pPr algn="ctr"/>
-            <a:r>
-              <a:rPr sz="1120" b="0" i="0">
-                <a:solidFill>
-                  <a:srgbClr val="AAB4C0"/>
-                </a:solidFill>
-                <a:latin typeface="Arial"/>
-              </a:rPr>
-              <a:t>Aerial drop of red retardant slurry</a:t>
-            </a:r>
-          </a:p>
-        </p:txBody>
-      </p:sp>
-      <p:sp>
-        <p:nvSpPr>
-          <p:cNvPr id="16" name="TextBox 15"/>
+          <p:cNvPr id="14" name="Rectangle 13"/>
+          <p:cNvSpPr/>
+          <p:nvPr/>
+        </p:nvSpPr>
+        <p:spPr>
+          <a:xfrm>
+            <a:off x="548640" y="1865741"/>
+            <a:ext cx="3320186" cy="16459"/>
+          </a:xfrm>
+          <a:prstGeom prst="rect">
+            <a:avLst/>
+          </a:prstGeom>
+          <a:solidFill>
+            <a:srgbClr val="4E8842"/>
+          </a:solidFill>
+          <a:ln>
+            <a:noFill/>
+          </a:ln>
+          <a:effectLst/>
+        </p:spPr>
+        <p:style>
+          <a:lnRef idx="1">
+            <a:schemeClr val="accent1"/>
+          </a:lnRef>
+          <a:fillRef idx="3">
+            <a:schemeClr val="accent1"/>
+          </a:fillRef>
+          <a:effectRef idx="2">
+            <a:schemeClr val="accent1"/>
+          </a:effectRef>
+          <a:fontRef idx="minor">
+            <a:schemeClr val="lt1"/>
+          </a:fontRef>
+        </p:style>
+        <p:txBody>
+          <a:bodyPr rtlCol="0" anchor="ctr"/>
+          <a:lstStyle/>
+          <a:p>
+            <a:pPr algn="ctr"/>
+          </a:p>
+        </p:txBody>
+      </p:sp>
+      <p:sp>
+        <p:nvSpPr>
+          <p:cNvPr id="15" name="Rectangle 14"/>
+          <p:cNvSpPr/>
+          <p:nvPr/>
+        </p:nvSpPr>
+        <p:spPr>
+          <a:xfrm>
+            <a:off x="880658" y="1261506"/>
+            <a:ext cx="996055" cy="86319"/>
+          </a:xfrm>
+          <a:prstGeom prst="rect">
+            <a:avLst/>
+          </a:prstGeom>
+          <a:solidFill>
+            <a:srgbClr val="556A7E"/>
+          </a:solidFill>
+          <a:ln>
+            <a:noFill/>
+          </a:ln>
+          <a:effectLst/>
+        </p:spPr>
+        <p:style>
+          <a:lnRef idx="1">
+            <a:schemeClr val="accent1"/>
+          </a:lnRef>
+          <a:fillRef idx="3">
+            <a:schemeClr val="accent1"/>
+          </a:fillRef>
+          <a:effectRef idx="2">
+            <a:schemeClr val="accent1"/>
+          </a:effectRef>
+          <a:fontRef idx="minor">
+            <a:schemeClr val="lt1"/>
+          </a:fontRef>
+        </p:style>
+        <p:txBody>
+          <a:bodyPr rtlCol="0" anchor="ctr"/>
+          <a:lstStyle/>
+          <a:p>
+            <a:pPr algn="ctr"/>
+          </a:p>
+        </p:txBody>
+      </p:sp>
+      <p:sp>
+        <p:nvSpPr>
+          <p:cNvPr id="16" name="Rectangle 15"/>
+          <p:cNvSpPr/>
+          <p:nvPr/>
+        </p:nvSpPr>
+        <p:spPr>
+          <a:xfrm>
+            <a:off x="1159554" y="1175186"/>
+            <a:ext cx="332018" cy="237378"/>
+          </a:xfrm>
+          <a:prstGeom prst="rect">
+            <a:avLst/>
+          </a:prstGeom>
+          <a:solidFill>
+            <a:srgbClr val="556A7E"/>
+          </a:solidFill>
+          <a:ln>
+            <a:noFill/>
+          </a:ln>
+          <a:effectLst/>
+        </p:spPr>
+        <p:style>
+          <a:lnRef idx="1">
+            <a:schemeClr val="accent1"/>
+          </a:lnRef>
+          <a:fillRef idx="3">
+            <a:schemeClr val="accent1"/>
+          </a:fillRef>
+          <a:effectRef idx="2">
+            <a:schemeClr val="accent1"/>
+          </a:effectRef>
+          <a:fontRef idx="minor">
+            <a:schemeClr val="lt1"/>
+          </a:fontRef>
+        </p:style>
+        <p:txBody>
+          <a:bodyPr rtlCol="0" anchor="ctr"/>
+          <a:lstStyle/>
+          <a:p>
+            <a:pPr algn="ctr"/>
+          </a:p>
+        </p:txBody>
+      </p:sp>
+      <p:sp>
+        <p:nvSpPr>
+          <p:cNvPr id="17" name="Rectangle 16"/>
+          <p:cNvSpPr/>
+          <p:nvPr/>
+        </p:nvSpPr>
+        <p:spPr>
+          <a:xfrm>
+            <a:off x="913860" y="1153607"/>
+            <a:ext cx="132807" cy="129479"/>
+          </a:xfrm>
+          <a:prstGeom prst="rect">
+            <a:avLst/>
+          </a:prstGeom>
+          <a:solidFill>
+            <a:srgbClr val="556A7E"/>
+          </a:solidFill>
+          <a:ln>
+            <a:noFill/>
+          </a:ln>
+          <a:effectLst/>
+        </p:spPr>
+        <p:style>
+          <a:lnRef idx="1">
+            <a:schemeClr val="accent1"/>
+          </a:lnRef>
+          <a:fillRef idx="3">
+            <a:schemeClr val="accent1"/>
+          </a:fillRef>
+          <a:effectRef idx="2">
+            <a:schemeClr val="accent1"/>
+          </a:effectRef>
+          <a:fontRef idx="minor">
+            <a:schemeClr val="lt1"/>
+          </a:fontRef>
+        </p:style>
+        <p:txBody>
+          <a:bodyPr rtlCol="0" anchor="ctr"/>
+          <a:lstStyle/>
+          <a:p>
+            <a:pPr algn="ctr"/>
+          </a:p>
+        </p:txBody>
+      </p:sp>
+      <p:sp>
+        <p:nvSpPr>
+          <p:cNvPr id="18" name="Oval 17"/>
+          <p:cNvSpPr/>
+          <p:nvPr/>
+        </p:nvSpPr>
+        <p:spPr>
+          <a:xfrm>
+            <a:off x="1710705" y="1498884"/>
+            <a:ext cx="132807" cy="94951"/>
+          </a:xfrm>
+          <a:prstGeom prst="ellipse">
+            <a:avLst/>
+          </a:prstGeom>
+          <a:solidFill>
+            <a:srgbClr val="C03C3C"/>
+          </a:solidFill>
+          <a:ln>
+            <a:noFill/>
+          </a:ln>
+          <a:effectLst/>
+        </p:spPr>
+        <p:style>
+          <a:lnRef idx="1">
+            <a:schemeClr val="accent1"/>
+          </a:lnRef>
+          <a:fillRef idx="3">
+            <a:schemeClr val="accent1"/>
+          </a:fillRef>
+          <a:effectRef idx="2">
+            <a:schemeClr val="accent1"/>
+          </a:effectRef>
+          <a:fontRef idx="minor">
+            <a:schemeClr val="lt1"/>
+          </a:fontRef>
+        </p:style>
+        <p:txBody>
+          <a:bodyPr rtlCol="0" anchor="ctr"/>
+          <a:lstStyle/>
+          <a:p>
+            <a:pPr algn="ctr"/>
+          </a:p>
+        </p:txBody>
+      </p:sp>
+      <p:sp>
+        <p:nvSpPr>
+          <p:cNvPr id="19" name="Oval 18"/>
+          <p:cNvSpPr/>
+          <p:nvPr/>
+        </p:nvSpPr>
+        <p:spPr>
+          <a:xfrm>
+            <a:off x="2009521" y="1595993"/>
+            <a:ext cx="119526" cy="84161"/>
+          </a:xfrm>
+          <a:prstGeom prst="ellipse">
+            <a:avLst/>
+          </a:prstGeom>
+          <a:solidFill>
+            <a:srgbClr val="C03C3C"/>
+          </a:solidFill>
+          <a:ln>
+            <a:noFill/>
+          </a:ln>
+          <a:effectLst/>
+        </p:spPr>
+        <p:style>
+          <a:lnRef idx="1">
+            <a:schemeClr val="accent1"/>
+          </a:lnRef>
+          <a:fillRef idx="3">
+            <a:schemeClr val="accent1"/>
+          </a:fillRef>
+          <a:effectRef idx="2">
+            <a:schemeClr val="accent1"/>
+          </a:effectRef>
+          <a:fontRef idx="minor">
+            <a:schemeClr val="lt1"/>
+          </a:fontRef>
+        </p:style>
+        <p:txBody>
+          <a:bodyPr rtlCol="0" anchor="ctr"/>
+          <a:lstStyle/>
+          <a:p>
+            <a:pPr algn="ctr"/>
+          </a:p>
+        </p:txBody>
+      </p:sp>
+      <p:sp>
+        <p:nvSpPr>
+          <p:cNvPr id="20" name="Oval 19"/>
+          <p:cNvSpPr/>
+          <p:nvPr/>
+        </p:nvSpPr>
+        <p:spPr>
+          <a:xfrm>
+            <a:off x="2275136" y="1520464"/>
+            <a:ext cx="126167" cy="88477"/>
+          </a:xfrm>
+          <a:prstGeom prst="ellipse">
+            <a:avLst/>
+          </a:prstGeom>
+          <a:solidFill>
+            <a:srgbClr val="C03C3C"/>
+          </a:solidFill>
+          <a:ln>
+            <a:noFill/>
+          </a:ln>
+          <a:effectLst/>
+        </p:spPr>
+        <p:style>
+          <a:lnRef idx="1">
+            <a:schemeClr val="accent1"/>
+          </a:lnRef>
+          <a:fillRef idx="3">
+            <a:schemeClr val="accent1"/>
+          </a:fillRef>
+          <a:effectRef idx="2">
+            <a:schemeClr val="accent1"/>
+          </a:effectRef>
+          <a:fontRef idx="minor">
+            <a:schemeClr val="lt1"/>
+          </a:fontRef>
+        </p:style>
+        <p:txBody>
+          <a:bodyPr rtlCol="0" anchor="ctr"/>
+          <a:lstStyle/>
+          <a:p>
+            <a:pPr algn="ctr"/>
+          </a:p>
+        </p:txBody>
+      </p:sp>
+      <p:sp>
+        <p:nvSpPr>
+          <p:cNvPr id="21" name="Oval 20"/>
+          <p:cNvSpPr/>
+          <p:nvPr/>
+        </p:nvSpPr>
+        <p:spPr>
+          <a:xfrm>
+            <a:off x="1943118" y="1725472"/>
+            <a:ext cx="106245" cy="75529"/>
+          </a:xfrm>
+          <a:prstGeom prst="ellipse">
+            <a:avLst/>
+          </a:prstGeom>
+          <a:solidFill>
+            <a:srgbClr val="C03C3C"/>
+          </a:solidFill>
+          <a:ln>
+            <a:noFill/>
+          </a:ln>
+          <a:effectLst/>
+        </p:spPr>
+        <p:style>
+          <a:lnRef idx="1">
+            <a:schemeClr val="accent1"/>
+          </a:lnRef>
+          <a:fillRef idx="3">
+            <a:schemeClr val="accent1"/>
+          </a:fillRef>
+          <a:effectRef idx="2">
+            <a:schemeClr val="accent1"/>
+          </a:effectRef>
+          <a:fontRef idx="minor">
+            <a:schemeClr val="lt1"/>
+          </a:fontRef>
+        </p:style>
+        <p:txBody>
+          <a:bodyPr rtlCol="0" anchor="ctr"/>
+          <a:lstStyle/>
+          <a:p>
+            <a:pPr algn="ctr"/>
+          </a:p>
+        </p:txBody>
+      </p:sp>
+      <p:sp>
+        <p:nvSpPr>
+          <p:cNvPr id="22" name="Oval 21"/>
+          <p:cNvSpPr/>
+          <p:nvPr/>
+        </p:nvSpPr>
+        <p:spPr>
+          <a:xfrm>
+            <a:off x="2474348" y="1649943"/>
+            <a:ext cx="112886" cy="79845"/>
+          </a:xfrm>
+          <a:prstGeom prst="ellipse">
+            <a:avLst/>
+          </a:prstGeom>
+          <a:solidFill>
+            <a:srgbClr val="C03C3C"/>
+          </a:solidFill>
+          <a:ln>
+            <a:noFill/>
+          </a:ln>
+          <a:effectLst/>
+        </p:spPr>
+        <p:style>
+          <a:lnRef idx="1">
+            <a:schemeClr val="accent1"/>
+          </a:lnRef>
+          <a:fillRef idx="3">
+            <a:schemeClr val="accent1"/>
+          </a:fillRef>
+          <a:effectRef idx="2">
+            <a:schemeClr val="accent1"/>
+          </a:effectRef>
+          <a:fontRef idx="minor">
+            <a:schemeClr val="lt1"/>
+          </a:fontRef>
+        </p:style>
+        <p:txBody>
+          <a:bodyPr rtlCol="0" anchor="ctr"/>
+          <a:lstStyle/>
+          <a:p>
+            <a:pPr algn="ctr"/>
+          </a:p>
+        </p:txBody>
+      </p:sp>
+      <p:sp>
+        <p:nvSpPr>
+          <p:cNvPr id="23" name="Oval 22"/>
+          <p:cNvSpPr/>
+          <p:nvPr/>
+        </p:nvSpPr>
+        <p:spPr>
+          <a:xfrm>
+            <a:off x="2208733" y="1779422"/>
+            <a:ext cx="99605" cy="71213"/>
+          </a:xfrm>
+          <a:prstGeom prst="ellipse">
+            <a:avLst/>
+          </a:prstGeom>
+          <a:solidFill>
+            <a:srgbClr val="C03C3C"/>
+          </a:solidFill>
+          <a:ln>
+            <a:noFill/>
+          </a:ln>
+          <a:effectLst/>
+        </p:spPr>
+        <p:style>
+          <a:lnRef idx="1">
+            <a:schemeClr val="accent1"/>
+          </a:lnRef>
+          <a:fillRef idx="3">
+            <a:schemeClr val="accent1"/>
+          </a:fillRef>
+          <a:effectRef idx="2">
+            <a:schemeClr val="accent1"/>
+          </a:effectRef>
+          <a:fontRef idx="minor">
+            <a:schemeClr val="lt1"/>
+          </a:fontRef>
+        </p:style>
+        <p:txBody>
+          <a:bodyPr rtlCol="0" anchor="ctr"/>
+          <a:lstStyle/>
+          <a:p>
+            <a:pPr algn="ctr"/>
+          </a:p>
+        </p:txBody>
+      </p:sp>
+      <p:sp>
+        <p:nvSpPr>
+          <p:cNvPr id="24" name="Oval 23"/>
+          <p:cNvSpPr/>
+          <p:nvPr/>
+        </p:nvSpPr>
+        <p:spPr>
+          <a:xfrm>
+            <a:off x="2607155" y="1563624"/>
+            <a:ext cx="92965" cy="66897"/>
+          </a:xfrm>
+          <a:prstGeom prst="ellipse">
+            <a:avLst/>
+          </a:prstGeom>
+          <a:solidFill>
+            <a:srgbClr val="C03C3C"/>
+          </a:solidFill>
+          <a:ln>
+            <a:noFill/>
+          </a:ln>
+          <a:effectLst/>
+        </p:spPr>
+        <p:style>
+          <a:lnRef idx="1">
+            <a:schemeClr val="accent1"/>
+          </a:lnRef>
+          <a:fillRef idx="3">
+            <a:schemeClr val="accent1"/>
+          </a:fillRef>
+          <a:effectRef idx="2">
+            <a:schemeClr val="accent1"/>
+          </a:effectRef>
+          <a:fontRef idx="minor">
+            <a:schemeClr val="lt1"/>
+          </a:fontRef>
+        </p:style>
+        <p:txBody>
+          <a:bodyPr rtlCol="0" anchor="ctr"/>
+          <a:lstStyle/>
+          <a:p>
+            <a:pPr algn="ctr"/>
+          </a:p>
+        </p:txBody>
+      </p:sp>
+      <p:sp>
+        <p:nvSpPr>
+          <p:cNvPr id="25" name="TextBox 24"/>
           <p:cNvSpPr txBox="1"/>
           <p:nvPr/>
         </p:nvSpPr>
@@ -55052,7 +55464,7 @@
       </p:sp>
       <p:sp>
         <p:nvSpPr>
-          <p:cNvPr id="17" name="Rectangle 16"/>
+          <p:cNvPr id="26" name="Rectangle 25"/>
           <p:cNvSpPr/>
           <p:nvPr/>
         </p:nvSpPr>
@@ -55096,7 +55508,7 @@
       </p:sp>
       <p:sp>
         <p:nvSpPr>
-          <p:cNvPr id="18" name="TextBox 17"/>
+          <p:cNvPr id="27" name="TextBox 26"/>
           <p:cNvSpPr txBox="1"/>
           <p:nvPr/>
         </p:nvSpPr>
@@ -55131,7 +55543,7 @@
       </p:sp>
       <p:sp>
         <p:nvSpPr>
-          <p:cNvPr id="19" name="TextBox 18"/>
+          <p:cNvPr id="28" name="TextBox 27"/>
           <p:cNvSpPr txBox="1"/>
           <p:nvPr/>
         </p:nvSpPr>
@@ -55166,7 +55578,7 @@
       </p:sp>
       <p:sp>
         <p:nvSpPr>
-          <p:cNvPr id="20" name="TextBox 19"/>
+          <p:cNvPr id="29" name="TextBox 28"/>
           <p:cNvSpPr txBox="1"/>
           <p:nvPr/>
         </p:nvSpPr>
@@ -55201,7 +55613,7 @@
       </p:sp>
       <p:sp>
         <p:nvSpPr>
-          <p:cNvPr id="21" name="TextBox 20"/>
+          <p:cNvPr id="30" name="TextBox 29"/>
           <p:cNvSpPr txBox="1"/>
           <p:nvPr/>
         </p:nvSpPr>
@@ -55236,7 +55648,7 @@
       </p:sp>
       <p:sp>
         <p:nvSpPr>
-          <p:cNvPr id="22" name="TextBox 21"/>
+          <p:cNvPr id="31" name="TextBox 30"/>
           <p:cNvSpPr txBox="1"/>
           <p:nvPr/>
         </p:nvSpPr>
@@ -55271,7 +55683,7 @@
       </p:sp>
       <p:sp>
         <p:nvSpPr>
-          <p:cNvPr id="23" name="TextBox 22"/>
+          <p:cNvPr id="32" name="TextBox 31"/>
           <p:cNvSpPr txBox="1"/>
           <p:nvPr/>
         </p:nvSpPr>
@@ -55306,7 +55718,7 @@
       </p:sp>
       <p:sp>
         <p:nvSpPr>
-          <p:cNvPr id="24" name="TextBox 23"/>
+          <p:cNvPr id="33" name="TextBox 32"/>
           <p:cNvSpPr txBox="1"/>
           <p:nvPr/>
         </p:nvSpPr>
@@ -55341,7 +55753,7 @@
       </p:sp>
       <p:sp>
         <p:nvSpPr>
-          <p:cNvPr id="25" name="TextBox 24"/>
+          <p:cNvPr id="34" name="TextBox 33"/>
           <p:cNvSpPr txBox="1"/>
           <p:nvPr/>
         </p:nvSpPr>
@@ -55376,7 +55788,7 @@
       </p:sp>
       <p:sp>
         <p:nvSpPr>
-          <p:cNvPr id="26" name="Rounded Rectangle 25"/>
+          <p:cNvPr id="35" name="Rounded Rectangle 34"/>
           <p:cNvSpPr/>
           <p:nvPr/>
         </p:nvSpPr>
@@ -55424,7 +55836,7 @@
       </p:sp>
       <p:sp>
         <p:nvSpPr>
-          <p:cNvPr id="27" name="Rectangle 26"/>
+          <p:cNvPr id="36" name="Rectangle 35"/>
           <p:cNvSpPr/>
           <p:nvPr/>
         </p:nvSpPr>
@@ -55468,7 +55880,7 @@
       </p:sp>
       <p:sp>
         <p:nvSpPr>
-          <p:cNvPr id="28" name="Rounded Rectangle 27"/>
+          <p:cNvPr id="37" name="Rounded Rectangle 36"/>
           <p:cNvSpPr/>
           <p:nvPr/>
         </p:nvSpPr>
@@ -55483,12 +55895,10 @@
             </a:avLst>
           </a:prstGeom>
           <a:solidFill>
-            <a:srgbClr val="F5F8FC"/>
+            <a:srgbClr val="BEE0F5"/>
           </a:solidFill>
-          <a:ln w="12700">
-            <a:solidFill>
-              <a:srgbClr val="C0D0E0"/>
-            </a:solidFill>
+          <a:ln>
+            <a:noFill/>
           </a:ln>
           <a:effectLst/>
         </p:spPr>
@@ -55516,14 +55926,2234 @@
       </p:sp>
       <p:sp>
         <p:nvSpPr>
-          <p:cNvPr id="29" name="Rectangle 28"/>
+          <p:cNvPr id="38" name="Rectangle 37"/>
           <p:cNvSpPr/>
           <p:nvPr/>
         </p:nvSpPr>
         <p:spPr>
           <a:xfrm>
-            <a:off x="4508906" y="1097280"/>
-            <a:ext cx="640080" cy="237744"/>
+            <a:off x="4502158" y="1563624"/>
+            <a:ext cx="232413" cy="431596"/>
+          </a:xfrm>
+          <a:prstGeom prst="rect">
+            <a:avLst/>
+          </a:prstGeom>
+          <a:solidFill>
+            <a:srgbClr val="2C3E50"/>
+          </a:solidFill>
+          <a:ln>
+            <a:noFill/>
+          </a:ln>
+          <a:effectLst/>
+        </p:spPr>
+        <p:style>
+          <a:lnRef idx="1">
+            <a:schemeClr val="accent1"/>
+          </a:lnRef>
+          <a:fillRef idx="3">
+            <a:schemeClr val="accent1"/>
+          </a:fillRef>
+          <a:effectRef idx="2">
+            <a:schemeClr val="accent1"/>
+          </a:effectRef>
+          <a:fontRef idx="minor">
+            <a:schemeClr val="lt1"/>
+          </a:fontRef>
+        </p:style>
+        <p:txBody>
+          <a:bodyPr rtlCol="0" anchor="ctr"/>
+          <a:lstStyle/>
+          <a:p>
+            <a:pPr algn="ctr"/>
+          </a:p>
+        </p:txBody>
+      </p:sp>
+      <p:sp>
+        <p:nvSpPr>
+          <p:cNvPr id="39" name="Rectangle 38"/>
+          <p:cNvSpPr/>
+          <p:nvPr/>
+        </p:nvSpPr>
+        <p:spPr>
+          <a:xfrm>
+            <a:off x="4601763" y="1412565"/>
+            <a:ext cx="332018" cy="302117"/>
+          </a:xfrm>
+          <a:prstGeom prst="rect">
+            <a:avLst/>
+          </a:prstGeom>
+          <a:solidFill>
+            <a:srgbClr val="2C3E50"/>
+          </a:solidFill>
+          <a:ln>
+            <a:noFill/>
+          </a:ln>
+          <a:effectLst/>
+        </p:spPr>
+        <p:style>
+          <a:lnRef idx="1">
+            <a:schemeClr val="accent1"/>
+          </a:lnRef>
+          <a:fillRef idx="3">
+            <a:schemeClr val="accent1"/>
+          </a:fillRef>
+          <a:effectRef idx="2">
+            <a:schemeClr val="accent1"/>
+          </a:effectRef>
+          <a:fontRef idx="minor">
+            <a:schemeClr val="lt1"/>
+          </a:fontRef>
+        </p:style>
+        <p:txBody>
+          <a:bodyPr rtlCol="0" anchor="ctr"/>
+          <a:lstStyle/>
+          <a:p>
+            <a:pPr algn="ctr"/>
+          </a:p>
+        </p:txBody>
+      </p:sp>
+      <p:sp>
+        <p:nvSpPr>
+          <p:cNvPr id="40" name="Rectangle 39"/>
+          <p:cNvSpPr/>
+          <p:nvPr/>
+        </p:nvSpPr>
+        <p:spPr>
+          <a:xfrm>
+            <a:off x="4867378" y="1488094"/>
+            <a:ext cx="132807" cy="151058"/>
+          </a:xfrm>
+          <a:prstGeom prst="rect">
+            <a:avLst/>
+          </a:prstGeom>
+          <a:solidFill>
+            <a:srgbClr val="2C3E50"/>
+          </a:solidFill>
+          <a:ln>
+            <a:noFill/>
+          </a:ln>
+          <a:effectLst/>
+        </p:spPr>
+        <p:style>
+          <a:lnRef idx="1">
+            <a:schemeClr val="accent1"/>
+          </a:lnRef>
+          <a:fillRef idx="3">
+            <a:schemeClr val="accent1"/>
+          </a:fillRef>
+          <a:effectRef idx="2">
+            <a:schemeClr val="accent1"/>
+          </a:effectRef>
+          <a:fontRef idx="minor">
+            <a:schemeClr val="lt1"/>
+          </a:fontRef>
+        </p:style>
+        <p:txBody>
+          <a:bodyPr rtlCol="0" anchor="ctr"/>
+          <a:lstStyle/>
+          <a:p>
+            <a:pPr algn="ctr"/>
+          </a:p>
+        </p:txBody>
+      </p:sp>
+      <p:sp>
+        <p:nvSpPr>
+          <p:cNvPr id="41" name="Oval 40"/>
+          <p:cNvSpPr/>
+          <p:nvPr/>
+        </p:nvSpPr>
+        <p:spPr>
+          <a:xfrm>
+            <a:off x="5033387" y="1261506"/>
+            <a:ext cx="464826" cy="323697"/>
+          </a:xfrm>
+          <a:prstGeom prst="ellipse">
+            <a:avLst/>
+          </a:prstGeom>
+          <a:solidFill>
+            <a:srgbClr val="F2F8FE"/>
+          </a:solidFill>
+          <a:ln>
+            <a:noFill/>
+          </a:ln>
+          <a:effectLst/>
+        </p:spPr>
+        <p:style>
+          <a:lnRef idx="1">
+            <a:schemeClr val="accent1"/>
+          </a:lnRef>
+          <a:fillRef idx="3">
+            <a:schemeClr val="accent1"/>
+          </a:fillRef>
+          <a:effectRef idx="2">
+            <a:schemeClr val="accent1"/>
+          </a:effectRef>
+          <a:fontRef idx="minor">
+            <a:schemeClr val="lt1"/>
+          </a:fontRef>
+        </p:style>
+        <p:txBody>
+          <a:bodyPr rtlCol="0" anchor="ctr"/>
+          <a:lstStyle/>
+          <a:p>
+            <a:pPr algn="ctr"/>
+          </a:p>
+        </p:txBody>
+      </p:sp>
+      <p:sp>
+        <p:nvSpPr>
+          <p:cNvPr id="42" name="Oval 41"/>
+          <p:cNvSpPr/>
+          <p:nvPr/>
+        </p:nvSpPr>
+        <p:spPr>
+          <a:xfrm>
+            <a:off x="5365406" y="1175186"/>
+            <a:ext cx="531229" cy="345277"/>
+          </a:xfrm>
+          <a:prstGeom prst="ellipse">
+            <a:avLst/>
+          </a:prstGeom>
+          <a:solidFill>
+            <a:srgbClr val="F2F8FE"/>
+          </a:solidFill>
+          <a:ln>
+            <a:noFill/>
+          </a:ln>
+          <a:effectLst/>
+        </p:spPr>
+        <p:style>
+          <a:lnRef idx="1">
+            <a:schemeClr val="accent1"/>
+          </a:lnRef>
+          <a:fillRef idx="3">
+            <a:schemeClr val="accent1"/>
+          </a:fillRef>
+          <a:effectRef idx="2">
+            <a:schemeClr val="accent1"/>
+          </a:effectRef>
+          <a:fontRef idx="minor">
+            <a:schemeClr val="lt1"/>
+          </a:fontRef>
+        </p:style>
+        <p:txBody>
+          <a:bodyPr rtlCol="0" anchor="ctr"/>
+          <a:lstStyle/>
+          <a:p>
+            <a:pPr algn="ctr"/>
+          </a:p>
+        </p:txBody>
+      </p:sp>
+      <p:sp>
+        <p:nvSpPr>
+          <p:cNvPr id="43" name="Oval 42"/>
+          <p:cNvSpPr/>
+          <p:nvPr/>
+        </p:nvSpPr>
+        <p:spPr>
+          <a:xfrm>
+            <a:off x="5763828" y="1229136"/>
+            <a:ext cx="464826" cy="302117"/>
+          </a:xfrm>
+          <a:prstGeom prst="ellipse">
+            <a:avLst/>
+          </a:prstGeom>
+          <a:solidFill>
+            <a:srgbClr val="F2F8FE"/>
+          </a:solidFill>
+          <a:ln>
+            <a:noFill/>
+          </a:ln>
+          <a:effectLst/>
+        </p:spPr>
+        <p:style>
+          <a:lnRef idx="1">
+            <a:schemeClr val="accent1"/>
+          </a:lnRef>
+          <a:fillRef idx="3">
+            <a:schemeClr val="accent1"/>
+          </a:fillRef>
+          <a:effectRef idx="2">
+            <a:schemeClr val="accent1"/>
+          </a:effectRef>
+          <a:fontRef idx="minor">
+            <a:schemeClr val="lt1"/>
+          </a:fontRef>
+        </p:style>
+        <p:txBody>
+          <a:bodyPr rtlCol="0" anchor="ctr"/>
+          <a:lstStyle/>
+          <a:p>
+            <a:pPr algn="ctr"/>
+          </a:p>
+        </p:txBody>
+      </p:sp>
+      <p:sp>
+        <p:nvSpPr>
+          <p:cNvPr id="44" name="Oval 43"/>
+          <p:cNvSpPr/>
+          <p:nvPr/>
+        </p:nvSpPr>
+        <p:spPr>
+          <a:xfrm>
+            <a:off x="6129049" y="1175186"/>
+            <a:ext cx="498027" cy="323697"/>
+          </a:xfrm>
+          <a:prstGeom prst="ellipse">
+            <a:avLst/>
+          </a:prstGeom>
+          <a:solidFill>
+            <a:srgbClr val="F2F8FE"/>
+          </a:solidFill>
+          <a:ln>
+            <a:noFill/>
+          </a:ln>
+          <a:effectLst/>
+        </p:spPr>
+        <p:style>
+          <a:lnRef idx="1">
+            <a:schemeClr val="accent1"/>
+          </a:lnRef>
+          <a:fillRef idx="3">
+            <a:schemeClr val="accent1"/>
+          </a:fillRef>
+          <a:effectRef idx="2">
+            <a:schemeClr val="accent1"/>
+          </a:effectRef>
+          <a:fontRef idx="minor">
+            <a:schemeClr val="lt1"/>
+          </a:fontRef>
+        </p:style>
+        <p:txBody>
+          <a:bodyPr rtlCol="0" anchor="ctr"/>
+          <a:lstStyle/>
+          <a:p>
+            <a:pPr algn="ctr"/>
+          </a:p>
+        </p:txBody>
+      </p:sp>
+      <p:sp>
+        <p:nvSpPr>
+          <p:cNvPr id="45" name="Oval 44"/>
+          <p:cNvSpPr/>
+          <p:nvPr/>
+        </p:nvSpPr>
+        <p:spPr>
+          <a:xfrm>
+            <a:off x="6494269" y="1239926"/>
+            <a:ext cx="431624" cy="280537"/>
+          </a:xfrm>
+          <a:prstGeom prst="ellipse">
+            <a:avLst/>
+          </a:prstGeom>
+          <a:solidFill>
+            <a:srgbClr val="F2F8FE"/>
+          </a:solidFill>
+          <a:ln>
+            <a:noFill/>
+          </a:ln>
+          <a:effectLst/>
+        </p:spPr>
+        <p:style>
+          <a:lnRef idx="1">
+            <a:schemeClr val="accent1"/>
+          </a:lnRef>
+          <a:fillRef idx="3">
+            <a:schemeClr val="accent1"/>
+          </a:fillRef>
+          <a:effectRef idx="2">
+            <a:schemeClr val="accent1"/>
+          </a:effectRef>
+          <a:fontRef idx="minor">
+            <a:schemeClr val="lt1"/>
+          </a:fontRef>
+        </p:style>
+        <p:txBody>
+          <a:bodyPr rtlCol="0" anchor="ctr"/>
+          <a:lstStyle/>
+          <a:p>
+            <a:pPr algn="ctr"/>
+          </a:p>
+        </p:txBody>
+      </p:sp>
+      <p:sp>
+        <p:nvSpPr>
+          <p:cNvPr id="46" name="Oval 45"/>
+          <p:cNvSpPr/>
+          <p:nvPr/>
+        </p:nvSpPr>
+        <p:spPr>
+          <a:xfrm>
+            <a:off x="6826288" y="1196766"/>
+            <a:ext cx="464826" cy="302117"/>
+          </a:xfrm>
+          <a:prstGeom prst="ellipse">
+            <a:avLst/>
+          </a:prstGeom>
+          <a:solidFill>
+            <a:srgbClr val="F2F8FE"/>
+          </a:solidFill>
+          <a:ln>
+            <a:noFill/>
+          </a:ln>
+          <a:effectLst/>
+        </p:spPr>
+        <p:style>
+          <a:lnRef idx="1">
+            <a:schemeClr val="accent1"/>
+          </a:lnRef>
+          <a:fillRef idx="3">
+            <a:schemeClr val="accent1"/>
+          </a:fillRef>
+          <a:effectRef idx="2">
+            <a:schemeClr val="accent1"/>
+          </a:effectRef>
+          <a:fontRef idx="minor">
+            <a:schemeClr val="lt1"/>
+          </a:fontRef>
+        </p:style>
+        <p:txBody>
+          <a:bodyPr rtlCol="0" anchor="ctr"/>
+          <a:lstStyle/>
+          <a:p>
+            <a:pPr algn="ctr"/>
+          </a:p>
+        </p:txBody>
+      </p:sp>
+      <p:sp>
+        <p:nvSpPr>
+          <p:cNvPr id="47" name="Oval 46"/>
+          <p:cNvSpPr/>
+          <p:nvPr/>
+        </p:nvSpPr>
+        <p:spPr>
+          <a:xfrm>
+            <a:off x="7158307" y="1283086"/>
+            <a:ext cx="398422" cy="258958"/>
+          </a:xfrm>
+          <a:prstGeom prst="ellipse">
+            <a:avLst/>
+          </a:prstGeom>
+          <a:solidFill>
+            <a:srgbClr val="F2F8FE"/>
+          </a:solidFill>
+          <a:ln>
+            <a:noFill/>
+          </a:ln>
+          <a:effectLst/>
+        </p:spPr>
+        <p:style>
+          <a:lnRef idx="1">
+            <a:schemeClr val="accent1"/>
+          </a:lnRef>
+          <a:fillRef idx="3">
+            <a:schemeClr val="accent1"/>
+          </a:fillRef>
+          <a:effectRef idx="2">
+            <a:schemeClr val="accent1"/>
+          </a:effectRef>
+          <a:fontRef idx="minor">
+            <a:schemeClr val="lt1"/>
+          </a:fontRef>
+        </p:style>
+        <p:txBody>
+          <a:bodyPr rtlCol="0" anchor="ctr"/>
+          <a:lstStyle/>
+          <a:p>
+            <a:pPr algn="ctr"/>
+          </a:p>
+        </p:txBody>
+      </p:sp>
+      <p:sp>
+        <p:nvSpPr>
+          <p:cNvPr id="48" name="Oval 47"/>
+          <p:cNvSpPr/>
+          <p:nvPr/>
+        </p:nvSpPr>
+        <p:spPr>
+          <a:xfrm>
+            <a:off x="5199397" y="1498884"/>
+            <a:ext cx="498027" cy="323697"/>
+          </a:xfrm>
+          <a:prstGeom prst="ellipse">
+            <a:avLst/>
+          </a:prstGeom>
+          <a:solidFill>
+            <a:srgbClr val="C8E4F5"/>
+          </a:solidFill>
+          <a:ln>
+            <a:noFill/>
+          </a:ln>
+          <a:effectLst/>
+        </p:spPr>
+        <p:style>
+          <a:lnRef idx="1">
+            <a:schemeClr val="accent1"/>
+          </a:lnRef>
+          <a:fillRef idx="3">
+            <a:schemeClr val="accent1"/>
+          </a:fillRef>
+          <a:effectRef idx="2">
+            <a:schemeClr val="accent1"/>
+          </a:effectRef>
+          <a:fontRef idx="minor">
+            <a:schemeClr val="lt1"/>
+          </a:fontRef>
+        </p:style>
+        <p:txBody>
+          <a:bodyPr rtlCol="0" anchor="ctr"/>
+          <a:lstStyle/>
+          <a:p>
+            <a:pPr algn="ctr"/>
+          </a:p>
+        </p:txBody>
+      </p:sp>
+      <p:sp>
+        <p:nvSpPr>
+          <p:cNvPr id="49" name="Oval 48"/>
+          <p:cNvSpPr/>
+          <p:nvPr/>
+        </p:nvSpPr>
+        <p:spPr>
+          <a:xfrm>
+            <a:off x="5564617" y="1434144"/>
+            <a:ext cx="531229" cy="345277"/>
+          </a:xfrm>
+          <a:prstGeom prst="ellipse">
+            <a:avLst/>
+          </a:prstGeom>
+          <a:solidFill>
+            <a:srgbClr val="C8E4F5"/>
+          </a:solidFill>
+          <a:ln>
+            <a:noFill/>
+          </a:ln>
+          <a:effectLst/>
+        </p:spPr>
+        <p:style>
+          <a:lnRef idx="1">
+            <a:schemeClr val="accent1"/>
+          </a:lnRef>
+          <a:fillRef idx="3">
+            <a:schemeClr val="accent1"/>
+          </a:fillRef>
+          <a:effectRef idx="2">
+            <a:schemeClr val="accent1"/>
+          </a:effectRef>
+          <a:fontRef idx="minor">
+            <a:schemeClr val="lt1"/>
+          </a:fontRef>
+        </p:style>
+        <p:txBody>
+          <a:bodyPr rtlCol="0" anchor="ctr"/>
+          <a:lstStyle/>
+          <a:p>
+            <a:pPr algn="ctr"/>
+          </a:p>
+        </p:txBody>
+      </p:sp>
+      <p:sp>
+        <p:nvSpPr>
+          <p:cNvPr id="50" name="Oval 49"/>
+          <p:cNvSpPr/>
+          <p:nvPr/>
+        </p:nvSpPr>
+        <p:spPr>
+          <a:xfrm>
+            <a:off x="5963040" y="1498884"/>
+            <a:ext cx="464826" cy="302117"/>
+          </a:xfrm>
+          <a:prstGeom prst="ellipse">
+            <a:avLst/>
+          </a:prstGeom>
+          <a:solidFill>
+            <a:srgbClr val="F2F8FE"/>
+          </a:solidFill>
+          <a:ln>
+            <a:noFill/>
+          </a:ln>
+          <a:effectLst/>
+        </p:spPr>
+        <p:style>
+          <a:lnRef idx="1">
+            <a:schemeClr val="accent1"/>
+          </a:lnRef>
+          <a:fillRef idx="3">
+            <a:schemeClr val="accent1"/>
+          </a:fillRef>
+          <a:effectRef idx="2">
+            <a:schemeClr val="accent1"/>
+          </a:effectRef>
+          <a:fontRef idx="minor">
+            <a:schemeClr val="lt1"/>
+          </a:fontRef>
+        </p:style>
+        <p:txBody>
+          <a:bodyPr rtlCol="0" anchor="ctr"/>
+          <a:lstStyle/>
+          <a:p>
+            <a:pPr algn="ctr"/>
+          </a:p>
+        </p:txBody>
+      </p:sp>
+      <p:sp>
+        <p:nvSpPr>
+          <p:cNvPr id="51" name="Oval 50"/>
+          <p:cNvSpPr/>
+          <p:nvPr/>
+        </p:nvSpPr>
+        <p:spPr>
+          <a:xfrm>
+            <a:off x="6328260" y="1434144"/>
+            <a:ext cx="464826" cy="302117"/>
+          </a:xfrm>
+          <a:prstGeom prst="ellipse">
+            <a:avLst/>
+          </a:prstGeom>
+          <a:solidFill>
+            <a:srgbClr val="C8E4F5"/>
+          </a:solidFill>
+          <a:ln>
+            <a:noFill/>
+          </a:ln>
+          <a:effectLst/>
+        </p:spPr>
+        <p:style>
+          <a:lnRef idx="1">
+            <a:schemeClr val="accent1"/>
+          </a:lnRef>
+          <a:fillRef idx="3">
+            <a:schemeClr val="accent1"/>
+          </a:fillRef>
+          <a:effectRef idx="2">
+            <a:schemeClr val="accent1"/>
+          </a:effectRef>
+          <a:fontRef idx="minor">
+            <a:schemeClr val="lt1"/>
+          </a:fontRef>
+        </p:style>
+        <p:txBody>
+          <a:bodyPr rtlCol="0" anchor="ctr"/>
+          <a:lstStyle/>
+          <a:p>
+            <a:pPr algn="ctr"/>
+          </a:p>
+        </p:txBody>
+      </p:sp>
+      <p:sp>
+        <p:nvSpPr>
+          <p:cNvPr id="52" name="Oval 51"/>
+          <p:cNvSpPr/>
+          <p:nvPr/>
+        </p:nvSpPr>
+        <p:spPr>
+          <a:xfrm>
+            <a:off x="6693481" y="1498884"/>
+            <a:ext cx="431624" cy="280537"/>
+          </a:xfrm>
+          <a:prstGeom prst="ellipse">
+            <a:avLst/>
+          </a:prstGeom>
+          <a:solidFill>
+            <a:srgbClr val="F2F8FE"/>
+          </a:solidFill>
+          <a:ln>
+            <a:noFill/>
+          </a:ln>
+          <a:effectLst/>
+        </p:spPr>
+        <p:style>
+          <a:lnRef idx="1">
+            <a:schemeClr val="accent1"/>
+          </a:lnRef>
+          <a:fillRef idx="3">
+            <a:schemeClr val="accent1"/>
+          </a:fillRef>
+          <a:effectRef idx="2">
+            <a:schemeClr val="accent1"/>
+          </a:effectRef>
+          <a:fontRef idx="minor">
+            <a:schemeClr val="lt1"/>
+          </a:fontRef>
+        </p:style>
+        <p:txBody>
+          <a:bodyPr rtlCol="0" anchor="ctr"/>
+          <a:lstStyle/>
+          <a:p>
+            <a:pPr algn="ctr"/>
+          </a:p>
+        </p:txBody>
+      </p:sp>
+      <p:sp>
+        <p:nvSpPr>
+          <p:cNvPr id="53" name="Oval 52"/>
+          <p:cNvSpPr/>
+          <p:nvPr/>
+        </p:nvSpPr>
+        <p:spPr>
+          <a:xfrm>
+            <a:off x="7058701" y="1412565"/>
+            <a:ext cx="398422" cy="258958"/>
+          </a:xfrm>
+          <a:prstGeom prst="ellipse">
+            <a:avLst/>
+          </a:prstGeom>
+          <a:solidFill>
+            <a:srgbClr val="C8E4F5"/>
+          </a:solidFill>
+          <a:ln>
+            <a:noFill/>
+          </a:ln>
+          <a:effectLst/>
+        </p:spPr>
+        <p:style>
+          <a:lnRef idx="1">
+            <a:schemeClr val="accent1"/>
+          </a:lnRef>
+          <a:fillRef idx="3">
+            <a:schemeClr val="accent1"/>
+          </a:fillRef>
+          <a:effectRef idx="2">
+            <a:schemeClr val="accent1"/>
+          </a:effectRef>
+          <a:fontRef idx="minor">
+            <a:schemeClr val="lt1"/>
+          </a:fontRef>
+        </p:style>
+        <p:txBody>
+          <a:bodyPr rtlCol="0" anchor="ctr"/>
+          <a:lstStyle/>
+          <a:p>
+            <a:pPr algn="ctr"/>
+          </a:p>
+        </p:txBody>
+      </p:sp>
+      <p:sp>
+        <p:nvSpPr>
+          <p:cNvPr id="54" name="Oval 53"/>
+          <p:cNvSpPr/>
+          <p:nvPr/>
+        </p:nvSpPr>
+        <p:spPr>
+          <a:xfrm>
+            <a:off x="7357518" y="1347825"/>
+            <a:ext cx="332018" cy="215798"/>
+          </a:xfrm>
+          <a:prstGeom prst="ellipse">
+            <a:avLst/>
+          </a:prstGeom>
+          <a:solidFill>
+            <a:srgbClr val="F2F8FE"/>
+          </a:solidFill>
+          <a:ln>
+            <a:noFill/>
+          </a:ln>
+          <a:effectLst/>
+        </p:spPr>
+        <p:style>
+          <a:lnRef idx="1">
+            <a:schemeClr val="accent1"/>
+          </a:lnRef>
+          <a:fillRef idx="3">
+            <a:schemeClr val="accent1"/>
+          </a:fillRef>
+          <a:effectRef idx="2">
+            <a:schemeClr val="accent1"/>
+          </a:effectRef>
+          <a:fontRef idx="minor">
+            <a:schemeClr val="lt1"/>
+          </a:fontRef>
+        </p:style>
+        <p:txBody>
+          <a:bodyPr rtlCol="0" anchor="ctr"/>
+          <a:lstStyle/>
+          <a:p>
+            <a:pPr algn="ctr"/>
+          </a:p>
+        </p:txBody>
+      </p:sp>
+      <p:sp>
+        <p:nvSpPr>
+          <p:cNvPr id="55" name="TextBox 54"/>
+          <p:cNvSpPr txBox="1"/>
+          <p:nvPr/>
+        </p:nvSpPr>
+        <p:spPr>
+          <a:xfrm>
+            <a:off x="4435754" y="2212848"/>
+            <a:ext cx="3320186" cy="365760"/>
+          </a:xfrm>
+          <a:prstGeom prst="rect">
+            <a:avLst/>
+          </a:prstGeom>
+          <a:noFill/>
+        </p:spPr>
+        <p:txBody>
+          <a:bodyPr wrap="square" anchor="t" lIns="36000" rIns="36000" tIns="18000" bIns="18000">
+            <a:spAutoFit/>
+          </a:bodyPr>
+          <a:lstStyle/>
+          <a:p>
+            <a:pPr algn="l"/>
+            <a:r>
+              <a:rPr sz="1680" b="1" i="0">
+                <a:solidFill>
+                  <a:srgbClr val="1E293B"/>
+                </a:solidFill>
+                <a:latin typeface="Arial"/>
+              </a:rPr>
+              <a:t>Foam suppressant</a:t>
+            </a:r>
+          </a:p>
+        </p:txBody>
+      </p:sp>
+      <p:sp>
+        <p:nvSpPr>
+          <p:cNvPr id="56" name="Rectangle 55"/>
+          <p:cNvSpPr/>
+          <p:nvPr/>
+        </p:nvSpPr>
+        <p:spPr>
+          <a:xfrm>
+            <a:off x="4435754" y="2724912"/>
+            <a:ext cx="3320186" cy="10972"/>
+          </a:xfrm>
+          <a:prstGeom prst="rect">
+            <a:avLst/>
+          </a:prstGeom>
+          <a:solidFill>
+            <a:srgbClr val="E2E8F0"/>
+          </a:solidFill>
+          <a:ln>
+            <a:noFill/>
+          </a:ln>
+          <a:effectLst/>
+        </p:spPr>
+        <p:style>
+          <a:lnRef idx="1">
+            <a:schemeClr val="accent1"/>
+          </a:lnRef>
+          <a:fillRef idx="3">
+            <a:schemeClr val="accent1"/>
+          </a:fillRef>
+          <a:effectRef idx="2">
+            <a:schemeClr val="accent1"/>
+          </a:effectRef>
+          <a:fontRef idx="minor">
+            <a:schemeClr val="lt1"/>
+          </a:fontRef>
+        </p:style>
+        <p:txBody>
+          <a:bodyPr rtlCol="0" anchor="ctr"/>
+          <a:lstStyle/>
+          <a:p>
+            <a:pPr algn="ctr"/>
+          </a:p>
+        </p:txBody>
+      </p:sp>
+      <p:sp>
+        <p:nvSpPr>
+          <p:cNvPr id="57" name="TextBox 56"/>
+          <p:cNvSpPr txBox="1"/>
+          <p:nvPr/>
+        </p:nvSpPr>
+        <p:spPr>
+          <a:xfrm>
+            <a:off x="4435754" y="2816352"/>
+            <a:ext cx="3320186" cy="201168"/>
+          </a:xfrm>
+          <a:prstGeom prst="rect">
+            <a:avLst/>
+          </a:prstGeom>
+          <a:noFill/>
+        </p:spPr>
+        <p:txBody>
+          <a:bodyPr wrap="square" anchor="t" lIns="36000" rIns="36000" tIns="18000" bIns="18000">
+            <a:spAutoFit/>
+          </a:bodyPr>
+          <a:lstStyle/>
+          <a:p>
+            <a:pPr algn="l"/>
+            <a:r>
+              <a:rPr sz="1008" b="1" i="0">
+                <a:solidFill>
+                  <a:srgbClr val="3B5174"/>
+                </a:solidFill>
+                <a:latin typeface="Arial"/>
+              </a:rPr>
+              <a:t>Example</a:t>
+            </a:r>
+          </a:p>
+        </p:txBody>
+      </p:sp>
+      <p:sp>
+        <p:nvSpPr>
+          <p:cNvPr id="58" name="TextBox 57"/>
+          <p:cNvSpPr txBox="1"/>
+          <p:nvPr/>
+        </p:nvSpPr>
+        <p:spPr>
+          <a:xfrm>
+            <a:off x="4435754" y="2999232"/>
+            <a:ext cx="3320186" cy="365760"/>
+          </a:xfrm>
+          <a:prstGeom prst="rect">
+            <a:avLst/>
+          </a:prstGeom>
+          <a:noFill/>
+        </p:spPr>
+        <p:txBody>
+          <a:bodyPr wrap="square" anchor="t" lIns="36000" rIns="36000" tIns="18000" bIns="18000">
+            <a:spAutoFit/>
+          </a:bodyPr>
+          <a:lstStyle/>
+          <a:p>
+            <a:pPr algn="l"/>
+            <a:r>
+              <a:rPr sz="1232" b="1" i="0">
+                <a:solidFill>
+                  <a:srgbClr val="475569"/>
+                </a:solidFill>
+                <a:latin typeface="Arial"/>
+              </a:rPr>
+              <a:t>Class A foam / legacy AFFF</a:t>
+            </a:r>
+          </a:p>
+        </p:txBody>
+      </p:sp>
+      <p:sp>
+        <p:nvSpPr>
+          <p:cNvPr id="59" name="TextBox 58"/>
+          <p:cNvSpPr txBox="1"/>
+          <p:nvPr/>
+        </p:nvSpPr>
+        <p:spPr>
+          <a:xfrm>
+            <a:off x="4435754" y="3419856"/>
+            <a:ext cx="3320186" cy="201168"/>
+          </a:xfrm>
+          <a:prstGeom prst="rect">
+            <a:avLst/>
+          </a:prstGeom>
+          <a:noFill/>
+        </p:spPr>
+        <p:txBody>
+          <a:bodyPr wrap="square" anchor="t" lIns="36000" rIns="36000" tIns="18000" bIns="18000">
+            <a:spAutoFit/>
+          </a:bodyPr>
+          <a:lstStyle/>
+          <a:p>
+            <a:pPr algn="l"/>
+            <a:r>
+              <a:rPr sz="1008" b="1" i="0">
+                <a:solidFill>
+                  <a:srgbClr val="64748B"/>
+                </a:solidFill>
+                <a:latin typeface="Arial"/>
+              </a:rPr>
+              <a:t>Composition</a:t>
+            </a:r>
+          </a:p>
+        </p:txBody>
+      </p:sp>
+      <p:sp>
+        <p:nvSpPr>
+          <p:cNvPr id="60" name="TextBox 59"/>
+          <p:cNvSpPr txBox="1"/>
+          <p:nvPr/>
+        </p:nvSpPr>
+        <p:spPr>
+          <a:xfrm>
+            <a:off x="4435754" y="3602736"/>
+            <a:ext cx="3320186" cy="384048"/>
+          </a:xfrm>
+          <a:prstGeom prst="rect">
+            <a:avLst/>
+          </a:prstGeom>
+          <a:noFill/>
+        </p:spPr>
+        <p:txBody>
+          <a:bodyPr wrap="square" anchor="t" lIns="36000" rIns="36000" tIns="18000" bIns="18000">
+            <a:spAutoFit/>
+          </a:bodyPr>
+          <a:lstStyle/>
+          <a:p>
+            <a:pPr algn="l"/>
+            <a:r>
+              <a:rPr sz="1232" b="0" i="0">
+                <a:solidFill>
+                  <a:srgbClr val="475569"/>
+                </a:solidFill>
+                <a:latin typeface="Arial"/>
+              </a:rPr>
+              <a:t>Surfactants (historically fluorinated)</a:t>
+            </a:r>
+          </a:p>
+        </p:txBody>
+      </p:sp>
+      <p:sp>
+        <p:nvSpPr>
+          <p:cNvPr id="61" name="TextBox 60"/>
+          <p:cNvSpPr txBox="1"/>
+          <p:nvPr/>
+        </p:nvSpPr>
+        <p:spPr>
+          <a:xfrm>
+            <a:off x="4435754" y="4041648"/>
+            <a:ext cx="3320186" cy="201168"/>
+          </a:xfrm>
+          <a:prstGeom prst="rect">
+            <a:avLst/>
+          </a:prstGeom>
+          <a:noFill/>
+        </p:spPr>
+        <p:txBody>
+          <a:bodyPr wrap="square" anchor="t" lIns="36000" rIns="36000" tIns="18000" bIns="18000">
+            <a:spAutoFit/>
+          </a:bodyPr>
+          <a:lstStyle/>
+          <a:p>
+            <a:pPr algn="l"/>
+            <a:r>
+              <a:rPr sz="1008" b="1" i="0">
+                <a:solidFill>
+                  <a:srgbClr val="64748B"/>
+                </a:solidFill>
+                <a:latin typeface="Arial"/>
+              </a:rPr>
+              <a:t>Effect / retention</a:t>
+            </a:r>
+          </a:p>
+        </p:txBody>
+      </p:sp>
+      <p:sp>
+        <p:nvSpPr>
+          <p:cNvPr id="62" name="TextBox 61"/>
+          <p:cNvSpPr txBox="1"/>
+          <p:nvPr/>
+        </p:nvSpPr>
+        <p:spPr>
+          <a:xfrm>
+            <a:off x="4435754" y="4224528"/>
+            <a:ext cx="3320186" cy="384048"/>
+          </a:xfrm>
+          <a:prstGeom prst="rect">
+            <a:avLst/>
+          </a:prstGeom>
+          <a:noFill/>
+        </p:spPr>
+        <p:txBody>
+          <a:bodyPr wrap="square" anchor="t" lIns="36000" rIns="36000" tIns="18000" bIns="18000">
+            <a:spAutoFit/>
+          </a:bodyPr>
+          <a:lstStyle/>
+          <a:p>
+            <a:pPr algn="l"/>
+            <a:r>
+              <a:rPr sz="1232" b="0" i="0">
+                <a:solidFill>
+                  <a:srgbClr val="475569"/>
+                </a:solidFill>
+                <a:latin typeface="Arial"/>
+              </a:rPr>
+              <a:t>Water retention 15–30 min (short-term)</a:t>
+            </a:r>
+          </a:p>
+        </p:txBody>
+      </p:sp>
+      <p:sp>
+        <p:nvSpPr>
+          <p:cNvPr id="63" name="TextBox 62"/>
+          <p:cNvSpPr txBox="1"/>
+          <p:nvPr/>
+        </p:nvSpPr>
+        <p:spPr>
+          <a:xfrm>
+            <a:off x="4435754" y="4663440"/>
+            <a:ext cx="3320186" cy="201168"/>
+          </a:xfrm>
+          <a:prstGeom prst="rect">
+            <a:avLst/>
+          </a:prstGeom>
+          <a:noFill/>
+        </p:spPr>
+        <p:txBody>
+          <a:bodyPr wrap="square" anchor="t" lIns="36000" rIns="36000" tIns="18000" bIns="18000">
+            <a:spAutoFit/>
+          </a:bodyPr>
+          <a:lstStyle/>
+          <a:p>
+            <a:pPr algn="l"/>
+            <a:r>
+              <a:rPr sz="1008" b="1" i="0">
+                <a:solidFill>
+                  <a:srgbClr val="A05656"/>
+                </a:solidFill>
+                <a:latin typeface="Arial"/>
+              </a:rPr>
+              <a:t>Limitation</a:t>
+            </a:r>
+          </a:p>
+        </p:txBody>
+      </p:sp>
+      <p:sp>
+        <p:nvSpPr>
+          <p:cNvPr id="64" name="TextBox 63"/>
+          <p:cNvSpPr txBox="1"/>
+          <p:nvPr/>
+        </p:nvSpPr>
+        <p:spPr>
+          <a:xfrm>
+            <a:off x="4435754" y="4846320"/>
+            <a:ext cx="3320186" cy="896112"/>
+          </a:xfrm>
+          <a:prstGeom prst="rect">
+            <a:avLst/>
+          </a:prstGeom>
+          <a:noFill/>
+        </p:spPr>
+        <p:txBody>
+          <a:bodyPr wrap="square" anchor="t" lIns="36000" rIns="36000" tIns="18000" bIns="18000">
+            <a:spAutoFit/>
+          </a:bodyPr>
+          <a:lstStyle/>
+          <a:p>
+            <a:pPr algn="l"/>
+            <a:r>
+              <a:rPr sz="1232" b="1" i="0">
+                <a:solidFill>
+                  <a:srgbClr val="A05656"/>
+                </a:solidFill>
+                <a:latin typeface="Arial"/>
+              </a:rPr>
+              <a:t>Loses effect when dry; fluorinated types bioaccumulate and are toxic</a:t>
+            </a:r>
+          </a:p>
+        </p:txBody>
+      </p:sp>
+      <p:sp>
+        <p:nvSpPr>
+          <p:cNvPr id="65" name="Rounded Rectangle 64"/>
+          <p:cNvSpPr/>
+          <p:nvPr/>
+        </p:nvSpPr>
+        <p:spPr>
+          <a:xfrm>
+            <a:off x="8139988" y="859536"/>
+            <a:ext cx="3685946" cy="5047488"/>
+          </a:xfrm>
+          <a:prstGeom prst="roundRect">
+            <a:avLst>
+              <a:gd name="adj" fmla="val 4000"/>
+            </a:avLst>
+          </a:prstGeom>
+          <a:solidFill>
+            <a:srgbClr val="1E293B"/>
+          </a:solidFill>
+          <a:ln>
+            <a:noFill/>
+          </a:ln>
+          <a:effectLst/>
+        </p:spPr>
+        <p:style>
+          <a:lnRef idx="1">
+            <a:schemeClr val="accent1"/>
+          </a:lnRef>
+          <a:fillRef idx="3">
+            <a:schemeClr val="accent1"/>
+          </a:fillRef>
+          <a:effectRef idx="2">
+            <a:schemeClr val="accent1"/>
+          </a:effectRef>
+          <a:fontRef idx="minor">
+            <a:schemeClr val="lt1"/>
+          </a:fontRef>
+        </p:style>
+        <p:txBody>
+          <a:bodyPr rtlCol="0" anchor="ctr"/>
+          <a:lstStyle/>
+          <a:p>
+            <a:pPr algn="ctr"/>
+          </a:p>
+        </p:txBody>
+      </p:sp>
+      <p:sp>
+        <p:nvSpPr>
+          <p:cNvPr id="66" name="Rectangle 65"/>
+          <p:cNvSpPr/>
+          <p:nvPr/>
+        </p:nvSpPr>
+        <p:spPr>
+          <a:xfrm>
+            <a:off x="8139988" y="859536"/>
+            <a:ext cx="3685946" cy="45720"/>
+          </a:xfrm>
+          <a:prstGeom prst="rect">
+            <a:avLst/>
+          </a:prstGeom>
+          <a:solidFill>
+            <a:srgbClr val="D4A574"/>
+          </a:solidFill>
+          <a:ln>
+            <a:noFill/>
+          </a:ln>
+          <a:effectLst/>
+        </p:spPr>
+        <p:style>
+          <a:lnRef idx="1">
+            <a:schemeClr val="accent1"/>
+          </a:lnRef>
+          <a:fillRef idx="3">
+            <a:schemeClr val="accent1"/>
+          </a:fillRef>
+          <a:effectRef idx="2">
+            <a:schemeClr val="accent1"/>
+          </a:effectRef>
+          <a:fontRef idx="minor">
+            <a:schemeClr val="lt1"/>
+          </a:fontRef>
+        </p:style>
+        <p:txBody>
+          <a:bodyPr rtlCol="0" anchor="ctr"/>
+          <a:lstStyle/>
+          <a:p>
+            <a:pPr algn="ctr"/>
+          </a:p>
+        </p:txBody>
+      </p:sp>
+      <p:sp>
+        <p:nvSpPr>
+          <p:cNvPr id="67" name="Rounded Rectangle 66"/>
+          <p:cNvSpPr/>
+          <p:nvPr/>
+        </p:nvSpPr>
+        <p:spPr>
+          <a:xfrm>
+            <a:off x="8322868" y="1024128"/>
+            <a:ext cx="3320186" cy="1078992"/>
+          </a:xfrm>
+          <a:prstGeom prst="roundRect">
+            <a:avLst>
+              <a:gd name="adj" fmla="val 3000"/>
+            </a:avLst>
+          </a:prstGeom>
+          <a:solidFill>
+            <a:srgbClr val="1E293B"/>
+          </a:solidFill>
+          <a:ln>
+            <a:noFill/>
+          </a:ln>
+          <a:effectLst/>
+        </p:spPr>
+        <p:style>
+          <a:lnRef idx="1">
+            <a:schemeClr val="accent1"/>
+          </a:lnRef>
+          <a:fillRef idx="3">
+            <a:schemeClr val="accent1"/>
+          </a:fillRef>
+          <a:effectRef idx="2">
+            <a:schemeClr val="accent1"/>
+          </a:effectRef>
+          <a:fontRef idx="minor">
+            <a:schemeClr val="lt1"/>
+          </a:fontRef>
+        </p:style>
+        <p:txBody>
+          <a:bodyPr rtlCol="0" anchor="ctr"/>
+          <a:lstStyle/>
+          <a:p>
+            <a:pPr algn="ctr"/>
+          </a:p>
+        </p:txBody>
+      </p:sp>
+      <p:sp>
+        <p:nvSpPr>
+          <p:cNvPr id="68" name="Rectangle 67"/>
+          <p:cNvSpPr/>
+          <p:nvPr/>
+        </p:nvSpPr>
+        <p:spPr>
+          <a:xfrm>
+            <a:off x="8322868" y="1973640"/>
+            <a:ext cx="3320186" cy="129479"/>
+          </a:xfrm>
+          <a:prstGeom prst="rect">
+            <a:avLst/>
+          </a:prstGeom>
+          <a:solidFill>
+            <a:srgbClr val="2E4A38"/>
+          </a:solidFill>
+          <a:ln>
+            <a:noFill/>
+          </a:ln>
+          <a:effectLst/>
+        </p:spPr>
+        <p:style>
+          <a:lnRef idx="1">
+            <a:schemeClr val="accent1"/>
+          </a:lnRef>
+          <a:fillRef idx="3">
+            <a:schemeClr val="accent1"/>
+          </a:fillRef>
+          <a:effectRef idx="2">
+            <a:schemeClr val="accent1"/>
+          </a:effectRef>
+          <a:fontRef idx="minor">
+            <a:schemeClr val="lt1"/>
+          </a:fontRef>
+        </p:style>
+        <p:txBody>
+          <a:bodyPr rtlCol="0" anchor="ctr"/>
+          <a:lstStyle/>
+          <a:p>
+            <a:pPr algn="ctr"/>
+          </a:p>
+        </p:txBody>
+      </p:sp>
+      <p:sp>
+        <p:nvSpPr>
+          <p:cNvPr id="69" name="Oval 68"/>
+          <p:cNvSpPr/>
+          <p:nvPr/>
+        </p:nvSpPr>
+        <p:spPr>
+          <a:xfrm>
+            <a:off x="9352126" y="1477304"/>
+            <a:ext cx="1261670" cy="561075"/>
+          </a:xfrm>
+          <a:prstGeom prst="ellipse">
+            <a:avLst/>
+          </a:prstGeom>
+          <a:solidFill>
+            <a:srgbClr val="4AAA92"/>
+          </a:solidFill>
+          <a:ln>
+            <a:noFill/>
+          </a:ln>
+          <a:effectLst/>
+        </p:spPr>
+        <p:style>
+          <a:lnRef idx="1">
+            <a:schemeClr val="accent1"/>
+          </a:lnRef>
+          <a:fillRef idx="3">
+            <a:schemeClr val="accent1"/>
+          </a:fillRef>
+          <a:effectRef idx="2">
+            <a:schemeClr val="accent1"/>
+          </a:effectRef>
+          <a:fontRef idx="minor">
+            <a:schemeClr val="lt1"/>
+          </a:fontRef>
+        </p:style>
+        <p:txBody>
+          <a:bodyPr rtlCol="0" anchor="ctr"/>
+          <a:lstStyle/>
+          <a:p>
+            <a:pPr algn="ctr"/>
+          </a:p>
+        </p:txBody>
+      </p:sp>
+      <p:sp>
+        <p:nvSpPr>
+          <p:cNvPr id="70" name="Rectangle 69"/>
+          <p:cNvSpPr/>
+          <p:nvPr/>
+        </p:nvSpPr>
+        <p:spPr>
+          <a:xfrm>
+            <a:off x="9451732" y="1542044"/>
+            <a:ext cx="1062459" cy="431596"/>
+          </a:xfrm>
+          <a:prstGeom prst="rect">
+            <a:avLst/>
+          </a:prstGeom>
+          <a:solidFill>
+            <a:srgbClr val="E8F0F8"/>
+          </a:solidFill>
+          <a:ln>
+            <a:noFill/>
+          </a:ln>
+          <a:effectLst/>
+        </p:spPr>
+        <p:style>
+          <a:lnRef idx="1">
+            <a:schemeClr val="accent1"/>
+          </a:lnRef>
+          <a:fillRef idx="3">
+            <a:schemeClr val="accent1"/>
+          </a:fillRef>
+          <a:effectRef idx="2">
+            <a:schemeClr val="accent1"/>
+          </a:effectRef>
+          <a:fontRef idx="minor">
+            <a:schemeClr val="lt1"/>
+          </a:fontRef>
+        </p:style>
+        <p:txBody>
+          <a:bodyPr rtlCol="0" anchor="ctr"/>
+          <a:lstStyle/>
+          <a:p>
+            <a:pPr algn="ctr"/>
+          </a:p>
+        </p:txBody>
+      </p:sp>
+      <p:sp>
+        <p:nvSpPr>
+          <p:cNvPr id="71" name="Isosceles Triangle 70"/>
+          <p:cNvSpPr/>
+          <p:nvPr/>
+        </p:nvSpPr>
+        <p:spPr>
+          <a:xfrm>
+            <a:off x="9385328" y="1218346"/>
+            <a:ext cx="1195267" cy="345277"/>
+          </a:xfrm>
+          <a:prstGeom prst="triangle">
+            <a:avLst/>
+          </a:prstGeom>
+          <a:solidFill>
+            <a:srgbClr val="CCD8E8"/>
+          </a:solidFill>
+          <a:ln>
+            <a:noFill/>
+          </a:ln>
+          <a:effectLst/>
+        </p:spPr>
+        <p:style>
+          <a:lnRef idx="1">
+            <a:schemeClr val="accent1"/>
+          </a:lnRef>
+          <a:fillRef idx="3">
+            <a:schemeClr val="accent1"/>
+          </a:fillRef>
+          <a:effectRef idx="2">
+            <a:schemeClr val="accent1"/>
+          </a:effectRef>
+          <a:fontRef idx="minor">
+            <a:schemeClr val="lt1"/>
+          </a:fontRef>
+        </p:style>
+        <p:txBody>
+          <a:bodyPr rtlCol="0" anchor="ctr"/>
+          <a:lstStyle/>
+          <a:p>
+            <a:pPr algn="ctr"/>
+          </a:p>
+        </p:txBody>
+      </p:sp>
+      <p:sp>
+        <p:nvSpPr>
+          <p:cNvPr id="72" name="Rectangle 71"/>
+          <p:cNvSpPr/>
+          <p:nvPr/>
+        </p:nvSpPr>
+        <p:spPr>
+          <a:xfrm>
+            <a:off x="9557977" y="1602467"/>
+            <a:ext cx="276239" cy="129479"/>
+          </a:xfrm>
+          <a:prstGeom prst="rect">
+            <a:avLst/>
+          </a:prstGeom>
+          <a:solidFill>
+            <a:srgbClr val="70AACC"/>
+          </a:solidFill>
+          <a:ln>
+            <a:noFill/>
+          </a:ln>
+          <a:effectLst/>
+        </p:spPr>
+        <p:style>
+          <a:lnRef idx="1">
+            <a:schemeClr val="accent1"/>
+          </a:lnRef>
+          <a:fillRef idx="3">
+            <a:schemeClr val="accent1"/>
+          </a:fillRef>
+          <a:effectRef idx="2">
+            <a:schemeClr val="accent1"/>
+          </a:effectRef>
+          <a:fontRef idx="minor">
+            <a:schemeClr val="lt1"/>
+          </a:fontRef>
+        </p:style>
+        <p:txBody>
+          <a:bodyPr rtlCol="0" anchor="ctr"/>
+          <a:lstStyle/>
+          <a:p>
+            <a:pPr algn="ctr"/>
+          </a:p>
+        </p:txBody>
+      </p:sp>
+      <p:sp>
+        <p:nvSpPr>
+          <p:cNvPr id="73" name="Rectangle 72"/>
+          <p:cNvSpPr/>
+          <p:nvPr/>
+        </p:nvSpPr>
+        <p:spPr>
+          <a:xfrm>
+            <a:off x="10089207" y="1602467"/>
+            <a:ext cx="276239" cy="129479"/>
+          </a:xfrm>
+          <a:prstGeom prst="rect">
+            <a:avLst/>
+          </a:prstGeom>
+          <a:solidFill>
+            <a:srgbClr val="70AACC"/>
+          </a:solidFill>
+          <a:ln>
+            <a:noFill/>
+          </a:ln>
+          <a:effectLst/>
+        </p:spPr>
+        <p:style>
+          <a:lnRef idx="1">
+            <a:schemeClr val="accent1"/>
+          </a:lnRef>
+          <a:fillRef idx="3">
+            <a:schemeClr val="accent1"/>
+          </a:fillRef>
+          <a:effectRef idx="2">
+            <a:schemeClr val="accent1"/>
+          </a:effectRef>
+          <a:fontRef idx="minor">
+            <a:schemeClr val="lt1"/>
+          </a:fontRef>
+        </p:style>
+        <p:txBody>
+          <a:bodyPr rtlCol="0" anchor="ctr"/>
+          <a:lstStyle/>
+          <a:p>
+            <a:pPr algn="ctr"/>
+          </a:p>
+        </p:txBody>
+      </p:sp>
+      <p:sp>
+        <p:nvSpPr>
+          <p:cNvPr id="74" name="Rectangle 73"/>
+          <p:cNvSpPr/>
+          <p:nvPr/>
+        </p:nvSpPr>
+        <p:spPr>
+          <a:xfrm>
+            <a:off x="9834217" y="1792370"/>
+            <a:ext cx="297488" cy="181270"/>
+          </a:xfrm>
+          <a:prstGeom prst="rect">
+            <a:avLst/>
+          </a:prstGeom>
+          <a:solidFill>
+            <a:srgbClr val="70AACC"/>
+          </a:solidFill>
+          <a:ln>
+            <a:noFill/>
+          </a:ln>
+          <a:effectLst/>
+        </p:spPr>
+        <p:style>
+          <a:lnRef idx="1">
+            <a:schemeClr val="accent1"/>
+          </a:lnRef>
+          <a:fillRef idx="3">
+            <a:schemeClr val="accent1"/>
+          </a:fillRef>
+          <a:effectRef idx="2">
+            <a:schemeClr val="accent1"/>
+          </a:effectRef>
+          <a:fontRef idx="minor">
+            <a:schemeClr val="lt1"/>
+          </a:fontRef>
+        </p:style>
+        <p:txBody>
+          <a:bodyPr rtlCol="0" anchor="ctr"/>
+          <a:lstStyle/>
+          <a:p>
+            <a:pPr algn="ctr"/>
+          </a:p>
+        </p:txBody>
+      </p:sp>
+      <p:sp>
+        <p:nvSpPr>
+          <p:cNvPr id="75" name="Oval 74"/>
+          <p:cNvSpPr/>
+          <p:nvPr/>
+        </p:nvSpPr>
+        <p:spPr>
+          <a:xfrm>
+            <a:off x="8654887" y="1239926"/>
+            <a:ext cx="92965" cy="82003"/>
+          </a:xfrm>
+          <a:prstGeom prst="ellipse">
+            <a:avLst/>
+          </a:prstGeom>
+          <a:solidFill>
+            <a:srgbClr val="38907A"/>
+          </a:solidFill>
+          <a:ln>
+            <a:noFill/>
+          </a:ln>
+          <a:effectLst/>
+        </p:spPr>
+        <p:style>
+          <a:lnRef idx="1">
+            <a:schemeClr val="accent1"/>
+          </a:lnRef>
+          <a:fillRef idx="3">
+            <a:schemeClr val="accent1"/>
+          </a:fillRef>
+          <a:effectRef idx="2">
+            <a:schemeClr val="accent1"/>
+          </a:effectRef>
+          <a:fontRef idx="minor">
+            <a:schemeClr val="lt1"/>
+          </a:fontRef>
+        </p:style>
+        <p:txBody>
+          <a:bodyPr rtlCol="0" anchor="ctr"/>
+          <a:lstStyle/>
+          <a:p>
+            <a:pPr algn="ctr"/>
+          </a:p>
+        </p:txBody>
+      </p:sp>
+      <p:sp>
+        <p:nvSpPr>
+          <p:cNvPr id="76" name="Oval 75"/>
+          <p:cNvSpPr/>
+          <p:nvPr/>
+        </p:nvSpPr>
+        <p:spPr>
+          <a:xfrm>
+            <a:off x="8820896" y="1477304"/>
+            <a:ext cx="79684" cy="69055"/>
+          </a:xfrm>
+          <a:prstGeom prst="ellipse">
+            <a:avLst/>
+          </a:prstGeom>
+          <a:solidFill>
+            <a:srgbClr val="38907A"/>
+          </a:solidFill>
+          <a:ln>
+            <a:noFill/>
+          </a:ln>
+          <a:effectLst/>
+        </p:spPr>
+        <p:style>
+          <a:lnRef idx="1">
+            <a:schemeClr val="accent1"/>
+          </a:lnRef>
+          <a:fillRef idx="3">
+            <a:schemeClr val="accent1"/>
+          </a:fillRef>
+          <a:effectRef idx="2">
+            <a:schemeClr val="accent1"/>
+          </a:effectRef>
+          <a:fontRef idx="minor">
+            <a:schemeClr val="lt1"/>
+          </a:fontRef>
+        </p:style>
+        <p:txBody>
+          <a:bodyPr rtlCol="0" anchor="ctr"/>
+          <a:lstStyle/>
+          <a:p>
+            <a:pPr algn="ctr"/>
+          </a:p>
+        </p:txBody>
+      </p:sp>
+      <p:sp>
+        <p:nvSpPr>
+          <p:cNvPr id="77" name="Oval 76"/>
+          <p:cNvSpPr/>
+          <p:nvPr/>
+        </p:nvSpPr>
+        <p:spPr>
+          <a:xfrm>
+            <a:off x="8986905" y="1347825"/>
+            <a:ext cx="86324" cy="75529"/>
+          </a:xfrm>
+          <a:prstGeom prst="ellipse">
+            <a:avLst/>
+          </a:prstGeom>
+          <a:solidFill>
+            <a:srgbClr val="38907A"/>
+          </a:solidFill>
+          <a:ln>
+            <a:noFill/>
+          </a:ln>
+          <a:effectLst/>
+        </p:spPr>
+        <p:style>
+          <a:lnRef idx="1">
+            <a:schemeClr val="accent1"/>
+          </a:lnRef>
+          <a:fillRef idx="3">
+            <a:schemeClr val="accent1"/>
+          </a:fillRef>
+          <a:effectRef idx="2">
+            <a:schemeClr val="accent1"/>
+          </a:effectRef>
+          <a:fontRef idx="minor">
+            <a:schemeClr val="lt1"/>
+          </a:fontRef>
+        </p:style>
+        <p:txBody>
+          <a:bodyPr rtlCol="0" anchor="ctr"/>
+          <a:lstStyle/>
+          <a:p>
+            <a:pPr algn="ctr"/>
+          </a:p>
+        </p:txBody>
+      </p:sp>
+      <p:sp>
+        <p:nvSpPr>
+          <p:cNvPr id="78" name="Oval 77"/>
+          <p:cNvSpPr/>
+          <p:nvPr/>
+        </p:nvSpPr>
+        <p:spPr>
+          <a:xfrm>
+            <a:off x="10979017" y="1261506"/>
+            <a:ext cx="86324" cy="79845"/>
+          </a:xfrm>
+          <a:prstGeom prst="ellipse">
+            <a:avLst/>
+          </a:prstGeom>
+          <a:solidFill>
+            <a:srgbClr val="38907A"/>
+          </a:solidFill>
+          <a:ln>
+            <a:noFill/>
+          </a:ln>
+          <a:effectLst/>
+        </p:spPr>
+        <p:style>
+          <a:lnRef idx="1">
+            <a:schemeClr val="accent1"/>
+          </a:lnRef>
+          <a:fillRef idx="3">
+            <a:schemeClr val="accent1"/>
+          </a:fillRef>
+          <a:effectRef idx="2">
+            <a:schemeClr val="accent1"/>
+          </a:effectRef>
+          <a:fontRef idx="minor">
+            <a:schemeClr val="lt1"/>
+          </a:fontRef>
+        </p:style>
+        <p:txBody>
+          <a:bodyPr rtlCol="0" anchor="ctr"/>
+          <a:lstStyle/>
+          <a:p>
+            <a:pPr algn="ctr"/>
+          </a:p>
+        </p:txBody>
+      </p:sp>
+      <p:sp>
+        <p:nvSpPr>
+          <p:cNvPr id="79" name="Oval 78"/>
+          <p:cNvSpPr/>
+          <p:nvPr/>
+        </p:nvSpPr>
+        <p:spPr>
+          <a:xfrm>
+            <a:off x="11111825" y="1477304"/>
+            <a:ext cx="79684" cy="71213"/>
+          </a:xfrm>
+          <a:prstGeom prst="ellipse">
+            <a:avLst/>
+          </a:prstGeom>
+          <a:solidFill>
+            <a:srgbClr val="38907A"/>
+          </a:solidFill>
+          <a:ln>
+            <a:noFill/>
+          </a:ln>
+          <a:effectLst/>
+        </p:spPr>
+        <p:style>
+          <a:lnRef idx="1">
+            <a:schemeClr val="accent1"/>
+          </a:lnRef>
+          <a:fillRef idx="3">
+            <a:schemeClr val="accent1"/>
+          </a:fillRef>
+          <a:effectRef idx="2">
+            <a:schemeClr val="accent1"/>
+          </a:effectRef>
+          <a:fontRef idx="minor">
+            <a:schemeClr val="lt1"/>
+          </a:fontRef>
+        </p:style>
+        <p:txBody>
+          <a:bodyPr rtlCol="0" anchor="ctr"/>
+          <a:lstStyle/>
+          <a:p>
+            <a:pPr algn="ctr"/>
+          </a:p>
+        </p:txBody>
+      </p:sp>
+      <p:sp>
+        <p:nvSpPr>
+          <p:cNvPr id="80" name="Oval 79"/>
+          <p:cNvSpPr/>
+          <p:nvPr/>
+        </p:nvSpPr>
+        <p:spPr>
+          <a:xfrm>
+            <a:off x="10846210" y="1606783"/>
+            <a:ext cx="92965" cy="75529"/>
+          </a:xfrm>
+          <a:prstGeom prst="ellipse">
+            <a:avLst/>
+          </a:prstGeom>
+          <a:solidFill>
+            <a:srgbClr val="38907A"/>
+          </a:solidFill>
+          <a:ln>
+            <a:noFill/>
+          </a:ln>
+          <a:effectLst/>
+        </p:spPr>
+        <p:style>
+          <a:lnRef idx="1">
+            <a:schemeClr val="accent1"/>
+          </a:lnRef>
+          <a:fillRef idx="3">
+            <a:schemeClr val="accent1"/>
+          </a:fillRef>
+          <a:effectRef idx="2">
+            <a:schemeClr val="accent1"/>
+          </a:effectRef>
+          <a:fontRef idx="minor">
+            <a:schemeClr val="lt1"/>
+          </a:fontRef>
+        </p:style>
+        <p:txBody>
+          <a:bodyPr rtlCol="0" anchor="ctr"/>
+          <a:lstStyle/>
+          <a:p>
+            <a:pPr algn="ctr"/>
+          </a:p>
+        </p:txBody>
+      </p:sp>
+      <p:sp>
+        <p:nvSpPr>
+          <p:cNvPr id="81" name="TextBox 80"/>
+          <p:cNvSpPr txBox="1"/>
+          <p:nvPr/>
+        </p:nvSpPr>
+        <p:spPr>
+          <a:xfrm>
+            <a:off x="8322868" y="2212848"/>
+            <a:ext cx="3320186" cy="365760"/>
+          </a:xfrm>
+          <a:prstGeom prst="rect">
+            <a:avLst/>
+          </a:prstGeom>
+          <a:noFill/>
+        </p:spPr>
+        <p:txBody>
+          <a:bodyPr wrap="square" anchor="t" lIns="36000" rIns="36000" tIns="18000" bIns="18000">
+            <a:spAutoFit/>
+          </a:bodyPr>
+          <a:lstStyle/>
+          <a:p>
+            <a:pPr algn="l"/>
+            <a:r>
+              <a:rPr sz="1680" b="1" i="0">
+                <a:solidFill>
+                  <a:srgbClr val="FFFFFF"/>
+                </a:solidFill>
+                <a:latin typeface="Arial"/>
+              </a:rPr>
+              <a:t>Water-enhancing gel (WEG)</a:t>
+            </a:r>
+          </a:p>
+        </p:txBody>
+      </p:sp>
+      <p:sp>
+        <p:nvSpPr>
+          <p:cNvPr id="82" name="Rectangle 81"/>
+          <p:cNvSpPr/>
+          <p:nvPr/>
+        </p:nvSpPr>
+        <p:spPr>
+          <a:xfrm>
+            <a:off x="8322868" y="2724912"/>
+            <a:ext cx="3320186" cy="10972"/>
+          </a:xfrm>
+          <a:prstGeom prst="rect">
+            <a:avLst/>
+          </a:prstGeom>
+          <a:solidFill>
+            <a:srgbClr val="445870"/>
+          </a:solidFill>
+          <a:ln>
+            <a:noFill/>
+          </a:ln>
+          <a:effectLst/>
+        </p:spPr>
+        <p:style>
+          <a:lnRef idx="1">
+            <a:schemeClr val="accent1"/>
+          </a:lnRef>
+          <a:fillRef idx="3">
+            <a:schemeClr val="accent1"/>
+          </a:fillRef>
+          <a:effectRef idx="2">
+            <a:schemeClr val="accent1"/>
+          </a:effectRef>
+          <a:fontRef idx="minor">
+            <a:schemeClr val="lt1"/>
+          </a:fontRef>
+        </p:style>
+        <p:txBody>
+          <a:bodyPr rtlCol="0" anchor="ctr"/>
+          <a:lstStyle/>
+          <a:p>
+            <a:pPr algn="ctr"/>
+          </a:p>
+        </p:txBody>
+      </p:sp>
+      <p:sp>
+        <p:nvSpPr>
+          <p:cNvPr id="83" name="TextBox 82"/>
+          <p:cNvSpPr txBox="1"/>
+          <p:nvPr/>
+        </p:nvSpPr>
+        <p:spPr>
+          <a:xfrm>
+            <a:off x="8322868" y="2816352"/>
+            <a:ext cx="3320186" cy="201168"/>
+          </a:xfrm>
+          <a:prstGeom prst="rect">
+            <a:avLst/>
+          </a:prstGeom>
+          <a:noFill/>
+        </p:spPr>
+        <p:txBody>
+          <a:bodyPr wrap="square" anchor="t" lIns="36000" rIns="36000" tIns="18000" bIns="18000">
+            <a:spAutoFit/>
+          </a:bodyPr>
+          <a:lstStyle/>
+          <a:p>
+            <a:pPr algn="l"/>
+            <a:r>
+              <a:rPr sz="1008" b="1" i="0">
+                <a:solidFill>
+                  <a:srgbClr val="D4A574"/>
+                </a:solidFill>
+                <a:latin typeface="Arial"/>
+              </a:rPr>
+              <a:t>Example</a:t>
+            </a:r>
+          </a:p>
+        </p:txBody>
+      </p:sp>
+      <p:sp>
+        <p:nvSpPr>
+          <p:cNvPr id="84" name="TextBox 83"/>
+          <p:cNvSpPr txBox="1"/>
+          <p:nvPr/>
+        </p:nvSpPr>
+        <p:spPr>
+          <a:xfrm>
+            <a:off x="8322868" y="2999232"/>
+            <a:ext cx="3320186" cy="365760"/>
+          </a:xfrm>
+          <a:prstGeom prst="rect">
+            <a:avLst/>
+          </a:prstGeom>
+          <a:noFill/>
+        </p:spPr>
+        <p:txBody>
+          <a:bodyPr wrap="square" anchor="t" lIns="36000" rIns="36000" tIns="18000" bIns="18000">
+            <a:spAutoFit/>
+          </a:bodyPr>
+          <a:lstStyle/>
+          <a:p>
+            <a:pPr algn="l"/>
+            <a:r>
+              <a:rPr sz="1232" b="1" i="0">
+                <a:solidFill>
+                  <a:srgbClr val="D8E2EE"/>
+                </a:solidFill>
+                <a:latin typeface="Arial"/>
+              </a:rPr>
+              <a:t>Barricade / Thermo-Gel / AquaGel-K</a:t>
+            </a:r>
+          </a:p>
+        </p:txBody>
+      </p:sp>
+      <p:sp>
+        <p:nvSpPr>
+          <p:cNvPr id="85" name="TextBox 84"/>
+          <p:cNvSpPr txBox="1"/>
+          <p:nvPr/>
+        </p:nvSpPr>
+        <p:spPr>
+          <a:xfrm>
+            <a:off x="8322868" y="3419856"/>
+            <a:ext cx="3320186" cy="201168"/>
+          </a:xfrm>
+          <a:prstGeom prst="rect">
+            <a:avLst/>
+          </a:prstGeom>
+          <a:noFill/>
+        </p:spPr>
+        <p:txBody>
+          <a:bodyPr wrap="square" anchor="t" lIns="36000" rIns="36000" tIns="18000" bIns="18000">
+            <a:spAutoFit/>
+          </a:bodyPr>
+          <a:lstStyle/>
+          <a:p>
+            <a:pPr algn="l"/>
+            <a:r>
+              <a:rPr sz="1008" b="1" i="0">
+                <a:solidFill>
+                  <a:srgbClr val="88A0B8"/>
+                </a:solidFill>
+                <a:latin typeface="Arial"/>
+              </a:rPr>
+              <a:t>Composition</a:t>
+            </a:r>
+          </a:p>
+        </p:txBody>
+      </p:sp>
+      <p:sp>
+        <p:nvSpPr>
+          <p:cNvPr id="86" name="TextBox 85"/>
+          <p:cNvSpPr txBox="1"/>
+          <p:nvPr/>
+        </p:nvSpPr>
+        <p:spPr>
+          <a:xfrm>
+            <a:off x="8322868" y="3602736"/>
+            <a:ext cx="3320186" cy="384048"/>
+          </a:xfrm>
+          <a:prstGeom prst="rect">
+            <a:avLst/>
+          </a:prstGeom>
+          <a:noFill/>
+        </p:spPr>
+        <p:txBody>
+          <a:bodyPr wrap="square" anchor="t" lIns="36000" rIns="36000" tIns="18000" bIns="18000">
+            <a:spAutoFit/>
+          </a:bodyPr>
+          <a:lstStyle/>
+          <a:p>
+            <a:pPr algn="l"/>
+            <a:r>
+              <a:rPr sz="1232" b="0" i="0">
+                <a:solidFill>
+                  <a:srgbClr val="D8E2EE"/>
+                </a:solidFill>
+                <a:latin typeface="Arial"/>
+              </a:rPr>
+              <a:t>Superabsorbent polymer (eco-friendly)</a:t>
+            </a:r>
+          </a:p>
+        </p:txBody>
+      </p:sp>
+      <p:sp>
+        <p:nvSpPr>
+          <p:cNvPr id="87" name="TextBox 86"/>
+          <p:cNvSpPr txBox="1"/>
+          <p:nvPr/>
+        </p:nvSpPr>
+        <p:spPr>
+          <a:xfrm>
+            <a:off x="8322868" y="4041648"/>
+            <a:ext cx="3320186" cy="201168"/>
+          </a:xfrm>
+          <a:prstGeom prst="rect">
+            <a:avLst/>
+          </a:prstGeom>
+          <a:noFill/>
+        </p:spPr>
+        <p:txBody>
+          <a:bodyPr wrap="square" anchor="t" lIns="36000" rIns="36000" tIns="18000" bIns="18000">
+            <a:spAutoFit/>
+          </a:bodyPr>
+          <a:lstStyle/>
+          <a:p>
+            <a:pPr algn="l"/>
+            <a:r>
+              <a:rPr sz="1008" b="1" i="0">
+                <a:solidFill>
+                  <a:srgbClr val="88A0B8"/>
+                </a:solidFill>
+                <a:latin typeface="Arial"/>
+              </a:rPr>
+              <a:t>Effect / retention</a:t>
+            </a:r>
+          </a:p>
+        </p:txBody>
+      </p:sp>
+      <p:sp>
+        <p:nvSpPr>
+          <p:cNvPr id="88" name="TextBox 87"/>
+          <p:cNvSpPr txBox="1"/>
+          <p:nvPr/>
+        </p:nvSpPr>
+        <p:spPr>
+          <a:xfrm>
+            <a:off x="8322868" y="4224528"/>
+            <a:ext cx="3320186" cy="384048"/>
+          </a:xfrm>
+          <a:prstGeom prst="rect">
+            <a:avLst/>
+          </a:prstGeom>
+          <a:noFill/>
+        </p:spPr>
+        <p:txBody>
+          <a:bodyPr wrap="square" anchor="t" lIns="36000" rIns="36000" tIns="18000" bIns="18000">
+            <a:spAutoFit/>
+          </a:bodyPr>
+          <a:lstStyle/>
+          <a:p>
+            <a:pPr algn="l"/>
+            <a:r>
+              <a:rPr sz="1232" b="0" i="0">
+                <a:solidFill>
+                  <a:srgbClr val="D8E2EE"/>
+                </a:solidFill>
+                <a:latin typeface="Arial"/>
+              </a:rPr>
+              <a:t>Water retention 30–60 min; protects buildings</a:t>
+            </a:r>
+          </a:p>
+        </p:txBody>
+      </p:sp>
+      <p:sp>
+        <p:nvSpPr>
+          <p:cNvPr id="89" name="TextBox 88"/>
+          <p:cNvSpPr txBox="1"/>
+          <p:nvPr/>
+        </p:nvSpPr>
+        <p:spPr>
+          <a:xfrm>
+            <a:off x="8322868" y="4663440"/>
+            <a:ext cx="3320186" cy="201168"/>
+          </a:xfrm>
+          <a:prstGeom prst="rect">
+            <a:avLst/>
+          </a:prstGeom>
+          <a:noFill/>
+        </p:spPr>
+        <p:txBody>
+          <a:bodyPr wrap="square" anchor="t" lIns="36000" rIns="36000" tIns="18000" bIns="18000">
+            <a:spAutoFit/>
+          </a:bodyPr>
+          <a:lstStyle/>
+          <a:p>
+            <a:pPr algn="l"/>
+            <a:r>
+              <a:rPr sz="1008" b="1" i="0">
+                <a:solidFill>
+                  <a:srgbClr val="D4A574"/>
+                </a:solidFill>
+                <a:latin typeface="Arial"/>
+              </a:rPr>
+              <a:t>Limitation</a:t>
+            </a:r>
+          </a:p>
+        </p:txBody>
+      </p:sp>
+      <p:sp>
+        <p:nvSpPr>
+          <p:cNvPr id="90" name="TextBox 89"/>
+          <p:cNvSpPr txBox="1"/>
+          <p:nvPr/>
+        </p:nvSpPr>
+        <p:spPr>
+          <a:xfrm>
+            <a:off x="8322868" y="4846320"/>
+            <a:ext cx="3320186" cy="896112"/>
+          </a:xfrm>
+          <a:prstGeom prst="rect">
+            <a:avLst/>
+          </a:prstGeom>
+          <a:noFill/>
+        </p:spPr>
+        <p:txBody>
+          <a:bodyPr wrap="square" anchor="t" lIns="36000" rIns="36000" tIns="18000" bIns="18000">
+            <a:spAutoFit/>
+          </a:bodyPr>
+          <a:lstStyle/>
+          <a:p>
+            <a:pPr algn="l"/>
+            <a:r>
+              <a:rPr sz="1232" b="1" i="0">
+                <a:solidFill>
+                  <a:srgbClr val="FFFFFF"/>
+                </a:solidFill>
+                <a:latin typeface="Arial"/>
+              </a:rPr>
+              <a:t>Once dried by heat/wind, effectiveness is completely lost</a:t>
+            </a:r>
+          </a:p>
+        </p:txBody>
+      </p:sp>
+      <p:sp>
+        <p:nvSpPr>
+          <p:cNvPr id="91" name="Rounded Rectangle 90"/>
+          <p:cNvSpPr/>
+          <p:nvPr/>
+        </p:nvSpPr>
+        <p:spPr>
+          <a:xfrm>
+            <a:off x="365760" y="6053328"/>
+            <a:ext cx="11460175" cy="457200"/>
+          </a:xfrm>
+          <a:prstGeom prst="roundRect">
+            <a:avLst>
+              <a:gd name="adj" fmla="val 4000"/>
+            </a:avLst>
+          </a:prstGeom>
+          <a:solidFill>
+            <a:srgbClr val="F8FAFC"/>
+          </a:solidFill>
+          <a:ln>
+            <a:noFill/>
+          </a:ln>
+          <a:effectLst/>
+        </p:spPr>
+        <p:style>
+          <a:lnRef idx="1">
+            <a:schemeClr val="accent1"/>
+          </a:lnRef>
+          <a:fillRef idx="3">
+            <a:schemeClr val="accent1"/>
+          </a:fillRef>
+          <a:effectRef idx="2">
+            <a:schemeClr val="accent1"/>
+          </a:effectRef>
+          <a:fontRef idx="minor">
+            <a:schemeClr val="lt1"/>
+          </a:fontRef>
+        </p:style>
+        <p:txBody>
+          <a:bodyPr rtlCol="0" anchor="ctr"/>
+          <a:lstStyle/>
+          <a:p>
+            <a:pPr algn="ctr"/>
+          </a:p>
+        </p:txBody>
+      </p:sp>
+      <p:sp>
+        <p:nvSpPr>
+          <p:cNvPr id="92" name="Rectangle 91"/>
+          <p:cNvSpPr/>
+          <p:nvPr/>
+        </p:nvSpPr>
+        <p:spPr>
+          <a:xfrm>
+            <a:off x="365760" y="6053328"/>
+            <a:ext cx="54864" cy="457200"/>
           </a:xfrm>
           <a:prstGeom prst="rect">
             <a:avLst/>
@@ -55560,1137 +58190,7 @@
       </p:sp>
       <p:sp>
         <p:nvSpPr>
-          <p:cNvPr id="30" name="TextBox 29"/>
-          <p:cNvSpPr txBox="1"/>
-          <p:nvPr/>
-        </p:nvSpPr>
-        <p:spPr>
-          <a:xfrm>
-            <a:off x="4508906" y="1097280"/>
-            <a:ext cx="640080" cy="237744"/>
-          </a:xfrm>
-          <a:prstGeom prst="rect">
-            <a:avLst/>
-          </a:prstGeom>
-          <a:noFill/>
-        </p:spPr>
-        <p:txBody>
-          <a:bodyPr wrap="square" anchor="ctr" lIns="36000" rIns="36000" tIns="18000" bIns="18000">
-            <a:spAutoFit/>
-          </a:bodyPr>
-          <a:lstStyle/>
-          <a:p>
-            <a:pPr algn="ctr"/>
-            <a:r>
-              <a:rPr sz="1008" b="1" i="0">
-                <a:solidFill>
-                  <a:srgbClr val="FFFFFF"/>
-                </a:solidFill>
-                <a:latin typeface="Arial"/>
-              </a:rPr>
-              <a:t>Photo</a:t>
-            </a:r>
-          </a:p>
-        </p:txBody>
-      </p:sp>
-      <p:sp>
-        <p:nvSpPr>
-          <p:cNvPr id="31" name="TextBox 30"/>
-          <p:cNvSpPr txBox="1"/>
-          <p:nvPr/>
-        </p:nvSpPr>
-        <p:spPr>
-          <a:xfrm>
-            <a:off x="4435754" y="1298448"/>
-            <a:ext cx="3320186" cy="512064"/>
-          </a:xfrm>
-          <a:prstGeom prst="rect">
-            <a:avLst/>
-          </a:prstGeom>
-          <a:noFill/>
-        </p:spPr>
-        <p:txBody>
-          <a:bodyPr wrap="square" anchor="ctr" lIns="36000" rIns="36000" tIns="18000" bIns="18000">
-            <a:spAutoFit/>
-          </a:bodyPr>
-          <a:lstStyle/>
-          <a:p>
-            <a:pPr algn="ctr"/>
-            <a:r>
-              <a:rPr sz="1120" b="0" i="0">
-                <a:solidFill>
-                  <a:srgbClr val="AAB4C0"/>
-                </a:solidFill>
-                <a:latin typeface="Arial"/>
-              </a:rPr>
-              <a:t>Foam discharge from a fire hose</a:t>
-            </a:r>
-          </a:p>
-        </p:txBody>
-      </p:sp>
-      <p:sp>
-        <p:nvSpPr>
-          <p:cNvPr id="32" name="TextBox 31"/>
-          <p:cNvSpPr txBox="1"/>
-          <p:nvPr/>
-        </p:nvSpPr>
-        <p:spPr>
-          <a:xfrm>
-            <a:off x="4435754" y="2212848"/>
-            <a:ext cx="3320186" cy="365760"/>
-          </a:xfrm>
-          <a:prstGeom prst="rect">
-            <a:avLst/>
-          </a:prstGeom>
-          <a:noFill/>
-        </p:spPr>
-        <p:txBody>
-          <a:bodyPr wrap="square" anchor="t" lIns="36000" rIns="36000" tIns="18000" bIns="18000">
-            <a:spAutoFit/>
-          </a:bodyPr>
-          <a:lstStyle/>
-          <a:p>
-            <a:pPr algn="l"/>
-            <a:r>
-              <a:rPr sz="1680" b="1" i="0">
-                <a:solidFill>
-                  <a:srgbClr val="1E293B"/>
-                </a:solidFill>
-                <a:latin typeface="Arial"/>
-              </a:rPr>
-              <a:t>Foam suppressant</a:t>
-            </a:r>
-          </a:p>
-        </p:txBody>
-      </p:sp>
-      <p:sp>
-        <p:nvSpPr>
-          <p:cNvPr id="33" name="Rectangle 32"/>
-          <p:cNvSpPr/>
-          <p:nvPr/>
-        </p:nvSpPr>
-        <p:spPr>
-          <a:xfrm>
-            <a:off x="4435754" y="2724912"/>
-            <a:ext cx="3320186" cy="10972"/>
-          </a:xfrm>
-          <a:prstGeom prst="rect">
-            <a:avLst/>
-          </a:prstGeom>
-          <a:solidFill>
-            <a:srgbClr val="E2E8F0"/>
-          </a:solidFill>
-          <a:ln>
-            <a:noFill/>
-          </a:ln>
-          <a:effectLst/>
-        </p:spPr>
-        <p:style>
-          <a:lnRef idx="1">
-            <a:schemeClr val="accent1"/>
-          </a:lnRef>
-          <a:fillRef idx="3">
-            <a:schemeClr val="accent1"/>
-          </a:fillRef>
-          <a:effectRef idx="2">
-            <a:schemeClr val="accent1"/>
-          </a:effectRef>
-          <a:fontRef idx="minor">
-            <a:schemeClr val="lt1"/>
-          </a:fontRef>
-        </p:style>
-        <p:txBody>
-          <a:bodyPr rtlCol="0" anchor="ctr"/>
-          <a:lstStyle/>
-          <a:p>
-            <a:pPr algn="ctr"/>
-          </a:p>
-        </p:txBody>
-      </p:sp>
-      <p:sp>
-        <p:nvSpPr>
-          <p:cNvPr id="34" name="TextBox 33"/>
-          <p:cNvSpPr txBox="1"/>
-          <p:nvPr/>
-        </p:nvSpPr>
-        <p:spPr>
-          <a:xfrm>
-            <a:off x="4435754" y="2816352"/>
-            <a:ext cx="3320186" cy="201168"/>
-          </a:xfrm>
-          <a:prstGeom prst="rect">
-            <a:avLst/>
-          </a:prstGeom>
-          <a:noFill/>
-        </p:spPr>
-        <p:txBody>
-          <a:bodyPr wrap="square" anchor="t" lIns="36000" rIns="36000" tIns="18000" bIns="18000">
-            <a:spAutoFit/>
-          </a:bodyPr>
-          <a:lstStyle/>
-          <a:p>
-            <a:pPr algn="l"/>
-            <a:r>
-              <a:rPr sz="1008" b="1" i="0">
-                <a:solidFill>
-                  <a:srgbClr val="3B5174"/>
-                </a:solidFill>
-                <a:latin typeface="Arial"/>
-              </a:rPr>
-              <a:t>Example</a:t>
-            </a:r>
-          </a:p>
-        </p:txBody>
-      </p:sp>
-      <p:sp>
-        <p:nvSpPr>
-          <p:cNvPr id="35" name="TextBox 34"/>
-          <p:cNvSpPr txBox="1"/>
-          <p:nvPr/>
-        </p:nvSpPr>
-        <p:spPr>
-          <a:xfrm>
-            <a:off x="4435754" y="2999232"/>
-            <a:ext cx="3320186" cy="365760"/>
-          </a:xfrm>
-          <a:prstGeom prst="rect">
-            <a:avLst/>
-          </a:prstGeom>
-          <a:noFill/>
-        </p:spPr>
-        <p:txBody>
-          <a:bodyPr wrap="square" anchor="t" lIns="36000" rIns="36000" tIns="18000" bIns="18000">
-            <a:spAutoFit/>
-          </a:bodyPr>
-          <a:lstStyle/>
-          <a:p>
-            <a:pPr algn="l"/>
-            <a:r>
-              <a:rPr sz="1232" b="1" i="0">
-                <a:solidFill>
-                  <a:srgbClr val="475569"/>
-                </a:solidFill>
-                <a:latin typeface="Arial"/>
-              </a:rPr>
-              <a:t>Class A foam / legacy AFFF</a:t>
-            </a:r>
-          </a:p>
-        </p:txBody>
-      </p:sp>
-      <p:sp>
-        <p:nvSpPr>
-          <p:cNvPr id="36" name="TextBox 35"/>
-          <p:cNvSpPr txBox="1"/>
-          <p:nvPr/>
-        </p:nvSpPr>
-        <p:spPr>
-          <a:xfrm>
-            <a:off x="4435754" y="3419856"/>
-            <a:ext cx="3320186" cy="201168"/>
-          </a:xfrm>
-          <a:prstGeom prst="rect">
-            <a:avLst/>
-          </a:prstGeom>
-          <a:noFill/>
-        </p:spPr>
-        <p:txBody>
-          <a:bodyPr wrap="square" anchor="t" lIns="36000" rIns="36000" tIns="18000" bIns="18000">
-            <a:spAutoFit/>
-          </a:bodyPr>
-          <a:lstStyle/>
-          <a:p>
-            <a:pPr algn="l"/>
-            <a:r>
-              <a:rPr sz="1008" b="1" i="0">
-                <a:solidFill>
-                  <a:srgbClr val="64748B"/>
-                </a:solidFill>
-                <a:latin typeface="Arial"/>
-              </a:rPr>
-              <a:t>Composition</a:t>
-            </a:r>
-          </a:p>
-        </p:txBody>
-      </p:sp>
-      <p:sp>
-        <p:nvSpPr>
-          <p:cNvPr id="37" name="TextBox 36"/>
-          <p:cNvSpPr txBox="1"/>
-          <p:nvPr/>
-        </p:nvSpPr>
-        <p:spPr>
-          <a:xfrm>
-            <a:off x="4435754" y="3602736"/>
-            <a:ext cx="3320186" cy="384048"/>
-          </a:xfrm>
-          <a:prstGeom prst="rect">
-            <a:avLst/>
-          </a:prstGeom>
-          <a:noFill/>
-        </p:spPr>
-        <p:txBody>
-          <a:bodyPr wrap="square" anchor="t" lIns="36000" rIns="36000" tIns="18000" bIns="18000">
-            <a:spAutoFit/>
-          </a:bodyPr>
-          <a:lstStyle/>
-          <a:p>
-            <a:pPr algn="l"/>
-            <a:r>
-              <a:rPr sz="1232" b="0" i="0">
-                <a:solidFill>
-                  <a:srgbClr val="475569"/>
-                </a:solidFill>
-                <a:latin typeface="Arial"/>
-              </a:rPr>
-              <a:t>Surfactants (historically fluorinated)</a:t>
-            </a:r>
-          </a:p>
-        </p:txBody>
-      </p:sp>
-      <p:sp>
-        <p:nvSpPr>
-          <p:cNvPr id="38" name="TextBox 37"/>
-          <p:cNvSpPr txBox="1"/>
-          <p:nvPr/>
-        </p:nvSpPr>
-        <p:spPr>
-          <a:xfrm>
-            <a:off x="4435754" y="4041648"/>
-            <a:ext cx="3320186" cy="201168"/>
-          </a:xfrm>
-          <a:prstGeom prst="rect">
-            <a:avLst/>
-          </a:prstGeom>
-          <a:noFill/>
-        </p:spPr>
-        <p:txBody>
-          <a:bodyPr wrap="square" anchor="t" lIns="36000" rIns="36000" tIns="18000" bIns="18000">
-            <a:spAutoFit/>
-          </a:bodyPr>
-          <a:lstStyle/>
-          <a:p>
-            <a:pPr algn="l"/>
-            <a:r>
-              <a:rPr sz="1008" b="1" i="0">
-                <a:solidFill>
-                  <a:srgbClr val="64748B"/>
-                </a:solidFill>
-                <a:latin typeface="Arial"/>
-              </a:rPr>
-              <a:t>Effect / retention</a:t>
-            </a:r>
-          </a:p>
-        </p:txBody>
-      </p:sp>
-      <p:sp>
-        <p:nvSpPr>
-          <p:cNvPr id="39" name="TextBox 38"/>
-          <p:cNvSpPr txBox="1"/>
-          <p:nvPr/>
-        </p:nvSpPr>
-        <p:spPr>
-          <a:xfrm>
-            <a:off x="4435754" y="4224528"/>
-            <a:ext cx="3320186" cy="384048"/>
-          </a:xfrm>
-          <a:prstGeom prst="rect">
-            <a:avLst/>
-          </a:prstGeom>
-          <a:noFill/>
-        </p:spPr>
-        <p:txBody>
-          <a:bodyPr wrap="square" anchor="t" lIns="36000" rIns="36000" tIns="18000" bIns="18000">
-            <a:spAutoFit/>
-          </a:bodyPr>
-          <a:lstStyle/>
-          <a:p>
-            <a:pPr algn="l"/>
-            <a:r>
-              <a:rPr sz="1232" b="0" i="0">
-                <a:solidFill>
-                  <a:srgbClr val="475569"/>
-                </a:solidFill>
-                <a:latin typeface="Arial"/>
-              </a:rPr>
-              <a:t>Water retention 15–30 min (short-term)</a:t>
-            </a:r>
-          </a:p>
-        </p:txBody>
-      </p:sp>
-      <p:sp>
-        <p:nvSpPr>
-          <p:cNvPr id="40" name="TextBox 39"/>
-          <p:cNvSpPr txBox="1"/>
-          <p:nvPr/>
-        </p:nvSpPr>
-        <p:spPr>
-          <a:xfrm>
-            <a:off x="4435754" y="4663440"/>
-            <a:ext cx="3320186" cy="201168"/>
-          </a:xfrm>
-          <a:prstGeom prst="rect">
-            <a:avLst/>
-          </a:prstGeom>
-          <a:noFill/>
-        </p:spPr>
-        <p:txBody>
-          <a:bodyPr wrap="square" anchor="t" lIns="36000" rIns="36000" tIns="18000" bIns="18000">
-            <a:spAutoFit/>
-          </a:bodyPr>
-          <a:lstStyle/>
-          <a:p>
-            <a:pPr algn="l"/>
-            <a:r>
-              <a:rPr sz="1008" b="1" i="0">
-                <a:solidFill>
-                  <a:srgbClr val="A05656"/>
-                </a:solidFill>
-                <a:latin typeface="Arial"/>
-              </a:rPr>
-              <a:t>Limitation</a:t>
-            </a:r>
-          </a:p>
-        </p:txBody>
-      </p:sp>
-      <p:sp>
-        <p:nvSpPr>
-          <p:cNvPr id="41" name="TextBox 40"/>
-          <p:cNvSpPr txBox="1"/>
-          <p:nvPr/>
-        </p:nvSpPr>
-        <p:spPr>
-          <a:xfrm>
-            <a:off x="4435754" y="4846320"/>
-            <a:ext cx="3320186" cy="896112"/>
-          </a:xfrm>
-          <a:prstGeom prst="rect">
-            <a:avLst/>
-          </a:prstGeom>
-          <a:noFill/>
-        </p:spPr>
-        <p:txBody>
-          <a:bodyPr wrap="square" anchor="t" lIns="36000" rIns="36000" tIns="18000" bIns="18000">
-            <a:spAutoFit/>
-          </a:bodyPr>
-          <a:lstStyle/>
-          <a:p>
-            <a:pPr algn="l"/>
-            <a:r>
-              <a:rPr sz="1232" b="1" i="0">
-                <a:solidFill>
-                  <a:srgbClr val="A05656"/>
-                </a:solidFill>
-                <a:latin typeface="Arial"/>
-              </a:rPr>
-              <a:t>Loses effect when dry; fluorinated types bioaccumulate and are toxic</a:t>
-            </a:r>
-          </a:p>
-        </p:txBody>
-      </p:sp>
-      <p:sp>
-        <p:nvSpPr>
-          <p:cNvPr id="42" name="Rounded Rectangle 41"/>
-          <p:cNvSpPr/>
-          <p:nvPr/>
-        </p:nvSpPr>
-        <p:spPr>
-          <a:xfrm>
-            <a:off x="8139988" y="859536"/>
-            <a:ext cx="3685946" cy="5047488"/>
-          </a:xfrm>
-          <a:prstGeom prst="roundRect">
-            <a:avLst>
-              <a:gd name="adj" fmla="val 4000"/>
-            </a:avLst>
-          </a:prstGeom>
-          <a:solidFill>
-            <a:srgbClr val="1E293B"/>
-          </a:solidFill>
-          <a:ln>
-            <a:noFill/>
-          </a:ln>
-          <a:effectLst/>
-        </p:spPr>
-        <p:style>
-          <a:lnRef idx="1">
-            <a:schemeClr val="accent1"/>
-          </a:lnRef>
-          <a:fillRef idx="3">
-            <a:schemeClr val="accent1"/>
-          </a:fillRef>
-          <a:effectRef idx="2">
-            <a:schemeClr val="accent1"/>
-          </a:effectRef>
-          <a:fontRef idx="minor">
-            <a:schemeClr val="lt1"/>
-          </a:fontRef>
-        </p:style>
-        <p:txBody>
-          <a:bodyPr rtlCol="0" anchor="ctr"/>
-          <a:lstStyle/>
-          <a:p>
-            <a:pPr algn="ctr"/>
-          </a:p>
-        </p:txBody>
-      </p:sp>
-      <p:sp>
-        <p:nvSpPr>
-          <p:cNvPr id="43" name="Rectangle 42"/>
-          <p:cNvSpPr/>
-          <p:nvPr/>
-        </p:nvSpPr>
-        <p:spPr>
-          <a:xfrm>
-            <a:off x="8139988" y="859536"/>
-            <a:ext cx="3685946" cy="45720"/>
-          </a:xfrm>
-          <a:prstGeom prst="rect">
-            <a:avLst/>
-          </a:prstGeom>
-          <a:solidFill>
-            <a:srgbClr val="D4A574"/>
-          </a:solidFill>
-          <a:ln>
-            <a:noFill/>
-          </a:ln>
-          <a:effectLst/>
-        </p:spPr>
-        <p:style>
-          <a:lnRef idx="1">
-            <a:schemeClr val="accent1"/>
-          </a:lnRef>
-          <a:fillRef idx="3">
-            <a:schemeClr val="accent1"/>
-          </a:fillRef>
-          <a:effectRef idx="2">
-            <a:schemeClr val="accent1"/>
-          </a:effectRef>
-          <a:fontRef idx="minor">
-            <a:schemeClr val="lt1"/>
-          </a:fontRef>
-        </p:style>
-        <p:txBody>
-          <a:bodyPr rtlCol="0" anchor="ctr"/>
-          <a:lstStyle/>
-          <a:p>
-            <a:pPr algn="ctr"/>
-          </a:p>
-        </p:txBody>
-      </p:sp>
-      <p:sp>
-        <p:nvSpPr>
-          <p:cNvPr id="44" name="Rounded Rectangle 43"/>
-          <p:cNvSpPr/>
-          <p:nvPr/>
-        </p:nvSpPr>
-        <p:spPr>
-          <a:xfrm>
-            <a:off x="8322868" y="1024128"/>
-            <a:ext cx="3320186" cy="1078992"/>
-          </a:xfrm>
-          <a:prstGeom prst="roundRect">
-            <a:avLst>
-              <a:gd name="adj" fmla="val 3000"/>
-            </a:avLst>
-          </a:prstGeom>
-          <a:solidFill>
-            <a:srgbClr val="F5F8FC"/>
-          </a:solidFill>
-          <a:ln w="12700">
-            <a:solidFill>
-              <a:srgbClr val="C0D0E0"/>
-            </a:solidFill>
-          </a:ln>
-          <a:effectLst/>
-        </p:spPr>
-        <p:style>
-          <a:lnRef idx="1">
-            <a:schemeClr val="accent1"/>
-          </a:lnRef>
-          <a:fillRef idx="3">
-            <a:schemeClr val="accent1"/>
-          </a:fillRef>
-          <a:effectRef idx="2">
-            <a:schemeClr val="accent1"/>
-          </a:effectRef>
-          <a:fontRef idx="minor">
-            <a:schemeClr val="lt1"/>
-          </a:fontRef>
-        </p:style>
-        <p:txBody>
-          <a:bodyPr rtlCol="0" anchor="ctr"/>
-          <a:lstStyle/>
-          <a:p>
-            <a:pPr algn="ctr"/>
-          </a:p>
-        </p:txBody>
-      </p:sp>
-      <p:sp>
-        <p:nvSpPr>
-          <p:cNvPr id="45" name="Rectangle 44"/>
-          <p:cNvSpPr/>
-          <p:nvPr/>
-        </p:nvSpPr>
-        <p:spPr>
-          <a:xfrm>
-            <a:off x="8396020" y="1097280"/>
-            <a:ext cx="640080" cy="237744"/>
-          </a:xfrm>
-          <a:prstGeom prst="rect">
-            <a:avLst/>
-          </a:prstGeom>
-          <a:solidFill>
-            <a:srgbClr val="D4A574"/>
-          </a:solidFill>
-          <a:ln>
-            <a:noFill/>
-          </a:ln>
-          <a:effectLst/>
-        </p:spPr>
-        <p:style>
-          <a:lnRef idx="1">
-            <a:schemeClr val="accent1"/>
-          </a:lnRef>
-          <a:fillRef idx="3">
-            <a:schemeClr val="accent1"/>
-          </a:fillRef>
-          <a:effectRef idx="2">
-            <a:schemeClr val="accent1"/>
-          </a:effectRef>
-          <a:fontRef idx="minor">
-            <a:schemeClr val="lt1"/>
-          </a:fontRef>
-        </p:style>
-        <p:txBody>
-          <a:bodyPr rtlCol="0" anchor="ctr"/>
-          <a:lstStyle/>
-          <a:p>
-            <a:pPr algn="ctr"/>
-          </a:p>
-        </p:txBody>
-      </p:sp>
-      <p:sp>
-        <p:nvSpPr>
-          <p:cNvPr id="46" name="TextBox 45"/>
-          <p:cNvSpPr txBox="1"/>
-          <p:nvPr/>
-        </p:nvSpPr>
-        <p:spPr>
-          <a:xfrm>
-            <a:off x="8396020" y="1097280"/>
-            <a:ext cx="640080" cy="237744"/>
-          </a:xfrm>
-          <a:prstGeom prst="rect">
-            <a:avLst/>
-          </a:prstGeom>
-          <a:noFill/>
-        </p:spPr>
-        <p:txBody>
-          <a:bodyPr wrap="square" anchor="ctr" lIns="36000" rIns="36000" tIns="18000" bIns="18000">
-            <a:spAutoFit/>
-          </a:bodyPr>
-          <a:lstStyle/>
-          <a:p>
-            <a:pPr algn="ctr"/>
-            <a:r>
-              <a:rPr sz="1008" b="1" i="0">
-                <a:solidFill>
-                  <a:srgbClr val="FFFFFF"/>
-                </a:solidFill>
-                <a:latin typeface="Arial"/>
-              </a:rPr>
-              <a:t>Photo</a:t>
-            </a:r>
-          </a:p>
-        </p:txBody>
-      </p:sp>
-      <p:sp>
-        <p:nvSpPr>
-          <p:cNvPr id="47" name="TextBox 46"/>
-          <p:cNvSpPr txBox="1"/>
-          <p:nvPr/>
-        </p:nvSpPr>
-        <p:spPr>
-          <a:xfrm>
-            <a:off x="8322868" y="1298448"/>
-            <a:ext cx="3320186" cy="512064"/>
-          </a:xfrm>
-          <a:prstGeom prst="rect">
-            <a:avLst/>
-          </a:prstGeom>
-          <a:noFill/>
-        </p:spPr>
-        <p:txBody>
-          <a:bodyPr wrap="square" anchor="ctr" lIns="36000" rIns="36000" tIns="18000" bIns="18000">
-            <a:spAutoFit/>
-          </a:bodyPr>
-          <a:lstStyle/>
-          <a:p>
-            <a:pPr algn="ctr"/>
-            <a:r>
-              <a:rPr sz="1120" b="0" i="0">
-                <a:solidFill>
-                  <a:srgbClr val="AAB4C0"/>
-                </a:solidFill>
-                <a:latin typeface="Arial"/>
-              </a:rPr>
-              <a:t>Pre-applied gel coating on homes</a:t>
-            </a:r>
-          </a:p>
-        </p:txBody>
-      </p:sp>
-      <p:sp>
-        <p:nvSpPr>
-          <p:cNvPr id="48" name="TextBox 47"/>
-          <p:cNvSpPr txBox="1"/>
-          <p:nvPr/>
-        </p:nvSpPr>
-        <p:spPr>
-          <a:xfrm>
-            <a:off x="8322868" y="2212848"/>
-            <a:ext cx="3320186" cy="365760"/>
-          </a:xfrm>
-          <a:prstGeom prst="rect">
-            <a:avLst/>
-          </a:prstGeom>
-          <a:noFill/>
-        </p:spPr>
-        <p:txBody>
-          <a:bodyPr wrap="square" anchor="t" lIns="36000" rIns="36000" tIns="18000" bIns="18000">
-            <a:spAutoFit/>
-          </a:bodyPr>
-          <a:lstStyle/>
-          <a:p>
-            <a:pPr algn="l"/>
-            <a:r>
-              <a:rPr sz="1680" b="1" i="0">
-                <a:solidFill>
-                  <a:srgbClr val="FFFFFF"/>
-                </a:solidFill>
-                <a:latin typeface="Arial"/>
-              </a:rPr>
-              <a:t>Water-enhancing gel (WEG)</a:t>
-            </a:r>
-          </a:p>
-        </p:txBody>
-      </p:sp>
-      <p:sp>
-        <p:nvSpPr>
-          <p:cNvPr id="49" name="Rectangle 48"/>
-          <p:cNvSpPr/>
-          <p:nvPr/>
-        </p:nvSpPr>
-        <p:spPr>
-          <a:xfrm>
-            <a:off x="8322868" y="2724912"/>
-            <a:ext cx="3320186" cy="10972"/>
-          </a:xfrm>
-          <a:prstGeom prst="rect">
-            <a:avLst/>
-          </a:prstGeom>
-          <a:solidFill>
-            <a:srgbClr val="445870"/>
-          </a:solidFill>
-          <a:ln>
-            <a:noFill/>
-          </a:ln>
-          <a:effectLst/>
-        </p:spPr>
-        <p:style>
-          <a:lnRef idx="1">
-            <a:schemeClr val="accent1"/>
-          </a:lnRef>
-          <a:fillRef idx="3">
-            <a:schemeClr val="accent1"/>
-          </a:fillRef>
-          <a:effectRef idx="2">
-            <a:schemeClr val="accent1"/>
-          </a:effectRef>
-          <a:fontRef idx="minor">
-            <a:schemeClr val="lt1"/>
-          </a:fontRef>
-        </p:style>
-        <p:txBody>
-          <a:bodyPr rtlCol="0" anchor="ctr"/>
-          <a:lstStyle/>
-          <a:p>
-            <a:pPr algn="ctr"/>
-          </a:p>
-        </p:txBody>
-      </p:sp>
-      <p:sp>
-        <p:nvSpPr>
-          <p:cNvPr id="50" name="TextBox 49"/>
-          <p:cNvSpPr txBox="1"/>
-          <p:nvPr/>
-        </p:nvSpPr>
-        <p:spPr>
-          <a:xfrm>
-            <a:off x="8322868" y="2816352"/>
-            <a:ext cx="3320186" cy="201168"/>
-          </a:xfrm>
-          <a:prstGeom prst="rect">
-            <a:avLst/>
-          </a:prstGeom>
-          <a:noFill/>
-        </p:spPr>
-        <p:txBody>
-          <a:bodyPr wrap="square" anchor="t" lIns="36000" rIns="36000" tIns="18000" bIns="18000">
-            <a:spAutoFit/>
-          </a:bodyPr>
-          <a:lstStyle/>
-          <a:p>
-            <a:pPr algn="l"/>
-            <a:r>
-              <a:rPr sz="1008" b="1" i="0">
-                <a:solidFill>
-                  <a:srgbClr val="D4A574"/>
-                </a:solidFill>
-                <a:latin typeface="Arial"/>
-              </a:rPr>
-              <a:t>Example</a:t>
-            </a:r>
-          </a:p>
-        </p:txBody>
-      </p:sp>
-      <p:sp>
-        <p:nvSpPr>
-          <p:cNvPr id="51" name="TextBox 50"/>
-          <p:cNvSpPr txBox="1"/>
-          <p:nvPr/>
-        </p:nvSpPr>
-        <p:spPr>
-          <a:xfrm>
-            <a:off x="8322868" y="2999232"/>
-            <a:ext cx="3320186" cy="365760"/>
-          </a:xfrm>
-          <a:prstGeom prst="rect">
-            <a:avLst/>
-          </a:prstGeom>
-          <a:noFill/>
-        </p:spPr>
-        <p:txBody>
-          <a:bodyPr wrap="square" anchor="t" lIns="36000" rIns="36000" tIns="18000" bIns="18000">
-            <a:spAutoFit/>
-          </a:bodyPr>
-          <a:lstStyle/>
-          <a:p>
-            <a:pPr algn="l"/>
-            <a:r>
-              <a:rPr sz="1232" b="1" i="0">
-                <a:solidFill>
-                  <a:srgbClr val="D8E2EE"/>
-                </a:solidFill>
-                <a:latin typeface="Arial"/>
-              </a:rPr>
-              <a:t>Barricade / Thermo-Gel / AquaGel-K</a:t>
-            </a:r>
-          </a:p>
-        </p:txBody>
-      </p:sp>
-      <p:sp>
-        <p:nvSpPr>
-          <p:cNvPr id="52" name="TextBox 51"/>
-          <p:cNvSpPr txBox="1"/>
-          <p:nvPr/>
-        </p:nvSpPr>
-        <p:spPr>
-          <a:xfrm>
-            <a:off x="8322868" y="3419856"/>
-            <a:ext cx="3320186" cy="201168"/>
-          </a:xfrm>
-          <a:prstGeom prst="rect">
-            <a:avLst/>
-          </a:prstGeom>
-          <a:noFill/>
-        </p:spPr>
-        <p:txBody>
-          <a:bodyPr wrap="square" anchor="t" lIns="36000" rIns="36000" tIns="18000" bIns="18000">
-            <a:spAutoFit/>
-          </a:bodyPr>
-          <a:lstStyle/>
-          <a:p>
-            <a:pPr algn="l"/>
-            <a:r>
-              <a:rPr sz="1008" b="1" i="0">
-                <a:solidFill>
-                  <a:srgbClr val="88A0B8"/>
-                </a:solidFill>
-                <a:latin typeface="Arial"/>
-              </a:rPr>
-              <a:t>Composition</a:t>
-            </a:r>
-          </a:p>
-        </p:txBody>
-      </p:sp>
-      <p:sp>
-        <p:nvSpPr>
-          <p:cNvPr id="53" name="TextBox 52"/>
-          <p:cNvSpPr txBox="1"/>
-          <p:nvPr/>
-        </p:nvSpPr>
-        <p:spPr>
-          <a:xfrm>
-            <a:off x="8322868" y="3602736"/>
-            <a:ext cx="3320186" cy="384048"/>
-          </a:xfrm>
-          <a:prstGeom prst="rect">
-            <a:avLst/>
-          </a:prstGeom>
-          <a:noFill/>
-        </p:spPr>
-        <p:txBody>
-          <a:bodyPr wrap="square" anchor="t" lIns="36000" rIns="36000" tIns="18000" bIns="18000">
-            <a:spAutoFit/>
-          </a:bodyPr>
-          <a:lstStyle/>
-          <a:p>
-            <a:pPr algn="l"/>
-            <a:r>
-              <a:rPr sz="1232" b="0" i="0">
-                <a:solidFill>
-                  <a:srgbClr val="D8E2EE"/>
-                </a:solidFill>
-                <a:latin typeface="Arial"/>
-              </a:rPr>
-              <a:t>Superabsorbent polymer (eco-friendly)</a:t>
-            </a:r>
-          </a:p>
-        </p:txBody>
-      </p:sp>
-      <p:sp>
-        <p:nvSpPr>
-          <p:cNvPr id="54" name="TextBox 53"/>
-          <p:cNvSpPr txBox="1"/>
-          <p:nvPr/>
-        </p:nvSpPr>
-        <p:spPr>
-          <a:xfrm>
-            <a:off x="8322868" y="4041648"/>
-            <a:ext cx="3320186" cy="201168"/>
-          </a:xfrm>
-          <a:prstGeom prst="rect">
-            <a:avLst/>
-          </a:prstGeom>
-          <a:noFill/>
-        </p:spPr>
-        <p:txBody>
-          <a:bodyPr wrap="square" anchor="t" lIns="36000" rIns="36000" tIns="18000" bIns="18000">
-            <a:spAutoFit/>
-          </a:bodyPr>
-          <a:lstStyle/>
-          <a:p>
-            <a:pPr algn="l"/>
-            <a:r>
-              <a:rPr sz="1008" b="1" i="0">
-                <a:solidFill>
-                  <a:srgbClr val="88A0B8"/>
-                </a:solidFill>
-                <a:latin typeface="Arial"/>
-              </a:rPr>
-              <a:t>Effect / retention</a:t>
-            </a:r>
-          </a:p>
-        </p:txBody>
-      </p:sp>
-      <p:sp>
-        <p:nvSpPr>
-          <p:cNvPr id="55" name="TextBox 54"/>
-          <p:cNvSpPr txBox="1"/>
-          <p:nvPr/>
-        </p:nvSpPr>
-        <p:spPr>
-          <a:xfrm>
-            <a:off x="8322868" y="4224528"/>
-            <a:ext cx="3320186" cy="384048"/>
-          </a:xfrm>
-          <a:prstGeom prst="rect">
-            <a:avLst/>
-          </a:prstGeom>
-          <a:noFill/>
-        </p:spPr>
-        <p:txBody>
-          <a:bodyPr wrap="square" anchor="t" lIns="36000" rIns="36000" tIns="18000" bIns="18000">
-            <a:spAutoFit/>
-          </a:bodyPr>
-          <a:lstStyle/>
-          <a:p>
-            <a:pPr algn="l"/>
-            <a:r>
-              <a:rPr sz="1232" b="0" i="0">
-                <a:solidFill>
-                  <a:srgbClr val="D8E2EE"/>
-                </a:solidFill>
-                <a:latin typeface="Arial"/>
-              </a:rPr>
-              <a:t>Water retention 30–60 min; protects buildings</a:t>
-            </a:r>
-          </a:p>
-        </p:txBody>
-      </p:sp>
-      <p:sp>
-        <p:nvSpPr>
-          <p:cNvPr id="56" name="TextBox 55"/>
-          <p:cNvSpPr txBox="1"/>
-          <p:nvPr/>
-        </p:nvSpPr>
-        <p:spPr>
-          <a:xfrm>
-            <a:off x="8322868" y="4663440"/>
-            <a:ext cx="3320186" cy="201168"/>
-          </a:xfrm>
-          <a:prstGeom prst="rect">
-            <a:avLst/>
-          </a:prstGeom>
-          <a:noFill/>
-        </p:spPr>
-        <p:txBody>
-          <a:bodyPr wrap="square" anchor="t" lIns="36000" rIns="36000" tIns="18000" bIns="18000">
-            <a:spAutoFit/>
-          </a:bodyPr>
-          <a:lstStyle/>
-          <a:p>
-            <a:pPr algn="l"/>
-            <a:r>
-              <a:rPr sz="1008" b="1" i="0">
-                <a:solidFill>
-                  <a:srgbClr val="D4A574"/>
-                </a:solidFill>
-                <a:latin typeface="Arial"/>
-              </a:rPr>
-              <a:t>Limitation</a:t>
-            </a:r>
-          </a:p>
-        </p:txBody>
-      </p:sp>
-      <p:sp>
-        <p:nvSpPr>
-          <p:cNvPr id="57" name="TextBox 56"/>
-          <p:cNvSpPr txBox="1"/>
-          <p:nvPr/>
-        </p:nvSpPr>
-        <p:spPr>
-          <a:xfrm>
-            <a:off x="8322868" y="4846320"/>
-            <a:ext cx="3320186" cy="896112"/>
-          </a:xfrm>
-          <a:prstGeom prst="rect">
-            <a:avLst/>
-          </a:prstGeom>
-          <a:noFill/>
-        </p:spPr>
-        <p:txBody>
-          <a:bodyPr wrap="square" anchor="t" lIns="36000" rIns="36000" tIns="18000" bIns="18000">
-            <a:spAutoFit/>
-          </a:bodyPr>
-          <a:lstStyle/>
-          <a:p>
-            <a:pPr algn="l"/>
-            <a:r>
-              <a:rPr sz="1232" b="1" i="0">
-                <a:solidFill>
-                  <a:srgbClr val="FFFFFF"/>
-                </a:solidFill>
-                <a:latin typeface="Arial"/>
-              </a:rPr>
-              <a:t>Once dried by heat/wind, effectiveness is completely lost</a:t>
-            </a:r>
-          </a:p>
-        </p:txBody>
-      </p:sp>
-      <p:sp>
-        <p:nvSpPr>
-          <p:cNvPr id="58" name="Rounded Rectangle 57"/>
-          <p:cNvSpPr/>
-          <p:nvPr/>
-        </p:nvSpPr>
-        <p:spPr>
-          <a:xfrm>
-            <a:off x="365760" y="6053328"/>
-            <a:ext cx="11460175" cy="457200"/>
-          </a:xfrm>
-          <a:prstGeom prst="roundRect">
-            <a:avLst>
-              <a:gd name="adj" fmla="val 4000"/>
-            </a:avLst>
-          </a:prstGeom>
-          <a:solidFill>
-            <a:srgbClr val="F8FAFC"/>
-          </a:solidFill>
-          <a:ln>
-            <a:noFill/>
-          </a:ln>
-          <a:effectLst/>
-        </p:spPr>
-        <p:style>
-          <a:lnRef idx="1">
-            <a:schemeClr val="accent1"/>
-          </a:lnRef>
-          <a:fillRef idx="3">
-            <a:schemeClr val="accent1"/>
-          </a:fillRef>
-          <a:effectRef idx="2">
-            <a:schemeClr val="accent1"/>
-          </a:effectRef>
-          <a:fontRef idx="minor">
-            <a:schemeClr val="lt1"/>
-          </a:fontRef>
-        </p:style>
-        <p:txBody>
-          <a:bodyPr rtlCol="0" anchor="ctr"/>
-          <a:lstStyle/>
-          <a:p>
-            <a:pPr algn="ctr"/>
-          </a:p>
-        </p:txBody>
-      </p:sp>
-      <p:sp>
-        <p:nvSpPr>
-          <p:cNvPr id="59" name="Rectangle 58"/>
-          <p:cNvSpPr/>
-          <p:nvPr/>
-        </p:nvSpPr>
-        <p:spPr>
-          <a:xfrm>
-            <a:off x="365760" y="6053328"/>
-            <a:ext cx="54864" cy="457200"/>
-          </a:xfrm>
-          <a:prstGeom prst="rect">
-            <a:avLst/>
-          </a:prstGeom>
-          <a:solidFill>
-            <a:srgbClr val="3B5174"/>
-          </a:solidFill>
-          <a:ln>
-            <a:noFill/>
-          </a:ln>
-          <a:effectLst/>
-        </p:spPr>
-        <p:style>
-          <a:lnRef idx="1">
-            <a:schemeClr val="accent1"/>
-          </a:lnRef>
-          <a:fillRef idx="3">
-            <a:schemeClr val="accent1"/>
-          </a:fillRef>
-          <a:effectRef idx="2">
-            <a:schemeClr val="accent1"/>
-          </a:effectRef>
-          <a:fontRef idx="minor">
-            <a:schemeClr val="lt1"/>
-          </a:fontRef>
-        </p:style>
-        <p:txBody>
-          <a:bodyPr rtlCol="0" anchor="ctr"/>
-          <a:lstStyle/>
-          <a:p>
-            <a:pPr algn="ctr"/>
-          </a:p>
-        </p:txBody>
-      </p:sp>
-      <p:sp>
-        <p:nvSpPr>
-          <p:cNvPr id="60" name="TextBox 59"/>
+          <p:cNvPr id="93" name="TextBox 92"/>
           <p:cNvSpPr txBox="1"/>
           <p:nvPr/>
         </p:nvSpPr>
@@ -56725,7 +58225,7 @@
       </p:sp>
       <p:sp>
         <p:nvSpPr>
-          <p:cNvPr id="61" name="TextBox 60"/>
+          <p:cNvPr id="94" name="TextBox 93"/>
           <p:cNvSpPr txBox="1"/>
           <p:nvPr/>
         </p:nvSpPr>

--- a/slides_en.pptx
+++ b/slides_en.pptx
@@ -17412,7 +17412,7 @@
                 </a:solidFill>
                 <a:latin typeface="Arial"/>
               </a:rPr>
-              <a:t>Adhesion and Surface Wettability: Properties Essential for Implementation</a:t>
+              <a:t>Rheological Design Translates Directly into Field Performance</a:t>
             </a:r>
           </a:p>
         </p:txBody>
@@ -17498,26 +17498,96 @@
       </p:sp>
       <p:sp>
         <p:nvSpPr>
-          <p:cNvPr id="10" name="Rounded Rectangle 9"/>
+          <p:cNvPr id="10" name="TextBox 9"/>
+          <p:cNvSpPr txBox="1"/>
+          <p:nvPr/>
+        </p:nvSpPr>
+        <p:spPr>
+          <a:xfrm>
+            <a:off x="365760" y="859536"/>
+            <a:ext cx="4114800" cy="274320"/>
+          </a:xfrm>
+          <a:prstGeom prst="rect">
+            <a:avLst/>
+          </a:prstGeom>
+          <a:noFill/>
+        </p:spPr>
+        <p:txBody>
+          <a:bodyPr wrap="square" anchor="t" lIns="36000" rIns="36000" tIns="18000" bIns="18000">
+            <a:spAutoFit/>
+          </a:bodyPr>
+          <a:lstStyle/>
+          <a:p>
+            <a:pPr algn="l"/>
+            <a:r>
+              <a:rPr sz="1344" b="1" i="0">
+                <a:solidFill>
+                  <a:srgbClr val="64748B"/>
+                </a:solidFill>
+                <a:latin typeface="Arial"/>
+              </a:rPr>
+              <a:t>Rheological Design (measured properties)</a:t>
+            </a:r>
+          </a:p>
+        </p:txBody>
+      </p:sp>
+      <p:sp>
+        <p:nvSpPr>
+          <p:cNvPr id="11" name="TextBox 10"/>
+          <p:cNvSpPr txBox="1"/>
+          <p:nvPr/>
+        </p:nvSpPr>
+        <p:spPr>
+          <a:xfrm>
+            <a:off x="5449824" y="859536"/>
+            <a:ext cx="6376111" cy="274320"/>
+          </a:xfrm>
+          <a:prstGeom prst="rect">
+            <a:avLst/>
+          </a:prstGeom>
+          <a:noFill/>
+        </p:spPr>
+        <p:txBody>
+          <a:bodyPr wrap="square" anchor="t" lIns="36000" rIns="36000" tIns="18000" bIns="18000">
+            <a:spAutoFit/>
+          </a:bodyPr>
+          <a:lstStyle/>
+          <a:p>
+            <a:pPr algn="l"/>
+            <a:r>
+              <a:rPr sz="1344" b="1" i="0">
+                <a:solidFill>
+                  <a:srgbClr val="64748B"/>
+                </a:solidFill>
+                <a:latin typeface="Arial"/>
+              </a:rPr>
+              <a:t>Expected Field Performance (behavior in use)</a:t>
+            </a:r>
+          </a:p>
+        </p:txBody>
+      </p:sp>
+      <p:sp>
+        <p:nvSpPr>
+          <p:cNvPr id="12" name="Rounded Rectangle 11"/>
           <p:cNvSpPr/>
           <p:nvPr/>
         </p:nvSpPr>
         <p:spPr>
           <a:xfrm>
-            <a:off x="365760" y="859536"/>
-            <a:ext cx="3734714" cy="2194560"/>
+            <a:off x="365760" y="1243584"/>
+            <a:ext cx="4114800" cy="1207008"/>
           </a:xfrm>
           <a:prstGeom prst="roundRect">
             <a:avLst>
-              <a:gd name="adj" fmla="val 2000"/>
+              <a:gd name="adj" fmla="val 5000"/>
             </a:avLst>
           </a:prstGeom>
           <a:solidFill>
-            <a:srgbClr val="F5F8FC"/>
+            <a:srgbClr val="F1F5F9"/>
           </a:solidFill>
-          <a:ln w="12700">
+          <a:ln w="6350">
             <a:solidFill>
-              <a:srgbClr val="C0D0E0"/>
+              <a:srgbClr val="E2E8F0"/>
             </a:solidFill>
           </a:ln>
           <a:effectLst/>
@@ -17546,20 +17616,20 @@
       </p:sp>
       <p:sp>
         <p:nvSpPr>
-          <p:cNvPr id="11" name="Rectangle 10"/>
+          <p:cNvPr id="13" name="Rectangle 12"/>
           <p:cNvSpPr/>
           <p:nvPr/>
         </p:nvSpPr>
         <p:spPr>
           <a:xfrm>
-            <a:off x="475488" y="969264"/>
-            <a:ext cx="868680" cy="292608"/>
+            <a:off x="365760" y="1243584"/>
+            <a:ext cx="54864" cy="1207008"/>
           </a:xfrm>
           <a:prstGeom prst="rect">
             <a:avLst/>
           </a:prstGeom>
           <a:solidFill>
-            <a:srgbClr val="1E293B"/>
+            <a:srgbClr val="4A7C8C"/>
           </a:solidFill>
           <a:ln>
             <a:noFill/>
@@ -17590,412 +17660,93 @@
       </p:sp>
       <p:sp>
         <p:nvSpPr>
-          <p:cNvPr id="12" name="TextBox 11"/>
-          <p:cNvSpPr txBox="1"/>
-          <p:nvPr/>
-        </p:nvSpPr>
-        <p:spPr>
-          <a:xfrm>
-            <a:off x="475488" y="969264"/>
-            <a:ext cx="868680" cy="292608"/>
-          </a:xfrm>
-          <a:prstGeom prst="rect">
-            <a:avLst/>
-          </a:prstGeom>
-          <a:noFill/>
-        </p:spPr>
-        <p:txBody>
-          <a:bodyPr wrap="square" anchor="ctr" lIns="36000" rIns="36000" tIns="18000" bIns="18000">
-            <a:spAutoFit/>
-          </a:bodyPr>
-          <a:lstStyle/>
-          <a:p>
-            <a:pPr algn="ctr"/>
-            <a:r>
-              <a:rPr sz="1232" b="1" i="0">
-                <a:solidFill>
-                  <a:srgbClr val="FFFFFF"/>
-                </a:solidFill>
-                <a:latin typeface="Arial"/>
-              </a:rPr>
-              <a:t>Photo</a:t>
-            </a:r>
-          </a:p>
-        </p:txBody>
-      </p:sp>
-      <p:sp>
-        <p:nvSpPr>
-          <p:cNvPr id="13" name="TextBox 12"/>
-          <p:cNvSpPr txBox="1"/>
-          <p:nvPr/>
-        </p:nvSpPr>
-        <p:spPr>
-          <a:xfrm>
-            <a:off x="365760" y="859536"/>
-            <a:ext cx="3734714" cy="2194560"/>
-          </a:xfrm>
-          <a:prstGeom prst="rect">
-            <a:avLst/>
-          </a:prstGeom>
-          <a:noFill/>
-        </p:spPr>
-        <p:txBody>
-          <a:bodyPr wrap="square" anchor="ctr" lIns="36000" rIns="36000" tIns="18000" bIns="18000">
-            <a:spAutoFit/>
-          </a:bodyPr>
-          <a:lstStyle/>
-          <a:p>
-            <a:pPr algn="ctr"/>
+          <p:cNvPr id="14" name="TextBox 13"/>
+          <p:cNvSpPr txBox="1"/>
+          <p:nvPr/>
+        </p:nvSpPr>
+        <p:spPr>
+          <a:xfrm>
+            <a:off x="566928" y="1408176"/>
+            <a:ext cx="3803904" cy="365760"/>
+          </a:xfrm>
+          <a:prstGeom prst="rect">
+            <a:avLst/>
+          </a:prstGeom>
+          <a:noFill/>
+        </p:spPr>
+        <p:txBody>
+          <a:bodyPr wrap="square" anchor="t" lIns="36000" rIns="36000" tIns="18000" bIns="18000">
+            <a:spAutoFit/>
+          </a:bodyPr>
+          <a:lstStyle/>
+          <a:p>
+            <a:pPr algn="l"/>
+            <a:r>
+              <a:rPr sz="1568" b="1" i="0">
+                <a:solidFill>
+                  <a:srgbClr val="1E293B"/>
+                </a:solidFill>
+                <a:latin typeface="Arial"/>
+              </a:rPr>
+              <a:t>Low Power-law Index n</a:t>
+            </a:r>
+          </a:p>
+        </p:txBody>
+      </p:sp>
+      <p:sp>
+        <p:nvSpPr>
+          <p:cNvPr id="15" name="TextBox 14"/>
+          <p:cNvSpPr txBox="1"/>
+          <p:nvPr/>
+        </p:nvSpPr>
+        <p:spPr>
+          <a:xfrm>
+            <a:off x="566928" y="1883664"/>
+            <a:ext cx="3803904" cy="457200"/>
+          </a:xfrm>
+          <a:prstGeom prst="rect">
+            <a:avLst/>
+          </a:prstGeom>
+          <a:noFill/>
+        </p:spPr>
+        <p:txBody>
+          <a:bodyPr wrap="square" anchor="t" lIns="36000" rIns="36000" tIns="18000" bIns="18000">
+            <a:spAutoFit/>
+          </a:bodyPr>
+          <a:lstStyle/>
+          <a:p>
+            <a:pPr algn="l"/>
             <a:r>
               <a:rPr sz="1344" b="0" i="0">
                 <a:solidFill>
-                  <a:srgbClr val="AAB4C0"/>
-                </a:solidFill>
-                <a:latin typeface="Arial"/>
-              </a:rPr>
-              <a:t>(Paste paper figure here)</a:t>
-            </a:r>
-          </a:p>
-        </p:txBody>
-      </p:sp>
-      <p:sp>
-        <p:nvSpPr>
-          <p:cNvPr id="14" name="TextBox 13"/>
-          <p:cNvSpPr txBox="1"/>
-          <p:nvPr/>
-        </p:nvSpPr>
-        <p:spPr>
-          <a:xfrm>
-            <a:off x="365760" y="3090672"/>
-            <a:ext cx="3734714" cy="274320"/>
-          </a:xfrm>
-          <a:prstGeom prst="rect">
-            <a:avLst/>
-          </a:prstGeom>
-          <a:noFill/>
-        </p:spPr>
-        <p:txBody>
-          <a:bodyPr wrap="square" anchor="t" lIns="36000" rIns="36000" tIns="18000" bIns="18000">
-            <a:spAutoFit/>
-          </a:bodyPr>
-          <a:lstStyle/>
-          <a:p>
-            <a:pPr algn="ctr"/>
-            <a:r>
-              <a:rPr sz="1120" b="0" i="1">
-                <a:solidFill>
-                  <a:srgbClr val="64748B"/>
-                </a:solidFill>
-                <a:latin typeface="Arial"/>
-              </a:rPr>
-              <a:t>Contact angle on wood</a:t>
-            </a:r>
-          </a:p>
-        </p:txBody>
-      </p:sp>
-      <p:sp>
-        <p:nvSpPr>
-          <p:cNvPr id="15" name="TextBox 14"/>
-          <p:cNvSpPr txBox="1"/>
-          <p:nvPr/>
-        </p:nvSpPr>
-        <p:spPr>
-          <a:xfrm>
-            <a:off x="365760" y="3401568"/>
-            <a:ext cx="3734714" cy="237744"/>
-          </a:xfrm>
-          <a:prstGeom prst="rect">
-            <a:avLst/>
-          </a:prstGeom>
-          <a:noFill/>
-        </p:spPr>
-        <p:txBody>
-          <a:bodyPr wrap="square" anchor="t" lIns="36000" rIns="36000" tIns="18000" bIns="18000">
-            <a:spAutoFit/>
-          </a:bodyPr>
-          <a:lstStyle/>
-          <a:p>
-            <a:pPr algn="l"/>
-            <a:r>
-              <a:rPr sz="1120" b="1" i="0">
-                <a:solidFill>
-                  <a:srgbClr val="64748B"/>
-                </a:solidFill>
-                <a:latin typeface="Arial"/>
-              </a:rPr>
-              <a:t>WETTING</a:t>
-            </a:r>
-          </a:p>
-        </p:txBody>
-      </p:sp>
-      <p:sp>
-        <p:nvSpPr>
-          <p:cNvPr id="16" name="TextBox 15"/>
-          <p:cNvSpPr txBox="1"/>
-          <p:nvPr/>
-        </p:nvSpPr>
-        <p:spPr>
-          <a:xfrm>
-            <a:off x="365760" y="3639312"/>
-            <a:ext cx="3734714" cy="310896"/>
-          </a:xfrm>
-          <a:prstGeom prst="rect">
-            <a:avLst/>
-          </a:prstGeom>
-          <a:noFill/>
-        </p:spPr>
-        <p:txBody>
-          <a:bodyPr wrap="square" anchor="t" lIns="36000" rIns="36000" tIns="18000" bIns="18000">
-            <a:spAutoFit/>
-          </a:bodyPr>
-          <a:lstStyle/>
-          <a:p>
-            <a:pPr algn="l"/>
-            <a:r>
-              <a:rPr sz="1568" b="1" i="0">
-                <a:solidFill>
-                  <a:srgbClr val="1E293B"/>
-                </a:solidFill>
-                <a:latin typeface="Arial"/>
-              </a:rPr>
-              <a:t>Contact Angle</a:t>
-            </a:r>
-          </a:p>
-        </p:txBody>
-      </p:sp>
-      <p:sp>
-        <p:nvSpPr>
-          <p:cNvPr id="17" name="TextBox 16"/>
-          <p:cNvSpPr txBox="1"/>
-          <p:nvPr/>
-        </p:nvSpPr>
-        <p:spPr>
-          <a:xfrm>
-            <a:off x="365760" y="4023360"/>
-            <a:ext cx="182880" cy="274320"/>
-          </a:xfrm>
-          <a:prstGeom prst="rect">
-            <a:avLst/>
-          </a:prstGeom>
-          <a:noFill/>
-        </p:spPr>
-        <p:txBody>
-          <a:bodyPr wrap="square" anchor="t" lIns="36000" rIns="36000" tIns="18000" bIns="18000">
-            <a:spAutoFit/>
-          </a:bodyPr>
-          <a:lstStyle/>
-          <a:p>
-            <a:pPr algn="l"/>
-            <a:r>
-              <a:rPr sz="1232" b="0" i="0">
-                <a:solidFill>
-                  <a:srgbClr val="3B5174"/>
-                </a:solidFill>
-                <a:latin typeface="Arial"/>
-              </a:rPr>
-              <a:t>•</a:t>
-            </a:r>
-          </a:p>
-        </p:txBody>
-      </p:sp>
-      <p:sp>
-        <p:nvSpPr>
-          <p:cNvPr id="18" name="TextBox 17"/>
-          <p:cNvSpPr txBox="1"/>
-          <p:nvPr/>
-        </p:nvSpPr>
-        <p:spPr>
-          <a:xfrm>
-            <a:off x="566928" y="4023360"/>
-            <a:ext cx="3533546" cy="274320"/>
-          </a:xfrm>
-          <a:prstGeom prst="rect">
-            <a:avLst/>
-          </a:prstGeom>
-          <a:noFill/>
-        </p:spPr>
-        <p:txBody>
-          <a:bodyPr wrap="square" anchor="t" lIns="36000" rIns="36000" tIns="18000" bIns="18000">
-            <a:spAutoFit/>
-          </a:bodyPr>
-          <a:lstStyle/>
-          <a:p>
-            <a:pPr algn="l"/>
-            <a:r>
-              <a:rPr sz="1232" b="0" i="0">
-                <a:solidFill>
                   <a:srgbClr val="334155"/>
                 </a:solidFill>
                 <a:latin typeface="Arial"/>
               </a:rPr>
-              <a:t>Evaluated on wood, concrete, metal</a:t>
-            </a:r>
-          </a:p>
-        </p:txBody>
-      </p:sp>
-      <p:sp>
-        <p:nvSpPr>
-          <p:cNvPr id="19" name="TextBox 18"/>
-          <p:cNvSpPr txBox="1"/>
-          <p:nvPr/>
-        </p:nvSpPr>
-        <p:spPr>
-          <a:xfrm>
-            <a:off x="365760" y="4334256"/>
-            <a:ext cx="182880" cy="274320"/>
-          </a:xfrm>
-          <a:prstGeom prst="rect">
-            <a:avLst/>
-          </a:prstGeom>
-          <a:noFill/>
-        </p:spPr>
-        <p:txBody>
-          <a:bodyPr wrap="square" anchor="t" lIns="36000" rIns="36000" tIns="18000" bIns="18000">
-            <a:spAutoFit/>
-          </a:bodyPr>
-          <a:lstStyle/>
-          <a:p>
-            <a:pPr algn="l"/>
-            <a:r>
-              <a:rPr sz="1232" b="0" i="0">
-                <a:solidFill>
-                  <a:srgbClr val="3B5174"/>
-                </a:solidFill>
-                <a:latin typeface="Arial"/>
-              </a:rPr>
-              <a:t>•</a:t>
-            </a:r>
-          </a:p>
-        </p:txBody>
-      </p:sp>
-      <p:sp>
-        <p:nvSpPr>
-          <p:cNvPr id="20" name="TextBox 19"/>
-          <p:cNvSpPr txBox="1"/>
-          <p:nvPr/>
-        </p:nvSpPr>
-        <p:spPr>
-          <a:xfrm>
-            <a:off x="566928" y="4334256"/>
-            <a:ext cx="3533546" cy="274320"/>
-          </a:xfrm>
-          <a:prstGeom prst="rect">
-            <a:avLst/>
-          </a:prstGeom>
-          <a:noFill/>
-        </p:spPr>
-        <p:txBody>
-          <a:bodyPr wrap="square" anchor="t" lIns="36000" rIns="36000" tIns="18000" bIns="18000">
-            <a:spAutoFit/>
-          </a:bodyPr>
-          <a:lstStyle/>
-          <a:p>
-            <a:pPr algn="l"/>
-            <a:r>
-              <a:rPr sz="1232" b="0" i="0">
-                <a:solidFill>
-                  <a:srgbClr val="334155"/>
-                </a:solidFill>
-                <a:latin typeface="Arial"/>
-              </a:rPr>
-              <a:t>WEG: low contact angle → wettability</a:t>
-            </a:r>
-          </a:p>
-        </p:txBody>
-      </p:sp>
-      <p:sp>
-        <p:nvSpPr>
-          <p:cNvPr id="21" name="TextBox 20"/>
-          <p:cNvSpPr txBox="1"/>
-          <p:nvPr/>
-        </p:nvSpPr>
-        <p:spPr>
-          <a:xfrm>
-            <a:off x="365760" y="4645152"/>
-            <a:ext cx="182880" cy="274320"/>
-          </a:xfrm>
-          <a:prstGeom prst="rect">
-            <a:avLst/>
-          </a:prstGeom>
-          <a:noFill/>
-        </p:spPr>
-        <p:txBody>
-          <a:bodyPr wrap="square" anchor="t" lIns="36000" rIns="36000" tIns="18000" bIns="18000">
-            <a:spAutoFit/>
-          </a:bodyPr>
-          <a:lstStyle/>
-          <a:p>
-            <a:pPr algn="l"/>
-            <a:r>
-              <a:rPr sz="1232" b="0" i="0">
-                <a:solidFill>
-                  <a:srgbClr val="3B5174"/>
-                </a:solidFill>
-                <a:latin typeface="Arial"/>
-              </a:rPr>
-              <a:t>•</a:t>
-            </a:r>
-          </a:p>
-        </p:txBody>
-      </p:sp>
-      <p:sp>
-        <p:nvSpPr>
-          <p:cNvPr id="22" name="TextBox 21"/>
-          <p:cNvSpPr txBox="1"/>
-          <p:nvPr/>
-        </p:nvSpPr>
-        <p:spPr>
-          <a:xfrm>
-            <a:off x="566928" y="4645152"/>
-            <a:ext cx="3533546" cy="274320"/>
-          </a:xfrm>
-          <a:prstGeom prst="rect">
-            <a:avLst/>
-          </a:prstGeom>
-          <a:noFill/>
-        </p:spPr>
-        <p:txBody>
-          <a:bodyPr wrap="square" anchor="t" lIns="36000" rIns="36000" tIns="18000" bIns="18000">
-            <a:spAutoFit/>
-          </a:bodyPr>
-          <a:lstStyle/>
-          <a:p>
-            <a:pPr algn="l"/>
-            <a:r>
-              <a:rPr sz="1232" b="0" i="0">
-                <a:solidFill>
-                  <a:srgbClr val="334155"/>
-                </a:solidFill>
-                <a:latin typeface="Arial"/>
-              </a:rPr>
-              <a:t>HEC+MC: high affinity to wood</a:t>
-            </a:r>
-          </a:p>
-        </p:txBody>
-      </p:sp>
-      <p:sp>
-        <p:nvSpPr>
-          <p:cNvPr id="23" name="Rounded Rectangle 22"/>
+              <a:t>Strong shear thinning (n ≪ 1)</a:t>
+            </a:r>
+          </a:p>
+        </p:txBody>
+      </p:sp>
+      <p:sp>
+        <p:nvSpPr>
+          <p:cNvPr id="16" name="Right Arrow 15"/>
           <p:cNvSpPr/>
           <p:nvPr/>
         </p:nvSpPr>
         <p:spPr>
           <a:xfrm>
-            <a:off x="4228490" y="859536"/>
-            <a:ext cx="3734714" cy="2194560"/>
-          </a:xfrm>
-          <a:prstGeom prst="roundRect">
-            <a:avLst>
-              <a:gd name="adj" fmla="val 2000"/>
-            </a:avLst>
+            <a:off x="4645152" y="1645920"/>
+            <a:ext cx="640080" cy="402336"/>
+          </a:xfrm>
+          <a:prstGeom prst="rightArrow">
+            <a:avLst/>
           </a:prstGeom>
           <a:solidFill>
-            <a:srgbClr val="F5F8FC"/>
+            <a:srgbClr val="4A7C8C"/>
           </a:solidFill>
-          <a:ln w="12700">
-            <a:solidFill>
-              <a:srgbClr val="C0D0E0"/>
-            </a:solidFill>
+          <a:ln>
+            <a:noFill/>
           </a:ln>
           <a:effectLst/>
         </p:spPr>
@@ -18023,20 +17774,198 @@
       </p:sp>
       <p:sp>
         <p:nvSpPr>
-          <p:cNvPr id="24" name="Rectangle 23"/>
+          <p:cNvPr id="17" name="Rounded Rectangle 16"/>
           <p:cNvSpPr/>
           <p:nvPr/>
         </p:nvSpPr>
         <p:spPr>
           <a:xfrm>
-            <a:off x="4338218" y="969264"/>
-            <a:ext cx="868680" cy="292608"/>
-          </a:xfrm>
-          <a:prstGeom prst="rect">
-            <a:avLst/>
+            <a:off x="5449824" y="1243584"/>
+            <a:ext cx="6376111" cy="1207008"/>
+          </a:xfrm>
+          <a:prstGeom prst="roundRect">
+            <a:avLst>
+              <a:gd name="adj" fmla="val 5000"/>
+            </a:avLst>
           </a:prstGeom>
           <a:solidFill>
-            <a:srgbClr val="1E293B"/>
+            <a:srgbClr val="FFFFFF"/>
+          </a:solidFill>
+          <a:ln w="12700">
+            <a:solidFill>
+              <a:srgbClr val="4A7C8C"/>
+            </a:solidFill>
+          </a:ln>
+          <a:effectLst/>
+        </p:spPr>
+        <p:style>
+          <a:lnRef idx="1">
+            <a:schemeClr val="accent1"/>
+          </a:lnRef>
+          <a:fillRef idx="3">
+            <a:schemeClr val="accent1"/>
+          </a:fillRef>
+          <a:effectRef idx="2">
+            <a:schemeClr val="accent1"/>
+          </a:effectRef>
+          <a:fontRef idx="minor">
+            <a:schemeClr val="lt1"/>
+          </a:fontRef>
+        </p:style>
+        <p:txBody>
+          <a:bodyPr rtlCol="0" anchor="ctr"/>
+          <a:lstStyle/>
+          <a:p>
+            <a:pPr algn="ctr"/>
+          </a:p>
+        </p:txBody>
+      </p:sp>
+      <p:sp>
+        <p:nvSpPr>
+          <p:cNvPr id="18" name="TextBox 17"/>
+          <p:cNvSpPr txBox="1"/>
+          <p:nvPr/>
+        </p:nvSpPr>
+        <p:spPr>
+          <a:xfrm>
+            <a:off x="5650992" y="1389888"/>
+            <a:ext cx="6065215" cy="365760"/>
+          </a:xfrm>
+          <a:prstGeom prst="rect">
+            <a:avLst/>
+          </a:prstGeom>
+          <a:noFill/>
+        </p:spPr>
+        <p:txBody>
+          <a:bodyPr wrap="square" anchor="t" lIns="36000" rIns="36000" tIns="18000" bIns="18000">
+            <a:spAutoFit/>
+          </a:bodyPr>
+          <a:lstStyle/>
+          <a:p>
+            <a:pPr algn="l"/>
+            <a:r>
+              <a:rPr sz="1568" b="1" i="0">
+                <a:solidFill>
+                  <a:srgbClr val="4A7C8C"/>
+                </a:solidFill>
+                <a:latin typeface="Arial"/>
+              </a:rPr>
+              <a:t>Sprayable</a:t>
+            </a:r>
+          </a:p>
+        </p:txBody>
+      </p:sp>
+      <p:sp>
+        <p:nvSpPr>
+          <p:cNvPr id="19" name="TextBox 18"/>
+          <p:cNvSpPr txBox="1"/>
+          <p:nvPr/>
+        </p:nvSpPr>
+        <p:spPr>
+          <a:xfrm>
+            <a:off x="5650992" y="1810512"/>
+            <a:ext cx="6065215" cy="566928"/>
+          </a:xfrm>
+          <a:prstGeom prst="rect">
+            <a:avLst/>
+          </a:prstGeom>
+          <a:noFill/>
+        </p:spPr>
+        <p:txBody>
+          <a:bodyPr wrap="square" anchor="t" lIns="36000" rIns="36000" tIns="18000" bIns="18000">
+            <a:spAutoFit/>
+          </a:bodyPr>
+          <a:lstStyle/>
+          <a:p>
+            <a:pPr algn="l"/>
+            <a:r>
+              <a:rPr sz="1344" b="0" i="0">
+                <a:solidFill>
+                  <a:srgbClr val="334155"/>
+                </a:solidFill>
+                <a:latin typeface="Arial"/>
+              </a:rPr>
+              <a:t>Viscosity drops under nozzle's high shear</a:t>
+            </a:r>
+          </a:p>
+          <a:p>
+            <a:pPr algn="l"/>
+            <a:r>
+              <a:rPr sz="1344" b="0" i="0">
+                <a:solidFill>
+                  <a:srgbClr val="334155"/>
+                </a:solidFill>
+                <a:latin typeface="Arial"/>
+              </a:rPr>
+              <a:t>→ Deployable with existing hoses/nozzles</a:t>
+            </a:r>
+          </a:p>
+        </p:txBody>
+      </p:sp>
+      <p:sp>
+        <p:nvSpPr>
+          <p:cNvPr id="20" name="Rounded Rectangle 19"/>
+          <p:cNvSpPr/>
+          <p:nvPr/>
+        </p:nvSpPr>
+        <p:spPr>
+          <a:xfrm>
+            <a:off x="365760" y="2633472"/>
+            <a:ext cx="4114800" cy="1207008"/>
+          </a:xfrm>
+          <a:prstGeom prst="roundRect">
+            <a:avLst>
+              <a:gd name="adj" fmla="val 5000"/>
+            </a:avLst>
+          </a:prstGeom>
+          <a:solidFill>
+            <a:srgbClr val="F1F5F9"/>
+          </a:solidFill>
+          <a:ln w="6350">
+            <a:solidFill>
+              <a:srgbClr val="E2E8F0"/>
+            </a:solidFill>
+          </a:ln>
+          <a:effectLst/>
+        </p:spPr>
+        <p:style>
+          <a:lnRef idx="1">
+            <a:schemeClr val="accent1"/>
+          </a:lnRef>
+          <a:fillRef idx="3">
+            <a:schemeClr val="accent1"/>
+          </a:fillRef>
+          <a:effectRef idx="2">
+            <a:schemeClr val="accent1"/>
+          </a:effectRef>
+          <a:fontRef idx="minor">
+            <a:schemeClr val="lt1"/>
+          </a:fontRef>
+        </p:style>
+        <p:txBody>
+          <a:bodyPr rtlCol="0" anchor="ctr"/>
+          <a:lstStyle/>
+          <a:p>
+            <a:pPr algn="ctr"/>
+          </a:p>
+        </p:txBody>
+      </p:sp>
+      <p:sp>
+        <p:nvSpPr>
+          <p:cNvPr id="21" name="Rectangle 20"/>
+          <p:cNvSpPr/>
+          <p:nvPr/>
+        </p:nvSpPr>
+        <p:spPr>
+          <a:xfrm>
+            <a:off x="365760" y="2633472"/>
+            <a:ext cx="54864" cy="1207008"/>
+          </a:xfrm>
+          <a:prstGeom prst="rect">
+            <a:avLst/>
+          </a:prstGeom>
+          <a:solidFill>
+            <a:srgbClr val="3B5174"/>
           </a:solidFill>
           <a:ln>
             <a:noFill/>
@@ -18067,412 +17996,93 @@
       </p:sp>
       <p:sp>
         <p:nvSpPr>
-          <p:cNvPr id="25" name="TextBox 24"/>
-          <p:cNvSpPr txBox="1"/>
-          <p:nvPr/>
-        </p:nvSpPr>
-        <p:spPr>
-          <a:xfrm>
-            <a:off x="4338218" y="969264"/>
-            <a:ext cx="868680" cy="292608"/>
-          </a:xfrm>
-          <a:prstGeom prst="rect">
-            <a:avLst/>
-          </a:prstGeom>
-          <a:noFill/>
-        </p:spPr>
-        <p:txBody>
-          <a:bodyPr wrap="square" anchor="ctr" lIns="36000" rIns="36000" tIns="18000" bIns="18000">
-            <a:spAutoFit/>
-          </a:bodyPr>
-          <a:lstStyle/>
-          <a:p>
-            <a:pPr algn="ctr"/>
-            <a:r>
-              <a:rPr sz="1232" b="1" i="0">
-                <a:solidFill>
-                  <a:srgbClr val="FFFFFF"/>
-                </a:solidFill>
-                <a:latin typeface="Arial"/>
-              </a:rPr>
-              <a:t>Photo</a:t>
-            </a:r>
-          </a:p>
-        </p:txBody>
-      </p:sp>
-      <p:sp>
-        <p:nvSpPr>
-          <p:cNvPr id="26" name="TextBox 25"/>
-          <p:cNvSpPr txBox="1"/>
-          <p:nvPr/>
-        </p:nvSpPr>
-        <p:spPr>
-          <a:xfrm>
-            <a:off x="4228490" y="859536"/>
-            <a:ext cx="3734714" cy="2194560"/>
-          </a:xfrm>
-          <a:prstGeom prst="rect">
-            <a:avLst/>
-          </a:prstGeom>
-          <a:noFill/>
-        </p:spPr>
-        <p:txBody>
-          <a:bodyPr wrap="square" anchor="ctr" lIns="36000" rIns="36000" tIns="18000" bIns="18000">
-            <a:spAutoFit/>
-          </a:bodyPr>
-          <a:lstStyle/>
-          <a:p>
-            <a:pPr algn="ctr"/>
+          <p:cNvPr id="22" name="TextBox 21"/>
+          <p:cNvSpPr txBox="1"/>
+          <p:nvPr/>
+        </p:nvSpPr>
+        <p:spPr>
+          <a:xfrm>
+            <a:off x="566928" y="2798064"/>
+            <a:ext cx="3803904" cy="365760"/>
+          </a:xfrm>
+          <a:prstGeom prst="rect">
+            <a:avLst/>
+          </a:prstGeom>
+          <a:noFill/>
+        </p:spPr>
+        <p:txBody>
+          <a:bodyPr wrap="square" anchor="t" lIns="36000" rIns="36000" tIns="18000" bIns="18000">
+            <a:spAutoFit/>
+          </a:bodyPr>
+          <a:lstStyle/>
+          <a:p>
+            <a:pPr algn="l"/>
+            <a:r>
+              <a:rPr sz="1568" b="1" i="0">
+                <a:solidFill>
+                  <a:srgbClr val="1E293B"/>
+                </a:solidFill>
+                <a:latin typeface="Arial"/>
+              </a:rPr>
+              <a:t>High Storage Modulus G' (G' ≫ G'')</a:t>
+            </a:r>
+          </a:p>
+        </p:txBody>
+      </p:sp>
+      <p:sp>
+        <p:nvSpPr>
+          <p:cNvPr id="23" name="TextBox 22"/>
+          <p:cNvSpPr txBox="1"/>
+          <p:nvPr/>
+        </p:nvSpPr>
+        <p:spPr>
+          <a:xfrm>
+            <a:off x="566928" y="3273552"/>
+            <a:ext cx="3803904" cy="457200"/>
+          </a:xfrm>
+          <a:prstGeom prst="rect">
+            <a:avLst/>
+          </a:prstGeom>
+          <a:noFill/>
+        </p:spPr>
+        <p:txBody>
+          <a:bodyPr wrap="square" anchor="t" lIns="36000" rIns="36000" tIns="18000" bIns="18000">
+            <a:spAutoFit/>
+          </a:bodyPr>
+          <a:lstStyle/>
+          <a:p>
+            <a:pPr algn="l"/>
             <a:r>
               <a:rPr sz="1344" b="0" i="0">
                 <a:solidFill>
-                  <a:srgbClr val="AAB4C0"/>
-                </a:solidFill>
-                <a:latin typeface="Arial"/>
-              </a:rPr>
-              <a:t>(Paste paper figure here)</a:t>
-            </a:r>
-          </a:p>
-        </p:txBody>
-      </p:sp>
-      <p:sp>
-        <p:nvSpPr>
-          <p:cNvPr id="27" name="TextBox 26"/>
-          <p:cNvSpPr txBox="1"/>
-          <p:nvPr/>
-        </p:nvSpPr>
-        <p:spPr>
-          <a:xfrm>
-            <a:off x="4228490" y="3090672"/>
-            <a:ext cx="3734714" cy="274320"/>
-          </a:xfrm>
-          <a:prstGeom prst="rect">
-            <a:avLst/>
-          </a:prstGeom>
-          <a:noFill/>
-        </p:spPr>
-        <p:txBody>
-          <a:bodyPr wrap="square" anchor="t" lIns="36000" rIns="36000" tIns="18000" bIns="18000">
-            <a:spAutoFit/>
-          </a:bodyPr>
-          <a:lstStyle/>
-          <a:p>
-            <a:pPr algn="ctr"/>
-            <a:r>
-              <a:rPr sz="1120" b="0" i="1">
-                <a:solidFill>
-                  <a:srgbClr val="64748B"/>
-                </a:solidFill>
-                <a:latin typeface="Arial"/>
-              </a:rPr>
-              <a:t>Gel retention on vertical substrate</a:t>
-            </a:r>
-          </a:p>
-        </p:txBody>
-      </p:sp>
-      <p:sp>
-        <p:nvSpPr>
-          <p:cNvPr id="28" name="TextBox 27"/>
-          <p:cNvSpPr txBox="1"/>
-          <p:nvPr/>
-        </p:nvSpPr>
-        <p:spPr>
-          <a:xfrm>
-            <a:off x="4228490" y="3401568"/>
-            <a:ext cx="3734714" cy="237744"/>
-          </a:xfrm>
-          <a:prstGeom prst="rect">
-            <a:avLst/>
-          </a:prstGeom>
-          <a:noFill/>
-        </p:spPr>
-        <p:txBody>
-          <a:bodyPr wrap="square" anchor="t" lIns="36000" rIns="36000" tIns="18000" bIns="18000">
-            <a:spAutoFit/>
-          </a:bodyPr>
-          <a:lstStyle/>
-          <a:p>
-            <a:pPr algn="l"/>
-            <a:r>
-              <a:rPr sz="1120" b="1" i="0">
-                <a:solidFill>
-                  <a:srgbClr val="64748B"/>
-                </a:solidFill>
-                <a:latin typeface="Arial"/>
-              </a:rPr>
-              <a:t>ADHESION</a:t>
-            </a:r>
-          </a:p>
-        </p:txBody>
-      </p:sp>
-      <p:sp>
-        <p:nvSpPr>
-          <p:cNvPr id="29" name="TextBox 28"/>
-          <p:cNvSpPr txBox="1"/>
-          <p:nvPr/>
-        </p:nvSpPr>
-        <p:spPr>
-          <a:xfrm>
-            <a:off x="4228490" y="3639312"/>
-            <a:ext cx="3734714" cy="310896"/>
-          </a:xfrm>
-          <a:prstGeom prst="rect">
-            <a:avLst/>
-          </a:prstGeom>
-          <a:noFill/>
-        </p:spPr>
-        <p:txBody>
-          <a:bodyPr wrap="square" anchor="t" lIns="36000" rIns="36000" tIns="18000" bIns="18000">
-            <a:spAutoFit/>
-          </a:bodyPr>
-          <a:lstStyle/>
-          <a:p>
-            <a:pPr algn="l"/>
-            <a:r>
-              <a:rPr sz="1568" b="1" i="0">
-                <a:solidFill>
-                  <a:srgbClr val="1E293B"/>
-                </a:solidFill>
-                <a:latin typeface="Arial"/>
-              </a:rPr>
-              <a:t>Vertical Adhesion</a:t>
-            </a:r>
-          </a:p>
-        </p:txBody>
-      </p:sp>
-      <p:sp>
-        <p:nvSpPr>
-          <p:cNvPr id="30" name="TextBox 29"/>
-          <p:cNvSpPr txBox="1"/>
-          <p:nvPr/>
-        </p:nvSpPr>
-        <p:spPr>
-          <a:xfrm>
-            <a:off x="4228490" y="4023360"/>
-            <a:ext cx="182880" cy="274320"/>
-          </a:xfrm>
-          <a:prstGeom prst="rect">
-            <a:avLst/>
-          </a:prstGeom>
-          <a:noFill/>
-        </p:spPr>
-        <p:txBody>
-          <a:bodyPr wrap="square" anchor="t" lIns="36000" rIns="36000" tIns="18000" bIns="18000">
-            <a:spAutoFit/>
-          </a:bodyPr>
-          <a:lstStyle/>
-          <a:p>
-            <a:pPr algn="l"/>
-            <a:r>
-              <a:rPr sz="1232" b="0" i="0">
-                <a:solidFill>
-                  <a:srgbClr val="3B5174"/>
-                </a:solidFill>
-                <a:latin typeface="Arial"/>
-              </a:rPr>
-              <a:t>•</a:t>
-            </a:r>
-          </a:p>
-        </p:txBody>
-      </p:sp>
-      <p:sp>
-        <p:nvSpPr>
-          <p:cNvPr id="31" name="TextBox 30"/>
-          <p:cNvSpPr txBox="1"/>
-          <p:nvPr/>
-        </p:nvSpPr>
-        <p:spPr>
-          <a:xfrm>
-            <a:off x="4429658" y="4023360"/>
-            <a:ext cx="3533546" cy="274320"/>
-          </a:xfrm>
-          <a:prstGeom prst="rect">
-            <a:avLst/>
-          </a:prstGeom>
-          <a:noFill/>
-        </p:spPr>
-        <p:txBody>
-          <a:bodyPr wrap="square" anchor="t" lIns="36000" rIns="36000" tIns="18000" bIns="18000">
-            <a:spAutoFit/>
-          </a:bodyPr>
-          <a:lstStyle/>
-          <a:p>
-            <a:pPr algn="l"/>
-            <a:r>
-              <a:rPr sz="1232" b="0" i="0">
-                <a:solidFill>
                   <a:srgbClr val="334155"/>
                 </a:solidFill>
                 <a:latin typeface="Arial"/>
               </a:rPr>
-              <a:t>Applied to vertical substrate</a:t>
-            </a:r>
-          </a:p>
-        </p:txBody>
-      </p:sp>
-      <p:sp>
-        <p:nvSpPr>
-          <p:cNvPr id="32" name="TextBox 31"/>
-          <p:cNvSpPr txBox="1"/>
-          <p:nvPr/>
-        </p:nvSpPr>
-        <p:spPr>
-          <a:xfrm>
-            <a:off x="4228490" y="4334256"/>
-            <a:ext cx="182880" cy="274320"/>
-          </a:xfrm>
-          <a:prstGeom prst="rect">
-            <a:avLst/>
-          </a:prstGeom>
-          <a:noFill/>
-        </p:spPr>
-        <p:txBody>
-          <a:bodyPr wrap="square" anchor="t" lIns="36000" rIns="36000" tIns="18000" bIns="18000">
-            <a:spAutoFit/>
-          </a:bodyPr>
-          <a:lstStyle/>
-          <a:p>
-            <a:pPr algn="l"/>
-            <a:r>
-              <a:rPr sz="1232" b="0" i="0">
-                <a:solidFill>
-                  <a:srgbClr val="3B5174"/>
-                </a:solidFill>
-                <a:latin typeface="Arial"/>
-              </a:rPr>
-              <a:t>•</a:t>
-            </a:r>
-          </a:p>
-        </p:txBody>
-      </p:sp>
-      <p:sp>
-        <p:nvSpPr>
-          <p:cNvPr id="33" name="TextBox 32"/>
-          <p:cNvSpPr txBox="1"/>
-          <p:nvPr/>
-        </p:nvSpPr>
-        <p:spPr>
-          <a:xfrm>
-            <a:off x="4429658" y="4334256"/>
-            <a:ext cx="3533546" cy="274320"/>
-          </a:xfrm>
-          <a:prstGeom prst="rect">
-            <a:avLst/>
-          </a:prstGeom>
-          <a:noFill/>
-        </p:spPr>
-        <p:txBody>
-          <a:bodyPr wrap="square" anchor="t" lIns="36000" rIns="36000" tIns="18000" bIns="18000">
-            <a:spAutoFit/>
-          </a:bodyPr>
-          <a:lstStyle/>
-          <a:p>
-            <a:pPr algn="l"/>
-            <a:r>
-              <a:rPr sz="1232" b="0" i="0">
-                <a:solidFill>
-                  <a:srgbClr val="334155"/>
-                </a:solidFill>
-                <a:latin typeface="Arial"/>
-              </a:rPr>
-              <a:t>G' ≫ G'' → no run-off</a:t>
-            </a:r>
-          </a:p>
-        </p:txBody>
-      </p:sp>
-      <p:sp>
-        <p:nvSpPr>
-          <p:cNvPr id="34" name="TextBox 33"/>
-          <p:cNvSpPr txBox="1"/>
-          <p:nvPr/>
-        </p:nvSpPr>
-        <p:spPr>
-          <a:xfrm>
-            <a:off x="4228490" y="4645152"/>
-            <a:ext cx="182880" cy="274320"/>
-          </a:xfrm>
-          <a:prstGeom prst="rect">
-            <a:avLst/>
-          </a:prstGeom>
-          <a:noFill/>
-        </p:spPr>
-        <p:txBody>
-          <a:bodyPr wrap="square" anchor="t" lIns="36000" rIns="36000" tIns="18000" bIns="18000">
-            <a:spAutoFit/>
-          </a:bodyPr>
-          <a:lstStyle/>
-          <a:p>
-            <a:pPr algn="l"/>
-            <a:r>
-              <a:rPr sz="1232" b="0" i="0">
-                <a:solidFill>
-                  <a:srgbClr val="3B5174"/>
-                </a:solidFill>
-                <a:latin typeface="Arial"/>
-              </a:rPr>
-              <a:t>•</a:t>
-            </a:r>
-          </a:p>
-        </p:txBody>
-      </p:sp>
-      <p:sp>
-        <p:nvSpPr>
-          <p:cNvPr id="35" name="TextBox 34"/>
-          <p:cNvSpPr txBox="1"/>
-          <p:nvPr/>
-        </p:nvSpPr>
-        <p:spPr>
-          <a:xfrm>
-            <a:off x="4429658" y="4645152"/>
-            <a:ext cx="3533546" cy="274320"/>
-          </a:xfrm>
-          <a:prstGeom prst="rect">
-            <a:avLst/>
-          </a:prstGeom>
-          <a:noFill/>
-        </p:spPr>
-        <p:txBody>
-          <a:bodyPr wrap="square" anchor="t" lIns="36000" rIns="36000" tIns="18000" bIns="18000">
-            <a:spAutoFit/>
-          </a:bodyPr>
-          <a:lstStyle/>
-          <a:p>
-            <a:pPr algn="l"/>
-            <a:r>
-              <a:rPr sz="1232" b="0" i="0">
-                <a:solidFill>
-                  <a:srgbClr val="334155"/>
-                </a:solidFill>
-                <a:latin typeface="Arial"/>
-              </a:rPr>
-              <a:t>Retention ≥ AquaGel-K</a:t>
-            </a:r>
-          </a:p>
-        </p:txBody>
-      </p:sp>
-      <p:sp>
-        <p:nvSpPr>
-          <p:cNvPr id="36" name="Rounded Rectangle 35"/>
+              <a:t>Holds gel state at rest</a:t>
+            </a:r>
+          </a:p>
+        </p:txBody>
+      </p:sp>
+      <p:sp>
+        <p:nvSpPr>
+          <p:cNvPr id="24" name="Right Arrow 23"/>
           <p:cNvSpPr/>
           <p:nvPr/>
         </p:nvSpPr>
         <p:spPr>
           <a:xfrm>
-            <a:off x="8091220" y="859536"/>
-            <a:ext cx="3734714" cy="2194560"/>
-          </a:xfrm>
-          <a:prstGeom prst="roundRect">
-            <a:avLst>
-              <a:gd name="adj" fmla="val 2000"/>
-            </a:avLst>
+            <a:off x="4645152" y="3035808"/>
+            <a:ext cx="640080" cy="402336"/>
+          </a:xfrm>
+          <a:prstGeom prst="rightArrow">
+            <a:avLst/>
           </a:prstGeom>
           <a:solidFill>
-            <a:srgbClr val="F5F8FC"/>
+            <a:srgbClr val="3B5174"/>
           </a:solidFill>
-          <a:ln w="12700">
-            <a:solidFill>
-              <a:srgbClr val="C0D0E0"/>
-            </a:solidFill>
+          <a:ln>
+            <a:noFill/>
           </a:ln>
           <a:effectLst/>
         </p:spPr>
@@ -18500,20 +18110,198 @@
       </p:sp>
       <p:sp>
         <p:nvSpPr>
-          <p:cNvPr id="37" name="Rectangle 36"/>
+          <p:cNvPr id="25" name="Rounded Rectangle 24"/>
           <p:cNvSpPr/>
           <p:nvPr/>
         </p:nvSpPr>
         <p:spPr>
           <a:xfrm>
-            <a:off x="8200948" y="969264"/>
-            <a:ext cx="868680" cy="292608"/>
-          </a:xfrm>
-          <a:prstGeom prst="rect">
-            <a:avLst/>
+            <a:off x="5449824" y="2633472"/>
+            <a:ext cx="6376111" cy="1207008"/>
+          </a:xfrm>
+          <a:prstGeom prst="roundRect">
+            <a:avLst>
+              <a:gd name="adj" fmla="val 5000"/>
+            </a:avLst>
           </a:prstGeom>
           <a:solidFill>
-            <a:srgbClr val="1E293B"/>
+            <a:srgbClr val="FFFFFF"/>
+          </a:solidFill>
+          <a:ln w="12700">
+            <a:solidFill>
+              <a:srgbClr val="3B5174"/>
+            </a:solidFill>
+          </a:ln>
+          <a:effectLst/>
+        </p:spPr>
+        <p:style>
+          <a:lnRef idx="1">
+            <a:schemeClr val="accent1"/>
+          </a:lnRef>
+          <a:fillRef idx="3">
+            <a:schemeClr val="accent1"/>
+          </a:fillRef>
+          <a:effectRef idx="2">
+            <a:schemeClr val="accent1"/>
+          </a:effectRef>
+          <a:fontRef idx="minor">
+            <a:schemeClr val="lt1"/>
+          </a:fontRef>
+        </p:style>
+        <p:txBody>
+          <a:bodyPr rtlCol="0" anchor="ctr"/>
+          <a:lstStyle/>
+          <a:p>
+            <a:pPr algn="ctr"/>
+          </a:p>
+        </p:txBody>
+      </p:sp>
+      <p:sp>
+        <p:nvSpPr>
+          <p:cNvPr id="26" name="TextBox 25"/>
+          <p:cNvSpPr txBox="1"/>
+          <p:nvPr/>
+        </p:nvSpPr>
+        <p:spPr>
+          <a:xfrm>
+            <a:off x="5650992" y="2779776"/>
+            <a:ext cx="6065215" cy="365760"/>
+          </a:xfrm>
+          <a:prstGeom prst="rect">
+            <a:avLst/>
+          </a:prstGeom>
+          <a:noFill/>
+        </p:spPr>
+        <p:txBody>
+          <a:bodyPr wrap="square" anchor="t" lIns="36000" rIns="36000" tIns="18000" bIns="18000">
+            <a:spAutoFit/>
+          </a:bodyPr>
+          <a:lstStyle/>
+          <a:p>
+            <a:pPr algn="l"/>
+            <a:r>
+              <a:rPr sz="1568" b="1" i="0">
+                <a:solidFill>
+                  <a:srgbClr val="3B5174"/>
+                </a:solidFill>
+                <a:latin typeface="Arial"/>
+              </a:rPr>
+              <a:t>No run-off on vertical surfaces</a:t>
+            </a:r>
+          </a:p>
+        </p:txBody>
+      </p:sp>
+      <p:sp>
+        <p:nvSpPr>
+          <p:cNvPr id="27" name="TextBox 26"/>
+          <p:cNvSpPr txBox="1"/>
+          <p:nvPr/>
+        </p:nvSpPr>
+        <p:spPr>
+          <a:xfrm>
+            <a:off x="5650992" y="3200400"/>
+            <a:ext cx="6065215" cy="566928"/>
+          </a:xfrm>
+          <a:prstGeom prst="rect">
+            <a:avLst/>
+          </a:prstGeom>
+          <a:noFill/>
+        </p:spPr>
+        <p:txBody>
+          <a:bodyPr wrap="square" anchor="t" lIns="36000" rIns="36000" tIns="18000" bIns="18000">
+            <a:spAutoFit/>
+          </a:bodyPr>
+          <a:lstStyle/>
+          <a:p>
+            <a:pPr algn="l"/>
+            <a:r>
+              <a:rPr sz="1344" b="0" i="0">
+                <a:solidFill>
+                  <a:srgbClr val="334155"/>
+                </a:solidFill>
+                <a:latin typeface="Arial"/>
+              </a:rPr>
+              <a:t>Retains shape and adheres after application</a:t>
+            </a:r>
+          </a:p>
+          <a:p>
+            <a:pPr algn="l"/>
+            <a:r>
+              <a:rPr sz="1344" b="0" i="0">
+                <a:solidFill>
+                  <a:srgbClr val="334155"/>
+                </a:solidFill>
+                <a:latin typeface="Arial"/>
+              </a:rPr>
+              <a:t>→ Holds on vertical substrates (wood, walls)</a:t>
+            </a:r>
+          </a:p>
+        </p:txBody>
+      </p:sp>
+      <p:sp>
+        <p:nvSpPr>
+          <p:cNvPr id="28" name="Rounded Rectangle 27"/>
+          <p:cNvSpPr/>
+          <p:nvPr/>
+        </p:nvSpPr>
+        <p:spPr>
+          <a:xfrm>
+            <a:off x="365760" y="4023360"/>
+            <a:ext cx="4114800" cy="1207008"/>
+          </a:xfrm>
+          <a:prstGeom prst="roundRect">
+            <a:avLst>
+              <a:gd name="adj" fmla="val 5000"/>
+            </a:avLst>
+          </a:prstGeom>
+          <a:solidFill>
+            <a:srgbClr val="F1F5F9"/>
+          </a:solidFill>
+          <a:ln w="6350">
+            <a:solidFill>
+              <a:srgbClr val="E2E8F0"/>
+            </a:solidFill>
+          </a:ln>
+          <a:effectLst/>
+        </p:spPr>
+        <p:style>
+          <a:lnRef idx="1">
+            <a:schemeClr val="accent1"/>
+          </a:lnRef>
+          <a:fillRef idx="3">
+            <a:schemeClr val="accent1"/>
+          </a:fillRef>
+          <a:effectRef idx="2">
+            <a:schemeClr val="accent1"/>
+          </a:effectRef>
+          <a:fontRef idx="minor">
+            <a:schemeClr val="lt1"/>
+          </a:fontRef>
+        </p:style>
+        <p:txBody>
+          <a:bodyPr rtlCol="0" anchor="ctr"/>
+          <a:lstStyle/>
+          <a:p>
+            <a:pPr algn="ctr"/>
+          </a:p>
+        </p:txBody>
+      </p:sp>
+      <p:sp>
+        <p:nvSpPr>
+          <p:cNvPr id="29" name="Rectangle 28"/>
+          <p:cNvSpPr/>
+          <p:nvPr/>
+        </p:nvSpPr>
+        <p:spPr>
+          <a:xfrm>
+            <a:off x="365760" y="4023360"/>
+            <a:ext cx="54864" cy="1207008"/>
+          </a:xfrm>
+          <a:prstGeom prst="rect">
+            <a:avLst/>
+          </a:prstGeom>
+          <a:solidFill>
+            <a:srgbClr val="D4A574"/>
           </a:solidFill>
           <a:ln>
             <a:noFill/>
@@ -18544,84 +18332,176 @@
       </p:sp>
       <p:sp>
         <p:nvSpPr>
-          <p:cNvPr id="38" name="TextBox 37"/>
-          <p:cNvSpPr txBox="1"/>
-          <p:nvPr/>
-        </p:nvSpPr>
-        <p:spPr>
-          <a:xfrm>
-            <a:off x="8200948" y="969264"/>
-            <a:ext cx="868680" cy="292608"/>
-          </a:xfrm>
-          <a:prstGeom prst="rect">
-            <a:avLst/>
-          </a:prstGeom>
-          <a:noFill/>
-        </p:spPr>
-        <p:txBody>
-          <a:bodyPr wrap="square" anchor="ctr" lIns="36000" rIns="36000" tIns="18000" bIns="18000">
-            <a:spAutoFit/>
-          </a:bodyPr>
-          <a:lstStyle/>
-          <a:p>
-            <a:pPr algn="ctr"/>
-            <a:r>
-              <a:rPr sz="1232" b="1" i="0">
-                <a:solidFill>
-                  <a:srgbClr val="FFFFFF"/>
-                </a:solidFill>
-                <a:latin typeface="Arial"/>
-              </a:rPr>
-              <a:t>Photo</a:t>
-            </a:r>
-          </a:p>
-        </p:txBody>
-      </p:sp>
-      <p:sp>
-        <p:nvSpPr>
-          <p:cNvPr id="39" name="TextBox 38"/>
-          <p:cNvSpPr txBox="1"/>
-          <p:nvPr/>
-        </p:nvSpPr>
-        <p:spPr>
-          <a:xfrm>
-            <a:off x="8091220" y="859536"/>
-            <a:ext cx="3734714" cy="2194560"/>
-          </a:xfrm>
-          <a:prstGeom prst="rect">
-            <a:avLst/>
-          </a:prstGeom>
-          <a:noFill/>
-        </p:spPr>
-        <p:txBody>
-          <a:bodyPr wrap="square" anchor="ctr" lIns="36000" rIns="36000" tIns="18000" bIns="18000">
-            <a:spAutoFit/>
-          </a:bodyPr>
-          <a:lstStyle/>
-          <a:p>
-            <a:pPr algn="ctr"/>
+          <p:cNvPr id="30" name="TextBox 29"/>
+          <p:cNvSpPr txBox="1"/>
+          <p:nvPr/>
+        </p:nvSpPr>
+        <p:spPr>
+          <a:xfrm>
+            <a:off x="566928" y="4187952"/>
+            <a:ext cx="3803904" cy="365760"/>
+          </a:xfrm>
+          <a:prstGeom prst="rect">
+            <a:avLst/>
+          </a:prstGeom>
+          <a:noFill/>
+        </p:spPr>
+        <p:txBody>
+          <a:bodyPr wrap="square" anchor="t" lIns="36000" rIns="36000" tIns="18000" bIns="18000">
+            <a:spAutoFit/>
+          </a:bodyPr>
+          <a:lstStyle/>
+          <a:p>
+            <a:pPr algn="l"/>
+            <a:r>
+              <a:rPr sz="1568" b="1" i="0">
+                <a:solidFill>
+                  <a:srgbClr val="1E293B"/>
+                </a:solidFill>
+                <a:latin typeface="Arial"/>
+              </a:rPr>
+              <a:t>Self-healing</a:t>
+            </a:r>
+          </a:p>
+        </p:txBody>
+      </p:sp>
+      <p:sp>
+        <p:nvSpPr>
+          <p:cNvPr id="31" name="TextBox 30"/>
+          <p:cNvSpPr txBox="1"/>
+          <p:nvPr/>
+        </p:nvSpPr>
+        <p:spPr>
+          <a:xfrm>
+            <a:off x="566928" y="4663440"/>
+            <a:ext cx="3803904" cy="457200"/>
+          </a:xfrm>
+          <a:prstGeom prst="rect">
+            <a:avLst/>
+          </a:prstGeom>
+          <a:noFill/>
+        </p:spPr>
+        <p:txBody>
+          <a:bodyPr wrap="square" anchor="t" lIns="36000" rIns="36000" tIns="18000" bIns="18000">
+            <a:spAutoFit/>
+          </a:bodyPr>
+          <a:lstStyle/>
+          <a:p>
+            <a:pPr algn="l"/>
             <a:r>
               <a:rPr sz="1344" b="0" i="0">
                 <a:solidFill>
-                  <a:srgbClr val="AAB4C0"/>
-                </a:solidFill>
-                <a:latin typeface="Arial"/>
-              </a:rPr>
-              <a:t>(Paste paper figure here)</a:t>
-            </a:r>
-          </a:p>
-        </p:txBody>
-      </p:sp>
-      <p:sp>
-        <p:nvSpPr>
-          <p:cNvPr id="40" name="TextBox 39"/>
-          <p:cNvSpPr txBox="1"/>
-          <p:nvPr/>
-        </p:nvSpPr>
-        <p:spPr>
-          <a:xfrm>
-            <a:off x="8091220" y="3090672"/>
-            <a:ext cx="3734714" cy="274320"/>
+                  <a:srgbClr val="334155"/>
+                </a:solidFill>
+                <a:latin typeface="Arial"/>
+              </a:rPr>
+              <a:t>G' recovers instantly after step-strain</a:t>
+            </a:r>
+          </a:p>
+        </p:txBody>
+      </p:sp>
+      <p:sp>
+        <p:nvSpPr>
+          <p:cNvPr id="32" name="Right Arrow 31"/>
+          <p:cNvSpPr/>
+          <p:nvPr/>
+        </p:nvSpPr>
+        <p:spPr>
+          <a:xfrm>
+            <a:off x="4645152" y="4425696"/>
+            <a:ext cx="640080" cy="402336"/>
+          </a:xfrm>
+          <a:prstGeom prst="rightArrow">
+            <a:avLst/>
+          </a:prstGeom>
+          <a:solidFill>
+            <a:srgbClr val="D4A574"/>
+          </a:solidFill>
+          <a:ln>
+            <a:noFill/>
+          </a:ln>
+          <a:effectLst/>
+        </p:spPr>
+        <p:style>
+          <a:lnRef idx="1">
+            <a:schemeClr val="accent1"/>
+          </a:lnRef>
+          <a:fillRef idx="3">
+            <a:schemeClr val="accent1"/>
+          </a:fillRef>
+          <a:effectRef idx="2">
+            <a:schemeClr val="accent1"/>
+          </a:effectRef>
+          <a:fontRef idx="minor">
+            <a:schemeClr val="lt1"/>
+          </a:fontRef>
+        </p:style>
+        <p:txBody>
+          <a:bodyPr rtlCol="0" anchor="ctr"/>
+          <a:lstStyle/>
+          <a:p>
+            <a:pPr algn="ctr"/>
+          </a:p>
+        </p:txBody>
+      </p:sp>
+      <p:sp>
+        <p:nvSpPr>
+          <p:cNvPr id="33" name="Rounded Rectangle 32"/>
+          <p:cNvSpPr/>
+          <p:nvPr/>
+        </p:nvSpPr>
+        <p:spPr>
+          <a:xfrm>
+            <a:off x="5449824" y="4023360"/>
+            <a:ext cx="6376111" cy="1207008"/>
+          </a:xfrm>
+          <a:prstGeom prst="roundRect">
+            <a:avLst>
+              <a:gd name="adj" fmla="val 5000"/>
+            </a:avLst>
+          </a:prstGeom>
+          <a:solidFill>
+            <a:srgbClr val="FFFFFF"/>
+          </a:solidFill>
+          <a:ln w="12700">
+            <a:solidFill>
+              <a:srgbClr val="D4A574"/>
+            </a:solidFill>
+          </a:ln>
+          <a:effectLst/>
+        </p:spPr>
+        <p:style>
+          <a:lnRef idx="1">
+            <a:schemeClr val="accent1"/>
+          </a:lnRef>
+          <a:fillRef idx="3">
+            <a:schemeClr val="accent1"/>
+          </a:fillRef>
+          <a:effectRef idx="2">
+            <a:schemeClr val="accent1"/>
+          </a:effectRef>
+          <a:fontRef idx="minor">
+            <a:schemeClr val="lt1"/>
+          </a:fontRef>
+        </p:style>
+        <p:txBody>
+          <a:bodyPr rtlCol="0" anchor="ctr"/>
+          <a:lstStyle/>
+          <a:p>
+            <a:pPr algn="ctr"/>
+          </a:p>
+        </p:txBody>
+      </p:sp>
+      <p:sp>
+        <p:nvSpPr>
+          <p:cNvPr id="34" name="TextBox 33"/>
+          <p:cNvSpPr txBox="1"/>
+          <p:nvPr/>
+        </p:nvSpPr>
+        <p:spPr>
+          <a:xfrm>
+            <a:off x="5650992" y="4169664"/>
+            <a:ext cx="6065215" cy="365760"/>
           </a:xfrm>
           <a:prstGeom prst="rect">
             <a:avLst/>
@@ -18634,29 +18514,29 @@
           </a:bodyPr>
           <a:lstStyle/>
           <a:p>
-            <a:pPr algn="ctr"/>
-            <a:r>
-              <a:rPr sz="1120" b="0" i="1">
-                <a:solidFill>
-                  <a:srgbClr val="64748B"/>
-                </a:solidFill>
-                <a:latin typeface="Arial"/>
-              </a:rPr>
-              <a:t>Nozzle spraying in action</a:t>
-            </a:r>
-          </a:p>
-        </p:txBody>
-      </p:sp>
-      <p:sp>
-        <p:nvSpPr>
-          <p:cNvPr id="41" name="TextBox 40"/>
-          <p:cNvSpPr txBox="1"/>
-          <p:nvPr/>
-        </p:nvSpPr>
-        <p:spPr>
-          <a:xfrm>
-            <a:off x="8091220" y="3401568"/>
-            <a:ext cx="3734714" cy="237744"/>
+            <a:pPr algn="l"/>
+            <a:r>
+              <a:rPr sz="1568" b="1" i="0">
+                <a:solidFill>
+                  <a:srgbClr val="D4A574"/>
+                </a:solidFill>
+                <a:latin typeface="Arial"/>
+              </a:rPr>
+              <a:t>Forms protective layer on landing</a:t>
+            </a:r>
+          </a:p>
+        </p:txBody>
+      </p:sp>
+      <p:sp>
+        <p:nvSpPr>
+          <p:cNvPr id="35" name="TextBox 34"/>
+          <p:cNvSpPr txBox="1"/>
+          <p:nvPr/>
+        </p:nvSpPr>
+        <p:spPr>
+          <a:xfrm>
+            <a:off x="5650992" y="4590288"/>
+            <a:ext cx="6065215" cy="566928"/>
           </a:xfrm>
           <a:prstGeom prst="rect">
             <a:avLst/>
@@ -18671,272 +18551,39 @@
           <a:p>
             <a:pPr algn="l"/>
             <a:r>
-              <a:rPr sz="1120" b="1" i="0">
-                <a:solidFill>
-                  <a:srgbClr val="64748B"/>
-                </a:solidFill>
-                <a:latin typeface="Arial"/>
-              </a:rPr>
-              <a:t>SPRAY</a:t>
-            </a:r>
-          </a:p>
-        </p:txBody>
-      </p:sp>
-      <p:sp>
-        <p:nvSpPr>
-          <p:cNvPr id="42" name="TextBox 41"/>
-          <p:cNvSpPr txBox="1"/>
-          <p:nvPr/>
-        </p:nvSpPr>
-        <p:spPr>
-          <a:xfrm>
-            <a:off x="8091220" y="3639312"/>
-            <a:ext cx="3734714" cy="310896"/>
-          </a:xfrm>
-          <a:prstGeom prst="rect">
-            <a:avLst/>
-          </a:prstGeom>
-          <a:noFill/>
-        </p:spPr>
-        <p:txBody>
-          <a:bodyPr wrap="square" anchor="t" lIns="36000" rIns="36000" tIns="18000" bIns="18000">
-            <a:spAutoFit/>
-          </a:bodyPr>
-          <a:lstStyle/>
-          <a:p>
-            <a:pPr algn="l"/>
-            <a:r>
-              <a:rPr sz="1568" b="1" i="0">
-                <a:solidFill>
-                  <a:srgbClr val="1E293B"/>
-                </a:solidFill>
-                <a:latin typeface="Arial"/>
-              </a:rPr>
-              <a:t>Spray Suitability</a:t>
-            </a:r>
-          </a:p>
-        </p:txBody>
-      </p:sp>
-      <p:sp>
-        <p:nvSpPr>
-          <p:cNvPr id="43" name="TextBox 42"/>
-          <p:cNvSpPr txBox="1"/>
-          <p:nvPr/>
-        </p:nvSpPr>
-        <p:spPr>
-          <a:xfrm>
-            <a:off x="8091220" y="4023360"/>
-            <a:ext cx="182880" cy="274320"/>
-          </a:xfrm>
-          <a:prstGeom prst="rect">
-            <a:avLst/>
-          </a:prstGeom>
-          <a:noFill/>
-        </p:spPr>
-        <p:txBody>
-          <a:bodyPr wrap="square" anchor="t" lIns="36000" rIns="36000" tIns="18000" bIns="18000">
-            <a:spAutoFit/>
-          </a:bodyPr>
-          <a:lstStyle/>
-          <a:p>
-            <a:pPr algn="l"/>
-            <a:r>
-              <a:rPr sz="1232" b="0" i="0">
-                <a:solidFill>
-                  <a:srgbClr val="3B5174"/>
-                </a:solidFill>
-                <a:latin typeface="Arial"/>
-              </a:rPr>
-              <a:t>•</a:t>
-            </a:r>
-          </a:p>
-        </p:txBody>
-      </p:sp>
-      <p:sp>
-        <p:nvSpPr>
-          <p:cNvPr id="44" name="TextBox 43"/>
-          <p:cNvSpPr txBox="1"/>
-          <p:nvPr/>
-        </p:nvSpPr>
-        <p:spPr>
-          <a:xfrm>
-            <a:off x="8292388" y="4023360"/>
-            <a:ext cx="3533546" cy="274320"/>
-          </a:xfrm>
-          <a:prstGeom prst="rect">
-            <a:avLst/>
-          </a:prstGeom>
-          <a:noFill/>
-        </p:spPr>
-        <p:txBody>
-          <a:bodyPr wrap="square" anchor="t" lIns="36000" rIns="36000" tIns="18000" bIns="18000">
-            <a:spAutoFit/>
-          </a:bodyPr>
-          <a:lstStyle/>
-          <a:p>
-            <a:pPr algn="l"/>
-            <a:r>
-              <a:rPr sz="1232" b="0" i="0">
+              <a:rPr sz="1344" b="0" i="0">
                 <a:solidFill>
                   <a:srgbClr val="334155"/>
                 </a:solidFill>
                 <a:latin typeface="Arial"/>
               </a:rPr>
-              <a:t>Viscosity drops under high shear</a:t>
-            </a:r>
-          </a:p>
-        </p:txBody>
-      </p:sp>
-      <p:sp>
-        <p:nvSpPr>
-          <p:cNvPr id="45" name="TextBox 44"/>
-          <p:cNvSpPr txBox="1"/>
-          <p:nvPr/>
-        </p:nvSpPr>
-        <p:spPr>
-          <a:xfrm>
-            <a:off x="8091220" y="4334256"/>
-            <a:ext cx="182880" cy="274320"/>
-          </a:xfrm>
-          <a:prstGeom prst="rect">
-            <a:avLst/>
-          </a:prstGeom>
-          <a:noFill/>
-        </p:spPr>
-        <p:txBody>
-          <a:bodyPr wrap="square" anchor="t" lIns="36000" rIns="36000" tIns="18000" bIns="18000">
-            <a:spAutoFit/>
-          </a:bodyPr>
-          <a:lstStyle/>
-          <a:p>
-            <a:pPr algn="l"/>
-            <a:r>
-              <a:rPr sz="1232" b="0" i="0">
-                <a:solidFill>
-                  <a:srgbClr val="3B5174"/>
-                </a:solidFill>
-                <a:latin typeface="Arial"/>
-              </a:rPr>
-              <a:t>•</a:t>
-            </a:r>
-          </a:p>
-        </p:txBody>
-      </p:sp>
-      <p:sp>
-        <p:nvSpPr>
-          <p:cNvPr id="46" name="TextBox 45"/>
-          <p:cNvSpPr txBox="1"/>
-          <p:nvPr/>
-        </p:nvSpPr>
-        <p:spPr>
-          <a:xfrm>
-            <a:off x="8292388" y="4334256"/>
-            <a:ext cx="3533546" cy="274320"/>
-          </a:xfrm>
-          <a:prstGeom prst="rect">
-            <a:avLst/>
-          </a:prstGeom>
-          <a:noFill/>
-        </p:spPr>
-        <p:txBody>
-          <a:bodyPr wrap="square" anchor="t" lIns="36000" rIns="36000" tIns="18000" bIns="18000">
-            <a:spAutoFit/>
-          </a:bodyPr>
-          <a:lstStyle/>
-          <a:p>
-            <a:pPr algn="l"/>
-            <a:r>
-              <a:rPr sz="1232" b="0" i="0">
+              <a:t>Re-gels immediately after spraying</a:t>
+            </a:r>
+          </a:p>
+          <a:p>
+            <a:pPr algn="l"/>
+            <a:r>
+              <a:rPr sz="1344" b="0" i="0">
                 <a:solidFill>
                   <a:srgbClr val="334155"/>
                 </a:solidFill>
                 <a:latin typeface="Arial"/>
               </a:rPr>
-              <a:t>Recovers high viscosity on landing</a:t>
-            </a:r>
-          </a:p>
-        </p:txBody>
-      </p:sp>
-      <p:sp>
-        <p:nvSpPr>
-          <p:cNvPr id="47" name="TextBox 46"/>
-          <p:cNvSpPr txBox="1"/>
-          <p:nvPr/>
-        </p:nvSpPr>
-        <p:spPr>
-          <a:xfrm>
-            <a:off x="8091220" y="4645152"/>
-            <a:ext cx="182880" cy="274320"/>
-          </a:xfrm>
-          <a:prstGeom prst="rect">
-            <a:avLst/>
-          </a:prstGeom>
-          <a:noFill/>
-        </p:spPr>
-        <p:txBody>
-          <a:bodyPr wrap="square" anchor="t" lIns="36000" rIns="36000" tIns="18000" bIns="18000">
-            <a:spAutoFit/>
-          </a:bodyPr>
-          <a:lstStyle/>
-          <a:p>
-            <a:pPr algn="l"/>
-            <a:r>
-              <a:rPr sz="1232" b="0" i="0">
-                <a:solidFill>
-                  <a:srgbClr val="3B5174"/>
-                </a:solidFill>
-                <a:latin typeface="Arial"/>
-              </a:rPr>
-              <a:t>•</a:t>
-            </a:r>
-          </a:p>
-        </p:txBody>
-      </p:sp>
-      <p:sp>
-        <p:nvSpPr>
-          <p:cNvPr id="48" name="TextBox 47"/>
-          <p:cNvSpPr txBox="1"/>
-          <p:nvPr/>
-        </p:nvSpPr>
-        <p:spPr>
-          <a:xfrm>
-            <a:off x="8292388" y="4645152"/>
-            <a:ext cx="3533546" cy="274320"/>
-          </a:xfrm>
-          <a:prstGeom prst="rect">
-            <a:avLst/>
-          </a:prstGeom>
-          <a:noFill/>
-        </p:spPr>
-        <p:txBody>
-          <a:bodyPr wrap="square" anchor="t" lIns="36000" rIns="36000" tIns="18000" bIns="18000">
-            <a:spAutoFit/>
-          </a:bodyPr>
-          <a:lstStyle/>
-          <a:p>
-            <a:pPr algn="l"/>
-            <a:r>
-              <a:rPr sz="1232" b="0" i="0">
-                <a:solidFill>
-                  <a:srgbClr val="334155"/>
-                </a:solidFill>
-                <a:latin typeface="Arial"/>
-              </a:rPr>
-              <a:t>Compatible with existing nozzles</a:t>
-            </a:r>
-          </a:p>
-        </p:txBody>
-      </p:sp>
-      <p:sp>
-        <p:nvSpPr>
-          <p:cNvPr id="49" name="Rounded Rectangle 48"/>
+              <a:t>→ Fire layer maintained against wind/rain/gravity</a:t>
+            </a:r>
+          </a:p>
+        </p:txBody>
+      </p:sp>
+      <p:sp>
+        <p:nvSpPr>
+          <p:cNvPr id="36" name="Rounded Rectangle 35"/>
           <p:cNvSpPr/>
           <p:nvPr/>
         </p:nvSpPr>
         <p:spPr>
           <a:xfrm>
-            <a:off x="365760" y="5980176"/>
-            <a:ext cx="11460175" cy="658368"/>
+            <a:off x="365760" y="6089904"/>
+            <a:ext cx="11460175" cy="566928"/>
           </a:xfrm>
           <a:prstGeom prst="roundRect">
             <a:avLst>
@@ -18975,14 +18622,14 @@
       </p:sp>
       <p:sp>
         <p:nvSpPr>
-          <p:cNvPr id="50" name="Rectangle 49"/>
+          <p:cNvPr id="37" name="Rectangle 36"/>
           <p:cNvSpPr/>
           <p:nvPr/>
         </p:nvSpPr>
         <p:spPr>
           <a:xfrm>
-            <a:off x="365760" y="5980176"/>
-            <a:ext cx="54864" cy="658368"/>
+            <a:off x="365760" y="6089904"/>
+            <a:ext cx="54864" cy="566928"/>
           </a:xfrm>
           <a:prstGeom prst="rect">
             <a:avLst/>
@@ -19019,14 +18666,14 @@
       </p:sp>
       <p:sp>
         <p:nvSpPr>
-          <p:cNvPr id="51" name="TextBox 50"/>
-          <p:cNvSpPr txBox="1"/>
-          <p:nvPr/>
-        </p:nvSpPr>
-        <p:spPr>
-          <a:xfrm>
-            <a:off x="548640" y="5980176"/>
-            <a:ext cx="365760" cy="658368"/>
+          <p:cNvPr id="38" name="TextBox 37"/>
+          <p:cNvSpPr txBox="1"/>
+          <p:nvPr/>
+        </p:nvSpPr>
+        <p:spPr>
+          <a:xfrm>
+            <a:off x="548640" y="6089904"/>
+            <a:ext cx="365760" cy="566928"/>
           </a:xfrm>
           <a:prstGeom prst="rect">
             <a:avLst/>
@@ -19047,21 +18694,21 @@
                 </a:solidFill>
                 <a:latin typeface="Arial"/>
               </a:rPr>
-              <a:t>✓</a:t>
-            </a:r>
-          </a:p>
-        </p:txBody>
-      </p:sp>
-      <p:sp>
-        <p:nvSpPr>
-          <p:cNvPr id="52" name="TextBox 51"/>
-          <p:cNvSpPr txBox="1"/>
-          <p:nvPr/>
-        </p:nvSpPr>
-        <p:spPr>
-          <a:xfrm>
-            <a:off x="960120" y="5980176"/>
-            <a:ext cx="10774375" cy="658368"/>
+              <a:t>ⓘ</a:t>
+            </a:r>
+          </a:p>
+        </p:txBody>
+      </p:sp>
+      <p:sp>
+        <p:nvSpPr>
+          <p:cNvPr id="39" name="TextBox 38"/>
+          <p:cNvSpPr txBox="1"/>
+          <p:nvPr/>
+        </p:nvSpPr>
+        <p:spPr>
+          <a:xfrm>
+            <a:off x="960120" y="6089904"/>
+            <a:ext cx="10774375" cy="566928"/>
           </a:xfrm>
           <a:prstGeom prst="rect">
             <a:avLst/>
@@ -19082,7 +18729,7 @@
                 </a:solidFill>
                 <a:latin typeface="Arial"/>
               </a:rPr>
-              <a:t>Rheological design (low n, high G') simultaneously achieves spray suitability and adhesion retention</a:t>
+              <a:t>These field performances are inferred from measured rheology. No independent contact-angle or adhesion-force tests were performed in this paper</a:t>
             </a:r>
           </a:p>
         </p:txBody>

--- a/slides_en.pptx
+++ b/slides_en.pptx
@@ -37934,7 +37934,7 @@
                 </a:solidFill>
                 <a:latin typeface="Arial"/>
               </a:rPr>
-              <a:t>Foaming Index Comparison</a:t>
+              <a:t>SDS Addition: Expected to Improve Foaming — But the Opposite Occurred (Fig. 4)</a:t>
             </a:r>
           </a:p>
         </p:txBody>
@@ -38027,7 +38027,609 @@
         <p:spPr>
           <a:xfrm>
             <a:off x="365760" y="859536"/>
-            <a:ext cx="5638647" cy="2103120"/>
+            <a:ext cx="3291840" cy="1005840"/>
+          </a:xfrm>
+          <a:prstGeom prst="roundRect">
+            <a:avLst>
+              <a:gd name="adj" fmla="val 5000"/>
+            </a:avLst>
+          </a:prstGeom>
+          <a:solidFill>
+            <a:srgbClr val="F1F5F9"/>
+          </a:solidFill>
+          <a:ln w="15240">
+            <a:solidFill>
+              <a:srgbClr val="4A7C8C"/>
+            </a:solidFill>
+          </a:ln>
+          <a:effectLst/>
+        </p:spPr>
+        <p:style>
+          <a:lnRef idx="1">
+            <a:schemeClr val="accent1"/>
+          </a:lnRef>
+          <a:fillRef idx="3">
+            <a:schemeClr val="accent1"/>
+          </a:fillRef>
+          <a:effectRef idx="2">
+            <a:schemeClr val="accent1"/>
+          </a:effectRef>
+          <a:fontRef idx="minor">
+            <a:schemeClr val="lt1"/>
+          </a:fontRef>
+        </p:style>
+        <p:txBody>
+          <a:bodyPr rtlCol="0" anchor="ctr"/>
+          <a:lstStyle/>
+          <a:p>
+            <a:pPr algn="ctr"/>
+          </a:p>
+        </p:txBody>
+      </p:sp>
+      <p:sp>
+        <p:nvSpPr>
+          <p:cNvPr id="11" name="Rectangle 10"/>
+          <p:cNvSpPr/>
+          <p:nvPr/>
+        </p:nvSpPr>
+        <p:spPr>
+          <a:xfrm>
+            <a:off x="365760" y="859536"/>
+            <a:ext cx="54864" cy="1005840"/>
+          </a:xfrm>
+          <a:prstGeom prst="rect">
+            <a:avLst/>
+          </a:prstGeom>
+          <a:solidFill>
+            <a:srgbClr val="4A7C8C"/>
+          </a:solidFill>
+          <a:ln>
+            <a:noFill/>
+          </a:ln>
+          <a:effectLst/>
+        </p:spPr>
+        <p:style>
+          <a:lnRef idx="1">
+            <a:schemeClr val="accent1"/>
+          </a:lnRef>
+          <a:fillRef idx="3">
+            <a:schemeClr val="accent1"/>
+          </a:fillRef>
+          <a:effectRef idx="2">
+            <a:schemeClr val="accent1"/>
+          </a:effectRef>
+          <a:fontRef idx="minor">
+            <a:schemeClr val="lt1"/>
+          </a:fontRef>
+        </p:style>
+        <p:txBody>
+          <a:bodyPr rtlCol="0" anchor="ctr"/>
+          <a:lstStyle/>
+          <a:p>
+            <a:pPr algn="ctr"/>
+          </a:p>
+        </p:txBody>
+      </p:sp>
+      <p:sp>
+        <p:nvSpPr>
+          <p:cNvPr id="12" name="TextBox 11"/>
+          <p:cNvSpPr txBox="1"/>
+          <p:nvPr/>
+        </p:nvSpPr>
+        <p:spPr>
+          <a:xfrm>
+            <a:off x="566928" y="932688"/>
+            <a:ext cx="3017520" cy="219456"/>
+          </a:xfrm>
+          <a:prstGeom prst="rect">
+            <a:avLst/>
+          </a:prstGeom>
+          <a:noFill/>
+        </p:spPr>
+        <p:txBody>
+          <a:bodyPr wrap="square" anchor="t" lIns="36000" rIns="36000" tIns="18000" bIns="18000">
+            <a:spAutoFit/>
+          </a:bodyPr>
+          <a:lstStyle/>
+          <a:p>
+            <a:pPr algn="l"/>
+            <a:r>
+              <a:rPr sz="1120" b="1" i="0">
+                <a:solidFill>
+                  <a:srgbClr val="4A7C8C"/>
+                </a:solidFill>
+                <a:latin typeface="Arial"/>
+              </a:rPr>
+              <a:t>Hypothesis (purpose of SDS)</a:t>
+            </a:r>
+          </a:p>
+        </p:txBody>
+      </p:sp>
+      <p:sp>
+        <p:nvSpPr>
+          <p:cNvPr id="13" name="TextBox 12"/>
+          <p:cNvSpPr txBox="1"/>
+          <p:nvPr/>
+        </p:nvSpPr>
+        <p:spPr>
+          <a:xfrm>
+            <a:off x="566928" y="1207008"/>
+            <a:ext cx="3017520" cy="585216"/>
+          </a:xfrm>
+          <a:prstGeom prst="rect">
+            <a:avLst/>
+          </a:prstGeom>
+          <a:noFill/>
+        </p:spPr>
+        <p:txBody>
+          <a:bodyPr wrap="square" anchor="t" lIns="36000" rIns="36000" tIns="18000" bIns="18000">
+            <a:spAutoFit/>
+          </a:bodyPr>
+          <a:lstStyle/>
+          <a:p>
+            <a:pPr algn="l"/>
+            <a:r>
+              <a:rPr sz="1232" b="0" i="0">
+                <a:solidFill>
+                  <a:srgbClr val="334155"/>
+                </a:solidFill>
+                <a:latin typeface="Arial"/>
+              </a:rPr>
+              <a:t>Surfactant SDS promotes bubble formation</a:t>
+            </a:r>
+          </a:p>
+          <a:p>
+            <a:pPr algn="l"/>
+            <a:r>
+              <a:rPr sz="1232" b="0" i="0">
+                <a:solidFill>
+                  <a:srgbClr val="334155"/>
+                </a:solidFill>
+                <a:latin typeface="Arial"/>
+              </a:rPr>
+              <a:t>→ Foaming Index increases</a:t>
+            </a:r>
+          </a:p>
+          <a:p>
+            <a:pPr algn="l"/>
+            <a:r>
+              <a:rPr sz="1232" b="0" i="0">
+                <a:solidFill>
+                  <a:srgbClr val="334155"/>
+                </a:solidFill>
+                <a:latin typeface="Arial"/>
+              </a:rPr>
+              <a:t>→ Thicker aerogel insulation layer</a:t>
+            </a:r>
+          </a:p>
+        </p:txBody>
+      </p:sp>
+      <p:sp>
+        <p:nvSpPr>
+          <p:cNvPr id="14" name="Right Arrow 13"/>
+          <p:cNvSpPr/>
+          <p:nvPr/>
+        </p:nvSpPr>
+        <p:spPr>
+          <a:xfrm>
+            <a:off x="3733723" y="1161288"/>
+            <a:ext cx="640080" cy="402336"/>
+          </a:xfrm>
+          <a:prstGeom prst="rightArrow">
+            <a:avLst/>
+          </a:prstGeom>
+          <a:solidFill>
+            <a:srgbClr val="64748B"/>
+          </a:solidFill>
+          <a:ln>
+            <a:noFill/>
+          </a:ln>
+          <a:effectLst/>
+        </p:spPr>
+        <p:style>
+          <a:lnRef idx="1">
+            <a:schemeClr val="accent1"/>
+          </a:lnRef>
+          <a:fillRef idx="3">
+            <a:schemeClr val="accent1"/>
+          </a:fillRef>
+          <a:effectRef idx="2">
+            <a:schemeClr val="accent1"/>
+          </a:effectRef>
+          <a:fontRef idx="minor">
+            <a:schemeClr val="lt1"/>
+          </a:fontRef>
+        </p:style>
+        <p:txBody>
+          <a:bodyPr rtlCol="0" anchor="ctr"/>
+          <a:lstStyle/>
+          <a:p>
+            <a:pPr algn="ctr"/>
+          </a:p>
+        </p:txBody>
+      </p:sp>
+      <p:sp>
+        <p:nvSpPr>
+          <p:cNvPr id="15" name="Rounded Rectangle 14"/>
+          <p:cNvSpPr/>
+          <p:nvPr/>
+        </p:nvSpPr>
+        <p:spPr>
+          <a:xfrm>
+            <a:off x="4449927" y="859536"/>
+            <a:ext cx="3291840" cy="1005840"/>
+          </a:xfrm>
+          <a:prstGeom prst="roundRect">
+            <a:avLst>
+              <a:gd name="adj" fmla="val 5000"/>
+            </a:avLst>
+          </a:prstGeom>
+          <a:solidFill>
+            <a:srgbClr val="F1F5F9"/>
+          </a:solidFill>
+          <a:ln w="10160">
+            <a:solidFill>
+              <a:srgbClr val="E2E8F0"/>
+            </a:solidFill>
+          </a:ln>
+          <a:effectLst/>
+        </p:spPr>
+        <p:style>
+          <a:lnRef idx="1">
+            <a:schemeClr val="accent1"/>
+          </a:lnRef>
+          <a:fillRef idx="3">
+            <a:schemeClr val="accent1"/>
+          </a:fillRef>
+          <a:effectRef idx="2">
+            <a:schemeClr val="accent1"/>
+          </a:effectRef>
+          <a:fontRef idx="minor">
+            <a:schemeClr val="lt1"/>
+          </a:fontRef>
+        </p:style>
+        <p:txBody>
+          <a:bodyPr rtlCol="0" anchor="ctr"/>
+          <a:lstStyle/>
+          <a:p>
+            <a:pPr algn="ctr"/>
+          </a:p>
+        </p:txBody>
+      </p:sp>
+      <p:sp>
+        <p:nvSpPr>
+          <p:cNvPr id="16" name="TextBox 15"/>
+          <p:cNvSpPr txBox="1"/>
+          <p:nvPr/>
+        </p:nvSpPr>
+        <p:spPr>
+          <a:xfrm>
+            <a:off x="4651095" y="932688"/>
+            <a:ext cx="3017520" cy="219456"/>
+          </a:xfrm>
+          <a:prstGeom prst="rect">
+            <a:avLst/>
+          </a:prstGeom>
+          <a:noFill/>
+        </p:spPr>
+        <p:txBody>
+          <a:bodyPr wrap="square" anchor="t" lIns="36000" rIns="36000" tIns="18000" bIns="18000">
+            <a:spAutoFit/>
+          </a:bodyPr>
+          <a:lstStyle/>
+          <a:p>
+            <a:pPr algn="l"/>
+            <a:r>
+              <a:rPr sz="1120" b="1" i="0">
+                <a:solidFill>
+                  <a:srgbClr val="64748B"/>
+                </a:solidFill>
+                <a:latin typeface="Arial"/>
+              </a:rPr>
+              <a:t>Experiment</a:t>
+            </a:r>
+          </a:p>
+        </p:txBody>
+      </p:sp>
+      <p:sp>
+        <p:nvSpPr>
+          <p:cNvPr id="17" name="TextBox 16"/>
+          <p:cNvSpPr txBox="1"/>
+          <p:nvPr/>
+        </p:nvSpPr>
+        <p:spPr>
+          <a:xfrm>
+            <a:off x="4651095" y="1207008"/>
+            <a:ext cx="3017520" cy="585216"/>
+          </a:xfrm>
+          <a:prstGeom prst="rect">
+            <a:avLst/>
+          </a:prstGeom>
+          <a:noFill/>
+        </p:spPr>
+        <p:txBody>
+          <a:bodyPr wrap="square" anchor="t" lIns="36000" rIns="36000" tIns="18000" bIns="18000">
+            <a:spAutoFit/>
+          </a:bodyPr>
+          <a:lstStyle/>
+          <a:p>
+            <a:pPr algn="l"/>
+            <a:r>
+              <a:rPr sz="1232" b="0" i="0">
+                <a:solidFill>
+                  <a:srgbClr val="334155"/>
+                </a:solidFill>
+                <a:latin typeface="Arial"/>
+              </a:rPr>
+              <a:t>SDS 0 / 0.1 / 0.5 wt% added to</a:t>
+            </a:r>
+          </a:p>
+          <a:p>
+            <a:pPr algn="l"/>
+            <a:r>
+              <a:rPr sz="1232" b="0" i="0">
+                <a:solidFill>
+                  <a:srgbClr val="334155"/>
+                </a:solidFill>
+                <a:latin typeface="Arial"/>
+              </a:rPr>
+              <a:t>HEC+MC/CSP; combustion tested</a:t>
+            </a:r>
+          </a:p>
+          <a:p>
+            <a:pPr algn="l"/>
+            <a:r>
+              <a:rPr sz="1232" b="0" i="0">
+                <a:solidFill>
+                  <a:srgbClr val="334155"/>
+                </a:solidFill>
+                <a:latin typeface="Arial"/>
+              </a:rPr>
+              <a:t>→ Foaming Index quantified (Fig. 4a/4b)</a:t>
+            </a:r>
+          </a:p>
+        </p:txBody>
+      </p:sp>
+      <p:sp>
+        <p:nvSpPr>
+          <p:cNvPr id="18" name="Right Arrow 17"/>
+          <p:cNvSpPr/>
+          <p:nvPr/>
+        </p:nvSpPr>
+        <p:spPr>
+          <a:xfrm>
+            <a:off x="7817891" y="1161288"/>
+            <a:ext cx="640080" cy="402336"/>
+          </a:xfrm>
+          <a:prstGeom prst="rightArrow">
+            <a:avLst/>
+          </a:prstGeom>
+          <a:solidFill>
+            <a:srgbClr val="9F7639"/>
+          </a:solidFill>
+          <a:ln>
+            <a:noFill/>
+          </a:ln>
+          <a:effectLst/>
+        </p:spPr>
+        <p:style>
+          <a:lnRef idx="1">
+            <a:schemeClr val="accent1"/>
+          </a:lnRef>
+          <a:fillRef idx="3">
+            <a:schemeClr val="accent1"/>
+          </a:fillRef>
+          <a:effectRef idx="2">
+            <a:schemeClr val="accent1"/>
+          </a:effectRef>
+          <a:fontRef idx="minor">
+            <a:schemeClr val="lt1"/>
+          </a:fontRef>
+        </p:style>
+        <p:txBody>
+          <a:bodyPr rtlCol="0" anchor="ctr"/>
+          <a:lstStyle/>
+          <a:p>
+            <a:pPr algn="ctr"/>
+          </a:p>
+        </p:txBody>
+      </p:sp>
+      <p:sp>
+        <p:nvSpPr>
+          <p:cNvPr id="19" name="Rounded Rectangle 18"/>
+          <p:cNvSpPr/>
+          <p:nvPr/>
+        </p:nvSpPr>
+        <p:spPr>
+          <a:xfrm>
+            <a:off x="8534095" y="859536"/>
+            <a:ext cx="3291840" cy="1005840"/>
+          </a:xfrm>
+          <a:prstGeom prst="roundRect">
+            <a:avLst>
+              <a:gd name="adj" fmla="val 5000"/>
+            </a:avLst>
+          </a:prstGeom>
+          <a:solidFill>
+            <a:srgbClr val="FFF7ED"/>
+          </a:solidFill>
+          <a:ln w="17780">
+            <a:solidFill>
+              <a:srgbClr val="9F7639"/>
+            </a:solidFill>
+          </a:ln>
+          <a:effectLst/>
+        </p:spPr>
+        <p:style>
+          <a:lnRef idx="1">
+            <a:schemeClr val="accent1"/>
+          </a:lnRef>
+          <a:fillRef idx="3">
+            <a:schemeClr val="accent1"/>
+          </a:fillRef>
+          <a:effectRef idx="2">
+            <a:schemeClr val="accent1"/>
+          </a:effectRef>
+          <a:fontRef idx="minor">
+            <a:schemeClr val="lt1"/>
+          </a:fontRef>
+        </p:style>
+        <p:txBody>
+          <a:bodyPr rtlCol="0" anchor="ctr"/>
+          <a:lstStyle/>
+          <a:p>
+            <a:pPr algn="ctr"/>
+          </a:p>
+        </p:txBody>
+      </p:sp>
+      <p:sp>
+        <p:nvSpPr>
+          <p:cNvPr id="20" name="Rectangle 19"/>
+          <p:cNvSpPr/>
+          <p:nvPr/>
+        </p:nvSpPr>
+        <p:spPr>
+          <a:xfrm>
+            <a:off x="8534095" y="859536"/>
+            <a:ext cx="54864" cy="1005840"/>
+          </a:xfrm>
+          <a:prstGeom prst="rect">
+            <a:avLst/>
+          </a:prstGeom>
+          <a:solidFill>
+            <a:srgbClr val="9F7639"/>
+          </a:solidFill>
+          <a:ln>
+            <a:noFill/>
+          </a:ln>
+          <a:effectLst/>
+        </p:spPr>
+        <p:style>
+          <a:lnRef idx="1">
+            <a:schemeClr val="accent1"/>
+          </a:lnRef>
+          <a:fillRef idx="3">
+            <a:schemeClr val="accent1"/>
+          </a:fillRef>
+          <a:effectRef idx="2">
+            <a:schemeClr val="accent1"/>
+          </a:effectRef>
+          <a:fontRef idx="minor">
+            <a:schemeClr val="lt1"/>
+          </a:fontRef>
+        </p:style>
+        <p:txBody>
+          <a:bodyPr rtlCol="0" anchor="ctr"/>
+          <a:lstStyle/>
+          <a:p>
+            <a:pPr algn="ctr"/>
+          </a:p>
+        </p:txBody>
+      </p:sp>
+      <p:sp>
+        <p:nvSpPr>
+          <p:cNvPr id="21" name="TextBox 20"/>
+          <p:cNvSpPr txBox="1"/>
+          <p:nvPr/>
+        </p:nvSpPr>
+        <p:spPr>
+          <a:xfrm>
+            <a:off x="8735263" y="932688"/>
+            <a:ext cx="3017520" cy="219456"/>
+          </a:xfrm>
+          <a:prstGeom prst="rect">
+            <a:avLst/>
+          </a:prstGeom>
+          <a:noFill/>
+        </p:spPr>
+        <p:txBody>
+          <a:bodyPr wrap="square" anchor="t" lIns="36000" rIns="36000" tIns="18000" bIns="18000">
+            <a:spAutoFit/>
+          </a:bodyPr>
+          <a:lstStyle/>
+          <a:p>
+            <a:pPr algn="l"/>
+            <a:r>
+              <a:rPr sz="1120" b="1" i="0">
+                <a:solidFill>
+                  <a:srgbClr val="9F7639"/>
+                </a:solidFill>
+                <a:latin typeface="Arial"/>
+              </a:rPr>
+              <a:t>Result (opposite of expected)</a:t>
+            </a:r>
+          </a:p>
+        </p:txBody>
+      </p:sp>
+      <p:sp>
+        <p:nvSpPr>
+          <p:cNvPr id="22" name="TextBox 21"/>
+          <p:cNvSpPr txBox="1"/>
+          <p:nvPr/>
+        </p:nvSpPr>
+        <p:spPr>
+          <a:xfrm>
+            <a:off x="8735263" y="1207008"/>
+            <a:ext cx="3017520" cy="585216"/>
+          </a:xfrm>
+          <a:prstGeom prst="rect">
+            <a:avLst/>
+          </a:prstGeom>
+          <a:noFill/>
+        </p:spPr>
+        <p:txBody>
+          <a:bodyPr wrap="square" anchor="t" lIns="36000" rIns="36000" tIns="18000" bIns="18000">
+            <a:spAutoFit/>
+          </a:bodyPr>
+          <a:lstStyle/>
+          <a:p>
+            <a:pPr algn="l"/>
+            <a:r>
+              <a:rPr sz="1232" b="0" i="0">
+                <a:solidFill>
+                  <a:srgbClr val="334155"/>
+                </a:solidFill>
+                <a:latin typeface="Arial"/>
+              </a:rPr>
+              <a:t>SDS addition reduced Foaming Index</a:t>
+            </a:r>
+          </a:p>
+          <a:p>
+            <a:pPr algn="l"/>
+            <a:r>
+              <a:rPr sz="1232" b="0" i="0">
+                <a:solidFill>
+                  <a:srgbClr val="334155"/>
+                </a:solidFill>
+                <a:latin typeface="Arial"/>
+              </a:rPr>
+              <a:t>2.6 (0%) → 2.3 (0.1%) → even lower (0.5%)</a:t>
+            </a:r>
+          </a:p>
+          <a:p>
+            <a:pPr algn="l"/>
+            <a:r>
+              <a:rPr sz="1232" b="0" i="0">
+                <a:solidFill>
+                  <a:srgbClr val="334155"/>
+                </a:solidFill>
+                <a:latin typeface="Arial"/>
+              </a:rPr>
+              <a:t>SDS did not improve foaming</a:t>
+            </a:r>
+          </a:p>
+        </p:txBody>
+      </p:sp>
+      <p:sp>
+        <p:nvSpPr>
+          <p:cNvPr id="23" name="Rounded Rectangle 22"/>
+          <p:cNvSpPr/>
+          <p:nvPr/>
+        </p:nvSpPr>
+        <p:spPr>
+          <a:xfrm>
+            <a:off x="365760" y="2121408"/>
+            <a:ext cx="5638647" cy="1920240"/>
           </a:xfrm>
           <a:prstGeom prst="roundRect">
             <a:avLst>
@@ -38068,13 +38670,13 @@
       </p:sp>
       <p:sp>
         <p:nvSpPr>
-          <p:cNvPr id="11" name="Rectangle 10"/>
+          <p:cNvPr id="24" name="Rectangle 23"/>
           <p:cNvSpPr/>
           <p:nvPr/>
         </p:nvSpPr>
         <p:spPr>
           <a:xfrm>
-            <a:off x="475488" y="969264"/>
+            <a:off x="475488" y="2231136"/>
             <a:ext cx="868680" cy="292608"/>
           </a:xfrm>
           <a:prstGeom prst="rect">
@@ -38112,13 +38714,13 @@
       </p:sp>
       <p:sp>
         <p:nvSpPr>
-          <p:cNvPr id="12" name="TextBox 11"/>
-          <p:cNvSpPr txBox="1"/>
-          <p:nvPr/>
-        </p:nvSpPr>
-        <p:spPr>
-          <a:xfrm>
-            <a:off x="475488" y="969264"/>
+          <p:cNvPr id="25" name="TextBox 24"/>
+          <p:cNvSpPr txBox="1"/>
+          <p:nvPr/>
+        </p:nvSpPr>
+        <p:spPr>
+          <a:xfrm>
+            <a:off x="475488" y="2231136"/>
             <a:ext cx="868680" cy="292608"/>
           </a:xfrm>
           <a:prstGeom prst="rect">
@@ -38147,14 +38749,14 @@
       </p:sp>
       <p:sp>
         <p:nvSpPr>
-          <p:cNvPr id="13" name="TextBox 12"/>
-          <p:cNvSpPr txBox="1"/>
-          <p:nvPr/>
-        </p:nvSpPr>
-        <p:spPr>
-          <a:xfrm>
-            <a:off x="365760" y="859536"/>
-            <a:ext cx="5638647" cy="2103120"/>
+          <p:cNvPr id="26" name="TextBox 25"/>
+          <p:cNvSpPr txBox="1"/>
+          <p:nvPr/>
+        </p:nvSpPr>
+        <p:spPr>
+          <a:xfrm>
+            <a:off x="365760" y="2121408"/>
+            <a:ext cx="5638647" cy="1920240"/>
           </a:xfrm>
           <a:prstGeom prst="rect">
             <a:avLst/>
@@ -38182,13 +38784,13 @@
       </p:sp>
       <p:sp>
         <p:nvSpPr>
-          <p:cNvPr id="14" name="TextBox 13"/>
-          <p:cNvSpPr txBox="1"/>
-          <p:nvPr/>
-        </p:nvSpPr>
-        <p:spPr>
-          <a:xfrm>
-            <a:off x="365760" y="2999232"/>
+          <p:cNvPr id="27" name="TextBox 26"/>
+          <p:cNvSpPr txBox="1"/>
+          <p:nvPr/>
+        </p:nvSpPr>
+        <p:spPr>
+          <a:xfrm>
+            <a:off x="365760" y="4078224"/>
             <a:ext cx="5638647" cy="274320"/>
           </a:xfrm>
           <a:prstGeom prst="rect">
@@ -38210,21 +38812,21 @@
                 </a:solidFill>
                 <a:latin typeface="Arial"/>
               </a:rPr>
-              <a:t>Appearance of foamed layer after combustion</a:t>
-            </a:r>
-          </a:p>
-        </p:txBody>
-      </p:sp>
-      <p:sp>
-        <p:nvSpPr>
-          <p:cNvPr id="15" name="Rounded Rectangle 14"/>
+              <a:t>Foamed layer appearance after combustion (by SDS level)</a:t>
+            </a:r>
+          </a:p>
+        </p:txBody>
+      </p:sp>
+      <p:sp>
+        <p:nvSpPr>
+          <p:cNvPr id="28" name="Rounded Rectangle 27"/>
           <p:cNvSpPr/>
           <p:nvPr/>
         </p:nvSpPr>
         <p:spPr>
           <a:xfrm>
-            <a:off x="6187287" y="859536"/>
-            <a:ext cx="5638647" cy="2103120"/>
+            <a:off x="6187287" y="2121408"/>
+            <a:ext cx="5638647" cy="1920240"/>
           </a:xfrm>
           <a:prstGeom prst="roundRect">
             <a:avLst>
@@ -38265,13 +38867,13 @@
       </p:sp>
       <p:sp>
         <p:nvSpPr>
-          <p:cNvPr id="16" name="Rectangle 15"/>
+          <p:cNvPr id="29" name="Rectangle 28"/>
           <p:cNvSpPr/>
           <p:nvPr/>
         </p:nvSpPr>
         <p:spPr>
           <a:xfrm>
-            <a:off x="6297015" y="969264"/>
+            <a:off x="6297015" y="2231136"/>
             <a:ext cx="868680" cy="292608"/>
           </a:xfrm>
           <a:prstGeom prst="rect">
@@ -38309,13 +38911,13 @@
       </p:sp>
       <p:sp>
         <p:nvSpPr>
-          <p:cNvPr id="17" name="TextBox 16"/>
-          <p:cNvSpPr txBox="1"/>
-          <p:nvPr/>
-        </p:nvSpPr>
-        <p:spPr>
-          <a:xfrm>
-            <a:off x="6297015" y="969264"/>
+          <p:cNvPr id="30" name="TextBox 29"/>
+          <p:cNvSpPr txBox="1"/>
+          <p:nvPr/>
+        </p:nvSpPr>
+        <p:spPr>
+          <a:xfrm>
+            <a:off x="6297015" y="2231136"/>
             <a:ext cx="868680" cy="292608"/>
           </a:xfrm>
           <a:prstGeom prst="rect">
@@ -38344,14 +38946,14 @@
       </p:sp>
       <p:sp>
         <p:nvSpPr>
-          <p:cNvPr id="18" name="TextBox 17"/>
-          <p:cNvSpPr txBox="1"/>
-          <p:nvPr/>
-        </p:nvSpPr>
-        <p:spPr>
-          <a:xfrm>
-            <a:off x="6187287" y="859536"/>
-            <a:ext cx="5638647" cy="2103120"/>
+          <p:cNvPr id="31" name="TextBox 30"/>
+          <p:cNvSpPr txBox="1"/>
+          <p:nvPr/>
+        </p:nvSpPr>
+        <p:spPr>
+          <a:xfrm>
+            <a:off x="6187287" y="2121408"/>
+            <a:ext cx="5638647" cy="1920240"/>
           </a:xfrm>
           <a:prstGeom prst="rect">
             <a:avLst/>
@@ -38379,13 +38981,13 @@
       </p:sp>
       <p:sp>
         <p:nvSpPr>
-          <p:cNvPr id="19" name="TextBox 18"/>
-          <p:cNvSpPr txBox="1"/>
-          <p:nvPr/>
-        </p:nvSpPr>
-        <p:spPr>
-          <a:xfrm>
-            <a:off x="6187287" y="2999232"/>
+          <p:cNvPr id="32" name="TextBox 31"/>
+          <p:cNvSpPr txBox="1"/>
+          <p:nvPr/>
+        </p:nvSpPr>
+        <p:spPr>
+          <a:xfrm>
+            <a:off x="6187287" y="4078224"/>
             <a:ext cx="5638647" cy="274320"/>
           </a:xfrm>
           <a:prstGeom prst="rect">
@@ -38407,21 +39009,21 @@
                 </a:solidFill>
                 <a:latin typeface="Arial"/>
               </a:rPr>
-              <a:t>Foaming Index for each formulation</a:t>
-            </a:r>
-          </a:p>
-        </p:txBody>
-      </p:sp>
-      <p:sp>
-        <p:nvSpPr>
-          <p:cNvPr id="20" name="TextBox 19"/>
-          <p:cNvSpPr txBox="1"/>
-          <p:nvPr/>
-        </p:nvSpPr>
-        <p:spPr>
-          <a:xfrm>
-            <a:off x="365760" y="3374136"/>
-            <a:ext cx="5638647" cy="274320"/>
+              <a:t>Foaming Index per formulation (quantified)</a:t>
+            </a:r>
+          </a:p>
+        </p:txBody>
+      </p:sp>
+      <p:sp>
+        <p:nvSpPr>
+          <p:cNvPr id="33" name="TextBox 32"/>
+          <p:cNvSpPr txBox="1"/>
+          <p:nvPr/>
+        </p:nvSpPr>
+        <p:spPr>
+          <a:xfrm>
+            <a:off x="365760" y="4297680"/>
+            <a:ext cx="5730087" cy="237744"/>
           </a:xfrm>
           <a:prstGeom prst="rect">
             <a:avLst/>
@@ -38436,7 +39038,7 @@
           <a:p>
             <a:pPr algn="l"/>
             <a:r>
-              <a:rPr sz="1344" b="1" i="0">
+              <a:rPr sz="1232" b="1" i="0">
                 <a:solidFill>
                   <a:srgbClr val="64748B"/>
                 </a:solidFill>
@@ -38449,14 +39051,14 @@
       </p:sp>
       <p:sp>
         <p:nvSpPr>
-          <p:cNvPr id="21" name="TextBox 20"/>
-          <p:cNvSpPr txBox="1"/>
-          <p:nvPr/>
-        </p:nvSpPr>
-        <p:spPr>
-          <a:xfrm>
-            <a:off x="365760" y="3739896"/>
-            <a:ext cx="1463040" cy="274320"/>
+          <p:cNvPr id="34" name="TextBox 33"/>
+          <p:cNvSpPr txBox="1"/>
+          <p:nvPr/>
+        </p:nvSpPr>
+        <p:spPr>
+          <a:xfrm>
+            <a:off x="365760" y="4590288"/>
+            <a:ext cx="2926080" cy="274320"/>
           </a:xfrm>
           <a:prstGeom prst="rect">
             <a:avLst/>
@@ -38477,21 +39079,21 @@
                 </a:solidFill>
                 <a:latin typeface="Arial"/>
               </a:rPr>
-              <a:t>AquaGel-K</a:t>
-            </a:r>
-          </a:p>
-        </p:txBody>
-      </p:sp>
-      <p:sp>
-        <p:nvSpPr>
-          <p:cNvPr id="22" name="Rounded Rectangle 21"/>
+              <a:t>HEC+MC/CSP 1-5 (SDS 0%)</a:t>
+            </a:r>
+          </a:p>
+        </p:txBody>
+      </p:sp>
+      <p:sp>
+        <p:nvSpPr>
+          <p:cNvPr id="35" name="Rounded Rectangle 34"/>
           <p:cNvSpPr/>
           <p:nvPr/>
         </p:nvSpPr>
         <p:spPr>
           <a:xfrm>
-            <a:off x="1920240" y="3813048"/>
-            <a:ext cx="3124047" cy="146304"/>
+            <a:off x="3383280" y="4663440"/>
+            <a:ext cx="3081948" cy="146304"/>
           </a:xfrm>
           <a:prstGeom prst="roundRect">
             <a:avLst>
@@ -38532,14 +39134,14 @@
       </p:sp>
       <p:sp>
         <p:nvSpPr>
-          <p:cNvPr id="23" name="Rounded Rectangle 22"/>
+          <p:cNvPr id="36" name="Rounded Rectangle 35"/>
           <p:cNvSpPr/>
           <p:nvPr/>
         </p:nvSpPr>
         <p:spPr>
           <a:xfrm>
-            <a:off x="1920240" y="3813048"/>
-            <a:ext cx="62480" cy="146304"/>
+            <a:off x="3383280" y="4663440"/>
+            <a:ext cx="3081948" cy="146304"/>
           </a:xfrm>
           <a:prstGeom prst="roundRect">
             <a:avLst>
@@ -38547,7 +39149,7 @@
             </a:avLst>
           </a:prstGeom>
           <a:solidFill>
-            <a:srgbClr val="AAB4C0"/>
+            <a:srgbClr val="4A7C8C"/>
           </a:solidFill>
           <a:ln>
             <a:noFill/>
@@ -38578,14 +39180,14 @@
       </p:sp>
       <p:sp>
         <p:nvSpPr>
-          <p:cNvPr id="24" name="TextBox 23"/>
-          <p:cNvSpPr txBox="1"/>
-          <p:nvPr/>
-        </p:nvSpPr>
-        <p:spPr>
-          <a:xfrm>
-            <a:off x="5135727" y="3739896"/>
-            <a:ext cx="868680" cy="274320"/>
+          <p:cNvPr id="37" name="TextBox 36"/>
+          <p:cNvSpPr txBox="1"/>
+          <p:nvPr/>
+        </p:nvSpPr>
+        <p:spPr>
+          <a:xfrm>
+            <a:off x="6556668" y="4590288"/>
+            <a:ext cx="914400" cy="274320"/>
           </a:xfrm>
           <a:prstGeom prst="rect">
             <a:avLst/>
@@ -38606,21 +39208,21 @@
                 </a:solidFill>
                 <a:latin typeface="Arial"/>
               </a:rPr>
-              <a:t>≈0</a:t>
-            </a:r>
-          </a:p>
-        </p:txBody>
-      </p:sp>
-      <p:sp>
-        <p:nvSpPr>
-          <p:cNvPr id="25" name="TextBox 24"/>
-          <p:cNvSpPr txBox="1"/>
-          <p:nvPr/>
-        </p:nvSpPr>
-        <p:spPr>
-          <a:xfrm>
-            <a:off x="365760" y="4151376"/>
-            <a:ext cx="1463040" cy="274320"/>
+              <a:t>≈2.6×</a:t>
+            </a:r>
+          </a:p>
+        </p:txBody>
+      </p:sp>
+      <p:sp>
+        <p:nvSpPr>
+          <p:cNvPr id="38" name="TextBox 37"/>
+          <p:cNvSpPr txBox="1"/>
+          <p:nvPr/>
+        </p:nvSpPr>
+        <p:spPr>
+          <a:xfrm>
+            <a:off x="365760" y="4956048"/>
+            <a:ext cx="2926080" cy="274320"/>
           </a:xfrm>
           <a:prstGeom prst="rect">
             <a:avLst/>
@@ -38641,21 +39243,21 @@
                 </a:solidFill>
                 <a:latin typeface="Arial"/>
               </a:rPr>
-              <a:t>MHEC/CSP 1-5</a:t>
-            </a:r>
-          </a:p>
-        </p:txBody>
-      </p:sp>
-      <p:sp>
-        <p:nvSpPr>
-          <p:cNvPr id="26" name="Rounded Rectangle 25"/>
+              <a:t>HEC+MC/CSP/SDS 1-5-0.1</a:t>
+            </a:r>
+          </a:p>
+        </p:txBody>
+      </p:sp>
+      <p:sp>
+        <p:nvSpPr>
+          <p:cNvPr id="39" name="Rounded Rectangle 38"/>
           <p:cNvSpPr/>
           <p:nvPr/>
         </p:nvSpPr>
         <p:spPr>
           <a:xfrm>
-            <a:off x="1920240" y="4224528"/>
-            <a:ext cx="3124047" cy="146304"/>
+            <a:off x="3383280" y="5029200"/>
+            <a:ext cx="3081948" cy="146304"/>
           </a:xfrm>
           <a:prstGeom prst="roundRect">
             <a:avLst>
@@ -38696,14 +39298,14 @@
       </p:sp>
       <p:sp>
         <p:nvSpPr>
-          <p:cNvPr id="27" name="Rounded Rectangle 26"/>
+          <p:cNvPr id="40" name="Rounded Rectangle 39"/>
           <p:cNvSpPr/>
           <p:nvPr/>
         </p:nvSpPr>
         <p:spPr>
           <a:xfrm>
-            <a:off x="1920240" y="4224528"/>
-            <a:ext cx="1655745" cy="146304"/>
+            <a:off x="3383280" y="5029200"/>
+            <a:ext cx="2712114" cy="146304"/>
           </a:xfrm>
           <a:prstGeom prst="roundRect">
             <a:avLst>
@@ -38711,7 +39313,7 @@
             </a:avLst>
           </a:prstGeom>
           <a:solidFill>
-            <a:srgbClr val="9F7639"/>
+            <a:srgbClr val="64748B"/>
           </a:solidFill>
           <a:ln>
             <a:noFill/>
@@ -38742,14 +39344,14 @@
       </p:sp>
       <p:sp>
         <p:nvSpPr>
-          <p:cNvPr id="28" name="TextBox 27"/>
-          <p:cNvSpPr txBox="1"/>
-          <p:nvPr/>
-        </p:nvSpPr>
-        <p:spPr>
-          <a:xfrm>
-            <a:off x="5135727" y="4151376"/>
-            <a:ext cx="868680" cy="274320"/>
+          <p:cNvPr id="41" name="TextBox 40"/>
+          <p:cNvSpPr txBox="1"/>
+          <p:nvPr/>
+        </p:nvSpPr>
+        <p:spPr>
+          <a:xfrm>
+            <a:off x="6556668" y="4956048"/>
+            <a:ext cx="914400" cy="274320"/>
           </a:xfrm>
           <a:prstGeom prst="rect">
             <a:avLst/>
@@ -38770,21 +39372,21 @@
                 </a:solidFill>
                 <a:latin typeface="Arial"/>
               </a:rPr>
-              <a:t>≈2.1×</a:t>
-            </a:r>
-          </a:p>
-        </p:txBody>
-      </p:sp>
-      <p:sp>
-        <p:nvSpPr>
-          <p:cNvPr id="29" name="TextBox 28"/>
-          <p:cNvSpPr txBox="1"/>
-          <p:nvPr/>
-        </p:nvSpPr>
-        <p:spPr>
-          <a:xfrm>
-            <a:off x="365760" y="4562856"/>
-            <a:ext cx="1463040" cy="274320"/>
+              <a:t>≈2.3×</a:t>
+            </a:r>
+          </a:p>
+        </p:txBody>
+      </p:sp>
+      <p:sp>
+        <p:nvSpPr>
+          <p:cNvPr id="42" name="TextBox 41"/>
+          <p:cNvSpPr txBox="1"/>
+          <p:nvPr/>
+        </p:nvSpPr>
+        <p:spPr>
+          <a:xfrm>
+            <a:off x="365760" y="5321808"/>
+            <a:ext cx="2926080" cy="274320"/>
           </a:xfrm>
           <a:prstGeom prst="rect">
             <a:avLst/>
@@ -38805,21 +39407,21 @@
                 </a:solidFill>
                 <a:latin typeface="Arial"/>
               </a:rPr>
-              <a:t>HEC+MC/CSP/SDS 1-5-0.1</a:t>
-            </a:r>
-          </a:p>
-        </p:txBody>
-      </p:sp>
-      <p:sp>
-        <p:nvSpPr>
-          <p:cNvPr id="30" name="Rounded Rectangle 29"/>
+              <a:t>HEC+MC/CSP/SDS 1-5-0.5</a:t>
+            </a:r>
+          </a:p>
+        </p:txBody>
+      </p:sp>
+      <p:sp>
+        <p:nvSpPr>
+          <p:cNvPr id="43" name="Rounded Rectangle 42"/>
           <p:cNvSpPr/>
           <p:nvPr/>
         </p:nvSpPr>
         <p:spPr>
           <a:xfrm>
-            <a:off x="1920240" y="4636008"/>
-            <a:ext cx="3124047" cy="146304"/>
+            <a:off x="3383280" y="5394960"/>
+            <a:ext cx="3081948" cy="146304"/>
           </a:xfrm>
           <a:prstGeom prst="roundRect">
             <a:avLst>
@@ -38860,14 +39462,14 @@
       </p:sp>
       <p:sp>
         <p:nvSpPr>
-          <p:cNvPr id="31" name="Rounded Rectangle 30"/>
+          <p:cNvPr id="44" name="Rounded Rectangle 43"/>
           <p:cNvSpPr/>
           <p:nvPr/>
         </p:nvSpPr>
         <p:spPr>
           <a:xfrm>
-            <a:off x="1920240" y="4636008"/>
-            <a:ext cx="1874428" cy="146304"/>
+            <a:off x="3383280" y="5394960"/>
+            <a:ext cx="2219002" cy="146304"/>
           </a:xfrm>
           <a:prstGeom prst="roundRect">
             <a:avLst>
@@ -38875,7 +39477,7 @@
             </a:avLst>
           </a:prstGeom>
           <a:solidFill>
-            <a:srgbClr val="5B7A99"/>
+            <a:srgbClr val="9F7639"/>
           </a:solidFill>
           <a:ln>
             <a:noFill/>
@@ -38906,14 +39508,14 @@
       </p:sp>
       <p:sp>
         <p:nvSpPr>
-          <p:cNvPr id="32" name="TextBox 31"/>
-          <p:cNvSpPr txBox="1"/>
-          <p:nvPr/>
-        </p:nvSpPr>
-        <p:spPr>
-          <a:xfrm>
-            <a:off x="5135727" y="4562856"/>
-            <a:ext cx="868680" cy="274320"/>
+          <p:cNvPr id="45" name="TextBox 44"/>
+          <p:cNvSpPr txBox="1"/>
+          <p:nvPr/>
+        </p:nvSpPr>
+        <p:spPr>
+          <a:xfrm>
+            <a:off x="6556668" y="5321808"/>
+            <a:ext cx="914400" cy="274320"/>
           </a:xfrm>
           <a:prstGeom prst="rect">
             <a:avLst/>
@@ -38934,21 +39536,21 @@
                 </a:solidFill>
                 <a:latin typeface="Arial"/>
               </a:rPr>
-              <a:t>≈2.3×</a:t>
-            </a:r>
-          </a:p>
-        </p:txBody>
-      </p:sp>
-      <p:sp>
-        <p:nvSpPr>
-          <p:cNvPr id="33" name="TextBox 32"/>
-          <p:cNvSpPr txBox="1"/>
-          <p:nvPr/>
-        </p:nvSpPr>
-        <p:spPr>
-          <a:xfrm>
-            <a:off x="365760" y="4974336"/>
-            <a:ext cx="1463040" cy="274320"/>
+              <a:t>even lower</a:t>
+            </a:r>
+          </a:p>
+        </p:txBody>
+      </p:sp>
+      <p:sp>
+        <p:nvSpPr>
+          <p:cNvPr id="46" name="TextBox 45"/>
+          <p:cNvSpPr txBox="1"/>
+          <p:nvPr/>
+        </p:nvSpPr>
+        <p:spPr>
+          <a:xfrm>
+            <a:off x="365760" y="5687568"/>
+            <a:ext cx="2926080" cy="274320"/>
           </a:xfrm>
           <a:prstGeom prst="rect">
             <a:avLst/>
@@ -38969,21 +39571,21 @@
                 </a:solidFill>
                 <a:latin typeface="Arial"/>
               </a:rPr>
-              <a:t>HEC+MC/CSP 1-5</a:t>
-            </a:r>
-          </a:p>
-        </p:txBody>
-      </p:sp>
-      <p:sp>
-        <p:nvSpPr>
-          <p:cNvPr id="34" name="Rounded Rectangle 33"/>
+              <a:t>AquaGel-K (reference)</a:t>
+            </a:r>
+          </a:p>
+        </p:txBody>
+      </p:sp>
+      <p:sp>
+        <p:nvSpPr>
+          <p:cNvPr id="47" name="Rounded Rectangle 46"/>
           <p:cNvSpPr/>
           <p:nvPr/>
         </p:nvSpPr>
         <p:spPr>
           <a:xfrm>
-            <a:off x="1920240" y="5047488"/>
-            <a:ext cx="3124047" cy="146304"/>
+            <a:off x="3383280" y="5760720"/>
+            <a:ext cx="3081948" cy="146304"/>
           </a:xfrm>
           <a:prstGeom prst="roundRect">
             <a:avLst>
@@ -39024,14 +39626,14 @@
       </p:sp>
       <p:sp>
         <p:nvSpPr>
-          <p:cNvPr id="35" name="Rounded Rectangle 34"/>
+          <p:cNvPr id="48" name="Rounded Rectangle 47"/>
           <p:cNvSpPr/>
           <p:nvPr/>
         </p:nvSpPr>
         <p:spPr>
           <a:xfrm>
-            <a:off x="1920240" y="5047488"/>
-            <a:ext cx="2124352" cy="146304"/>
+            <a:off x="3383280" y="5760720"/>
+            <a:ext cx="61638" cy="146304"/>
           </a:xfrm>
           <a:prstGeom prst="roundRect">
             <a:avLst>
@@ -39039,7 +39641,7 @@
             </a:avLst>
           </a:prstGeom>
           <a:solidFill>
-            <a:srgbClr val="4A7C8C"/>
+            <a:srgbClr val="AAB4C0"/>
           </a:solidFill>
           <a:ln>
             <a:noFill/>
@@ -39070,14 +39672,14 @@
       </p:sp>
       <p:sp>
         <p:nvSpPr>
-          <p:cNvPr id="36" name="TextBox 35"/>
-          <p:cNvSpPr txBox="1"/>
-          <p:nvPr/>
-        </p:nvSpPr>
-        <p:spPr>
-          <a:xfrm>
-            <a:off x="5135727" y="4974336"/>
-            <a:ext cx="868680" cy="274320"/>
+          <p:cNvPr id="49" name="TextBox 48"/>
+          <p:cNvSpPr txBox="1"/>
+          <p:nvPr/>
+        </p:nvSpPr>
+        <p:spPr>
+          <a:xfrm>
+            <a:off x="6556668" y="5687568"/>
+            <a:ext cx="914400" cy="274320"/>
           </a:xfrm>
           <a:prstGeom prst="rect">
             <a:avLst/>
@@ -39098,64 +39700,119 @@
                 </a:solidFill>
                 <a:latin typeface="Arial"/>
               </a:rPr>
-              <a:t>≈2.6×</a:t>
-            </a:r>
-          </a:p>
-        </p:txBody>
-      </p:sp>
-      <p:sp>
-        <p:nvSpPr>
-          <p:cNvPr id="37" name="TextBox 36"/>
-          <p:cNvSpPr txBox="1"/>
-          <p:nvPr/>
-        </p:nvSpPr>
-        <p:spPr>
-          <a:xfrm>
-            <a:off x="6187287" y="3374136"/>
-            <a:ext cx="5638647" cy="274320"/>
-          </a:xfrm>
-          <a:prstGeom prst="rect">
-            <a:avLst/>
-          </a:prstGeom>
-          <a:noFill/>
-        </p:spPr>
-        <p:txBody>
-          <a:bodyPr wrap="square" anchor="t" lIns="36000" rIns="36000" tIns="18000" bIns="18000">
-            <a:spAutoFit/>
-          </a:bodyPr>
-          <a:lstStyle/>
-          <a:p>
-            <a:pPr algn="l"/>
-            <a:r>
-              <a:rPr sz="1344" b="1" i="0">
-                <a:solidFill>
-                  <a:srgbClr val="64748B"/>
-                </a:solidFill>
-                <a:latin typeface="Arial"/>
-              </a:rPr>
-              <a:t>Insulating Effect from Foaming</a:t>
-            </a:r>
-          </a:p>
-        </p:txBody>
-      </p:sp>
-      <p:sp>
-        <p:nvSpPr>
-          <p:cNvPr id="38" name="TextBox 37"/>
-          <p:cNvSpPr txBox="1"/>
-          <p:nvPr/>
-        </p:nvSpPr>
-        <p:spPr>
-          <a:xfrm>
-            <a:off x="6233007" y="3739896"/>
-            <a:ext cx="182880" cy="274320"/>
-          </a:xfrm>
-          <a:prstGeom prst="rect">
-            <a:avLst/>
-          </a:prstGeom>
-          <a:noFill/>
-        </p:spPr>
-        <p:txBody>
-          <a:bodyPr wrap="square" anchor="t" lIns="36000" rIns="36000" tIns="18000" bIns="18000">
+              <a:t>≈0</a:t>
+            </a:r>
+          </a:p>
+        </p:txBody>
+      </p:sp>
+      <p:sp>
+        <p:nvSpPr>
+          <p:cNvPr id="50" name="Rounded Rectangle 49"/>
+          <p:cNvSpPr/>
+          <p:nvPr/>
+        </p:nvSpPr>
+        <p:spPr>
+          <a:xfrm>
+            <a:off x="365760" y="6144768"/>
+            <a:ext cx="11460175" cy="530352"/>
+          </a:xfrm>
+          <a:prstGeom prst="roundRect">
+            <a:avLst>
+              <a:gd name="adj" fmla="val 4000"/>
+            </a:avLst>
+          </a:prstGeom>
+          <a:solidFill>
+            <a:srgbClr val="1E293B"/>
+          </a:solidFill>
+          <a:ln>
+            <a:noFill/>
+          </a:ln>
+          <a:effectLst/>
+        </p:spPr>
+        <p:style>
+          <a:lnRef idx="1">
+            <a:schemeClr val="accent1"/>
+          </a:lnRef>
+          <a:fillRef idx="3">
+            <a:schemeClr val="accent1"/>
+          </a:fillRef>
+          <a:effectRef idx="2">
+            <a:schemeClr val="accent1"/>
+          </a:effectRef>
+          <a:fontRef idx="minor">
+            <a:schemeClr val="lt1"/>
+          </a:fontRef>
+        </p:style>
+        <p:txBody>
+          <a:bodyPr rtlCol="0" anchor="ctr"/>
+          <a:lstStyle/>
+          <a:p>
+            <a:pPr algn="ctr"/>
+          </a:p>
+        </p:txBody>
+      </p:sp>
+      <p:sp>
+        <p:nvSpPr>
+          <p:cNvPr id="51" name="Rectangle 50"/>
+          <p:cNvSpPr/>
+          <p:nvPr/>
+        </p:nvSpPr>
+        <p:spPr>
+          <a:xfrm>
+            <a:off x="365760" y="6144768"/>
+            <a:ext cx="54864" cy="530352"/>
+          </a:xfrm>
+          <a:prstGeom prst="rect">
+            <a:avLst/>
+          </a:prstGeom>
+          <a:solidFill>
+            <a:srgbClr val="D4A574"/>
+          </a:solidFill>
+          <a:ln>
+            <a:noFill/>
+          </a:ln>
+          <a:effectLst/>
+        </p:spPr>
+        <p:style>
+          <a:lnRef idx="1">
+            <a:schemeClr val="accent1"/>
+          </a:lnRef>
+          <a:fillRef idx="3">
+            <a:schemeClr val="accent1"/>
+          </a:fillRef>
+          <a:effectRef idx="2">
+            <a:schemeClr val="accent1"/>
+          </a:effectRef>
+          <a:fontRef idx="minor">
+            <a:schemeClr val="lt1"/>
+          </a:fontRef>
+        </p:style>
+        <p:txBody>
+          <a:bodyPr rtlCol="0" anchor="ctr"/>
+          <a:lstStyle/>
+          <a:p>
+            <a:pPr algn="ctr"/>
+          </a:p>
+        </p:txBody>
+      </p:sp>
+      <p:sp>
+        <p:nvSpPr>
+          <p:cNvPr id="52" name="TextBox 51"/>
+          <p:cNvSpPr txBox="1"/>
+          <p:nvPr/>
+        </p:nvSpPr>
+        <p:spPr>
+          <a:xfrm>
+            <a:off x="548640" y="6144768"/>
+            <a:ext cx="365760" cy="530352"/>
+          </a:xfrm>
+          <a:prstGeom prst="rect">
+            <a:avLst/>
+          </a:prstGeom>
+          <a:noFill/>
+        </p:spPr>
+        <p:txBody>
+          <a:bodyPr wrap="square" anchor="ctr" lIns="36000" rIns="36000" tIns="18000" bIns="18000">
             <a:spAutoFit/>
           </a:bodyPr>
           <a:lstStyle/>
@@ -39164,256 +39821,46 @@
             <a:r>
               <a:rPr sz="1568" b="0" i="0">
                 <a:solidFill>
-                  <a:srgbClr val="3B5174"/>
-                </a:solidFill>
-                <a:latin typeface="Arial"/>
-              </a:rPr>
-              <a:t>•</a:t>
-            </a:r>
-          </a:p>
-        </p:txBody>
-      </p:sp>
-      <p:sp>
-        <p:nvSpPr>
-          <p:cNvPr id="39" name="TextBox 38"/>
-          <p:cNvSpPr txBox="1"/>
-          <p:nvPr/>
-        </p:nvSpPr>
-        <p:spPr>
-          <a:xfrm>
-            <a:off x="6461607" y="3739896"/>
-            <a:ext cx="5318607" cy="274320"/>
-          </a:xfrm>
-          <a:prstGeom prst="rect">
-            <a:avLst/>
-          </a:prstGeom>
-          <a:noFill/>
-        </p:spPr>
-        <p:txBody>
-          <a:bodyPr wrap="square" anchor="t" lIns="36000" rIns="36000" tIns="18000" bIns="18000">
-            <a:spAutoFit/>
-          </a:bodyPr>
-          <a:lstStyle/>
-          <a:p>
-            <a:pPr algn="l"/>
-            <a:r>
-              <a:rPr sz="1344" b="0" i="0">
-                <a:solidFill>
-                  <a:srgbClr val="334155"/>
-                </a:solidFill>
-                <a:latin typeface="Arial"/>
-              </a:rPr>
-              <a:t>Expands to &gt;2× initial thickness → heat conduction path extended</a:t>
-            </a:r>
-          </a:p>
-        </p:txBody>
-      </p:sp>
-      <p:sp>
-        <p:nvSpPr>
-          <p:cNvPr id="40" name="TextBox 39"/>
-          <p:cNvSpPr txBox="1"/>
-          <p:nvPr/>
-        </p:nvSpPr>
-        <p:spPr>
-          <a:xfrm>
-            <a:off x="6233007" y="4123944"/>
-            <a:ext cx="182880" cy="274320"/>
-          </a:xfrm>
-          <a:prstGeom prst="rect">
-            <a:avLst/>
-          </a:prstGeom>
-          <a:noFill/>
-        </p:spPr>
-        <p:txBody>
-          <a:bodyPr wrap="square" anchor="t" lIns="36000" rIns="36000" tIns="18000" bIns="18000">
-            <a:spAutoFit/>
-          </a:bodyPr>
-          <a:lstStyle/>
-          <a:p>
-            <a:pPr algn="l"/>
-            <a:r>
-              <a:rPr sz="1568" b="0" i="0">
-                <a:solidFill>
-                  <a:srgbClr val="3B5174"/>
-                </a:solidFill>
-                <a:latin typeface="Arial"/>
-              </a:rPr>
-              <a:t>•</a:t>
-            </a:r>
-          </a:p>
-        </p:txBody>
-      </p:sp>
-      <p:sp>
-        <p:nvSpPr>
-          <p:cNvPr id="41" name="TextBox 40"/>
-          <p:cNvSpPr txBox="1"/>
-          <p:nvPr/>
-        </p:nvSpPr>
-        <p:spPr>
-          <a:xfrm>
-            <a:off x="6461607" y="4123944"/>
-            <a:ext cx="5318607" cy="274320"/>
-          </a:xfrm>
-          <a:prstGeom prst="rect">
-            <a:avLst/>
-          </a:prstGeom>
-          <a:noFill/>
-        </p:spPr>
-        <p:txBody>
-          <a:bodyPr wrap="square" anchor="t" lIns="36000" rIns="36000" tIns="18000" bIns="18000">
-            <a:spAutoFit/>
-          </a:bodyPr>
-          <a:lstStyle/>
-          <a:p>
-            <a:pPr algn="l"/>
-            <a:r>
-              <a:rPr sz="1344" b="0" i="0">
-                <a:solidFill>
-                  <a:srgbClr val="334155"/>
-                </a:solidFill>
-                <a:latin typeface="Arial"/>
-              </a:rPr>
-              <a:t>Air trapped in pores enhances thermal insulation</a:t>
-            </a:r>
-          </a:p>
-        </p:txBody>
-      </p:sp>
-      <p:sp>
-        <p:nvSpPr>
-          <p:cNvPr id="42" name="TextBox 41"/>
-          <p:cNvSpPr txBox="1"/>
-          <p:nvPr/>
-        </p:nvSpPr>
-        <p:spPr>
-          <a:xfrm>
-            <a:off x="6233007" y="4507992"/>
-            <a:ext cx="182880" cy="274320"/>
-          </a:xfrm>
-          <a:prstGeom prst="rect">
-            <a:avLst/>
-          </a:prstGeom>
-          <a:noFill/>
-        </p:spPr>
-        <p:txBody>
-          <a:bodyPr wrap="square" anchor="t" lIns="36000" rIns="36000" tIns="18000" bIns="18000">
-            <a:spAutoFit/>
-          </a:bodyPr>
-          <a:lstStyle/>
-          <a:p>
-            <a:pPr algn="l"/>
-            <a:r>
-              <a:rPr sz="1568" b="0" i="0">
-                <a:solidFill>
-                  <a:srgbClr val="3B5174"/>
-                </a:solidFill>
-                <a:latin typeface="Arial"/>
-              </a:rPr>
-              <a:t>•</a:t>
-            </a:r>
-          </a:p>
-        </p:txBody>
-      </p:sp>
-      <p:sp>
-        <p:nvSpPr>
-          <p:cNvPr id="43" name="TextBox 42"/>
-          <p:cNvSpPr txBox="1"/>
-          <p:nvPr/>
-        </p:nvSpPr>
-        <p:spPr>
-          <a:xfrm>
-            <a:off x="6461607" y="4507992"/>
-            <a:ext cx="5318607" cy="274320"/>
-          </a:xfrm>
-          <a:prstGeom prst="rect">
-            <a:avLst/>
-          </a:prstGeom>
-          <a:noFill/>
-        </p:spPr>
-        <p:txBody>
-          <a:bodyPr wrap="square" anchor="t" lIns="36000" rIns="36000" tIns="18000" bIns="18000">
-            <a:spAutoFit/>
-          </a:bodyPr>
-          <a:lstStyle/>
-          <a:p>
-            <a:pPr algn="l"/>
-            <a:r>
-              <a:rPr sz="1344" b="0" i="0">
-                <a:solidFill>
-                  <a:srgbClr val="334155"/>
-                </a:solidFill>
-                <a:latin typeface="Arial"/>
-              </a:rPr>
-              <a:t>AquaGel-K does not foam → collapses flat under flame</a:t>
-            </a:r>
-          </a:p>
-        </p:txBody>
-      </p:sp>
-      <p:sp>
-        <p:nvSpPr>
-          <p:cNvPr id="44" name="TextBox 43"/>
-          <p:cNvSpPr txBox="1"/>
-          <p:nvPr/>
-        </p:nvSpPr>
-        <p:spPr>
-          <a:xfrm>
-            <a:off x="6233007" y="4892040"/>
-            <a:ext cx="182880" cy="274320"/>
-          </a:xfrm>
-          <a:prstGeom prst="rect">
-            <a:avLst/>
-          </a:prstGeom>
-          <a:noFill/>
-        </p:spPr>
-        <p:txBody>
-          <a:bodyPr wrap="square" anchor="t" lIns="36000" rIns="36000" tIns="18000" bIns="18000">
-            <a:spAutoFit/>
-          </a:bodyPr>
-          <a:lstStyle/>
-          <a:p>
-            <a:pPr algn="l"/>
-            <a:r>
-              <a:rPr sz="1568" b="0" i="0">
-                <a:solidFill>
-                  <a:srgbClr val="3B5174"/>
-                </a:solidFill>
-                <a:latin typeface="Arial"/>
-              </a:rPr>
-              <a:t>•</a:t>
-            </a:r>
-          </a:p>
-        </p:txBody>
-      </p:sp>
-      <p:sp>
-        <p:nvSpPr>
-          <p:cNvPr id="45" name="TextBox 44"/>
-          <p:cNvSpPr txBox="1"/>
-          <p:nvPr/>
-        </p:nvSpPr>
-        <p:spPr>
-          <a:xfrm>
-            <a:off x="6461607" y="4892040"/>
-            <a:ext cx="5318607" cy="274320"/>
-          </a:xfrm>
-          <a:prstGeom prst="rect">
-            <a:avLst/>
-          </a:prstGeom>
-          <a:noFill/>
-        </p:spPr>
-        <p:txBody>
-          <a:bodyPr wrap="square" anchor="t" lIns="36000" rIns="36000" tIns="18000" bIns="18000">
-            <a:spAutoFit/>
-          </a:bodyPr>
-          <a:lstStyle/>
-          <a:p>
-            <a:pPr algn="l"/>
-            <a:r>
-              <a:rPr sz="1344" b="0" i="0">
-                <a:solidFill>
-                  <a:srgbClr val="334155"/>
-                </a:solidFill>
-                <a:latin typeface="Arial"/>
-              </a:rPr>
-              <a:t>HEC+MC/CSP without SDS achieves the highest foaming index (≈2.6)</a:t>
+                  <a:srgbClr val="D4A574"/>
+                </a:solidFill>
+                <a:latin typeface="Arial"/>
+              </a:rPr>
+              <a:t>!</a:t>
+            </a:r>
+          </a:p>
+        </p:txBody>
+      </p:sp>
+      <p:sp>
+        <p:nvSpPr>
+          <p:cNvPr id="53" name="TextBox 52"/>
+          <p:cNvSpPr txBox="1"/>
+          <p:nvPr/>
+        </p:nvSpPr>
+        <p:spPr>
+          <a:xfrm>
+            <a:off x="960120" y="6144768"/>
+            <a:ext cx="10774375" cy="530352"/>
+          </a:xfrm>
+          <a:prstGeom prst="rect">
+            <a:avLst/>
+          </a:prstGeom>
+          <a:noFill/>
+        </p:spPr>
+        <p:txBody>
+          <a:bodyPr wrap="square" anchor="ctr" lIns="36000" rIns="36000" tIns="18000" bIns="18000">
+            <a:spAutoFit/>
+          </a:bodyPr>
+          <a:lstStyle/>
+          <a:p>
+            <a:pPr algn="l"/>
+            <a:r>
+              <a:rPr sz="1456" b="1" i="0">
+                <a:solidFill>
+                  <a:srgbClr val="FFFFFF"/>
+                </a:solidFill>
+                <a:latin typeface="Arial"/>
+              </a:rPr>
+              <a:t>SDS did not improve foaming — instead coarsened bubble structure (Fig. 4c SEM) → explains the Foaming Index decrease</a:t>
             </a:r>
           </a:p>
         </p:txBody>

--- a/slides_en.pptx
+++ b/slides_en.pptx
@@ -22250,7 +22250,7 @@
                 </a:solidFill>
                 <a:latin typeface="Arial"/>
               </a:rPr>
-              <a:t>Rheology ②: Shear Thinning and Power-law Index</a:t>
+              <a:t>Rheology ②: Two Yield Stresses — Static (Adhesion) &amp; Dynamic (Spraying)</a:t>
             </a:r>
           </a:p>
         </p:txBody>
@@ -22343,7 +22343,167 @@
         <p:spPr>
           <a:xfrm>
             <a:off x="365760" y="859536"/>
-            <a:ext cx="6555461" cy="4389120"/>
+            <a:ext cx="11460175" cy="566928"/>
+          </a:xfrm>
+          <a:prstGeom prst="roundRect">
+            <a:avLst>
+              <a:gd name="adj" fmla="val 4000"/>
+            </a:avLst>
+          </a:prstGeom>
+          <a:solidFill>
+            <a:srgbClr val="F8FAFC"/>
+          </a:solidFill>
+          <a:ln>
+            <a:noFill/>
+          </a:ln>
+          <a:effectLst/>
+        </p:spPr>
+        <p:style>
+          <a:lnRef idx="1">
+            <a:schemeClr val="accent1"/>
+          </a:lnRef>
+          <a:fillRef idx="3">
+            <a:schemeClr val="accent1"/>
+          </a:fillRef>
+          <a:effectRef idx="2">
+            <a:schemeClr val="accent1"/>
+          </a:effectRef>
+          <a:fontRef idx="minor">
+            <a:schemeClr val="lt1"/>
+          </a:fontRef>
+        </p:style>
+        <p:txBody>
+          <a:bodyPr rtlCol="0" anchor="ctr"/>
+          <a:lstStyle/>
+          <a:p>
+            <a:pPr algn="ctr"/>
+          </a:p>
+        </p:txBody>
+      </p:sp>
+      <p:sp>
+        <p:nvSpPr>
+          <p:cNvPr id="11" name="Rectangle 10"/>
+          <p:cNvSpPr/>
+          <p:nvPr/>
+        </p:nvSpPr>
+        <p:spPr>
+          <a:xfrm>
+            <a:off x="365760" y="859536"/>
+            <a:ext cx="54864" cy="566928"/>
+          </a:xfrm>
+          <a:prstGeom prst="rect">
+            <a:avLst/>
+          </a:prstGeom>
+          <a:solidFill>
+            <a:srgbClr val="3B5174"/>
+          </a:solidFill>
+          <a:ln>
+            <a:noFill/>
+          </a:ln>
+          <a:effectLst/>
+        </p:spPr>
+        <p:style>
+          <a:lnRef idx="1">
+            <a:schemeClr val="accent1"/>
+          </a:lnRef>
+          <a:fillRef idx="3">
+            <a:schemeClr val="accent1"/>
+          </a:fillRef>
+          <a:effectRef idx="2">
+            <a:schemeClr val="accent1"/>
+          </a:effectRef>
+          <a:fontRef idx="minor">
+            <a:schemeClr val="lt1"/>
+          </a:fontRef>
+        </p:style>
+        <p:txBody>
+          <a:bodyPr rtlCol="0" anchor="ctr"/>
+          <a:lstStyle/>
+          <a:p>
+            <a:pPr algn="ctr"/>
+          </a:p>
+        </p:txBody>
+      </p:sp>
+      <p:sp>
+        <p:nvSpPr>
+          <p:cNvPr id="12" name="TextBox 11"/>
+          <p:cNvSpPr txBox="1"/>
+          <p:nvPr/>
+        </p:nvSpPr>
+        <p:spPr>
+          <a:xfrm>
+            <a:off x="548640" y="859536"/>
+            <a:ext cx="365760" cy="566928"/>
+          </a:xfrm>
+          <a:prstGeom prst="rect">
+            <a:avLst/>
+          </a:prstGeom>
+          <a:noFill/>
+        </p:spPr>
+        <p:txBody>
+          <a:bodyPr wrap="square" anchor="ctr" lIns="36000" rIns="36000" tIns="18000" bIns="18000">
+            <a:spAutoFit/>
+          </a:bodyPr>
+          <a:lstStyle/>
+          <a:p>
+            <a:pPr algn="l"/>
+            <a:r>
+              <a:rPr sz="1568" b="0" i="0">
+                <a:solidFill>
+                  <a:srgbClr val="3B5174"/>
+                </a:solidFill>
+                <a:latin typeface="Arial"/>
+              </a:rPr>
+              <a:t>ƒ</a:t>
+            </a:r>
+          </a:p>
+        </p:txBody>
+      </p:sp>
+      <p:sp>
+        <p:nvSpPr>
+          <p:cNvPr id="13" name="TextBox 12"/>
+          <p:cNvSpPr txBox="1"/>
+          <p:nvPr/>
+        </p:nvSpPr>
+        <p:spPr>
+          <a:xfrm>
+            <a:off x="960120" y="859536"/>
+            <a:ext cx="10774375" cy="566928"/>
+          </a:xfrm>
+          <a:prstGeom prst="rect">
+            <a:avLst/>
+          </a:prstGeom>
+          <a:noFill/>
+        </p:spPr>
+        <p:txBody>
+          <a:bodyPr wrap="square" anchor="ctr" lIns="36000" rIns="36000" tIns="18000" bIns="18000">
+            <a:spAutoFit/>
+          </a:bodyPr>
+          <a:lstStyle/>
+          <a:p>
+            <a:pPr algn="l"/>
+            <a:r>
+              <a:rPr sz="1456" b="1" i="0">
+                <a:solidFill>
+                  <a:srgbClr val="1E293B"/>
+                </a:solidFill>
+                <a:latin typeface="Arial"/>
+              </a:rPr>
+              <a:t>Yield stress = stress needed to initiate / maintain flow of the gel. Evaluated with two definitions (Fig. 2c–d, S3)</a:t>
+            </a:r>
+          </a:p>
+        </p:txBody>
+      </p:sp>
+      <p:sp>
+        <p:nvSpPr>
+          <p:cNvPr id="14" name="Rounded Rectangle 13"/>
+          <p:cNvSpPr/>
+          <p:nvPr/>
+        </p:nvSpPr>
+        <p:spPr>
+          <a:xfrm>
+            <a:off x="365760" y="1609344"/>
+            <a:ext cx="4492630" cy="3246120"/>
           </a:xfrm>
           <a:prstGeom prst="roundRect">
             <a:avLst>
@@ -22384,13 +22544,13 @@
       </p:sp>
       <p:sp>
         <p:nvSpPr>
-          <p:cNvPr id="11" name="Rectangle 10"/>
+          <p:cNvPr id="15" name="Rectangle 14"/>
           <p:cNvSpPr/>
           <p:nvPr/>
         </p:nvSpPr>
         <p:spPr>
           <a:xfrm>
-            <a:off x="475488" y="969264"/>
+            <a:off x="475488" y="1719072"/>
             <a:ext cx="868680" cy="292608"/>
           </a:xfrm>
           <a:prstGeom prst="rect">
@@ -22428,13 +22588,13 @@
       </p:sp>
       <p:sp>
         <p:nvSpPr>
-          <p:cNvPr id="12" name="TextBox 11"/>
-          <p:cNvSpPr txBox="1"/>
-          <p:nvPr/>
-        </p:nvSpPr>
-        <p:spPr>
-          <a:xfrm>
-            <a:off x="475488" y="969264"/>
+          <p:cNvPr id="16" name="TextBox 15"/>
+          <p:cNvSpPr txBox="1"/>
+          <p:nvPr/>
+        </p:nvSpPr>
+        <p:spPr>
+          <a:xfrm>
+            <a:off x="475488" y="1719072"/>
             <a:ext cx="868680" cy="292608"/>
           </a:xfrm>
           <a:prstGeom prst="rect">
@@ -22463,14 +22623,14 @@
       </p:sp>
       <p:sp>
         <p:nvSpPr>
-          <p:cNvPr id="13" name="TextBox 12"/>
-          <p:cNvSpPr txBox="1"/>
-          <p:nvPr/>
-        </p:nvSpPr>
-        <p:spPr>
-          <a:xfrm>
-            <a:off x="365760" y="859536"/>
-            <a:ext cx="6555461" cy="4389120"/>
+          <p:cNvPr id="17" name="TextBox 16"/>
+          <p:cNvSpPr txBox="1"/>
+          <p:nvPr/>
+        </p:nvSpPr>
+        <p:spPr>
+          <a:xfrm>
+            <a:off x="365760" y="1609344"/>
+            <a:ext cx="4492630" cy="3246120"/>
           </a:xfrm>
           <a:prstGeom prst="rect">
             <a:avLst/>
@@ -22498,14 +22658,14 @@
       </p:sp>
       <p:sp>
         <p:nvSpPr>
-          <p:cNvPr id="14" name="TextBox 13"/>
-          <p:cNvSpPr txBox="1"/>
-          <p:nvPr/>
-        </p:nvSpPr>
-        <p:spPr>
-          <a:xfrm>
-            <a:off x="365760" y="5285232"/>
-            <a:ext cx="6555461" cy="274320"/>
+          <p:cNvPr id="18" name="TextBox 17"/>
+          <p:cNvSpPr txBox="1"/>
+          <p:nvPr/>
+        </p:nvSpPr>
+        <p:spPr>
+          <a:xfrm>
+            <a:off x="365760" y="4892040"/>
+            <a:ext cx="4492630" cy="274320"/>
           </a:xfrm>
           <a:prstGeom prst="rect">
             <a:avLst/>
@@ -22526,33 +22686,33 @@
                 </a:solidFill>
                 <a:latin typeface="Arial"/>
               </a:rPr>
-              <a:t>Viscosity vs. shear rate (shear-thinning behavior)</a:t>
-            </a:r>
-          </a:p>
-        </p:txBody>
-      </p:sp>
-      <p:sp>
-        <p:nvSpPr>
-          <p:cNvPr id="15" name="Rounded Rectangle 14"/>
+              <a:t>Steady-shear flow sweep → dynamic yield stress via HB fit</a:t>
+            </a:r>
+          </a:p>
+        </p:txBody>
+      </p:sp>
+      <p:sp>
+        <p:nvSpPr>
+          <p:cNvPr id="19" name="Rounded Rectangle 18"/>
           <p:cNvSpPr/>
           <p:nvPr/>
         </p:nvSpPr>
         <p:spPr>
           <a:xfrm>
-            <a:off x="7104101" y="859536"/>
-            <a:ext cx="4721833" cy="1097280"/>
+            <a:off x="5077846" y="1609344"/>
+            <a:ext cx="6748089" cy="1554480"/>
           </a:xfrm>
           <a:prstGeom prst="roundRect">
             <a:avLst>
-              <a:gd name="adj" fmla="val 3000"/>
+              <a:gd name="adj" fmla="val 5000"/>
             </a:avLst>
           </a:prstGeom>
           <a:solidFill>
-            <a:srgbClr val="F8FAFC"/>
+            <a:srgbClr val="F1F5F9"/>
           </a:solidFill>
-          <a:ln w="6350">
+          <a:ln w="15240">
             <a:solidFill>
-              <a:srgbClr val="E2E8F0"/>
+              <a:srgbClr val="4A7C8C"/>
             </a:solidFill>
           </a:ln>
           <a:effectLst/>
@@ -22581,132 +22741,23 @@
       </p:sp>
       <p:sp>
         <p:nvSpPr>
-          <p:cNvPr id="16" name="TextBox 15"/>
-          <p:cNvSpPr txBox="1"/>
-          <p:nvPr/>
-        </p:nvSpPr>
-        <p:spPr>
-          <a:xfrm>
-            <a:off x="7232117" y="969264"/>
-            <a:ext cx="4465801" cy="228600"/>
-          </a:xfrm>
-          <a:prstGeom prst="rect">
-            <a:avLst/>
-          </a:prstGeom>
-          <a:noFill/>
-        </p:spPr>
-        <p:txBody>
-          <a:bodyPr wrap="square" anchor="t" lIns="36000" rIns="36000" tIns="18000" bIns="18000">
-            <a:spAutoFit/>
-          </a:bodyPr>
-          <a:lstStyle/>
-          <a:p>
-            <a:pPr algn="l"/>
-            <a:r>
-              <a:rPr sz="1120" b="1" i="0">
-                <a:solidFill>
-                  <a:srgbClr val="64748B"/>
-                </a:solidFill>
-                <a:latin typeface="Arial"/>
-              </a:rPr>
-              <a:t>Flow index n</a:t>
-            </a:r>
-          </a:p>
-        </p:txBody>
-      </p:sp>
-      <p:sp>
-        <p:nvSpPr>
-          <p:cNvPr id="17" name="TextBox 16"/>
-          <p:cNvSpPr txBox="1"/>
-          <p:nvPr/>
-        </p:nvSpPr>
-        <p:spPr>
-          <a:xfrm>
-            <a:off x="7232117" y="1225296"/>
-            <a:ext cx="4465801" cy="411480"/>
-          </a:xfrm>
-          <a:prstGeom prst="rect">
-            <a:avLst/>
-          </a:prstGeom>
-          <a:noFill/>
-        </p:spPr>
-        <p:txBody>
-          <a:bodyPr wrap="square" anchor="t" lIns="36000" rIns="36000" tIns="18000" bIns="18000">
-            <a:spAutoFit/>
-          </a:bodyPr>
-          <a:lstStyle/>
-          <a:p>
-            <a:pPr algn="l"/>
-            <a:r>
-              <a:rPr sz="2240" b="1" i="0">
-                <a:solidFill>
-                  <a:srgbClr val="3B5174"/>
-                </a:solidFill>
-                <a:latin typeface="Arial"/>
-              </a:rPr>
-              <a:t>n &lt; 1</a:t>
-            </a:r>
-          </a:p>
-        </p:txBody>
-      </p:sp>
-      <p:sp>
-        <p:nvSpPr>
-          <p:cNvPr id="18" name="TextBox 17"/>
-          <p:cNvSpPr txBox="1"/>
-          <p:nvPr/>
-        </p:nvSpPr>
-        <p:spPr>
-          <a:xfrm>
-            <a:off x="7232117" y="1645920"/>
-            <a:ext cx="4465801" cy="219456"/>
-          </a:xfrm>
-          <a:prstGeom prst="rect">
-            <a:avLst/>
-          </a:prstGeom>
-          <a:noFill/>
-        </p:spPr>
-        <p:txBody>
-          <a:bodyPr wrap="square" anchor="t" lIns="36000" rIns="36000" tIns="18000" bIns="18000">
-            <a:spAutoFit/>
-          </a:bodyPr>
-          <a:lstStyle/>
-          <a:p>
-            <a:pPr algn="l"/>
-            <a:r>
-              <a:rPr sz="1008" b="0" i="0">
-                <a:solidFill>
-                  <a:srgbClr val="64748B"/>
-                </a:solidFill>
-                <a:latin typeface="Arial"/>
-              </a:rPr>
-              <a:t>HEC+MC/CSP — strong shear thinning</a:t>
-            </a:r>
-          </a:p>
-        </p:txBody>
-      </p:sp>
-      <p:sp>
-        <p:nvSpPr>
-          <p:cNvPr id="19" name="Rounded Rectangle 18"/>
+          <p:cNvPr id="20" name="Rectangle 19"/>
           <p:cNvSpPr/>
           <p:nvPr/>
         </p:nvSpPr>
         <p:spPr>
           <a:xfrm>
-            <a:off x="7104101" y="2093976"/>
-            <a:ext cx="4721833" cy="1097280"/>
-          </a:xfrm>
-          <a:prstGeom prst="roundRect">
-            <a:avLst>
-              <a:gd name="adj" fmla="val 3000"/>
-            </a:avLst>
+            <a:off x="5077846" y="1609344"/>
+            <a:ext cx="54864" cy="1554480"/>
+          </a:xfrm>
+          <a:prstGeom prst="rect">
+            <a:avLst/>
           </a:prstGeom>
           <a:solidFill>
-            <a:srgbClr val="F8FAFC"/>
+            <a:srgbClr val="4A7C8C"/>
           </a:solidFill>
-          <a:ln w="6350">
-            <a:solidFill>
-              <a:srgbClr val="E2E8F0"/>
-            </a:solidFill>
+          <a:ln>
+            <a:noFill/>
           </a:ln>
           <a:effectLst/>
         </p:spPr>
@@ -22734,14 +22785,14 @@
       </p:sp>
       <p:sp>
         <p:nvSpPr>
-          <p:cNvPr id="20" name="TextBox 19"/>
-          <p:cNvSpPr txBox="1"/>
-          <p:nvPr/>
-        </p:nvSpPr>
-        <p:spPr>
-          <a:xfrm>
-            <a:off x="7232117" y="2203704"/>
-            <a:ext cx="4465801" cy="228600"/>
+          <p:cNvPr id="21" name="TextBox 20"/>
+          <p:cNvSpPr txBox="1"/>
+          <p:nvPr/>
+        </p:nvSpPr>
+        <p:spPr>
+          <a:xfrm>
+            <a:off x="5279014" y="1719072"/>
+            <a:ext cx="6437193" cy="274320"/>
           </a:xfrm>
           <a:prstGeom prst="rect">
             <a:avLst/>
@@ -22756,27 +22807,27 @@
           <a:p>
             <a:pPr algn="l"/>
             <a:r>
-              <a:rPr sz="1120" b="1" i="0">
-                <a:solidFill>
-                  <a:srgbClr val="64748B"/>
-                </a:solidFill>
-                <a:latin typeface="Arial"/>
-              </a:rPr>
-              <a:t>Flow index n</a:t>
-            </a:r>
-          </a:p>
-        </p:txBody>
-      </p:sp>
-      <p:sp>
-        <p:nvSpPr>
-          <p:cNvPr id="21" name="TextBox 20"/>
-          <p:cNvSpPr txBox="1"/>
-          <p:nvPr/>
-        </p:nvSpPr>
-        <p:spPr>
-          <a:xfrm>
-            <a:off x="7232117" y="2459736"/>
-            <a:ext cx="4465801" cy="411480"/>
+              <a:rPr sz="1456" b="1" i="0">
+                <a:solidFill>
+                  <a:srgbClr val="4A7C8C"/>
+                </a:solidFill>
+                <a:latin typeface="Arial"/>
+              </a:rPr>
+              <a:t>Static yield stress σ_static ("absolute" yield stress)</a:t>
+            </a:r>
+          </a:p>
+        </p:txBody>
+      </p:sp>
+      <p:sp>
+        <p:nvSpPr>
+          <p:cNvPr id="22" name="TextBox 21"/>
+          <p:cNvSpPr txBox="1"/>
+          <p:nvPr/>
+        </p:nvSpPr>
+        <p:spPr>
+          <a:xfrm>
+            <a:off x="5279014" y="2066544"/>
+            <a:ext cx="6437193" cy="365760"/>
           </a:xfrm>
           <a:prstGeom prst="rect">
             <a:avLst/>
@@ -22791,27 +22842,27 @@
           <a:p>
             <a:pPr algn="l"/>
             <a:r>
-              <a:rPr sz="2240" b="1" i="0">
-                <a:solidFill>
-                  <a:srgbClr val="3B5174"/>
-                </a:solidFill>
-                <a:latin typeface="Arial"/>
-              </a:rPr>
-              <a:t>n &lt; 1</a:t>
-            </a:r>
-          </a:p>
-        </p:txBody>
-      </p:sp>
-      <p:sp>
-        <p:nvSpPr>
-          <p:cNvPr id="22" name="TextBox 21"/>
-          <p:cNvSpPr txBox="1"/>
-          <p:nvPr/>
-        </p:nvSpPr>
-        <p:spPr>
-          <a:xfrm>
-            <a:off x="7232117" y="2880360"/>
-            <a:ext cx="4465801" cy="219456"/>
+              <a:rPr sz="1288" b="0" i="0">
+                <a:solidFill>
+                  <a:srgbClr val="334155"/>
+                </a:solidFill>
+                <a:latin typeface="Arial"/>
+              </a:rPr>
+              <a:t>Measured: stress at G' / G'' crossover in a large-amplitude oscillatory shear (LAOS) sweep</a:t>
+            </a:r>
+          </a:p>
+        </p:txBody>
+      </p:sp>
+      <p:sp>
+        <p:nvSpPr>
+          <p:cNvPr id="23" name="TextBox 22"/>
+          <p:cNvSpPr txBox="1"/>
+          <p:nvPr/>
+        </p:nvSpPr>
+        <p:spPr>
+          <a:xfrm>
+            <a:off x="5279014" y="2505456"/>
+            <a:ext cx="6437193" cy="585216"/>
           </a:xfrm>
           <a:prstGeom prst="rect">
             <a:avLst/>
@@ -22826,39 +22877,51 @@
           <a:p>
             <a:pPr algn="l"/>
             <a:r>
-              <a:rPr sz="1008" b="0" i="0">
-                <a:solidFill>
-                  <a:srgbClr val="64748B"/>
-                </a:solidFill>
-                <a:latin typeface="Arial"/>
-              </a:rPr>
-              <a:t>MHEC/CSP — shear thinning</a:t>
-            </a:r>
-          </a:p>
-        </p:txBody>
-      </p:sp>
-      <p:sp>
-        <p:nvSpPr>
-          <p:cNvPr id="23" name="Rounded Rectangle 22"/>
+              <a:rPr sz="1288" b="0" i="0">
+                <a:solidFill>
+                  <a:srgbClr val="475569"/>
+                </a:solidFill>
+                <a:latin typeface="Arial"/>
+              </a:rPr>
+              <a:t>Meaning: stress to initiate flow (start deforming)</a:t>
+            </a:r>
+          </a:p>
+          <a:p>
+            <a:pPr algn="l"/>
+            <a:r>
+              <a:rPr sz="1288" b="0" i="0">
+                <a:solidFill>
+                  <a:srgbClr val="475569"/>
+                </a:solidFill>
+                <a:latin typeface="Arial"/>
+              </a:rPr>
+              <a:t>→ Higher = stronger adhesion to vertical/elevated fuel surfaces, reluctant to flow</a:t>
+            </a:r>
+          </a:p>
+        </p:txBody>
+      </p:sp>
+      <p:sp>
+        <p:nvSpPr>
+          <p:cNvPr id="24" name="Rounded Rectangle 23"/>
           <p:cNvSpPr/>
           <p:nvPr/>
         </p:nvSpPr>
         <p:spPr>
           <a:xfrm>
-            <a:off x="7104101" y="3419856"/>
-            <a:ext cx="4721833" cy="914400"/>
+            <a:off x="5077846" y="3300984"/>
+            <a:ext cx="6748089" cy="1554480"/>
           </a:xfrm>
           <a:prstGeom prst="roundRect">
             <a:avLst>
-              <a:gd name="adj" fmla="val 4000"/>
+              <a:gd name="adj" fmla="val 5000"/>
             </a:avLst>
           </a:prstGeom>
           <a:solidFill>
-            <a:srgbClr val="FFFFFF"/>
+            <a:srgbClr val="F1F5F9"/>
           </a:solidFill>
-          <a:ln w="6350">
+          <a:ln w="15240">
             <a:solidFill>
-              <a:srgbClr val="E2E8F0"/>
+              <a:srgbClr val="3B5174"/>
             </a:solidFill>
           </a:ln>
           <a:effectLst/>
@@ -22887,107 +22950,14 @@
       </p:sp>
       <p:sp>
         <p:nvSpPr>
-          <p:cNvPr id="24" name="TextBox 23"/>
-          <p:cNvSpPr txBox="1"/>
-          <p:nvPr/>
-        </p:nvSpPr>
-        <p:spPr>
-          <a:xfrm>
-            <a:off x="7241261" y="3557016"/>
-            <a:ext cx="4447513" cy="640080"/>
-          </a:xfrm>
-          <a:prstGeom prst="rect">
-            <a:avLst/>
-          </a:prstGeom>
-          <a:noFill/>
-        </p:spPr>
-        <p:txBody>
-          <a:bodyPr wrap="square" anchor="t" lIns="36000" rIns="36000" tIns="18000" bIns="18000">
-            <a:spAutoFit/>
-          </a:bodyPr>
-          <a:lstStyle/>
-          <a:p>
-            <a:pPr algn="l"/>
-            <a:r>
-              <a:rPr sz="1344" b="0" i="0">
-                <a:solidFill>
-                  <a:srgbClr val="475569"/>
-                </a:solidFill>
-                <a:latin typeface="Arial"/>
-              </a:rPr>
-              <a:t>n &lt; 1 = shear-thinning</a:t>
-            </a:r>
-          </a:p>
-          <a:p>
-            <a:pPr algn="l"/>
-            <a:r>
-              <a:rPr sz="1344" b="0" i="0">
-                <a:solidFill>
-                  <a:srgbClr val="475569"/>
-                </a:solidFill>
-                <a:latin typeface="Arial"/>
-              </a:rPr>
-              <a:t>Lower values → better flow at high shear → excellent sprayability</a:t>
-            </a:r>
-          </a:p>
-        </p:txBody>
-      </p:sp>
-      <p:sp>
-        <p:nvSpPr>
-          <p:cNvPr id="25" name="Rounded Rectangle 24"/>
+          <p:cNvPr id="25" name="Rectangle 24"/>
           <p:cNvSpPr/>
           <p:nvPr/>
         </p:nvSpPr>
         <p:spPr>
           <a:xfrm>
-            <a:off x="365760" y="5431536"/>
-            <a:ext cx="11460175" cy="594360"/>
-          </a:xfrm>
-          <a:prstGeom prst="roundRect">
-            <a:avLst>
-              <a:gd name="adj" fmla="val 4000"/>
-            </a:avLst>
-          </a:prstGeom>
-          <a:solidFill>
-            <a:srgbClr val="F8FAFC"/>
-          </a:solidFill>
-          <a:ln>
-            <a:noFill/>
-          </a:ln>
-          <a:effectLst/>
-        </p:spPr>
-        <p:style>
-          <a:lnRef idx="1">
-            <a:schemeClr val="accent1"/>
-          </a:lnRef>
-          <a:fillRef idx="3">
-            <a:schemeClr val="accent1"/>
-          </a:fillRef>
-          <a:effectRef idx="2">
-            <a:schemeClr val="accent1"/>
-          </a:effectRef>
-          <a:fontRef idx="minor">
-            <a:schemeClr val="lt1"/>
-          </a:fontRef>
-        </p:style>
-        <p:txBody>
-          <a:bodyPr rtlCol="0" anchor="ctr"/>
-          <a:lstStyle/>
-          <a:p>
-            <a:pPr algn="ctr"/>
-          </a:p>
-        </p:txBody>
-      </p:sp>
-      <p:sp>
-        <p:nvSpPr>
-          <p:cNvPr id="26" name="Rectangle 25"/>
-          <p:cNvSpPr/>
-          <p:nvPr/>
-        </p:nvSpPr>
-        <p:spPr>
-          <a:xfrm>
-            <a:off x="365760" y="5431536"/>
-            <a:ext cx="54864" cy="594360"/>
+            <a:off x="5077846" y="3300984"/>
+            <a:ext cx="54864" cy="1554480"/>
           </a:xfrm>
           <a:prstGeom prst="rect">
             <a:avLst/>
@@ -23024,14 +22994,221 @@
       </p:sp>
       <p:sp>
         <p:nvSpPr>
+          <p:cNvPr id="26" name="TextBox 25"/>
+          <p:cNvSpPr txBox="1"/>
+          <p:nvPr/>
+        </p:nvSpPr>
+        <p:spPr>
+          <a:xfrm>
+            <a:off x="5279014" y="3410712"/>
+            <a:ext cx="6437193" cy="274320"/>
+          </a:xfrm>
+          <a:prstGeom prst="rect">
+            <a:avLst/>
+          </a:prstGeom>
+          <a:noFill/>
+        </p:spPr>
+        <p:txBody>
+          <a:bodyPr wrap="square" anchor="t" lIns="36000" rIns="36000" tIns="18000" bIns="18000">
+            <a:spAutoFit/>
+          </a:bodyPr>
+          <a:lstStyle/>
+          <a:p>
+            <a:pPr algn="l"/>
+            <a:r>
+              <a:rPr sz="1456" b="1" i="0">
+                <a:solidFill>
+                  <a:srgbClr val="3B5174"/>
+                </a:solidFill>
+                <a:latin typeface="Arial"/>
+              </a:rPr>
+              <a:t>Dynamic yield stress σ_dynamic</a:t>
+            </a:r>
+          </a:p>
+        </p:txBody>
+      </p:sp>
+      <p:sp>
+        <p:nvSpPr>
           <p:cNvPr id="27" name="TextBox 26"/>
           <p:cNvSpPr txBox="1"/>
           <p:nvPr/>
         </p:nvSpPr>
         <p:spPr>
           <a:xfrm>
-            <a:off x="548640" y="5431536"/>
-            <a:ext cx="365760" cy="594360"/>
+            <a:off x="5279014" y="3758184"/>
+            <a:ext cx="6437193" cy="274320"/>
+          </a:xfrm>
+          <a:prstGeom prst="rect">
+            <a:avLst/>
+          </a:prstGeom>
+          <a:noFill/>
+        </p:spPr>
+        <p:txBody>
+          <a:bodyPr wrap="square" anchor="t" lIns="36000" rIns="36000" tIns="18000" bIns="18000">
+            <a:spAutoFit/>
+          </a:bodyPr>
+          <a:lstStyle/>
+          <a:p>
+            <a:pPr algn="l"/>
+            <a:r>
+              <a:rPr sz="1288" b="0" i="0">
+                <a:solidFill>
+                  <a:srgbClr val="334155"/>
+                </a:solidFill>
+                <a:latin typeface="Arial"/>
+              </a:rPr>
+              <a:t>Measured: fit flow sweep (100→0.01 s⁻¹) to the Herschel–Bulkley model</a:t>
+            </a:r>
+          </a:p>
+        </p:txBody>
+      </p:sp>
+      <p:sp>
+        <p:nvSpPr>
+          <p:cNvPr id="28" name="TextBox 27"/>
+          <p:cNvSpPr txBox="1"/>
+          <p:nvPr/>
+        </p:nvSpPr>
+        <p:spPr>
+          <a:xfrm>
+            <a:off x="5279014" y="4069080"/>
+            <a:ext cx="6437193" cy="731520"/>
+          </a:xfrm>
+          <a:prstGeom prst="rect">
+            <a:avLst/>
+          </a:prstGeom>
+          <a:noFill/>
+        </p:spPr>
+        <p:txBody>
+          <a:bodyPr wrap="square" anchor="t" lIns="36000" rIns="36000" tIns="18000" bIns="18000">
+            <a:spAutoFit/>
+          </a:bodyPr>
+          <a:lstStyle/>
+          <a:p>
+            <a:pPr algn="l"/>
+            <a:r>
+              <a:rPr sz="1288" b="0" i="0">
+                <a:solidFill>
+                  <a:srgbClr val="475569"/>
+                </a:solidFill>
+                <a:latin typeface="Arial"/>
+              </a:rPr>
+              <a:t>Meaning: stress to maintain flow → moderate value enables spraying within pump-pressure limits</a:t>
+            </a:r>
+          </a:p>
+          <a:p>
+            <a:pPr algn="l"/>
+            <a:r>
+              <a:rPr sz="1288" b="0" i="0">
+                <a:solidFill>
+                  <a:srgbClr val="475569"/>
+                </a:solidFill>
+                <a:latin typeface="Arial"/>
+              </a:rPr>
+              <a:t>Measured (fresh): HEC+MC/CSP 33.34 Pa / MHEC/CSP 3.31 Pa</a:t>
+            </a:r>
+          </a:p>
+        </p:txBody>
+      </p:sp>
+      <p:sp>
+        <p:nvSpPr>
+          <p:cNvPr id="29" name="Rounded Rectangle 28"/>
+          <p:cNvSpPr/>
+          <p:nvPr/>
+        </p:nvSpPr>
+        <p:spPr>
+          <a:xfrm>
+            <a:off x="365760" y="5056632"/>
+            <a:ext cx="11460175" cy="566928"/>
+          </a:xfrm>
+          <a:prstGeom prst="roundRect">
+            <a:avLst>
+              <a:gd name="adj" fmla="val 4000"/>
+            </a:avLst>
+          </a:prstGeom>
+          <a:solidFill>
+            <a:srgbClr val="1E293B"/>
+          </a:solidFill>
+          <a:ln>
+            <a:noFill/>
+          </a:ln>
+          <a:effectLst/>
+        </p:spPr>
+        <p:style>
+          <a:lnRef idx="1">
+            <a:schemeClr val="accent1"/>
+          </a:lnRef>
+          <a:fillRef idx="3">
+            <a:schemeClr val="accent1"/>
+          </a:fillRef>
+          <a:effectRef idx="2">
+            <a:schemeClr val="accent1"/>
+          </a:effectRef>
+          <a:fontRef idx="minor">
+            <a:schemeClr val="lt1"/>
+          </a:fontRef>
+        </p:style>
+        <p:txBody>
+          <a:bodyPr rtlCol="0" anchor="ctr"/>
+          <a:lstStyle/>
+          <a:p>
+            <a:pPr algn="ctr"/>
+          </a:p>
+        </p:txBody>
+      </p:sp>
+      <p:sp>
+        <p:nvSpPr>
+          <p:cNvPr id="30" name="Rectangle 29"/>
+          <p:cNvSpPr/>
+          <p:nvPr/>
+        </p:nvSpPr>
+        <p:spPr>
+          <a:xfrm>
+            <a:off x="365760" y="5056632"/>
+            <a:ext cx="54864" cy="566928"/>
+          </a:xfrm>
+          <a:prstGeom prst="rect">
+            <a:avLst/>
+          </a:prstGeom>
+          <a:solidFill>
+            <a:srgbClr val="D4A574"/>
+          </a:solidFill>
+          <a:ln>
+            <a:noFill/>
+          </a:ln>
+          <a:effectLst/>
+        </p:spPr>
+        <p:style>
+          <a:lnRef idx="1">
+            <a:schemeClr val="accent1"/>
+          </a:lnRef>
+          <a:fillRef idx="3">
+            <a:schemeClr val="accent1"/>
+          </a:fillRef>
+          <a:effectRef idx="2">
+            <a:schemeClr val="accent1"/>
+          </a:effectRef>
+          <a:fontRef idx="minor">
+            <a:schemeClr val="lt1"/>
+          </a:fontRef>
+        </p:style>
+        <p:txBody>
+          <a:bodyPr rtlCol="0" anchor="ctr"/>
+          <a:lstStyle/>
+          <a:p>
+            <a:pPr algn="ctr"/>
+          </a:p>
+        </p:txBody>
+      </p:sp>
+      <p:sp>
+        <p:nvSpPr>
+          <p:cNvPr id="31" name="TextBox 30"/>
+          <p:cNvSpPr txBox="1"/>
+          <p:nvPr/>
+        </p:nvSpPr>
+        <p:spPr>
+          <a:xfrm>
+            <a:off x="548640" y="5056632"/>
+            <a:ext cx="365760" cy="566928"/>
           </a:xfrm>
           <a:prstGeom prst="rect">
             <a:avLst/>
@@ -23048,25 +23225,25 @@
             <a:r>
               <a:rPr sz="1568" b="0" i="0">
                 <a:solidFill>
-                  <a:srgbClr val="3B5174"/>
-                </a:solidFill>
-                <a:latin typeface="Arial"/>
-              </a:rPr>
-              <a:t>💨</a:t>
-            </a:r>
-          </a:p>
-        </p:txBody>
-      </p:sp>
-      <p:sp>
-        <p:nvSpPr>
-          <p:cNvPr id="28" name="TextBox 27"/>
-          <p:cNvSpPr txBox="1"/>
-          <p:nvPr/>
-        </p:nvSpPr>
-        <p:spPr>
-          <a:xfrm>
-            <a:off x="960120" y="5431536"/>
-            <a:ext cx="10774375" cy="594360"/>
+                  <a:srgbClr val="D4A574"/>
+                </a:solidFill>
+                <a:latin typeface="Arial"/>
+              </a:rPr>
+              <a:t>✓</a:t>
+            </a:r>
+          </a:p>
+        </p:txBody>
+      </p:sp>
+      <p:sp>
+        <p:nvSpPr>
+          <p:cNvPr id="32" name="TextBox 31"/>
+          <p:cNvSpPr txBox="1"/>
+          <p:nvPr/>
+        </p:nvSpPr>
+        <p:spPr>
+          <a:xfrm>
+            <a:off x="960120" y="5056632"/>
+            <a:ext cx="10774375" cy="566928"/>
           </a:xfrm>
           <a:prstGeom prst="rect">
             <a:avLst/>
@@ -23083,11 +23260,11 @@
             <a:r>
               <a:rPr sz="1456" b="1" i="0">
                 <a:solidFill>
-                  <a:srgbClr val="1E293B"/>
-                </a:solidFill>
-                <a:latin typeface="Arial"/>
-              </a:rPr>
-              <a:t>High viscosity at rest for adhesion, low viscosity during spraying — flow properties compatible with existing firefighting equipment</a:t>
+                  <a:srgbClr val="FFFFFF"/>
+                </a:solidFill>
+                <a:latin typeface="Arial"/>
+              </a:rPr>
+              <a:t>The key to deployability: high static yield stress (adhesion) + moderate dynamic yield stress (spraying). Adding surfactant (SDS) lowers both, affecting adhesion and stability</a:t>
             </a:r>
           </a:p>
         </p:txBody>
@@ -23351,7 +23528,7 @@
                 </a:solidFill>
                 <a:latin typeface="Arial"/>
               </a:rPr>
-              <a:t>Rheology ③: Static Yield Stress and Long-term Stability</a:t>
+              <a:t>Rheology ③: Aging of Dynamic Yield Stress and Long-term Stability</a:t>
             </a:r>
           </a:p>
         </p:txBody>
@@ -23590,7 +23767,7 @@
                 </a:solidFill>
                 <a:latin typeface="Arial"/>
               </a:rPr>
-              <a:t>Static yield stress: stress at the G'/G'' crossover (σ_s) from amplitude sweep — minimum stress to initiate flow</a:t>
+              <a:t>Dynamic yield stress: obtained by fitting the steady-shear flow sweep to the Herschel–Bulkley model (σ_d) — stress to maintain flow (Fig. S7)</a:t>
             </a:r>
           </a:p>
         </p:txBody>
@@ -23704,7 +23881,7 @@
                 </a:solidFill>
                 <a:latin typeface="Arial"/>
               </a:rPr>
-              <a:t>Static yield stress (fresh)</a:t>
+              <a:t>Dynamic yield stress (Day 1)</a:t>
             </a:r>
           </a:p>
         </p:txBody>
@@ -23739,7 +23916,7 @@
                 </a:solidFill>
                 <a:latin typeface="Arial"/>
               </a:rPr>
-              <a:t>Static yield stress (455 days)</a:t>
+              <a:t>Dynamic yield stress (Day 455)</a:t>
             </a:r>
           </a:p>
         </p:txBody>
@@ -24415,7 +24592,7 @@
                 </a:solidFill>
                 <a:latin typeface="Arial"/>
               </a:rPr>
-              <a:t>Static Yield Stress</a:t>
+              <a:t>Dynamic Yield Stress (HB fit)</a:t>
             </a:r>
           </a:p>
         </p:txBody>
@@ -24450,7 +24627,7 @@
                 </a:solidFill>
                 <a:latin typeface="Arial"/>
               </a:rPr>
-              <a:t>Measured at G'/G'' crossover from amplitude sweep. HEC+MC/CSP: 33.34 Pa; MHEC/CSP: 3.31 Pa (fresh)</a:t>
+              <a:t>Obtained by fitting the steady-shear flow sweep to the HB model. HEC+MC/CSP: 33.34 Pa; MHEC/CSP: 3.31 Pa (Day 1)</a:t>
             </a:r>
           </a:p>
         </p:txBody>
@@ -24686,7 +24863,7 @@
                 </a:solidFill>
                 <a:latin typeface="Arial"/>
               </a:rPr>
-              <a:t>HEC+MC system shows ~10× higher yield stress, better for vertical surface adhesion. MHEC simpler to manufacture</a:t>
+              <a:t>HEC+MC stiffens with aging (33.34→68.9 Pa). MHEC changes gently and is simpler to manufacture (single polymer)</a:t>
             </a:r>
           </a:p>
         </p:txBody>

--- a/slides_en.pptx
+++ b/slides_en.pptx
@@ -6983,7 +6983,7 @@
                 </a:solidFill>
                 <a:latin typeface="Arial"/>
               </a:rPr>
-              <a:t>Shear-thinning n &lt; 1</a:t>
+              <a:t>Shear-thinning (viscosity drops)</a:t>
             </a:r>
           </a:p>
         </p:txBody>
@@ -9865,7 +9865,7 @@
                 </a:solidFill>
                 <a:latin typeface="Arial"/>
               </a:rPr>
-              <a:t>Flow index n &lt; 1 — reduced viscosity during spraying</a:t>
+              <a:t>Viscosity drops sharply at high shear — fluidizes during spraying</a:t>
             </a:r>
           </a:p>
         </p:txBody>
@@ -9935,7 +9935,7 @@
                 </a:solidFill>
                 <a:latin typeface="Arial"/>
               </a:rPr>
-              <a:t>~33 Pa — gel structure maintained at rest</a:t>
+              <a:t>~33 Pa (dynamic, HB fit) — gel structure maintained at rest</a:t>
             </a:r>
           </a:p>
         </p:txBody>
@@ -10088,7 +10088,7 @@
                 </a:solidFill>
                 <a:latin typeface="Arial"/>
               </a:rPr>
-              <a:t>Flow index n</a:t>
+              <a:t>Viscosity response</a:t>
             </a:r>
           </a:p>
         </p:txBody>
@@ -10123,7 +10123,7 @@
                 </a:solidFill>
                 <a:latin typeface="Arial"/>
               </a:rPr>
-              <a:t>&lt; 1</a:t>
+              <a:t>reversible</a:t>
             </a:r>
           </a:p>
         </p:txBody>
@@ -10158,7 +10158,7 @@
                 </a:solidFill>
                 <a:latin typeface="Arial"/>
               </a:rPr>
-              <a:t>Strong shear-thinning</a:t>
+              <a:t>Low at high shear → recovers at rest</a:t>
             </a:r>
           </a:p>
         </p:txBody>
@@ -10241,7 +10241,7 @@
                 </a:solidFill>
                 <a:latin typeface="Arial"/>
               </a:rPr>
-              <a:t>Static yield stress</a:t>
+              <a:t>Dynamic yield stress</a:t>
             </a:r>
           </a:p>
         </p:txBody>
@@ -10311,7 +10311,7 @@
                 </a:solidFill>
                 <a:latin typeface="Arial"/>
               </a:rPr>
-              <a:t>HEC+MC/CSP</a:t>
+              <a:t>HEC+MC/CSP (HB fit)</a:t>
             </a:r>
           </a:p>
         </p:txBody>
@@ -17689,7 +17689,7 @@
                 </a:solidFill>
                 <a:latin typeface="Arial"/>
               </a:rPr>
-              <a:t>Low Power-law Index n</a:t>
+              <a:t>Shear-thinning behavior</a:t>
             </a:r>
           </a:p>
         </p:txBody>
@@ -17724,7 +17724,7 @@
                 </a:solidFill>
                 <a:latin typeface="Arial"/>
               </a:rPr>
-              <a:t>Strong shear thinning (n ≪ 1)</a:t>
+              <a:t>Viscosity drops sharply at high shear</a:t>
             </a:r>
           </a:p>
         </p:txBody>
@@ -28866,7 +28866,7 @@
                 </a:solidFill>
                 <a:latin typeface="Arial"/>
               </a:rPr>
-              <a:t>Strong shear thinning (n &lt; 1)</a:t>
+              <a:t>Shear-thinning (low viscosity at high shear)</a:t>
             </a:r>
           </a:p>
         </p:txBody>
@@ -29461,7 +29461,7 @@
                 </a:solidFill>
                 <a:latin typeface="Arial"/>
               </a:rPr>
-              <a:t>Shear thinning (n &lt; 1)</a:t>
+              <a:t>Shear-thinning behavior</a:t>
             </a:r>
           </a:p>
         </p:txBody>
@@ -60648,7 +60648,7 @@
                 </a:solidFill>
                 <a:latin typeface="Arial"/>
               </a:rPr>
-              <a:t>n &lt; 1</a:t>
+              <a:t>demonstrated</a:t>
             </a:r>
           </a:p>
         </p:txBody>
@@ -66748,7 +66748,7 @@
                 </a:solidFill>
                 <a:latin typeface="Arial"/>
               </a:rPr>
-              <a:t>Power-law n &lt; 1 (suitable for spraying and pipeline pumping)</a:t>
+              <a:t>Viscosity drops at high shear (suitable for spraying and pipeline pumping)</a:t>
             </a:r>
           </a:p>
         </p:txBody>

--- a/slides_en.pptx
+++ b/slides_en.pptx
@@ -19607,7 +19607,7 @@
                 </a:solidFill>
                 <a:latin typeface="Arial"/>
               </a:rPr>
-              <a:t>Rheology ①: Oscillatory Moduli G' / G''</a:t>
+              <a:t>Rheology ①: Viscoelasticity &amp; Shear-Thinning (Fig. 2a–c)</a:t>
             </a:r>
           </a:p>
         </p:txBody>
@@ -19700,7 +19700,7 @@
         <p:spPr>
           <a:xfrm>
             <a:off x="365760" y="859536"/>
-            <a:ext cx="6555461" cy="4389120"/>
+            <a:ext cx="5620359" cy="3200400"/>
           </a:xfrm>
           <a:prstGeom prst="roundRect">
             <a:avLst>
@@ -19827,7 +19827,7 @@
         <p:spPr>
           <a:xfrm>
             <a:off x="365760" y="859536"/>
-            <a:ext cx="6555461" cy="4389120"/>
+            <a:ext cx="5620359" cy="3200400"/>
           </a:xfrm>
           <a:prstGeom prst="rect">
             <a:avLst/>
@@ -19861,8 +19861,8 @@
         </p:nvSpPr>
         <p:spPr>
           <a:xfrm>
-            <a:off x="365760" y="5285232"/>
-            <a:ext cx="6555461" cy="274320"/>
+            <a:off x="365760" y="4096512"/>
+            <a:ext cx="5620359" cy="274320"/>
           </a:xfrm>
           <a:prstGeom prst="rect">
             <a:avLst/>
@@ -19883,7 +19883,7 @@
                 </a:solidFill>
                 <a:latin typeface="Arial"/>
               </a:rPr>
-              <a:t>Angular frequency vs Storage modulus G' · Loss modulus G''</a:t>
+              <a:t>Angular frequency vs G' / G'' (viscoelasticity at rest)</a:t>
             </a:r>
           </a:p>
         </p:txBody>
@@ -19896,20 +19896,20 @@
         </p:nvSpPr>
         <p:spPr>
           <a:xfrm>
-            <a:off x="7104101" y="859536"/>
-            <a:ext cx="4721833" cy="2560320"/>
+            <a:off x="6205575" y="859536"/>
+            <a:ext cx="5620359" cy="3200400"/>
           </a:xfrm>
           <a:prstGeom prst="roundRect">
             <a:avLst>
-              <a:gd name="adj" fmla="val 4000"/>
+              <a:gd name="adj" fmla="val 2000"/>
             </a:avLst>
           </a:prstGeom>
           <a:solidFill>
-            <a:srgbClr val="F1F5F9"/>
+            <a:srgbClr val="F5F8FC"/>
           </a:solidFill>
-          <a:ln w="6350">
+          <a:ln w="12700">
             <a:solidFill>
-              <a:srgbClr val="E2E8F0"/>
+              <a:srgbClr val="C0D0E0"/>
             </a:solidFill>
           </a:ln>
           <a:effectLst/>
@@ -19944,8 +19944,367 @@
         </p:nvSpPr>
         <p:spPr>
           <a:xfrm>
-            <a:off x="7104101" y="859536"/>
-            <a:ext cx="4721833" cy="36576"/>
+            <a:off x="6315303" y="969264"/>
+            <a:ext cx="868680" cy="292608"/>
+          </a:xfrm>
+          <a:prstGeom prst="rect">
+            <a:avLst/>
+          </a:prstGeom>
+          <a:solidFill>
+            <a:srgbClr val="1E293B"/>
+          </a:solidFill>
+          <a:ln>
+            <a:noFill/>
+          </a:ln>
+          <a:effectLst/>
+        </p:spPr>
+        <p:style>
+          <a:lnRef idx="1">
+            <a:schemeClr val="accent1"/>
+          </a:lnRef>
+          <a:fillRef idx="3">
+            <a:schemeClr val="accent1"/>
+          </a:fillRef>
+          <a:effectRef idx="2">
+            <a:schemeClr val="accent1"/>
+          </a:effectRef>
+          <a:fontRef idx="minor">
+            <a:schemeClr val="lt1"/>
+          </a:fontRef>
+        </p:style>
+        <p:txBody>
+          <a:bodyPr rtlCol="0" anchor="ctr"/>
+          <a:lstStyle/>
+          <a:p>
+            <a:pPr algn="ctr"/>
+          </a:p>
+        </p:txBody>
+      </p:sp>
+      <p:sp>
+        <p:nvSpPr>
+          <p:cNvPr id="17" name="TextBox 16"/>
+          <p:cNvSpPr txBox="1"/>
+          <p:nvPr/>
+        </p:nvSpPr>
+        <p:spPr>
+          <a:xfrm>
+            <a:off x="6315303" y="969264"/>
+            <a:ext cx="868680" cy="292608"/>
+          </a:xfrm>
+          <a:prstGeom prst="rect">
+            <a:avLst/>
+          </a:prstGeom>
+          <a:noFill/>
+        </p:spPr>
+        <p:txBody>
+          <a:bodyPr wrap="square" anchor="ctr" lIns="36000" rIns="36000" tIns="18000" bIns="18000">
+            <a:spAutoFit/>
+          </a:bodyPr>
+          <a:lstStyle/>
+          <a:p>
+            <a:pPr algn="ctr"/>
+            <a:r>
+              <a:rPr sz="1232" b="1" i="0">
+                <a:solidFill>
+                  <a:srgbClr val="FFFFFF"/>
+                </a:solidFill>
+                <a:latin typeface="Arial"/>
+              </a:rPr>
+              <a:t>Fig. 2c</a:t>
+            </a:r>
+          </a:p>
+        </p:txBody>
+      </p:sp>
+      <p:sp>
+        <p:nvSpPr>
+          <p:cNvPr id="18" name="TextBox 17"/>
+          <p:cNvSpPr txBox="1"/>
+          <p:nvPr/>
+        </p:nvSpPr>
+        <p:spPr>
+          <a:xfrm>
+            <a:off x="6205575" y="859536"/>
+            <a:ext cx="5620359" cy="3200400"/>
+          </a:xfrm>
+          <a:prstGeom prst="rect">
+            <a:avLst/>
+          </a:prstGeom>
+          <a:noFill/>
+        </p:spPr>
+        <p:txBody>
+          <a:bodyPr wrap="square" anchor="ctr" lIns="36000" rIns="36000" tIns="18000" bIns="18000">
+            <a:spAutoFit/>
+          </a:bodyPr>
+          <a:lstStyle/>
+          <a:p>
+            <a:pPr algn="ctr"/>
+            <a:r>
+              <a:rPr sz="1344" b="0" i="0">
+                <a:solidFill>
+                  <a:srgbClr val="AAB4C0"/>
+                </a:solidFill>
+                <a:latin typeface="Arial"/>
+              </a:rPr>
+              <a:t>(Paste paper figure here)</a:t>
+            </a:r>
+          </a:p>
+        </p:txBody>
+      </p:sp>
+      <p:sp>
+        <p:nvSpPr>
+          <p:cNvPr id="19" name="TextBox 18"/>
+          <p:cNvSpPr txBox="1"/>
+          <p:nvPr/>
+        </p:nvSpPr>
+        <p:spPr>
+          <a:xfrm>
+            <a:off x="6205575" y="4096512"/>
+            <a:ext cx="5620359" cy="274320"/>
+          </a:xfrm>
+          <a:prstGeom prst="rect">
+            <a:avLst/>
+          </a:prstGeom>
+          <a:noFill/>
+        </p:spPr>
+        <p:txBody>
+          <a:bodyPr wrap="square" anchor="t" lIns="36000" rIns="36000" tIns="18000" bIns="18000">
+            <a:spAutoFit/>
+          </a:bodyPr>
+          <a:lstStyle/>
+          <a:p>
+            <a:pPr algn="ctr"/>
+            <a:r>
+              <a:rPr sz="1120" b="0" i="1">
+                <a:solidFill>
+                  <a:srgbClr val="64748B"/>
+                </a:solidFill>
+                <a:latin typeface="Arial"/>
+              </a:rPr>
+              <a:t>Shear rate vs viscosity (shear-thinning)</a:t>
+            </a:r>
+          </a:p>
+        </p:txBody>
+      </p:sp>
+      <p:sp>
+        <p:nvSpPr>
+          <p:cNvPr id="20" name="Rounded Rectangle 19"/>
+          <p:cNvSpPr/>
+          <p:nvPr/>
+        </p:nvSpPr>
+        <p:spPr>
+          <a:xfrm>
+            <a:off x="365760" y="4261104"/>
+            <a:ext cx="5620359" cy="914400"/>
+          </a:xfrm>
+          <a:prstGeom prst="roundRect">
+            <a:avLst>
+              <a:gd name="adj" fmla="val 5000"/>
+            </a:avLst>
+          </a:prstGeom>
+          <a:solidFill>
+            <a:srgbClr val="F1F5F9"/>
+          </a:solidFill>
+          <a:ln w="15240">
+            <a:solidFill>
+              <a:srgbClr val="4A7C8C"/>
+            </a:solidFill>
+          </a:ln>
+          <a:effectLst/>
+        </p:spPr>
+        <p:style>
+          <a:lnRef idx="1">
+            <a:schemeClr val="accent1"/>
+          </a:lnRef>
+          <a:fillRef idx="3">
+            <a:schemeClr val="accent1"/>
+          </a:fillRef>
+          <a:effectRef idx="2">
+            <a:schemeClr val="accent1"/>
+          </a:effectRef>
+          <a:fontRef idx="minor">
+            <a:schemeClr val="lt1"/>
+          </a:fontRef>
+        </p:style>
+        <p:txBody>
+          <a:bodyPr rtlCol="0" anchor="ctr"/>
+          <a:lstStyle/>
+          <a:p>
+            <a:pPr algn="ctr"/>
+          </a:p>
+        </p:txBody>
+      </p:sp>
+      <p:sp>
+        <p:nvSpPr>
+          <p:cNvPr id="21" name="Rectangle 20"/>
+          <p:cNvSpPr/>
+          <p:nvPr/>
+        </p:nvSpPr>
+        <p:spPr>
+          <a:xfrm>
+            <a:off x="365760" y="4261104"/>
+            <a:ext cx="54864" cy="914400"/>
+          </a:xfrm>
+          <a:prstGeom prst="rect">
+            <a:avLst/>
+          </a:prstGeom>
+          <a:solidFill>
+            <a:srgbClr val="4A7C8C"/>
+          </a:solidFill>
+          <a:ln>
+            <a:noFill/>
+          </a:ln>
+          <a:effectLst/>
+        </p:spPr>
+        <p:style>
+          <a:lnRef idx="1">
+            <a:schemeClr val="accent1"/>
+          </a:lnRef>
+          <a:fillRef idx="3">
+            <a:schemeClr val="accent1"/>
+          </a:fillRef>
+          <a:effectRef idx="2">
+            <a:schemeClr val="accent1"/>
+          </a:effectRef>
+          <a:fontRef idx="minor">
+            <a:schemeClr val="lt1"/>
+          </a:fontRef>
+        </p:style>
+        <p:txBody>
+          <a:bodyPr rtlCol="0" anchor="ctr"/>
+          <a:lstStyle/>
+          <a:p>
+            <a:pPr algn="ctr"/>
+          </a:p>
+        </p:txBody>
+      </p:sp>
+      <p:sp>
+        <p:nvSpPr>
+          <p:cNvPr id="22" name="TextBox 21"/>
+          <p:cNvSpPr txBox="1"/>
+          <p:nvPr/>
+        </p:nvSpPr>
+        <p:spPr>
+          <a:xfrm>
+            <a:off x="548640" y="4370832"/>
+            <a:ext cx="5309463" cy="274320"/>
+          </a:xfrm>
+          <a:prstGeom prst="rect">
+            <a:avLst/>
+          </a:prstGeom>
+          <a:noFill/>
+        </p:spPr>
+        <p:txBody>
+          <a:bodyPr wrap="square" anchor="t" lIns="36000" rIns="36000" tIns="18000" bIns="18000">
+            <a:spAutoFit/>
+          </a:bodyPr>
+          <a:lstStyle/>
+          <a:p>
+            <a:pPr algn="l"/>
+            <a:r>
+              <a:rPr sz="1400" b="1" i="0">
+                <a:solidFill>
+                  <a:srgbClr val="4A7C8C"/>
+                </a:solidFill>
+                <a:latin typeface="Arial"/>
+              </a:rPr>
+              <a:t>At rest: G' &gt; G'' → solid-like (gel) behavior</a:t>
+            </a:r>
+          </a:p>
+        </p:txBody>
+      </p:sp>
+      <p:sp>
+        <p:nvSpPr>
+          <p:cNvPr id="23" name="TextBox 22"/>
+          <p:cNvSpPr txBox="1"/>
+          <p:nvPr/>
+        </p:nvSpPr>
+        <p:spPr>
+          <a:xfrm>
+            <a:off x="548640" y="4700016"/>
+            <a:ext cx="5309463" cy="411480"/>
+          </a:xfrm>
+          <a:prstGeom prst="rect">
+            <a:avLst/>
+          </a:prstGeom>
+          <a:noFill/>
+        </p:spPr>
+        <p:txBody>
+          <a:bodyPr wrap="square" anchor="t" lIns="36000" rIns="36000" tIns="18000" bIns="18000">
+            <a:spAutoFit/>
+          </a:bodyPr>
+          <a:lstStyle/>
+          <a:p>
+            <a:pPr algn="l"/>
+            <a:r>
+              <a:rPr sz="1288" b="0" i="0">
+                <a:solidFill>
+                  <a:srgbClr val="334155"/>
+                </a:solidFill>
+                <a:latin typeface="Arial"/>
+              </a:rPr>
+              <a:t>Low frequency dependence, stable network → does not flow off after application</a:t>
+            </a:r>
+          </a:p>
+        </p:txBody>
+      </p:sp>
+      <p:sp>
+        <p:nvSpPr>
+          <p:cNvPr id="24" name="Rounded Rectangle 23"/>
+          <p:cNvSpPr/>
+          <p:nvPr/>
+        </p:nvSpPr>
+        <p:spPr>
+          <a:xfrm>
+            <a:off x="6205575" y="4261104"/>
+            <a:ext cx="5620359" cy="914400"/>
+          </a:xfrm>
+          <a:prstGeom prst="roundRect">
+            <a:avLst>
+              <a:gd name="adj" fmla="val 5000"/>
+            </a:avLst>
+          </a:prstGeom>
+          <a:solidFill>
+            <a:srgbClr val="F1F5F9"/>
+          </a:solidFill>
+          <a:ln w="15240">
+            <a:solidFill>
+              <a:srgbClr val="3B5174"/>
+            </a:solidFill>
+          </a:ln>
+          <a:effectLst/>
+        </p:spPr>
+        <p:style>
+          <a:lnRef idx="1">
+            <a:schemeClr val="accent1"/>
+          </a:lnRef>
+          <a:fillRef idx="3">
+            <a:schemeClr val="accent1"/>
+          </a:fillRef>
+          <a:effectRef idx="2">
+            <a:schemeClr val="accent1"/>
+          </a:effectRef>
+          <a:fontRef idx="minor">
+            <a:schemeClr val="lt1"/>
+          </a:fontRef>
+        </p:style>
+        <p:txBody>
+          <a:bodyPr rtlCol="0" anchor="ctr"/>
+          <a:lstStyle/>
+          <a:p>
+            <a:pPr algn="ctr"/>
+          </a:p>
+        </p:txBody>
+      </p:sp>
+      <p:sp>
+        <p:nvSpPr>
+          <p:cNvPr id="25" name="Rectangle 24"/>
+          <p:cNvSpPr/>
+          <p:nvPr/>
+        </p:nvSpPr>
+        <p:spPr>
+          <a:xfrm>
+            <a:off x="6205575" y="4261104"/>
+            <a:ext cx="54864" cy="914400"/>
           </a:xfrm>
           <a:prstGeom prst="rect">
             <a:avLst/>
@@ -19982,14 +20341,14 @@
       </p:sp>
       <p:sp>
         <p:nvSpPr>
-          <p:cNvPr id="17" name="TextBox 16"/>
-          <p:cNvSpPr txBox="1"/>
-          <p:nvPr/>
-        </p:nvSpPr>
-        <p:spPr>
-          <a:xfrm>
-            <a:off x="7286981" y="1024128"/>
-            <a:ext cx="4356073" cy="219456"/>
+          <p:cNvPr id="26" name="TextBox 25"/>
+          <p:cNvSpPr txBox="1"/>
+          <p:nvPr/>
+        </p:nvSpPr>
+        <p:spPr>
+          <a:xfrm>
+            <a:off x="6388455" y="4370832"/>
+            <a:ext cx="5309463" cy="274320"/>
           </a:xfrm>
           <a:prstGeom prst="rect">
             <a:avLst/>
@@ -20004,27 +20363,27 @@
           <a:p>
             <a:pPr algn="l"/>
             <a:r>
-              <a:rPr sz="1120" b="1" i="0">
-                <a:solidFill>
-                  <a:srgbClr val="64748B"/>
-                </a:solidFill>
-                <a:latin typeface="Arial"/>
-              </a:rPr>
-              <a:t>KEY OBSERVATION</a:t>
-            </a:r>
-          </a:p>
-        </p:txBody>
-      </p:sp>
-      <p:sp>
-        <p:nvSpPr>
-          <p:cNvPr id="18" name="TextBox 17"/>
-          <p:cNvSpPr txBox="1"/>
-          <p:nvPr/>
-        </p:nvSpPr>
-        <p:spPr>
-          <a:xfrm>
-            <a:off x="7286981" y="1261872"/>
-            <a:ext cx="4356073" cy="329184"/>
+              <a:rPr sz="1400" b="1" i="0">
+                <a:solidFill>
+                  <a:srgbClr val="3B5174"/>
+                </a:solidFill>
+                <a:latin typeface="Arial"/>
+              </a:rPr>
+              <a:t>Under high shear: viscosity drops sharply (shear-thinning)</a:t>
+            </a:r>
+          </a:p>
+        </p:txBody>
+      </p:sp>
+      <p:sp>
+        <p:nvSpPr>
+          <p:cNvPr id="27" name="TextBox 26"/>
+          <p:cNvSpPr txBox="1"/>
+          <p:nvPr/>
+        </p:nvSpPr>
+        <p:spPr>
+          <a:xfrm>
+            <a:off x="6388455" y="4700016"/>
+            <a:ext cx="5309463" cy="411480"/>
           </a:xfrm>
           <a:prstGeom prst="rect">
             <a:avLst/>
@@ -20039,237 +20398,27 @@
           <a:p>
             <a:pPr algn="l"/>
             <a:r>
-              <a:rPr sz="1680" b="1" i="0">
-                <a:solidFill>
-                  <a:srgbClr val="1E293B"/>
-                </a:solidFill>
-                <a:latin typeface="Arial"/>
-              </a:rPr>
-              <a:t>Key Observation</a:t>
-            </a:r>
-          </a:p>
-        </p:txBody>
-      </p:sp>
-      <p:sp>
-        <p:nvSpPr>
-          <p:cNvPr id="19" name="TextBox 18"/>
-          <p:cNvSpPr txBox="1"/>
-          <p:nvPr/>
-        </p:nvSpPr>
-        <p:spPr>
-          <a:xfrm>
-            <a:off x="7286981" y="1627632"/>
-            <a:ext cx="182880" cy="274320"/>
-          </a:xfrm>
-          <a:prstGeom prst="rect">
-            <a:avLst/>
-          </a:prstGeom>
-          <a:noFill/>
-        </p:spPr>
-        <p:txBody>
-          <a:bodyPr wrap="square" anchor="t" lIns="36000" rIns="36000" tIns="18000" bIns="18000">
-            <a:spAutoFit/>
-          </a:bodyPr>
-          <a:lstStyle/>
-          <a:p>
-            <a:pPr algn="l"/>
-            <a:r>
-              <a:rPr sz="1344" b="0" i="0">
-                <a:solidFill>
-                  <a:srgbClr val="3B5174"/>
-                </a:solidFill>
-                <a:latin typeface="Arial"/>
-              </a:rPr>
-              <a:t>•</a:t>
-            </a:r>
-          </a:p>
-        </p:txBody>
-      </p:sp>
-      <p:sp>
-        <p:nvSpPr>
-          <p:cNvPr id="20" name="TextBox 19"/>
-          <p:cNvSpPr txBox="1"/>
-          <p:nvPr/>
-        </p:nvSpPr>
-        <p:spPr>
-          <a:xfrm>
-            <a:off x="7488149" y="1627632"/>
-            <a:ext cx="4154905" cy="274320"/>
-          </a:xfrm>
-          <a:prstGeom prst="rect">
-            <a:avLst/>
-          </a:prstGeom>
-          <a:noFill/>
-        </p:spPr>
-        <p:txBody>
-          <a:bodyPr wrap="square" anchor="t" lIns="36000" rIns="36000" tIns="18000" bIns="18000">
-            <a:spAutoFit/>
-          </a:bodyPr>
-          <a:lstStyle/>
-          <a:p>
-            <a:pPr algn="l"/>
-            <a:r>
-              <a:rPr sz="1344" b="0" i="0">
-                <a:solidFill>
-                  <a:srgbClr val="475569"/>
-                </a:solidFill>
-                <a:latin typeface="Arial"/>
-              </a:rPr>
-              <a:t>G' &gt; G'' for all formulations → solid-like (gel) behavior</a:t>
-            </a:r>
-          </a:p>
-        </p:txBody>
-      </p:sp>
-      <p:sp>
-        <p:nvSpPr>
-          <p:cNvPr id="21" name="TextBox 20"/>
-          <p:cNvSpPr txBox="1"/>
-          <p:nvPr/>
-        </p:nvSpPr>
-        <p:spPr>
-          <a:xfrm>
-            <a:off x="7286981" y="1901952"/>
-            <a:ext cx="182880" cy="274320"/>
-          </a:xfrm>
-          <a:prstGeom prst="rect">
-            <a:avLst/>
-          </a:prstGeom>
-          <a:noFill/>
-        </p:spPr>
-        <p:txBody>
-          <a:bodyPr wrap="square" anchor="t" lIns="36000" rIns="36000" tIns="18000" bIns="18000">
-            <a:spAutoFit/>
-          </a:bodyPr>
-          <a:lstStyle/>
-          <a:p>
-            <a:pPr algn="l"/>
-            <a:r>
-              <a:rPr sz="1344" b="0" i="0">
-                <a:solidFill>
-                  <a:srgbClr val="3B5174"/>
-                </a:solidFill>
-                <a:latin typeface="Arial"/>
-              </a:rPr>
-              <a:t>•</a:t>
-            </a:r>
-          </a:p>
-        </p:txBody>
-      </p:sp>
-      <p:sp>
-        <p:nvSpPr>
-          <p:cNvPr id="22" name="TextBox 21"/>
-          <p:cNvSpPr txBox="1"/>
-          <p:nvPr/>
-        </p:nvSpPr>
-        <p:spPr>
-          <a:xfrm>
-            <a:off x="7488149" y="1901952"/>
-            <a:ext cx="4154905" cy="274320"/>
-          </a:xfrm>
-          <a:prstGeom prst="rect">
-            <a:avLst/>
-          </a:prstGeom>
-          <a:noFill/>
-        </p:spPr>
-        <p:txBody>
-          <a:bodyPr wrap="square" anchor="t" lIns="36000" rIns="36000" tIns="18000" bIns="18000">
-            <a:spAutoFit/>
-          </a:bodyPr>
-          <a:lstStyle/>
-          <a:p>
-            <a:pPr algn="l"/>
-            <a:r>
-              <a:rPr sz="1344" b="0" i="0">
-                <a:solidFill>
-                  <a:srgbClr val="475569"/>
-                </a:solidFill>
-                <a:latin typeface="Arial"/>
-              </a:rPr>
-              <a:t>Low frequency dependence → stable network</a:t>
-            </a:r>
-          </a:p>
-        </p:txBody>
-      </p:sp>
-      <p:sp>
-        <p:nvSpPr>
-          <p:cNvPr id="23" name="TextBox 22"/>
-          <p:cNvSpPr txBox="1"/>
-          <p:nvPr/>
-        </p:nvSpPr>
-        <p:spPr>
-          <a:xfrm>
-            <a:off x="7286981" y="2176272"/>
-            <a:ext cx="182880" cy="274320"/>
-          </a:xfrm>
-          <a:prstGeom prst="rect">
-            <a:avLst/>
-          </a:prstGeom>
-          <a:noFill/>
-        </p:spPr>
-        <p:txBody>
-          <a:bodyPr wrap="square" anchor="t" lIns="36000" rIns="36000" tIns="18000" bIns="18000">
-            <a:spAutoFit/>
-          </a:bodyPr>
-          <a:lstStyle/>
-          <a:p>
-            <a:pPr algn="l"/>
-            <a:r>
-              <a:rPr sz="1344" b="0" i="0">
-                <a:solidFill>
-                  <a:srgbClr val="3B5174"/>
-                </a:solidFill>
-                <a:latin typeface="Arial"/>
-              </a:rPr>
-              <a:t>•</a:t>
-            </a:r>
-          </a:p>
-        </p:txBody>
-      </p:sp>
-      <p:sp>
-        <p:nvSpPr>
-          <p:cNvPr id="24" name="TextBox 23"/>
-          <p:cNvSpPr txBox="1"/>
-          <p:nvPr/>
-        </p:nvSpPr>
-        <p:spPr>
-          <a:xfrm>
-            <a:off x="7488149" y="2176272"/>
-            <a:ext cx="4154905" cy="274320"/>
-          </a:xfrm>
-          <a:prstGeom prst="rect">
-            <a:avLst/>
-          </a:prstGeom>
-          <a:noFill/>
-        </p:spPr>
-        <p:txBody>
-          <a:bodyPr wrap="square" anchor="t" lIns="36000" rIns="36000" tIns="18000" bIns="18000">
-            <a:spAutoFit/>
-          </a:bodyPr>
-          <a:lstStyle/>
-          <a:p>
-            <a:pPr algn="l"/>
-            <a:r>
-              <a:rPr sz="1344" b="0" i="0">
-                <a:solidFill>
-                  <a:srgbClr val="475569"/>
-                </a:solidFill>
-                <a:latin typeface="Arial"/>
-              </a:rPr>
-              <a:t>AquaGel-K (G'=457 Pa) shows higher G' than WEG (46/26 Pa); all formulations exhibit gel behavior</a:t>
-            </a:r>
-          </a:p>
-        </p:txBody>
-      </p:sp>
-      <p:sp>
-        <p:nvSpPr>
-          <p:cNvPr id="25" name="Rounded Rectangle 24"/>
+              <a:rPr sz="1288" b="0" i="0">
+                <a:solidFill>
+                  <a:srgbClr val="334155"/>
+                </a:solidFill>
+                <a:latin typeface="Arial"/>
+              </a:rPr>
+              <a:t>High shear through the nozzle lowers viscosity → enables spray application</a:t>
+            </a:r>
+          </a:p>
+        </p:txBody>
+      </p:sp>
+      <p:sp>
+        <p:nvSpPr>
+          <p:cNvPr id="28" name="Rounded Rectangle 27"/>
           <p:cNvSpPr/>
           <p:nvPr/>
         </p:nvSpPr>
         <p:spPr>
           <a:xfrm>
-            <a:off x="7104101" y="3648456"/>
-            <a:ext cx="4721833" cy="731520"/>
+            <a:off x="365760" y="5340096"/>
+            <a:ext cx="11460175" cy="512064"/>
           </a:xfrm>
           <a:prstGeom prst="roundRect">
             <a:avLst>
@@ -20277,7 +20426,7 @@
             </a:avLst>
           </a:prstGeom>
           <a:solidFill>
-            <a:srgbClr val="F8FAFC"/>
+            <a:srgbClr val="1E293B"/>
           </a:solidFill>
           <a:ln>
             <a:noFill/>
@@ -20308,20 +20457,20 @@
       </p:sp>
       <p:sp>
         <p:nvSpPr>
-          <p:cNvPr id="26" name="Rectangle 25"/>
+          <p:cNvPr id="29" name="Rectangle 28"/>
           <p:cNvSpPr/>
           <p:nvPr/>
         </p:nvSpPr>
         <p:spPr>
           <a:xfrm>
-            <a:off x="7104101" y="3648456"/>
-            <a:ext cx="54864" cy="731520"/>
+            <a:off x="365760" y="5340096"/>
+            <a:ext cx="54864" cy="512064"/>
           </a:xfrm>
           <a:prstGeom prst="rect">
             <a:avLst/>
           </a:prstGeom>
           <a:solidFill>
-            <a:srgbClr val="3B5174"/>
+            <a:srgbClr val="D4A574"/>
           </a:solidFill>
           <a:ln>
             <a:noFill/>
@@ -20352,14 +20501,14 @@
       </p:sp>
       <p:sp>
         <p:nvSpPr>
-          <p:cNvPr id="27" name="TextBox 26"/>
-          <p:cNvSpPr txBox="1"/>
-          <p:nvPr/>
-        </p:nvSpPr>
-        <p:spPr>
-          <a:xfrm>
-            <a:off x="7286981" y="3648456"/>
-            <a:ext cx="365760" cy="731520"/>
+          <p:cNvPr id="30" name="TextBox 29"/>
+          <p:cNvSpPr txBox="1"/>
+          <p:nvPr/>
+        </p:nvSpPr>
+        <p:spPr>
+          <a:xfrm>
+            <a:off x="548640" y="5340096"/>
+            <a:ext cx="365760" cy="512064"/>
           </a:xfrm>
           <a:prstGeom prst="rect">
             <a:avLst/>
@@ -20376,25 +20525,25 @@
             <a:r>
               <a:rPr sz="1568" b="0" i="0">
                 <a:solidFill>
-                  <a:srgbClr val="3B5174"/>
-                </a:solidFill>
-                <a:latin typeface="Arial"/>
-              </a:rPr>
-              <a:t>"</a:t>
-            </a:r>
-          </a:p>
-        </p:txBody>
-      </p:sp>
-      <p:sp>
-        <p:nvSpPr>
-          <p:cNvPr id="28" name="TextBox 27"/>
-          <p:cNvSpPr txBox="1"/>
-          <p:nvPr/>
-        </p:nvSpPr>
-        <p:spPr>
-          <a:xfrm>
-            <a:off x="7698461" y="3648456"/>
-            <a:ext cx="4036033" cy="731520"/>
+                  <a:srgbClr val="D4A574"/>
+                </a:solidFill>
+                <a:latin typeface="Arial"/>
+              </a:rPr>
+              <a:t>✓</a:t>
+            </a:r>
+          </a:p>
+        </p:txBody>
+      </p:sp>
+      <p:sp>
+        <p:nvSpPr>
+          <p:cNvPr id="31" name="TextBox 30"/>
+          <p:cNvSpPr txBox="1"/>
+          <p:nvPr/>
+        </p:nvSpPr>
+        <p:spPr>
+          <a:xfrm>
+            <a:off x="960120" y="5340096"/>
+            <a:ext cx="10774375" cy="512064"/>
           </a:xfrm>
           <a:prstGeom prst="rect">
             <a:avLst/>
@@ -20411,11 +20560,11 @@
             <a:r>
               <a:rPr sz="1456" b="1" i="0">
                 <a:solidFill>
-                  <a:srgbClr val="1E293B"/>
-                </a:solidFill>
-                <a:latin typeface="Arial"/>
-              </a:rPr>
-              <a:t>Clearly formed gel network; does not flow off after application</a:t>
+                  <a:srgbClr val="FFFFFF"/>
+                </a:solidFill>
+                <a:latin typeface="Arial"/>
+              </a:rPr>
+              <a:t>Gel at rest (no dripping) + low viscosity when sprayed (deliverable) — the basis of spray application</a:t>
             </a:r>
           </a:p>
         </p:txBody>
@@ -22250,7 +22399,7 @@
                 </a:solidFill>
                 <a:latin typeface="Arial"/>
               </a:rPr>
-              <a:t>Rheology ②: Two Yield Stresses — Static (Adhesion) &amp; Dynamic (Spraying)</a:t>
+              <a:t>Rheology ②: Static &amp; Dynamic Yield Stress vs AquaGel-K (Fig. 2d, S3)</a:t>
             </a:r>
           </a:p>
         </p:txBody>
@@ -22489,7 +22638,7 @@
                 </a:solidFill>
                 <a:latin typeface="Arial"/>
               </a:rPr>
-              <a:t>Yield stress = stress needed to initiate / maintain flow of the gel. Evaluated with two definitions (Fig. 2c–d, S3)</a:t>
+              <a:t>Yield stress = stress needed to initiate / maintain flow. Evaluated as static (onset = adhesion) and dynamic (maintain = spraying)</a:t>
             </a:r>
           </a:p>
         </p:txBody>
@@ -22503,7 +22652,7 @@
         <p:spPr>
           <a:xfrm>
             <a:off x="365760" y="1609344"/>
-            <a:ext cx="4492630" cy="3246120"/>
+            <a:ext cx="4492630" cy="1554480"/>
           </a:xfrm>
           <a:prstGeom prst="roundRect">
             <a:avLst>
@@ -22616,7 +22765,7 @@
                 </a:solidFill>
                 <a:latin typeface="Arial"/>
               </a:rPr>
-              <a:t>Fig. 2c–d</a:t>
+              <a:t>SI Fig. S3</a:t>
             </a:r>
           </a:p>
         </p:txBody>
@@ -22630,7 +22779,7 @@
         <p:spPr>
           <a:xfrm>
             <a:off x="365760" y="1609344"/>
-            <a:ext cx="4492630" cy="3246120"/>
+            <a:ext cx="4492630" cy="1554480"/>
           </a:xfrm>
           <a:prstGeom prst="rect">
             <a:avLst/>
@@ -22659,6 +22808,203 @@
       <p:sp>
         <p:nvSpPr>
           <p:cNvPr id="18" name="TextBox 17"/>
+          <p:cNvSpPr txBox="1"/>
+          <p:nvPr/>
+        </p:nvSpPr>
+        <p:spPr>
+          <a:xfrm>
+            <a:off x="365760" y="3200400"/>
+            <a:ext cx="4492630" cy="274320"/>
+          </a:xfrm>
+          <a:prstGeom prst="rect">
+            <a:avLst/>
+          </a:prstGeom>
+          <a:noFill/>
+        </p:spPr>
+        <p:txBody>
+          <a:bodyPr wrap="square" anchor="t" lIns="36000" rIns="36000" tIns="18000" bIns="18000">
+            <a:spAutoFit/>
+          </a:bodyPr>
+          <a:lstStyle/>
+          <a:p>
+            <a:pPr algn="ctr"/>
+            <a:r>
+              <a:rPr sz="1120" b="0" i="1">
+                <a:solidFill>
+                  <a:srgbClr val="64748B"/>
+                </a:solidFill>
+                <a:latin typeface="Arial"/>
+              </a:rPr>
+              <a:t>Amplitude sweep: G'/G'' crossover (static yield stress)</a:t>
+            </a:r>
+          </a:p>
+        </p:txBody>
+      </p:sp>
+      <p:sp>
+        <p:nvSpPr>
+          <p:cNvPr id="19" name="Rounded Rectangle 18"/>
+          <p:cNvSpPr/>
+          <p:nvPr/>
+        </p:nvSpPr>
+        <p:spPr>
+          <a:xfrm>
+            <a:off x="365760" y="3300984"/>
+            <a:ext cx="4492630" cy="1554480"/>
+          </a:xfrm>
+          <a:prstGeom prst="roundRect">
+            <a:avLst>
+              <a:gd name="adj" fmla="val 2000"/>
+            </a:avLst>
+          </a:prstGeom>
+          <a:solidFill>
+            <a:srgbClr val="F5F8FC"/>
+          </a:solidFill>
+          <a:ln w="12700">
+            <a:solidFill>
+              <a:srgbClr val="C0D0E0"/>
+            </a:solidFill>
+          </a:ln>
+          <a:effectLst/>
+        </p:spPr>
+        <p:style>
+          <a:lnRef idx="1">
+            <a:schemeClr val="accent1"/>
+          </a:lnRef>
+          <a:fillRef idx="3">
+            <a:schemeClr val="accent1"/>
+          </a:fillRef>
+          <a:effectRef idx="2">
+            <a:schemeClr val="accent1"/>
+          </a:effectRef>
+          <a:fontRef idx="minor">
+            <a:schemeClr val="lt1"/>
+          </a:fontRef>
+        </p:style>
+        <p:txBody>
+          <a:bodyPr rtlCol="0" anchor="ctr"/>
+          <a:lstStyle/>
+          <a:p>
+            <a:pPr algn="ctr"/>
+          </a:p>
+        </p:txBody>
+      </p:sp>
+      <p:sp>
+        <p:nvSpPr>
+          <p:cNvPr id="20" name="Rectangle 19"/>
+          <p:cNvSpPr/>
+          <p:nvPr/>
+        </p:nvSpPr>
+        <p:spPr>
+          <a:xfrm>
+            <a:off x="475488" y="3410712"/>
+            <a:ext cx="868680" cy="292608"/>
+          </a:xfrm>
+          <a:prstGeom prst="rect">
+            <a:avLst/>
+          </a:prstGeom>
+          <a:solidFill>
+            <a:srgbClr val="1E293B"/>
+          </a:solidFill>
+          <a:ln>
+            <a:noFill/>
+          </a:ln>
+          <a:effectLst/>
+        </p:spPr>
+        <p:style>
+          <a:lnRef idx="1">
+            <a:schemeClr val="accent1"/>
+          </a:lnRef>
+          <a:fillRef idx="3">
+            <a:schemeClr val="accent1"/>
+          </a:fillRef>
+          <a:effectRef idx="2">
+            <a:schemeClr val="accent1"/>
+          </a:effectRef>
+          <a:fontRef idx="minor">
+            <a:schemeClr val="lt1"/>
+          </a:fontRef>
+        </p:style>
+        <p:txBody>
+          <a:bodyPr rtlCol="0" anchor="ctr"/>
+          <a:lstStyle/>
+          <a:p>
+            <a:pPr algn="ctr"/>
+          </a:p>
+        </p:txBody>
+      </p:sp>
+      <p:sp>
+        <p:nvSpPr>
+          <p:cNvPr id="21" name="TextBox 20"/>
+          <p:cNvSpPr txBox="1"/>
+          <p:nvPr/>
+        </p:nvSpPr>
+        <p:spPr>
+          <a:xfrm>
+            <a:off x="475488" y="3410712"/>
+            <a:ext cx="868680" cy="292608"/>
+          </a:xfrm>
+          <a:prstGeom prst="rect">
+            <a:avLst/>
+          </a:prstGeom>
+          <a:noFill/>
+        </p:spPr>
+        <p:txBody>
+          <a:bodyPr wrap="square" anchor="ctr" lIns="36000" rIns="36000" tIns="18000" bIns="18000">
+            <a:spAutoFit/>
+          </a:bodyPr>
+          <a:lstStyle/>
+          <a:p>
+            <a:pPr algn="ctr"/>
+            <a:r>
+              <a:rPr sz="1232" b="1" i="0">
+                <a:solidFill>
+                  <a:srgbClr val="FFFFFF"/>
+                </a:solidFill>
+                <a:latin typeface="Arial"/>
+              </a:rPr>
+              <a:t>Fig. 2d</a:t>
+            </a:r>
+          </a:p>
+        </p:txBody>
+      </p:sp>
+      <p:sp>
+        <p:nvSpPr>
+          <p:cNvPr id="22" name="TextBox 21"/>
+          <p:cNvSpPr txBox="1"/>
+          <p:nvPr/>
+        </p:nvSpPr>
+        <p:spPr>
+          <a:xfrm>
+            <a:off x="365760" y="3300984"/>
+            <a:ext cx="4492630" cy="1554480"/>
+          </a:xfrm>
+          <a:prstGeom prst="rect">
+            <a:avLst/>
+          </a:prstGeom>
+          <a:noFill/>
+        </p:spPr>
+        <p:txBody>
+          <a:bodyPr wrap="square" anchor="ctr" lIns="36000" rIns="36000" tIns="18000" bIns="18000">
+            <a:spAutoFit/>
+          </a:bodyPr>
+          <a:lstStyle/>
+          <a:p>
+            <a:pPr algn="ctr"/>
+            <a:r>
+              <a:rPr sz="1344" b="0" i="0">
+                <a:solidFill>
+                  <a:srgbClr val="AAB4C0"/>
+                </a:solidFill>
+                <a:latin typeface="Arial"/>
+              </a:rPr>
+              <a:t>(Paste paper figure here)</a:t>
+            </a:r>
+          </a:p>
+        </p:txBody>
+      </p:sp>
+      <p:sp>
+        <p:nvSpPr>
+          <p:cNvPr id="23" name="TextBox 22"/>
           <p:cNvSpPr txBox="1"/>
           <p:nvPr/>
         </p:nvSpPr>
@@ -22686,14 +23032,14 @@
                 </a:solidFill>
                 <a:latin typeface="Arial"/>
               </a:rPr>
-              <a:t>Steady-shear flow sweep → dynamic yield stress via HB fit</a:t>
-            </a:r>
-          </a:p>
-        </p:txBody>
-      </p:sp>
-      <p:sp>
-        <p:nvSpPr>
-          <p:cNvPr id="19" name="Rounded Rectangle 18"/>
+              <a:t>Dynamic yield stress via HB fit (bar chart)</a:t>
+            </a:r>
+          </a:p>
+        </p:txBody>
+      </p:sp>
+      <p:sp>
+        <p:nvSpPr>
+          <p:cNvPr id="24" name="Rounded Rectangle 23"/>
           <p:cNvSpPr/>
           <p:nvPr/>
         </p:nvSpPr>
@@ -22741,7 +23087,7 @@
       </p:sp>
       <p:sp>
         <p:nvSpPr>
-          <p:cNvPr id="20" name="Rectangle 19"/>
+          <p:cNvPr id="25" name="Rectangle 24"/>
           <p:cNvSpPr/>
           <p:nvPr/>
         </p:nvSpPr>
@@ -22785,7 +23131,7 @@
       </p:sp>
       <p:sp>
         <p:nvSpPr>
-          <p:cNvPr id="21" name="TextBox 20"/>
+          <p:cNvPr id="26" name="TextBox 25"/>
           <p:cNvSpPr txBox="1"/>
           <p:nvPr/>
         </p:nvSpPr>
@@ -22813,21 +23159,21 @@
                 </a:solidFill>
                 <a:latin typeface="Arial"/>
               </a:rPr>
-              <a:t>Static yield stress σ_static ("absolute" yield stress)</a:t>
-            </a:r>
-          </a:p>
-        </p:txBody>
-      </p:sp>
-      <p:sp>
-        <p:nvSpPr>
-          <p:cNvPr id="22" name="TextBox 21"/>
+              <a:t>Static yield stress σ_static (onset = adhesion)</a:t>
+            </a:r>
+          </a:p>
+        </p:txBody>
+      </p:sp>
+      <p:sp>
+        <p:nvSpPr>
+          <p:cNvPr id="27" name="TextBox 26"/>
           <p:cNvSpPr txBox="1"/>
           <p:nvPr/>
         </p:nvSpPr>
         <p:spPr>
           <a:xfrm>
             <a:off x="5279014" y="2066544"/>
-            <a:ext cx="6437193" cy="365760"/>
+            <a:ext cx="6437193" cy="274320"/>
           </a:xfrm>
           <a:prstGeom prst="rect">
             <a:avLst/>
@@ -22848,21 +23194,21 @@
                 </a:solidFill>
                 <a:latin typeface="Arial"/>
               </a:rPr>
-              <a:t>Measured: stress at G' / G'' crossover in a large-amplitude oscillatory shear (LAOS) sweep</a:t>
-            </a:r>
-          </a:p>
-        </p:txBody>
-      </p:sp>
-      <p:sp>
-        <p:nvSpPr>
-          <p:cNvPr id="23" name="TextBox 22"/>
-          <p:cNvSpPr txBox="1"/>
-          <p:nvPr/>
-        </p:nvSpPr>
-        <p:spPr>
-          <a:xfrm>
-            <a:off x="5279014" y="2505456"/>
-            <a:ext cx="6437193" cy="585216"/>
+              <a:t>Measured: stress at G' / G'' crossover in an amplitude (LAOS) sweep (S3)</a:t>
+            </a:r>
+          </a:p>
+        </p:txBody>
+      </p:sp>
+      <p:sp>
+        <p:nvSpPr>
+          <p:cNvPr id="28" name="TextBox 27"/>
+          <p:cNvSpPr txBox="1"/>
+          <p:nvPr/>
+        </p:nvSpPr>
+        <p:spPr>
+          <a:xfrm>
+            <a:off x="5279014" y="2377440"/>
+            <a:ext cx="6437193" cy="731520"/>
           </a:xfrm>
           <a:prstGeom prst="rect">
             <a:avLst/>
@@ -22883,7 +23229,7 @@
                 </a:solidFill>
                 <a:latin typeface="Arial"/>
               </a:rPr>
-              <a:t>Meaning: stress to initiate flow (start deforming)</a:t>
+              <a:t>WEG shows higher static yield stress than AquaGel-K</a:t>
             </a:r>
           </a:p>
           <a:p>
@@ -22895,14 +23241,14 @@
                 </a:solidFill>
                 <a:latin typeface="Arial"/>
               </a:rPr>
-              <a:t>→ Higher = stronger adhesion to vertical/elevated fuel surfaces, reluctant to flow</a:t>
-            </a:r>
-          </a:p>
-        </p:txBody>
-      </p:sp>
-      <p:sp>
-        <p:nvSpPr>
-          <p:cNvPr id="24" name="Rounded Rectangle 23"/>
+              <a:t>→ reluctant to flow off vertical/elevated fuel surfaces, adheres strongly</a:t>
+            </a:r>
+          </a:p>
+        </p:txBody>
+      </p:sp>
+      <p:sp>
+        <p:nvSpPr>
+          <p:cNvPr id="29" name="Rounded Rectangle 28"/>
           <p:cNvSpPr/>
           <p:nvPr/>
         </p:nvSpPr>
@@ -22950,7 +23296,7 @@
       </p:sp>
       <p:sp>
         <p:nvSpPr>
-          <p:cNvPr id="25" name="Rectangle 24"/>
+          <p:cNvPr id="30" name="Rectangle 29"/>
           <p:cNvSpPr/>
           <p:nvPr/>
         </p:nvSpPr>
@@ -22994,7 +23340,7 @@
       </p:sp>
       <p:sp>
         <p:nvSpPr>
-          <p:cNvPr id="26" name="TextBox 25"/>
+          <p:cNvPr id="31" name="TextBox 30"/>
           <p:cNvSpPr txBox="1"/>
           <p:nvPr/>
         </p:nvSpPr>
@@ -23022,14 +23368,14 @@
                 </a:solidFill>
                 <a:latin typeface="Arial"/>
               </a:rPr>
-              <a:t>Dynamic yield stress σ_dynamic</a:t>
-            </a:r>
-          </a:p>
-        </p:txBody>
-      </p:sp>
-      <p:sp>
-        <p:nvSpPr>
-          <p:cNvPr id="27" name="TextBox 26"/>
+              <a:t>Dynamic yield stress σ_dynamic (maintain = spraying)</a:t>
+            </a:r>
+          </a:p>
+        </p:txBody>
+      </p:sp>
+      <p:sp>
+        <p:nvSpPr>
+          <p:cNvPr id="32" name="TextBox 31"/>
           <p:cNvSpPr txBox="1"/>
           <p:nvPr/>
         </p:nvSpPr>
@@ -23057,14 +23403,14 @@
                 </a:solidFill>
                 <a:latin typeface="Arial"/>
               </a:rPr>
-              <a:t>Measured: fit flow sweep (100→0.01 s⁻¹) to the Herschel–Bulkley model</a:t>
-            </a:r>
-          </a:p>
-        </p:txBody>
-      </p:sp>
-      <p:sp>
-        <p:nvSpPr>
-          <p:cNvPr id="28" name="TextBox 27"/>
+              <a:t>Measured: HB-model fit of the flow sweep (100→0.01 s⁻¹) (2d)</a:t>
+            </a:r>
+          </a:p>
+        </p:txBody>
+      </p:sp>
+      <p:sp>
+        <p:nvSpPr>
+          <p:cNvPr id="33" name="TextBox 32"/>
           <p:cNvSpPr txBox="1"/>
           <p:nvPr/>
         </p:nvSpPr>
@@ -23092,7 +23438,7 @@
                 </a:solidFill>
                 <a:latin typeface="Arial"/>
               </a:rPr>
-              <a:t>Meaning: stress to maintain flow → moderate value enables spraying within pump-pressure limits</a:t>
+              <a:t>Orders of magnitude above AquaGel-K (0.05 Pa reference line)</a:t>
             </a:r>
           </a:p>
           <a:p>
@@ -23104,14 +23450,14 @@
                 </a:solidFill>
                 <a:latin typeface="Arial"/>
               </a:rPr>
-              <a:t>Measured (fresh): HEC+MC/CSP 33.34 Pa / MHEC/CSP 3.31 Pa</a:t>
-            </a:r>
-          </a:p>
-        </p:txBody>
-      </p:sp>
-      <p:sp>
-        <p:nvSpPr>
-          <p:cNvPr id="29" name="Rounded Rectangle 28"/>
+              <a:t>→ sprayable within pump pressure yet resistant to flowing off</a:t>
+            </a:r>
+          </a:p>
+        </p:txBody>
+      </p:sp>
+      <p:sp>
+        <p:nvSpPr>
+          <p:cNvPr id="34" name="Rounded Rectangle 33"/>
           <p:cNvSpPr/>
           <p:nvPr/>
         </p:nvSpPr>
@@ -23157,7 +23503,7 @@
       </p:sp>
       <p:sp>
         <p:nvSpPr>
-          <p:cNvPr id="30" name="Rectangle 29"/>
+          <p:cNvPr id="35" name="Rectangle 34"/>
           <p:cNvSpPr/>
           <p:nvPr/>
         </p:nvSpPr>
@@ -23201,7 +23547,7 @@
       </p:sp>
       <p:sp>
         <p:nvSpPr>
-          <p:cNvPr id="31" name="TextBox 30"/>
+          <p:cNvPr id="36" name="TextBox 35"/>
           <p:cNvSpPr txBox="1"/>
           <p:nvPr/>
         </p:nvSpPr>
@@ -23236,7 +23582,7 @@
       </p:sp>
       <p:sp>
         <p:nvSpPr>
-          <p:cNvPr id="32" name="TextBox 31"/>
+          <p:cNvPr id="37" name="TextBox 36"/>
           <p:cNvSpPr txBox="1"/>
           <p:nvPr/>
         </p:nvSpPr>
@@ -23264,7 +23610,7 @@
                 </a:solidFill>
                 <a:latin typeface="Arial"/>
               </a:rPr>
-              <a:t>The key to deployability: high static yield stress (adhesion) + moderate dynamic yield stress (spraying). Adding surfactant (SDS) lowers both, affecting adhesion and stability</a:t>
+              <a:t>For both static and dynamic yield stress, WEG greatly exceeds commercial AquaGel-K. Their small difference (weak thixotropy) lets the network re-form instantly, maintaining adhesion self-healingly</a:t>
             </a:r>
           </a:p>
         </p:txBody>
